--- a/utils/file/charts.pptx
+++ b/utils/file/charts.pptx
@@ -8,33 +8,34 @@
     <p:sldId id="270" r:id="rId2"/>
     <p:sldId id="286" r:id="rId3"/>
     <p:sldId id="287" r:id="rId4"/>
-    <p:sldId id="258" r:id="rId5"/>
-    <p:sldId id="259" r:id="rId6"/>
-    <p:sldId id="260" r:id="rId7"/>
-    <p:sldId id="269" r:id="rId8"/>
-    <p:sldId id="261" r:id="rId9"/>
-    <p:sldId id="262" r:id="rId10"/>
-    <p:sldId id="263" r:id="rId11"/>
-    <p:sldId id="265" r:id="rId12"/>
-    <p:sldId id="266" r:id="rId13"/>
-    <p:sldId id="267" r:id="rId14"/>
-    <p:sldId id="273" r:id="rId15"/>
-    <p:sldId id="271" r:id="rId16"/>
-    <p:sldId id="268" r:id="rId17"/>
-    <p:sldId id="281" r:id="rId18"/>
-    <p:sldId id="282" r:id="rId19"/>
-    <p:sldId id="283" r:id="rId20"/>
-    <p:sldId id="284" r:id="rId21"/>
-    <p:sldId id="274" r:id="rId22"/>
-    <p:sldId id="276" r:id="rId23"/>
-    <p:sldId id="277" r:id="rId24"/>
-    <p:sldId id="278" r:id="rId25"/>
-    <p:sldId id="279" r:id="rId26"/>
-    <p:sldId id="285" r:id="rId27"/>
-    <p:sldId id="280" r:id="rId28"/>
-    <p:sldId id="264" r:id="rId29"/>
-    <p:sldId id="272" r:id="rId30"/>
-    <p:sldId id="256" r:id="rId31"/>
+    <p:sldId id="288" r:id="rId5"/>
+    <p:sldId id="258" r:id="rId6"/>
+    <p:sldId id="259" r:id="rId7"/>
+    <p:sldId id="260" r:id="rId8"/>
+    <p:sldId id="269" r:id="rId9"/>
+    <p:sldId id="261" r:id="rId10"/>
+    <p:sldId id="262" r:id="rId11"/>
+    <p:sldId id="263" r:id="rId12"/>
+    <p:sldId id="265" r:id="rId13"/>
+    <p:sldId id="266" r:id="rId14"/>
+    <p:sldId id="267" r:id="rId15"/>
+    <p:sldId id="273" r:id="rId16"/>
+    <p:sldId id="271" r:id="rId17"/>
+    <p:sldId id="268" r:id="rId18"/>
+    <p:sldId id="281" r:id="rId19"/>
+    <p:sldId id="282" r:id="rId20"/>
+    <p:sldId id="283" r:id="rId21"/>
+    <p:sldId id="284" r:id="rId22"/>
+    <p:sldId id="274" r:id="rId23"/>
+    <p:sldId id="276" r:id="rId24"/>
+    <p:sldId id="277" r:id="rId25"/>
+    <p:sldId id="278" r:id="rId26"/>
+    <p:sldId id="279" r:id="rId27"/>
+    <p:sldId id="285" r:id="rId28"/>
+    <p:sldId id="280" r:id="rId29"/>
+    <p:sldId id="264" r:id="rId30"/>
+    <p:sldId id="272" r:id="rId31"/>
+    <p:sldId id="256" r:id="rId32"/>
   </p:sldIdLst>
   <p:sldSz cx="12192000" cy="6858000"/>
   <p:notesSz cx="6858000" cy="9144000"/>
@@ -288,7 +289,7 @@
           <a:p>
             <a:fld id="{C0F7C65B-F23F-479A-8AFF-E7E0FC962F06}" type="datetimeFigureOut">
               <a:rPr lang="zh-CN" altLang="en-US" smtClean="0"/>
-              <a:t>2025/10/18</a:t>
+              <a:t>2025/10/19</a:t>
             </a:fld>
             <a:endParaRPr lang="zh-CN" altLang="en-US"/>
           </a:p>
@@ -486,7 +487,7 @@
           <a:p>
             <a:fld id="{C0F7C65B-F23F-479A-8AFF-E7E0FC962F06}" type="datetimeFigureOut">
               <a:rPr lang="zh-CN" altLang="en-US" smtClean="0"/>
-              <a:t>2025/10/18</a:t>
+              <a:t>2025/10/19</a:t>
             </a:fld>
             <a:endParaRPr lang="zh-CN" altLang="en-US"/>
           </a:p>
@@ -694,7 +695,7 @@
           <a:p>
             <a:fld id="{C0F7C65B-F23F-479A-8AFF-E7E0FC962F06}" type="datetimeFigureOut">
               <a:rPr lang="zh-CN" altLang="en-US" smtClean="0"/>
-              <a:t>2025/10/18</a:t>
+              <a:t>2025/10/19</a:t>
             </a:fld>
             <a:endParaRPr lang="zh-CN" altLang="en-US"/>
           </a:p>
@@ -892,7 +893,7 @@
           <a:p>
             <a:fld id="{C0F7C65B-F23F-479A-8AFF-E7E0FC962F06}" type="datetimeFigureOut">
               <a:rPr lang="zh-CN" altLang="en-US" smtClean="0"/>
-              <a:t>2025/10/18</a:t>
+              <a:t>2025/10/19</a:t>
             </a:fld>
             <a:endParaRPr lang="zh-CN" altLang="en-US"/>
           </a:p>
@@ -1167,7 +1168,7 @@
           <a:p>
             <a:fld id="{C0F7C65B-F23F-479A-8AFF-E7E0FC962F06}" type="datetimeFigureOut">
               <a:rPr lang="zh-CN" altLang="en-US" smtClean="0"/>
-              <a:t>2025/10/18</a:t>
+              <a:t>2025/10/19</a:t>
             </a:fld>
             <a:endParaRPr lang="zh-CN" altLang="en-US"/>
           </a:p>
@@ -1432,7 +1433,7 @@
           <a:p>
             <a:fld id="{C0F7C65B-F23F-479A-8AFF-E7E0FC962F06}" type="datetimeFigureOut">
               <a:rPr lang="zh-CN" altLang="en-US" smtClean="0"/>
-              <a:t>2025/10/18</a:t>
+              <a:t>2025/10/19</a:t>
             </a:fld>
             <a:endParaRPr lang="zh-CN" altLang="en-US"/>
           </a:p>
@@ -1844,7 +1845,7 @@
           <a:p>
             <a:fld id="{C0F7C65B-F23F-479A-8AFF-E7E0FC962F06}" type="datetimeFigureOut">
               <a:rPr lang="zh-CN" altLang="en-US" smtClean="0"/>
-              <a:t>2025/10/18</a:t>
+              <a:t>2025/10/19</a:t>
             </a:fld>
             <a:endParaRPr lang="zh-CN" altLang="en-US"/>
           </a:p>
@@ -1985,7 +1986,7 @@
           <a:p>
             <a:fld id="{C0F7C65B-F23F-479A-8AFF-E7E0FC962F06}" type="datetimeFigureOut">
               <a:rPr lang="zh-CN" altLang="en-US" smtClean="0"/>
-              <a:t>2025/10/18</a:t>
+              <a:t>2025/10/19</a:t>
             </a:fld>
             <a:endParaRPr lang="zh-CN" altLang="en-US"/>
           </a:p>
@@ -2098,7 +2099,7 @@
           <a:p>
             <a:fld id="{C0F7C65B-F23F-479A-8AFF-E7E0FC962F06}" type="datetimeFigureOut">
               <a:rPr lang="zh-CN" altLang="en-US" smtClean="0"/>
-              <a:t>2025/10/18</a:t>
+              <a:t>2025/10/19</a:t>
             </a:fld>
             <a:endParaRPr lang="zh-CN" altLang="en-US"/>
           </a:p>
@@ -2409,7 +2410,7 @@
           <a:p>
             <a:fld id="{C0F7C65B-F23F-479A-8AFF-E7E0FC962F06}" type="datetimeFigureOut">
               <a:rPr lang="zh-CN" altLang="en-US" smtClean="0"/>
-              <a:t>2025/10/18</a:t>
+              <a:t>2025/10/19</a:t>
             </a:fld>
             <a:endParaRPr lang="zh-CN" altLang="en-US"/>
           </a:p>
@@ -2697,7 +2698,7 @@
           <a:p>
             <a:fld id="{C0F7C65B-F23F-479A-8AFF-E7E0FC962F06}" type="datetimeFigureOut">
               <a:rPr lang="zh-CN" altLang="en-US" smtClean="0"/>
-              <a:t>2025/10/18</a:t>
+              <a:t>2025/10/19</a:t>
             </a:fld>
             <a:endParaRPr lang="zh-CN" altLang="en-US"/>
           </a:p>
@@ -2938,7 +2939,7 @@
           <a:p>
             <a:fld id="{C0F7C65B-F23F-479A-8AFF-E7E0FC962F06}" type="datetimeFigureOut">
               <a:rPr lang="zh-CN" altLang="en-US" smtClean="0"/>
-              <a:t>2025/10/18</a:t>
+              <a:t>2025/10/19</a:t>
             </a:fld>
             <a:endParaRPr lang="zh-CN" altLang="en-US"/>
           </a:p>
@@ -3508,6 +3509,972 @@
         <p:cNvPr id="1" name="">
           <a:extLst>
             <a:ext uri="{FF2B5EF4-FFF2-40B4-BE49-F238E27FC236}">
+              <a16:creationId xmlns:a16="http://schemas.microsoft.com/office/drawing/2014/main" id="{5C7A2C4C-DE35-8F5D-FAA3-1F45B914C406}"/>
+            </a:ext>
+          </a:extLst>
+        </p:cNvPr>
+        <p:cNvGrpSpPr/>
+        <p:nvPr/>
+      </p:nvGrpSpPr>
+      <p:grpSpPr>
+        <a:xfrm>
+          <a:off x="0" y="0"/>
+          <a:ext cx="0" cy="0"/>
+          <a:chOff x="0" y="0"/>
+          <a:chExt cx="0" cy="0"/>
+        </a:xfrm>
+      </p:grpSpPr>
+      <p:sp>
+        <p:nvSpPr>
+          <p:cNvPr id="7" name="矩形: 圆角 6">
+            <a:extLst>
+              <a:ext uri="{FF2B5EF4-FFF2-40B4-BE49-F238E27FC236}">
+                <a16:creationId xmlns:a16="http://schemas.microsoft.com/office/drawing/2014/main" id="{E9167702-BFB3-0DB3-BB79-C1FC75427EA0}"/>
+              </a:ext>
+            </a:extLst>
+          </p:cNvPr>
+          <p:cNvSpPr/>
+          <p:nvPr/>
+        </p:nvSpPr>
+        <p:spPr>
+          <a:xfrm>
+            <a:off x="4988680" y="2930400"/>
+            <a:ext cx="900000" cy="216000"/>
+          </a:xfrm>
+          <a:prstGeom prst="roundRect">
+            <a:avLst/>
+          </a:prstGeom>
+          <a:solidFill>
+            <a:srgbClr val="335BA3">
+              <a:alpha val="89804"/>
+            </a:srgbClr>
+          </a:solidFill>
+          <a:ln w="12700">
+            <a:noFill/>
+          </a:ln>
+        </p:spPr>
+        <p:style>
+          <a:lnRef idx="2">
+            <a:schemeClr val="accent1">
+              <a:shade val="15000"/>
+            </a:schemeClr>
+          </a:lnRef>
+          <a:fillRef idx="1">
+            <a:schemeClr val="accent1"/>
+          </a:fillRef>
+          <a:effectRef idx="0">
+            <a:schemeClr val="accent1"/>
+          </a:effectRef>
+          <a:fontRef idx="minor">
+            <a:schemeClr val="lt1"/>
+          </a:fontRef>
+        </p:style>
+        <p:txBody>
+          <a:bodyPr rtlCol="0" anchor="ctr"/>
+          <a:lstStyle/>
+          <a:p>
+            <a:pPr algn="ctr"/>
+            <a:r>
+              <a:rPr lang="en-US" altLang="zh-CN" sz="800">
+                <a:latin typeface="Quicksand" panose="00000500000000000000" pitchFamily="2" charset="0"/>
+              </a:rPr>
+              <a:t>::before</a:t>
+            </a:r>
+            <a:endParaRPr lang="zh-CN" altLang="en-US" sz="800">
+              <a:latin typeface="Quicksand" panose="00000500000000000000" pitchFamily="2" charset="0"/>
+            </a:endParaRPr>
+          </a:p>
+        </p:txBody>
+      </p:sp>
+      <p:sp>
+        <p:nvSpPr>
+          <p:cNvPr id="25" name="矩形: 圆角 24">
+            <a:extLst>
+              <a:ext uri="{FF2B5EF4-FFF2-40B4-BE49-F238E27FC236}">
+                <a16:creationId xmlns:a16="http://schemas.microsoft.com/office/drawing/2014/main" id="{DB29B0F0-7681-C319-D905-61DFC9EA1742}"/>
+              </a:ext>
+            </a:extLst>
+          </p:cNvPr>
+          <p:cNvSpPr/>
+          <p:nvPr/>
+        </p:nvSpPr>
+        <p:spPr>
+          <a:xfrm>
+            <a:off x="6057780" y="2534400"/>
+            <a:ext cx="900000" cy="216000"/>
+          </a:xfrm>
+          <a:prstGeom prst="roundRect">
+            <a:avLst/>
+          </a:prstGeom>
+          <a:solidFill>
+            <a:srgbClr val="F9423A">
+              <a:alpha val="89804"/>
+            </a:srgbClr>
+          </a:solidFill>
+          <a:ln w="12700">
+            <a:noFill/>
+          </a:ln>
+        </p:spPr>
+        <p:style>
+          <a:lnRef idx="2">
+            <a:schemeClr val="accent1">
+              <a:shade val="15000"/>
+            </a:schemeClr>
+          </a:lnRef>
+          <a:fillRef idx="1">
+            <a:schemeClr val="accent1"/>
+          </a:fillRef>
+          <a:effectRef idx="0">
+            <a:schemeClr val="accent1"/>
+          </a:effectRef>
+          <a:fontRef idx="minor">
+            <a:schemeClr val="lt1"/>
+          </a:fontRef>
+        </p:style>
+        <p:txBody>
+          <a:bodyPr rtlCol="0" anchor="ctr"/>
+          <a:lstStyle/>
+          <a:p>
+            <a:pPr algn="ctr"/>
+            <a:r>
+              <a:rPr lang="en-US" altLang="zh-CN" sz="800">
+                <a:latin typeface="Quicksand" panose="00000500000000000000" pitchFamily="2" charset="0"/>
+              </a:rPr>
+              <a:t>String of text</a:t>
+            </a:r>
+            <a:endParaRPr lang="zh-CN" altLang="en-US" sz="800">
+              <a:latin typeface="Quicksand" panose="00000500000000000000" pitchFamily="2" charset="0"/>
+            </a:endParaRPr>
+          </a:p>
+        </p:txBody>
+      </p:sp>
+      <p:sp>
+        <p:nvSpPr>
+          <p:cNvPr id="26" name="矩形: 圆角 25">
+            <a:extLst>
+              <a:ext uri="{FF2B5EF4-FFF2-40B4-BE49-F238E27FC236}">
+                <a16:creationId xmlns:a16="http://schemas.microsoft.com/office/drawing/2014/main" id="{A362D5C7-ED9E-7876-9B3A-5E7694F2029B}"/>
+              </a:ext>
+            </a:extLst>
+          </p:cNvPr>
+          <p:cNvSpPr/>
+          <p:nvPr/>
+        </p:nvSpPr>
+        <p:spPr>
+          <a:xfrm>
+            <a:off x="6057780" y="2798400"/>
+            <a:ext cx="900000" cy="216000"/>
+          </a:xfrm>
+          <a:prstGeom prst="roundRect">
+            <a:avLst/>
+          </a:prstGeom>
+          <a:solidFill>
+            <a:srgbClr val="F6A04D">
+              <a:alpha val="89804"/>
+            </a:srgbClr>
+          </a:solidFill>
+          <a:ln w="12700">
+            <a:noFill/>
+          </a:ln>
+        </p:spPr>
+        <p:style>
+          <a:lnRef idx="2">
+            <a:schemeClr val="accent1">
+              <a:shade val="15000"/>
+            </a:schemeClr>
+          </a:lnRef>
+          <a:fillRef idx="1">
+            <a:schemeClr val="accent1"/>
+          </a:fillRef>
+          <a:effectRef idx="0">
+            <a:schemeClr val="accent1"/>
+          </a:effectRef>
+          <a:fontRef idx="minor">
+            <a:schemeClr val="lt1"/>
+          </a:fontRef>
+        </p:style>
+        <p:txBody>
+          <a:bodyPr rtlCol="0" anchor="ctr"/>
+          <a:lstStyle/>
+          <a:p>
+            <a:pPr algn="ctr"/>
+            <a:r>
+              <a:rPr lang="en-US" altLang="zh-CN" sz="800">
+                <a:latin typeface="Quicksand" panose="00000500000000000000" pitchFamily="2" charset="0"/>
+              </a:rPr>
+              <a:t>Entity</a:t>
+            </a:r>
+            <a:endParaRPr lang="zh-CN" altLang="en-US" sz="800">
+              <a:latin typeface="Quicksand" panose="00000500000000000000" pitchFamily="2" charset="0"/>
+            </a:endParaRPr>
+          </a:p>
+        </p:txBody>
+      </p:sp>
+      <p:cxnSp>
+        <p:nvCxnSpPr>
+          <p:cNvPr id="28" name="连接符: 曲线 27">
+            <a:extLst>
+              <a:ext uri="{FF2B5EF4-FFF2-40B4-BE49-F238E27FC236}">
+                <a16:creationId xmlns:a16="http://schemas.microsoft.com/office/drawing/2014/main" id="{3CC45C27-5C3D-1BF1-5E05-EB880994D1C9}"/>
+              </a:ext>
+            </a:extLst>
+          </p:cNvPr>
+          <p:cNvCxnSpPr>
+            <a:cxnSpLocks/>
+            <a:stCxn id="7" idx="3"/>
+            <a:endCxn id="25" idx="1"/>
+          </p:cNvCxnSpPr>
+          <p:nvPr/>
+        </p:nvCxnSpPr>
+        <p:spPr>
+          <a:xfrm flipV="1">
+            <a:off x="5888680" y="2642400"/>
+            <a:ext cx="169100" cy="396000"/>
+          </a:xfrm>
+          <a:prstGeom prst="curvedConnector3">
+            <a:avLst/>
+          </a:prstGeom>
+          <a:ln>
+            <a:solidFill>
+              <a:srgbClr val="C00000"/>
+            </a:solidFill>
+          </a:ln>
+        </p:spPr>
+        <p:style>
+          <a:lnRef idx="1">
+            <a:schemeClr val="accent1"/>
+          </a:lnRef>
+          <a:fillRef idx="0">
+            <a:schemeClr val="accent1"/>
+          </a:fillRef>
+          <a:effectRef idx="0">
+            <a:schemeClr val="accent1"/>
+          </a:effectRef>
+          <a:fontRef idx="minor">
+            <a:schemeClr val="tx1"/>
+          </a:fontRef>
+        </p:style>
+      </p:cxnSp>
+      <p:cxnSp>
+        <p:nvCxnSpPr>
+          <p:cNvPr id="34" name="连接符: 曲线 33">
+            <a:extLst>
+              <a:ext uri="{FF2B5EF4-FFF2-40B4-BE49-F238E27FC236}">
+                <a16:creationId xmlns:a16="http://schemas.microsoft.com/office/drawing/2014/main" id="{D6AAD16A-0663-8D07-DC16-C4F0A658F0A3}"/>
+              </a:ext>
+            </a:extLst>
+          </p:cNvPr>
+          <p:cNvCxnSpPr>
+            <a:cxnSpLocks/>
+            <a:stCxn id="7" idx="3"/>
+            <a:endCxn id="12" idx="1"/>
+          </p:cNvCxnSpPr>
+          <p:nvPr/>
+        </p:nvCxnSpPr>
+        <p:spPr>
+          <a:xfrm>
+            <a:off x="5888680" y="3038400"/>
+            <a:ext cx="169100" cy="132000"/>
+          </a:xfrm>
+          <a:prstGeom prst="curvedConnector3">
+            <a:avLst>
+              <a:gd name="adj1" fmla="val 50000"/>
+            </a:avLst>
+          </a:prstGeom>
+          <a:ln>
+            <a:solidFill>
+              <a:srgbClr val="9966FF"/>
+            </a:solidFill>
+          </a:ln>
+        </p:spPr>
+        <p:style>
+          <a:lnRef idx="1">
+            <a:schemeClr val="accent1"/>
+          </a:lnRef>
+          <a:fillRef idx="0">
+            <a:schemeClr val="accent1"/>
+          </a:fillRef>
+          <a:effectRef idx="0">
+            <a:schemeClr val="accent1"/>
+          </a:effectRef>
+          <a:fontRef idx="minor">
+            <a:schemeClr val="tx1"/>
+          </a:fontRef>
+        </p:style>
+      </p:cxnSp>
+      <p:sp>
+        <p:nvSpPr>
+          <p:cNvPr id="108" name="矩形: 圆角 107">
+            <a:extLst>
+              <a:ext uri="{FF2B5EF4-FFF2-40B4-BE49-F238E27FC236}">
+                <a16:creationId xmlns:a16="http://schemas.microsoft.com/office/drawing/2014/main" id="{509F35E6-BC71-27B6-AB68-9D6D8641D9DE}"/>
+              </a:ext>
+            </a:extLst>
+          </p:cNvPr>
+          <p:cNvSpPr/>
+          <p:nvPr/>
+        </p:nvSpPr>
+        <p:spPr>
+          <a:xfrm>
+            <a:off x="6049650" y="3326400"/>
+            <a:ext cx="900000" cy="216000"/>
+          </a:xfrm>
+          <a:prstGeom prst="roundRect">
+            <a:avLst/>
+          </a:prstGeom>
+          <a:solidFill>
+            <a:srgbClr val="FB837D"/>
+          </a:solidFill>
+          <a:ln w="12700">
+            <a:noFill/>
+          </a:ln>
+        </p:spPr>
+        <p:style>
+          <a:lnRef idx="2">
+            <a:schemeClr val="accent1">
+              <a:shade val="15000"/>
+            </a:schemeClr>
+          </a:lnRef>
+          <a:fillRef idx="1">
+            <a:schemeClr val="accent1"/>
+          </a:fillRef>
+          <a:effectRef idx="0">
+            <a:schemeClr val="accent1"/>
+          </a:effectRef>
+          <a:fontRef idx="minor">
+            <a:schemeClr val="lt1"/>
+          </a:fontRef>
+        </p:style>
+        <p:txBody>
+          <a:bodyPr rtlCol="0" anchor="ctr"/>
+          <a:lstStyle/>
+          <a:p>
+            <a:pPr algn="ctr"/>
+            <a:r>
+              <a:rPr lang="en-US" altLang="zh-CN" sz="800">
+                <a:latin typeface="Quicksand" panose="00000500000000000000" pitchFamily="2" charset="0"/>
+              </a:rPr>
+              <a:t>counter</a:t>
+            </a:r>
+            <a:endParaRPr lang="zh-CN" altLang="en-US" sz="800">
+              <a:latin typeface="Quicksand" panose="00000500000000000000" pitchFamily="2" charset="0"/>
+            </a:endParaRPr>
+          </a:p>
+        </p:txBody>
+      </p:sp>
+      <p:cxnSp>
+        <p:nvCxnSpPr>
+          <p:cNvPr id="118" name="连接符: 曲线 117">
+            <a:extLst>
+              <a:ext uri="{FF2B5EF4-FFF2-40B4-BE49-F238E27FC236}">
+                <a16:creationId xmlns:a16="http://schemas.microsoft.com/office/drawing/2014/main" id="{DC5EF390-7693-C62F-379C-E8944F075A72}"/>
+              </a:ext>
+            </a:extLst>
+          </p:cNvPr>
+          <p:cNvCxnSpPr>
+            <a:cxnSpLocks/>
+            <a:stCxn id="7" idx="3"/>
+            <a:endCxn id="26" idx="1"/>
+          </p:cNvCxnSpPr>
+          <p:nvPr/>
+        </p:nvCxnSpPr>
+        <p:spPr>
+          <a:xfrm flipV="1">
+            <a:off x="5888680" y="2906400"/>
+            <a:ext cx="169100" cy="132000"/>
+          </a:xfrm>
+          <a:prstGeom prst="curvedConnector3">
+            <a:avLst>
+              <a:gd name="adj1" fmla="val 50000"/>
+            </a:avLst>
+          </a:prstGeom>
+          <a:ln>
+            <a:solidFill>
+              <a:srgbClr val="F7AA5F"/>
+            </a:solidFill>
+          </a:ln>
+        </p:spPr>
+        <p:style>
+          <a:lnRef idx="1">
+            <a:schemeClr val="accent1"/>
+          </a:lnRef>
+          <a:fillRef idx="0">
+            <a:schemeClr val="accent1"/>
+          </a:fillRef>
+          <a:effectRef idx="0">
+            <a:schemeClr val="accent1"/>
+          </a:effectRef>
+          <a:fontRef idx="minor">
+            <a:schemeClr val="tx1"/>
+          </a:fontRef>
+        </p:style>
+      </p:cxnSp>
+      <p:cxnSp>
+        <p:nvCxnSpPr>
+          <p:cNvPr id="121" name="连接符: 曲线 120">
+            <a:extLst>
+              <a:ext uri="{FF2B5EF4-FFF2-40B4-BE49-F238E27FC236}">
+                <a16:creationId xmlns:a16="http://schemas.microsoft.com/office/drawing/2014/main" id="{1D3BCEB4-577A-2C82-5900-26B41E83F91D}"/>
+              </a:ext>
+            </a:extLst>
+          </p:cNvPr>
+          <p:cNvCxnSpPr>
+            <a:cxnSpLocks/>
+            <a:stCxn id="7" idx="3"/>
+            <a:endCxn id="108" idx="1"/>
+          </p:cNvCxnSpPr>
+          <p:nvPr/>
+        </p:nvCxnSpPr>
+        <p:spPr>
+          <a:xfrm>
+            <a:off x="5888680" y="3038400"/>
+            <a:ext cx="160970" cy="396000"/>
+          </a:xfrm>
+          <a:prstGeom prst="curvedConnector3">
+            <a:avLst>
+              <a:gd name="adj1" fmla="val 50000"/>
+            </a:avLst>
+          </a:prstGeom>
+          <a:ln>
+            <a:solidFill>
+              <a:srgbClr val="00B050"/>
+            </a:solidFill>
+          </a:ln>
+        </p:spPr>
+        <p:style>
+          <a:lnRef idx="1">
+            <a:schemeClr val="accent1"/>
+          </a:lnRef>
+          <a:fillRef idx="0">
+            <a:schemeClr val="accent1"/>
+          </a:fillRef>
+          <a:effectRef idx="0">
+            <a:schemeClr val="accent1"/>
+          </a:effectRef>
+          <a:fontRef idx="minor">
+            <a:schemeClr val="tx1"/>
+          </a:fontRef>
+        </p:style>
+      </p:cxnSp>
+      <p:sp>
+        <p:nvSpPr>
+          <p:cNvPr id="12" name="矩形: 圆角 11">
+            <a:extLst>
+              <a:ext uri="{FF2B5EF4-FFF2-40B4-BE49-F238E27FC236}">
+                <a16:creationId xmlns:a16="http://schemas.microsoft.com/office/drawing/2014/main" id="{E4023AE0-10C4-EDDD-C931-D3E49B6AC7C9}"/>
+              </a:ext>
+            </a:extLst>
+          </p:cNvPr>
+          <p:cNvSpPr/>
+          <p:nvPr/>
+        </p:nvSpPr>
+        <p:spPr>
+          <a:xfrm>
+            <a:off x="6057780" y="3062400"/>
+            <a:ext cx="900000" cy="216000"/>
+          </a:xfrm>
+          <a:prstGeom prst="roundRect">
+            <a:avLst/>
+          </a:prstGeom>
+          <a:solidFill>
+            <a:srgbClr val="9966FF"/>
+          </a:solidFill>
+          <a:ln w="12700">
+            <a:noFill/>
+          </a:ln>
+        </p:spPr>
+        <p:style>
+          <a:lnRef idx="2">
+            <a:schemeClr val="accent1">
+              <a:shade val="15000"/>
+            </a:schemeClr>
+          </a:lnRef>
+          <a:fillRef idx="1">
+            <a:schemeClr val="accent1"/>
+          </a:fillRef>
+          <a:effectRef idx="0">
+            <a:schemeClr val="accent1"/>
+          </a:effectRef>
+          <a:fontRef idx="minor">
+            <a:schemeClr val="lt1"/>
+          </a:fontRef>
+        </p:style>
+        <p:txBody>
+          <a:bodyPr rtlCol="0" anchor="ctr"/>
+          <a:lstStyle/>
+          <a:p>
+            <a:pPr algn="ctr"/>
+            <a:r>
+              <a:rPr lang="en-US" altLang="zh-CN" sz="800">
+                <a:solidFill>
+                  <a:schemeClr val="bg1"/>
+                </a:solidFill>
+                <a:latin typeface="Quicksand Light" panose="00000400000000000000" pitchFamily="2" charset="0"/>
+              </a:rPr>
+              <a:t>Iconfont</a:t>
+            </a:r>
+            <a:endParaRPr lang="zh-CN" altLang="en-US" sz="800">
+              <a:solidFill>
+                <a:schemeClr val="bg1"/>
+              </a:solidFill>
+              <a:latin typeface="Quicksand Light" panose="00000400000000000000" pitchFamily="2" charset="0"/>
+            </a:endParaRPr>
+          </a:p>
+        </p:txBody>
+      </p:sp>
+      <p:sp>
+        <p:nvSpPr>
+          <p:cNvPr id="2" name="矩形: 圆角 1">
+            <a:extLst>
+              <a:ext uri="{FF2B5EF4-FFF2-40B4-BE49-F238E27FC236}">
+                <a16:creationId xmlns:a16="http://schemas.microsoft.com/office/drawing/2014/main" id="{83E28516-AB33-28C4-44B6-24DE28D98661}"/>
+              </a:ext>
+            </a:extLst>
+          </p:cNvPr>
+          <p:cNvSpPr/>
+          <p:nvPr/>
+        </p:nvSpPr>
+        <p:spPr>
+          <a:xfrm>
+            <a:off x="7126880" y="2798400"/>
+            <a:ext cx="900000" cy="216000"/>
+          </a:xfrm>
+          <a:prstGeom prst="roundRect">
+            <a:avLst/>
+          </a:prstGeom>
+          <a:solidFill>
+            <a:srgbClr val="CCF2E5"/>
+          </a:solidFill>
+          <a:ln w="12700">
+            <a:noFill/>
+          </a:ln>
+        </p:spPr>
+        <p:style>
+          <a:lnRef idx="2">
+            <a:schemeClr val="accent1">
+              <a:shade val="15000"/>
+            </a:schemeClr>
+          </a:lnRef>
+          <a:fillRef idx="1">
+            <a:schemeClr val="accent1"/>
+          </a:fillRef>
+          <a:effectRef idx="0">
+            <a:schemeClr val="accent1"/>
+          </a:effectRef>
+          <a:fontRef idx="minor">
+            <a:schemeClr val="lt1"/>
+          </a:fontRef>
+        </p:style>
+        <p:txBody>
+          <a:bodyPr rtlCol="0" anchor="ctr"/>
+          <a:lstStyle/>
+          <a:p>
+            <a:pPr algn="ctr"/>
+            <a:r>
+              <a:rPr lang="en-US" altLang="zh-CN" sz="800">
+                <a:solidFill>
+                  <a:sysClr val="windowText" lastClr="000000"/>
+                </a:solidFill>
+                <a:latin typeface="Quicksand Light" panose="00000400000000000000" pitchFamily="2" charset="0"/>
+              </a:rPr>
+              <a:t>Unicode</a:t>
+            </a:r>
+            <a:endParaRPr lang="zh-CN" altLang="en-US" sz="800">
+              <a:solidFill>
+                <a:sysClr val="windowText" lastClr="000000"/>
+              </a:solidFill>
+              <a:latin typeface="Quicksand Light" panose="00000400000000000000" pitchFamily="2" charset="0"/>
+            </a:endParaRPr>
+          </a:p>
+        </p:txBody>
+      </p:sp>
+      <p:sp>
+        <p:nvSpPr>
+          <p:cNvPr id="5" name="矩形: 圆角 4">
+            <a:extLst>
+              <a:ext uri="{FF2B5EF4-FFF2-40B4-BE49-F238E27FC236}">
+                <a16:creationId xmlns:a16="http://schemas.microsoft.com/office/drawing/2014/main" id="{EC9DFEFA-DE6D-C382-23DE-033158234380}"/>
+              </a:ext>
+            </a:extLst>
+          </p:cNvPr>
+          <p:cNvSpPr/>
+          <p:nvPr/>
+        </p:nvSpPr>
+        <p:spPr>
+          <a:xfrm>
+            <a:off x="7126880" y="3062400"/>
+            <a:ext cx="900000" cy="216000"/>
+          </a:xfrm>
+          <a:prstGeom prst="roundRect">
+            <a:avLst/>
+          </a:prstGeom>
+          <a:solidFill>
+            <a:srgbClr val="CCF2E5"/>
+          </a:solidFill>
+          <a:ln w="12700">
+            <a:noFill/>
+          </a:ln>
+        </p:spPr>
+        <p:style>
+          <a:lnRef idx="2">
+            <a:schemeClr val="accent1">
+              <a:shade val="15000"/>
+            </a:schemeClr>
+          </a:lnRef>
+          <a:fillRef idx="1">
+            <a:schemeClr val="accent1"/>
+          </a:fillRef>
+          <a:effectRef idx="0">
+            <a:schemeClr val="accent1"/>
+          </a:effectRef>
+          <a:fontRef idx="minor">
+            <a:schemeClr val="lt1"/>
+          </a:fontRef>
+        </p:style>
+        <p:txBody>
+          <a:bodyPr rtlCol="0" anchor="ctr"/>
+          <a:lstStyle/>
+          <a:p>
+            <a:pPr algn="ctr"/>
+            <a:r>
+              <a:rPr lang="en-US" altLang="zh-CN" sz="800">
+                <a:solidFill>
+                  <a:sysClr val="windowText" lastClr="000000"/>
+                </a:solidFill>
+                <a:latin typeface="Quicksand Light" panose="00000400000000000000" pitchFamily="2" charset="0"/>
+              </a:rPr>
+              <a:t>Unicode</a:t>
+            </a:r>
+            <a:endParaRPr lang="zh-CN" altLang="en-US" sz="800">
+              <a:solidFill>
+                <a:sysClr val="windowText" lastClr="000000"/>
+              </a:solidFill>
+              <a:latin typeface="Quicksand Light" panose="00000400000000000000" pitchFamily="2" charset="0"/>
+            </a:endParaRPr>
+          </a:p>
+        </p:txBody>
+      </p:sp>
+      <p:cxnSp>
+        <p:nvCxnSpPr>
+          <p:cNvPr id="8" name="直接连接符 7">
+            <a:extLst>
+              <a:ext uri="{FF2B5EF4-FFF2-40B4-BE49-F238E27FC236}">
+                <a16:creationId xmlns:a16="http://schemas.microsoft.com/office/drawing/2014/main" id="{9C72856E-D2DA-7E17-A337-C4361ABDE71E}"/>
+              </a:ext>
+            </a:extLst>
+          </p:cNvPr>
+          <p:cNvCxnSpPr>
+            <a:stCxn id="26" idx="3"/>
+            <a:endCxn id="2" idx="1"/>
+          </p:cNvCxnSpPr>
+          <p:nvPr/>
+        </p:nvCxnSpPr>
+        <p:spPr>
+          <a:xfrm>
+            <a:off x="6957780" y="2906400"/>
+            <a:ext cx="169100" cy="0"/>
+          </a:xfrm>
+          <a:prstGeom prst="line">
+            <a:avLst/>
+          </a:prstGeom>
+          <a:ln>
+            <a:solidFill>
+              <a:srgbClr val="F7AA5F"/>
+            </a:solidFill>
+          </a:ln>
+        </p:spPr>
+        <p:style>
+          <a:lnRef idx="1">
+            <a:schemeClr val="accent1"/>
+          </a:lnRef>
+          <a:fillRef idx="0">
+            <a:schemeClr val="accent1"/>
+          </a:fillRef>
+          <a:effectRef idx="0">
+            <a:schemeClr val="accent1"/>
+          </a:effectRef>
+          <a:fontRef idx="minor">
+            <a:schemeClr val="tx1"/>
+          </a:fontRef>
+        </p:style>
+      </p:cxnSp>
+      <p:cxnSp>
+        <p:nvCxnSpPr>
+          <p:cNvPr id="10" name="直接连接符 9">
+            <a:extLst>
+              <a:ext uri="{FF2B5EF4-FFF2-40B4-BE49-F238E27FC236}">
+                <a16:creationId xmlns:a16="http://schemas.microsoft.com/office/drawing/2014/main" id="{E671B0F8-4EB3-1F8A-06EB-35F88593DCA1}"/>
+              </a:ext>
+            </a:extLst>
+          </p:cNvPr>
+          <p:cNvCxnSpPr>
+            <a:stCxn id="12" idx="3"/>
+            <a:endCxn id="5" idx="1"/>
+          </p:cNvCxnSpPr>
+          <p:nvPr/>
+        </p:nvCxnSpPr>
+        <p:spPr>
+          <a:xfrm>
+            <a:off x="6957780" y="3170400"/>
+            <a:ext cx="169100" cy="0"/>
+          </a:xfrm>
+          <a:prstGeom prst="line">
+            <a:avLst/>
+          </a:prstGeom>
+          <a:ln>
+            <a:solidFill>
+              <a:srgbClr val="9966FF"/>
+            </a:solidFill>
+          </a:ln>
+        </p:spPr>
+        <p:style>
+          <a:lnRef idx="1">
+            <a:schemeClr val="accent1"/>
+          </a:lnRef>
+          <a:fillRef idx="0">
+            <a:schemeClr val="accent1"/>
+          </a:fillRef>
+          <a:effectRef idx="0">
+            <a:schemeClr val="accent1"/>
+          </a:effectRef>
+          <a:fontRef idx="minor">
+            <a:schemeClr val="tx1"/>
+          </a:fontRef>
+        </p:style>
+      </p:cxnSp>
+      <p:sp>
+        <p:nvSpPr>
+          <p:cNvPr id="3" name="矩形: 圆角 2">
+            <a:extLst>
+              <a:ext uri="{FF2B5EF4-FFF2-40B4-BE49-F238E27FC236}">
+                <a16:creationId xmlns:a16="http://schemas.microsoft.com/office/drawing/2014/main" id="{C3064634-CD22-075E-68B9-962F834B311B}"/>
+              </a:ext>
+            </a:extLst>
+          </p:cNvPr>
+          <p:cNvSpPr/>
+          <p:nvPr/>
+        </p:nvSpPr>
+        <p:spPr>
+          <a:xfrm>
+            <a:off x="3927709" y="3179700"/>
+            <a:ext cx="900000" cy="216000"/>
+          </a:xfrm>
+          <a:prstGeom prst="roundRect">
+            <a:avLst/>
+          </a:prstGeom>
+          <a:solidFill>
+            <a:schemeClr val="tx1"/>
+          </a:solidFill>
+          <a:ln w="12700">
+            <a:noFill/>
+          </a:ln>
+        </p:spPr>
+        <p:style>
+          <a:lnRef idx="2">
+            <a:schemeClr val="accent1">
+              <a:shade val="15000"/>
+            </a:schemeClr>
+          </a:lnRef>
+          <a:fillRef idx="1">
+            <a:schemeClr val="accent1"/>
+          </a:fillRef>
+          <a:effectRef idx="0">
+            <a:schemeClr val="accent1"/>
+          </a:effectRef>
+          <a:fontRef idx="minor">
+            <a:schemeClr val="lt1"/>
+          </a:fontRef>
+        </p:style>
+        <p:txBody>
+          <a:bodyPr rtlCol="0" anchor="ctr"/>
+          <a:lstStyle/>
+          <a:p>
+            <a:pPr algn="ctr"/>
+            <a:r>
+              <a:rPr lang="en-US" altLang="zh-CN" sz="800">
+                <a:latin typeface="Quicksand Medium" panose="00000600000000000000" pitchFamily="2" charset="0"/>
+              </a:rPr>
+              <a:t>&lt;li&gt;</a:t>
+            </a:r>
+            <a:endParaRPr lang="zh-CN" altLang="en-US" sz="800">
+              <a:latin typeface="Quicksand Medium" panose="00000600000000000000" pitchFamily="2" charset="0"/>
+            </a:endParaRPr>
+          </a:p>
+        </p:txBody>
+      </p:sp>
+      <p:sp>
+        <p:nvSpPr>
+          <p:cNvPr id="4" name="矩形: 圆角 3">
+            <a:extLst>
+              <a:ext uri="{FF2B5EF4-FFF2-40B4-BE49-F238E27FC236}">
+                <a16:creationId xmlns:a16="http://schemas.microsoft.com/office/drawing/2014/main" id="{D464FB6F-32E1-97B7-CAC2-14F5345557D4}"/>
+              </a:ext>
+            </a:extLst>
+          </p:cNvPr>
+          <p:cNvSpPr/>
+          <p:nvPr/>
+        </p:nvSpPr>
+        <p:spPr>
+          <a:xfrm>
+            <a:off x="4988679" y="3429000"/>
+            <a:ext cx="900000" cy="216000"/>
+          </a:xfrm>
+          <a:prstGeom prst="roundRect">
+            <a:avLst/>
+          </a:prstGeom>
+          <a:solidFill>
+            <a:srgbClr val="335BA3">
+              <a:alpha val="89804"/>
+            </a:srgbClr>
+          </a:solidFill>
+          <a:ln w="12700">
+            <a:noFill/>
+          </a:ln>
+        </p:spPr>
+        <p:style>
+          <a:lnRef idx="2">
+            <a:schemeClr val="accent1">
+              <a:shade val="15000"/>
+            </a:schemeClr>
+          </a:lnRef>
+          <a:fillRef idx="1">
+            <a:schemeClr val="accent1"/>
+          </a:fillRef>
+          <a:effectRef idx="0">
+            <a:schemeClr val="accent1"/>
+          </a:effectRef>
+          <a:fontRef idx="minor">
+            <a:schemeClr val="lt1"/>
+          </a:fontRef>
+        </p:style>
+        <p:txBody>
+          <a:bodyPr rtlCol="0" anchor="ctr"/>
+          <a:lstStyle/>
+          <a:p>
+            <a:pPr algn="ctr"/>
+            <a:r>
+              <a:rPr lang="en-US" altLang="zh-CN" sz="800">
+                <a:latin typeface="Quicksand" panose="00000500000000000000" pitchFamily="2" charset="0"/>
+              </a:rPr>
+              <a:t>::after</a:t>
+            </a:r>
+            <a:endParaRPr lang="zh-CN" altLang="en-US" sz="800">
+              <a:latin typeface="Quicksand" panose="00000500000000000000" pitchFamily="2" charset="0"/>
+            </a:endParaRPr>
+          </a:p>
+        </p:txBody>
+      </p:sp>
+      <p:cxnSp>
+        <p:nvCxnSpPr>
+          <p:cNvPr id="6" name="连接符: 曲线 5">
+            <a:extLst>
+              <a:ext uri="{FF2B5EF4-FFF2-40B4-BE49-F238E27FC236}">
+                <a16:creationId xmlns:a16="http://schemas.microsoft.com/office/drawing/2014/main" id="{A49DEFA1-8658-B2E8-502E-F97718CFD37A}"/>
+              </a:ext>
+            </a:extLst>
+          </p:cNvPr>
+          <p:cNvCxnSpPr>
+            <a:cxnSpLocks/>
+            <a:stCxn id="3" idx="3"/>
+            <a:endCxn id="7" idx="1"/>
+          </p:cNvCxnSpPr>
+          <p:nvPr/>
+        </p:nvCxnSpPr>
+        <p:spPr>
+          <a:xfrm flipV="1">
+            <a:off x="4827709" y="3038400"/>
+            <a:ext cx="160971" cy="249300"/>
+          </a:xfrm>
+          <a:prstGeom prst="curvedConnector3">
+            <a:avLst/>
+          </a:prstGeom>
+          <a:ln>
+            <a:solidFill>
+              <a:srgbClr val="486CAC"/>
+            </a:solidFill>
+          </a:ln>
+        </p:spPr>
+        <p:style>
+          <a:lnRef idx="1">
+            <a:schemeClr val="accent1"/>
+          </a:lnRef>
+          <a:fillRef idx="0">
+            <a:schemeClr val="accent1"/>
+          </a:fillRef>
+          <a:effectRef idx="0">
+            <a:schemeClr val="accent1"/>
+          </a:effectRef>
+          <a:fontRef idx="minor">
+            <a:schemeClr val="tx1"/>
+          </a:fontRef>
+        </p:style>
+      </p:cxnSp>
+      <p:cxnSp>
+        <p:nvCxnSpPr>
+          <p:cNvPr id="13" name="连接符: 曲线 12">
+            <a:extLst>
+              <a:ext uri="{FF2B5EF4-FFF2-40B4-BE49-F238E27FC236}">
+                <a16:creationId xmlns:a16="http://schemas.microsoft.com/office/drawing/2014/main" id="{24C1CA78-5496-27AF-13AD-7BE3E7DD4AE2}"/>
+              </a:ext>
+            </a:extLst>
+          </p:cNvPr>
+          <p:cNvCxnSpPr>
+            <a:cxnSpLocks/>
+            <a:stCxn id="3" idx="3"/>
+            <a:endCxn id="4" idx="1"/>
+          </p:cNvCxnSpPr>
+          <p:nvPr/>
+        </p:nvCxnSpPr>
+        <p:spPr>
+          <a:xfrm>
+            <a:off x="4827709" y="3287700"/>
+            <a:ext cx="160970" cy="249300"/>
+          </a:xfrm>
+          <a:prstGeom prst="curvedConnector3">
+            <a:avLst/>
+          </a:prstGeom>
+          <a:ln>
+            <a:solidFill>
+              <a:srgbClr val="486CAC"/>
+            </a:solidFill>
+          </a:ln>
+        </p:spPr>
+        <p:style>
+          <a:lnRef idx="1">
+            <a:schemeClr val="accent1"/>
+          </a:lnRef>
+          <a:fillRef idx="0">
+            <a:schemeClr val="accent1"/>
+          </a:fillRef>
+          <a:effectRef idx="0">
+            <a:schemeClr val="accent1"/>
+          </a:effectRef>
+          <a:fontRef idx="minor">
+            <a:schemeClr val="tx1"/>
+          </a:fontRef>
+        </p:style>
+      </p:cxnSp>
+    </p:spTree>
+    <p:extLst>
+      <p:ext uri="{BB962C8B-B14F-4D97-AF65-F5344CB8AC3E}">
+        <p14:creationId xmlns:p14="http://schemas.microsoft.com/office/powerpoint/2010/main" val="825264789"/>
+      </p:ext>
+    </p:extLst>
+  </p:cSld>
+  <p:clrMapOvr>
+    <a:masterClrMapping/>
+  </p:clrMapOvr>
+</p:sld>
+</file>
+
+<file path=ppt/slides/slide11.xml><?xml version="1.0" encoding="utf-8"?>
+<p:sld xmlns:a="http://schemas.openxmlformats.org/drawingml/2006/main" xmlns:r="http://schemas.openxmlformats.org/officeDocument/2006/relationships" xmlns:p="http://schemas.openxmlformats.org/presentationml/2006/main">
+  <p:cSld>
+    <p:spTree>
+      <p:nvGrpSpPr>
+        <p:cNvPr id="1" name="">
+          <a:extLst>
+            <a:ext uri="{FF2B5EF4-FFF2-40B4-BE49-F238E27FC236}">
               <a16:creationId xmlns:a16="http://schemas.microsoft.com/office/drawing/2014/main" id="{8E4FA66E-600A-88EF-A518-DADE5F3B4051}"/>
             </a:ext>
           </a:extLst>
@@ -4094,7 +5061,7 @@
 </p:sld>
 </file>
 
-<file path=ppt/slides/slide11.xml><?xml version="1.0" encoding="utf-8"?>
+<file path=ppt/slides/slide12.xml><?xml version="1.0" encoding="utf-8"?>
 <p:sld xmlns:a="http://schemas.openxmlformats.org/drawingml/2006/main" xmlns:r="http://schemas.openxmlformats.org/officeDocument/2006/relationships" xmlns:p="http://schemas.openxmlformats.org/presentationml/2006/main">
   <p:cSld>
     <p:spTree>
@@ -5709,7 +6676,7 @@
 </p:sld>
 </file>
 
-<file path=ppt/slides/slide12.xml><?xml version="1.0" encoding="utf-8"?>
+<file path=ppt/slides/slide13.xml><?xml version="1.0" encoding="utf-8"?>
 <p:sld xmlns:a="http://schemas.openxmlformats.org/drawingml/2006/main" xmlns:r="http://schemas.openxmlformats.org/officeDocument/2006/relationships" xmlns:p="http://schemas.openxmlformats.org/presentationml/2006/main">
   <p:cSld>
     <p:spTree>
@@ -8714,7 +9681,7 @@
 </p:sld>
 </file>
 
-<file path=ppt/slides/slide13.xml><?xml version="1.0" encoding="utf-8"?>
+<file path=ppt/slides/slide14.xml><?xml version="1.0" encoding="utf-8"?>
 <p:sld xmlns:a="http://schemas.openxmlformats.org/drawingml/2006/main" xmlns:r="http://schemas.openxmlformats.org/officeDocument/2006/relationships" xmlns:p="http://schemas.openxmlformats.org/presentationml/2006/main">
   <p:cSld>
     <p:spTree>
@@ -11297,7 +12264,7 @@
 </p:sld>
 </file>
 
-<file path=ppt/slides/slide14.xml><?xml version="1.0" encoding="utf-8"?>
+<file path=ppt/slides/slide15.xml><?xml version="1.0" encoding="utf-8"?>
 <p:sld xmlns:a="http://schemas.openxmlformats.org/drawingml/2006/main" xmlns:r="http://schemas.openxmlformats.org/officeDocument/2006/relationships" xmlns:p="http://schemas.openxmlformats.org/presentationml/2006/main">
   <p:cSld>
     <p:spTree>
@@ -12702,7 +13669,7 @@
 </p:sld>
 </file>
 
-<file path=ppt/slides/slide15.xml><?xml version="1.0" encoding="utf-8"?>
+<file path=ppt/slides/slide16.xml><?xml version="1.0" encoding="utf-8"?>
 <p:sld xmlns:a="http://schemas.openxmlformats.org/drawingml/2006/main" xmlns:r="http://schemas.openxmlformats.org/officeDocument/2006/relationships" xmlns:p="http://schemas.openxmlformats.org/presentationml/2006/main">
   <p:cSld>
     <p:spTree>
@@ -13910,7 +14877,7 @@
 </p:sld>
 </file>
 
-<file path=ppt/slides/slide16.xml><?xml version="1.0" encoding="utf-8"?>
+<file path=ppt/slides/slide17.xml><?xml version="1.0" encoding="utf-8"?>
 <p:sld xmlns:a="http://schemas.openxmlformats.org/drawingml/2006/main" xmlns:r="http://schemas.openxmlformats.org/officeDocument/2006/relationships" xmlns:p="http://schemas.openxmlformats.org/presentationml/2006/main">
   <p:cSld>
     <p:spTree>
@@ -14254,7 +15221,7 @@
 </p:sld>
 </file>
 
-<file path=ppt/slides/slide17.xml><?xml version="1.0" encoding="utf-8"?>
+<file path=ppt/slides/slide18.xml><?xml version="1.0" encoding="utf-8"?>
 <p:sld xmlns:a="http://schemas.openxmlformats.org/drawingml/2006/main" xmlns:r="http://schemas.openxmlformats.org/officeDocument/2006/relationships" xmlns:p="http://schemas.openxmlformats.org/presentationml/2006/main">
   <p:cSld>
     <p:spTree>
@@ -14700,7 +15667,7 @@
 </p:sld>
 </file>
 
-<file path=ppt/slides/slide18.xml><?xml version="1.0" encoding="utf-8"?>
+<file path=ppt/slides/slide19.xml><?xml version="1.0" encoding="utf-8"?>
 <p:sld xmlns:a="http://schemas.openxmlformats.org/drawingml/2006/main" xmlns:r="http://schemas.openxmlformats.org/officeDocument/2006/relationships" xmlns:p="http://schemas.openxmlformats.org/presentationml/2006/main">
   <p:cSld>
     <p:spTree>
@@ -15137,452 +16104,6 @@
     <p:extLst>
       <p:ext uri="{BB962C8B-B14F-4D97-AF65-F5344CB8AC3E}">
         <p14:creationId xmlns:p14="http://schemas.microsoft.com/office/powerpoint/2010/main" val="3803754908"/>
-      </p:ext>
-    </p:extLst>
-  </p:cSld>
-  <p:clrMapOvr>
-    <a:masterClrMapping/>
-  </p:clrMapOvr>
-</p:sld>
-</file>
-
-<file path=ppt/slides/slide19.xml><?xml version="1.0" encoding="utf-8"?>
-<p:sld xmlns:a="http://schemas.openxmlformats.org/drawingml/2006/main" xmlns:r="http://schemas.openxmlformats.org/officeDocument/2006/relationships" xmlns:p="http://schemas.openxmlformats.org/presentationml/2006/main">
-  <p:cSld>
-    <p:spTree>
-      <p:nvGrpSpPr>
-        <p:cNvPr id="1" name="">
-          <a:extLst>
-            <a:ext uri="{FF2B5EF4-FFF2-40B4-BE49-F238E27FC236}">
-              <a16:creationId xmlns:a16="http://schemas.microsoft.com/office/drawing/2014/main" id="{70C4E89A-BF29-AF5A-ED21-08479844B4D3}"/>
-            </a:ext>
-          </a:extLst>
-        </p:cNvPr>
-        <p:cNvGrpSpPr/>
-        <p:nvPr/>
-      </p:nvGrpSpPr>
-      <p:grpSpPr>
-        <a:xfrm>
-          <a:off x="0" y="0"/>
-          <a:ext cx="0" cy="0"/>
-          <a:chOff x="0" y="0"/>
-          <a:chExt cx="0" cy="0"/>
-        </a:xfrm>
-      </p:grpSpPr>
-      <p:sp>
-        <p:nvSpPr>
-          <p:cNvPr id="2" name="Rectangle 1">
-            <a:extLst>
-              <a:ext uri="{FF2B5EF4-FFF2-40B4-BE49-F238E27FC236}">
-                <a16:creationId xmlns:a16="http://schemas.microsoft.com/office/drawing/2014/main" id="{0F4514FD-593B-5957-478B-81363107123A}"/>
-              </a:ext>
-            </a:extLst>
-          </p:cNvPr>
-          <p:cNvSpPr/>
-          <p:nvPr/>
-        </p:nvSpPr>
-        <p:spPr>
-          <a:xfrm>
-            <a:off x="3757723" y="1589964"/>
-            <a:ext cx="3600000" cy="1800000"/>
-          </a:xfrm>
-          <a:prstGeom prst="rect">
-            <a:avLst/>
-          </a:prstGeom>
-          <a:solidFill>
-            <a:schemeClr val="bg1">
-              <a:lumMod val="95000"/>
-            </a:schemeClr>
-          </a:solidFill>
-          <a:ln>
-            <a:noFill/>
-          </a:ln>
-        </p:spPr>
-        <p:style>
-          <a:lnRef idx="2">
-            <a:schemeClr val="accent1">
-              <a:shade val="15000"/>
-            </a:schemeClr>
-          </a:lnRef>
-          <a:fillRef idx="1">
-            <a:schemeClr val="accent1"/>
-          </a:fillRef>
-          <a:effectRef idx="0">
-            <a:schemeClr val="accent1"/>
-          </a:effectRef>
-          <a:fontRef idx="minor">
-            <a:schemeClr val="lt1"/>
-          </a:fontRef>
-        </p:style>
-        <p:txBody>
-          <a:bodyPr rtlCol="0" anchor="ctr"/>
-          <a:lstStyle/>
-          <a:p>
-            <a:pPr algn="ctr"/>
-            <a:endParaRPr lang="zh-CN" altLang="en-US" sz="1200">
-              <a:solidFill>
-                <a:schemeClr val="accent6">
-                  <a:lumMod val="75000"/>
-                </a:schemeClr>
-              </a:solidFill>
-              <a:latin typeface="Poppins" panose="00000500000000000000" pitchFamily="2" charset="0"/>
-              <a:cs typeface="Poppins" panose="00000500000000000000" pitchFamily="2" charset="0"/>
-            </a:endParaRPr>
-          </a:p>
-        </p:txBody>
-      </p:sp>
-      <p:sp>
-        <p:nvSpPr>
-          <p:cNvPr id="3" name="Rectangle 2">
-            <a:extLst>
-              <a:ext uri="{FF2B5EF4-FFF2-40B4-BE49-F238E27FC236}">
-                <a16:creationId xmlns:a16="http://schemas.microsoft.com/office/drawing/2014/main" id="{BA8D48D4-E1F3-B266-9AE0-9C5665BBD6F5}"/>
-              </a:ext>
-            </a:extLst>
-          </p:cNvPr>
-          <p:cNvSpPr/>
-          <p:nvPr/>
-        </p:nvSpPr>
-        <p:spPr>
-          <a:xfrm>
-            <a:off x="3757723" y="1589964"/>
-            <a:ext cx="3600000" cy="720000"/>
-          </a:xfrm>
-          <a:prstGeom prst="rect">
-            <a:avLst/>
-          </a:prstGeom>
-          <a:solidFill>
-            <a:srgbClr val="92D050"/>
-          </a:solidFill>
-          <a:ln>
-            <a:noFill/>
-          </a:ln>
-        </p:spPr>
-        <p:style>
-          <a:lnRef idx="2">
-            <a:schemeClr val="accent1">
-              <a:shade val="15000"/>
-            </a:schemeClr>
-          </a:lnRef>
-          <a:fillRef idx="1">
-            <a:schemeClr val="accent1"/>
-          </a:fillRef>
-          <a:effectRef idx="0">
-            <a:schemeClr val="accent1"/>
-          </a:effectRef>
-          <a:fontRef idx="minor">
-            <a:schemeClr val="lt1"/>
-          </a:fontRef>
-        </p:style>
-        <p:txBody>
-          <a:bodyPr rtlCol="0" anchor="b" anchorCtr="0"/>
-          <a:lstStyle/>
-          <a:p>
-            <a:r>
-              <a:rPr lang="en-US" altLang="zh-CN" sz="1200">
-                <a:latin typeface="Poppins" panose="00000500000000000000" pitchFamily="2" charset="0"/>
-                <a:cs typeface="Poppins" panose="00000500000000000000" pitchFamily="2" charset="0"/>
-              </a:rPr>
-              <a:t>start</a:t>
-            </a:r>
-            <a:endParaRPr lang="zh-CN" altLang="en-US" sz="1200">
-              <a:latin typeface="Poppins" panose="00000500000000000000" pitchFamily="2" charset="0"/>
-              <a:cs typeface="Poppins" panose="00000500000000000000" pitchFamily="2" charset="0"/>
-            </a:endParaRPr>
-          </a:p>
-        </p:txBody>
-      </p:sp>
-      <p:sp>
-        <p:nvSpPr>
-          <p:cNvPr id="4" name="Rectangle 3">
-            <a:extLst>
-              <a:ext uri="{FF2B5EF4-FFF2-40B4-BE49-F238E27FC236}">
-                <a16:creationId xmlns:a16="http://schemas.microsoft.com/office/drawing/2014/main" id="{75131CE1-6587-9E1B-DBD4-384409634CF3}"/>
-              </a:ext>
-            </a:extLst>
-          </p:cNvPr>
-          <p:cNvSpPr/>
-          <p:nvPr/>
-        </p:nvSpPr>
-        <p:spPr>
-          <a:xfrm>
-            <a:off x="3757723" y="2309964"/>
-            <a:ext cx="3600000" cy="1080000"/>
-          </a:xfrm>
-          <a:prstGeom prst="rect">
-            <a:avLst/>
-          </a:prstGeom>
-          <a:solidFill>
-            <a:srgbClr val="92D050"/>
-          </a:solidFill>
-          <a:ln>
-            <a:noFill/>
-          </a:ln>
-        </p:spPr>
-        <p:style>
-          <a:lnRef idx="2">
-            <a:schemeClr val="accent1">
-              <a:shade val="15000"/>
-            </a:schemeClr>
-          </a:lnRef>
-          <a:fillRef idx="1">
-            <a:schemeClr val="accent1"/>
-          </a:fillRef>
-          <a:effectRef idx="0">
-            <a:schemeClr val="accent1"/>
-          </a:effectRef>
-          <a:fontRef idx="minor">
-            <a:schemeClr val="lt1"/>
-          </a:fontRef>
-        </p:style>
-        <p:txBody>
-          <a:bodyPr rtlCol="0" anchor="t" anchorCtr="0"/>
-          <a:lstStyle/>
-          <a:p>
-            <a:r>
-              <a:rPr lang="en-US" altLang="zh-CN" sz="1200">
-                <a:latin typeface="Poppins" panose="00000500000000000000" pitchFamily="2" charset="0"/>
-                <a:cs typeface="Poppins" panose="00000500000000000000" pitchFamily="2" charset="0"/>
-              </a:rPr>
-              <a:t>end</a:t>
-            </a:r>
-            <a:endParaRPr lang="zh-CN" altLang="en-US" sz="1200">
-              <a:latin typeface="Poppins" panose="00000500000000000000" pitchFamily="2" charset="0"/>
-              <a:cs typeface="Poppins" panose="00000500000000000000" pitchFamily="2" charset="0"/>
-            </a:endParaRPr>
-          </a:p>
-        </p:txBody>
-      </p:sp>
-      <p:sp>
-        <p:nvSpPr>
-          <p:cNvPr id="5" name="文本框 4">
-            <a:extLst>
-              <a:ext uri="{FF2B5EF4-FFF2-40B4-BE49-F238E27FC236}">
-                <a16:creationId xmlns:a16="http://schemas.microsoft.com/office/drawing/2014/main" id="{45D18331-4F10-66C6-2CC3-6214413856F0}"/>
-              </a:ext>
-            </a:extLst>
-          </p:cNvPr>
-          <p:cNvSpPr txBox="1"/>
-          <p:nvPr/>
-        </p:nvSpPr>
-        <p:spPr>
-          <a:xfrm>
-            <a:off x="4991100" y="2089523"/>
-            <a:ext cx="1592103" cy="307777"/>
-          </a:xfrm>
-          <a:prstGeom prst="rect">
-            <a:avLst/>
-          </a:prstGeom>
-          <a:noFill/>
-        </p:spPr>
-        <p:txBody>
-          <a:bodyPr wrap="none" rtlCol="0">
-            <a:spAutoFit/>
-          </a:bodyPr>
-          <a:lstStyle/>
-          <a:p>
-            <a:r>
-              <a:rPr lang="en-US" altLang="zh-CN" sz="1400">
-                <a:latin typeface="Poppins" panose="00000500000000000000" pitchFamily="2" charset="0"/>
-                <a:cs typeface="Poppins" panose="00000500000000000000" pitchFamily="2" charset="0"/>
-              </a:rPr>
-              <a:t>Animation Zone</a:t>
-            </a:r>
-            <a:endParaRPr lang="zh-CN" altLang="en-US" sz="1400">
-              <a:latin typeface="Poppins" panose="00000500000000000000" pitchFamily="2" charset="0"/>
-              <a:cs typeface="Poppins" panose="00000500000000000000" pitchFamily="2" charset="0"/>
-            </a:endParaRPr>
-          </a:p>
-        </p:txBody>
-      </p:sp>
-      <p:cxnSp>
-        <p:nvCxnSpPr>
-          <p:cNvPr id="7" name="Straight Arrow Connector 5">
-            <a:extLst>
-              <a:ext uri="{FF2B5EF4-FFF2-40B4-BE49-F238E27FC236}">
-                <a16:creationId xmlns:a16="http://schemas.microsoft.com/office/drawing/2014/main" id="{835AD99D-1E1D-3323-3899-83DE42EDA003}"/>
-              </a:ext>
-            </a:extLst>
-          </p:cNvPr>
-          <p:cNvCxnSpPr>
-            <a:cxnSpLocks/>
-          </p:cNvCxnSpPr>
-          <p:nvPr/>
-        </p:nvCxnSpPr>
-        <p:spPr>
-          <a:xfrm>
-            <a:off x="4297473" y="1589964"/>
-            <a:ext cx="0" cy="720000"/>
-          </a:xfrm>
-          <a:prstGeom prst="straightConnector1">
-            <a:avLst/>
-          </a:prstGeom>
-          <a:ln>
-            <a:solidFill>
-              <a:schemeClr val="bg1"/>
-            </a:solidFill>
-            <a:tailEnd type="triangle"/>
-          </a:ln>
-        </p:spPr>
-        <p:style>
-          <a:lnRef idx="1">
-            <a:schemeClr val="accent1"/>
-          </a:lnRef>
-          <a:fillRef idx="0">
-            <a:schemeClr val="accent1"/>
-          </a:fillRef>
-          <a:effectRef idx="0">
-            <a:schemeClr val="accent1"/>
-          </a:effectRef>
-          <a:fontRef idx="minor">
-            <a:schemeClr val="tx1"/>
-          </a:fontRef>
-        </p:style>
-      </p:cxnSp>
-      <p:cxnSp>
-        <p:nvCxnSpPr>
-          <p:cNvPr id="9" name="Straight Arrow Connector 7">
-            <a:extLst>
-              <a:ext uri="{FF2B5EF4-FFF2-40B4-BE49-F238E27FC236}">
-                <a16:creationId xmlns:a16="http://schemas.microsoft.com/office/drawing/2014/main" id="{00A8B3C4-1587-38DE-2403-A0606A3593B1}"/>
-              </a:ext>
-            </a:extLst>
-          </p:cNvPr>
-          <p:cNvCxnSpPr>
-            <a:cxnSpLocks/>
-          </p:cNvCxnSpPr>
-          <p:nvPr/>
-        </p:nvCxnSpPr>
-        <p:spPr>
-          <a:xfrm flipV="1">
-            <a:off x="4297473" y="2309964"/>
-            <a:ext cx="0" cy="1080000"/>
-          </a:xfrm>
-          <a:prstGeom prst="straightConnector1">
-            <a:avLst/>
-          </a:prstGeom>
-          <a:ln>
-            <a:solidFill>
-              <a:schemeClr val="bg1"/>
-            </a:solidFill>
-            <a:tailEnd type="triangle"/>
-          </a:ln>
-        </p:spPr>
-        <p:style>
-          <a:lnRef idx="1">
-            <a:schemeClr val="accent1"/>
-          </a:lnRef>
-          <a:fillRef idx="0">
-            <a:schemeClr val="accent1"/>
-          </a:fillRef>
-          <a:effectRef idx="0">
-            <a:schemeClr val="accent1"/>
-          </a:effectRef>
-          <a:fontRef idx="minor">
-            <a:schemeClr val="tx1"/>
-          </a:fontRef>
-        </p:style>
-      </p:cxnSp>
-      <p:sp>
-        <p:nvSpPr>
-          <p:cNvPr id="10" name="文本框 9">
-            <a:extLst>
-              <a:ext uri="{FF2B5EF4-FFF2-40B4-BE49-F238E27FC236}">
-                <a16:creationId xmlns:a16="http://schemas.microsoft.com/office/drawing/2014/main" id="{1A3F9847-32C0-AF36-6722-54B895024168}"/>
-              </a:ext>
-            </a:extLst>
-          </p:cNvPr>
-          <p:cNvSpPr txBox="1"/>
-          <p:nvPr/>
-        </p:nvSpPr>
-        <p:spPr>
-          <a:xfrm>
-            <a:off x="4297473" y="2032965"/>
-            <a:ext cx="476412" cy="276999"/>
-          </a:xfrm>
-          <a:prstGeom prst="rect">
-            <a:avLst/>
-          </a:prstGeom>
-          <a:noFill/>
-        </p:spPr>
-        <p:txBody>
-          <a:bodyPr wrap="none" rtlCol="0">
-            <a:spAutoFit/>
-          </a:bodyPr>
-          <a:lstStyle/>
-          <a:p>
-            <a:r>
-              <a:rPr lang="en-US" altLang="zh-CN" sz="1200">
-                <a:solidFill>
-                  <a:schemeClr val="bg1"/>
-                </a:solidFill>
-                <a:latin typeface="Poppins" panose="00000500000000000000" pitchFamily="2" charset="0"/>
-                <a:cs typeface="Poppins" panose="00000500000000000000" pitchFamily="2" charset="0"/>
-              </a:rPr>
-              <a:t>40%</a:t>
-            </a:r>
-            <a:endParaRPr lang="zh-CN" altLang="en-US" sz="1200">
-              <a:solidFill>
-                <a:schemeClr val="bg1"/>
-              </a:solidFill>
-              <a:latin typeface="Poppins" panose="00000500000000000000" pitchFamily="2" charset="0"/>
-              <a:cs typeface="Poppins" panose="00000500000000000000" pitchFamily="2" charset="0"/>
-            </a:endParaRPr>
-          </a:p>
-        </p:txBody>
-      </p:sp>
-      <p:sp>
-        <p:nvSpPr>
-          <p:cNvPr id="11" name="文本框 10">
-            <a:extLst>
-              <a:ext uri="{FF2B5EF4-FFF2-40B4-BE49-F238E27FC236}">
-                <a16:creationId xmlns:a16="http://schemas.microsoft.com/office/drawing/2014/main" id="{9D2433A2-2688-D06B-77ED-F2DBF6D27DA1}"/>
-              </a:ext>
-            </a:extLst>
-          </p:cNvPr>
-          <p:cNvSpPr txBox="1"/>
-          <p:nvPr/>
-        </p:nvSpPr>
-        <p:spPr>
-          <a:xfrm>
-            <a:off x="4297473" y="2309964"/>
-            <a:ext cx="476412" cy="276999"/>
-          </a:xfrm>
-          <a:prstGeom prst="rect">
-            <a:avLst/>
-          </a:prstGeom>
-          <a:noFill/>
-        </p:spPr>
-        <p:txBody>
-          <a:bodyPr wrap="none" rtlCol="0">
-            <a:spAutoFit/>
-          </a:bodyPr>
-          <a:lstStyle/>
-          <a:p>
-            <a:r>
-              <a:rPr lang="en-US" altLang="zh-CN" sz="1200">
-                <a:solidFill>
-                  <a:schemeClr val="bg1"/>
-                </a:solidFill>
-                <a:latin typeface="Poppins" panose="00000500000000000000" pitchFamily="2" charset="0"/>
-                <a:cs typeface="Poppins" panose="00000500000000000000" pitchFamily="2" charset="0"/>
-              </a:rPr>
-              <a:t>60%</a:t>
-            </a:r>
-            <a:endParaRPr lang="zh-CN" altLang="en-US" sz="1200">
-              <a:solidFill>
-                <a:schemeClr val="bg1"/>
-              </a:solidFill>
-              <a:latin typeface="Poppins" panose="00000500000000000000" pitchFamily="2" charset="0"/>
-              <a:cs typeface="Poppins" panose="00000500000000000000" pitchFamily="2" charset="0"/>
-            </a:endParaRPr>
-          </a:p>
-        </p:txBody>
-      </p:sp>
-    </p:spTree>
-    <p:extLst>
-      <p:ext uri="{BB962C8B-B14F-4D97-AF65-F5344CB8AC3E}">
-        <p14:creationId xmlns:p14="http://schemas.microsoft.com/office/powerpoint/2010/main" val="1843053738"/>
       </p:ext>
     </p:extLst>
   </p:cSld>
@@ -15629,14 +16150,16 @@
         </p:nvSpPr>
         <p:spPr>
           <a:xfrm>
-            <a:off x="3307693" y="3015669"/>
+            <a:off x="3307693" y="2719832"/>
             <a:ext cx="1440000" cy="360000"/>
           </a:xfrm>
           <a:prstGeom prst="roundRect">
             <a:avLst/>
           </a:prstGeom>
           <a:solidFill>
-            <a:srgbClr val="EB3B5A"/>
+            <a:schemeClr val="accent5">
+              <a:lumMod val="75000"/>
+            </a:schemeClr>
           </a:solidFill>
           <a:ln w="12700">
             <a:noFill/>
@@ -15689,7 +16212,7 @@
         </p:nvSpPr>
         <p:spPr>
           <a:xfrm>
-            <a:off x="5031248" y="2800413"/>
+            <a:off x="5031248" y="3132107"/>
             <a:ext cx="1800000" cy="360000"/>
           </a:xfrm>
           <a:prstGeom prst="roundRect">
@@ -15756,7 +16279,7 @@
         </p:nvSpPr>
         <p:spPr>
           <a:xfrm>
-            <a:off x="5031248" y="3230925"/>
+            <a:off x="5031248" y="3562619"/>
             <a:ext cx="1800000" cy="360000"/>
           </a:xfrm>
           <a:prstGeom prst="roundRect">
@@ -15798,7 +16321,7 @@
                 </a:solidFill>
                 <a:latin typeface="Quicksand Light" panose="00000400000000000000" pitchFamily="2" charset="0"/>
               </a:rPr>
-              <a:t>Three-Way Handshake</a:t>
+              <a:t>Transition Control</a:t>
             </a:r>
             <a:endParaRPr lang="zh-CN" altLang="en-US" sz="1200" dirty="0">
               <a:solidFill>
@@ -15823,7 +16346,7 @@
         </p:nvSpPr>
         <p:spPr>
           <a:xfrm>
-            <a:off x="5031248" y="4091950"/>
+            <a:off x="5031248" y="4665692"/>
             <a:ext cx="1800000" cy="360000"/>
           </a:xfrm>
           <a:prstGeom prst="roundRect">
@@ -15865,7 +16388,7 @@
                 </a:solidFill>
                 <a:latin typeface="Quicksand Light" panose="00000400000000000000" pitchFamily="2" charset="0"/>
               </a:rPr>
-              <a:t>Prototype</a:t>
+              <a:t>Packet</a:t>
             </a:r>
             <a:endParaRPr lang="zh-CN" altLang="en-US" sz="1200" dirty="0">
               <a:solidFill>
@@ -15878,23 +16401,24 @@
       </p:sp>
       <p:cxnSp>
         <p:nvCxnSpPr>
-          <p:cNvPr id="7" name="连接符: 曲线 6">
-            <a:extLst>
-              <a:ext uri="{FF2B5EF4-FFF2-40B4-BE49-F238E27FC236}">
-                <a16:creationId xmlns:a16="http://schemas.microsoft.com/office/drawing/2014/main" id="{32AFC9CD-9646-AC6D-2875-55BC88E93D88}"/>
+          <p:cNvPr id="8" name="连接符: 曲线 7">
+            <a:extLst>
+              <a:ext uri="{FF2B5EF4-FFF2-40B4-BE49-F238E27FC236}">
+                <a16:creationId xmlns:a16="http://schemas.microsoft.com/office/drawing/2014/main" id="{40667B24-5AC7-5F2E-7021-EBB90191C191}"/>
               </a:ext>
             </a:extLst>
           </p:cNvPr>
           <p:cNvCxnSpPr>
-            <a:stCxn id="2" idx="3"/>
-            <a:endCxn id="5" idx="1"/>
+            <a:cxnSpLocks/>
+            <a:stCxn id="3" idx="1"/>
+            <a:endCxn id="16" idx="3"/>
           </p:cNvCxnSpPr>
           <p:nvPr/>
         </p:nvCxnSpPr>
         <p:spPr>
-          <a:xfrm>
-            <a:off x="4747693" y="3195669"/>
-            <a:ext cx="283555" cy="1076281"/>
+          <a:xfrm rot="10800000" flipV="1">
+            <a:off x="4747694" y="3312107"/>
+            <a:ext cx="283555" cy="215256"/>
           </a:xfrm>
           <a:prstGeom prst="curvedConnector3">
             <a:avLst>
@@ -15903,53 +16427,7 @@
           </a:prstGeom>
           <a:ln w="6350">
             <a:solidFill>
-              <a:schemeClr val="tx2"/>
-            </a:solidFill>
-          </a:ln>
-        </p:spPr>
-        <p:style>
-          <a:lnRef idx="1">
-            <a:schemeClr val="accent1"/>
-          </a:lnRef>
-          <a:fillRef idx="0">
-            <a:schemeClr val="accent1"/>
-          </a:fillRef>
-          <a:effectRef idx="0">
-            <a:schemeClr val="accent1"/>
-          </a:effectRef>
-          <a:fontRef idx="minor">
-            <a:schemeClr val="tx1"/>
-          </a:fontRef>
-        </p:style>
-      </p:cxnSp>
-      <p:cxnSp>
-        <p:nvCxnSpPr>
-          <p:cNvPr id="8" name="连接符: 曲线 7">
-            <a:extLst>
-              <a:ext uri="{FF2B5EF4-FFF2-40B4-BE49-F238E27FC236}">
-                <a16:creationId xmlns:a16="http://schemas.microsoft.com/office/drawing/2014/main" id="{40667B24-5AC7-5F2E-7021-EBB90191C191}"/>
-              </a:ext>
-            </a:extLst>
-          </p:cNvPr>
-          <p:cNvCxnSpPr>
-            <a:stCxn id="3" idx="1"/>
-            <a:endCxn id="2" idx="3"/>
-          </p:cNvCxnSpPr>
-          <p:nvPr/>
-        </p:nvCxnSpPr>
-        <p:spPr>
-          <a:xfrm rot="10800000" flipV="1">
-            <a:off x="4747694" y="2980413"/>
-            <a:ext cx="283555" cy="215256"/>
-          </a:xfrm>
-          <a:prstGeom prst="curvedConnector3">
-            <a:avLst>
-              <a:gd name="adj1" fmla="val 50000"/>
-            </a:avLst>
-          </a:prstGeom>
-          <a:ln w="6350">
-            <a:solidFill>
-              <a:schemeClr val="tx2"/>
+              <a:srgbClr val="3CBFD1"/>
             </a:solidFill>
           </a:ln>
         </p:spPr>
@@ -15982,7 +16460,7 @@
         </p:nvSpPr>
         <p:spPr>
           <a:xfrm>
-            <a:off x="5031248" y="3661437"/>
+            <a:off x="5031248" y="3993131"/>
             <a:ext cx="1800000" cy="360000"/>
           </a:xfrm>
           <a:prstGeom prst="roundRect">
@@ -16024,7 +16502,7 @@
                 </a:solidFill>
                 <a:latin typeface="Quicksand Light" panose="00000400000000000000" pitchFamily="2" charset="0"/>
               </a:rPr>
-              <a:t>Four-way Handshake</a:t>
+              <a:t>Packet</a:t>
             </a:r>
             <a:endParaRPr lang="zh-CN" altLang="en-US" sz="1200" dirty="0">
               <a:solidFill>
@@ -16046,14 +16524,14 @@
           </p:cNvPr>
           <p:cNvCxnSpPr>
             <a:cxnSpLocks/>
-            <a:stCxn id="2" idx="3"/>
+            <a:stCxn id="16" idx="3"/>
             <a:endCxn id="9" idx="1"/>
           </p:cNvCxnSpPr>
           <p:nvPr/>
         </p:nvCxnSpPr>
         <p:spPr>
           <a:xfrm>
-            <a:off x="4747693" y="3195669"/>
+            <a:off x="4747693" y="3527363"/>
             <a:ext cx="283555" cy="645768"/>
           </a:xfrm>
           <a:prstGeom prst="curvedConnector3">
@@ -16063,7 +16541,7 @@
           </a:prstGeom>
           <a:ln w="6350">
             <a:solidFill>
-              <a:schemeClr val="tx2"/>
+              <a:srgbClr val="3CBFD1"/>
             </a:solidFill>
           </a:ln>
         </p:spPr>
@@ -16096,7 +16574,7 @@
         </p:nvSpPr>
         <p:spPr>
           <a:xfrm>
-            <a:off x="5031248" y="2373912"/>
+            <a:off x="5031248" y="2705606"/>
             <a:ext cx="1800000" cy="360000"/>
           </a:xfrm>
           <a:prstGeom prst="roundRect">
@@ -16161,13 +16639,13 @@
           <p:cNvCxnSpPr>
             <a:cxnSpLocks/>
             <a:stCxn id="13" idx="1"/>
-            <a:endCxn id="2" idx="3"/>
+            <a:endCxn id="16" idx="3"/>
           </p:cNvCxnSpPr>
           <p:nvPr/>
         </p:nvCxnSpPr>
         <p:spPr>
           <a:xfrm rot="10800000" flipV="1">
-            <a:off x="4747694" y="2553911"/>
+            <a:off x="4747694" y="2885605"/>
             <a:ext cx="283555" cy="641757"/>
           </a:xfrm>
           <a:prstGeom prst="curvedConnector3">
@@ -16177,7 +16655,7 @@
           </a:prstGeom>
           <a:ln w="6350">
             <a:solidFill>
-              <a:schemeClr val="tx2"/>
+              <a:srgbClr val="3CBFD1"/>
             </a:solidFill>
           </a:ln>
         </p:spPr>
@@ -16210,7 +16688,7 @@
         </p:nvSpPr>
         <p:spPr>
           <a:xfrm>
-            <a:off x="1584137" y="3446181"/>
+            <a:off x="1584137" y="3347363"/>
             <a:ext cx="1440000" cy="360000"/>
           </a:xfrm>
           <a:prstGeom prst="roundRect">
@@ -16276,8 +16754,8 @@
         </p:nvCxnSpPr>
         <p:spPr>
           <a:xfrm flipV="1">
-            <a:off x="3024137" y="3195669"/>
-            <a:ext cx="283556" cy="430512"/>
+            <a:off x="3024137" y="2899832"/>
+            <a:ext cx="283556" cy="627531"/>
           </a:xfrm>
           <a:prstGeom prst="curvedConnector3">
             <a:avLst>
@@ -16286,7 +16764,9 @@
           </a:prstGeom>
           <a:ln>
             <a:solidFill>
-              <a:srgbClr val="20BF6B"/>
+              <a:schemeClr val="accent5">
+                <a:lumMod val="75000"/>
+              </a:schemeClr>
             </a:solidFill>
           </a:ln>
         </p:spPr>
@@ -16319,7 +16799,7 @@
         </p:nvSpPr>
         <p:spPr>
           <a:xfrm>
-            <a:off x="3307693" y="3446181"/>
+            <a:off x="3307693" y="3347363"/>
             <a:ext cx="1440000" cy="360000"/>
           </a:xfrm>
           <a:prstGeom prst="roundRect">
@@ -16379,7 +16859,7 @@
         </p:nvSpPr>
         <p:spPr>
           <a:xfrm>
-            <a:off x="3307693" y="3876693"/>
+            <a:off x="3307693" y="4665692"/>
             <a:ext cx="1440000" cy="360000"/>
           </a:xfrm>
           <a:prstGeom prst="roundRect">
@@ -16443,8 +16923,8 @@
         </p:nvCxnSpPr>
         <p:spPr>
           <a:xfrm>
-            <a:off x="3024137" y="3626181"/>
-            <a:ext cx="283556" cy="430512"/>
+            <a:off x="3024137" y="3527363"/>
+            <a:ext cx="283556" cy="1318329"/>
           </a:xfrm>
           <a:prstGeom prst="curvedConnector3">
             <a:avLst>
@@ -16489,7 +16969,7 @@
         </p:nvCxnSpPr>
         <p:spPr>
           <a:xfrm flipH="1">
-            <a:off x="3024137" y="3626181"/>
+            <a:off x="3024137" y="3527363"/>
             <a:ext cx="283556" cy="0"/>
           </a:xfrm>
           <a:prstGeom prst="line">
@@ -16497,7 +16977,7 @@
           </a:prstGeom>
           <a:ln>
             <a:solidFill>
-              <a:srgbClr val="20BF6B"/>
+              <a:srgbClr val="3CBFD1"/>
             </a:solidFill>
           </a:ln>
         </p:spPr>
@@ -16528,13 +17008,13 @@
           <p:cNvCxnSpPr>
             <a:cxnSpLocks/>
             <a:stCxn id="4" idx="1"/>
-            <a:endCxn id="2" idx="3"/>
+            <a:endCxn id="16" idx="3"/>
           </p:cNvCxnSpPr>
           <p:nvPr/>
         </p:nvCxnSpPr>
         <p:spPr>
           <a:xfrm rot="10800000">
-            <a:off x="4747694" y="3195669"/>
+            <a:off x="4747694" y="3527363"/>
             <a:ext cx="283555" cy="215256"/>
           </a:xfrm>
           <a:prstGeom prst="curvedConnector3">
@@ -16544,7 +17024,161 @@
           </a:prstGeom>
           <a:ln w="6350">
             <a:solidFill>
-              <a:schemeClr val="tx2"/>
+              <a:srgbClr val="3CBFD1"/>
+            </a:solidFill>
+          </a:ln>
+        </p:spPr>
+        <p:style>
+          <a:lnRef idx="1">
+            <a:schemeClr val="accent1"/>
+          </a:lnRef>
+          <a:fillRef idx="0">
+            <a:schemeClr val="accent1"/>
+          </a:fillRef>
+          <a:effectRef idx="0">
+            <a:schemeClr val="accent1"/>
+          </a:effectRef>
+          <a:fontRef idx="minor">
+            <a:schemeClr val="tx1"/>
+          </a:fontRef>
+        </p:style>
+      </p:cxnSp>
+      <p:sp>
+        <p:nvSpPr>
+          <p:cNvPr id="6" name="矩形: 圆角 5">
+            <a:extLst>
+              <a:ext uri="{FF2B5EF4-FFF2-40B4-BE49-F238E27FC236}">
+                <a16:creationId xmlns:a16="http://schemas.microsoft.com/office/drawing/2014/main" id="{E26F0BAC-FA81-5F6F-B924-707A50D906C4}"/>
+              </a:ext>
+            </a:extLst>
+          </p:cNvPr>
+          <p:cNvSpPr/>
+          <p:nvPr/>
+        </p:nvSpPr>
+        <p:spPr>
+          <a:xfrm>
+            <a:off x="7102100" y="3562619"/>
+            <a:ext cx="1800000" cy="360000"/>
+          </a:xfrm>
+          <a:prstGeom prst="roundRect">
+            <a:avLst/>
+          </a:prstGeom>
+          <a:noFill/>
+          <a:ln w="12700">
+            <a:noFill/>
+            <a:prstDash val="solid"/>
+          </a:ln>
+        </p:spPr>
+        <p:style>
+          <a:lnRef idx="2">
+            <a:schemeClr val="accent1">
+              <a:shade val="15000"/>
+            </a:schemeClr>
+          </a:lnRef>
+          <a:fillRef idx="1">
+            <a:schemeClr val="accent1"/>
+          </a:fillRef>
+          <a:effectRef idx="0">
+            <a:schemeClr val="accent1"/>
+          </a:effectRef>
+          <a:fontRef idx="minor">
+            <a:schemeClr val="lt1"/>
+          </a:fontRef>
+        </p:style>
+        <p:txBody>
+          <a:bodyPr rtlCol="0" anchor="ctr"/>
+          <a:lstStyle/>
+          <a:p>
+            <a:r>
+              <a:rPr lang="en-US" altLang="zh-CN" sz="1200" dirty="0">
+                <a:solidFill>
+                  <a:sysClr val="windowText" lastClr="000000"/>
+                </a:solidFill>
+                <a:latin typeface="Quicksand Light" panose="00000400000000000000" pitchFamily="2" charset="0"/>
+              </a:rPr>
+              <a:t>Three-Way Handshake</a:t>
+            </a:r>
+            <a:endParaRPr lang="zh-CN" altLang="en-US" sz="1200" dirty="0">
+              <a:solidFill>
+                <a:sysClr val="windowText" lastClr="000000"/>
+              </a:solidFill>
+              <a:latin typeface="Quicksand Light" panose="00000400000000000000" pitchFamily="2" charset="0"/>
+            </a:endParaRPr>
+          </a:p>
+        </p:txBody>
+      </p:sp>
+      <p:cxnSp>
+        <p:nvCxnSpPr>
+          <p:cNvPr id="12" name="直接连接符 11">
+            <a:extLst>
+              <a:ext uri="{FF2B5EF4-FFF2-40B4-BE49-F238E27FC236}">
+                <a16:creationId xmlns:a16="http://schemas.microsoft.com/office/drawing/2014/main" id="{981EAB78-C655-57B2-73AD-691D97EFD79E}"/>
+              </a:ext>
+            </a:extLst>
+          </p:cNvPr>
+          <p:cNvCxnSpPr>
+            <a:stCxn id="4" idx="3"/>
+            <a:endCxn id="6" idx="1"/>
+          </p:cNvCxnSpPr>
+          <p:nvPr/>
+        </p:nvCxnSpPr>
+        <p:spPr>
+          <a:xfrm>
+            <a:off x="6831248" y="3742619"/>
+            <a:ext cx="270852" cy="0"/>
+          </a:xfrm>
+          <a:prstGeom prst="line">
+            <a:avLst/>
+          </a:prstGeom>
+          <a:ln>
+            <a:solidFill>
+              <a:schemeClr val="bg1">
+                <a:lumMod val="50000"/>
+              </a:schemeClr>
+            </a:solidFill>
+          </a:ln>
+        </p:spPr>
+        <p:style>
+          <a:lnRef idx="1">
+            <a:schemeClr val="accent1"/>
+          </a:lnRef>
+          <a:fillRef idx="0">
+            <a:schemeClr val="accent1"/>
+          </a:fillRef>
+          <a:effectRef idx="0">
+            <a:schemeClr val="accent1"/>
+          </a:effectRef>
+          <a:fontRef idx="minor">
+            <a:schemeClr val="tx1"/>
+          </a:fontRef>
+        </p:style>
+      </p:cxnSp>
+      <p:cxnSp>
+        <p:nvCxnSpPr>
+          <p:cNvPr id="17" name="直接连接符 16">
+            <a:extLst>
+              <a:ext uri="{FF2B5EF4-FFF2-40B4-BE49-F238E27FC236}">
+                <a16:creationId xmlns:a16="http://schemas.microsoft.com/office/drawing/2014/main" id="{5469945C-7541-0506-CC16-F8088F979CF3}"/>
+              </a:ext>
+            </a:extLst>
+          </p:cNvPr>
+          <p:cNvCxnSpPr>
+            <a:stCxn id="19" idx="3"/>
+            <a:endCxn id="5" idx="1"/>
+          </p:cNvCxnSpPr>
+          <p:nvPr/>
+        </p:nvCxnSpPr>
+        <p:spPr>
+          <a:xfrm>
+            <a:off x="4747693" y="4845692"/>
+            <a:ext cx="283555" cy="0"/>
+          </a:xfrm>
+          <a:prstGeom prst="line">
+            <a:avLst/>
+          </a:prstGeom>
+          <a:ln>
+            <a:solidFill>
+              <a:srgbClr val="20BD6A"/>
             </a:solidFill>
           </a:ln>
         </p:spPr>
@@ -16577,6 +17211,452 @@
 </file>
 
 <file path=ppt/slides/slide20.xml><?xml version="1.0" encoding="utf-8"?>
+<p:sld xmlns:a="http://schemas.openxmlformats.org/drawingml/2006/main" xmlns:r="http://schemas.openxmlformats.org/officeDocument/2006/relationships" xmlns:p="http://schemas.openxmlformats.org/presentationml/2006/main">
+  <p:cSld>
+    <p:spTree>
+      <p:nvGrpSpPr>
+        <p:cNvPr id="1" name="">
+          <a:extLst>
+            <a:ext uri="{FF2B5EF4-FFF2-40B4-BE49-F238E27FC236}">
+              <a16:creationId xmlns:a16="http://schemas.microsoft.com/office/drawing/2014/main" id="{70C4E89A-BF29-AF5A-ED21-08479844B4D3}"/>
+            </a:ext>
+          </a:extLst>
+        </p:cNvPr>
+        <p:cNvGrpSpPr/>
+        <p:nvPr/>
+      </p:nvGrpSpPr>
+      <p:grpSpPr>
+        <a:xfrm>
+          <a:off x="0" y="0"/>
+          <a:ext cx="0" cy="0"/>
+          <a:chOff x="0" y="0"/>
+          <a:chExt cx="0" cy="0"/>
+        </a:xfrm>
+      </p:grpSpPr>
+      <p:sp>
+        <p:nvSpPr>
+          <p:cNvPr id="2" name="Rectangle 1">
+            <a:extLst>
+              <a:ext uri="{FF2B5EF4-FFF2-40B4-BE49-F238E27FC236}">
+                <a16:creationId xmlns:a16="http://schemas.microsoft.com/office/drawing/2014/main" id="{0F4514FD-593B-5957-478B-81363107123A}"/>
+              </a:ext>
+            </a:extLst>
+          </p:cNvPr>
+          <p:cNvSpPr/>
+          <p:nvPr/>
+        </p:nvSpPr>
+        <p:spPr>
+          <a:xfrm>
+            <a:off x="3757723" y="1589964"/>
+            <a:ext cx="3600000" cy="1800000"/>
+          </a:xfrm>
+          <a:prstGeom prst="rect">
+            <a:avLst/>
+          </a:prstGeom>
+          <a:solidFill>
+            <a:schemeClr val="bg1">
+              <a:lumMod val="95000"/>
+            </a:schemeClr>
+          </a:solidFill>
+          <a:ln>
+            <a:noFill/>
+          </a:ln>
+        </p:spPr>
+        <p:style>
+          <a:lnRef idx="2">
+            <a:schemeClr val="accent1">
+              <a:shade val="15000"/>
+            </a:schemeClr>
+          </a:lnRef>
+          <a:fillRef idx="1">
+            <a:schemeClr val="accent1"/>
+          </a:fillRef>
+          <a:effectRef idx="0">
+            <a:schemeClr val="accent1"/>
+          </a:effectRef>
+          <a:fontRef idx="minor">
+            <a:schemeClr val="lt1"/>
+          </a:fontRef>
+        </p:style>
+        <p:txBody>
+          <a:bodyPr rtlCol="0" anchor="ctr"/>
+          <a:lstStyle/>
+          <a:p>
+            <a:pPr algn="ctr"/>
+            <a:endParaRPr lang="zh-CN" altLang="en-US" sz="1200">
+              <a:solidFill>
+                <a:schemeClr val="accent6">
+                  <a:lumMod val="75000"/>
+                </a:schemeClr>
+              </a:solidFill>
+              <a:latin typeface="Poppins" panose="00000500000000000000" pitchFamily="2" charset="0"/>
+              <a:cs typeface="Poppins" panose="00000500000000000000" pitchFamily="2" charset="0"/>
+            </a:endParaRPr>
+          </a:p>
+        </p:txBody>
+      </p:sp>
+      <p:sp>
+        <p:nvSpPr>
+          <p:cNvPr id="3" name="Rectangle 2">
+            <a:extLst>
+              <a:ext uri="{FF2B5EF4-FFF2-40B4-BE49-F238E27FC236}">
+                <a16:creationId xmlns:a16="http://schemas.microsoft.com/office/drawing/2014/main" id="{BA8D48D4-E1F3-B266-9AE0-9C5665BBD6F5}"/>
+              </a:ext>
+            </a:extLst>
+          </p:cNvPr>
+          <p:cNvSpPr/>
+          <p:nvPr/>
+        </p:nvSpPr>
+        <p:spPr>
+          <a:xfrm>
+            <a:off x="3757723" y="1589964"/>
+            <a:ext cx="3600000" cy="720000"/>
+          </a:xfrm>
+          <a:prstGeom prst="rect">
+            <a:avLst/>
+          </a:prstGeom>
+          <a:solidFill>
+            <a:srgbClr val="92D050"/>
+          </a:solidFill>
+          <a:ln>
+            <a:noFill/>
+          </a:ln>
+        </p:spPr>
+        <p:style>
+          <a:lnRef idx="2">
+            <a:schemeClr val="accent1">
+              <a:shade val="15000"/>
+            </a:schemeClr>
+          </a:lnRef>
+          <a:fillRef idx="1">
+            <a:schemeClr val="accent1"/>
+          </a:fillRef>
+          <a:effectRef idx="0">
+            <a:schemeClr val="accent1"/>
+          </a:effectRef>
+          <a:fontRef idx="minor">
+            <a:schemeClr val="lt1"/>
+          </a:fontRef>
+        </p:style>
+        <p:txBody>
+          <a:bodyPr rtlCol="0" anchor="b" anchorCtr="0"/>
+          <a:lstStyle/>
+          <a:p>
+            <a:r>
+              <a:rPr lang="en-US" altLang="zh-CN" sz="1200">
+                <a:latin typeface="Poppins" panose="00000500000000000000" pitchFamily="2" charset="0"/>
+                <a:cs typeface="Poppins" panose="00000500000000000000" pitchFamily="2" charset="0"/>
+              </a:rPr>
+              <a:t>start</a:t>
+            </a:r>
+            <a:endParaRPr lang="zh-CN" altLang="en-US" sz="1200">
+              <a:latin typeface="Poppins" panose="00000500000000000000" pitchFamily="2" charset="0"/>
+              <a:cs typeface="Poppins" panose="00000500000000000000" pitchFamily="2" charset="0"/>
+            </a:endParaRPr>
+          </a:p>
+        </p:txBody>
+      </p:sp>
+      <p:sp>
+        <p:nvSpPr>
+          <p:cNvPr id="4" name="Rectangle 3">
+            <a:extLst>
+              <a:ext uri="{FF2B5EF4-FFF2-40B4-BE49-F238E27FC236}">
+                <a16:creationId xmlns:a16="http://schemas.microsoft.com/office/drawing/2014/main" id="{75131CE1-6587-9E1B-DBD4-384409634CF3}"/>
+              </a:ext>
+            </a:extLst>
+          </p:cNvPr>
+          <p:cNvSpPr/>
+          <p:nvPr/>
+        </p:nvSpPr>
+        <p:spPr>
+          <a:xfrm>
+            <a:off x="3757723" y="2309964"/>
+            <a:ext cx="3600000" cy="1080000"/>
+          </a:xfrm>
+          <a:prstGeom prst="rect">
+            <a:avLst/>
+          </a:prstGeom>
+          <a:solidFill>
+            <a:srgbClr val="92D050"/>
+          </a:solidFill>
+          <a:ln>
+            <a:noFill/>
+          </a:ln>
+        </p:spPr>
+        <p:style>
+          <a:lnRef idx="2">
+            <a:schemeClr val="accent1">
+              <a:shade val="15000"/>
+            </a:schemeClr>
+          </a:lnRef>
+          <a:fillRef idx="1">
+            <a:schemeClr val="accent1"/>
+          </a:fillRef>
+          <a:effectRef idx="0">
+            <a:schemeClr val="accent1"/>
+          </a:effectRef>
+          <a:fontRef idx="minor">
+            <a:schemeClr val="lt1"/>
+          </a:fontRef>
+        </p:style>
+        <p:txBody>
+          <a:bodyPr rtlCol="0" anchor="t" anchorCtr="0"/>
+          <a:lstStyle/>
+          <a:p>
+            <a:r>
+              <a:rPr lang="en-US" altLang="zh-CN" sz="1200">
+                <a:latin typeface="Poppins" panose="00000500000000000000" pitchFamily="2" charset="0"/>
+                <a:cs typeface="Poppins" panose="00000500000000000000" pitchFamily="2" charset="0"/>
+              </a:rPr>
+              <a:t>end</a:t>
+            </a:r>
+            <a:endParaRPr lang="zh-CN" altLang="en-US" sz="1200">
+              <a:latin typeface="Poppins" panose="00000500000000000000" pitchFamily="2" charset="0"/>
+              <a:cs typeface="Poppins" panose="00000500000000000000" pitchFamily="2" charset="0"/>
+            </a:endParaRPr>
+          </a:p>
+        </p:txBody>
+      </p:sp>
+      <p:sp>
+        <p:nvSpPr>
+          <p:cNvPr id="5" name="文本框 4">
+            <a:extLst>
+              <a:ext uri="{FF2B5EF4-FFF2-40B4-BE49-F238E27FC236}">
+                <a16:creationId xmlns:a16="http://schemas.microsoft.com/office/drawing/2014/main" id="{45D18331-4F10-66C6-2CC3-6214413856F0}"/>
+              </a:ext>
+            </a:extLst>
+          </p:cNvPr>
+          <p:cNvSpPr txBox="1"/>
+          <p:nvPr/>
+        </p:nvSpPr>
+        <p:spPr>
+          <a:xfrm>
+            <a:off x="4991100" y="2089523"/>
+            <a:ext cx="1592103" cy="307777"/>
+          </a:xfrm>
+          <a:prstGeom prst="rect">
+            <a:avLst/>
+          </a:prstGeom>
+          <a:noFill/>
+        </p:spPr>
+        <p:txBody>
+          <a:bodyPr wrap="none" rtlCol="0">
+            <a:spAutoFit/>
+          </a:bodyPr>
+          <a:lstStyle/>
+          <a:p>
+            <a:r>
+              <a:rPr lang="en-US" altLang="zh-CN" sz="1400">
+                <a:latin typeface="Poppins" panose="00000500000000000000" pitchFamily="2" charset="0"/>
+                <a:cs typeface="Poppins" panose="00000500000000000000" pitchFamily="2" charset="0"/>
+              </a:rPr>
+              <a:t>Animation Zone</a:t>
+            </a:r>
+            <a:endParaRPr lang="zh-CN" altLang="en-US" sz="1400">
+              <a:latin typeface="Poppins" panose="00000500000000000000" pitchFamily="2" charset="0"/>
+              <a:cs typeface="Poppins" panose="00000500000000000000" pitchFamily="2" charset="0"/>
+            </a:endParaRPr>
+          </a:p>
+        </p:txBody>
+      </p:sp>
+      <p:cxnSp>
+        <p:nvCxnSpPr>
+          <p:cNvPr id="7" name="Straight Arrow Connector 5">
+            <a:extLst>
+              <a:ext uri="{FF2B5EF4-FFF2-40B4-BE49-F238E27FC236}">
+                <a16:creationId xmlns:a16="http://schemas.microsoft.com/office/drawing/2014/main" id="{835AD99D-1E1D-3323-3899-83DE42EDA003}"/>
+              </a:ext>
+            </a:extLst>
+          </p:cNvPr>
+          <p:cNvCxnSpPr>
+            <a:cxnSpLocks/>
+          </p:cNvCxnSpPr>
+          <p:nvPr/>
+        </p:nvCxnSpPr>
+        <p:spPr>
+          <a:xfrm>
+            <a:off x="4297473" y="1589964"/>
+            <a:ext cx="0" cy="720000"/>
+          </a:xfrm>
+          <a:prstGeom prst="straightConnector1">
+            <a:avLst/>
+          </a:prstGeom>
+          <a:ln>
+            <a:solidFill>
+              <a:schemeClr val="bg1"/>
+            </a:solidFill>
+            <a:tailEnd type="triangle"/>
+          </a:ln>
+        </p:spPr>
+        <p:style>
+          <a:lnRef idx="1">
+            <a:schemeClr val="accent1"/>
+          </a:lnRef>
+          <a:fillRef idx="0">
+            <a:schemeClr val="accent1"/>
+          </a:fillRef>
+          <a:effectRef idx="0">
+            <a:schemeClr val="accent1"/>
+          </a:effectRef>
+          <a:fontRef idx="minor">
+            <a:schemeClr val="tx1"/>
+          </a:fontRef>
+        </p:style>
+      </p:cxnSp>
+      <p:cxnSp>
+        <p:nvCxnSpPr>
+          <p:cNvPr id="9" name="Straight Arrow Connector 7">
+            <a:extLst>
+              <a:ext uri="{FF2B5EF4-FFF2-40B4-BE49-F238E27FC236}">
+                <a16:creationId xmlns:a16="http://schemas.microsoft.com/office/drawing/2014/main" id="{00A8B3C4-1587-38DE-2403-A0606A3593B1}"/>
+              </a:ext>
+            </a:extLst>
+          </p:cNvPr>
+          <p:cNvCxnSpPr>
+            <a:cxnSpLocks/>
+          </p:cNvCxnSpPr>
+          <p:nvPr/>
+        </p:nvCxnSpPr>
+        <p:spPr>
+          <a:xfrm flipV="1">
+            <a:off x="4297473" y="2309964"/>
+            <a:ext cx="0" cy="1080000"/>
+          </a:xfrm>
+          <a:prstGeom prst="straightConnector1">
+            <a:avLst/>
+          </a:prstGeom>
+          <a:ln>
+            <a:solidFill>
+              <a:schemeClr val="bg1"/>
+            </a:solidFill>
+            <a:tailEnd type="triangle"/>
+          </a:ln>
+        </p:spPr>
+        <p:style>
+          <a:lnRef idx="1">
+            <a:schemeClr val="accent1"/>
+          </a:lnRef>
+          <a:fillRef idx="0">
+            <a:schemeClr val="accent1"/>
+          </a:fillRef>
+          <a:effectRef idx="0">
+            <a:schemeClr val="accent1"/>
+          </a:effectRef>
+          <a:fontRef idx="minor">
+            <a:schemeClr val="tx1"/>
+          </a:fontRef>
+        </p:style>
+      </p:cxnSp>
+      <p:sp>
+        <p:nvSpPr>
+          <p:cNvPr id="10" name="文本框 9">
+            <a:extLst>
+              <a:ext uri="{FF2B5EF4-FFF2-40B4-BE49-F238E27FC236}">
+                <a16:creationId xmlns:a16="http://schemas.microsoft.com/office/drawing/2014/main" id="{1A3F9847-32C0-AF36-6722-54B895024168}"/>
+              </a:ext>
+            </a:extLst>
+          </p:cNvPr>
+          <p:cNvSpPr txBox="1"/>
+          <p:nvPr/>
+        </p:nvSpPr>
+        <p:spPr>
+          <a:xfrm>
+            <a:off x="4297473" y="2032965"/>
+            <a:ext cx="476412" cy="276999"/>
+          </a:xfrm>
+          <a:prstGeom prst="rect">
+            <a:avLst/>
+          </a:prstGeom>
+          <a:noFill/>
+        </p:spPr>
+        <p:txBody>
+          <a:bodyPr wrap="none" rtlCol="0">
+            <a:spAutoFit/>
+          </a:bodyPr>
+          <a:lstStyle/>
+          <a:p>
+            <a:r>
+              <a:rPr lang="en-US" altLang="zh-CN" sz="1200">
+                <a:solidFill>
+                  <a:schemeClr val="bg1"/>
+                </a:solidFill>
+                <a:latin typeface="Poppins" panose="00000500000000000000" pitchFamily="2" charset="0"/>
+                <a:cs typeface="Poppins" panose="00000500000000000000" pitchFamily="2" charset="0"/>
+              </a:rPr>
+              <a:t>40%</a:t>
+            </a:r>
+            <a:endParaRPr lang="zh-CN" altLang="en-US" sz="1200">
+              <a:solidFill>
+                <a:schemeClr val="bg1"/>
+              </a:solidFill>
+              <a:latin typeface="Poppins" panose="00000500000000000000" pitchFamily="2" charset="0"/>
+              <a:cs typeface="Poppins" panose="00000500000000000000" pitchFamily="2" charset="0"/>
+            </a:endParaRPr>
+          </a:p>
+        </p:txBody>
+      </p:sp>
+      <p:sp>
+        <p:nvSpPr>
+          <p:cNvPr id="11" name="文本框 10">
+            <a:extLst>
+              <a:ext uri="{FF2B5EF4-FFF2-40B4-BE49-F238E27FC236}">
+                <a16:creationId xmlns:a16="http://schemas.microsoft.com/office/drawing/2014/main" id="{9D2433A2-2688-D06B-77ED-F2DBF6D27DA1}"/>
+              </a:ext>
+            </a:extLst>
+          </p:cNvPr>
+          <p:cNvSpPr txBox="1"/>
+          <p:nvPr/>
+        </p:nvSpPr>
+        <p:spPr>
+          <a:xfrm>
+            <a:off x="4297473" y="2309964"/>
+            <a:ext cx="476412" cy="276999"/>
+          </a:xfrm>
+          <a:prstGeom prst="rect">
+            <a:avLst/>
+          </a:prstGeom>
+          <a:noFill/>
+        </p:spPr>
+        <p:txBody>
+          <a:bodyPr wrap="none" rtlCol="0">
+            <a:spAutoFit/>
+          </a:bodyPr>
+          <a:lstStyle/>
+          <a:p>
+            <a:r>
+              <a:rPr lang="en-US" altLang="zh-CN" sz="1200">
+                <a:solidFill>
+                  <a:schemeClr val="bg1"/>
+                </a:solidFill>
+                <a:latin typeface="Poppins" panose="00000500000000000000" pitchFamily="2" charset="0"/>
+                <a:cs typeface="Poppins" panose="00000500000000000000" pitchFamily="2" charset="0"/>
+              </a:rPr>
+              <a:t>60%</a:t>
+            </a:r>
+            <a:endParaRPr lang="zh-CN" altLang="en-US" sz="1200">
+              <a:solidFill>
+                <a:schemeClr val="bg1"/>
+              </a:solidFill>
+              <a:latin typeface="Poppins" panose="00000500000000000000" pitchFamily="2" charset="0"/>
+              <a:cs typeface="Poppins" panose="00000500000000000000" pitchFamily="2" charset="0"/>
+            </a:endParaRPr>
+          </a:p>
+        </p:txBody>
+      </p:sp>
+    </p:spTree>
+    <p:extLst>
+      <p:ext uri="{BB962C8B-B14F-4D97-AF65-F5344CB8AC3E}">
+        <p14:creationId xmlns:p14="http://schemas.microsoft.com/office/powerpoint/2010/main" val="1843053738"/>
+      </p:ext>
+    </p:extLst>
+  </p:cSld>
+  <p:clrMapOvr>
+    <a:masterClrMapping/>
+  </p:clrMapOvr>
+</p:sld>
+</file>
+
+<file path=ppt/slides/slide21.xml><?xml version="1.0" encoding="utf-8"?>
 <p:sld xmlns:a="http://schemas.openxmlformats.org/drawingml/2006/main" xmlns:r="http://schemas.openxmlformats.org/officeDocument/2006/relationships" xmlns:p="http://schemas.openxmlformats.org/presentationml/2006/main">
   <p:cSld>
     <p:spTree>
@@ -17022,7 +18102,7 @@
 </p:sld>
 </file>
 
-<file path=ppt/slides/slide21.xml><?xml version="1.0" encoding="utf-8"?>
+<file path=ppt/slides/slide22.xml><?xml version="1.0" encoding="utf-8"?>
 <p:sld xmlns:a="http://schemas.openxmlformats.org/drawingml/2006/main" xmlns:r="http://schemas.openxmlformats.org/officeDocument/2006/relationships" xmlns:p="http://schemas.openxmlformats.org/presentationml/2006/main">
   <p:cSld>
     <p:spTree>
@@ -18265,7 +19345,7 @@
 </p:sld>
 </file>
 
-<file path=ppt/slides/slide22.xml><?xml version="1.0" encoding="utf-8"?>
+<file path=ppt/slides/slide23.xml><?xml version="1.0" encoding="utf-8"?>
 <p:sld xmlns:a="http://schemas.openxmlformats.org/drawingml/2006/main" xmlns:r="http://schemas.openxmlformats.org/officeDocument/2006/relationships" xmlns:p="http://schemas.openxmlformats.org/presentationml/2006/main">
   <p:cSld>
     <p:spTree>
@@ -19938,7 +21018,7 @@
 </p:sld>
 </file>
 
-<file path=ppt/slides/slide23.xml><?xml version="1.0" encoding="utf-8"?>
+<file path=ppt/slides/slide24.xml><?xml version="1.0" encoding="utf-8"?>
 <p:sld xmlns:a="http://schemas.openxmlformats.org/drawingml/2006/main" xmlns:r="http://schemas.openxmlformats.org/officeDocument/2006/relationships" xmlns:p="http://schemas.openxmlformats.org/presentationml/2006/main">
   <p:cSld>
     <p:spTree>
@@ -21190,7 +22270,7 @@
 </p:sld>
 </file>
 
-<file path=ppt/slides/slide24.xml><?xml version="1.0" encoding="utf-8"?>
+<file path=ppt/slides/slide25.xml><?xml version="1.0" encoding="utf-8"?>
 <p:sld xmlns:a="http://schemas.openxmlformats.org/drawingml/2006/main" xmlns:r="http://schemas.openxmlformats.org/officeDocument/2006/relationships" xmlns:p="http://schemas.openxmlformats.org/presentationml/2006/main">
   <p:cSld>
     <p:spTree>
@@ -22313,7 +23393,7 @@
 </p:sld>
 </file>
 
-<file path=ppt/slides/slide25.xml><?xml version="1.0" encoding="utf-8"?>
+<file path=ppt/slides/slide26.xml><?xml version="1.0" encoding="utf-8"?>
 <p:sld xmlns:a="http://schemas.openxmlformats.org/drawingml/2006/main" xmlns:r="http://schemas.openxmlformats.org/officeDocument/2006/relationships" xmlns:p="http://schemas.openxmlformats.org/presentationml/2006/main">
   <p:cSld>
     <p:spTree>
@@ -23676,7 +24756,7 @@
 </p:sld>
 </file>
 
-<file path=ppt/slides/slide26.xml><?xml version="1.0" encoding="utf-8"?>
+<file path=ppt/slides/slide27.xml><?xml version="1.0" encoding="utf-8"?>
 <p:sld xmlns:a="http://schemas.openxmlformats.org/drawingml/2006/main" xmlns:r="http://schemas.openxmlformats.org/officeDocument/2006/relationships" xmlns:p="http://schemas.openxmlformats.org/presentationml/2006/main">
   <p:cSld>
     <p:spTree>
@@ -25052,7 +26132,7 @@
 </p:sld>
 </file>
 
-<file path=ppt/slides/slide27.xml><?xml version="1.0" encoding="utf-8"?>
+<file path=ppt/slides/slide28.xml><?xml version="1.0" encoding="utf-8"?>
 <p:sld xmlns:a="http://schemas.openxmlformats.org/drawingml/2006/main" xmlns:r="http://schemas.openxmlformats.org/officeDocument/2006/relationships" xmlns:p="http://schemas.openxmlformats.org/presentationml/2006/main">
   <p:cSld>
     <p:spTree>
@@ -26249,7 +27329,7 @@
 </p:sld>
 </file>
 
-<file path=ppt/slides/slide28.xml><?xml version="1.0" encoding="utf-8"?>
+<file path=ppt/slides/slide29.xml><?xml version="1.0" encoding="utf-8"?>
 <p:sld xmlns:a="http://schemas.openxmlformats.org/drawingml/2006/main" xmlns:r="http://schemas.openxmlformats.org/officeDocument/2006/relationships" xmlns:p="http://schemas.openxmlformats.org/presentationml/2006/main">
   <p:cSld>
     <p:spTree>
@@ -26300,409 +27380,6 @@
     <p:extLst>
       <p:ext uri="{BB962C8B-B14F-4D97-AF65-F5344CB8AC3E}">
         <p14:creationId xmlns:p14="http://schemas.microsoft.com/office/powerpoint/2010/main" val="2672122669"/>
-      </p:ext>
-    </p:extLst>
-  </p:cSld>
-  <p:clrMapOvr>
-    <a:masterClrMapping/>
-  </p:clrMapOvr>
-</p:sld>
-</file>
-
-<file path=ppt/slides/slide29.xml><?xml version="1.0" encoding="utf-8"?>
-<p:sld xmlns:a="http://schemas.openxmlformats.org/drawingml/2006/main" xmlns:r="http://schemas.openxmlformats.org/officeDocument/2006/relationships" xmlns:p="http://schemas.openxmlformats.org/presentationml/2006/main">
-  <p:cSld>
-    <p:spTree>
-      <p:nvGrpSpPr>
-        <p:cNvPr id="1" name=""/>
-        <p:cNvGrpSpPr/>
-        <p:nvPr/>
-      </p:nvGrpSpPr>
-      <p:grpSpPr>
-        <a:xfrm>
-          <a:off x="0" y="0"/>
-          <a:ext cx="0" cy="0"/>
-          <a:chOff x="0" y="0"/>
-          <a:chExt cx="0" cy="0"/>
-        </a:xfrm>
-      </p:grpSpPr>
-      <p:sp>
-        <p:nvSpPr>
-          <p:cNvPr id="2" name="矩形: 圆角 1">
-            <a:extLst>
-              <a:ext uri="{FF2B5EF4-FFF2-40B4-BE49-F238E27FC236}">
-                <a16:creationId xmlns:a16="http://schemas.microsoft.com/office/drawing/2014/main" id="{DE06BA0C-6283-91C4-F4BA-E09E7F3139E7}"/>
-              </a:ext>
-            </a:extLst>
-          </p:cNvPr>
-          <p:cNvSpPr/>
-          <p:nvPr/>
-        </p:nvSpPr>
-        <p:spPr>
-          <a:xfrm>
-            <a:off x="3681691" y="2836100"/>
-            <a:ext cx="648000" cy="216000"/>
-          </a:xfrm>
-          <a:prstGeom prst="roundRect">
-            <a:avLst/>
-          </a:prstGeom>
-          <a:noFill/>
-          <a:ln w="12700">
-            <a:noFill/>
-          </a:ln>
-        </p:spPr>
-        <p:style>
-          <a:lnRef idx="2">
-            <a:schemeClr val="accent1">
-              <a:shade val="15000"/>
-            </a:schemeClr>
-          </a:lnRef>
-          <a:fillRef idx="1">
-            <a:schemeClr val="accent1"/>
-          </a:fillRef>
-          <a:effectRef idx="0">
-            <a:schemeClr val="accent1"/>
-          </a:effectRef>
-          <a:fontRef idx="minor">
-            <a:schemeClr val="lt1"/>
-          </a:fontRef>
-        </p:style>
-        <p:txBody>
-          <a:bodyPr rtlCol="0" anchor="ctr"/>
-          <a:lstStyle/>
-          <a:p>
-            <a:pPr algn="ctr"/>
-            <a:r>
-              <a:rPr lang="en-US" altLang="zh-CN" sz="800">
-                <a:solidFill>
-                  <a:sysClr val="windowText" lastClr="000000"/>
-                </a:solidFill>
-                <a:latin typeface="Quicksand Medium" panose="00000600000000000000" pitchFamily="2" charset="0"/>
-              </a:rPr>
-              <a:t>property</a:t>
-            </a:r>
-            <a:endParaRPr lang="zh-CN" altLang="en-US" sz="800">
-              <a:solidFill>
-                <a:sysClr val="windowText" lastClr="000000"/>
-              </a:solidFill>
-              <a:latin typeface="Quicksand Medium" panose="00000600000000000000" pitchFamily="2" charset="0"/>
-            </a:endParaRPr>
-          </a:p>
-        </p:txBody>
-      </p:sp>
-      <p:sp>
-        <p:nvSpPr>
-          <p:cNvPr id="3" name="文本框 2">
-            <a:extLst>
-              <a:ext uri="{FF2B5EF4-FFF2-40B4-BE49-F238E27FC236}">
-                <a16:creationId xmlns:a16="http://schemas.microsoft.com/office/drawing/2014/main" id="{1BF4DFA0-A45B-A793-3635-62C2BCB7B7E5}"/>
-              </a:ext>
-            </a:extLst>
-          </p:cNvPr>
-          <p:cNvSpPr txBox="1"/>
-          <p:nvPr/>
-        </p:nvSpPr>
-        <p:spPr>
-          <a:xfrm>
-            <a:off x="3733800" y="2152650"/>
-            <a:ext cx="1204176" cy="276999"/>
-          </a:xfrm>
-          <a:prstGeom prst="rect">
-            <a:avLst/>
-          </a:prstGeom>
-          <a:noFill/>
-        </p:spPr>
-        <p:txBody>
-          <a:bodyPr wrap="none" rtlCol="0">
-            <a:spAutoFit/>
-          </a:bodyPr>
-          <a:lstStyle/>
-          <a:p>
-            <a:r>
-              <a:rPr lang="en-US" altLang="zh-CN" sz="1200">
-                <a:latin typeface="Quicksand Medium" panose="00000600000000000000" pitchFamily="2" charset="0"/>
-              </a:rPr>
-              <a:t>width : 1024px</a:t>
-            </a:r>
-            <a:endParaRPr lang="zh-CN" altLang="en-US" sz="1200">
-              <a:latin typeface="Quicksand Medium" panose="00000600000000000000" pitchFamily="2" charset="0"/>
-            </a:endParaRPr>
-          </a:p>
-        </p:txBody>
-      </p:sp>
-      <p:sp>
-        <p:nvSpPr>
-          <p:cNvPr id="4" name="矩形: 圆角 3">
-            <a:extLst>
-              <a:ext uri="{FF2B5EF4-FFF2-40B4-BE49-F238E27FC236}">
-                <a16:creationId xmlns:a16="http://schemas.microsoft.com/office/drawing/2014/main" id="{C7735414-9923-6A1B-5E08-61B1E5335642}"/>
-              </a:ext>
-            </a:extLst>
-          </p:cNvPr>
-          <p:cNvSpPr/>
-          <p:nvPr/>
-        </p:nvSpPr>
-        <p:spPr>
-          <a:xfrm>
-            <a:off x="4265891" y="2836100"/>
-            <a:ext cx="504000" cy="216000"/>
-          </a:xfrm>
-          <a:prstGeom prst="roundRect">
-            <a:avLst/>
-          </a:prstGeom>
-          <a:noFill/>
-          <a:ln w="12700">
-            <a:noFill/>
-          </a:ln>
-        </p:spPr>
-        <p:style>
-          <a:lnRef idx="2">
-            <a:schemeClr val="accent1">
-              <a:shade val="15000"/>
-            </a:schemeClr>
-          </a:lnRef>
-          <a:fillRef idx="1">
-            <a:schemeClr val="accent1"/>
-          </a:fillRef>
-          <a:effectRef idx="0">
-            <a:schemeClr val="accent1"/>
-          </a:effectRef>
-          <a:fontRef idx="minor">
-            <a:schemeClr val="lt1"/>
-          </a:fontRef>
-        </p:style>
-        <p:txBody>
-          <a:bodyPr rtlCol="0" anchor="ctr"/>
-          <a:lstStyle/>
-          <a:p>
-            <a:pPr algn="ctr"/>
-            <a:r>
-              <a:rPr lang="en-US" altLang="zh-CN" sz="800">
-                <a:solidFill>
-                  <a:sysClr val="windowText" lastClr="000000"/>
-                </a:solidFill>
-                <a:latin typeface="Quicksand Medium" panose="00000600000000000000" pitchFamily="2" charset="0"/>
-              </a:rPr>
-              <a:t>value</a:t>
-            </a:r>
-            <a:endParaRPr lang="zh-CN" altLang="en-US" sz="800">
-              <a:solidFill>
-                <a:sysClr val="windowText" lastClr="000000"/>
-              </a:solidFill>
-              <a:latin typeface="Quicksand Medium" panose="00000600000000000000" pitchFamily="2" charset="0"/>
-            </a:endParaRPr>
-          </a:p>
-        </p:txBody>
-      </p:sp>
-      <p:sp>
-        <p:nvSpPr>
-          <p:cNvPr id="5" name="矩形: 圆角 4">
-            <a:extLst>
-              <a:ext uri="{FF2B5EF4-FFF2-40B4-BE49-F238E27FC236}">
-                <a16:creationId xmlns:a16="http://schemas.microsoft.com/office/drawing/2014/main" id="{F7AAF0E5-DEEE-811D-1957-33B4BEA1BE4F}"/>
-              </a:ext>
-            </a:extLst>
-          </p:cNvPr>
-          <p:cNvSpPr/>
-          <p:nvPr/>
-        </p:nvSpPr>
-        <p:spPr>
-          <a:xfrm>
-            <a:off x="4513541" y="2836100"/>
-            <a:ext cx="504000" cy="216000"/>
-          </a:xfrm>
-          <a:prstGeom prst="roundRect">
-            <a:avLst/>
-          </a:prstGeom>
-          <a:noFill/>
-          <a:ln w="12700">
-            <a:noFill/>
-          </a:ln>
-        </p:spPr>
-        <p:style>
-          <a:lnRef idx="2">
-            <a:schemeClr val="accent1">
-              <a:shade val="15000"/>
-            </a:schemeClr>
-          </a:lnRef>
-          <a:fillRef idx="1">
-            <a:schemeClr val="accent1"/>
-          </a:fillRef>
-          <a:effectRef idx="0">
-            <a:schemeClr val="accent1"/>
-          </a:effectRef>
-          <a:fontRef idx="minor">
-            <a:schemeClr val="lt1"/>
-          </a:fontRef>
-        </p:style>
-        <p:txBody>
-          <a:bodyPr rtlCol="0" anchor="ctr"/>
-          <a:lstStyle/>
-          <a:p>
-            <a:pPr algn="ctr"/>
-            <a:r>
-              <a:rPr lang="en-US" altLang="zh-CN" sz="800">
-                <a:solidFill>
-                  <a:sysClr val="windowText" lastClr="000000"/>
-                </a:solidFill>
-                <a:latin typeface="Quicksand Medium" panose="00000600000000000000" pitchFamily="2" charset="0"/>
-              </a:rPr>
-              <a:t>unit</a:t>
-            </a:r>
-            <a:endParaRPr lang="zh-CN" altLang="en-US" sz="800">
-              <a:solidFill>
-                <a:sysClr val="windowText" lastClr="000000"/>
-              </a:solidFill>
-              <a:latin typeface="Quicksand Medium" panose="00000600000000000000" pitchFamily="2" charset="0"/>
-            </a:endParaRPr>
-          </a:p>
-        </p:txBody>
-      </p:sp>
-      <p:cxnSp>
-        <p:nvCxnSpPr>
-          <p:cNvPr id="9" name="直接箭头连接符 8">
-            <a:extLst>
-              <a:ext uri="{FF2B5EF4-FFF2-40B4-BE49-F238E27FC236}">
-                <a16:creationId xmlns:a16="http://schemas.microsoft.com/office/drawing/2014/main" id="{43AA0F72-759C-7EAB-A6C6-60FEE7FFD186}"/>
-              </a:ext>
-            </a:extLst>
-          </p:cNvPr>
-          <p:cNvCxnSpPr>
-            <a:cxnSpLocks/>
-          </p:cNvCxnSpPr>
-          <p:nvPr/>
-        </p:nvCxnSpPr>
-        <p:spPr>
-          <a:xfrm flipV="1">
-            <a:off x="4003541" y="2432050"/>
-            <a:ext cx="0" cy="360000"/>
-          </a:xfrm>
-          <a:prstGeom prst="straightConnector1">
-            <a:avLst/>
-          </a:prstGeom>
-          <a:ln>
-            <a:solidFill>
-              <a:schemeClr val="tx1">
-                <a:lumMod val="65000"/>
-                <a:lumOff val="35000"/>
-              </a:schemeClr>
-            </a:solidFill>
-            <a:tailEnd type="triangle"/>
-          </a:ln>
-        </p:spPr>
-        <p:style>
-          <a:lnRef idx="1">
-            <a:schemeClr val="accent1"/>
-          </a:lnRef>
-          <a:fillRef idx="0">
-            <a:schemeClr val="accent1"/>
-          </a:fillRef>
-          <a:effectRef idx="0">
-            <a:schemeClr val="accent1"/>
-          </a:effectRef>
-          <a:fontRef idx="minor">
-            <a:schemeClr val="tx1"/>
-          </a:fontRef>
-        </p:style>
-      </p:cxnSp>
-      <p:cxnSp>
-        <p:nvCxnSpPr>
-          <p:cNvPr id="10" name="直接箭头连接符 9">
-            <a:extLst>
-              <a:ext uri="{FF2B5EF4-FFF2-40B4-BE49-F238E27FC236}">
-                <a16:creationId xmlns:a16="http://schemas.microsoft.com/office/drawing/2014/main" id="{FA908F67-2343-A19C-6EA2-70D4CBB6210B}"/>
-              </a:ext>
-            </a:extLst>
-          </p:cNvPr>
-          <p:cNvCxnSpPr>
-            <a:cxnSpLocks/>
-          </p:cNvCxnSpPr>
-          <p:nvPr/>
-        </p:nvCxnSpPr>
-        <p:spPr>
-          <a:xfrm flipV="1">
-            <a:off x="4517891" y="2432050"/>
-            <a:ext cx="0" cy="360000"/>
-          </a:xfrm>
-          <a:prstGeom prst="straightConnector1">
-            <a:avLst/>
-          </a:prstGeom>
-          <a:ln>
-            <a:solidFill>
-              <a:schemeClr val="tx1">
-                <a:lumMod val="65000"/>
-                <a:lumOff val="35000"/>
-              </a:schemeClr>
-            </a:solidFill>
-            <a:tailEnd type="triangle"/>
-          </a:ln>
-        </p:spPr>
-        <p:style>
-          <a:lnRef idx="1">
-            <a:schemeClr val="accent1"/>
-          </a:lnRef>
-          <a:fillRef idx="0">
-            <a:schemeClr val="accent1"/>
-          </a:fillRef>
-          <a:effectRef idx="0">
-            <a:schemeClr val="accent1"/>
-          </a:effectRef>
-          <a:fontRef idx="minor">
-            <a:schemeClr val="tx1"/>
-          </a:fontRef>
-        </p:style>
-      </p:cxnSp>
-      <p:cxnSp>
-        <p:nvCxnSpPr>
-          <p:cNvPr id="11" name="直接箭头连接符 10">
-            <a:extLst>
-              <a:ext uri="{FF2B5EF4-FFF2-40B4-BE49-F238E27FC236}">
-                <a16:creationId xmlns:a16="http://schemas.microsoft.com/office/drawing/2014/main" id="{F2B6BAE4-E058-A8A3-0AAE-176FEB20EE1B}"/>
-              </a:ext>
-            </a:extLst>
-          </p:cNvPr>
-          <p:cNvCxnSpPr>
-            <a:cxnSpLocks/>
-          </p:cNvCxnSpPr>
-          <p:nvPr/>
-        </p:nvCxnSpPr>
-        <p:spPr>
-          <a:xfrm flipV="1">
-            <a:off x="4765541" y="2432050"/>
-            <a:ext cx="0" cy="360000"/>
-          </a:xfrm>
-          <a:prstGeom prst="straightConnector1">
-            <a:avLst/>
-          </a:prstGeom>
-          <a:ln>
-            <a:solidFill>
-              <a:schemeClr val="tx1">
-                <a:lumMod val="65000"/>
-                <a:lumOff val="35000"/>
-              </a:schemeClr>
-            </a:solidFill>
-            <a:tailEnd type="triangle"/>
-          </a:ln>
-        </p:spPr>
-        <p:style>
-          <a:lnRef idx="1">
-            <a:schemeClr val="accent1"/>
-          </a:lnRef>
-          <a:fillRef idx="0">
-            <a:schemeClr val="accent1"/>
-          </a:fillRef>
-          <a:effectRef idx="0">
-            <a:schemeClr val="accent1"/>
-          </a:effectRef>
-          <a:fontRef idx="minor">
-            <a:schemeClr val="tx1"/>
-          </a:fontRef>
-        </p:style>
-      </p:cxnSp>
-    </p:spTree>
-    <p:extLst>
-      <p:ext uri="{BB962C8B-B14F-4D97-AF65-F5344CB8AC3E}">
-        <p14:creationId xmlns:p14="http://schemas.microsoft.com/office/powerpoint/2010/main" val="979191356"/>
       </p:ext>
     </p:extLst>
   </p:cSld>
@@ -27483,6 +28160,409 @@
 </file>
 
 <file path=ppt/slides/slide30.xml><?xml version="1.0" encoding="utf-8"?>
+<p:sld xmlns:a="http://schemas.openxmlformats.org/drawingml/2006/main" xmlns:r="http://schemas.openxmlformats.org/officeDocument/2006/relationships" xmlns:p="http://schemas.openxmlformats.org/presentationml/2006/main">
+  <p:cSld>
+    <p:spTree>
+      <p:nvGrpSpPr>
+        <p:cNvPr id="1" name=""/>
+        <p:cNvGrpSpPr/>
+        <p:nvPr/>
+      </p:nvGrpSpPr>
+      <p:grpSpPr>
+        <a:xfrm>
+          <a:off x="0" y="0"/>
+          <a:ext cx="0" cy="0"/>
+          <a:chOff x="0" y="0"/>
+          <a:chExt cx="0" cy="0"/>
+        </a:xfrm>
+      </p:grpSpPr>
+      <p:sp>
+        <p:nvSpPr>
+          <p:cNvPr id="2" name="矩形: 圆角 1">
+            <a:extLst>
+              <a:ext uri="{FF2B5EF4-FFF2-40B4-BE49-F238E27FC236}">
+                <a16:creationId xmlns:a16="http://schemas.microsoft.com/office/drawing/2014/main" id="{DE06BA0C-6283-91C4-F4BA-E09E7F3139E7}"/>
+              </a:ext>
+            </a:extLst>
+          </p:cNvPr>
+          <p:cNvSpPr/>
+          <p:nvPr/>
+        </p:nvSpPr>
+        <p:spPr>
+          <a:xfrm>
+            <a:off x="3681691" y="2836100"/>
+            <a:ext cx="648000" cy="216000"/>
+          </a:xfrm>
+          <a:prstGeom prst="roundRect">
+            <a:avLst/>
+          </a:prstGeom>
+          <a:noFill/>
+          <a:ln w="12700">
+            <a:noFill/>
+          </a:ln>
+        </p:spPr>
+        <p:style>
+          <a:lnRef idx="2">
+            <a:schemeClr val="accent1">
+              <a:shade val="15000"/>
+            </a:schemeClr>
+          </a:lnRef>
+          <a:fillRef idx="1">
+            <a:schemeClr val="accent1"/>
+          </a:fillRef>
+          <a:effectRef idx="0">
+            <a:schemeClr val="accent1"/>
+          </a:effectRef>
+          <a:fontRef idx="minor">
+            <a:schemeClr val="lt1"/>
+          </a:fontRef>
+        </p:style>
+        <p:txBody>
+          <a:bodyPr rtlCol="0" anchor="ctr"/>
+          <a:lstStyle/>
+          <a:p>
+            <a:pPr algn="ctr"/>
+            <a:r>
+              <a:rPr lang="en-US" altLang="zh-CN" sz="800">
+                <a:solidFill>
+                  <a:sysClr val="windowText" lastClr="000000"/>
+                </a:solidFill>
+                <a:latin typeface="Quicksand Medium" panose="00000600000000000000" pitchFamily="2" charset="0"/>
+              </a:rPr>
+              <a:t>property</a:t>
+            </a:r>
+            <a:endParaRPr lang="zh-CN" altLang="en-US" sz="800">
+              <a:solidFill>
+                <a:sysClr val="windowText" lastClr="000000"/>
+              </a:solidFill>
+              <a:latin typeface="Quicksand Medium" panose="00000600000000000000" pitchFamily="2" charset="0"/>
+            </a:endParaRPr>
+          </a:p>
+        </p:txBody>
+      </p:sp>
+      <p:sp>
+        <p:nvSpPr>
+          <p:cNvPr id="3" name="文本框 2">
+            <a:extLst>
+              <a:ext uri="{FF2B5EF4-FFF2-40B4-BE49-F238E27FC236}">
+                <a16:creationId xmlns:a16="http://schemas.microsoft.com/office/drawing/2014/main" id="{1BF4DFA0-A45B-A793-3635-62C2BCB7B7E5}"/>
+              </a:ext>
+            </a:extLst>
+          </p:cNvPr>
+          <p:cNvSpPr txBox="1"/>
+          <p:nvPr/>
+        </p:nvSpPr>
+        <p:spPr>
+          <a:xfrm>
+            <a:off x="3733800" y="2152650"/>
+            <a:ext cx="1204176" cy="276999"/>
+          </a:xfrm>
+          <a:prstGeom prst="rect">
+            <a:avLst/>
+          </a:prstGeom>
+          <a:noFill/>
+        </p:spPr>
+        <p:txBody>
+          <a:bodyPr wrap="none" rtlCol="0">
+            <a:spAutoFit/>
+          </a:bodyPr>
+          <a:lstStyle/>
+          <a:p>
+            <a:r>
+              <a:rPr lang="en-US" altLang="zh-CN" sz="1200">
+                <a:latin typeface="Quicksand Medium" panose="00000600000000000000" pitchFamily="2" charset="0"/>
+              </a:rPr>
+              <a:t>width : 1024px</a:t>
+            </a:r>
+            <a:endParaRPr lang="zh-CN" altLang="en-US" sz="1200">
+              <a:latin typeface="Quicksand Medium" panose="00000600000000000000" pitchFamily="2" charset="0"/>
+            </a:endParaRPr>
+          </a:p>
+        </p:txBody>
+      </p:sp>
+      <p:sp>
+        <p:nvSpPr>
+          <p:cNvPr id="4" name="矩形: 圆角 3">
+            <a:extLst>
+              <a:ext uri="{FF2B5EF4-FFF2-40B4-BE49-F238E27FC236}">
+                <a16:creationId xmlns:a16="http://schemas.microsoft.com/office/drawing/2014/main" id="{C7735414-9923-6A1B-5E08-61B1E5335642}"/>
+              </a:ext>
+            </a:extLst>
+          </p:cNvPr>
+          <p:cNvSpPr/>
+          <p:nvPr/>
+        </p:nvSpPr>
+        <p:spPr>
+          <a:xfrm>
+            <a:off x="4265891" y="2836100"/>
+            <a:ext cx="504000" cy="216000"/>
+          </a:xfrm>
+          <a:prstGeom prst="roundRect">
+            <a:avLst/>
+          </a:prstGeom>
+          <a:noFill/>
+          <a:ln w="12700">
+            <a:noFill/>
+          </a:ln>
+        </p:spPr>
+        <p:style>
+          <a:lnRef idx="2">
+            <a:schemeClr val="accent1">
+              <a:shade val="15000"/>
+            </a:schemeClr>
+          </a:lnRef>
+          <a:fillRef idx="1">
+            <a:schemeClr val="accent1"/>
+          </a:fillRef>
+          <a:effectRef idx="0">
+            <a:schemeClr val="accent1"/>
+          </a:effectRef>
+          <a:fontRef idx="minor">
+            <a:schemeClr val="lt1"/>
+          </a:fontRef>
+        </p:style>
+        <p:txBody>
+          <a:bodyPr rtlCol="0" anchor="ctr"/>
+          <a:lstStyle/>
+          <a:p>
+            <a:pPr algn="ctr"/>
+            <a:r>
+              <a:rPr lang="en-US" altLang="zh-CN" sz="800">
+                <a:solidFill>
+                  <a:sysClr val="windowText" lastClr="000000"/>
+                </a:solidFill>
+                <a:latin typeface="Quicksand Medium" panose="00000600000000000000" pitchFamily="2" charset="0"/>
+              </a:rPr>
+              <a:t>value</a:t>
+            </a:r>
+            <a:endParaRPr lang="zh-CN" altLang="en-US" sz="800">
+              <a:solidFill>
+                <a:sysClr val="windowText" lastClr="000000"/>
+              </a:solidFill>
+              <a:latin typeface="Quicksand Medium" panose="00000600000000000000" pitchFamily="2" charset="0"/>
+            </a:endParaRPr>
+          </a:p>
+        </p:txBody>
+      </p:sp>
+      <p:sp>
+        <p:nvSpPr>
+          <p:cNvPr id="5" name="矩形: 圆角 4">
+            <a:extLst>
+              <a:ext uri="{FF2B5EF4-FFF2-40B4-BE49-F238E27FC236}">
+                <a16:creationId xmlns:a16="http://schemas.microsoft.com/office/drawing/2014/main" id="{F7AAF0E5-DEEE-811D-1957-33B4BEA1BE4F}"/>
+              </a:ext>
+            </a:extLst>
+          </p:cNvPr>
+          <p:cNvSpPr/>
+          <p:nvPr/>
+        </p:nvSpPr>
+        <p:spPr>
+          <a:xfrm>
+            <a:off x="4513541" y="2836100"/>
+            <a:ext cx="504000" cy="216000"/>
+          </a:xfrm>
+          <a:prstGeom prst="roundRect">
+            <a:avLst/>
+          </a:prstGeom>
+          <a:noFill/>
+          <a:ln w="12700">
+            <a:noFill/>
+          </a:ln>
+        </p:spPr>
+        <p:style>
+          <a:lnRef idx="2">
+            <a:schemeClr val="accent1">
+              <a:shade val="15000"/>
+            </a:schemeClr>
+          </a:lnRef>
+          <a:fillRef idx="1">
+            <a:schemeClr val="accent1"/>
+          </a:fillRef>
+          <a:effectRef idx="0">
+            <a:schemeClr val="accent1"/>
+          </a:effectRef>
+          <a:fontRef idx="minor">
+            <a:schemeClr val="lt1"/>
+          </a:fontRef>
+        </p:style>
+        <p:txBody>
+          <a:bodyPr rtlCol="0" anchor="ctr"/>
+          <a:lstStyle/>
+          <a:p>
+            <a:pPr algn="ctr"/>
+            <a:r>
+              <a:rPr lang="en-US" altLang="zh-CN" sz="800">
+                <a:solidFill>
+                  <a:sysClr val="windowText" lastClr="000000"/>
+                </a:solidFill>
+                <a:latin typeface="Quicksand Medium" panose="00000600000000000000" pitchFamily="2" charset="0"/>
+              </a:rPr>
+              <a:t>unit</a:t>
+            </a:r>
+            <a:endParaRPr lang="zh-CN" altLang="en-US" sz="800">
+              <a:solidFill>
+                <a:sysClr val="windowText" lastClr="000000"/>
+              </a:solidFill>
+              <a:latin typeface="Quicksand Medium" panose="00000600000000000000" pitchFamily="2" charset="0"/>
+            </a:endParaRPr>
+          </a:p>
+        </p:txBody>
+      </p:sp>
+      <p:cxnSp>
+        <p:nvCxnSpPr>
+          <p:cNvPr id="9" name="直接箭头连接符 8">
+            <a:extLst>
+              <a:ext uri="{FF2B5EF4-FFF2-40B4-BE49-F238E27FC236}">
+                <a16:creationId xmlns:a16="http://schemas.microsoft.com/office/drawing/2014/main" id="{43AA0F72-759C-7EAB-A6C6-60FEE7FFD186}"/>
+              </a:ext>
+            </a:extLst>
+          </p:cNvPr>
+          <p:cNvCxnSpPr>
+            <a:cxnSpLocks/>
+          </p:cNvCxnSpPr>
+          <p:nvPr/>
+        </p:nvCxnSpPr>
+        <p:spPr>
+          <a:xfrm flipV="1">
+            <a:off x="4003541" y="2432050"/>
+            <a:ext cx="0" cy="360000"/>
+          </a:xfrm>
+          <a:prstGeom prst="straightConnector1">
+            <a:avLst/>
+          </a:prstGeom>
+          <a:ln>
+            <a:solidFill>
+              <a:schemeClr val="tx1">
+                <a:lumMod val="65000"/>
+                <a:lumOff val="35000"/>
+              </a:schemeClr>
+            </a:solidFill>
+            <a:tailEnd type="triangle"/>
+          </a:ln>
+        </p:spPr>
+        <p:style>
+          <a:lnRef idx="1">
+            <a:schemeClr val="accent1"/>
+          </a:lnRef>
+          <a:fillRef idx="0">
+            <a:schemeClr val="accent1"/>
+          </a:fillRef>
+          <a:effectRef idx="0">
+            <a:schemeClr val="accent1"/>
+          </a:effectRef>
+          <a:fontRef idx="minor">
+            <a:schemeClr val="tx1"/>
+          </a:fontRef>
+        </p:style>
+      </p:cxnSp>
+      <p:cxnSp>
+        <p:nvCxnSpPr>
+          <p:cNvPr id="10" name="直接箭头连接符 9">
+            <a:extLst>
+              <a:ext uri="{FF2B5EF4-FFF2-40B4-BE49-F238E27FC236}">
+                <a16:creationId xmlns:a16="http://schemas.microsoft.com/office/drawing/2014/main" id="{FA908F67-2343-A19C-6EA2-70D4CBB6210B}"/>
+              </a:ext>
+            </a:extLst>
+          </p:cNvPr>
+          <p:cNvCxnSpPr>
+            <a:cxnSpLocks/>
+          </p:cNvCxnSpPr>
+          <p:nvPr/>
+        </p:nvCxnSpPr>
+        <p:spPr>
+          <a:xfrm flipV="1">
+            <a:off x="4517891" y="2432050"/>
+            <a:ext cx="0" cy="360000"/>
+          </a:xfrm>
+          <a:prstGeom prst="straightConnector1">
+            <a:avLst/>
+          </a:prstGeom>
+          <a:ln>
+            <a:solidFill>
+              <a:schemeClr val="tx1">
+                <a:lumMod val="65000"/>
+                <a:lumOff val="35000"/>
+              </a:schemeClr>
+            </a:solidFill>
+            <a:tailEnd type="triangle"/>
+          </a:ln>
+        </p:spPr>
+        <p:style>
+          <a:lnRef idx="1">
+            <a:schemeClr val="accent1"/>
+          </a:lnRef>
+          <a:fillRef idx="0">
+            <a:schemeClr val="accent1"/>
+          </a:fillRef>
+          <a:effectRef idx="0">
+            <a:schemeClr val="accent1"/>
+          </a:effectRef>
+          <a:fontRef idx="minor">
+            <a:schemeClr val="tx1"/>
+          </a:fontRef>
+        </p:style>
+      </p:cxnSp>
+      <p:cxnSp>
+        <p:nvCxnSpPr>
+          <p:cNvPr id="11" name="直接箭头连接符 10">
+            <a:extLst>
+              <a:ext uri="{FF2B5EF4-FFF2-40B4-BE49-F238E27FC236}">
+                <a16:creationId xmlns:a16="http://schemas.microsoft.com/office/drawing/2014/main" id="{F2B6BAE4-E058-A8A3-0AAE-176FEB20EE1B}"/>
+              </a:ext>
+            </a:extLst>
+          </p:cNvPr>
+          <p:cNvCxnSpPr>
+            <a:cxnSpLocks/>
+          </p:cNvCxnSpPr>
+          <p:nvPr/>
+        </p:nvCxnSpPr>
+        <p:spPr>
+          <a:xfrm flipV="1">
+            <a:off x="4765541" y="2432050"/>
+            <a:ext cx="0" cy="360000"/>
+          </a:xfrm>
+          <a:prstGeom prst="straightConnector1">
+            <a:avLst/>
+          </a:prstGeom>
+          <a:ln>
+            <a:solidFill>
+              <a:schemeClr val="tx1">
+                <a:lumMod val="65000"/>
+                <a:lumOff val="35000"/>
+              </a:schemeClr>
+            </a:solidFill>
+            <a:tailEnd type="triangle"/>
+          </a:ln>
+        </p:spPr>
+        <p:style>
+          <a:lnRef idx="1">
+            <a:schemeClr val="accent1"/>
+          </a:lnRef>
+          <a:fillRef idx="0">
+            <a:schemeClr val="accent1"/>
+          </a:fillRef>
+          <a:effectRef idx="0">
+            <a:schemeClr val="accent1"/>
+          </a:effectRef>
+          <a:fontRef idx="minor">
+            <a:schemeClr val="tx1"/>
+          </a:fontRef>
+        </p:style>
+      </p:cxnSp>
+    </p:spTree>
+    <p:extLst>
+      <p:ext uri="{BB962C8B-B14F-4D97-AF65-F5344CB8AC3E}">
+        <p14:creationId xmlns:p14="http://schemas.microsoft.com/office/powerpoint/2010/main" val="979191356"/>
+      </p:ext>
+    </p:extLst>
+  </p:cSld>
+  <p:clrMapOvr>
+    <a:masterClrMapping/>
+  </p:clrMapOvr>
+</p:sld>
+</file>
+
+<file path=ppt/slides/slide31.xml><?xml version="1.0" encoding="utf-8"?>
 <p:sld xmlns:a="http://schemas.openxmlformats.org/drawingml/2006/main" xmlns:r="http://schemas.openxmlformats.org/officeDocument/2006/relationships" xmlns:p="http://schemas.openxmlformats.org/presentationml/2006/main">
   <p:cSld>
     <p:spTree>
@@ -31453,6 +32533,3584 @@
       </p:grpSpPr>
       <p:sp>
         <p:nvSpPr>
+          <p:cNvPr id="3" name="矩形 2">
+            <a:extLst>
+              <a:ext uri="{FF2B5EF4-FFF2-40B4-BE49-F238E27FC236}">
+                <a16:creationId xmlns:a16="http://schemas.microsoft.com/office/drawing/2014/main" id="{7BFE180E-ABE5-8E60-4B59-6CA2D6B23612}"/>
+              </a:ext>
+            </a:extLst>
+          </p:cNvPr>
+          <p:cNvSpPr/>
+          <p:nvPr/>
+        </p:nvSpPr>
+        <p:spPr>
+          <a:xfrm>
+            <a:off x="1162062" y="941298"/>
+            <a:ext cx="1984550" cy="666914"/>
+          </a:xfrm>
+          <a:prstGeom prst="rect">
+            <a:avLst/>
+          </a:prstGeom>
+          <a:noFill/>
+        </p:spPr>
+        <p:style>
+          <a:lnRef idx="2">
+            <a:schemeClr val="accent1">
+              <a:shade val="15000"/>
+            </a:schemeClr>
+          </a:lnRef>
+          <a:fillRef idx="1">
+            <a:schemeClr val="accent1"/>
+          </a:fillRef>
+          <a:effectRef idx="0">
+            <a:schemeClr val="accent1"/>
+          </a:effectRef>
+          <a:fontRef idx="minor">
+            <a:schemeClr val="lt1"/>
+          </a:fontRef>
+        </p:style>
+        <p:txBody>
+          <a:bodyPr rtlCol="0" anchor="ctr"/>
+          <a:lstStyle/>
+          <a:p>
+            <a:pPr algn="ctr"/>
+            <a:endParaRPr lang="zh-CN" altLang="en-US"/>
+          </a:p>
+        </p:txBody>
+      </p:sp>
+      <p:grpSp>
+        <p:nvGrpSpPr>
+          <p:cNvPr id="28" name="组合 27">
+            <a:extLst>
+              <a:ext uri="{FF2B5EF4-FFF2-40B4-BE49-F238E27FC236}">
+                <a16:creationId xmlns:a16="http://schemas.microsoft.com/office/drawing/2014/main" id="{EEE51978-A443-A483-9810-F30672E49154}"/>
+              </a:ext>
+            </a:extLst>
+          </p:cNvPr>
+          <p:cNvGrpSpPr/>
+          <p:nvPr/>
+        </p:nvGrpSpPr>
+        <p:grpSpPr>
+          <a:xfrm>
+            <a:off x="1201985" y="1094755"/>
+            <a:ext cx="590549" cy="360000"/>
+            <a:chOff x="1385885" y="1017493"/>
+            <a:chExt cx="590549" cy="360000"/>
+          </a:xfrm>
+        </p:grpSpPr>
+        <p:pic>
+          <p:nvPicPr>
+            <p:cNvPr id="5" name="图形 4" descr="文档">
+              <a:extLst>
+                <a:ext uri="{FF2B5EF4-FFF2-40B4-BE49-F238E27FC236}">
+                  <a16:creationId xmlns:a16="http://schemas.microsoft.com/office/drawing/2014/main" id="{D592AA54-6817-6628-8E43-B1C0A007507B}"/>
+                </a:ext>
+              </a:extLst>
+            </p:cNvPr>
+            <p:cNvPicPr>
+              <a:picLocks noChangeAspect="1"/>
+            </p:cNvPicPr>
+            <p:nvPr/>
+          </p:nvPicPr>
+          <p:blipFill>
+            <a:blip r:embed="rId2">
+              <a:extLst>
+                <a:ext uri="{96DAC541-7B7A-43D3-8B79-37D633B846F1}">
+                  <asvg:svgBlip xmlns:asvg="http://schemas.microsoft.com/office/drawing/2016/SVG/main" r:embed="rId3"/>
+                </a:ext>
+              </a:extLst>
+            </a:blip>
+            <a:stretch>
+              <a:fillRect/>
+            </a:stretch>
+          </p:blipFill>
+          <p:spPr>
+            <a:xfrm>
+              <a:off x="1616434" y="1017493"/>
+              <a:ext cx="360000" cy="360000"/>
+            </a:xfrm>
+            <a:prstGeom prst="rect">
+              <a:avLst/>
+            </a:prstGeom>
+          </p:spPr>
+        </p:pic>
+        <p:sp>
+          <p:nvSpPr>
+            <p:cNvPr id="8" name="文本框 7">
+              <a:extLst>
+                <a:ext uri="{FF2B5EF4-FFF2-40B4-BE49-F238E27FC236}">
+                  <a16:creationId xmlns:a16="http://schemas.microsoft.com/office/drawing/2014/main" id="{106CC44C-DDBD-2221-C55E-AB74FEF9A77C}"/>
+                </a:ext>
+              </a:extLst>
+            </p:cNvPr>
+            <p:cNvSpPr txBox="1"/>
+            <p:nvPr/>
+          </p:nvSpPr>
+          <p:spPr>
+            <a:xfrm>
+              <a:off x="1385885" y="1058994"/>
+              <a:ext cx="370614" cy="276999"/>
+            </a:xfrm>
+            <a:prstGeom prst="rect">
+              <a:avLst/>
+            </a:prstGeom>
+            <a:noFill/>
+          </p:spPr>
+          <p:txBody>
+            <a:bodyPr wrap="none" rtlCol="0">
+              <a:spAutoFit/>
+            </a:bodyPr>
+            <a:lstStyle/>
+            <a:p>
+              <a:pPr algn="l"/>
+              <a:r>
+                <a:rPr lang="en-US" altLang="zh-CN" sz="1200" dirty="0">
+                  <a:solidFill>
+                    <a:srgbClr val="FF0000"/>
+                  </a:solidFill>
+                  <a:latin typeface="Courier New" panose="02070309020205020404" pitchFamily="49" charset="0"/>
+                  <a:ea typeface="微软雅黑" panose="020B0503020204020204" pitchFamily="34" charset="-122"/>
+                  <a:cs typeface="Courier New" panose="02070309020205020404" pitchFamily="49" charset="0"/>
+                </a:rPr>
+                <a:t>P1</a:t>
+              </a:r>
+              <a:endParaRPr lang="zh-CN" altLang="en-US" sz="1200" dirty="0">
+                <a:solidFill>
+                  <a:srgbClr val="FF0000"/>
+                </a:solidFill>
+                <a:latin typeface="Courier New" panose="02070309020205020404" pitchFamily="49" charset="0"/>
+                <a:ea typeface="微软雅黑" panose="020B0503020204020204" pitchFamily="34" charset="-122"/>
+                <a:cs typeface="Courier New" panose="02070309020205020404" pitchFamily="49" charset="0"/>
+              </a:endParaRPr>
+            </a:p>
+          </p:txBody>
+        </p:sp>
+      </p:grpSp>
+      <p:grpSp>
+        <p:nvGrpSpPr>
+          <p:cNvPr id="27" name="组合 26">
+            <a:extLst>
+              <a:ext uri="{FF2B5EF4-FFF2-40B4-BE49-F238E27FC236}">
+                <a16:creationId xmlns:a16="http://schemas.microsoft.com/office/drawing/2014/main" id="{EF8C590D-AE02-7479-0F90-FBBDFC7F636A}"/>
+              </a:ext>
+            </a:extLst>
+          </p:cNvPr>
+          <p:cNvGrpSpPr/>
+          <p:nvPr/>
+        </p:nvGrpSpPr>
+        <p:grpSpPr>
+          <a:xfrm>
+            <a:off x="1814238" y="1094755"/>
+            <a:ext cx="590549" cy="360000"/>
+            <a:chOff x="1890159" y="1017493"/>
+            <a:chExt cx="590549" cy="360000"/>
+          </a:xfrm>
+        </p:grpSpPr>
+        <p:pic>
+          <p:nvPicPr>
+            <p:cNvPr id="6" name="图形 5" descr="文档">
+              <a:extLst>
+                <a:ext uri="{FF2B5EF4-FFF2-40B4-BE49-F238E27FC236}">
+                  <a16:creationId xmlns:a16="http://schemas.microsoft.com/office/drawing/2014/main" id="{30029A1D-3142-A849-40F0-98C81931F497}"/>
+                </a:ext>
+              </a:extLst>
+            </p:cNvPr>
+            <p:cNvPicPr>
+              <a:picLocks noChangeAspect="1"/>
+            </p:cNvPicPr>
+            <p:nvPr/>
+          </p:nvPicPr>
+          <p:blipFill>
+            <a:blip r:embed="rId2">
+              <a:extLst>
+                <a:ext uri="{96DAC541-7B7A-43D3-8B79-37D633B846F1}">
+                  <asvg:svgBlip xmlns:asvg="http://schemas.microsoft.com/office/drawing/2016/SVG/main" r:embed="rId3"/>
+                </a:ext>
+              </a:extLst>
+            </a:blip>
+            <a:stretch>
+              <a:fillRect/>
+            </a:stretch>
+          </p:blipFill>
+          <p:spPr>
+            <a:xfrm>
+              <a:off x="2120708" y="1017493"/>
+              <a:ext cx="360000" cy="360000"/>
+            </a:xfrm>
+            <a:prstGeom prst="rect">
+              <a:avLst/>
+            </a:prstGeom>
+          </p:spPr>
+        </p:pic>
+        <p:sp>
+          <p:nvSpPr>
+            <p:cNvPr id="9" name="文本框 8">
+              <a:extLst>
+                <a:ext uri="{FF2B5EF4-FFF2-40B4-BE49-F238E27FC236}">
+                  <a16:creationId xmlns:a16="http://schemas.microsoft.com/office/drawing/2014/main" id="{C6AF8BFB-BC01-EA81-BBA3-2AEBB263CB35}"/>
+                </a:ext>
+              </a:extLst>
+            </p:cNvPr>
+            <p:cNvSpPr txBox="1"/>
+            <p:nvPr/>
+          </p:nvSpPr>
+          <p:spPr>
+            <a:xfrm>
+              <a:off x="1890159" y="1058994"/>
+              <a:ext cx="370614" cy="276999"/>
+            </a:xfrm>
+            <a:prstGeom prst="rect">
+              <a:avLst/>
+            </a:prstGeom>
+            <a:noFill/>
+          </p:spPr>
+          <p:txBody>
+            <a:bodyPr wrap="none" rtlCol="0">
+              <a:spAutoFit/>
+            </a:bodyPr>
+            <a:lstStyle/>
+            <a:p>
+              <a:pPr algn="l"/>
+              <a:r>
+                <a:rPr lang="en-US" altLang="zh-CN" sz="1200" dirty="0">
+                  <a:solidFill>
+                    <a:srgbClr val="FF0000"/>
+                  </a:solidFill>
+                  <a:latin typeface="Courier New" panose="02070309020205020404" pitchFamily="49" charset="0"/>
+                  <a:ea typeface="微软雅黑" panose="020B0503020204020204" pitchFamily="34" charset="-122"/>
+                  <a:cs typeface="Courier New" panose="02070309020205020404" pitchFamily="49" charset="0"/>
+                </a:rPr>
+                <a:t>P2</a:t>
+              </a:r>
+              <a:endParaRPr lang="zh-CN" altLang="en-US" sz="1200" dirty="0">
+                <a:solidFill>
+                  <a:srgbClr val="FF0000"/>
+                </a:solidFill>
+                <a:latin typeface="Courier New" panose="02070309020205020404" pitchFamily="49" charset="0"/>
+                <a:ea typeface="微软雅黑" panose="020B0503020204020204" pitchFamily="34" charset="-122"/>
+                <a:cs typeface="Courier New" panose="02070309020205020404" pitchFamily="49" charset="0"/>
+              </a:endParaRPr>
+            </a:p>
+          </p:txBody>
+        </p:sp>
+      </p:grpSp>
+      <p:grpSp>
+        <p:nvGrpSpPr>
+          <p:cNvPr id="26" name="组合 25">
+            <a:extLst>
+              <a:ext uri="{FF2B5EF4-FFF2-40B4-BE49-F238E27FC236}">
+                <a16:creationId xmlns:a16="http://schemas.microsoft.com/office/drawing/2014/main" id="{32CF8815-FB37-8F08-135C-44B7A215A80F}"/>
+              </a:ext>
+            </a:extLst>
+          </p:cNvPr>
+          <p:cNvGrpSpPr/>
+          <p:nvPr/>
+        </p:nvGrpSpPr>
+        <p:grpSpPr>
+          <a:xfrm>
+            <a:off x="2461950" y="1094755"/>
+            <a:ext cx="590549" cy="360000"/>
+            <a:chOff x="2394433" y="1017493"/>
+            <a:chExt cx="590549" cy="360000"/>
+          </a:xfrm>
+        </p:grpSpPr>
+        <p:pic>
+          <p:nvPicPr>
+            <p:cNvPr id="7" name="图形 6" descr="文档">
+              <a:extLst>
+                <a:ext uri="{FF2B5EF4-FFF2-40B4-BE49-F238E27FC236}">
+                  <a16:creationId xmlns:a16="http://schemas.microsoft.com/office/drawing/2014/main" id="{F9DE4040-A3A2-D7C4-282B-42E9C18507BF}"/>
+                </a:ext>
+              </a:extLst>
+            </p:cNvPr>
+            <p:cNvPicPr>
+              <a:picLocks noChangeAspect="1"/>
+            </p:cNvPicPr>
+            <p:nvPr/>
+          </p:nvPicPr>
+          <p:blipFill>
+            <a:blip r:embed="rId2">
+              <a:extLst>
+                <a:ext uri="{96DAC541-7B7A-43D3-8B79-37D633B846F1}">
+                  <asvg:svgBlip xmlns:asvg="http://schemas.microsoft.com/office/drawing/2016/SVG/main" r:embed="rId3"/>
+                </a:ext>
+              </a:extLst>
+            </a:blip>
+            <a:stretch>
+              <a:fillRect/>
+            </a:stretch>
+          </p:blipFill>
+          <p:spPr>
+            <a:xfrm>
+              <a:off x="2624982" y="1017493"/>
+              <a:ext cx="360000" cy="360000"/>
+            </a:xfrm>
+            <a:prstGeom prst="rect">
+              <a:avLst/>
+            </a:prstGeom>
+          </p:spPr>
+        </p:pic>
+        <p:sp>
+          <p:nvSpPr>
+            <p:cNvPr id="10" name="文本框 9">
+              <a:extLst>
+                <a:ext uri="{FF2B5EF4-FFF2-40B4-BE49-F238E27FC236}">
+                  <a16:creationId xmlns:a16="http://schemas.microsoft.com/office/drawing/2014/main" id="{AEBB5379-D08A-58CF-929D-278588283330}"/>
+                </a:ext>
+              </a:extLst>
+            </p:cNvPr>
+            <p:cNvSpPr txBox="1"/>
+            <p:nvPr/>
+          </p:nvSpPr>
+          <p:spPr>
+            <a:xfrm>
+              <a:off x="2394433" y="1058994"/>
+              <a:ext cx="370614" cy="276999"/>
+            </a:xfrm>
+            <a:prstGeom prst="rect">
+              <a:avLst/>
+            </a:prstGeom>
+            <a:noFill/>
+          </p:spPr>
+          <p:txBody>
+            <a:bodyPr wrap="none" rtlCol="0">
+              <a:spAutoFit/>
+            </a:bodyPr>
+            <a:lstStyle/>
+            <a:p>
+              <a:pPr algn="l"/>
+              <a:r>
+                <a:rPr lang="en-US" altLang="zh-CN" sz="1200" dirty="0">
+                  <a:latin typeface="Courier New" panose="02070309020205020404" pitchFamily="49" charset="0"/>
+                  <a:ea typeface="微软雅黑" panose="020B0503020204020204" pitchFamily="34" charset="-122"/>
+                  <a:cs typeface="Courier New" panose="02070309020205020404" pitchFamily="49" charset="0"/>
+                </a:rPr>
+                <a:t>P3</a:t>
+              </a:r>
+              <a:endParaRPr lang="zh-CN" altLang="en-US" sz="1200" dirty="0">
+                <a:latin typeface="Courier New" panose="02070309020205020404" pitchFamily="49" charset="0"/>
+                <a:ea typeface="微软雅黑" panose="020B0503020204020204" pitchFamily="34" charset="-122"/>
+                <a:cs typeface="Courier New" panose="02070309020205020404" pitchFamily="49" charset="0"/>
+              </a:endParaRPr>
+            </a:p>
+          </p:txBody>
+        </p:sp>
+      </p:grpSp>
+      <p:grpSp>
+        <p:nvGrpSpPr>
+          <p:cNvPr id="31" name="组合 30">
+            <a:extLst>
+              <a:ext uri="{FF2B5EF4-FFF2-40B4-BE49-F238E27FC236}">
+                <a16:creationId xmlns:a16="http://schemas.microsoft.com/office/drawing/2014/main" id="{FFF33479-772D-E44E-423D-6B3E220FAB77}"/>
+              </a:ext>
+            </a:extLst>
+          </p:cNvPr>
+          <p:cNvGrpSpPr/>
+          <p:nvPr/>
+        </p:nvGrpSpPr>
+        <p:grpSpPr>
+          <a:xfrm>
+            <a:off x="5313157" y="1134038"/>
+            <a:ext cx="590549" cy="360000"/>
+            <a:chOff x="1385885" y="1017493"/>
+            <a:chExt cx="590549" cy="360000"/>
+          </a:xfrm>
+        </p:grpSpPr>
+        <p:pic>
+          <p:nvPicPr>
+            <p:cNvPr id="38" name="图形 37" descr="文档">
+              <a:extLst>
+                <a:ext uri="{FF2B5EF4-FFF2-40B4-BE49-F238E27FC236}">
+                  <a16:creationId xmlns:a16="http://schemas.microsoft.com/office/drawing/2014/main" id="{DDBB9DFE-CD76-50F1-DA80-6B5074DDC07E}"/>
+                </a:ext>
+              </a:extLst>
+            </p:cNvPr>
+            <p:cNvPicPr>
+              <a:picLocks noChangeAspect="1"/>
+            </p:cNvPicPr>
+            <p:nvPr/>
+          </p:nvPicPr>
+          <p:blipFill>
+            <a:blip r:embed="rId2">
+              <a:extLst>
+                <a:ext uri="{96DAC541-7B7A-43D3-8B79-37D633B846F1}">
+                  <asvg:svgBlip xmlns:asvg="http://schemas.microsoft.com/office/drawing/2016/SVG/main" r:embed="rId3"/>
+                </a:ext>
+              </a:extLst>
+            </a:blip>
+            <a:stretch>
+              <a:fillRect/>
+            </a:stretch>
+          </p:blipFill>
+          <p:spPr>
+            <a:xfrm>
+              <a:off x="1616434" y="1017493"/>
+              <a:ext cx="360000" cy="360000"/>
+            </a:xfrm>
+            <a:prstGeom prst="rect">
+              <a:avLst/>
+            </a:prstGeom>
+          </p:spPr>
+        </p:pic>
+        <p:sp>
+          <p:nvSpPr>
+            <p:cNvPr id="39" name="文本框 38">
+              <a:extLst>
+                <a:ext uri="{FF2B5EF4-FFF2-40B4-BE49-F238E27FC236}">
+                  <a16:creationId xmlns:a16="http://schemas.microsoft.com/office/drawing/2014/main" id="{2D63B797-FD37-FC99-7EA7-971D5F5AD65A}"/>
+                </a:ext>
+              </a:extLst>
+            </p:cNvPr>
+            <p:cNvSpPr txBox="1"/>
+            <p:nvPr/>
+          </p:nvSpPr>
+          <p:spPr>
+            <a:xfrm>
+              <a:off x="1385885" y="1058994"/>
+              <a:ext cx="370614" cy="276999"/>
+            </a:xfrm>
+            <a:prstGeom prst="rect">
+              <a:avLst/>
+            </a:prstGeom>
+            <a:noFill/>
+          </p:spPr>
+          <p:txBody>
+            <a:bodyPr wrap="none" rtlCol="0">
+              <a:spAutoFit/>
+            </a:bodyPr>
+            <a:lstStyle/>
+            <a:p>
+              <a:pPr algn="l"/>
+              <a:r>
+                <a:rPr lang="en-US" altLang="zh-CN" sz="1200" dirty="0">
+                  <a:solidFill>
+                    <a:srgbClr val="FF0000"/>
+                  </a:solidFill>
+                  <a:latin typeface="Courier New" panose="02070309020205020404" pitchFamily="49" charset="0"/>
+                  <a:ea typeface="微软雅黑" panose="020B0503020204020204" pitchFamily="34" charset="-122"/>
+                  <a:cs typeface="Courier New" panose="02070309020205020404" pitchFamily="49" charset="0"/>
+                </a:rPr>
+                <a:t>P4</a:t>
+              </a:r>
+              <a:endParaRPr lang="zh-CN" altLang="en-US" sz="1200" dirty="0">
+                <a:solidFill>
+                  <a:srgbClr val="FF0000"/>
+                </a:solidFill>
+                <a:latin typeface="Courier New" panose="02070309020205020404" pitchFamily="49" charset="0"/>
+                <a:ea typeface="微软雅黑" panose="020B0503020204020204" pitchFamily="34" charset="-122"/>
+                <a:cs typeface="Courier New" panose="02070309020205020404" pitchFamily="49" charset="0"/>
+              </a:endParaRPr>
+            </a:p>
+          </p:txBody>
+        </p:sp>
+      </p:grpSp>
+      <p:grpSp>
+        <p:nvGrpSpPr>
+          <p:cNvPr id="32" name="组合 31">
+            <a:extLst>
+              <a:ext uri="{FF2B5EF4-FFF2-40B4-BE49-F238E27FC236}">
+                <a16:creationId xmlns:a16="http://schemas.microsoft.com/office/drawing/2014/main" id="{DCCFFB73-5D89-6A4D-E232-39B07CB34469}"/>
+              </a:ext>
+            </a:extLst>
+          </p:cNvPr>
+          <p:cNvGrpSpPr/>
+          <p:nvPr/>
+        </p:nvGrpSpPr>
+        <p:grpSpPr>
+          <a:xfrm>
+            <a:off x="6113940" y="1134038"/>
+            <a:ext cx="590549" cy="360000"/>
+            <a:chOff x="1890159" y="1017493"/>
+            <a:chExt cx="590549" cy="360000"/>
+          </a:xfrm>
+        </p:grpSpPr>
+        <p:pic>
+          <p:nvPicPr>
+            <p:cNvPr id="36" name="图形 35" descr="文档">
+              <a:extLst>
+                <a:ext uri="{FF2B5EF4-FFF2-40B4-BE49-F238E27FC236}">
+                  <a16:creationId xmlns:a16="http://schemas.microsoft.com/office/drawing/2014/main" id="{1930C0F1-9FF2-AC85-BE65-1154DEE47C31}"/>
+                </a:ext>
+              </a:extLst>
+            </p:cNvPr>
+            <p:cNvPicPr>
+              <a:picLocks noChangeAspect="1"/>
+            </p:cNvPicPr>
+            <p:nvPr/>
+          </p:nvPicPr>
+          <p:blipFill>
+            <a:blip r:embed="rId2">
+              <a:extLst>
+                <a:ext uri="{96DAC541-7B7A-43D3-8B79-37D633B846F1}">
+                  <asvg:svgBlip xmlns:asvg="http://schemas.microsoft.com/office/drawing/2016/SVG/main" r:embed="rId3"/>
+                </a:ext>
+              </a:extLst>
+            </a:blip>
+            <a:stretch>
+              <a:fillRect/>
+            </a:stretch>
+          </p:blipFill>
+          <p:spPr>
+            <a:xfrm>
+              <a:off x="2120708" y="1017493"/>
+              <a:ext cx="360000" cy="360000"/>
+            </a:xfrm>
+            <a:prstGeom prst="rect">
+              <a:avLst/>
+            </a:prstGeom>
+          </p:spPr>
+        </p:pic>
+        <p:sp>
+          <p:nvSpPr>
+            <p:cNvPr id="37" name="文本框 36">
+              <a:extLst>
+                <a:ext uri="{FF2B5EF4-FFF2-40B4-BE49-F238E27FC236}">
+                  <a16:creationId xmlns:a16="http://schemas.microsoft.com/office/drawing/2014/main" id="{CCBEDC82-7F2D-2DD6-B054-1BA61E5F6B8E}"/>
+                </a:ext>
+              </a:extLst>
+            </p:cNvPr>
+            <p:cNvSpPr txBox="1"/>
+            <p:nvPr/>
+          </p:nvSpPr>
+          <p:spPr>
+            <a:xfrm>
+              <a:off x="1890159" y="1058994"/>
+              <a:ext cx="370614" cy="276999"/>
+            </a:xfrm>
+            <a:prstGeom prst="rect">
+              <a:avLst/>
+            </a:prstGeom>
+            <a:noFill/>
+          </p:spPr>
+          <p:txBody>
+            <a:bodyPr wrap="none" rtlCol="0">
+              <a:spAutoFit/>
+            </a:bodyPr>
+            <a:lstStyle/>
+            <a:p>
+              <a:pPr algn="l"/>
+              <a:r>
+                <a:rPr lang="en-US" altLang="zh-CN" sz="1200" dirty="0">
+                  <a:solidFill>
+                    <a:srgbClr val="20BD6A"/>
+                  </a:solidFill>
+                  <a:latin typeface="Courier New" panose="02070309020205020404" pitchFamily="49" charset="0"/>
+                  <a:ea typeface="微软雅黑" panose="020B0503020204020204" pitchFamily="34" charset="-122"/>
+                  <a:cs typeface="Courier New" panose="02070309020205020404" pitchFamily="49" charset="0"/>
+                </a:rPr>
+                <a:t>P5</a:t>
+              </a:r>
+              <a:endParaRPr lang="zh-CN" altLang="en-US" sz="1200" dirty="0">
+                <a:solidFill>
+                  <a:srgbClr val="20BD6A"/>
+                </a:solidFill>
+                <a:latin typeface="Courier New" panose="02070309020205020404" pitchFamily="49" charset="0"/>
+                <a:ea typeface="微软雅黑" panose="020B0503020204020204" pitchFamily="34" charset="-122"/>
+                <a:cs typeface="Courier New" panose="02070309020205020404" pitchFamily="49" charset="0"/>
+              </a:endParaRPr>
+            </a:p>
+          </p:txBody>
+        </p:sp>
+      </p:grpSp>
+      <p:grpSp>
+        <p:nvGrpSpPr>
+          <p:cNvPr id="49" name="组合 48">
+            <a:extLst>
+              <a:ext uri="{FF2B5EF4-FFF2-40B4-BE49-F238E27FC236}">
+                <a16:creationId xmlns:a16="http://schemas.microsoft.com/office/drawing/2014/main" id="{C87BABE2-7EA3-18A8-2B61-DFB9D7DBC833}"/>
+              </a:ext>
+            </a:extLst>
+          </p:cNvPr>
+          <p:cNvGrpSpPr/>
+          <p:nvPr/>
+        </p:nvGrpSpPr>
+        <p:grpSpPr>
+          <a:xfrm>
+            <a:off x="1858929" y="1587810"/>
+            <a:ext cx="500364" cy="360000"/>
+            <a:chOff x="6021196" y="1927412"/>
+            <a:chExt cx="500364" cy="360000"/>
+          </a:xfrm>
+        </p:grpSpPr>
+        <p:sp>
+          <p:nvSpPr>
+            <p:cNvPr id="40" name="矩形 39">
+              <a:extLst>
+                <a:ext uri="{FF2B5EF4-FFF2-40B4-BE49-F238E27FC236}">
+                  <a16:creationId xmlns:a16="http://schemas.microsoft.com/office/drawing/2014/main" id="{2C4388B8-41C7-7966-AF7E-68FC733CD07E}"/>
+                </a:ext>
+              </a:extLst>
+            </p:cNvPr>
+            <p:cNvSpPr/>
+            <p:nvPr/>
+          </p:nvSpPr>
+          <p:spPr>
+            <a:xfrm>
+              <a:off x="6233560" y="1927412"/>
+              <a:ext cx="288000" cy="72000"/>
+            </a:xfrm>
+            <a:prstGeom prst="rect">
+              <a:avLst/>
+            </a:prstGeom>
+            <a:solidFill>
+              <a:schemeClr val="bg1">
+                <a:lumMod val="85000"/>
+              </a:schemeClr>
+            </a:solidFill>
+            <a:ln>
+              <a:noFill/>
+            </a:ln>
+          </p:spPr>
+          <p:style>
+            <a:lnRef idx="2">
+              <a:schemeClr val="accent1">
+                <a:shade val="15000"/>
+              </a:schemeClr>
+            </a:lnRef>
+            <a:fillRef idx="1">
+              <a:schemeClr val="accent1"/>
+            </a:fillRef>
+            <a:effectRef idx="0">
+              <a:schemeClr val="accent1"/>
+            </a:effectRef>
+            <a:fontRef idx="minor">
+              <a:schemeClr val="lt1"/>
+            </a:fontRef>
+          </p:style>
+          <p:txBody>
+            <a:bodyPr rtlCol="0" anchor="ctr"/>
+            <a:lstStyle/>
+            <a:p>
+              <a:pPr algn="ctr"/>
+              <a:endParaRPr lang="zh-CN" altLang="en-US"/>
+            </a:p>
+          </p:txBody>
+        </p:sp>
+        <p:sp>
+          <p:nvSpPr>
+            <p:cNvPr id="41" name="矩形 40">
+              <a:extLst>
+                <a:ext uri="{FF2B5EF4-FFF2-40B4-BE49-F238E27FC236}">
+                  <a16:creationId xmlns:a16="http://schemas.microsoft.com/office/drawing/2014/main" id="{1FA6612F-5465-D46C-E103-4027D25A0D71}"/>
+                </a:ext>
+              </a:extLst>
+            </p:cNvPr>
+            <p:cNvSpPr/>
+            <p:nvPr/>
+          </p:nvSpPr>
+          <p:spPr>
+            <a:xfrm>
+              <a:off x="6233560" y="2157812"/>
+              <a:ext cx="288000" cy="72000"/>
+            </a:xfrm>
+            <a:prstGeom prst="rect">
+              <a:avLst/>
+            </a:prstGeom>
+            <a:solidFill>
+              <a:schemeClr val="bg1">
+                <a:lumMod val="95000"/>
+              </a:schemeClr>
+            </a:solidFill>
+            <a:ln>
+              <a:noFill/>
+            </a:ln>
+          </p:spPr>
+          <p:style>
+            <a:lnRef idx="2">
+              <a:schemeClr val="accent1">
+                <a:shade val="15000"/>
+              </a:schemeClr>
+            </a:lnRef>
+            <a:fillRef idx="1">
+              <a:schemeClr val="accent1"/>
+            </a:fillRef>
+            <a:effectRef idx="0">
+              <a:schemeClr val="accent1"/>
+            </a:effectRef>
+            <a:fontRef idx="minor">
+              <a:schemeClr val="lt1"/>
+            </a:fontRef>
+          </p:style>
+          <p:txBody>
+            <a:bodyPr rtlCol="0" anchor="ctr"/>
+            <a:lstStyle/>
+            <a:p>
+              <a:pPr algn="ctr"/>
+              <a:endParaRPr lang="zh-CN" altLang="en-US"/>
+            </a:p>
+          </p:txBody>
+        </p:sp>
+        <p:sp>
+          <p:nvSpPr>
+            <p:cNvPr id="42" name="矩形 41">
+              <a:extLst>
+                <a:ext uri="{FF2B5EF4-FFF2-40B4-BE49-F238E27FC236}">
+                  <a16:creationId xmlns:a16="http://schemas.microsoft.com/office/drawing/2014/main" id="{C2FC505B-0DC7-5836-2B96-0A02A442F905}"/>
+                </a:ext>
+              </a:extLst>
+            </p:cNvPr>
+            <p:cNvSpPr/>
+            <p:nvPr/>
+          </p:nvSpPr>
+          <p:spPr>
+            <a:xfrm>
+              <a:off x="6233560" y="2215412"/>
+              <a:ext cx="288000" cy="72000"/>
+            </a:xfrm>
+            <a:prstGeom prst="rect">
+              <a:avLst/>
+            </a:prstGeom>
+            <a:solidFill>
+              <a:schemeClr val="bg1">
+                <a:lumMod val="95000"/>
+              </a:schemeClr>
+            </a:solidFill>
+            <a:ln>
+              <a:noFill/>
+            </a:ln>
+          </p:spPr>
+          <p:style>
+            <a:lnRef idx="2">
+              <a:schemeClr val="accent1">
+                <a:shade val="15000"/>
+              </a:schemeClr>
+            </a:lnRef>
+            <a:fillRef idx="1">
+              <a:schemeClr val="accent1"/>
+            </a:fillRef>
+            <a:effectRef idx="0">
+              <a:schemeClr val="accent1"/>
+            </a:effectRef>
+            <a:fontRef idx="minor">
+              <a:schemeClr val="lt1"/>
+            </a:fontRef>
+          </p:style>
+          <p:txBody>
+            <a:bodyPr rtlCol="0" anchor="ctr"/>
+            <a:lstStyle/>
+            <a:p>
+              <a:pPr algn="ctr"/>
+              <a:endParaRPr lang="zh-CN" altLang="en-US"/>
+            </a:p>
+          </p:txBody>
+        </p:sp>
+        <p:sp>
+          <p:nvSpPr>
+            <p:cNvPr id="43" name="矩形 42">
+              <a:extLst>
+                <a:ext uri="{FF2B5EF4-FFF2-40B4-BE49-F238E27FC236}">
+                  <a16:creationId xmlns:a16="http://schemas.microsoft.com/office/drawing/2014/main" id="{B4830477-DBD1-836B-1EA6-0CCBBBFA3971}"/>
+                </a:ext>
+              </a:extLst>
+            </p:cNvPr>
+            <p:cNvSpPr/>
+            <p:nvPr/>
+          </p:nvSpPr>
+          <p:spPr>
+            <a:xfrm>
+              <a:off x="6233560" y="1985012"/>
+              <a:ext cx="288000" cy="72000"/>
+            </a:xfrm>
+            <a:prstGeom prst="rect">
+              <a:avLst/>
+            </a:prstGeom>
+            <a:solidFill>
+              <a:schemeClr val="bg1">
+                <a:lumMod val="85000"/>
+              </a:schemeClr>
+            </a:solidFill>
+            <a:ln>
+              <a:noFill/>
+            </a:ln>
+          </p:spPr>
+          <p:style>
+            <a:lnRef idx="2">
+              <a:schemeClr val="accent1">
+                <a:shade val="15000"/>
+              </a:schemeClr>
+            </a:lnRef>
+            <a:fillRef idx="1">
+              <a:schemeClr val="accent1"/>
+            </a:fillRef>
+            <a:effectRef idx="0">
+              <a:schemeClr val="accent1"/>
+            </a:effectRef>
+            <a:fontRef idx="minor">
+              <a:schemeClr val="lt1"/>
+            </a:fontRef>
+          </p:style>
+          <p:txBody>
+            <a:bodyPr rtlCol="0" anchor="ctr"/>
+            <a:lstStyle/>
+            <a:p>
+              <a:pPr algn="ctr"/>
+              <a:endParaRPr lang="zh-CN" altLang="en-US"/>
+            </a:p>
+          </p:txBody>
+        </p:sp>
+        <p:sp>
+          <p:nvSpPr>
+            <p:cNvPr id="44" name="矩形 43">
+              <a:extLst>
+                <a:ext uri="{FF2B5EF4-FFF2-40B4-BE49-F238E27FC236}">
+                  <a16:creationId xmlns:a16="http://schemas.microsoft.com/office/drawing/2014/main" id="{40C3A5DF-752B-5061-EFA6-D5EBE06C766F}"/>
+                </a:ext>
+              </a:extLst>
+            </p:cNvPr>
+            <p:cNvSpPr/>
+            <p:nvPr/>
+          </p:nvSpPr>
+          <p:spPr>
+            <a:xfrm>
+              <a:off x="6233560" y="2042612"/>
+              <a:ext cx="288000" cy="72000"/>
+            </a:xfrm>
+            <a:prstGeom prst="rect">
+              <a:avLst/>
+            </a:prstGeom>
+            <a:solidFill>
+              <a:schemeClr val="bg1">
+                <a:lumMod val="95000"/>
+              </a:schemeClr>
+            </a:solidFill>
+            <a:ln>
+              <a:noFill/>
+            </a:ln>
+          </p:spPr>
+          <p:style>
+            <a:lnRef idx="2">
+              <a:schemeClr val="accent1">
+                <a:shade val="15000"/>
+              </a:schemeClr>
+            </a:lnRef>
+            <a:fillRef idx="1">
+              <a:schemeClr val="accent1"/>
+            </a:fillRef>
+            <a:effectRef idx="0">
+              <a:schemeClr val="accent1"/>
+            </a:effectRef>
+            <a:fontRef idx="minor">
+              <a:schemeClr val="lt1"/>
+            </a:fontRef>
+          </p:style>
+          <p:txBody>
+            <a:bodyPr rtlCol="0" anchor="ctr"/>
+            <a:lstStyle/>
+            <a:p>
+              <a:pPr algn="ctr"/>
+              <a:endParaRPr lang="zh-CN" altLang="en-US"/>
+            </a:p>
+          </p:txBody>
+        </p:sp>
+        <p:sp>
+          <p:nvSpPr>
+            <p:cNvPr id="45" name="矩形 44">
+              <a:extLst>
+                <a:ext uri="{FF2B5EF4-FFF2-40B4-BE49-F238E27FC236}">
+                  <a16:creationId xmlns:a16="http://schemas.microsoft.com/office/drawing/2014/main" id="{0C62FA6C-2638-63CB-F4A7-A2A3D9BDC1EA}"/>
+                </a:ext>
+              </a:extLst>
+            </p:cNvPr>
+            <p:cNvSpPr/>
+            <p:nvPr/>
+          </p:nvSpPr>
+          <p:spPr>
+            <a:xfrm>
+              <a:off x="6233560" y="2100212"/>
+              <a:ext cx="288000" cy="72000"/>
+            </a:xfrm>
+            <a:prstGeom prst="rect">
+              <a:avLst/>
+            </a:prstGeom>
+            <a:solidFill>
+              <a:schemeClr val="bg1">
+                <a:lumMod val="95000"/>
+              </a:schemeClr>
+            </a:solidFill>
+            <a:ln>
+              <a:noFill/>
+            </a:ln>
+          </p:spPr>
+          <p:style>
+            <a:lnRef idx="2">
+              <a:schemeClr val="accent1">
+                <a:shade val="15000"/>
+              </a:schemeClr>
+            </a:lnRef>
+            <a:fillRef idx="1">
+              <a:schemeClr val="accent1"/>
+            </a:fillRef>
+            <a:effectRef idx="0">
+              <a:schemeClr val="accent1"/>
+            </a:effectRef>
+            <a:fontRef idx="minor">
+              <a:schemeClr val="lt1"/>
+            </a:fontRef>
+          </p:style>
+          <p:txBody>
+            <a:bodyPr rtlCol="0" anchor="ctr"/>
+            <a:lstStyle/>
+            <a:p>
+              <a:pPr algn="ctr"/>
+              <a:endParaRPr lang="zh-CN" altLang="en-US"/>
+            </a:p>
+          </p:txBody>
+        </p:sp>
+        <p:sp>
+          <p:nvSpPr>
+            <p:cNvPr id="47" name="文本框 46">
+              <a:extLst>
+                <a:ext uri="{FF2B5EF4-FFF2-40B4-BE49-F238E27FC236}">
+                  <a16:creationId xmlns:a16="http://schemas.microsoft.com/office/drawing/2014/main" id="{A53E4717-44C1-8BA9-0660-C66F67B79A6A}"/>
+                </a:ext>
+              </a:extLst>
+            </p:cNvPr>
+            <p:cNvSpPr txBox="1"/>
+            <p:nvPr/>
+          </p:nvSpPr>
+          <p:spPr>
+            <a:xfrm>
+              <a:off x="6021196" y="1968913"/>
+              <a:ext cx="277640" cy="276999"/>
+            </a:xfrm>
+            <a:prstGeom prst="rect">
+              <a:avLst/>
+            </a:prstGeom>
+            <a:noFill/>
+          </p:spPr>
+          <p:txBody>
+            <a:bodyPr wrap="none" rtlCol="0">
+              <a:spAutoFit/>
+            </a:bodyPr>
+            <a:lstStyle/>
+            <a:p>
+              <a:pPr algn="l"/>
+              <a:r>
+                <a:rPr lang="en-US" altLang="zh-CN" sz="1200" dirty="0">
+                  <a:solidFill>
+                    <a:srgbClr val="FF0000"/>
+                  </a:solidFill>
+                  <a:latin typeface="Courier New" panose="02070309020205020404" pitchFamily="49" charset="0"/>
+                  <a:ea typeface="微软雅黑" panose="020B0503020204020204" pitchFamily="34" charset="-122"/>
+                  <a:cs typeface="Courier New" panose="02070309020205020404" pitchFamily="49" charset="0"/>
+                </a:rPr>
+                <a:t>b</a:t>
+              </a:r>
+              <a:endParaRPr lang="zh-CN" altLang="en-US" sz="1200" dirty="0">
+                <a:solidFill>
+                  <a:srgbClr val="FF0000"/>
+                </a:solidFill>
+                <a:latin typeface="Courier New" panose="02070309020205020404" pitchFamily="49" charset="0"/>
+                <a:ea typeface="微软雅黑" panose="020B0503020204020204" pitchFamily="34" charset="-122"/>
+                <a:cs typeface="Courier New" panose="02070309020205020404" pitchFamily="49" charset="0"/>
+              </a:endParaRPr>
+            </a:p>
+          </p:txBody>
+        </p:sp>
+      </p:grpSp>
+      <p:grpSp>
+        <p:nvGrpSpPr>
+          <p:cNvPr id="50" name="组合 49">
+            <a:extLst>
+              <a:ext uri="{FF2B5EF4-FFF2-40B4-BE49-F238E27FC236}">
+                <a16:creationId xmlns:a16="http://schemas.microsoft.com/office/drawing/2014/main" id="{5E6B5F9C-3DF1-1A06-2457-90F50CE5E760}"/>
+              </a:ext>
+            </a:extLst>
+          </p:cNvPr>
+          <p:cNvGrpSpPr/>
+          <p:nvPr/>
+        </p:nvGrpSpPr>
+        <p:grpSpPr>
+          <a:xfrm>
+            <a:off x="2516275" y="1587810"/>
+            <a:ext cx="500364" cy="360000"/>
+            <a:chOff x="6021196" y="1927412"/>
+            <a:chExt cx="500364" cy="360000"/>
+          </a:xfrm>
+        </p:grpSpPr>
+        <p:sp>
+          <p:nvSpPr>
+            <p:cNvPr id="51" name="矩形 50">
+              <a:extLst>
+                <a:ext uri="{FF2B5EF4-FFF2-40B4-BE49-F238E27FC236}">
+                  <a16:creationId xmlns:a16="http://schemas.microsoft.com/office/drawing/2014/main" id="{9082ED9C-9ACF-F7E4-A84A-02C00C613563}"/>
+                </a:ext>
+              </a:extLst>
+            </p:cNvPr>
+            <p:cNvSpPr/>
+            <p:nvPr/>
+          </p:nvSpPr>
+          <p:spPr>
+            <a:xfrm>
+              <a:off x="6233560" y="1927412"/>
+              <a:ext cx="288000" cy="72000"/>
+            </a:xfrm>
+            <a:prstGeom prst="rect">
+              <a:avLst/>
+            </a:prstGeom>
+            <a:solidFill>
+              <a:schemeClr val="bg1">
+                <a:lumMod val="85000"/>
+              </a:schemeClr>
+            </a:solidFill>
+            <a:ln>
+              <a:noFill/>
+            </a:ln>
+          </p:spPr>
+          <p:style>
+            <a:lnRef idx="2">
+              <a:schemeClr val="accent1">
+                <a:shade val="15000"/>
+              </a:schemeClr>
+            </a:lnRef>
+            <a:fillRef idx="1">
+              <a:schemeClr val="accent1"/>
+            </a:fillRef>
+            <a:effectRef idx="0">
+              <a:schemeClr val="accent1"/>
+            </a:effectRef>
+            <a:fontRef idx="minor">
+              <a:schemeClr val="lt1"/>
+            </a:fontRef>
+          </p:style>
+          <p:txBody>
+            <a:bodyPr rtlCol="0" anchor="ctr"/>
+            <a:lstStyle/>
+            <a:p>
+              <a:pPr algn="ctr"/>
+              <a:endParaRPr lang="zh-CN" altLang="en-US"/>
+            </a:p>
+          </p:txBody>
+        </p:sp>
+        <p:sp>
+          <p:nvSpPr>
+            <p:cNvPr id="52" name="矩形 51">
+              <a:extLst>
+                <a:ext uri="{FF2B5EF4-FFF2-40B4-BE49-F238E27FC236}">
+                  <a16:creationId xmlns:a16="http://schemas.microsoft.com/office/drawing/2014/main" id="{0FD4FFCB-DE31-D71C-87FD-EA974E2AA517}"/>
+                </a:ext>
+              </a:extLst>
+            </p:cNvPr>
+            <p:cNvSpPr/>
+            <p:nvPr/>
+          </p:nvSpPr>
+          <p:spPr>
+            <a:xfrm>
+              <a:off x="6233560" y="2157812"/>
+              <a:ext cx="288000" cy="72000"/>
+            </a:xfrm>
+            <a:prstGeom prst="rect">
+              <a:avLst/>
+            </a:prstGeom>
+            <a:solidFill>
+              <a:schemeClr val="bg1">
+                <a:lumMod val="95000"/>
+              </a:schemeClr>
+            </a:solidFill>
+            <a:ln>
+              <a:noFill/>
+            </a:ln>
+          </p:spPr>
+          <p:style>
+            <a:lnRef idx="2">
+              <a:schemeClr val="accent1">
+                <a:shade val="15000"/>
+              </a:schemeClr>
+            </a:lnRef>
+            <a:fillRef idx="1">
+              <a:schemeClr val="accent1"/>
+            </a:fillRef>
+            <a:effectRef idx="0">
+              <a:schemeClr val="accent1"/>
+            </a:effectRef>
+            <a:fontRef idx="minor">
+              <a:schemeClr val="lt1"/>
+            </a:fontRef>
+          </p:style>
+          <p:txBody>
+            <a:bodyPr rtlCol="0" anchor="ctr"/>
+            <a:lstStyle/>
+            <a:p>
+              <a:pPr algn="ctr"/>
+              <a:endParaRPr lang="zh-CN" altLang="en-US"/>
+            </a:p>
+          </p:txBody>
+        </p:sp>
+        <p:sp>
+          <p:nvSpPr>
+            <p:cNvPr id="53" name="矩形 52">
+              <a:extLst>
+                <a:ext uri="{FF2B5EF4-FFF2-40B4-BE49-F238E27FC236}">
+                  <a16:creationId xmlns:a16="http://schemas.microsoft.com/office/drawing/2014/main" id="{F4FFC7B0-91DF-0748-7AB7-DACE9A82AB79}"/>
+                </a:ext>
+              </a:extLst>
+            </p:cNvPr>
+            <p:cNvSpPr/>
+            <p:nvPr/>
+          </p:nvSpPr>
+          <p:spPr>
+            <a:xfrm>
+              <a:off x="6233560" y="2215412"/>
+              <a:ext cx="288000" cy="72000"/>
+            </a:xfrm>
+            <a:prstGeom prst="rect">
+              <a:avLst/>
+            </a:prstGeom>
+            <a:solidFill>
+              <a:schemeClr val="bg1">
+                <a:lumMod val="95000"/>
+              </a:schemeClr>
+            </a:solidFill>
+            <a:ln>
+              <a:noFill/>
+            </a:ln>
+          </p:spPr>
+          <p:style>
+            <a:lnRef idx="2">
+              <a:schemeClr val="accent1">
+                <a:shade val="15000"/>
+              </a:schemeClr>
+            </a:lnRef>
+            <a:fillRef idx="1">
+              <a:schemeClr val="accent1"/>
+            </a:fillRef>
+            <a:effectRef idx="0">
+              <a:schemeClr val="accent1"/>
+            </a:effectRef>
+            <a:fontRef idx="minor">
+              <a:schemeClr val="lt1"/>
+            </a:fontRef>
+          </p:style>
+          <p:txBody>
+            <a:bodyPr rtlCol="0" anchor="ctr"/>
+            <a:lstStyle/>
+            <a:p>
+              <a:pPr algn="ctr"/>
+              <a:endParaRPr lang="zh-CN" altLang="en-US"/>
+            </a:p>
+          </p:txBody>
+        </p:sp>
+        <p:sp>
+          <p:nvSpPr>
+            <p:cNvPr id="54" name="矩形 53">
+              <a:extLst>
+                <a:ext uri="{FF2B5EF4-FFF2-40B4-BE49-F238E27FC236}">
+                  <a16:creationId xmlns:a16="http://schemas.microsoft.com/office/drawing/2014/main" id="{11E2C48D-8950-5CCC-D008-F49615A59FBD}"/>
+                </a:ext>
+              </a:extLst>
+            </p:cNvPr>
+            <p:cNvSpPr/>
+            <p:nvPr/>
+          </p:nvSpPr>
+          <p:spPr>
+            <a:xfrm>
+              <a:off x="6233560" y="1985012"/>
+              <a:ext cx="288000" cy="72000"/>
+            </a:xfrm>
+            <a:prstGeom prst="rect">
+              <a:avLst/>
+            </a:prstGeom>
+            <a:solidFill>
+              <a:schemeClr val="bg1">
+                <a:lumMod val="95000"/>
+              </a:schemeClr>
+            </a:solidFill>
+            <a:ln>
+              <a:noFill/>
+            </a:ln>
+          </p:spPr>
+          <p:style>
+            <a:lnRef idx="2">
+              <a:schemeClr val="accent1">
+                <a:shade val="15000"/>
+              </a:schemeClr>
+            </a:lnRef>
+            <a:fillRef idx="1">
+              <a:schemeClr val="accent1"/>
+            </a:fillRef>
+            <a:effectRef idx="0">
+              <a:schemeClr val="accent1"/>
+            </a:effectRef>
+            <a:fontRef idx="minor">
+              <a:schemeClr val="lt1"/>
+            </a:fontRef>
+          </p:style>
+          <p:txBody>
+            <a:bodyPr rtlCol="0" anchor="ctr"/>
+            <a:lstStyle/>
+            <a:p>
+              <a:pPr algn="ctr"/>
+              <a:endParaRPr lang="zh-CN" altLang="en-US"/>
+            </a:p>
+          </p:txBody>
+        </p:sp>
+        <p:sp>
+          <p:nvSpPr>
+            <p:cNvPr id="55" name="矩形 54">
+              <a:extLst>
+                <a:ext uri="{FF2B5EF4-FFF2-40B4-BE49-F238E27FC236}">
+                  <a16:creationId xmlns:a16="http://schemas.microsoft.com/office/drawing/2014/main" id="{09855BE9-6824-6113-9C56-6EEB90FD44DF}"/>
+                </a:ext>
+              </a:extLst>
+            </p:cNvPr>
+            <p:cNvSpPr/>
+            <p:nvPr/>
+          </p:nvSpPr>
+          <p:spPr>
+            <a:xfrm>
+              <a:off x="6233560" y="2042612"/>
+              <a:ext cx="288000" cy="72000"/>
+            </a:xfrm>
+            <a:prstGeom prst="rect">
+              <a:avLst/>
+            </a:prstGeom>
+            <a:solidFill>
+              <a:schemeClr val="bg1">
+                <a:lumMod val="95000"/>
+              </a:schemeClr>
+            </a:solidFill>
+            <a:ln>
+              <a:noFill/>
+            </a:ln>
+          </p:spPr>
+          <p:style>
+            <a:lnRef idx="2">
+              <a:schemeClr val="accent1">
+                <a:shade val="15000"/>
+              </a:schemeClr>
+            </a:lnRef>
+            <a:fillRef idx="1">
+              <a:schemeClr val="accent1"/>
+            </a:fillRef>
+            <a:effectRef idx="0">
+              <a:schemeClr val="accent1"/>
+            </a:effectRef>
+            <a:fontRef idx="minor">
+              <a:schemeClr val="lt1"/>
+            </a:fontRef>
+          </p:style>
+          <p:txBody>
+            <a:bodyPr rtlCol="0" anchor="ctr"/>
+            <a:lstStyle/>
+            <a:p>
+              <a:pPr algn="ctr"/>
+              <a:endParaRPr lang="zh-CN" altLang="en-US"/>
+            </a:p>
+          </p:txBody>
+        </p:sp>
+        <p:sp>
+          <p:nvSpPr>
+            <p:cNvPr id="56" name="矩形 55">
+              <a:extLst>
+                <a:ext uri="{FF2B5EF4-FFF2-40B4-BE49-F238E27FC236}">
+                  <a16:creationId xmlns:a16="http://schemas.microsoft.com/office/drawing/2014/main" id="{5F15DDE4-E238-28A7-9CEE-3C2EDBC4FA9C}"/>
+                </a:ext>
+              </a:extLst>
+            </p:cNvPr>
+            <p:cNvSpPr/>
+            <p:nvPr/>
+          </p:nvSpPr>
+          <p:spPr>
+            <a:xfrm>
+              <a:off x="6233560" y="2100212"/>
+              <a:ext cx="288000" cy="72000"/>
+            </a:xfrm>
+            <a:prstGeom prst="rect">
+              <a:avLst/>
+            </a:prstGeom>
+            <a:solidFill>
+              <a:schemeClr val="bg1">
+                <a:lumMod val="95000"/>
+              </a:schemeClr>
+            </a:solidFill>
+            <a:ln>
+              <a:noFill/>
+            </a:ln>
+          </p:spPr>
+          <p:style>
+            <a:lnRef idx="2">
+              <a:schemeClr val="accent1">
+                <a:shade val="15000"/>
+              </a:schemeClr>
+            </a:lnRef>
+            <a:fillRef idx="1">
+              <a:schemeClr val="accent1"/>
+            </a:fillRef>
+            <a:effectRef idx="0">
+              <a:schemeClr val="accent1"/>
+            </a:effectRef>
+            <a:fontRef idx="minor">
+              <a:schemeClr val="lt1"/>
+            </a:fontRef>
+          </p:style>
+          <p:txBody>
+            <a:bodyPr rtlCol="0" anchor="ctr"/>
+            <a:lstStyle/>
+            <a:p>
+              <a:pPr algn="ctr"/>
+              <a:endParaRPr lang="zh-CN" altLang="en-US"/>
+            </a:p>
+          </p:txBody>
+        </p:sp>
+        <p:sp>
+          <p:nvSpPr>
+            <p:cNvPr id="57" name="文本框 56">
+              <a:extLst>
+                <a:ext uri="{FF2B5EF4-FFF2-40B4-BE49-F238E27FC236}">
+                  <a16:creationId xmlns:a16="http://schemas.microsoft.com/office/drawing/2014/main" id="{6161DDB2-F975-84F5-5B00-B5161DB14BF6}"/>
+                </a:ext>
+              </a:extLst>
+            </p:cNvPr>
+            <p:cNvSpPr txBox="1"/>
+            <p:nvPr/>
+          </p:nvSpPr>
+          <p:spPr>
+            <a:xfrm>
+              <a:off x="6021196" y="1968913"/>
+              <a:ext cx="277640" cy="276999"/>
+            </a:xfrm>
+            <a:prstGeom prst="rect">
+              <a:avLst/>
+            </a:prstGeom>
+            <a:noFill/>
+          </p:spPr>
+          <p:txBody>
+            <a:bodyPr wrap="none" rtlCol="0">
+              <a:spAutoFit/>
+            </a:bodyPr>
+            <a:lstStyle/>
+            <a:p>
+              <a:pPr algn="l"/>
+              <a:r>
+                <a:rPr lang="en-US" altLang="zh-CN" sz="1200" dirty="0">
+                  <a:latin typeface="Courier New" panose="02070309020205020404" pitchFamily="49" charset="0"/>
+                  <a:ea typeface="微软雅黑" panose="020B0503020204020204" pitchFamily="34" charset="-122"/>
+                  <a:cs typeface="Courier New" panose="02070309020205020404" pitchFamily="49" charset="0"/>
+                </a:rPr>
+                <a:t>c</a:t>
+              </a:r>
+              <a:endParaRPr lang="zh-CN" altLang="en-US" sz="1200" dirty="0">
+                <a:latin typeface="Courier New" panose="02070309020205020404" pitchFamily="49" charset="0"/>
+                <a:ea typeface="微软雅黑" panose="020B0503020204020204" pitchFamily="34" charset="-122"/>
+                <a:cs typeface="Courier New" panose="02070309020205020404" pitchFamily="49" charset="0"/>
+              </a:endParaRPr>
+            </a:p>
+          </p:txBody>
+        </p:sp>
+      </p:grpSp>
+      <p:grpSp>
+        <p:nvGrpSpPr>
+          <p:cNvPr id="58" name="组合 57">
+            <a:extLst>
+              <a:ext uri="{FF2B5EF4-FFF2-40B4-BE49-F238E27FC236}">
+                <a16:creationId xmlns:a16="http://schemas.microsoft.com/office/drawing/2014/main" id="{E0CD305E-CB6B-74DC-94AA-BADA10F3DCD3}"/>
+              </a:ext>
+            </a:extLst>
+          </p:cNvPr>
+          <p:cNvGrpSpPr/>
+          <p:nvPr/>
+        </p:nvGrpSpPr>
+        <p:grpSpPr>
+          <a:xfrm>
+            <a:off x="1264740" y="1587810"/>
+            <a:ext cx="500364" cy="360000"/>
+            <a:chOff x="6021196" y="1927412"/>
+            <a:chExt cx="500364" cy="360000"/>
+          </a:xfrm>
+        </p:grpSpPr>
+        <p:sp>
+          <p:nvSpPr>
+            <p:cNvPr id="59" name="矩形 58">
+              <a:extLst>
+                <a:ext uri="{FF2B5EF4-FFF2-40B4-BE49-F238E27FC236}">
+                  <a16:creationId xmlns:a16="http://schemas.microsoft.com/office/drawing/2014/main" id="{3715DD3C-8625-A078-FF3D-F0F2F3852838}"/>
+                </a:ext>
+              </a:extLst>
+            </p:cNvPr>
+            <p:cNvSpPr/>
+            <p:nvPr/>
+          </p:nvSpPr>
+          <p:spPr>
+            <a:xfrm>
+              <a:off x="6233560" y="1927412"/>
+              <a:ext cx="288000" cy="72000"/>
+            </a:xfrm>
+            <a:prstGeom prst="rect">
+              <a:avLst/>
+            </a:prstGeom>
+            <a:solidFill>
+              <a:schemeClr val="bg1">
+                <a:lumMod val="85000"/>
+              </a:schemeClr>
+            </a:solidFill>
+            <a:ln>
+              <a:noFill/>
+            </a:ln>
+          </p:spPr>
+          <p:style>
+            <a:lnRef idx="2">
+              <a:schemeClr val="accent1">
+                <a:shade val="15000"/>
+              </a:schemeClr>
+            </a:lnRef>
+            <a:fillRef idx="1">
+              <a:schemeClr val="accent1"/>
+            </a:fillRef>
+            <a:effectRef idx="0">
+              <a:schemeClr val="accent1"/>
+            </a:effectRef>
+            <a:fontRef idx="minor">
+              <a:schemeClr val="lt1"/>
+            </a:fontRef>
+          </p:style>
+          <p:txBody>
+            <a:bodyPr rtlCol="0" anchor="ctr"/>
+            <a:lstStyle/>
+            <a:p>
+              <a:pPr algn="ctr"/>
+              <a:endParaRPr lang="zh-CN" altLang="en-US"/>
+            </a:p>
+          </p:txBody>
+        </p:sp>
+        <p:sp>
+          <p:nvSpPr>
+            <p:cNvPr id="60" name="矩形 59">
+              <a:extLst>
+                <a:ext uri="{FF2B5EF4-FFF2-40B4-BE49-F238E27FC236}">
+                  <a16:creationId xmlns:a16="http://schemas.microsoft.com/office/drawing/2014/main" id="{9AAE2502-F9AE-97E3-D9D5-65B7435CBB0D}"/>
+                </a:ext>
+              </a:extLst>
+            </p:cNvPr>
+            <p:cNvSpPr/>
+            <p:nvPr/>
+          </p:nvSpPr>
+          <p:spPr>
+            <a:xfrm>
+              <a:off x="6233560" y="2157812"/>
+              <a:ext cx="288000" cy="72000"/>
+            </a:xfrm>
+            <a:prstGeom prst="rect">
+              <a:avLst/>
+            </a:prstGeom>
+            <a:solidFill>
+              <a:schemeClr val="bg1">
+                <a:lumMod val="95000"/>
+              </a:schemeClr>
+            </a:solidFill>
+            <a:ln>
+              <a:noFill/>
+            </a:ln>
+          </p:spPr>
+          <p:style>
+            <a:lnRef idx="2">
+              <a:schemeClr val="accent1">
+                <a:shade val="15000"/>
+              </a:schemeClr>
+            </a:lnRef>
+            <a:fillRef idx="1">
+              <a:schemeClr val="accent1"/>
+            </a:fillRef>
+            <a:effectRef idx="0">
+              <a:schemeClr val="accent1"/>
+            </a:effectRef>
+            <a:fontRef idx="minor">
+              <a:schemeClr val="lt1"/>
+            </a:fontRef>
+          </p:style>
+          <p:txBody>
+            <a:bodyPr rtlCol="0" anchor="ctr"/>
+            <a:lstStyle/>
+            <a:p>
+              <a:pPr algn="ctr"/>
+              <a:endParaRPr lang="zh-CN" altLang="en-US"/>
+            </a:p>
+          </p:txBody>
+        </p:sp>
+        <p:sp>
+          <p:nvSpPr>
+            <p:cNvPr id="61" name="矩形 60">
+              <a:extLst>
+                <a:ext uri="{FF2B5EF4-FFF2-40B4-BE49-F238E27FC236}">
+                  <a16:creationId xmlns:a16="http://schemas.microsoft.com/office/drawing/2014/main" id="{475CDBC5-00DF-80C3-4168-758A9ADA89F1}"/>
+                </a:ext>
+              </a:extLst>
+            </p:cNvPr>
+            <p:cNvSpPr/>
+            <p:nvPr/>
+          </p:nvSpPr>
+          <p:spPr>
+            <a:xfrm>
+              <a:off x="6233560" y="2215412"/>
+              <a:ext cx="288000" cy="72000"/>
+            </a:xfrm>
+            <a:prstGeom prst="rect">
+              <a:avLst/>
+            </a:prstGeom>
+            <a:solidFill>
+              <a:schemeClr val="bg1">
+                <a:lumMod val="95000"/>
+              </a:schemeClr>
+            </a:solidFill>
+            <a:ln>
+              <a:noFill/>
+            </a:ln>
+          </p:spPr>
+          <p:style>
+            <a:lnRef idx="2">
+              <a:schemeClr val="accent1">
+                <a:shade val="15000"/>
+              </a:schemeClr>
+            </a:lnRef>
+            <a:fillRef idx="1">
+              <a:schemeClr val="accent1"/>
+            </a:fillRef>
+            <a:effectRef idx="0">
+              <a:schemeClr val="accent1"/>
+            </a:effectRef>
+            <a:fontRef idx="minor">
+              <a:schemeClr val="lt1"/>
+            </a:fontRef>
+          </p:style>
+          <p:txBody>
+            <a:bodyPr rtlCol="0" anchor="ctr"/>
+            <a:lstStyle/>
+            <a:p>
+              <a:pPr algn="ctr"/>
+              <a:endParaRPr lang="zh-CN" altLang="en-US"/>
+            </a:p>
+          </p:txBody>
+        </p:sp>
+        <p:sp>
+          <p:nvSpPr>
+            <p:cNvPr id="62" name="矩形 61">
+              <a:extLst>
+                <a:ext uri="{FF2B5EF4-FFF2-40B4-BE49-F238E27FC236}">
+                  <a16:creationId xmlns:a16="http://schemas.microsoft.com/office/drawing/2014/main" id="{31EEF486-C12F-D047-04A9-5D1104BAEC13}"/>
+                </a:ext>
+              </a:extLst>
+            </p:cNvPr>
+            <p:cNvSpPr/>
+            <p:nvPr/>
+          </p:nvSpPr>
+          <p:spPr>
+            <a:xfrm>
+              <a:off x="6233560" y="1985012"/>
+              <a:ext cx="288000" cy="72000"/>
+            </a:xfrm>
+            <a:prstGeom prst="rect">
+              <a:avLst/>
+            </a:prstGeom>
+            <a:solidFill>
+              <a:schemeClr val="bg1">
+                <a:lumMod val="95000"/>
+              </a:schemeClr>
+            </a:solidFill>
+            <a:ln>
+              <a:noFill/>
+            </a:ln>
+          </p:spPr>
+          <p:style>
+            <a:lnRef idx="2">
+              <a:schemeClr val="accent1">
+                <a:shade val="15000"/>
+              </a:schemeClr>
+            </a:lnRef>
+            <a:fillRef idx="1">
+              <a:schemeClr val="accent1"/>
+            </a:fillRef>
+            <a:effectRef idx="0">
+              <a:schemeClr val="accent1"/>
+            </a:effectRef>
+            <a:fontRef idx="minor">
+              <a:schemeClr val="lt1"/>
+            </a:fontRef>
+          </p:style>
+          <p:txBody>
+            <a:bodyPr rtlCol="0" anchor="ctr"/>
+            <a:lstStyle/>
+            <a:p>
+              <a:pPr algn="ctr"/>
+              <a:endParaRPr lang="zh-CN" altLang="en-US"/>
+            </a:p>
+          </p:txBody>
+        </p:sp>
+        <p:sp>
+          <p:nvSpPr>
+            <p:cNvPr id="63" name="矩形 62">
+              <a:extLst>
+                <a:ext uri="{FF2B5EF4-FFF2-40B4-BE49-F238E27FC236}">
+                  <a16:creationId xmlns:a16="http://schemas.microsoft.com/office/drawing/2014/main" id="{73F12FC0-126E-07F4-5A0F-606B0F6654ED}"/>
+                </a:ext>
+              </a:extLst>
+            </p:cNvPr>
+            <p:cNvSpPr/>
+            <p:nvPr/>
+          </p:nvSpPr>
+          <p:spPr>
+            <a:xfrm>
+              <a:off x="6233560" y="2042612"/>
+              <a:ext cx="288000" cy="72000"/>
+            </a:xfrm>
+            <a:prstGeom prst="rect">
+              <a:avLst/>
+            </a:prstGeom>
+            <a:solidFill>
+              <a:schemeClr val="bg1">
+                <a:lumMod val="95000"/>
+              </a:schemeClr>
+            </a:solidFill>
+            <a:ln>
+              <a:noFill/>
+            </a:ln>
+          </p:spPr>
+          <p:style>
+            <a:lnRef idx="2">
+              <a:schemeClr val="accent1">
+                <a:shade val="15000"/>
+              </a:schemeClr>
+            </a:lnRef>
+            <a:fillRef idx="1">
+              <a:schemeClr val="accent1"/>
+            </a:fillRef>
+            <a:effectRef idx="0">
+              <a:schemeClr val="accent1"/>
+            </a:effectRef>
+            <a:fontRef idx="minor">
+              <a:schemeClr val="lt1"/>
+            </a:fontRef>
+          </p:style>
+          <p:txBody>
+            <a:bodyPr rtlCol="0" anchor="ctr"/>
+            <a:lstStyle/>
+            <a:p>
+              <a:pPr algn="ctr"/>
+              <a:endParaRPr lang="zh-CN" altLang="en-US"/>
+            </a:p>
+          </p:txBody>
+        </p:sp>
+        <p:sp>
+          <p:nvSpPr>
+            <p:cNvPr id="64" name="矩形 63">
+              <a:extLst>
+                <a:ext uri="{FF2B5EF4-FFF2-40B4-BE49-F238E27FC236}">
+                  <a16:creationId xmlns:a16="http://schemas.microsoft.com/office/drawing/2014/main" id="{66214CFD-5A95-AB58-CCC7-78F786972EE4}"/>
+                </a:ext>
+              </a:extLst>
+            </p:cNvPr>
+            <p:cNvSpPr/>
+            <p:nvPr/>
+          </p:nvSpPr>
+          <p:spPr>
+            <a:xfrm>
+              <a:off x="6233560" y="2100212"/>
+              <a:ext cx="288000" cy="72000"/>
+            </a:xfrm>
+            <a:prstGeom prst="rect">
+              <a:avLst/>
+            </a:prstGeom>
+            <a:solidFill>
+              <a:schemeClr val="bg1">
+                <a:lumMod val="95000"/>
+              </a:schemeClr>
+            </a:solidFill>
+            <a:ln>
+              <a:noFill/>
+            </a:ln>
+          </p:spPr>
+          <p:style>
+            <a:lnRef idx="2">
+              <a:schemeClr val="accent1">
+                <a:shade val="15000"/>
+              </a:schemeClr>
+            </a:lnRef>
+            <a:fillRef idx="1">
+              <a:schemeClr val="accent1"/>
+            </a:fillRef>
+            <a:effectRef idx="0">
+              <a:schemeClr val="accent1"/>
+            </a:effectRef>
+            <a:fontRef idx="minor">
+              <a:schemeClr val="lt1"/>
+            </a:fontRef>
+          </p:style>
+          <p:txBody>
+            <a:bodyPr rtlCol="0" anchor="ctr"/>
+            <a:lstStyle/>
+            <a:p>
+              <a:pPr algn="ctr"/>
+              <a:endParaRPr lang="zh-CN" altLang="en-US"/>
+            </a:p>
+          </p:txBody>
+        </p:sp>
+        <p:sp>
+          <p:nvSpPr>
+            <p:cNvPr id="65" name="文本框 64">
+              <a:extLst>
+                <a:ext uri="{FF2B5EF4-FFF2-40B4-BE49-F238E27FC236}">
+                  <a16:creationId xmlns:a16="http://schemas.microsoft.com/office/drawing/2014/main" id="{21FC1B37-AA45-139E-926B-8232672ED33E}"/>
+                </a:ext>
+              </a:extLst>
+            </p:cNvPr>
+            <p:cNvSpPr txBox="1"/>
+            <p:nvPr/>
+          </p:nvSpPr>
+          <p:spPr>
+            <a:xfrm>
+              <a:off x="6021196" y="1968913"/>
+              <a:ext cx="277640" cy="276999"/>
+            </a:xfrm>
+            <a:prstGeom prst="rect">
+              <a:avLst/>
+            </a:prstGeom>
+            <a:noFill/>
+          </p:spPr>
+          <p:txBody>
+            <a:bodyPr wrap="none" rtlCol="0">
+              <a:spAutoFit/>
+            </a:bodyPr>
+            <a:lstStyle/>
+            <a:p>
+              <a:pPr algn="l"/>
+              <a:r>
+                <a:rPr lang="en-US" altLang="zh-CN" sz="1200" dirty="0">
+                  <a:solidFill>
+                    <a:srgbClr val="FF0000"/>
+                  </a:solidFill>
+                  <a:latin typeface="Courier New" panose="02070309020205020404" pitchFamily="49" charset="0"/>
+                  <a:ea typeface="微软雅黑" panose="020B0503020204020204" pitchFamily="34" charset="-122"/>
+                  <a:cs typeface="Courier New" panose="02070309020205020404" pitchFamily="49" charset="0"/>
+                </a:rPr>
+                <a:t>a</a:t>
+              </a:r>
+              <a:endParaRPr lang="zh-CN" altLang="en-US" sz="1200" dirty="0">
+                <a:solidFill>
+                  <a:srgbClr val="FF0000"/>
+                </a:solidFill>
+                <a:latin typeface="Courier New" panose="02070309020205020404" pitchFamily="49" charset="0"/>
+                <a:ea typeface="微软雅黑" panose="020B0503020204020204" pitchFamily="34" charset="-122"/>
+                <a:cs typeface="Courier New" panose="02070309020205020404" pitchFamily="49" charset="0"/>
+              </a:endParaRPr>
+            </a:p>
+          </p:txBody>
+        </p:sp>
+      </p:grpSp>
+      <p:grpSp>
+        <p:nvGrpSpPr>
+          <p:cNvPr id="68" name="组合 67">
+            <a:extLst>
+              <a:ext uri="{FF2B5EF4-FFF2-40B4-BE49-F238E27FC236}">
+                <a16:creationId xmlns:a16="http://schemas.microsoft.com/office/drawing/2014/main" id="{2C1B7785-28AF-6325-BB5C-C5B0FC4972B8}"/>
+              </a:ext>
+            </a:extLst>
+          </p:cNvPr>
+          <p:cNvGrpSpPr/>
+          <p:nvPr/>
+        </p:nvGrpSpPr>
+        <p:grpSpPr>
+          <a:xfrm>
+            <a:off x="6181579" y="1613646"/>
+            <a:ext cx="500364" cy="360000"/>
+            <a:chOff x="6021196" y="1927412"/>
+            <a:chExt cx="500364" cy="360000"/>
+          </a:xfrm>
+        </p:grpSpPr>
+        <p:sp>
+          <p:nvSpPr>
+            <p:cNvPr id="85" name="矩形 84">
+              <a:extLst>
+                <a:ext uri="{FF2B5EF4-FFF2-40B4-BE49-F238E27FC236}">
+                  <a16:creationId xmlns:a16="http://schemas.microsoft.com/office/drawing/2014/main" id="{87AE1995-3315-FF77-9797-224E963023E2}"/>
+                </a:ext>
+              </a:extLst>
+            </p:cNvPr>
+            <p:cNvSpPr/>
+            <p:nvPr/>
+          </p:nvSpPr>
+          <p:spPr>
+            <a:xfrm>
+              <a:off x="6233560" y="1927412"/>
+              <a:ext cx="288000" cy="72000"/>
+            </a:xfrm>
+            <a:prstGeom prst="rect">
+              <a:avLst/>
+            </a:prstGeom>
+            <a:solidFill>
+              <a:schemeClr val="bg1">
+                <a:lumMod val="85000"/>
+              </a:schemeClr>
+            </a:solidFill>
+            <a:ln>
+              <a:noFill/>
+            </a:ln>
+          </p:spPr>
+          <p:style>
+            <a:lnRef idx="2">
+              <a:schemeClr val="accent1">
+                <a:shade val="15000"/>
+              </a:schemeClr>
+            </a:lnRef>
+            <a:fillRef idx="1">
+              <a:schemeClr val="accent1"/>
+            </a:fillRef>
+            <a:effectRef idx="0">
+              <a:schemeClr val="accent1"/>
+            </a:effectRef>
+            <a:fontRef idx="minor">
+              <a:schemeClr val="lt1"/>
+            </a:fontRef>
+          </p:style>
+          <p:txBody>
+            <a:bodyPr rtlCol="0" anchor="ctr"/>
+            <a:lstStyle/>
+            <a:p>
+              <a:pPr algn="ctr"/>
+              <a:endParaRPr lang="zh-CN" altLang="en-US"/>
+            </a:p>
+          </p:txBody>
+        </p:sp>
+        <p:sp>
+          <p:nvSpPr>
+            <p:cNvPr id="86" name="矩形 85">
+              <a:extLst>
+                <a:ext uri="{FF2B5EF4-FFF2-40B4-BE49-F238E27FC236}">
+                  <a16:creationId xmlns:a16="http://schemas.microsoft.com/office/drawing/2014/main" id="{0054F01C-EBA5-E10B-EAE0-71A9FBB1D7B6}"/>
+                </a:ext>
+              </a:extLst>
+            </p:cNvPr>
+            <p:cNvSpPr/>
+            <p:nvPr/>
+          </p:nvSpPr>
+          <p:spPr>
+            <a:xfrm>
+              <a:off x="6233560" y="2157812"/>
+              <a:ext cx="288000" cy="72000"/>
+            </a:xfrm>
+            <a:prstGeom prst="rect">
+              <a:avLst/>
+            </a:prstGeom>
+            <a:solidFill>
+              <a:schemeClr val="bg1">
+                <a:lumMod val="95000"/>
+              </a:schemeClr>
+            </a:solidFill>
+            <a:ln>
+              <a:noFill/>
+            </a:ln>
+          </p:spPr>
+          <p:style>
+            <a:lnRef idx="2">
+              <a:schemeClr val="accent1">
+                <a:shade val="15000"/>
+              </a:schemeClr>
+            </a:lnRef>
+            <a:fillRef idx="1">
+              <a:schemeClr val="accent1"/>
+            </a:fillRef>
+            <a:effectRef idx="0">
+              <a:schemeClr val="accent1"/>
+            </a:effectRef>
+            <a:fontRef idx="minor">
+              <a:schemeClr val="lt1"/>
+            </a:fontRef>
+          </p:style>
+          <p:txBody>
+            <a:bodyPr rtlCol="0" anchor="ctr"/>
+            <a:lstStyle/>
+            <a:p>
+              <a:pPr algn="ctr"/>
+              <a:endParaRPr lang="zh-CN" altLang="en-US"/>
+            </a:p>
+          </p:txBody>
+        </p:sp>
+        <p:sp>
+          <p:nvSpPr>
+            <p:cNvPr id="87" name="矩形 86">
+              <a:extLst>
+                <a:ext uri="{FF2B5EF4-FFF2-40B4-BE49-F238E27FC236}">
+                  <a16:creationId xmlns:a16="http://schemas.microsoft.com/office/drawing/2014/main" id="{E602ABC8-D041-30A2-8AE4-0C9805219317}"/>
+                </a:ext>
+              </a:extLst>
+            </p:cNvPr>
+            <p:cNvSpPr/>
+            <p:nvPr/>
+          </p:nvSpPr>
+          <p:spPr>
+            <a:xfrm>
+              <a:off x="6233560" y="2215412"/>
+              <a:ext cx="288000" cy="72000"/>
+            </a:xfrm>
+            <a:prstGeom prst="rect">
+              <a:avLst/>
+            </a:prstGeom>
+            <a:solidFill>
+              <a:schemeClr val="bg1">
+                <a:lumMod val="95000"/>
+              </a:schemeClr>
+            </a:solidFill>
+            <a:ln>
+              <a:noFill/>
+            </a:ln>
+          </p:spPr>
+          <p:style>
+            <a:lnRef idx="2">
+              <a:schemeClr val="accent1">
+                <a:shade val="15000"/>
+              </a:schemeClr>
+            </a:lnRef>
+            <a:fillRef idx="1">
+              <a:schemeClr val="accent1"/>
+            </a:fillRef>
+            <a:effectRef idx="0">
+              <a:schemeClr val="accent1"/>
+            </a:effectRef>
+            <a:fontRef idx="minor">
+              <a:schemeClr val="lt1"/>
+            </a:fontRef>
+          </p:style>
+          <p:txBody>
+            <a:bodyPr rtlCol="0" anchor="ctr"/>
+            <a:lstStyle/>
+            <a:p>
+              <a:pPr algn="ctr"/>
+              <a:endParaRPr lang="zh-CN" altLang="en-US"/>
+            </a:p>
+          </p:txBody>
+        </p:sp>
+        <p:sp>
+          <p:nvSpPr>
+            <p:cNvPr id="88" name="矩形 87">
+              <a:extLst>
+                <a:ext uri="{FF2B5EF4-FFF2-40B4-BE49-F238E27FC236}">
+                  <a16:creationId xmlns:a16="http://schemas.microsoft.com/office/drawing/2014/main" id="{49D9C45B-A327-2671-EE42-6E8D0FE16228}"/>
+                </a:ext>
+              </a:extLst>
+            </p:cNvPr>
+            <p:cNvSpPr/>
+            <p:nvPr/>
+          </p:nvSpPr>
+          <p:spPr>
+            <a:xfrm>
+              <a:off x="6233560" y="1985012"/>
+              <a:ext cx="288000" cy="72000"/>
+            </a:xfrm>
+            <a:prstGeom prst="rect">
+              <a:avLst/>
+            </a:prstGeom>
+            <a:solidFill>
+              <a:schemeClr val="bg1">
+                <a:lumMod val="85000"/>
+              </a:schemeClr>
+            </a:solidFill>
+            <a:ln>
+              <a:noFill/>
+            </a:ln>
+          </p:spPr>
+          <p:style>
+            <a:lnRef idx="2">
+              <a:schemeClr val="accent1">
+                <a:shade val="15000"/>
+              </a:schemeClr>
+            </a:lnRef>
+            <a:fillRef idx="1">
+              <a:schemeClr val="accent1"/>
+            </a:fillRef>
+            <a:effectRef idx="0">
+              <a:schemeClr val="accent1"/>
+            </a:effectRef>
+            <a:fontRef idx="minor">
+              <a:schemeClr val="lt1"/>
+            </a:fontRef>
+          </p:style>
+          <p:txBody>
+            <a:bodyPr rtlCol="0" anchor="ctr"/>
+            <a:lstStyle/>
+            <a:p>
+              <a:pPr algn="ctr"/>
+              <a:endParaRPr lang="zh-CN" altLang="en-US"/>
+            </a:p>
+          </p:txBody>
+        </p:sp>
+        <p:sp>
+          <p:nvSpPr>
+            <p:cNvPr id="89" name="矩形 88">
+              <a:extLst>
+                <a:ext uri="{FF2B5EF4-FFF2-40B4-BE49-F238E27FC236}">
+                  <a16:creationId xmlns:a16="http://schemas.microsoft.com/office/drawing/2014/main" id="{FF177BA0-2E68-0AA8-EA55-74B6FEF924C4}"/>
+                </a:ext>
+              </a:extLst>
+            </p:cNvPr>
+            <p:cNvSpPr/>
+            <p:nvPr/>
+          </p:nvSpPr>
+          <p:spPr>
+            <a:xfrm>
+              <a:off x="6233560" y="2042612"/>
+              <a:ext cx="288000" cy="72000"/>
+            </a:xfrm>
+            <a:prstGeom prst="rect">
+              <a:avLst/>
+            </a:prstGeom>
+            <a:solidFill>
+              <a:schemeClr val="bg1">
+                <a:lumMod val="95000"/>
+              </a:schemeClr>
+            </a:solidFill>
+            <a:ln>
+              <a:noFill/>
+            </a:ln>
+          </p:spPr>
+          <p:style>
+            <a:lnRef idx="2">
+              <a:schemeClr val="accent1">
+                <a:shade val="15000"/>
+              </a:schemeClr>
+            </a:lnRef>
+            <a:fillRef idx="1">
+              <a:schemeClr val="accent1"/>
+            </a:fillRef>
+            <a:effectRef idx="0">
+              <a:schemeClr val="accent1"/>
+            </a:effectRef>
+            <a:fontRef idx="minor">
+              <a:schemeClr val="lt1"/>
+            </a:fontRef>
+          </p:style>
+          <p:txBody>
+            <a:bodyPr rtlCol="0" anchor="ctr"/>
+            <a:lstStyle/>
+            <a:p>
+              <a:pPr algn="ctr"/>
+              <a:endParaRPr lang="zh-CN" altLang="en-US"/>
+            </a:p>
+          </p:txBody>
+        </p:sp>
+        <p:sp>
+          <p:nvSpPr>
+            <p:cNvPr id="90" name="矩形 89">
+              <a:extLst>
+                <a:ext uri="{FF2B5EF4-FFF2-40B4-BE49-F238E27FC236}">
+                  <a16:creationId xmlns:a16="http://schemas.microsoft.com/office/drawing/2014/main" id="{DA8B6111-A2C8-D837-66B9-08FF5E94D914}"/>
+                </a:ext>
+              </a:extLst>
+            </p:cNvPr>
+            <p:cNvSpPr/>
+            <p:nvPr/>
+          </p:nvSpPr>
+          <p:spPr>
+            <a:xfrm>
+              <a:off x="6233560" y="2100212"/>
+              <a:ext cx="288000" cy="72000"/>
+            </a:xfrm>
+            <a:prstGeom prst="rect">
+              <a:avLst/>
+            </a:prstGeom>
+            <a:solidFill>
+              <a:schemeClr val="bg1">
+                <a:lumMod val="95000"/>
+              </a:schemeClr>
+            </a:solidFill>
+            <a:ln>
+              <a:noFill/>
+            </a:ln>
+          </p:spPr>
+          <p:style>
+            <a:lnRef idx="2">
+              <a:schemeClr val="accent1">
+                <a:shade val="15000"/>
+              </a:schemeClr>
+            </a:lnRef>
+            <a:fillRef idx="1">
+              <a:schemeClr val="accent1"/>
+            </a:fillRef>
+            <a:effectRef idx="0">
+              <a:schemeClr val="accent1"/>
+            </a:effectRef>
+            <a:fontRef idx="minor">
+              <a:schemeClr val="lt1"/>
+            </a:fontRef>
+          </p:style>
+          <p:txBody>
+            <a:bodyPr rtlCol="0" anchor="ctr"/>
+            <a:lstStyle/>
+            <a:p>
+              <a:pPr algn="ctr"/>
+              <a:endParaRPr lang="zh-CN" altLang="en-US"/>
+            </a:p>
+          </p:txBody>
+        </p:sp>
+        <p:sp>
+          <p:nvSpPr>
+            <p:cNvPr id="91" name="文本框 90">
+              <a:extLst>
+                <a:ext uri="{FF2B5EF4-FFF2-40B4-BE49-F238E27FC236}">
+                  <a16:creationId xmlns:a16="http://schemas.microsoft.com/office/drawing/2014/main" id="{110E5261-1043-DF12-D880-DEF63B8F92BC}"/>
+                </a:ext>
+              </a:extLst>
+            </p:cNvPr>
+            <p:cNvSpPr txBox="1"/>
+            <p:nvPr/>
+          </p:nvSpPr>
+          <p:spPr>
+            <a:xfrm>
+              <a:off x="6021196" y="1968913"/>
+              <a:ext cx="277640" cy="276999"/>
+            </a:xfrm>
+            <a:prstGeom prst="rect">
+              <a:avLst/>
+            </a:prstGeom>
+            <a:noFill/>
+          </p:spPr>
+          <p:txBody>
+            <a:bodyPr wrap="none" rtlCol="0">
+              <a:spAutoFit/>
+            </a:bodyPr>
+            <a:lstStyle/>
+            <a:p>
+              <a:pPr algn="l"/>
+              <a:r>
+                <a:rPr lang="en-US" altLang="zh-CN" sz="1200" dirty="0">
+                  <a:solidFill>
+                    <a:srgbClr val="20BD6A"/>
+                  </a:solidFill>
+                  <a:latin typeface="Courier New" panose="02070309020205020404" pitchFamily="49" charset="0"/>
+                  <a:ea typeface="微软雅黑" panose="020B0503020204020204" pitchFamily="34" charset="-122"/>
+                  <a:cs typeface="Courier New" panose="02070309020205020404" pitchFamily="49" charset="0"/>
+                </a:rPr>
+                <a:t>y</a:t>
+              </a:r>
+              <a:endParaRPr lang="zh-CN" altLang="en-US" sz="1200" dirty="0">
+                <a:solidFill>
+                  <a:srgbClr val="20BD6A"/>
+                </a:solidFill>
+                <a:latin typeface="Courier New" panose="02070309020205020404" pitchFamily="49" charset="0"/>
+                <a:ea typeface="微软雅黑" panose="020B0503020204020204" pitchFamily="34" charset="-122"/>
+                <a:cs typeface="Courier New" panose="02070309020205020404" pitchFamily="49" charset="0"/>
+              </a:endParaRPr>
+            </a:p>
+          </p:txBody>
+        </p:sp>
+      </p:grpSp>
+      <p:grpSp>
+        <p:nvGrpSpPr>
+          <p:cNvPr id="70" name="组合 69">
+            <a:extLst>
+              <a:ext uri="{FF2B5EF4-FFF2-40B4-BE49-F238E27FC236}">
+                <a16:creationId xmlns:a16="http://schemas.microsoft.com/office/drawing/2014/main" id="{6ECACA64-201F-1DCE-A528-12EAE695D5B2}"/>
+              </a:ext>
+            </a:extLst>
+          </p:cNvPr>
+          <p:cNvGrpSpPr/>
+          <p:nvPr/>
+        </p:nvGrpSpPr>
+        <p:grpSpPr>
+          <a:xfrm>
+            <a:off x="5371564" y="1613646"/>
+            <a:ext cx="500364" cy="360000"/>
+            <a:chOff x="6021196" y="1927412"/>
+            <a:chExt cx="500364" cy="360000"/>
+          </a:xfrm>
+        </p:grpSpPr>
+        <p:sp>
+          <p:nvSpPr>
+            <p:cNvPr id="71" name="矩形 70">
+              <a:extLst>
+                <a:ext uri="{FF2B5EF4-FFF2-40B4-BE49-F238E27FC236}">
+                  <a16:creationId xmlns:a16="http://schemas.microsoft.com/office/drawing/2014/main" id="{689147F5-2DB7-469C-C9A4-79A2786B0E6B}"/>
+                </a:ext>
+              </a:extLst>
+            </p:cNvPr>
+            <p:cNvSpPr/>
+            <p:nvPr/>
+          </p:nvSpPr>
+          <p:spPr>
+            <a:xfrm>
+              <a:off x="6233560" y="1927412"/>
+              <a:ext cx="288000" cy="72000"/>
+            </a:xfrm>
+            <a:prstGeom prst="rect">
+              <a:avLst/>
+            </a:prstGeom>
+            <a:solidFill>
+              <a:schemeClr val="bg1">
+                <a:lumMod val="85000"/>
+              </a:schemeClr>
+            </a:solidFill>
+            <a:ln>
+              <a:noFill/>
+            </a:ln>
+          </p:spPr>
+          <p:style>
+            <a:lnRef idx="2">
+              <a:schemeClr val="accent1">
+                <a:shade val="15000"/>
+              </a:schemeClr>
+            </a:lnRef>
+            <a:fillRef idx="1">
+              <a:schemeClr val="accent1"/>
+            </a:fillRef>
+            <a:effectRef idx="0">
+              <a:schemeClr val="accent1"/>
+            </a:effectRef>
+            <a:fontRef idx="minor">
+              <a:schemeClr val="lt1"/>
+            </a:fontRef>
+          </p:style>
+          <p:txBody>
+            <a:bodyPr rtlCol="0" anchor="ctr"/>
+            <a:lstStyle/>
+            <a:p>
+              <a:pPr algn="ctr"/>
+              <a:endParaRPr lang="zh-CN" altLang="en-US"/>
+            </a:p>
+          </p:txBody>
+        </p:sp>
+        <p:sp>
+          <p:nvSpPr>
+            <p:cNvPr id="72" name="矩形 71">
+              <a:extLst>
+                <a:ext uri="{FF2B5EF4-FFF2-40B4-BE49-F238E27FC236}">
+                  <a16:creationId xmlns:a16="http://schemas.microsoft.com/office/drawing/2014/main" id="{CFB970BC-9D0D-39D5-1B66-92FE6DDC6D53}"/>
+                </a:ext>
+              </a:extLst>
+            </p:cNvPr>
+            <p:cNvSpPr/>
+            <p:nvPr/>
+          </p:nvSpPr>
+          <p:spPr>
+            <a:xfrm>
+              <a:off x="6233560" y="2157812"/>
+              <a:ext cx="288000" cy="72000"/>
+            </a:xfrm>
+            <a:prstGeom prst="rect">
+              <a:avLst/>
+            </a:prstGeom>
+            <a:solidFill>
+              <a:schemeClr val="bg1">
+                <a:lumMod val="95000"/>
+              </a:schemeClr>
+            </a:solidFill>
+            <a:ln>
+              <a:noFill/>
+            </a:ln>
+          </p:spPr>
+          <p:style>
+            <a:lnRef idx="2">
+              <a:schemeClr val="accent1">
+                <a:shade val="15000"/>
+              </a:schemeClr>
+            </a:lnRef>
+            <a:fillRef idx="1">
+              <a:schemeClr val="accent1"/>
+            </a:fillRef>
+            <a:effectRef idx="0">
+              <a:schemeClr val="accent1"/>
+            </a:effectRef>
+            <a:fontRef idx="minor">
+              <a:schemeClr val="lt1"/>
+            </a:fontRef>
+          </p:style>
+          <p:txBody>
+            <a:bodyPr rtlCol="0" anchor="ctr"/>
+            <a:lstStyle/>
+            <a:p>
+              <a:pPr algn="ctr"/>
+              <a:endParaRPr lang="zh-CN" altLang="en-US"/>
+            </a:p>
+          </p:txBody>
+        </p:sp>
+        <p:sp>
+          <p:nvSpPr>
+            <p:cNvPr id="73" name="矩形 72">
+              <a:extLst>
+                <a:ext uri="{FF2B5EF4-FFF2-40B4-BE49-F238E27FC236}">
+                  <a16:creationId xmlns:a16="http://schemas.microsoft.com/office/drawing/2014/main" id="{869461EA-2F46-387F-11AF-9273E85AC66A}"/>
+                </a:ext>
+              </a:extLst>
+            </p:cNvPr>
+            <p:cNvSpPr/>
+            <p:nvPr/>
+          </p:nvSpPr>
+          <p:spPr>
+            <a:xfrm>
+              <a:off x="6233560" y="2215412"/>
+              <a:ext cx="288000" cy="72000"/>
+            </a:xfrm>
+            <a:prstGeom prst="rect">
+              <a:avLst/>
+            </a:prstGeom>
+            <a:solidFill>
+              <a:schemeClr val="bg1">
+                <a:lumMod val="95000"/>
+              </a:schemeClr>
+            </a:solidFill>
+            <a:ln>
+              <a:noFill/>
+            </a:ln>
+          </p:spPr>
+          <p:style>
+            <a:lnRef idx="2">
+              <a:schemeClr val="accent1">
+                <a:shade val="15000"/>
+              </a:schemeClr>
+            </a:lnRef>
+            <a:fillRef idx="1">
+              <a:schemeClr val="accent1"/>
+            </a:fillRef>
+            <a:effectRef idx="0">
+              <a:schemeClr val="accent1"/>
+            </a:effectRef>
+            <a:fontRef idx="minor">
+              <a:schemeClr val="lt1"/>
+            </a:fontRef>
+          </p:style>
+          <p:txBody>
+            <a:bodyPr rtlCol="0" anchor="ctr"/>
+            <a:lstStyle/>
+            <a:p>
+              <a:pPr algn="ctr"/>
+              <a:endParaRPr lang="zh-CN" altLang="en-US"/>
+            </a:p>
+          </p:txBody>
+        </p:sp>
+        <p:sp>
+          <p:nvSpPr>
+            <p:cNvPr id="74" name="矩形 73">
+              <a:extLst>
+                <a:ext uri="{FF2B5EF4-FFF2-40B4-BE49-F238E27FC236}">
+                  <a16:creationId xmlns:a16="http://schemas.microsoft.com/office/drawing/2014/main" id="{B26B85BE-6EA5-3297-ACE5-4AAE406AA7E0}"/>
+                </a:ext>
+              </a:extLst>
+            </p:cNvPr>
+            <p:cNvSpPr/>
+            <p:nvPr/>
+          </p:nvSpPr>
+          <p:spPr>
+            <a:xfrm>
+              <a:off x="6233560" y="1985012"/>
+              <a:ext cx="288000" cy="72000"/>
+            </a:xfrm>
+            <a:prstGeom prst="rect">
+              <a:avLst/>
+            </a:prstGeom>
+            <a:solidFill>
+              <a:schemeClr val="bg1">
+                <a:lumMod val="85000"/>
+              </a:schemeClr>
+            </a:solidFill>
+            <a:ln>
+              <a:noFill/>
+            </a:ln>
+          </p:spPr>
+          <p:style>
+            <a:lnRef idx="2">
+              <a:schemeClr val="accent1">
+                <a:shade val="15000"/>
+              </a:schemeClr>
+            </a:lnRef>
+            <a:fillRef idx="1">
+              <a:schemeClr val="accent1"/>
+            </a:fillRef>
+            <a:effectRef idx="0">
+              <a:schemeClr val="accent1"/>
+            </a:effectRef>
+            <a:fontRef idx="minor">
+              <a:schemeClr val="lt1"/>
+            </a:fontRef>
+          </p:style>
+          <p:txBody>
+            <a:bodyPr rtlCol="0" anchor="ctr"/>
+            <a:lstStyle/>
+            <a:p>
+              <a:pPr algn="ctr"/>
+              <a:endParaRPr lang="zh-CN" altLang="en-US"/>
+            </a:p>
+          </p:txBody>
+        </p:sp>
+        <p:sp>
+          <p:nvSpPr>
+            <p:cNvPr id="75" name="矩形 74">
+              <a:extLst>
+                <a:ext uri="{FF2B5EF4-FFF2-40B4-BE49-F238E27FC236}">
+                  <a16:creationId xmlns:a16="http://schemas.microsoft.com/office/drawing/2014/main" id="{1FFB968D-EB71-EB02-A7E9-2B84CF0C40D1}"/>
+                </a:ext>
+              </a:extLst>
+            </p:cNvPr>
+            <p:cNvSpPr/>
+            <p:nvPr/>
+          </p:nvSpPr>
+          <p:spPr>
+            <a:xfrm>
+              <a:off x="6233560" y="2042612"/>
+              <a:ext cx="288000" cy="72000"/>
+            </a:xfrm>
+            <a:prstGeom prst="rect">
+              <a:avLst/>
+            </a:prstGeom>
+            <a:solidFill>
+              <a:schemeClr val="bg1">
+                <a:lumMod val="85000"/>
+              </a:schemeClr>
+            </a:solidFill>
+            <a:ln>
+              <a:noFill/>
+            </a:ln>
+          </p:spPr>
+          <p:style>
+            <a:lnRef idx="2">
+              <a:schemeClr val="accent1">
+                <a:shade val="15000"/>
+              </a:schemeClr>
+            </a:lnRef>
+            <a:fillRef idx="1">
+              <a:schemeClr val="accent1"/>
+            </a:fillRef>
+            <a:effectRef idx="0">
+              <a:schemeClr val="accent1"/>
+            </a:effectRef>
+            <a:fontRef idx="minor">
+              <a:schemeClr val="lt1"/>
+            </a:fontRef>
+          </p:style>
+          <p:txBody>
+            <a:bodyPr rtlCol="0" anchor="ctr"/>
+            <a:lstStyle/>
+            <a:p>
+              <a:pPr algn="ctr"/>
+              <a:endParaRPr lang="zh-CN" altLang="en-US"/>
+            </a:p>
+          </p:txBody>
+        </p:sp>
+        <p:sp>
+          <p:nvSpPr>
+            <p:cNvPr id="76" name="矩形 75">
+              <a:extLst>
+                <a:ext uri="{FF2B5EF4-FFF2-40B4-BE49-F238E27FC236}">
+                  <a16:creationId xmlns:a16="http://schemas.microsoft.com/office/drawing/2014/main" id="{72A919FF-CEC4-0191-4D11-35D51B499666}"/>
+                </a:ext>
+              </a:extLst>
+            </p:cNvPr>
+            <p:cNvSpPr/>
+            <p:nvPr/>
+          </p:nvSpPr>
+          <p:spPr>
+            <a:xfrm>
+              <a:off x="6233560" y="2100212"/>
+              <a:ext cx="288000" cy="72000"/>
+            </a:xfrm>
+            <a:prstGeom prst="rect">
+              <a:avLst/>
+            </a:prstGeom>
+            <a:solidFill>
+              <a:schemeClr val="bg1">
+                <a:lumMod val="95000"/>
+              </a:schemeClr>
+            </a:solidFill>
+            <a:ln>
+              <a:noFill/>
+            </a:ln>
+          </p:spPr>
+          <p:style>
+            <a:lnRef idx="2">
+              <a:schemeClr val="accent1">
+                <a:shade val="15000"/>
+              </a:schemeClr>
+            </a:lnRef>
+            <a:fillRef idx="1">
+              <a:schemeClr val="accent1"/>
+            </a:fillRef>
+            <a:effectRef idx="0">
+              <a:schemeClr val="accent1"/>
+            </a:effectRef>
+            <a:fontRef idx="minor">
+              <a:schemeClr val="lt1"/>
+            </a:fontRef>
+          </p:style>
+          <p:txBody>
+            <a:bodyPr rtlCol="0" anchor="ctr"/>
+            <a:lstStyle/>
+            <a:p>
+              <a:pPr algn="ctr"/>
+              <a:endParaRPr lang="zh-CN" altLang="en-US"/>
+            </a:p>
+          </p:txBody>
+        </p:sp>
+        <p:sp>
+          <p:nvSpPr>
+            <p:cNvPr id="77" name="文本框 76">
+              <a:extLst>
+                <a:ext uri="{FF2B5EF4-FFF2-40B4-BE49-F238E27FC236}">
+                  <a16:creationId xmlns:a16="http://schemas.microsoft.com/office/drawing/2014/main" id="{DA2B652A-F8C1-8697-AF28-C510F9E58D30}"/>
+                </a:ext>
+              </a:extLst>
+            </p:cNvPr>
+            <p:cNvSpPr txBox="1"/>
+            <p:nvPr/>
+          </p:nvSpPr>
+          <p:spPr>
+            <a:xfrm>
+              <a:off x="6021196" y="1968913"/>
+              <a:ext cx="277640" cy="276999"/>
+            </a:xfrm>
+            <a:prstGeom prst="rect">
+              <a:avLst/>
+            </a:prstGeom>
+            <a:noFill/>
+          </p:spPr>
+          <p:txBody>
+            <a:bodyPr wrap="none" rtlCol="0">
+              <a:spAutoFit/>
+            </a:bodyPr>
+            <a:lstStyle/>
+            <a:p>
+              <a:pPr algn="l"/>
+              <a:r>
+                <a:rPr lang="en-US" altLang="zh-CN" sz="1200" dirty="0">
+                  <a:solidFill>
+                    <a:srgbClr val="FF0000"/>
+                  </a:solidFill>
+                  <a:latin typeface="Courier New" panose="02070309020205020404" pitchFamily="49" charset="0"/>
+                  <a:ea typeface="微软雅黑" panose="020B0503020204020204" pitchFamily="34" charset="-122"/>
+                  <a:cs typeface="Courier New" panose="02070309020205020404" pitchFamily="49" charset="0"/>
+                </a:rPr>
+                <a:t>x</a:t>
+              </a:r>
+              <a:endParaRPr lang="zh-CN" altLang="en-US" sz="1200" dirty="0">
+                <a:solidFill>
+                  <a:srgbClr val="FF0000"/>
+                </a:solidFill>
+                <a:latin typeface="Courier New" panose="02070309020205020404" pitchFamily="49" charset="0"/>
+                <a:ea typeface="微软雅黑" panose="020B0503020204020204" pitchFamily="34" charset="-122"/>
+                <a:cs typeface="Courier New" panose="02070309020205020404" pitchFamily="49" charset="0"/>
+              </a:endParaRPr>
+            </a:p>
+          </p:txBody>
+        </p:sp>
+      </p:grpSp>
+      <p:sp>
+        <p:nvSpPr>
+          <p:cNvPr id="92" name="矩形 91">
+            <a:extLst>
+              <a:ext uri="{FF2B5EF4-FFF2-40B4-BE49-F238E27FC236}">
+                <a16:creationId xmlns:a16="http://schemas.microsoft.com/office/drawing/2014/main" id="{888FEABB-73F0-04A3-E7F6-03CDE808B5F5}"/>
+              </a:ext>
+            </a:extLst>
+          </p:cNvPr>
+          <p:cNvSpPr/>
+          <p:nvPr/>
+        </p:nvSpPr>
+        <p:spPr>
+          <a:xfrm>
+            <a:off x="1162062" y="1954304"/>
+            <a:ext cx="1984550" cy="666914"/>
+          </a:xfrm>
+          <a:prstGeom prst="rect">
+            <a:avLst/>
+          </a:prstGeom>
+          <a:noFill/>
+        </p:spPr>
+        <p:style>
+          <a:lnRef idx="2">
+            <a:schemeClr val="accent1">
+              <a:shade val="15000"/>
+            </a:schemeClr>
+          </a:lnRef>
+          <a:fillRef idx="1">
+            <a:schemeClr val="accent1"/>
+          </a:fillRef>
+          <a:effectRef idx="0">
+            <a:schemeClr val="accent1"/>
+          </a:effectRef>
+          <a:fontRef idx="minor">
+            <a:schemeClr val="lt1"/>
+          </a:fontRef>
+        </p:style>
+        <p:txBody>
+          <a:bodyPr rtlCol="0" anchor="ctr"/>
+          <a:lstStyle/>
+          <a:p>
+            <a:pPr algn="ctr"/>
+            <a:endParaRPr lang="zh-CN" altLang="en-US"/>
+          </a:p>
+        </p:txBody>
+      </p:sp>
+      <p:sp>
+        <p:nvSpPr>
+          <p:cNvPr id="93" name="文本框 92">
+            <a:extLst>
+              <a:ext uri="{FF2B5EF4-FFF2-40B4-BE49-F238E27FC236}">
+                <a16:creationId xmlns:a16="http://schemas.microsoft.com/office/drawing/2014/main" id="{7BFFA76B-7CCC-1BDD-0519-E31C2CEF215C}"/>
+              </a:ext>
+            </a:extLst>
+          </p:cNvPr>
+          <p:cNvSpPr txBox="1"/>
+          <p:nvPr/>
+        </p:nvSpPr>
+        <p:spPr>
+          <a:xfrm>
+            <a:off x="3230113" y="1136256"/>
+            <a:ext cx="1765227" cy="276999"/>
+          </a:xfrm>
+          <a:prstGeom prst="rect">
+            <a:avLst/>
+          </a:prstGeom>
+          <a:noFill/>
+        </p:spPr>
+        <p:txBody>
+          <a:bodyPr wrap="none" rtlCol="0">
+            <a:spAutoFit/>
+          </a:bodyPr>
+          <a:lstStyle/>
+          <a:p>
+            <a:pPr algn="ctr"/>
+            <a:r>
+              <a:rPr lang="en-US" altLang="zh-CN" sz="1200" dirty="0">
+                <a:latin typeface="Courier New" panose="02070309020205020404" pitchFamily="49" charset="0"/>
+                <a:ea typeface="微软雅黑" panose="020B0503020204020204" pitchFamily="34" charset="-122"/>
+                <a:cs typeface="Courier New" panose="02070309020205020404" pitchFamily="49" charset="0"/>
+              </a:rPr>
+              <a:t>Application Layer</a:t>
+            </a:r>
+            <a:endParaRPr lang="zh-CN" altLang="en-US" sz="1200" dirty="0">
+              <a:latin typeface="Courier New" panose="02070309020205020404" pitchFamily="49" charset="0"/>
+              <a:ea typeface="微软雅黑" panose="020B0503020204020204" pitchFamily="34" charset="-122"/>
+              <a:cs typeface="Courier New" panose="02070309020205020404" pitchFamily="49" charset="0"/>
+            </a:endParaRPr>
+          </a:p>
+        </p:txBody>
+      </p:sp>
+      <p:sp>
+        <p:nvSpPr>
+          <p:cNvPr id="94" name="文本框 93">
+            <a:extLst>
+              <a:ext uri="{FF2B5EF4-FFF2-40B4-BE49-F238E27FC236}">
+                <a16:creationId xmlns:a16="http://schemas.microsoft.com/office/drawing/2014/main" id="{78B4EAAF-8F9E-AE2E-0B18-C4FFF109669A}"/>
+              </a:ext>
+            </a:extLst>
+          </p:cNvPr>
+          <p:cNvSpPr txBox="1"/>
+          <p:nvPr/>
+        </p:nvSpPr>
+        <p:spPr>
+          <a:xfrm>
+            <a:off x="3834445" y="1629312"/>
+            <a:ext cx="556563" cy="276999"/>
+          </a:xfrm>
+          <a:prstGeom prst="rect">
+            <a:avLst/>
+          </a:prstGeom>
+          <a:noFill/>
+        </p:spPr>
+        <p:txBody>
+          <a:bodyPr wrap="none" rtlCol="0">
+            <a:spAutoFit/>
+          </a:bodyPr>
+          <a:lstStyle/>
+          <a:p>
+            <a:pPr algn="ctr"/>
+            <a:r>
+              <a:rPr lang="en-US" altLang="zh-CN" sz="1200" dirty="0">
+                <a:latin typeface="Courier New" panose="02070309020205020404" pitchFamily="49" charset="0"/>
+                <a:ea typeface="微软雅黑" panose="020B0503020204020204" pitchFamily="34" charset="-122"/>
+                <a:cs typeface="Courier New" panose="02070309020205020404" pitchFamily="49" charset="0"/>
+              </a:rPr>
+              <a:t>Port</a:t>
+            </a:r>
+            <a:endParaRPr lang="zh-CN" altLang="en-US" sz="1200" dirty="0">
+              <a:latin typeface="Courier New" panose="02070309020205020404" pitchFamily="49" charset="0"/>
+              <a:ea typeface="微软雅黑" panose="020B0503020204020204" pitchFamily="34" charset="-122"/>
+              <a:cs typeface="Courier New" panose="02070309020205020404" pitchFamily="49" charset="0"/>
+            </a:endParaRPr>
+          </a:p>
+        </p:txBody>
+      </p:sp>
+      <p:sp>
+        <p:nvSpPr>
+          <p:cNvPr id="95" name="文本框 94">
+            <a:extLst>
+              <a:ext uri="{FF2B5EF4-FFF2-40B4-BE49-F238E27FC236}">
+                <a16:creationId xmlns:a16="http://schemas.microsoft.com/office/drawing/2014/main" id="{BB7A9DAC-57B6-3ACD-5E13-83AEE7073E74}"/>
+              </a:ext>
+            </a:extLst>
+          </p:cNvPr>
+          <p:cNvSpPr txBox="1"/>
+          <p:nvPr/>
+        </p:nvSpPr>
+        <p:spPr>
+          <a:xfrm>
+            <a:off x="3323087" y="2149262"/>
+            <a:ext cx="1579279" cy="276999"/>
+          </a:xfrm>
+          <a:prstGeom prst="rect">
+            <a:avLst/>
+          </a:prstGeom>
+          <a:noFill/>
+        </p:spPr>
+        <p:txBody>
+          <a:bodyPr wrap="none" rtlCol="0">
+            <a:spAutoFit/>
+          </a:bodyPr>
+          <a:lstStyle/>
+          <a:p>
+            <a:pPr algn="ctr"/>
+            <a:r>
+              <a:rPr lang="en-US" altLang="zh-CN" sz="1200" dirty="0">
+                <a:latin typeface="Courier New" panose="02070309020205020404" pitchFamily="49" charset="0"/>
+                <a:ea typeface="微软雅黑" panose="020B0503020204020204" pitchFamily="34" charset="-122"/>
+                <a:cs typeface="Courier New" panose="02070309020205020404" pitchFamily="49" charset="0"/>
+              </a:rPr>
+              <a:t>Transport Layer</a:t>
+            </a:r>
+            <a:endParaRPr lang="zh-CN" altLang="en-US" sz="1200" dirty="0">
+              <a:latin typeface="Courier New" panose="02070309020205020404" pitchFamily="49" charset="0"/>
+              <a:ea typeface="微软雅黑" panose="020B0503020204020204" pitchFamily="34" charset="-122"/>
+              <a:cs typeface="Courier New" panose="02070309020205020404" pitchFamily="49" charset="0"/>
+            </a:endParaRPr>
+          </a:p>
+        </p:txBody>
+      </p:sp>
+      <p:sp>
+        <p:nvSpPr>
+          <p:cNvPr id="96" name="矩形 95">
+            <a:extLst>
+              <a:ext uri="{FF2B5EF4-FFF2-40B4-BE49-F238E27FC236}">
+                <a16:creationId xmlns:a16="http://schemas.microsoft.com/office/drawing/2014/main" id="{0BE6DD7B-018D-19B4-2101-31B944A8B234}"/>
+              </a:ext>
+            </a:extLst>
+          </p:cNvPr>
+          <p:cNvSpPr/>
+          <p:nvPr/>
+        </p:nvSpPr>
+        <p:spPr>
+          <a:xfrm>
+            <a:off x="5133426" y="941298"/>
+            <a:ext cx="1984550" cy="666914"/>
+          </a:xfrm>
+          <a:prstGeom prst="rect">
+            <a:avLst/>
+          </a:prstGeom>
+          <a:noFill/>
+        </p:spPr>
+        <p:style>
+          <a:lnRef idx="2">
+            <a:schemeClr val="accent1">
+              <a:shade val="15000"/>
+            </a:schemeClr>
+          </a:lnRef>
+          <a:fillRef idx="1">
+            <a:schemeClr val="accent1"/>
+          </a:fillRef>
+          <a:effectRef idx="0">
+            <a:schemeClr val="accent1"/>
+          </a:effectRef>
+          <a:fontRef idx="minor">
+            <a:schemeClr val="lt1"/>
+          </a:fontRef>
+        </p:style>
+        <p:txBody>
+          <a:bodyPr rtlCol="0" anchor="ctr"/>
+          <a:lstStyle/>
+          <a:p>
+            <a:pPr algn="ctr"/>
+            <a:endParaRPr lang="zh-CN" altLang="en-US"/>
+          </a:p>
+        </p:txBody>
+      </p:sp>
+      <p:sp>
+        <p:nvSpPr>
+          <p:cNvPr id="97" name="矩形 96">
+            <a:extLst>
+              <a:ext uri="{FF2B5EF4-FFF2-40B4-BE49-F238E27FC236}">
+                <a16:creationId xmlns:a16="http://schemas.microsoft.com/office/drawing/2014/main" id="{3EF20692-7A2A-6BCC-4AE5-92FF63D2F76B}"/>
+              </a:ext>
+            </a:extLst>
+          </p:cNvPr>
+          <p:cNvSpPr/>
+          <p:nvPr/>
+        </p:nvSpPr>
+        <p:spPr>
+          <a:xfrm>
+            <a:off x="5133426" y="1954304"/>
+            <a:ext cx="1984550" cy="666914"/>
+          </a:xfrm>
+          <a:prstGeom prst="rect">
+            <a:avLst/>
+          </a:prstGeom>
+          <a:noFill/>
+        </p:spPr>
+        <p:style>
+          <a:lnRef idx="2">
+            <a:schemeClr val="accent1">
+              <a:shade val="15000"/>
+            </a:schemeClr>
+          </a:lnRef>
+          <a:fillRef idx="1">
+            <a:schemeClr val="accent1"/>
+          </a:fillRef>
+          <a:effectRef idx="0">
+            <a:schemeClr val="accent1"/>
+          </a:effectRef>
+          <a:fontRef idx="minor">
+            <a:schemeClr val="lt1"/>
+          </a:fontRef>
+        </p:style>
+        <p:txBody>
+          <a:bodyPr rtlCol="0" anchor="ctr"/>
+          <a:lstStyle/>
+          <a:p>
+            <a:pPr algn="ctr"/>
+            <a:endParaRPr lang="zh-CN" altLang="en-US"/>
+          </a:p>
+        </p:txBody>
+      </p:sp>
+      <p:cxnSp>
+        <p:nvCxnSpPr>
+          <p:cNvPr id="99" name="连接符: 肘形 98">
+            <a:extLst>
+              <a:ext uri="{FF2B5EF4-FFF2-40B4-BE49-F238E27FC236}">
+                <a16:creationId xmlns:a16="http://schemas.microsoft.com/office/drawing/2014/main" id="{3C5353EC-0C26-3DA5-91BB-A7A2D466E8DB}"/>
+              </a:ext>
+            </a:extLst>
+          </p:cNvPr>
+          <p:cNvCxnSpPr>
+            <a:cxnSpLocks/>
+            <a:stCxn id="92" idx="2"/>
+            <a:endCxn id="97" idx="2"/>
+          </p:cNvCxnSpPr>
+          <p:nvPr/>
+        </p:nvCxnSpPr>
+        <p:spPr>
+          <a:xfrm rot="16200000" flipH="1">
+            <a:off x="4140019" y="635536"/>
+            <a:ext cx="12700" cy="3971364"/>
+          </a:xfrm>
+          <a:prstGeom prst="bentConnector3">
+            <a:avLst>
+              <a:gd name="adj1" fmla="val 3423528"/>
+            </a:avLst>
+          </a:prstGeom>
+          <a:ln>
+            <a:solidFill>
+              <a:schemeClr val="bg1">
+                <a:lumMod val="50000"/>
+              </a:schemeClr>
+            </a:solidFill>
+            <a:prstDash val="lgDash"/>
+            <a:tailEnd type="triangle"/>
+          </a:ln>
+        </p:spPr>
+        <p:style>
+          <a:lnRef idx="1">
+            <a:schemeClr val="accent1"/>
+          </a:lnRef>
+          <a:fillRef idx="0">
+            <a:schemeClr val="accent1"/>
+          </a:fillRef>
+          <a:effectRef idx="0">
+            <a:schemeClr val="accent1"/>
+          </a:effectRef>
+          <a:fontRef idx="minor">
+            <a:schemeClr val="tx1"/>
+          </a:fontRef>
+        </p:style>
+      </p:cxnSp>
+      <p:sp>
+        <p:nvSpPr>
+          <p:cNvPr id="101" name="文本框 100">
+            <a:extLst>
+              <a:ext uri="{FF2B5EF4-FFF2-40B4-BE49-F238E27FC236}">
+                <a16:creationId xmlns:a16="http://schemas.microsoft.com/office/drawing/2014/main" id="{ED49EBE7-C4F1-6FC3-1679-222C90BC5C16}"/>
+              </a:ext>
+            </a:extLst>
+          </p:cNvPr>
+          <p:cNvSpPr txBox="1"/>
+          <p:nvPr/>
+        </p:nvSpPr>
+        <p:spPr>
+          <a:xfrm>
+            <a:off x="3323087" y="3054700"/>
+            <a:ext cx="1579278" cy="276999"/>
+          </a:xfrm>
+          <a:prstGeom prst="rect">
+            <a:avLst/>
+          </a:prstGeom>
+          <a:noFill/>
+        </p:spPr>
+        <p:txBody>
+          <a:bodyPr wrap="none" rtlCol="0">
+            <a:spAutoFit/>
+          </a:bodyPr>
+          <a:lstStyle/>
+          <a:p>
+            <a:pPr algn="ctr"/>
+            <a:r>
+              <a:rPr lang="en-US" altLang="zh-CN" sz="1200" dirty="0">
+                <a:latin typeface="Courier New" panose="02070309020205020404" pitchFamily="49" charset="0"/>
+                <a:ea typeface="微软雅黑" panose="020B0503020204020204" pitchFamily="34" charset="-122"/>
+                <a:cs typeface="Courier New" panose="02070309020205020404" pitchFamily="49" charset="0"/>
+              </a:rPr>
+              <a:t>Logical channel</a:t>
+            </a:r>
+            <a:endParaRPr lang="zh-CN" altLang="en-US" sz="1200" dirty="0">
+              <a:latin typeface="Courier New" panose="02070309020205020404" pitchFamily="49" charset="0"/>
+              <a:ea typeface="微软雅黑" panose="020B0503020204020204" pitchFamily="34" charset="-122"/>
+              <a:cs typeface="Courier New" panose="02070309020205020404" pitchFamily="49" charset="0"/>
+            </a:endParaRPr>
+          </a:p>
+        </p:txBody>
+      </p:sp>
+      <p:cxnSp>
+        <p:nvCxnSpPr>
+          <p:cNvPr id="106" name="直接箭头连接符 105">
+            <a:extLst>
+              <a:ext uri="{FF2B5EF4-FFF2-40B4-BE49-F238E27FC236}">
+                <a16:creationId xmlns:a16="http://schemas.microsoft.com/office/drawing/2014/main" id="{9F95E230-B855-5A29-A91F-4D13421FE8F3}"/>
+              </a:ext>
+            </a:extLst>
+          </p:cNvPr>
+          <p:cNvCxnSpPr>
+            <a:cxnSpLocks/>
+          </p:cNvCxnSpPr>
+          <p:nvPr/>
+        </p:nvCxnSpPr>
+        <p:spPr>
+          <a:xfrm>
+            <a:off x="1631176" y="1444373"/>
+            <a:ext cx="0" cy="144000"/>
+          </a:xfrm>
+          <a:prstGeom prst="straightConnector1">
+            <a:avLst/>
+          </a:prstGeom>
+          <a:ln>
+            <a:solidFill>
+              <a:srgbClr val="EB3B5A"/>
+            </a:solidFill>
+            <a:tailEnd type="triangle"/>
+          </a:ln>
+        </p:spPr>
+        <p:style>
+          <a:lnRef idx="1">
+            <a:schemeClr val="accent1"/>
+          </a:lnRef>
+          <a:fillRef idx="0">
+            <a:schemeClr val="accent1"/>
+          </a:fillRef>
+          <a:effectRef idx="0">
+            <a:schemeClr val="accent1"/>
+          </a:effectRef>
+          <a:fontRef idx="minor">
+            <a:schemeClr val="tx1"/>
+          </a:fontRef>
+        </p:style>
+      </p:cxnSp>
+      <p:cxnSp>
+        <p:nvCxnSpPr>
+          <p:cNvPr id="107" name="直接箭头连接符 106">
+            <a:extLst>
+              <a:ext uri="{FF2B5EF4-FFF2-40B4-BE49-F238E27FC236}">
+                <a16:creationId xmlns:a16="http://schemas.microsoft.com/office/drawing/2014/main" id="{0F64A9B7-628A-1A23-350B-C708056CA88D}"/>
+              </a:ext>
+            </a:extLst>
+          </p:cNvPr>
+          <p:cNvCxnSpPr>
+            <a:cxnSpLocks/>
+          </p:cNvCxnSpPr>
+          <p:nvPr/>
+        </p:nvCxnSpPr>
+        <p:spPr>
+          <a:xfrm>
+            <a:off x="2205321" y="1444373"/>
+            <a:ext cx="0" cy="144000"/>
+          </a:xfrm>
+          <a:prstGeom prst="straightConnector1">
+            <a:avLst/>
+          </a:prstGeom>
+          <a:ln>
+            <a:solidFill>
+              <a:srgbClr val="EB3B5A"/>
+            </a:solidFill>
+            <a:tailEnd type="triangle"/>
+          </a:ln>
+        </p:spPr>
+        <p:style>
+          <a:lnRef idx="1">
+            <a:schemeClr val="accent1"/>
+          </a:lnRef>
+          <a:fillRef idx="0">
+            <a:schemeClr val="accent1"/>
+          </a:fillRef>
+          <a:effectRef idx="0">
+            <a:schemeClr val="accent1"/>
+          </a:effectRef>
+          <a:fontRef idx="minor">
+            <a:schemeClr val="tx1"/>
+          </a:fontRef>
+        </p:style>
+      </p:cxnSp>
+      <p:cxnSp>
+        <p:nvCxnSpPr>
+          <p:cNvPr id="108" name="直接箭头连接符 107">
+            <a:extLst>
+              <a:ext uri="{FF2B5EF4-FFF2-40B4-BE49-F238E27FC236}">
+                <a16:creationId xmlns:a16="http://schemas.microsoft.com/office/drawing/2014/main" id="{84A5B23B-C6FE-8F0E-60A0-FF0E219AC4FD}"/>
+              </a:ext>
+            </a:extLst>
+          </p:cNvPr>
+          <p:cNvCxnSpPr>
+            <a:cxnSpLocks/>
+          </p:cNvCxnSpPr>
+          <p:nvPr/>
+        </p:nvCxnSpPr>
+        <p:spPr>
+          <a:xfrm>
+            <a:off x="2877672" y="1444373"/>
+            <a:ext cx="0" cy="144000"/>
+          </a:xfrm>
+          <a:prstGeom prst="straightConnector1">
+            <a:avLst/>
+          </a:prstGeom>
+          <a:ln>
+            <a:solidFill>
+              <a:srgbClr val="20BD6A"/>
+            </a:solidFill>
+            <a:tailEnd type="triangle"/>
+          </a:ln>
+        </p:spPr>
+        <p:style>
+          <a:lnRef idx="1">
+            <a:schemeClr val="accent1"/>
+          </a:lnRef>
+          <a:fillRef idx="0">
+            <a:schemeClr val="accent1"/>
+          </a:fillRef>
+          <a:effectRef idx="0">
+            <a:schemeClr val="accent1"/>
+          </a:effectRef>
+          <a:fontRef idx="minor">
+            <a:schemeClr val="tx1"/>
+          </a:fontRef>
+        </p:style>
+      </p:cxnSp>
+      <p:cxnSp>
+        <p:nvCxnSpPr>
+          <p:cNvPr id="109" name="直接箭头连接符 108">
+            <a:extLst>
+              <a:ext uri="{FF2B5EF4-FFF2-40B4-BE49-F238E27FC236}">
+                <a16:creationId xmlns:a16="http://schemas.microsoft.com/office/drawing/2014/main" id="{F82FD08F-3A64-FD6C-A2E3-B71D5DB39489}"/>
+              </a:ext>
+            </a:extLst>
+          </p:cNvPr>
+          <p:cNvCxnSpPr>
+            <a:cxnSpLocks/>
+          </p:cNvCxnSpPr>
+          <p:nvPr/>
+        </p:nvCxnSpPr>
+        <p:spPr>
+          <a:xfrm>
+            <a:off x="5736737" y="1444373"/>
+            <a:ext cx="0" cy="144000"/>
+          </a:xfrm>
+          <a:prstGeom prst="straightConnector1">
+            <a:avLst/>
+          </a:prstGeom>
+          <a:ln>
+            <a:solidFill>
+              <a:schemeClr val="tx1"/>
+            </a:solidFill>
+            <a:tailEnd type="triangle"/>
+          </a:ln>
+        </p:spPr>
+        <p:style>
+          <a:lnRef idx="1">
+            <a:schemeClr val="accent1"/>
+          </a:lnRef>
+          <a:fillRef idx="0">
+            <a:schemeClr val="accent1"/>
+          </a:fillRef>
+          <a:effectRef idx="0">
+            <a:schemeClr val="accent1"/>
+          </a:effectRef>
+          <a:fontRef idx="minor">
+            <a:schemeClr val="tx1"/>
+          </a:fontRef>
+        </p:style>
+      </p:cxnSp>
+      <p:cxnSp>
+        <p:nvCxnSpPr>
+          <p:cNvPr id="110" name="直接箭头连接符 109">
+            <a:extLst>
+              <a:ext uri="{FF2B5EF4-FFF2-40B4-BE49-F238E27FC236}">
+                <a16:creationId xmlns:a16="http://schemas.microsoft.com/office/drawing/2014/main" id="{B58085E8-4B1F-E09F-657B-59008B7DC38A}"/>
+              </a:ext>
+            </a:extLst>
+          </p:cNvPr>
+          <p:cNvCxnSpPr>
+            <a:cxnSpLocks/>
+          </p:cNvCxnSpPr>
+          <p:nvPr/>
+        </p:nvCxnSpPr>
+        <p:spPr>
+          <a:xfrm>
+            <a:off x="6535271" y="1444373"/>
+            <a:ext cx="0" cy="144000"/>
+          </a:xfrm>
+          <a:prstGeom prst="straightConnector1">
+            <a:avLst/>
+          </a:prstGeom>
+          <a:ln>
+            <a:solidFill>
+              <a:srgbClr val="20BD6A"/>
+            </a:solidFill>
+            <a:tailEnd type="triangle"/>
+          </a:ln>
+        </p:spPr>
+        <p:style>
+          <a:lnRef idx="1">
+            <a:schemeClr val="accent1"/>
+          </a:lnRef>
+          <a:fillRef idx="0">
+            <a:schemeClr val="accent1"/>
+          </a:fillRef>
+          <a:effectRef idx="0">
+            <a:schemeClr val="accent1"/>
+          </a:effectRef>
+          <a:fontRef idx="minor">
+            <a:schemeClr val="tx1"/>
+          </a:fontRef>
+        </p:style>
+      </p:cxnSp>
+      <p:sp>
+        <p:nvSpPr>
+          <p:cNvPr id="113" name="文本框 112">
+            <a:extLst>
+              <a:ext uri="{FF2B5EF4-FFF2-40B4-BE49-F238E27FC236}">
+                <a16:creationId xmlns:a16="http://schemas.microsoft.com/office/drawing/2014/main" id="{31D96E86-612C-59A6-07F0-4553D172F74A}"/>
+              </a:ext>
+            </a:extLst>
+          </p:cNvPr>
+          <p:cNvSpPr txBox="1"/>
+          <p:nvPr/>
+        </p:nvSpPr>
+        <p:spPr>
+          <a:xfrm>
+            <a:off x="2171811" y="2638792"/>
+            <a:ext cx="1300356" cy="276999"/>
+          </a:xfrm>
+          <a:prstGeom prst="rect">
+            <a:avLst/>
+          </a:prstGeom>
+          <a:noFill/>
+        </p:spPr>
+        <p:txBody>
+          <a:bodyPr wrap="none" rtlCol="0">
+            <a:spAutoFit/>
+          </a:bodyPr>
+          <a:lstStyle/>
+          <a:p>
+            <a:pPr algn="l"/>
+            <a:r>
+              <a:rPr lang="en-US" altLang="zh-CN" sz="1200" dirty="0">
+                <a:latin typeface="Courier New" panose="02070309020205020404" pitchFamily="49" charset="0"/>
+                <a:ea typeface="微软雅黑" panose="020B0503020204020204" pitchFamily="34" charset="-122"/>
+                <a:cs typeface="Courier New" panose="02070309020205020404" pitchFamily="49" charset="0"/>
+              </a:rPr>
+              <a:t>Multiplexing</a:t>
+            </a:r>
+            <a:endParaRPr lang="zh-CN" altLang="en-US" sz="1200" dirty="0">
+              <a:latin typeface="Courier New" panose="02070309020205020404" pitchFamily="49" charset="0"/>
+              <a:ea typeface="微软雅黑" panose="020B0503020204020204" pitchFamily="34" charset="-122"/>
+              <a:cs typeface="Courier New" panose="02070309020205020404" pitchFamily="49" charset="0"/>
+            </a:endParaRPr>
+          </a:p>
+        </p:txBody>
+      </p:sp>
+      <p:sp>
+        <p:nvSpPr>
+          <p:cNvPr id="114" name="文本框 113">
+            <a:extLst>
+              <a:ext uri="{FF2B5EF4-FFF2-40B4-BE49-F238E27FC236}">
+                <a16:creationId xmlns:a16="http://schemas.microsoft.com/office/drawing/2014/main" id="{E1F78B75-9A57-987F-F596-E2F4E0AF2A96}"/>
+              </a:ext>
+            </a:extLst>
+          </p:cNvPr>
+          <p:cNvSpPr txBox="1"/>
+          <p:nvPr/>
+        </p:nvSpPr>
+        <p:spPr>
+          <a:xfrm>
+            <a:off x="4643729" y="2638792"/>
+            <a:ext cx="1486304" cy="276999"/>
+          </a:xfrm>
+          <a:prstGeom prst="rect">
+            <a:avLst/>
+          </a:prstGeom>
+          <a:noFill/>
+        </p:spPr>
+        <p:txBody>
+          <a:bodyPr wrap="none" rtlCol="0">
+            <a:spAutoFit/>
+          </a:bodyPr>
+          <a:lstStyle/>
+          <a:p>
+            <a:pPr algn="l"/>
+            <a:r>
+              <a:rPr lang="en-US" altLang="zh-CN" sz="1200" dirty="0">
+                <a:latin typeface="Courier New" panose="02070309020205020404" pitchFamily="49" charset="0"/>
+                <a:ea typeface="微软雅黑" panose="020B0503020204020204" pitchFamily="34" charset="-122"/>
+                <a:cs typeface="Courier New" panose="02070309020205020404" pitchFamily="49" charset="0"/>
+              </a:rPr>
+              <a:t>Demultiplexing</a:t>
+            </a:r>
+            <a:endParaRPr lang="zh-CN" altLang="en-US" sz="1200" dirty="0">
+              <a:latin typeface="Courier New" panose="02070309020205020404" pitchFamily="49" charset="0"/>
+              <a:ea typeface="微软雅黑" panose="020B0503020204020204" pitchFamily="34" charset="-122"/>
+              <a:cs typeface="Courier New" panose="02070309020205020404" pitchFamily="49" charset="0"/>
+            </a:endParaRPr>
+          </a:p>
+        </p:txBody>
+      </p:sp>
+      <p:cxnSp>
+        <p:nvCxnSpPr>
+          <p:cNvPr id="115" name="直接箭头连接符 114">
+            <a:extLst>
+              <a:ext uri="{FF2B5EF4-FFF2-40B4-BE49-F238E27FC236}">
+                <a16:creationId xmlns:a16="http://schemas.microsoft.com/office/drawing/2014/main" id="{522EF6EB-A31C-327C-6988-F23967A32403}"/>
+              </a:ext>
+            </a:extLst>
+          </p:cNvPr>
+          <p:cNvCxnSpPr>
+            <a:cxnSpLocks/>
+          </p:cNvCxnSpPr>
+          <p:nvPr/>
+        </p:nvCxnSpPr>
+        <p:spPr>
+          <a:xfrm>
+            <a:off x="1608860" y="1973646"/>
+            <a:ext cx="545477" cy="647572"/>
+          </a:xfrm>
+          <a:prstGeom prst="straightConnector1">
+            <a:avLst/>
+          </a:prstGeom>
+          <a:ln>
+            <a:solidFill>
+              <a:srgbClr val="EB3B5A"/>
+            </a:solidFill>
+            <a:tailEnd type="triangle"/>
+          </a:ln>
+        </p:spPr>
+        <p:style>
+          <a:lnRef idx="1">
+            <a:schemeClr val="accent1"/>
+          </a:lnRef>
+          <a:fillRef idx="0">
+            <a:schemeClr val="accent1"/>
+          </a:fillRef>
+          <a:effectRef idx="0">
+            <a:schemeClr val="accent1"/>
+          </a:effectRef>
+          <a:fontRef idx="minor">
+            <a:schemeClr val="tx1"/>
+          </a:fontRef>
+        </p:style>
+      </p:cxnSp>
+      <p:cxnSp>
+        <p:nvCxnSpPr>
+          <p:cNvPr id="117" name="直接箭头连接符 116">
+            <a:extLst>
+              <a:ext uri="{FF2B5EF4-FFF2-40B4-BE49-F238E27FC236}">
+                <a16:creationId xmlns:a16="http://schemas.microsoft.com/office/drawing/2014/main" id="{AADAE543-12BC-DB03-2563-BF2956BD561C}"/>
+              </a:ext>
+            </a:extLst>
+          </p:cNvPr>
+          <p:cNvCxnSpPr>
+            <a:cxnSpLocks/>
+            <a:stCxn id="53" idx="2"/>
+          </p:cNvCxnSpPr>
+          <p:nvPr/>
+        </p:nvCxnSpPr>
+        <p:spPr>
+          <a:xfrm flipH="1">
+            <a:off x="2260519" y="1947810"/>
+            <a:ext cx="612120" cy="690982"/>
+          </a:xfrm>
+          <a:prstGeom prst="straightConnector1">
+            <a:avLst/>
+          </a:prstGeom>
+          <a:ln>
+            <a:solidFill>
+              <a:srgbClr val="20BD6A"/>
+            </a:solidFill>
+            <a:tailEnd type="triangle"/>
+          </a:ln>
+        </p:spPr>
+        <p:style>
+          <a:lnRef idx="1">
+            <a:schemeClr val="accent1"/>
+          </a:lnRef>
+          <a:fillRef idx="0">
+            <a:schemeClr val="accent1"/>
+          </a:fillRef>
+          <a:effectRef idx="0">
+            <a:schemeClr val="accent1"/>
+          </a:effectRef>
+          <a:fontRef idx="minor">
+            <a:schemeClr val="tx1"/>
+          </a:fontRef>
+        </p:style>
+      </p:cxnSp>
+      <p:cxnSp>
+        <p:nvCxnSpPr>
+          <p:cNvPr id="125" name="直接箭头连接符 124">
+            <a:extLst>
+              <a:ext uri="{FF2B5EF4-FFF2-40B4-BE49-F238E27FC236}">
+                <a16:creationId xmlns:a16="http://schemas.microsoft.com/office/drawing/2014/main" id="{59A3AE77-7CC2-78DE-0312-42231F1660DF}"/>
+              </a:ext>
+            </a:extLst>
+          </p:cNvPr>
+          <p:cNvCxnSpPr>
+            <a:cxnSpLocks/>
+          </p:cNvCxnSpPr>
+          <p:nvPr/>
+        </p:nvCxnSpPr>
+        <p:spPr>
+          <a:xfrm>
+            <a:off x="2205321" y="1955359"/>
+            <a:ext cx="0" cy="648000"/>
+          </a:xfrm>
+          <a:prstGeom prst="straightConnector1">
+            <a:avLst/>
+          </a:prstGeom>
+          <a:ln>
+            <a:solidFill>
+              <a:srgbClr val="EB3B5A"/>
+            </a:solidFill>
+            <a:tailEnd type="triangle"/>
+          </a:ln>
+        </p:spPr>
+        <p:style>
+          <a:lnRef idx="1">
+            <a:schemeClr val="accent1"/>
+          </a:lnRef>
+          <a:fillRef idx="0">
+            <a:schemeClr val="accent1"/>
+          </a:fillRef>
+          <a:effectRef idx="0">
+            <a:schemeClr val="accent1"/>
+          </a:effectRef>
+          <a:fontRef idx="minor">
+            <a:schemeClr val="tx1"/>
+          </a:fontRef>
+        </p:style>
+      </p:cxnSp>
+      <p:cxnSp>
+        <p:nvCxnSpPr>
+          <p:cNvPr id="128" name="直接箭头连接符 127">
+            <a:extLst>
+              <a:ext uri="{FF2B5EF4-FFF2-40B4-BE49-F238E27FC236}">
+                <a16:creationId xmlns:a16="http://schemas.microsoft.com/office/drawing/2014/main" id="{E7AAC13A-7877-C8E2-C121-22971E49B0C1}"/>
+              </a:ext>
+            </a:extLst>
+          </p:cNvPr>
+          <p:cNvCxnSpPr>
+            <a:cxnSpLocks/>
+          </p:cNvCxnSpPr>
+          <p:nvPr/>
+        </p:nvCxnSpPr>
+        <p:spPr>
+          <a:xfrm flipH="1" flipV="1">
+            <a:off x="5708280" y="1968704"/>
+            <a:ext cx="426521" cy="586376"/>
+          </a:xfrm>
+          <a:prstGeom prst="straightConnector1">
+            <a:avLst/>
+          </a:prstGeom>
+          <a:ln>
+            <a:solidFill>
+              <a:srgbClr val="EB3B5A"/>
+            </a:solidFill>
+            <a:tailEnd type="triangle"/>
+          </a:ln>
+        </p:spPr>
+        <p:style>
+          <a:lnRef idx="1">
+            <a:schemeClr val="accent1"/>
+          </a:lnRef>
+          <a:fillRef idx="0">
+            <a:schemeClr val="accent1"/>
+          </a:fillRef>
+          <a:effectRef idx="0">
+            <a:schemeClr val="accent1"/>
+          </a:effectRef>
+          <a:fontRef idx="minor">
+            <a:schemeClr val="tx1"/>
+          </a:fontRef>
+        </p:style>
+      </p:cxnSp>
+      <p:cxnSp>
+        <p:nvCxnSpPr>
+          <p:cNvPr id="130" name="直接箭头连接符 129">
+            <a:extLst>
+              <a:ext uri="{FF2B5EF4-FFF2-40B4-BE49-F238E27FC236}">
+                <a16:creationId xmlns:a16="http://schemas.microsoft.com/office/drawing/2014/main" id="{F8896D3E-8D00-8E4F-BE16-F2F757596011}"/>
+              </a:ext>
+            </a:extLst>
+          </p:cNvPr>
+          <p:cNvCxnSpPr>
+            <a:cxnSpLocks/>
+          </p:cNvCxnSpPr>
+          <p:nvPr/>
+        </p:nvCxnSpPr>
+        <p:spPr>
+          <a:xfrm flipV="1">
+            <a:off x="6134801" y="1943080"/>
+            <a:ext cx="400470" cy="612000"/>
+          </a:xfrm>
+          <a:prstGeom prst="straightConnector1">
+            <a:avLst/>
+          </a:prstGeom>
+          <a:ln>
+            <a:solidFill>
+              <a:srgbClr val="20BD6A"/>
+            </a:solidFill>
+            <a:tailEnd type="triangle"/>
+          </a:ln>
+        </p:spPr>
+        <p:style>
+          <a:lnRef idx="1">
+            <a:schemeClr val="accent1"/>
+          </a:lnRef>
+          <a:fillRef idx="0">
+            <a:schemeClr val="accent1"/>
+          </a:fillRef>
+          <a:effectRef idx="0">
+            <a:schemeClr val="accent1"/>
+          </a:effectRef>
+          <a:fontRef idx="minor">
+            <a:schemeClr val="tx1"/>
+          </a:fontRef>
+        </p:style>
+      </p:cxnSp>
+      <p:sp>
+        <p:nvSpPr>
+          <p:cNvPr id="133" name="文本框 132">
+            <a:extLst>
+              <a:ext uri="{FF2B5EF4-FFF2-40B4-BE49-F238E27FC236}">
+                <a16:creationId xmlns:a16="http://schemas.microsoft.com/office/drawing/2014/main" id="{AE814C0F-52D6-33B1-47C2-8CB08BA624A7}"/>
+              </a:ext>
+            </a:extLst>
+          </p:cNvPr>
+          <p:cNvSpPr txBox="1"/>
+          <p:nvPr/>
+        </p:nvSpPr>
+        <p:spPr>
+          <a:xfrm>
+            <a:off x="1954603" y="561975"/>
+            <a:ext cx="399468" cy="307777"/>
+          </a:xfrm>
+          <a:prstGeom prst="rect">
+            <a:avLst/>
+          </a:prstGeom>
+          <a:noFill/>
+        </p:spPr>
+        <p:txBody>
+          <a:bodyPr wrap="none" rtlCol="0">
+            <a:spAutoFit/>
+          </a:bodyPr>
+          <a:lstStyle/>
+          <a:p>
+            <a:pPr algn="ctr"/>
+            <a:r>
+              <a:rPr lang="en-US" altLang="zh-CN" sz="1400" dirty="0">
+                <a:latin typeface="Courier New" panose="02070309020205020404" pitchFamily="49" charset="0"/>
+                <a:ea typeface="微软雅黑" panose="020B0503020204020204" pitchFamily="34" charset="-122"/>
+                <a:cs typeface="Courier New" panose="02070309020205020404" pitchFamily="49" charset="0"/>
+              </a:rPr>
+              <a:t>H1</a:t>
+            </a:r>
+            <a:endParaRPr lang="zh-CN" altLang="en-US" sz="1400" dirty="0">
+              <a:latin typeface="Courier New" panose="02070309020205020404" pitchFamily="49" charset="0"/>
+              <a:ea typeface="微软雅黑" panose="020B0503020204020204" pitchFamily="34" charset="-122"/>
+              <a:cs typeface="Courier New" panose="02070309020205020404" pitchFamily="49" charset="0"/>
+            </a:endParaRPr>
+          </a:p>
+        </p:txBody>
+      </p:sp>
+      <p:sp>
+        <p:nvSpPr>
+          <p:cNvPr id="134" name="文本框 133">
+            <a:extLst>
+              <a:ext uri="{FF2B5EF4-FFF2-40B4-BE49-F238E27FC236}">
+                <a16:creationId xmlns:a16="http://schemas.microsoft.com/office/drawing/2014/main" id="{C0E3A1EE-675E-B52B-E72D-37290E277572}"/>
+              </a:ext>
+            </a:extLst>
+          </p:cNvPr>
+          <p:cNvSpPr txBox="1"/>
+          <p:nvPr/>
+        </p:nvSpPr>
+        <p:spPr>
+          <a:xfrm>
+            <a:off x="5925967" y="561975"/>
+            <a:ext cx="399468" cy="307777"/>
+          </a:xfrm>
+          <a:prstGeom prst="rect">
+            <a:avLst/>
+          </a:prstGeom>
+          <a:noFill/>
+        </p:spPr>
+        <p:txBody>
+          <a:bodyPr wrap="none" rtlCol="0">
+            <a:spAutoFit/>
+          </a:bodyPr>
+          <a:lstStyle/>
+          <a:p>
+            <a:pPr algn="ctr"/>
+            <a:r>
+              <a:rPr lang="en-US" altLang="zh-CN" sz="1400" dirty="0">
+                <a:latin typeface="Courier New" panose="02070309020205020404" pitchFamily="49" charset="0"/>
+                <a:ea typeface="微软雅黑" panose="020B0503020204020204" pitchFamily="34" charset="-122"/>
+                <a:cs typeface="Courier New" panose="02070309020205020404" pitchFamily="49" charset="0"/>
+              </a:rPr>
+              <a:t>H2</a:t>
+            </a:r>
+            <a:endParaRPr lang="zh-CN" altLang="en-US" sz="1400" dirty="0">
+              <a:latin typeface="Courier New" panose="02070309020205020404" pitchFamily="49" charset="0"/>
+              <a:ea typeface="微软雅黑" panose="020B0503020204020204" pitchFamily="34" charset="-122"/>
+              <a:cs typeface="Courier New" panose="02070309020205020404" pitchFamily="49" charset="0"/>
+            </a:endParaRPr>
+          </a:p>
+        </p:txBody>
+      </p:sp>
+    </p:spTree>
+    <p:extLst>
+      <p:ext uri="{BB962C8B-B14F-4D97-AF65-F5344CB8AC3E}">
+        <p14:creationId xmlns:p14="http://schemas.microsoft.com/office/powerpoint/2010/main" val="3411162658"/>
+      </p:ext>
+    </p:extLst>
+  </p:cSld>
+  <p:clrMapOvr>
+    <a:masterClrMapping/>
+  </p:clrMapOvr>
+</p:sld>
+</file>
+
+<file path=ppt/slides/slide5.xml><?xml version="1.0" encoding="utf-8"?>
+<p:sld xmlns:a="http://schemas.openxmlformats.org/drawingml/2006/main" xmlns:r="http://schemas.openxmlformats.org/officeDocument/2006/relationships" xmlns:p="http://schemas.openxmlformats.org/presentationml/2006/main">
+  <p:cSld>
+    <p:spTree>
+      <p:nvGrpSpPr>
+        <p:cNvPr id="1" name=""/>
+        <p:cNvGrpSpPr/>
+        <p:nvPr/>
+      </p:nvGrpSpPr>
+      <p:grpSpPr>
+        <a:xfrm>
+          <a:off x="0" y="0"/>
+          <a:ext cx="0" cy="0"/>
+          <a:chOff x="0" y="0"/>
+          <a:chExt cx="0" cy="0"/>
+        </a:xfrm>
+      </p:grpSpPr>
+      <p:sp>
+        <p:nvSpPr>
           <p:cNvPr id="2" name="矩形: 圆角 1">
             <a:extLst>
               <a:ext uri="{FF2B5EF4-FFF2-40B4-BE49-F238E27FC236}">
@@ -32624,7 +37282,7 @@
 </p:sld>
 </file>
 
-<file path=ppt/slides/slide5.xml><?xml version="1.0" encoding="utf-8"?>
+<file path=ppt/slides/slide6.xml><?xml version="1.0" encoding="utf-8"?>
 <p:sld xmlns:a="http://schemas.openxmlformats.org/drawingml/2006/main" xmlns:r="http://schemas.openxmlformats.org/officeDocument/2006/relationships" xmlns:p="http://schemas.openxmlformats.org/presentationml/2006/main">
   <p:cSld>
     <p:spTree>
@@ -35833,7 +40491,7 @@
 </p:sld>
 </file>
 
-<file path=ppt/slides/slide6.xml><?xml version="1.0" encoding="utf-8"?>
+<file path=ppt/slides/slide7.xml><?xml version="1.0" encoding="utf-8"?>
 <p:sld xmlns:a="http://schemas.openxmlformats.org/drawingml/2006/main" xmlns:r="http://schemas.openxmlformats.org/officeDocument/2006/relationships" xmlns:p="http://schemas.openxmlformats.org/presentationml/2006/main">
   <p:cSld>
     <p:spTree>
@@ -38011,7 +42669,7 @@
 </p:sld>
 </file>
 
-<file path=ppt/slides/slide7.xml><?xml version="1.0" encoding="utf-8"?>
+<file path=ppt/slides/slide8.xml><?xml version="1.0" encoding="utf-8"?>
 <p:sld xmlns:a="http://schemas.openxmlformats.org/drawingml/2006/main" xmlns:r="http://schemas.openxmlformats.org/officeDocument/2006/relationships" xmlns:p="http://schemas.openxmlformats.org/presentationml/2006/main">
   <p:cSld>
     <p:spTree>
@@ -38956,7 +43614,7 @@
 </p:sld>
 </file>
 
-<file path=ppt/slides/slide8.xml><?xml version="1.0" encoding="utf-8"?>
+<file path=ppt/slides/slide9.xml><?xml version="1.0" encoding="utf-8"?>
 <p:sld xmlns:a="http://schemas.openxmlformats.org/drawingml/2006/main" xmlns:r="http://schemas.openxmlformats.org/officeDocument/2006/relationships" xmlns:p="http://schemas.openxmlformats.org/presentationml/2006/main">
   <p:cSld>
     <p:spTree>
@@ -40676,972 +45334,6 @@
     <p:extLst>
       <p:ext uri="{BB962C8B-B14F-4D97-AF65-F5344CB8AC3E}">
         <p14:creationId xmlns:p14="http://schemas.microsoft.com/office/powerpoint/2010/main" val="2989024140"/>
-      </p:ext>
-    </p:extLst>
-  </p:cSld>
-  <p:clrMapOvr>
-    <a:masterClrMapping/>
-  </p:clrMapOvr>
-</p:sld>
-</file>
-
-<file path=ppt/slides/slide9.xml><?xml version="1.0" encoding="utf-8"?>
-<p:sld xmlns:a="http://schemas.openxmlformats.org/drawingml/2006/main" xmlns:r="http://schemas.openxmlformats.org/officeDocument/2006/relationships" xmlns:p="http://schemas.openxmlformats.org/presentationml/2006/main">
-  <p:cSld>
-    <p:spTree>
-      <p:nvGrpSpPr>
-        <p:cNvPr id="1" name="">
-          <a:extLst>
-            <a:ext uri="{FF2B5EF4-FFF2-40B4-BE49-F238E27FC236}">
-              <a16:creationId xmlns:a16="http://schemas.microsoft.com/office/drawing/2014/main" id="{5C7A2C4C-DE35-8F5D-FAA3-1F45B914C406}"/>
-            </a:ext>
-          </a:extLst>
-        </p:cNvPr>
-        <p:cNvGrpSpPr/>
-        <p:nvPr/>
-      </p:nvGrpSpPr>
-      <p:grpSpPr>
-        <a:xfrm>
-          <a:off x="0" y="0"/>
-          <a:ext cx="0" cy="0"/>
-          <a:chOff x="0" y="0"/>
-          <a:chExt cx="0" cy="0"/>
-        </a:xfrm>
-      </p:grpSpPr>
-      <p:sp>
-        <p:nvSpPr>
-          <p:cNvPr id="7" name="矩形: 圆角 6">
-            <a:extLst>
-              <a:ext uri="{FF2B5EF4-FFF2-40B4-BE49-F238E27FC236}">
-                <a16:creationId xmlns:a16="http://schemas.microsoft.com/office/drawing/2014/main" id="{E9167702-BFB3-0DB3-BB79-C1FC75427EA0}"/>
-              </a:ext>
-            </a:extLst>
-          </p:cNvPr>
-          <p:cNvSpPr/>
-          <p:nvPr/>
-        </p:nvSpPr>
-        <p:spPr>
-          <a:xfrm>
-            <a:off x="4988680" y="2930400"/>
-            <a:ext cx="900000" cy="216000"/>
-          </a:xfrm>
-          <a:prstGeom prst="roundRect">
-            <a:avLst/>
-          </a:prstGeom>
-          <a:solidFill>
-            <a:srgbClr val="335BA3">
-              <a:alpha val="89804"/>
-            </a:srgbClr>
-          </a:solidFill>
-          <a:ln w="12700">
-            <a:noFill/>
-          </a:ln>
-        </p:spPr>
-        <p:style>
-          <a:lnRef idx="2">
-            <a:schemeClr val="accent1">
-              <a:shade val="15000"/>
-            </a:schemeClr>
-          </a:lnRef>
-          <a:fillRef idx="1">
-            <a:schemeClr val="accent1"/>
-          </a:fillRef>
-          <a:effectRef idx="0">
-            <a:schemeClr val="accent1"/>
-          </a:effectRef>
-          <a:fontRef idx="minor">
-            <a:schemeClr val="lt1"/>
-          </a:fontRef>
-        </p:style>
-        <p:txBody>
-          <a:bodyPr rtlCol="0" anchor="ctr"/>
-          <a:lstStyle/>
-          <a:p>
-            <a:pPr algn="ctr"/>
-            <a:r>
-              <a:rPr lang="en-US" altLang="zh-CN" sz="800">
-                <a:latin typeface="Quicksand" panose="00000500000000000000" pitchFamily="2" charset="0"/>
-              </a:rPr>
-              <a:t>::before</a:t>
-            </a:r>
-            <a:endParaRPr lang="zh-CN" altLang="en-US" sz="800">
-              <a:latin typeface="Quicksand" panose="00000500000000000000" pitchFamily="2" charset="0"/>
-            </a:endParaRPr>
-          </a:p>
-        </p:txBody>
-      </p:sp>
-      <p:sp>
-        <p:nvSpPr>
-          <p:cNvPr id="25" name="矩形: 圆角 24">
-            <a:extLst>
-              <a:ext uri="{FF2B5EF4-FFF2-40B4-BE49-F238E27FC236}">
-                <a16:creationId xmlns:a16="http://schemas.microsoft.com/office/drawing/2014/main" id="{DB29B0F0-7681-C319-D905-61DFC9EA1742}"/>
-              </a:ext>
-            </a:extLst>
-          </p:cNvPr>
-          <p:cNvSpPr/>
-          <p:nvPr/>
-        </p:nvSpPr>
-        <p:spPr>
-          <a:xfrm>
-            <a:off x="6057780" y="2534400"/>
-            <a:ext cx="900000" cy="216000"/>
-          </a:xfrm>
-          <a:prstGeom prst="roundRect">
-            <a:avLst/>
-          </a:prstGeom>
-          <a:solidFill>
-            <a:srgbClr val="F9423A">
-              <a:alpha val="89804"/>
-            </a:srgbClr>
-          </a:solidFill>
-          <a:ln w="12700">
-            <a:noFill/>
-          </a:ln>
-        </p:spPr>
-        <p:style>
-          <a:lnRef idx="2">
-            <a:schemeClr val="accent1">
-              <a:shade val="15000"/>
-            </a:schemeClr>
-          </a:lnRef>
-          <a:fillRef idx="1">
-            <a:schemeClr val="accent1"/>
-          </a:fillRef>
-          <a:effectRef idx="0">
-            <a:schemeClr val="accent1"/>
-          </a:effectRef>
-          <a:fontRef idx="minor">
-            <a:schemeClr val="lt1"/>
-          </a:fontRef>
-        </p:style>
-        <p:txBody>
-          <a:bodyPr rtlCol="0" anchor="ctr"/>
-          <a:lstStyle/>
-          <a:p>
-            <a:pPr algn="ctr"/>
-            <a:r>
-              <a:rPr lang="en-US" altLang="zh-CN" sz="800">
-                <a:latin typeface="Quicksand" panose="00000500000000000000" pitchFamily="2" charset="0"/>
-              </a:rPr>
-              <a:t>String of text</a:t>
-            </a:r>
-            <a:endParaRPr lang="zh-CN" altLang="en-US" sz="800">
-              <a:latin typeface="Quicksand" panose="00000500000000000000" pitchFamily="2" charset="0"/>
-            </a:endParaRPr>
-          </a:p>
-        </p:txBody>
-      </p:sp>
-      <p:sp>
-        <p:nvSpPr>
-          <p:cNvPr id="26" name="矩形: 圆角 25">
-            <a:extLst>
-              <a:ext uri="{FF2B5EF4-FFF2-40B4-BE49-F238E27FC236}">
-                <a16:creationId xmlns:a16="http://schemas.microsoft.com/office/drawing/2014/main" id="{A362D5C7-ED9E-7876-9B3A-5E7694F2029B}"/>
-              </a:ext>
-            </a:extLst>
-          </p:cNvPr>
-          <p:cNvSpPr/>
-          <p:nvPr/>
-        </p:nvSpPr>
-        <p:spPr>
-          <a:xfrm>
-            <a:off x="6057780" y="2798400"/>
-            <a:ext cx="900000" cy="216000"/>
-          </a:xfrm>
-          <a:prstGeom prst="roundRect">
-            <a:avLst/>
-          </a:prstGeom>
-          <a:solidFill>
-            <a:srgbClr val="F6A04D">
-              <a:alpha val="89804"/>
-            </a:srgbClr>
-          </a:solidFill>
-          <a:ln w="12700">
-            <a:noFill/>
-          </a:ln>
-        </p:spPr>
-        <p:style>
-          <a:lnRef idx="2">
-            <a:schemeClr val="accent1">
-              <a:shade val="15000"/>
-            </a:schemeClr>
-          </a:lnRef>
-          <a:fillRef idx="1">
-            <a:schemeClr val="accent1"/>
-          </a:fillRef>
-          <a:effectRef idx="0">
-            <a:schemeClr val="accent1"/>
-          </a:effectRef>
-          <a:fontRef idx="minor">
-            <a:schemeClr val="lt1"/>
-          </a:fontRef>
-        </p:style>
-        <p:txBody>
-          <a:bodyPr rtlCol="0" anchor="ctr"/>
-          <a:lstStyle/>
-          <a:p>
-            <a:pPr algn="ctr"/>
-            <a:r>
-              <a:rPr lang="en-US" altLang="zh-CN" sz="800">
-                <a:latin typeface="Quicksand" panose="00000500000000000000" pitchFamily="2" charset="0"/>
-              </a:rPr>
-              <a:t>Entity</a:t>
-            </a:r>
-            <a:endParaRPr lang="zh-CN" altLang="en-US" sz="800">
-              <a:latin typeface="Quicksand" panose="00000500000000000000" pitchFamily="2" charset="0"/>
-            </a:endParaRPr>
-          </a:p>
-        </p:txBody>
-      </p:sp>
-      <p:cxnSp>
-        <p:nvCxnSpPr>
-          <p:cNvPr id="28" name="连接符: 曲线 27">
-            <a:extLst>
-              <a:ext uri="{FF2B5EF4-FFF2-40B4-BE49-F238E27FC236}">
-                <a16:creationId xmlns:a16="http://schemas.microsoft.com/office/drawing/2014/main" id="{3CC45C27-5C3D-1BF1-5E05-EB880994D1C9}"/>
-              </a:ext>
-            </a:extLst>
-          </p:cNvPr>
-          <p:cNvCxnSpPr>
-            <a:cxnSpLocks/>
-            <a:stCxn id="7" idx="3"/>
-            <a:endCxn id="25" idx="1"/>
-          </p:cNvCxnSpPr>
-          <p:nvPr/>
-        </p:nvCxnSpPr>
-        <p:spPr>
-          <a:xfrm flipV="1">
-            <a:off x="5888680" y="2642400"/>
-            <a:ext cx="169100" cy="396000"/>
-          </a:xfrm>
-          <a:prstGeom prst="curvedConnector3">
-            <a:avLst/>
-          </a:prstGeom>
-          <a:ln>
-            <a:solidFill>
-              <a:srgbClr val="C00000"/>
-            </a:solidFill>
-          </a:ln>
-        </p:spPr>
-        <p:style>
-          <a:lnRef idx="1">
-            <a:schemeClr val="accent1"/>
-          </a:lnRef>
-          <a:fillRef idx="0">
-            <a:schemeClr val="accent1"/>
-          </a:fillRef>
-          <a:effectRef idx="0">
-            <a:schemeClr val="accent1"/>
-          </a:effectRef>
-          <a:fontRef idx="minor">
-            <a:schemeClr val="tx1"/>
-          </a:fontRef>
-        </p:style>
-      </p:cxnSp>
-      <p:cxnSp>
-        <p:nvCxnSpPr>
-          <p:cNvPr id="34" name="连接符: 曲线 33">
-            <a:extLst>
-              <a:ext uri="{FF2B5EF4-FFF2-40B4-BE49-F238E27FC236}">
-                <a16:creationId xmlns:a16="http://schemas.microsoft.com/office/drawing/2014/main" id="{D6AAD16A-0663-8D07-DC16-C4F0A658F0A3}"/>
-              </a:ext>
-            </a:extLst>
-          </p:cNvPr>
-          <p:cNvCxnSpPr>
-            <a:cxnSpLocks/>
-            <a:stCxn id="7" idx="3"/>
-            <a:endCxn id="12" idx="1"/>
-          </p:cNvCxnSpPr>
-          <p:nvPr/>
-        </p:nvCxnSpPr>
-        <p:spPr>
-          <a:xfrm>
-            <a:off x="5888680" y="3038400"/>
-            <a:ext cx="169100" cy="132000"/>
-          </a:xfrm>
-          <a:prstGeom prst="curvedConnector3">
-            <a:avLst>
-              <a:gd name="adj1" fmla="val 50000"/>
-            </a:avLst>
-          </a:prstGeom>
-          <a:ln>
-            <a:solidFill>
-              <a:srgbClr val="9966FF"/>
-            </a:solidFill>
-          </a:ln>
-        </p:spPr>
-        <p:style>
-          <a:lnRef idx="1">
-            <a:schemeClr val="accent1"/>
-          </a:lnRef>
-          <a:fillRef idx="0">
-            <a:schemeClr val="accent1"/>
-          </a:fillRef>
-          <a:effectRef idx="0">
-            <a:schemeClr val="accent1"/>
-          </a:effectRef>
-          <a:fontRef idx="minor">
-            <a:schemeClr val="tx1"/>
-          </a:fontRef>
-        </p:style>
-      </p:cxnSp>
-      <p:sp>
-        <p:nvSpPr>
-          <p:cNvPr id="108" name="矩形: 圆角 107">
-            <a:extLst>
-              <a:ext uri="{FF2B5EF4-FFF2-40B4-BE49-F238E27FC236}">
-                <a16:creationId xmlns:a16="http://schemas.microsoft.com/office/drawing/2014/main" id="{509F35E6-BC71-27B6-AB68-9D6D8641D9DE}"/>
-              </a:ext>
-            </a:extLst>
-          </p:cNvPr>
-          <p:cNvSpPr/>
-          <p:nvPr/>
-        </p:nvSpPr>
-        <p:spPr>
-          <a:xfrm>
-            <a:off x="6049650" y="3326400"/>
-            <a:ext cx="900000" cy="216000"/>
-          </a:xfrm>
-          <a:prstGeom prst="roundRect">
-            <a:avLst/>
-          </a:prstGeom>
-          <a:solidFill>
-            <a:srgbClr val="FB837D"/>
-          </a:solidFill>
-          <a:ln w="12700">
-            <a:noFill/>
-          </a:ln>
-        </p:spPr>
-        <p:style>
-          <a:lnRef idx="2">
-            <a:schemeClr val="accent1">
-              <a:shade val="15000"/>
-            </a:schemeClr>
-          </a:lnRef>
-          <a:fillRef idx="1">
-            <a:schemeClr val="accent1"/>
-          </a:fillRef>
-          <a:effectRef idx="0">
-            <a:schemeClr val="accent1"/>
-          </a:effectRef>
-          <a:fontRef idx="minor">
-            <a:schemeClr val="lt1"/>
-          </a:fontRef>
-        </p:style>
-        <p:txBody>
-          <a:bodyPr rtlCol="0" anchor="ctr"/>
-          <a:lstStyle/>
-          <a:p>
-            <a:pPr algn="ctr"/>
-            <a:r>
-              <a:rPr lang="en-US" altLang="zh-CN" sz="800">
-                <a:latin typeface="Quicksand" panose="00000500000000000000" pitchFamily="2" charset="0"/>
-              </a:rPr>
-              <a:t>counter</a:t>
-            </a:r>
-            <a:endParaRPr lang="zh-CN" altLang="en-US" sz="800">
-              <a:latin typeface="Quicksand" panose="00000500000000000000" pitchFamily="2" charset="0"/>
-            </a:endParaRPr>
-          </a:p>
-        </p:txBody>
-      </p:sp>
-      <p:cxnSp>
-        <p:nvCxnSpPr>
-          <p:cNvPr id="118" name="连接符: 曲线 117">
-            <a:extLst>
-              <a:ext uri="{FF2B5EF4-FFF2-40B4-BE49-F238E27FC236}">
-                <a16:creationId xmlns:a16="http://schemas.microsoft.com/office/drawing/2014/main" id="{DC5EF390-7693-C62F-379C-E8944F075A72}"/>
-              </a:ext>
-            </a:extLst>
-          </p:cNvPr>
-          <p:cNvCxnSpPr>
-            <a:cxnSpLocks/>
-            <a:stCxn id="7" idx="3"/>
-            <a:endCxn id="26" idx="1"/>
-          </p:cNvCxnSpPr>
-          <p:nvPr/>
-        </p:nvCxnSpPr>
-        <p:spPr>
-          <a:xfrm flipV="1">
-            <a:off x="5888680" y="2906400"/>
-            <a:ext cx="169100" cy="132000"/>
-          </a:xfrm>
-          <a:prstGeom prst="curvedConnector3">
-            <a:avLst>
-              <a:gd name="adj1" fmla="val 50000"/>
-            </a:avLst>
-          </a:prstGeom>
-          <a:ln>
-            <a:solidFill>
-              <a:srgbClr val="F7AA5F"/>
-            </a:solidFill>
-          </a:ln>
-        </p:spPr>
-        <p:style>
-          <a:lnRef idx="1">
-            <a:schemeClr val="accent1"/>
-          </a:lnRef>
-          <a:fillRef idx="0">
-            <a:schemeClr val="accent1"/>
-          </a:fillRef>
-          <a:effectRef idx="0">
-            <a:schemeClr val="accent1"/>
-          </a:effectRef>
-          <a:fontRef idx="minor">
-            <a:schemeClr val="tx1"/>
-          </a:fontRef>
-        </p:style>
-      </p:cxnSp>
-      <p:cxnSp>
-        <p:nvCxnSpPr>
-          <p:cNvPr id="121" name="连接符: 曲线 120">
-            <a:extLst>
-              <a:ext uri="{FF2B5EF4-FFF2-40B4-BE49-F238E27FC236}">
-                <a16:creationId xmlns:a16="http://schemas.microsoft.com/office/drawing/2014/main" id="{1D3BCEB4-577A-2C82-5900-26B41E83F91D}"/>
-              </a:ext>
-            </a:extLst>
-          </p:cNvPr>
-          <p:cNvCxnSpPr>
-            <a:cxnSpLocks/>
-            <a:stCxn id="7" idx="3"/>
-            <a:endCxn id="108" idx="1"/>
-          </p:cNvCxnSpPr>
-          <p:nvPr/>
-        </p:nvCxnSpPr>
-        <p:spPr>
-          <a:xfrm>
-            <a:off x="5888680" y="3038400"/>
-            <a:ext cx="160970" cy="396000"/>
-          </a:xfrm>
-          <a:prstGeom prst="curvedConnector3">
-            <a:avLst>
-              <a:gd name="adj1" fmla="val 50000"/>
-            </a:avLst>
-          </a:prstGeom>
-          <a:ln>
-            <a:solidFill>
-              <a:srgbClr val="00B050"/>
-            </a:solidFill>
-          </a:ln>
-        </p:spPr>
-        <p:style>
-          <a:lnRef idx="1">
-            <a:schemeClr val="accent1"/>
-          </a:lnRef>
-          <a:fillRef idx="0">
-            <a:schemeClr val="accent1"/>
-          </a:fillRef>
-          <a:effectRef idx="0">
-            <a:schemeClr val="accent1"/>
-          </a:effectRef>
-          <a:fontRef idx="minor">
-            <a:schemeClr val="tx1"/>
-          </a:fontRef>
-        </p:style>
-      </p:cxnSp>
-      <p:sp>
-        <p:nvSpPr>
-          <p:cNvPr id="12" name="矩形: 圆角 11">
-            <a:extLst>
-              <a:ext uri="{FF2B5EF4-FFF2-40B4-BE49-F238E27FC236}">
-                <a16:creationId xmlns:a16="http://schemas.microsoft.com/office/drawing/2014/main" id="{E4023AE0-10C4-EDDD-C931-D3E49B6AC7C9}"/>
-              </a:ext>
-            </a:extLst>
-          </p:cNvPr>
-          <p:cNvSpPr/>
-          <p:nvPr/>
-        </p:nvSpPr>
-        <p:spPr>
-          <a:xfrm>
-            <a:off x="6057780" y="3062400"/>
-            <a:ext cx="900000" cy="216000"/>
-          </a:xfrm>
-          <a:prstGeom prst="roundRect">
-            <a:avLst/>
-          </a:prstGeom>
-          <a:solidFill>
-            <a:srgbClr val="9966FF"/>
-          </a:solidFill>
-          <a:ln w="12700">
-            <a:noFill/>
-          </a:ln>
-        </p:spPr>
-        <p:style>
-          <a:lnRef idx="2">
-            <a:schemeClr val="accent1">
-              <a:shade val="15000"/>
-            </a:schemeClr>
-          </a:lnRef>
-          <a:fillRef idx="1">
-            <a:schemeClr val="accent1"/>
-          </a:fillRef>
-          <a:effectRef idx="0">
-            <a:schemeClr val="accent1"/>
-          </a:effectRef>
-          <a:fontRef idx="minor">
-            <a:schemeClr val="lt1"/>
-          </a:fontRef>
-        </p:style>
-        <p:txBody>
-          <a:bodyPr rtlCol="0" anchor="ctr"/>
-          <a:lstStyle/>
-          <a:p>
-            <a:pPr algn="ctr"/>
-            <a:r>
-              <a:rPr lang="en-US" altLang="zh-CN" sz="800">
-                <a:solidFill>
-                  <a:schemeClr val="bg1"/>
-                </a:solidFill>
-                <a:latin typeface="Quicksand Light" panose="00000400000000000000" pitchFamily="2" charset="0"/>
-              </a:rPr>
-              <a:t>Iconfont</a:t>
-            </a:r>
-            <a:endParaRPr lang="zh-CN" altLang="en-US" sz="800">
-              <a:solidFill>
-                <a:schemeClr val="bg1"/>
-              </a:solidFill>
-              <a:latin typeface="Quicksand Light" panose="00000400000000000000" pitchFamily="2" charset="0"/>
-            </a:endParaRPr>
-          </a:p>
-        </p:txBody>
-      </p:sp>
-      <p:sp>
-        <p:nvSpPr>
-          <p:cNvPr id="2" name="矩形: 圆角 1">
-            <a:extLst>
-              <a:ext uri="{FF2B5EF4-FFF2-40B4-BE49-F238E27FC236}">
-                <a16:creationId xmlns:a16="http://schemas.microsoft.com/office/drawing/2014/main" id="{83E28516-AB33-28C4-44B6-24DE28D98661}"/>
-              </a:ext>
-            </a:extLst>
-          </p:cNvPr>
-          <p:cNvSpPr/>
-          <p:nvPr/>
-        </p:nvSpPr>
-        <p:spPr>
-          <a:xfrm>
-            <a:off x="7126880" y="2798400"/>
-            <a:ext cx="900000" cy="216000"/>
-          </a:xfrm>
-          <a:prstGeom prst="roundRect">
-            <a:avLst/>
-          </a:prstGeom>
-          <a:solidFill>
-            <a:srgbClr val="CCF2E5"/>
-          </a:solidFill>
-          <a:ln w="12700">
-            <a:noFill/>
-          </a:ln>
-        </p:spPr>
-        <p:style>
-          <a:lnRef idx="2">
-            <a:schemeClr val="accent1">
-              <a:shade val="15000"/>
-            </a:schemeClr>
-          </a:lnRef>
-          <a:fillRef idx="1">
-            <a:schemeClr val="accent1"/>
-          </a:fillRef>
-          <a:effectRef idx="0">
-            <a:schemeClr val="accent1"/>
-          </a:effectRef>
-          <a:fontRef idx="minor">
-            <a:schemeClr val="lt1"/>
-          </a:fontRef>
-        </p:style>
-        <p:txBody>
-          <a:bodyPr rtlCol="0" anchor="ctr"/>
-          <a:lstStyle/>
-          <a:p>
-            <a:pPr algn="ctr"/>
-            <a:r>
-              <a:rPr lang="en-US" altLang="zh-CN" sz="800">
-                <a:solidFill>
-                  <a:sysClr val="windowText" lastClr="000000"/>
-                </a:solidFill>
-                <a:latin typeface="Quicksand Light" panose="00000400000000000000" pitchFamily="2" charset="0"/>
-              </a:rPr>
-              <a:t>Unicode</a:t>
-            </a:r>
-            <a:endParaRPr lang="zh-CN" altLang="en-US" sz="800">
-              <a:solidFill>
-                <a:sysClr val="windowText" lastClr="000000"/>
-              </a:solidFill>
-              <a:latin typeface="Quicksand Light" panose="00000400000000000000" pitchFamily="2" charset="0"/>
-            </a:endParaRPr>
-          </a:p>
-        </p:txBody>
-      </p:sp>
-      <p:sp>
-        <p:nvSpPr>
-          <p:cNvPr id="5" name="矩形: 圆角 4">
-            <a:extLst>
-              <a:ext uri="{FF2B5EF4-FFF2-40B4-BE49-F238E27FC236}">
-                <a16:creationId xmlns:a16="http://schemas.microsoft.com/office/drawing/2014/main" id="{EC9DFEFA-DE6D-C382-23DE-033158234380}"/>
-              </a:ext>
-            </a:extLst>
-          </p:cNvPr>
-          <p:cNvSpPr/>
-          <p:nvPr/>
-        </p:nvSpPr>
-        <p:spPr>
-          <a:xfrm>
-            <a:off x="7126880" y="3062400"/>
-            <a:ext cx="900000" cy="216000"/>
-          </a:xfrm>
-          <a:prstGeom prst="roundRect">
-            <a:avLst/>
-          </a:prstGeom>
-          <a:solidFill>
-            <a:srgbClr val="CCF2E5"/>
-          </a:solidFill>
-          <a:ln w="12700">
-            <a:noFill/>
-          </a:ln>
-        </p:spPr>
-        <p:style>
-          <a:lnRef idx="2">
-            <a:schemeClr val="accent1">
-              <a:shade val="15000"/>
-            </a:schemeClr>
-          </a:lnRef>
-          <a:fillRef idx="1">
-            <a:schemeClr val="accent1"/>
-          </a:fillRef>
-          <a:effectRef idx="0">
-            <a:schemeClr val="accent1"/>
-          </a:effectRef>
-          <a:fontRef idx="minor">
-            <a:schemeClr val="lt1"/>
-          </a:fontRef>
-        </p:style>
-        <p:txBody>
-          <a:bodyPr rtlCol="0" anchor="ctr"/>
-          <a:lstStyle/>
-          <a:p>
-            <a:pPr algn="ctr"/>
-            <a:r>
-              <a:rPr lang="en-US" altLang="zh-CN" sz="800">
-                <a:solidFill>
-                  <a:sysClr val="windowText" lastClr="000000"/>
-                </a:solidFill>
-                <a:latin typeface="Quicksand Light" panose="00000400000000000000" pitchFamily="2" charset="0"/>
-              </a:rPr>
-              <a:t>Unicode</a:t>
-            </a:r>
-            <a:endParaRPr lang="zh-CN" altLang="en-US" sz="800">
-              <a:solidFill>
-                <a:sysClr val="windowText" lastClr="000000"/>
-              </a:solidFill>
-              <a:latin typeface="Quicksand Light" panose="00000400000000000000" pitchFamily="2" charset="0"/>
-            </a:endParaRPr>
-          </a:p>
-        </p:txBody>
-      </p:sp>
-      <p:cxnSp>
-        <p:nvCxnSpPr>
-          <p:cNvPr id="8" name="直接连接符 7">
-            <a:extLst>
-              <a:ext uri="{FF2B5EF4-FFF2-40B4-BE49-F238E27FC236}">
-                <a16:creationId xmlns:a16="http://schemas.microsoft.com/office/drawing/2014/main" id="{9C72856E-D2DA-7E17-A337-C4361ABDE71E}"/>
-              </a:ext>
-            </a:extLst>
-          </p:cNvPr>
-          <p:cNvCxnSpPr>
-            <a:stCxn id="26" idx="3"/>
-            <a:endCxn id="2" idx="1"/>
-          </p:cNvCxnSpPr>
-          <p:nvPr/>
-        </p:nvCxnSpPr>
-        <p:spPr>
-          <a:xfrm>
-            <a:off x="6957780" y="2906400"/>
-            <a:ext cx="169100" cy="0"/>
-          </a:xfrm>
-          <a:prstGeom prst="line">
-            <a:avLst/>
-          </a:prstGeom>
-          <a:ln>
-            <a:solidFill>
-              <a:srgbClr val="F7AA5F"/>
-            </a:solidFill>
-          </a:ln>
-        </p:spPr>
-        <p:style>
-          <a:lnRef idx="1">
-            <a:schemeClr val="accent1"/>
-          </a:lnRef>
-          <a:fillRef idx="0">
-            <a:schemeClr val="accent1"/>
-          </a:fillRef>
-          <a:effectRef idx="0">
-            <a:schemeClr val="accent1"/>
-          </a:effectRef>
-          <a:fontRef idx="minor">
-            <a:schemeClr val="tx1"/>
-          </a:fontRef>
-        </p:style>
-      </p:cxnSp>
-      <p:cxnSp>
-        <p:nvCxnSpPr>
-          <p:cNvPr id="10" name="直接连接符 9">
-            <a:extLst>
-              <a:ext uri="{FF2B5EF4-FFF2-40B4-BE49-F238E27FC236}">
-                <a16:creationId xmlns:a16="http://schemas.microsoft.com/office/drawing/2014/main" id="{E671B0F8-4EB3-1F8A-06EB-35F88593DCA1}"/>
-              </a:ext>
-            </a:extLst>
-          </p:cNvPr>
-          <p:cNvCxnSpPr>
-            <a:stCxn id="12" idx="3"/>
-            <a:endCxn id="5" idx="1"/>
-          </p:cNvCxnSpPr>
-          <p:nvPr/>
-        </p:nvCxnSpPr>
-        <p:spPr>
-          <a:xfrm>
-            <a:off x="6957780" y="3170400"/>
-            <a:ext cx="169100" cy="0"/>
-          </a:xfrm>
-          <a:prstGeom prst="line">
-            <a:avLst/>
-          </a:prstGeom>
-          <a:ln>
-            <a:solidFill>
-              <a:srgbClr val="9966FF"/>
-            </a:solidFill>
-          </a:ln>
-        </p:spPr>
-        <p:style>
-          <a:lnRef idx="1">
-            <a:schemeClr val="accent1"/>
-          </a:lnRef>
-          <a:fillRef idx="0">
-            <a:schemeClr val="accent1"/>
-          </a:fillRef>
-          <a:effectRef idx="0">
-            <a:schemeClr val="accent1"/>
-          </a:effectRef>
-          <a:fontRef idx="minor">
-            <a:schemeClr val="tx1"/>
-          </a:fontRef>
-        </p:style>
-      </p:cxnSp>
-      <p:sp>
-        <p:nvSpPr>
-          <p:cNvPr id="3" name="矩形: 圆角 2">
-            <a:extLst>
-              <a:ext uri="{FF2B5EF4-FFF2-40B4-BE49-F238E27FC236}">
-                <a16:creationId xmlns:a16="http://schemas.microsoft.com/office/drawing/2014/main" id="{C3064634-CD22-075E-68B9-962F834B311B}"/>
-              </a:ext>
-            </a:extLst>
-          </p:cNvPr>
-          <p:cNvSpPr/>
-          <p:nvPr/>
-        </p:nvSpPr>
-        <p:spPr>
-          <a:xfrm>
-            <a:off x="3927709" y="3179700"/>
-            <a:ext cx="900000" cy="216000"/>
-          </a:xfrm>
-          <a:prstGeom prst="roundRect">
-            <a:avLst/>
-          </a:prstGeom>
-          <a:solidFill>
-            <a:schemeClr val="tx1"/>
-          </a:solidFill>
-          <a:ln w="12700">
-            <a:noFill/>
-          </a:ln>
-        </p:spPr>
-        <p:style>
-          <a:lnRef idx="2">
-            <a:schemeClr val="accent1">
-              <a:shade val="15000"/>
-            </a:schemeClr>
-          </a:lnRef>
-          <a:fillRef idx="1">
-            <a:schemeClr val="accent1"/>
-          </a:fillRef>
-          <a:effectRef idx="0">
-            <a:schemeClr val="accent1"/>
-          </a:effectRef>
-          <a:fontRef idx="minor">
-            <a:schemeClr val="lt1"/>
-          </a:fontRef>
-        </p:style>
-        <p:txBody>
-          <a:bodyPr rtlCol="0" anchor="ctr"/>
-          <a:lstStyle/>
-          <a:p>
-            <a:pPr algn="ctr"/>
-            <a:r>
-              <a:rPr lang="en-US" altLang="zh-CN" sz="800">
-                <a:latin typeface="Quicksand Medium" panose="00000600000000000000" pitchFamily="2" charset="0"/>
-              </a:rPr>
-              <a:t>&lt;li&gt;</a:t>
-            </a:r>
-            <a:endParaRPr lang="zh-CN" altLang="en-US" sz="800">
-              <a:latin typeface="Quicksand Medium" panose="00000600000000000000" pitchFamily="2" charset="0"/>
-            </a:endParaRPr>
-          </a:p>
-        </p:txBody>
-      </p:sp>
-      <p:sp>
-        <p:nvSpPr>
-          <p:cNvPr id="4" name="矩形: 圆角 3">
-            <a:extLst>
-              <a:ext uri="{FF2B5EF4-FFF2-40B4-BE49-F238E27FC236}">
-                <a16:creationId xmlns:a16="http://schemas.microsoft.com/office/drawing/2014/main" id="{D464FB6F-32E1-97B7-CAC2-14F5345557D4}"/>
-              </a:ext>
-            </a:extLst>
-          </p:cNvPr>
-          <p:cNvSpPr/>
-          <p:nvPr/>
-        </p:nvSpPr>
-        <p:spPr>
-          <a:xfrm>
-            <a:off x="4988679" y="3429000"/>
-            <a:ext cx="900000" cy="216000"/>
-          </a:xfrm>
-          <a:prstGeom prst="roundRect">
-            <a:avLst/>
-          </a:prstGeom>
-          <a:solidFill>
-            <a:srgbClr val="335BA3">
-              <a:alpha val="89804"/>
-            </a:srgbClr>
-          </a:solidFill>
-          <a:ln w="12700">
-            <a:noFill/>
-          </a:ln>
-        </p:spPr>
-        <p:style>
-          <a:lnRef idx="2">
-            <a:schemeClr val="accent1">
-              <a:shade val="15000"/>
-            </a:schemeClr>
-          </a:lnRef>
-          <a:fillRef idx="1">
-            <a:schemeClr val="accent1"/>
-          </a:fillRef>
-          <a:effectRef idx="0">
-            <a:schemeClr val="accent1"/>
-          </a:effectRef>
-          <a:fontRef idx="minor">
-            <a:schemeClr val="lt1"/>
-          </a:fontRef>
-        </p:style>
-        <p:txBody>
-          <a:bodyPr rtlCol="0" anchor="ctr"/>
-          <a:lstStyle/>
-          <a:p>
-            <a:pPr algn="ctr"/>
-            <a:r>
-              <a:rPr lang="en-US" altLang="zh-CN" sz="800">
-                <a:latin typeface="Quicksand" panose="00000500000000000000" pitchFamily="2" charset="0"/>
-              </a:rPr>
-              <a:t>::after</a:t>
-            </a:r>
-            <a:endParaRPr lang="zh-CN" altLang="en-US" sz="800">
-              <a:latin typeface="Quicksand" panose="00000500000000000000" pitchFamily="2" charset="0"/>
-            </a:endParaRPr>
-          </a:p>
-        </p:txBody>
-      </p:sp>
-      <p:cxnSp>
-        <p:nvCxnSpPr>
-          <p:cNvPr id="6" name="连接符: 曲线 5">
-            <a:extLst>
-              <a:ext uri="{FF2B5EF4-FFF2-40B4-BE49-F238E27FC236}">
-                <a16:creationId xmlns:a16="http://schemas.microsoft.com/office/drawing/2014/main" id="{A49DEFA1-8658-B2E8-502E-F97718CFD37A}"/>
-              </a:ext>
-            </a:extLst>
-          </p:cNvPr>
-          <p:cNvCxnSpPr>
-            <a:cxnSpLocks/>
-            <a:stCxn id="3" idx="3"/>
-            <a:endCxn id="7" idx="1"/>
-          </p:cNvCxnSpPr>
-          <p:nvPr/>
-        </p:nvCxnSpPr>
-        <p:spPr>
-          <a:xfrm flipV="1">
-            <a:off x="4827709" y="3038400"/>
-            <a:ext cx="160971" cy="249300"/>
-          </a:xfrm>
-          <a:prstGeom prst="curvedConnector3">
-            <a:avLst/>
-          </a:prstGeom>
-          <a:ln>
-            <a:solidFill>
-              <a:srgbClr val="486CAC"/>
-            </a:solidFill>
-          </a:ln>
-        </p:spPr>
-        <p:style>
-          <a:lnRef idx="1">
-            <a:schemeClr val="accent1"/>
-          </a:lnRef>
-          <a:fillRef idx="0">
-            <a:schemeClr val="accent1"/>
-          </a:fillRef>
-          <a:effectRef idx="0">
-            <a:schemeClr val="accent1"/>
-          </a:effectRef>
-          <a:fontRef idx="minor">
-            <a:schemeClr val="tx1"/>
-          </a:fontRef>
-        </p:style>
-      </p:cxnSp>
-      <p:cxnSp>
-        <p:nvCxnSpPr>
-          <p:cNvPr id="13" name="连接符: 曲线 12">
-            <a:extLst>
-              <a:ext uri="{FF2B5EF4-FFF2-40B4-BE49-F238E27FC236}">
-                <a16:creationId xmlns:a16="http://schemas.microsoft.com/office/drawing/2014/main" id="{24C1CA78-5496-27AF-13AD-7BE3E7DD4AE2}"/>
-              </a:ext>
-            </a:extLst>
-          </p:cNvPr>
-          <p:cNvCxnSpPr>
-            <a:cxnSpLocks/>
-            <a:stCxn id="3" idx="3"/>
-            <a:endCxn id="4" idx="1"/>
-          </p:cNvCxnSpPr>
-          <p:nvPr/>
-        </p:nvCxnSpPr>
-        <p:spPr>
-          <a:xfrm>
-            <a:off x="4827709" y="3287700"/>
-            <a:ext cx="160970" cy="249300"/>
-          </a:xfrm>
-          <a:prstGeom prst="curvedConnector3">
-            <a:avLst/>
-          </a:prstGeom>
-          <a:ln>
-            <a:solidFill>
-              <a:srgbClr val="486CAC"/>
-            </a:solidFill>
-          </a:ln>
-        </p:spPr>
-        <p:style>
-          <a:lnRef idx="1">
-            <a:schemeClr val="accent1"/>
-          </a:lnRef>
-          <a:fillRef idx="0">
-            <a:schemeClr val="accent1"/>
-          </a:fillRef>
-          <a:effectRef idx="0">
-            <a:schemeClr val="accent1"/>
-          </a:effectRef>
-          <a:fontRef idx="minor">
-            <a:schemeClr val="tx1"/>
-          </a:fontRef>
-        </p:style>
-      </p:cxnSp>
-    </p:spTree>
-    <p:extLst>
-      <p:ext uri="{BB962C8B-B14F-4D97-AF65-F5344CB8AC3E}">
-        <p14:creationId xmlns:p14="http://schemas.microsoft.com/office/powerpoint/2010/main" val="825264789"/>
       </p:ext>
     </p:extLst>
   </p:cSld>

--- a/utils/file/charts.pptx
+++ b/utils/file/charts.pptx
@@ -16321,7 +16321,7 @@
                 </a:solidFill>
                 <a:latin typeface="Quicksand Light" panose="00000400000000000000" pitchFamily="2" charset="0"/>
               </a:rPr>
-              <a:t>Transition Control</a:t>
+              <a:t>Three-Way Handshake</a:t>
             </a:r>
             <a:endParaRPr lang="zh-CN" altLang="en-US" sz="1200" dirty="0">
               <a:solidFill>
@@ -17089,15 +17089,6 @@
           <a:bodyPr rtlCol="0" anchor="ctr"/>
           <a:lstStyle/>
           <a:p>
-            <a:r>
-              <a:rPr lang="en-US" altLang="zh-CN" sz="1200" dirty="0">
-                <a:solidFill>
-                  <a:sysClr val="windowText" lastClr="000000"/>
-                </a:solidFill>
-                <a:latin typeface="Quicksand Light" panose="00000400000000000000" pitchFamily="2" charset="0"/>
-              </a:rPr>
-              <a:t>Three-Way Handshake</a:t>
-            </a:r>
             <a:endParaRPr lang="zh-CN" altLang="en-US" sz="1200" dirty="0">
               <a:solidFill>
                 <a:sysClr val="windowText" lastClr="000000"/>
@@ -17107,52 +17098,6 @@
           </a:p>
         </p:txBody>
       </p:sp>
-      <p:cxnSp>
-        <p:nvCxnSpPr>
-          <p:cNvPr id="12" name="直接连接符 11">
-            <a:extLst>
-              <a:ext uri="{FF2B5EF4-FFF2-40B4-BE49-F238E27FC236}">
-                <a16:creationId xmlns:a16="http://schemas.microsoft.com/office/drawing/2014/main" id="{981EAB78-C655-57B2-73AD-691D97EFD79E}"/>
-              </a:ext>
-            </a:extLst>
-          </p:cNvPr>
-          <p:cNvCxnSpPr>
-            <a:stCxn id="4" idx="3"/>
-            <a:endCxn id="6" idx="1"/>
-          </p:cNvCxnSpPr>
-          <p:nvPr/>
-        </p:nvCxnSpPr>
-        <p:spPr>
-          <a:xfrm>
-            <a:off x="6831248" y="3742619"/>
-            <a:ext cx="270852" cy="0"/>
-          </a:xfrm>
-          <a:prstGeom prst="line">
-            <a:avLst/>
-          </a:prstGeom>
-          <a:ln>
-            <a:solidFill>
-              <a:schemeClr val="bg1">
-                <a:lumMod val="50000"/>
-              </a:schemeClr>
-            </a:solidFill>
-          </a:ln>
-        </p:spPr>
-        <p:style>
-          <a:lnRef idx="1">
-            <a:schemeClr val="accent1"/>
-          </a:lnRef>
-          <a:fillRef idx="0">
-            <a:schemeClr val="accent1"/>
-          </a:fillRef>
-          <a:effectRef idx="0">
-            <a:schemeClr val="accent1"/>
-          </a:effectRef>
-          <a:fontRef idx="minor">
-            <a:schemeClr val="tx1"/>
-          </a:fontRef>
-        </p:style>
-      </p:cxnSp>
       <p:cxnSp>
         <p:nvCxnSpPr>
           <p:cNvPr id="17" name="直接连接符 16">

--- a/utils/file/charts.pptx
+++ b/utils/file/charts.pptx
@@ -6,36 +6,37 @@
   </p:sldMasterIdLst>
   <p:sldIdLst>
     <p:sldId id="270" r:id="rId2"/>
-    <p:sldId id="286" r:id="rId3"/>
-    <p:sldId id="287" r:id="rId4"/>
-    <p:sldId id="288" r:id="rId5"/>
-    <p:sldId id="258" r:id="rId6"/>
-    <p:sldId id="259" r:id="rId7"/>
-    <p:sldId id="260" r:id="rId8"/>
-    <p:sldId id="269" r:id="rId9"/>
-    <p:sldId id="261" r:id="rId10"/>
-    <p:sldId id="262" r:id="rId11"/>
-    <p:sldId id="263" r:id="rId12"/>
-    <p:sldId id="265" r:id="rId13"/>
-    <p:sldId id="266" r:id="rId14"/>
-    <p:sldId id="267" r:id="rId15"/>
-    <p:sldId id="273" r:id="rId16"/>
-    <p:sldId id="271" r:id="rId17"/>
-    <p:sldId id="268" r:id="rId18"/>
-    <p:sldId id="281" r:id="rId19"/>
-    <p:sldId id="282" r:id="rId20"/>
-    <p:sldId id="283" r:id="rId21"/>
-    <p:sldId id="284" r:id="rId22"/>
-    <p:sldId id="274" r:id="rId23"/>
-    <p:sldId id="276" r:id="rId24"/>
-    <p:sldId id="277" r:id="rId25"/>
-    <p:sldId id="278" r:id="rId26"/>
-    <p:sldId id="279" r:id="rId27"/>
-    <p:sldId id="285" r:id="rId28"/>
-    <p:sldId id="280" r:id="rId29"/>
-    <p:sldId id="264" r:id="rId30"/>
-    <p:sldId id="272" r:id="rId31"/>
-    <p:sldId id="256" r:id="rId32"/>
+    <p:sldId id="289" r:id="rId3"/>
+    <p:sldId id="286" r:id="rId4"/>
+    <p:sldId id="287" r:id="rId5"/>
+    <p:sldId id="288" r:id="rId6"/>
+    <p:sldId id="258" r:id="rId7"/>
+    <p:sldId id="259" r:id="rId8"/>
+    <p:sldId id="260" r:id="rId9"/>
+    <p:sldId id="269" r:id="rId10"/>
+    <p:sldId id="261" r:id="rId11"/>
+    <p:sldId id="262" r:id="rId12"/>
+    <p:sldId id="263" r:id="rId13"/>
+    <p:sldId id="265" r:id="rId14"/>
+    <p:sldId id="266" r:id="rId15"/>
+    <p:sldId id="267" r:id="rId16"/>
+    <p:sldId id="273" r:id="rId17"/>
+    <p:sldId id="271" r:id="rId18"/>
+    <p:sldId id="268" r:id="rId19"/>
+    <p:sldId id="281" r:id="rId20"/>
+    <p:sldId id="282" r:id="rId21"/>
+    <p:sldId id="283" r:id="rId22"/>
+    <p:sldId id="284" r:id="rId23"/>
+    <p:sldId id="274" r:id="rId24"/>
+    <p:sldId id="276" r:id="rId25"/>
+    <p:sldId id="277" r:id="rId26"/>
+    <p:sldId id="278" r:id="rId27"/>
+    <p:sldId id="279" r:id="rId28"/>
+    <p:sldId id="285" r:id="rId29"/>
+    <p:sldId id="280" r:id="rId30"/>
+    <p:sldId id="264" r:id="rId31"/>
+    <p:sldId id="272" r:id="rId32"/>
+    <p:sldId id="256" r:id="rId33"/>
   </p:sldIdLst>
   <p:sldSz cx="12192000" cy="6858000"/>
   <p:notesSz cx="6858000" cy="9144000"/>
@@ -289,7 +290,7 @@
           <a:p>
             <a:fld id="{C0F7C65B-F23F-479A-8AFF-E7E0FC962F06}" type="datetimeFigureOut">
               <a:rPr lang="zh-CN" altLang="en-US" smtClean="0"/>
-              <a:t>2025/10/19</a:t>
+              <a:t>2025/10/29</a:t>
             </a:fld>
             <a:endParaRPr lang="zh-CN" altLang="en-US"/>
           </a:p>
@@ -487,7 +488,7 @@
           <a:p>
             <a:fld id="{C0F7C65B-F23F-479A-8AFF-E7E0FC962F06}" type="datetimeFigureOut">
               <a:rPr lang="zh-CN" altLang="en-US" smtClean="0"/>
-              <a:t>2025/10/19</a:t>
+              <a:t>2025/10/29</a:t>
             </a:fld>
             <a:endParaRPr lang="zh-CN" altLang="en-US"/>
           </a:p>
@@ -695,7 +696,7 @@
           <a:p>
             <a:fld id="{C0F7C65B-F23F-479A-8AFF-E7E0FC962F06}" type="datetimeFigureOut">
               <a:rPr lang="zh-CN" altLang="en-US" smtClean="0"/>
-              <a:t>2025/10/19</a:t>
+              <a:t>2025/10/29</a:t>
             </a:fld>
             <a:endParaRPr lang="zh-CN" altLang="en-US"/>
           </a:p>
@@ -893,7 +894,7 @@
           <a:p>
             <a:fld id="{C0F7C65B-F23F-479A-8AFF-E7E0FC962F06}" type="datetimeFigureOut">
               <a:rPr lang="zh-CN" altLang="en-US" smtClean="0"/>
-              <a:t>2025/10/19</a:t>
+              <a:t>2025/10/29</a:t>
             </a:fld>
             <a:endParaRPr lang="zh-CN" altLang="en-US"/>
           </a:p>
@@ -1168,7 +1169,7 @@
           <a:p>
             <a:fld id="{C0F7C65B-F23F-479A-8AFF-E7E0FC962F06}" type="datetimeFigureOut">
               <a:rPr lang="zh-CN" altLang="en-US" smtClean="0"/>
-              <a:t>2025/10/19</a:t>
+              <a:t>2025/10/29</a:t>
             </a:fld>
             <a:endParaRPr lang="zh-CN" altLang="en-US"/>
           </a:p>
@@ -1433,7 +1434,7 @@
           <a:p>
             <a:fld id="{C0F7C65B-F23F-479A-8AFF-E7E0FC962F06}" type="datetimeFigureOut">
               <a:rPr lang="zh-CN" altLang="en-US" smtClean="0"/>
-              <a:t>2025/10/19</a:t>
+              <a:t>2025/10/29</a:t>
             </a:fld>
             <a:endParaRPr lang="zh-CN" altLang="en-US"/>
           </a:p>
@@ -1845,7 +1846,7 @@
           <a:p>
             <a:fld id="{C0F7C65B-F23F-479A-8AFF-E7E0FC962F06}" type="datetimeFigureOut">
               <a:rPr lang="zh-CN" altLang="en-US" smtClean="0"/>
-              <a:t>2025/10/19</a:t>
+              <a:t>2025/10/29</a:t>
             </a:fld>
             <a:endParaRPr lang="zh-CN" altLang="en-US"/>
           </a:p>
@@ -1986,7 +1987,7 @@
           <a:p>
             <a:fld id="{C0F7C65B-F23F-479A-8AFF-E7E0FC962F06}" type="datetimeFigureOut">
               <a:rPr lang="zh-CN" altLang="en-US" smtClean="0"/>
-              <a:t>2025/10/19</a:t>
+              <a:t>2025/10/29</a:t>
             </a:fld>
             <a:endParaRPr lang="zh-CN" altLang="en-US"/>
           </a:p>
@@ -2099,7 +2100,7 @@
           <a:p>
             <a:fld id="{C0F7C65B-F23F-479A-8AFF-E7E0FC962F06}" type="datetimeFigureOut">
               <a:rPr lang="zh-CN" altLang="en-US" smtClean="0"/>
-              <a:t>2025/10/19</a:t>
+              <a:t>2025/10/29</a:t>
             </a:fld>
             <a:endParaRPr lang="zh-CN" altLang="en-US"/>
           </a:p>
@@ -2410,7 +2411,7 @@
           <a:p>
             <a:fld id="{C0F7C65B-F23F-479A-8AFF-E7E0FC962F06}" type="datetimeFigureOut">
               <a:rPr lang="zh-CN" altLang="en-US" smtClean="0"/>
-              <a:t>2025/10/19</a:t>
+              <a:t>2025/10/29</a:t>
             </a:fld>
             <a:endParaRPr lang="zh-CN" altLang="en-US"/>
           </a:p>
@@ -2698,7 +2699,7 @@
           <a:p>
             <a:fld id="{C0F7C65B-F23F-479A-8AFF-E7E0FC962F06}" type="datetimeFigureOut">
               <a:rPr lang="zh-CN" altLang="en-US" smtClean="0"/>
-              <a:t>2025/10/19</a:t>
+              <a:t>2025/10/29</a:t>
             </a:fld>
             <a:endParaRPr lang="zh-CN" altLang="en-US"/>
           </a:p>
@@ -2939,7 +2940,7 @@
           <a:p>
             <a:fld id="{C0F7C65B-F23F-479A-8AFF-E7E0FC962F06}" type="datetimeFigureOut">
               <a:rPr lang="zh-CN" altLang="en-US" smtClean="0"/>
-              <a:t>2025/10/19</a:t>
+              <a:t>2025/10/29</a:t>
             </a:fld>
             <a:endParaRPr lang="zh-CN" altLang="en-US"/>
           </a:p>
@@ -3509,6 +3510,1735 @@
         <p:cNvPr id="1" name="">
           <a:extLst>
             <a:ext uri="{FF2B5EF4-FFF2-40B4-BE49-F238E27FC236}">
+              <a16:creationId xmlns:a16="http://schemas.microsoft.com/office/drawing/2014/main" id="{18E2CAE3-A1AC-3F4E-935C-0F5B86F0EE15}"/>
+            </a:ext>
+          </a:extLst>
+        </p:cNvPr>
+        <p:cNvGrpSpPr/>
+        <p:nvPr/>
+      </p:nvGrpSpPr>
+      <p:grpSpPr>
+        <a:xfrm>
+          <a:off x="0" y="0"/>
+          <a:ext cx="0" cy="0"/>
+          <a:chOff x="0" y="0"/>
+          <a:chExt cx="0" cy="0"/>
+        </a:xfrm>
+      </p:grpSpPr>
+      <p:sp>
+        <p:nvSpPr>
+          <p:cNvPr id="3" name="矩形: 圆角 2">
+            <a:extLst>
+              <a:ext uri="{FF2B5EF4-FFF2-40B4-BE49-F238E27FC236}">
+                <a16:creationId xmlns:a16="http://schemas.microsoft.com/office/drawing/2014/main" id="{3F6BEB13-BC5C-76A7-70B4-5704F9D6A0AC}"/>
+              </a:ext>
+            </a:extLst>
+          </p:cNvPr>
+          <p:cNvSpPr/>
+          <p:nvPr/>
+        </p:nvSpPr>
+        <p:spPr>
+          <a:xfrm>
+            <a:off x="3927709" y="3694457"/>
+            <a:ext cx="936000" cy="216000"/>
+          </a:xfrm>
+          <a:prstGeom prst="roundRect">
+            <a:avLst/>
+          </a:prstGeom>
+          <a:solidFill>
+            <a:srgbClr val="335BA3">
+              <a:alpha val="89804"/>
+            </a:srgbClr>
+          </a:solidFill>
+          <a:ln w="12700">
+            <a:noFill/>
+          </a:ln>
+        </p:spPr>
+        <p:style>
+          <a:lnRef idx="2">
+            <a:schemeClr val="accent1">
+              <a:shade val="15000"/>
+            </a:schemeClr>
+          </a:lnRef>
+          <a:fillRef idx="1">
+            <a:schemeClr val="accent1"/>
+          </a:fillRef>
+          <a:effectRef idx="0">
+            <a:schemeClr val="accent1"/>
+          </a:effectRef>
+          <a:fontRef idx="minor">
+            <a:schemeClr val="lt1"/>
+          </a:fontRef>
+        </p:style>
+        <p:txBody>
+          <a:bodyPr rtlCol="0" anchor="ctr"/>
+          <a:lstStyle/>
+          <a:p>
+            <a:pPr algn="ctr"/>
+            <a:r>
+              <a:rPr lang="en-US" altLang="zh-CN" sz="800">
+                <a:latin typeface="Quicksand" panose="00000500000000000000" pitchFamily="2" charset="0"/>
+              </a:rPr>
+              <a:t>cartsView.vue</a:t>
+            </a:r>
+            <a:endParaRPr lang="zh-CN" altLang="en-US" sz="800">
+              <a:latin typeface="Quicksand" panose="00000500000000000000" pitchFamily="2" charset="0"/>
+            </a:endParaRPr>
+          </a:p>
+        </p:txBody>
+      </p:sp>
+      <p:sp>
+        <p:nvSpPr>
+          <p:cNvPr id="4" name="矩形: 圆角 3">
+            <a:extLst>
+              <a:ext uri="{FF2B5EF4-FFF2-40B4-BE49-F238E27FC236}">
+                <a16:creationId xmlns:a16="http://schemas.microsoft.com/office/drawing/2014/main" id="{A865B1BF-2668-EBE3-9A2F-76B4ADFC7BD3}"/>
+              </a:ext>
+            </a:extLst>
+          </p:cNvPr>
+          <p:cNvSpPr/>
+          <p:nvPr/>
+        </p:nvSpPr>
+        <p:spPr>
+          <a:xfrm>
+            <a:off x="3927709" y="2237109"/>
+            <a:ext cx="936000" cy="216000"/>
+          </a:xfrm>
+          <a:prstGeom prst="roundRect">
+            <a:avLst/>
+          </a:prstGeom>
+          <a:solidFill>
+            <a:srgbClr val="00BC7B">
+              <a:alpha val="89804"/>
+            </a:srgbClr>
+          </a:solidFill>
+          <a:ln w="12700">
+            <a:noFill/>
+          </a:ln>
+        </p:spPr>
+        <p:style>
+          <a:lnRef idx="2">
+            <a:schemeClr val="accent1">
+              <a:shade val="15000"/>
+            </a:schemeClr>
+          </a:lnRef>
+          <a:fillRef idx="1">
+            <a:schemeClr val="accent1"/>
+          </a:fillRef>
+          <a:effectRef idx="0">
+            <a:schemeClr val="accent1"/>
+          </a:effectRef>
+          <a:fontRef idx="minor">
+            <a:schemeClr val="lt1"/>
+          </a:fontRef>
+        </p:style>
+        <p:txBody>
+          <a:bodyPr rtlCol="0" anchor="ctr"/>
+          <a:lstStyle/>
+          <a:p>
+            <a:pPr algn="ctr"/>
+            <a:r>
+              <a:rPr lang="en-US" altLang="zh-CN" sz="800">
+                <a:latin typeface="Quicksand" panose="00000500000000000000" pitchFamily="2" charset="0"/>
+              </a:rPr>
+              <a:t>detailsView.vue</a:t>
+            </a:r>
+            <a:endParaRPr lang="zh-CN" altLang="en-US" sz="800">
+              <a:latin typeface="Quicksand" panose="00000500000000000000" pitchFamily="2" charset="0"/>
+            </a:endParaRPr>
+          </a:p>
+        </p:txBody>
+      </p:sp>
+      <p:sp>
+        <p:nvSpPr>
+          <p:cNvPr id="7" name="矩形: 圆角 6">
+            <a:extLst>
+              <a:ext uri="{FF2B5EF4-FFF2-40B4-BE49-F238E27FC236}">
+                <a16:creationId xmlns:a16="http://schemas.microsoft.com/office/drawing/2014/main" id="{CF1F7419-7D34-C865-9FD3-CEF01F2784E0}"/>
+              </a:ext>
+            </a:extLst>
+          </p:cNvPr>
+          <p:cNvSpPr/>
+          <p:nvPr/>
+        </p:nvSpPr>
+        <p:spPr>
+          <a:xfrm>
+            <a:off x="4988680" y="2965783"/>
+            <a:ext cx="900000" cy="216000"/>
+          </a:xfrm>
+          <a:prstGeom prst="roundRect">
+            <a:avLst/>
+          </a:prstGeom>
+          <a:solidFill>
+            <a:srgbClr val="F9423A">
+              <a:alpha val="89804"/>
+            </a:srgbClr>
+          </a:solidFill>
+          <a:ln w="12700">
+            <a:noFill/>
+          </a:ln>
+        </p:spPr>
+        <p:style>
+          <a:lnRef idx="2">
+            <a:schemeClr val="accent1">
+              <a:shade val="15000"/>
+            </a:schemeClr>
+          </a:lnRef>
+          <a:fillRef idx="1">
+            <a:schemeClr val="accent1"/>
+          </a:fillRef>
+          <a:effectRef idx="0">
+            <a:schemeClr val="accent1"/>
+          </a:effectRef>
+          <a:fontRef idx="minor">
+            <a:schemeClr val="lt1"/>
+          </a:fontRef>
+        </p:style>
+        <p:txBody>
+          <a:bodyPr rtlCol="0" anchor="ctr"/>
+          <a:lstStyle/>
+          <a:p>
+            <a:pPr algn="ctr"/>
+            <a:r>
+              <a:rPr lang="en-US" altLang="zh-CN" sz="800">
+                <a:latin typeface="Quicksand" panose="00000500000000000000" pitchFamily="2" charset="0"/>
+              </a:rPr>
+              <a:t>cart.js</a:t>
+            </a:r>
+            <a:endParaRPr lang="zh-CN" altLang="en-US" sz="800">
+              <a:latin typeface="Quicksand" panose="00000500000000000000" pitchFamily="2" charset="0"/>
+            </a:endParaRPr>
+          </a:p>
+        </p:txBody>
+      </p:sp>
+      <p:cxnSp>
+        <p:nvCxnSpPr>
+          <p:cNvPr id="14" name="连接符: 曲线 13">
+            <a:extLst>
+              <a:ext uri="{FF2B5EF4-FFF2-40B4-BE49-F238E27FC236}">
+                <a16:creationId xmlns:a16="http://schemas.microsoft.com/office/drawing/2014/main" id="{8CA54037-8AE4-360B-D22C-AE9D102A0F28}"/>
+              </a:ext>
+            </a:extLst>
+          </p:cNvPr>
+          <p:cNvCxnSpPr>
+            <a:cxnSpLocks/>
+            <a:stCxn id="7" idx="1"/>
+            <a:endCxn id="3" idx="3"/>
+          </p:cNvCxnSpPr>
+          <p:nvPr/>
+        </p:nvCxnSpPr>
+        <p:spPr>
+          <a:xfrm rot="10800000" flipV="1">
+            <a:off x="4863710" y="3073783"/>
+            <a:ext cx="124971" cy="728674"/>
+          </a:xfrm>
+          <a:prstGeom prst="curvedConnector3">
+            <a:avLst>
+              <a:gd name="adj1" fmla="val 50000"/>
+            </a:avLst>
+          </a:prstGeom>
+          <a:ln>
+            <a:solidFill>
+              <a:srgbClr val="6D91D1"/>
+            </a:solidFill>
+          </a:ln>
+        </p:spPr>
+        <p:style>
+          <a:lnRef idx="1">
+            <a:schemeClr val="accent1"/>
+          </a:lnRef>
+          <a:fillRef idx="0">
+            <a:schemeClr val="accent1"/>
+          </a:fillRef>
+          <a:effectRef idx="0">
+            <a:schemeClr val="accent1"/>
+          </a:effectRef>
+          <a:fontRef idx="minor">
+            <a:schemeClr val="tx1"/>
+          </a:fontRef>
+        </p:style>
+      </p:cxnSp>
+      <p:cxnSp>
+        <p:nvCxnSpPr>
+          <p:cNvPr id="17" name="连接符: 曲线 16">
+            <a:extLst>
+              <a:ext uri="{FF2B5EF4-FFF2-40B4-BE49-F238E27FC236}">
+                <a16:creationId xmlns:a16="http://schemas.microsoft.com/office/drawing/2014/main" id="{5D7F2DC2-788D-E15F-2B93-BEC9E5020321}"/>
+              </a:ext>
+            </a:extLst>
+          </p:cNvPr>
+          <p:cNvCxnSpPr>
+            <a:stCxn id="4" idx="3"/>
+            <a:endCxn id="7" idx="1"/>
+          </p:cNvCxnSpPr>
+          <p:nvPr/>
+        </p:nvCxnSpPr>
+        <p:spPr>
+          <a:xfrm>
+            <a:off x="4863709" y="2345109"/>
+            <a:ext cx="124971" cy="728674"/>
+          </a:xfrm>
+          <a:prstGeom prst="curvedConnector3">
+            <a:avLst/>
+          </a:prstGeom>
+          <a:ln>
+            <a:solidFill>
+              <a:srgbClr val="00B050"/>
+            </a:solidFill>
+          </a:ln>
+        </p:spPr>
+        <p:style>
+          <a:lnRef idx="1">
+            <a:schemeClr val="accent1"/>
+          </a:lnRef>
+          <a:fillRef idx="0">
+            <a:schemeClr val="accent1"/>
+          </a:fillRef>
+          <a:effectRef idx="0">
+            <a:schemeClr val="accent1"/>
+          </a:effectRef>
+          <a:fontRef idx="minor">
+            <a:schemeClr val="tx1"/>
+          </a:fontRef>
+        </p:style>
+      </p:cxnSp>
+      <p:sp>
+        <p:nvSpPr>
+          <p:cNvPr id="25" name="矩形: 圆角 24">
+            <a:extLst>
+              <a:ext uri="{FF2B5EF4-FFF2-40B4-BE49-F238E27FC236}">
+                <a16:creationId xmlns:a16="http://schemas.microsoft.com/office/drawing/2014/main" id="{9206292A-CFFA-EDEE-0CE6-0FCE7626F683}"/>
+              </a:ext>
+            </a:extLst>
+          </p:cNvPr>
+          <p:cNvSpPr/>
+          <p:nvPr/>
+        </p:nvSpPr>
+        <p:spPr>
+          <a:xfrm>
+            <a:off x="6057780" y="2534400"/>
+            <a:ext cx="900000" cy="216000"/>
+          </a:xfrm>
+          <a:prstGeom prst="roundRect">
+            <a:avLst/>
+          </a:prstGeom>
+          <a:solidFill>
+            <a:srgbClr val="FB837D"/>
+          </a:solidFill>
+          <a:ln w="12700">
+            <a:noFill/>
+          </a:ln>
+        </p:spPr>
+        <p:style>
+          <a:lnRef idx="2">
+            <a:schemeClr val="accent1">
+              <a:shade val="15000"/>
+            </a:schemeClr>
+          </a:lnRef>
+          <a:fillRef idx="1">
+            <a:schemeClr val="accent1"/>
+          </a:fillRef>
+          <a:effectRef idx="0">
+            <a:schemeClr val="accent1"/>
+          </a:effectRef>
+          <a:fontRef idx="minor">
+            <a:schemeClr val="lt1"/>
+          </a:fontRef>
+        </p:style>
+        <p:txBody>
+          <a:bodyPr rtlCol="0" anchor="ctr"/>
+          <a:lstStyle/>
+          <a:p>
+            <a:pPr algn="ctr"/>
+            <a:r>
+              <a:rPr lang="en-US" altLang="zh-CN" sz="800">
+                <a:latin typeface="Quicksand" panose="00000500000000000000" pitchFamily="2" charset="0"/>
+              </a:rPr>
+              <a:t>lists</a:t>
+            </a:r>
+            <a:endParaRPr lang="zh-CN" altLang="en-US" sz="800">
+              <a:latin typeface="Quicksand" panose="00000500000000000000" pitchFamily="2" charset="0"/>
+            </a:endParaRPr>
+          </a:p>
+        </p:txBody>
+      </p:sp>
+      <p:sp>
+        <p:nvSpPr>
+          <p:cNvPr id="26" name="矩形: 圆角 25">
+            <a:extLst>
+              <a:ext uri="{FF2B5EF4-FFF2-40B4-BE49-F238E27FC236}">
+                <a16:creationId xmlns:a16="http://schemas.microsoft.com/office/drawing/2014/main" id="{E1A4A212-0D66-8B59-6229-1091271BAD62}"/>
+              </a:ext>
+            </a:extLst>
+          </p:cNvPr>
+          <p:cNvSpPr/>
+          <p:nvPr/>
+        </p:nvSpPr>
+        <p:spPr>
+          <a:xfrm>
+            <a:off x="6057780" y="2798400"/>
+            <a:ext cx="900000" cy="216000"/>
+          </a:xfrm>
+          <a:prstGeom prst="roundRect">
+            <a:avLst/>
+          </a:prstGeom>
+          <a:solidFill>
+            <a:srgbClr val="FB837D"/>
+          </a:solidFill>
+          <a:ln w="12700">
+            <a:noFill/>
+          </a:ln>
+        </p:spPr>
+        <p:style>
+          <a:lnRef idx="2">
+            <a:schemeClr val="accent1">
+              <a:shade val="15000"/>
+            </a:schemeClr>
+          </a:lnRef>
+          <a:fillRef idx="1">
+            <a:schemeClr val="accent1"/>
+          </a:fillRef>
+          <a:effectRef idx="0">
+            <a:schemeClr val="accent1"/>
+          </a:effectRef>
+          <a:fontRef idx="minor">
+            <a:schemeClr val="lt1"/>
+          </a:fontRef>
+        </p:style>
+        <p:txBody>
+          <a:bodyPr rtlCol="0" anchor="ctr"/>
+          <a:lstStyle/>
+          <a:p>
+            <a:pPr algn="ctr"/>
+            <a:r>
+              <a:rPr lang="en-US" altLang="zh-CN" sz="800">
+                <a:latin typeface="Quicksand" panose="00000500000000000000" pitchFamily="2" charset="0"/>
+              </a:rPr>
+              <a:t>getLists()</a:t>
+            </a:r>
+            <a:endParaRPr lang="zh-CN" altLang="en-US" sz="800">
+              <a:latin typeface="Quicksand" panose="00000500000000000000" pitchFamily="2" charset="0"/>
+            </a:endParaRPr>
+          </a:p>
+        </p:txBody>
+      </p:sp>
+      <p:cxnSp>
+        <p:nvCxnSpPr>
+          <p:cNvPr id="28" name="连接符: 曲线 27">
+            <a:extLst>
+              <a:ext uri="{FF2B5EF4-FFF2-40B4-BE49-F238E27FC236}">
+                <a16:creationId xmlns:a16="http://schemas.microsoft.com/office/drawing/2014/main" id="{309BB0B0-6F0E-C24E-3004-E1132211C2A4}"/>
+              </a:ext>
+            </a:extLst>
+          </p:cNvPr>
+          <p:cNvCxnSpPr>
+            <a:cxnSpLocks/>
+            <a:stCxn id="7" idx="3"/>
+            <a:endCxn id="25" idx="1"/>
+          </p:cNvCxnSpPr>
+          <p:nvPr/>
+        </p:nvCxnSpPr>
+        <p:spPr>
+          <a:xfrm flipV="1">
+            <a:off x="5888680" y="2642400"/>
+            <a:ext cx="169100" cy="431383"/>
+          </a:xfrm>
+          <a:prstGeom prst="curvedConnector3">
+            <a:avLst/>
+          </a:prstGeom>
+          <a:ln>
+            <a:solidFill>
+              <a:srgbClr val="C00000"/>
+            </a:solidFill>
+          </a:ln>
+        </p:spPr>
+        <p:style>
+          <a:lnRef idx="1">
+            <a:schemeClr val="accent1"/>
+          </a:lnRef>
+          <a:fillRef idx="0">
+            <a:schemeClr val="accent1"/>
+          </a:fillRef>
+          <a:effectRef idx="0">
+            <a:schemeClr val="accent1"/>
+          </a:effectRef>
+          <a:fontRef idx="minor">
+            <a:schemeClr val="tx1"/>
+          </a:fontRef>
+        </p:style>
+      </p:cxnSp>
+      <p:cxnSp>
+        <p:nvCxnSpPr>
+          <p:cNvPr id="34" name="连接符: 曲线 33">
+            <a:extLst>
+              <a:ext uri="{FF2B5EF4-FFF2-40B4-BE49-F238E27FC236}">
+                <a16:creationId xmlns:a16="http://schemas.microsoft.com/office/drawing/2014/main" id="{AAE83631-A7F6-E02C-6D38-BABF5CA86FCF}"/>
+              </a:ext>
+            </a:extLst>
+          </p:cNvPr>
+          <p:cNvCxnSpPr>
+            <a:cxnSpLocks/>
+            <a:stCxn id="7" idx="3"/>
+            <a:endCxn id="12" idx="1"/>
+          </p:cNvCxnSpPr>
+          <p:nvPr/>
+        </p:nvCxnSpPr>
+        <p:spPr>
+          <a:xfrm>
+            <a:off x="5888680" y="3073783"/>
+            <a:ext cx="169100" cy="96617"/>
+          </a:xfrm>
+          <a:prstGeom prst="curvedConnector3">
+            <a:avLst>
+              <a:gd name="adj1" fmla="val 50000"/>
+            </a:avLst>
+          </a:prstGeom>
+          <a:ln>
+            <a:solidFill>
+              <a:srgbClr val="C00000"/>
+            </a:solidFill>
+          </a:ln>
+        </p:spPr>
+        <p:style>
+          <a:lnRef idx="1">
+            <a:schemeClr val="accent1"/>
+          </a:lnRef>
+          <a:fillRef idx="0">
+            <a:schemeClr val="accent1"/>
+          </a:fillRef>
+          <a:effectRef idx="0">
+            <a:schemeClr val="accent1"/>
+          </a:effectRef>
+          <a:fontRef idx="minor">
+            <a:schemeClr val="tx1"/>
+          </a:fontRef>
+        </p:style>
+      </p:cxnSp>
+      <p:cxnSp>
+        <p:nvCxnSpPr>
+          <p:cNvPr id="69" name="连接符: 曲线 68">
+            <a:extLst>
+              <a:ext uri="{FF2B5EF4-FFF2-40B4-BE49-F238E27FC236}">
+                <a16:creationId xmlns:a16="http://schemas.microsoft.com/office/drawing/2014/main" id="{3C11272C-4991-936E-0304-646EE0728FD5}"/>
+              </a:ext>
+            </a:extLst>
+          </p:cNvPr>
+          <p:cNvCxnSpPr>
+            <a:cxnSpLocks/>
+            <a:stCxn id="35" idx="3"/>
+            <a:endCxn id="4" idx="1"/>
+          </p:cNvCxnSpPr>
+          <p:nvPr/>
+        </p:nvCxnSpPr>
+        <p:spPr>
+          <a:xfrm>
+            <a:off x="3738400" y="2055600"/>
+            <a:ext cx="189309" cy="289509"/>
+          </a:xfrm>
+          <a:prstGeom prst="curvedConnector3">
+            <a:avLst>
+              <a:gd name="adj1" fmla="val 50000"/>
+            </a:avLst>
+          </a:prstGeom>
+          <a:ln>
+            <a:solidFill>
+              <a:srgbClr val="00B050"/>
+            </a:solidFill>
+          </a:ln>
+        </p:spPr>
+        <p:style>
+          <a:lnRef idx="1">
+            <a:schemeClr val="accent1"/>
+          </a:lnRef>
+          <a:fillRef idx="0">
+            <a:schemeClr val="accent1"/>
+          </a:fillRef>
+          <a:effectRef idx="0">
+            <a:schemeClr val="accent1"/>
+          </a:effectRef>
+          <a:fontRef idx="minor">
+            <a:schemeClr val="tx1"/>
+          </a:fontRef>
+        </p:style>
+      </p:cxnSp>
+      <p:sp>
+        <p:nvSpPr>
+          <p:cNvPr id="108" name="矩形: 圆角 107">
+            <a:extLst>
+              <a:ext uri="{FF2B5EF4-FFF2-40B4-BE49-F238E27FC236}">
+                <a16:creationId xmlns:a16="http://schemas.microsoft.com/office/drawing/2014/main" id="{FAC0BED9-67F3-89B3-6AB2-8DA4ED4A93BE}"/>
+              </a:ext>
+            </a:extLst>
+          </p:cNvPr>
+          <p:cNvSpPr/>
+          <p:nvPr/>
+        </p:nvSpPr>
+        <p:spPr>
+          <a:xfrm>
+            <a:off x="6049650" y="3326400"/>
+            <a:ext cx="900000" cy="216000"/>
+          </a:xfrm>
+          <a:prstGeom prst="roundRect">
+            <a:avLst/>
+          </a:prstGeom>
+          <a:solidFill>
+            <a:srgbClr val="FB837D"/>
+          </a:solidFill>
+          <a:ln w="12700">
+            <a:noFill/>
+          </a:ln>
+        </p:spPr>
+        <p:style>
+          <a:lnRef idx="2">
+            <a:schemeClr val="accent1">
+              <a:shade val="15000"/>
+            </a:schemeClr>
+          </a:lnRef>
+          <a:fillRef idx="1">
+            <a:schemeClr val="accent1"/>
+          </a:fillRef>
+          <a:effectRef idx="0">
+            <a:schemeClr val="accent1"/>
+          </a:effectRef>
+          <a:fontRef idx="minor">
+            <a:schemeClr val="lt1"/>
+          </a:fontRef>
+        </p:style>
+        <p:txBody>
+          <a:bodyPr rtlCol="0" anchor="ctr"/>
+          <a:lstStyle/>
+          <a:p>
+            <a:pPr algn="ctr"/>
+            <a:r>
+              <a:rPr lang="en-US" altLang="zh-CN" sz="800">
+                <a:latin typeface="Quicksand" panose="00000500000000000000" pitchFamily="2" charset="0"/>
+              </a:rPr>
+              <a:t>clearCarts()</a:t>
+            </a:r>
+            <a:endParaRPr lang="zh-CN" altLang="en-US" sz="800">
+              <a:latin typeface="Quicksand" panose="00000500000000000000" pitchFamily="2" charset="0"/>
+            </a:endParaRPr>
+          </a:p>
+        </p:txBody>
+      </p:sp>
+      <p:cxnSp>
+        <p:nvCxnSpPr>
+          <p:cNvPr id="118" name="连接符: 曲线 117">
+            <a:extLst>
+              <a:ext uri="{FF2B5EF4-FFF2-40B4-BE49-F238E27FC236}">
+                <a16:creationId xmlns:a16="http://schemas.microsoft.com/office/drawing/2014/main" id="{10E5DD0E-A687-963B-1415-3F7429B9EB3A}"/>
+              </a:ext>
+            </a:extLst>
+          </p:cNvPr>
+          <p:cNvCxnSpPr>
+            <a:cxnSpLocks/>
+            <a:stCxn id="7" idx="3"/>
+            <a:endCxn id="26" idx="1"/>
+          </p:cNvCxnSpPr>
+          <p:nvPr/>
+        </p:nvCxnSpPr>
+        <p:spPr>
+          <a:xfrm flipV="1">
+            <a:off x="5888680" y="2906400"/>
+            <a:ext cx="169100" cy="167383"/>
+          </a:xfrm>
+          <a:prstGeom prst="curvedConnector3">
+            <a:avLst>
+              <a:gd name="adj1" fmla="val 50000"/>
+            </a:avLst>
+          </a:prstGeom>
+          <a:ln>
+            <a:solidFill>
+              <a:srgbClr val="C00000"/>
+            </a:solidFill>
+          </a:ln>
+        </p:spPr>
+        <p:style>
+          <a:lnRef idx="1">
+            <a:schemeClr val="accent1"/>
+          </a:lnRef>
+          <a:fillRef idx="0">
+            <a:schemeClr val="accent1"/>
+          </a:fillRef>
+          <a:effectRef idx="0">
+            <a:schemeClr val="accent1"/>
+          </a:effectRef>
+          <a:fontRef idx="minor">
+            <a:schemeClr val="tx1"/>
+          </a:fontRef>
+        </p:style>
+      </p:cxnSp>
+      <p:cxnSp>
+        <p:nvCxnSpPr>
+          <p:cNvPr id="121" name="连接符: 曲线 120">
+            <a:extLst>
+              <a:ext uri="{FF2B5EF4-FFF2-40B4-BE49-F238E27FC236}">
+                <a16:creationId xmlns:a16="http://schemas.microsoft.com/office/drawing/2014/main" id="{5E6615E3-8D72-AC02-8F82-0C0E07C8A063}"/>
+              </a:ext>
+            </a:extLst>
+          </p:cNvPr>
+          <p:cNvCxnSpPr>
+            <a:cxnSpLocks/>
+            <a:stCxn id="7" idx="3"/>
+            <a:endCxn id="108" idx="1"/>
+          </p:cNvCxnSpPr>
+          <p:nvPr/>
+        </p:nvCxnSpPr>
+        <p:spPr>
+          <a:xfrm>
+            <a:off x="5888680" y="3073783"/>
+            <a:ext cx="160970" cy="360617"/>
+          </a:xfrm>
+          <a:prstGeom prst="curvedConnector3">
+            <a:avLst>
+              <a:gd name="adj1" fmla="val 50000"/>
+            </a:avLst>
+          </a:prstGeom>
+          <a:ln>
+            <a:solidFill>
+              <a:srgbClr val="C00000"/>
+            </a:solidFill>
+          </a:ln>
+        </p:spPr>
+        <p:style>
+          <a:lnRef idx="1">
+            <a:schemeClr val="accent1"/>
+          </a:lnRef>
+          <a:fillRef idx="0">
+            <a:schemeClr val="accent1"/>
+          </a:fillRef>
+          <a:effectRef idx="0">
+            <a:schemeClr val="accent1"/>
+          </a:effectRef>
+          <a:fontRef idx="minor">
+            <a:schemeClr val="tx1"/>
+          </a:fontRef>
+        </p:style>
+      </p:cxnSp>
+      <p:sp>
+        <p:nvSpPr>
+          <p:cNvPr id="12" name="矩形: 圆角 11">
+            <a:extLst>
+              <a:ext uri="{FF2B5EF4-FFF2-40B4-BE49-F238E27FC236}">
+                <a16:creationId xmlns:a16="http://schemas.microsoft.com/office/drawing/2014/main" id="{720E96D7-080F-5915-CFE3-F48B6E4FAB2E}"/>
+              </a:ext>
+            </a:extLst>
+          </p:cNvPr>
+          <p:cNvSpPr/>
+          <p:nvPr/>
+        </p:nvSpPr>
+        <p:spPr>
+          <a:xfrm>
+            <a:off x="6057780" y="3062400"/>
+            <a:ext cx="900000" cy="216000"/>
+          </a:xfrm>
+          <a:prstGeom prst="roundRect">
+            <a:avLst/>
+          </a:prstGeom>
+          <a:solidFill>
+            <a:srgbClr val="FB837D"/>
+          </a:solidFill>
+          <a:ln w="12700">
+            <a:noFill/>
+          </a:ln>
+        </p:spPr>
+        <p:style>
+          <a:lnRef idx="2">
+            <a:schemeClr val="accent1">
+              <a:shade val="15000"/>
+            </a:schemeClr>
+          </a:lnRef>
+          <a:fillRef idx="1">
+            <a:schemeClr val="accent1"/>
+          </a:fillRef>
+          <a:effectRef idx="0">
+            <a:schemeClr val="accent1"/>
+          </a:effectRef>
+          <a:fontRef idx="minor">
+            <a:schemeClr val="lt1"/>
+          </a:fontRef>
+        </p:style>
+        <p:txBody>
+          <a:bodyPr rtlCol="0" anchor="ctr"/>
+          <a:lstStyle/>
+          <a:p>
+            <a:pPr algn="ctr"/>
+            <a:r>
+              <a:rPr lang="en-US" altLang="zh-CN" sz="800">
+                <a:latin typeface="Quicksand" panose="00000500000000000000" pitchFamily="2" charset="0"/>
+              </a:rPr>
+              <a:t>addToCarts()</a:t>
+            </a:r>
+            <a:endParaRPr lang="zh-CN" altLang="en-US" sz="800">
+              <a:latin typeface="Quicksand" panose="00000500000000000000" pitchFamily="2" charset="0"/>
+            </a:endParaRPr>
+          </a:p>
+        </p:txBody>
+      </p:sp>
+      <p:sp>
+        <p:nvSpPr>
+          <p:cNvPr id="35" name="矩形: 圆角 34">
+            <a:extLst>
+              <a:ext uri="{FF2B5EF4-FFF2-40B4-BE49-F238E27FC236}">
+                <a16:creationId xmlns:a16="http://schemas.microsoft.com/office/drawing/2014/main" id="{2560AFC3-5502-019C-04F5-A2B3EC196CEB}"/>
+              </a:ext>
+            </a:extLst>
+          </p:cNvPr>
+          <p:cNvSpPr/>
+          <p:nvPr/>
+        </p:nvSpPr>
+        <p:spPr>
+          <a:xfrm>
+            <a:off x="2730400" y="1947600"/>
+            <a:ext cx="1008000" cy="216000"/>
+          </a:xfrm>
+          <a:prstGeom prst="roundRect">
+            <a:avLst/>
+          </a:prstGeom>
+          <a:solidFill>
+            <a:srgbClr val="CCF2E5"/>
+          </a:solidFill>
+          <a:ln w="12700">
+            <a:noFill/>
+          </a:ln>
+        </p:spPr>
+        <p:style>
+          <a:lnRef idx="2">
+            <a:schemeClr val="accent1">
+              <a:shade val="15000"/>
+            </a:schemeClr>
+          </a:lnRef>
+          <a:fillRef idx="1">
+            <a:schemeClr val="accent1"/>
+          </a:fillRef>
+          <a:effectRef idx="0">
+            <a:schemeClr val="accent1"/>
+          </a:effectRef>
+          <a:fontRef idx="minor">
+            <a:schemeClr val="lt1"/>
+          </a:fontRef>
+        </p:style>
+        <p:txBody>
+          <a:bodyPr rtlCol="0" anchor="ctr"/>
+          <a:lstStyle/>
+          <a:p>
+            <a:pPr algn="ctr"/>
+            <a:r>
+              <a:rPr lang="en-US" altLang="zh-CN" sz="800">
+                <a:solidFill>
+                  <a:sysClr val="windowText" lastClr="000000"/>
+                </a:solidFill>
+                <a:latin typeface="Quicksand Light" panose="00000400000000000000" pitchFamily="2" charset="0"/>
+              </a:rPr>
+              <a:t>good</a:t>
+            </a:r>
+            <a:endParaRPr lang="zh-CN" altLang="en-US" sz="800">
+              <a:solidFill>
+                <a:sysClr val="windowText" lastClr="000000"/>
+              </a:solidFill>
+              <a:latin typeface="Quicksand Light" panose="00000400000000000000" pitchFamily="2" charset="0"/>
+            </a:endParaRPr>
+          </a:p>
+        </p:txBody>
+      </p:sp>
+      <p:sp>
+        <p:nvSpPr>
+          <p:cNvPr id="36" name="矩形: 圆角 35">
+            <a:extLst>
+              <a:ext uri="{FF2B5EF4-FFF2-40B4-BE49-F238E27FC236}">
+                <a16:creationId xmlns:a16="http://schemas.microsoft.com/office/drawing/2014/main" id="{DEA05F83-9848-938F-5765-BDA46419BE99}"/>
+              </a:ext>
+            </a:extLst>
+          </p:cNvPr>
+          <p:cNvSpPr/>
+          <p:nvPr/>
+        </p:nvSpPr>
+        <p:spPr>
+          <a:xfrm>
+            <a:off x="2730400" y="2237109"/>
+            <a:ext cx="1008000" cy="216000"/>
+          </a:xfrm>
+          <a:prstGeom prst="roundRect">
+            <a:avLst/>
+          </a:prstGeom>
+          <a:solidFill>
+            <a:srgbClr val="CCF2E5"/>
+          </a:solidFill>
+          <a:ln w="12700">
+            <a:noFill/>
+          </a:ln>
+        </p:spPr>
+        <p:style>
+          <a:lnRef idx="2">
+            <a:schemeClr val="accent1">
+              <a:shade val="15000"/>
+            </a:schemeClr>
+          </a:lnRef>
+          <a:fillRef idx="1">
+            <a:schemeClr val="accent1"/>
+          </a:fillRef>
+          <a:effectRef idx="0">
+            <a:schemeClr val="accent1"/>
+          </a:effectRef>
+          <a:fontRef idx="minor">
+            <a:schemeClr val="lt1"/>
+          </a:fontRef>
+        </p:style>
+        <p:txBody>
+          <a:bodyPr rtlCol="0" anchor="ctr"/>
+          <a:lstStyle/>
+          <a:p>
+            <a:pPr algn="ctr"/>
+            <a:r>
+              <a:rPr lang="en-US" altLang="zh-CN" sz="800">
+                <a:solidFill>
+                  <a:sysClr val="windowText" lastClr="000000"/>
+                </a:solidFill>
+                <a:latin typeface="Quicksand Light" panose="00000400000000000000" pitchFamily="2" charset="0"/>
+              </a:rPr>
+              <a:t>goodSelected</a:t>
+            </a:r>
+            <a:endParaRPr lang="zh-CN" altLang="en-US" sz="800">
+              <a:solidFill>
+                <a:sysClr val="windowText" lastClr="000000"/>
+              </a:solidFill>
+              <a:latin typeface="Quicksand Light" panose="00000400000000000000" pitchFamily="2" charset="0"/>
+            </a:endParaRPr>
+          </a:p>
+        </p:txBody>
+      </p:sp>
+      <p:sp>
+        <p:nvSpPr>
+          <p:cNvPr id="37" name="矩形: 圆角 36">
+            <a:extLst>
+              <a:ext uri="{FF2B5EF4-FFF2-40B4-BE49-F238E27FC236}">
+                <a16:creationId xmlns:a16="http://schemas.microsoft.com/office/drawing/2014/main" id="{61EF7C50-FB8D-FA1D-20B6-85409306F50D}"/>
+              </a:ext>
+            </a:extLst>
+          </p:cNvPr>
+          <p:cNvSpPr/>
+          <p:nvPr/>
+        </p:nvSpPr>
+        <p:spPr>
+          <a:xfrm>
+            <a:off x="2730400" y="2523600"/>
+            <a:ext cx="1008000" cy="216000"/>
+          </a:xfrm>
+          <a:prstGeom prst="roundRect">
+            <a:avLst/>
+          </a:prstGeom>
+          <a:solidFill>
+            <a:srgbClr val="CCF2E5"/>
+          </a:solidFill>
+          <a:ln w="12700">
+            <a:noFill/>
+          </a:ln>
+        </p:spPr>
+        <p:style>
+          <a:lnRef idx="2">
+            <a:schemeClr val="accent1">
+              <a:shade val="15000"/>
+            </a:schemeClr>
+          </a:lnRef>
+          <a:fillRef idx="1">
+            <a:schemeClr val="accent1"/>
+          </a:fillRef>
+          <a:effectRef idx="0">
+            <a:schemeClr val="accent1"/>
+          </a:effectRef>
+          <a:fontRef idx="minor">
+            <a:schemeClr val="lt1"/>
+          </a:fontRef>
+        </p:style>
+        <p:txBody>
+          <a:bodyPr rtlCol="0" anchor="ctr"/>
+          <a:lstStyle/>
+          <a:p>
+            <a:pPr algn="ctr"/>
+            <a:r>
+              <a:rPr lang="en-US" altLang="zh-CN" sz="800">
+                <a:solidFill>
+                  <a:sysClr val="windowText" lastClr="000000"/>
+                </a:solidFill>
+                <a:latin typeface="Quicksand Light" panose="00000400000000000000" pitchFamily="2" charset="0"/>
+              </a:rPr>
+              <a:t>addToCarts()</a:t>
+            </a:r>
+            <a:endParaRPr lang="zh-CN" altLang="en-US" sz="800">
+              <a:solidFill>
+                <a:sysClr val="windowText" lastClr="000000"/>
+              </a:solidFill>
+              <a:latin typeface="Quicksand Light" panose="00000400000000000000" pitchFamily="2" charset="0"/>
+            </a:endParaRPr>
+          </a:p>
+        </p:txBody>
+      </p:sp>
+      <p:cxnSp>
+        <p:nvCxnSpPr>
+          <p:cNvPr id="40" name="连接符: 曲线 39">
+            <a:extLst>
+              <a:ext uri="{FF2B5EF4-FFF2-40B4-BE49-F238E27FC236}">
+                <a16:creationId xmlns:a16="http://schemas.microsoft.com/office/drawing/2014/main" id="{4AC6721A-6244-50EC-47B3-5478511DF02F}"/>
+              </a:ext>
+            </a:extLst>
+          </p:cNvPr>
+          <p:cNvCxnSpPr>
+            <a:cxnSpLocks/>
+            <a:stCxn id="37" idx="3"/>
+            <a:endCxn id="4" idx="1"/>
+          </p:cNvCxnSpPr>
+          <p:nvPr/>
+        </p:nvCxnSpPr>
+        <p:spPr>
+          <a:xfrm flipV="1">
+            <a:off x="3738400" y="2345109"/>
+            <a:ext cx="189309" cy="286491"/>
+          </a:xfrm>
+          <a:prstGeom prst="curvedConnector3">
+            <a:avLst>
+              <a:gd name="adj1" fmla="val 50000"/>
+            </a:avLst>
+          </a:prstGeom>
+          <a:ln>
+            <a:solidFill>
+              <a:srgbClr val="00B050"/>
+            </a:solidFill>
+          </a:ln>
+        </p:spPr>
+        <p:style>
+          <a:lnRef idx="1">
+            <a:schemeClr val="accent1"/>
+          </a:lnRef>
+          <a:fillRef idx="0">
+            <a:schemeClr val="accent1"/>
+          </a:fillRef>
+          <a:effectRef idx="0">
+            <a:schemeClr val="accent1"/>
+          </a:effectRef>
+          <a:fontRef idx="minor">
+            <a:schemeClr val="tx1"/>
+          </a:fontRef>
+        </p:style>
+      </p:cxnSp>
+      <p:cxnSp>
+        <p:nvCxnSpPr>
+          <p:cNvPr id="45" name="直接连接符 44">
+            <a:extLst>
+              <a:ext uri="{FF2B5EF4-FFF2-40B4-BE49-F238E27FC236}">
+                <a16:creationId xmlns:a16="http://schemas.microsoft.com/office/drawing/2014/main" id="{64FC7AF9-BB31-5588-9F23-4B97028C7A12}"/>
+              </a:ext>
+            </a:extLst>
+          </p:cNvPr>
+          <p:cNvCxnSpPr>
+            <a:stCxn id="36" idx="3"/>
+            <a:endCxn id="4" idx="1"/>
+          </p:cNvCxnSpPr>
+          <p:nvPr/>
+        </p:nvCxnSpPr>
+        <p:spPr>
+          <a:xfrm>
+            <a:off x="3738400" y="2345109"/>
+            <a:ext cx="189309" cy="0"/>
+          </a:xfrm>
+          <a:prstGeom prst="line">
+            <a:avLst/>
+          </a:prstGeom>
+          <a:ln>
+            <a:solidFill>
+              <a:srgbClr val="00B050"/>
+            </a:solidFill>
+          </a:ln>
+        </p:spPr>
+        <p:style>
+          <a:lnRef idx="1">
+            <a:schemeClr val="accent1"/>
+          </a:lnRef>
+          <a:fillRef idx="0">
+            <a:schemeClr val="accent1"/>
+          </a:fillRef>
+          <a:effectRef idx="0">
+            <a:schemeClr val="accent1"/>
+          </a:effectRef>
+          <a:fontRef idx="minor">
+            <a:schemeClr val="tx1"/>
+          </a:fontRef>
+        </p:style>
+      </p:cxnSp>
+      <p:sp>
+        <p:nvSpPr>
+          <p:cNvPr id="54" name="矩形: 圆角 53">
+            <a:extLst>
+              <a:ext uri="{FF2B5EF4-FFF2-40B4-BE49-F238E27FC236}">
+                <a16:creationId xmlns:a16="http://schemas.microsoft.com/office/drawing/2014/main" id="{A46905A7-222F-AF3F-81E8-3E43C3A2AFC0}"/>
+              </a:ext>
+            </a:extLst>
+          </p:cNvPr>
+          <p:cNvSpPr/>
+          <p:nvPr/>
+        </p:nvSpPr>
+        <p:spPr>
+          <a:xfrm>
+            <a:off x="2730400" y="2946554"/>
+            <a:ext cx="1008000" cy="216000"/>
+          </a:xfrm>
+          <a:prstGeom prst="roundRect">
+            <a:avLst/>
+          </a:prstGeom>
+          <a:solidFill>
+            <a:srgbClr val="5C84CC">
+              <a:alpha val="89804"/>
+            </a:srgbClr>
+          </a:solidFill>
+          <a:ln w="12700">
+            <a:noFill/>
+          </a:ln>
+        </p:spPr>
+        <p:style>
+          <a:lnRef idx="2">
+            <a:schemeClr val="accent1">
+              <a:shade val="15000"/>
+            </a:schemeClr>
+          </a:lnRef>
+          <a:fillRef idx="1">
+            <a:schemeClr val="accent1"/>
+          </a:fillRef>
+          <a:effectRef idx="0">
+            <a:schemeClr val="accent1"/>
+          </a:effectRef>
+          <a:fontRef idx="minor">
+            <a:schemeClr val="lt1"/>
+          </a:fontRef>
+        </p:style>
+        <p:txBody>
+          <a:bodyPr rtlCol="0" anchor="ctr"/>
+          <a:lstStyle/>
+          <a:p>
+            <a:pPr algn="ctr"/>
+            <a:r>
+              <a:rPr lang="en-US" altLang="zh-CN" sz="800">
+                <a:latin typeface="Quicksand" panose="00000500000000000000" pitchFamily="2" charset="0"/>
+              </a:rPr>
+              <a:t>lists</a:t>
+            </a:r>
+            <a:endParaRPr lang="zh-CN" altLang="en-US" sz="800">
+              <a:latin typeface="Quicksand" panose="00000500000000000000" pitchFamily="2" charset="0"/>
+            </a:endParaRPr>
+          </a:p>
+        </p:txBody>
+      </p:sp>
+      <p:sp>
+        <p:nvSpPr>
+          <p:cNvPr id="55" name="矩形: 圆角 54">
+            <a:extLst>
+              <a:ext uri="{FF2B5EF4-FFF2-40B4-BE49-F238E27FC236}">
+                <a16:creationId xmlns:a16="http://schemas.microsoft.com/office/drawing/2014/main" id="{1B69FB84-588C-3B6F-29DC-0D207F19217B}"/>
+              </a:ext>
+            </a:extLst>
+          </p:cNvPr>
+          <p:cNvSpPr/>
+          <p:nvPr/>
+        </p:nvSpPr>
+        <p:spPr>
+          <a:xfrm>
+            <a:off x="2730400" y="3245715"/>
+            <a:ext cx="1008000" cy="216000"/>
+          </a:xfrm>
+          <a:prstGeom prst="roundRect">
+            <a:avLst/>
+          </a:prstGeom>
+          <a:solidFill>
+            <a:srgbClr val="5C84CC">
+              <a:alpha val="89804"/>
+            </a:srgbClr>
+          </a:solidFill>
+          <a:ln w="12700">
+            <a:noFill/>
+          </a:ln>
+        </p:spPr>
+        <p:style>
+          <a:lnRef idx="2">
+            <a:schemeClr val="accent1">
+              <a:shade val="15000"/>
+            </a:schemeClr>
+          </a:lnRef>
+          <a:fillRef idx="1">
+            <a:schemeClr val="accent1"/>
+          </a:fillRef>
+          <a:effectRef idx="0">
+            <a:schemeClr val="accent1"/>
+          </a:effectRef>
+          <a:fontRef idx="minor">
+            <a:schemeClr val="lt1"/>
+          </a:fontRef>
+        </p:style>
+        <p:txBody>
+          <a:bodyPr rtlCol="0" anchor="ctr"/>
+          <a:lstStyle/>
+          <a:p>
+            <a:pPr algn="ctr"/>
+            <a:r>
+              <a:rPr lang="en-US" altLang="zh-CN" sz="800">
+                <a:latin typeface="Quicksand" panose="00000500000000000000" pitchFamily="2" charset="0"/>
+              </a:rPr>
+              <a:t>selectedLists</a:t>
+            </a:r>
+            <a:endParaRPr lang="zh-CN" altLang="en-US" sz="800">
+              <a:latin typeface="Quicksand" panose="00000500000000000000" pitchFamily="2" charset="0"/>
+            </a:endParaRPr>
+          </a:p>
+        </p:txBody>
+      </p:sp>
+      <p:sp>
+        <p:nvSpPr>
+          <p:cNvPr id="56" name="矩形: 圆角 55">
+            <a:extLst>
+              <a:ext uri="{FF2B5EF4-FFF2-40B4-BE49-F238E27FC236}">
+                <a16:creationId xmlns:a16="http://schemas.microsoft.com/office/drawing/2014/main" id="{1761FC9C-89B8-41A0-8F5C-43B5E16AA3C1}"/>
+              </a:ext>
+            </a:extLst>
+          </p:cNvPr>
+          <p:cNvSpPr/>
+          <p:nvPr/>
+        </p:nvSpPr>
+        <p:spPr>
+          <a:xfrm>
+            <a:off x="2730400" y="3544876"/>
+            <a:ext cx="1008000" cy="216000"/>
+          </a:xfrm>
+          <a:prstGeom prst="roundRect">
+            <a:avLst/>
+          </a:prstGeom>
+          <a:solidFill>
+            <a:srgbClr val="5C84CC">
+              <a:alpha val="89804"/>
+            </a:srgbClr>
+          </a:solidFill>
+          <a:ln w="12700">
+            <a:noFill/>
+          </a:ln>
+        </p:spPr>
+        <p:style>
+          <a:lnRef idx="2">
+            <a:schemeClr val="accent1">
+              <a:shade val="15000"/>
+            </a:schemeClr>
+          </a:lnRef>
+          <a:fillRef idx="1">
+            <a:schemeClr val="accent1"/>
+          </a:fillRef>
+          <a:effectRef idx="0">
+            <a:schemeClr val="accent1"/>
+          </a:effectRef>
+          <a:fontRef idx="minor">
+            <a:schemeClr val="lt1"/>
+          </a:fontRef>
+        </p:style>
+        <p:txBody>
+          <a:bodyPr rtlCol="0" anchor="ctr"/>
+          <a:lstStyle/>
+          <a:p>
+            <a:pPr algn="ctr"/>
+            <a:r>
+              <a:rPr lang="en-US" altLang="zh-CN" sz="800">
+                <a:latin typeface="Quicksand" panose="00000500000000000000" pitchFamily="2" charset="0"/>
+              </a:rPr>
+              <a:t>isAll</a:t>
+            </a:r>
+            <a:endParaRPr lang="zh-CN" altLang="en-US" sz="800">
+              <a:latin typeface="Quicksand" panose="00000500000000000000" pitchFamily="2" charset="0"/>
+            </a:endParaRPr>
+          </a:p>
+        </p:txBody>
+      </p:sp>
+      <p:sp>
+        <p:nvSpPr>
+          <p:cNvPr id="57" name="矩形: 圆角 56">
+            <a:extLst>
+              <a:ext uri="{FF2B5EF4-FFF2-40B4-BE49-F238E27FC236}">
+                <a16:creationId xmlns:a16="http://schemas.microsoft.com/office/drawing/2014/main" id="{83DCAFDE-14F9-6845-DB80-8B8F839510C3}"/>
+              </a:ext>
+            </a:extLst>
+          </p:cNvPr>
+          <p:cNvSpPr/>
+          <p:nvPr/>
+        </p:nvSpPr>
+        <p:spPr>
+          <a:xfrm>
+            <a:off x="2730400" y="3844037"/>
+            <a:ext cx="1008000" cy="216000"/>
+          </a:xfrm>
+          <a:prstGeom prst="roundRect">
+            <a:avLst/>
+          </a:prstGeom>
+          <a:solidFill>
+            <a:srgbClr val="5C84CC">
+              <a:alpha val="89804"/>
+            </a:srgbClr>
+          </a:solidFill>
+          <a:ln w="12700">
+            <a:noFill/>
+          </a:ln>
+        </p:spPr>
+        <p:style>
+          <a:lnRef idx="2">
+            <a:schemeClr val="accent1">
+              <a:shade val="15000"/>
+            </a:schemeClr>
+          </a:lnRef>
+          <a:fillRef idx="1">
+            <a:schemeClr val="accent1"/>
+          </a:fillRef>
+          <a:effectRef idx="0">
+            <a:schemeClr val="accent1"/>
+          </a:effectRef>
+          <a:fontRef idx="minor">
+            <a:schemeClr val="lt1"/>
+          </a:fontRef>
+        </p:style>
+        <p:txBody>
+          <a:bodyPr rtlCol="0" anchor="ctr"/>
+          <a:lstStyle/>
+          <a:p>
+            <a:pPr algn="ctr"/>
+            <a:r>
+              <a:rPr lang="en-US" altLang="zh-CN" sz="800">
+                <a:latin typeface="Quicksand" panose="00000500000000000000" pitchFamily="2" charset="0"/>
+              </a:rPr>
+              <a:t>count</a:t>
+            </a:r>
+            <a:endParaRPr lang="zh-CN" altLang="en-US" sz="800">
+              <a:latin typeface="Quicksand" panose="00000500000000000000" pitchFamily="2" charset="0"/>
+            </a:endParaRPr>
+          </a:p>
+        </p:txBody>
+      </p:sp>
+      <p:sp>
+        <p:nvSpPr>
+          <p:cNvPr id="59" name="矩形: 圆角 58">
+            <a:extLst>
+              <a:ext uri="{FF2B5EF4-FFF2-40B4-BE49-F238E27FC236}">
+                <a16:creationId xmlns:a16="http://schemas.microsoft.com/office/drawing/2014/main" id="{D7B3F34F-6627-658C-A744-FBC9FDD8AF91}"/>
+              </a:ext>
+            </a:extLst>
+          </p:cNvPr>
+          <p:cNvSpPr/>
+          <p:nvPr/>
+        </p:nvSpPr>
+        <p:spPr>
+          <a:xfrm>
+            <a:off x="2730400" y="4143198"/>
+            <a:ext cx="1008000" cy="216000"/>
+          </a:xfrm>
+          <a:prstGeom prst="roundRect">
+            <a:avLst/>
+          </a:prstGeom>
+          <a:solidFill>
+            <a:srgbClr val="5C84CC">
+              <a:alpha val="89804"/>
+            </a:srgbClr>
+          </a:solidFill>
+          <a:ln w="12700">
+            <a:noFill/>
+          </a:ln>
+        </p:spPr>
+        <p:style>
+          <a:lnRef idx="2">
+            <a:schemeClr val="accent1">
+              <a:shade val="15000"/>
+            </a:schemeClr>
+          </a:lnRef>
+          <a:fillRef idx="1">
+            <a:schemeClr val="accent1"/>
+          </a:fillRef>
+          <a:effectRef idx="0">
+            <a:schemeClr val="accent1"/>
+          </a:effectRef>
+          <a:fontRef idx="minor">
+            <a:schemeClr val="lt1"/>
+          </a:fontRef>
+        </p:style>
+        <p:txBody>
+          <a:bodyPr rtlCol="0" anchor="ctr"/>
+          <a:lstStyle/>
+          <a:p>
+            <a:pPr algn="ctr"/>
+            <a:r>
+              <a:rPr lang="en-US" altLang="zh-CN" sz="800">
+                <a:latin typeface="Quicksand" panose="00000500000000000000" pitchFamily="2" charset="0"/>
+              </a:rPr>
+              <a:t>totalPrice</a:t>
+            </a:r>
+            <a:endParaRPr lang="zh-CN" altLang="en-US" sz="800">
+              <a:latin typeface="Quicksand" panose="00000500000000000000" pitchFamily="2" charset="0"/>
+            </a:endParaRPr>
+          </a:p>
+        </p:txBody>
+      </p:sp>
+      <p:sp>
+        <p:nvSpPr>
+          <p:cNvPr id="60" name="矩形: 圆角 59">
+            <a:extLst>
+              <a:ext uri="{FF2B5EF4-FFF2-40B4-BE49-F238E27FC236}">
+                <a16:creationId xmlns:a16="http://schemas.microsoft.com/office/drawing/2014/main" id="{69FD48F7-D13B-8DD4-D4AA-42DDEE93B189}"/>
+              </a:ext>
+            </a:extLst>
+          </p:cNvPr>
+          <p:cNvSpPr/>
+          <p:nvPr/>
+        </p:nvSpPr>
+        <p:spPr>
+          <a:xfrm>
+            <a:off x="2730400" y="4442359"/>
+            <a:ext cx="1008000" cy="216000"/>
+          </a:xfrm>
+          <a:prstGeom prst="roundRect">
+            <a:avLst/>
+          </a:prstGeom>
+          <a:solidFill>
+            <a:srgbClr val="5C84CC">
+              <a:alpha val="89804"/>
+            </a:srgbClr>
+          </a:solidFill>
+          <a:ln w="12700">
+            <a:noFill/>
+          </a:ln>
+        </p:spPr>
+        <p:style>
+          <a:lnRef idx="2">
+            <a:schemeClr val="accent1">
+              <a:shade val="15000"/>
+            </a:schemeClr>
+          </a:lnRef>
+          <a:fillRef idx="1">
+            <a:schemeClr val="accent1"/>
+          </a:fillRef>
+          <a:effectRef idx="0">
+            <a:schemeClr val="accent1"/>
+          </a:effectRef>
+          <a:fontRef idx="minor">
+            <a:schemeClr val="lt1"/>
+          </a:fontRef>
+        </p:style>
+        <p:txBody>
+          <a:bodyPr rtlCol="0" anchor="ctr"/>
+          <a:lstStyle/>
+          <a:p>
+            <a:pPr algn="ctr"/>
+            <a:r>
+              <a:rPr lang="en-US" altLang="zh-CN" sz="800">
+                <a:latin typeface="Quicksand" panose="00000500000000000000" pitchFamily="2" charset="0"/>
+              </a:rPr>
+              <a:t>discountPrice</a:t>
+            </a:r>
+            <a:endParaRPr lang="zh-CN" altLang="en-US" sz="800">
+              <a:latin typeface="Quicksand" panose="00000500000000000000" pitchFamily="2" charset="0"/>
+            </a:endParaRPr>
+          </a:p>
+        </p:txBody>
+      </p:sp>
+      <p:cxnSp>
+        <p:nvCxnSpPr>
+          <p:cNvPr id="61" name="连接符: 曲线 60">
+            <a:extLst>
+              <a:ext uri="{FF2B5EF4-FFF2-40B4-BE49-F238E27FC236}">
+                <a16:creationId xmlns:a16="http://schemas.microsoft.com/office/drawing/2014/main" id="{BD5BA532-7EB2-08C6-9059-CA4E846D5684}"/>
+              </a:ext>
+            </a:extLst>
+          </p:cNvPr>
+          <p:cNvCxnSpPr>
+            <a:cxnSpLocks/>
+            <a:stCxn id="54" idx="3"/>
+            <a:endCxn id="3" idx="1"/>
+          </p:cNvCxnSpPr>
+          <p:nvPr/>
+        </p:nvCxnSpPr>
+        <p:spPr>
+          <a:xfrm>
+            <a:off x="3738400" y="3054554"/>
+            <a:ext cx="189309" cy="747903"/>
+          </a:xfrm>
+          <a:prstGeom prst="curvedConnector3">
+            <a:avLst>
+              <a:gd name="adj1" fmla="val 50000"/>
+            </a:avLst>
+          </a:prstGeom>
+          <a:ln>
+            <a:solidFill>
+              <a:srgbClr val="6D91D1"/>
+            </a:solidFill>
+          </a:ln>
+        </p:spPr>
+        <p:style>
+          <a:lnRef idx="1">
+            <a:schemeClr val="accent1"/>
+          </a:lnRef>
+          <a:fillRef idx="0">
+            <a:schemeClr val="accent1"/>
+          </a:fillRef>
+          <a:effectRef idx="0">
+            <a:schemeClr val="accent1"/>
+          </a:effectRef>
+          <a:fontRef idx="minor">
+            <a:schemeClr val="tx1"/>
+          </a:fontRef>
+        </p:style>
+      </p:cxnSp>
+      <p:cxnSp>
+        <p:nvCxnSpPr>
+          <p:cNvPr id="68" name="连接符: 曲线 67">
+            <a:extLst>
+              <a:ext uri="{FF2B5EF4-FFF2-40B4-BE49-F238E27FC236}">
+                <a16:creationId xmlns:a16="http://schemas.microsoft.com/office/drawing/2014/main" id="{16E326BD-B4AE-1641-E70A-A6BFE4509A70}"/>
+              </a:ext>
+            </a:extLst>
+          </p:cNvPr>
+          <p:cNvCxnSpPr>
+            <a:cxnSpLocks/>
+            <a:stCxn id="55" idx="3"/>
+            <a:endCxn id="3" idx="1"/>
+          </p:cNvCxnSpPr>
+          <p:nvPr/>
+        </p:nvCxnSpPr>
+        <p:spPr>
+          <a:xfrm>
+            <a:off x="3738400" y="3353715"/>
+            <a:ext cx="189309" cy="448742"/>
+          </a:xfrm>
+          <a:prstGeom prst="curvedConnector3">
+            <a:avLst>
+              <a:gd name="adj1" fmla="val 50000"/>
+            </a:avLst>
+          </a:prstGeom>
+          <a:ln>
+            <a:solidFill>
+              <a:srgbClr val="6D91D1"/>
+            </a:solidFill>
+          </a:ln>
+        </p:spPr>
+        <p:style>
+          <a:lnRef idx="1">
+            <a:schemeClr val="accent1"/>
+          </a:lnRef>
+          <a:fillRef idx="0">
+            <a:schemeClr val="accent1"/>
+          </a:fillRef>
+          <a:effectRef idx="0">
+            <a:schemeClr val="accent1"/>
+          </a:effectRef>
+          <a:fontRef idx="minor">
+            <a:schemeClr val="tx1"/>
+          </a:fontRef>
+        </p:style>
+      </p:cxnSp>
+      <p:cxnSp>
+        <p:nvCxnSpPr>
+          <p:cNvPr id="75" name="连接符: 曲线 74">
+            <a:extLst>
+              <a:ext uri="{FF2B5EF4-FFF2-40B4-BE49-F238E27FC236}">
+                <a16:creationId xmlns:a16="http://schemas.microsoft.com/office/drawing/2014/main" id="{B5A66737-652E-D3AD-C2BA-7A64BF6D2DB4}"/>
+              </a:ext>
+            </a:extLst>
+          </p:cNvPr>
+          <p:cNvCxnSpPr>
+            <a:cxnSpLocks/>
+            <a:stCxn id="60" idx="3"/>
+            <a:endCxn id="3" idx="1"/>
+          </p:cNvCxnSpPr>
+          <p:nvPr/>
+        </p:nvCxnSpPr>
+        <p:spPr>
+          <a:xfrm flipV="1">
+            <a:off x="3738400" y="3802457"/>
+            <a:ext cx="189309" cy="747902"/>
+          </a:xfrm>
+          <a:prstGeom prst="curvedConnector3">
+            <a:avLst>
+              <a:gd name="adj1" fmla="val 50000"/>
+            </a:avLst>
+          </a:prstGeom>
+          <a:ln>
+            <a:solidFill>
+              <a:srgbClr val="6D91D1"/>
+            </a:solidFill>
+          </a:ln>
+        </p:spPr>
+        <p:style>
+          <a:lnRef idx="1">
+            <a:schemeClr val="accent1"/>
+          </a:lnRef>
+          <a:fillRef idx="0">
+            <a:schemeClr val="accent1"/>
+          </a:fillRef>
+          <a:effectRef idx="0">
+            <a:schemeClr val="accent1"/>
+          </a:effectRef>
+          <a:fontRef idx="minor">
+            <a:schemeClr val="tx1"/>
+          </a:fontRef>
+        </p:style>
+      </p:cxnSp>
+      <p:cxnSp>
+        <p:nvCxnSpPr>
+          <p:cNvPr id="78" name="连接符: 曲线 77">
+            <a:extLst>
+              <a:ext uri="{FF2B5EF4-FFF2-40B4-BE49-F238E27FC236}">
+                <a16:creationId xmlns:a16="http://schemas.microsoft.com/office/drawing/2014/main" id="{9C49D303-6593-4078-0C50-F1465C52AB10}"/>
+              </a:ext>
+            </a:extLst>
+          </p:cNvPr>
+          <p:cNvCxnSpPr>
+            <a:cxnSpLocks/>
+            <a:stCxn id="56" idx="3"/>
+            <a:endCxn id="3" idx="1"/>
+          </p:cNvCxnSpPr>
+          <p:nvPr/>
+        </p:nvCxnSpPr>
+        <p:spPr>
+          <a:xfrm>
+            <a:off x="3738400" y="3652876"/>
+            <a:ext cx="189309" cy="149581"/>
+          </a:xfrm>
+          <a:prstGeom prst="curvedConnector3">
+            <a:avLst>
+              <a:gd name="adj1" fmla="val 50000"/>
+            </a:avLst>
+          </a:prstGeom>
+          <a:ln>
+            <a:solidFill>
+              <a:srgbClr val="6D91D1"/>
+            </a:solidFill>
+          </a:ln>
+        </p:spPr>
+        <p:style>
+          <a:lnRef idx="1">
+            <a:schemeClr val="accent1"/>
+          </a:lnRef>
+          <a:fillRef idx="0">
+            <a:schemeClr val="accent1"/>
+          </a:fillRef>
+          <a:effectRef idx="0">
+            <a:schemeClr val="accent1"/>
+          </a:effectRef>
+          <a:fontRef idx="minor">
+            <a:schemeClr val="tx1"/>
+          </a:fontRef>
+        </p:style>
+      </p:cxnSp>
+      <p:cxnSp>
+        <p:nvCxnSpPr>
+          <p:cNvPr id="81" name="连接符: 曲线 80">
+            <a:extLst>
+              <a:ext uri="{FF2B5EF4-FFF2-40B4-BE49-F238E27FC236}">
+                <a16:creationId xmlns:a16="http://schemas.microsoft.com/office/drawing/2014/main" id="{96EB5F84-D1BD-20B5-2777-AB306C14B03E}"/>
+              </a:ext>
+            </a:extLst>
+          </p:cNvPr>
+          <p:cNvCxnSpPr>
+            <a:cxnSpLocks/>
+            <a:stCxn id="59" idx="3"/>
+            <a:endCxn id="3" idx="1"/>
+          </p:cNvCxnSpPr>
+          <p:nvPr/>
+        </p:nvCxnSpPr>
+        <p:spPr>
+          <a:xfrm flipV="1">
+            <a:off x="3738400" y="3802457"/>
+            <a:ext cx="189309" cy="448741"/>
+          </a:xfrm>
+          <a:prstGeom prst="curvedConnector3">
+            <a:avLst>
+              <a:gd name="adj1" fmla="val 50000"/>
+            </a:avLst>
+          </a:prstGeom>
+          <a:ln>
+            <a:solidFill>
+              <a:srgbClr val="6D91D1"/>
+            </a:solidFill>
+          </a:ln>
+        </p:spPr>
+        <p:style>
+          <a:lnRef idx="1">
+            <a:schemeClr val="accent1"/>
+          </a:lnRef>
+          <a:fillRef idx="0">
+            <a:schemeClr val="accent1"/>
+          </a:fillRef>
+          <a:effectRef idx="0">
+            <a:schemeClr val="accent1"/>
+          </a:effectRef>
+          <a:fontRef idx="minor">
+            <a:schemeClr val="tx1"/>
+          </a:fontRef>
+        </p:style>
+      </p:cxnSp>
+      <p:cxnSp>
+        <p:nvCxnSpPr>
+          <p:cNvPr id="86" name="连接符: 曲线 85">
+            <a:extLst>
+              <a:ext uri="{FF2B5EF4-FFF2-40B4-BE49-F238E27FC236}">
+                <a16:creationId xmlns:a16="http://schemas.microsoft.com/office/drawing/2014/main" id="{698C2E92-6E21-B7A7-AAAB-69046DD82A44}"/>
+              </a:ext>
+            </a:extLst>
+          </p:cNvPr>
+          <p:cNvCxnSpPr>
+            <a:cxnSpLocks/>
+            <a:stCxn id="57" idx="3"/>
+            <a:endCxn id="3" idx="1"/>
+          </p:cNvCxnSpPr>
+          <p:nvPr/>
+        </p:nvCxnSpPr>
+        <p:spPr>
+          <a:xfrm flipV="1">
+            <a:off x="3738400" y="3802457"/>
+            <a:ext cx="189309" cy="149580"/>
+          </a:xfrm>
+          <a:prstGeom prst="curvedConnector3">
+            <a:avLst>
+              <a:gd name="adj1" fmla="val 50000"/>
+            </a:avLst>
+          </a:prstGeom>
+          <a:ln>
+            <a:solidFill>
+              <a:srgbClr val="6D91D1"/>
+            </a:solidFill>
+          </a:ln>
+        </p:spPr>
+        <p:style>
+          <a:lnRef idx="1">
+            <a:schemeClr val="accent1"/>
+          </a:lnRef>
+          <a:fillRef idx="0">
+            <a:schemeClr val="accent1"/>
+          </a:fillRef>
+          <a:effectRef idx="0">
+            <a:schemeClr val="accent1"/>
+          </a:effectRef>
+          <a:fontRef idx="minor">
+            <a:schemeClr val="tx1"/>
+          </a:fontRef>
+        </p:style>
+      </p:cxnSp>
+    </p:spTree>
+    <p:extLst>
+      <p:ext uri="{BB962C8B-B14F-4D97-AF65-F5344CB8AC3E}">
+        <p14:creationId xmlns:p14="http://schemas.microsoft.com/office/powerpoint/2010/main" val="2989024140"/>
+      </p:ext>
+    </p:extLst>
+  </p:cSld>
+  <p:clrMapOvr>
+    <a:masterClrMapping/>
+  </p:clrMapOvr>
+</p:sld>
+</file>
+
+<file path=ppt/slides/slide11.xml><?xml version="1.0" encoding="utf-8"?>
+<p:sld xmlns:a="http://schemas.openxmlformats.org/drawingml/2006/main" xmlns:r="http://schemas.openxmlformats.org/officeDocument/2006/relationships" xmlns:p="http://schemas.openxmlformats.org/presentationml/2006/main">
+  <p:cSld>
+    <p:spTree>
+      <p:nvGrpSpPr>
+        <p:cNvPr id="1" name="">
+          <a:extLst>
+            <a:ext uri="{FF2B5EF4-FFF2-40B4-BE49-F238E27FC236}">
               <a16:creationId xmlns:a16="http://schemas.microsoft.com/office/drawing/2014/main" id="{5C7A2C4C-DE35-8F5D-FAA3-1F45B914C406}"/>
             </a:ext>
           </a:extLst>
@@ -4467,7 +6197,7 @@
 </p:sld>
 </file>
 
-<file path=ppt/slides/slide11.xml><?xml version="1.0" encoding="utf-8"?>
+<file path=ppt/slides/slide12.xml><?xml version="1.0" encoding="utf-8"?>
 <p:sld xmlns:a="http://schemas.openxmlformats.org/drawingml/2006/main" xmlns:r="http://schemas.openxmlformats.org/officeDocument/2006/relationships" xmlns:p="http://schemas.openxmlformats.org/presentationml/2006/main">
   <p:cSld>
     <p:spTree>
@@ -5061,7 +6791,7 @@
 </p:sld>
 </file>
 
-<file path=ppt/slides/slide12.xml><?xml version="1.0" encoding="utf-8"?>
+<file path=ppt/slides/slide13.xml><?xml version="1.0" encoding="utf-8"?>
 <p:sld xmlns:a="http://schemas.openxmlformats.org/drawingml/2006/main" xmlns:r="http://schemas.openxmlformats.org/officeDocument/2006/relationships" xmlns:p="http://schemas.openxmlformats.org/presentationml/2006/main">
   <p:cSld>
     <p:spTree>
@@ -6676,7 +8406,7 @@
 </p:sld>
 </file>
 
-<file path=ppt/slides/slide13.xml><?xml version="1.0" encoding="utf-8"?>
+<file path=ppt/slides/slide14.xml><?xml version="1.0" encoding="utf-8"?>
 <p:sld xmlns:a="http://schemas.openxmlformats.org/drawingml/2006/main" xmlns:r="http://schemas.openxmlformats.org/officeDocument/2006/relationships" xmlns:p="http://schemas.openxmlformats.org/presentationml/2006/main">
   <p:cSld>
     <p:spTree>
@@ -9681,7 +11411,7 @@
 </p:sld>
 </file>
 
-<file path=ppt/slides/slide14.xml><?xml version="1.0" encoding="utf-8"?>
+<file path=ppt/slides/slide15.xml><?xml version="1.0" encoding="utf-8"?>
 <p:sld xmlns:a="http://schemas.openxmlformats.org/drawingml/2006/main" xmlns:r="http://schemas.openxmlformats.org/officeDocument/2006/relationships" xmlns:p="http://schemas.openxmlformats.org/presentationml/2006/main">
   <p:cSld>
     <p:spTree>
@@ -12264,7 +13994,7 @@
 </p:sld>
 </file>
 
-<file path=ppt/slides/slide15.xml><?xml version="1.0" encoding="utf-8"?>
+<file path=ppt/slides/slide16.xml><?xml version="1.0" encoding="utf-8"?>
 <p:sld xmlns:a="http://schemas.openxmlformats.org/drawingml/2006/main" xmlns:r="http://schemas.openxmlformats.org/officeDocument/2006/relationships" xmlns:p="http://schemas.openxmlformats.org/presentationml/2006/main">
   <p:cSld>
     <p:spTree>
@@ -13669,7 +15399,7 @@
 </p:sld>
 </file>
 
-<file path=ppt/slides/slide16.xml><?xml version="1.0" encoding="utf-8"?>
+<file path=ppt/slides/slide17.xml><?xml version="1.0" encoding="utf-8"?>
 <p:sld xmlns:a="http://schemas.openxmlformats.org/drawingml/2006/main" xmlns:r="http://schemas.openxmlformats.org/officeDocument/2006/relationships" xmlns:p="http://schemas.openxmlformats.org/presentationml/2006/main">
   <p:cSld>
     <p:spTree>
@@ -14877,7 +16607,7 @@
 </p:sld>
 </file>
 
-<file path=ppt/slides/slide17.xml><?xml version="1.0" encoding="utf-8"?>
+<file path=ppt/slides/slide18.xml><?xml version="1.0" encoding="utf-8"?>
 <p:sld xmlns:a="http://schemas.openxmlformats.org/drawingml/2006/main" xmlns:r="http://schemas.openxmlformats.org/officeDocument/2006/relationships" xmlns:p="http://schemas.openxmlformats.org/presentationml/2006/main">
   <p:cSld>
     <p:spTree>
@@ -15221,7 +16951,7 @@
 </p:sld>
 </file>
 
-<file path=ppt/slides/slide18.xml><?xml version="1.0" encoding="utf-8"?>
+<file path=ppt/slides/slide19.xml><?xml version="1.0" encoding="utf-8"?>
 <p:sld xmlns:a="http://schemas.openxmlformats.org/drawingml/2006/main" xmlns:r="http://schemas.openxmlformats.org/officeDocument/2006/relationships" xmlns:p="http://schemas.openxmlformats.org/presentationml/2006/main">
   <p:cSld>
     <p:spTree>
@@ -15667,7 +17397,136 @@
 </p:sld>
 </file>
 
-<file path=ppt/slides/slide19.xml><?xml version="1.0" encoding="utf-8"?>
+<file path=ppt/slides/slide2.xml><?xml version="1.0" encoding="utf-8"?>
+<p:sld xmlns:a="http://schemas.openxmlformats.org/drawingml/2006/main" xmlns:r="http://schemas.openxmlformats.org/officeDocument/2006/relationships" xmlns:p="http://schemas.openxmlformats.org/presentationml/2006/main">
+  <p:cSld>
+    <p:spTree>
+      <p:nvGrpSpPr>
+        <p:cNvPr id="1" name=""/>
+        <p:cNvGrpSpPr/>
+        <p:nvPr/>
+      </p:nvGrpSpPr>
+      <p:grpSpPr>
+        <a:xfrm>
+          <a:off x="0" y="0"/>
+          <a:ext cx="0" cy="0"/>
+          <a:chOff x="0" y="0"/>
+          <a:chExt cx="0" cy="0"/>
+        </a:xfrm>
+      </p:grpSpPr>
+      <p:pic>
+        <p:nvPicPr>
+          <p:cNvPr id="1026" name="Picture 2">
+            <a:extLst>
+              <a:ext uri="{FF2B5EF4-FFF2-40B4-BE49-F238E27FC236}">
+                <a16:creationId xmlns:a16="http://schemas.microsoft.com/office/drawing/2014/main" id="{02D4B95B-4837-314F-E44F-1B98868454D4}"/>
+              </a:ext>
+            </a:extLst>
+          </p:cNvPr>
+          <p:cNvPicPr>
+            <a:picLocks noChangeAspect="1" noChangeArrowheads="1"/>
+          </p:cNvPicPr>
+          <p:nvPr/>
+        </p:nvPicPr>
+        <p:blipFill>
+          <a:blip r:embed="rId2">
+            <a:extLst>
+              <a:ext uri="{28A0092B-C50C-407E-A947-70E740481C1C}">
+                <a14:useLocalDpi xmlns:a14="http://schemas.microsoft.com/office/drawing/2010/main" val="0"/>
+              </a:ext>
+            </a:extLst>
+          </a:blip>
+          <a:srcRect/>
+          <a:stretch>
+            <a:fillRect/>
+          </a:stretch>
+        </p:blipFill>
+        <p:spPr bwMode="auto">
+          <a:xfrm>
+            <a:off x="3848100" y="1943100"/>
+            <a:ext cx="4495800" cy="2971800"/>
+          </a:xfrm>
+          <a:prstGeom prst="rect">
+            <a:avLst/>
+          </a:prstGeom>
+          <a:noFill/>
+          <a:extLst>
+            <a:ext uri="{909E8E84-426E-40DD-AFC4-6F175D3DCCD1}">
+              <a14:hiddenFill xmlns:a14="http://schemas.microsoft.com/office/drawing/2010/main">
+                <a:solidFill>
+                  <a:srgbClr val="FFFFFF"/>
+                </a:solidFill>
+              </a14:hiddenFill>
+            </a:ext>
+          </a:extLst>
+        </p:spPr>
+      </p:pic>
+      <p:sp>
+        <p:nvSpPr>
+          <p:cNvPr id="2" name="矩形 1">
+            <a:extLst>
+              <a:ext uri="{FF2B5EF4-FFF2-40B4-BE49-F238E27FC236}">
+                <a16:creationId xmlns:a16="http://schemas.microsoft.com/office/drawing/2014/main" id="{82FB5D9D-1EED-E402-9A5B-9D01D36FAD12}"/>
+              </a:ext>
+            </a:extLst>
+          </p:cNvPr>
+          <p:cNvSpPr/>
+          <p:nvPr/>
+        </p:nvSpPr>
+        <p:spPr>
+          <a:xfrm>
+            <a:off x="6409765" y="4312024"/>
+            <a:ext cx="2393576" cy="779929"/>
+          </a:xfrm>
+          <a:prstGeom prst="rect">
+            <a:avLst/>
+          </a:prstGeom>
+          <a:solidFill>
+            <a:schemeClr val="bg1"/>
+          </a:solidFill>
+          <a:ln>
+            <a:noFill/>
+          </a:ln>
+        </p:spPr>
+        <p:style>
+          <a:lnRef idx="2">
+            <a:schemeClr val="accent1">
+              <a:shade val="15000"/>
+            </a:schemeClr>
+          </a:lnRef>
+          <a:fillRef idx="1">
+            <a:schemeClr val="accent1"/>
+          </a:fillRef>
+          <a:effectRef idx="0">
+            <a:schemeClr val="accent1"/>
+          </a:effectRef>
+          <a:fontRef idx="minor">
+            <a:schemeClr val="lt1"/>
+          </a:fontRef>
+        </p:style>
+        <p:txBody>
+          <a:bodyPr rtlCol="0" anchor="ctr"/>
+          <a:lstStyle/>
+          <a:p>
+            <a:pPr algn="ctr"/>
+            <a:endParaRPr lang="zh-CN" altLang="en-US"/>
+          </a:p>
+        </p:txBody>
+      </p:sp>
+    </p:spTree>
+    <p:extLst>
+      <p:ext uri="{BB962C8B-B14F-4D97-AF65-F5344CB8AC3E}">
+        <p14:creationId xmlns:p14="http://schemas.microsoft.com/office/powerpoint/2010/main" val="3445511340"/>
+      </p:ext>
+    </p:extLst>
+  </p:cSld>
+  <p:clrMapOvr>
+    <a:masterClrMapping/>
+  </p:clrMapOvr>
+</p:sld>
+</file>
+
+<file path=ppt/slides/slide20.xml><?xml version="1.0" encoding="utf-8"?>
 <p:sld xmlns:a="http://schemas.openxmlformats.org/drawingml/2006/main" xmlns:r="http://schemas.openxmlformats.org/officeDocument/2006/relationships" xmlns:p="http://schemas.openxmlformats.org/presentationml/2006/main">
   <p:cSld>
     <p:spTree>
@@ -16113,1049 +17972,7 @@
 </p:sld>
 </file>
 
-<file path=ppt/slides/slide2.xml><?xml version="1.0" encoding="utf-8"?>
-<p:sld xmlns:a="http://schemas.openxmlformats.org/drawingml/2006/main" xmlns:r="http://schemas.openxmlformats.org/officeDocument/2006/relationships" xmlns:p="http://schemas.openxmlformats.org/presentationml/2006/main">
-  <p:cSld>
-    <p:spTree>
-      <p:nvGrpSpPr>
-        <p:cNvPr id="1" name="">
-          <a:extLst>
-            <a:ext uri="{FF2B5EF4-FFF2-40B4-BE49-F238E27FC236}">
-              <a16:creationId xmlns:a16="http://schemas.microsoft.com/office/drawing/2014/main" id="{305ACE99-59B0-D2A0-7D0D-F12E4D9ED934}"/>
-            </a:ext>
-          </a:extLst>
-        </p:cNvPr>
-        <p:cNvGrpSpPr/>
-        <p:nvPr/>
-      </p:nvGrpSpPr>
-      <p:grpSpPr>
-        <a:xfrm>
-          <a:off x="0" y="0"/>
-          <a:ext cx="0" cy="0"/>
-          <a:chOff x="0" y="0"/>
-          <a:chExt cx="0" cy="0"/>
-        </a:xfrm>
-      </p:grpSpPr>
-      <p:sp>
-        <p:nvSpPr>
-          <p:cNvPr id="2" name="矩形: 圆角 1">
-            <a:extLst>
-              <a:ext uri="{FF2B5EF4-FFF2-40B4-BE49-F238E27FC236}">
-                <a16:creationId xmlns:a16="http://schemas.microsoft.com/office/drawing/2014/main" id="{EA1617AA-3BC5-A6C2-7966-463E2BC3AC46}"/>
-              </a:ext>
-            </a:extLst>
-          </p:cNvPr>
-          <p:cNvSpPr/>
-          <p:nvPr/>
-        </p:nvSpPr>
-        <p:spPr>
-          <a:xfrm>
-            <a:off x="3307693" y="2719832"/>
-            <a:ext cx="1440000" cy="360000"/>
-          </a:xfrm>
-          <a:prstGeom prst="roundRect">
-            <a:avLst/>
-          </a:prstGeom>
-          <a:solidFill>
-            <a:schemeClr val="accent5">
-              <a:lumMod val="75000"/>
-            </a:schemeClr>
-          </a:solidFill>
-          <a:ln w="12700">
-            <a:noFill/>
-          </a:ln>
-        </p:spPr>
-        <p:style>
-          <a:lnRef idx="2">
-            <a:schemeClr val="accent1">
-              <a:shade val="15000"/>
-            </a:schemeClr>
-          </a:lnRef>
-          <a:fillRef idx="1">
-            <a:schemeClr val="accent1"/>
-          </a:fillRef>
-          <a:effectRef idx="0">
-            <a:schemeClr val="accent1"/>
-          </a:effectRef>
-          <a:fontRef idx="minor">
-            <a:schemeClr val="lt1"/>
-          </a:fontRef>
-        </p:style>
-        <p:txBody>
-          <a:bodyPr rtlCol="0" anchor="ctr"/>
-          <a:lstStyle/>
-          <a:p>
-            <a:pPr algn="ctr"/>
-            <a:r>
-              <a:rPr lang="en-US" altLang="zh-CN" sz="1200" dirty="0">
-                <a:latin typeface="Quicksand Light" panose="00000400000000000000" pitchFamily="2" charset="0"/>
-              </a:rPr>
-              <a:t>Port</a:t>
-            </a:r>
-            <a:endParaRPr lang="zh-CN" altLang="en-US" sz="1200" dirty="0">
-              <a:latin typeface="Quicksand Light" panose="00000400000000000000" pitchFamily="2" charset="0"/>
-            </a:endParaRPr>
-          </a:p>
-        </p:txBody>
-      </p:sp>
-      <p:sp>
-        <p:nvSpPr>
-          <p:cNvPr id="3" name="矩形: 圆角 2">
-            <a:extLst>
-              <a:ext uri="{FF2B5EF4-FFF2-40B4-BE49-F238E27FC236}">
-                <a16:creationId xmlns:a16="http://schemas.microsoft.com/office/drawing/2014/main" id="{9D801BA9-9C6A-24D0-E174-E3604316CB49}"/>
-              </a:ext>
-            </a:extLst>
-          </p:cNvPr>
-          <p:cNvSpPr/>
-          <p:nvPr/>
-        </p:nvSpPr>
-        <p:spPr>
-          <a:xfrm>
-            <a:off x="5031248" y="3132107"/>
-            <a:ext cx="1800000" cy="360000"/>
-          </a:xfrm>
-          <a:prstGeom prst="roundRect">
-            <a:avLst/>
-          </a:prstGeom>
-          <a:noFill/>
-          <a:ln w="12700">
-            <a:solidFill>
-              <a:schemeClr val="tx2"/>
-            </a:solidFill>
-            <a:prstDash val="solid"/>
-          </a:ln>
-        </p:spPr>
-        <p:style>
-          <a:lnRef idx="2">
-            <a:schemeClr val="accent1">
-              <a:shade val="15000"/>
-            </a:schemeClr>
-          </a:lnRef>
-          <a:fillRef idx="1">
-            <a:schemeClr val="accent1"/>
-          </a:fillRef>
-          <a:effectRef idx="0">
-            <a:schemeClr val="accent1"/>
-          </a:effectRef>
-          <a:fontRef idx="minor">
-            <a:schemeClr val="lt1"/>
-          </a:fontRef>
-        </p:style>
-        <p:txBody>
-          <a:bodyPr rtlCol="0" anchor="ctr"/>
-          <a:lstStyle/>
-          <a:p>
-            <a:pPr algn="ctr"/>
-            <a:r>
-              <a:rPr lang="en-US" altLang="zh-CN" sz="1200" dirty="0">
-                <a:solidFill>
-                  <a:sysClr val="windowText" lastClr="000000"/>
-                </a:solidFill>
-                <a:latin typeface="Quicksand Light" panose="00000400000000000000" pitchFamily="2" charset="0"/>
-              </a:rPr>
-              <a:t>Congestion  Control</a:t>
-            </a:r>
-            <a:endParaRPr lang="zh-CN" altLang="en-US" sz="1200" dirty="0">
-              <a:solidFill>
-                <a:sysClr val="windowText" lastClr="000000"/>
-              </a:solidFill>
-              <a:latin typeface="Quicksand Light" panose="00000400000000000000" pitchFamily="2" charset="0"/>
-            </a:endParaRPr>
-          </a:p>
-        </p:txBody>
-      </p:sp>
-      <p:sp>
-        <p:nvSpPr>
-          <p:cNvPr id="4" name="矩形: 圆角 3">
-            <a:extLst>
-              <a:ext uri="{FF2B5EF4-FFF2-40B4-BE49-F238E27FC236}">
-                <a16:creationId xmlns:a16="http://schemas.microsoft.com/office/drawing/2014/main" id="{B7D33566-285E-1CCB-5E98-A8DFB5DC5691}"/>
-              </a:ext>
-            </a:extLst>
-          </p:cNvPr>
-          <p:cNvSpPr/>
-          <p:nvPr/>
-        </p:nvSpPr>
-        <p:spPr>
-          <a:xfrm>
-            <a:off x="5031248" y="3562619"/>
-            <a:ext cx="1800000" cy="360000"/>
-          </a:xfrm>
-          <a:prstGeom prst="roundRect">
-            <a:avLst/>
-          </a:prstGeom>
-          <a:noFill/>
-          <a:ln w="12700">
-            <a:solidFill>
-              <a:schemeClr val="tx2"/>
-            </a:solidFill>
-            <a:prstDash val="solid"/>
-          </a:ln>
-        </p:spPr>
-        <p:style>
-          <a:lnRef idx="2">
-            <a:schemeClr val="accent1">
-              <a:shade val="15000"/>
-            </a:schemeClr>
-          </a:lnRef>
-          <a:fillRef idx="1">
-            <a:schemeClr val="accent1"/>
-          </a:fillRef>
-          <a:effectRef idx="0">
-            <a:schemeClr val="accent1"/>
-          </a:effectRef>
-          <a:fontRef idx="minor">
-            <a:schemeClr val="lt1"/>
-          </a:fontRef>
-        </p:style>
-        <p:txBody>
-          <a:bodyPr rtlCol="0" anchor="ctr"/>
-          <a:lstStyle/>
-          <a:p>
-            <a:pPr algn="ctr"/>
-            <a:r>
-              <a:rPr lang="en-US" altLang="zh-CN" sz="1200" dirty="0">
-                <a:solidFill>
-                  <a:sysClr val="windowText" lastClr="000000"/>
-                </a:solidFill>
-                <a:latin typeface="Quicksand Light" panose="00000400000000000000" pitchFamily="2" charset="0"/>
-              </a:rPr>
-              <a:t>Three-Way Handshake</a:t>
-            </a:r>
-            <a:endParaRPr lang="zh-CN" altLang="en-US" sz="1200" dirty="0">
-              <a:solidFill>
-                <a:sysClr val="windowText" lastClr="000000"/>
-              </a:solidFill>
-              <a:latin typeface="Quicksand Light" panose="00000400000000000000" pitchFamily="2" charset="0"/>
-            </a:endParaRPr>
-          </a:p>
-        </p:txBody>
-      </p:sp>
-      <p:sp>
-        <p:nvSpPr>
-          <p:cNvPr id="5" name="矩形: 圆角 4">
-            <a:extLst>
-              <a:ext uri="{FF2B5EF4-FFF2-40B4-BE49-F238E27FC236}">
-                <a16:creationId xmlns:a16="http://schemas.microsoft.com/office/drawing/2014/main" id="{905996E1-56AA-82E7-6CF1-E2487C38B700}"/>
-              </a:ext>
-            </a:extLst>
-          </p:cNvPr>
-          <p:cNvSpPr/>
-          <p:nvPr/>
-        </p:nvSpPr>
-        <p:spPr>
-          <a:xfrm>
-            <a:off x="5031248" y="4665692"/>
-            <a:ext cx="1800000" cy="360000"/>
-          </a:xfrm>
-          <a:prstGeom prst="roundRect">
-            <a:avLst/>
-          </a:prstGeom>
-          <a:noFill/>
-          <a:ln w="12700">
-            <a:solidFill>
-              <a:schemeClr val="tx2"/>
-            </a:solidFill>
-            <a:prstDash val="solid"/>
-          </a:ln>
-        </p:spPr>
-        <p:style>
-          <a:lnRef idx="2">
-            <a:schemeClr val="accent1">
-              <a:shade val="15000"/>
-            </a:schemeClr>
-          </a:lnRef>
-          <a:fillRef idx="1">
-            <a:schemeClr val="accent1"/>
-          </a:fillRef>
-          <a:effectRef idx="0">
-            <a:schemeClr val="accent1"/>
-          </a:effectRef>
-          <a:fontRef idx="minor">
-            <a:schemeClr val="lt1"/>
-          </a:fontRef>
-        </p:style>
-        <p:txBody>
-          <a:bodyPr rtlCol="0" anchor="ctr"/>
-          <a:lstStyle/>
-          <a:p>
-            <a:pPr algn="ctr"/>
-            <a:r>
-              <a:rPr lang="en-US" altLang="zh-CN" sz="1200" dirty="0">
-                <a:solidFill>
-                  <a:sysClr val="windowText" lastClr="000000"/>
-                </a:solidFill>
-                <a:latin typeface="Quicksand Light" panose="00000400000000000000" pitchFamily="2" charset="0"/>
-              </a:rPr>
-              <a:t>Packet</a:t>
-            </a:r>
-            <a:endParaRPr lang="zh-CN" altLang="en-US" sz="1200" dirty="0">
-              <a:solidFill>
-                <a:sysClr val="windowText" lastClr="000000"/>
-              </a:solidFill>
-              <a:latin typeface="Quicksand Light" panose="00000400000000000000" pitchFamily="2" charset="0"/>
-            </a:endParaRPr>
-          </a:p>
-        </p:txBody>
-      </p:sp>
-      <p:cxnSp>
-        <p:nvCxnSpPr>
-          <p:cNvPr id="8" name="连接符: 曲线 7">
-            <a:extLst>
-              <a:ext uri="{FF2B5EF4-FFF2-40B4-BE49-F238E27FC236}">
-                <a16:creationId xmlns:a16="http://schemas.microsoft.com/office/drawing/2014/main" id="{40667B24-5AC7-5F2E-7021-EBB90191C191}"/>
-              </a:ext>
-            </a:extLst>
-          </p:cNvPr>
-          <p:cNvCxnSpPr>
-            <a:cxnSpLocks/>
-            <a:stCxn id="3" idx="1"/>
-            <a:endCxn id="16" idx="3"/>
-          </p:cNvCxnSpPr>
-          <p:nvPr/>
-        </p:nvCxnSpPr>
-        <p:spPr>
-          <a:xfrm rot="10800000" flipV="1">
-            <a:off x="4747694" y="3312107"/>
-            <a:ext cx="283555" cy="215256"/>
-          </a:xfrm>
-          <a:prstGeom prst="curvedConnector3">
-            <a:avLst>
-              <a:gd name="adj1" fmla="val 50000"/>
-            </a:avLst>
-          </a:prstGeom>
-          <a:ln w="6350">
-            <a:solidFill>
-              <a:srgbClr val="3CBFD1"/>
-            </a:solidFill>
-          </a:ln>
-        </p:spPr>
-        <p:style>
-          <a:lnRef idx="1">
-            <a:schemeClr val="accent1"/>
-          </a:lnRef>
-          <a:fillRef idx="0">
-            <a:schemeClr val="accent1"/>
-          </a:fillRef>
-          <a:effectRef idx="0">
-            <a:schemeClr val="accent1"/>
-          </a:effectRef>
-          <a:fontRef idx="minor">
-            <a:schemeClr val="tx1"/>
-          </a:fontRef>
-        </p:style>
-      </p:cxnSp>
-      <p:sp>
-        <p:nvSpPr>
-          <p:cNvPr id="9" name="矩形: 圆角 8">
-            <a:extLst>
-              <a:ext uri="{FF2B5EF4-FFF2-40B4-BE49-F238E27FC236}">
-                <a16:creationId xmlns:a16="http://schemas.microsoft.com/office/drawing/2014/main" id="{88EFE3ED-A618-B1ED-5F36-94CB8F38355F}"/>
-              </a:ext>
-            </a:extLst>
-          </p:cNvPr>
-          <p:cNvSpPr/>
-          <p:nvPr/>
-        </p:nvSpPr>
-        <p:spPr>
-          <a:xfrm>
-            <a:off x="5031248" y="3993131"/>
-            <a:ext cx="1800000" cy="360000"/>
-          </a:xfrm>
-          <a:prstGeom prst="roundRect">
-            <a:avLst/>
-          </a:prstGeom>
-          <a:noFill/>
-          <a:ln w="12700">
-            <a:solidFill>
-              <a:schemeClr val="tx2"/>
-            </a:solidFill>
-            <a:prstDash val="solid"/>
-          </a:ln>
-        </p:spPr>
-        <p:style>
-          <a:lnRef idx="2">
-            <a:schemeClr val="accent1">
-              <a:shade val="15000"/>
-            </a:schemeClr>
-          </a:lnRef>
-          <a:fillRef idx="1">
-            <a:schemeClr val="accent1"/>
-          </a:fillRef>
-          <a:effectRef idx="0">
-            <a:schemeClr val="accent1"/>
-          </a:effectRef>
-          <a:fontRef idx="minor">
-            <a:schemeClr val="lt1"/>
-          </a:fontRef>
-        </p:style>
-        <p:txBody>
-          <a:bodyPr rtlCol="0" anchor="ctr"/>
-          <a:lstStyle/>
-          <a:p>
-            <a:pPr algn="ctr"/>
-            <a:r>
-              <a:rPr lang="en-US" altLang="zh-CN" sz="1200" dirty="0">
-                <a:solidFill>
-                  <a:sysClr val="windowText" lastClr="000000"/>
-                </a:solidFill>
-                <a:latin typeface="Quicksand Light" panose="00000400000000000000" pitchFamily="2" charset="0"/>
-              </a:rPr>
-              <a:t>Packet</a:t>
-            </a:r>
-            <a:endParaRPr lang="zh-CN" altLang="en-US" sz="1200" dirty="0">
-              <a:solidFill>
-                <a:sysClr val="windowText" lastClr="000000"/>
-              </a:solidFill>
-              <a:latin typeface="Quicksand Light" panose="00000400000000000000" pitchFamily="2" charset="0"/>
-            </a:endParaRPr>
-          </a:p>
-        </p:txBody>
-      </p:sp>
-      <p:cxnSp>
-        <p:nvCxnSpPr>
-          <p:cNvPr id="10" name="连接符: 曲线 9">
-            <a:extLst>
-              <a:ext uri="{FF2B5EF4-FFF2-40B4-BE49-F238E27FC236}">
-                <a16:creationId xmlns:a16="http://schemas.microsoft.com/office/drawing/2014/main" id="{56D54B0A-0C00-1FA5-AA24-AB208E9F3E39}"/>
-              </a:ext>
-            </a:extLst>
-          </p:cNvPr>
-          <p:cNvCxnSpPr>
-            <a:cxnSpLocks/>
-            <a:stCxn id="16" idx="3"/>
-            <a:endCxn id="9" idx="1"/>
-          </p:cNvCxnSpPr>
-          <p:nvPr/>
-        </p:nvCxnSpPr>
-        <p:spPr>
-          <a:xfrm>
-            <a:off x="4747693" y="3527363"/>
-            <a:ext cx="283555" cy="645768"/>
-          </a:xfrm>
-          <a:prstGeom prst="curvedConnector3">
-            <a:avLst>
-              <a:gd name="adj1" fmla="val 50000"/>
-            </a:avLst>
-          </a:prstGeom>
-          <a:ln w="6350">
-            <a:solidFill>
-              <a:srgbClr val="3CBFD1"/>
-            </a:solidFill>
-          </a:ln>
-        </p:spPr>
-        <p:style>
-          <a:lnRef idx="1">
-            <a:schemeClr val="accent1"/>
-          </a:lnRef>
-          <a:fillRef idx="0">
-            <a:schemeClr val="accent1"/>
-          </a:fillRef>
-          <a:effectRef idx="0">
-            <a:schemeClr val="accent1"/>
-          </a:effectRef>
-          <a:fontRef idx="minor">
-            <a:schemeClr val="tx1"/>
-          </a:fontRef>
-        </p:style>
-      </p:cxnSp>
-      <p:sp>
-        <p:nvSpPr>
-          <p:cNvPr id="13" name="矩形: 圆角 12">
-            <a:extLst>
-              <a:ext uri="{FF2B5EF4-FFF2-40B4-BE49-F238E27FC236}">
-                <a16:creationId xmlns:a16="http://schemas.microsoft.com/office/drawing/2014/main" id="{AD181E9B-9708-8757-6641-0EC70B8857D3}"/>
-              </a:ext>
-            </a:extLst>
-          </p:cNvPr>
-          <p:cNvSpPr/>
-          <p:nvPr/>
-        </p:nvSpPr>
-        <p:spPr>
-          <a:xfrm>
-            <a:off x="5031248" y="2705606"/>
-            <a:ext cx="1800000" cy="360000"/>
-          </a:xfrm>
-          <a:prstGeom prst="roundRect">
-            <a:avLst/>
-          </a:prstGeom>
-          <a:noFill/>
-          <a:ln w="12700">
-            <a:solidFill>
-              <a:schemeClr val="tx2"/>
-            </a:solidFill>
-            <a:prstDash val="solid"/>
-          </a:ln>
-        </p:spPr>
-        <p:style>
-          <a:lnRef idx="2">
-            <a:schemeClr val="accent1">
-              <a:shade val="15000"/>
-            </a:schemeClr>
-          </a:lnRef>
-          <a:fillRef idx="1">
-            <a:schemeClr val="accent1"/>
-          </a:fillRef>
-          <a:effectRef idx="0">
-            <a:schemeClr val="accent1"/>
-          </a:effectRef>
-          <a:fontRef idx="minor">
-            <a:schemeClr val="lt1"/>
-          </a:fontRef>
-        </p:style>
-        <p:txBody>
-          <a:bodyPr rtlCol="0" anchor="ctr"/>
-          <a:lstStyle/>
-          <a:p>
-            <a:pPr algn="ctr"/>
-            <a:r>
-              <a:rPr lang="en-US" altLang="zh-CN" sz="1200" dirty="0">
-                <a:solidFill>
-                  <a:sysClr val="windowText" lastClr="000000"/>
-                </a:solidFill>
-                <a:latin typeface="Quicksand Light" panose="00000400000000000000" pitchFamily="2" charset="0"/>
-              </a:rPr>
-              <a:t>Traffic Control</a:t>
-            </a:r>
-            <a:endParaRPr lang="zh-CN" altLang="en-US" sz="1200" dirty="0">
-              <a:solidFill>
-                <a:sysClr val="windowText" lastClr="000000"/>
-              </a:solidFill>
-              <a:latin typeface="Quicksand Light" panose="00000400000000000000" pitchFamily="2" charset="0"/>
-            </a:endParaRPr>
-          </a:p>
-        </p:txBody>
-      </p:sp>
-      <p:cxnSp>
-        <p:nvCxnSpPr>
-          <p:cNvPr id="14" name="连接符: 曲线 13">
-            <a:extLst>
-              <a:ext uri="{FF2B5EF4-FFF2-40B4-BE49-F238E27FC236}">
-                <a16:creationId xmlns:a16="http://schemas.microsoft.com/office/drawing/2014/main" id="{94161A20-9CEA-26C5-90F1-7284ECA5C704}"/>
-              </a:ext>
-            </a:extLst>
-          </p:cNvPr>
-          <p:cNvCxnSpPr>
-            <a:cxnSpLocks/>
-            <a:stCxn id="13" idx="1"/>
-            <a:endCxn id="16" idx="3"/>
-          </p:cNvCxnSpPr>
-          <p:nvPr/>
-        </p:nvCxnSpPr>
-        <p:spPr>
-          <a:xfrm rot="10800000" flipV="1">
-            <a:off x="4747694" y="2885605"/>
-            <a:ext cx="283555" cy="641757"/>
-          </a:xfrm>
-          <a:prstGeom prst="curvedConnector3">
-            <a:avLst>
-              <a:gd name="adj1" fmla="val 50000"/>
-            </a:avLst>
-          </a:prstGeom>
-          <a:ln w="6350">
-            <a:solidFill>
-              <a:srgbClr val="3CBFD1"/>
-            </a:solidFill>
-          </a:ln>
-        </p:spPr>
-        <p:style>
-          <a:lnRef idx="1">
-            <a:schemeClr val="accent1"/>
-          </a:lnRef>
-          <a:fillRef idx="0">
-            <a:schemeClr val="accent1"/>
-          </a:fillRef>
-          <a:effectRef idx="0">
-            <a:schemeClr val="accent1"/>
-          </a:effectRef>
-          <a:fontRef idx="minor">
-            <a:schemeClr val="tx1"/>
-          </a:fontRef>
-        </p:style>
-      </p:cxnSp>
-      <p:sp>
-        <p:nvSpPr>
-          <p:cNvPr id="36" name="矩形: 圆角 35">
-            <a:extLst>
-              <a:ext uri="{FF2B5EF4-FFF2-40B4-BE49-F238E27FC236}">
-                <a16:creationId xmlns:a16="http://schemas.microsoft.com/office/drawing/2014/main" id="{C6587821-DD92-9679-7756-3E8C2C8D118E}"/>
-              </a:ext>
-            </a:extLst>
-          </p:cNvPr>
-          <p:cNvSpPr/>
-          <p:nvPr/>
-        </p:nvSpPr>
-        <p:spPr>
-          <a:xfrm>
-            <a:off x="1584137" y="3347363"/>
-            <a:ext cx="1440000" cy="360000"/>
-          </a:xfrm>
-          <a:prstGeom prst="roundRect">
-            <a:avLst/>
-          </a:prstGeom>
-          <a:solidFill>
-            <a:schemeClr val="tx1"/>
-          </a:solidFill>
-          <a:ln w="12700">
-            <a:noFill/>
-          </a:ln>
-        </p:spPr>
-        <p:style>
-          <a:lnRef idx="2">
-            <a:schemeClr val="accent1">
-              <a:shade val="15000"/>
-            </a:schemeClr>
-          </a:lnRef>
-          <a:fillRef idx="1">
-            <a:schemeClr val="accent1"/>
-          </a:fillRef>
-          <a:effectRef idx="0">
-            <a:schemeClr val="accent1"/>
-          </a:effectRef>
-          <a:fontRef idx="minor">
-            <a:schemeClr val="lt1"/>
-          </a:fontRef>
-        </p:style>
-        <p:txBody>
-          <a:bodyPr rtlCol="0" anchor="ctr"/>
-          <a:lstStyle/>
-          <a:p>
-            <a:pPr algn="ctr"/>
-            <a:r>
-              <a:rPr lang="en-US" altLang="zh-CN" sz="1200" dirty="0">
-                <a:latin typeface="Quicksand Light" panose="00000400000000000000" pitchFamily="2" charset="0"/>
-                <a:ea typeface="微软雅黑" panose="020B0503020204020204" pitchFamily="34" charset="-122"/>
-              </a:rPr>
-              <a:t>Transport Layer</a:t>
-            </a:r>
-            <a:endParaRPr lang="zh-CN" altLang="en-US" sz="1200" dirty="0">
-              <a:latin typeface="Quicksand Light" panose="00000400000000000000" pitchFamily="2" charset="0"/>
-              <a:ea typeface="微软雅黑" panose="020B0503020204020204" pitchFamily="34" charset="-122"/>
-            </a:endParaRPr>
-          </a:p>
-        </p:txBody>
-      </p:sp>
-      <p:cxnSp>
-        <p:nvCxnSpPr>
-          <p:cNvPr id="42" name="连接符: 曲线 41">
-            <a:extLst>
-              <a:ext uri="{FF2B5EF4-FFF2-40B4-BE49-F238E27FC236}">
-                <a16:creationId xmlns:a16="http://schemas.microsoft.com/office/drawing/2014/main" id="{6589FE98-C76F-3ED9-8AB2-A810BAC61631}"/>
-              </a:ext>
-            </a:extLst>
-          </p:cNvPr>
-          <p:cNvCxnSpPr>
-            <a:cxnSpLocks/>
-            <a:stCxn id="36" idx="3"/>
-            <a:endCxn id="2" idx="1"/>
-          </p:cNvCxnSpPr>
-          <p:nvPr/>
-        </p:nvCxnSpPr>
-        <p:spPr>
-          <a:xfrm flipV="1">
-            <a:off x="3024137" y="2899832"/>
-            <a:ext cx="283556" cy="627531"/>
-          </a:xfrm>
-          <a:prstGeom prst="curvedConnector3">
-            <a:avLst>
-              <a:gd name="adj1" fmla="val 50000"/>
-            </a:avLst>
-          </a:prstGeom>
-          <a:ln>
-            <a:solidFill>
-              <a:schemeClr val="accent5">
-                <a:lumMod val="75000"/>
-              </a:schemeClr>
-            </a:solidFill>
-          </a:ln>
-        </p:spPr>
-        <p:style>
-          <a:lnRef idx="1">
-            <a:schemeClr val="accent1"/>
-          </a:lnRef>
-          <a:fillRef idx="0">
-            <a:schemeClr val="accent1"/>
-          </a:fillRef>
-          <a:effectRef idx="0">
-            <a:schemeClr val="accent1"/>
-          </a:effectRef>
-          <a:fontRef idx="minor">
-            <a:schemeClr val="tx1"/>
-          </a:fontRef>
-        </p:style>
-      </p:cxnSp>
-      <p:sp>
-        <p:nvSpPr>
-          <p:cNvPr id="16" name="矩形: 圆角 15">
-            <a:extLst>
-              <a:ext uri="{FF2B5EF4-FFF2-40B4-BE49-F238E27FC236}">
-                <a16:creationId xmlns:a16="http://schemas.microsoft.com/office/drawing/2014/main" id="{C4F8D70D-848F-8E10-57D5-0246D0F22858}"/>
-              </a:ext>
-            </a:extLst>
-          </p:cNvPr>
-          <p:cNvSpPr/>
-          <p:nvPr/>
-        </p:nvSpPr>
-        <p:spPr>
-          <a:xfrm>
-            <a:off x="3307693" y="3347363"/>
-            <a:ext cx="1440000" cy="360000"/>
-          </a:xfrm>
-          <a:prstGeom prst="roundRect">
-            <a:avLst/>
-          </a:prstGeom>
-          <a:solidFill>
-            <a:srgbClr val="3DC1D3"/>
-          </a:solidFill>
-          <a:ln w="12700">
-            <a:noFill/>
-          </a:ln>
-        </p:spPr>
-        <p:style>
-          <a:lnRef idx="2">
-            <a:schemeClr val="accent1">
-              <a:shade val="15000"/>
-            </a:schemeClr>
-          </a:lnRef>
-          <a:fillRef idx="1">
-            <a:schemeClr val="accent1"/>
-          </a:fillRef>
-          <a:effectRef idx="0">
-            <a:schemeClr val="accent1"/>
-          </a:effectRef>
-          <a:fontRef idx="minor">
-            <a:schemeClr val="lt1"/>
-          </a:fontRef>
-        </p:style>
-        <p:txBody>
-          <a:bodyPr rtlCol="0" anchor="ctr"/>
-          <a:lstStyle/>
-          <a:p>
-            <a:pPr algn="ctr"/>
-            <a:r>
-              <a:rPr lang="en-US" altLang="zh-CN" sz="1200" dirty="0">
-                <a:latin typeface="Quicksand Light" panose="00000400000000000000" pitchFamily="2" charset="0"/>
-              </a:rPr>
-              <a:t>TCP</a:t>
-            </a:r>
-            <a:endParaRPr lang="zh-CN" altLang="en-US" sz="1200" dirty="0">
-              <a:latin typeface="Quicksand Light" panose="00000400000000000000" pitchFamily="2" charset="0"/>
-            </a:endParaRPr>
-          </a:p>
-        </p:txBody>
-      </p:sp>
-      <p:sp>
-        <p:nvSpPr>
-          <p:cNvPr id="19" name="矩形: 圆角 18">
-            <a:extLst>
-              <a:ext uri="{FF2B5EF4-FFF2-40B4-BE49-F238E27FC236}">
-                <a16:creationId xmlns:a16="http://schemas.microsoft.com/office/drawing/2014/main" id="{81530229-6710-AE17-7125-34E7C102D265}"/>
-              </a:ext>
-            </a:extLst>
-          </p:cNvPr>
-          <p:cNvSpPr/>
-          <p:nvPr/>
-        </p:nvSpPr>
-        <p:spPr>
-          <a:xfrm>
-            <a:off x="3307693" y="4665692"/>
-            <a:ext cx="1440000" cy="360000"/>
-          </a:xfrm>
-          <a:prstGeom prst="roundRect">
-            <a:avLst/>
-          </a:prstGeom>
-          <a:solidFill>
-            <a:srgbClr val="20BF6B"/>
-          </a:solidFill>
-          <a:ln w="12700">
-            <a:noFill/>
-          </a:ln>
-        </p:spPr>
-        <p:style>
-          <a:lnRef idx="2">
-            <a:schemeClr val="accent1">
-              <a:shade val="15000"/>
-            </a:schemeClr>
-          </a:lnRef>
-          <a:fillRef idx="1">
-            <a:schemeClr val="accent1"/>
-          </a:fillRef>
-          <a:effectRef idx="0">
-            <a:schemeClr val="accent1"/>
-          </a:effectRef>
-          <a:fontRef idx="minor">
-            <a:schemeClr val="lt1"/>
-          </a:fontRef>
-        </p:style>
-        <p:txBody>
-          <a:bodyPr rtlCol="0" anchor="ctr"/>
-          <a:lstStyle/>
-          <a:p>
-            <a:pPr algn="ctr"/>
-            <a:r>
-              <a:rPr lang="en-US" altLang="zh-CN" sz="1200" dirty="0">
-                <a:latin typeface="Quicksand Light" panose="00000400000000000000" pitchFamily="2" charset="0"/>
-              </a:rPr>
-              <a:t>UDP</a:t>
-            </a:r>
-            <a:endParaRPr lang="zh-CN" altLang="en-US" sz="1200" dirty="0">
-              <a:latin typeface="Quicksand Light" panose="00000400000000000000" pitchFamily="2" charset="0"/>
-            </a:endParaRPr>
-          </a:p>
-        </p:txBody>
-      </p:sp>
-      <p:cxnSp>
-        <p:nvCxnSpPr>
-          <p:cNvPr id="22" name="连接符: 曲线 21">
-            <a:extLst>
-              <a:ext uri="{FF2B5EF4-FFF2-40B4-BE49-F238E27FC236}">
-                <a16:creationId xmlns:a16="http://schemas.microsoft.com/office/drawing/2014/main" id="{983C1AC8-3735-FBF8-1D52-F46340D06312}"/>
-              </a:ext>
-            </a:extLst>
-          </p:cNvPr>
-          <p:cNvCxnSpPr>
-            <a:cxnSpLocks/>
-            <a:stCxn id="36" idx="3"/>
-            <a:endCxn id="19" idx="1"/>
-          </p:cNvCxnSpPr>
-          <p:nvPr/>
-        </p:nvCxnSpPr>
-        <p:spPr>
-          <a:xfrm>
-            <a:off x="3024137" y="3527363"/>
-            <a:ext cx="283556" cy="1318329"/>
-          </a:xfrm>
-          <a:prstGeom prst="curvedConnector3">
-            <a:avLst>
-              <a:gd name="adj1" fmla="val 50000"/>
-            </a:avLst>
-          </a:prstGeom>
-          <a:ln>
-            <a:solidFill>
-              <a:srgbClr val="20BF6B"/>
-            </a:solidFill>
-          </a:ln>
-        </p:spPr>
-        <p:style>
-          <a:lnRef idx="1">
-            <a:schemeClr val="accent1"/>
-          </a:lnRef>
-          <a:fillRef idx="0">
-            <a:schemeClr val="accent1"/>
-          </a:fillRef>
-          <a:effectRef idx="0">
-            <a:schemeClr val="accent1"/>
-          </a:effectRef>
-          <a:fontRef idx="minor">
-            <a:schemeClr val="tx1"/>
-          </a:fontRef>
-        </p:style>
-      </p:cxnSp>
-      <p:cxnSp>
-        <p:nvCxnSpPr>
-          <p:cNvPr id="28" name="直接连接符 27">
-            <a:extLst>
-              <a:ext uri="{FF2B5EF4-FFF2-40B4-BE49-F238E27FC236}">
-                <a16:creationId xmlns:a16="http://schemas.microsoft.com/office/drawing/2014/main" id="{BD7B110E-78A0-DA3F-A295-242686C8DE59}"/>
-              </a:ext>
-            </a:extLst>
-          </p:cNvPr>
-          <p:cNvCxnSpPr>
-            <a:stCxn id="16" idx="1"/>
-            <a:endCxn id="36" idx="3"/>
-          </p:cNvCxnSpPr>
-          <p:nvPr/>
-        </p:nvCxnSpPr>
-        <p:spPr>
-          <a:xfrm flipH="1">
-            <a:off x="3024137" y="3527363"/>
-            <a:ext cx="283556" cy="0"/>
-          </a:xfrm>
-          <a:prstGeom prst="line">
-            <a:avLst/>
-          </a:prstGeom>
-          <a:ln>
-            <a:solidFill>
-              <a:srgbClr val="3CBFD1"/>
-            </a:solidFill>
-          </a:ln>
-        </p:spPr>
-        <p:style>
-          <a:lnRef idx="1">
-            <a:schemeClr val="accent1"/>
-          </a:lnRef>
-          <a:fillRef idx="0">
-            <a:schemeClr val="accent1"/>
-          </a:fillRef>
-          <a:effectRef idx="0">
-            <a:schemeClr val="accent1"/>
-          </a:effectRef>
-          <a:fontRef idx="minor">
-            <a:schemeClr val="tx1"/>
-          </a:fontRef>
-        </p:style>
-      </p:cxnSp>
-      <p:cxnSp>
-        <p:nvCxnSpPr>
-          <p:cNvPr id="29" name="连接符: 曲线 28">
-            <a:extLst>
-              <a:ext uri="{FF2B5EF4-FFF2-40B4-BE49-F238E27FC236}">
-                <a16:creationId xmlns:a16="http://schemas.microsoft.com/office/drawing/2014/main" id="{3CE98D71-068D-12E4-6351-5662457FF6EF}"/>
-              </a:ext>
-            </a:extLst>
-          </p:cNvPr>
-          <p:cNvCxnSpPr>
-            <a:cxnSpLocks/>
-            <a:stCxn id="4" idx="1"/>
-            <a:endCxn id="16" idx="3"/>
-          </p:cNvCxnSpPr>
-          <p:nvPr/>
-        </p:nvCxnSpPr>
-        <p:spPr>
-          <a:xfrm rot="10800000">
-            <a:off x="4747694" y="3527363"/>
-            <a:ext cx="283555" cy="215256"/>
-          </a:xfrm>
-          <a:prstGeom prst="curvedConnector3">
-            <a:avLst>
-              <a:gd name="adj1" fmla="val 50000"/>
-            </a:avLst>
-          </a:prstGeom>
-          <a:ln w="6350">
-            <a:solidFill>
-              <a:srgbClr val="3CBFD1"/>
-            </a:solidFill>
-          </a:ln>
-        </p:spPr>
-        <p:style>
-          <a:lnRef idx="1">
-            <a:schemeClr val="accent1"/>
-          </a:lnRef>
-          <a:fillRef idx="0">
-            <a:schemeClr val="accent1"/>
-          </a:fillRef>
-          <a:effectRef idx="0">
-            <a:schemeClr val="accent1"/>
-          </a:effectRef>
-          <a:fontRef idx="minor">
-            <a:schemeClr val="tx1"/>
-          </a:fontRef>
-        </p:style>
-      </p:cxnSp>
-      <p:sp>
-        <p:nvSpPr>
-          <p:cNvPr id="6" name="矩形: 圆角 5">
-            <a:extLst>
-              <a:ext uri="{FF2B5EF4-FFF2-40B4-BE49-F238E27FC236}">
-                <a16:creationId xmlns:a16="http://schemas.microsoft.com/office/drawing/2014/main" id="{E26F0BAC-FA81-5F6F-B924-707A50D906C4}"/>
-              </a:ext>
-            </a:extLst>
-          </p:cNvPr>
-          <p:cNvSpPr/>
-          <p:nvPr/>
-        </p:nvSpPr>
-        <p:spPr>
-          <a:xfrm>
-            <a:off x="7102100" y="3562619"/>
-            <a:ext cx="1800000" cy="360000"/>
-          </a:xfrm>
-          <a:prstGeom prst="roundRect">
-            <a:avLst/>
-          </a:prstGeom>
-          <a:noFill/>
-          <a:ln w="12700">
-            <a:noFill/>
-            <a:prstDash val="solid"/>
-          </a:ln>
-        </p:spPr>
-        <p:style>
-          <a:lnRef idx="2">
-            <a:schemeClr val="accent1">
-              <a:shade val="15000"/>
-            </a:schemeClr>
-          </a:lnRef>
-          <a:fillRef idx="1">
-            <a:schemeClr val="accent1"/>
-          </a:fillRef>
-          <a:effectRef idx="0">
-            <a:schemeClr val="accent1"/>
-          </a:effectRef>
-          <a:fontRef idx="minor">
-            <a:schemeClr val="lt1"/>
-          </a:fontRef>
-        </p:style>
-        <p:txBody>
-          <a:bodyPr rtlCol="0" anchor="ctr"/>
-          <a:lstStyle/>
-          <a:p>
-            <a:endParaRPr lang="zh-CN" altLang="en-US" sz="1200" dirty="0">
-              <a:solidFill>
-                <a:sysClr val="windowText" lastClr="000000"/>
-              </a:solidFill>
-              <a:latin typeface="Quicksand Light" panose="00000400000000000000" pitchFamily="2" charset="0"/>
-            </a:endParaRPr>
-          </a:p>
-        </p:txBody>
-      </p:sp>
-      <p:cxnSp>
-        <p:nvCxnSpPr>
-          <p:cNvPr id="17" name="直接连接符 16">
-            <a:extLst>
-              <a:ext uri="{FF2B5EF4-FFF2-40B4-BE49-F238E27FC236}">
-                <a16:creationId xmlns:a16="http://schemas.microsoft.com/office/drawing/2014/main" id="{5469945C-7541-0506-CC16-F8088F979CF3}"/>
-              </a:ext>
-            </a:extLst>
-          </p:cNvPr>
-          <p:cNvCxnSpPr>
-            <a:stCxn id="19" idx="3"/>
-            <a:endCxn id="5" idx="1"/>
-          </p:cNvCxnSpPr>
-          <p:nvPr/>
-        </p:nvCxnSpPr>
-        <p:spPr>
-          <a:xfrm>
-            <a:off x="4747693" y="4845692"/>
-            <a:ext cx="283555" cy="0"/>
-          </a:xfrm>
-          <a:prstGeom prst="line">
-            <a:avLst/>
-          </a:prstGeom>
-          <a:ln>
-            <a:solidFill>
-              <a:srgbClr val="20BD6A"/>
-            </a:solidFill>
-          </a:ln>
-        </p:spPr>
-        <p:style>
-          <a:lnRef idx="1">
-            <a:schemeClr val="accent1"/>
-          </a:lnRef>
-          <a:fillRef idx="0">
-            <a:schemeClr val="accent1"/>
-          </a:fillRef>
-          <a:effectRef idx="0">
-            <a:schemeClr val="accent1"/>
-          </a:effectRef>
-          <a:fontRef idx="minor">
-            <a:schemeClr val="tx1"/>
-          </a:fontRef>
-        </p:style>
-      </p:cxnSp>
-    </p:spTree>
-    <p:extLst>
-      <p:ext uri="{BB962C8B-B14F-4D97-AF65-F5344CB8AC3E}">
-        <p14:creationId xmlns:p14="http://schemas.microsoft.com/office/powerpoint/2010/main" val="1275707856"/>
-      </p:ext>
-    </p:extLst>
-  </p:cSld>
-  <p:clrMapOvr>
-    <a:masterClrMapping/>
-  </p:clrMapOvr>
-</p:sld>
-</file>
-
-<file path=ppt/slides/slide20.xml><?xml version="1.0" encoding="utf-8"?>
+<file path=ppt/slides/slide21.xml><?xml version="1.0" encoding="utf-8"?>
 <p:sld xmlns:a="http://schemas.openxmlformats.org/drawingml/2006/main" xmlns:r="http://schemas.openxmlformats.org/officeDocument/2006/relationships" xmlns:p="http://schemas.openxmlformats.org/presentationml/2006/main">
   <p:cSld>
     <p:spTree>
@@ -17601,7 +18418,7 @@
 </p:sld>
 </file>
 
-<file path=ppt/slides/slide21.xml><?xml version="1.0" encoding="utf-8"?>
+<file path=ppt/slides/slide22.xml><?xml version="1.0" encoding="utf-8"?>
 <p:sld xmlns:a="http://schemas.openxmlformats.org/drawingml/2006/main" xmlns:r="http://schemas.openxmlformats.org/officeDocument/2006/relationships" xmlns:p="http://schemas.openxmlformats.org/presentationml/2006/main">
   <p:cSld>
     <p:spTree>
@@ -18047,7 +18864,7 @@
 </p:sld>
 </file>
 
-<file path=ppt/slides/slide22.xml><?xml version="1.0" encoding="utf-8"?>
+<file path=ppt/slides/slide23.xml><?xml version="1.0" encoding="utf-8"?>
 <p:sld xmlns:a="http://schemas.openxmlformats.org/drawingml/2006/main" xmlns:r="http://schemas.openxmlformats.org/officeDocument/2006/relationships" xmlns:p="http://schemas.openxmlformats.org/presentationml/2006/main">
   <p:cSld>
     <p:spTree>
@@ -19290,7 +20107,7 @@
 </p:sld>
 </file>
 
-<file path=ppt/slides/slide23.xml><?xml version="1.0" encoding="utf-8"?>
+<file path=ppt/slides/slide24.xml><?xml version="1.0" encoding="utf-8"?>
 <p:sld xmlns:a="http://schemas.openxmlformats.org/drawingml/2006/main" xmlns:r="http://schemas.openxmlformats.org/officeDocument/2006/relationships" xmlns:p="http://schemas.openxmlformats.org/presentationml/2006/main">
   <p:cSld>
     <p:spTree>
@@ -20963,7 +21780,7 @@
 </p:sld>
 </file>
 
-<file path=ppt/slides/slide24.xml><?xml version="1.0" encoding="utf-8"?>
+<file path=ppt/slides/slide25.xml><?xml version="1.0" encoding="utf-8"?>
 <p:sld xmlns:a="http://schemas.openxmlformats.org/drawingml/2006/main" xmlns:r="http://schemas.openxmlformats.org/officeDocument/2006/relationships" xmlns:p="http://schemas.openxmlformats.org/presentationml/2006/main">
   <p:cSld>
     <p:spTree>
@@ -22215,7 +23032,7 @@
 </p:sld>
 </file>
 
-<file path=ppt/slides/slide25.xml><?xml version="1.0" encoding="utf-8"?>
+<file path=ppt/slides/slide26.xml><?xml version="1.0" encoding="utf-8"?>
 <p:sld xmlns:a="http://schemas.openxmlformats.org/drawingml/2006/main" xmlns:r="http://schemas.openxmlformats.org/officeDocument/2006/relationships" xmlns:p="http://schemas.openxmlformats.org/presentationml/2006/main">
   <p:cSld>
     <p:spTree>
@@ -23338,7 +24155,7 @@
 </p:sld>
 </file>
 
-<file path=ppt/slides/slide26.xml><?xml version="1.0" encoding="utf-8"?>
+<file path=ppt/slides/slide27.xml><?xml version="1.0" encoding="utf-8"?>
 <p:sld xmlns:a="http://schemas.openxmlformats.org/drawingml/2006/main" xmlns:r="http://schemas.openxmlformats.org/officeDocument/2006/relationships" xmlns:p="http://schemas.openxmlformats.org/presentationml/2006/main">
   <p:cSld>
     <p:spTree>
@@ -24701,7 +25518,7 @@
 </p:sld>
 </file>
 
-<file path=ppt/slides/slide27.xml><?xml version="1.0" encoding="utf-8"?>
+<file path=ppt/slides/slide28.xml><?xml version="1.0" encoding="utf-8"?>
 <p:sld xmlns:a="http://schemas.openxmlformats.org/drawingml/2006/main" xmlns:r="http://schemas.openxmlformats.org/officeDocument/2006/relationships" xmlns:p="http://schemas.openxmlformats.org/presentationml/2006/main">
   <p:cSld>
     <p:spTree>
@@ -26077,7 +26894,7 @@
 </p:sld>
 </file>
 
-<file path=ppt/slides/slide28.xml><?xml version="1.0" encoding="utf-8"?>
+<file path=ppt/slides/slide29.xml><?xml version="1.0" encoding="utf-8"?>
 <p:sld xmlns:a="http://schemas.openxmlformats.org/drawingml/2006/main" xmlns:r="http://schemas.openxmlformats.org/officeDocument/2006/relationships" xmlns:p="http://schemas.openxmlformats.org/presentationml/2006/main">
   <p:cSld>
     <p:spTree>
@@ -27274,12 +28091,18 @@
 </p:sld>
 </file>
 
-<file path=ppt/slides/slide29.xml><?xml version="1.0" encoding="utf-8"?>
+<file path=ppt/slides/slide3.xml><?xml version="1.0" encoding="utf-8"?>
 <p:sld xmlns:a="http://schemas.openxmlformats.org/drawingml/2006/main" xmlns:r="http://schemas.openxmlformats.org/officeDocument/2006/relationships" xmlns:p="http://schemas.openxmlformats.org/presentationml/2006/main">
   <p:cSld>
     <p:spTree>
       <p:nvGrpSpPr>
-        <p:cNvPr id="1" name=""/>
+        <p:cNvPr id="1" name="">
+          <a:extLst>
+            <a:ext uri="{FF2B5EF4-FFF2-40B4-BE49-F238E27FC236}">
+              <a16:creationId xmlns:a16="http://schemas.microsoft.com/office/drawing/2014/main" id="{305ACE99-59B0-D2A0-7D0D-F12E4D9ED934}"/>
+            </a:ext>
+          </a:extLst>
+        </p:cNvPr>
         <p:cNvGrpSpPr/>
         <p:nvPr/>
       </p:nvGrpSpPr>
@@ -27291,404 +28114,805 @@
           <a:chExt cx="0" cy="0"/>
         </a:xfrm>
       </p:grpSpPr>
-      <p:pic>
-        <p:nvPicPr>
-          <p:cNvPr id="3" name="图片 2">
-            <a:extLst>
-              <a:ext uri="{FF2B5EF4-FFF2-40B4-BE49-F238E27FC236}">
-                <a16:creationId xmlns:a16="http://schemas.microsoft.com/office/drawing/2014/main" id="{7ECC09FE-D9D2-2E76-0948-E1F27A08CD34}"/>
-              </a:ext>
-            </a:extLst>
-          </p:cNvPr>
-          <p:cNvPicPr>
-            <a:picLocks noChangeAspect="1"/>
-          </p:cNvPicPr>
-          <p:nvPr/>
-        </p:nvPicPr>
-        <p:blipFill>
-          <a:blip r:embed="rId2"/>
-          <a:stretch>
-            <a:fillRect/>
-          </a:stretch>
-        </p:blipFill>
-        <p:spPr>
-          <a:xfrm>
-            <a:off x="5043340" y="1842866"/>
-            <a:ext cx="2105319" cy="3172268"/>
-          </a:xfrm>
-          <a:prstGeom prst="rect">
-            <a:avLst/>
-          </a:prstGeom>
-        </p:spPr>
-      </p:pic>
-    </p:spTree>
-    <p:extLst>
-      <p:ext uri="{BB962C8B-B14F-4D97-AF65-F5344CB8AC3E}">
-        <p14:creationId xmlns:p14="http://schemas.microsoft.com/office/powerpoint/2010/main" val="2672122669"/>
-      </p:ext>
-    </p:extLst>
-  </p:cSld>
-  <p:clrMapOvr>
-    <a:masterClrMapping/>
-  </p:clrMapOvr>
-</p:sld>
-</file>
-
-<file path=ppt/slides/slide3.xml><?xml version="1.0" encoding="utf-8"?>
-<p:sld xmlns:a="http://schemas.openxmlformats.org/drawingml/2006/main" xmlns:r="http://schemas.openxmlformats.org/officeDocument/2006/relationships" xmlns:p="http://schemas.openxmlformats.org/presentationml/2006/main">
-  <p:cSld>
-    <p:spTree>
-      <p:nvGrpSpPr>
-        <p:cNvPr id="1" name=""/>
-        <p:cNvGrpSpPr/>
-        <p:nvPr/>
-      </p:nvGrpSpPr>
-      <p:grpSpPr>
-        <a:xfrm>
-          <a:off x="0" y="0"/>
-          <a:ext cx="0" cy="0"/>
-          <a:chOff x="0" y="0"/>
-          <a:chExt cx="0" cy="0"/>
-        </a:xfrm>
-      </p:grpSpPr>
-      <p:cxnSp>
-        <p:nvCxnSpPr>
-          <p:cNvPr id="7" name="直接箭头连接符 6">
-            <a:extLst>
-              <a:ext uri="{FF2B5EF4-FFF2-40B4-BE49-F238E27FC236}">
-                <a16:creationId xmlns:a16="http://schemas.microsoft.com/office/drawing/2014/main" id="{C80FF363-BC0E-F513-0462-96F884DB1FDC}"/>
-              </a:ext>
-            </a:extLst>
-          </p:cNvPr>
-          <p:cNvCxnSpPr>
-            <a:cxnSpLocks/>
-          </p:cNvCxnSpPr>
-          <p:nvPr/>
-        </p:nvCxnSpPr>
-        <p:spPr>
-          <a:xfrm>
-            <a:off x="3851142" y="1691563"/>
-            <a:ext cx="0" cy="3966287"/>
-          </a:xfrm>
-          <a:prstGeom prst="straightConnector1">
-            <a:avLst/>
-          </a:prstGeom>
-          <a:ln w="12700">
-            <a:solidFill>
-              <a:schemeClr val="tx1"/>
-            </a:solidFill>
-            <a:tailEnd type="triangle"/>
-          </a:ln>
-        </p:spPr>
-        <p:style>
-          <a:lnRef idx="1">
-            <a:schemeClr val="accent1"/>
-          </a:lnRef>
-          <a:fillRef idx="0">
-            <a:schemeClr val="accent1"/>
-          </a:fillRef>
-          <a:effectRef idx="0">
-            <a:schemeClr val="accent1"/>
-          </a:effectRef>
-          <a:fontRef idx="minor">
-            <a:schemeClr val="tx1"/>
-          </a:fontRef>
-        </p:style>
-      </p:cxnSp>
-      <p:cxnSp>
-        <p:nvCxnSpPr>
-          <p:cNvPr id="8" name="直接箭头连接符 7">
-            <a:extLst>
-              <a:ext uri="{FF2B5EF4-FFF2-40B4-BE49-F238E27FC236}">
-                <a16:creationId xmlns:a16="http://schemas.microsoft.com/office/drawing/2014/main" id="{22E1B91C-93FA-1433-6508-4A43CD8D807B}"/>
-              </a:ext>
-            </a:extLst>
-          </p:cNvPr>
-          <p:cNvCxnSpPr>
-            <a:cxnSpLocks/>
-          </p:cNvCxnSpPr>
-          <p:nvPr/>
-        </p:nvCxnSpPr>
-        <p:spPr>
-          <a:xfrm>
-            <a:off x="7298041" y="1691563"/>
-            <a:ext cx="0" cy="3966287"/>
-          </a:xfrm>
-          <a:prstGeom prst="straightConnector1">
-            <a:avLst/>
-          </a:prstGeom>
-          <a:ln w="12700">
-            <a:solidFill>
-              <a:schemeClr val="tx1"/>
-            </a:solidFill>
-            <a:tailEnd type="triangle"/>
-          </a:ln>
-        </p:spPr>
-        <p:style>
-          <a:lnRef idx="1">
-            <a:schemeClr val="accent1"/>
-          </a:lnRef>
-          <a:fillRef idx="0">
-            <a:schemeClr val="accent1"/>
-          </a:fillRef>
-          <a:effectRef idx="0">
-            <a:schemeClr val="accent1"/>
-          </a:effectRef>
-          <a:fontRef idx="minor">
-            <a:schemeClr val="tx1"/>
-          </a:fontRef>
-        </p:style>
-      </p:cxnSp>
       <p:sp>
         <p:nvSpPr>
-          <p:cNvPr id="9" name="文本框 8">
-            <a:extLst>
-              <a:ext uri="{FF2B5EF4-FFF2-40B4-BE49-F238E27FC236}">
-                <a16:creationId xmlns:a16="http://schemas.microsoft.com/office/drawing/2014/main" id="{A3720D08-6F14-38E6-12AA-2F942A367B46}"/>
-              </a:ext>
-            </a:extLst>
-          </p:cNvPr>
-          <p:cNvSpPr txBox="1"/>
+          <p:cNvPr id="2" name="矩形: 圆角 1">
+            <a:extLst>
+              <a:ext uri="{FF2B5EF4-FFF2-40B4-BE49-F238E27FC236}">
+                <a16:creationId xmlns:a16="http://schemas.microsoft.com/office/drawing/2014/main" id="{EA1617AA-3BC5-A6C2-7966-463E2BC3AC46}"/>
+              </a:ext>
+            </a:extLst>
+          </p:cNvPr>
+          <p:cNvSpPr/>
           <p:nvPr/>
         </p:nvSpPr>
         <p:spPr>
           <a:xfrm>
-            <a:off x="3387554" y="1885950"/>
-            <a:ext cx="463588" cy="276999"/>
-          </a:xfrm>
-          <a:prstGeom prst="rect">
-            <a:avLst/>
-          </a:prstGeom>
-          <a:noFill/>
-        </p:spPr>
+            <a:off x="3307693" y="2719832"/>
+            <a:ext cx="1440000" cy="360000"/>
+          </a:xfrm>
+          <a:prstGeom prst="roundRect">
+            <a:avLst/>
+          </a:prstGeom>
+          <a:solidFill>
+            <a:schemeClr val="accent5">
+              <a:lumMod val="75000"/>
+            </a:schemeClr>
+          </a:solidFill>
+          <a:ln w="12700">
+            <a:noFill/>
+          </a:ln>
+        </p:spPr>
+        <p:style>
+          <a:lnRef idx="2">
+            <a:schemeClr val="accent1">
+              <a:shade val="15000"/>
+            </a:schemeClr>
+          </a:lnRef>
+          <a:fillRef idx="1">
+            <a:schemeClr val="accent1"/>
+          </a:fillRef>
+          <a:effectRef idx="0">
+            <a:schemeClr val="accent1"/>
+          </a:effectRef>
+          <a:fontRef idx="minor">
+            <a:schemeClr val="lt1"/>
+          </a:fontRef>
+        </p:style>
         <p:txBody>
-          <a:bodyPr wrap="none" rtlCol="0">
-            <a:spAutoFit/>
-          </a:bodyPr>
+          <a:bodyPr rtlCol="0" anchor="ctr"/>
           <a:lstStyle/>
           <a:p>
+            <a:pPr algn="ctr"/>
             <a:r>
               <a:rPr lang="en-US" altLang="zh-CN" sz="1200" dirty="0">
-                <a:latin typeface="Courier New" panose="02070309020205020404" pitchFamily="49" charset="0"/>
-                <a:ea typeface="微软雅黑" panose="020B0503020204020204" pitchFamily="34" charset="-122"/>
-                <a:cs typeface="Courier New" panose="02070309020205020404" pitchFamily="49" charset="0"/>
+                <a:latin typeface="Quicksand Light" panose="00000400000000000000" pitchFamily="2" charset="0"/>
               </a:rPr>
-              <a:t>Bob</a:t>
+              <a:t>Port</a:t>
             </a:r>
             <a:endParaRPr lang="zh-CN" altLang="en-US" sz="1200" dirty="0">
-              <a:latin typeface="Courier New" panose="02070309020205020404" pitchFamily="49" charset="0"/>
-              <a:ea typeface="微软雅黑" panose="020B0503020204020204" pitchFamily="34" charset="-122"/>
-              <a:cs typeface="Courier New" panose="02070309020205020404" pitchFamily="49" charset="0"/>
+              <a:latin typeface="Quicksand Light" panose="00000400000000000000" pitchFamily="2" charset="0"/>
             </a:endParaRPr>
           </a:p>
         </p:txBody>
       </p:sp>
       <p:sp>
         <p:nvSpPr>
-          <p:cNvPr id="10" name="文本框 9">
-            <a:extLst>
-              <a:ext uri="{FF2B5EF4-FFF2-40B4-BE49-F238E27FC236}">
-                <a16:creationId xmlns:a16="http://schemas.microsoft.com/office/drawing/2014/main" id="{C2D2F0C1-4F48-4565-097F-21C3E7248276}"/>
-              </a:ext>
-            </a:extLst>
-          </p:cNvPr>
-          <p:cNvSpPr txBox="1"/>
+          <p:cNvPr id="3" name="矩形: 圆角 2">
+            <a:extLst>
+              <a:ext uri="{FF2B5EF4-FFF2-40B4-BE49-F238E27FC236}">
+                <a16:creationId xmlns:a16="http://schemas.microsoft.com/office/drawing/2014/main" id="{9D801BA9-9C6A-24D0-E174-E3604316CB49}"/>
+              </a:ext>
+            </a:extLst>
+          </p:cNvPr>
+          <p:cNvSpPr/>
           <p:nvPr/>
         </p:nvSpPr>
         <p:spPr>
           <a:xfrm>
-            <a:off x="7298041" y="1885950"/>
-            <a:ext cx="649537" cy="276999"/>
-          </a:xfrm>
-          <a:prstGeom prst="rect">
+            <a:off x="5031248" y="3132107"/>
+            <a:ext cx="1800000" cy="360000"/>
+          </a:xfrm>
+          <a:prstGeom prst="roundRect">
             <a:avLst/>
           </a:prstGeom>
           <a:noFill/>
-        </p:spPr>
+          <a:ln w="12700">
+            <a:solidFill>
+              <a:schemeClr val="tx2"/>
+            </a:solidFill>
+            <a:prstDash val="solid"/>
+          </a:ln>
+        </p:spPr>
+        <p:style>
+          <a:lnRef idx="2">
+            <a:schemeClr val="accent1">
+              <a:shade val="15000"/>
+            </a:schemeClr>
+          </a:lnRef>
+          <a:fillRef idx="1">
+            <a:schemeClr val="accent1"/>
+          </a:fillRef>
+          <a:effectRef idx="0">
+            <a:schemeClr val="accent1"/>
+          </a:effectRef>
+          <a:fontRef idx="minor">
+            <a:schemeClr val="lt1"/>
+          </a:fontRef>
+        </p:style>
         <p:txBody>
-          <a:bodyPr wrap="none" rtlCol="0">
-            <a:spAutoFit/>
-          </a:bodyPr>
+          <a:bodyPr rtlCol="0" anchor="ctr"/>
           <a:lstStyle/>
           <a:p>
+            <a:pPr algn="ctr"/>
             <a:r>
               <a:rPr lang="en-US" altLang="zh-CN" sz="1200" dirty="0">
-                <a:latin typeface="Courier New" panose="02070309020205020404" pitchFamily="49" charset="0"/>
-                <a:ea typeface="微软雅黑" panose="020B0503020204020204" pitchFamily="34" charset="-122"/>
-                <a:cs typeface="Courier New" panose="02070309020205020404" pitchFamily="49" charset="0"/>
+                <a:solidFill>
+                  <a:sysClr val="windowText" lastClr="000000"/>
+                </a:solidFill>
+                <a:latin typeface="Quicksand Light" panose="00000400000000000000" pitchFamily="2" charset="0"/>
               </a:rPr>
-              <a:t>Alice</a:t>
+              <a:t>Congestion  Control</a:t>
             </a:r>
             <a:endParaRPr lang="zh-CN" altLang="en-US" sz="1200" dirty="0">
-              <a:latin typeface="Courier New" panose="02070309020205020404" pitchFamily="49" charset="0"/>
-              <a:ea typeface="微软雅黑" panose="020B0503020204020204" pitchFamily="34" charset="-122"/>
-              <a:cs typeface="Courier New" panose="02070309020205020404" pitchFamily="49" charset="0"/>
+              <a:solidFill>
+                <a:sysClr val="windowText" lastClr="000000"/>
+              </a:solidFill>
+              <a:latin typeface="Quicksand Light" panose="00000400000000000000" pitchFamily="2" charset="0"/>
             </a:endParaRPr>
           </a:p>
         </p:txBody>
       </p:sp>
       <p:sp>
         <p:nvSpPr>
-          <p:cNvPr id="11" name="文本框 10">
-            <a:extLst>
-              <a:ext uri="{FF2B5EF4-FFF2-40B4-BE49-F238E27FC236}">
-                <a16:creationId xmlns:a16="http://schemas.microsoft.com/office/drawing/2014/main" id="{2AB7995F-7501-3414-56E0-2CC9D159BB4D}"/>
-              </a:ext>
-            </a:extLst>
-          </p:cNvPr>
-          <p:cNvSpPr txBox="1"/>
+          <p:cNvPr id="4" name="矩形: 圆角 3">
+            <a:extLst>
+              <a:ext uri="{FF2B5EF4-FFF2-40B4-BE49-F238E27FC236}">
+                <a16:creationId xmlns:a16="http://schemas.microsoft.com/office/drawing/2014/main" id="{B7D33566-285E-1CCB-5E98-A8DFB5DC5691}"/>
+              </a:ext>
+            </a:extLst>
+          </p:cNvPr>
+          <p:cNvSpPr/>
           <p:nvPr/>
         </p:nvSpPr>
         <p:spPr>
           <a:xfrm>
-            <a:off x="3855211" y="2238375"/>
-            <a:ext cx="3438762" cy="276999"/>
-          </a:xfrm>
-          <a:prstGeom prst="rect">
+            <a:off x="5031248" y="3562619"/>
+            <a:ext cx="1800000" cy="360000"/>
+          </a:xfrm>
+          <a:prstGeom prst="roundRect">
             <a:avLst/>
           </a:prstGeom>
           <a:noFill/>
-        </p:spPr>
+          <a:ln w="12700">
+            <a:solidFill>
+              <a:schemeClr val="tx2"/>
+            </a:solidFill>
+            <a:prstDash val="solid"/>
+          </a:ln>
+        </p:spPr>
+        <p:style>
+          <a:lnRef idx="2">
+            <a:schemeClr val="accent1">
+              <a:shade val="15000"/>
+            </a:schemeClr>
+          </a:lnRef>
+          <a:fillRef idx="1">
+            <a:schemeClr val="accent1"/>
+          </a:fillRef>
+          <a:effectRef idx="0">
+            <a:schemeClr val="accent1"/>
+          </a:effectRef>
+          <a:fontRef idx="minor">
+            <a:schemeClr val="lt1"/>
+          </a:fontRef>
+        </p:style>
         <p:txBody>
-          <a:bodyPr wrap="none" rtlCol="0">
-            <a:spAutoFit/>
-          </a:bodyPr>
+          <a:bodyPr rtlCol="0" anchor="ctr"/>
           <a:lstStyle/>
           <a:p>
-            <a:pPr algn="l"/>
+            <a:pPr algn="ctr"/>
             <a:r>
               <a:rPr lang="en-US" altLang="zh-CN" sz="1200" dirty="0">
-                <a:latin typeface="Courier New" panose="02070309020205020404" pitchFamily="49" charset="0"/>
-                <a:ea typeface="微软雅黑" panose="020B0503020204020204" pitchFamily="34" charset="-122"/>
-                <a:cs typeface="Courier New" panose="02070309020205020404" pitchFamily="49" charset="0"/>
+                <a:solidFill>
+                  <a:sysClr val="windowText" lastClr="000000"/>
+                </a:solidFill>
+                <a:latin typeface="Quicksand Light" panose="00000400000000000000" pitchFamily="2" charset="0"/>
               </a:rPr>
-              <a:t>I would like to talk to you, Alice.</a:t>
+              <a:t>Three-Way Handshake</a:t>
             </a:r>
             <a:endParaRPr lang="zh-CN" altLang="en-US" sz="1200" dirty="0">
-              <a:latin typeface="Courier New" panose="02070309020205020404" pitchFamily="49" charset="0"/>
-              <a:ea typeface="微软雅黑" panose="020B0503020204020204" pitchFamily="34" charset="-122"/>
-              <a:cs typeface="Courier New" panose="02070309020205020404" pitchFamily="49" charset="0"/>
+              <a:solidFill>
+                <a:sysClr val="windowText" lastClr="000000"/>
+              </a:solidFill>
+              <a:latin typeface="Quicksand Light" panose="00000400000000000000" pitchFamily="2" charset="0"/>
             </a:endParaRPr>
           </a:p>
         </p:txBody>
       </p:sp>
       <p:sp>
         <p:nvSpPr>
-          <p:cNvPr id="12" name="文本框 11">
-            <a:extLst>
-              <a:ext uri="{FF2B5EF4-FFF2-40B4-BE49-F238E27FC236}">
-                <a16:creationId xmlns:a16="http://schemas.microsoft.com/office/drawing/2014/main" id="{D90B4BF5-F870-456B-089B-598433C770CC}"/>
-              </a:ext>
-            </a:extLst>
-          </p:cNvPr>
-          <p:cNvSpPr txBox="1"/>
+          <p:cNvPr id="5" name="矩形: 圆角 4">
+            <a:extLst>
+              <a:ext uri="{FF2B5EF4-FFF2-40B4-BE49-F238E27FC236}">
+                <a16:creationId xmlns:a16="http://schemas.microsoft.com/office/drawing/2014/main" id="{905996E1-56AA-82E7-6CF1-E2487C38B700}"/>
+              </a:ext>
+            </a:extLst>
+          </p:cNvPr>
+          <p:cNvSpPr/>
           <p:nvPr/>
         </p:nvSpPr>
         <p:spPr>
           <a:xfrm>
-            <a:off x="4552518" y="3614738"/>
-            <a:ext cx="2044149" cy="276999"/>
-          </a:xfrm>
-          <a:prstGeom prst="rect">
+            <a:off x="5031248" y="4665692"/>
+            <a:ext cx="1800000" cy="360000"/>
+          </a:xfrm>
+          <a:prstGeom prst="roundRect">
             <a:avLst/>
           </a:prstGeom>
           <a:noFill/>
-        </p:spPr>
+          <a:ln w="12700">
+            <a:solidFill>
+              <a:schemeClr val="tx2"/>
+            </a:solidFill>
+            <a:prstDash val="solid"/>
+          </a:ln>
+        </p:spPr>
+        <p:style>
+          <a:lnRef idx="2">
+            <a:schemeClr val="accent1">
+              <a:shade val="15000"/>
+            </a:schemeClr>
+          </a:lnRef>
+          <a:fillRef idx="1">
+            <a:schemeClr val="accent1"/>
+          </a:fillRef>
+          <a:effectRef idx="0">
+            <a:schemeClr val="accent1"/>
+          </a:effectRef>
+          <a:fontRef idx="minor">
+            <a:schemeClr val="lt1"/>
+          </a:fontRef>
+        </p:style>
         <p:txBody>
-          <a:bodyPr wrap="none" rtlCol="0">
-            <a:spAutoFit/>
-          </a:bodyPr>
+          <a:bodyPr rtlCol="0" anchor="ctr"/>
           <a:lstStyle/>
           <a:p>
-            <a:pPr algn="l"/>
+            <a:pPr algn="ctr"/>
             <a:r>
               <a:rPr lang="en-US" altLang="zh-CN" sz="1200" dirty="0">
-                <a:latin typeface="Courier New" panose="02070309020205020404" pitchFamily="49" charset="0"/>
-                <a:ea typeface="微软雅黑" panose="020B0503020204020204" pitchFamily="34" charset="-122"/>
-                <a:cs typeface="Courier New" panose="02070309020205020404" pitchFamily="49" charset="0"/>
+                <a:solidFill>
+                  <a:sysClr val="windowText" lastClr="000000"/>
+                </a:solidFill>
+                <a:latin typeface="Quicksand Light" panose="00000400000000000000" pitchFamily="2" charset="0"/>
               </a:rPr>
-              <a:t>Ok, let’s talk. Bob.</a:t>
+              <a:t>Packet</a:t>
             </a:r>
             <a:endParaRPr lang="zh-CN" altLang="en-US" sz="1200" dirty="0">
-              <a:latin typeface="Courier New" panose="02070309020205020404" pitchFamily="49" charset="0"/>
+              <a:solidFill>
+                <a:sysClr val="windowText" lastClr="000000"/>
+              </a:solidFill>
+              <a:latin typeface="Quicksand Light" panose="00000400000000000000" pitchFamily="2" charset="0"/>
+            </a:endParaRPr>
+          </a:p>
+        </p:txBody>
+      </p:sp>
+      <p:cxnSp>
+        <p:nvCxnSpPr>
+          <p:cNvPr id="8" name="连接符: 曲线 7">
+            <a:extLst>
+              <a:ext uri="{FF2B5EF4-FFF2-40B4-BE49-F238E27FC236}">
+                <a16:creationId xmlns:a16="http://schemas.microsoft.com/office/drawing/2014/main" id="{40667B24-5AC7-5F2E-7021-EBB90191C191}"/>
+              </a:ext>
+            </a:extLst>
+          </p:cNvPr>
+          <p:cNvCxnSpPr>
+            <a:cxnSpLocks/>
+            <a:stCxn id="3" idx="1"/>
+            <a:endCxn id="16" idx="3"/>
+          </p:cNvCxnSpPr>
+          <p:nvPr/>
+        </p:nvCxnSpPr>
+        <p:spPr>
+          <a:xfrm rot="10800000" flipV="1">
+            <a:off x="4747694" y="3312107"/>
+            <a:ext cx="283555" cy="215256"/>
+          </a:xfrm>
+          <a:prstGeom prst="curvedConnector3">
+            <a:avLst>
+              <a:gd name="adj1" fmla="val 50000"/>
+            </a:avLst>
+          </a:prstGeom>
+          <a:ln w="6350">
+            <a:solidFill>
+              <a:srgbClr val="3CBFD1"/>
+            </a:solidFill>
+          </a:ln>
+        </p:spPr>
+        <p:style>
+          <a:lnRef idx="1">
+            <a:schemeClr val="accent1"/>
+          </a:lnRef>
+          <a:fillRef idx="0">
+            <a:schemeClr val="accent1"/>
+          </a:fillRef>
+          <a:effectRef idx="0">
+            <a:schemeClr val="accent1"/>
+          </a:effectRef>
+          <a:fontRef idx="minor">
+            <a:schemeClr val="tx1"/>
+          </a:fontRef>
+        </p:style>
+      </p:cxnSp>
+      <p:sp>
+        <p:nvSpPr>
+          <p:cNvPr id="9" name="矩形: 圆角 8">
+            <a:extLst>
+              <a:ext uri="{FF2B5EF4-FFF2-40B4-BE49-F238E27FC236}">
+                <a16:creationId xmlns:a16="http://schemas.microsoft.com/office/drawing/2014/main" id="{88EFE3ED-A618-B1ED-5F36-94CB8F38355F}"/>
+              </a:ext>
+            </a:extLst>
+          </p:cNvPr>
+          <p:cNvSpPr/>
+          <p:nvPr/>
+        </p:nvSpPr>
+        <p:spPr>
+          <a:xfrm>
+            <a:off x="5031248" y="3993131"/>
+            <a:ext cx="1800000" cy="360000"/>
+          </a:xfrm>
+          <a:prstGeom prst="roundRect">
+            <a:avLst/>
+          </a:prstGeom>
+          <a:noFill/>
+          <a:ln w="12700">
+            <a:solidFill>
+              <a:schemeClr val="tx2"/>
+            </a:solidFill>
+            <a:prstDash val="solid"/>
+          </a:ln>
+        </p:spPr>
+        <p:style>
+          <a:lnRef idx="2">
+            <a:schemeClr val="accent1">
+              <a:shade val="15000"/>
+            </a:schemeClr>
+          </a:lnRef>
+          <a:fillRef idx="1">
+            <a:schemeClr val="accent1"/>
+          </a:fillRef>
+          <a:effectRef idx="0">
+            <a:schemeClr val="accent1"/>
+          </a:effectRef>
+          <a:fontRef idx="minor">
+            <a:schemeClr val="lt1"/>
+          </a:fontRef>
+        </p:style>
+        <p:txBody>
+          <a:bodyPr rtlCol="0" anchor="ctr"/>
+          <a:lstStyle/>
+          <a:p>
+            <a:pPr algn="ctr"/>
+            <a:r>
+              <a:rPr lang="en-US" altLang="zh-CN" sz="1200" dirty="0">
+                <a:solidFill>
+                  <a:sysClr val="windowText" lastClr="000000"/>
+                </a:solidFill>
+                <a:latin typeface="Quicksand Light" panose="00000400000000000000" pitchFamily="2" charset="0"/>
+              </a:rPr>
+              <a:t>Packet</a:t>
+            </a:r>
+            <a:endParaRPr lang="zh-CN" altLang="en-US" sz="1200" dirty="0">
+              <a:solidFill>
+                <a:sysClr val="windowText" lastClr="000000"/>
+              </a:solidFill>
+              <a:latin typeface="Quicksand Light" panose="00000400000000000000" pitchFamily="2" charset="0"/>
+            </a:endParaRPr>
+          </a:p>
+        </p:txBody>
+      </p:sp>
+      <p:cxnSp>
+        <p:nvCxnSpPr>
+          <p:cNvPr id="10" name="连接符: 曲线 9">
+            <a:extLst>
+              <a:ext uri="{FF2B5EF4-FFF2-40B4-BE49-F238E27FC236}">
+                <a16:creationId xmlns:a16="http://schemas.microsoft.com/office/drawing/2014/main" id="{56D54B0A-0C00-1FA5-AA24-AB208E9F3E39}"/>
+              </a:ext>
+            </a:extLst>
+          </p:cNvPr>
+          <p:cNvCxnSpPr>
+            <a:cxnSpLocks/>
+            <a:stCxn id="16" idx="3"/>
+            <a:endCxn id="9" idx="1"/>
+          </p:cNvCxnSpPr>
+          <p:nvPr/>
+        </p:nvCxnSpPr>
+        <p:spPr>
+          <a:xfrm>
+            <a:off x="4747693" y="3527363"/>
+            <a:ext cx="283555" cy="645768"/>
+          </a:xfrm>
+          <a:prstGeom prst="curvedConnector3">
+            <a:avLst>
+              <a:gd name="adj1" fmla="val 50000"/>
+            </a:avLst>
+          </a:prstGeom>
+          <a:ln w="6350">
+            <a:solidFill>
+              <a:srgbClr val="3CBFD1"/>
+            </a:solidFill>
+          </a:ln>
+        </p:spPr>
+        <p:style>
+          <a:lnRef idx="1">
+            <a:schemeClr val="accent1"/>
+          </a:lnRef>
+          <a:fillRef idx="0">
+            <a:schemeClr val="accent1"/>
+          </a:fillRef>
+          <a:effectRef idx="0">
+            <a:schemeClr val="accent1"/>
+          </a:effectRef>
+          <a:fontRef idx="minor">
+            <a:schemeClr val="tx1"/>
+          </a:fontRef>
+        </p:style>
+      </p:cxnSp>
+      <p:sp>
+        <p:nvSpPr>
+          <p:cNvPr id="13" name="矩形: 圆角 12">
+            <a:extLst>
+              <a:ext uri="{FF2B5EF4-FFF2-40B4-BE49-F238E27FC236}">
+                <a16:creationId xmlns:a16="http://schemas.microsoft.com/office/drawing/2014/main" id="{AD181E9B-9708-8757-6641-0EC70B8857D3}"/>
+              </a:ext>
+            </a:extLst>
+          </p:cNvPr>
+          <p:cNvSpPr/>
+          <p:nvPr/>
+        </p:nvSpPr>
+        <p:spPr>
+          <a:xfrm>
+            <a:off x="5031248" y="2705606"/>
+            <a:ext cx="1800000" cy="360000"/>
+          </a:xfrm>
+          <a:prstGeom prst="roundRect">
+            <a:avLst/>
+          </a:prstGeom>
+          <a:noFill/>
+          <a:ln w="12700">
+            <a:solidFill>
+              <a:schemeClr val="tx2"/>
+            </a:solidFill>
+            <a:prstDash val="solid"/>
+          </a:ln>
+        </p:spPr>
+        <p:style>
+          <a:lnRef idx="2">
+            <a:schemeClr val="accent1">
+              <a:shade val="15000"/>
+            </a:schemeClr>
+          </a:lnRef>
+          <a:fillRef idx="1">
+            <a:schemeClr val="accent1"/>
+          </a:fillRef>
+          <a:effectRef idx="0">
+            <a:schemeClr val="accent1"/>
+          </a:effectRef>
+          <a:fontRef idx="minor">
+            <a:schemeClr val="lt1"/>
+          </a:fontRef>
+        </p:style>
+        <p:txBody>
+          <a:bodyPr rtlCol="0" anchor="ctr"/>
+          <a:lstStyle/>
+          <a:p>
+            <a:pPr algn="ctr"/>
+            <a:r>
+              <a:rPr lang="en-US" altLang="zh-CN" sz="1200" dirty="0">
+                <a:solidFill>
+                  <a:sysClr val="windowText" lastClr="000000"/>
+                </a:solidFill>
+                <a:latin typeface="Quicksand Light" panose="00000400000000000000" pitchFamily="2" charset="0"/>
+              </a:rPr>
+              <a:t>Traffic Control</a:t>
+            </a:r>
+            <a:endParaRPr lang="zh-CN" altLang="en-US" sz="1200" dirty="0">
+              <a:solidFill>
+                <a:sysClr val="windowText" lastClr="000000"/>
+              </a:solidFill>
+              <a:latin typeface="Quicksand Light" panose="00000400000000000000" pitchFamily="2" charset="0"/>
+            </a:endParaRPr>
+          </a:p>
+        </p:txBody>
+      </p:sp>
+      <p:cxnSp>
+        <p:nvCxnSpPr>
+          <p:cNvPr id="14" name="连接符: 曲线 13">
+            <a:extLst>
+              <a:ext uri="{FF2B5EF4-FFF2-40B4-BE49-F238E27FC236}">
+                <a16:creationId xmlns:a16="http://schemas.microsoft.com/office/drawing/2014/main" id="{94161A20-9CEA-26C5-90F1-7284ECA5C704}"/>
+              </a:ext>
+            </a:extLst>
+          </p:cNvPr>
+          <p:cNvCxnSpPr>
+            <a:cxnSpLocks/>
+            <a:stCxn id="13" idx="1"/>
+            <a:endCxn id="16" idx="3"/>
+          </p:cNvCxnSpPr>
+          <p:nvPr/>
+        </p:nvCxnSpPr>
+        <p:spPr>
+          <a:xfrm rot="10800000" flipV="1">
+            <a:off x="4747694" y="2885605"/>
+            <a:ext cx="283555" cy="641757"/>
+          </a:xfrm>
+          <a:prstGeom prst="curvedConnector3">
+            <a:avLst>
+              <a:gd name="adj1" fmla="val 50000"/>
+            </a:avLst>
+          </a:prstGeom>
+          <a:ln w="6350">
+            <a:solidFill>
+              <a:srgbClr val="3CBFD1"/>
+            </a:solidFill>
+          </a:ln>
+        </p:spPr>
+        <p:style>
+          <a:lnRef idx="1">
+            <a:schemeClr val="accent1"/>
+          </a:lnRef>
+          <a:fillRef idx="0">
+            <a:schemeClr val="accent1"/>
+          </a:fillRef>
+          <a:effectRef idx="0">
+            <a:schemeClr val="accent1"/>
+          </a:effectRef>
+          <a:fontRef idx="minor">
+            <a:schemeClr val="tx1"/>
+          </a:fontRef>
+        </p:style>
+      </p:cxnSp>
+      <p:sp>
+        <p:nvSpPr>
+          <p:cNvPr id="36" name="矩形: 圆角 35">
+            <a:extLst>
+              <a:ext uri="{FF2B5EF4-FFF2-40B4-BE49-F238E27FC236}">
+                <a16:creationId xmlns:a16="http://schemas.microsoft.com/office/drawing/2014/main" id="{C6587821-DD92-9679-7756-3E8C2C8D118E}"/>
+              </a:ext>
+            </a:extLst>
+          </p:cNvPr>
+          <p:cNvSpPr/>
+          <p:nvPr/>
+        </p:nvSpPr>
+        <p:spPr>
+          <a:xfrm>
+            <a:off x="1584137" y="3347363"/>
+            <a:ext cx="1440000" cy="360000"/>
+          </a:xfrm>
+          <a:prstGeom prst="roundRect">
+            <a:avLst/>
+          </a:prstGeom>
+          <a:solidFill>
+            <a:schemeClr val="tx1"/>
+          </a:solidFill>
+          <a:ln w="12700">
+            <a:noFill/>
+          </a:ln>
+        </p:spPr>
+        <p:style>
+          <a:lnRef idx="2">
+            <a:schemeClr val="accent1">
+              <a:shade val="15000"/>
+            </a:schemeClr>
+          </a:lnRef>
+          <a:fillRef idx="1">
+            <a:schemeClr val="accent1"/>
+          </a:fillRef>
+          <a:effectRef idx="0">
+            <a:schemeClr val="accent1"/>
+          </a:effectRef>
+          <a:fontRef idx="minor">
+            <a:schemeClr val="lt1"/>
+          </a:fontRef>
+        </p:style>
+        <p:txBody>
+          <a:bodyPr rtlCol="0" anchor="ctr"/>
+          <a:lstStyle/>
+          <a:p>
+            <a:pPr algn="ctr"/>
+            <a:r>
+              <a:rPr lang="en-US" altLang="zh-CN" sz="1200" dirty="0">
+                <a:latin typeface="Quicksand Light" panose="00000400000000000000" pitchFamily="2" charset="0"/>
+                <a:ea typeface="微软雅黑" panose="020B0503020204020204" pitchFamily="34" charset="-122"/>
+              </a:rPr>
+              <a:t>Transport Layer</a:t>
+            </a:r>
+            <a:endParaRPr lang="zh-CN" altLang="en-US" sz="1200" dirty="0">
+              <a:latin typeface="Quicksand Light" panose="00000400000000000000" pitchFamily="2" charset="0"/>
               <a:ea typeface="微软雅黑" panose="020B0503020204020204" pitchFamily="34" charset="-122"/>
-              <a:cs typeface="Courier New" panose="02070309020205020404" pitchFamily="49" charset="0"/>
+            </a:endParaRPr>
+          </a:p>
+        </p:txBody>
+      </p:sp>
+      <p:cxnSp>
+        <p:nvCxnSpPr>
+          <p:cNvPr id="42" name="连接符: 曲线 41">
+            <a:extLst>
+              <a:ext uri="{FF2B5EF4-FFF2-40B4-BE49-F238E27FC236}">
+                <a16:creationId xmlns:a16="http://schemas.microsoft.com/office/drawing/2014/main" id="{6589FE98-C76F-3ED9-8AB2-A810BAC61631}"/>
+              </a:ext>
+            </a:extLst>
+          </p:cNvPr>
+          <p:cNvCxnSpPr>
+            <a:cxnSpLocks/>
+            <a:stCxn id="36" idx="3"/>
+            <a:endCxn id="2" idx="1"/>
+          </p:cNvCxnSpPr>
+          <p:nvPr/>
+        </p:nvCxnSpPr>
+        <p:spPr>
+          <a:xfrm flipV="1">
+            <a:off x="3024137" y="2899832"/>
+            <a:ext cx="283556" cy="627531"/>
+          </a:xfrm>
+          <a:prstGeom prst="curvedConnector3">
+            <a:avLst>
+              <a:gd name="adj1" fmla="val 50000"/>
+            </a:avLst>
+          </a:prstGeom>
+          <a:ln>
+            <a:solidFill>
+              <a:schemeClr val="accent5">
+                <a:lumMod val="75000"/>
+              </a:schemeClr>
+            </a:solidFill>
+          </a:ln>
+        </p:spPr>
+        <p:style>
+          <a:lnRef idx="1">
+            <a:schemeClr val="accent1"/>
+          </a:lnRef>
+          <a:fillRef idx="0">
+            <a:schemeClr val="accent1"/>
+          </a:fillRef>
+          <a:effectRef idx="0">
+            <a:schemeClr val="accent1"/>
+          </a:effectRef>
+          <a:fontRef idx="minor">
+            <a:schemeClr val="tx1"/>
+          </a:fontRef>
+        </p:style>
+      </p:cxnSp>
+      <p:sp>
+        <p:nvSpPr>
+          <p:cNvPr id="16" name="矩形: 圆角 15">
+            <a:extLst>
+              <a:ext uri="{FF2B5EF4-FFF2-40B4-BE49-F238E27FC236}">
+                <a16:creationId xmlns:a16="http://schemas.microsoft.com/office/drawing/2014/main" id="{C4F8D70D-848F-8E10-57D5-0246D0F22858}"/>
+              </a:ext>
+            </a:extLst>
+          </p:cNvPr>
+          <p:cNvSpPr/>
+          <p:nvPr/>
+        </p:nvSpPr>
+        <p:spPr>
+          <a:xfrm>
+            <a:off x="3307693" y="3347363"/>
+            <a:ext cx="1440000" cy="360000"/>
+          </a:xfrm>
+          <a:prstGeom prst="roundRect">
+            <a:avLst/>
+          </a:prstGeom>
+          <a:solidFill>
+            <a:srgbClr val="3DC1D3"/>
+          </a:solidFill>
+          <a:ln w="12700">
+            <a:noFill/>
+          </a:ln>
+        </p:spPr>
+        <p:style>
+          <a:lnRef idx="2">
+            <a:schemeClr val="accent1">
+              <a:shade val="15000"/>
+            </a:schemeClr>
+          </a:lnRef>
+          <a:fillRef idx="1">
+            <a:schemeClr val="accent1"/>
+          </a:fillRef>
+          <a:effectRef idx="0">
+            <a:schemeClr val="accent1"/>
+          </a:effectRef>
+          <a:fontRef idx="minor">
+            <a:schemeClr val="lt1"/>
+          </a:fontRef>
+        </p:style>
+        <p:txBody>
+          <a:bodyPr rtlCol="0" anchor="ctr"/>
+          <a:lstStyle/>
+          <a:p>
+            <a:pPr algn="ctr"/>
+            <a:r>
+              <a:rPr lang="en-US" altLang="zh-CN" sz="1200" dirty="0">
+                <a:latin typeface="Quicksand Light" panose="00000400000000000000" pitchFamily="2" charset="0"/>
+              </a:rPr>
+              <a:t>TCP</a:t>
+            </a:r>
+            <a:endParaRPr lang="zh-CN" altLang="en-US" sz="1200" dirty="0">
+              <a:latin typeface="Quicksand Light" panose="00000400000000000000" pitchFamily="2" charset="0"/>
             </a:endParaRPr>
           </a:p>
         </p:txBody>
       </p:sp>
       <p:sp>
         <p:nvSpPr>
-          <p:cNvPr id="13" name="文本框 12">
-            <a:extLst>
-              <a:ext uri="{FF2B5EF4-FFF2-40B4-BE49-F238E27FC236}">
-                <a16:creationId xmlns:a16="http://schemas.microsoft.com/office/drawing/2014/main" id="{2D5DC4C4-2CE4-FDE6-CB90-80F89118B614}"/>
-              </a:ext>
-            </a:extLst>
-          </p:cNvPr>
-          <p:cNvSpPr txBox="1"/>
+          <p:cNvPr id="19" name="矩形: 圆角 18">
+            <a:extLst>
+              <a:ext uri="{FF2B5EF4-FFF2-40B4-BE49-F238E27FC236}">
+                <a16:creationId xmlns:a16="http://schemas.microsoft.com/office/drawing/2014/main" id="{81530229-6710-AE17-7125-34E7C102D265}"/>
+              </a:ext>
+            </a:extLst>
+          </p:cNvPr>
+          <p:cNvSpPr/>
           <p:nvPr/>
         </p:nvSpPr>
         <p:spPr>
           <a:xfrm>
-            <a:off x="4506030" y="4991100"/>
-            <a:ext cx="2137124" cy="276999"/>
-          </a:xfrm>
-          <a:prstGeom prst="rect">
-            <a:avLst/>
-          </a:prstGeom>
-          <a:noFill/>
-        </p:spPr>
+            <a:off x="3307693" y="4665692"/>
+            <a:ext cx="1440000" cy="360000"/>
+          </a:xfrm>
+          <a:prstGeom prst="roundRect">
+            <a:avLst/>
+          </a:prstGeom>
+          <a:solidFill>
+            <a:srgbClr val="20BF6B"/>
+          </a:solidFill>
+          <a:ln w="12700">
+            <a:noFill/>
+          </a:ln>
+        </p:spPr>
+        <p:style>
+          <a:lnRef idx="2">
+            <a:schemeClr val="accent1">
+              <a:shade val="15000"/>
+            </a:schemeClr>
+          </a:lnRef>
+          <a:fillRef idx="1">
+            <a:schemeClr val="accent1"/>
+          </a:fillRef>
+          <a:effectRef idx="0">
+            <a:schemeClr val="accent1"/>
+          </a:effectRef>
+          <a:fontRef idx="minor">
+            <a:schemeClr val="lt1"/>
+          </a:fontRef>
+        </p:style>
         <p:txBody>
-          <a:bodyPr wrap="none" rtlCol="0">
-            <a:spAutoFit/>
-          </a:bodyPr>
+          <a:bodyPr rtlCol="0" anchor="ctr"/>
           <a:lstStyle/>
           <a:p>
-            <a:pPr algn="l"/>
+            <a:pPr algn="ctr"/>
             <a:r>
               <a:rPr lang="en-US" altLang="zh-CN" sz="1200" dirty="0">
-                <a:latin typeface="Courier New" panose="02070309020205020404" pitchFamily="49" charset="0"/>
-                <a:ea typeface="微软雅黑" panose="020B0503020204020204" pitchFamily="34" charset="-122"/>
-                <a:cs typeface="Courier New" panose="02070309020205020404" pitchFamily="49" charset="0"/>
+                <a:latin typeface="Quicksand Light" panose="00000400000000000000" pitchFamily="2" charset="0"/>
               </a:rPr>
-              <a:t>Ok, thank you. Alice.</a:t>
+              <a:t>UDP</a:t>
             </a:r>
             <a:endParaRPr lang="zh-CN" altLang="en-US" sz="1200" dirty="0">
-              <a:latin typeface="Courier New" panose="02070309020205020404" pitchFamily="49" charset="0"/>
-              <a:ea typeface="微软雅黑" panose="020B0503020204020204" pitchFamily="34" charset="-122"/>
-              <a:cs typeface="Courier New" panose="02070309020205020404" pitchFamily="49" charset="0"/>
+              <a:latin typeface="Quicksand Light" panose="00000400000000000000" pitchFamily="2" charset="0"/>
             </a:endParaRPr>
           </a:p>
         </p:txBody>
       </p:sp>
       <p:cxnSp>
         <p:nvCxnSpPr>
-          <p:cNvPr id="15" name="直接箭头连接符 14">
-            <a:extLst>
-              <a:ext uri="{FF2B5EF4-FFF2-40B4-BE49-F238E27FC236}">
-                <a16:creationId xmlns:a16="http://schemas.microsoft.com/office/drawing/2014/main" id="{32FF09AF-22D3-1EEF-0F0D-F8D9ECD231A4}"/>
+          <p:cNvPr id="22" name="连接符: 曲线 21">
+            <a:extLst>
+              <a:ext uri="{FF2B5EF4-FFF2-40B4-BE49-F238E27FC236}">
+                <a16:creationId xmlns:a16="http://schemas.microsoft.com/office/drawing/2014/main" id="{983C1AC8-3735-FBF8-1D52-F46340D06312}"/>
               </a:ext>
             </a:extLst>
           </p:cNvPr>
           <p:cNvCxnSpPr>
             <a:cxnSpLocks/>
+            <a:stCxn id="36" idx="3"/>
+            <a:endCxn id="19" idx="1"/>
           </p:cNvCxnSpPr>
           <p:nvPr/>
         </p:nvCxnSpPr>
         <p:spPr>
           <a:xfrm>
-            <a:off x="4057649" y="2515374"/>
-            <a:ext cx="2880000" cy="0"/>
-          </a:xfrm>
-          <a:prstGeom prst="straightConnector1">
-            <a:avLst/>
+            <a:off x="3024137" y="3527363"/>
+            <a:ext cx="283556" cy="1318329"/>
+          </a:xfrm>
+          <a:prstGeom prst="curvedConnector3">
+            <a:avLst>
+              <a:gd name="adj1" fmla="val 50000"/>
+            </a:avLst>
           </a:prstGeom>
           <a:ln>
             <a:solidFill>
-              <a:schemeClr val="tx1"/>
+              <a:srgbClr val="20BF6B"/>
             </a:solidFill>
-            <a:tailEnd type="triangle"/>
           </a:ln>
         </p:spPr>
         <p:style>
@@ -27708,31 +28932,31 @@
       </p:cxnSp>
       <p:cxnSp>
         <p:nvCxnSpPr>
-          <p:cNvPr id="16" name="直接箭头连接符 15">
-            <a:extLst>
-              <a:ext uri="{FF2B5EF4-FFF2-40B4-BE49-F238E27FC236}">
-                <a16:creationId xmlns:a16="http://schemas.microsoft.com/office/drawing/2014/main" id="{D3A9630C-36DC-3779-A1FB-26718B3A1CA9}"/>
+          <p:cNvPr id="28" name="直接连接符 27">
+            <a:extLst>
+              <a:ext uri="{FF2B5EF4-FFF2-40B4-BE49-F238E27FC236}">
+                <a16:creationId xmlns:a16="http://schemas.microsoft.com/office/drawing/2014/main" id="{BD7B110E-78A0-DA3F-A295-242686C8DE59}"/>
               </a:ext>
             </a:extLst>
           </p:cNvPr>
           <p:cNvCxnSpPr>
-            <a:cxnSpLocks/>
+            <a:stCxn id="16" idx="1"/>
+            <a:endCxn id="36" idx="3"/>
           </p:cNvCxnSpPr>
           <p:nvPr/>
         </p:nvCxnSpPr>
         <p:spPr>
-          <a:xfrm>
-            <a:off x="4057649" y="5268099"/>
-            <a:ext cx="2880000" cy="0"/>
-          </a:xfrm>
-          <a:prstGeom prst="straightConnector1">
+          <a:xfrm flipH="1">
+            <a:off x="3024137" y="3527363"/>
+            <a:ext cx="283556" cy="0"/>
+          </a:xfrm>
+          <a:prstGeom prst="line">
             <a:avLst/>
           </a:prstGeom>
           <a:ln>
             <a:solidFill>
-              <a:schemeClr val="tx1"/>
+              <a:srgbClr val="3CBFD1"/>
             </a:solidFill>
-            <a:tailEnd type="triangle"/>
           </a:ln>
         </p:spPr>
         <p:style>
@@ -27752,31 +28976,34 @@
       </p:cxnSp>
       <p:cxnSp>
         <p:nvCxnSpPr>
-          <p:cNvPr id="17" name="直接箭头连接符 16">
-            <a:extLst>
-              <a:ext uri="{FF2B5EF4-FFF2-40B4-BE49-F238E27FC236}">
-                <a16:creationId xmlns:a16="http://schemas.microsoft.com/office/drawing/2014/main" id="{2A8D5AF9-308A-50B4-85CD-E6F7CC8B17FA}"/>
+          <p:cNvPr id="29" name="连接符: 曲线 28">
+            <a:extLst>
+              <a:ext uri="{FF2B5EF4-FFF2-40B4-BE49-F238E27FC236}">
+                <a16:creationId xmlns:a16="http://schemas.microsoft.com/office/drawing/2014/main" id="{3CE98D71-068D-12E4-6351-5662457FF6EF}"/>
               </a:ext>
             </a:extLst>
           </p:cNvPr>
           <p:cNvCxnSpPr>
             <a:cxnSpLocks/>
+            <a:stCxn id="4" idx="1"/>
+            <a:endCxn id="16" idx="3"/>
           </p:cNvCxnSpPr>
           <p:nvPr/>
         </p:nvCxnSpPr>
         <p:spPr>
-          <a:xfrm flipH="1">
-            <a:off x="4057649" y="3891737"/>
-            <a:ext cx="2880000" cy="0"/>
-          </a:xfrm>
-          <a:prstGeom prst="straightConnector1">
-            <a:avLst/>
-          </a:prstGeom>
-          <a:ln>
+          <a:xfrm rot="10800000">
+            <a:off x="4747694" y="3527363"/>
+            <a:ext cx="283555" cy="215256"/>
+          </a:xfrm>
+          <a:prstGeom prst="curvedConnector3">
+            <a:avLst>
+              <a:gd name="adj1" fmla="val 50000"/>
+            </a:avLst>
+          </a:prstGeom>
+          <a:ln w="6350">
             <a:solidFill>
-              <a:schemeClr val="tx1"/>
+              <a:srgbClr val="3CBFD1"/>
             </a:solidFill>
-            <a:tailEnd type="triangle"/>
           </a:ln>
         </p:spPr>
         <p:style>
@@ -27796,239 +29023,86 @@
       </p:cxnSp>
       <p:sp>
         <p:nvSpPr>
-          <p:cNvPr id="18" name="文本框 17">
-            <a:extLst>
-              <a:ext uri="{FF2B5EF4-FFF2-40B4-BE49-F238E27FC236}">
-                <a16:creationId xmlns:a16="http://schemas.microsoft.com/office/drawing/2014/main" id="{45C08739-91CB-D562-5989-E9C9A2D2D7E1}"/>
-              </a:ext>
-            </a:extLst>
-          </p:cNvPr>
-          <p:cNvSpPr txBox="1"/>
+          <p:cNvPr id="6" name="矩形: 圆角 5">
+            <a:extLst>
+              <a:ext uri="{FF2B5EF4-FFF2-40B4-BE49-F238E27FC236}">
+                <a16:creationId xmlns:a16="http://schemas.microsoft.com/office/drawing/2014/main" id="{E26F0BAC-FA81-5F6F-B924-707A50D906C4}"/>
+              </a:ext>
+            </a:extLst>
+          </p:cNvPr>
+          <p:cNvSpPr/>
           <p:nvPr/>
         </p:nvSpPr>
         <p:spPr>
           <a:xfrm>
-            <a:off x="4708010" y="2515374"/>
-            <a:ext cx="1579278" cy="276999"/>
-          </a:xfrm>
-          <a:prstGeom prst="rect">
+            <a:off x="7102100" y="3562619"/>
+            <a:ext cx="1800000" cy="360000"/>
+          </a:xfrm>
+          <a:prstGeom prst="roundRect">
             <a:avLst/>
           </a:prstGeom>
           <a:noFill/>
-        </p:spPr>
+          <a:ln w="12700">
+            <a:noFill/>
+            <a:prstDash val="solid"/>
+          </a:ln>
+        </p:spPr>
+        <p:style>
+          <a:lnRef idx="2">
+            <a:schemeClr val="accent1">
+              <a:shade val="15000"/>
+            </a:schemeClr>
+          </a:lnRef>
+          <a:fillRef idx="1">
+            <a:schemeClr val="accent1"/>
+          </a:fillRef>
+          <a:effectRef idx="0">
+            <a:schemeClr val="accent1"/>
+          </a:effectRef>
+          <a:fontRef idx="minor">
+            <a:schemeClr val="lt1"/>
+          </a:fontRef>
+        </p:style>
         <p:txBody>
-          <a:bodyPr wrap="none" rtlCol="0">
-            <a:spAutoFit/>
-          </a:bodyPr>
+          <a:bodyPr rtlCol="0" anchor="ctr"/>
           <a:lstStyle/>
           <a:p>
-            <a:pPr algn="l"/>
-            <a:r>
-              <a:rPr lang="en-US" altLang="zh-CN" sz="1200" b="1" dirty="0">
-                <a:latin typeface="Courier New" panose="02070309020205020404" pitchFamily="49" charset="0"/>
-                <a:ea typeface="微软雅黑" panose="020B0503020204020204" pitchFamily="34" charset="-122"/>
-                <a:cs typeface="Courier New" panose="02070309020205020404" pitchFamily="49" charset="0"/>
-              </a:rPr>
-              <a:t>SYN =1, SEQ# 10</a:t>
-            </a:r>
-            <a:endParaRPr lang="zh-CN" altLang="en-US" sz="1200" b="1" dirty="0">
-              <a:latin typeface="Courier New" panose="02070309020205020404" pitchFamily="49" charset="0"/>
-              <a:ea typeface="微软雅黑" panose="020B0503020204020204" pitchFamily="34" charset="-122"/>
-              <a:cs typeface="Courier New" panose="02070309020205020404" pitchFamily="49" charset="0"/>
+            <a:endParaRPr lang="zh-CN" altLang="en-US" sz="1200" dirty="0">
+              <a:solidFill>
+                <a:sysClr val="windowText" lastClr="000000"/>
+              </a:solidFill>
+              <a:latin typeface="Quicksand Light" panose="00000400000000000000" pitchFamily="2" charset="0"/>
             </a:endParaRPr>
           </a:p>
         </p:txBody>
       </p:sp>
-      <p:sp>
-        <p:nvSpPr>
-          <p:cNvPr id="19" name="文本框 18">
-            <a:extLst>
-              <a:ext uri="{FF2B5EF4-FFF2-40B4-BE49-F238E27FC236}">
-                <a16:creationId xmlns:a16="http://schemas.microsoft.com/office/drawing/2014/main" id="{09C4F885-BE5F-6D59-AA52-9C5CABD19E92}"/>
-              </a:ext>
-            </a:extLst>
-          </p:cNvPr>
-          <p:cNvSpPr txBox="1"/>
-          <p:nvPr/>
-        </p:nvSpPr>
-        <p:spPr>
-          <a:xfrm>
-            <a:off x="4289626" y="3891737"/>
-            <a:ext cx="2416046" cy="276999"/>
-          </a:xfrm>
-          <a:prstGeom prst="rect">
-            <a:avLst/>
-          </a:prstGeom>
-          <a:noFill/>
-        </p:spPr>
-        <p:txBody>
-          <a:bodyPr wrap="none" rtlCol="0">
-            <a:spAutoFit/>
-          </a:bodyPr>
-          <a:lstStyle/>
-          <a:p>
-            <a:pPr algn="l"/>
-            <a:r>
-              <a:rPr lang="en-US" altLang="zh-CN" sz="1200" b="1" dirty="0">
-                <a:latin typeface="Courier New" panose="02070309020205020404" pitchFamily="49" charset="0"/>
-                <a:ea typeface="微软雅黑" panose="020B0503020204020204" pitchFamily="34" charset="-122"/>
-                <a:cs typeface="Courier New" panose="02070309020205020404" pitchFamily="49" charset="0"/>
-              </a:rPr>
-              <a:t>SYN =1, ACK = 1, ACK# 10</a:t>
-            </a:r>
-            <a:endParaRPr lang="zh-CN" altLang="en-US" sz="1200" b="1" dirty="0">
-              <a:latin typeface="Courier New" panose="02070309020205020404" pitchFamily="49" charset="0"/>
-              <a:ea typeface="微软雅黑" panose="020B0503020204020204" pitchFamily="34" charset="-122"/>
-              <a:cs typeface="Courier New" panose="02070309020205020404" pitchFamily="49" charset="0"/>
-            </a:endParaRPr>
-          </a:p>
-        </p:txBody>
-      </p:sp>
-      <p:sp>
-        <p:nvSpPr>
-          <p:cNvPr id="20" name="文本框 19">
-            <a:extLst>
-              <a:ext uri="{FF2B5EF4-FFF2-40B4-BE49-F238E27FC236}">
-                <a16:creationId xmlns:a16="http://schemas.microsoft.com/office/drawing/2014/main" id="{92CBE984-67D0-C6C5-9B64-118FE70B19C4}"/>
-              </a:ext>
-            </a:extLst>
-          </p:cNvPr>
-          <p:cNvSpPr txBox="1"/>
-          <p:nvPr/>
-        </p:nvSpPr>
-        <p:spPr>
-          <a:xfrm>
-            <a:off x="4661523" y="5268099"/>
-            <a:ext cx="1672253" cy="276999"/>
-          </a:xfrm>
-          <a:prstGeom prst="rect">
-            <a:avLst/>
-          </a:prstGeom>
-          <a:noFill/>
-        </p:spPr>
-        <p:txBody>
-          <a:bodyPr wrap="none" rtlCol="0">
-            <a:spAutoFit/>
-          </a:bodyPr>
-          <a:lstStyle/>
-          <a:p>
-            <a:pPr algn="l"/>
-            <a:r>
-              <a:rPr lang="en-US" altLang="zh-CN" sz="1200" b="1" dirty="0">
-                <a:latin typeface="Courier New" panose="02070309020205020404" pitchFamily="49" charset="0"/>
-                <a:ea typeface="微软雅黑" panose="020B0503020204020204" pitchFamily="34" charset="-122"/>
-                <a:cs typeface="Courier New" panose="02070309020205020404" pitchFamily="49" charset="0"/>
-              </a:rPr>
-              <a:t>ACK = 1, SEQ# 11</a:t>
-            </a:r>
-            <a:endParaRPr lang="zh-CN" altLang="en-US" sz="1200" b="1" dirty="0">
-              <a:latin typeface="Courier New" panose="02070309020205020404" pitchFamily="49" charset="0"/>
-              <a:ea typeface="微软雅黑" panose="020B0503020204020204" pitchFamily="34" charset="-122"/>
-              <a:cs typeface="Courier New" panose="02070309020205020404" pitchFamily="49" charset="0"/>
-            </a:endParaRPr>
-          </a:p>
-        </p:txBody>
-      </p:sp>
-      <p:pic>
-        <p:nvPicPr>
-          <p:cNvPr id="21" name="图片 20">
-            <a:extLst>
-              <a:ext uri="{FF2B5EF4-FFF2-40B4-BE49-F238E27FC236}">
-                <a16:creationId xmlns:a16="http://schemas.microsoft.com/office/drawing/2014/main" id="{6F333424-1B0A-FC44-A9BD-30232A0B4331}"/>
-              </a:ext>
-            </a:extLst>
-          </p:cNvPr>
-          <p:cNvPicPr>
-            <a:picLocks noChangeAspect="1"/>
-          </p:cNvPicPr>
-          <p:nvPr/>
-        </p:nvPicPr>
-        <p:blipFill>
-          <a:blip r:embed="rId2">
-            <a:extLst>
-              <a:ext uri="{28A0092B-C50C-407E-A947-70E740481C1C}">
-                <a14:useLocalDpi xmlns:a14="http://schemas.microsoft.com/office/drawing/2010/main" val="0"/>
-              </a:ext>
-            </a:extLst>
-          </a:blip>
-          <a:stretch>
-            <a:fillRect/>
-          </a:stretch>
-        </p:blipFill>
-        <p:spPr>
-          <a:xfrm>
-            <a:off x="3463542" y="887595"/>
-            <a:ext cx="720000" cy="854393"/>
-          </a:xfrm>
-          <a:prstGeom prst="rect">
-            <a:avLst/>
-          </a:prstGeom>
-        </p:spPr>
-      </p:pic>
-      <p:pic>
-        <p:nvPicPr>
-          <p:cNvPr id="22" name="图片 21">
-            <a:extLst>
-              <a:ext uri="{FF2B5EF4-FFF2-40B4-BE49-F238E27FC236}">
-                <a16:creationId xmlns:a16="http://schemas.microsoft.com/office/drawing/2014/main" id="{BA33F9E0-DA70-90DC-6252-77C04D78C2FF}"/>
-              </a:ext>
-            </a:extLst>
-          </p:cNvPr>
-          <p:cNvPicPr>
-            <a:picLocks noChangeAspect="1"/>
-          </p:cNvPicPr>
-          <p:nvPr/>
-        </p:nvPicPr>
-        <p:blipFill>
-          <a:blip r:embed="rId3">
-            <a:extLst>
-              <a:ext uri="{28A0092B-C50C-407E-A947-70E740481C1C}">
-                <a14:useLocalDpi xmlns:a14="http://schemas.microsoft.com/office/drawing/2010/main" val="0"/>
-              </a:ext>
-            </a:extLst>
-          </a:blip>
-          <a:stretch>
-            <a:fillRect/>
-          </a:stretch>
-        </p:blipFill>
-        <p:spPr>
-          <a:xfrm>
-            <a:off x="6910441" y="820363"/>
-            <a:ext cx="720000" cy="921625"/>
-          </a:xfrm>
-          <a:prstGeom prst="rect">
-            <a:avLst/>
-          </a:prstGeom>
-        </p:spPr>
-      </p:pic>
       <p:cxnSp>
         <p:nvCxnSpPr>
-          <p:cNvPr id="23" name="直接箭头连接符 22">
-            <a:extLst>
-              <a:ext uri="{FF2B5EF4-FFF2-40B4-BE49-F238E27FC236}">
-                <a16:creationId xmlns:a16="http://schemas.microsoft.com/office/drawing/2014/main" id="{D431E32C-59D1-0A8B-89EC-7EB38ADDC489}"/>
+          <p:cNvPr id="17" name="直接连接符 16">
+            <a:extLst>
+              <a:ext uri="{FF2B5EF4-FFF2-40B4-BE49-F238E27FC236}">
+                <a16:creationId xmlns:a16="http://schemas.microsoft.com/office/drawing/2014/main" id="{5469945C-7541-0506-CC16-F8088F979CF3}"/>
               </a:ext>
             </a:extLst>
           </p:cNvPr>
           <p:cNvCxnSpPr>
-            <a:cxnSpLocks/>
+            <a:stCxn id="19" idx="3"/>
+            <a:endCxn id="5" idx="1"/>
           </p:cNvCxnSpPr>
           <p:nvPr/>
         </p:nvCxnSpPr>
         <p:spPr>
           <a:xfrm>
-            <a:off x="4106991" y="1448574"/>
-            <a:ext cx="2880000" cy="0"/>
-          </a:xfrm>
-          <a:prstGeom prst="straightConnector1">
-            <a:avLst/>
-          </a:prstGeom>
-          <a:ln w="38100">
+            <a:off x="4747693" y="4845692"/>
+            <a:ext cx="283555" cy="0"/>
+          </a:xfrm>
+          <a:prstGeom prst="line">
+            <a:avLst/>
+          </a:prstGeom>
+          <a:ln>
             <a:solidFill>
-              <a:schemeClr val="tx1"/>
+              <a:srgbClr val="20BD6A"/>
             </a:solidFill>
-            <a:headEnd type="stealth"/>
-            <a:tailEnd type="triangle"/>
           </a:ln>
         </p:spPr>
         <p:style>
@@ -28046,55 +29120,10 @@
           </a:fontRef>
         </p:style>
       </p:cxnSp>
-      <p:sp>
-        <p:nvSpPr>
-          <p:cNvPr id="24" name="文本框 23">
-            <a:extLst>
-              <a:ext uri="{FF2B5EF4-FFF2-40B4-BE49-F238E27FC236}">
-                <a16:creationId xmlns:a16="http://schemas.microsoft.com/office/drawing/2014/main" id="{56729AAD-AAAB-E89F-E7EF-17595C5ED533}"/>
-              </a:ext>
-            </a:extLst>
-          </p:cNvPr>
-          <p:cNvSpPr txBox="1"/>
-          <p:nvPr/>
-        </p:nvSpPr>
-        <p:spPr>
-          <a:xfrm>
-            <a:off x="4571404" y="1171575"/>
-            <a:ext cx="1951175" cy="276999"/>
-          </a:xfrm>
-          <a:prstGeom prst="rect">
-            <a:avLst/>
-          </a:prstGeom>
-          <a:noFill/>
-        </p:spPr>
-        <p:txBody>
-          <a:bodyPr wrap="none" rtlCol="0">
-            <a:spAutoFit/>
-          </a:bodyPr>
-          <a:lstStyle/>
-          <a:p>
-            <a:pPr algn="l"/>
-            <a:r>
-              <a:rPr lang="en-US" altLang="zh-CN" sz="1200" dirty="0">
-                <a:latin typeface="Courier New" panose="02070309020205020404" pitchFamily="49" charset="0"/>
-                <a:ea typeface="微软雅黑" panose="020B0503020204020204" pitchFamily="34" charset="-122"/>
-                <a:cs typeface="Courier New" panose="02070309020205020404" pitchFamily="49" charset="0"/>
-              </a:rPr>
-              <a:t>Three-Way Handshake</a:t>
-            </a:r>
-            <a:endParaRPr lang="zh-CN" altLang="en-US" sz="1200" dirty="0">
-              <a:latin typeface="Courier New" panose="02070309020205020404" pitchFamily="49" charset="0"/>
-              <a:ea typeface="微软雅黑" panose="020B0503020204020204" pitchFamily="34" charset="-122"/>
-              <a:cs typeface="Courier New" panose="02070309020205020404" pitchFamily="49" charset="0"/>
-            </a:endParaRPr>
-          </a:p>
-        </p:txBody>
-      </p:sp>
     </p:spTree>
     <p:extLst>
       <p:ext uri="{BB962C8B-B14F-4D97-AF65-F5344CB8AC3E}">
-        <p14:creationId xmlns:p14="http://schemas.microsoft.com/office/powerpoint/2010/main" val="222786176"/>
+        <p14:creationId xmlns:p14="http://schemas.microsoft.com/office/powerpoint/2010/main" val="1275707856"/>
       </p:ext>
     </p:extLst>
   </p:cSld>
@@ -28121,6 +29150,66 @@
           <a:chExt cx="0" cy="0"/>
         </a:xfrm>
       </p:grpSpPr>
+      <p:pic>
+        <p:nvPicPr>
+          <p:cNvPr id="3" name="图片 2">
+            <a:extLst>
+              <a:ext uri="{FF2B5EF4-FFF2-40B4-BE49-F238E27FC236}">
+                <a16:creationId xmlns:a16="http://schemas.microsoft.com/office/drawing/2014/main" id="{7ECC09FE-D9D2-2E76-0948-E1F27A08CD34}"/>
+              </a:ext>
+            </a:extLst>
+          </p:cNvPr>
+          <p:cNvPicPr>
+            <a:picLocks noChangeAspect="1"/>
+          </p:cNvPicPr>
+          <p:nvPr/>
+        </p:nvPicPr>
+        <p:blipFill>
+          <a:blip r:embed="rId2"/>
+          <a:stretch>
+            <a:fillRect/>
+          </a:stretch>
+        </p:blipFill>
+        <p:spPr>
+          <a:xfrm>
+            <a:off x="5043340" y="1842866"/>
+            <a:ext cx="2105319" cy="3172268"/>
+          </a:xfrm>
+          <a:prstGeom prst="rect">
+            <a:avLst/>
+          </a:prstGeom>
+        </p:spPr>
+      </p:pic>
+    </p:spTree>
+    <p:extLst>
+      <p:ext uri="{BB962C8B-B14F-4D97-AF65-F5344CB8AC3E}">
+        <p14:creationId xmlns:p14="http://schemas.microsoft.com/office/powerpoint/2010/main" val="2672122669"/>
+      </p:ext>
+    </p:extLst>
+  </p:cSld>
+  <p:clrMapOvr>
+    <a:masterClrMapping/>
+  </p:clrMapOvr>
+</p:sld>
+</file>
+
+<file path=ppt/slides/slide31.xml><?xml version="1.0" encoding="utf-8"?>
+<p:sld xmlns:a="http://schemas.openxmlformats.org/drawingml/2006/main" xmlns:r="http://schemas.openxmlformats.org/officeDocument/2006/relationships" xmlns:p="http://schemas.openxmlformats.org/presentationml/2006/main">
+  <p:cSld>
+    <p:spTree>
+      <p:nvGrpSpPr>
+        <p:cNvPr id="1" name=""/>
+        <p:cNvGrpSpPr/>
+        <p:nvPr/>
+      </p:nvGrpSpPr>
+      <p:grpSpPr>
+        <a:xfrm>
+          <a:off x="0" y="0"/>
+          <a:ext cx="0" cy="0"/>
+          <a:chOff x="0" y="0"/>
+          <a:chExt cx="0" cy="0"/>
+        </a:xfrm>
+      </p:grpSpPr>
       <p:sp>
         <p:nvSpPr>
           <p:cNvPr id="2" name="矩形: 圆角 1">
@@ -28507,7 +29596,7 @@
 </p:sld>
 </file>
 
-<file path=ppt/slides/slide31.xml><?xml version="1.0" encoding="utf-8"?>
+<file path=ppt/slides/slide32.xml><?xml version="1.0" encoding="utf-8"?>
 <p:sld xmlns:a="http://schemas.openxmlformats.org/drawingml/2006/main" xmlns:r="http://schemas.openxmlformats.org/officeDocument/2006/relationships" xmlns:p="http://schemas.openxmlformats.org/presentationml/2006/main">
   <p:cSld>
     <p:spTree>
@@ -32476,6 +33565,776 @@
           <a:chExt cx="0" cy="0"/>
         </a:xfrm>
       </p:grpSpPr>
+      <p:cxnSp>
+        <p:nvCxnSpPr>
+          <p:cNvPr id="7" name="直接箭头连接符 6">
+            <a:extLst>
+              <a:ext uri="{FF2B5EF4-FFF2-40B4-BE49-F238E27FC236}">
+                <a16:creationId xmlns:a16="http://schemas.microsoft.com/office/drawing/2014/main" id="{C80FF363-BC0E-F513-0462-96F884DB1FDC}"/>
+              </a:ext>
+            </a:extLst>
+          </p:cNvPr>
+          <p:cNvCxnSpPr>
+            <a:cxnSpLocks/>
+          </p:cNvCxnSpPr>
+          <p:nvPr/>
+        </p:nvCxnSpPr>
+        <p:spPr>
+          <a:xfrm>
+            <a:off x="3851142" y="1691563"/>
+            <a:ext cx="0" cy="3966287"/>
+          </a:xfrm>
+          <a:prstGeom prst="straightConnector1">
+            <a:avLst/>
+          </a:prstGeom>
+          <a:ln w="12700">
+            <a:solidFill>
+              <a:schemeClr val="tx1"/>
+            </a:solidFill>
+            <a:tailEnd type="triangle"/>
+          </a:ln>
+        </p:spPr>
+        <p:style>
+          <a:lnRef idx="1">
+            <a:schemeClr val="accent1"/>
+          </a:lnRef>
+          <a:fillRef idx="0">
+            <a:schemeClr val="accent1"/>
+          </a:fillRef>
+          <a:effectRef idx="0">
+            <a:schemeClr val="accent1"/>
+          </a:effectRef>
+          <a:fontRef idx="minor">
+            <a:schemeClr val="tx1"/>
+          </a:fontRef>
+        </p:style>
+      </p:cxnSp>
+      <p:cxnSp>
+        <p:nvCxnSpPr>
+          <p:cNvPr id="8" name="直接箭头连接符 7">
+            <a:extLst>
+              <a:ext uri="{FF2B5EF4-FFF2-40B4-BE49-F238E27FC236}">
+                <a16:creationId xmlns:a16="http://schemas.microsoft.com/office/drawing/2014/main" id="{22E1B91C-93FA-1433-6508-4A43CD8D807B}"/>
+              </a:ext>
+            </a:extLst>
+          </p:cNvPr>
+          <p:cNvCxnSpPr>
+            <a:cxnSpLocks/>
+          </p:cNvCxnSpPr>
+          <p:nvPr/>
+        </p:nvCxnSpPr>
+        <p:spPr>
+          <a:xfrm>
+            <a:off x="7298041" y="1691563"/>
+            <a:ext cx="0" cy="3966287"/>
+          </a:xfrm>
+          <a:prstGeom prst="straightConnector1">
+            <a:avLst/>
+          </a:prstGeom>
+          <a:ln w="12700">
+            <a:solidFill>
+              <a:schemeClr val="tx1"/>
+            </a:solidFill>
+            <a:tailEnd type="triangle"/>
+          </a:ln>
+        </p:spPr>
+        <p:style>
+          <a:lnRef idx="1">
+            <a:schemeClr val="accent1"/>
+          </a:lnRef>
+          <a:fillRef idx="0">
+            <a:schemeClr val="accent1"/>
+          </a:fillRef>
+          <a:effectRef idx="0">
+            <a:schemeClr val="accent1"/>
+          </a:effectRef>
+          <a:fontRef idx="minor">
+            <a:schemeClr val="tx1"/>
+          </a:fontRef>
+        </p:style>
+      </p:cxnSp>
+      <p:sp>
+        <p:nvSpPr>
+          <p:cNvPr id="9" name="文本框 8">
+            <a:extLst>
+              <a:ext uri="{FF2B5EF4-FFF2-40B4-BE49-F238E27FC236}">
+                <a16:creationId xmlns:a16="http://schemas.microsoft.com/office/drawing/2014/main" id="{A3720D08-6F14-38E6-12AA-2F942A367B46}"/>
+              </a:ext>
+            </a:extLst>
+          </p:cNvPr>
+          <p:cNvSpPr txBox="1"/>
+          <p:nvPr/>
+        </p:nvSpPr>
+        <p:spPr>
+          <a:xfrm>
+            <a:off x="3387554" y="1885950"/>
+            <a:ext cx="463588" cy="276999"/>
+          </a:xfrm>
+          <a:prstGeom prst="rect">
+            <a:avLst/>
+          </a:prstGeom>
+          <a:noFill/>
+        </p:spPr>
+        <p:txBody>
+          <a:bodyPr wrap="none" rtlCol="0">
+            <a:spAutoFit/>
+          </a:bodyPr>
+          <a:lstStyle/>
+          <a:p>
+            <a:r>
+              <a:rPr lang="en-US" altLang="zh-CN" sz="1200" dirty="0">
+                <a:latin typeface="Courier New" panose="02070309020205020404" pitchFamily="49" charset="0"/>
+                <a:ea typeface="微软雅黑" panose="020B0503020204020204" pitchFamily="34" charset="-122"/>
+                <a:cs typeface="Courier New" panose="02070309020205020404" pitchFamily="49" charset="0"/>
+              </a:rPr>
+              <a:t>Bob</a:t>
+            </a:r>
+            <a:endParaRPr lang="zh-CN" altLang="en-US" sz="1200" dirty="0">
+              <a:latin typeface="Courier New" panose="02070309020205020404" pitchFamily="49" charset="0"/>
+              <a:ea typeface="微软雅黑" panose="020B0503020204020204" pitchFamily="34" charset="-122"/>
+              <a:cs typeface="Courier New" panose="02070309020205020404" pitchFamily="49" charset="0"/>
+            </a:endParaRPr>
+          </a:p>
+        </p:txBody>
+      </p:sp>
+      <p:sp>
+        <p:nvSpPr>
+          <p:cNvPr id="10" name="文本框 9">
+            <a:extLst>
+              <a:ext uri="{FF2B5EF4-FFF2-40B4-BE49-F238E27FC236}">
+                <a16:creationId xmlns:a16="http://schemas.microsoft.com/office/drawing/2014/main" id="{C2D2F0C1-4F48-4565-097F-21C3E7248276}"/>
+              </a:ext>
+            </a:extLst>
+          </p:cNvPr>
+          <p:cNvSpPr txBox="1"/>
+          <p:nvPr/>
+        </p:nvSpPr>
+        <p:spPr>
+          <a:xfrm>
+            <a:off x="7298041" y="1885950"/>
+            <a:ext cx="649537" cy="276999"/>
+          </a:xfrm>
+          <a:prstGeom prst="rect">
+            <a:avLst/>
+          </a:prstGeom>
+          <a:noFill/>
+        </p:spPr>
+        <p:txBody>
+          <a:bodyPr wrap="none" rtlCol="0">
+            <a:spAutoFit/>
+          </a:bodyPr>
+          <a:lstStyle/>
+          <a:p>
+            <a:r>
+              <a:rPr lang="en-US" altLang="zh-CN" sz="1200" dirty="0">
+                <a:latin typeface="Courier New" panose="02070309020205020404" pitchFamily="49" charset="0"/>
+                <a:ea typeface="微软雅黑" panose="020B0503020204020204" pitchFamily="34" charset="-122"/>
+                <a:cs typeface="Courier New" panose="02070309020205020404" pitchFamily="49" charset="0"/>
+              </a:rPr>
+              <a:t>Alice</a:t>
+            </a:r>
+            <a:endParaRPr lang="zh-CN" altLang="en-US" sz="1200" dirty="0">
+              <a:latin typeface="Courier New" panose="02070309020205020404" pitchFamily="49" charset="0"/>
+              <a:ea typeface="微软雅黑" panose="020B0503020204020204" pitchFamily="34" charset="-122"/>
+              <a:cs typeface="Courier New" panose="02070309020205020404" pitchFamily="49" charset="0"/>
+            </a:endParaRPr>
+          </a:p>
+        </p:txBody>
+      </p:sp>
+      <p:sp>
+        <p:nvSpPr>
+          <p:cNvPr id="11" name="文本框 10">
+            <a:extLst>
+              <a:ext uri="{FF2B5EF4-FFF2-40B4-BE49-F238E27FC236}">
+                <a16:creationId xmlns:a16="http://schemas.microsoft.com/office/drawing/2014/main" id="{2AB7995F-7501-3414-56E0-2CC9D159BB4D}"/>
+              </a:ext>
+            </a:extLst>
+          </p:cNvPr>
+          <p:cNvSpPr txBox="1"/>
+          <p:nvPr/>
+        </p:nvSpPr>
+        <p:spPr>
+          <a:xfrm>
+            <a:off x="3855211" y="2238375"/>
+            <a:ext cx="3438762" cy="276999"/>
+          </a:xfrm>
+          <a:prstGeom prst="rect">
+            <a:avLst/>
+          </a:prstGeom>
+          <a:noFill/>
+        </p:spPr>
+        <p:txBody>
+          <a:bodyPr wrap="none" rtlCol="0">
+            <a:spAutoFit/>
+          </a:bodyPr>
+          <a:lstStyle/>
+          <a:p>
+            <a:pPr algn="l"/>
+            <a:r>
+              <a:rPr lang="en-US" altLang="zh-CN" sz="1200" dirty="0">
+                <a:latin typeface="Courier New" panose="02070309020205020404" pitchFamily="49" charset="0"/>
+                <a:ea typeface="微软雅黑" panose="020B0503020204020204" pitchFamily="34" charset="-122"/>
+                <a:cs typeface="Courier New" panose="02070309020205020404" pitchFamily="49" charset="0"/>
+              </a:rPr>
+              <a:t>I would like to talk to you, Alice.</a:t>
+            </a:r>
+            <a:endParaRPr lang="zh-CN" altLang="en-US" sz="1200" dirty="0">
+              <a:latin typeface="Courier New" panose="02070309020205020404" pitchFamily="49" charset="0"/>
+              <a:ea typeface="微软雅黑" panose="020B0503020204020204" pitchFamily="34" charset="-122"/>
+              <a:cs typeface="Courier New" panose="02070309020205020404" pitchFamily="49" charset="0"/>
+            </a:endParaRPr>
+          </a:p>
+        </p:txBody>
+      </p:sp>
+      <p:sp>
+        <p:nvSpPr>
+          <p:cNvPr id="12" name="文本框 11">
+            <a:extLst>
+              <a:ext uri="{FF2B5EF4-FFF2-40B4-BE49-F238E27FC236}">
+                <a16:creationId xmlns:a16="http://schemas.microsoft.com/office/drawing/2014/main" id="{D90B4BF5-F870-456B-089B-598433C770CC}"/>
+              </a:ext>
+            </a:extLst>
+          </p:cNvPr>
+          <p:cNvSpPr txBox="1"/>
+          <p:nvPr/>
+        </p:nvSpPr>
+        <p:spPr>
+          <a:xfrm>
+            <a:off x="4552518" y="3614738"/>
+            <a:ext cx="2044149" cy="276999"/>
+          </a:xfrm>
+          <a:prstGeom prst="rect">
+            <a:avLst/>
+          </a:prstGeom>
+          <a:noFill/>
+        </p:spPr>
+        <p:txBody>
+          <a:bodyPr wrap="none" rtlCol="0">
+            <a:spAutoFit/>
+          </a:bodyPr>
+          <a:lstStyle/>
+          <a:p>
+            <a:pPr algn="l"/>
+            <a:r>
+              <a:rPr lang="en-US" altLang="zh-CN" sz="1200" dirty="0">
+                <a:latin typeface="Courier New" panose="02070309020205020404" pitchFamily="49" charset="0"/>
+                <a:ea typeface="微软雅黑" panose="020B0503020204020204" pitchFamily="34" charset="-122"/>
+                <a:cs typeface="Courier New" panose="02070309020205020404" pitchFamily="49" charset="0"/>
+              </a:rPr>
+              <a:t>Ok, let’s talk. Bob.</a:t>
+            </a:r>
+            <a:endParaRPr lang="zh-CN" altLang="en-US" sz="1200" dirty="0">
+              <a:latin typeface="Courier New" panose="02070309020205020404" pitchFamily="49" charset="0"/>
+              <a:ea typeface="微软雅黑" panose="020B0503020204020204" pitchFamily="34" charset="-122"/>
+              <a:cs typeface="Courier New" panose="02070309020205020404" pitchFamily="49" charset="0"/>
+            </a:endParaRPr>
+          </a:p>
+        </p:txBody>
+      </p:sp>
+      <p:sp>
+        <p:nvSpPr>
+          <p:cNvPr id="13" name="文本框 12">
+            <a:extLst>
+              <a:ext uri="{FF2B5EF4-FFF2-40B4-BE49-F238E27FC236}">
+                <a16:creationId xmlns:a16="http://schemas.microsoft.com/office/drawing/2014/main" id="{2D5DC4C4-2CE4-FDE6-CB90-80F89118B614}"/>
+              </a:ext>
+            </a:extLst>
+          </p:cNvPr>
+          <p:cNvSpPr txBox="1"/>
+          <p:nvPr/>
+        </p:nvSpPr>
+        <p:spPr>
+          <a:xfrm>
+            <a:off x="4506030" y="4991100"/>
+            <a:ext cx="2137124" cy="276999"/>
+          </a:xfrm>
+          <a:prstGeom prst="rect">
+            <a:avLst/>
+          </a:prstGeom>
+          <a:noFill/>
+        </p:spPr>
+        <p:txBody>
+          <a:bodyPr wrap="none" rtlCol="0">
+            <a:spAutoFit/>
+          </a:bodyPr>
+          <a:lstStyle/>
+          <a:p>
+            <a:pPr algn="l"/>
+            <a:r>
+              <a:rPr lang="en-US" altLang="zh-CN" sz="1200" dirty="0">
+                <a:latin typeface="Courier New" panose="02070309020205020404" pitchFamily="49" charset="0"/>
+                <a:ea typeface="微软雅黑" panose="020B0503020204020204" pitchFamily="34" charset="-122"/>
+                <a:cs typeface="Courier New" panose="02070309020205020404" pitchFamily="49" charset="0"/>
+              </a:rPr>
+              <a:t>Ok, thank you. Alice.</a:t>
+            </a:r>
+            <a:endParaRPr lang="zh-CN" altLang="en-US" sz="1200" dirty="0">
+              <a:latin typeface="Courier New" panose="02070309020205020404" pitchFamily="49" charset="0"/>
+              <a:ea typeface="微软雅黑" panose="020B0503020204020204" pitchFamily="34" charset="-122"/>
+              <a:cs typeface="Courier New" panose="02070309020205020404" pitchFamily="49" charset="0"/>
+            </a:endParaRPr>
+          </a:p>
+        </p:txBody>
+      </p:sp>
+      <p:cxnSp>
+        <p:nvCxnSpPr>
+          <p:cNvPr id="15" name="直接箭头连接符 14">
+            <a:extLst>
+              <a:ext uri="{FF2B5EF4-FFF2-40B4-BE49-F238E27FC236}">
+                <a16:creationId xmlns:a16="http://schemas.microsoft.com/office/drawing/2014/main" id="{32FF09AF-22D3-1EEF-0F0D-F8D9ECD231A4}"/>
+              </a:ext>
+            </a:extLst>
+          </p:cNvPr>
+          <p:cNvCxnSpPr>
+            <a:cxnSpLocks/>
+          </p:cNvCxnSpPr>
+          <p:nvPr/>
+        </p:nvCxnSpPr>
+        <p:spPr>
+          <a:xfrm>
+            <a:off x="4057649" y="2515374"/>
+            <a:ext cx="2880000" cy="0"/>
+          </a:xfrm>
+          <a:prstGeom prst="straightConnector1">
+            <a:avLst/>
+          </a:prstGeom>
+          <a:ln>
+            <a:solidFill>
+              <a:schemeClr val="tx1"/>
+            </a:solidFill>
+            <a:tailEnd type="triangle"/>
+          </a:ln>
+        </p:spPr>
+        <p:style>
+          <a:lnRef idx="1">
+            <a:schemeClr val="accent1"/>
+          </a:lnRef>
+          <a:fillRef idx="0">
+            <a:schemeClr val="accent1"/>
+          </a:fillRef>
+          <a:effectRef idx="0">
+            <a:schemeClr val="accent1"/>
+          </a:effectRef>
+          <a:fontRef idx="minor">
+            <a:schemeClr val="tx1"/>
+          </a:fontRef>
+        </p:style>
+      </p:cxnSp>
+      <p:cxnSp>
+        <p:nvCxnSpPr>
+          <p:cNvPr id="16" name="直接箭头连接符 15">
+            <a:extLst>
+              <a:ext uri="{FF2B5EF4-FFF2-40B4-BE49-F238E27FC236}">
+                <a16:creationId xmlns:a16="http://schemas.microsoft.com/office/drawing/2014/main" id="{D3A9630C-36DC-3779-A1FB-26718B3A1CA9}"/>
+              </a:ext>
+            </a:extLst>
+          </p:cNvPr>
+          <p:cNvCxnSpPr>
+            <a:cxnSpLocks/>
+          </p:cNvCxnSpPr>
+          <p:nvPr/>
+        </p:nvCxnSpPr>
+        <p:spPr>
+          <a:xfrm>
+            <a:off x="4057649" y="5268099"/>
+            <a:ext cx="2880000" cy="0"/>
+          </a:xfrm>
+          <a:prstGeom prst="straightConnector1">
+            <a:avLst/>
+          </a:prstGeom>
+          <a:ln>
+            <a:solidFill>
+              <a:schemeClr val="tx1"/>
+            </a:solidFill>
+            <a:tailEnd type="triangle"/>
+          </a:ln>
+        </p:spPr>
+        <p:style>
+          <a:lnRef idx="1">
+            <a:schemeClr val="accent1"/>
+          </a:lnRef>
+          <a:fillRef idx="0">
+            <a:schemeClr val="accent1"/>
+          </a:fillRef>
+          <a:effectRef idx="0">
+            <a:schemeClr val="accent1"/>
+          </a:effectRef>
+          <a:fontRef idx="minor">
+            <a:schemeClr val="tx1"/>
+          </a:fontRef>
+        </p:style>
+      </p:cxnSp>
+      <p:cxnSp>
+        <p:nvCxnSpPr>
+          <p:cNvPr id="17" name="直接箭头连接符 16">
+            <a:extLst>
+              <a:ext uri="{FF2B5EF4-FFF2-40B4-BE49-F238E27FC236}">
+                <a16:creationId xmlns:a16="http://schemas.microsoft.com/office/drawing/2014/main" id="{2A8D5AF9-308A-50B4-85CD-E6F7CC8B17FA}"/>
+              </a:ext>
+            </a:extLst>
+          </p:cNvPr>
+          <p:cNvCxnSpPr>
+            <a:cxnSpLocks/>
+          </p:cNvCxnSpPr>
+          <p:nvPr/>
+        </p:nvCxnSpPr>
+        <p:spPr>
+          <a:xfrm flipH="1">
+            <a:off x="4057649" y="3891737"/>
+            <a:ext cx="2880000" cy="0"/>
+          </a:xfrm>
+          <a:prstGeom prst="straightConnector1">
+            <a:avLst/>
+          </a:prstGeom>
+          <a:ln>
+            <a:solidFill>
+              <a:schemeClr val="tx1"/>
+            </a:solidFill>
+            <a:tailEnd type="triangle"/>
+          </a:ln>
+        </p:spPr>
+        <p:style>
+          <a:lnRef idx="1">
+            <a:schemeClr val="accent1"/>
+          </a:lnRef>
+          <a:fillRef idx="0">
+            <a:schemeClr val="accent1"/>
+          </a:fillRef>
+          <a:effectRef idx="0">
+            <a:schemeClr val="accent1"/>
+          </a:effectRef>
+          <a:fontRef idx="minor">
+            <a:schemeClr val="tx1"/>
+          </a:fontRef>
+        </p:style>
+      </p:cxnSp>
+      <p:sp>
+        <p:nvSpPr>
+          <p:cNvPr id="18" name="文本框 17">
+            <a:extLst>
+              <a:ext uri="{FF2B5EF4-FFF2-40B4-BE49-F238E27FC236}">
+                <a16:creationId xmlns:a16="http://schemas.microsoft.com/office/drawing/2014/main" id="{45C08739-91CB-D562-5989-E9C9A2D2D7E1}"/>
+              </a:ext>
+            </a:extLst>
+          </p:cNvPr>
+          <p:cNvSpPr txBox="1"/>
+          <p:nvPr/>
+        </p:nvSpPr>
+        <p:spPr>
+          <a:xfrm>
+            <a:off x="4708010" y="2515374"/>
+            <a:ext cx="1579278" cy="276999"/>
+          </a:xfrm>
+          <a:prstGeom prst="rect">
+            <a:avLst/>
+          </a:prstGeom>
+          <a:noFill/>
+        </p:spPr>
+        <p:txBody>
+          <a:bodyPr wrap="none" rtlCol="0">
+            <a:spAutoFit/>
+          </a:bodyPr>
+          <a:lstStyle/>
+          <a:p>
+            <a:pPr algn="l"/>
+            <a:r>
+              <a:rPr lang="en-US" altLang="zh-CN" sz="1200" b="1" dirty="0">
+                <a:latin typeface="Courier New" panose="02070309020205020404" pitchFamily="49" charset="0"/>
+                <a:ea typeface="微软雅黑" panose="020B0503020204020204" pitchFamily="34" charset="-122"/>
+                <a:cs typeface="Courier New" panose="02070309020205020404" pitchFamily="49" charset="0"/>
+              </a:rPr>
+              <a:t>SYN =1, SEQ# 10</a:t>
+            </a:r>
+            <a:endParaRPr lang="zh-CN" altLang="en-US" sz="1200" b="1" dirty="0">
+              <a:latin typeface="Courier New" panose="02070309020205020404" pitchFamily="49" charset="0"/>
+              <a:ea typeface="微软雅黑" panose="020B0503020204020204" pitchFamily="34" charset="-122"/>
+              <a:cs typeface="Courier New" panose="02070309020205020404" pitchFamily="49" charset="0"/>
+            </a:endParaRPr>
+          </a:p>
+        </p:txBody>
+      </p:sp>
+      <p:sp>
+        <p:nvSpPr>
+          <p:cNvPr id="19" name="文本框 18">
+            <a:extLst>
+              <a:ext uri="{FF2B5EF4-FFF2-40B4-BE49-F238E27FC236}">
+                <a16:creationId xmlns:a16="http://schemas.microsoft.com/office/drawing/2014/main" id="{09C4F885-BE5F-6D59-AA52-9C5CABD19E92}"/>
+              </a:ext>
+            </a:extLst>
+          </p:cNvPr>
+          <p:cNvSpPr txBox="1"/>
+          <p:nvPr/>
+        </p:nvSpPr>
+        <p:spPr>
+          <a:xfrm>
+            <a:off x="4289626" y="3891737"/>
+            <a:ext cx="2416046" cy="276999"/>
+          </a:xfrm>
+          <a:prstGeom prst="rect">
+            <a:avLst/>
+          </a:prstGeom>
+          <a:noFill/>
+        </p:spPr>
+        <p:txBody>
+          <a:bodyPr wrap="none" rtlCol="0">
+            <a:spAutoFit/>
+          </a:bodyPr>
+          <a:lstStyle/>
+          <a:p>
+            <a:pPr algn="l"/>
+            <a:r>
+              <a:rPr lang="en-US" altLang="zh-CN" sz="1200" b="1" dirty="0">
+                <a:latin typeface="Courier New" panose="02070309020205020404" pitchFamily="49" charset="0"/>
+                <a:ea typeface="微软雅黑" panose="020B0503020204020204" pitchFamily="34" charset="-122"/>
+                <a:cs typeface="Courier New" panose="02070309020205020404" pitchFamily="49" charset="0"/>
+              </a:rPr>
+              <a:t>SYN =1, ACK = 1, ACK# 10</a:t>
+            </a:r>
+            <a:endParaRPr lang="zh-CN" altLang="en-US" sz="1200" b="1" dirty="0">
+              <a:latin typeface="Courier New" panose="02070309020205020404" pitchFamily="49" charset="0"/>
+              <a:ea typeface="微软雅黑" panose="020B0503020204020204" pitchFamily="34" charset="-122"/>
+              <a:cs typeface="Courier New" panose="02070309020205020404" pitchFamily="49" charset="0"/>
+            </a:endParaRPr>
+          </a:p>
+        </p:txBody>
+      </p:sp>
+      <p:sp>
+        <p:nvSpPr>
+          <p:cNvPr id="20" name="文本框 19">
+            <a:extLst>
+              <a:ext uri="{FF2B5EF4-FFF2-40B4-BE49-F238E27FC236}">
+                <a16:creationId xmlns:a16="http://schemas.microsoft.com/office/drawing/2014/main" id="{92CBE984-67D0-C6C5-9B64-118FE70B19C4}"/>
+              </a:ext>
+            </a:extLst>
+          </p:cNvPr>
+          <p:cNvSpPr txBox="1"/>
+          <p:nvPr/>
+        </p:nvSpPr>
+        <p:spPr>
+          <a:xfrm>
+            <a:off x="4661523" y="5268099"/>
+            <a:ext cx="1672253" cy="276999"/>
+          </a:xfrm>
+          <a:prstGeom prst="rect">
+            <a:avLst/>
+          </a:prstGeom>
+          <a:noFill/>
+        </p:spPr>
+        <p:txBody>
+          <a:bodyPr wrap="none" rtlCol="0">
+            <a:spAutoFit/>
+          </a:bodyPr>
+          <a:lstStyle/>
+          <a:p>
+            <a:pPr algn="l"/>
+            <a:r>
+              <a:rPr lang="en-US" altLang="zh-CN" sz="1200" b="1" dirty="0">
+                <a:latin typeface="Courier New" panose="02070309020205020404" pitchFamily="49" charset="0"/>
+                <a:ea typeface="微软雅黑" panose="020B0503020204020204" pitchFamily="34" charset="-122"/>
+                <a:cs typeface="Courier New" panose="02070309020205020404" pitchFamily="49" charset="0"/>
+              </a:rPr>
+              <a:t>ACK = 1, SEQ# 11</a:t>
+            </a:r>
+            <a:endParaRPr lang="zh-CN" altLang="en-US" sz="1200" b="1" dirty="0">
+              <a:latin typeface="Courier New" panose="02070309020205020404" pitchFamily="49" charset="0"/>
+              <a:ea typeface="微软雅黑" panose="020B0503020204020204" pitchFamily="34" charset="-122"/>
+              <a:cs typeface="Courier New" panose="02070309020205020404" pitchFamily="49" charset="0"/>
+            </a:endParaRPr>
+          </a:p>
+        </p:txBody>
+      </p:sp>
+      <p:pic>
+        <p:nvPicPr>
+          <p:cNvPr id="21" name="图片 20">
+            <a:extLst>
+              <a:ext uri="{FF2B5EF4-FFF2-40B4-BE49-F238E27FC236}">
+                <a16:creationId xmlns:a16="http://schemas.microsoft.com/office/drawing/2014/main" id="{6F333424-1B0A-FC44-A9BD-30232A0B4331}"/>
+              </a:ext>
+            </a:extLst>
+          </p:cNvPr>
+          <p:cNvPicPr>
+            <a:picLocks noChangeAspect="1"/>
+          </p:cNvPicPr>
+          <p:nvPr/>
+        </p:nvPicPr>
+        <p:blipFill>
+          <a:blip r:embed="rId2">
+            <a:extLst>
+              <a:ext uri="{28A0092B-C50C-407E-A947-70E740481C1C}">
+                <a14:useLocalDpi xmlns:a14="http://schemas.microsoft.com/office/drawing/2010/main" val="0"/>
+              </a:ext>
+            </a:extLst>
+          </a:blip>
+          <a:stretch>
+            <a:fillRect/>
+          </a:stretch>
+        </p:blipFill>
+        <p:spPr>
+          <a:xfrm>
+            <a:off x="3463542" y="887595"/>
+            <a:ext cx="720000" cy="854393"/>
+          </a:xfrm>
+          <a:prstGeom prst="rect">
+            <a:avLst/>
+          </a:prstGeom>
+        </p:spPr>
+      </p:pic>
+      <p:pic>
+        <p:nvPicPr>
+          <p:cNvPr id="22" name="图片 21">
+            <a:extLst>
+              <a:ext uri="{FF2B5EF4-FFF2-40B4-BE49-F238E27FC236}">
+                <a16:creationId xmlns:a16="http://schemas.microsoft.com/office/drawing/2014/main" id="{BA33F9E0-DA70-90DC-6252-77C04D78C2FF}"/>
+              </a:ext>
+            </a:extLst>
+          </p:cNvPr>
+          <p:cNvPicPr>
+            <a:picLocks noChangeAspect="1"/>
+          </p:cNvPicPr>
+          <p:nvPr/>
+        </p:nvPicPr>
+        <p:blipFill>
+          <a:blip r:embed="rId3">
+            <a:extLst>
+              <a:ext uri="{28A0092B-C50C-407E-A947-70E740481C1C}">
+                <a14:useLocalDpi xmlns:a14="http://schemas.microsoft.com/office/drawing/2010/main" val="0"/>
+              </a:ext>
+            </a:extLst>
+          </a:blip>
+          <a:stretch>
+            <a:fillRect/>
+          </a:stretch>
+        </p:blipFill>
+        <p:spPr>
+          <a:xfrm>
+            <a:off x="6910441" y="820363"/>
+            <a:ext cx="720000" cy="921625"/>
+          </a:xfrm>
+          <a:prstGeom prst="rect">
+            <a:avLst/>
+          </a:prstGeom>
+        </p:spPr>
+      </p:pic>
+      <p:cxnSp>
+        <p:nvCxnSpPr>
+          <p:cNvPr id="23" name="直接箭头连接符 22">
+            <a:extLst>
+              <a:ext uri="{FF2B5EF4-FFF2-40B4-BE49-F238E27FC236}">
+                <a16:creationId xmlns:a16="http://schemas.microsoft.com/office/drawing/2014/main" id="{D431E32C-59D1-0A8B-89EC-7EB38ADDC489}"/>
+              </a:ext>
+            </a:extLst>
+          </p:cNvPr>
+          <p:cNvCxnSpPr>
+            <a:cxnSpLocks/>
+          </p:cNvCxnSpPr>
+          <p:nvPr/>
+        </p:nvCxnSpPr>
+        <p:spPr>
+          <a:xfrm>
+            <a:off x="4106991" y="1448574"/>
+            <a:ext cx="2880000" cy="0"/>
+          </a:xfrm>
+          <a:prstGeom prst="straightConnector1">
+            <a:avLst/>
+          </a:prstGeom>
+          <a:ln w="38100">
+            <a:solidFill>
+              <a:schemeClr val="tx1"/>
+            </a:solidFill>
+            <a:headEnd type="stealth"/>
+            <a:tailEnd type="triangle"/>
+          </a:ln>
+        </p:spPr>
+        <p:style>
+          <a:lnRef idx="1">
+            <a:schemeClr val="accent1"/>
+          </a:lnRef>
+          <a:fillRef idx="0">
+            <a:schemeClr val="accent1"/>
+          </a:fillRef>
+          <a:effectRef idx="0">
+            <a:schemeClr val="accent1"/>
+          </a:effectRef>
+          <a:fontRef idx="minor">
+            <a:schemeClr val="tx1"/>
+          </a:fontRef>
+        </p:style>
+      </p:cxnSp>
+      <p:sp>
+        <p:nvSpPr>
+          <p:cNvPr id="24" name="文本框 23">
+            <a:extLst>
+              <a:ext uri="{FF2B5EF4-FFF2-40B4-BE49-F238E27FC236}">
+                <a16:creationId xmlns:a16="http://schemas.microsoft.com/office/drawing/2014/main" id="{56729AAD-AAAB-E89F-E7EF-17595C5ED533}"/>
+              </a:ext>
+            </a:extLst>
+          </p:cNvPr>
+          <p:cNvSpPr txBox="1"/>
+          <p:nvPr/>
+        </p:nvSpPr>
+        <p:spPr>
+          <a:xfrm>
+            <a:off x="4571404" y="1171575"/>
+            <a:ext cx="1951175" cy="276999"/>
+          </a:xfrm>
+          <a:prstGeom prst="rect">
+            <a:avLst/>
+          </a:prstGeom>
+          <a:noFill/>
+        </p:spPr>
+        <p:txBody>
+          <a:bodyPr wrap="none" rtlCol="0">
+            <a:spAutoFit/>
+          </a:bodyPr>
+          <a:lstStyle/>
+          <a:p>
+            <a:pPr algn="l"/>
+            <a:r>
+              <a:rPr lang="en-US" altLang="zh-CN" sz="1200" dirty="0">
+                <a:latin typeface="Courier New" panose="02070309020205020404" pitchFamily="49" charset="0"/>
+                <a:ea typeface="微软雅黑" panose="020B0503020204020204" pitchFamily="34" charset="-122"/>
+                <a:cs typeface="Courier New" panose="02070309020205020404" pitchFamily="49" charset="0"/>
+              </a:rPr>
+              <a:t>Three-Way Handshake</a:t>
+            </a:r>
+            <a:endParaRPr lang="zh-CN" altLang="en-US" sz="1200" dirty="0">
+              <a:latin typeface="Courier New" panose="02070309020205020404" pitchFamily="49" charset="0"/>
+              <a:ea typeface="微软雅黑" panose="020B0503020204020204" pitchFamily="34" charset="-122"/>
+              <a:cs typeface="Courier New" panose="02070309020205020404" pitchFamily="49" charset="0"/>
+            </a:endParaRPr>
+          </a:p>
+        </p:txBody>
+      </p:sp>
+    </p:spTree>
+    <p:extLst>
+      <p:ext uri="{BB962C8B-B14F-4D97-AF65-F5344CB8AC3E}">
+        <p14:creationId xmlns:p14="http://schemas.microsoft.com/office/powerpoint/2010/main" val="222786176"/>
+      </p:ext>
+    </p:extLst>
+  </p:cSld>
+  <p:clrMapOvr>
+    <a:masterClrMapping/>
+  </p:clrMapOvr>
+</p:sld>
+</file>
+
+<file path=ppt/slides/slide5.xml><?xml version="1.0" encoding="utf-8"?>
+<p:sld xmlns:a="http://schemas.openxmlformats.org/drawingml/2006/main" xmlns:r="http://schemas.openxmlformats.org/officeDocument/2006/relationships" xmlns:p="http://schemas.openxmlformats.org/presentationml/2006/main">
+  <p:cSld>
+    <p:spTree>
+      <p:nvGrpSpPr>
+        <p:cNvPr id="1" name=""/>
+        <p:cNvGrpSpPr/>
+        <p:nvPr/>
+      </p:nvGrpSpPr>
+      <p:grpSpPr>
+        <a:xfrm>
+          <a:off x="0" y="0"/>
+          <a:ext cx="0" cy="0"/>
+          <a:chOff x="0" y="0"/>
+          <a:chExt cx="0" cy="0"/>
+        </a:xfrm>
+      </p:grpSpPr>
       <p:sp>
         <p:nvSpPr>
           <p:cNvPr id="3" name="矩形 2">
@@ -36037,7 +37896,7 @@
 </p:sld>
 </file>
 
-<file path=ppt/slides/slide5.xml><?xml version="1.0" encoding="utf-8"?>
+<file path=ppt/slides/slide6.xml><?xml version="1.0" encoding="utf-8"?>
 <p:sld xmlns:a="http://schemas.openxmlformats.org/drawingml/2006/main" xmlns:r="http://schemas.openxmlformats.org/officeDocument/2006/relationships" xmlns:p="http://schemas.openxmlformats.org/presentationml/2006/main">
   <p:cSld>
     <p:spTree>
@@ -37227,7 +39086,7 @@
 </p:sld>
 </file>
 
-<file path=ppt/slides/slide6.xml><?xml version="1.0" encoding="utf-8"?>
+<file path=ppt/slides/slide7.xml><?xml version="1.0" encoding="utf-8"?>
 <p:sld xmlns:a="http://schemas.openxmlformats.org/drawingml/2006/main" xmlns:r="http://schemas.openxmlformats.org/officeDocument/2006/relationships" xmlns:p="http://schemas.openxmlformats.org/presentationml/2006/main">
   <p:cSld>
     <p:spTree>
@@ -40436,7 +42295,7 @@
 </p:sld>
 </file>
 
-<file path=ppt/slides/slide7.xml><?xml version="1.0" encoding="utf-8"?>
+<file path=ppt/slides/slide8.xml><?xml version="1.0" encoding="utf-8"?>
 <p:sld xmlns:a="http://schemas.openxmlformats.org/drawingml/2006/main" xmlns:r="http://schemas.openxmlformats.org/officeDocument/2006/relationships" xmlns:p="http://schemas.openxmlformats.org/presentationml/2006/main">
   <p:cSld>
     <p:spTree>
@@ -42614,7 +44473,7 @@
 </p:sld>
 </file>
 
-<file path=ppt/slides/slide8.xml><?xml version="1.0" encoding="utf-8"?>
+<file path=ppt/slides/slide9.xml><?xml version="1.0" encoding="utf-8"?>
 <p:sld xmlns:a="http://schemas.openxmlformats.org/drawingml/2006/main" xmlns:r="http://schemas.openxmlformats.org/officeDocument/2006/relationships" xmlns:p="http://schemas.openxmlformats.org/presentationml/2006/main">
   <p:cSld>
     <p:spTree>
@@ -43550,1735 +45409,6 @@
     <p:extLst>
       <p:ext uri="{BB962C8B-B14F-4D97-AF65-F5344CB8AC3E}">
         <p14:creationId xmlns:p14="http://schemas.microsoft.com/office/powerpoint/2010/main" val="1414077195"/>
-      </p:ext>
-    </p:extLst>
-  </p:cSld>
-  <p:clrMapOvr>
-    <a:masterClrMapping/>
-  </p:clrMapOvr>
-</p:sld>
-</file>
-
-<file path=ppt/slides/slide9.xml><?xml version="1.0" encoding="utf-8"?>
-<p:sld xmlns:a="http://schemas.openxmlformats.org/drawingml/2006/main" xmlns:r="http://schemas.openxmlformats.org/officeDocument/2006/relationships" xmlns:p="http://schemas.openxmlformats.org/presentationml/2006/main">
-  <p:cSld>
-    <p:spTree>
-      <p:nvGrpSpPr>
-        <p:cNvPr id="1" name="">
-          <a:extLst>
-            <a:ext uri="{FF2B5EF4-FFF2-40B4-BE49-F238E27FC236}">
-              <a16:creationId xmlns:a16="http://schemas.microsoft.com/office/drawing/2014/main" id="{18E2CAE3-A1AC-3F4E-935C-0F5B86F0EE15}"/>
-            </a:ext>
-          </a:extLst>
-        </p:cNvPr>
-        <p:cNvGrpSpPr/>
-        <p:nvPr/>
-      </p:nvGrpSpPr>
-      <p:grpSpPr>
-        <a:xfrm>
-          <a:off x="0" y="0"/>
-          <a:ext cx="0" cy="0"/>
-          <a:chOff x="0" y="0"/>
-          <a:chExt cx="0" cy="0"/>
-        </a:xfrm>
-      </p:grpSpPr>
-      <p:sp>
-        <p:nvSpPr>
-          <p:cNvPr id="3" name="矩形: 圆角 2">
-            <a:extLst>
-              <a:ext uri="{FF2B5EF4-FFF2-40B4-BE49-F238E27FC236}">
-                <a16:creationId xmlns:a16="http://schemas.microsoft.com/office/drawing/2014/main" id="{3F6BEB13-BC5C-76A7-70B4-5704F9D6A0AC}"/>
-              </a:ext>
-            </a:extLst>
-          </p:cNvPr>
-          <p:cNvSpPr/>
-          <p:nvPr/>
-        </p:nvSpPr>
-        <p:spPr>
-          <a:xfrm>
-            <a:off x="3927709" y="3694457"/>
-            <a:ext cx="936000" cy="216000"/>
-          </a:xfrm>
-          <a:prstGeom prst="roundRect">
-            <a:avLst/>
-          </a:prstGeom>
-          <a:solidFill>
-            <a:srgbClr val="335BA3">
-              <a:alpha val="89804"/>
-            </a:srgbClr>
-          </a:solidFill>
-          <a:ln w="12700">
-            <a:noFill/>
-          </a:ln>
-        </p:spPr>
-        <p:style>
-          <a:lnRef idx="2">
-            <a:schemeClr val="accent1">
-              <a:shade val="15000"/>
-            </a:schemeClr>
-          </a:lnRef>
-          <a:fillRef idx="1">
-            <a:schemeClr val="accent1"/>
-          </a:fillRef>
-          <a:effectRef idx="0">
-            <a:schemeClr val="accent1"/>
-          </a:effectRef>
-          <a:fontRef idx="minor">
-            <a:schemeClr val="lt1"/>
-          </a:fontRef>
-        </p:style>
-        <p:txBody>
-          <a:bodyPr rtlCol="0" anchor="ctr"/>
-          <a:lstStyle/>
-          <a:p>
-            <a:pPr algn="ctr"/>
-            <a:r>
-              <a:rPr lang="en-US" altLang="zh-CN" sz="800">
-                <a:latin typeface="Quicksand" panose="00000500000000000000" pitchFamily="2" charset="0"/>
-              </a:rPr>
-              <a:t>cartsView.vue</a:t>
-            </a:r>
-            <a:endParaRPr lang="zh-CN" altLang="en-US" sz="800">
-              <a:latin typeface="Quicksand" panose="00000500000000000000" pitchFamily="2" charset="0"/>
-            </a:endParaRPr>
-          </a:p>
-        </p:txBody>
-      </p:sp>
-      <p:sp>
-        <p:nvSpPr>
-          <p:cNvPr id="4" name="矩形: 圆角 3">
-            <a:extLst>
-              <a:ext uri="{FF2B5EF4-FFF2-40B4-BE49-F238E27FC236}">
-                <a16:creationId xmlns:a16="http://schemas.microsoft.com/office/drawing/2014/main" id="{A865B1BF-2668-EBE3-9A2F-76B4ADFC7BD3}"/>
-              </a:ext>
-            </a:extLst>
-          </p:cNvPr>
-          <p:cNvSpPr/>
-          <p:nvPr/>
-        </p:nvSpPr>
-        <p:spPr>
-          <a:xfrm>
-            <a:off x="3927709" y="2237109"/>
-            <a:ext cx="936000" cy="216000"/>
-          </a:xfrm>
-          <a:prstGeom prst="roundRect">
-            <a:avLst/>
-          </a:prstGeom>
-          <a:solidFill>
-            <a:srgbClr val="00BC7B">
-              <a:alpha val="89804"/>
-            </a:srgbClr>
-          </a:solidFill>
-          <a:ln w="12700">
-            <a:noFill/>
-          </a:ln>
-        </p:spPr>
-        <p:style>
-          <a:lnRef idx="2">
-            <a:schemeClr val="accent1">
-              <a:shade val="15000"/>
-            </a:schemeClr>
-          </a:lnRef>
-          <a:fillRef idx="1">
-            <a:schemeClr val="accent1"/>
-          </a:fillRef>
-          <a:effectRef idx="0">
-            <a:schemeClr val="accent1"/>
-          </a:effectRef>
-          <a:fontRef idx="minor">
-            <a:schemeClr val="lt1"/>
-          </a:fontRef>
-        </p:style>
-        <p:txBody>
-          <a:bodyPr rtlCol="0" anchor="ctr"/>
-          <a:lstStyle/>
-          <a:p>
-            <a:pPr algn="ctr"/>
-            <a:r>
-              <a:rPr lang="en-US" altLang="zh-CN" sz="800">
-                <a:latin typeface="Quicksand" panose="00000500000000000000" pitchFamily="2" charset="0"/>
-              </a:rPr>
-              <a:t>detailsView.vue</a:t>
-            </a:r>
-            <a:endParaRPr lang="zh-CN" altLang="en-US" sz="800">
-              <a:latin typeface="Quicksand" panose="00000500000000000000" pitchFamily="2" charset="0"/>
-            </a:endParaRPr>
-          </a:p>
-        </p:txBody>
-      </p:sp>
-      <p:sp>
-        <p:nvSpPr>
-          <p:cNvPr id="7" name="矩形: 圆角 6">
-            <a:extLst>
-              <a:ext uri="{FF2B5EF4-FFF2-40B4-BE49-F238E27FC236}">
-                <a16:creationId xmlns:a16="http://schemas.microsoft.com/office/drawing/2014/main" id="{CF1F7419-7D34-C865-9FD3-CEF01F2784E0}"/>
-              </a:ext>
-            </a:extLst>
-          </p:cNvPr>
-          <p:cNvSpPr/>
-          <p:nvPr/>
-        </p:nvSpPr>
-        <p:spPr>
-          <a:xfrm>
-            <a:off x="4988680" y="2965783"/>
-            <a:ext cx="900000" cy="216000"/>
-          </a:xfrm>
-          <a:prstGeom prst="roundRect">
-            <a:avLst/>
-          </a:prstGeom>
-          <a:solidFill>
-            <a:srgbClr val="F9423A">
-              <a:alpha val="89804"/>
-            </a:srgbClr>
-          </a:solidFill>
-          <a:ln w="12700">
-            <a:noFill/>
-          </a:ln>
-        </p:spPr>
-        <p:style>
-          <a:lnRef idx="2">
-            <a:schemeClr val="accent1">
-              <a:shade val="15000"/>
-            </a:schemeClr>
-          </a:lnRef>
-          <a:fillRef idx="1">
-            <a:schemeClr val="accent1"/>
-          </a:fillRef>
-          <a:effectRef idx="0">
-            <a:schemeClr val="accent1"/>
-          </a:effectRef>
-          <a:fontRef idx="minor">
-            <a:schemeClr val="lt1"/>
-          </a:fontRef>
-        </p:style>
-        <p:txBody>
-          <a:bodyPr rtlCol="0" anchor="ctr"/>
-          <a:lstStyle/>
-          <a:p>
-            <a:pPr algn="ctr"/>
-            <a:r>
-              <a:rPr lang="en-US" altLang="zh-CN" sz="800">
-                <a:latin typeface="Quicksand" panose="00000500000000000000" pitchFamily="2" charset="0"/>
-              </a:rPr>
-              <a:t>cart.js</a:t>
-            </a:r>
-            <a:endParaRPr lang="zh-CN" altLang="en-US" sz="800">
-              <a:latin typeface="Quicksand" panose="00000500000000000000" pitchFamily="2" charset="0"/>
-            </a:endParaRPr>
-          </a:p>
-        </p:txBody>
-      </p:sp>
-      <p:cxnSp>
-        <p:nvCxnSpPr>
-          <p:cNvPr id="14" name="连接符: 曲线 13">
-            <a:extLst>
-              <a:ext uri="{FF2B5EF4-FFF2-40B4-BE49-F238E27FC236}">
-                <a16:creationId xmlns:a16="http://schemas.microsoft.com/office/drawing/2014/main" id="{8CA54037-8AE4-360B-D22C-AE9D102A0F28}"/>
-              </a:ext>
-            </a:extLst>
-          </p:cNvPr>
-          <p:cNvCxnSpPr>
-            <a:cxnSpLocks/>
-            <a:stCxn id="7" idx="1"/>
-            <a:endCxn id="3" idx="3"/>
-          </p:cNvCxnSpPr>
-          <p:nvPr/>
-        </p:nvCxnSpPr>
-        <p:spPr>
-          <a:xfrm rot="10800000" flipV="1">
-            <a:off x="4863710" y="3073783"/>
-            <a:ext cx="124971" cy="728674"/>
-          </a:xfrm>
-          <a:prstGeom prst="curvedConnector3">
-            <a:avLst>
-              <a:gd name="adj1" fmla="val 50000"/>
-            </a:avLst>
-          </a:prstGeom>
-          <a:ln>
-            <a:solidFill>
-              <a:srgbClr val="6D91D1"/>
-            </a:solidFill>
-          </a:ln>
-        </p:spPr>
-        <p:style>
-          <a:lnRef idx="1">
-            <a:schemeClr val="accent1"/>
-          </a:lnRef>
-          <a:fillRef idx="0">
-            <a:schemeClr val="accent1"/>
-          </a:fillRef>
-          <a:effectRef idx="0">
-            <a:schemeClr val="accent1"/>
-          </a:effectRef>
-          <a:fontRef idx="minor">
-            <a:schemeClr val="tx1"/>
-          </a:fontRef>
-        </p:style>
-      </p:cxnSp>
-      <p:cxnSp>
-        <p:nvCxnSpPr>
-          <p:cNvPr id="17" name="连接符: 曲线 16">
-            <a:extLst>
-              <a:ext uri="{FF2B5EF4-FFF2-40B4-BE49-F238E27FC236}">
-                <a16:creationId xmlns:a16="http://schemas.microsoft.com/office/drawing/2014/main" id="{5D7F2DC2-788D-E15F-2B93-BEC9E5020321}"/>
-              </a:ext>
-            </a:extLst>
-          </p:cNvPr>
-          <p:cNvCxnSpPr>
-            <a:stCxn id="4" idx="3"/>
-            <a:endCxn id="7" idx="1"/>
-          </p:cNvCxnSpPr>
-          <p:nvPr/>
-        </p:nvCxnSpPr>
-        <p:spPr>
-          <a:xfrm>
-            <a:off x="4863709" y="2345109"/>
-            <a:ext cx="124971" cy="728674"/>
-          </a:xfrm>
-          <a:prstGeom prst="curvedConnector3">
-            <a:avLst/>
-          </a:prstGeom>
-          <a:ln>
-            <a:solidFill>
-              <a:srgbClr val="00B050"/>
-            </a:solidFill>
-          </a:ln>
-        </p:spPr>
-        <p:style>
-          <a:lnRef idx="1">
-            <a:schemeClr val="accent1"/>
-          </a:lnRef>
-          <a:fillRef idx="0">
-            <a:schemeClr val="accent1"/>
-          </a:fillRef>
-          <a:effectRef idx="0">
-            <a:schemeClr val="accent1"/>
-          </a:effectRef>
-          <a:fontRef idx="minor">
-            <a:schemeClr val="tx1"/>
-          </a:fontRef>
-        </p:style>
-      </p:cxnSp>
-      <p:sp>
-        <p:nvSpPr>
-          <p:cNvPr id="25" name="矩形: 圆角 24">
-            <a:extLst>
-              <a:ext uri="{FF2B5EF4-FFF2-40B4-BE49-F238E27FC236}">
-                <a16:creationId xmlns:a16="http://schemas.microsoft.com/office/drawing/2014/main" id="{9206292A-CFFA-EDEE-0CE6-0FCE7626F683}"/>
-              </a:ext>
-            </a:extLst>
-          </p:cNvPr>
-          <p:cNvSpPr/>
-          <p:nvPr/>
-        </p:nvSpPr>
-        <p:spPr>
-          <a:xfrm>
-            <a:off x="6057780" y="2534400"/>
-            <a:ext cx="900000" cy="216000"/>
-          </a:xfrm>
-          <a:prstGeom prst="roundRect">
-            <a:avLst/>
-          </a:prstGeom>
-          <a:solidFill>
-            <a:srgbClr val="FB837D"/>
-          </a:solidFill>
-          <a:ln w="12700">
-            <a:noFill/>
-          </a:ln>
-        </p:spPr>
-        <p:style>
-          <a:lnRef idx="2">
-            <a:schemeClr val="accent1">
-              <a:shade val="15000"/>
-            </a:schemeClr>
-          </a:lnRef>
-          <a:fillRef idx="1">
-            <a:schemeClr val="accent1"/>
-          </a:fillRef>
-          <a:effectRef idx="0">
-            <a:schemeClr val="accent1"/>
-          </a:effectRef>
-          <a:fontRef idx="minor">
-            <a:schemeClr val="lt1"/>
-          </a:fontRef>
-        </p:style>
-        <p:txBody>
-          <a:bodyPr rtlCol="0" anchor="ctr"/>
-          <a:lstStyle/>
-          <a:p>
-            <a:pPr algn="ctr"/>
-            <a:r>
-              <a:rPr lang="en-US" altLang="zh-CN" sz="800">
-                <a:latin typeface="Quicksand" panose="00000500000000000000" pitchFamily="2" charset="0"/>
-              </a:rPr>
-              <a:t>lists</a:t>
-            </a:r>
-            <a:endParaRPr lang="zh-CN" altLang="en-US" sz="800">
-              <a:latin typeface="Quicksand" panose="00000500000000000000" pitchFamily="2" charset="0"/>
-            </a:endParaRPr>
-          </a:p>
-        </p:txBody>
-      </p:sp>
-      <p:sp>
-        <p:nvSpPr>
-          <p:cNvPr id="26" name="矩形: 圆角 25">
-            <a:extLst>
-              <a:ext uri="{FF2B5EF4-FFF2-40B4-BE49-F238E27FC236}">
-                <a16:creationId xmlns:a16="http://schemas.microsoft.com/office/drawing/2014/main" id="{E1A4A212-0D66-8B59-6229-1091271BAD62}"/>
-              </a:ext>
-            </a:extLst>
-          </p:cNvPr>
-          <p:cNvSpPr/>
-          <p:nvPr/>
-        </p:nvSpPr>
-        <p:spPr>
-          <a:xfrm>
-            <a:off x="6057780" y="2798400"/>
-            <a:ext cx="900000" cy="216000"/>
-          </a:xfrm>
-          <a:prstGeom prst="roundRect">
-            <a:avLst/>
-          </a:prstGeom>
-          <a:solidFill>
-            <a:srgbClr val="FB837D"/>
-          </a:solidFill>
-          <a:ln w="12700">
-            <a:noFill/>
-          </a:ln>
-        </p:spPr>
-        <p:style>
-          <a:lnRef idx="2">
-            <a:schemeClr val="accent1">
-              <a:shade val="15000"/>
-            </a:schemeClr>
-          </a:lnRef>
-          <a:fillRef idx="1">
-            <a:schemeClr val="accent1"/>
-          </a:fillRef>
-          <a:effectRef idx="0">
-            <a:schemeClr val="accent1"/>
-          </a:effectRef>
-          <a:fontRef idx="minor">
-            <a:schemeClr val="lt1"/>
-          </a:fontRef>
-        </p:style>
-        <p:txBody>
-          <a:bodyPr rtlCol="0" anchor="ctr"/>
-          <a:lstStyle/>
-          <a:p>
-            <a:pPr algn="ctr"/>
-            <a:r>
-              <a:rPr lang="en-US" altLang="zh-CN" sz="800">
-                <a:latin typeface="Quicksand" panose="00000500000000000000" pitchFamily="2" charset="0"/>
-              </a:rPr>
-              <a:t>getLists()</a:t>
-            </a:r>
-            <a:endParaRPr lang="zh-CN" altLang="en-US" sz="800">
-              <a:latin typeface="Quicksand" panose="00000500000000000000" pitchFamily="2" charset="0"/>
-            </a:endParaRPr>
-          </a:p>
-        </p:txBody>
-      </p:sp>
-      <p:cxnSp>
-        <p:nvCxnSpPr>
-          <p:cNvPr id="28" name="连接符: 曲线 27">
-            <a:extLst>
-              <a:ext uri="{FF2B5EF4-FFF2-40B4-BE49-F238E27FC236}">
-                <a16:creationId xmlns:a16="http://schemas.microsoft.com/office/drawing/2014/main" id="{309BB0B0-6F0E-C24E-3004-E1132211C2A4}"/>
-              </a:ext>
-            </a:extLst>
-          </p:cNvPr>
-          <p:cNvCxnSpPr>
-            <a:cxnSpLocks/>
-            <a:stCxn id="7" idx="3"/>
-            <a:endCxn id="25" idx="1"/>
-          </p:cNvCxnSpPr>
-          <p:nvPr/>
-        </p:nvCxnSpPr>
-        <p:spPr>
-          <a:xfrm flipV="1">
-            <a:off x="5888680" y="2642400"/>
-            <a:ext cx="169100" cy="431383"/>
-          </a:xfrm>
-          <a:prstGeom prst="curvedConnector3">
-            <a:avLst/>
-          </a:prstGeom>
-          <a:ln>
-            <a:solidFill>
-              <a:srgbClr val="C00000"/>
-            </a:solidFill>
-          </a:ln>
-        </p:spPr>
-        <p:style>
-          <a:lnRef idx="1">
-            <a:schemeClr val="accent1"/>
-          </a:lnRef>
-          <a:fillRef idx="0">
-            <a:schemeClr val="accent1"/>
-          </a:fillRef>
-          <a:effectRef idx="0">
-            <a:schemeClr val="accent1"/>
-          </a:effectRef>
-          <a:fontRef idx="minor">
-            <a:schemeClr val="tx1"/>
-          </a:fontRef>
-        </p:style>
-      </p:cxnSp>
-      <p:cxnSp>
-        <p:nvCxnSpPr>
-          <p:cNvPr id="34" name="连接符: 曲线 33">
-            <a:extLst>
-              <a:ext uri="{FF2B5EF4-FFF2-40B4-BE49-F238E27FC236}">
-                <a16:creationId xmlns:a16="http://schemas.microsoft.com/office/drawing/2014/main" id="{AAE83631-A7F6-E02C-6D38-BABF5CA86FCF}"/>
-              </a:ext>
-            </a:extLst>
-          </p:cNvPr>
-          <p:cNvCxnSpPr>
-            <a:cxnSpLocks/>
-            <a:stCxn id="7" idx="3"/>
-            <a:endCxn id="12" idx="1"/>
-          </p:cNvCxnSpPr>
-          <p:nvPr/>
-        </p:nvCxnSpPr>
-        <p:spPr>
-          <a:xfrm>
-            <a:off x="5888680" y="3073783"/>
-            <a:ext cx="169100" cy="96617"/>
-          </a:xfrm>
-          <a:prstGeom prst="curvedConnector3">
-            <a:avLst>
-              <a:gd name="adj1" fmla="val 50000"/>
-            </a:avLst>
-          </a:prstGeom>
-          <a:ln>
-            <a:solidFill>
-              <a:srgbClr val="C00000"/>
-            </a:solidFill>
-          </a:ln>
-        </p:spPr>
-        <p:style>
-          <a:lnRef idx="1">
-            <a:schemeClr val="accent1"/>
-          </a:lnRef>
-          <a:fillRef idx="0">
-            <a:schemeClr val="accent1"/>
-          </a:fillRef>
-          <a:effectRef idx="0">
-            <a:schemeClr val="accent1"/>
-          </a:effectRef>
-          <a:fontRef idx="minor">
-            <a:schemeClr val="tx1"/>
-          </a:fontRef>
-        </p:style>
-      </p:cxnSp>
-      <p:cxnSp>
-        <p:nvCxnSpPr>
-          <p:cNvPr id="69" name="连接符: 曲线 68">
-            <a:extLst>
-              <a:ext uri="{FF2B5EF4-FFF2-40B4-BE49-F238E27FC236}">
-                <a16:creationId xmlns:a16="http://schemas.microsoft.com/office/drawing/2014/main" id="{3C11272C-4991-936E-0304-646EE0728FD5}"/>
-              </a:ext>
-            </a:extLst>
-          </p:cNvPr>
-          <p:cNvCxnSpPr>
-            <a:cxnSpLocks/>
-            <a:stCxn id="35" idx="3"/>
-            <a:endCxn id="4" idx="1"/>
-          </p:cNvCxnSpPr>
-          <p:nvPr/>
-        </p:nvCxnSpPr>
-        <p:spPr>
-          <a:xfrm>
-            <a:off x="3738400" y="2055600"/>
-            <a:ext cx="189309" cy="289509"/>
-          </a:xfrm>
-          <a:prstGeom prst="curvedConnector3">
-            <a:avLst>
-              <a:gd name="adj1" fmla="val 50000"/>
-            </a:avLst>
-          </a:prstGeom>
-          <a:ln>
-            <a:solidFill>
-              <a:srgbClr val="00B050"/>
-            </a:solidFill>
-          </a:ln>
-        </p:spPr>
-        <p:style>
-          <a:lnRef idx="1">
-            <a:schemeClr val="accent1"/>
-          </a:lnRef>
-          <a:fillRef idx="0">
-            <a:schemeClr val="accent1"/>
-          </a:fillRef>
-          <a:effectRef idx="0">
-            <a:schemeClr val="accent1"/>
-          </a:effectRef>
-          <a:fontRef idx="minor">
-            <a:schemeClr val="tx1"/>
-          </a:fontRef>
-        </p:style>
-      </p:cxnSp>
-      <p:sp>
-        <p:nvSpPr>
-          <p:cNvPr id="108" name="矩形: 圆角 107">
-            <a:extLst>
-              <a:ext uri="{FF2B5EF4-FFF2-40B4-BE49-F238E27FC236}">
-                <a16:creationId xmlns:a16="http://schemas.microsoft.com/office/drawing/2014/main" id="{FAC0BED9-67F3-89B3-6AB2-8DA4ED4A93BE}"/>
-              </a:ext>
-            </a:extLst>
-          </p:cNvPr>
-          <p:cNvSpPr/>
-          <p:nvPr/>
-        </p:nvSpPr>
-        <p:spPr>
-          <a:xfrm>
-            <a:off x="6049650" y="3326400"/>
-            <a:ext cx="900000" cy="216000"/>
-          </a:xfrm>
-          <a:prstGeom prst="roundRect">
-            <a:avLst/>
-          </a:prstGeom>
-          <a:solidFill>
-            <a:srgbClr val="FB837D"/>
-          </a:solidFill>
-          <a:ln w="12700">
-            <a:noFill/>
-          </a:ln>
-        </p:spPr>
-        <p:style>
-          <a:lnRef idx="2">
-            <a:schemeClr val="accent1">
-              <a:shade val="15000"/>
-            </a:schemeClr>
-          </a:lnRef>
-          <a:fillRef idx="1">
-            <a:schemeClr val="accent1"/>
-          </a:fillRef>
-          <a:effectRef idx="0">
-            <a:schemeClr val="accent1"/>
-          </a:effectRef>
-          <a:fontRef idx="minor">
-            <a:schemeClr val="lt1"/>
-          </a:fontRef>
-        </p:style>
-        <p:txBody>
-          <a:bodyPr rtlCol="0" anchor="ctr"/>
-          <a:lstStyle/>
-          <a:p>
-            <a:pPr algn="ctr"/>
-            <a:r>
-              <a:rPr lang="en-US" altLang="zh-CN" sz="800">
-                <a:latin typeface="Quicksand" panose="00000500000000000000" pitchFamily="2" charset="0"/>
-              </a:rPr>
-              <a:t>clearCarts()</a:t>
-            </a:r>
-            <a:endParaRPr lang="zh-CN" altLang="en-US" sz="800">
-              <a:latin typeface="Quicksand" panose="00000500000000000000" pitchFamily="2" charset="0"/>
-            </a:endParaRPr>
-          </a:p>
-        </p:txBody>
-      </p:sp>
-      <p:cxnSp>
-        <p:nvCxnSpPr>
-          <p:cNvPr id="118" name="连接符: 曲线 117">
-            <a:extLst>
-              <a:ext uri="{FF2B5EF4-FFF2-40B4-BE49-F238E27FC236}">
-                <a16:creationId xmlns:a16="http://schemas.microsoft.com/office/drawing/2014/main" id="{10E5DD0E-A687-963B-1415-3F7429B9EB3A}"/>
-              </a:ext>
-            </a:extLst>
-          </p:cNvPr>
-          <p:cNvCxnSpPr>
-            <a:cxnSpLocks/>
-            <a:stCxn id="7" idx="3"/>
-            <a:endCxn id="26" idx="1"/>
-          </p:cNvCxnSpPr>
-          <p:nvPr/>
-        </p:nvCxnSpPr>
-        <p:spPr>
-          <a:xfrm flipV="1">
-            <a:off x="5888680" y="2906400"/>
-            <a:ext cx="169100" cy="167383"/>
-          </a:xfrm>
-          <a:prstGeom prst="curvedConnector3">
-            <a:avLst>
-              <a:gd name="adj1" fmla="val 50000"/>
-            </a:avLst>
-          </a:prstGeom>
-          <a:ln>
-            <a:solidFill>
-              <a:srgbClr val="C00000"/>
-            </a:solidFill>
-          </a:ln>
-        </p:spPr>
-        <p:style>
-          <a:lnRef idx="1">
-            <a:schemeClr val="accent1"/>
-          </a:lnRef>
-          <a:fillRef idx="0">
-            <a:schemeClr val="accent1"/>
-          </a:fillRef>
-          <a:effectRef idx="0">
-            <a:schemeClr val="accent1"/>
-          </a:effectRef>
-          <a:fontRef idx="minor">
-            <a:schemeClr val="tx1"/>
-          </a:fontRef>
-        </p:style>
-      </p:cxnSp>
-      <p:cxnSp>
-        <p:nvCxnSpPr>
-          <p:cNvPr id="121" name="连接符: 曲线 120">
-            <a:extLst>
-              <a:ext uri="{FF2B5EF4-FFF2-40B4-BE49-F238E27FC236}">
-                <a16:creationId xmlns:a16="http://schemas.microsoft.com/office/drawing/2014/main" id="{5E6615E3-8D72-AC02-8F82-0C0E07C8A063}"/>
-              </a:ext>
-            </a:extLst>
-          </p:cNvPr>
-          <p:cNvCxnSpPr>
-            <a:cxnSpLocks/>
-            <a:stCxn id="7" idx="3"/>
-            <a:endCxn id="108" idx="1"/>
-          </p:cNvCxnSpPr>
-          <p:nvPr/>
-        </p:nvCxnSpPr>
-        <p:spPr>
-          <a:xfrm>
-            <a:off x="5888680" y="3073783"/>
-            <a:ext cx="160970" cy="360617"/>
-          </a:xfrm>
-          <a:prstGeom prst="curvedConnector3">
-            <a:avLst>
-              <a:gd name="adj1" fmla="val 50000"/>
-            </a:avLst>
-          </a:prstGeom>
-          <a:ln>
-            <a:solidFill>
-              <a:srgbClr val="C00000"/>
-            </a:solidFill>
-          </a:ln>
-        </p:spPr>
-        <p:style>
-          <a:lnRef idx="1">
-            <a:schemeClr val="accent1"/>
-          </a:lnRef>
-          <a:fillRef idx="0">
-            <a:schemeClr val="accent1"/>
-          </a:fillRef>
-          <a:effectRef idx="0">
-            <a:schemeClr val="accent1"/>
-          </a:effectRef>
-          <a:fontRef idx="minor">
-            <a:schemeClr val="tx1"/>
-          </a:fontRef>
-        </p:style>
-      </p:cxnSp>
-      <p:sp>
-        <p:nvSpPr>
-          <p:cNvPr id="12" name="矩形: 圆角 11">
-            <a:extLst>
-              <a:ext uri="{FF2B5EF4-FFF2-40B4-BE49-F238E27FC236}">
-                <a16:creationId xmlns:a16="http://schemas.microsoft.com/office/drawing/2014/main" id="{720E96D7-080F-5915-CFE3-F48B6E4FAB2E}"/>
-              </a:ext>
-            </a:extLst>
-          </p:cNvPr>
-          <p:cNvSpPr/>
-          <p:nvPr/>
-        </p:nvSpPr>
-        <p:spPr>
-          <a:xfrm>
-            <a:off x="6057780" y="3062400"/>
-            <a:ext cx="900000" cy="216000"/>
-          </a:xfrm>
-          <a:prstGeom prst="roundRect">
-            <a:avLst/>
-          </a:prstGeom>
-          <a:solidFill>
-            <a:srgbClr val="FB837D"/>
-          </a:solidFill>
-          <a:ln w="12700">
-            <a:noFill/>
-          </a:ln>
-        </p:spPr>
-        <p:style>
-          <a:lnRef idx="2">
-            <a:schemeClr val="accent1">
-              <a:shade val="15000"/>
-            </a:schemeClr>
-          </a:lnRef>
-          <a:fillRef idx="1">
-            <a:schemeClr val="accent1"/>
-          </a:fillRef>
-          <a:effectRef idx="0">
-            <a:schemeClr val="accent1"/>
-          </a:effectRef>
-          <a:fontRef idx="minor">
-            <a:schemeClr val="lt1"/>
-          </a:fontRef>
-        </p:style>
-        <p:txBody>
-          <a:bodyPr rtlCol="0" anchor="ctr"/>
-          <a:lstStyle/>
-          <a:p>
-            <a:pPr algn="ctr"/>
-            <a:r>
-              <a:rPr lang="en-US" altLang="zh-CN" sz="800">
-                <a:latin typeface="Quicksand" panose="00000500000000000000" pitchFamily="2" charset="0"/>
-              </a:rPr>
-              <a:t>addToCarts()</a:t>
-            </a:r>
-            <a:endParaRPr lang="zh-CN" altLang="en-US" sz="800">
-              <a:latin typeface="Quicksand" panose="00000500000000000000" pitchFamily="2" charset="0"/>
-            </a:endParaRPr>
-          </a:p>
-        </p:txBody>
-      </p:sp>
-      <p:sp>
-        <p:nvSpPr>
-          <p:cNvPr id="35" name="矩形: 圆角 34">
-            <a:extLst>
-              <a:ext uri="{FF2B5EF4-FFF2-40B4-BE49-F238E27FC236}">
-                <a16:creationId xmlns:a16="http://schemas.microsoft.com/office/drawing/2014/main" id="{2560AFC3-5502-019C-04F5-A2B3EC196CEB}"/>
-              </a:ext>
-            </a:extLst>
-          </p:cNvPr>
-          <p:cNvSpPr/>
-          <p:nvPr/>
-        </p:nvSpPr>
-        <p:spPr>
-          <a:xfrm>
-            <a:off x="2730400" y="1947600"/>
-            <a:ext cx="1008000" cy="216000"/>
-          </a:xfrm>
-          <a:prstGeom prst="roundRect">
-            <a:avLst/>
-          </a:prstGeom>
-          <a:solidFill>
-            <a:srgbClr val="CCF2E5"/>
-          </a:solidFill>
-          <a:ln w="12700">
-            <a:noFill/>
-          </a:ln>
-        </p:spPr>
-        <p:style>
-          <a:lnRef idx="2">
-            <a:schemeClr val="accent1">
-              <a:shade val="15000"/>
-            </a:schemeClr>
-          </a:lnRef>
-          <a:fillRef idx="1">
-            <a:schemeClr val="accent1"/>
-          </a:fillRef>
-          <a:effectRef idx="0">
-            <a:schemeClr val="accent1"/>
-          </a:effectRef>
-          <a:fontRef idx="minor">
-            <a:schemeClr val="lt1"/>
-          </a:fontRef>
-        </p:style>
-        <p:txBody>
-          <a:bodyPr rtlCol="0" anchor="ctr"/>
-          <a:lstStyle/>
-          <a:p>
-            <a:pPr algn="ctr"/>
-            <a:r>
-              <a:rPr lang="en-US" altLang="zh-CN" sz="800">
-                <a:solidFill>
-                  <a:sysClr val="windowText" lastClr="000000"/>
-                </a:solidFill>
-                <a:latin typeface="Quicksand Light" panose="00000400000000000000" pitchFamily="2" charset="0"/>
-              </a:rPr>
-              <a:t>good</a:t>
-            </a:r>
-            <a:endParaRPr lang="zh-CN" altLang="en-US" sz="800">
-              <a:solidFill>
-                <a:sysClr val="windowText" lastClr="000000"/>
-              </a:solidFill>
-              <a:latin typeface="Quicksand Light" panose="00000400000000000000" pitchFamily="2" charset="0"/>
-            </a:endParaRPr>
-          </a:p>
-        </p:txBody>
-      </p:sp>
-      <p:sp>
-        <p:nvSpPr>
-          <p:cNvPr id="36" name="矩形: 圆角 35">
-            <a:extLst>
-              <a:ext uri="{FF2B5EF4-FFF2-40B4-BE49-F238E27FC236}">
-                <a16:creationId xmlns:a16="http://schemas.microsoft.com/office/drawing/2014/main" id="{DEA05F83-9848-938F-5765-BDA46419BE99}"/>
-              </a:ext>
-            </a:extLst>
-          </p:cNvPr>
-          <p:cNvSpPr/>
-          <p:nvPr/>
-        </p:nvSpPr>
-        <p:spPr>
-          <a:xfrm>
-            <a:off x="2730400" y="2237109"/>
-            <a:ext cx="1008000" cy="216000"/>
-          </a:xfrm>
-          <a:prstGeom prst="roundRect">
-            <a:avLst/>
-          </a:prstGeom>
-          <a:solidFill>
-            <a:srgbClr val="CCF2E5"/>
-          </a:solidFill>
-          <a:ln w="12700">
-            <a:noFill/>
-          </a:ln>
-        </p:spPr>
-        <p:style>
-          <a:lnRef idx="2">
-            <a:schemeClr val="accent1">
-              <a:shade val="15000"/>
-            </a:schemeClr>
-          </a:lnRef>
-          <a:fillRef idx="1">
-            <a:schemeClr val="accent1"/>
-          </a:fillRef>
-          <a:effectRef idx="0">
-            <a:schemeClr val="accent1"/>
-          </a:effectRef>
-          <a:fontRef idx="minor">
-            <a:schemeClr val="lt1"/>
-          </a:fontRef>
-        </p:style>
-        <p:txBody>
-          <a:bodyPr rtlCol="0" anchor="ctr"/>
-          <a:lstStyle/>
-          <a:p>
-            <a:pPr algn="ctr"/>
-            <a:r>
-              <a:rPr lang="en-US" altLang="zh-CN" sz="800">
-                <a:solidFill>
-                  <a:sysClr val="windowText" lastClr="000000"/>
-                </a:solidFill>
-                <a:latin typeface="Quicksand Light" panose="00000400000000000000" pitchFamily="2" charset="0"/>
-              </a:rPr>
-              <a:t>goodSelected</a:t>
-            </a:r>
-            <a:endParaRPr lang="zh-CN" altLang="en-US" sz="800">
-              <a:solidFill>
-                <a:sysClr val="windowText" lastClr="000000"/>
-              </a:solidFill>
-              <a:latin typeface="Quicksand Light" panose="00000400000000000000" pitchFamily="2" charset="0"/>
-            </a:endParaRPr>
-          </a:p>
-        </p:txBody>
-      </p:sp>
-      <p:sp>
-        <p:nvSpPr>
-          <p:cNvPr id="37" name="矩形: 圆角 36">
-            <a:extLst>
-              <a:ext uri="{FF2B5EF4-FFF2-40B4-BE49-F238E27FC236}">
-                <a16:creationId xmlns:a16="http://schemas.microsoft.com/office/drawing/2014/main" id="{61EF7C50-FB8D-FA1D-20B6-85409306F50D}"/>
-              </a:ext>
-            </a:extLst>
-          </p:cNvPr>
-          <p:cNvSpPr/>
-          <p:nvPr/>
-        </p:nvSpPr>
-        <p:spPr>
-          <a:xfrm>
-            <a:off x="2730400" y="2523600"/>
-            <a:ext cx="1008000" cy="216000"/>
-          </a:xfrm>
-          <a:prstGeom prst="roundRect">
-            <a:avLst/>
-          </a:prstGeom>
-          <a:solidFill>
-            <a:srgbClr val="CCF2E5"/>
-          </a:solidFill>
-          <a:ln w="12700">
-            <a:noFill/>
-          </a:ln>
-        </p:spPr>
-        <p:style>
-          <a:lnRef idx="2">
-            <a:schemeClr val="accent1">
-              <a:shade val="15000"/>
-            </a:schemeClr>
-          </a:lnRef>
-          <a:fillRef idx="1">
-            <a:schemeClr val="accent1"/>
-          </a:fillRef>
-          <a:effectRef idx="0">
-            <a:schemeClr val="accent1"/>
-          </a:effectRef>
-          <a:fontRef idx="minor">
-            <a:schemeClr val="lt1"/>
-          </a:fontRef>
-        </p:style>
-        <p:txBody>
-          <a:bodyPr rtlCol="0" anchor="ctr"/>
-          <a:lstStyle/>
-          <a:p>
-            <a:pPr algn="ctr"/>
-            <a:r>
-              <a:rPr lang="en-US" altLang="zh-CN" sz="800">
-                <a:solidFill>
-                  <a:sysClr val="windowText" lastClr="000000"/>
-                </a:solidFill>
-                <a:latin typeface="Quicksand Light" panose="00000400000000000000" pitchFamily="2" charset="0"/>
-              </a:rPr>
-              <a:t>addToCarts()</a:t>
-            </a:r>
-            <a:endParaRPr lang="zh-CN" altLang="en-US" sz="800">
-              <a:solidFill>
-                <a:sysClr val="windowText" lastClr="000000"/>
-              </a:solidFill>
-              <a:latin typeface="Quicksand Light" panose="00000400000000000000" pitchFamily="2" charset="0"/>
-            </a:endParaRPr>
-          </a:p>
-        </p:txBody>
-      </p:sp>
-      <p:cxnSp>
-        <p:nvCxnSpPr>
-          <p:cNvPr id="40" name="连接符: 曲线 39">
-            <a:extLst>
-              <a:ext uri="{FF2B5EF4-FFF2-40B4-BE49-F238E27FC236}">
-                <a16:creationId xmlns:a16="http://schemas.microsoft.com/office/drawing/2014/main" id="{4AC6721A-6244-50EC-47B3-5478511DF02F}"/>
-              </a:ext>
-            </a:extLst>
-          </p:cNvPr>
-          <p:cNvCxnSpPr>
-            <a:cxnSpLocks/>
-            <a:stCxn id="37" idx="3"/>
-            <a:endCxn id="4" idx="1"/>
-          </p:cNvCxnSpPr>
-          <p:nvPr/>
-        </p:nvCxnSpPr>
-        <p:spPr>
-          <a:xfrm flipV="1">
-            <a:off x="3738400" y="2345109"/>
-            <a:ext cx="189309" cy="286491"/>
-          </a:xfrm>
-          <a:prstGeom prst="curvedConnector3">
-            <a:avLst>
-              <a:gd name="adj1" fmla="val 50000"/>
-            </a:avLst>
-          </a:prstGeom>
-          <a:ln>
-            <a:solidFill>
-              <a:srgbClr val="00B050"/>
-            </a:solidFill>
-          </a:ln>
-        </p:spPr>
-        <p:style>
-          <a:lnRef idx="1">
-            <a:schemeClr val="accent1"/>
-          </a:lnRef>
-          <a:fillRef idx="0">
-            <a:schemeClr val="accent1"/>
-          </a:fillRef>
-          <a:effectRef idx="0">
-            <a:schemeClr val="accent1"/>
-          </a:effectRef>
-          <a:fontRef idx="minor">
-            <a:schemeClr val="tx1"/>
-          </a:fontRef>
-        </p:style>
-      </p:cxnSp>
-      <p:cxnSp>
-        <p:nvCxnSpPr>
-          <p:cNvPr id="45" name="直接连接符 44">
-            <a:extLst>
-              <a:ext uri="{FF2B5EF4-FFF2-40B4-BE49-F238E27FC236}">
-                <a16:creationId xmlns:a16="http://schemas.microsoft.com/office/drawing/2014/main" id="{64FC7AF9-BB31-5588-9F23-4B97028C7A12}"/>
-              </a:ext>
-            </a:extLst>
-          </p:cNvPr>
-          <p:cNvCxnSpPr>
-            <a:stCxn id="36" idx="3"/>
-            <a:endCxn id="4" idx="1"/>
-          </p:cNvCxnSpPr>
-          <p:nvPr/>
-        </p:nvCxnSpPr>
-        <p:spPr>
-          <a:xfrm>
-            <a:off x="3738400" y="2345109"/>
-            <a:ext cx="189309" cy="0"/>
-          </a:xfrm>
-          <a:prstGeom prst="line">
-            <a:avLst/>
-          </a:prstGeom>
-          <a:ln>
-            <a:solidFill>
-              <a:srgbClr val="00B050"/>
-            </a:solidFill>
-          </a:ln>
-        </p:spPr>
-        <p:style>
-          <a:lnRef idx="1">
-            <a:schemeClr val="accent1"/>
-          </a:lnRef>
-          <a:fillRef idx="0">
-            <a:schemeClr val="accent1"/>
-          </a:fillRef>
-          <a:effectRef idx="0">
-            <a:schemeClr val="accent1"/>
-          </a:effectRef>
-          <a:fontRef idx="minor">
-            <a:schemeClr val="tx1"/>
-          </a:fontRef>
-        </p:style>
-      </p:cxnSp>
-      <p:sp>
-        <p:nvSpPr>
-          <p:cNvPr id="54" name="矩形: 圆角 53">
-            <a:extLst>
-              <a:ext uri="{FF2B5EF4-FFF2-40B4-BE49-F238E27FC236}">
-                <a16:creationId xmlns:a16="http://schemas.microsoft.com/office/drawing/2014/main" id="{A46905A7-222F-AF3F-81E8-3E43C3A2AFC0}"/>
-              </a:ext>
-            </a:extLst>
-          </p:cNvPr>
-          <p:cNvSpPr/>
-          <p:nvPr/>
-        </p:nvSpPr>
-        <p:spPr>
-          <a:xfrm>
-            <a:off x="2730400" y="2946554"/>
-            <a:ext cx="1008000" cy="216000"/>
-          </a:xfrm>
-          <a:prstGeom prst="roundRect">
-            <a:avLst/>
-          </a:prstGeom>
-          <a:solidFill>
-            <a:srgbClr val="5C84CC">
-              <a:alpha val="89804"/>
-            </a:srgbClr>
-          </a:solidFill>
-          <a:ln w="12700">
-            <a:noFill/>
-          </a:ln>
-        </p:spPr>
-        <p:style>
-          <a:lnRef idx="2">
-            <a:schemeClr val="accent1">
-              <a:shade val="15000"/>
-            </a:schemeClr>
-          </a:lnRef>
-          <a:fillRef idx="1">
-            <a:schemeClr val="accent1"/>
-          </a:fillRef>
-          <a:effectRef idx="0">
-            <a:schemeClr val="accent1"/>
-          </a:effectRef>
-          <a:fontRef idx="minor">
-            <a:schemeClr val="lt1"/>
-          </a:fontRef>
-        </p:style>
-        <p:txBody>
-          <a:bodyPr rtlCol="0" anchor="ctr"/>
-          <a:lstStyle/>
-          <a:p>
-            <a:pPr algn="ctr"/>
-            <a:r>
-              <a:rPr lang="en-US" altLang="zh-CN" sz="800">
-                <a:latin typeface="Quicksand" panose="00000500000000000000" pitchFamily="2" charset="0"/>
-              </a:rPr>
-              <a:t>lists</a:t>
-            </a:r>
-            <a:endParaRPr lang="zh-CN" altLang="en-US" sz="800">
-              <a:latin typeface="Quicksand" panose="00000500000000000000" pitchFamily="2" charset="0"/>
-            </a:endParaRPr>
-          </a:p>
-        </p:txBody>
-      </p:sp>
-      <p:sp>
-        <p:nvSpPr>
-          <p:cNvPr id="55" name="矩形: 圆角 54">
-            <a:extLst>
-              <a:ext uri="{FF2B5EF4-FFF2-40B4-BE49-F238E27FC236}">
-                <a16:creationId xmlns:a16="http://schemas.microsoft.com/office/drawing/2014/main" id="{1B69FB84-588C-3B6F-29DC-0D207F19217B}"/>
-              </a:ext>
-            </a:extLst>
-          </p:cNvPr>
-          <p:cNvSpPr/>
-          <p:nvPr/>
-        </p:nvSpPr>
-        <p:spPr>
-          <a:xfrm>
-            <a:off x="2730400" y="3245715"/>
-            <a:ext cx="1008000" cy="216000"/>
-          </a:xfrm>
-          <a:prstGeom prst="roundRect">
-            <a:avLst/>
-          </a:prstGeom>
-          <a:solidFill>
-            <a:srgbClr val="5C84CC">
-              <a:alpha val="89804"/>
-            </a:srgbClr>
-          </a:solidFill>
-          <a:ln w="12700">
-            <a:noFill/>
-          </a:ln>
-        </p:spPr>
-        <p:style>
-          <a:lnRef idx="2">
-            <a:schemeClr val="accent1">
-              <a:shade val="15000"/>
-            </a:schemeClr>
-          </a:lnRef>
-          <a:fillRef idx="1">
-            <a:schemeClr val="accent1"/>
-          </a:fillRef>
-          <a:effectRef idx="0">
-            <a:schemeClr val="accent1"/>
-          </a:effectRef>
-          <a:fontRef idx="minor">
-            <a:schemeClr val="lt1"/>
-          </a:fontRef>
-        </p:style>
-        <p:txBody>
-          <a:bodyPr rtlCol="0" anchor="ctr"/>
-          <a:lstStyle/>
-          <a:p>
-            <a:pPr algn="ctr"/>
-            <a:r>
-              <a:rPr lang="en-US" altLang="zh-CN" sz="800">
-                <a:latin typeface="Quicksand" panose="00000500000000000000" pitchFamily="2" charset="0"/>
-              </a:rPr>
-              <a:t>selectedLists</a:t>
-            </a:r>
-            <a:endParaRPr lang="zh-CN" altLang="en-US" sz="800">
-              <a:latin typeface="Quicksand" panose="00000500000000000000" pitchFamily="2" charset="0"/>
-            </a:endParaRPr>
-          </a:p>
-        </p:txBody>
-      </p:sp>
-      <p:sp>
-        <p:nvSpPr>
-          <p:cNvPr id="56" name="矩形: 圆角 55">
-            <a:extLst>
-              <a:ext uri="{FF2B5EF4-FFF2-40B4-BE49-F238E27FC236}">
-                <a16:creationId xmlns:a16="http://schemas.microsoft.com/office/drawing/2014/main" id="{1761FC9C-89B8-41A0-8F5C-43B5E16AA3C1}"/>
-              </a:ext>
-            </a:extLst>
-          </p:cNvPr>
-          <p:cNvSpPr/>
-          <p:nvPr/>
-        </p:nvSpPr>
-        <p:spPr>
-          <a:xfrm>
-            <a:off x="2730400" y="3544876"/>
-            <a:ext cx="1008000" cy="216000"/>
-          </a:xfrm>
-          <a:prstGeom prst="roundRect">
-            <a:avLst/>
-          </a:prstGeom>
-          <a:solidFill>
-            <a:srgbClr val="5C84CC">
-              <a:alpha val="89804"/>
-            </a:srgbClr>
-          </a:solidFill>
-          <a:ln w="12700">
-            <a:noFill/>
-          </a:ln>
-        </p:spPr>
-        <p:style>
-          <a:lnRef idx="2">
-            <a:schemeClr val="accent1">
-              <a:shade val="15000"/>
-            </a:schemeClr>
-          </a:lnRef>
-          <a:fillRef idx="1">
-            <a:schemeClr val="accent1"/>
-          </a:fillRef>
-          <a:effectRef idx="0">
-            <a:schemeClr val="accent1"/>
-          </a:effectRef>
-          <a:fontRef idx="minor">
-            <a:schemeClr val="lt1"/>
-          </a:fontRef>
-        </p:style>
-        <p:txBody>
-          <a:bodyPr rtlCol="0" anchor="ctr"/>
-          <a:lstStyle/>
-          <a:p>
-            <a:pPr algn="ctr"/>
-            <a:r>
-              <a:rPr lang="en-US" altLang="zh-CN" sz="800">
-                <a:latin typeface="Quicksand" panose="00000500000000000000" pitchFamily="2" charset="0"/>
-              </a:rPr>
-              <a:t>isAll</a:t>
-            </a:r>
-            <a:endParaRPr lang="zh-CN" altLang="en-US" sz="800">
-              <a:latin typeface="Quicksand" panose="00000500000000000000" pitchFamily="2" charset="0"/>
-            </a:endParaRPr>
-          </a:p>
-        </p:txBody>
-      </p:sp>
-      <p:sp>
-        <p:nvSpPr>
-          <p:cNvPr id="57" name="矩形: 圆角 56">
-            <a:extLst>
-              <a:ext uri="{FF2B5EF4-FFF2-40B4-BE49-F238E27FC236}">
-                <a16:creationId xmlns:a16="http://schemas.microsoft.com/office/drawing/2014/main" id="{83DCAFDE-14F9-6845-DB80-8B8F839510C3}"/>
-              </a:ext>
-            </a:extLst>
-          </p:cNvPr>
-          <p:cNvSpPr/>
-          <p:nvPr/>
-        </p:nvSpPr>
-        <p:spPr>
-          <a:xfrm>
-            <a:off x="2730400" y="3844037"/>
-            <a:ext cx="1008000" cy="216000"/>
-          </a:xfrm>
-          <a:prstGeom prst="roundRect">
-            <a:avLst/>
-          </a:prstGeom>
-          <a:solidFill>
-            <a:srgbClr val="5C84CC">
-              <a:alpha val="89804"/>
-            </a:srgbClr>
-          </a:solidFill>
-          <a:ln w="12700">
-            <a:noFill/>
-          </a:ln>
-        </p:spPr>
-        <p:style>
-          <a:lnRef idx="2">
-            <a:schemeClr val="accent1">
-              <a:shade val="15000"/>
-            </a:schemeClr>
-          </a:lnRef>
-          <a:fillRef idx="1">
-            <a:schemeClr val="accent1"/>
-          </a:fillRef>
-          <a:effectRef idx="0">
-            <a:schemeClr val="accent1"/>
-          </a:effectRef>
-          <a:fontRef idx="minor">
-            <a:schemeClr val="lt1"/>
-          </a:fontRef>
-        </p:style>
-        <p:txBody>
-          <a:bodyPr rtlCol="0" anchor="ctr"/>
-          <a:lstStyle/>
-          <a:p>
-            <a:pPr algn="ctr"/>
-            <a:r>
-              <a:rPr lang="en-US" altLang="zh-CN" sz="800">
-                <a:latin typeface="Quicksand" panose="00000500000000000000" pitchFamily="2" charset="0"/>
-              </a:rPr>
-              <a:t>count</a:t>
-            </a:r>
-            <a:endParaRPr lang="zh-CN" altLang="en-US" sz="800">
-              <a:latin typeface="Quicksand" panose="00000500000000000000" pitchFamily="2" charset="0"/>
-            </a:endParaRPr>
-          </a:p>
-        </p:txBody>
-      </p:sp>
-      <p:sp>
-        <p:nvSpPr>
-          <p:cNvPr id="59" name="矩形: 圆角 58">
-            <a:extLst>
-              <a:ext uri="{FF2B5EF4-FFF2-40B4-BE49-F238E27FC236}">
-                <a16:creationId xmlns:a16="http://schemas.microsoft.com/office/drawing/2014/main" id="{D7B3F34F-6627-658C-A744-FBC9FDD8AF91}"/>
-              </a:ext>
-            </a:extLst>
-          </p:cNvPr>
-          <p:cNvSpPr/>
-          <p:nvPr/>
-        </p:nvSpPr>
-        <p:spPr>
-          <a:xfrm>
-            <a:off x="2730400" y="4143198"/>
-            <a:ext cx="1008000" cy="216000"/>
-          </a:xfrm>
-          <a:prstGeom prst="roundRect">
-            <a:avLst/>
-          </a:prstGeom>
-          <a:solidFill>
-            <a:srgbClr val="5C84CC">
-              <a:alpha val="89804"/>
-            </a:srgbClr>
-          </a:solidFill>
-          <a:ln w="12700">
-            <a:noFill/>
-          </a:ln>
-        </p:spPr>
-        <p:style>
-          <a:lnRef idx="2">
-            <a:schemeClr val="accent1">
-              <a:shade val="15000"/>
-            </a:schemeClr>
-          </a:lnRef>
-          <a:fillRef idx="1">
-            <a:schemeClr val="accent1"/>
-          </a:fillRef>
-          <a:effectRef idx="0">
-            <a:schemeClr val="accent1"/>
-          </a:effectRef>
-          <a:fontRef idx="minor">
-            <a:schemeClr val="lt1"/>
-          </a:fontRef>
-        </p:style>
-        <p:txBody>
-          <a:bodyPr rtlCol="0" anchor="ctr"/>
-          <a:lstStyle/>
-          <a:p>
-            <a:pPr algn="ctr"/>
-            <a:r>
-              <a:rPr lang="en-US" altLang="zh-CN" sz="800">
-                <a:latin typeface="Quicksand" panose="00000500000000000000" pitchFamily="2" charset="0"/>
-              </a:rPr>
-              <a:t>totalPrice</a:t>
-            </a:r>
-            <a:endParaRPr lang="zh-CN" altLang="en-US" sz="800">
-              <a:latin typeface="Quicksand" panose="00000500000000000000" pitchFamily="2" charset="0"/>
-            </a:endParaRPr>
-          </a:p>
-        </p:txBody>
-      </p:sp>
-      <p:sp>
-        <p:nvSpPr>
-          <p:cNvPr id="60" name="矩形: 圆角 59">
-            <a:extLst>
-              <a:ext uri="{FF2B5EF4-FFF2-40B4-BE49-F238E27FC236}">
-                <a16:creationId xmlns:a16="http://schemas.microsoft.com/office/drawing/2014/main" id="{69FD48F7-D13B-8DD4-D4AA-42DDEE93B189}"/>
-              </a:ext>
-            </a:extLst>
-          </p:cNvPr>
-          <p:cNvSpPr/>
-          <p:nvPr/>
-        </p:nvSpPr>
-        <p:spPr>
-          <a:xfrm>
-            <a:off x="2730400" y="4442359"/>
-            <a:ext cx="1008000" cy="216000"/>
-          </a:xfrm>
-          <a:prstGeom prst="roundRect">
-            <a:avLst/>
-          </a:prstGeom>
-          <a:solidFill>
-            <a:srgbClr val="5C84CC">
-              <a:alpha val="89804"/>
-            </a:srgbClr>
-          </a:solidFill>
-          <a:ln w="12700">
-            <a:noFill/>
-          </a:ln>
-        </p:spPr>
-        <p:style>
-          <a:lnRef idx="2">
-            <a:schemeClr val="accent1">
-              <a:shade val="15000"/>
-            </a:schemeClr>
-          </a:lnRef>
-          <a:fillRef idx="1">
-            <a:schemeClr val="accent1"/>
-          </a:fillRef>
-          <a:effectRef idx="0">
-            <a:schemeClr val="accent1"/>
-          </a:effectRef>
-          <a:fontRef idx="minor">
-            <a:schemeClr val="lt1"/>
-          </a:fontRef>
-        </p:style>
-        <p:txBody>
-          <a:bodyPr rtlCol="0" anchor="ctr"/>
-          <a:lstStyle/>
-          <a:p>
-            <a:pPr algn="ctr"/>
-            <a:r>
-              <a:rPr lang="en-US" altLang="zh-CN" sz="800">
-                <a:latin typeface="Quicksand" panose="00000500000000000000" pitchFamily="2" charset="0"/>
-              </a:rPr>
-              <a:t>discountPrice</a:t>
-            </a:r>
-            <a:endParaRPr lang="zh-CN" altLang="en-US" sz="800">
-              <a:latin typeface="Quicksand" panose="00000500000000000000" pitchFamily="2" charset="0"/>
-            </a:endParaRPr>
-          </a:p>
-        </p:txBody>
-      </p:sp>
-      <p:cxnSp>
-        <p:nvCxnSpPr>
-          <p:cNvPr id="61" name="连接符: 曲线 60">
-            <a:extLst>
-              <a:ext uri="{FF2B5EF4-FFF2-40B4-BE49-F238E27FC236}">
-                <a16:creationId xmlns:a16="http://schemas.microsoft.com/office/drawing/2014/main" id="{BD5BA532-7EB2-08C6-9059-CA4E846D5684}"/>
-              </a:ext>
-            </a:extLst>
-          </p:cNvPr>
-          <p:cNvCxnSpPr>
-            <a:cxnSpLocks/>
-            <a:stCxn id="54" idx="3"/>
-            <a:endCxn id="3" idx="1"/>
-          </p:cNvCxnSpPr>
-          <p:nvPr/>
-        </p:nvCxnSpPr>
-        <p:spPr>
-          <a:xfrm>
-            <a:off x="3738400" y="3054554"/>
-            <a:ext cx="189309" cy="747903"/>
-          </a:xfrm>
-          <a:prstGeom prst="curvedConnector3">
-            <a:avLst>
-              <a:gd name="adj1" fmla="val 50000"/>
-            </a:avLst>
-          </a:prstGeom>
-          <a:ln>
-            <a:solidFill>
-              <a:srgbClr val="6D91D1"/>
-            </a:solidFill>
-          </a:ln>
-        </p:spPr>
-        <p:style>
-          <a:lnRef idx="1">
-            <a:schemeClr val="accent1"/>
-          </a:lnRef>
-          <a:fillRef idx="0">
-            <a:schemeClr val="accent1"/>
-          </a:fillRef>
-          <a:effectRef idx="0">
-            <a:schemeClr val="accent1"/>
-          </a:effectRef>
-          <a:fontRef idx="minor">
-            <a:schemeClr val="tx1"/>
-          </a:fontRef>
-        </p:style>
-      </p:cxnSp>
-      <p:cxnSp>
-        <p:nvCxnSpPr>
-          <p:cNvPr id="68" name="连接符: 曲线 67">
-            <a:extLst>
-              <a:ext uri="{FF2B5EF4-FFF2-40B4-BE49-F238E27FC236}">
-                <a16:creationId xmlns:a16="http://schemas.microsoft.com/office/drawing/2014/main" id="{16E326BD-B4AE-1641-E70A-A6BFE4509A70}"/>
-              </a:ext>
-            </a:extLst>
-          </p:cNvPr>
-          <p:cNvCxnSpPr>
-            <a:cxnSpLocks/>
-            <a:stCxn id="55" idx="3"/>
-            <a:endCxn id="3" idx="1"/>
-          </p:cNvCxnSpPr>
-          <p:nvPr/>
-        </p:nvCxnSpPr>
-        <p:spPr>
-          <a:xfrm>
-            <a:off x="3738400" y="3353715"/>
-            <a:ext cx="189309" cy="448742"/>
-          </a:xfrm>
-          <a:prstGeom prst="curvedConnector3">
-            <a:avLst>
-              <a:gd name="adj1" fmla="val 50000"/>
-            </a:avLst>
-          </a:prstGeom>
-          <a:ln>
-            <a:solidFill>
-              <a:srgbClr val="6D91D1"/>
-            </a:solidFill>
-          </a:ln>
-        </p:spPr>
-        <p:style>
-          <a:lnRef idx="1">
-            <a:schemeClr val="accent1"/>
-          </a:lnRef>
-          <a:fillRef idx="0">
-            <a:schemeClr val="accent1"/>
-          </a:fillRef>
-          <a:effectRef idx="0">
-            <a:schemeClr val="accent1"/>
-          </a:effectRef>
-          <a:fontRef idx="minor">
-            <a:schemeClr val="tx1"/>
-          </a:fontRef>
-        </p:style>
-      </p:cxnSp>
-      <p:cxnSp>
-        <p:nvCxnSpPr>
-          <p:cNvPr id="75" name="连接符: 曲线 74">
-            <a:extLst>
-              <a:ext uri="{FF2B5EF4-FFF2-40B4-BE49-F238E27FC236}">
-                <a16:creationId xmlns:a16="http://schemas.microsoft.com/office/drawing/2014/main" id="{B5A66737-652E-D3AD-C2BA-7A64BF6D2DB4}"/>
-              </a:ext>
-            </a:extLst>
-          </p:cNvPr>
-          <p:cNvCxnSpPr>
-            <a:cxnSpLocks/>
-            <a:stCxn id="60" idx="3"/>
-            <a:endCxn id="3" idx="1"/>
-          </p:cNvCxnSpPr>
-          <p:nvPr/>
-        </p:nvCxnSpPr>
-        <p:spPr>
-          <a:xfrm flipV="1">
-            <a:off x="3738400" y="3802457"/>
-            <a:ext cx="189309" cy="747902"/>
-          </a:xfrm>
-          <a:prstGeom prst="curvedConnector3">
-            <a:avLst>
-              <a:gd name="adj1" fmla="val 50000"/>
-            </a:avLst>
-          </a:prstGeom>
-          <a:ln>
-            <a:solidFill>
-              <a:srgbClr val="6D91D1"/>
-            </a:solidFill>
-          </a:ln>
-        </p:spPr>
-        <p:style>
-          <a:lnRef idx="1">
-            <a:schemeClr val="accent1"/>
-          </a:lnRef>
-          <a:fillRef idx="0">
-            <a:schemeClr val="accent1"/>
-          </a:fillRef>
-          <a:effectRef idx="0">
-            <a:schemeClr val="accent1"/>
-          </a:effectRef>
-          <a:fontRef idx="minor">
-            <a:schemeClr val="tx1"/>
-          </a:fontRef>
-        </p:style>
-      </p:cxnSp>
-      <p:cxnSp>
-        <p:nvCxnSpPr>
-          <p:cNvPr id="78" name="连接符: 曲线 77">
-            <a:extLst>
-              <a:ext uri="{FF2B5EF4-FFF2-40B4-BE49-F238E27FC236}">
-                <a16:creationId xmlns:a16="http://schemas.microsoft.com/office/drawing/2014/main" id="{9C49D303-6593-4078-0C50-F1465C52AB10}"/>
-              </a:ext>
-            </a:extLst>
-          </p:cNvPr>
-          <p:cNvCxnSpPr>
-            <a:cxnSpLocks/>
-            <a:stCxn id="56" idx="3"/>
-            <a:endCxn id="3" idx="1"/>
-          </p:cNvCxnSpPr>
-          <p:nvPr/>
-        </p:nvCxnSpPr>
-        <p:spPr>
-          <a:xfrm>
-            <a:off x="3738400" y="3652876"/>
-            <a:ext cx="189309" cy="149581"/>
-          </a:xfrm>
-          <a:prstGeom prst="curvedConnector3">
-            <a:avLst>
-              <a:gd name="adj1" fmla="val 50000"/>
-            </a:avLst>
-          </a:prstGeom>
-          <a:ln>
-            <a:solidFill>
-              <a:srgbClr val="6D91D1"/>
-            </a:solidFill>
-          </a:ln>
-        </p:spPr>
-        <p:style>
-          <a:lnRef idx="1">
-            <a:schemeClr val="accent1"/>
-          </a:lnRef>
-          <a:fillRef idx="0">
-            <a:schemeClr val="accent1"/>
-          </a:fillRef>
-          <a:effectRef idx="0">
-            <a:schemeClr val="accent1"/>
-          </a:effectRef>
-          <a:fontRef idx="minor">
-            <a:schemeClr val="tx1"/>
-          </a:fontRef>
-        </p:style>
-      </p:cxnSp>
-      <p:cxnSp>
-        <p:nvCxnSpPr>
-          <p:cNvPr id="81" name="连接符: 曲线 80">
-            <a:extLst>
-              <a:ext uri="{FF2B5EF4-FFF2-40B4-BE49-F238E27FC236}">
-                <a16:creationId xmlns:a16="http://schemas.microsoft.com/office/drawing/2014/main" id="{96EB5F84-D1BD-20B5-2777-AB306C14B03E}"/>
-              </a:ext>
-            </a:extLst>
-          </p:cNvPr>
-          <p:cNvCxnSpPr>
-            <a:cxnSpLocks/>
-            <a:stCxn id="59" idx="3"/>
-            <a:endCxn id="3" idx="1"/>
-          </p:cNvCxnSpPr>
-          <p:nvPr/>
-        </p:nvCxnSpPr>
-        <p:spPr>
-          <a:xfrm flipV="1">
-            <a:off x="3738400" y="3802457"/>
-            <a:ext cx="189309" cy="448741"/>
-          </a:xfrm>
-          <a:prstGeom prst="curvedConnector3">
-            <a:avLst>
-              <a:gd name="adj1" fmla="val 50000"/>
-            </a:avLst>
-          </a:prstGeom>
-          <a:ln>
-            <a:solidFill>
-              <a:srgbClr val="6D91D1"/>
-            </a:solidFill>
-          </a:ln>
-        </p:spPr>
-        <p:style>
-          <a:lnRef idx="1">
-            <a:schemeClr val="accent1"/>
-          </a:lnRef>
-          <a:fillRef idx="0">
-            <a:schemeClr val="accent1"/>
-          </a:fillRef>
-          <a:effectRef idx="0">
-            <a:schemeClr val="accent1"/>
-          </a:effectRef>
-          <a:fontRef idx="minor">
-            <a:schemeClr val="tx1"/>
-          </a:fontRef>
-        </p:style>
-      </p:cxnSp>
-      <p:cxnSp>
-        <p:nvCxnSpPr>
-          <p:cNvPr id="86" name="连接符: 曲线 85">
-            <a:extLst>
-              <a:ext uri="{FF2B5EF4-FFF2-40B4-BE49-F238E27FC236}">
-                <a16:creationId xmlns:a16="http://schemas.microsoft.com/office/drawing/2014/main" id="{698C2E92-6E21-B7A7-AAAB-69046DD82A44}"/>
-              </a:ext>
-            </a:extLst>
-          </p:cNvPr>
-          <p:cNvCxnSpPr>
-            <a:cxnSpLocks/>
-            <a:stCxn id="57" idx="3"/>
-            <a:endCxn id="3" idx="1"/>
-          </p:cNvCxnSpPr>
-          <p:nvPr/>
-        </p:nvCxnSpPr>
-        <p:spPr>
-          <a:xfrm flipV="1">
-            <a:off x="3738400" y="3802457"/>
-            <a:ext cx="189309" cy="149580"/>
-          </a:xfrm>
-          <a:prstGeom prst="curvedConnector3">
-            <a:avLst>
-              <a:gd name="adj1" fmla="val 50000"/>
-            </a:avLst>
-          </a:prstGeom>
-          <a:ln>
-            <a:solidFill>
-              <a:srgbClr val="6D91D1"/>
-            </a:solidFill>
-          </a:ln>
-        </p:spPr>
-        <p:style>
-          <a:lnRef idx="1">
-            <a:schemeClr val="accent1"/>
-          </a:lnRef>
-          <a:fillRef idx="0">
-            <a:schemeClr val="accent1"/>
-          </a:fillRef>
-          <a:effectRef idx="0">
-            <a:schemeClr val="accent1"/>
-          </a:effectRef>
-          <a:fontRef idx="minor">
-            <a:schemeClr val="tx1"/>
-          </a:fontRef>
-        </p:style>
-      </p:cxnSp>
-    </p:spTree>
-    <p:extLst>
-      <p:ext uri="{BB962C8B-B14F-4D97-AF65-F5344CB8AC3E}">
-        <p14:creationId xmlns:p14="http://schemas.microsoft.com/office/powerpoint/2010/main" val="2989024140"/>
       </p:ext>
     </p:extLst>
   </p:cSld>

--- a/utils/file/charts.pptx
+++ b/utils/file/charts.pptx
@@ -7,36 +7,37 @@
   <p:sldIdLst>
     <p:sldId id="270" r:id="rId2"/>
     <p:sldId id="289" r:id="rId3"/>
-    <p:sldId id="286" r:id="rId4"/>
-    <p:sldId id="287" r:id="rId5"/>
-    <p:sldId id="288" r:id="rId6"/>
-    <p:sldId id="258" r:id="rId7"/>
-    <p:sldId id="259" r:id="rId8"/>
-    <p:sldId id="260" r:id="rId9"/>
-    <p:sldId id="269" r:id="rId10"/>
-    <p:sldId id="261" r:id="rId11"/>
-    <p:sldId id="262" r:id="rId12"/>
-    <p:sldId id="263" r:id="rId13"/>
-    <p:sldId id="265" r:id="rId14"/>
-    <p:sldId id="266" r:id="rId15"/>
-    <p:sldId id="267" r:id="rId16"/>
-    <p:sldId id="273" r:id="rId17"/>
-    <p:sldId id="271" r:id="rId18"/>
-    <p:sldId id="268" r:id="rId19"/>
-    <p:sldId id="281" r:id="rId20"/>
-    <p:sldId id="282" r:id="rId21"/>
-    <p:sldId id="283" r:id="rId22"/>
-    <p:sldId id="284" r:id="rId23"/>
-    <p:sldId id="274" r:id="rId24"/>
-    <p:sldId id="276" r:id="rId25"/>
-    <p:sldId id="277" r:id="rId26"/>
-    <p:sldId id="278" r:id="rId27"/>
-    <p:sldId id="279" r:id="rId28"/>
-    <p:sldId id="285" r:id="rId29"/>
-    <p:sldId id="280" r:id="rId30"/>
-    <p:sldId id="264" r:id="rId31"/>
-    <p:sldId id="272" r:id="rId32"/>
-    <p:sldId id="256" r:id="rId33"/>
+    <p:sldId id="290" r:id="rId4"/>
+    <p:sldId id="286" r:id="rId5"/>
+    <p:sldId id="287" r:id="rId6"/>
+    <p:sldId id="288" r:id="rId7"/>
+    <p:sldId id="258" r:id="rId8"/>
+    <p:sldId id="259" r:id="rId9"/>
+    <p:sldId id="260" r:id="rId10"/>
+    <p:sldId id="269" r:id="rId11"/>
+    <p:sldId id="261" r:id="rId12"/>
+    <p:sldId id="262" r:id="rId13"/>
+    <p:sldId id="263" r:id="rId14"/>
+    <p:sldId id="265" r:id="rId15"/>
+    <p:sldId id="266" r:id="rId16"/>
+    <p:sldId id="267" r:id="rId17"/>
+    <p:sldId id="273" r:id="rId18"/>
+    <p:sldId id="271" r:id="rId19"/>
+    <p:sldId id="268" r:id="rId20"/>
+    <p:sldId id="281" r:id="rId21"/>
+    <p:sldId id="282" r:id="rId22"/>
+    <p:sldId id="283" r:id="rId23"/>
+    <p:sldId id="284" r:id="rId24"/>
+    <p:sldId id="274" r:id="rId25"/>
+    <p:sldId id="276" r:id="rId26"/>
+    <p:sldId id="277" r:id="rId27"/>
+    <p:sldId id="278" r:id="rId28"/>
+    <p:sldId id="279" r:id="rId29"/>
+    <p:sldId id="285" r:id="rId30"/>
+    <p:sldId id="280" r:id="rId31"/>
+    <p:sldId id="264" r:id="rId32"/>
+    <p:sldId id="272" r:id="rId33"/>
+    <p:sldId id="256" r:id="rId34"/>
   </p:sldIdLst>
   <p:sldSz cx="12192000" cy="6858000"/>
   <p:notesSz cx="6858000" cy="9144000"/>
@@ -3510,6 +3511,951 @@
         <p:cNvPr id="1" name="">
           <a:extLst>
             <a:ext uri="{FF2B5EF4-FFF2-40B4-BE49-F238E27FC236}">
+              <a16:creationId xmlns:a16="http://schemas.microsoft.com/office/drawing/2014/main" id="{17D44D37-27F9-6B4C-6ADE-230014C32D82}"/>
+            </a:ext>
+          </a:extLst>
+        </p:cNvPr>
+        <p:cNvGrpSpPr/>
+        <p:nvPr/>
+      </p:nvGrpSpPr>
+      <p:grpSpPr>
+        <a:xfrm>
+          <a:off x="0" y="0"/>
+          <a:ext cx="0" cy="0"/>
+          <a:chOff x="0" y="0"/>
+          <a:chExt cx="0" cy="0"/>
+        </a:xfrm>
+      </p:grpSpPr>
+      <p:sp>
+        <p:nvSpPr>
+          <p:cNvPr id="2" name="矩形: 圆角 1">
+            <a:extLst>
+              <a:ext uri="{FF2B5EF4-FFF2-40B4-BE49-F238E27FC236}">
+                <a16:creationId xmlns:a16="http://schemas.microsoft.com/office/drawing/2014/main" id="{78C5F840-463F-A4D0-84A1-63E21E233D5E}"/>
+              </a:ext>
+            </a:extLst>
+          </p:cNvPr>
+          <p:cNvSpPr/>
+          <p:nvPr/>
+        </p:nvSpPr>
+        <p:spPr>
+          <a:xfrm>
+            <a:off x="5267696" y="3029934"/>
+            <a:ext cx="1080000" cy="216000"/>
+          </a:xfrm>
+          <a:prstGeom prst="roundRect">
+            <a:avLst/>
+          </a:prstGeom>
+          <a:solidFill>
+            <a:schemeClr val="tx1"/>
+          </a:solidFill>
+          <a:ln w="12700">
+            <a:noFill/>
+          </a:ln>
+        </p:spPr>
+        <p:style>
+          <a:lnRef idx="2">
+            <a:schemeClr val="accent1">
+              <a:shade val="15000"/>
+            </a:schemeClr>
+          </a:lnRef>
+          <a:fillRef idx="1">
+            <a:schemeClr val="accent1"/>
+          </a:fillRef>
+          <a:effectRef idx="0">
+            <a:schemeClr val="accent1"/>
+          </a:effectRef>
+          <a:fontRef idx="minor">
+            <a:schemeClr val="lt1"/>
+          </a:fontRef>
+        </p:style>
+        <p:txBody>
+          <a:bodyPr rtlCol="0" anchor="ctr"/>
+          <a:lstStyle/>
+          <a:p>
+            <a:pPr algn="ctr"/>
+            <a:r>
+              <a:rPr lang="en-US" altLang="zh-CN" sz="800">
+                <a:latin typeface="微软雅黑" panose="020B0503020204020204" pitchFamily="34" charset="-122"/>
+                <a:ea typeface="微软雅黑" panose="020B0503020204020204" pitchFamily="34" charset="-122"/>
+              </a:rPr>
+              <a:t>background</a:t>
+            </a:r>
+            <a:endParaRPr lang="zh-CN" altLang="en-US" sz="800">
+              <a:latin typeface="微软雅黑" panose="020B0503020204020204" pitchFamily="34" charset="-122"/>
+              <a:ea typeface="微软雅黑" panose="020B0503020204020204" pitchFamily="34" charset="-122"/>
+            </a:endParaRPr>
+          </a:p>
+        </p:txBody>
+      </p:sp>
+      <p:sp>
+        <p:nvSpPr>
+          <p:cNvPr id="3" name="矩形: 圆角 2">
+            <a:extLst>
+              <a:ext uri="{FF2B5EF4-FFF2-40B4-BE49-F238E27FC236}">
+                <a16:creationId xmlns:a16="http://schemas.microsoft.com/office/drawing/2014/main" id="{F4DE9355-3EFB-8606-FA1A-6D56D6950A98}"/>
+              </a:ext>
+            </a:extLst>
+          </p:cNvPr>
+          <p:cNvSpPr/>
+          <p:nvPr/>
+        </p:nvSpPr>
+        <p:spPr>
+          <a:xfrm>
+            <a:off x="6583823" y="3218172"/>
+            <a:ext cx="1440000" cy="216000"/>
+          </a:xfrm>
+          <a:prstGeom prst="roundRect">
+            <a:avLst/>
+          </a:prstGeom>
+          <a:solidFill>
+            <a:srgbClr val="6D214F"/>
+          </a:solidFill>
+          <a:ln w="12700">
+            <a:noFill/>
+          </a:ln>
+        </p:spPr>
+        <p:style>
+          <a:lnRef idx="2">
+            <a:schemeClr val="accent1">
+              <a:shade val="15000"/>
+            </a:schemeClr>
+          </a:lnRef>
+          <a:fillRef idx="1">
+            <a:schemeClr val="accent1"/>
+          </a:fillRef>
+          <a:effectRef idx="0">
+            <a:schemeClr val="accent1"/>
+          </a:effectRef>
+          <a:fontRef idx="minor">
+            <a:schemeClr val="lt1"/>
+          </a:fontRef>
+        </p:style>
+        <p:txBody>
+          <a:bodyPr rtlCol="0" anchor="ctr"/>
+          <a:lstStyle/>
+          <a:p>
+            <a:pPr algn="ctr"/>
+            <a:r>
+              <a:rPr lang="en-US" altLang="zh-CN" sz="800">
+                <a:latin typeface="Quicksand" panose="00000500000000000000" pitchFamily="2" charset="0"/>
+              </a:rPr>
+              <a:t>background-repeat</a:t>
+            </a:r>
+            <a:endParaRPr lang="zh-CN" altLang="en-US" sz="800">
+              <a:latin typeface="Quicksand" panose="00000500000000000000" pitchFamily="2" charset="0"/>
+            </a:endParaRPr>
+          </a:p>
+        </p:txBody>
+      </p:sp>
+      <p:sp>
+        <p:nvSpPr>
+          <p:cNvPr id="4" name="矩形: 圆角 3">
+            <a:extLst>
+              <a:ext uri="{FF2B5EF4-FFF2-40B4-BE49-F238E27FC236}">
+                <a16:creationId xmlns:a16="http://schemas.microsoft.com/office/drawing/2014/main" id="{B18A25FE-C1B9-F539-4E02-CEFFCB9D0003}"/>
+              </a:ext>
+            </a:extLst>
+          </p:cNvPr>
+          <p:cNvSpPr/>
+          <p:nvPr/>
+        </p:nvSpPr>
+        <p:spPr>
+          <a:xfrm>
+            <a:off x="6583823" y="1712260"/>
+            <a:ext cx="1440000" cy="216000"/>
+          </a:xfrm>
+          <a:prstGeom prst="roundRect">
+            <a:avLst/>
+          </a:prstGeom>
+          <a:solidFill>
+            <a:srgbClr val="FA8231"/>
+          </a:solidFill>
+          <a:ln w="12700">
+            <a:noFill/>
+          </a:ln>
+        </p:spPr>
+        <p:style>
+          <a:lnRef idx="2">
+            <a:schemeClr val="accent1">
+              <a:shade val="15000"/>
+            </a:schemeClr>
+          </a:lnRef>
+          <a:fillRef idx="1">
+            <a:schemeClr val="accent1"/>
+          </a:fillRef>
+          <a:effectRef idx="0">
+            <a:schemeClr val="accent1"/>
+          </a:effectRef>
+          <a:fontRef idx="minor">
+            <a:schemeClr val="lt1"/>
+          </a:fontRef>
+        </p:style>
+        <p:txBody>
+          <a:bodyPr rtlCol="0" anchor="ctr"/>
+          <a:lstStyle/>
+          <a:p>
+            <a:pPr algn="ctr"/>
+            <a:r>
+              <a:rPr lang="en-US" altLang="zh-CN" sz="800">
+                <a:latin typeface="Quicksand" panose="00000500000000000000" pitchFamily="2" charset="0"/>
+              </a:rPr>
+              <a:t>Background-color</a:t>
+            </a:r>
+            <a:endParaRPr lang="zh-CN" altLang="en-US" sz="800">
+              <a:latin typeface="Quicksand" panose="00000500000000000000" pitchFamily="2" charset="0"/>
+            </a:endParaRPr>
+          </a:p>
+        </p:txBody>
+      </p:sp>
+      <p:sp>
+        <p:nvSpPr>
+          <p:cNvPr id="5" name="矩形: 圆角 4">
+            <a:extLst>
+              <a:ext uri="{FF2B5EF4-FFF2-40B4-BE49-F238E27FC236}">
+                <a16:creationId xmlns:a16="http://schemas.microsoft.com/office/drawing/2014/main" id="{87A792D5-D640-E90C-F6FA-DE21142430A7}"/>
+              </a:ext>
+            </a:extLst>
+          </p:cNvPr>
+          <p:cNvSpPr/>
+          <p:nvPr/>
+        </p:nvSpPr>
+        <p:spPr>
+          <a:xfrm>
+            <a:off x="6583823" y="2088738"/>
+            <a:ext cx="1440000" cy="216000"/>
+          </a:xfrm>
+          <a:prstGeom prst="roundRect">
+            <a:avLst/>
+          </a:prstGeom>
+          <a:solidFill>
+            <a:srgbClr val="EB3B5A"/>
+          </a:solidFill>
+          <a:ln w="12700">
+            <a:noFill/>
+          </a:ln>
+        </p:spPr>
+        <p:style>
+          <a:lnRef idx="2">
+            <a:schemeClr val="accent1">
+              <a:shade val="15000"/>
+            </a:schemeClr>
+          </a:lnRef>
+          <a:fillRef idx="1">
+            <a:schemeClr val="accent1"/>
+          </a:fillRef>
+          <a:effectRef idx="0">
+            <a:schemeClr val="accent1"/>
+          </a:effectRef>
+          <a:fontRef idx="minor">
+            <a:schemeClr val="lt1"/>
+          </a:fontRef>
+        </p:style>
+        <p:txBody>
+          <a:bodyPr rtlCol="0" anchor="ctr"/>
+          <a:lstStyle/>
+          <a:p>
+            <a:pPr algn="ctr"/>
+            <a:r>
+              <a:rPr lang="en-US" altLang="zh-CN" sz="800">
+                <a:latin typeface="Quicksand" panose="00000500000000000000" pitchFamily="2" charset="0"/>
+              </a:rPr>
+              <a:t>background-img</a:t>
+            </a:r>
+            <a:endParaRPr lang="zh-CN" altLang="en-US" sz="800">
+              <a:latin typeface="Quicksand" panose="00000500000000000000" pitchFamily="2" charset="0"/>
+            </a:endParaRPr>
+          </a:p>
+        </p:txBody>
+      </p:sp>
+      <p:sp>
+        <p:nvSpPr>
+          <p:cNvPr id="6" name="矩形: 圆角 5">
+            <a:extLst>
+              <a:ext uri="{FF2B5EF4-FFF2-40B4-BE49-F238E27FC236}">
+                <a16:creationId xmlns:a16="http://schemas.microsoft.com/office/drawing/2014/main" id="{F001F596-A9BC-961B-AB7F-13C5672DF725}"/>
+              </a:ext>
+            </a:extLst>
+          </p:cNvPr>
+          <p:cNvSpPr/>
+          <p:nvPr/>
+        </p:nvSpPr>
+        <p:spPr>
+          <a:xfrm>
+            <a:off x="6583823" y="2465216"/>
+            <a:ext cx="1440000" cy="216000"/>
+          </a:xfrm>
+          <a:prstGeom prst="roundRect">
+            <a:avLst/>
+          </a:prstGeom>
+          <a:solidFill>
+            <a:srgbClr val="F78FB3"/>
+          </a:solidFill>
+          <a:ln w="12700">
+            <a:noFill/>
+          </a:ln>
+        </p:spPr>
+        <p:style>
+          <a:lnRef idx="2">
+            <a:schemeClr val="accent1">
+              <a:shade val="15000"/>
+            </a:schemeClr>
+          </a:lnRef>
+          <a:fillRef idx="1">
+            <a:schemeClr val="accent1"/>
+          </a:fillRef>
+          <a:effectRef idx="0">
+            <a:schemeClr val="accent1"/>
+          </a:effectRef>
+          <a:fontRef idx="minor">
+            <a:schemeClr val="lt1"/>
+          </a:fontRef>
+        </p:style>
+        <p:txBody>
+          <a:bodyPr rtlCol="0" anchor="ctr"/>
+          <a:lstStyle/>
+          <a:p>
+            <a:pPr algn="ctr"/>
+            <a:r>
+              <a:rPr lang="en-US" altLang="zh-CN" sz="800">
+                <a:latin typeface="Quicksand" panose="00000500000000000000" pitchFamily="2" charset="0"/>
+              </a:rPr>
+              <a:t>background-position</a:t>
+            </a:r>
+            <a:endParaRPr lang="zh-CN" altLang="en-US" sz="800">
+              <a:latin typeface="Quicksand" panose="00000500000000000000" pitchFamily="2" charset="0"/>
+            </a:endParaRPr>
+          </a:p>
+        </p:txBody>
+      </p:sp>
+      <p:cxnSp>
+        <p:nvCxnSpPr>
+          <p:cNvPr id="13" name="连接符: 曲线 12">
+            <a:extLst>
+              <a:ext uri="{FF2B5EF4-FFF2-40B4-BE49-F238E27FC236}">
+                <a16:creationId xmlns:a16="http://schemas.microsoft.com/office/drawing/2014/main" id="{D857022F-FD57-CB9F-109D-F0FEA004375B}"/>
+              </a:ext>
+            </a:extLst>
+          </p:cNvPr>
+          <p:cNvCxnSpPr>
+            <a:cxnSpLocks/>
+            <a:stCxn id="2" idx="3"/>
+            <a:endCxn id="3" idx="1"/>
+          </p:cNvCxnSpPr>
+          <p:nvPr/>
+        </p:nvCxnSpPr>
+        <p:spPr>
+          <a:xfrm>
+            <a:off x="6347696" y="3137934"/>
+            <a:ext cx="236127" cy="188238"/>
+          </a:xfrm>
+          <a:prstGeom prst="curvedConnector3">
+            <a:avLst>
+              <a:gd name="adj1" fmla="val 50000"/>
+            </a:avLst>
+          </a:prstGeom>
+          <a:ln>
+            <a:solidFill>
+              <a:srgbClr val="6D214F"/>
+            </a:solidFill>
+          </a:ln>
+        </p:spPr>
+        <p:style>
+          <a:lnRef idx="1">
+            <a:schemeClr val="accent1"/>
+          </a:lnRef>
+          <a:fillRef idx="0">
+            <a:schemeClr val="accent1"/>
+          </a:fillRef>
+          <a:effectRef idx="0">
+            <a:schemeClr val="accent1"/>
+          </a:effectRef>
+          <a:fontRef idx="minor">
+            <a:schemeClr val="tx1"/>
+          </a:fontRef>
+        </p:style>
+      </p:cxnSp>
+      <p:cxnSp>
+        <p:nvCxnSpPr>
+          <p:cNvPr id="14" name="连接符: 曲线 13">
+            <a:extLst>
+              <a:ext uri="{FF2B5EF4-FFF2-40B4-BE49-F238E27FC236}">
+                <a16:creationId xmlns:a16="http://schemas.microsoft.com/office/drawing/2014/main" id="{DF152018-D11C-FF19-7282-EC631DB77FDB}"/>
+              </a:ext>
+            </a:extLst>
+          </p:cNvPr>
+          <p:cNvCxnSpPr>
+            <a:stCxn id="2" idx="3"/>
+            <a:endCxn id="5" idx="1"/>
+          </p:cNvCxnSpPr>
+          <p:nvPr/>
+        </p:nvCxnSpPr>
+        <p:spPr>
+          <a:xfrm flipV="1">
+            <a:off x="6347696" y="2196738"/>
+            <a:ext cx="236127" cy="941196"/>
+          </a:xfrm>
+          <a:prstGeom prst="curvedConnector3">
+            <a:avLst/>
+          </a:prstGeom>
+          <a:ln>
+            <a:solidFill>
+              <a:srgbClr val="FF0000"/>
+            </a:solidFill>
+          </a:ln>
+        </p:spPr>
+        <p:style>
+          <a:lnRef idx="1">
+            <a:schemeClr val="accent1"/>
+          </a:lnRef>
+          <a:fillRef idx="0">
+            <a:schemeClr val="accent1"/>
+          </a:fillRef>
+          <a:effectRef idx="0">
+            <a:schemeClr val="accent1"/>
+          </a:effectRef>
+          <a:fontRef idx="minor">
+            <a:schemeClr val="tx1"/>
+          </a:fontRef>
+        </p:style>
+      </p:cxnSp>
+      <p:cxnSp>
+        <p:nvCxnSpPr>
+          <p:cNvPr id="15" name="连接符: 曲线 14">
+            <a:extLst>
+              <a:ext uri="{FF2B5EF4-FFF2-40B4-BE49-F238E27FC236}">
+                <a16:creationId xmlns:a16="http://schemas.microsoft.com/office/drawing/2014/main" id="{D776544B-8805-064E-FB86-8357089F4115}"/>
+              </a:ext>
+            </a:extLst>
+          </p:cNvPr>
+          <p:cNvCxnSpPr>
+            <a:stCxn id="2" idx="3"/>
+            <a:endCxn id="6" idx="1"/>
+          </p:cNvCxnSpPr>
+          <p:nvPr/>
+        </p:nvCxnSpPr>
+        <p:spPr>
+          <a:xfrm flipV="1">
+            <a:off x="6347696" y="2573216"/>
+            <a:ext cx="236127" cy="564718"/>
+          </a:xfrm>
+          <a:prstGeom prst="curvedConnector3">
+            <a:avLst/>
+          </a:prstGeom>
+          <a:ln>
+            <a:solidFill>
+              <a:srgbClr val="F78FB3"/>
+            </a:solidFill>
+          </a:ln>
+        </p:spPr>
+        <p:style>
+          <a:lnRef idx="1">
+            <a:schemeClr val="accent1"/>
+          </a:lnRef>
+          <a:fillRef idx="0">
+            <a:schemeClr val="accent1"/>
+          </a:fillRef>
+          <a:effectRef idx="0">
+            <a:schemeClr val="accent1"/>
+          </a:effectRef>
+          <a:fontRef idx="minor">
+            <a:schemeClr val="tx1"/>
+          </a:fontRef>
+        </p:style>
+      </p:cxnSp>
+      <p:cxnSp>
+        <p:nvCxnSpPr>
+          <p:cNvPr id="16" name="连接符: 曲线 15">
+            <a:extLst>
+              <a:ext uri="{FF2B5EF4-FFF2-40B4-BE49-F238E27FC236}">
+                <a16:creationId xmlns:a16="http://schemas.microsoft.com/office/drawing/2014/main" id="{5530CC53-CE6B-A691-48F9-E0FE20C352A0}"/>
+              </a:ext>
+            </a:extLst>
+          </p:cNvPr>
+          <p:cNvCxnSpPr>
+            <a:stCxn id="4" idx="1"/>
+            <a:endCxn id="2" idx="3"/>
+          </p:cNvCxnSpPr>
+          <p:nvPr/>
+        </p:nvCxnSpPr>
+        <p:spPr>
+          <a:xfrm rot="10800000" flipV="1">
+            <a:off x="6347697" y="1820260"/>
+            <a:ext cx="236127" cy="1317674"/>
+          </a:xfrm>
+          <a:prstGeom prst="curvedConnector3">
+            <a:avLst/>
+          </a:prstGeom>
+          <a:ln>
+            <a:solidFill>
+              <a:srgbClr val="FFC000"/>
+            </a:solidFill>
+          </a:ln>
+        </p:spPr>
+        <p:style>
+          <a:lnRef idx="1">
+            <a:schemeClr val="accent1"/>
+          </a:lnRef>
+          <a:fillRef idx="0">
+            <a:schemeClr val="accent1"/>
+          </a:fillRef>
+          <a:effectRef idx="0">
+            <a:schemeClr val="accent1"/>
+          </a:effectRef>
+          <a:fontRef idx="minor">
+            <a:schemeClr val="tx1"/>
+          </a:fontRef>
+        </p:style>
+      </p:cxnSp>
+      <p:sp>
+        <p:nvSpPr>
+          <p:cNvPr id="12" name="矩形: 圆角 11">
+            <a:extLst>
+              <a:ext uri="{FF2B5EF4-FFF2-40B4-BE49-F238E27FC236}">
+                <a16:creationId xmlns:a16="http://schemas.microsoft.com/office/drawing/2014/main" id="{CA690FCB-6050-34A5-12AA-227C0F7253CA}"/>
+              </a:ext>
+            </a:extLst>
+          </p:cNvPr>
+          <p:cNvSpPr/>
+          <p:nvPr/>
+        </p:nvSpPr>
+        <p:spPr>
+          <a:xfrm>
+            <a:off x="6583823" y="2841694"/>
+            <a:ext cx="1440000" cy="216000"/>
+          </a:xfrm>
+          <a:prstGeom prst="roundRect">
+            <a:avLst/>
+          </a:prstGeom>
+          <a:solidFill>
+            <a:srgbClr val="8854D0"/>
+          </a:solidFill>
+          <a:ln w="12700">
+            <a:noFill/>
+          </a:ln>
+        </p:spPr>
+        <p:style>
+          <a:lnRef idx="2">
+            <a:schemeClr val="accent1">
+              <a:shade val="15000"/>
+            </a:schemeClr>
+          </a:lnRef>
+          <a:fillRef idx="1">
+            <a:schemeClr val="accent1"/>
+          </a:fillRef>
+          <a:effectRef idx="0">
+            <a:schemeClr val="accent1"/>
+          </a:effectRef>
+          <a:fontRef idx="minor">
+            <a:schemeClr val="lt1"/>
+          </a:fontRef>
+        </p:style>
+        <p:txBody>
+          <a:bodyPr rtlCol="0" anchor="ctr"/>
+          <a:lstStyle/>
+          <a:p>
+            <a:pPr algn="ctr"/>
+            <a:r>
+              <a:rPr lang="en-US" altLang="zh-CN" sz="800">
+                <a:latin typeface="Quicksand" panose="00000500000000000000" pitchFamily="2" charset="0"/>
+              </a:rPr>
+              <a:t>background-size</a:t>
+            </a:r>
+            <a:endParaRPr lang="zh-CN" altLang="en-US" sz="800">
+              <a:latin typeface="Quicksand" panose="00000500000000000000" pitchFamily="2" charset="0"/>
+            </a:endParaRPr>
+          </a:p>
+        </p:txBody>
+      </p:sp>
+      <p:cxnSp>
+        <p:nvCxnSpPr>
+          <p:cNvPr id="21" name="连接符: 曲线 20">
+            <a:extLst>
+              <a:ext uri="{FF2B5EF4-FFF2-40B4-BE49-F238E27FC236}">
+                <a16:creationId xmlns:a16="http://schemas.microsoft.com/office/drawing/2014/main" id="{B1FC38B2-3763-8A0C-56A4-C088C18DDBC2}"/>
+              </a:ext>
+            </a:extLst>
+          </p:cNvPr>
+          <p:cNvCxnSpPr>
+            <a:cxnSpLocks/>
+            <a:stCxn id="2" idx="3"/>
+            <a:endCxn id="12" idx="1"/>
+          </p:cNvCxnSpPr>
+          <p:nvPr/>
+        </p:nvCxnSpPr>
+        <p:spPr>
+          <a:xfrm flipV="1">
+            <a:off x="6347696" y="2949694"/>
+            <a:ext cx="236127" cy="188240"/>
+          </a:xfrm>
+          <a:prstGeom prst="curvedConnector3">
+            <a:avLst>
+              <a:gd name="adj1" fmla="val 50000"/>
+            </a:avLst>
+          </a:prstGeom>
+          <a:ln>
+            <a:solidFill>
+              <a:srgbClr val="8854D0"/>
+            </a:solidFill>
+          </a:ln>
+        </p:spPr>
+        <p:style>
+          <a:lnRef idx="1">
+            <a:schemeClr val="accent1"/>
+          </a:lnRef>
+          <a:fillRef idx="0">
+            <a:schemeClr val="accent1"/>
+          </a:fillRef>
+          <a:effectRef idx="0">
+            <a:schemeClr val="accent1"/>
+          </a:effectRef>
+          <a:fontRef idx="minor">
+            <a:schemeClr val="tx1"/>
+          </a:fontRef>
+        </p:style>
+      </p:cxnSp>
+      <p:sp>
+        <p:nvSpPr>
+          <p:cNvPr id="9" name="矩形: 圆角 8">
+            <a:extLst>
+              <a:ext uri="{FF2B5EF4-FFF2-40B4-BE49-F238E27FC236}">
+                <a16:creationId xmlns:a16="http://schemas.microsoft.com/office/drawing/2014/main" id="{5704B543-A087-6258-53B2-3382506CB5CB}"/>
+              </a:ext>
+            </a:extLst>
+          </p:cNvPr>
+          <p:cNvSpPr/>
+          <p:nvPr/>
+        </p:nvSpPr>
+        <p:spPr>
+          <a:xfrm>
+            <a:off x="6583823" y="3971128"/>
+            <a:ext cx="1440000" cy="216000"/>
+          </a:xfrm>
+          <a:prstGeom prst="roundRect">
+            <a:avLst/>
+          </a:prstGeom>
+          <a:solidFill>
+            <a:srgbClr val="3DC1D3"/>
+          </a:solidFill>
+          <a:ln w="12700">
+            <a:noFill/>
+          </a:ln>
+        </p:spPr>
+        <p:style>
+          <a:lnRef idx="2">
+            <a:schemeClr val="accent1">
+              <a:shade val="15000"/>
+            </a:schemeClr>
+          </a:lnRef>
+          <a:fillRef idx="1">
+            <a:schemeClr val="accent1"/>
+          </a:fillRef>
+          <a:effectRef idx="0">
+            <a:schemeClr val="accent1"/>
+          </a:effectRef>
+          <a:fontRef idx="minor">
+            <a:schemeClr val="lt1"/>
+          </a:fontRef>
+        </p:style>
+        <p:txBody>
+          <a:bodyPr rtlCol="0" anchor="ctr"/>
+          <a:lstStyle/>
+          <a:p>
+            <a:pPr algn="ctr"/>
+            <a:r>
+              <a:rPr lang="en-US" altLang="zh-CN" sz="800">
+                <a:latin typeface="Quicksand" panose="00000500000000000000" pitchFamily="2" charset="0"/>
+              </a:rPr>
+              <a:t>background-clip</a:t>
+            </a:r>
+            <a:endParaRPr lang="zh-CN" altLang="en-US" sz="800">
+              <a:latin typeface="Quicksand" panose="00000500000000000000" pitchFamily="2" charset="0"/>
+            </a:endParaRPr>
+          </a:p>
+        </p:txBody>
+      </p:sp>
+      <p:cxnSp>
+        <p:nvCxnSpPr>
+          <p:cNvPr id="11" name="连接符: 曲线 10">
+            <a:extLst>
+              <a:ext uri="{FF2B5EF4-FFF2-40B4-BE49-F238E27FC236}">
+                <a16:creationId xmlns:a16="http://schemas.microsoft.com/office/drawing/2014/main" id="{EADC1F19-9641-15F6-3ECE-3B5E53A4B1CD}"/>
+              </a:ext>
+            </a:extLst>
+          </p:cNvPr>
+          <p:cNvCxnSpPr>
+            <a:cxnSpLocks/>
+            <a:stCxn id="2" idx="3"/>
+            <a:endCxn id="9" idx="1"/>
+          </p:cNvCxnSpPr>
+          <p:nvPr/>
+        </p:nvCxnSpPr>
+        <p:spPr>
+          <a:xfrm>
+            <a:off x="6347696" y="3137934"/>
+            <a:ext cx="236127" cy="941194"/>
+          </a:xfrm>
+          <a:prstGeom prst="curvedConnector3">
+            <a:avLst>
+              <a:gd name="adj1" fmla="val 50000"/>
+            </a:avLst>
+          </a:prstGeom>
+          <a:ln>
+            <a:solidFill>
+              <a:srgbClr val="3DC1D3"/>
+            </a:solidFill>
+          </a:ln>
+        </p:spPr>
+        <p:style>
+          <a:lnRef idx="1">
+            <a:schemeClr val="accent1"/>
+          </a:lnRef>
+          <a:fillRef idx="0">
+            <a:schemeClr val="accent1"/>
+          </a:fillRef>
+          <a:effectRef idx="0">
+            <a:schemeClr val="accent1"/>
+          </a:effectRef>
+          <a:fontRef idx="minor">
+            <a:schemeClr val="tx1"/>
+          </a:fontRef>
+        </p:style>
+      </p:cxnSp>
+      <p:sp>
+        <p:nvSpPr>
+          <p:cNvPr id="28" name="矩形: 圆角 27">
+            <a:extLst>
+              <a:ext uri="{FF2B5EF4-FFF2-40B4-BE49-F238E27FC236}">
+                <a16:creationId xmlns:a16="http://schemas.microsoft.com/office/drawing/2014/main" id="{2D76B52C-A377-4760-EE4D-8E1F7250DC8F}"/>
+              </a:ext>
+            </a:extLst>
+          </p:cNvPr>
+          <p:cNvSpPr/>
+          <p:nvPr/>
+        </p:nvSpPr>
+        <p:spPr>
+          <a:xfrm>
+            <a:off x="6583823" y="3594650"/>
+            <a:ext cx="1440000" cy="216000"/>
+          </a:xfrm>
+          <a:prstGeom prst="roundRect">
+            <a:avLst/>
+          </a:prstGeom>
+          <a:solidFill>
+            <a:srgbClr val="20BF6B"/>
+          </a:solidFill>
+          <a:ln w="12700">
+            <a:noFill/>
+          </a:ln>
+        </p:spPr>
+        <p:style>
+          <a:lnRef idx="2">
+            <a:schemeClr val="accent1">
+              <a:shade val="15000"/>
+            </a:schemeClr>
+          </a:lnRef>
+          <a:fillRef idx="1">
+            <a:schemeClr val="accent1"/>
+          </a:fillRef>
+          <a:effectRef idx="0">
+            <a:schemeClr val="accent1"/>
+          </a:effectRef>
+          <a:fontRef idx="minor">
+            <a:schemeClr val="lt1"/>
+          </a:fontRef>
+        </p:style>
+        <p:txBody>
+          <a:bodyPr rtlCol="0" anchor="ctr"/>
+          <a:lstStyle/>
+          <a:p>
+            <a:pPr algn="ctr"/>
+            <a:r>
+              <a:rPr lang="en-US" altLang="zh-CN" sz="800">
+                <a:latin typeface="Quicksand" panose="00000500000000000000" pitchFamily="2" charset="0"/>
+              </a:rPr>
+              <a:t>background-origin</a:t>
+            </a:r>
+            <a:endParaRPr lang="zh-CN" altLang="en-US" sz="800">
+              <a:latin typeface="Quicksand" panose="00000500000000000000" pitchFamily="2" charset="0"/>
+            </a:endParaRPr>
+          </a:p>
+        </p:txBody>
+      </p:sp>
+      <p:cxnSp>
+        <p:nvCxnSpPr>
+          <p:cNvPr id="29" name="连接符: 曲线 28">
+            <a:extLst>
+              <a:ext uri="{FF2B5EF4-FFF2-40B4-BE49-F238E27FC236}">
+                <a16:creationId xmlns:a16="http://schemas.microsoft.com/office/drawing/2014/main" id="{EF08E3E2-D366-FE1C-85A8-77605DB967B3}"/>
+              </a:ext>
+            </a:extLst>
+          </p:cNvPr>
+          <p:cNvCxnSpPr>
+            <a:cxnSpLocks/>
+            <a:stCxn id="28" idx="1"/>
+            <a:endCxn id="2" idx="3"/>
+          </p:cNvCxnSpPr>
+          <p:nvPr/>
+        </p:nvCxnSpPr>
+        <p:spPr>
+          <a:xfrm rot="10800000">
+            <a:off x="6347697" y="3137934"/>
+            <a:ext cx="236127" cy="564716"/>
+          </a:xfrm>
+          <a:prstGeom prst="curvedConnector3">
+            <a:avLst>
+              <a:gd name="adj1" fmla="val 50000"/>
+            </a:avLst>
+          </a:prstGeom>
+          <a:ln>
+            <a:solidFill>
+              <a:srgbClr val="20BF6B"/>
+            </a:solidFill>
+          </a:ln>
+        </p:spPr>
+        <p:style>
+          <a:lnRef idx="1">
+            <a:schemeClr val="accent1"/>
+          </a:lnRef>
+          <a:fillRef idx="0">
+            <a:schemeClr val="accent1"/>
+          </a:fillRef>
+          <a:effectRef idx="0">
+            <a:schemeClr val="accent1"/>
+          </a:effectRef>
+          <a:fontRef idx="minor">
+            <a:schemeClr val="tx1"/>
+          </a:fontRef>
+        </p:style>
+      </p:cxnSp>
+      <p:sp>
+        <p:nvSpPr>
+          <p:cNvPr id="24" name="矩形: 圆角 8">
+            <a:extLst>
+              <a:ext uri="{FF2B5EF4-FFF2-40B4-BE49-F238E27FC236}">
+                <a16:creationId xmlns:a16="http://schemas.microsoft.com/office/drawing/2014/main" id="{A6C27A23-18E4-76C2-DEF7-34D22EC06C21}"/>
+              </a:ext>
+            </a:extLst>
+          </p:cNvPr>
+          <p:cNvSpPr/>
+          <p:nvPr/>
+        </p:nvSpPr>
+        <p:spPr>
+          <a:xfrm>
+            <a:off x="6583823" y="4347608"/>
+            <a:ext cx="1440000" cy="216000"/>
+          </a:xfrm>
+          <a:prstGeom prst="roundRect">
+            <a:avLst/>
+          </a:prstGeom>
+          <a:solidFill>
+            <a:srgbClr val="0070C0"/>
+          </a:solidFill>
+          <a:ln w="12700">
+            <a:noFill/>
+          </a:ln>
+        </p:spPr>
+        <p:style>
+          <a:lnRef idx="2">
+            <a:schemeClr val="accent1">
+              <a:shade val="15000"/>
+            </a:schemeClr>
+          </a:lnRef>
+          <a:fillRef idx="1">
+            <a:schemeClr val="accent1"/>
+          </a:fillRef>
+          <a:effectRef idx="0">
+            <a:schemeClr val="accent1"/>
+          </a:effectRef>
+          <a:fontRef idx="minor">
+            <a:schemeClr val="lt1"/>
+          </a:fontRef>
+        </p:style>
+        <p:txBody>
+          <a:bodyPr rtlCol="0" anchor="ctr"/>
+          <a:lstStyle/>
+          <a:p>
+            <a:pPr algn="ctr"/>
+            <a:r>
+              <a:rPr lang="en-US" altLang="zh-CN" sz="800">
+                <a:latin typeface="Quicksand" panose="00000500000000000000" pitchFamily="2" charset="0"/>
+              </a:rPr>
+              <a:t>background-attachment</a:t>
+            </a:r>
+            <a:endParaRPr lang="zh-CN" altLang="en-US" sz="800">
+              <a:latin typeface="Quicksand" panose="00000500000000000000" pitchFamily="2" charset="0"/>
+            </a:endParaRPr>
+          </a:p>
+        </p:txBody>
+      </p:sp>
+      <p:cxnSp>
+        <p:nvCxnSpPr>
+          <p:cNvPr id="46" name="连接符: 曲线 10">
+            <a:extLst>
+              <a:ext uri="{FF2B5EF4-FFF2-40B4-BE49-F238E27FC236}">
+                <a16:creationId xmlns:a16="http://schemas.microsoft.com/office/drawing/2014/main" id="{32E5C4EC-C977-10C6-8D74-4BEFAAD30A4E}"/>
+              </a:ext>
+            </a:extLst>
+          </p:cNvPr>
+          <p:cNvCxnSpPr>
+            <a:cxnSpLocks/>
+            <a:stCxn id="2" idx="3"/>
+            <a:endCxn id="24" idx="1"/>
+          </p:cNvCxnSpPr>
+          <p:nvPr/>
+        </p:nvCxnSpPr>
+        <p:spPr>
+          <a:xfrm>
+            <a:off x="6347696" y="3137934"/>
+            <a:ext cx="236127" cy="1317674"/>
+          </a:xfrm>
+          <a:prstGeom prst="curvedConnector3">
+            <a:avLst>
+              <a:gd name="adj1" fmla="val 50000"/>
+            </a:avLst>
+          </a:prstGeom>
+          <a:ln>
+            <a:solidFill>
+              <a:srgbClr val="0070C0"/>
+            </a:solidFill>
+          </a:ln>
+        </p:spPr>
+        <p:style>
+          <a:lnRef idx="1">
+            <a:schemeClr val="accent1"/>
+          </a:lnRef>
+          <a:fillRef idx="0">
+            <a:schemeClr val="accent1"/>
+          </a:fillRef>
+          <a:effectRef idx="0">
+            <a:schemeClr val="accent1"/>
+          </a:effectRef>
+          <a:fontRef idx="minor">
+            <a:schemeClr val="tx1"/>
+          </a:fontRef>
+        </p:style>
+      </p:cxnSp>
+    </p:spTree>
+    <p:extLst>
+      <p:ext uri="{BB962C8B-B14F-4D97-AF65-F5344CB8AC3E}">
+        <p14:creationId xmlns:p14="http://schemas.microsoft.com/office/powerpoint/2010/main" val="1414077195"/>
+      </p:ext>
+    </p:extLst>
+  </p:cSld>
+  <p:clrMapOvr>
+    <a:masterClrMapping/>
+  </p:clrMapOvr>
+</p:sld>
+</file>
+
+<file path=ppt/slides/slide11.xml><?xml version="1.0" encoding="utf-8"?>
+<p:sld xmlns:a="http://schemas.openxmlformats.org/drawingml/2006/main" xmlns:r="http://schemas.openxmlformats.org/officeDocument/2006/relationships" xmlns:p="http://schemas.openxmlformats.org/presentationml/2006/main">
+  <p:cSld>
+    <p:spTree>
+      <p:nvGrpSpPr>
+        <p:cNvPr id="1" name="">
+          <a:extLst>
+            <a:ext uri="{FF2B5EF4-FFF2-40B4-BE49-F238E27FC236}">
               <a16:creationId xmlns:a16="http://schemas.microsoft.com/office/drawing/2014/main" id="{18E2CAE3-A1AC-3F4E-935C-0F5B86F0EE15}"/>
             </a:ext>
           </a:extLst>
@@ -5231,7 +6177,7 @@
 </p:sld>
 </file>
 
-<file path=ppt/slides/slide11.xml><?xml version="1.0" encoding="utf-8"?>
+<file path=ppt/slides/slide12.xml><?xml version="1.0" encoding="utf-8"?>
 <p:sld xmlns:a="http://schemas.openxmlformats.org/drawingml/2006/main" xmlns:r="http://schemas.openxmlformats.org/officeDocument/2006/relationships" xmlns:p="http://schemas.openxmlformats.org/presentationml/2006/main">
   <p:cSld>
     <p:spTree>
@@ -6197,7 +7143,7 @@
 </p:sld>
 </file>
 
-<file path=ppt/slides/slide12.xml><?xml version="1.0" encoding="utf-8"?>
+<file path=ppt/slides/slide13.xml><?xml version="1.0" encoding="utf-8"?>
 <p:sld xmlns:a="http://schemas.openxmlformats.org/drawingml/2006/main" xmlns:r="http://schemas.openxmlformats.org/officeDocument/2006/relationships" xmlns:p="http://schemas.openxmlformats.org/presentationml/2006/main">
   <p:cSld>
     <p:spTree>
@@ -6791,7 +7737,7 @@
 </p:sld>
 </file>
 
-<file path=ppt/slides/slide13.xml><?xml version="1.0" encoding="utf-8"?>
+<file path=ppt/slides/slide14.xml><?xml version="1.0" encoding="utf-8"?>
 <p:sld xmlns:a="http://schemas.openxmlformats.org/drawingml/2006/main" xmlns:r="http://schemas.openxmlformats.org/officeDocument/2006/relationships" xmlns:p="http://schemas.openxmlformats.org/presentationml/2006/main">
   <p:cSld>
     <p:spTree>
@@ -8406,7 +9352,7 @@
 </p:sld>
 </file>
 
-<file path=ppt/slides/slide14.xml><?xml version="1.0" encoding="utf-8"?>
+<file path=ppt/slides/slide15.xml><?xml version="1.0" encoding="utf-8"?>
 <p:sld xmlns:a="http://schemas.openxmlformats.org/drawingml/2006/main" xmlns:r="http://schemas.openxmlformats.org/officeDocument/2006/relationships" xmlns:p="http://schemas.openxmlformats.org/presentationml/2006/main">
   <p:cSld>
     <p:spTree>
@@ -11411,7 +12357,7 @@
 </p:sld>
 </file>
 
-<file path=ppt/slides/slide15.xml><?xml version="1.0" encoding="utf-8"?>
+<file path=ppt/slides/slide16.xml><?xml version="1.0" encoding="utf-8"?>
 <p:sld xmlns:a="http://schemas.openxmlformats.org/drawingml/2006/main" xmlns:r="http://schemas.openxmlformats.org/officeDocument/2006/relationships" xmlns:p="http://schemas.openxmlformats.org/presentationml/2006/main">
   <p:cSld>
     <p:spTree>
@@ -13994,7 +14940,7 @@
 </p:sld>
 </file>
 
-<file path=ppt/slides/slide16.xml><?xml version="1.0" encoding="utf-8"?>
+<file path=ppt/slides/slide17.xml><?xml version="1.0" encoding="utf-8"?>
 <p:sld xmlns:a="http://schemas.openxmlformats.org/drawingml/2006/main" xmlns:r="http://schemas.openxmlformats.org/officeDocument/2006/relationships" xmlns:p="http://schemas.openxmlformats.org/presentationml/2006/main">
   <p:cSld>
     <p:spTree>
@@ -15399,7 +16345,7 @@
 </p:sld>
 </file>
 
-<file path=ppt/slides/slide17.xml><?xml version="1.0" encoding="utf-8"?>
+<file path=ppt/slides/slide18.xml><?xml version="1.0" encoding="utf-8"?>
 <p:sld xmlns:a="http://schemas.openxmlformats.org/drawingml/2006/main" xmlns:r="http://schemas.openxmlformats.org/officeDocument/2006/relationships" xmlns:p="http://schemas.openxmlformats.org/presentationml/2006/main">
   <p:cSld>
     <p:spTree>
@@ -16607,7 +17553,7 @@
 </p:sld>
 </file>
 
-<file path=ppt/slides/slide18.xml><?xml version="1.0" encoding="utf-8"?>
+<file path=ppt/slides/slide19.xml><?xml version="1.0" encoding="utf-8"?>
 <p:sld xmlns:a="http://schemas.openxmlformats.org/drawingml/2006/main" xmlns:r="http://schemas.openxmlformats.org/officeDocument/2006/relationships" xmlns:p="http://schemas.openxmlformats.org/presentationml/2006/main">
   <p:cSld>
     <p:spTree>
@@ -16942,452 +17888,6 @@
     <p:extLst>
       <p:ext uri="{BB962C8B-B14F-4D97-AF65-F5344CB8AC3E}">
         <p14:creationId xmlns:p14="http://schemas.microsoft.com/office/powerpoint/2010/main" val="1393457208"/>
-      </p:ext>
-    </p:extLst>
-  </p:cSld>
-  <p:clrMapOvr>
-    <a:masterClrMapping/>
-  </p:clrMapOvr>
-</p:sld>
-</file>
-
-<file path=ppt/slides/slide19.xml><?xml version="1.0" encoding="utf-8"?>
-<p:sld xmlns:a="http://schemas.openxmlformats.org/drawingml/2006/main" xmlns:r="http://schemas.openxmlformats.org/officeDocument/2006/relationships" xmlns:p="http://schemas.openxmlformats.org/presentationml/2006/main">
-  <p:cSld>
-    <p:spTree>
-      <p:nvGrpSpPr>
-        <p:cNvPr id="1" name="">
-          <a:extLst>
-            <a:ext uri="{FF2B5EF4-FFF2-40B4-BE49-F238E27FC236}">
-              <a16:creationId xmlns:a16="http://schemas.microsoft.com/office/drawing/2014/main" id="{CDC8A674-4B20-52FC-4D14-C7C25881D114}"/>
-            </a:ext>
-          </a:extLst>
-        </p:cNvPr>
-        <p:cNvGrpSpPr/>
-        <p:nvPr/>
-      </p:nvGrpSpPr>
-      <p:grpSpPr>
-        <a:xfrm>
-          <a:off x="0" y="0"/>
-          <a:ext cx="0" cy="0"/>
-          <a:chOff x="0" y="0"/>
-          <a:chExt cx="0" cy="0"/>
-        </a:xfrm>
-      </p:grpSpPr>
-      <p:sp>
-        <p:nvSpPr>
-          <p:cNvPr id="2" name="Rectangle 1">
-            <a:extLst>
-              <a:ext uri="{FF2B5EF4-FFF2-40B4-BE49-F238E27FC236}">
-                <a16:creationId xmlns:a16="http://schemas.microsoft.com/office/drawing/2014/main" id="{F22D05D8-3AED-74C1-0CE8-D5D7495EB663}"/>
-              </a:ext>
-            </a:extLst>
-          </p:cNvPr>
-          <p:cNvSpPr/>
-          <p:nvPr/>
-        </p:nvSpPr>
-        <p:spPr>
-          <a:xfrm>
-            <a:off x="3757723" y="1589964"/>
-            <a:ext cx="3600000" cy="1800000"/>
-          </a:xfrm>
-          <a:prstGeom prst="rect">
-            <a:avLst/>
-          </a:prstGeom>
-          <a:solidFill>
-            <a:schemeClr val="bg1">
-              <a:lumMod val="95000"/>
-            </a:schemeClr>
-          </a:solidFill>
-          <a:ln>
-            <a:noFill/>
-          </a:ln>
-        </p:spPr>
-        <p:style>
-          <a:lnRef idx="2">
-            <a:schemeClr val="accent1">
-              <a:shade val="15000"/>
-            </a:schemeClr>
-          </a:lnRef>
-          <a:fillRef idx="1">
-            <a:schemeClr val="accent1"/>
-          </a:fillRef>
-          <a:effectRef idx="0">
-            <a:schemeClr val="accent1"/>
-          </a:effectRef>
-          <a:fontRef idx="minor">
-            <a:schemeClr val="lt1"/>
-          </a:fontRef>
-        </p:style>
-        <p:txBody>
-          <a:bodyPr rtlCol="0" anchor="ctr"/>
-          <a:lstStyle/>
-          <a:p>
-            <a:pPr algn="ctr"/>
-            <a:endParaRPr lang="zh-CN" altLang="en-US" sz="1200">
-              <a:solidFill>
-                <a:schemeClr val="accent6">
-                  <a:lumMod val="75000"/>
-                </a:schemeClr>
-              </a:solidFill>
-              <a:latin typeface="Poppins" panose="00000500000000000000" pitchFamily="2" charset="0"/>
-              <a:cs typeface="Poppins" panose="00000500000000000000" pitchFamily="2" charset="0"/>
-            </a:endParaRPr>
-          </a:p>
-        </p:txBody>
-      </p:sp>
-      <p:sp>
-        <p:nvSpPr>
-          <p:cNvPr id="3" name="Rectangle 2">
-            <a:extLst>
-              <a:ext uri="{FF2B5EF4-FFF2-40B4-BE49-F238E27FC236}">
-                <a16:creationId xmlns:a16="http://schemas.microsoft.com/office/drawing/2014/main" id="{7F930297-9DE3-3DCF-AABF-29D8326193C9}"/>
-              </a:ext>
-            </a:extLst>
-          </p:cNvPr>
-          <p:cNvSpPr/>
-          <p:nvPr/>
-        </p:nvSpPr>
-        <p:spPr>
-          <a:xfrm>
-            <a:off x="3757723" y="1589964"/>
-            <a:ext cx="3600000" cy="900000"/>
-          </a:xfrm>
-          <a:prstGeom prst="rect">
-            <a:avLst/>
-          </a:prstGeom>
-          <a:solidFill>
-            <a:srgbClr val="92D050"/>
-          </a:solidFill>
-          <a:ln>
-            <a:noFill/>
-          </a:ln>
-        </p:spPr>
-        <p:style>
-          <a:lnRef idx="2">
-            <a:schemeClr val="accent1">
-              <a:shade val="15000"/>
-            </a:schemeClr>
-          </a:lnRef>
-          <a:fillRef idx="1">
-            <a:schemeClr val="accent1"/>
-          </a:fillRef>
-          <a:effectRef idx="0">
-            <a:schemeClr val="accent1"/>
-          </a:effectRef>
-          <a:fontRef idx="minor">
-            <a:schemeClr val="lt1"/>
-          </a:fontRef>
-        </p:style>
-        <p:txBody>
-          <a:bodyPr rtlCol="0" anchor="b" anchorCtr="0"/>
-          <a:lstStyle/>
-          <a:p>
-            <a:r>
-              <a:rPr lang="en-US" altLang="zh-CN" sz="1200">
-                <a:latin typeface="Poppins" panose="00000500000000000000" pitchFamily="2" charset="0"/>
-                <a:cs typeface="Poppins" panose="00000500000000000000" pitchFamily="2" charset="0"/>
-              </a:rPr>
-              <a:t>start</a:t>
-            </a:r>
-            <a:endParaRPr lang="zh-CN" altLang="en-US" sz="1200">
-              <a:latin typeface="Poppins" panose="00000500000000000000" pitchFamily="2" charset="0"/>
-              <a:cs typeface="Poppins" panose="00000500000000000000" pitchFamily="2" charset="0"/>
-            </a:endParaRPr>
-          </a:p>
-        </p:txBody>
-      </p:sp>
-      <p:sp>
-        <p:nvSpPr>
-          <p:cNvPr id="4" name="Rectangle 3">
-            <a:extLst>
-              <a:ext uri="{FF2B5EF4-FFF2-40B4-BE49-F238E27FC236}">
-                <a16:creationId xmlns:a16="http://schemas.microsoft.com/office/drawing/2014/main" id="{DD00528E-40A9-8D7F-7992-8A0D03F1FC6B}"/>
-              </a:ext>
-            </a:extLst>
-          </p:cNvPr>
-          <p:cNvSpPr/>
-          <p:nvPr/>
-        </p:nvSpPr>
-        <p:spPr>
-          <a:xfrm>
-            <a:off x="3757723" y="3029964"/>
-            <a:ext cx="3600000" cy="360000"/>
-          </a:xfrm>
-          <a:prstGeom prst="rect">
-            <a:avLst/>
-          </a:prstGeom>
-          <a:solidFill>
-            <a:srgbClr val="92D050"/>
-          </a:solidFill>
-          <a:ln>
-            <a:noFill/>
-          </a:ln>
-        </p:spPr>
-        <p:style>
-          <a:lnRef idx="2">
-            <a:schemeClr val="accent1">
-              <a:shade val="15000"/>
-            </a:schemeClr>
-          </a:lnRef>
-          <a:fillRef idx="1">
-            <a:schemeClr val="accent1"/>
-          </a:fillRef>
-          <a:effectRef idx="0">
-            <a:schemeClr val="accent1"/>
-          </a:effectRef>
-          <a:fontRef idx="minor">
-            <a:schemeClr val="lt1"/>
-          </a:fontRef>
-        </p:style>
-        <p:txBody>
-          <a:bodyPr rtlCol="0" anchor="t" anchorCtr="0"/>
-          <a:lstStyle/>
-          <a:p>
-            <a:r>
-              <a:rPr lang="en-US" altLang="zh-CN" sz="1200">
-                <a:latin typeface="Poppins" panose="00000500000000000000" pitchFamily="2" charset="0"/>
-                <a:cs typeface="Poppins" panose="00000500000000000000" pitchFamily="2" charset="0"/>
-              </a:rPr>
-              <a:t>end</a:t>
-            </a:r>
-            <a:endParaRPr lang="zh-CN" altLang="en-US" sz="1200">
-              <a:latin typeface="Poppins" panose="00000500000000000000" pitchFamily="2" charset="0"/>
-              <a:cs typeface="Poppins" panose="00000500000000000000" pitchFamily="2" charset="0"/>
-            </a:endParaRPr>
-          </a:p>
-        </p:txBody>
-      </p:sp>
-      <p:sp>
-        <p:nvSpPr>
-          <p:cNvPr id="5" name="文本框 4">
-            <a:extLst>
-              <a:ext uri="{FF2B5EF4-FFF2-40B4-BE49-F238E27FC236}">
-                <a16:creationId xmlns:a16="http://schemas.microsoft.com/office/drawing/2014/main" id="{1168FFE8-572C-8F4A-4B0C-2CDAEEE869B6}"/>
-              </a:ext>
-            </a:extLst>
-          </p:cNvPr>
-          <p:cNvSpPr txBox="1"/>
-          <p:nvPr/>
-        </p:nvSpPr>
-        <p:spPr>
-          <a:xfrm>
-            <a:off x="4991100" y="2575298"/>
-            <a:ext cx="1592103" cy="307777"/>
-          </a:xfrm>
-          <a:prstGeom prst="rect">
-            <a:avLst/>
-          </a:prstGeom>
-          <a:noFill/>
-        </p:spPr>
-        <p:txBody>
-          <a:bodyPr wrap="none" rtlCol="0">
-            <a:spAutoFit/>
-          </a:bodyPr>
-          <a:lstStyle/>
-          <a:p>
-            <a:r>
-              <a:rPr lang="en-US" altLang="zh-CN" sz="1400">
-                <a:latin typeface="Poppins" panose="00000500000000000000" pitchFamily="2" charset="0"/>
-                <a:cs typeface="Poppins" panose="00000500000000000000" pitchFamily="2" charset="0"/>
-              </a:rPr>
-              <a:t>Animation Zone</a:t>
-            </a:r>
-            <a:endParaRPr lang="zh-CN" altLang="en-US" sz="1400">
-              <a:latin typeface="Poppins" panose="00000500000000000000" pitchFamily="2" charset="0"/>
-              <a:cs typeface="Poppins" panose="00000500000000000000" pitchFamily="2" charset="0"/>
-            </a:endParaRPr>
-          </a:p>
-        </p:txBody>
-      </p:sp>
-      <p:cxnSp>
-        <p:nvCxnSpPr>
-          <p:cNvPr id="7" name="Straight Arrow Connector 5">
-            <a:extLst>
-              <a:ext uri="{FF2B5EF4-FFF2-40B4-BE49-F238E27FC236}">
-                <a16:creationId xmlns:a16="http://schemas.microsoft.com/office/drawing/2014/main" id="{974D8CA4-5773-A2C8-7760-C668032AB677}"/>
-              </a:ext>
-            </a:extLst>
-          </p:cNvPr>
-          <p:cNvCxnSpPr>
-            <a:cxnSpLocks/>
-          </p:cNvCxnSpPr>
-          <p:nvPr/>
-        </p:nvCxnSpPr>
-        <p:spPr>
-          <a:xfrm>
-            <a:off x="4297473" y="1589964"/>
-            <a:ext cx="0" cy="900000"/>
-          </a:xfrm>
-          <a:prstGeom prst="straightConnector1">
-            <a:avLst/>
-          </a:prstGeom>
-          <a:ln>
-            <a:solidFill>
-              <a:schemeClr val="bg1"/>
-            </a:solidFill>
-            <a:tailEnd type="triangle"/>
-          </a:ln>
-        </p:spPr>
-        <p:style>
-          <a:lnRef idx="1">
-            <a:schemeClr val="accent1"/>
-          </a:lnRef>
-          <a:fillRef idx="0">
-            <a:schemeClr val="accent1"/>
-          </a:fillRef>
-          <a:effectRef idx="0">
-            <a:schemeClr val="accent1"/>
-          </a:effectRef>
-          <a:fontRef idx="minor">
-            <a:schemeClr val="tx1"/>
-          </a:fontRef>
-        </p:style>
-      </p:cxnSp>
-      <p:cxnSp>
-        <p:nvCxnSpPr>
-          <p:cNvPr id="9" name="Straight Arrow Connector 7">
-            <a:extLst>
-              <a:ext uri="{FF2B5EF4-FFF2-40B4-BE49-F238E27FC236}">
-                <a16:creationId xmlns:a16="http://schemas.microsoft.com/office/drawing/2014/main" id="{8E99497E-3A18-FE20-0D3E-38950FC6DD0B}"/>
-              </a:ext>
-            </a:extLst>
-          </p:cNvPr>
-          <p:cNvCxnSpPr>
-            <a:cxnSpLocks/>
-          </p:cNvCxnSpPr>
-          <p:nvPr/>
-        </p:nvCxnSpPr>
-        <p:spPr>
-          <a:xfrm flipV="1">
-            <a:off x="4297473" y="3029964"/>
-            <a:ext cx="0" cy="360000"/>
-          </a:xfrm>
-          <a:prstGeom prst="straightConnector1">
-            <a:avLst/>
-          </a:prstGeom>
-          <a:ln>
-            <a:solidFill>
-              <a:schemeClr val="bg1"/>
-            </a:solidFill>
-            <a:tailEnd type="triangle"/>
-          </a:ln>
-        </p:spPr>
-        <p:style>
-          <a:lnRef idx="1">
-            <a:schemeClr val="accent1"/>
-          </a:lnRef>
-          <a:fillRef idx="0">
-            <a:schemeClr val="accent1"/>
-          </a:fillRef>
-          <a:effectRef idx="0">
-            <a:schemeClr val="accent1"/>
-          </a:effectRef>
-          <a:fontRef idx="minor">
-            <a:schemeClr val="tx1"/>
-          </a:fontRef>
-        </p:style>
-      </p:cxnSp>
-      <p:sp>
-        <p:nvSpPr>
-          <p:cNvPr id="10" name="文本框 9">
-            <a:extLst>
-              <a:ext uri="{FF2B5EF4-FFF2-40B4-BE49-F238E27FC236}">
-                <a16:creationId xmlns:a16="http://schemas.microsoft.com/office/drawing/2014/main" id="{DA858028-96BD-C8FB-F9FA-D1B94A3ACF82}"/>
-              </a:ext>
-            </a:extLst>
-          </p:cNvPr>
-          <p:cNvSpPr txBox="1"/>
-          <p:nvPr/>
-        </p:nvSpPr>
-        <p:spPr>
-          <a:xfrm>
-            <a:off x="4297473" y="2212965"/>
-            <a:ext cx="474810" cy="276999"/>
-          </a:xfrm>
-          <a:prstGeom prst="rect">
-            <a:avLst/>
-          </a:prstGeom>
-          <a:noFill/>
-        </p:spPr>
-        <p:txBody>
-          <a:bodyPr wrap="none" rtlCol="0">
-            <a:spAutoFit/>
-          </a:bodyPr>
-          <a:lstStyle/>
-          <a:p>
-            <a:r>
-              <a:rPr lang="en-US" altLang="zh-CN" sz="1200">
-                <a:solidFill>
-                  <a:schemeClr val="bg1"/>
-                </a:solidFill>
-                <a:latin typeface="Poppins" panose="00000500000000000000" pitchFamily="2" charset="0"/>
-                <a:cs typeface="Poppins" panose="00000500000000000000" pitchFamily="2" charset="0"/>
-              </a:rPr>
-              <a:t>50%</a:t>
-            </a:r>
-            <a:endParaRPr lang="zh-CN" altLang="en-US" sz="1200">
-              <a:solidFill>
-                <a:schemeClr val="bg1"/>
-              </a:solidFill>
-              <a:latin typeface="Poppins" panose="00000500000000000000" pitchFamily="2" charset="0"/>
-              <a:cs typeface="Poppins" panose="00000500000000000000" pitchFamily="2" charset="0"/>
-            </a:endParaRPr>
-          </a:p>
-        </p:txBody>
-      </p:sp>
-      <p:sp>
-        <p:nvSpPr>
-          <p:cNvPr id="11" name="文本框 10">
-            <a:extLst>
-              <a:ext uri="{FF2B5EF4-FFF2-40B4-BE49-F238E27FC236}">
-                <a16:creationId xmlns:a16="http://schemas.microsoft.com/office/drawing/2014/main" id="{0D1B1507-C034-E622-893C-D7A632BF8E33}"/>
-              </a:ext>
-            </a:extLst>
-          </p:cNvPr>
-          <p:cNvSpPr txBox="1"/>
-          <p:nvPr/>
-        </p:nvSpPr>
-        <p:spPr>
-          <a:xfrm>
-            <a:off x="4297473" y="3029964"/>
-            <a:ext cx="425116" cy="276999"/>
-          </a:xfrm>
-          <a:prstGeom prst="rect">
-            <a:avLst/>
-          </a:prstGeom>
-          <a:noFill/>
-        </p:spPr>
-        <p:txBody>
-          <a:bodyPr wrap="none" rtlCol="0">
-            <a:spAutoFit/>
-          </a:bodyPr>
-          <a:lstStyle/>
-          <a:p>
-            <a:r>
-              <a:rPr lang="en-US" altLang="zh-CN" sz="1200">
-                <a:solidFill>
-                  <a:schemeClr val="bg1"/>
-                </a:solidFill>
-                <a:latin typeface="Poppins" panose="00000500000000000000" pitchFamily="2" charset="0"/>
-                <a:cs typeface="Poppins" panose="00000500000000000000" pitchFamily="2" charset="0"/>
-              </a:rPr>
-              <a:t>10%</a:t>
-            </a:r>
-            <a:endParaRPr lang="zh-CN" altLang="en-US" sz="1200">
-              <a:solidFill>
-                <a:schemeClr val="bg1"/>
-              </a:solidFill>
-              <a:latin typeface="Poppins" panose="00000500000000000000" pitchFamily="2" charset="0"/>
-              <a:cs typeface="Poppins" panose="00000500000000000000" pitchFamily="2" charset="0"/>
-            </a:endParaRPr>
-          </a:p>
-        </p:txBody>
-      </p:sp>
-    </p:spTree>
-    <p:extLst>
-      <p:ext uri="{BB962C8B-B14F-4D97-AF65-F5344CB8AC3E}">
-        <p14:creationId xmlns:p14="http://schemas.microsoft.com/office/powerpoint/2010/main" val="2473040496"/>
       </p:ext>
     </p:extLst>
   </p:cSld>
@@ -17534,6 +18034,452 @@
         <p:cNvPr id="1" name="">
           <a:extLst>
             <a:ext uri="{FF2B5EF4-FFF2-40B4-BE49-F238E27FC236}">
+              <a16:creationId xmlns:a16="http://schemas.microsoft.com/office/drawing/2014/main" id="{CDC8A674-4B20-52FC-4D14-C7C25881D114}"/>
+            </a:ext>
+          </a:extLst>
+        </p:cNvPr>
+        <p:cNvGrpSpPr/>
+        <p:nvPr/>
+      </p:nvGrpSpPr>
+      <p:grpSpPr>
+        <a:xfrm>
+          <a:off x="0" y="0"/>
+          <a:ext cx="0" cy="0"/>
+          <a:chOff x="0" y="0"/>
+          <a:chExt cx="0" cy="0"/>
+        </a:xfrm>
+      </p:grpSpPr>
+      <p:sp>
+        <p:nvSpPr>
+          <p:cNvPr id="2" name="Rectangle 1">
+            <a:extLst>
+              <a:ext uri="{FF2B5EF4-FFF2-40B4-BE49-F238E27FC236}">
+                <a16:creationId xmlns:a16="http://schemas.microsoft.com/office/drawing/2014/main" id="{F22D05D8-3AED-74C1-0CE8-D5D7495EB663}"/>
+              </a:ext>
+            </a:extLst>
+          </p:cNvPr>
+          <p:cNvSpPr/>
+          <p:nvPr/>
+        </p:nvSpPr>
+        <p:spPr>
+          <a:xfrm>
+            <a:off x="3757723" y="1589964"/>
+            <a:ext cx="3600000" cy="1800000"/>
+          </a:xfrm>
+          <a:prstGeom prst="rect">
+            <a:avLst/>
+          </a:prstGeom>
+          <a:solidFill>
+            <a:schemeClr val="bg1">
+              <a:lumMod val="95000"/>
+            </a:schemeClr>
+          </a:solidFill>
+          <a:ln>
+            <a:noFill/>
+          </a:ln>
+        </p:spPr>
+        <p:style>
+          <a:lnRef idx="2">
+            <a:schemeClr val="accent1">
+              <a:shade val="15000"/>
+            </a:schemeClr>
+          </a:lnRef>
+          <a:fillRef idx="1">
+            <a:schemeClr val="accent1"/>
+          </a:fillRef>
+          <a:effectRef idx="0">
+            <a:schemeClr val="accent1"/>
+          </a:effectRef>
+          <a:fontRef idx="minor">
+            <a:schemeClr val="lt1"/>
+          </a:fontRef>
+        </p:style>
+        <p:txBody>
+          <a:bodyPr rtlCol="0" anchor="ctr"/>
+          <a:lstStyle/>
+          <a:p>
+            <a:pPr algn="ctr"/>
+            <a:endParaRPr lang="zh-CN" altLang="en-US" sz="1200">
+              <a:solidFill>
+                <a:schemeClr val="accent6">
+                  <a:lumMod val="75000"/>
+                </a:schemeClr>
+              </a:solidFill>
+              <a:latin typeface="Poppins" panose="00000500000000000000" pitchFamily="2" charset="0"/>
+              <a:cs typeface="Poppins" panose="00000500000000000000" pitchFamily="2" charset="0"/>
+            </a:endParaRPr>
+          </a:p>
+        </p:txBody>
+      </p:sp>
+      <p:sp>
+        <p:nvSpPr>
+          <p:cNvPr id="3" name="Rectangle 2">
+            <a:extLst>
+              <a:ext uri="{FF2B5EF4-FFF2-40B4-BE49-F238E27FC236}">
+                <a16:creationId xmlns:a16="http://schemas.microsoft.com/office/drawing/2014/main" id="{7F930297-9DE3-3DCF-AABF-29D8326193C9}"/>
+              </a:ext>
+            </a:extLst>
+          </p:cNvPr>
+          <p:cNvSpPr/>
+          <p:nvPr/>
+        </p:nvSpPr>
+        <p:spPr>
+          <a:xfrm>
+            <a:off x="3757723" y="1589964"/>
+            <a:ext cx="3600000" cy="900000"/>
+          </a:xfrm>
+          <a:prstGeom prst="rect">
+            <a:avLst/>
+          </a:prstGeom>
+          <a:solidFill>
+            <a:srgbClr val="92D050"/>
+          </a:solidFill>
+          <a:ln>
+            <a:noFill/>
+          </a:ln>
+        </p:spPr>
+        <p:style>
+          <a:lnRef idx="2">
+            <a:schemeClr val="accent1">
+              <a:shade val="15000"/>
+            </a:schemeClr>
+          </a:lnRef>
+          <a:fillRef idx="1">
+            <a:schemeClr val="accent1"/>
+          </a:fillRef>
+          <a:effectRef idx="0">
+            <a:schemeClr val="accent1"/>
+          </a:effectRef>
+          <a:fontRef idx="minor">
+            <a:schemeClr val="lt1"/>
+          </a:fontRef>
+        </p:style>
+        <p:txBody>
+          <a:bodyPr rtlCol="0" anchor="b" anchorCtr="0"/>
+          <a:lstStyle/>
+          <a:p>
+            <a:r>
+              <a:rPr lang="en-US" altLang="zh-CN" sz="1200">
+                <a:latin typeface="Poppins" panose="00000500000000000000" pitchFamily="2" charset="0"/>
+                <a:cs typeface="Poppins" panose="00000500000000000000" pitchFamily="2" charset="0"/>
+              </a:rPr>
+              <a:t>start</a:t>
+            </a:r>
+            <a:endParaRPr lang="zh-CN" altLang="en-US" sz="1200">
+              <a:latin typeface="Poppins" panose="00000500000000000000" pitchFamily="2" charset="0"/>
+              <a:cs typeface="Poppins" panose="00000500000000000000" pitchFamily="2" charset="0"/>
+            </a:endParaRPr>
+          </a:p>
+        </p:txBody>
+      </p:sp>
+      <p:sp>
+        <p:nvSpPr>
+          <p:cNvPr id="4" name="Rectangle 3">
+            <a:extLst>
+              <a:ext uri="{FF2B5EF4-FFF2-40B4-BE49-F238E27FC236}">
+                <a16:creationId xmlns:a16="http://schemas.microsoft.com/office/drawing/2014/main" id="{DD00528E-40A9-8D7F-7992-8A0D03F1FC6B}"/>
+              </a:ext>
+            </a:extLst>
+          </p:cNvPr>
+          <p:cNvSpPr/>
+          <p:nvPr/>
+        </p:nvSpPr>
+        <p:spPr>
+          <a:xfrm>
+            <a:off x="3757723" y="3029964"/>
+            <a:ext cx="3600000" cy="360000"/>
+          </a:xfrm>
+          <a:prstGeom prst="rect">
+            <a:avLst/>
+          </a:prstGeom>
+          <a:solidFill>
+            <a:srgbClr val="92D050"/>
+          </a:solidFill>
+          <a:ln>
+            <a:noFill/>
+          </a:ln>
+        </p:spPr>
+        <p:style>
+          <a:lnRef idx="2">
+            <a:schemeClr val="accent1">
+              <a:shade val="15000"/>
+            </a:schemeClr>
+          </a:lnRef>
+          <a:fillRef idx="1">
+            <a:schemeClr val="accent1"/>
+          </a:fillRef>
+          <a:effectRef idx="0">
+            <a:schemeClr val="accent1"/>
+          </a:effectRef>
+          <a:fontRef idx="minor">
+            <a:schemeClr val="lt1"/>
+          </a:fontRef>
+        </p:style>
+        <p:txBody>
+          <a:bodyPr rtlCol="0" anchor="t" anchorCtr="0"/>
+          <a:lstStyle/>
+          <a:p>
+            <a:r>
+              <a:rPr lang="en-US" altLang="zh-CN" sz="1200">
+                <a:latin typeface="Poppins" panose="00000500000000000000" pitchFamily="2" charset="0"/>
+                <a:cs typeface="Poppins" panose="00000500000000000000" pitchFamily="2" charset="0"/>
+              </a:rPr>
+              <a:t>end</a:t>
+            </a:r>
+            <a:endParaRPr lang="zh-CN" altLang="en-US" sz="1200">
+              <a:latin typeface="Poppins" panose="00000500000000000000" pitchFamily="2" charset="0"/>
+              <a:cs typeface="Poppins" panose="00000500000000000000" pitchFamily="2" charset="0"/>
+            </a:endParaRPr>
+          </a:p>
+        </p:txBody>
+      </p:sp>
+      <p:sp>
+        <p:nvSpPr>
+          <p:cNvPr id="5" name="文本框 4">
+            <a:extLst>
+              <a:ext uri="{FF2B5EF4-FFF2-40B4-BE49-F238E27FC236}">
+                <a16:creationId xmlns:a16="http://schemas.microsoft.com/office/drawing/2014/main" id="{1168FFE8-572C-8F4A-4B0C-2CDAEEE869B6}"/>
+              </a:ext>
+            </a:extLst>
+          </p:cNvPr>
+          <p:cNvSpPr txBox="1"/>
+          <p:nvPr/>
+        </p:nvSpPr>
+        <p:spPr>
+          <a:xfrm>
+            <a:off x="4991100" y="2575298"/>
+            <a:ext cx="1592103" cy="307777"/>
+          </a:xfrm>
+          <a:prstGeom prst="rect">
+            <a:avLst/>
+          </a:prstGeom>
+          <a:noFill/>
+        </p:spPr>
+        <p:txBody>
+          <a:bodyPr wrap="none" rtlCol="0">
+            <a:spAutoFit/>
+          </a:bodyPr>
+          <a:lstStyle/>
+          <a:p>
+            <a:r>
+              <a:rPr lang="en-US" altLang="zh-CN" sz="1400">
+                <a:latin typeface="Poppins" panose="00000500000000000000" pitchFamily="2" charset="0"/>
+                <a:cs typeface="Poppins" panose="00000500000000000000" pitchFamily="2" charset="0"/>
+              </a:rPr>
+              <a:t>Animation Zone</a:t>
+            </a:r>
+            <a:endParaRPr lang="zh-CN" altLang="en-US" sz="1400">
+              <a:latin typeface="Poppins" panose="00000500000000000000" pitchFamily="2" charset="0"/>
+              <a:cs typeface="Poppins" panose="00000500000000000000" pitchFamily="2" charset="0"/>
+            </a:endParaRPr>
+          </a:p>
+        </p:txBody>
+      </p:sp>
+      <p:cxnSp>
+        <p:nvCxnSpPr>
+          <p:cNvPr id="7" name="Straight Arrow Connector 5">
+            <a:extLst>
+              <a:ext uri="{FF2B5EF4-FFF2-40B4-BE49-F238E27FC236}">
+                <a16:creationId xmlns:a16="http://schemas.microsoft.com/office/drawing/2014/main" id="{974D8CA4-5773-A2C8-7760-C668032AB677}"/>
+              </a:ext>
+            </a:extLst>
+          </p:cNvPr>
+          <p:cNvCxnSpPr>
+            <a:cxnSpLocks/>
+          </p:cNvCxnSpPr>
+          <p:nvPr/>
+        </p:nvCxnSpPr>
+        <p:spPr>
+          <a:xfrm>
+            <a:off x="4297473" y="1589964"/>
+            <a:ext cx="0" cy="900000"/>
+          </a:xfrm>
+          <a:prstGeom prst="straightConnector1">
+            <a:avLst/>
+          </a:prstGeom>
+          <a:ln>
+            <a:solidFill>
+              <a:schemeClr val="bg1"/>
+            </a:solidFill>
+            <a:tailEnd type="triangle"/>
+          </a:ln>
+        </p:spPr>
+        <p:style>
+          <a:lnRef idx="1">
+            <a:schemeClr val="accent1"/>
+          </a:lnRef>
+          <a:fillRef idx="0">
+            <a:schemeClr val="accent1"/>
+          </a:fillRef>
+          <a:effectRef idx="0">
+            <a:schemeClr val="accent1"/>
+          </a:effectRef>
+          <a:fontRef idx="minor">
+            <a:schemeClr val="tx1"/>
+          </a:fontRef>
+        </p:style>
+      </p:cxnSp>
+      <p:cxnSp>
+        <p:nvCxnSpPr>
+          <p:cNvPr id="9" name="Straight Arrow Connector 7">
+            <a:extLst>
+              <a:ext uri="{FF2B5EF4-FFF2-40B4-BE49-F238E27FC236}">
+                <a16:creationId xmlns:a16="http://schemas.microsoft.com/office/drawing/2014/main" id="{8E99497E-3A18-FE20-0D3E-38950FC6DD0B}"/>
+              </a:ext>
+            </a:extLst>
+          </p:cNvPr>
+          <p:cNvCxnSpPr>
+            <a:cxnSpLocks/>
+          </p:cNvCxnSpPr>
+          <p:nvPr/>
+        </p:nvCxnSpPr>
+        <p:spPr>
+          <a:xfrm flipV="1">
+            <a:off x="4297473" y="3029964"/>
+            <a:ext cx="0" cy="360000"/>
+          </a:xfrm>
+          <a:prstGeom prst="straightConnector1">
+            <a:avLst/>
+          </a:prstGeom>
+          <a:ln>
+            <a:solidFill>
+              <a:schemeClr val="bg1"/>
+            </a:solidFill>
+            <a:tailEnd type="triangle"/>
+          </a:ln>
+        </p:spPr>
+        <p:style>
+          <a:lnRef idx="1">
+            <a:schemeClr val="accent1"/>
+          </a:lnRef>
+          <a:fillRef idx="0">
+            <a:schemeClr val="accent1"/>
+          </a:fillRef>
+          <a:effectRef idx="0">
+            <a:schemeClr val="accent1"/>
+          </a:effectRef>
+          <a:fontRef idx="minor">
+            <a:schemeClr val="tx1"/>
+          </a:fontRef>
+        </p:style>
+      </p:cxnSp>
+      <p:sp>
+        <p:nvSpPr>
+          <p:cNvPr id="10" name="文本框 9">
+            <a:extLst>
+              <a:ext uri="{FF2B5EF4-FFF2-40B4-BE49-F238E27FC236}">
+                <a16:creationId xmlns:a16="http://schemas.microsoft.com/office/drawing/2014/main" id="{DA858028-96BD-C8FB-F9FA-D1B94A3ACF82}"/>
+              </a:ext>
+            </a:extLst>
+          </p:cNvPr>
+          <p:cNvSpPr txBox="1"/>
+          <p:nvPr/>
+        </p:nvSpPr>
+        <p:spPr>
+          <a:xfrm>
+            <a:off x="4297473" y="2212965"/>
+            <a:ext cx="474810" cy="276999"/>
+          </a:xfrm>
+          <a:prstGeom prst="rect">
+            <a:avLst/>
+          </a:prstGeom>
+          <a:noFill/>
+        </p:spPr>
+        <p:txBody>
+          <a:bodyPr wrap="none" rtlCol="0">
+            <a:spAutoFit/>
+          </a:bodyPr>
+          <a:lstStyle/>
+          <a:p>
+            <a:r>
+              <a:rPr lang="en-US" altLang="zh-CN" sz="1200">
+                <a:solidFill>
+                  <a:schemeClr val="bg1"/>
+                </a:solidFill>
+                <a:latin typeface="Poppins" panose="00000500000000000000" pitchFamily="2" charset="0"/>
+                <a:cs typeface="Poppins" panose="00000500000000000000" pitchFamily="2" charset="0"/>
+              </a:rPr>
+              <a:t>50%</a:t>
+            </a:r>
+            <a:endParaRPr lang="zh-CN" altLang="en-US" sz="1200">
+              <a:solidFill>
+                <a:schemeClr val="bg1"/>
+              </a:solidFill>
+              <a:latin typeface="Poppins" panose="00000500000000000000" pitchFamily="2" charset="0"/>
+              <a:cs typeface="Poppins" panose="00000500000000000000" pitchFamily="2" charset="0"/>
+            </a:endParaRPr>
+          </a:p>
+        </p:txBody>
+      </p:sp>
+      <p:sp>
+        <p:nvSpPr>
+          <p:cNvPr id="11" name="文本框 10">
+            <a:extLst>
+              <a:ext uri="{FF2B5EF4-FFF2-40B4-BE49-F238E27FC236}">
+                <a16:creationId xmlns:a16="http://schemas.microsoft.com/office/drawing/2014/main" id="{0D1B1507-C034-E622-893C-D7A632BF8E33}"/>
+              </a:ext>
+            </a:extLst>
+          </p:cNvPr>
+          <p:cNvSpPr txBox="1"/>
+          <p:nvPr/>
+        </p:nvSpPr>
+        <p:spPr>
+          <a:xfrm>
+            <a:off x="4297473" y="3029964"/>
+            <a:ext cx="425116" cy="276999"/>
+          </a:xfrm>
+          <a:prstGeom prst="rect">
+            <a:avLst/>
+          </a:prstGeom>
+          <a:noFill/>
+        </p:spPr>
+        <p:txBody>
+          <a:bodyPr wrap="none" rtlCol="0">
+            <a:spAutoFit/>
+          </a:bodyPr>
+          <a:lstStyle/>
+          <a:p>
+            <a:r>
+              <a:rPr lang="en-US" altLang="zh-CN" sz="1200">
+                <a:solidFill>
+                  <a:schemeClr val="bg1"/>
+                </a:solidFill>
+                <a:latin typeface="Poppins" panose="00000500000000000000" pitchFamily="2" charset="0"/>
+                <a:cs typeface="Poppins" panose="00000500000000000000" pitchFamily="2" charset="0"/>
+              </a:rPr>
+              <a:t>10%</a:t>
+            </a:r>
+            <a:endParaRPr lang="zh-CN" altLang="en-US" sz="1200">
+              <a:solidFill>
+                <a:schemeClr val="bg1"/>
+              </a:solidFill>
+              <a:latin typeface="Poppins" panose="00000500000000000000" pitchFamily="2" charset="0"/>
+              <a:cs typeface="Poppins" panose="00000500000000000000" pitchFamily="2" charset="0"/>
+            </a:endParaRPr>
+          </a:p>
+        </p:txBody>
+      </p:sp>
+    </p:spTree>
+    <p:extLst>
+      <p:ext uri="{BB962C8B-B14F-4D97-AF65-F5344CB8AC3E}">
+        <p14:creationId xmlns:p14="http://schemas.microsoft.com/office/powerpoint/2010/main" val="2473040496"/>
+      </p:ext>
+    </p:extLst>
+  </p:cSld>
+  <p:clrMapOvr>
+    <a:masterClrMapping/>
+  </p:clrMapOvr>
+</p:sld>
+</file>
+
+<file path=ppt/slides/slide21.xml><?xml version="1.0" encoding="utf-8"?>
+<p:sld xmlns:a="http://schemas.openxmlformats.org/drawingml/2006/main" xmlns:r="http://schemas.openxmlformats.org/officeDocument/2006/relationships" xmlns:p="http://schemas.openxmlformats.org/presentationml/2006/main">
+  <p:cSld>
+    <p:spTree>
+      <p:nvGrpSpPr>
+        <p:cNvPr id="1" name="">
+          <a:extLst>
+            <a:ext uri="{FF2B5EF4-FFF2-40B4-BE49-F238E27FC236}">
               <a16:creationId xmlns:a16="http://schemas.microsoft.com/office/drawing/2014/main" id="{4B6AC346-4E87-BA38-8EDB-AEACB42C1BE9}"/>
             </a:ext>
           </a:extLst>
@@ -17972,7 +18918,7 @@
 </p:sld>
 </file>
 
-<file path=ppt/slides/slide21.xml><?xml version="1.0" encoding="utf-8"?>
+<file path=ppt/slides/slide22.xml><?xml version="1.0" encoding="utf-8"?>
 <p:sld xmlns:a="http://schemas.openxmlformats.org/drawingml/2006/main" xmlns:r="http://schemas.openxmlformats.org/officeDocument/2006/relationships" xmlns:p="http://schemas.openxmlformats.org/presentationml/2006/main">
   <p:cSld>
     <p:spTree>
@@ -18418,7 +19364,7 @@
 </p:sld>
 </file>
 
-<file path=ppt/slides/slide22.xml><?xml version="1.0" encoding="utf-8"?>
+<file path=ppt/slides/slide23.xml><?xml version="1.0" encoding="utf-8"?>
 <p:sld xmlns:a="http://schemas.openxmlformats.org/drawingml/2006/main" xmlns:r="http://schemas.openxmlformats.org/officeDocument/2006/relationships" xmlns:p="http://schemas.openxmlformats.org/presentationml/2006/main">
   <p:cSld>
     <p:spTree>
@@ -18864,7 +19810,7 @@
 </p:sld>
 </file>
 
-<file path=ppt/slides/slide23.xml><?xml version="1.0" encoding="utf-8"?>
+<file path=ppt/slides/slide24.xml><?xml version="1.0" encoding="utf-8"?>
 <p:sld xmlns:a="http://schemas.openxmlformats.org/drawingml/2006/main" xmlns:r="http://schemas.openxmlformats.org/officeDocument/2006/relationships" xmlns:p="http://schemas.openxmlformats.org/presentationml/2006/main">
   <p:cSld>
     <p:spTree>
@@ -20107,7 +21053,7 @@
 </p:sld>
 </file>
 
-<file path=ppt/slides/slide24.xml><?xml version="1.0" encoding="utf-8"?>
+<file path=ppt/slides/slide25.xml><?xml version="1.0" encoding="utf-8"?>
 <p:sld xmlns:a="http://schemas.openxmlformats.org/drawingml/2006/main" xmlns:r="http://schemas.openxmlformats.org/officeDocument/2006/relationships" xmlns:p="http://schemas.openxmlformats.org/presentationml/2006/main">
   <p:cSld>
     <p:spTree>
@@ -21780,7 +22726,7 @@
 </p:sld>
 </file>
 
-<file path=ppt/slides/slide25.xml><?xml version="1.0" encoding="utf-8"?>
+<file path=ppt/slides/slide26.xml><?xml version="1.0" encoding="utf-8"?>
 <p:sld xmlns:a="http://schemas.openxmlformats.org/drawingml/2006/main" xmlns:r="http://schemas.openxmlformats.org/officeDocument/2006/relationships" xmlns:p="http://schemas.openxmlformats.org/presentationml/2006/main">
   <p:cSld>
     <p:spTree>
@@ -23032,7 +23978,7 @@
 </p:sld>
 </file>
 
-<file path=ppt/slides/slide26.xml><?xml version="1.0" encoding="utf-8"?>
+<file path=ppt/slides/slide27.xml><?xml version="1.0" encoding="utf-8"?>
 <p:sld xmlns:a="http://schemas.openxmlformats.org/drawingml/2006/main" xmlns:r="http://schemas.openxmlformats.org/officeDocument/2006/relationships" xmlns:p="http://schemas.openxmlformats.org/presentationml/2006/main">
   <p:cSld>
     <p:spTree>
@@ -24155,7 +25101,7 @@
 </p:sld>
 </file>
 
-<file path=ppt/slides/slide27.xml><?xml version="1.0" encoding="utf-8"?>
+<file path=ppt/slides/slide28.xml><?xml version="1.0" encoding="utf-8"?>
 <p:sld xmlns:a="http://schemas.openxmlformats.org/drawingml/2006/main" xmlns:r="http://schemas.openxmlformats.org/officeDocument/2006/relationships" xmlns:p="http://schemas.openxmlformats.org/presentationml/2006/main">
   <p:cSld>
     <p:spTree>
@@ -25518,7 +26464,7 @@
 </p:sld>
 </file>
 
-<file path=ppt/slides/slide28.xml><?xml version="1.0" encoding="utf-8"?>
+<file path=ppt/slides/slide29.xml><?xml version="1.0" encoding="utf-8"?>
 <p:sld xmlns:a="http://schemas.openxmlformats.org/drawingml/2006/main" xmlns:r="http://schemas.openxmlformats.org/officeDocument/2006/relationships" xmlns:p="http://schemas.openxmlformats.org/presentationml/2006/main">
   <p:cSld>
     <p:spTree>
@@ -26894,7 +27840,136 @@
 </p:sld>
 </file>
 
-<file path=ppt/slides/slide29.xml><?xml version="1.0" encoding="utf-8"?>
+<file path=ppt/slides/slide3.xml><?xml version="1.0" encoding="utf-8"?>
+<p:sld xmlns:a="http://schemas.openxmlformats.org/drawingml/2006/main" xmlns:r="http://schemas.openxmlformats.org/officeDocument/2006/relationships" xmlns:p="http://schemas.openxmlformats.org/presentationml/2006/main">
+  <p:cSld>
+    <p:spTree>
+      <p:nvGrpSpPr>
+        <p:cNvPr id="1" name=""/>
+        <p:cNvGrpSpPr/>
+        <p:nvPr/>
+      </p:nvGrpSpPr>
+      <p:grpSpPr>
+        <a:xfrm>
+          <a:off x="0" y="0"/>
+          <a:ext cx="0" cy="0"/>
+          <a:chOff x="0" y="0"/>
+          <a:chExt cx="0" cy="0"/>
+        </a:xfrm>
+      </p:grpSpPr>
+      <p:pic>
+        <p:nvPicPr>
+          <p:cNvPr id="1026" name="Picture 2" descr="第十八天 PPPoE原理和配置_当用户希望建立pppoe连接时,首先会发送什么类型的ppp报文-CSDN博客">
+            <a:extLst>
+              <a:ext uri="{FF2B5EF4-FFF2-40B4-BE49-F238E27FC236}">
+                <a16:creationId xmlns:a16="http://schemas.microsoft.com/office/drawing/2014/main" id="{C6C94040-E0BC-6343-0359-493FEFBAA89B}"/>
+              </a:ext>
+            </a:extLst>
+          </p:cNvPr>
+          <p:cNvPicPr>
+            <a:picLocks noChangeAspect="1" noChangeArrowheads="1"/>
+          </p:cNvPicPr>
+          <p:nvPr/>
+        </p:nvPicPr>
+        <p:blipFill>
+          <a:blip r:embed="rId2">
+            <a:extLst>
+              <a:ext uri="{28A0092B-C50C-407E-A947-70E740481C1C}">
+                <a14:useLocalDpi xmlns:a14="http://schemas.microsoft.com/office/drawing/2010/main" val="0"/>
+              </a:ext>
+            </a:extLst>
+          </a:blip>
+          <a:srcRect/>
+          <a:stretch>
+            <a:fillRect/>
+          </a:stretch>
+        </p:blipFill>
+        <p:spPr bwMode="auto">
+          <a:xfrm>
+            <a:off x="2811182" y="1407458"/>
+            <a:ext cx="6480000" cy="3828970"/>
+          </a:xfrm>
+          <a:prstGeom prst="rect">
+            <a:avLst/>
+          </a:prstGeom>
+          <a:noFill/>
+          <a:extLst>
+            <a:ext uri="{909E8E84-426E-40DD-AFC4-6F175D3DCCD1}">
+              <a14:hiddenFill xmlns:a14="http://schemas.microsoft.com/office/drawing/2010/main">
+                <a:solidFill>
+                  <a:srgbClr val="FFFFFF"/>
+                </a:solidFill>
+              </a14:hiddenFill>
+            </a:ext>
+          </a:extLst>
+        </p:spPr>
+      </p:pic>
+      <p:sp>
+        <p:nvSpPr>
+          <p:cNvPr id="2" name="矩形 1">
+            <a:extLst>
+              <a:ext uri="{FF2B5EF4-FFF2-40B4-BE49-F238E27FC236}">
+                <a16:creationId xmlns:a16="http://schemas.microsoft.com/office/drawing/2014/main" id="{19D45507-CD22-C66C-A849-86CD58600BEF}"/>
+              </a:ext>
+            </a:extLst>
+          </p:cNvPr>
+          <p:cNvSpPr/>
+          <p:nvPr/>
+        </p:nvSpPr>
+        <p:spPr>
+          <a:xfrm>
+            <a:off x="6938682" y="4421023"/>
+            <a:ext cx="2393576" cy="779929"/>
+          </a:xfrm>
+          <a:prstGeom prst="rect">
+            <a:avLst/>
+          </a:prstGeom>
+          <a:solidFill>
+            <a:schemeClr val="bg1"/>
+          </a:solidFill>
+          <a:ln>
+            <a:noFill/>
+          </a:ln>
+        </p:spPr>
+        <p:style>
+          <a:lnRef idx="2">
+            <a:schemeClr val="accent1">
+              <a:shade val="15000"/>
+            </a:schemeClr>
+          </a:lnRef>
+          <a:fillRef idx="1">
+            <a:schemeClr val="accent1"/>
+          </a:fillRef>
+          <a:effectRef idx="0">
+            <a:schemeClr val="accent1"/>
+          </a:effectRef>
+          <a:fontRef idx="minor">
+            <a:schemeClr val="lt1"/>
+          </a:fontRef>
+        </p:style>
+        <p:txBody>
+          <a:bodyPr rtlCol="0" anchor="ctr"/>
+          <a:lstStyle/>
+          <a:p>
+            <a:pPr algn="ctr"/>
+            <a:endParaRPr lang="zh-CN" altLang="en-US"/>
+          </a:p>
+        </p:txBody>
+      </p:sp>
+    </p:spTree>
+    <p:extLst>
+      <p:ext uri="{BB962C8B-B14F-4D97-AF65-F5344CB8AC3E}">
+        <p14:creationId xmlns:p14="http://schemas.microsoft.com/office/powerpoint/2010/main" val="1938204860"/>
+      </p:ext>
+    </p:extLst>
+  </p:cSld>
+  <p:clrMapOvr>
+    <a:masterClrMapping/>
+  </p:clrMapOvr>
+</p:sld>
+</file>
+
+<file path=ppt/slides/slide30.xml><?xml version="1.0" encoding="utf-8"?>
 <p:sld xmlns:a="http://schemas.openxmlformats.org/drawingml/2006/main" xmlns:r="http://schemas.openxmlformats.org/officeDocument/2006/relationships" xmlns:p="http://schemas.openxmlformats.org/presentationml/2006/main">
   <p:cSld>
     <p:spTree>
@@ -28091,1049 +29166,7 @@
 </p:sld>
 </file>
 
-<file path=ppt/slides/slide3.xml><?xml version="1.0" encoding="utf-8"?>
-<p:sld xmlns:a="http://schemas.openxmlformats.org/drawingml/2006/main" xmlns:r="http://schemas.openxmlformats.org/officeDocument/2006/relationships" xmlns:p="http://schemas.openxmlformats.org/presentationml/2006/main">
-  <p:cSld>
-    <p:spTree>
-      <p:nvGrpSpPr>
-        <p:cNvPr id="1" name="">
-          <a:extLst>
-            <a:ext uri="{FF2B5EF4-FFF2-40B4-BE49-F238E27FC236}">
-              <a16:creationId xmlns:a16="http://schemas.microsoft.com/office/drawing/2014/main" id="{305ACE99-59B0-D2A0-7D0D-F12E4D9ED934}"/>
-            </a:ext>
-          </a:extLst>
-        </p:cNvPr>
-        <p:cNvGrpSpPr/>
-        <p:nvPr/>
-      </p:nvGrpSpPr>
-      <p:grpSpPr>
-        <a:xfrm>
-          <a:off x="0" y="0"/>
-          <a:ext cx="0" cy="0"/>
-          <a:chOff x="0" y="0"/>
-          <a:chExt cx="0" cy="0"/>
-        </a:xfrm>
-      </p:grpSpPr>
-      <p:sp>
-        <p:nvSpPr>
-          <p:cNvPr id="2" name="矩形: 圆角 1">
-            <a:extLst>
-              <a:ext uri="{FF2B5EF4-FFF2-40B4-BE49-F238E27FC236}">
-                <a16:creationId xmlns:a16="http://schemas.microsoft.com/office/drawing/2014/main" id="{EA1617AA-3BC5-A6C2-7966-463E2BC3AC46}"/>
-              </a:ext>
-            </a:extLst>
-          </p:cNvPr>
-          <p:cNvSpPr/>
-          <p:nvPr/>
-        </p:nvSpPr>
-        <p:spPr>
-          <a:xfrm>
-            <a:off x="3307693" y="2719832"/>
-            <a:ext cx="1440000" cy="360000"/>
-          </a:xfrm>
-          <a:prstGeom prst="roundRect">
-            <a:avLst/>
-          </a:prstGeom>
-          <a:solidFill>
-            <a:schemeClr val="accent5">
-              <a:lumMod val="75000"/>
-            </a:schemeClr>
-          </a:solidFill>
-          <a:ln w="12700">
-            <a:noFill/>
-          </a:ln>
-        </p:spPr>
-        <p:style>
-          <a:lnRef idx="2">
-            <a:schemeClr val="accent1">
-              <a:shade val="15000"/>
-            </a:schemeClr>
-          </a:lnRef>
-          <a:fillRef idx="1">
-            <a:schemeClr val="accent1"/>
-          </a:fillRef>
-          <a:effectRef idx="0">
-            <a:schemeClr val="accent1"/>
-          </a:effectRef>
-          <a:fontRef idx="minor">
-            <a:schemeClr val="lt1"/>
-          </a:fontRef>
-        </p:style>
-        <p:txBody>
-          <a:bodyPr rtlCol="0" anchor="ctr"/>
-          <a:lstStyle/>
-          <a:p>
-            <a:pPr algn="ctr"/>
-            <a:r>
-              <a:rPr lang="en-US" altLang="zh-CN" sz="1200" dirty="0">
-                <a:latin typeface="Quicksand Light" panose="00000400000000000000" pitchFamily="2" charset="0"/>
-              </a:rPr>
-              <a:t>Port</a:t>
-            </a:r>
-            <a:endParaRPr lang="zh-CN" altLang="en-US" sz="1200" dirty="0">
-              <a:latin typeface="Quicksand Light" panose="00000400000000000000" pitchFamily="2" charset="0"/>
-            </a:endParaRPr>
-          </a:p>
-        </p:txBody>
-      </p:sp>
-      <p:sp>
-        <p:nvSpPr>
-          <p:cNvPr id="3" name="矩形: 圆角 2">
-            <a:extLst>
-              <a:ext uri="{FF2B5EF4-FFF2-40B4-BE49-F238E27FC236}">
-                <a16:creationId xmlns:a16="http://schemas.microsoft.com/office/drawing/2014/main" id="{9D801BA9-9C6A-24D0-E174-E3604316CB49}"/>
-              </a:ext>
-            </a:extLst>
-          </p:cNvPr>
-          <p:cNvSpPr/>
-          <p:nvPr/>
-        </p:nvSpPr>
-        <p:spPr>
-          <a:xfrm>
-            <a:off x="5031248" y="3132107"/>
-            <a:ext cx="1800000" cy="360000"/>
-          </a:xfrm>
-          <a:prstGeom prst="roundRect">
-            <a:avLst/>
-          </a:prstGeom>
-          <a:noFill/>
-          <a:ln w="12700">
-            <a:solidFill>
-              <a:schemeClr val="tx2"/>
-            </a:solidFill>
-            <a:prstDash val="solid"/>
-          </a:ln>
-        </p:spPr>
-        <p:style>
-          <a:lnRef idx="2">
-            <a:schemeClr val="accent1">
-              <a:shade val="15000"/>
-            </a:schemeClr>
-          </a:lnRef>
-          <a:fillRef idx="1">
-            <a:schemeClr val="accent1"/>
-          </a:fillRef>
-          <a:effectRef idx="0">
-            <a:schemeClr val="accent1"/>
-          </a:effectRef>
-          <a:fontRef idx="minor">
-            <a:schemeClr val="lt1"/>
-          </a:fontRef>
-        </p:style>
-        <p:txBody>
-          <a:bodyPr rtlCol="0" anchor="ctr"/>
-          <a:lstStyle/>
-          <a:p>
-            <a:pPr algn="ctr"/>
-            <a:r>
-              <a:rPr lang="en-US" altLang="zh-CN" sz="1200" dirty="0">
-                <a:solidFill>
-                  <a:sysClr val="windowText" lastClr="000000"/>
-                </a:solidFill>
-                <a:latin typeface="Quicksand Light" panose="00000400000000000000" pitchFamily="2" charset="0"/>
-              </a:rPr>
-              <a:t>Congestion  Control</a:t>
-            </a:r>
-            <a:endParaRPr lang="zh-CN" altLang="en-US" sz="1200" dirty="0">
-              <a:solidFill>
-                <a:sysClr val="windowText" lastClr="000000"/>
-              </a:solidFill>
-              <a:latin typeface="Quicksand Light" panose="00000400000000000000" pitchFamily="2" charset="0"/>
-            </a:endParaRPr>
-          </a:p>
-        </p:txBody>
-      </p:sp>
-      <p:sp>
-        <p:nvSpPr>
-          <p:cNvPr id="4" name="矩形: 圆角 3">
-            <a:extLst>
-              <a:ext uri="{FF2B5EF4-FFF2-40B4-BE49-F238E27FC236}">
-                <a16:creationId xmlns:a16="http://schemas.microsoft.com/office/drawing/2014/main" id="{B7D33566-285E-1CCB-5E98-A8DFB5DC5691}"/>
-              </a:ext>
-            </a:extLst>
-          </p:cNvPr>
-          <p:cNvSpPr/>
-          <p:nvPr/>
-        </p:nvSpPr>
-        <p:spPr>
-          <a:xfrm>
-            <a:off x="5031248" y="3562619"/>
-            <a:ext cx="1800000" cy="360000"/>
-          </a:xfrm>
-          <a:prstGeom prst="roundRect">
-            <a:avLst/>
-          </a:prstGeom>
-          <a:noFill/>
-          <a:ln w="12700">
-            <a:solidFill>
-              <a:schemeClr val="tx2"/>
-            </a:solidFill>
-            <a:prstDash val="solid"/>
-          </a:ln>
-        </p:spPr>
-        <p:style>
-          <a:lnRef idx="2">
-            <a:schemeClr val="accent1">
-              <a:shade val="15000"/>
-            </a:schemeClr>
-          </a:lnRef>
-          <a:fillRef idx="1">
-            <a:schemeClr val="accent1"/>
-          </a:fillRef>
-          <a:effectRef idx="0">
-            <a:schemeClr val="accent1"/>
-          </a:effectRef>
-          <a:fontRef idx="minor">
-            <a:schemeClr val="lt1"/>
-          </a:fontRef>
-        </p:style>
-        <p:txBody>
-          <a:bodyPr rtlCol="0" anchor="ctr"/>
-          <a:lstStyle/>
-          <a:p>
-            <a:pPr algn="ctr"/>
-            <a:r>
-              <a:rPr lang="en-US" altLang="zh-CN" sz="1200" dirty="0">
-                <a:solidFill>
-                  <a:sysClr val="windowText" lastClr="000000"/>
-                </a:solidFill>
-                <a:latin typeface="Quicksand Light" panose="00000400000000000000" pitchFamily="2" charset="0"/>
-              </a:rPr>
-              <a:t>Three-Way Handshake</a:t>
-            </a:r>
-            <a:endParaRPr lang="zh-CN" altLang="en-US" sz="1200" dirty="0">
-              <a:solidFill>
-                <a:sysClr val="windowText" lastClr="000000"/>
-              </a:solidFill>
-              <a:latin typeface="Quicksand Light" panose="00000400000000000000" pitchFamily="2" charset="0"/>
-            </a:endParaRPr>
-          </a:p>
-        </p:txBody>
-      </p:sp>
-      <p:sp>
-        <p:nvSpPr>
-          <p:cNvPr id="5" name="矩形: 圆角 4">
-            <a:extLst>
-              <a:ext uri="{FF2B5EF4-FFF2-40B4-BE49-F238E27FC236}">
-                <a16:creationId xmlns:a16="http://schemas.microsoft.com/office/drawing/2014/main" id="{905996E1-56AA-82E7-6CF1-E2487C38B700}"/>
-              </a:ext>
-            </a:extLst>
-          </p:cNvPr>
-          <p:cNvSpPr/>
-          <p:nvPr/>
-        </p:nvSpPr>
-        <p:spPr>
-          <a:xfrm>
-            <a:off x="5031248" y="4665692"/>
-            <a:ext cx="1800000" cy="360000"/>
-          </a:xfrm>
-          <a:prstGeom prst="roundRect">
-            <a:avLst/>
-          </a:prstGeom>
-          <a:noFill/>
-          <a:ln w="12700">
-            <a:solidFill>
-              <a:schemeClr val="tx2"/>
-            </a:solidFill>
-            <a:prstDash val="solid"/>
-          </a:ln>
-        </p:spPr>
-        <p:style>
-          <a:lnRef idx="2">
-            <a:schemeClr val="accent1">
-              <a:shade val="15000"/>
-            </a:schemeClr>
-          </a:lnRef>
-          <a:fillRef idx="1">
-            <a:schemeClr val="accent1"/>
-          </a:fillRef>
-          <a:effectRef idx="0">
-            <a:schemeClr val="accent1"/>
-          </a:effectRef>
-          <a:fontRef idx="minor">
-            <a:schemeClr val="lt1"/>
-          </a:fontRef>
-        </p:style>
-        <p:txBody>
-          <a:bodyPr rtlCol="0" anchor="ctr"/>
-          <a:lstStyle/>
-          <a:p>
-            <a:pPr algn="ctr"/>
-            <a:r>
-              <a:rPr lang="en-US" altLang="zh-CN" sz="1200" dirty="0">
-                <a:solidFill>
-                  <a:sysClr val="windowText" lastClr="000000"/>
-                </a:solidFill>
-                <a:latin typeface="Quicksand Light" panose="00000400000000000000" pitchFamily="2" charset="0"/>
-              </a:rPr>
-              <a:t>Packet</a:t>
-            </a:r>
-            <a:endParaRPr lang="zh-CN" altLang="en-US" sz="1200" dirty="0">
-              <a:solidFill>
-                <a:sysClr val="windowText" lastClr="000000"/>
-              </a:solidFill>
-              <a:latin typeface="Quicksand Light" panose="00000400000000000000" pitchFamily="2" charset="0"/>
-            </a:endParaRPr>
-          </a:p>
-        </p:txBody>
-      </p:sp>
-      <p:cxnSp>
-        <p:nvCxnSpPr>
-          <p:cNvPr id="8" name="连接符: 曲线 7">
-            <a:extLst>
-              <a:ext uri="{FF2B5EF4-FFF2-40B4-BE49-F238E27FC236}">
-                <a16:creationId xmlns:a16="http://schemas.microsoft.com/office/drawing/2014/main" id="{40667B24-5AC7-5F2E-7021-EBB90191C191}"/>
-              </a:ext>
-            </a:extLst>
-          </p:cNvPr>
-          <p:cNvCxnSpPr>
-            <a:cxnSpLocks/>
-            <a:stCxn id="3" idx="1"/>
-            <a:endCxn id="16" idx="3"/>
-          </p:cNvCxnSpPr>
-          <p:nvPr/>
-        </p:nvCxnSpPr>
-        <p:spPr>
-          <a:xfrm rot="10800000" flipV="1">
-            <a:off x="4747694" y="3312107"/>
-            <a:ext cx="283555" cy="215256"/>
-          </a:xfrm>
-          <a:prstGeom prst="curvedConnector3">
-            <a:avLst>
-              <a:gd name="adj1" fmla="val 50000"/>
-            </a:avLst>
-          </a:prstGeom>
-          <a:ln w="6350">
-            <a:solidFill>
-              <a:srgbClr val="3CBFD1"/>
-            </a:solidFill>
-          </a:ln>
-        </p:spPr>
-        <p:style>
-          <a:lnRef idx="1">
-            <a:schemeClr val="accent1"/>
-          </a:lnRef>
-          <a:fillRef idx="0">
-            <a:schemeClr val="accent1"/>
-          </a:fillRef>
-          <a:effectRef idx="0">
-            <a:schemeClr val="accent1"/>
-          </a:effectRef>
-          <a:fontRef idx="minor">
-            <a:schemeClr val="tx1"/>
-          </a:fontRef>
-        </p:style>
-      </p:cxnSp>
-      <p:sp>
-        <p:nvSpPr>
-          <p:cNvPr id="9" name="矩形: 圆角 8">
-            <a:extLst>
-              <a:ext uri="{FF2B5EF4-FFF2-40B4-BE49-F238E27FC236}">
-                <a16:creationId xmlns:a16="http://schemas.microsoft.com/office/drawing/2014/main" id="{88EFE3ED-A618-B1ED-5F36-94CB8F38355F}"/>
-              </a:ext>
-            </a:extLst>
-          </p:cNvPr>
-          <p:cNvSpPr/>
-          <p:nvPr/>
-        </p:nvSpPr>
-        <p:spPr>
-          <a:xfrm>
-            <a:off x="5031248" y="3993131"/>
-            <a:ext cx="1800000" cy="360000"/>
-          </a:xfrm>
-          <a:prstGeom prst="roundRect">
-            <a:avLst/>
-          </a:prstGeom>
-          <a:noFill/>
-          <a:ln w="12700">
-            <a:solidFill>
-              <a:schemeClr val="tx2"/>
-            </a:solidFill>
-            <a:prstDash val="solid"/>
-          </a:ln>
-        </p:spPr>
-        <p:style>
-          <a:lnRef idx="2">
-            <a:schemeClr val="accent1">
-              <a:shade val="15000"/>
-            </a:schemeClr>
-          </a:lnRef>
-          <a:fillRef idx="1">
-            <a:schemeClr val="accent1"/>
-          </a:fillRef>
-          <a:effectRef idx="0">
-            <a:schemeClr val="accent1"/>
-          </a:effectRef>
-          <a:fontRef idx="minor">
-            <a:schemeClr val="lt1"/>
-          </a:fontRef>
-        </p:style>
-        <p:txBody>
-          <a:bodyPr rtlCol="0" anchor="ctr"/>
-          <a:lstStyle/>
-          <a:p>
-            <a:pPr algn="ctr"/>
-            <a:r>
-              <a:rPr lang="en-US" altLang="zh-CN" sz="1200" dirty="0">
-                <a:solidFill>
-                  <a:sysClr val="windowText" lastClr="000000"/>
-                </a:solidFill>
-                <a:latin typeface="Quicksand Light" panose="00000400000000000000" pitchFamily="2" charset="0"/>
-              </a:rPr>
-              <a:t>Packet</a:t>
-            </a:r>
-            <a:endParaRPr lang="zh-CN" altLang="en-US" sz="1200" dirty="0">
-              <a:solidFill>
-                <a:sysClr val="windowText" lastClr="000000"/>
-              </a:solidFill>
-              <a:latin typeface="Quicksand Light" panose="00000400000000000000" pitchFamily="2" charset="0"/>
-            </a:endParaRPr>
-          </a:p>
-        </p:txBody>
-      </p:sp>
-      <p:cxnSp>
-        <p:nvCxnSpPr>
-          <p:cNvPr id="10" name="连接符: 曲线 9">
-            <a:extLst>
-              <a:ext uri="{FF2B5EF4-FFF2-40B4-BE49-F238E27FC236}">
-                <a16:creationId xmlns:a16="http://schemas.microsoft.com/office/drawing/2014/main" id="{56D54B0A-0C00-1FA5-AA24-AB208E9F3E39}"/>
-              </a:ext>
-            </a:extLst>
-          </p:cNvPr>
-          <p:cNvCxnSpPr>
-            <a:cxnSpLocks/>
-            <a:stCxn id="16" idx="3"/>
-            <a:endCxn id="9" idx="1"/>
-          </p:cNvCxnSpPr>
-          <p:nvPr/>
-        </p:nvCxnSpPr>
-        <p:spPr>
-          <a:xfrm>
-            <a:off x="4747693" y="3527363"/>
-            <a:ext cx="283555" cy="645768"/>
-          </a:xfrm>
-          <a:prstGeom prst="curvedConnector3">
-            <a:avLst>
-              <a:gd name="adj1" fmla="val 50000"/>
-            </a:avLst>
-          </a:prstGeom>
-          <a:ln w="6350">
-            <a:solidFill>
-              <a:srgbClr val="3CBFD1"/>
-            </a:solidFill>
-          </a:ln>
-        </p:spPr>
-        <p:style>
-          <a:lnRef idx="1">
-            <a:schemeClr val="accent1"/>
-          </a:lnRef>
-          <a:fillRef idx="0">
-            <a:schemeClr val="accent1"/>
-          </a:fillRef>
-          <a:effectRef idx="0">
-            <a:schemeClr val="accent1"/>
-          </a:effectRef>
-          <a:fontRef idx="minor">
-            <a:schemeClr val="tx1"/>
-          </a:fontRef>
-        </p:style>
-      </p:cxnSp>
-      <p:sp>
-        <p:nvSpPr>
-          <p:cNvPr id="13" name="矩形: 圆角 12">
-            <a:extLst>
-              <a:ext uri="{FF2B5EF4-FFF2-40B4-BE49-F238E27FC236}">
-                <a16:creationId xmlns:a16="http://schemas.microsoft.com/office/drawing/2014/main" id="{AD181E9B-9708-8757-6641-0EC70B8857D3}"/>
-              </a:ext>
-            </a:extLst>
-          </p:cNvPr>
-          <p:cNvSpPr/>
-          <p:nvPr/>
-        </p:nvSpPr>
-        <p:spPr>
-          <a:xfrm>
-            <a:off x="5031248" y="2705606"/>
-            <a:ext cx="1800000" cy="360000"/>
-          </a:xfrm>
-          <a:prstGeom prst="roundRect">
-            <a:avLst/>
-          </a:prstGeom>
-          <a:noFill/>
-          <a:ln w="12700">
-            <a:solidFill>
-              <a:schemeClr val="tx2"/>
-            </a:solidFill>
-            <a:prstDash val="solid"/>
-          </a:ln>
-        </p:spPr>
-        <p:style>
-          <a:lnRef idx="2">
-            <a:schemeClr val="accent1">
-              <a:shade val="15000"/>
-            </a:schemeClr>
-          </a:lnRef>
-          <a:fillRef idx="1">
-            <a:schemeClr val="accent1"/>
-          </a:fillRef>
-          <a:effectRef idx="0">
-            <a:schemeClr val="accent1"/>
-          </a:effectRef>
-          <a:fontRef idx="minor">
-            <a:schemeClr val="lt1"/>
-          </a:fontRef>
-        </p:style>
-        <p:txBody>
-          <a:bodyPr rtlCol="0" anchor="ctr"/>
-          <a:lstStyle/>
-          <a:p>
-            <a:pPr algn="ctr"/>
-            <a:r>
-              <a:rPr lang="en-US" altLang="zh-CN" sz="1200" dirty="0">
-                <a:solidFill>
-                  <a:sysClr val="windowText" lastClr="000000"/>
-                </a:solidFill>
-                <a:latin typeface="Quicksand Light" panose="00000400000000000000" pitchFamily="2" charset="0"/>
-              </a:rPr>
-              <a:t>Traffic Control</a:t>
-            </a:r>
-            <a:endParaRPr lang="zh-CN" altLang="en-US" sz="1200" dirty="0">
-              <a:solidFill>
-                <a:sysClr val="windowText" lastClr="000000"/>
-              </a:solidFill>
-              <a:latin typeface="Quicksand Light" panose="00000400000000000000" pitchFamily="2" charset="0"/>
-            </a:endParaRPr>
-          </a:p>
-        </p:txBody>
-      </p:sp>
-      <p:cxnSp>
-        <p:nvCxnSpPr>
-          <p:cNvPr id="14" name="连接符: 曲线 13">
-            <a:extLst>
-              <a:ext uri="{FF2B5EF4-FFF2-40B4-BE49-F238E27FC236}">
-                <a16:creationId xmlns:a16="http://schemas.microsoft.com/office/drawing/2014/main" id="{94161A20-9CEA-26C5-90F1-7284ECA5C704}"/>
-              </a:ext>
-            </a:extLst>
-          </p:cNvPr>
-          <p:cNvCxnSpPr>
-            <a:cxnSpLocks/>
-            <a:stCxn id="13" idx="1"/>
-            <a:endCxn id="16" idx="3"/>
-          </p:cNvCxnSpPr>
-          <p:nvPr/>
-        </p:nvCxnSpPr>
-        <p:spPr>
-          <a:xfrm rot="10800000" flipV="1">
-            <a:off x="4747694" y="2885605"/>
-            <a:ext cx="283555" cy="641757"/>
-          </a:xfrm>
-          <a:prstGeom prst="curvedConnector3">
-            <a:avLst>
-              <a:gd name="adj1" fmla="val 50000"/>
-            </a:avLst>
-          </a:prstGeom>
-          <a:ln w="6350">
-            <a:solidFill>
-              <a:srgbClr val="3CBFD1"/>
-            </a:solidFill>
-          </a:ln>
-        </p:spPr>
-        <p:style>
-          <a:lnRef idx="1">
-            <a:schemeClr val="accent1"/>
-          </a:lnRef>
-          <a:fillRef idx="0">
-            <a:schemeClr val="accent1"/>
-          </a:fillRef>
-          <a:effectRef idx="0">
-            <a:schemeClr val="accent1"/>
-          </a:effectRef>
-          <a:fontRef idx="minor">
-            <a:schemeClr val="tx1"/>
-          </a:fontRef>
-        </p:style>
-      </p:cxnSp>
-      <p:sp>
-        <p:nvSpPr>
-          <p:cNvPr id="36" name="矩形: 圆角 35">
-            <a:extLst>
-              <a:ext uri="{FF2B5EF4-FFF2-40B4-BE49-F238E27FC236}">
-                <a16:creationId xmlns:a16="http://schemas.microsoft.com/office/drawing/2014/main" id="{C6587821-DD92-9679-7756-3E8C2C8D118E}"/>
-              </a:ext>
-            </a:extLst>
-          </p:cNvPr>
-          <p:cNvSpPr/>
-          <p:nvPr/>
-        </p:nvSpPr>
-        <p:spPr>
-          <a:xfrm>
-            <a:off x="1584137" y="3347363"/>
-            <a:ext cx="1440000" cy="360000"/>
-          </a:xfrm>
-          <a:prstGeom prst="roundRect">
-            <a:avLst/>
-          </a:prstGeom>
-          <a:solidFill>
-            <a:schemeClr val="tx1"/>
-          </a:solidFill>
-          <a:ln w="12700">
-            <a:noFill/>
-          </a:ln>
-        </p:spPr>
-        <p:style>
-          <a:lnRef idx="2">
-            <a:schemeClr val="accent1">
-              <a:shade val="15000"/>
-            </a:schemeClr>
-          </a:lnRef>
-          <a:fillRef idx="1">
-            <a:schemeClr val="accent1"/>
-          </a:fillRef>
-          <a:effectRef idx="0">
-            <a:schemeClr val="accent1"/>
-          </a:effectRef>
-          <a:fontRef idx="minor">
-            <a:schemeClr val="lt1"/>
-          </a:fontRef>
-        </p:style>
-        <p:txBody>
-          <a:bodyPr rtlCol="0" anchor="ctr"/>
-          <a:lstStyle/>
-          <a:p>
-            <a:pPr algn="ctr"/>
-            <a:r>
-              <a:rPr lang="en-US" altLang="zh-CN" sz="1200" dirty="0">
-                <a:latin typeface="Quicksand Light" panose="00000400000000000000" pitchFamily="2" charset="0"/>
-                <a:ea typeface="微软雅黑" panose="020B0503020204020204" pitchFamily="34" charset="-122"/>
-              </a:rPr>
-              <a:t>Transport Layer</a:t>
-            </a:r>
-            <a:endParaRPr lang="zh-CN" altLang="en-US" sz="1200" dirty="0">
-              <a:latin typeface="Quicksand Light" panose="00000400000000000000" pitchFamily="2" charset="0"/>
-              <a:ea typeface="微软雅黑" panose="020B0503020204020204" pitchFamily="34" charset="-122"/>
-            </a:endParaRPr>
-          </a:p>
-        </p:txBody>
-      </p:sp>
-      <p:cxnSp>
-        <p:nvCxnSpPr>
-          <p:cNvPr id="42" name="连接符: 曲线 41">
-            <a:extLst>
-              <a:ext uri="{FF2B5EF4-FFF2-40B4-BE49-F238E27FC236}">
-                <a16:creationId xmlns:a16="http://schemas.microsoft.com/office/drawing/2014/main" id="{6589FE98-C76F-3ED9-8AB2-A810BAC61631}"/>
-              </a:ext>
-            </a:extLst>
-          </p:cNvPr>
-          <p:cNvCxnSpPr>
-            <a:cxnSpLocks/>
-            <a:stCxn id="36" idx="3"/>
-            <a:endCxn id="2" idx="1"/>
-          </p:cNvCxnSpPr>
-          <p:nvPr/>
-        </p:nvCxnSpPr>
-        <p:spPr>
-          <a:xfrm flipV="1">
-            <a:off x="3024137" y="2899832"/>
-            <a:ext cx="283556" cy="627531"/>
-          </a:xfrm>
-          <a:prstGeom prst="curvedConnector3">
-            <a:avLst>
-              <a:gd name="adj1" fmla="val 50000"/>
-            </a:avLst>
-          </a:prstGeom>
-          <a:ln>
-            <a:solidFill>
-              <a:schemeClr val="accent5">
-                <a:lumMod val="75000"/>
-              </a:schemeClr>
-            </a:solidFill>
-          </a:ln>
-        </p:spPr>
-        <p:style>
-          <a:lnRef idx="1">
-            <a:schemeClr val="accent1"/>
-          </a:lnRef>
-          <a:fillRef idx="0">
-            <a:schemeClr val="accent1"/>
-          </a:fillRef>
-          <a:effectRef idx="0">
-            <a:schemeClr val="accent1"/>
-          </a:effectRef>
-          <a:fontRef idx="minor">
-            <a:schemeClr val="tx1"/>
-          </a:fontRef>
-        </p:style>
-      </p:cxnSp>
-      <p:sp>
-        <p:nvSpPr>
-          <p:cNvPr id="16" name="矩形: 圆角 15">
-            <a:extLst>
-              <a:ext uri="{FF2B5EF4-FFF2-40B4-BE49-F238E27FC236}">
-                <a16:creationId xmlns:a16="http://schemas.microsoft.com/office/drawing/2014/main" id="{C4F8D70D-848F-8E10-57D5-0246D0F22858}"/>
-              </a:ext>
-            </a:extLst>
-          </p:cNvPr>
-          <p:cNvSpPr/>
-          <p:nvPr/>
-        </p:nvSpPr>
-        <p:spPr>
-          <a:xfrm>
-            <a:off x="3307693" y="3347363"/>
-            <a:ext cx="1440000" cy="360000"/>
-          </a:xfrm>
-          <a:prstGeom prst="roundRect">
-            <a:avLst/>
-          </a:prstGeom>
-          <a:solidFill>
-            <a:srgbClr val="3DC1D3"/>
-          </a:solidFill>
-          <a:ln w="12700">
-            <a:noFill/>
-          </a:ln>
-        </p:spPr>
-        <p:style>
-          <a:lnRef idx="2">
-            <a:schemeClr val="accent1">
-              <a:shade val="15000"/>
-            </a:schemeClr>
-          </a:lnRef>
-          <a:fillRef idx="1">
-            <a:schemeClr val="accent1"/>
-          </a:fillRef>
-          <a:effectRef idx="0">
-            <a:schemeClr val="accent1"/>
-          </a:effectRef>
-          <a:fontRef idx="minor">
-            <a:schemeClr val="lt1"/>
-          </a:fontRef>
-        </p:style>
-        <p:txBody>
-          <a:bodyPr rtlCol="0" anchor="ctr"/>
-          <a:lstStyle/>
-          <a:p>
-            <a:pPr algn="ctr"/>
-            <a:r>
-              <a:rPr lang="en-US" altLang="zh-CN" sz="1200" dirty="0">
-                <a:latin typeface="Quicksand Light" panose="00000400000000000000" pitchFamily="2" charset="0"/>
-              </a:rPr>
-              <a:t>TCP</a:t>
-            </a:r>
-            <a:endParaRPr lang="zh-CN" altLang="en-US" sz="1200" dirty="0">
-              <a:latin typeface="Quicksand Light" panose="00000400000000000000" pitchFamily="2" charset="0"/>
-            </a:endParaRPr>
-          </a:p>
-        </p:txBody>
-      </p:sp>
-      <p:sp>
-        <p:nvSpPr>
-          <p:cNvPr id="19" name="矩形: 圆角 18">
-            <a:extLst>
-              <a:ext uri="{FF2B5EF4-FFF2-40B4-BE49-F238E27FC236}">
-                <a16:creationId xmlns:a16="http://schemas.microsoft.com/office/drawing/2014/main" id="{81530229-6710-AE17-7125-34E7C102D265}"/>
-              </a:ext>
-            </a:extLst>
-          </p:cNvPr>
-          <p:cNvSpPr/>
-          <p:nvPr/>
-        </p:nvSpPr>
-        <p:spPr>
-          <a:xfrm>
-            <a:off x="3307693" y="4665692"/>
-            <a:ext cx="1440000" cy="360000"/>
-          </a:xfrm>
-          <a:prstGeom prst="roundRect">
-            <a:avLst/>
-          </a:prstGeom>
-          <a:solidFill>
-            <a:srgbClr val="20BF6B"/>
-          </a:solidFill>
-          <a:ln w="12700">
-            <a:noFill/>
-          </a:ln>
-        </p:spPr>
-        <p:style>
-          <a:lnRef idx="2">
-            <a:schemeClr val="accent1">
-              <a:shade val="15000"/>
-            </a:schemeClr>
-          </a:lnRef>
-          <a:fillRef idx="1">
-            <a:schemeClr val="accent1"/>
-          </a:fillRef>
-          <a:effectRef idx="0">
-            <a:schemeClr val="accent1"/>
-          </a:effectRef>
-          <a:fontRef idx="minor">
-            <a:schemeClr val="lt1"/>
-          </a:fontRef>
-        </p:style>
-        <p:txBody>
-          <a:bodyPr rtlCol="0" anchor="ctr"/>
-          <a:lstStyle/>
-          <a:p>
-            <a:pPr algn="ctr"/>
-            <a:r>
-              <a:rPr lang="en-US" altLang="zh-CN" sz="1200" dirty="0">
-                <a:latin typeface="Quicksand Light" panose="00000400000000000000" pitchFamily="2" charset="0"/>
-              </a:rPr>
-              <a:t>UDP</a:t>
-            </a:r>
-            <a:endParaRPr lang="zh-CN" altLang="en-US" sz="1200" dirty="0">
-              <a:latin typeface="Quicksand Light" panose="00000400000000000000" pitchFamily="2" charset="0"/>
-            </a:endParaRPr>
-          </a:p>
-        </p:txBody>
-      </p:sp>
-      <p:cxnSp>
-        <p:nvCxnSpPr>
-          <p:cNvPr id="22" name="连接符: 曲线 21">
-            <a:extLst>
-              <a:ext uri="{FF2B5EF4-FFF2-40B4-BE49-F238E27FC236}">
-                <a16:creationId xmlns:a16="http://schemas.microsoft.com/office/drawing/2014/main" id="{983C1AC8-3735-FBF8-1D52-F46340D06312}"/>
-              </a:ext>
-            </a:extLst>
-          </p:cNvPr>
-          <p:cNvCxnSpPr>
-            <a:cxnSpLocks/>
-            <a:stCxn id="36" idx="3"/>
-            <a:endCxn id="19" idx="1"/>
-          </p:cNvCxnSpPr>
-          <p:nvPr/>
-        </p:nvCxnSpPr>
-        <p:spPr>
-          <a:xfrm>
-            <a:off x="3024137" y="3527363"/>
-            <a:ext cx="283556" cy="1318329"/>
-          </a:xfrm>
-          <a:prstGeom prst="curvedConnector3">
-            <a:avLst>
-              <a:gd name="adj1" fmla="val 50000"/>
-            </a:avLst>
-          </a:prstGeom>
-          <a:ln>
-            <a:solidFill>
-              <a:srgbClr val="20BF6B"/>
-            </a:solidFill>
-          </a:ln>
-        </p:spPr>
-        <p:style>
-          <a:lnRef idx="1">
-            <a:schemeClr val="accent1"/>
-          </a:lnRef>
-          <a:fillRef idx="0">
-            <a:schemeClr val="accent1"/>
-          </a:fillRef>
-          <a:effectRef idx="0">
-            <a:schemeClr val="accent1"/>
-          </a:effectRef>
-          <a:fontRef idx="minor">
-            <a:schemeClr val="tx1"/>
-          </a:fontRef>
-        </p:style>
-      </p:cxnSp>
-      <p:cxnSp>
-        <p:nvCxnSpPr>
-          <p:cNvPr id="28" name="直接连接符 27">
-            <a:extLst>
-              <a:ext uri="{FF2B5EF4-FFF2-40B4-BE49-F238E27FC236}">
-                <a16:creationId xmlns:a16="http://schemas.microsoft.com/office/drawing/2014/main" id="{BD7B110E-78A0-DA3F-A295-242686C8DE59}"/>
-              </a:ext>
-            </a:extLst>
-          </p:cNvPr>
-          <p:cNvCxnSpPr>
-            <a:stCxn id="16" idx="1"/>
-            <a:endCxn id="36" idx="3"/>
-          </p:cNvCxnSpPr>
-          <p:nvPr/>
-        </p:nvCxnSpPr>
-        <p:spPr>
-          <a:xfrm flipH="1">
-            <a:off x="3024137" y="3527363"/>
-            <a:ext cx="283556" cy="0"/>
-          </a:xfrm>
-          <a:prstGeom prst="line">
-            <a:avLst/>
-          </a:prstGeom>
-          <a:ln>
-            <a:solidFill>
-              <a:srgbClr val="3CBFD1"/>
-            </a:solidFill>
-          </a:ln>
-        </p:spPr>
-        <p:style>
-          <a:lnRef idx="1">
-            <a:schemeClr val="accent1"/>
-          </a:lnRef>
-          <a:fillRef idx="0">
-            <a:schemeClr val="accent1"/>
-          </a:fillRef>
-          <a:effectRef idx="0">
-            <a:schemeClr val="accent1"/>
-          </a:effectRef>
-          <a:fontRef idx="minor">
-            <a:schemeClr val="tx1"/>
-          </a:fontRef>
-        </p:style>
-      </p:cxnSp>
-      <p:cxnSp>
-        <p:nvCxnSpPr>
-          <p:cNvPr id="29" name="连接符: 曲线 28">
-            <a:extLst>
-              <a:ext uri="{FF2B5EF4-FFF2-40B4-BE49-F238E27FC236}">
-                <a16:creationId xmlns:a16="http://schemas.microsoft.com/office/drawing/2014/main" id="{3CE98D71-068D-12E4-6351-5662457FF6EF}"/>
-              </a:ext>
-            </a:extLst>
-          </p:cNvPr>
-          <p:cNvCxnSpPr>
-            <a:cxnSpLocks/>
-            <a:stCxn id="4" idx="1"/>
-            <a:endCxn id="16" idx="3"/>
-          </p:cNvCxnSpPr>
-          <p:nvPr/>
-        </p:nvCxnSpPr>
-        <p:spPr>
-          <a:xfrm rot="10800000">
-            <a:off x="4747694" y="3527363"/>
-            <a:ext cx="283555" cy="215256"/>
-          </a:xfrm>
-          <a:prstGeom prst="curvedConnector3">
-            <a:avLst>
-              <a:gd name="adj1" fmla="val 50000"/>
-            </a:avLst>
-          </a:prstGeom>
-          <a:ln w="6350">
-            <a:solidFill>
-              <a:srgbClr val="3CBFD1"/>
-            </a:solidFill>
-          </a:ln>
-        </p:spPr>
-        <p:style>
-          <a:lnRef idx="1">
-            <a:schemeClr val="accent1"/>
-          </a:lnRef>
-          <a:fillRef idx="0">
-            <a:schemeClr val="accent1"/>
-          </a:fillRef>
-          <a:effectRef idx="0">
-            <a:schemeClr val="accent1"/>
-          </a:effectRef>
-          <a:fontRef idx="minor">
-            <a:schemeClr val="tx1"/>
-          </a:fontRef>
-        </p:style>
-      </p:cxnSp>
-      <p:sp>
-        <p:nvSpPr>
-          <p:cNvPr id="6" name="矩形: 圆角 5">
-            <a:extLst>
-              <a:ext uri="{FF2B5EF4-FFF2-40B4-BE49-F238E27FC236}">
-                <a16:creationId xmlns:a16="http://schemas.microsoft.com/office/drawing/2014/main" id="{E26F0BAC-FA81-5F6F-B924-707A50D906C4}"/>
-              </a:ext>
-            </a:extLst>
-          </p:cNvPr>
-          <p:cNvSpPr/>
-          <p:nvPr/>
-        </p:nvSpPr>
-        <p:spPr>
-          <a:xfrm>
-            <a:off x="7102100" y="3562619"/>
-            <a:ext cx="1800000" cy="360000"/>
-          </a:xfrm>
-          <a:prstGeom prst="roundRect">
-            <a:avLst/>
-          </a:prstGeom>
-          <a:noFill/>
-          <a:ln w="12700">
-            <a:noFill/>
-            <a:prstDash val="solid"/>
-          </a:ln>
-        </p:spPr>
-        <p:style>
-          <a:lnRef idx="2">
-            <a:schemeClr val="accent1">
-              <a:shade val="15000"/>
-            </a:schemeClr>
-          </a:lnRef>
-          <a:fillRef idx="1">
-            <a:schemeClr val="accent1"/>
-          </a:fillRef>
-          <a:effectRef idx="0">
-            <a:schemeClr val="accent1"/>
-          </a:effectRef>
-          <a:fontRef idx="minor">
-            <a:schemeClr val="lt1"/>
-          </a:fontRef>
-        </p:style>
-        <p:txBody>
-          <a:bodyPr rtlCol="0" anchor="ctr"/>
-          <a:lstStyle/>
-          <a:p>
-            <a:endParaRPr lang="zh-CN" altLang="en-US" sz="1200" dirty="0">
-              <a:solidFill>
-                <a:sysClr val="windowText" lastClr="000000"/>
-              </a:solidFill>
-              <a:latin typeface="Quicksand Light" panose="00000400000000000000" pitchFamily="2" charset="0"/>
-            </a:endParaRPr>
-          </a:p>
-        </p:txBody>
-      </p:sp>
-      <p:cxnSp>
-        <p:nvCxnSpPr>
-          <p:cNvPr id="17" name="直接连接符 16">
-            <a:extLst>
-              <a:ext uri="{FF2B5EF4-FFF2-40B4-BE49-F238E27FC236}">
-                <a16:creationId xmlns:a16="http://schemas.microsoft.com/office/drawing/2014/main" id="{5469945C-7541-0506-CC16-F8088F979CF3}"/>
-              </a:ext>
-            </a:extLst>
-          </p:cNvPr>
-          <p:cNvCxnSpPr>
-            <a:stCxn id="19" idx="3"/>
-            <a:endCxn id="5" idx="1"/>
-          </p:cNvCxnSpPr>
-          <p:nvPr/>
-        </p:nvCxnSpPr>
-        <p:spPr>
-          <a:xfrm>
-            <a:off x="4747693" y="4845692"/>
-            <a:ext cx="283555" cy="0"/>
-          </a:xfrm>
-          <a:prstGeom prst="line">
-            <a:avLst/>
-          </a:prstGeom>
-          <a:ln>
-            <a:solidFill>
-              <a:srgbClr val="20BD6A"/>
-            </a:solidFill>
-          </a:ln>
-        </p:spPr>
-        <p:style>
-          <a:lnRef idx="1">
-            <a:schemeClr val="accent1"/>
-          </a:lnRef>
-          <a:fillRef idx="0">
-            <a:schemeClr val="accent1"/>
-          </a:fillRef>
-          <a:effectRef idx="0">
-            <a:schemeClr val="accent1"/>
-          </a:effectRef>
-          <a:fontRef idx="minor">
-            <a:schemeClr val="tx1"/>
-          </a:fontRef>
-        </p:style>
-      </p:cxnSp>
-    </p:spTree>
-    <p:extLst>
-      <p:ext uri="{BB962C8B-B14F-4D97-AF65-F5344CB8AC3E}">
-        <p14:creationId xmlns:p14="http://schemas.microsoft.com/office/powerpoint/2010/main" val="1275707856"/>
-      </p:ext>
-    </p:extLst>
-  </p:cSld>
-  <p:clrMapOvr>
-    <a:masterClrMapping/>
-  </p:clrMapOvr>
-</p:sld>
-</file>
-
-<file path=ppt/slides/slide30.xml><?xml version="1.0" encoding="utf-8"?>
+<file path=ppt/slides/slide31.xml><?xml version="1.0" encoding="utf-8"?>
 <p:sld xmlns:a="http://schemas.openxmlformats.org/drawingml/2006/main" xmlns:r="http://schemas.openxmlformats.org/officeDocument/2006/relationships" xmlns:p="http://schemas.openxmlformats.org/presentationml/2006/main">
   <p:cSld>
     <p:spTree>
@@ -29193,7 +29226,7 @@
 </p:sld>
 </file>
 
-<file path=ppt/slides/slide31.xml><?xml version="1.0" encoding="utf-8"?>
+<file path=ppt/slides/slide32.xml><?xml version="1.0" encoding="utf-8"?>
 <p:sld xmlns:a="http://schemas.openxmlformats.org/drawingml/2006/main" xmlns:r="http://schemas.openxmlformats.org/officeDocument/2006/relationships" xmlns:p="http://schemas.openxmlformats.org/presentationml/2006/main">
   <p:cSld>
     <p:spTree>
@@ -29596,7 +29629,7 @@
 </p:sld>
 </file>
 
-<file path=ppt/slides/slide32.xml><?xml version="1.0" encoding="utf-8"?>
+<file path=ppt/slides/slide33.xml><?xml version="1.0" encoding="utf-8"?>
 <p:sld xmlns:a="http://schemas.openxmlformats.org/drawingml/2006/main" xmlns:r="http://schemas.openxmlformats.org/officeDocument/2006/relationships" xmlns:p="http://schemas.openxmlformats.org/presentationml/2006/main">
   <p:cSld>
     <p:spTree>
@@ -33553,6 +33586,1048 @@
   <p:cSld>
     <p:spTree>
       <p:nvGrpSpPr>
+        <p:cNvPr id="1" name="">
+          <a:extLst>
+            <a:ext uri="{FF2B5EF4-FFF2-40B4-BE49-F238E27FC236}">
+              <a16:creationId xmlns:a16="http://schemas.microsoft.com/office/drawing/2014/main" id="{305ACE99-59B0-D2A0-7D0D-F12E4D9ED934}"/>
+            </a:ext>
+          </a:extLst>
+        </p:cNvPr>
+        <p:cNvGrpSpPr/>
+        <p:nvPr/>
+      </p:nvGrpSpPr>
+      <p:grpSpPr>
+        <a:xfrm>
+          <a:off x="0" y="0"/>
+          <a:ext cx="0" cy="0"/>
+          <a:chOff x="0" y="0"/>
+          <a:chExt cx="0" cy="0"/>
+        </a:xfrm>
+      </p:grpSpPr>
+      <p:sp>
+        <p:nvSpPr>
+          <p:cNvPr id="2" name="矩形: 圆角 1">
+            <a:extLst>
+              <a:ext uri="{FF2B5EF4-FFF2-40B4-BE49-F238E27FC236}">
+                <a16:creationId xmlns:a16="http://schemas.microsoft.com/office/drawing/2014/main" id="{EA1617AA-3BC5-A6C2-7966-463E2BC3AC46}"/>
+              </a:ext>
+            </a:extLst>
+          </p:cNvPr>
+          <p:cNvSpPr/>
+          <p:nvPr/>
+        </p:nvSpPr>
+        <p:spPr>
+          <a:xfrm>
+            <a:off x="3307693" y="2719832"/>
+            <a:ext cx="1440000" cy="360000"/>
+          </a:xfrm>
+          <a:prstGeom prst="roundRect">
+            <a:avLst/>
+          </a:prstGeom>
+          <a:solidFill>
+            <a:schemeClr val="accent5">
+              <a:lumMod val="75000"/>
+            </a:schemeClr>
+          </a:solidFill>
+          <a:ln w="12700">
+            <a:noFill/>
+          </a:ln>
+        </p:spPr>
+        <p:style>
+          <a:lnRef idx="2">
+            <a:schemeClr val="accent1">
+              <a:shade val="15000"/>
+            </a:schemeClr>
+          </a:lnRef>
+          <a:fillRef idx="1">
+            <a:schemeClr val="accent1"/>
+          </a:fillRef>
+          <a:effectRef idx="0">
+            <a:schemeClr val="accent1"/>
+          </a:effectRef>
+          <a:fontRef idx="minor">
+            <a:schemeClr val="lt1"/>
+          </a:fontRef>
+        </p:style>
+        <p:txBody>
+          <a:bodyPr rtlCol="0" anchor="ctr"/>
+          <a:lstStyle/>
+          <a:p>
+            <a:pPr algn="ctr"/>
+            <a:r>
+              <a:rPr lang="en-US" altLang="zh-CN" sz="1200" dirty="0">
+                <a:latin typeface="Quicksand Light" panose="00000400000000000000" pitchFamily="2" charset="0"/>
+              </a:rPr>
+              <a:t>Port</a:t>
+            </a:r>
+            <a:endParaRPr lang="zh-CN" altLang="en-US" sz="1200" dirty="0">
+              <a:latin typeface="Quicksand Light" panose="00000400000000000000" pitchFamily="2" charset="0"/>
+            </a:endParaRPr>
+          </a:p>
+        </p:txBody>
+      </p:sp>
+      <p:sp>
+        <p:nvSpPr>
+          <p:cNvPr id="3" name="矩形: 圆角 2">
+            <a:extLst>
+              <a:ext uri="{FF2B5EF4-FFF2-40B4-BE49-F238E27FC236}">
+                <a16:creationId xmlns:a16="http://schemas.microsoft.com/office/drawing/2014/main" id="{9D801BA9-9C6A-24D0-E174-E3604316CB49}"/>
+              </a:ext>
+            </a:extLst>
+          </p:cNvPr>
+          <p:cNvSpPr/>
+          <p:nvPr/>
+        </p:nvSpPr>
+        <p:spPr>
+          <a:xfrm>
+            <a:off x="5031248" y="3132107"/>
+            <a:ext cx="1800000" cy="360000"/>
+          </a:xfrm>
+          <a:prstGeom prst="roundRect">
+            <a:avLst/>
+          </a:prstGeom>
+          <a:noFill/>
+          <a:ln w="12700">
+            <a:solidFill>
+              <a:schemeClr val="tx2"/>
+            </a:solidFill>
+            <a:prstDash val="solid"/>
+          </a:ln>
+        </p:spPr>
+        <p:style>
+          <a:lnRef idx="2">
+            <a:schemeClr val="accent1">
+              <a:shade val="15000"/>
+            </a:schemeClr>
+          </a:lnRef>
+          <a:fillRef idx="1">
+            <a:schemeClr val="accent1"/>
+          </a:fillRef>
+          <a:effectRef idx="0">
+            <a:schemeClr val="accent1"/>
+          </a:effectRef>
+          <a:fontRef idx="minor">
+            <a:schemeClr val="lt1"/>
+          </a:fontRef>
+        </p:style>
+        <p:txBody>
+          <a:bodyPr rtlCol="0" anchor="ctr"/>
+          <a:lstStyle/>
+          <a:p>
+            <a:pPr algn="ctr"/>
+            <a:r>
+              <a:rPr lang="en-US" altLang="zh-CN" sz="1200" dirty="0">
+                <a:solidFill>
+                  <a:sysClr val="windowText" lastClr="000000"/>
+                </a:solidFill>
+                <a:latin typeface="Quicksand Light" panose="00000400000000000000" pitchFamily="2" charset="0"/>
+              </a:rPr>
+              <a:t>Congestion  Control</a:t>
+            </a:r>
+            <a:endParaRPr lang="zh-CN" altLang="en-US" sz="1200" dirty="0">
+              <a:solidFill>
+                <a:sysClr val="windowText" lastClr="000000"/>
+              </a:solidFill>
+              <a:latin typeface="Quicksand Light" panose="00000400000000000000" pitchFamily="2" charset="0"/>
+            </a:endParaRPr>
+          </a:p>
+        </p:txBody>
+      </p:sp>
+      <p:sp>
+        <p:nvSpPr>
+          <p:cNvPr id="4" name="矩形: 圆角 3">
+            <a:extLst>
+              <a:ext uri="{FF2B5EF4-FFF2-40B4-BE49-F238E27FC236}">
+                <a16:creationId xmlns:a16="http://schemas.microsoft.com/office/drawing/2014/main" id="{B7D33566-285E-1CCB-5E98-A8DFB5DC5691}"/>
+              </a:ext>
+            </a:extLst>
+          </p:cNvPr>
+          <p:cNvSpPr/>
+          <p:nvPr/>
+        </p:nvSpPr>
+        <p:spPr>
+          <a:xfrm>
+            <a:off x="5031248" y="3562619"/>
+            <a:ext cx="1800000" cy="360000"/>
+          </a:xfrm>
+          <a:prstGeom prst="roundRect">
+            <a:avLst/>
+          </a:prstGeom>
+          <a:noFill/>
+          <a:ln w="12700">
+            <a:solidFill>
+              <a:schemeClr val="tx2"/>
+            </a:solidFill>
+            <a:prstDash val="solid"/>
+          </a:ln>
+        </p:spPr>
+        <p:style>
+          <a:lnRef idx="2">
+            <a:schemeClr val="accent1">
+              <a:shade val="15000"/>
+            </a:schemeClr>
+          </a:lnRef>
+          <a:fillRef idx="1">
+            <a:schemeClr val="accent1"/>
+          </a:fillRef>
+          <a:effectRef idx="0">
+            <a:schemeClr val="accent1"/>
+          </a:effectRef>
+          <a:fontRef idx="minor">
+            <a:schemeClr val="lt1"/>
+          </a:fontRef>
+        </p:style>
+        <p:txBody>
+          <a:bodyPr rtlCol="0" anchor="ctr"/>
+          <a:lstStyle/>
+          <a:p>
+            <a:pPr algn="ctr"/>
+            <a:r>
+              <a:rPr lang="en-US" altLang="zh-CN" sz="1200" dirty="0">
+                <a:solidFill>
+                  <a:sysClr val="windowText" lastClr="000000"/>
+                </a:solidFill>
+                <a:latin typeface="Quicksand Light" panose="00000400000000000000" pitchFamily="2" charset="0"/>
+              </a:rPr>
+              <a:t>Three-Way Handshake</a:t>
+            </a:r>
+            <a:endParaRPr lang="zh-CN" altLang="en-US" sz="1200" dirty="0">
+              <a:solidFill>
+                <a:sysClr val="windowText" lastClr="000000"/>
+              </a:solidFill>
+              <a:latin typeface="Quicksand Light" panose="00000400000000000000" pitchFamily="2" charset="0"/>
+            </a:endParaRPr>
+          </a:p>
+        </p:txBody>
+      </p:sp>
+      <p:sp>
+        <p:nvSpPr>
+          <p:cNvPr id="5" name="矩形: 圆角 4">
+            <a:extLst>
+              <a:ext uri="{FF2B5EF4-FFF2-40B4-BE49-F238E27FC236}">
+                <a16:creationId xmlns:a16="http://schemas.microsoft.com/office/drawing/2014/main" id="{905996E1-56AA-82E7-6CF1-E2487C38B700}"/>
+              </a:ext>
+            </a:extLst>
+          </p:cNvPr>
+          <p:cNvSpPr/>
+          <p:nvPr/>
+        </p:nvSpPr>
+        <p:spPr>
+          <a:xfrm>
+            <a:off x="5031248" y="4665692"/>
+            <a:ext cx="1800000" cy="360000"/>
+          </a:xfrm>
+          <a:prstGeom prst="roundRect">
+            <a:avLst/>
+          </a:prstGeom>
+          <a:noFill/>
+          <a:ln w="12700">
+            <a:solidFill>
+              <a:schemeClr val="tx2"/>
+            </a:solidFill>
+            <a:prstDash val="solid"/>
+          </a:ln>
+        </p:spPr>
+        <p:style>
+          <a:lnRef idx="2">
+            <a:schemeClr val="accent1">
+              <a:shade val="15000"/>
+            </a:schemeClr>
+          </a:lnRef>
+          <a:fillRef idx="1">
+            <a:schemeClr val="accent1"/>
+          </a:fillRef>
+          <a:effectRef idx="0">
+            <a:schemeClr val="accent1"/>
+          </a:effectRef>
+          <a:fontRef idx="minor">
+            <a:schemeClr val="lt1"/>
+          </a:fontRef>
+        </p:style>
+        <p:txBody>
+          <a:bodyPr rtlCol="0" anchor="ctr"/>
+          <a:lstStyle/>
+          <a:p>
+            <a:pPr algn="ctr"/>
+            <a:r>
+              <a:rPr lang="en-US" altLang="zh-CN" sz="1200" dirty="0">
+                <a:solidFill>
+                  <a:sysClr val="windowText" lastClr="000000"/>
+                </a:solidFill>
+                <a:latin typeface="Quicksand Light" panose="00000400000000000000" pitchFamily="2" charset="0"/>
+              </a:rPr>
+              <a:t>Packet</a:t>
+            </a:r>
+            <a:endParaRPr lang="zh-CN" altLang="en-US" sz="1200" dirty="0">
+              <a:solidFill>
+                <a:sysClr val="windowText" lastClr="000000"/>
+              </a:solidFill>
+              <a:latin typeface="Quicksand Light" panose="00000400000000000000" pitchFamily="2" charset="0"/>
+            </a:endParaRPr>
+          </a:p>
+        </p:txBody>
+      </p:sp>
+      <p:cxnSp>
+        <p:nvCxnSpPr>
+          <p:cNvPr id="8" name="连接符: 曲线 7">
+            <a:extLst>
+              <a:ext uri="{FF2B5EF4-FFF2-40B4-BE49-F238E27FC236}">
+                <a16:creationId xmlns:a16="http://schemas.microsoft.com/office/drawing/2014/main" id="{40667B24-5AC7-5F2E-7021-EBB90191C191}"/>
+              </a:ext>
+            </a:extLst>
+          </p:cNvPr>
+          <p:cNvCxnSpPr>
+            <a:cxnSpLocks/>
+            <a:stCxn id="3" idx="1"/>
+            <a:endCxn id="16" idx="3"/>
+          </p:cNvCxnSpPr>
+          <p:nvPr/>
+        </p:nvCxnSpPr>
+        <p:spPr>
+          <a:xfrm rot="10800000" flipV="1">
+            <a:off x="4747694" y="3312107"/>
+            <a:ext cx="283555" cy="215256"/>
+          </a:xfrm>
+          <a:prstGeom prst="curvedConnector3">
+            <a:avLst>
+              <a:gd name="adj1" fmla="val 50000"/>
+            </a:avLst>
+          </a:prstGeom>
+          <a:ln w="6350">
+            <a:solidFill>
+              <a:srgbClr val="3CBFD1"/>
+            </a:solidFill>
+          </a:ln>
+        </p:spPr>
+        <p:style>
+          <a:lnRef idx="1">
+            <a:schemeClr val="accent1"/>
+          </a:lnRef>
+          <a:fillRef idx="0">
+            <a:schemeClr val="accent1"/>
+          </a:fillRef>
+          <a:effectRef idx="0">
+            <a:schemeClr val="accent1"/>
+          </a:effectRef>
+          <a:fontRef idx="minor">
+            <a:schemeClr val="tx1"/>
+          </a:fontRef>
+        </p:style>
+      </p:cxnSp>
+      <p:sp>
+        <p:nvSpPr>
+          <p:cNvPr id="9" name="矩形: 圆角 8">
+            <a:extLst>
+              <a:ext uri="{FF2B5EF4-FFF2-40B4-BE49-F238E27FC236}">
+                <a16:creationId xmlns:a16="http://schemas.microsoft.com/office/drawing/2014/main" id="{88EFE3ED-A618-B1ED-5F36-94CB8F38355F}"/>
+              </a:ext>
+            </a:extLst>
+          </p:cNvPr>
+          <p:cNvSpPr/>
+          <p:nvPr/>
+        </p:nvSpPr>
+        <p:spPr>
+          <a:xfrm>
+            <a:off x="5031248" y="3993131"/>
+            <a:ext cx="1800000" cy="360000"/>
+          </a:xfrm>
+          <a:prstGeom prst="roundRect">
+            <a:avLst/>
+          </a:prstGeom>
+          <a:noFill/>
+          <a:ln w="12700">
+            <a:solidFill>
+              <a:schemeClr val="tx2"/>
+            </a:solidFill>
+            <a:prstDash val="solid"/>
+          </a:ln>
+        </p:spPr>
+        <p:style>
+          <a:lnRef idx="2">
+            <a:schemeClr val="accent1">
+              <a:shade val="15000"/>
+            </a:schemeClr>
+          </a:lnRef>
+          <a:fillRef idx="1">
+            <a:schemeClr val="accent1"/>
+          </a:fillRef>
+          <a:effectRef idx="0">
+            <a:schemeClr val="accent1"/>
+          </a:effectRef>
+          <a:fontRef idx="minor">
+            <a:schemeClr val="lt1"/>
+          </a:fontRef>
+        </p:style>
+        <p:txBody>
+          <a:bodyPr rtlCol="0" anchor="ctr"/>
+          <a:lstStyle/>
+          <a:p>
+            <a:pPr algn="ctr"/>
+            <a:r>
+              <a:rPr lang="en-US" altLang="zh-CN" sz="1200" dirty="0">
+                <a:solidFill>
+                  <a:sysClr val="windowText" lastClr="000000"/>
+                </a:solidFill>
+                <a:latin typeface="Quicksand Light" panose="00000400000000000000" pitchFamily="2" charset="0"/>
+              </a:rPr>
+              <a:t>Packet</a:t>
+            </a:r>
+            <a:endParaRPr lang="zh-CN" altLang="en-US" sz="1200" dirty="0">
+              <a:solidFill>
+                <a:sysClr val="windowText" lastClr="000000"/>
+              </a:solidFill>
+              <a:latin typeface="Quicksand Light" panose="00000400000000000000" pitchFamily="2" charset="0"/>
+            </a:endParaRPr>
+          </a:p>
+        </p:txBody>
+      </p:sp>
+      <p:cxnSp>
+        <p:nvCxnSpPr>
+          <p:cNvPr id="10" name="连接符: 曲线 9">
+            <a:extLst>
+              <a:ext uri="{FF2B5EF4-FFF2-40B4-BE49-F238E27FC236}">
+                <a16:creationId xmlns:a16="http://schemas.microsoft.com/office/drawing/2014/main" id="{56D54B0A-0C00-1FA5-AA24-AB208E9F3E39}"/>
+              </a:ext>
+            </a:extLst>
+          </p:cNvPr>
+          <p:cNvCxnSpPr>
+            <a:cxnSpLocks/>
+            <a:stCxn id="16" idx="3"/>
+            <a:endCxn id="9" idx="1"/>
+          </p:cNvCxnSpPr>
+          <p:nvPr/>
+        </p:nvCxnSpPr>
+        <p:spPr>
+          <a:xfrm>
+            <a:off x="4747693" y="3527363"/>
+            <a:ext cx="283555" cy="645768"/>
+          </a:xfrm>
+          <a:prstGeom prst="curvedConnector3">
+            <a:avLst>
+              <a:gd name="adj1" fmla="val 50000"/>
+            </a:avLst>
+          </a:prstGeom>
+          <a:ln w="6350">
+            <a:solidFill>
+              <a:srgbClr val="3CBFD1"/>
+            </a:solidFill>
+          </a:ln>
+        </p:spPr>
+        <p:style>
+          <a:lnRef idx="1">
+            <a:schemeClr val="accent1"/>
+          </a:lnRef>
+          <a:fillRef idx="0">
+            <a:schemeClr val="accent1"/>
+          </a:fillRef>
+          <a:effectRef idx="0">
+            <a:schemeClr val="accent1"/>
+          </a:effectRef>
+          <a:fontRef idx="minor">
+            <a:schemeClr val="tx1"/>
+          </a:fontRef>
+        </p:style>
+      </p:cxnSp>
+      <p:sp>
+        <p:nvSpPr>
+          <p:cNvPr id="13" name="矩形: 圆角 12">
+            <a:extLst>
+              <a:ext uri="{FF2B5EF4-FFF2-40B4-BE49-F238E27FC236}">
+                <a16:creationId xmlns:a16="http://schemas.microsoft.com/office/drawing/2014/main" id="{AD181E9B-9708-8757-6641-0EC70B8857D3}"/>
+              </a:ext>
+            </a:extLst>
+          </p:cNvPr>
+          <p:cNvSpPr/>
+          <p:nvPr/>
+        </p:nvSpPr>
+        <p:spPr>
+          <a:xfrm>
+            <a:off x="5031248" y="2705606"/>
+            <a:ext cx="1800000" cy="360000"/>
+          </a:xfrm>
+          <a:prstGeom prst="roundRect">
+            <a:avLst/>
+          </a:prstGeom>
+          <a:noFill/>
+          <a:ln w="12700">
+            <a:solidFill>
+              <a:schemeClr val="tx2"/>
+            </a:solidFill>
+            <a:prstDash val="solid"/>
+          </a:ln>
+        </p:spPr>
+        <p:style>
+          <a:lnRef idx="2">
+            <a:schemeClr val="accent1">
+              <a:shade val="15000"/>
+            </a:schemeClr>
+          </a:lnRef>
+          <a:fillRef idx="1">
+            <a:schemeClr val="accent1"/>
+          </a:fillRef>
+          <a:effectRef idx="0">
+            <a:schemeClr val="accent1"/>
+          </a:effectRef>
+          <a:fontRef idx="minor">
+            <a:schemeClr val="lt1"/>
+          </a:fontRef>
+        </p:style>
+        <p:txBody>
+          <a:bodyPr rtlCol="0" anchor="ctr"/>
+          <a:lstStyle/>
+          <a:p>
+            <a:pPr algn="ctr"/>
+            <a:r>
+              <a:rPr lang="en-US" altLang="zh-CN" sz="1200" dirty="0">
+                <a:solidFill>
+                  <a:sysClr val="windowText" lastClr="000000"/>
+                </a:solidFill>
+                <a:latin typeface="Quicksand Light" panose="00000400000000000000" pitchFamily="2" charset="0"/>
+              </a:rPr>
+              <a:t>Traffic Control</a:t>
+            </a:r>
+            <a:endParaRPr lang="zh-CN" altLang="en-US" sz="1200" dirty="0">
+              <a:solidFill>
+                <a:sysClr val="windowText" lastClr="000000"/>
+              </a:solidFill>
+              <a:latin typeface="Quicksand Light" panose="00000400000000000000" pitchFamily="2" charset="0"/>
+            </a:endParaRPr>
+          </a:p>
+        </p:txBody>
+      </p:sp>
+      <p:cxnSp>
+        <p:nvCxnSpPr>
+          <p:cNvPr id="14" name="连接符: 曲线 13">
+            <a:extLst>
+              <a:ext uri="{FF2B5EF4-FFF2-40B4-BE49-F238E27FC236}">
+                <a16:creationId xmlns:a16="http://schemas.microsoft.com/office/drawing/2014/main" id="{94161A20-9CEA-26C5-90F1-7284ECA5C704}"/>
+              </a:ext>
+            </a:extLst>
+          </p:cNvPr>
+          <p:cNvCxnSpPr>
+            <a:cxnSpLocks/>
+            <a:stCxn id="13" idx="1"/>
+            <a:endCxn id="16" idx="3"/>
+          </p:cNvCxnSpPr>
+          <p:nvPr/>
+        </p:nvCxnSpPr>
+        <p:spPr>
+          <a:xfrm rot="10800000" flipV="1">
+            <a:off x="4747694" y="2885605"/>
+            <a:ext cx="283555" cy="641757"/>
+          </a:xfrm>
+          <a:prstGeom prst="curvedConnector3">
+            <a:avLst>
+              <a:gd name="adj1" fmla="val 50000"/>
+            </a:avLst>
+          </a:prstGeom>
+          <a:ln w="6350">
+            <a:solidFill>
+              <a:srgbClr val="3CBFD1"/>
+            </a:solidFill>
+          </a:ln>
+        </p:spPr>
+        <p:style>
+          <a:lnRef idx="1">
+            <a:schemeClr val="accent1"/>
+          </a:lnRef>
+          <a:fillRef idx="0">
+            <a:schemeClr val="accent1"/>
+          </a:fillRef>
+          <a:effectRef idx="0">
+            <a:schemeClr val="accent1"/>
+          </a:effectRef>
+          <a:fontRef idx="minor">
+            <a:schemeClr val="tx1"/>
+          </a:fontRef>
+        </p:style>
+      </p:cxnSp>
+      <p:sp>
+        <p:nvSpPr>
+          <p:cNvPr id="36" name="矩形: 圆角 35">
+            <a:extLst>
+              <a:ext uri="{FF2B5EF4-FFF2-40B4-BE49-F238E27FC236}">
+                <a16:creationId xmlns:a16="http://schemas.microsoft.com/office/drawing/2014/main" id="{C6587821-DD92-9679-7756-3E8C2C8D118E}"/>
+              </a:ext>
+            </a:extLst>
+          </p:cNvPr>
+          <p:cNvSpPr/>
+          <p:nvPr/>
+        </p:nvSpPr>
+        <p:spPr>
+          <a:xfrm>
+            <a:off x="1584137" y="3347363"/>
+            <a:ext cx="1440000" cy="360000"/>
+          </a:xfrm>
+          <a:prstGeom prst="roundRect">
+            <a:avLst/>
+          </a:prstGeom>
+          <a:solidFill>
+            <a:schemeClr val="tx1"/>
+          </a:solidFill>
+          <a:ln w="12700">
+            <a:noFill/>
+          </a:ln>
+        </p:spPr>
+        <p:style>
+          <a:lnRef idx="2">
+            <a:schemeClr val="accent1">
+              <a:shade val="15000"/>
+            </a:schemeClr>
+          </a:lnRef>
+          <a:fillRef idx="1">
+            <a:schemeClr val="accent1"/>
+          </a:fillRef>
+          <a:effectRef idx="0">
+            <a:schemeClr val="accent1"/>
+          </a:effectRef>
+          <a:fontRef idx="minor">
+            <a:schemeClr val="lt1"/>
+          </a:fontRef>
+        </p:style>
+        <p:txBody>
+          <a:bodyPr rtlCol="0" anchor="ctr"/>
+          <a:lstStyle/>
+          <a:p>
+            <a:pPr algn="ctr"/>
+            <a:r>
+              <a:rPr lang="en-US" altLang="zh-CN" sz="1200" dirty="0">
+                <a:latin typeface="Quicksand Light" panose="00000400000000000000" pitchFamily="2" charset="0"/>
+                <a:ea typeface="微软雅黑" panose="020B0503020204020204" pitchFamily="34" charset="-122"/>
+              </a:rPr>
+              <a:t>Transport Layer</a:t>
+            </a:r>
+            <a:endParaRPr lang="zh-CN" altLang="en-US" sz="1200" dirty="0">
+              <a:latin typeface="Quicksand Light" panose="00000400000000000000" pitchFamily="2" charset="0"/>
+              <a:ea typeface="微软雅黑" panose="020B0503020204020204" pitchFamily="34" charset="-122"/>
+            </a:endParaRPr>
+          </a:p>
+        </p:txBody>
+      </p:sp>
+      <p:cxnSp>
+        <p:nvCxnSpPr>
+          <p:cNvPr id="42" name="连接符: 曲线 41">
+            <a:extLst>
+              <a:ext uri="{FF2B5EF4-FFF2-40B4-BE49-F238E27FC236}">
+                <a16:creationId xmlns:a16="http://schemas.microsoft.com/office/drawing/2014/main" id="{6589FE98-C76F-3ED9-8AB2-A810BAC61631}"/>
+              </a:ext>
+            </a:extLst>
+          </p:cNvPr>
+          <p:cNvCxnSpPr>
+            <a:cxnSpLocks/>
+            <a:stCxn id="36" idx="3"/>
+            <a:endCxn id="2" idx="1"/>
+          </p:cNvCxnSpPr>
+          <p:nvPr/>
+        </p:nvCxnSpPr>
+        <p:spPr>
+          <a:xfrm flipV="1">
+            <a:off x="3024137" y="2899832"/>
+            <a:ext cx="283556" cy="627531"/>
+          </a:xfrm>
+          <a:prstGeom prst="curvedConnector3">
+            <a:avLst>
+              <a:gd name="adj1" fmla="val 50000"/>
+            </a:avLst>
+          </a:prstGeom>
+          <a:ln>
+            <a:solidFill>
+              <a:schemeClr val="accent5">
+                <a:lumMod val="75000"/>
+              </a:schemeClr>
+            </a:solidFill>
+          </a:ln>
+        </p:spPr>
+        <p:style>
+          <a:lnRef idx="1">
+            <a:schemeClr val="accent1"/>
+          </a:lnRef>
+          <a:fillRef idx="0">
+            <a:schemeClr val="accent1"/>
+          </a:fillRef>
+          <a:effectRef idx="0">
+            <a:schemeClr val="accent1"/>
+          </a:effectRef>
+          <a:fontRef idx="minor">
+            <a:schemeClr val="tx1"/>
+          </a:fontRef>
+        </p:style>
+      </p:cxnSp>
+      <p:sp>
+        <p:nvSpPr>
+          <p:cNvPr id="16" name="矩形: 圆角 15">
+            <a:extLst>
+              <a:ext uri="{FF2B5EF4-FFF2-40B4-BE49-F238E27FC236}">
+                <a16:creationId xmlns:a16="http://schemas.microsoft.com/office/drawing/2014/main" id="{C4F8D70D-848F-8E10-57D5-0246D0F22858}"/>
+              </a:ext>
+            </a:extLst>
+          </p:cNvPr>
+          <p:cNvSpPr/>
+          <p:nvPr/>
+        </p:nvSpPr>
+        <p:spPr>
+          <a:xfrm>
+            <a:off x="3307693" y="3347363"/>
+            <a:ext cx="1440000" cy="360000"/>
+          </a:xfrm>
+          <a:prstGeom prst="roundRect">
+            <a:avLst/>
+          </a:prstGeom>
+          <a:solidFill>
+            <a:srgbClr val="3DC1D3"/>
+          </a:solidFill>
+          <a:ln w="12700">
+            <a:noFill/>
+          </a:ln>
+        </p:spPr>
+        <p:style>
+          <a:lnRef idx="2">
+            <a:schemeClr val="accent1">
+              <a:shade val="15000"/>
+            </a:schemeClr>
+          </a:lnRef>
+          <a:fillRef idx="1">
+            <a:schemeClr val="accent1"/>
+          </a:fillRef>
+          <a:effectRef idx="0">
+            <a:schemeClr val="accent1"/>
+          </a:effectRef>
+          <a:fontRef idx="minor">
+            <a:schemeClr val="lt1"/>
+          </a:fontRef>
+        </p:style>
+        <p:txBody>
+          <a:bodyPr rtlCol="0" anchor="ctr"/>
+          <a:lstStyle/>
+          <a:p>
+            <a:pPr algn="ctr"/>
+            <a:r>
+              <a:rPr lang="en-US" altLang="zh-CN" sz="1200" dirty="0">
+                <a:latin typeface="Quicksand Light" panose="00000400000000000000" pitchFamily="2" charset="0"/>
+              </a:rPr>
+              <a:t>TCP</a:t>
+            </a:r>
+            <a:endParaRPr lang="zh-CN" altLang="en-US" sz="1200" dirty="0">
+              <a:latin typeface="Quicksand Light" panose="00000400000000000000" pitchFamily="2" charset="0"/>
+            </a:endParaRPr>
+          </a:p>
+        </p:txBody>
+      </p:sp>
+      <p:sp>
+        <p:nvSpPr>
+          <p:cNvPr id="19" name="矩形: 圆角 18">
+            <a:extLst>
+              <a:ext uri="{FF2B5EF4-FFF2-40B4-BE49-F238E27FC236}">
+                <a16:creationId xmlns:a16="http://schemas.microsoft.com/office/drawing/2014/main" id="{81530229-6710-AE17-7125-34E7C102D265}"/>
+              </a:ext>
+            </a:extLst>
+          </p:cNvPr>
+          <p:cNvSpPr/>
+          <p:nvPr/>
+        </p:nvSpPr>
+        <p:spPr>
+          <a:xfrm>
+            <a:off x="3307693" y="4665692"/>
+            <a:ext cx="1440000" cy="360000"/>
+          </a:xfrm>
+          <a:prstGeom prst="roundRect">
+            <a:avLst/>
+          </a:prstGeom>
+          <a:solidFill>
+            <a:srgbClr val="20BF6B"/>
+          </a:solidFill>
+          <a:ln w="12700">
+            <a:noFill/>
+          </a:ln>
+        </p:spPr>
+        <p:style>
+          <a:lnRef idx="2">
+            <a:schemeClr val="accent1">
+              <a:shade val="15000"/>
+            </a:schemeClr>
+          </a:lnRef>
+          <a:fillRef idx="1">
+            <a:schemeClr val="accent1"/>
+          </a:fillRef>
+          <a:effectRef idx="0">
+            <a:schemeClr val="accent1"/>
+          </a:effectRef>
+          <a:fontRef idx="minor">
+            <a:schemeClr val="lt1"/>
+          </a:fontRef>
+        </p:style>
+        <p:txBody>
+          <a:bodyPr rtlCol="0" anchor="ctr"/>
+          <a:lstStyle/>
+          <a:p>
+            <a:pPr algn="ctr"/>
+            <a:r>
+              <a:rPr lang="en-US" altLang="zh-CN" sz="1200" dirty="0">
+                <a:latin typeface="Quicksand Light" panose="00000400000000000000" pitchFamily="2" charset="0"/>
+              </a:rPr>
+              <a:t>UDP</a:t>
+            </a:r>
+            <a:endParaRPr lang="zh-CN" altLang="en-US" sz="1200" dirty="0">
+              <a:latin typeface="Quicksand Light" panose="00000400000000000000" pitchFamily="2" charset="0"/>
+            </a:endParaRPr>
+          </a:p>
+        </p:txBody>
+      </p:sp>
+      <p:cxnSp>
+        <p:nvCxnSpPr>
+          <p:cNvPr id="22" name="连接符: 曲线 21">
+            <a:extLst>
+              <a:ext uri="{FF2B5EF4-FFF2-40B4-BE49-F238E27FC236}">
+                <a16:creationId xmlns:a16="http://schemas.microsoft.com/office/drawing/2014/main" id="{983C1AC8-3735-FBF8-1D52-F46340D06312}"/>
+              </a:ext>
+            </a:extLst>
+          </p:cNvPr>
+          <p:cNvCxnSpPr>
+            <a:cxnSpLocks/>
+            <a:stCxn id="36" idx="3"/>
+            <a:endCxn id="19" idx="1"/>
+          </p:cNvCxnSpPr>
+          <p:nvPr/>
+        </p:nvCxnSpPr>
+        <p:spPr>
+          <a:xfrm>
+            <a:off x="3024137" y="3527363"/>
+            <a:ext cx="283556" cy="1318329"/>
+          </a:xfrm>
+          <a:prstGeom prst="curvedConnector3">
+            <a:avLst>
+              <a:gd name="adj1" fmla="val 50000"/>
+            </a:avLst>
+          </a:prstGeom>
+          <a:ln>
+            <a:solidFill>
+              <a:srgbClr val="20BF6B"/>
+            </a:solidFill>
+          </a:ln>
+        </p:spPr>
+        <p:style>
+          <a:lnRef idx="1">
+            <a:schemeClr val="accent1"/>
+          </a:lnRef>
+          <a:fillRef idx="0">
+            <a:schemeClr val="accent1"/>
+          </a:fillRef>
+          <a:effectRef idx="0">
+            <a:schemeClr val="accent1"/>
+          </a:effectRef>
+          <a:fontRef idx="minor">
+            <a:schemeClr val="tx1"/>
+          </a:fontRef>
+        </p:style>
+      </p:cxnSp>
+      <p:cxnSp>
+        <p:nvCxnSpPr>
+          <p:cNvPr id="28" name="直接连接符 27">
+            <a:extLst>
+              <a:ext uri="{FF2B5EF4-FFF2-40B4-BE49-F238E27FC236}">
+                <a16:creationId xmlns:a16="http://schemas.microsoft.com/office/drawing/2014/main" id="{BD7B110E-78A0-DA3F-A295-242686C8DE59}"/>
+              </a:ext>
+            </a:extLst>
+          </p:cNvPr>
+          <p:cNvCxnSpPr>
+            <a:stCxn id="16" idx="1"/>
+            <a:endCxn id="36" idx="3"/>
+          </p:cNvCxnSpPr>
+          <p:nvPr/>
+        </p:nvCxnSpPr>
+        <p:spPr>
+          <a:xfrm flipH="1">
+            <a:off x="3024137" y="3527363"/>
+            <a:ext cx="283556" cy="0"/>
+          </a:xfrm>
+          <a:prstGeom prst="line">
+            <a:avLst/>
+          </a:prstGeom>
+          <a:ln>
+            <a:solidFill>
+              <a:srgbClr val="3CBFD1"/>
+            </a:solidFill>
+          </a:ln>
+        </p:spPr>
+        <p:style>
+          <a:lnRef idx="1">
+            <a:schemeClr val="accent1"/>
+          </a:lnRef>
+          <a:fillRef idx="0">
+            <a:schemeClr val="accent1"/>
+          </a:fillRef>
+          <a:effectRef idx="0">
+            <a:schemeClr val="accent1"/>
+          </a:effectRef>
+          <a:fontRef idx="minor">
+            <a:schemeClr val="tx1"/>
+          </a:fontRef>
+        </p:style>
+      </p:cxnSp>
+      <p:cxnSp>
+        <p:nvCxnSpPr>
+          <p:cNvPr id="29" name="连接符: 曲线 28">
+            <a:extLst>
+              <a:ext uri="{FF2B5EF4-FFF2-40B4-BE49-F238E27FC236}">
+                <a16:creationId xmlns:a16="http://schemas.microsoft.com/office/drawing/2014/main" id="{3CE98D71-068D-12E4-6351-5662457FF6EF}"/>
+              </a:ext>
+            </a:extLst>
+          </p:cNvPr>
+          <p:cNvCxnSpPr>
+            <a:cxnSpLocks/>
+            <a:stCxn id="4" idx="1"/>
+            <a:endCxn id="16" idx="3"/>
+          </p:cNvCxnSpPr>
+          <p:nvPr/>
+        </p:nvCxnSpPr>
+        <p:spPr>
+          <a:xfrm rot="10800000">
+            <a:off x="4747694" y="3527363"/>
+            <a:ext cx="283555" cy="215256"/>
+          </a:xfrm>
+          <a:prstGeom prst="curvedConnector3">
+            <a:avLst>
+              <a:gd name="adj1" fmla="val 50000"/>
+            </a:avLst>
+          </a:prstGeom>
+          <a:ln w="6350">
+            <a:solidFill>
+              <a:srgbClr val="3CBFD1"/>
+            </a:solidFill>
+          </a:ln>
+        </p:spPr>
+        <p:style>
+          <a:lnRef idx="1">
+            <a:schemeClr val="accent1"/>
+          </a:lnRef>
+          <a:fillRef idx="0">
+            <a:schemeClr val="accent1"/>
+          </a:fillRef>
+          <a:effectRef idx="0">
+            <a:schemeClr val="accent1"/>
+          </a:effectRef>
+          <a:fontRef idx="minor">
+            <a:schemeClr val="tx1"/>
+          </a:fontRef>
+        </p:style>
+      </p:cxnSp>
+      <p:sp>
+        <p:nvSpPr>
+          <p:cNvPr id="6" name="矩形: 圆角 5">
+            <a:extLst>
+              <a:ext uri="{FF2B5EF4-FFF2-40B4-BE49-F238E27FC236}">
+                <a16:creationId xmlns:a16="http://schemas.microsoft.com/office/drawing/2014/main" id="{E26F0BAC-FA81-5F6F-B924-707A50D906C4}"/>
+              </a:ext>
+            </a:extLst>
+          </p:cNvPr>
+          <p:cNvSpPr/>
+          <p:nvPr/>
+        </p:nvSpPr>
+        <p:spPr>
+          <a:xfrm>
+            <a:off x="7102100" y="3562619"/>
+            <a:ext cx="1800000" cy="360000"/>
+          </a:xfrm>
+          <a:prstGeom prst="roundRect">
+            <a:avLst/>
+          </a:prstGeom>
+          <a:noFill/>
+          <a:ln w="12700">
+            <a:noFill/>
+            <a:prstDash val="solid"/>
+          </a:ln>
+        </p:spPr>
+        <p:style>
+          <a:lnRef idx="2">
+            <a:schemeClr val="accent1">
+              <a:shade val="15000"/>
+            </a:schemeClr>
+          </a:lnRef>
+          <a:fillRef idx="1">
+            <a:schemeClr val="accent1"/>
+          </a:fillRef>
+          <a:effectRef idx="0">
+            <a:schemeClr val="accent1"/>
+          </a:effectRef>
+          <a:fontRef idx="minor">
+            <a:schemeClr val="lt1"/>
+          </a:fontRef>
+        </p:style>
+        <p:txBody>
+          <a:bodyPr rtlCol="0" anchor="ctr"/>
+          <a:lstStyle/>
+          <a:p>
+            <a:endParaRPr lang="zh-CN" altLang="en-US" sz="1200" dirty="0">
+              <a:solidFill>
+                <a:sysClr val="windowText" lastClr="000000"/>
+              </a:solidFill>
+              <a:latin typeface="Quicksand Light" panose="00000400000000000000" pitchFamily="2" charset="0"/>
+            </a:endParaRPr>
+          </a:p>
+        </p:txBody>
+      </p:sp>
+      <p:cxnSp>
+        <p:nvCxnSpPr>
+          <p:cNvPr id="17" name="直接连接符 16">
+            <a:extLst>
+              <a:ext uri="{FF2B5EF4-FFF2-40B4-BE49-F238E27FC236}">
+                <a16:creationId xmlns:a16="http://schemas.microsoft.com/office/drawing/2014/main" id="{5469945C-7541-0506-CC16-F8088F979CF3}"/>
+              </a:ext>
+            </a:extLst>
+          </p:cNvPr>
+          <p:cNvCxnSpPr>
+            <a:stCxn id="19" idx="3"/>
+            <a:endCxn id="5" idx="1"/>
+          </p:cNvCxnSpPr>
+          <p:nvPr/>
+        </p:nvCxnSpPr>
+        <p:spPr>
+          <a:xfrm>
+            <a:off x="4747693" y="4845692"/>
+            <a:ext cx="283555" cy="0"/>
+          </a:xfrm>
+          <a:prstGeom prst="line">
+            <a:avLst/>
+          </a:prstGeom>
+          <a:ln>
+            <a:solidFill>
+              <a:srgbClr val="20BD6A"/>
+            </a:solidFill>
+          </a:ln>
+        </p:spPr>
+        <p:style>
+          <a:lnRef idx="1">
+            <a:schemeClr val="accent1"/>
+          </a:lnRef>
+          <a:fillRef idx="0">
+            <a:schemeClr val="accent1"/>
+          </a:fillRef>
+          <a:effectRef idx="0">
+            <a:schemeClr val="accent1"/>
+          </a:effectRef>
+          <a:fontRef idx="minor">
+            <a:schemeClr val="tx1"/>
+          </a:fontRef>
+        </p:style>
+      </p:cxnSp>
+    </p:spTree>
+    <p:extLst>
+      <p:ext uri="{BB962C8B-B14F-4D97-AF65-F5344CB8AC3E}">
+        <p14:creationId xmlns:p14="http://schemas.microsoft.com/office/powerpoint/2010/main" val="1275707856"/>
+      </p:ext>
+    </p:extLst>
+  </p:cSld>
+  <p:clrMapOvr>
+    <a:masterClrMapping/>
+  </p:clrMapOvr>
+</p:sld>
+</file>
+
+<file path=ppt/slides/slide5.xml><?xml version="1.0" encoding="utf-8"?>
+<p:sld xmlns:a="http://schemas.openxmlformats.org/drawingml/2006/main" xmlns:r="http://schemas.openxmlformats.org/officeDocument/2006/relationships" xmlns:p="http://schemas.openxmlformats.org/presentationml/2006/main">
+  <p:cSld>
+    <p:spTree>
+      <p:nvGrpSpPr>
         <p:cNvPr id="1" name=""/>
         <p:cNvGrpSpPr/>
         <p:nvPr/>
@@ -34318,7 +35393,7 @@
 </p:sld>
 </file>
 
-<file path=ppt/slides/slide5.xml><?xml version="1.0" encoding="utf-8"?>
+<file path=ppt/slides/slide6.xml><?xml version="1.0" encoding="utf-8"?>
 <p:sld xmlns:a="http://schemas.openxmlformats.org/drawingml/2006/main" xmlns:r="http://schemas.openxmlformats.org/officeDocument/2006/relationships" xmlns:p="http://schemas.openxmlformats.org/presentationml/2006/main">
   <p:cSld>
     <p:spTree>
@@ -37896,7 +38971,7 @@
 </p:sld>
 </file>
 
-<file path=ppt/slides/slide6.xml><?xml version="1.0" encoding="utf-8"?>
+<file path=ppt/slides/slide7.xml><?xml version="1.0" encoding="utf-8"?>
 <p:sld xmlns:a="http://schemas.openxmlformats.org/drawingml/2006/main" xmlns:r="http://schemas.openxmlformats.org/officeDocument/2006/relationships" xmlns:p="http://schemas.openxmlformats.org/presentationml/2006/main">
   <p:cSld>
     <p:spTree>
@@ -39086,7 +40161,7 @@
 </p:sld>
 </file>
 
-<file path=ppt/slides/slide7.xml><?xml version="1.0" encoding="utf-8"?>
+<file path=ppt/slides/slide8.xml><?xml version="1.0" encoding="utf-8"?>
 <p:sld xmlns:a="http://schemas.openxmlformats.org/drawingml/2006/main" xmlns:r="http://schemas.openxmlformats.org/officeDocument/2006/relationships" xmlns:p="http://schemas.openxmlformats.org/presentationml/2006/main">
   <p:cSld>
     <p:spTree>
@@ -42295,7 +43370,7 @@
 </p:sld>
 </file>
 
-<file path=ppt/slides/slide8.xml><?xml version="1.0" encoding="utf-8"?>
+<file path=ppt/slides/slide9.xml><?xml version="1.0" encoding="utf-8"?>
 <p:sld xmlns:a="http://schemas.openxmlformats.org/drawingml/2006/main" xmlns:r="http://schemas.openxmlformats.org/officeDocument/2006/relationships" xmlns:p="http://schemas.openxmlformats.org/presentationml/2006/main">
   <p:cSld>
     <p:spTree>
@@ -44464,951 +45539,6 @@
     <p:extLst>
       <p:ext uri="{BB962C8B-B14F-4D97-AF65-F5344CB8AC3E}">
         <p14:creationId xmlns:p14="http://schemas.microsoft.com/office/powerpoint/2010/main" val="4061278343"/>
-      </p:ext>
-    </p:extLst>
-  </p:cSld>
-  <p:clrMapOvr>
-    <a:masterClrMapping/>
-  </p:clrMapOvr>
-</p:sld>
-</file>
-
-<file path=ppt/slides/slide9.xml><?xml version="1.0" encoding="utf-8"?>
-<p:sld xmlns:a="http://schemas.openxmlformats.org/drawingml/2006/main" xmlns:r="http://schemas.openxmlformats.org/officeDocument/2006/relationships" xmlns:p="http://schemas.openxmlformats.org/presentationml/2006/main">
-  <p:cSld>
-    <p:spTree>
-      <p:nvGrpSpPr>
-        <p:cNvPr id="1" name="">
-          <a:extLst>
-            <a:ext uri="{FF2B5EF4-FFF2-40B4-BE49-F238E27FC236}">
-              <a16:creationId xmlns:a16="http://schemas.microsoft.com/office/drawing/2014/main" id="{17D44D37-27F9-6B4C-6ADE-230014C32D82}"/>
-            </a:ext>
-          </a:extLst>
-        </p:cNvPr>
-        <p:cNvGrpSpPr/>
-        <p:nvPr/>
-      </p:nvGrpSpPr>
-      <p:grpSpPr>
-        <a:xfrm>
-          <a:off x="0" y="0"/>
-          <a:ext cx="0" cy="0"/>
-          <a:chOff x="0" y="0"/>
-          <a:chExt cx="0" cy="0"/>
-        </a:xfrm>
-      </p:grpSpPr>
-      <p:sp>
-        <p:nvSpPr>
-          <p:cNvPr id="2" name="矩形: 圆角 1">
-            <a:extLst>
-              <a:ext uri="{FF2B5EF4-FFF2-40B4-BE49-F238E27FC236}">
-                <a16:creationId xmlns:a16="http://schemas.microsoft.com/office/drawing/2014/main" id="{78C5F840-463F-A4D0-84A1-63E21E233D5E}"/>
-              </a:ext>
-            </a:extLst>
-          </p:cNvPr>
-          <p:cNvSpPr/>
-          <p:nvPr/>
-        </p:nvSpPr>
-        <p:spPr>
-          <a:xfrm>
-            <a:off x="5267696" y="3029934"/>
-            <a:ext cx="1080000" cy="216000"/>
-          </a:xfrm>
-          <a:prstGeom prst="roundRect">
-            <a:avLst/>
-          </a:prstGeom>
-          <a:solidFill>
-            <a:schemeClr val="tx1"/>
-          </a:solidFill>
-          <a:ln w="12700">
-            <a:noFill/>
-          </a:ln>
-        </p:spPr>
-        <p:style>
-          <a:lnRef idx="2">
-            <a:schemeClr val="accent1">
-              <a:shade val="15000"/>
-            </a:schemeClr>
-          </a:lnRef>
-          <a:fillRef idx="1">
-            <a:schemeClr val="accent1"/>
-          </a:fillRef>
-          <a:effectRef idx="0">
-            <a:schemeClr val="accent1"/>
-          </a:effectRef>
-          <a:fontRef idx="minor">
-            <a:schemeClr val="lt1"/>
-          </a:fontRef>
-        </p:style>
-        <p:txBody>
-          <a:bodyPr rtlCol="0" anchor="ctr"/>
-          <a:lstStyle/>
-          <a:p>
-            <a:pPr algn="ctr"/>
-            <a:r>
-              <a:rPr lang="en-US" altLang="zh-CN" sz="800">
-                <a:latin typeface="微软雅黑" panose="020B0503020204020204" pitchFamily="34" charset="-122"/>
-                <a:ea typeface="微软雅黑" panose="020B0503020204020204" pitchFamily="34" charset="-122"/>
-              </a:rPr>
-              <a:t>background</a:t>
-            </a:r>
-            <a:endParaRPr lang="zh-CN" altLang="en-US" sz="800">
-              <a:latin typeface="微软雅黑" panose="020B0503020204020204" pitchFamily="34" charset="-122"/>
-              <a:ea typeface="微软雅黑" panose="020B0503020204020204" pitchFamily="34" charset="-122"/>
-            </a:endParaRPr>
-          </a:p>
-        </p:txBody>
-      </p:sp>
-      <p:sp>
-        <p:nvSpPr>
-          <p:cNvPr id="3" name="矩形: 圆角 2">
-            <a:extLst>
-              <a:ext uri="{FF2B5EF4-FFF2-40B4-BE49-F238E27FC236}">
-                <a16:creationId xmlns:a16="http://schemas.microsoft.com/office/drawing/2014/main" id="{F4DE9355-3EFB-8606-FA1A-6D56D6950A98}"/>
-              </a:ext>
-            </a:extLst>
-          </p:cNvPr>
-          <p:cNvSpPr/>
-          <p:nvPr/>
-        </p:nvSpPr>
-        <p:spPr>
-          <a:xfrm>
-            <a:off x="6583823" y="3218172"/>
-            <a:ext cx="1440000" cy="216000"/>
-          </a:xfrm>
-          <a:prstGeom prst="roundRect">
-            <a:avLst/>
-          </a:prstGeom>
-          <a:solidFill>
-            <a:srgbClr val="6D214F"/>
-          </a:solidFill>
-          <a:ln w="12700">
-            <a:noFill/>
-          </a:ln>
-        </p:spPr>
-        <p:style>
-          <a:lnRef idx="2">
-            <a:schemeClr val="accent1">
-              <a:shade val="15000"/>
-            </a:schemeClr>
-          </a:lnRef>
-          <a:fillRef idx="1">
-            <a:schemeClr val="accent1"/>
-          </a:fillRef>
-          <a:effectRef idx="0">
-            <a:schemeClr val="accent1"/>
-          </a:effectRef>
-          <a:fontRef idx="minor">
-            <a:schemeClr val="lt1"/>
-          </a:fontRef>
-        </p:style>
-        <p:txBody>
-          <a:bodyPr rtlCol="0" anchor="ctr"/>
-          <a:lstStyle/>
-          <a:p>
-            <a:pPr algn="ctr"/>
-            <a:r>
-              <a:rPr lang="en-US" altLang="zh-CN" sz="800">
-                <a:latin typeface="Quicksand" panose="00000500000000000000" pitchFamily="2" charset="0"/>
-              </a:rPr>
-              <a:t>background-repeat</a:t>
-            </a:r>
-            <a:endParaRPr lang="zh-CN" altLang="en-US" sz="800">
-              <a:latin typeface="Quicksand" panose="00000500000000000000" pitchFamily="2" charset="0"/>
-            </a:endParaRPr>
-          </a:p>
-        </p:txBody>
-      </p:sp>
-      <p:sp>
-        <p:nvSpPr>
-          <p:cNvPr id="4" name="矩形: 圆角 3">
-            <a:extLst>
-              <a:ext uri="{FF2B5EF4-FFF2-40B4-BE49-F238E27FC236}">
-                <a16:creationId xmlns:a16="http://schemas.microsoft.com/office/drawing/2014/main" id="{B18A25FE-C1B9-F539-4E02-CEFFCB9D0003}"/>
-              </a:ext>
-            </a:extLst>
-          </p:cNvPr>
-          <p:cNvSpPr/>
-          <p:nvPr/>
-        </p:nvSpPr>
-        <p:spPr>
-          <a:xfrm>
-            <a:off x="6583823" y="1712260"/>
-            <a:ext cx="1440000" cy="216000"/>
-          </a:xfrm>
-          <a:prstGeom prst="roundRect">
-            <a:avLst/>
-          </a:prstGeom>
-          <a:solidFill>
-            <a:srgbClr val="FA8231"/>
-          </a:solidFill>
-          <a:ln w="12700">
-            <a:noFill/>
-          </a:ln>
-        </p:spPr>
-        <p:style>
-          <a:lnRef idx="2">
-            <a:schemeClr val="accent1">
-              <a:shade val="15000"/>
-            </a:schemeClr>
-          </a:lnRef>
-          <a:fillRef idx="1">
-            <a:schemeClr val="accent1"/>
-          </a:fillRef>
-          <a:effectRef idx="0">
-            <a:schemeClr val="accent1"/>
-          </a:effectRef>
-          <a:fontRef idx="minor">
-            <a:schemeClr val="lt1"/>
-          </a:fontRef>
-        </p:style>
-        <p:txBody>
-          <a:bodyPr rtlCol="0" anchor="ctr"/>
-          <a:lstStyle/>
-          <a:p>
-            <a:pPr algn="ctr"/>
-            <a:r>
-              <a:rPr lang="en-US" altLang="zh-CN" sz="800">
-                <a:latin typeface="Quicksand" panose="00000500000000000000" pitchFamily="2" charset="0"/>
-              </a:rPr>
-              <a:t>Background-color</a:t>
-            </a:r>
-            <a:endParaRPr lang="zh-CN" altLang="en-US" sz="800">
-              <a:latin typeface="Quicksand" panose="00000500000000000000" pitchFamily="2" charset="0"/>
-            </a:endParaRPr>
-          </a:p>
-        </p:txBody>
-      </p:sp>
-      <p:sp>
-        <p:nvSpPr>
-          <p:cNvPr id="5" name="矩形: 圆角 4">
-            <a:extLst>
-              <a:ext uri="{FF2B5EF4-FFF2-40B4-BE49-F238E27FC236}">
-                <a16:creationId xmlns:a16="http://schemas.microsoft.com/office/drawing/2014/main" id="{87A792D5-D640-E90C-F6FA-DE21142430A7}"/>
-              </a:ext>
-            </a:extLst>
-          </p:cNvPr>
-          <p:cNvSpPr/>
-          <p:nvPr/>
-        </p:nvSpPr>
-        <p:spPr>
-          <a:xfrm>
-            <a:off x="6583823" y="2088738"/>
-            <a:ext cx="1440000" cy="216000"/>
-          </a:xfrm>
-          <a:prstGeom prst="roundRect">
-            <a:avLst/>
-          </a:prstGeom>
-          <a:solidFill>
-            <a:srgbClr val="EB3B5A"/>
-          </a:solidFill>
-          <a:ln w="12700">
-            <a:noFill/>
-          </a:ln>
-        </p:spPr>
-        <p:style>
-          <a:lnRef idx="2">
-            <a:schemeClr val="accent1">
-              <a:shade val="15000"/>
-            </a:schemeClr>
-          </a:lnRef>
-          <a:fillRef idx="1">
-            <a:schemeClr val="accent1"/>
-          </a:fillRef>
-          <a:effectRef idx="0">
-            <a:schemeClr val="accent1"/>
-          </a:effectRef>
-          <a:fontRef idx="minor">
-            <a:schemeClr val="lt1"/>
-          </a:fontRef>
-        </p:style>
-        <p:txBody>
-          <a:bodyPr rtlCol="0" anchor="ctr"/>
-          <a:lstStyle/>
-          <a:p>
-            <a:pPr algn="ctr"/>
-            <a:r>
-              <a:rPr lang="en-US" altLang="zh-CN" sz="800">
-                <a:latin typeface="Quicksand" panose="00000500000000000000" pitchFamily="2" charset="0"/>
-              </a:rPr>
-              <a:t>background-img</a:t>
-            </a:r>
-            <a:endParaRPr lang="zh-CN" altLang="en-US" sz="800">
-              <a:latin typeface="Quicksand" panose="00000500000000000000" pitchFamily="2" charset="0"/>
-            </a:endParaRPr>
-          </a:p>
-        </p:txBody>
-      </p:sp>
-      <p:sp>
-        <p:nvSpPr>
-          <p:cNvPr id="6" name="矩形: 圆角 5">
-            <a:extLst>
-              <a:ext uri="{FF2B5EF4-FFF2-40B4-BE49-F238E27FC236}">
-                <a16:creationId xmlns:a16="http://schemas.microsoft.com/office/drawing/2014/main" id="{F001F596-A9BC-961B-AB7F-13C5672DF725}"/>
-              </a:ext>
-            </a:extLst>
-          </p:cNvPr>
-          <p:cNvSpPr/>
-          <p:nvPr/>
-        </p:nvSpPr>
-        <p:spPr>
-          <a:xfrm>
-            <a:off x="6583823" y="2465216"/>
-            <a:ext cx="1440000" cy="216000"/>
-          </a:xfrm>
-          <a:prstGeom prst="roundRect">
-            <a:avLst/>
-          </a:prstGeom>
-          <a:solidFill>
-            <a:srgbClr val="F78FB3"/>
-          </a:solidFill>
-          <a:ln w="12700">
-            <a:noFill/>
-          </a:ln>
-        </p:spPr>
-        <p:style>
-          <a:lnRef idx="2">
-            <a:schemeClr val="accent1">
-              <a:shade val="15000"/>
-            </a:schemeClr>
-          </a:lnRef>
-          <a:fillRef idx="1">
-            <a:schemeClr val="accent1"/>
-          </a:fillRef>
-          <a:effectRef idx="0">
-            <a:schemeClr val="accent1"/>
-          </a:effectRef>
-          <a:fontRef idx="minor">
-            <a:schemeClr val="lt1"/>
-          </a:fontRef>
-        </p:style>
-        <p:txBody>
-          <a:bodyPr rtlCol="0" anchor="ctr"/>
-          <a:lstStyle/>
-          <a:p>
-            <a:pPr algn="ctr"/>
-            <a:r>
-              <a:rPr lang="en-US" altLang="zh-CN" sz="800">
-                <a:latin typeface="Quicksand" panose="00000500000000000000" pitchFamily="2" charset="0"/>
-              </a:rPr>
-              <a:t>background-position</a:t>
-            </a:r>
-            <a:endParaRPr lang="zh-CN" altLang="en-US" sz="800">
-              <a:latin typeface="Quicksand" panose="00000500000000000000" pitchFamily="2" charset="0"/>
-            </a:endParaRPr>
-          </a:p>
-        </p:txBody>
-      </p:sp>
-      <p:cxnSp>
-        <p:nvCxnSpPr>
-          <p:cNvPr id="13" name="连接符: 曲线 12">
-            <a:extLst>
-              <a:ext uri="{FF2B5EF4-FFF2-40B4-BE49-F238E27FC236}">
-                <a16:creationId xmlns:a16="http://schemas.microsoft.com/office/drawing/2014/main" id="{D857022F-FD57-CB9F-109D-F0FEA004375B}"/>
-              </a:ext>
-            </a:extLst>
-          </p:cNvPr>
-          <p:cNvCxnSpPr>
-            <a:cxnSpLocks/>
-            <a:stCxn id="2" idx="3"/>
-            <a:endCxn id="3" idx="1"/>
-          </p:cNvCxnSpPr>
-          <p:nvPr/>
-        </p:nvCxnSpPr>
-        <p:spPr>
-          <a:xfrm>
-            <a:off x="6347696" y="3137934"/>
-            <a:ext cx="236127" cy="188238"/>
-          </a:xfrm>
-          <a:prstGeom prst="curvedConnector3">
-            <a:avLst>
-              <a:gd name="adj1" fmla="val 50000"/>
-            </a:avLst>
-          </a:prstGeom>
-          <a:ln>
-            <a:solidFill>
-              <a:srgbClr val="6D214F"/>
-            </a:solidFill>
-          </a:ln>
-        </p:spPr>
-        <p:style>
-          <a:lnRef idx="1">
-            <a:schemeClr val="accent1"/>
-          </a:lnRef>
-          <a:fillRef idx="0">
-            <a:schemeClr val="accent1"/>
-          </a:fillRef>
-          <a:effectRef idx="0">
-            <a:schemeClr val="accent1"/>
-          </a:effectRef>
-          <a:fontRef idx="minor">
-            <a:schemeClr val="tx1"/>
-          </a:fontRef>
-        </p:style>
-      </p:cxnSp>
-      <p:cxnSp>
-        <p:nvCxnSpPr>
-          <p:cNvPr id="14" name="连接符: 曲线 13">
-            <a:extLst>
-              <a:ext uri="{FF2B5EF4-FFF2-40B4-BE49-F238E27FC236}">
-                <a16:creationId xmlns:a16="http://schemas.microsoft.com/office/drawing/2014/main" id="{DF152018-D11C-FF19-7282-EC631DB77FDB}"/>
-              </a:ext>
-            </a:extLst>
-          </p:cNvPr>
-          <p:cNvCxnSpPr>
-            <a:stCxn id="2" idx="3"/>
-            <a:endCxn id="5" idx="1"/>
-          </p:cNvCxnSpPr>
-          <p:nvPr/>
-        </p:nvCxnSpPr>
-        <p:spPr>
-          <a:xfrm flipV="1">
-            <a:off x="6347696" y="2196738"/>
-            <a:ext cx="236127" cy="941196"/>
-          </a:xfrm>
-          <a:prstGeom prst="curvedConnector3">
-            <a:avLst/>
-          </a:prstGeom>
-          <a:ln>
-            <a:solidFill>
-              <a:srgbClr val="FF0000"/>
-            </a:solidFill>
-          </a:ln>
-        </p:spPr>
-        <p:style>
-          <a:lnRef idx="1">
-            <a:schemeClr val="accent1"/>
-          </a:lnRef>
-          <a:fillRef idx="0">
-            <a:schemeClr val="accent1"/>
-          </a:fillRef>
-          <a:effectRef idx="0">
-            <a:schemeClr val="accent1"/>
-          </a:effectRef>
-          <a:fontRef idx="minor">
-            <a:schemeClr val="tx1"/>
-          </a:fontRef>
-        </p:style>
-      </p:cxnSp>
-      <p:cxnSp>
-        <p:nvCxnSpPr>
-          <p:cNvPr id="15" name="连接符: 曲线 14">
-            <a:extLst>
-              <a:ext uri="{FF2B5EF4-FFF2-40B4-BE49-F238E27FC236}">
-                <a16:creationId xmlns:a16="http://schemas.microsoft.com/office/drawing/2014/main" id="{D776544B-8805-064E-FB86-8357089F4115}"/>
-              </a:ext>
-            </a:extLst>
-          </p:cNvPr>
-          <p:cNvCxnSpPr>
-            <a:stCxn id="2" idx="3"/>
-            <a:endCxn id="6" idx="1"/>
-          </p:cNvCxnSpPr>
-          <p:nvPr/>
-        </p:nvCxnSpPr>
-        <p:spPr>
-          <a:xfrm flipV="1">
-            <a:off x="6347696" y="2573216"/>
-            <a:ext cx="236127" cy="564718"/>
-          </a:xfrm>
-          <a:prstGeom prst="curvedConnector3">
-            <a:avLst/>
-          </a:prstGeom>
-          <a:ln>
-            <a:solidFill>
-              <a:srgbClr val="F78FB3"/>
-            </a:solidFill>
-          </a:ln>
-        </p:spPr>
-        <p:style>
-          <a:lnRef idx="1">
-            <a:schemeClr val="accent1"/>
-          </a:lnRef>
-          <a:fillRef idx="0">
-            <a:schemeClr val="accent1"/>
-          </a:fillRef>
-          <a:effectRef idx="0">
-            <a:schemeClr val="accent1"/>
-          </a:effectRef>
-          <a:fontRef idx="minor">
-            <a:schemeClr val="tx1"/>
-          </a:fontRef>
-        </p:style>
-      </p:cxnSp>
-      <p:cxnSp>
-        <p:nvCxnSpPr>
-          <p:cNvPr id="16" name="连接符: 曲线 15">
-            <a:extLst>
-              <a:ext uri="{FF2B5EF4-FFF2-40B4-BE49-F238E27FC236}">
-                <a16:creationId xmlns:a16="http://schemas.microsoft.com/office/drawing/2014/main" id="{5530CC53-CE6B-A691-48F9-E0FE20C352A0}"/>
-              </a:ext>
-            </a:extLst>
-          </p:cNvPr>
-          <p:cNvCxnSpPr>
-            <a:stCxn id="4" idx="1"/>
-            <a:endCxn id="2" idx="3"/>
-          </p:cNvCxnSpPr>
-          <p:nvPr/>
-        </p:nvCxnSpPr>
-        <p:spPr>
-          <a:xfrm rot="10800000" flipV="1">
-            <a:off x="6347697" y="1820260"/>
-            <a:ext cx="236127" cy="1317674"/>
-          </a:xfrm>
-          <a:prstGeom prst="curvedConnector3">
-            <a:avLst/>
-          </a:prstGeom>
-          <a:ln>
-            <a:solidFill>
-              <a:srgbClr val="FFC000"/>
-            </a:solidFill>
-          </a:ln>
-        </p:spPr>
-        <p:style>
-          <a:lnRef idx="1">
-            <a:schemeClr val="accent1"/>
-          </a:lnRef>
-          <a:fillRef idx="0">
-            <a:schemeClr val="accent1"/>
-          </a:fillRef>
-          <a:effectRef idx="0">
-            <a:schemeClr val="accent1"/>
-          </a:effectRef>
-          <a:fontRef idx="minor">
-            <a:schemeClr val="tx1"/>
-          </a:fontRef>
-        </p:style>
-      </p:cxnSp>
-      <p:sp>
-        <p:nvSpPr>
-          <p:cNvPr id="12" name="矩形: 圆角 11">
-            <a:extLst>
-              <a:ext uri="{FF2B5EF4-FFF2-40B4-BE49-F238E27FC236}">
-                <a16:creationId xmlns:a16="http://schemas.microsoft.com/office/drawing/2014/main" id="{CA690FCB-6050-34A5-12AA-227C0F7253CA}"/>
-              </a:ext>
-            </a:extLst>
-          </p:cNvPr>
-          <p:cNvSpPr/>
-          <p:nvPr/>
-        </p:nvSpPr>
-        <p:spPr>
-          <a:xfrm>
-            <a:off x="6583823" y="2841694"/>
-            <a:ext cx="1440000" cy="216000"/>
-          </a:xfrm>
-          <a:prstGeom prst="roundRect">
-            <a:avLst/>
-          </a:prstGeom>
-          <a:solidFill>
-            <a:srgbClr val="8854D0"/>
-          </a:solidFill>
-          <a:ln w="12700">
-            <a:noFill/>
-          </a:ln>
-        </p:spPr>
-        <p:style>
-          <a:lnRef idx="2">
-            <a:schemeClr val="accent1">
-              <a:shade val="15000"/>
-            </a:schemeClr>
-          </a:lnRef>
-          <a:fillRef idx="1">
-            <a:schemeClr val="accent1"/>
-          </a:fillRef>
-          <a:effectRef idx="0">
-            <a:schemeClr val="accent1"/>
-          </a:effectRef>
-          <a:fontRef idx="minor">
-            <a:schemeClr val="lt1"/>
-          </a:fontRef>
-        </p:style>
-        <p:txBody>
-          <a:bodyPr rtlCol="0" anchor="ctr"/>
-          <a:lstStyle/>
-          <a:p>
-            <a:pPr algn="ctr"/>
-            <a:r>
-              <a:rPr lang="en-US" altLang="zh-CN" sz="800">
-                <a:latin typeface="Quicksand" panose="00000500000000000000" pitchFamily="2" charset="0"/>
-              </a:rPr>
-              <a:t>background-size</a:t>
-            </a:r>
-            <a:endParaRPr lang="zh-CN" altLang="en-US" sz="800">
-              <a:latin typeface="Quicksand" panose="00000500000000000000" pitchFamily="2" charset="0"/>
-            </a:endParaRPr>
-          </a:p>
-        </p:txBody>
-      </p:sp>
-      <p:cxnSp>
-        <p:nvCxnSpPr>
-          <p:cNvPr id="21" name="连接符: 曲线 20">
-            <a:extLst>
-              <a:ext uri="{FF2B5EF4-FFF2-40B4-BE49-F238E27FC236}">
-                <a16:creationId xmlns:a16="http://schemas.microsoft.com/office/drawing/2014/main" id="{B1FC38B2-3763-8A0C-56A4-C088C18DDBC2}"/>
-              </a:ext>
-            </a:extLst>
-          </p:cNvPr>
-          <p:cNvCxnSpPr>
-            <a:cxnSpLocks/>
-            <a:stCxn id="2" idx="3"/>
-            <a:endCxn id="12" idx="1"/>
-          </p:cNvCxnSpPr>
-          <p:nvPr/>
-        </p:nvCxnSpPr>
-        <p:spPr>
-          <a:xfrm flipV="1">
-            <a:off x="6347696" y="2949694"/>
-            <a:ext cx="236127" cy="188240"/>
-          </a:xfrm>
-          <a:prstGeom prst="curvedConnector3">
-            <a:avLst>
-              <a:gd name="adj1" fmla="val 50000"/>
-            </a:avLst>
-          </a:prstGeom>
-          <a:ln>
-            <a:solidFill>
-              <a:srgbClr val="8854D0"/>
-            </a:solidFill>
-          </a:ln>
-        </p:spPr>
-        <p:style>
-          <a:lnRef idx="1">
-            <a:schemeClr val="accent1"/>
-          </a:lnRef>
-          <a:fillRef idx="0">
-            <a:schemeClr val="accent1"/>
-          </a:fillRef>
-          <a:effectRef idx="0">
-            <a:schemeClr val="accent1"/>
-          </a:effectRef>
-          <a:fontRef idx="minor">
-            <a:schemeClr val="tx1"/>
-          </a:fontRef>
-        </p:style>
-      </p:cxnSp>
-      <p:sp>
-        <p:nvSpPr>
-          <p:cNvPr id="9" name="矩形: 圆角 8">
-            <a:extLst>
-              <a:ext uri="{FF2B5EF4-FFF2-40B4-BE49-F238E27FC236}">
-                <a16:creationId xmlns:a16="http://schemas.microsoft.com/office/drawing/2014/main" id="{5704B543-A087-6258-53B2-3382506CB5CB}"/>
-              </a:ext>
-            </a:extLst>
-          </p:cNvPr>
-          <p:cNvSpPr/>
-          <p:nvPr/>
-        </p:nvSpPr>
-        <p:spPr>
-          <a:xfrm>
-            <a:off x="6583823" y="3971128"/>
-            <a:ext cx="1440000" cy="216000"/>
-          </a:xfrm>
-          <a:prstGeom prst="roundRect">
-            <a:avLst/>
-          </a:prstGeom>
-          <a:solidFill>
-            <a:srgbClr val="3DC1D3"/>
-          </a:solidFill>
-          <a:ln w="12700">
-            <a:noFill/>
-          </a:ln>
-        </p:spPr>
-        <p:style>
-          <a:lnRef idx="2">
-            <a:schemeClr val="accent1">
-              <a:shade val="15000"/>
-            </a:schemeClr>
-          </a:lnRef>
-          <a:fillRef idx="1">
-            <a:schemeClr val="accent1"/>
-          </a:fillRef>
-          <a:effectRef idx="0">
-            <a:schemeClr val="accent1"/>
-          </a:effectRef>
-          <a:fontRef idx="minor">
-            <a:schemeClr val="lt1"/>
-          </a:fontRef>
-        </p:style>
-        <p:txBody>
-          <a:bodyPr rtlCol="0" anchor="ctr"/>
-          <a:lstStyle/>
-          <a:p>
-            <a:pPr algn="ctr"/>
-            <a:r>
-              <a:rPr lang="en-US" altLang="zh-CN" sz="800">
-                <a:latin typeface="Quicksand" panose="00000500000000000000" pitchFamily="2" charset="0"/>
-              </a:rPr>
-              <a:t>background-clip</a:t>
-            </a:r>
-            <a:endParaRPr lang="zh-CN" altLang="en-US" sz="800">
-              <a:latin typeface="Quicksand" panose="00000500000000000000" pitchFamily="2" charset="0"/>
-            </a:endParaRPr>
-          </a:p>
-        </p:txBody>
-      </p:sp>
-      <p:cxnSp>
-        <p:nvCxnSpPr>
-          <p:cNvPr id="11" name="连接符: 曲线 10">
-            <a:extLst>
-              <a:ext uri="{FF2B5EF4-FFF2-40B4-BE49-F238E27FC236}">
-                <a16:creationId xmlns:a16="http://schemas.microsoft.com/office/drawing/2014/main" id="{EADC1F19-9641-15F6-3ECE-3B5E53A4B1CD}"/>
-              </a:ext>
-            </a:extLst>
-          </p:cNvPr>
-          <p:cNvCxnSpPr>
-            <a:cxnSpLocks/>
-            <a:stCxn id="2" idx="3"/>
-            <a:endCxn id="9" idx="1"/>
-          </p:cNvCxnSpPr>
-          <p:nvPr/>
-        </p:nvCxnSpPr>
-        <p:spPr>
-          <a:xfrm>
-            <a:off x="6347696" y="3137934"/>
-            <a:ext cx="236127" cy="941194"/>
-          </a:xfrm>
-          <a:prstGeom prst="curvedConnector3">
-            <a:avLst>
-              <a:gd name="adj1" fmla="val 50000"/>
-            </a:avLst>
-          </a:prstGeom>
-          <a:ln>
-            <a:solidFill>
-              <a:srgbClr val="3DC1D3"/>
-            </a:solidFill>
-          </a:ln>
-        </p:spPr>
-        <p:style>
-          <a:lnRef idx="1">
-            <a:schemeClr val="accent1"/>
-          </a:lnRef>
-          <a:fillRef idx="0">
-            <a:schemeClr val="accent1"/>
-          </a:fillRef>
-          <a:effectRef idx="0">
-            <a:schemeClr val="accent1"/>
-          </a:effectRef>
-          <a:fontRef idx="minor">
-            <a:schemeClr val="tx1"/>
-          </a:fontRef>
-        </p:style>
-      </p:cxnSp>
-      <p:sp>
-        <p:nvSpPr>
-          <p:cNvPr id="28" name="矩形: 圆角 27">
-            <a:extLst>
-              <a:ext uri="{FF2B5EF4-FFF2-40B4-BE49-F238E27FC236}">
-                <a16:creationId xmlns:a16="http://schemas.microsoft.com/office/drawing/2014/main" id="{2D76B52C-A377-4760-EE4D-8E1F7250DC8F}"/>
-              </a:ext>
-            </a:extLst>
-          </p:cNvPr>
-          <p:cNvSpPr/>
-          <p:nvPr/>
-        </p:nvSpPr>
-        <p:spPr>
-          <a:xfrm>
-            <a:off x="6583823" y="3594650"/>
-            <a:ext cx="1440000" cy="216000"/>
-          </a:xfrm>
-          <a:prstGeom prst="roundRect">
-            <a:avLst/>
-          </a:prstGeom>
-          <a:solidFill>
-            <a:srgbClr val="20BF6B"/>
-          </a:solidFill>
-          <a:ln w="12700">
-            <a:noFill/>
-          </a:ln>
-        </p:spPr>
-        <p:style>
-          <a:lnRef idx="2">
-            <a:schemeClr val="accent1">
-              <a:shade val="15000"/>
-            </a:schemeClr>
-          </a:lnRef>
-          <a:fillRef idx="1">
-            <a:schemeClr val="accent1"/>
-          </a:fillRef>
-          <a:effectRef idx="0">
-            <a:schemeClr val="accent1"/>
-          </a:effectRef>
-          <a:fontRef idx="minor">
-            <a:schemeClr val="lt1"/>
-          </a:fontRef>
-        </p:style>
-        <p:txBody>
-          <a:bodyPr rtlCol="0" anchor="ctr"/>
-          <a:lstStyle/>
-          <a:p>
-            <a:pPr algn="ctr"/>
-            <a:r>
-              <a:rPr lang="en-US" altLang="zh-CN" sz="800">
-                <a:latin typeface="Quicksand" panose="00000500000000000000" pitchFamily="2" charset="0"/>
-              </a:rPr>
-              <a:t>background-origin</a:t>
-            </a:r>
-            <a:endParaRPr lang="zh-CN" altLang="en-US" sz="800">
-              <a:latin typeface="Quicksand" panose="00000500000000000000" pitchFamily="2" charset="0"/>
-            </a:endParaRPr>
-          </a:p>
-        </p:txBody>
-      </p:sp>
-      <p:cxnSp>
-        <p:nvCxnSpPr>
-          <p:cNvPr id="29" name="连接符: 曲线 28">
-            <a:extLst>
-              <a:ext uri="{FF2B5EF4-FFF2-40B4-BE49-F238E27FC236}">
-                <a16:creationId xmlns:a16="http://schemas.microsoft.com/office/drawing/2014/main" id="{EF08E3E2-D366-FE1C-85A8-77605DB967B3}"/>
-              </a:ext>
-            </a:extLst>
-          </p:cNvPr>
-          <p:cNvCxnSpPr>
-            <a:cxnSpLocks/>
-            <a:stCxn id="28" idx="1"/>
-            <a:endCxn id="2" idx="3"/>
-          </p:cNvCxnSpPr>
-          <p:nvPr/>
-        </p:nvCxnSpPr>
-        <p:spPr>
-          <a:xfrm rot="10800000">
-            <a:off x="6347697" y="3137934"/>
-            <a:ext cx="236127" cy="564716"/>
-          </a:xfrm>
-          <a:prstGeom prst="curvedConnector3">
-            <a:avLst>
-              <a:gd name="adj1" fmla="val 50000"/>
-            </a:avLst>
-          </a:prstGeom>
-          <a:ln>
-            <a:solidFill>
-              <a:srgbClr val="20BF6B"/>
-            </a:solidFill>
-          </a:ln>
-        </p:spPr>
-        <p:style>
-          <a:lnRef idx="1">
-            <a:schemeClr val="accent1"/>
-          </a:lnRef>
-          <a:fillRef idx="0">
-            <a:schemeClr val="accent1"/>
-          </a:fillRef>
-          <a:effectRef idx="0">
-            <a:schemeClr val="accent1"/>
-          </a:effectRef>
-          <a:fontRef idx="minor">
-            <a:schemeClr val="tx1"/>
-          </a:fontRef>
-        </p:style>
-      </p:cxnSp>
-      <p:sp>
-        <p:nvSpPr>
-          <p:cNvPr id="24" name="矩形: 圆角 8">
-            <a:extLst>
-              <a:ext uri="{FF2B5EF4-FFF2-40B4-BE49-F238E27FC236}">
-                <a16:creationId xmlns:a16="http://schemas.microsoft.com/office/drawing/2014/main" id="{A6C27A23-18E4-76C2-DEF7-34D22EC06C21}"/>
-              </a:ext>
-            </a:extLst>
-          </p:cNvPr>
-          <p:cNvSpPr/>
-          <p:nvPr/>
-        </p:nvSpPr>
-        <p:spPr>
-          <a:xfrm>
-            <a:off x="6583823" y="4347608"/>
-            <a:ext cx="1440000" cy="216000"/>
-          </a:xfrm>
-          <a:prstGeom prst="roundRect">
-            <a:avLst/>
-          </a:prstGeom>
-          <a:solidFill>
-            <a:srgbClr val="0070C0"/>
-          </a:solidFill>
-          <a:ln w="12700">
-            <a:noFill/>
-          </a:ln>
-        </p:spPr>
-        <p:style>
-          <a:lnRef idx="2">
-            <a:schemeClr val="accent1">
-              <a:shade val="15000"/>
-            </a:schemeClr>
-          </a:lnRef>
-          <a:fillRef idx="1">
-            <a:schemeClr val="accent1"/>
-          </a:fillRef>
-          <a:effectRef idx="0">
-            <a:schemeClr val="accent1"/>
-          </a:effectRef>
-          <a:fontRef idx="minor">
-            <a:schemeClr val="lt1"/>
-          </a:fontRef>
-        </p:style>
-        <p:txBody>
-          <a:bodyPr rtlCol="0" anchor="ctr"/>
-          <a:lstStyle/>
-          <a:p>
-            <a:pPr algn="ctr"/>
-            <a:r>
-              <a:rPr lang="en-US" altLang="zh-CN" sz="800">
-                <a:latin typeface="Quicksand" panose="00000500000000000000" pitchFamily="2" charset="0"/>
-              </a:rPr>
-              <a:t>background-attachment</a:t>
-            </a:r>
-            <a:endParaRPr lang="zh-CN" altLang="en-US" sz="800">
-              <a:latin typeface="Quicksand" panose="00000500000000000000" pitchFamily="2" charset="0"/>
-            </a:endParaRPr>
-          </a:p>
-        </p:txBody>
-      </p:sp>
-      <p:cxnSp>
-        <p:nvCxnSpPr>
-          <p:cNvPr id="46" name="连接符: 曲线 10">
-            <a:extLst>
-              <a:ext uri="{FF2B5EF4-FFF2-40B4-BE49-F238E27FC236}">
-                <a16:creationId xmlns:a16="http://schemas.microsoft.com/office/drawing/2014/main" id="{32E5C4EC-C977-10C6-8D74-4BEFAAD30A4E}"/>
-              </a:ext>
-            </a:extLst>
-          </p:cNvPr>
-          <p:cNvCxnSpPr>
-            <a:cxnSpLocks/>
-            <a:stCxn id="2" idx="3"/>
-            <a:endCxn id="24" idx="1"/>
-          </p:cNvCxnSpPr>
-          <p:nvPr/>
-        </p:nvCxnSpPr>
-        <p:spPr>
-          <a:xfrm>
-            <a:off x="6347696" y="3137934"/>
-            <a:ext cx="236127" cy="1317674"/>
-          </a:xfrm>
-          <a:prstGeom prst="curvedConnector3">
-            <a:avLst>
-              <a:gd name="adj1" fmla="val 50000"/>
-            </a:avLst>
-          </a:prstGeom>
-          <a:ln>
-            <a:solidFill>
-              <a:srgbClr val="0070C0"/>
-            </a:solidFill>
-          </a:ln>
-        </p:spPr>
-        <p:style>
-          <a:lnRef idx="1">
-            <a:schemeClr val="accent1"/>
-          </a:lnRef>
-          <a:fillRef idx="0">
-            <a:schemeClr val="accent1"/>
-          </a:fillRef>
-          <a:effectRef idx="0">
-            <a:schemeClr val="accent1"/>
-          </a:effectRef>
-          <a:fontRef idx="minor">
-            <a:schemeClr val="tx1"/>
-          </a:fontRef>
-        </p:style>
-      </p:cxnSp>
-    </p:spTree>
-    <p:extLst>
-      <p:ext uri="{BB962C8B-B14F-4D97-AF65-F5344CB8AC3E}">
-        <p14:creationId xmlns:p14="http://schemas.microsoft.com/office/powerpoint/2010/main" val="1414077195"/>
       </p:ext>
     </p:extLst>
   </p:cSld>

--- a/utils/file/charts.pptx
+++ b/utils/file/charts.pptx
@@ -10,34 +10,33 @@
     <p:sldId id="290" r:id="rId4"/>
     <p:sldId id="286" r:id="rId5"/>
     <p:sldId id="287" r:id="rId6"/>
-    <p:sldId id="288" r:id="rId7"/>
-    <p:sldId id="258" r:id="rId8"/>
-    <p:sldId id="259" r:id="rId9"/>
-    <p:sldId id="260" r:id="rId10"/>
-    <p:sldId id="269" r:id="rId11"/>
-    <p:sldId id="261" r:id="rId12"/>
-    <p:sldId id="262" r:id="rId13"/>
-    <p:sldId id="263" r:id="rId14"/>
-    <p:sldId id="265" r:id="rId15"/>
-    <p:sldId id="266" r:id="rId16"/>
-    <p:sldId id="267" r:id="rId17"/>
-    <p:sldId id="273" r:id="rId18"/>
-    <p:sldId id="271" r:id="rId19"/>
-    <p:sldId id="268" r:id="rId20"/>
-    <p:sldId id="281" r:id="rId21"/>
-    <p:sldId id="282" r:id="rId22"/>
-    <p:sldId id="283" r:id="rId23"/>
-    <p:sldId id="284" r:id="rId24"/>
-    <p:sldId id="274" r:id="rId25"/>
-    <p:sldId id="276" r:id="rId26"/>
-    <p:sldId id="277" r:id="rId27"/>
-    <p:sldId id="278" r:id="rId28"/>
-    <p:sldId id="279" r:id="rId29"/>
-    <p:sldId id="285" r:id="rId30"/>
-    <p:sldId id="280" r:id="rId31"/>
-    <p:sldId id="264" r:id="rId32"/>
-    <p:sldId id="272" r:id="rId33"/>
-    <p:sldId id="256" r:id="rId34"/>
+    <p:sldId id="258" r:id="rId7"/>
+    <p:sldId id="259" r:id="rId8"/>
+    <p:sldId id="260" r:id="rId9"/>
+    <p:sldId id="269" r:id="rId10"/>
+    <p:sldId id="261" r:id="rId11"/>
+    <p:sldId id="262" r:id="rId12"/>
+    <p:sldId id="263" r:id="rId13"/>
+    <p:sldId id="265" r:id="rId14"/>
+    <p:sldId id="266" r:id="rId15"/>
+    <p:sldId id="267" r:id="rId16"/>
+    <p:sldId id="273" r:id="rId17"/>
+    <p:sldId id="271" r:id="rId18"/>
+    <p:sldId id="268" r:id="rId19"/>
+    <p:sldId id="281" r:id="rId20"/>
+    <p:sldId id="282" r:id="rId21"/>
+    <p:sldId id="283" r:id="rId22"/>
+    <p:sldId id="284" r:id="rId23"/>
+    <p:sldId id="274" r:id="rId24"/>
+    <p:sldId id="276" r:id="rId25"/>
+    <p:sldId id="277" r:id="rId26"/>
+    <p:sldId id="278" r:id="rId27"/>
+    <p:sldId id="279" r:id="rId28"/>
+    <p:sldId id="285" r:id="rId29"/>
+    <p:sldId id="280" r:id="rId30"/>
+    <p:sldId id="264" r:id="rId31"/>
+    <p:sldId id="272" r:id="rId32"/>
+    <p:sldId id="256" r:id="rId33"/>
   </p:sldIdLst>
   <p:sldSz cx="12192000" cy="6858000"/>
   <p:notesSz cx="6858000" cy="9144000"/>
@@ -291,7 +290,7 @@
           <a:p>
             <a:fld id="{C0F7C65B-F23F-479A-8AFF-E7E0FC962F06}" type="datetimeFigureOut">
               <a:rPr lang="zh-CN" altLang="en-US" smtClean="0"/>
-              <a:t>2025/10/29</a:t>
+              <a:t>2025/11/7</a:t>
             </a:fld>
             <a:endParaRPr lang="zh-CN" altLang="en-US"/>
           </a:p>
@@ -489,7 +488,7 @@
           <a:p>
             <a:fld id="{C0F7C65B-F23F-479A-8AFF-E7E0FC962F06}" type="datetimeFigureOut">
               <a:rPr lang="zh-CN" altLang="en-US" smtClean="0"/>
-              <a:t>2025/10/29</a:t>
+              <a:t>2025/11/7</a:t>
             </a:fld>
             <a:endParaRPr lang="zh-CN" altLang="en-US"/>
           </a:p>
@@ -697,7 +696,7 @@
           <a:p>
             <a:fld id="{C0F7C65B-F23F-479A-8AFF-E7E0FC962F06}" type="datetimeFigureOut">
               <a:rPr lang="zh-CN" altLang="en-US" smtClean="0"/>
-              <a:t>2025/10/29</a:t>
+              <a:t>2025/11/7</a:t>
             </a:fld>
             <a:endParaRPr lang="zh-CN" altLang="en-US"/>
           </a:p>
@@ -895,7 +894,7 @@
           <a:p>
             <a:fld id="{C0F7C65B-F23F-479A-8AFF-E7E0FC962F06}" type="datetimeFigureOut">
               <a:rPr lang="zh-CN" altLang="en-US" smtClean="0"/>
-              <a:t>2025/10/29</a:t>
+              <a:t>2025/11/7</a:t>
             </a:fld>
             <a:endParaRPr lang="zh-CN" altLang="en-US"/>
           </a:p>
@@ -1170,7 +1169,7 @@
           <a:p>
             <a:fld id="{C0F7C65B-F23F-479A-8AFF-E7E0FC962F06}" type="datetimeFigureOut">
               <a:rPr lang="zh-CN" altLang="en-US" smtClean="0"/>
-              <a:t>2025/10/29</a:t>
+              <a:t>2025/11/7</a:t>
             </a:fld>
             <a:endParaRPr lang="zh-CN" altLang="en-US"/>
           </a:p>
@@ -1435,7 +1434,7 @@
           <a:p>
             <a:fld id="{C0F7C65B-F23F-479A-8AFF-E7E0FC962F06}" type="datetimeFigureOut">
               <a:rPr lang="zh-CN" altLang="en-US" smtClean="0"/>
-              <a:t>2025/10/29</a:t>
+              <a:t>2025/11/7</a:t>
             </a:fld>
             <a:endParaRPr lang="zh-CN" altLang="en-US"/>
           </a:p>
@@ -1847,7 +1846,7 @@
           <a:p>
             <a:fld id="{C0F7C65B-F23F-479A-8AFF-E7E0FC962F06}" type="datetimeFigureOut">
               <a:rPr lang="zh-CN" altLang="en-US" smtClean="0"/>
-              <a:t>2025/10/29</a:t>
+              <a:t>2025/11/7</a:t>
             </a:fld>
             <a:endParaRPr lang="zh-CN" altLang="en-US"/>
           </a:p>
@@ -1988,7 +1987,7 @@
           <a:p>
             <a:fld id="{C0F7C65B-F23F-479A-8AFF-E7E0FC962F06}" type="datetimeFigureOut">
               <a:rPr lang="zh-CN" altLang="en-US" smtClean="0"/>
-              <a:t>2025/10/29</a:t>
+              <a:t>2025/11/7</a:t>
             </a:fld>
             <a:endParaRPr lang="zh-CN" altLang="en-US"/>
           </a:p>
@@ -2101,7 +2100,7 @@
           <a:p>
             <a:fld id="{C0F7C65B-F23F-479A-8AFF-E7E0FC962F06}" type="datetimeFigureOut">
               <a:rPr lang="zh-CN" altLang="en-US" smtClean="0"/>
-              <a:t>2025/10/29</a:t>
+              <a:t>2025/11/7</a:t>
             </a:fld>
             <a:endParaRPr lang="zh-CN" altLang="en-US"/>
           </a:p>
@@ -2412,7 +2411,7 @@
           <a:p>
             <a:fld id="{C0F7C65B-F23F-479A-8AFF-E7E0FC962F06}" type="datetimeFigureOut">
               <a:rPr lang="zh-CN" altLang="en-US" smtClean="0"/>
-              <a:t>2025/10/29</a:t>
+              <a:t>2025/11/7</a:t>
             </a:fld>
             <a:endParaRPr lang="zh-CN" altLang="en-US"/>
           </a:p>
@@ -2700,7 +2699,7 @@
           <a:p>
             <a:fld id="{C0F7C65B-F23F-479A-8AFF-E7E0FC962F06}" type="datetimeFigureOut">
               <a:rPr lang="zh-CN" altLang="en-US" smtClean="0"/>
-              <a:t>2025/10/29</a:t>
+              <a:t>2025/11/7</a:t>
             </a:fld>
             <a:endParaRPr lang="zh-CN" altLang="en-US"/>
           </a:p>
@@ -2941,7 +2940,7 @@
           <a:p>
             <a:fld id="{C0F7C65B-F23F-479A-8AFF-E7E0FC962F06}" type="datetimeFigureOut">
               <a:rPr lang="zh-CN" altLang="en-US" smtClean="0"/>
-              <a:t>2025/10/29</a:t>
+              <a:t>2025/11/7</a:t>
             </a:fld>
             <a:endParaRPr lang="zh-CN" altLang="en-US"/>
           </a:p>
@@ -3511,951 +3510,6 @@
         <p:cNvPr id="1" name="">
           <a:extLst>
             <a:ext uri="{FF2B5EF4-FFF2-40B4-BE49-F238E27FC236}">
-              <a16:creationId xmlns:a16="http://schemas.microsoft.com/office/drawing/2014/main" id="{17D44D37-27F9-6B4C-6ADE-230014C32D82}"/>
-            </a:ext>
-          </a:extLst>
-        </p:cNvPr>
-        <p:cNvGrpSpPr/>
-        <p:nvPr/>
-      </p:nvGrpSpPr>
-      <p:grpSpPr>
-        <a:xfrm>
-          <a:off x="0" y="0"/>
-          <a:ext cx="0" cy="0"/>
-          <a:chOff x="0" y="0"/>
-          <a:chExt cx="0" cy="0"/>
-        </a:xfrm>
-      </p:grpSpPr>
-      <p:sp>
-        <p:nvSpPr>
-          <p:cNvPr id="2" name="矩形: 圆角 1">
-            <a:extLst>
-              <a:ext uri="{FF2B5EF4-FFF2-40B4-BE49-F238E27FC236}">
-                <a16:creationId xmlns:a16="http://schemas.microsoft.com/office/drawing/2014/main" id="{78C5F840-463F-A4D0-84A1-63E21E233D5E}"/>
-              </a:ext>
-            </a:extLst>
-          </p:cNvPr>
-          <p:cNvSpPr/>
-          <p:nvPr/>
-        </p:nvSpPr>
-        <p:spPr>
-          <a:xfrm>
-            <a:off x="5267696" y="3029934"/>
-            <a:ext cx="1080000" cy="216000"/>
-          </a:xfrm>
-          <a:prstGeom prst="roundRect">
-            <a:avLst/>
-          </a:prstGeom>
-          <a:solidFill>
-            <a:schemeClr val="tx1"/>
-          </a:solidFill>
-          <a:ln w="12700">
-            <a:noFill/>
-          </a:ln>
-        </p:spPr>
-        <p:style>
-          <a:lnRef idx="2">
-            <a:schemeClr val="accent1">
-              <a:shade val="15000"/>
-            </a:schemeClr>
-          </a:lnRef>
-          <a:fillRef idx="1">
-            <a:schemeClr val="accent1"/>
-          </a:fillRef>
-          <a:effectRef idx="0">
-            <a:schemeClr val="accent1"/>
-          </a:effectRef>
-          <a:fontRef idx="minor">
-            <a:schemeClr val="lt1"/>
-          </a:fontRef>
-        </p:style>
-        <p:txBody>
-          <a:bodyPr rtlCol="0" anchor="ctr"/>
-          <a:lstStyle/>
-          <a:p>
-            <a:pPr algn="ctr"/>
-            <a:r>
-              <a:rPr lang="en-US" altLang="zh-CN" sz="800">
-                <a:latin typeface="微软雅黑" panose="020B0503020204020204" pitchFamily="34" charset="-122"/>
-                <a:ea typeface="微软雅黑" panose="020B0503020204020204" pitchFamily="34" charset="-122"/>
-              </a:rPr>
-              <a:t>background</a:t>
-            </a:r>
-            <a:endParaRPr lang="zh-CN" altLang="en-US" sz="800">
-              <a:latin typeface="微软雅黑" panose="020B0503020204020204" pitchFamily="34" charset="-122"/>
-              <a:ea typeface="微软雅黑" panose="020B0503020204020204" pitchFamily="34" charset="-122"/>
-            </a:endParaRPr>
-          </a:p>
-        </p:txBody>
-      </p:sp>
-      <p:sp>
-        <p:nvSpPr>
-          <p:cNvPr id="3" name="矩形: 圆角 2">
-            <a:extLst>
-              <a:ext uri="{FF2B5EF4-FFF2-40B4-BE49-F238E27FC236}">
-                <a16:creationId xmlns:a16="http://schemas.microsoft.com/office/drawing/2014/main" id="{F4DE9355-3EFB-8606-FA1A-6D56D6950A98}"/>
-              </a:ext>
-            </a:extLst>
-          </p:cNvPr>
-          <p:cNvSpPr/>
-          <p:nvPr/>
-        </p:nvSpPr>
-        <p:spPr>
-          <a:xfrm>
-            <a:off x="6583823" y="3218172"/>
-            <a:ext cx="1440000" cy="216000"/>
-          </a:xfrm>
-          <a:prstGeom prst="roundRect">
-            <a:avLst/>
-          </a:prstGeom>
-          <a:solidFill>
-            <a:srgbClr val="6D214F"/>
-          </a:solidFill>
-          <a:ln w="12700">
-            <a:noFill/>
-          </a:ln>
-        </p:spPr>
-        <p:style>
-          <a:lnRef idx="2">
-            <a:schemeClr val="accent1">
-              <a:shade val="15000"/>
-            </a:schemeClr>
-          </a:lnRef>
-          <a:fillRef idx="1">
-            <a:schemeClr val="accent1"/>
-          </a:fillRef>
-          <a:effectRef idx="0">
-            <a:schemeClr val="accent1"/>
-          </a:effectRef>
-          <a:fontRef idx="minor">
-            <a:schemeClr val="lt1"/>
-          </a:fontRef>
-        </p:style>
-        <p:txBody>
-          <a:bodyPr rtlCol="0" anchor="ctr"/>
-          <a:lstStyle/>
-          <a:p>
-            <a:pPr algn="ctr"/>
-            <a:r>
-              <a:rPr lang="en-US" altLang="zh-CN" sz="800">
-                <a:latin typeface="Quicksand" panose="00000500000000000000" pitchFamily="2" charset="0"/>
-              </a:rPr>
-              <a:t>background-repeat</a:t>
-            </a:r>
-            <a:endParaRPr lang="zh-CN" altLang="en-US" sz="800">
-              <a:latin typeface="Quicksand" panose="00000500000000000000" pitchFamily="2" charset="0"/>
-            </a:endParaRPr>
-          </a:p>
-        </p:txBody>
-      </p:sp>
-      <p:sp>
-        <p:nvSpPr>
-          <p:cNvPr id="4" name="矩形: 圆角 3">
-            <a:extLst>
-              <a:ext uri="{FF2B5EF4-FFF2-40B4-BE49-F238E27FC236}">
-                <a16:creationId xmlns:a16="http://schemas.microsoft.com/office/drawing/2014/main" id="{B18A25FE-C1B9-F539-4E02-CEFFCB9D0003}"/>
-              </a:ext>
-            </a:extLst>
-          </p:cNvPr>
-          <p:cNvSpPr/>
-          <p:nvPr/>
-        </p:nvSpPr>
-        <p:spPr>
-          <a:xfrm>
-            <a:off x="6583823" y="1712260"/>
-            <a:ext cx="1440000" cy="216000"/>
-          </a:xfrm>
-          <a:prstGeom prst="roundRect">
-            <a:avLst/>
-          </a:prstGeom>
-          <a:solidFill>
-            <a:srgbClr val="FA8231"/>
-          </a:solidFill>
-          <a:ln w="12700">
-            <a:noFill/>
-          </a:ln>
-        </p:spPr>
-        <p:style>
-          <a:lnRef idx="2">
-            <a:schemeClr val="accent1">
-              <a:shade val="15000"/>
-            </a:schemeClr>
-          </a:lnRef>
-          <a:fillRef idx="1">
-            <a:schemeClr val="accent1"/>
-          </a:fillRef>
-          <a:effectRef idx="0">
-            <a:schemeClr val="accent1"/>
-          </a:effectRef>
-          <a:fontRef idx="minor">
-            <a:schemeClr val="lt1"/>
-          </a:fontRef>
-        </p:style>
-        <p:txBody>
-          <a:bodyPr rtlCol="0" anchor="ctr"/>
-          <a:lstStyle/>
-          <a:p>
-            <a:pPr algn="ctr"/>
-            <a:r>
-              <a:rPr lang="en-US" altLang="zh-CN" sz="800">
-                <a:latin typeface="Quicksand" panose="00000500000000000000" pitchFamily="2" charset="0"/>
-              </a:rPr>
-              <a:t>Background-color</a:t>
-            </a:r>
-            <a:endParaRPr lang="zh-CN" altLang="en-US" sz="800">
-              <a:latin typeface="Quicksand" panose="00000500000000000000" pitchFamily="2" charset="0"/>
-            </a:endParaRPr>
-          </a:p>
-        </p:txBody>
-      </p:sp>
-      <p:sp>
-        <p:nvSpPr>
-          <p:cNvPr id="5" name="矩形: 圆角 4">
-            <a:extLst>
-              <a:ext uri="{FF2B5EF4-FFF2-40B4-BE49-F238E27FC236}">
-                <a16:creationId xmlns:a16="http://schemas.microsoft.com/office/drawing/2014/main" id="{87A792D5-D640-E90C-F6FA-DE21142430A7}"/>
-              </a:ext>
-            </a:extLst>
-          </p:cNvPr>
-          <p:cNvSpPr/>
-          <p:nvPr/>
-        </p:nvSpPr>
-        <p:spPr>
-          <a:xfrm>
-            <a:off x="6583823" y="2088738"/>
-            <a:ext cx="1440000" cy="216000"/>
-          </a:xfrm>
-          <a:prstGeom prst="roundRect">
-            <a:avLst/>
-          </a:prstGeom>
-          <a:solidFill>
-            <a:srgbClr val="EB3B5A"/>
-          </a:solidFill>
-          <a:ln w="12700">
-            <a:noFill/>
-          </a:ln>
-        </p:spPr>
-        <p:style>
-          <a:lnRef idx="2">
-            <a:schemeClr val="accent1">
-              <a:shade val="15000"/>
-            </a:schemeClr>
-          </a:lnRef>
-          <a:fillRef idx="1">
-            <a:schemeClr val="accent1"/>
-          </a:fillRef>
-          <a:effectRef idx="0">
-            <a:schemeClr val="accent1"/>
-          </a:effectRef>
-          <a:fontRef idx="minor">
-            <a:schemeClr val="lt1"/>
-          </a:fontRef>
-        </p:style>
-        <p:txBody>
-          <a:bodyPr rtlCol="0" anchor="ctr"/>
-          <a:lstStyle/>
-          <a:p>
-            <a:pPr algn="ctr"/>
-            <a:r>
-              <a:rPr lang="en-US" altLang="zh-CN" sz="800">
-                <a:latin typeface="Quicksand" panose="00000500000000000000" pitchFamily="2" charset="0"/>
-              </a:rPr>
-              <a:t>background-img</a:t>
-            </a:r>
-            <a:endParaRPr lang="zh-CN" altLang="en-US" sz="800">
-              <a:latin typeface="Quicksand" panose="00000500000000000000" pitchFamily="2" charset="0"/>
-            </a:endParaRPr>
-          </a:p>
-        </p:txBody>
-      </p:sp>
-      <p:sp>
-        <p:nvSpPr>
-          <p:cNvPr id="6" name="矩形: 圆角 5">
-            <a:extLst>
-              <a:ext uri="{FF2B5EF4-FFF2-40B4-BE49-F238E27FC236}">
-                <a16:creationId xmlns:a16="http://schemas.microsoft.com/office/drawing/2014/main" id="{F001F596-A9BC-961B-AB7F-13C5672DF725}"/>
-              </a:ext>
-            </a:extLst>
-          </p:cNvPr>
-          <p:cNvSpPr/>
-          <p:nvPr/>
-        </p:nvSpPr>
-        <p:spPr>
-          <a:xfrm>
-            <a:off x="6583823" y="2465216"/>
-            <a:ext cx="1440000" cy="216000"/>
-          </a:xfrm>
-          <a:prstGeom prst="roundRect">
-            <a:avLst/>
-          </a:prstGeom>
-          <a:solidFill>
-            <a:srgbClr val="F78FB3"/>
-          </a:solidFill>
-          <a:ln w="12700">
-            <a:noFill/>
-          </a:ln>
-        </p:spPr>
-        <p:style>
-          <a:lnRef idx="2">
-            <a:schemeClr val="accent1">
-              <a:shade val="15000"/>
-            </a:schemeClr>
-          </a:lnRef>
-          <a:fillRef idx="1">
-            <a:schemeClr val="accent1"/>
-          </a:fillRef>
-          <a:effectRef idx="0">
-            <a:schemeClr val="accent1"/>
-          </a:effectRef>
-          <a:fontRef idx="minor">
-            <a:schemeClr val="lt1"/>
-          </a:fontRef>
-        </p:style>
-        <p:txBody>
-          <a:bodyPr rtlCol="0" anchor="ctr"/>
-          <a:lstStyle/>
-          <a:p>
-            <a:pPr algn="ctr"/>
-            <a:r>
-              <a:rPr lang="en-US" altLang="zh-CN" sz="800">
-                <a:latin typeface="Quicksand" panose="00000500000000000000" pitchFamily="2" charset="0"/>
-              </a:rPr>
-              <a:t>background-position</a:t>
-            </a:r>
-            <a:endParaRPr lang="zh-CN" altLang="en-US" sz="800">
-              <a:latin typeface="Quicksand" panose="00000500000000000000" pitchFamily="2" charset="0"/>
-            </a:endParaRPr>
-          </a:p>
-        </p:txBody>
-      </p:sp>
-      <p:cxnSp>
-        <p:nvCxnSpPr>
-          <p:cNvPr id="13" name="连接符: 曲线 12">
-            <a:extLst>
-              <a:ext uri="{FF2B5EF4-FFF2-40B4-BE49-F238E27FC236}">
-                <a16:creationId xmlns:a16="http://schemas.microsoft.com/office/drawing/2014/main" id="{D857022F-FD57-CB9F-109D-F0FEA004375B}"/>
-              </a:ext>
-            </a:extLst>
-          </p:cNvPr>
-          <p:cNvCxnSpPr>
-            <a:cxnSpLocks/>
-            <a:stCxn id="2" idx="3"/>
-            <a:endCxn id="3" idx="1"/>
-          </p:cNvCxnSpPr>
-          <p:nvPr/>
-        </p:nvCxnSpPr>
-        <p:spPr>
-          <a:xfrm>
-            <a:off x="6347696" y="3137934"/>
-            <a:ext cx="236127" cy="188238"/>
-          </a:xfrm>
-          <a:prstGeom prst="curvedConnector3">
-            <a:avLst>
-              <a:gd name="adj1" fmla="val 50000"/>
-            </a:avLst>
-          </a:prstGeom>
-          <a:ln>
-            <a:solidFill>
-              <a:srgbClr val="6D214F"/>
-            </a:solidFill>
-          </a:ln>
-        </p:spPr>
-        <p:style>
-          <a:lnRef idx="1">
-            <a:schemeClr val="accent1"/>
-          </a:lnRef>
-          <a:fillRef idx="0">
-            <a:schemeClr val="accent1"/>
-          </a:fillRef>
-          <a:effectRef idx="0">
-            <a:schemeClr val="accent1"/>
-          </a:effectRef>
-          <a:fontRef idx="minor">
-            <a:schemeClr val="tx1"/>
-          </a:fontRef>
-        </p:style>
-      </p:cxnSp>
-      <p:cxnSp>
-        <p:nvCxnSpPr>
-          <p:cNvPr id="14" name="连接符: 曲线 13">
-            <a:extLst>
-              <a:ext uri="{FF2B5EF4-FFF2-40B4-BE49-F238E27FC236}">
-                <a16:creationId xmlns:a16="http://schemas.microsoft.com/office/drawing/2014/main" id="{DF152018-D11C-FF19-7282-EC631DB77FDB}"/>
-              </a:ext>
-            </a:extLst>
-          </p:cNvPr>
-          <p:cNvCxnSpPr>
-            <a:stCxn id="2" idx="3"/>
-            <a:endCxn id="5" idx="1"/>
-          </p:cNvCxnSpPr>
-          <p:nvPr/>
-        </p:nvCxnSpPr>
-        <p:spPr>
-          <a:xfrm flipV="1">
-            <a:off x="6347696" y="2196738"/>
-            <a:ext cx="236127" cy="941196"/>
-          </a:xfrm>
-          <a:prstGeom prst="curvedConnector3">
-            <a:avLst/>
-          </a:prstGeom>
-          <a:ln>
-            <a:solidFill>
-              <a:srgbClr val="FF0000"/>
-            </a:solidFill>
-          </a:ln>
-        </p:spPr>
-        <p:style>
-          <a:lnRef idx="1">
-            <a:schemeClr val="accent1"/>
-          </a:lnRef>
-          <a:fillRef idx="0">
-            <a:schemeClr val="accent1"/>
-          </a:fillRef>
-          <a:effectRef idx="0">
-            <a:schemeClr val="accent1"/>
-          </a:effectRef>
-          <a:fontRef idx="minor">
-            <a:schemeClr val="tx1"/>
-          </a:fontRef>
-        </p:style>
-      </p:cxnSp>
-      <p:cxnSp>
-        <p:nvCxnSpPr>
-          <p:cNvPr id="15" name="连接符: 曲线 14">
-            <a:extLst>
-              <a:ext uri="{FF2B5EF4-FFF2-40B4-BE49-F238E27FC236}">
-                <a16:creationId xmlns:a16="http://schemas.microsoft.com/office/drawing/2014/main" id="{D776544B-8805-064E-FB86-8357089F4115}"/>
-              </a:ext>
-            </a:extLst>
-          </p:cNvPr>
-          <p:cNvCxnSpPr>
-            <a:stCxn id="2" idx="3"/>
-            <a:endCxn id="6" idx="1"/>
-          </p:cNvCxnSpPr>
-          <p:nvPr/>
-        </p:nvCxnSpPr>
-        <p:spPr>
-          <a:xfrm flipV="1">
-            <a:off x="6347696" y="2573216"/>
-            <a:ext cx="236127" cy="564718"/>
-          </a:xfrm>
-          <a:prstGeom prst="curvedConnector3">
-            <a:avLst/>
-          </a:prstGeom>
-          <a:ln>
-            <a:solidFill>
-              <a:srgbClr val="F78FB3"/>
-            </a:solidFill>
-          </a:ln>
-        </p:spPr>
-        <p:style>
-          <a:lnRef idx="1">
-            <a:schemeClr val="accent1"/>
-          </a:lnRef>
-          <a:fillRef idx="0">
-            <a:schemeClr val="accent1"/>
-          </a:fillRef>
-          <a:effectRef idx="0">
-            <a:schemeClr val="accent1"/>
-          </a:effectRef>
-          <a:fontRef idx="minor">
-            <a:schemeClr val="tx1"/>
-          </a:fontRef>
-        </p:style>
-      </p:cxnSp>
-      <p:cxnSp>
-        <p:nvCxnSpPr>
-          <p:cNvPr id="16" name="连接符: 曲线 15">
-            <a:extLst>
-              <a:ext uri="{FF2B5EF4-FFF2-40B4-BE49-F238E27FC236}">
-                <a16:creationId xmlns:a16="http://schemas.microsoft.com/office/drawing/2014/main" id="{5530CC53-CE6B-A691-48F9-E0FE20C352A0}"/>
-              </a:ext>
-            </a:extLst>
-          </p:cNvPr>
-          <p:cNvCxnSpPr>
-            <a:stCxn id="4" idx="1"/>
-            <a:endCxn id="2" idx="3"/>
-          </p:cNvCxnSpPr>
-          <p:nvPr/>
-        </p:nvCxnSpPr>
-        <p:spPr>
-          <a:xfrm rot="10800000" flipV="1">
-            <a:off x="6347697" y="1820260"/>
-            <a:ext cx="236127" cy="1317674"/>
-          </a:xfrm>
-          <a:prstGeom prst="curvedConnector3">
-            <a:avLst/>
-          </a:prstGeom>
-          <a:ln>
-            <a:solidFill>
-              <a:srgbClr val="FFC000"/>
-            </a:solidFill>
-          </a:ln>
-        </p:spPr>
-        <p:style>
-          <a:lnRef idx="1">
-            <a:schemeClr val="accent1"/>
-          </a:lnRef>
-          <a:fillRef idx="0">
-            <a:schemeClr val="accent1"/>
-          </a:fillRef>
-          <a:effectRef idx="0">
-            <a:schemeClr val="accent1"/>
-          </a:effectRef>
-          <a:fontRef idx="minor">
-            <a:schemeClr val="tx1"/>
-          </a:fontRef>
-        </p:style>
-      </p:cxnSp>
-      <p:sp>
-        <p:nvSpPr>
-          <p:cNvPr id="12" name="矩形: 圆角 11">
-            <a:extLst>
-              <a:ext uri="{FF2B5EF4-FFF2-40B4-BE49-F238E27FC236}">
-                <a16:creationId xmlns:a16="http://schemas.microsoft.com/office/drawing/2014/main" id="{CA690FCB-6050-34A5-12AA-227C0F7253CA}"/>
-              </a:ext>
-            </a:extLst>
-          </p:cNvPr>
-          <p:cNvSpPr/>
-          <p:nvPr/>
-        </p:nvSpPr>
-        <p:spPr>
-          <a:xfrm>
-            <a:off x="6583823" y="2841694"/>
-            <a:ext cx="1440000" cy="216000"/>
-          </a:xfrm>
-          <a:prstGeom prst="roundRect">
-            <a:avLst/>
-          </a:prstGeom>
-          <a:solidFill>
-            <a:srgbClr val="8854D0"/>
-          </a:solidFill>
-          <a:ln w="12700">
-            <a:noFill/>
-          </a:ln>
-        </p:spPr>
-        <p:style>
-          <a:lnRef idx="2">
-            <a:schemeClr val="accent1">
-              <a:shade val="15000"/>
-            </a:schemeClr>
-          </a:lnRef>
-          <a:fillRef idx="1">
-            <a:schemeClr val="accent1"/>
-          </a:fillRef>
-          <a:effectRef idx="0">
-            <a:schemeClr val="accent1"/>
-          </a:effectRef>
-          <a:fontRef idx="minor">
-            <a:schemeClr val="lt1"/>
-          </a:fontRef>
-        </p:style>
-        <p:txBody>
-          <a:bodyPr rtlCol="0" anchor="ctr"/>
-          <a:lstStyle/>
-          <a:p>
-            <a:pPr algn="ctr"/>
-            <a:r>
-              <a:rPr lang="en-US" altLang="zh-CN" sz="800">
-                <a:latin typeface="Quicksand" panose="00000500000000000000" pitchFamily="2" charset="0"/>
-              </a:rPr>
-              <a:t>background-size</a:t>
-            </a:r>
-            <a:endParaRPr lang="zh-CN" altLang="en-US" sz="800">
-              <a:latin typeface="Quicksand" panose="00000500000000000000" pitchFamily="2" charset="0"/>
-            </a:endParaRPr>
-          </a:p>
-        </p:txBody>
-      </p:sp>
-      <p:cxnSp>
-        <p:nvCxnSpPr>
-          <p:cNvPr id="21" name="连接符: 曲线 20">
-            <a:extLst>
-              <a:ext uri="{FF2B5EF4-FFF2-40B4-BE49-F238E27FC236}">
-                <a16:creationId xmlns:a16="http://schemas.microsoft.com/office/drawing/2014/main" id="{B1FC38B2-3763-8A0C-56A4-C088C18DDBC2}"/>
-              </a:ext>
-            </a:extLst>
-          </p:cNvPr>
-          <p:cNvCxnSpPr>
-            <a:cxnSpLocks/>
-            <a:stCxn id="2" idx="3"/>
-            <a:endCxn id="12" idx="1"/>
-          </p:cNvCxnSpPr>
-          <p:nvPr/>
-        </p:nvCxnSpPr>
-        <p:spPr>
-          <a:xfrm flipV="1">
-            <a:off x="6347696" y="2949694"/>
-            <a:ext cx="236127" cy="188240"/>
-          </a:xfrm>
-          <a:prstGeom prst="curvedConnector3">
-            <a:avLst>
-              <a:gd name="adj1" fmla="val 50000"/>
-            </a:avLst>
-          </a:prstGeom>
-          <a:ln>
-            <a:solidFill>
-              <a:srgbClr val="8854D0"/>
-            </a:solidFill>
-          </a:ln>
-        </p:spPr>
-        <p:style>
-          <a:lnRef idx="1">
-            <a:schemeClr val="accent1"/>
-          </a:lnRef>
-          <a:fillRef idx="0">
-            <a:schemeClr val="accent1"/>
-          </a:fillRef>
-          <a:effectRef idx="0">
-            <a:schemeClr val="accent1"/>
-          </a:effectRef>
-          <a:fontRef idx="minor">
-            <a:schemeClr val="tx1"/>
-          </a:fontRef>
-        </p:style>
-      </p:cxnSp>
-      <p:sp>
-        <p:nvSpPr>
-          <p:cNvPr id="9" name="矩形: 圆角 8">
-            <a:extLst>
-              <a:ext uri="{FF2B5EF4-FFF2-40B4-BE49-F238E27FC236}">
-                <a16:creationId xmlns:a16="http://schemas.microsoft.com/office/drawing/2014/main" id="{5704B543-A087-6258-53B2-3382506CB5CB}"/>
-              </a:ext>
-            </a:extLst>
-          </p:cNvPr>
-          <p:cNvSpPr/>
-          <p:nvPr/>
-        </p:nvSpPr>
-        <p:spPr>
-          <a:xfrm>
-            <a:off x="6583823" y="3971128"/>
-            <a:ext cx="1440000" cy="216000"/>
-          </a:xfrm>
-          <a:prstGeom prst="roundRect">
-            <a:avLst/>
-          </a:prstGeom>
-          <a:solidFill>
-            <a:srgbClr val="3DC1D3"/>
-          </a:solidFill>
-          <a:ln w="12700">
-            <a:noFill/>
-          </a:ln>
-        </p:spPr>
-        <p:style>
-          <a:lnRef idx="2">
-            <a:schemeClr val="accent1">
-              <a:shade val="15000"/>
-            </a:schemeClr>
-          </a:lnRef>
-          <a:fillRef idx="1">
-            <a:schemeClr val="accent1"/>
-          </a:fillRef>
-          <a:effectRef idx="0">
-            <a:schemeClr val="accent1"/>
-          </a:effectRef>
-          <a:fontRef idx="minor">
-            <a:schemeClr val="lt1"/>
-          </a:fontRef>
-        </p:style>
-        <p:txBody>
-          <a:bodyPr rtlCol="0" anchor="ctr"/>
-          <a:lstStyle/>
-          <a:p>
-            <a:pPr algn="ctr"/>
-            <a:r>
-              <a:rPr lang="en-US" altLang="zh-CN" sz="800">
-                <a:latin typeface="Quicksand" panose="00000500000000000000" pitchFamily="2" charset="0"/>
-              </a:rPr>
-              <a:t>background-clip</a:t>
-            </a:r>
-            <a:endParaRPr lang="zh-CN" altLang="en-US" sz="800">
-              <a:latin typeface="Quicksand" panose="00000500000000000000" pitchFamily="2" charset="0"/>
-            </a:endParaRPr>
-          </a:p>
-        </p:txBody>
-      </p:sp>
-      <p:cxnSp>
-        <p:nvCxnSpPr>
-          <p:cNvPr id="11" name="连接符: 曲线 10">
-            <a:extLst>
-              <a:ext uri="{FF2B5EF4-FFF2-40B4-BE49-F238E27FC236}">
-                <a16:creationId xmlns:a16="http://schemas.microsoft.com/office/drawing/2014/main" id="{EADC1F19-9641-15F6-3ECE-3B5E53A4B1CD}"/>
-              </a:ext>
-            </a:extLst>
-          </p:cNvPr>
-          <p:cNvCxnSpPr>
-            <a:cxnSpLocks/>
-            <a:stCxn id="2" idx="3"/>
-            <a:endCxn id="9" idx="1"/>
-          </p:cNvCxnSpPr>
-          <p:nvPr/>
-        </p:nvCxnSpPr>
-        <p:spPr>
-          <a:xfrm>
-            <a:off x="6347696" y="3137934"/>
-            <a:ext cx="236127" cy="941194"/>
-          </a:xfrm>
-          <a:prstGeom prst="curvedConnector3">
-            <a:avLst>
-              <a:gd name="adj1" fmla="val 50000"/>
-            </a:avLst>
-          </a:prstGeom>
-          <a:ln>
-            <a:solidFill>
-              <a:srgbClr val="3DC1D3"/>
-            </a:solidFill>
-          </a:ln>
-        </p:spPr>
-        <p:style>
-          <a:lnRef idx="1">
-            <a:schemeClr val="accent1"/>
-          </a:lnRef>
-          <a:fillRef idx="0">
-            <a:schemeClr val="accent1"/>
-          </a:fillRef>
-          <a:effectRef idx="0">
-            <a:schemeClr val="accent1"/>
-          </a:effectRef>
-          <a:fontRef idx="minor">
-            <a:schemeClr val="tx1"/>
-          </a:fontRef>
-        </p:style>
-      </p:cxnSp>
-      <p:sp>
-        <p:nvSpPr>
-          <p:cNvPr id="28" name="矩形: 圆角 27">
-            <a:extLst>
-              <a:ext uri="{FF2B5EF4-FFF2-40B4-BE49-F238E27FC236}">
-                <a16:creationId xmlns:a16="http://schemas.microsoft.com/office/drawing/2014/main" id="{2D76B52C-A377-4760-EE4D-8E1F7250DC8F}"/>
-              </a:ext>
-            </a:extLst>
-          </p:cNvPr>
-          <p:cNvSpPr/>
-          <p:nvPr/>
-        </p:nvSpPr>
-        <p:spPr>
-          <a:xfrm>
-            <a:off x="6583823" y="3594650"/>
-            <a:ext cx="1440000" cy="216000"/>
-          </a:xfrm>
-          <a:prstGeom prst="roundRect">
-            <a:avLst/>
-          </a:prstGeom>
-          <a:solidFill>
-            <a:srgbClr val="20BF6B"/>
-          </a:solidFill>
-          <a:ln w="12700">
-            <a:noFill/>
-          </a:ln>
-        </p:spPr>
-        <p:style>
-          <a:lnRef idx="2">
-            <a:schemeClr val="accent1">
-              <a:shade val="15000"/>
-            </a:schemeClr>
-          </a:lnRef>
-          <a:fillRef idx="1">
-            <a:schemeClr val="accent1"/>
-          </a:fillRef>
-          <a:effectRef idx="0">
-            <a:schemeClr val="accent1"/>
-          </a:effectRef>
-          <a:fontRef idx="minor">
-            <a:schemeClr val="lt1"/>
-          </a:fontRef>
-        </p:style>
-        <p:txBody>
-          <a:bodyPr rtlCol="0" anchor="ctr"/>
-          <a:lstStyle/>
-          <a:p>
-            <a:pPr algn="ctr"/>
-            <a:r>
-              <a:rPr lang="en-US" altLang="zh-CN" sz="800">
-                <a:latin typeface="Quicksand" panose="00000500000000000000" pitchFamily="2" charset="0"/>
-              </a:rPr>
-              <a:t>background-origin</a:t>
-            </a:r>
-            <a:endParaRPr lang="zh-CN" altLang="en-US" sz="800">
-              <a:latin typeface="Quicksand" panose="00000500000000000000" pitchFamily="2" charset="0"/>
-            </a:endParaRPr>
-          </a:p>
-        </p:txBody>
-      </p:sp>
-      <p:cxnSp>
-        <p:nvCxnSpPr>
-          <p:cNvPr id="29" name="连接符: 曲线 28">
-            <a:extLst>
-              <a:ext uri="{FF2B5EF4-FFF2-40B4-BE49-F238E27FC236}">
-                <a16:creationId xmlns:a16="http://schemas.microsoft.com/office/drawing/2014/main" id="{EF08E3E2-D366-FE1C-85A8-77605DB967B3}"/>
-              </a:ext>
-            </a:extLst>
-          </p:cNvPr>
-          <p:cNvCxnSpPr>
-            <a:cxnSpLocks/>
-            <a:stCxn id="28" idx="1"/>
-            <a:endCxn id="2" idx="3"/>
-          </p:cNvCxnSpPr>
-          <p:nvPr/>
-        </p:nvCxnSpPr>
-        <p:spPr>
-          <a:xfrm rot="10800000">
-            <a:off x="6347697" y="3137934"/>
-            <a:ext cx="236127" cy="564716"/>
-          </a:xfrm>
-          <a:prstGeom prst="curvedConnector3">
-            <a:avLst>
-              <a:gd name="adj1" fmla="val 50000"/>
-            </a:avLst>
-          </a:prstGeom>
-          <a:ln>
-            <a:solidFill>
-              <a:srgbClr val="20BF6B"/>
-            </a:solidFill>
-          </a:ln>
-        </p:spPr>
-        <p:style>
-          <a:lnRef idx="1">
-            <a:schemeClr val="accent1"/>
-          </a:lnRef>
-          <a:fillRef idx="0">
-            <a:schemeClr val="accent1"/>
-          </a:fillRef>
-          <a:effectRef idx="0">
-            <a:schemeClr val="accent1"/>
-          </a:effectRef>
-          <a:fontRef idx="minor">
-            <a:schemeClr val="tx1"/>
-          </a:fontRef>
-        </p:style>
-      </p:cxnSp>
-      <p:sp>
-        <p:nvSpPr>
-          <p:cNvPr id="24" name="矩形: 圆角 8">
-            <a:extLst>
-              <a:ext uri="{FF2B5EF4-FFF2-40B4-BE49-F238E27FC236}">
-                <a16:creationId xmlns:a16="http://schemas.microsoft.com/office/drawing/2014/main" id="{A6C27A23-18E4-76C2-DEF7-34D22EC06C21}"/>
-              </a:ext>
-            </a:extLst>
-          </p:cNvPr>
-          <p:cNvSpPr/>
-          <p:nvPr/>
-        </p:nvSpPr>
-        <p:spPr>
-          <a:xfrm>
-            <a:off x="6583823" y="4347608"/>
-            <a:ext cx="1440000" cy="216000"/>
-          </a:xfrm>
-          <a:prstGeom prst="roundRect">
-            <a:avLst/>
-          </a:prstGeom>
-          <a:solidFill>
-            <a:srgbClr val="0070C0"/>
-          </a:solidFill>
-          <a:ln w="12700">
-            <a:noFill/>
-          </a:ln>
-        </p:spPr>
-        <p:style>
-          <a:lnRef idx="2">
-            <a:schemeClr val="accent1">
-              <a:shade val="15000"/>
-            </a:schemeClr>
-          </a:lnRef>
-          <a:fillRef idx="1">
-            <a:schemeClr val="accent1"/>
-          </a:fillRef>
-          <a:effectRef idx="0">
-            <a:schemeClr val="accent1"/>
-          </a:effectRef>
-          <a:fontRef idx="minor">
-            <a:schemeClr val="lt1"/>
-          </a:fontRef>
-        </p:style>
-        <p:txBody>
-          <a:bodyPr rtlCol="0" anchor="ctr"/>
-          <a:lstStyle/>
-          <a:p>
-            <a:pPr algn="ctr"/>
-            <a:r>
-              <a:rPr lang="en-US" altLang="zh-CN" sz="800">
-                <a:latin typeface="Quicksand" panose="00000500000000000000" pitchFamily="2" charset="0"/>
-              </a:rPr>
-              <a:t>background-attachment</a:t>
-            </a:r>
-            <a:endParaRPr lang="zh-CN" altLang="en-US" sz="800">
-              <a:latin typeface="Quicksand" panose="00000500000000000000" pitchFamily="2" charset="0"/>
-            </a:endParaRPr>
-          </a:p>
-        </p:txBody>
-      </p:sp>
-      <p:cxnSp>
-        <p:nvCxnSpPr>
-          <p:cNvPr id="46" name="连接符: 曲线 10">
-            <a:extLst>
-              <a:ext uri="{FF2B5EF4-FFF2-40B4-BE49-F238E27FC236}">
-                <a16:creationId xmlns:a16="http://schemas.microsoft.com/office/drawing/2014/main" id="{32E5C4EC-C977-10C6-8D74-4BEFAAD30A4E}"/>
-              </a:ext>
-            </a:extLst>
-          </p:cNvPr>
-          <p:cNvCxnSpPr>
-            <a:cxnSpLocks/>
-            <a:stCxn id="2" idx="3"/>
-            <a:endCxn id="24" idx="1"/>
-          </p:cNvCxnSpPr>
-          <p:nvPr/>
-        </p:nvCxnSpPr>
-        <p:spPr>
-          <a:xfrm>
-            <a:off x="6347696" y="3137934"/>
-            <a:ext cx="236127" cy="1317674"/>
-          </a:xfrm>
-          <a:prstGeom prst="curvedConnector3">
-            <a:avLst>
-              <a:gd name="adj1" fmla="val 50000"/>
-            </a:avLst>
-          </a:prstGeom>
-          <a:ln>
-            <a:solidFill>
-              <a:srgbClr val="0070C0"/>
-            </a:solidFill>
-          </a:ln>
-        </p:spPr>
-        <p:style>
-          <a:lnRef idx="1">
-            <a:schemeClr val="accent1"/>
-          </a:lnRef>
-          <a:fillRef idx="0">
-            <a:schemeClr val="accent1"/>
-          </a:fillRef>
-          <a:effectRef idx="0">
-            <a:schemeClr val="accent1"/>
-          </a:effectRef>
-          <a:fontRef idx="minor">
-            <a:schemeClr val="tx1"/>
-          </a:fontRef>
-        </p:style>
-      </p:cxnSp>
-    </p:spTree>
-    <p:extLst>
-      <p:ext uri="{BB962C8B-B14F-4D97-AF65-F5344CB8AC3E}">
-        <p14:creationId xmlns:p14="http://schemas.microsoft.com/office/powerpoint/2010/main" val="1414077195"/>
-      </p:ext>
-    </p:extLst>
-  </p:cSld>
-  <p:clrMapOvr>
-    <a:masterClrMapping/>
-  </p:clrMapOvr>
-</p:sld>
-</file>
-
-<file path=ppt/slides/slide11.xml><?xml version="1.0" encoding="utf-8"?>
-<p:sld xmlns:a="http://schemas.openxmlformats.org/drawingml/2006/main" xmlns:r="http://schemas.openxmlformats.org/officeDocument/2006/relationships" xmlns:p="http://schemas.openxmlformats.org/presentationml/2006/main">
-  <p:cSld>
-    <p:spTree>
-      <p:nvGrpSpPr>
-        <p:cNvPr id="1" name="">
-          <a:extLst>
-            <a:ext uri="{FF2B5EF4-FFF2-40B4-BE49-F238E27FC236}">
               <a16:creationId xmlns:a16="http://schemas.microsoft.com/office/drawing/2014/main" id="{18E2CAE3-A1AC-3F4E-935C-0F5B86F0EE15}"/>
             </a:ext>
           </a:extLst>
@@ -6177,7 +5231,7 @@
 </p:sld>
 </file>
 
-<file path=ppt/slides/slide12.xml><?xml version="1.0" encoding="utf-8"?>
+<file path=ppt/slides/slide11.xml><?xml version="1.0" encoding="utf-8"?>
 <p:sld xmlns:a="http://schemas.openxmlformats.org/drawingml/2006/main" xmlns:r="http://schemas.openxmlformats.org/officeDocument/2006/relationships" xmlns:p="http://schemas.openxmlformats.org/presentationml/2006/main">
   <p:cSld>
     <p:spTree>
@@ -7143,7 +6197,7 @@
 </p:sld>
 </file>
 
-<file path=ppt/slides/slide13.xml><?xml version="1.0" encoding="utf-8"?>
+<file path=ppt/slides/slide12.xml><?xml version="1.0" encoding="utf-8"?>
 <p:sld xmlns:a="http://schemas.openxmlformats.org/drawingml/2006/main" xmlns:r="http://schemas.openxmlformats.org/officeDocument/2006/relationships" xmlns:p="http://schemas.openxmlformats.org/presentationml/2006/main">
   <p:cSld>
     <p:spTree>
@@ -7737,7 +6791,7 @@
 </p:sld>
 </file>
 
-<file path=ppt/slides/slide14.xml><?xml version="1.0" encoding="utf-8"?>
+<file path=ppt/slides/slide13.xml><?xml version="1.0" encoding="utf-8"?>
 <p:sld xmlns:a="http://schemas.openxmlformats.org/drawingml/2006/main" xmlns:r="http://schemas.openxmlformats.org/officeDocument/2006/relationships" xmlns:p="http://schemas.openxmlformats.org/presentationml/2006/main">
   <p:cSld>
     <p:spTree>
@@ -9352,7 +8406,7 @@
 </p:sld>
 </file>
 
-<file path=ppt/slides/slide15.xml><?xml version="1.0" encoding="utf-8"?>
+<file path=ppt/slides/slide14.xml><?xml version="1.0" encoding="utf-8"?>
 <p:sld xmlns:a="http://schemas.openxmlformats.org/drawingml/2006/main" xmlns:r="http://schemas.openxmlformats.org/officeDocument/2006/relationships" xmlns:p="http://schemas.openxmlformats.org/presentationml/2006/main">
   <p:cSld>
     <p:spTree>
@@ -12357,7 +11411,7 @@
 </p:sld>
 </file>
 
-<file path=ppt/slides/slide16.xml><?xml version="1.0" encoding="utf-8"?>
+<file path=ppt/slides/slide15.xml><?xml version="1.0" encoding="utf-8"?>
 <p:sld xmlns:a="http://schemas.openxmlformats.org/drawingml/2006/main" xmlns:r="http://schemas.openxmlformats.org/officeDocument/2006/relationships" xmlns:p="http://schemas.openxmlformats.org/presentationml/2006/main">
   <p:cSld>
     <p:spTree>
@@ -14940,7 +13994,7 @@
 </p:sld>
 </file>
 
-<file path=ppt/slides/slide17.xml><?xml version="1.0" encoding="utf-8"?>
+<file path=ppt/slides/slide16.xml><?xml version="1.0" encoding="utf-8"?>
 <p:sld xmlns:a="http://schemas.openxmlformats.org/drawingml/2006/main" xmlns:r="http://schemas.openxmlformats.org/officeDocument/2006/relationships" xmlns:p="http://schemas.openxmlformats.org/presentationml/2006/main">
   <p:cSld>
     <p:spTree>
@@ -16345,7 +15399,7 @@
 </p:sld>
 </file>
 
-<file path=ppt/slides/slide18.xml><?xml version="1.0" encoding="utf-8"?>
+<file path=ppt/slides/slide17.xml><?xml version="1.0" encoding="utf-8"?>
 <p:sld xmlns:a="http://schemas.openxmlformats.org/drawingml/2006/main" xmlns:r="http://schemas.openxmlformats.org/officeDocument/2006/relationships" xmlns:p="http://schemas.openxmlformats.org/presentationml/2006/main">
   <p:cSld>
     <p:spTree>
@@ -17553,7 +16607,7 @@
 </p:sld>
 </file>
 
-<file path=ppt/slides/slide19.xml><?xml version="1.0" encoding="utf-8"?>
+<file path=ppt/slides/slide18.xml><?xml version="1.0" encoding="utf-8"?>
 <p:sld xmlns:a="http://schemas.openxmlformats.org/drawingml/2006/main" xmlns:r="http://schemas.openxmlformats.org/officeDocument/2006/relationships" xmlns:p="http://schemas.openxmlformats.org/presentationml/2006/main">
   <p:cSld>
     <p:spTree>
@@ -17888,6 +16942,452 @@
     <p:extLst>
       <p:ext uri="{BB962C8B-B14F-4D97-AF65-F5344CB8AC3E}">
         <p14:creationId xmlns:p14="http://schemas.microsoft.com/office/powerpoint/2010/main" val="1393457208"/>
+      </p:ext>
+    </p:extLst>
+  </p:cSld>
+  <p:clrMapOvr>
+    <a:masterClrMapping/>
+  </p:clrMapOvr>
+</p:sld>
+</file>
+
+<file path=ppt/slides/slide19.xml><?xml version="1.0" encoding="utf-8"?>
+<p:sld xmlns:a="http://schemas.openxmlformats.org/drawingml/2006/main" xmlns:r="http://schemas.openxmlformats.org/officeDocument/2006/relationships" xmlns:p="http://schemas.openxmlformats.org/presentationml/2006/main">
+  <p:cSld>
+    <p:spTree>
+      <p:nvGrpSpPr>
+        <p:cNvPr id="1" name="">
+          <a:extLst>
+            <a:ext uri="{FF2B5EF4-FFF2-40B4-BE49-F238E27FC236}">
+              <a16:creationId xmlns:a16="http://schemas.microsoft.com/office/drawing/2014/main" id="{CDC8A674-4B20-52FC-4D14-C7C25881D114}"/>
+            </a:ext>
+          </a:extLst>
+        </p:cNvPr>
+        <p:cNvGrpSpPr/>
+        <p:nvPr/>
+      </p:nvGrpSpPr>
+      <p:grpSpPr>
+        <a:xfrm>
+          <a:off x="0" y="0"/>
+          <a:ext cx="0" cy="0"/>
+          <a:chOff x="0" y="0"/>
+          <a:chExt cx="0" cy="0"/>
+        </a:xfrm>
+      </p:grpSpPr>
+      <p:sp>
+        <p:nvSpPr>
+          <p:cNvPr id="2" name="Rectangle 1">
+            <a:extLst>
+              <a:ext uri="{FF2B5EF4-FFF2-40B4-BE49-F238E27FC236}">
+                <a16:creationId xmlns:a16="http://schemas.microsoft.com/office/drawing/2014/main" id="{F22D05D8-3AED-74C1-0CE8-D5D7495EB663}"/>
+              </a:ext>
+            </a:extLst>
+          </p:cNvPr>
+          <p:cNvSpPr/>
+          <p:nvPr/>
+        </p:nvSpPr>
+        <p:spPr>
+          <a:xfrm>
+            <a:off x="3757723" y="1589964"/>
+            <a:ext cx="3600000" cy="1800000"/>
+          </a:xfrm>
+          <a:prstGeom prst="rect">
+            <a:avLst/>
+          </a:prstGeom>
+          <a:solidFill>
+            <a:schemeClr val="bg1">
+              <a:lumMod val="95000"/>
+            </a:schemeClr>
+          </a:solidFill>
+          <a:ln>
+            <a:noFill/>
+          </a:ln>
+        </p:spPr>
+        <p:style>
+          <a:lnRef idx="2">
+            <a:schemeClr val="accent1">
+              <a:shade val="15000"/>
+            </a:schemeClr>
+          </a:lnRef>
+          <a:fillRef idx="1">
+            <a:schemeClr val="accent1"/>
+          </a:fillRef>
+          <a:effectRef idx="0">
+            <a:schemeClr val="accent1"/>
+          </a:effectRef>
+          <a:fontRef idx="minor">
+            <a:schemeClr val="lt1"/>
+          </a:fontRef>
+        </p:style>
+        <p:txBody>
+          <a:bodyPr rtlCol="0" anchor="ctr"/>
+          <a:lstStyle/>
+          <a:p>
+            <a:pPr algn="ctr"/>
+            <a:endParaRPr lang="zh-CN" altLang="en-US" sz="1200">
+              <a:solidFill>
+                <a:schemeClr val="accent6">
+                  <a:lumMod val="75000"/>
+                </a:schemeClr>
+              </a:solidFill>
+              <a:latin typeface="Poppins" panose="00000500000000000000" pitchFamily="2" charset="0"/>
+              <a:cs typeface="Poppins" panose="00000500000000000000" pitchFamily="2" charset="0"/>
+            </a:endParaRPr>
+          </a:p>
+        </p:txBody>
+      </p:sp>
+      <p:sp>
+        <p:nvSpPr>
+          <p:cNvPr id="3" name="Rectangle 2">
+            <a:extLst>
+              <a:ext uri="{FF2B5EF4-FFF2-40B4-BE49-F238E27FC236}">
+                <a16:creationId xmlns:a16="http://schemas.microsoft.com/office/drawing/2014/main" id="{7F930297-9DE3-3DCF-AABF-29D8326193C9}"/>
+              </a:ext>
+            </a:extLst>
+          </p:cNvPr>
+          <p:cNvSpPr/>
+          <p:nvPr/>
+        </p:nvSpPr>
+        <p:spPr>
+          <a:xfrm>
+            <a:off x="3757723" y="1589964"/>
+            <a:ext cx="3600000" cy="900000"/>
+          </a:xfrm>
+          <a:prstGeom prst="rect">
+            <a:avLst/>
+          </a:prstGeom>
+          <a:solidFill>
+            <a:srgbClr val="92D050"/>
+          </a:solidFill>
+          <a:ln>
+            <a:noFill/>
+          </a:ln>
+        </p:spPr>
+        <p:style>
+          <a:lnRef idx="2">
+            <a:schemeClr val="accent1">
+              <a:shade val="15000"/>
+            </a:schemeClr>
+          </a:lnRef>
+          <a:fillRef idx="1">
+            <a:schemeClr val="accent1"/>
+          </a:fillRef>
+          <a:effectRef idx="0">
+            <a:schemeClr val="accent1"/>
+          </a:effectRef>
+          <a:fontRef idx="minor">
+            <a:schemeClr val="lt1"/>
+          </a:fontRef>
+        </p:style>
+        <p:txBody>
+          <a:bodyPr rtlCol="0" anchor="b" anchorCtr="0"/>
+          <a:lstStyle/>
+          <a:p>
+            <a:r>
+              <a:rPr lang="en-US" altLang="zh-CN" sz="1200">
+                <a:latin typeface="Poppins" panose="00000500000000000000" pitchFamily="2" charset="0"/>
+                <a:cs typeface="Poppins" panose="00000500000000000000" pitchFamily="2" charset="0"/>
+              </a:rPr>
+              <a:t>start</a:t>
+            </a:r>
+            <a:endParaRPr lang="zh-CN" altLang="en-US" sz="1200">
+              <a:latin typeface="Poppins" panose="00000500000000000000" pitchFamily="2" charset="0"/>
+              <a:cs typeface="Poppins" panose="00000500000000000000" pitchFamily="2" charset="0"/>
+            </a:endParaRPr>
+          </a:p>
+        </p:txBody>
+      </p:sp>
+      <p:sp>
+        <p:nvSpPr>
+          <p:cNvPr id="4" name="Rectangle 3">
+            <a:extLst>
+              <a:ext uri="{FF2B5EF4-FFF2-40B4-BE49-F238E27FC236}">
+                <a16:creationId xmlns:a16="http://schemas.microsoft.com/office/drawing/2014/main" id="{DD00528E-40A9-8D7F-7992-8A0D03F1FC6B}"/>
+              </a:ext>
+            </a:extLst>
+          </p:cNvPr>
+          <p:cNvSpPr/>
+          <p:nvPr/>
+        </p:nvSpPr>
+        <p:spPr>
+          <a:xfrm>
+            <a:off x="3757723" y="3029964"/>
+            <a:ext cx="3600000" cy="360000"/>
+          </a:xfrm>
+          <a:prstGeom prst="rect">
+            <a:avLst/>
+          </a:prstGeom>
+          <a:solidFill>
+            <a:srgbClr val="92D050"/>
+          </a:solidFill>
+          <a:ln>
+            <a:noFill/>
+          </a:ln>
+        </p:spPr>
+        <p:style>
+          <a:lnRef idx="2">
+            <a:schemeClr val="accent1">
+              <a:shade val="15000"/>
+            </a:schemeClr>
+          </a:lnRef>
+          <a:fillRef idx="1">
+            <a:schemeClr val="accent1"/>
+          </a:fillRef>
+          <a:effectRef idx="0">
+            <a:schemeClr val="accent1"/>
+          </a:effectRef>
+          <a:fontRef idx="minor">
+            <a:schemeClr val="lt1"/>
+          </a:fontRef>
+        </p:style>
+        <p:txBody>
+          <a:bodyPr rtlCol="0" anchor="t" anchorCtr="0"/>
+          <a:lstStyle/>
+          <a:p>
+            <a:r>
+              <a:rPr lang="en-US" altLang="zh-CN" sz="1200">
+                <a:latin typeface="Poppins" panose="00000500000000000000" pitchFamily="2" charset="0"/>
+                <a:cs typeface="Poppins" panose="00000500000000000000" pitchFamily="2" charset="0"/>
+              </a:rPr>
+              <a:t>end</a:t>
+            </a:r>
+            <a:endParaRPr lang="zh-CN" altLang="en-US" sz="1200">
+              <a:latin typeface="Poppins" panose="00000500000000000000" pitchFamily="2" charset="0"/>
+              <a:cs typeface="Poppins" panose="00000500000000000000" pitchFamily="2" charset="0"/>
+            </a:endParaRPr>
+          </a:p>
+        </p:txBody>
+      </p:sp>
+      <p:sp>
+        <p:nvSpPr>
+          <p:cNvPr id="5" name="文本框 4">
+            <a:extLst>
+              <a:ext uri="{FF2B5EF4-FFF2-40B4-BE49-F238E27FC236}">
+                <a16:creationId xmlns:a16="http://schemas.microsoft.com/office/drawing/2014/main" id="{1168FFE8-572C-8F4A-4B0C-2CDAEEE869B6}"/>
+              </a:ext>
+            </a:extLst>
+          </p:cNvPr>
+          <p:cNvSpPr txBox="1"/>
+          <p:nvPr/>
+        </p:nvSpPr>
+        <p:spPr>
+          <a:xfrm>
+            <a:off x="4991100" y="2575298"/>
+            <a:ext cx="1592103" cy="307777"/>
+          </a:xfrm>
+          <a:prstGeom prst="rect">
+            <a:avLst/>
+          </a:prstGeom>
+          <a:noFill/>
+        </p:spPr>
+        <p:txBody>
+          <a:bodyPr wrap="none" rtlCol="0">
+            <a:spAutoFit/>
+          </a:bodyPr>
+          <a:lstStyle/>
+          <a:p>
+            <a:r>
+              <a:rPr lang="en-US" altLang="zh-CN" sz="1400">
+                <a:latin typeface="Poppins" panose="00000500000000000000" pitchFamily="2" charset="0"/>
+                <a:cs typeface="Poppins" panose="00000500000000000000" pitchFamily="2" charset="0"/>
+              </a:rPr>
+              <a:t>Animation Zone</a:t>
+            </a:r>
+            <a:endParaRPr lang="zh-CN" altLang="en-US" sz="1400">
+              <a:latin typeface="Poppins" panose="00000500000000000000" pitchFamily="2" charset="0"/>
+              <a:cs typeface="Poppins" panose="00000500000000000000" pitchFamily="2" charset="0"/>
+            </a:endParaRPr>
+          </a:p>
+        </p:txBody>
+      </p:sp>
+      <p:cxnSp>
+        <p:nvCxnSpPr>
+          <p:cNvPr id="7" name="Straight Arrow Connector 5">
+            <a:extLst>
+              <a:ext uri="{FF2B5EF4-FFF2-40B4-BE49-F238E27FC236}">
+                <a16:creationId xmlns:a16="http://schemas.microsoft.com/office/drawing/2014/main" id="{974D8CA4-5773-A2C8-7760-C668032AB677}"/>
+              </a:ext>
+            </a:extLst>
+          </p:cNvPr>
+          <p:cNvCxnSpPr>
+            <a:cxnSpLocks/>
+          </p:cNvCxnSpPr>
+          <p:nvPr/>
+        </p:nvCxnSpPr>
+        <p:spPr>
+          <a:xfrm>
+            <a:off x="4297473" y="1589964"/>
+            <a:ext cx="0" cy="900000"/>
+          </a:xfrm>
+          <a:prstGeom prst="straightConnector1">
+            <a:avLst/>
+          </a:prstGeom>
+          <a:ln>
+            <a:solidFill>
+              <a:schemeClr val="bg1"/>
+            </a:solidFill>
+            <a:tailEnd type="triangle"/>
+          </a:ln>
+        </p:spPr>
+        <p:style>
+          <a:lnRef idx="1">
+            <a:schemeClr val="accent1"/>
+          </a:lnRef>
+          <a:fillRef idx="0">
+            <a:schemeClr val="accent1"/>
+          </a:fillRef>
+          <a:effectRef idx="0">
+            <a:schemeClr val="accent1"/>
+          </a:effectRef>
+          <a:fontRef idx="minor">
+            <a:schemeClr val="tx1"/>
+          </a:fontRef>
+        </p:style>
+      </p:cxnSp>
+      <p:cxnSp>
+        <p:nvCxnSpPr>
+          <p:cNvPr id="9" name="Straight Arrow Connector 7">
+            <a:extLst>
+              <a:ext uri="{FF2B5EF4-FFF2-40B4-BE49-F238E27FC236}">
+                <a16:creationId xmlns:a16="http://schemas.microsoft.com/office/drawing/2014/main" id="{8E99497E-3A18-FE20-0D3E-38950FC6DD0B}"/>
+              </a:ext>
+            </a:extLst>
+          </p:cNvPr>
+          <p:cNvCxnSpPr>
+            <a:cxnSpLocks/>
+          </p:cNvCxnSpPr>
+          <p:nvPr/>
+        </p:nvCxnSpPr>
+        <p:spPr>
+          <a:xfrm flipV="1">
+            <a:off x="4297473" y="3029964"/>
+            <a:ext cx="0" cy="360000"/>
+          </a:xfrm>
+          <a:prstGeom prst="straightConnector1">
+            <a:avLst/>
+          </a:prstGeom>
+          <a:ln>
+            <a:solidFill>
+              <a:schemeClr val="bg1"/>
+            </a:solidFill>
+            <a:tailEnd type="triangle"/>
+          </a:ln>
+        </p:spPr>
+        <p:style>
+          <a:lnRef idx="1">
+            <a:schemeClr val="accent1"/>
+          </a:lnRef>
+          <a:fillRef idx="0">
+            <a:schemeClr val="accent1"/>
+          </a:fillRef>
+          <a:effectRef idx="0">
+            <a:schemeClr val="accent1"/>
+          </a:effectRef>
+          <a:fontRef idx="minor">
+            <a:schemeClr val="tx1"/>
+          </a:fontRef>
+        </p:style>
+      </p:cxnSp>
+      <p:sp>
+        <p:nvSpPr>
+          <p:cNvPr id="10" name="文本框 9">
+            <a:extLst>
+              <a:ext uri="{FF2B5EF4-FFF2-40B4-BE49-F238E27FC236}">
+                <a16:creationId xmlns:a16="http://schemas.microsoft.com/office/drawing/2014/main" id="{DA858028-96BD-C8FB-F9FA-D1B94A3ACF82}"/>
+              </a:ext>
+            </a:extLst>
+          </p:cNvPr>
+          <p:cNvSpPr txBox="1"/>
+          <p:nvPr/>
+        </p:nvSpPr>
+        <p:spPr>
+          <a:xfrm>
+            <a:off x="4297473" y="2212965"/>
+            <a:ext cx="474810" cy="276999"/>
+          </a:xfrm>
+          <a:prstGeom prst="rect">
+            <a:avLst/>
+          </a:prstGeom>
+          <a:noFill/>
+        </p:spPr>
+        <p:txBody>
+          <a:bodyPr wrap="none" rtlCol="0">
+            <a:spAutoFit/>
+          </a:bodyPr>
+          <a:lstStyle/>
+          <a:p>
+            <a:r>
+              <a:rPr lang="en-US" altLang="zh-CN" sz="1200">
+                <a:solidFill>
+                  <a:schemeClr val="bg1"/>
+                </a:solidFill>
+                <a:latin typeface="Poppins" panose="00000500000000000000" pitchFamily="2" charset="0"/>
+                <a:cs typeface="Poppins" panose="00000500000000000000" pitchFamily="2" charset="0"/>
+              </a:rPr>
+              <a:t>50%</a:t>
+            </a:r>
+            <a:endParaRPr lang="zh-CN" altLang="en-US" sz="1200">
+              <a:solidFill>
+                <a:schemeClr val="bg1"/>
+              </a:solidFill>
+              <a:latin typeface="Poppins" panose="00000500000000000000" pitchFamily="2" charset="0"/>
+              <a:cs typeface="Poppins" panose="00000500000000000000" pitchFamily="2" charset="0"/>
+            </a:endParaRPr>
+          </a:p>
+        </p:txBody>
+      </p:sp>
+      <p:sp>
+        <p:nvSpPr>
+          <p:cNvPr id="11" name="文本框 10">
+            <a:extLst>
+              <a:ext uri="{FF2B5EF4-FFF2-40B4-BE49-F238E27FC236}">
+                <a16:creationId xmlns:a16="http://schemas.microsoft.com/office/drawing/2014/main" id="{0D1B1507-C034-E622-893C-D7A632BF8E33}"/>
+              </a:ext>
+            </a:extLst>
+          </p:cNvPr>
+          <p:cNvSpPr txBox="1"/>
+          <p:nvPr/>
+        </p:nvSpPr>
+        <p:spPr>
+          <a:xfrm>
+            <a:off x="4297473" y="3029964"/>
+            <a:ext cx="425116" cy="276999"/>
+          </a:xfrm>
+          <a:prstGeom prst="rect">
+            <a:avLst/>
+          </a:prstGeom>
+          <a:noFill/>
+        </p:spPr>
+        <p:txBody>
+          <a:bodyPr wrap="none" rtlCol="0">
+            <a:spAutoFit/>
+          </a:bodyPr>
+          <a:lstStyle/>
+          <a:p>
+            <a:r>
+              <a:rPr lang="en-US" altLang="zh-CN" sz="1200">
+                <a:solidFill>
+                  <a:schemeClr val="bg1"/>
+                </a:solidFill>
+                <a:latin typeface="Poppins" panose="00000500000000000000" pitchFamily="2" charset="0"/>
+                <a:cs typeface="Poppins" panose="00000500000000000000" pitchFamily="2" charset="0"/>
+              </a:rPr>
+              <a:t>10%</a:t>
+            </a:r>
+            <a:endParaRPr lang="zh-CN" altLang="en-US" sz="1200">
+              <a:solidFill>
+                <a:schemeClr val="bg1"/>
+              </a:solidFill>
+              <a:latin typeface="Poppins" panose="00000500000000000000" pitchFamily="2" charset="0"/>
+              <a:cs typeface="Poppins" panose="00000500000000000000" pitchFamily="2" charset="0"/>
+            </a:endParaRPr>
+          </a:p>
+        </p:txBody>
+      </p:sp>
+    </p:spTree>
+    <p:extLst>
+      <p:ext uri="{BB962C8B-B14F-4D97-AF65-F5344CB8AC3E}">
+        <p14:creationId xmlns:p14="http://schemas.microsoft.com/office/powerpoint/2010/main" val="2473040496"/>
       </p:ext>
     </p:extLst>
   </p:cSld>
@@ -18034,452 +17534,6 @@
         <p:cNvPr id="1" name="">
           <a:extLst>
             <a:ext uri="{FF2B5EF4-FFF2-40B4-BE49-F238E27FC236}">
-              <a16:creationId xmlns:a16="http://schemas.microsoft.com/office/drawing/2014/main" id="{CDC8A674-4B20-52FC-4D14-C7C25881D114}"/>
-            </a:ext>
-          </a:extLst>
-        </p:cNvPr>
-        <p:cNvGrpSpPr/>
-        <p:nvPr/>
-      </p:nvGrpSpPr>
-      <p:grpSpPr>
-        <a:xfrm>
-          <a:off x="0" y="0"/>
-          <a:ext cx="0" cy="0"/>
-          <a:chOff x="0" y="0"/>
-          <a:chExt cx="0" cy="0"/>
-        </a:xfrm>
-      </p:grpSpPr>
-      <p:sp>
-        <p:nvSpPr>
-          <p:cNvPr id="2" name="Rectangle 1">
-            <a:extLst>
-              <a:ext uri="{FF2B5EF4-FFF2-40B4-BE49-F238E27FC236}">
-                <a16:creationId xmlns:a16="http://schemas.microsoft.com/office/drawing/2014/main" id="{F22D05D8-3AED-74C1-0CE8-D5D7495EB663}"/>
-              </a:ext>
-            </a:extLst>
-          </p:cNvPr>
-          <p:cNvSpPr/>
-          <p:nvPr/>
-        </p:nvSpPr>
-        <p:spPr>
-          <a:xfrm>
-            <a:off x="3757723" y="1589964"/>
-            <a:ext cx="3600000" cy="1800000"/>
-          </a:xfrm>
-          <a:prstGeom prst="rect">
-            <a:avLst/>
-          </a:prstGeom>
-          <a:solidFill>
-            <a:schemeClr val="bg1">
-              <a:lumMod val="95000"/>
-            </a:schemeClr>
-          </a:solidFill>
-          <a:ln>
-            <a:noFill/>
-          </a:ln>
-        </p:spPr>
-        <p:style>
-          <a:lnRef idx="2">
-            <a:schemeClr val="accent1">
-              <a:shade val="15000"/>
-            </a:schemeClr>
-          </a:lnRef>
-          <a:fillRef idx="1">
-            <a:schemeClr val="accent1"/>
-          </a:fillRef>
-          <a:effectRef idx="0">
-            <a:schemeClr val="accent1"/>
-          </a:effectRef>
-          <a:fontRef idx="minor">
-            <a:schemeClr val="lt1"/>
-          </a:fontRef>
-        </p:style>
-        <p:txBody>
-          <a:bodyPr rtlCol="0" anchor="ctr"/>
-          <a:lstStyle/>
-          <a:p>
-            <a:pPr algn="ctr"/>
-            <a:endParaRPr lang="zh-CN" altLang="en-US" sz="1200">
-              <a:solidFill>
-                <a:schemeClr val="accent6">
-                  <a:lumMod val="75000"/>
-                </a:schemeClr>
-              </a:solidFill>
-              <a:latin typeface="Poppins" panose="00000500000000000000" pitchFamily="2" charset="0"/>
-              <a:cs typeface="Poppins" panose="00000500000000000000" pitchFamily="2" charset="0"/>
-            </a:endParaRPr>
-          </a:p>
-        </p:txBody>
-      </p:sp>
-      <p:sp>
-        <p:nvSpPr>
-          <p:cNvPr id="3" name="Rectangle 2">
-            <a:extLst>
-              <a:ext uri="{FF2B5EF4-FFF2-40B4-BE49-F238E27FC236}">
-                <a16:creationId xmlns:a16="http://schemas.microsoft.com/office/drawing/2014/main" id="{7F930297-9DE3-3DCF-AABF-29D8326193C9}"/>
-              </a:ext>
-            </a:extLst>
-          </p:cNvPr>
-          <p:cNvSpPr/>
-          <p:nvPr/>
-        </p:nvSpPr>
-        <p:spPr>
-          <a:xfrm>
-            <a:off x="3757723" y="1589964"/>
-            <a:ext cx="3600000" cy="900000"/>
-          </a:xfrm>
-          <a:prstGeom prst="rect">
-            <a:avLst/>
-          </a:prstGeom>
-          <a:solidFill>
-            <a:srgbClr val="92D050"/>
-          </a:solidFill>
-          <a:ln>
-            <a:noFill/>
-          </a:ln>
-        </p:spPr>
-        <p:style>
-          <a:lnRef idx="2">
-            <a:schemeClr val="accent1">
-              <a:shade val="15000"/>
-            </a:schemeClr>
-          </a:lnRef>
-          <a:fillRef idx="1">
-            <a:schemeClr val="accent1"/>
-          </a:fillRef>
-          <a:effectRef idx="0">
-            <a:schemeClr val="accent1"/>
-          </a:effectRef>
-          <a:fontRef idx="minor">
-            <a:schemeClr val="lt1"/>
-          </a:fontRef>
-        </p:style>
-        <p:txBody>
-          <a:bodyPr rtlCol="0" anchor="b" anchorCtr="0"/>
-          <a:lstStyle/>
-          <a:p>
-            <a:r>
-              <a:rPr lang="en-US" altLang="zh-CN" sz="1200">
-                <a:latin typeface="Poppins" panose="00000500000000000000" pitchFamily="2" charset="0"/>
-                <a:cs typeface="Poppins" panose="00000500000000000000" pitchFamily="2" charset="0"/>
-              </a:rPr>
-              <a:t>start</a:t>
-            </a:r>
-            <a:endParaRPr lang="zh-CN" altLang="en-US" sz="1200">
-              <a:latin typeface="Poppins" panose="00000500000000000000" pitchFamily="2" charset="0"/>
-              <a:cs typeface="Poppins" panose="00000500000000000000" pitchFamily="2" charset="0"/>
-            </a:endParaRPr>
-          </a:p>
-        </p:txBody>
-      </p:sp>
-      <p:sp>
-        <p:nvSpPr>
-          <p:cNvPr id="4" name="Rectangle 3">
-            <a:extLst>
-              <a:ext uri="{FF2B5EF4-FFF2-40B4-BE49-F238E27FC236}">
-                <a16:creationId xmlns:a16="http://schemas.microsoft.com/office/drawing/2014/main" id="{DD00528E-40A9-8D7F-7992-8A0D03F1FC6B}"/>
-              </a:ext>
-            </a:extLst>
-          </p:cNvPr>
-          <p:cNvSpPr/>
-          <p:nvPr/>
-        </p:nvSpPr>
-        <p:spPr>
-          <a:xfrm>
-            <a:off x="3757723" y="3029964"/>
-            <a:ext cx="3600000" cy="360000"/>
-          </a:xfrm>
-          <a:prstGeom prst="rect">
-            <a:avLst/>
-          </a:prstGeom>
-          <a:solidFill>
-            <a:srgbClr val="92D050"/>
-          </a:solidFill>
-          <a:ln>
-            <a:noFill/>
-          </a:ln>
-        </p:spPr>
-        <p:style>
-          <a:lnRef idx="2">
-            <a:schemeClr val="accent1">
-              <a:shade val="15000"/>
-            </a:schemeClr>
-          </a:lnRef>
-          <a:fillRef idx="1">
-            <a:schemeClr val="accent1"/>
-          </a:fillRef>
-          <a:effectRef idx="0">
-            <a:schemeClr val="accent1"/>
-          </a:effectRef>
-          <a:fontRef idx="minor">
-            <a:schemeClr val="lt1"/>
-          </a:fontRef>
-        </p:style>
-        <p:txBody>
-          <a:bodyPr rtlCol="0" anchor="t" anchorCtr="0"/>
-          <a:lstStyle/>
-          <a:p>
-            <a:r>
-              <a:rPr lang="en-US" altLang="zh-CN" sz="1200">
-                <a:latin typeface="Poppins" panose="00000500000000000000" pitchFamily="2" charset="0"/>
-                <a:cs typeface="Poppins" panose="00000500000000000000" pitchFamily="2" charset="0"/>
-              </a:rPr>
-              <a:t>end</a:t>
-            </a:r>
-            <a:endParaRPr lang="zh-CN" altLang="en-US" sz="1200">
-              <a:latin typeface="Poppins" panose="00000500000000000000" pitchFamily="2" charset="0"/>
-              <a:cs typeface="Poppins" panose="00000500000000000000" pitchFamily="2" charset="0"/>
-            </a:endParaRPr>
-          </a:p>
-        </p:txBody>
-      </p:sp>
-      <p:sp>
-        <p:nvSpPr>
-          <p:cNvPr id="5" name="文本框 4">
-            <a:extLst>
-              <a:ext uri="{FF2B5EF4-FFF2-40B4-BE49-F238E27FC236}">
-                <a16:creationId xmlns:a16="http://schemas.microsoft.com/office/drawing/2014/main" id="{1168FFE8-572C-8F4A-4B0C-2CDAEEE869B6}"/>
-              </a:ext>
-            </a:extLst>
-          </p:cNvPr>
-          <p:cNvSpPr txBox="1"/>
-          <p:nvPr/>
-        </p:nvSpPr>
-        <p:spPr>
-          <a:xfrm>
-            <a:off x="4991100" y="2575298"/>
-            <a:ext cx="1592103" cy="307777"/>
-          </a:xfrm>
-          <a:prstGeom prst="rect">
-            <a:avLst/>
-          </a:prstGeom>
-          <a:noFill/>
-        </p:spPr>
-        <p:txBody>
-          <a:bodyPr wrap="none" rtlCol="0">
-            <a:spAutoFit/>
-          </a:bodyPr>
-          <a:lstStyle/>
-          <a:p>
-            <a:r>
-              <a:rPr lang="en-US" altLang="zh-CN" sz="1400">
-                <a:latin typeface="Poppins" panose="00000500000000000000" pitchFamily="2" charset="0"/>
-                <a:cs typeface="Poppins" panose="00000500000000000000" pitchFamily="2" charset="0"/>
-              </a:rPr>
-              <a:t>Animation Zone</a:t>
-            </a:r>
-            <a:endParaRPr lang="zh-CN" altLang="en-US" sz="1400">
-              <a:latin typeface="Poppins" panose="00000500000000000000" pitchFamily="2" charset="0"/>
-              <a:cs typeface="Poppins" panose="00000500000000000000" pitchFamily="2" charset="0"/>
-            </a:endParaRPr>
-          </a:p>
-        </p:txBody>
-      </p:sp>
-      <p:cxnSp>
-        <p:nvCxnSpPr>
-          <p:cNvPr id="7" name="Straight Arrow Connector 5">
-            <a:extLst>
-              <a:ext uri="{FF2B5EF4-FFF2-40B4-BE49-F238E27FC236}">
-                <a16:creationId xmlns:a16="http://schemas.microsoft.com/office/drawing/2014/main" id="{974D8CA4-5773-A2C8-7760-C668032AB677}"/>
-              </a:ext>
-            </a:extLst>
-          </p:cNvPr>
-          <p:cNvCxnSpPr>
-            <a:cxnSpLocks/>
-          </p:cNvCxnSpPr>
-          <p:nvPr/>
-        </p:nvCxnSpPr>
-        <p:spPr>
-          <a:xfrm>
-            <a:off x="4297473" y="1589964"/>
-            <a:ext cx="0" cy="900000"/>
-          </a:xfrm>
-          <a:prstGeom prst="straightConnector1">
-            <a:avLst/>
-          </a:prstGeom>
-          <a:ln>
-            <a:solidFill>
-              <a:schemeClr val="bg1"/>
-            </a:solidFill>
-            <a:tailEnd type="triangle"/>
-          </a:ln>
-        </p:spPr>
-        <p:style>
-          <a:lnRef idx="1">
-            <a:schemeClr val="accent1"/>
-          </a:lnRef>
-          <a:fillRef idx="0">
-            <a:schemeClr val="accent1"/>
-          </a:fillRef>
-          <a:effectRef idx="0">
-            <a:schemeClr val="accent1"/>
-          </a:effectRef>
-          <a:fontRef idx="minor">
-            <a:schemeClr val="tx1"/>
-          </a:fontRef>
-        </p:style>
-      </p:cxnSp>
-      <p:cxnSp>
-        <p:nvCxnSpPr>
-          <p:cNvPr id="9" name="Straight Arrow Connector 7">
-            <a:extLst>
-              <a:ext uri="{FF2B5EF4-FFF2-40B4-BE49-F238E27FC236}">
-                <a16:creationId xmlns:a16="http://schemas.microsoft.com/office/drawing/2014/main" id="{8E99497E-3A18-FE20-0D3E-38950FC6DD0B}"/>
-              </a:ext>
-            </a:extLst>
-          </p:cNvPr>
-          <p:cNvCxnSpPr>
-            <a:cxnSpLocks/>
-          </p:cNvCxnSpPr>
-          <p:nvPr/>
-        </p:nvCxnSpPr>
-        <p:spPr>
-          <a:xfrm flipV="1">
-            <a:off x="4297473" y="3029964"/>
-            <a:ext cx="0" cy="360000"/>
-          </a:xfrm>
-          <a:prstGeom prst="straightConnector1">
-            <a:avLst/>
-          </a:prstGeom>
-          <a:ln>
-            <a:solidFill>
-              <a:schemeClr val="bg1"/>
-            </a:solidFill>
-            <a:tailEnd type="triangle"/>
-          </a:ln>
-        </p:spPr>
-        <p:style>
-          <a:lnRef idx="1">
-            <a:schemeClr val="accent1"/>
-          </a:lnRef>
-          <a:fillRef idx="0">
-            <a:schemeClr val="accent1"/>
-          </a:fillRef>
-          <a:effectRef idx="0">
-            <a:schemeClr val="accent1"/>
-          </a:effectRef>
-          <a:fontRef idx="minor">
-            <a:schemeClr val="tx1"/>
-          </a:fontRef>
-        </p:style>
-      </p:cxnSp>
-      <p:sp>
-        <p:nvSpPr>
-          <p:cNvPr id="10" name="文本框 9">
-            <a:extLst>
-              <a:ext uri="{FF2B5EF4-FFF2-40B4-BE49-F238E27FC236}">
-                <a16:creationId xmlns:a16="http://schemas.microsoft.com/office/drawing/2014/main" id="{DA858028-96BD-C8FB-F9FA-D1B94A3ACF82}"/>
-              </a:ext>
-            </a:extLst>
-          </p:cNvPr>
-          <p:cNvSpPr txBox="1"/>
-          <p:nvPr/>
-        </p:nvSpPr>
-        <p:spPr>
-          <a:xfrm>
-            <a:off x="4297473" y="2212965"/>
-            <a:ext cx="474810" cy="276999"/>
-          </a:xfrm>
-          <a:prstGeom prst="rect">
-            <a:avLst/>
-          </a:prstGeom>
-          <a:noFill/>
-        </p:spPr>
-        <p:txBody>
-          <a:bodyPr wrap="none" rtlCol="0">
-            <a:spAutoFit/>
-          </a:bodyPr>
-          <a:lstStyle/>
-          <a:p>
-            <a:r>
-              <a:rPr lang="en-US" altLang="zh-CN" sz="1200">
-                <a:solidFill>
-                  <a:schemeClr val="bg1"/>
-                </a:solidFill>
-                <a:latin typeface="Poppins" panose="00000500000000000000" pitchFamily="2" charset="0"/>
-                <a:cs typeface="Poppins" panose="00000500000000000000" pitchFamily="2" charset="0"/>
-              </a:rPr>
-              <a:t>50%</a:t>
-            </a:r>
-            <a:endParaRPr lang="zh-CN" altLang="en-US" sz="1200">
-              <a:solidFill>
-                <a:schemeClr val="bg1"/>
-              </a:solidFill>
-              <a:latin typeface="Poppins" panose="00000500000000000000" pitchFamily="2" charset="0"/>
-              <a:cs typeface="Poppins" panose="00000500000000000000" pitchFamily="2" charset="0"/>
-            </a:endParaRPr>
-          </a:p>
-        </p:txBody>
-      </p:sp>
-      <p:sp>
-        <p:nvSpPr>
-          <p:cNvPr id="11" name="文本框 10">
-            <a:extLst>
-              <a:ext uri="{FF2B5EF4-FFF2-40B4-BE49-F238E27FC236}">
-                <a16:creationId xmlns:a16="http://schemas.microsoft.com/office/drawing/2014/main" id="{0D1B1507-C034-E622-893C-D7A632BF8E33}"/>
-              </a:ext>
-            </a:extLst>
-          </p:cNvPr>
-          <p:cNvSpPr txBox="1"/>
-          <p:nvPr/>
-        </p:nvSpPr>
-        <p:spPr>
-          <a:xfrm>
-            <a:off x="4297473" y="3029964"/>
-            <a:ext cx="425116" cy="276999"/>
-          </a:xfrm>
-          <a:prstGeom prst="rect">
-            <a:avLst/>
-          </a:prstGeom>
-          <a:noFill/>
-        </p:spPr>
-        <p:txBody>
-          <a:bodyPr wrap="none" rtlCol="0">
-            <a:spAutoFit/>
-          </a:bodyPr>
-          <a:lstStyle/>
-          <a:p>
-            <a:r>
-              <a:rPr lang="en-US" altLang="zh-CN" sz="1200">
-                <a:solidFill>
-                  <a:schemeClr val="bg1"/>
-                </a:solidFill>
-                <a:latin typeface="Poppins" panose="00000500000000000000" pitchFamily="2" charset="0"/>
-                <a:cs typeface="Poppins" panose="00000500000000000000" pitchFamily="2" charset="0"/>
-              </a:rPr>
-              <a:t>10%</a:t>
-            </a:r>
-            <a:endParaRPr lang="zh-CN" altLang="en-US" sz="1200">
-              <a:solidFill>
-                <a:schemeClr val="bg1"/>
-              </a:solidFill>
-              <a:latin typeface="Poppins" panose="00000500000000000000" pitchFamily="2" charset="0"/>
-              <a:cs typeface="Poppins" panose="00000500000000000000" pitchFamily="2" charset="0"/>
-            </a:endParaRPr>
-          </a:p>
-        </p:txBody>
-      </p:sp>
-    </p:spTree>
-    <p:extLst>
-      <p:ext uri="{BB962C8B-B14F-4D97-AF65-F5344CB8AC3E}">
-        <p14:creationId xmlns:p14="http://schemas.microsoft.com/office/powerpoint/2010/main" val="2473040496"/>
-      </p:ext>
-    </p:extLst>
-  </p:cSld>
-  <p:clrMapOvr>
-    <a:masterClrMapping/>
-  </p:clrMapOvr>
-</p:sld>
-</file>
-
-<file path=ppt/slides/slide21.xml><?xml version="1.0" encoding="utf-8"?>
-<p:sld xmlns:a="http://schemas.openxmlformats.org/drawingml/2006/main" xmlns:r="http://schemas.openxmlformats.org/officeDocument/2006/relationships" xmlns:p="http://schemas.openxmlformats.org/presentationml/2006/main">
-  <p:cSld>
-    <p:spTree>
-      <p:nvGrpSpPr>
-        <p:cNvPr id="1" name="">
-          <a:extLst>
-            <a:ext uri="{FF2B5EF4-FFF2-40B4-BE49-F238E27FC236}">
               <a16:creationId xmlns:a16="http://schemas.microsoft.com/office/drawing/2014/main" id="{4B6AC346-4E87-BA38-8EDB-AEACB42C1BE9}"/>
             </a:ext>
           </a:extLst>
@@ -18918,7 +17972,7 @@
 </p:sld>
 </file>
 
-<file path=ppt/slides/slide22.xml><?xml version="1.0" encoding="utf-8"?>
+<file path=ppt/slides/slide21.xml><?xml version="1.0" encoding="utf-8"?>
 <p:sld xmlns:a="http://schemas.openxmlformats.org/drawingml/2006/main" xmlns:r="http://schemas.openxmlformats.org/officeDocument/2006/relationships" xmlns:p="http://schemas.openxmlformats.org/presentationml/2006/main">
   <p:cSld>
     <p:spTree>
@@ -19364,7 +18418,7 @@
 </p:sld>
 </file>
 
-<file path=ppt/slides/slide23.xml><?xml version="1.0" encoding="utf-8"?>
+<file path=ppt/slides/slide22.xml><?xml version="1.0" encoding="utf-8"?>
 <p:sld xmlns:a="http://schemas.openxmlformats.org/drawingml/2006/main" xmlns:r="http://schemas.openxmlformats.org/officeDocument/2006/relationships" xmlns:p="http://schemas.openxmlformats.org/presentationml/2006/main">
   <p:cSld>
     <p:spTree>
@@ -19810,7 +18864,7 @@
 </p:sld>
 </file>
 
-<file path=ppt/slides/slide24.xml><?xml version="1.0" encoding="utf-8"?>
+<file path=ppt/slides/slide23.xml><?xml version="1.0" encoding="utf-8"?>
 <p:sld xmlns:a="http://schemas.openxmlformats.org/drawingml/2006/main" xmlns:r="http://schemas.openxmlformats.org/officeDocument/2006/relationships" xmlns:p="http://schemas.openxmlformats.org/presentationml/2006/main">
   <p:cSld>
     <p:spTree>
@@ -21053,7 +20107,7 @@
 </p:sld>
 </file>
 
-<file path=ppt/slides/slide25.xml><?xml version="1.0" encoding="utf-8"?>
+<file path=ppt/slides/slide24.xml><?xml version="1.0" encoding="utf-8"?>
 <p:sld xmlns:a="http://schemas.openxmlformats.org/drawingml/2006/main" xmlns:r="http://schemas.openxmlformats.org/officeDocument/2006/relationships" xmlns:p="http://schemas.openxmlformats.org/presentationml/2006/main">
   <p:cSld>
     <p:spTree>
@@ -22726,7 +21780,7 @@
 </p:sld>
 </file>
 
-<file path=ppt/slides/slide26.xml><?xml version="1.0" encoding="utf-8"?>
+<file path=ppt/slides/slide25.xml><?xml version="1.0" encoding="utf-8"?>
 <p:sld xmlns:a="http://schemas.openxmlformats.org/drawingml/2006/main" xmlns:r="http://schemas.openxmlformats.org/officeDocument/2006/relationships" xmlns:p="http://schemas.openxmlformats.org/presentationml/2006/main">
   <p:cSld>
     <p:spTree>
@@ -23978,7 +23032,7 @@
 </p:sld>
 </file>
 
-<file path=ppt/slides/slide27.xml><?xml version="1.0" encoding="utf-8"?>
+<file path=ppt/slides/slide26.xml><?xml version="1.0" encoding="utf-8"?>
 <p:sld xmlns:a="http://schemas.openxmlformats.org/drawingml/2006/main" xmlns:r="http://schemas.openxmlformats.org/officeDocument/2006/relationships" xmlns:p="http://schemas.openxmlformats.org/presentationml/2006/main">
   <p:cSld>
     <p:spTree>
@@ -25101,7 +24155,7 @@
 </p:sld>
 </file>
 
-<file path=ppt/slides/slide28.xml><?xml version="1.0" encoding="utf-8"?>
+<file path=ppt/slides/slide27.xml><?xml version="1.0" encoding="utf-8"?>
 <p:sld xmlns:a="http://schemas.openxmlformats.org/drawingml/2006/main" xmlns:r="http://schemas.openxmlformats.org/officeDocument/2006/relationships" xmlns:p="http://schemas.openxmlformats.org/presentationml/2006/main">
   <p:cSld>
     <p:spTree>
@@ -26464,7 +25518,7 @@
 </p:sld>
 </file>
 
-<file path=ppt/slides/slide29.xml><?xml version="1.0" encoding="utf-8"?>
+<file path=ppt/slides/slide28.xml><?xml version="1.0" encoding="utf-8"?>
 <p:sld xmlns:a="http://schemas.openxmlformats.org/drawingml/2006/main" xmlns:r="http://schemas.openxmlformats.org/officeDocument/2006/relationships" xmlns:p="http://schemas.openxmlformats.org/presentationml/2006/main">
   <p:cSld>
     <p:spTree>
@@ -27831,6 +26885,1203 @@
     <p:extLst>
       <p:ext uri="{BB962C8B-B14F-4D97-AF65-F5344CB8AC3E}">
         <p14:creationId xmlns:p14="http://schemas.microsoft.com/office/powerpoint/2010/main" val="2316391152"/>
+      </p:ext>
+    </p:extLst>
+  </p:cSld>
+  <p:clrMapOvr>
+    <a:masterClrMapping/>
+  </p:clrMapOvr>
+</p:sld>
+</file>
+
+<file path=ppt/slides/slide29.xml><?xml version="1.0" encoding="utf-8"?>
+<p:sld xmlns:a="http://schemas.openxmlformats.org/drawingml/2006/main" xmlns:r="http://schemas.openxmlformats.org/officeDocument/2006/relationships" xmlns:p="http://schemas.openxmlformats.org/presentationml/2006/main">
+  <p:cSld>
+    <p:spTree>
+      <p:nvGrpSpPr>
+        <p:cNvPr id="1" name=""/>
+        <p:cNvGrpSpPr/>
+        <p:nvPr/>
+      </p:nvGrpSpPr>
+      <p:grpSpPr>
+        <a:xfrm>
+          <a:off x="0" y="0"/>
+          <a:ext cx="0" cy="0"/>
+          <a:chOff x="0" y="0"/>
+          <a:chExt cx="0" cy="0"/>
+        </a:xfrm>
+      </p:grpSpPr>
+      <p:sp>
+        <p:nvSpPr>
+          <p:cNvPr id="2" name="矩形: 圆角 1">
+            <a:extLst>
+              <a:ext uri="{FF2B5EF4-FFF2-40B4-BE49-F238E27FC236}">
+                <a16:creationId xmlns:a16="http://schemas.microsoft.com/office/drawing/2014/main" id="{7CE4D4CF-0466-1DC3-08B4-9C28D4A64E27}"/>
+              </a:ext>
+            </a:extLst>
+          </p:cNvPr>
+          <p:cNvSpPr/>
+          <p:nvPr/>
+        </p:nvSpPr>
+        <p:spPr>
+          <a:xfrm>
+            <a:off x="2622449" y="3094613"/>
+            <a:ext cx="1440000" cy="360000"/>
+          </a:xfrm>
+          <a:prstGeom prst="roundRect">
+            <a:avLst/>
+          </a:prstGeom>
+          <a:solidFill>
+            <a:schemeClr val="tx1"/>
+          </a:solidFill>
+          <a:ln w="12700">
+            <a:noFill/>
+          </a:ln>
+        </p:spPr>
+        <p:style>
+          <a:lnRef idx="2">
+            <a:schemeClr val="accent1">
+              <a:shade val="15000"/>
+            </a:schemeClr>
+          </a:lnRef>
+          <a:fillRef idx="1">
+            <a:schemeClr val="accent1"/>
+          </a:fillRef>
+          <a:effectRef idx="0">
+            <a:schemeClr val="accent1"/>
+          </a:effectRef>
+          <a:fontRef idx="minor">
+            <a:schemeClr val="lt1"/>
+          </a:fontRef>
+        </p:style>
+        <p:txBody>
+          <a:bodyPr rtlCol="0" anchor="ctr"/>
+          <a:lstStyle/>
+          <a:p>
+            <a:pPr algn="ctr"/>
+            <a:r>
+              <a:rPr lang="en-US" altLang="zh-CN" sz="1200">
+                <a:latin typeface="Quicksand Light" panose="00000400000000000000" pitchFamily="2" charset="0"/>
+                <a:ea typeface="仿宋" panose="02010609060101010101" pitchFamily="49" charset="-122"/>
+              </a:rPr>
+              <a:t>&lt;scroll-view&gt;</a:t>
+            </a:r>
+            <a:endParaRPr lang="zh-CN" altLang="en-US" sz="1200">
+              <a:latin typeface="Quicksand Light" panose="00000400000000000000" pitchFamily="2" charset="0"/>
+              <a:ea typeface="仿宋" panose="02010609060101010101" pitchFamily="49" charset="-122"/>
+            </a:endParaRPr>
+          </a:p>
+        </p:txBody>
+      </p:sp>
+      <p:sp>
+        <p:nvSpPr>
+          <p:cNvPr id="3" name="矩形: 圆角 2">
+            <a:extLst>
+              <a:ext uri="{FF2B5EF4-FFF2-40B4-BE49-F238E27FC236}">
+                <a16:creationId xmlns:a16="http://schemas.microsoft.com/office/drawing/2014/main" id="{6EE8E41B-FB18-64FF-0539-7D9127F8FC67}"/>
+              </a:ext>
+            </a:extLst>
+          </p:cNvPr>
+          <p:cNvSpPr/>
+          <p:nvPr/>
+        </p:nvSpPr>
+        <p:spPr>
+          <a:xfrm>
+            <a:off x="5806701" y="2901283"/>
+            <a:ext cx="1620000" cy="360000"/>
+          </a:xfrm>
+          <a:prstGeom prst="roundRect">
+            <a:avLst/>
+          </a:prstGeom>
+          <a:noFill/>
+          <a:ln w="12700">
+            <a:solidFill>
+              <a:srgbClr val="EB3B5A"/>
+            </a:solidFill>
+            <a:prstDash val="dash"/>
+          </a:ln>
+        </p:spPr>
+        <p:style>
+          <a:lnRef idx="2">
+            <a:schemeClr val="accent1">
+              <a:shade val="15000"/>
+            </a:schemeClr>
+          </a:lnRef>
+          <a:fillRef idx="1">
+            <a:schemeClr val="accent1"/>
+          </a:fillRef>
+          <a:effectRef idx="0">
+            <a:schemeClr val="accent1"/>
+          </a:effectRef>
+          <a:fontRef idx="minor">
+            <a:schemeClr val="lt1"/>
+          </a:fontRef>
+        </p:style>
+        <p:txBody>
+          <a:bodyPr rtlCol="0" anchor="ctr"/>
+          <a:lstStyle/>
+          <a:p>
+            <a:pPr algn="ctr"/>
+            <a:r>
+              <a:rPr lang="zh-CN" altLang="en-US" sz="1200">
+                <a:solidFill>
+                  <a:sysClr val="windowText" lastClr="000000"/>
+                </a:solidFill>
+                <a:latin typeface="Quicksand Light" panose="00000400000000000000" pitchFamily="2" charset="0"/>
+                <a:ea typeface="仿宋" panose="02010609060101010101" pitchFamily="49" charset="-122"/>
+              </a:rPr>
+              <a:t>行内 </a:t>
+            </a:r>
+            <a:r>
+              <a:rPr lang="en-US" altLang="zh-CN" sz="1200">
+                <a:solidFill>
+                  <a:sysClr val="windowText" lastClr="000000"/>
+                </a:solidFill>
+                <a:latin typeface="Quicksand Light" panose="00000400000000000000" pitchFamily="2" charset="0"/>
+                <a:ea typeface="仿宋" panose="02010609060101010101" pitchFamily="49" charset="-122"/>
+              </a:rPr>
+              <a:t>inline</a:t>
+            </a:r>
+            <a:endParaRPr lang="zh-CN" altLang="en-US" sz="1200">
+              <a:solidFill>
+                <a:sysClr val="windowText" lastClr="000000"/>
+              </a:solidFill>
+              <a:latin typeface="Quicksand Light" panose="00000400000000000000" pitchFamily="2" charset="0"/>
+              <a:ea typeface="仿宋" panose="02010609060101010101" pitchFamily="49" charset="-122"/>
+            </a:endParaRPr>
+          </a:p>
+        </p:txBody>
+      </p:sp>
+      <p:sp>
+        <p:nvSpPr>
+          <p:cNvPr id="8" name="矩形: 圆角 7">
+            <a:extLst>
+              <a:ext uri="{FF2B5EF4-FFF2-40B4-BE49-F238E27FC236}">
+                <a16:creationId xmlns:a16="http://schemas.microsoft.com/office/drawing/2014/main" id="{06699B4A-F636-A7C1-FB1E-69E3110ACB30}"/>
+              </a:ext>
+            </a:extLst>
+          </p:cNvPr>
+          <p:cNvSpPr/>
+          <p:nvPr/>
+        </p:nvSpPr>
+        <p:spPr>
+          <a:xfrm>
+            <a:off x="4394575" y="4241749"/>
+            <a:ext cx="1080000" cy="360000"/>
+          </a:xfrm>
+          <a:prstGeom prst="roundRect">
+            <a:avLst/>
+          </a:prstGeom>
+          <a:solidFill>
+            <a:srgbClr val="3DC1D3"/>
+          </a:solidFill>
+          <a:ln w="12700">
+            <a:noFill/>
+          </a:ln>
+        </p:spPr>
+        <p:style>
+          <a:lnRef idx="2">
+            <a:schemeClr val="accent1">
+              <a:shade val="15000"/>
+            </a:schemeClr>
+          </a:lnRef>
+          <a:fillRef idx="1">
+            <a:schemeClr val="accent1"/>
+          </a:fillRef>
+          <a:effectRef idx="0">
+            <a:schemeClr val="accent1"/>
+          </a:effectRef>
+          <a:fontRef idx="minor">
+            <a:schemeClr val="lt1"/>
+          </a:fontRef>
+        </p:style>
+        <p:txBody>
+          <a:bodyPr rtlCol="0" anchor="ctr"/>
+          <a:lstStyle/>
+          <a:p>
+            <a:pPr algn="ctr"/>
+            <a:r>
+              <a:rPr lang="zh-CN" altLang="en-US" sz="1200">
+                <a:latin typeface="Quicksand Light" panose="00000400000000000000" pitchFamily="2" charset="0"/>
+                <a:ea typeface="仿宋" panose="02010609060101010101" pitchFamily="49" charset="-122"/>
+              </a:rPr>
+              <a:t>垂直滚动</a:t>
+            </a:r>
+          </a:p>
+        </p:txBody>
+      </p:sp>
+      <p:sp>
+        <p:nvSpPr>
+          <p:cNvPr id="9" name="矩形: 圆角 8">
+            <a:extLst>
+              <a:ext uri="{FF2B5EF4-FFF2-40B4-BE49-F238E27FC236}">
+                <a16:creationId xmlns:a16="http://schemas.microsoft.com/office/drawing/2014/main" id="{63EC0026-3C9E-C410-1B1D-25D54ACB2F10}"/>
+              </a:ext>
+            </a:extLst>
+          </p:cNvPr>
+          <p:cNvSpPr/>
+          <p:nvPr/>
+        </p:nvSpPr>
+        <p:spPr>
+          <a:xfrm>
+            <a:off x="4394575" y="3094613"/>
+            <a:ext cx="1080000" cy="360000"/>
+          </a:xfrm>
+          <a:prstGeom prst="roundRect">
+            <a:avLst/>
+          </a:prstGeom>
+          <a:solidFill>
+            <a:srgbClr val="EB3B5A"/>
+          </a:solidFill>
+          <a:ln w="12700">
+            <a:noFill/>
+          </a:ln>
+        </p:spPr>
+        <p:style>
+          <a:lnRef idx="2">
+            <a:schemeClr val="accent1">
+              <a:shade val="15000"/>
+            </a:schemeClr>
+          </a:lnRef>
+          <a:fillRef idx="1">
+            <a:schemeClr val="accent1"/>
+          </a:fillRef>
+          <a:effectRef idx="0">
+            <a:schemeClr val="accent1"/>
+          </a:effectRef>
+          <a:fontRef idx="minor">
+            <a:schemeClr val="lt1"/>
+          </a:fontRef>
+        </p:style>
+        <p:txBody>
+          <a:bodyPr rtlCol="0" anchor="ctr"/>
+          <a:lstStyle/>
+          <a:p>
+            <a:pPr algn="ctr"/>
+            <a:r>
+              <a:rPr lang="zh-CN" altLang="en-US" sz="1200" dirty="0">
+                <a:latin typeface="Quicksand Light" panose="00000400000000000000" pitchFamily="2" charset="0"/>
+                <a:ea typeface="仿宋" panose="02010609060101010101" pitchFamily="49" charset="-122"/>
+              </a:rPr>
+              <a:t>水平滚动</a:t>
+            </a:r>
+          </a:p>
+        </p:txBody>
+      </p:sp>
+      <p:cxnSp>
+        <p:nvCxnSpPr>
+          <p:cNvPr id="10" name="连接符: 曲线 9">
+            <a:extLst>
+              <a:ext uri="{FF2B5EF4-FFF2-40B4-BE49-F238E27FC236}">
+                <a16:creationId xmlns:a16="http://schemas.microsoft.com/office/drawing/2014/main" id="{89376DA1-2871-7B3F-3D7E-34DF204828CA}"/>
+              </a:ext>
+            </a:extLst>
+          </p:cNvPr>
+          <p:cNvCxnSpPr>
+            <a:cxnSpLocks/>
+            <a:stCxn id="9" idx="3"/>
+            <a:endCxn id="17" idx="1"/>
+          </p:cNvCxnSpPr>
+          <p:nvPr/>
+        </p:nvCxnSpPr>
+        <p:spPr>
+          <a:xfrm flipV="1">
+            <a:off x="5474575" y="2104829"/>
+            <a:ext cx="332126" cy="1169784"/>
+          </a:xfrm>
+          <a:prstGeom prst="curvedConnector3">
+            <a:avLst>
+              <a:gd name="adj1" fmla="val 50000"/>
+            </a:avLst>
+          </a:prstGeom>
+          <a:ln>
+            <a:solidFill>
+              <a:srgbClr val="EB3B5A"/>
+            </a:solidFill>
+          </a:ln>
+        </p:spPr>
+        <p:style>
+          <a:lnRef idx="1">
+            <a:schemeClr val="accent1"/>
+          </a:lnRef>
+          <a:fillRef idx="0">
+            <a:schemeClr val="accent1"/>
+          </a:fillRef>
+          <a:effectRef idx="0">
+            <a:schemeClr val="accent1"/>
+          </a:effectRef>
+          <a:fontRef idx="minor">
+            <a:schemeClr val="tx1"/>
+          </a:fontRef>
+        </p:style>
+      </p:cxnSp>
+      <p:cxnSp>
+        <p:nvCxnSpPr>
+          <p:cNvPr id="15" name="直接连接符 14">
+            <a:extLst>
+              <a:ext uri="{FF2B5EF4-FFF2-40B4-BE49-F238E27FC236}">
+                <a16:creationId xmlns:a16="http://schemas.microsoft.com/office/drawing/2014/main" id="{B3AF8529-84E5-3299-2E12-01B446E0607B}"/>
+              </a:ext>
+            </a:extLst>
+          </p:cNvPr>
+          <p:cNvCxnSpPr>
+            <a:cxnSpLocks/>
+            <a:stCxn id="2" idx="3"/>
+            <a:endCxn id="9" idx="1"/>
+          </p:cNvCxnSpPr>
+          <p:nvPr/>
+        </p:nvCxnSpPr>
+        <p:spPr>
+          <a:xfrm>
+            <a:off x="4062449" y="3274613"/>
+            <a:ext cx="332126" cy="0"/>
+          </a:xfrm>
+          <a:prstGeom prst="line">
+            <a:avLst/>
+          </a:prstGeom>
+          <a:ln>
+            <a:solidFill>
+              <a:srgbClr val="EB3B5A"/>
+            </a:solidFill>
+          </a:ln>
+        </p:spPr>
+        <p:style>
+          <a:lnRef idx="1">
+            <a:schemeClr val="accent1"/>
+          </a:lnRef>
+          <a:fillRef idx="0">
+            <a:schemeClr val="accent1"/>
+          </a:fillRef>
+          <a:effectRef idx="0">
+            <a:schemeClr val="accent1"/>
+          </a:effectRef>
+          <a:fontRef idx="minor">
+            <a:schemeClr val="tx1"/>
+          </a:fontRef>
+        </p:style>
+      </p:cxnSp>
+      <p:sp>
+        <p:nvSpPr>
+          <p:cNvPr id="16" name="矩形: 圆角 15">
+            <a:extLst>
+              <a:ext uri="{FF2B5EF4-FFF2-40B4-BE49-F238E27FC236}">
+                <a16:creationId xmlns:a16="http://schemas.microsoft.com/office/drawing/2014/main" id="{FA81A049-32C6-0464-CB2F-FE666FC0CCAF}"/>
+              </a:ext>
+            </a:extLst>
+          </p:cNvPr>
+          <p:cNvSpPr/>
+          <p:nvPr/>
+        </p:nvSpPr>
+        <p:spPr>
+          <a:xfrm>
+            <a:off x="5806701" y="2413056"/>
+            <a:ext cx="1620000" cy="360000"/>
+          </a:xfrm>
+          <a:prstGeom prst="roundRect">
+            <a:avLst/>
+          </a:prstGeom>
+          <a:noFill/>
+          <a:ln w="12700">
+            <a:solidFill>
+              <a:srgbClr val="EB3B5A"/>
+            </a:solidFill>
+          </a:ln>
+        </p:spPr>
+        <p:style>
+          <a:lnRef idx="2">
+            <a:schemeClr val="accent1">
+              <a:shade val="15000"/>
+            </a:schemeClr>
+          </a:lnRef>
+          <a:fillRef idx="1">
+            <a:schemeClr val="accent1"/>
+          </a:fillRef>
+          <a:effectRef idx="0">
+            <a:schemeClr val="accent1"/>
+          </a:effectRef>
+          <a:fontRef idx="minor">
+            <a:schemeClr val="lt1"/>
+          </a:fontRef>
+        </p:style>
+        <p:txBody>
+          <a:bodyPr rtlCol="0" anchor="ctr"/>
+          <a:lstStyle/>
+          <a:p>
+            <a:pPr algn="ctr"/>
+            <a:r>
+              <a:rPr lang="zh-CN" altLang="en-US" sz="1200">
+                <a:solidFill>
+                  <a:sysClr val="windowText" lastClr="000000"/>
+                </a:solidFill>
+                <a:latin typeface="Quicksand Light" panose="00000400000000000000" pitchFamily="2" charset="0"/>
+                <a:ea typeface="仿宋" panose="02010609060101010101" pitchFamily="49" charset="-122"/>
+              </a:rPr>
+              <a:t>容器 </a:t>
+            </a:r>
+            <a:r>
+              <a:rPr lang="en-US" altLang="zh-CN" sz="1200">
+                <a:solidFill>
+                  <a:sysClr val="windowText" lastClr="000000"/>
+                </a:solidFill>
+                <a:latin typeface="Quicksand Light" panose="00000400000000000000" pitchFamily="2" charset="0"/>
+                <a:ea typeface="仿宋" panose="02010609060101010101" pitchFamily="49" charset="-122"/>
+              </a:rPr>
+              <a:t>wrap</a:t>
+            </a:r>
+            <a:endParaRPr lang="zh-CN" altLang="en-US" sz="1200">
+              <a:solidFill>
+                <a:sysClr val="windowText" lastClr="000000"/>
+              </a:solidFill>
+              <a:latin typeface="Quicksand Light" panose="00000400000000000000" pitchFamily="2" charset="0"/>
+              <a:ea typeface="仿宋" panose="02010609060101010101" pitchFamily="49" charset="-122"/>
+            </a:endParaRPr>
+          </a:p>
+        </p:txBody>
+      </p:sp>
+      <p:sp>
+        <p:nvSpPr>
+          <p:cNvPr id="17" name="矩形: 圆角 16">
+            <a:extLst>
+              <a:ext uri="{FF2B5EF4-FFF2-40B4-BE49-F238E27FC236}">
+                <a16:creationId xmlns:a16="http://schemas.microsoft.com/office/drawing/2014/main" id="{DF07C0A6-7F4B-674A-E488-85EB77ABE14F}"/>
+              </a:ext>
+            </a:extLst>
+          </p:cNvPr>
+          <p:cNvSpPr/>
+          <p:nvPr/>
+        </p:nvSpPr>
+        <p:spPr>
+          <a:xfrm>
+            <a:off x="5806701" y="1924829"/>
+            <a:ext cx="1620000" cy="360000"/>
+          </a:xfrm>
+          <a:prstGeom prst="roundRect">
+            <a:avLst/>
+          </a:prstGeom>
+          <a:noFill/>
+          <a:ln w="12700">
+            <a:solidFill>
+              <a:srgbClr val="EB3B5A"/>
+            </a:solidFill>
+          </a:ln>
+        </p:spPr>
+        <p:style>
+          <a:lnRef idx="2">
+            <a:schemeClr val="accent1">
+              <a:shade val="15000"/>
+            </a:schemeClr>
+          </a:lnRef>
+          <a:fillRef idx="1">
+            <a:schemeClr val="accent1"/>
+          </a:fillRef>
+          <a:effectRef idx="0">
+            <a:schemeClr val="accent1"/>
+          </a:effectRef>
+          <a:fontRef idx="minor">
+            <a:schemeClr val="lt1"/>
+          </a:fontRef>
+        </p:style>
+        <p:txBody>
+          <a:bodyPr rtlCol="0" anchor="ctr"/>
+          <a:lstStyle/>
+          <a:p>
+            <a:pPr algn="ctr"/>
+            <a:r>
+              <a:rPr lang="en-US" altLang="zh-CN" sz="1200">
+                <a:solidFill>
+                  <a:sysClr val="windowText" lastClr="000000"/>
+                </a:solidFill>
+                <a:latin typeface="Quicksand Light" panose="00000400000000000000" pitchFamily="2" charset="0"/>
+                <a:ea typeface="仿宋" panose="02010609060101010101" pitchFamily="49" charset="-122"/>
+              </a:rPr>
+              <a:t>enable-flex</a:t>
+            </a:r>
+            <a:endParaRPr lang="zh-CN" altLang="en-US" sz="1200">
+              <a:solidFill>
+                <a:sysClr val="windowText" lastClr="000000"/>
+              </a:solidFill>
+              <a:latin typeface="Quicksand Light" panose="00000400000000000000" pitchFamily="2" charset="0"/>
+              <a:ea typeface="仿宋" panose="02010609060101010101" pitchFamily="49" charset="-122"/>
+            </a:endParaRPr>
+          </a:p>
+        </p:txBody>
+      </p:sp>
+      <p:sp>
+        <p:nvSpPr>
+          <p:cNvPr id="18" name="矩形: 圆角 17">
+            <a:extLst>
+              <a:ext uri="{FF2B5EF4-FFF2-40B4-BE49-F238E27FC236}">
+                <a16:creationId xmlns:a16="http://schemas.microsoft.com/office/drawing/2014/main" id="{79DE23DA-ADA0-B751-DD89-7669F999E79D}"/>
+              </a:ext>
+            </a:extLst>
+          </p:cNvPr>
+          <p:cNvSpPr/>
+          <p:nvPr/>
+        </p:nvSpPr>
+        <p:spPr>
+          <a:xfrm>
+            <a:off x="5806701" y="3389510"/>
+            <a:ext cx="1620000" cy="360000"/>
+          </a:xfrm>
+          <a:prstGeom prst="roundRect">
+            <a:avLst/>
+          </a:prstGeom>
+          <a:noFill/>
+          <a:ln w="12700">
+            <a:solidFill>
+              <a:srgbClr val="EB3B5A"/>
+            </a:solidFill>
+            <a:prstDash val="dash"/>
+          </a:ln>
+        </p:spPr>
+        <p:style>
+          <a:lnRef idx="2">
+            <a:schemeClr val="accent1">
+              <a:shade val="15000"/>
+            </a:schemeClr>
+          </a:lnRef>
+          <a:fillRef idx="1">
+            <a:schemeClr val="accent1"/>
+          </a:fillRef>
+          <a:effectRef idx="0">
+            <a:schemeClr val="accent1"/>
+          </a:effectRef>
+          <a:fontRef idx="minor">
+            <a:schemeClr val="lt1"/>
+          </a:fontRef>
+        </p:style>
+        <p:txBody>
+          <a:bodyPr rtlCol="0" anchor="ctr"/>
+          <a:lstStyle/>
+          <a:p>
+            <a:pPr algn="ctr"/>
+            <a:r>
+              <a:rPr lang="zh-CN" altLang="en-US" sz="1200">
+                <a:solidFill>
+                  <a:sysClr val="windowText" lastClr="000000"/>
+                </a:solidFill>
+                <a:latin typeface="Quicksand Light" panose="00000400000000000000" pitchFamily="2" charset="0"/>
+                <a:ea typeface="仿宋" panose="02010609060101010101" pitchFamily="49" charset="-122"/>
+              </a:rPr>
+              <a:t>行内块 </a:t>
+            </a:r>
+            <a:r>
+              <a:rPr lang="en-US" altLang="zh-CN" sz="1200">
+                <a:solidFill>
+                  <a:sysClr val="windowText" lastClr="000000"/>
+                </a:solidFill>
+                <a:latin typeface="Quicksand Light" panose="00000400000000000000" pitchFamily="2" charset="0"/>
+                <a:ea typeface="仿宋" panose="02010609060101010101" pitchFamily="49" charset="-122"/>
+              </a:rPr>
+              <a:t>inline-block</a:t>
+            </a:r>
+            <a:endParaRPr lang="zh-CN" altLang="en-US" sz="1200">
+              <a:solidFill>
+                <a:sysClr val="windowText" lastClr="000000"/>
+              </a:solidFill>
+              <a:latin typeface="Quicksand Light" panose="00000400000000000000" pitchFamily="2" charset="0"/>
+              <a:ea typeface="仿宋" panose="02010609060101010101" pitchFamily="49" charset="-122"/>
+            </a:endParaRPr>
+          </a:p>
+        </p:txBody>
+      </p:sp>
+      <p:sp>
+        <p:nvSpPr>
+          <p:cNvPr id="19" name="矩形: 圆角 18">
+            <a:extLst>
+              <a:ext uri="{FF2B5EF4-FFF2-40B4-BE49-F238E27FC236}">
+                <a16:creationId xmlns:a16="http://schemas.microsoft.com/office/drawing/2014/main" id="{03E4ED18-20DE-9A2D-F3D6-31F089C7D92C}"/>
+              </a:ext>
+            </a:extLst>
+          </p:cNvPr>
+          <p:cNvSpPr/>
+          <p:nvPr/>
+        </p:nvSpPr>
+        <p:spPr>
+          <a:xfrm>
+            <a:off x="5806701" y="3877737"/>
+            <a:ext cx="1620000" cy="360000"/>
+          </a:xfrm>
+          <a:prstGeom prst="roundRect">
+            <a:avLst/>
+          </a:prstGeom>
+          <a:noFill/>
+          <a:ln w="12700">
+            <a:solidFill>
+              <a:schemeClr val="bg1">
+                <a:lumMod val="50000"/>
+              </a:schemeClr>
+            </a:solidFill>
+            <a:prstDash val="dash"/>
+          </a:ln>
+        </p:spPr>
+        <p:style>
+          <a:lnRef idx="2">
+            <a:schemeClr val="accent1">
+              <a:shade val="15000"/>
+            </a:schemeClr>
+          </a:lnRef>
+          <a:fillRef idx="1">
+            <a:schemeClr val="accent1"/>
+          </a:fillRef>
+          <a:effectRef idx="0">
+            <a:schemeClr val="accent1"/>
+          </a:effectRef>
+          <a:fontRef idx="minor">
+            <a:schemeClr val="lt1"/>
+          </a:fontRef>
+        </p:style>
+        <p:txBody>
+          <a:bodyPr rtlCol="0" anchor="ctr"/>
+          <a:lstStyle/>
+          <a:p>
+            <a:pPr algn="ctr"/>
+            <a:r>
+              <a:rPr lang="zh-CN" altLang="en-US" sz="1200">
+                <a:solidFill>
+                  <a:sysClr val="windowText" lastClr="000000"/>
+                </a:solidFill>
+                <a:latin typeface="Quicksand Light" panose="00000400000000000000" pitchFamily="2" charset="0"/>
+                <a:ea typeface="仿宋" panose="02010609060101010101" pitchFamily="49" charset="-122"/>
+              </a:rPr>
+              <a:t>网格 </a:t>
+            </a:r>
+            <a:r>
+              <a:rPr lang="en-US" altLang="zh-CN" sz="1200">
+                <a:solidFill>
+                  <a:sysClr val="windowText" lastClr="000000"/>
+                </a:solidFill>
+                <a:latin typeface="Quicksand Light" panose="00000400000000000000" pitchFamily="2" charset="0"/>
+                <a:ea typeface="仿宋" panose="02010609060101010101" pitchFamily="49" charset="-122"/>
+              </a:rPr>
+              <a:t>grid</a:t>
+            </a:r>
+            <a:endParaRPr lang="zh-CN" altLang="en-US" sz="1200">
+              <a:solidFill>
+                <a:sysClr val="windowText" lastClr="000000"/>
+              </a:solidFill>
+              <a:latin typeface="Quicksand Light" panose="00000400000000000000" pitchFamily="2" charset="0"/>
+              <a:ea typeface="仿宋" panose="02010609060101010101" pitchFamily="49" charset="-122"/>
+            </a:endParaRPr>
+          </a:p>
+        </p:txBody>
+      </p:sp>
+      <p:cxnSp>
+        <p:nvCxnSpPr>
+          <p:cNvPr id="22" name="连接符: 曲线 21">
+            <a:extLst>
+              <a:ext uri="{FF2B5EF4-FFF2-40B4-BE49-F238E27FC236}">
+                <a16:creationId xmlns:a16="http://schemas.microsoft.com/office/drawing/2014/main" id="{D99A8B47-6D7E-2EA4-8359-4BD4F43E0B70}"/>
+              </a:ext>
+            </a:extLst>
+          </p:cNvPr>
+          <p:cNvCxnSpPr>
+            <a:cxnSpLocks/>
+            <a:stCxn id="9" idx="3"/>
+            <a:endCxn id="7" idx="1"/>
+          </p:cNvCxnSpPr>
+          <p:nvPr/>
+        </p:nvCxnSpPr>
+        <p:spPr>
+          <a:xfrm>
+            <a:off x="5474575" y="3274613"/>
+            <a:ext cx="332126" cy="1271351"/>
+          </a:xfrm>
+          <a:prstGeom prst="curvedConnector3">
+            <a:avLst>
+              <a:gd name="adj1" fmla="val 50000"/>
+            </a:avLst>
+          </a:prstGeom>
+          <a:ln>
+            <a:solidFill>
+              <a:srgbClr val="EB3B5A"/>
+            </a:solidFill>
+          </a:ln>
+        </p:spPr>
+        <p:style>
+          <a:lnRef idx="1">
+            <a:schemeClr val="accent1"/>
+          </a:lnRef>
+          <a:fillRef idx="0">
+            <a:schemeClr val="accent1"/>
+          </a:fillRef>
+          <a:effectRef idx="0">
+            <a:schemeClr val="accent1"/>
+          </a:effectRef>
+          <a:fontRef idx="minor">
+            <a:schemeClr val="tx1"/>
+          </a:fontRef>
+        </p:style>
+      </p:cxnSp>
+      <p:cxnSp>
+        <p:nvCxnSpPr>
+          <p:cNvPr id="26" name="连接符: 曲线 25">
+            <a:extLst>
+              <a:ext uri="{FF2B5EF4-FFF2-40B4-BE49-F238E27FC236}">
+                <a16:creationId xmlns:a16="http://schemas.microsoft.com/office/drawing/2014/main" id="{46C1E541-71B5-21B2-7273-4EAC0DC70F03}"/>
+              </a:ext>
+            </a:extLst>
+          </p:cNvPr>
+          <p:cNvCxnSpPr>
+            <a:cxnSpLocks/>
+            <a:stCxn id="8" idx="1"/>
+            <a:endCxn id="2" idx="3"/>
+          </p:cNvCxnSpPr>
+          <p:nvPr/>
+        </p:nvCxnSpPr>
+        <p:spPr>
+          <a:xfrm rot="10800000">
+            <a:off x="4062449" y="3274613"/>
+            <a:ext cx="332126" cy="1147136"/>
+          </a:xfrm>
+          <a:prstGeom prst="curvedConnector3">
+            <a:avLst>
+              <a:gd name="adj1" fmla="val 50000"/>
+            </a:avLst>
+          </a:prstGeom>
+          <a:ln>
+            <a:solidFill>
+              <a:srgbClr val="3DC1D3"/>
+            </a:solidFill>
+          </a:ln>
+        </p:spPr>
+        <p:style>
+          <a:lnRef idx="1">
+            <a:schemeClr val="accent1"/>
+          </a:lnRef>
+          <a:fillRef idx="0">
+            <a:schemeClr val="accent1"/>
+          </a:fillRef>
+          <a:effectRef idx="0">
+            <a:schemeClr val="accent1"/>
+          </a:effectRef>
+          <a:fontRef idx="minor">
+            <a:schemeClr val="tx1"/>
+          </a:fontRef>
+        </p:style>
+      </p:cxnSp>
+      <p:sp>
+        <p:nvSpPr>
+          <p:cNvPr id="31" name="矩形: 圆角 30">
+            <a:extLst>
+              <a:ext uri="{FF2B5EF4-FFF2-40B4-BE49-F238E27FC236}">
+                <a16:creationId xmlns:a16="http://schemas.microsoft.com/office/drawing/2014/main" id="{E8C9255D-9B6B-1495-9667-75E062A30160}"/>
+              </a:ext>
+            </a:extLst>
+          </p:cNvPr>
+          <p:cNvSpPr/>
+          <p:nvPr/>
+        </p:nvSpPr>
+        <p:spPr>
+          <a:xfrm>
+            <a:off x="4394575" y="5388885"/>
+            <a:ext cx="1080000" cy="360000"/>
+          </a:xfrm>
+          <a:prstGeom prst="roundRect">
+            <a:avLst/>
+          </a:prstGeom>
+          <a:solidFill>
+            <a:schemeClr val="accent6">
+              <a:lumMod val="60000"/>
+              <a:lumOff val="40000"/>
+            </a:schemeClr>
+          </a:solidFill>
+          <a:ln w="12700">
+            <a:noFill/>
+          </a:ln>
+        </p:spPr>
+        <p:style>
+          <a:lnRef idx="2">
+            <a:schemeClr val="accent1">
+              <a:shade val="15000"/>
+            </a:schemeClr>
+          </a:lnRef>
+          <a:fillRef idx="1">
+            <a:schemeClr val="accent1"/>
+          </a:fillRef>
+          <a:effectRef idx="0">
+            <a:schemeClr val="accent1"/>
+          </a:effectRef>
+          <a:fontRef idx="minor">
+            <a:schemeClr val="lt1"/>
+          </a:fontRef>
+        </p:style>
+        <p:txBody>
+          <a:bodyPr rtlCol="0" anchor="ctr"/>
+          <a:lstStyle/>
+          <a:p>
+            <a:pPr algn="ctr"/>
+            <a:r>
+              <a:rPr lang="zh-CN" altLang="en-US" sz="1200">
+                <a:latin typeface="Quicksand Light" panose="00000400000000000000" pitchFamily="2" charset="0"/>
+                <a:ea typeface="仿宋" panose="02010609060101010101" pitchFamily="49" charset="-122"/>
+              </a:rPr>
+              <a:t>导航</a:t>
+            </a:r>
+          </a:p>
+        </p:txBody>
+      </p:sp>
+      <p:cxnSp>
+        <p:nvCxnSpPr>
+          <p:cNvPr id="32" name="连接符: 曲线 31">
+            <a:extLst>
+              <a:ext uri="{FF2B5EF4-FFF2-40B4-BE49-F238E27FC236}">
+                <a16:creationId xmlns:a16="http://schemas.microsoft.com/office/drawing/2014/main" id="{77355C97-960E-5F33-1A9D-C89E64984730}"/>
+              </a:ext>
+            </a:extLst>
+          </p:cNvPr>
+          <p:cNvCxnSpPr>
+            <a:cxnSpLocks/>
+            <a:stCxn id="31" idx="1"/>
+            <a:endCxn id="2" idx="3"/>
+          </p:cNvCxnSpPr>
+          <p:nvPr/>
+        </p:nvCxnSpPr>
+        <p:spPr>
+          <a:xfrm rot="10800000">
+            <a:off x="4062449" y="3274613"/>
+            <a:ext cx="332126" cy="2294272"/>
+          </a:xfrm>
+          <a:prstGeom prst="curvedConnector3">
+            <a:avLst>
+              <a:gd name="adj1" fmla="val 50000"/>
+            </a:avLst>
+          </a:prstGeom>
+          <a:ln>
+            <a:solidFill>
+              <a:srgbClr val="A9D18E"/>
+            </a:solidFill>
+          </a:ln>
+        </p:spPr>
+        <p:style>
+          <a:lnRef idx="1">
+            <a:schemeClr val="accent1"/>
+          </a:lnRef>
+          <a:fillRef idx="0">
+            <a:schemeClr val="accent1"/>
+          </a:fillRef>
+          <a:effectRef idx="0">
+            <a:schemeClr val="accent1"/>
+          </a:effectRef>
+          <a:fontRef idx="minor">
+            <a:schemeClr val="tx1"/>
+          </a:fontRef>
+        </p:style>
+      </p:cxnSp>
+      <p:sp>
+        <p:nvSpPr>
+          <p:cNvPr id="4" name="矩形: 圆角 3">
+            <a:extLst>
+              <a:ext uri="{FF2B5EF4-FFF2-40B4-BE49-F238E27FC236}">
+                <a16:creationId xmlns:a16="http://schemas.microsoft.com/office/drawing/2014/main" id="{F804F753-E482-E059-B0E0-437F4CB1E50C}"/>
+              </a:ext>
+            </a:extLst>
+          </p:cNvPr>
+          <p:cNvSpPr/>
+          <p:nvPr/>
+        </p:nvSpPr>
+        <p:spPr>
+          <a:xfrm>
+            <a:off x="5806701" y="5164768"/>
+            <a:ext cx="1620000" cy="360000"/>
+          </a:xfrm>
+          <a:prstGeom prst="roundRect">
+            <a:avLst/>
+          </a:prstGeom>
+          <a:noFill/>
+          <a:ln w="12700">
+            <a:solidFill>
+              <a:schemeClr val="accent6">
+                <a:lumMod val="60000"/>
+                <a:lumOff val="40000"/>
+              </a:schemeClr>
+            </a:solidFill>
+          </a:ln>
+        </p:spPr>
+        <p:style>
+          <a:lnRef idx="2">
+            <a:schemeClr val="accent1">
+              <a:shade val="15000"/>
+            </a:schemeClr>
+          </a:lnRef>
+          <a:fillRef idx="1">
+            <a:schemeClr val="accent1"/>
+          </a:fillRef>
+          <a:effectRef idx="0">
+            <a:schemeClr val="accent1"/>
+          </a:effectRef>
+          <a:fontRef idx="minor">
+            <a:schemeClr val="lt1"/>
+          </a:fontRef>
+        </p:style>
+        <p:txBody>
+          <a:bodyPr rtlCol="0" anchor="ctr"/>
+          <a:lstStyle/>
+          <a:p>
+            <a:pPr algn="ctr"/>
+            <a:r>
+              <a:rPr lang="zh-CN" altLang="en-US" sz="1200">
+                <a:solidFill>
+                  <a:sysClr val="windowText" lastClr="000000"/>
+                </a:solidFill>
+                <a:latin typeface="Quicksand Light" panose="00000400000000000000" pitchFamily="2" charset="0"/>
+                <a:ea typeface="仿宋" panose="02010609060101010101" pitchFamily="49" charset="-122"/>
+              </a:rPr>
+              <a:t>一个滚动视图</a:t>
+            </a:r>
+          </a:p>
+        </p:txBody>
+      </p:sp>
+      <p:sp>
+        <p:nvSpPr>
+          <p:cNvPr id="5" name="矩形: 圆角 4">
+            <a:extLst>
+              <a:ext uri="{FF2B5EF4-FFF2-40B4-BE49-F238E27FC236}">
+                <a16:creationId xmlns:a16="http://schemas.microsoft.com/office/drawing/2014/main" id="{2F218F90-1527-32EF-A4D6-D219CF5B8F16}"/>
+              </a:ext>
+            </a:extLst>
+          </p:cNvPr>
+          <p:cNvSpPr/>
+          <p:nvPr/>
+        </p:nvSpPr>
+        <p:spPr>
+          <a:xfrm>
+            <a:off x="5806701" y="5613003"/>
+            <a:ext cx="1620000" cy="360000"/>
+          </a:xfrm>
+          <a:prstGeom prst="roundRect">
+            <a:avLst/>
+          </a:prstGeom>
+          <a:noFill/>
+          <a:ln w="12700">
+            <a:solidFill>
+              <a:schemeClr val="accent6">
+                <a:lumMod val="60000"/>
+                <a:lumOff val="40000"/>
+              </a:schemeClr>
+            </a:solidFill>
+            <a:prstDash val="dash"/>
+          </a:ln>
+        </p:spPr>
+        <p:style>
+          <a:lnRef idx="2">
+            <a:schemeClr val="accent1">
+              <a:shade val="15000"/>
+            </a:schemeClr>
+          </a:lnRef>
+          <a:fillRef idx="1">
+            <a:schemeClr val="accent1"/>
+          </a:fillRef>
+          <a:effectRef idx="0">
+            <a:schemeClr val="accent1"/>
+          </a:effectRef>
+          <a:fontRef idx="minor">
+            <a:schemeClr val="lt1"/>
+          </a:fontRef>
+        </p:style>
+        <p:txBody>
+          <a:bodyPr rtlCol="0" anchor="ctr"/>
+          <a:lstStyle/>
+          <a:p>
+            <a:pPr algn="ctr"/>
+            <a:r>
+              <a:rPr lang="zh-CN" altLang="en-US" sz="1200">
+                <a:solidFill>
+                  <a:sysClr val="windowText" lastClr="000000"/>
+                </a:solidFill>
+                <a:latin typeface="Quicksand Light" panose="00000400000000000000" pitchFamily="2" charset="0"/>
+                <a:ea typeface="仿宋" panose="02010609060101010101" pitchFamily="49" charset="-122"/>
+              </a:rPr>
+              <a:t>二个滚动视图</a:t>
+            </a:r>
+          </a:p>
+        </p:txBody>
+      </p:sp>
+      <p:cxnSp>
+        <p:nvCxnSpPr>
+          <p:cNvPr id="6" name="连接符: 曲线 5">
+            <a:extLst>
+              <a:ext uri="{FF2B5EF4-FFF2-40B4-BE49-F238E27FC236}">
+                <a16:creationId xmlns:a16="http://schemas.microsoft.com/office/drawing/2014/main" id="{A07E7128-4DE2-E2DD-961D-C1575C1BBE3A}"/>
+              </a:ext>
+            </a:extLst>
+          </p:cNvPr>
+          <p:cNvCxnSpPr>
+            <a:cxnSpLocks/>
+            <a:stCxn id="31" idx="3"/>
+            <a:endCxn id="4" idx="1"/>
+          </p:cNvCxnSpPr>
+          <p:nvPr/>
+        </p:nvCxnSpPr>
+        <p:spPr>
+          <a:xfrm flipV="1">
+            <a:off x="5474575" y="5344768"/>
+            <a:ext cx="332126" cy="224117"/>
+          </a:xfrm>
+          <a:prstGeom prst="curvedConnector3">
+            <a:avLst>
+              <a:gd name="adj1" fmla="val 50000"/>
+            </a:avLst>
+          </a:prstGeom>
+          <a:ln>
+            <a:solidFill>
+              <a:schemeClr val="accent6">
+                <a:lumMod val="60000"/>
+                <a:lumOff val="40000"/>
+              </a:schemeClr>
+            </a:solidFill>
+          </a:ln>
+        </p:spPr>
+        <p:style>
+          <a:lnRef idx="1">
+            <a:schemeClr val="accent1"/>
+          </a:lnRef>
+          <a:fillRef idx="0">
+            <a:schemeClr val="accent1"/>
+          </a:fillRef>
+          <a:effectRef idx="0">
+            <a:schemeClr val="accent1"/>
+          </a:effectRef>
+          <a:fontRef idx="minor">
+            <a:schemeClr val="tx1"/>
+          </a:fontRef>
+        </p:style>
+      </p:cxnSp>
+      <p:cxnSp>
+        <p:nvCxnSpPr>
+          <p:cNvPr id="12" name="连接符: 曲线 11">
+            <a:extLst>
+              <a:ext uri="{FF2B5EF4-FFF2-40B4-BE49-F238E27FC236}">
+                <a16:creationId xmlns:a16="http://schemas.microsoft.com/office/drawing/2014/main" id="{5FD7AEAF-CD97-C450-BBC1-2641DC43007D}"/>
+              </a:ext>
+            </a:extLst>
+          </p:cNvPr>
+          <p:cNvCxnSpPr>
+            <a:cxnSpLocks/>
+            <a:stCxn id="31" idx="3"/>
+            <a:endCxn id="5" idx="1"/>
+          </p:cNvCxnSpPr>
+          <p:nvPr/>
+        </p:nvCxnSpPr>
+        <p:spPr>
+          <a:xfrm>
+            <a:off x="5474575" y="5568885"/>
+            <a:ext cx="332126" cy="224118"/>
+          </a:xfrm>
+          <a:prstGeom prst="curvedConnector3">
+            <a:avLst>
+              <a:gd name="adj1" fmla="val 50000"/>
+            </a:avLst>
+          </a:prstGeom>
+          <a:ln>
+            <a:solidFill>
+              <a:schemeClr val="accent6">
+                <a:lumMod val="60000"/>
+                <a:lumOff val="40000"/>
+              </a:schemeClr>
+            </a:solidFill>
+          </a:ln>
+        </p:spPr>
+        <p:style>
+          <a:lnRef idx="1">
+            <a:schemeClr val="accent1"/>
+          </a:lnRef>
+          <a:fillRef idx="0">
+            <a:schemeClr val="accent1"/>
+          </a:fillRef>
+          <a:effectRef idx="0">
+            <a:schemeClr val="accent1"/>
+          </a:effectRef>
+          <a:fontRef idx="minor">
+            <a:schemeClr val="tx1"/>
+          </a:fontRef>
+        </p:style>
+      </p:cxnSp>
+      <p:sp>
+        <p:nvSpPr>
+          <p:cNvPr id="7" name="矩形: 圆角 6">
+            <a:extLst>
+              <a:ext uri="{FF2B5EF4-FFF2-40B4-BE49-F238E27FC236}">
+                <a16:creationId xmlns:a16="http://schemas.microsoft.com/office/drawing/2014/main" id="{383E7043-36AC-CBD4-DF24-A727B7D0B0BD}"/>
+              </a:ext>
+            </a:extLst>
+          </p:cNvPr>
+          <p:cNvSpPr/>
+          <p:nvPr/>
+        </p:nvSpPr>
+        <p:spPr>
+          <a:xfrm>
+            <a:off x="5806701" y="4365964"/>
+            <a:ext cx="1620000" cy="360000"/>
+          </a:xfrm>
+          <a:prstGeom prst="roundRect">
+            <a:avLst/>
+          </a:prstGeom>
+          <a:noFill/>
+          <a:ln w="12700">
+            <a:solidFill>
+              <a:schemeClr val="bg1">
+                <a:lumMod val="50000"/>
+              </a:schemeClr>
+            </a:solidFill>
+            <a:prstDash val="dash"/>
+          </a:ln>
+        </p:spPr>
+        <p:style>
+          <a:lnRef idx="2">
+            <a:schemeClr val="accent1">
+              <a:shade val="15000"/>
+            </a:schemeClr>
+          </a:lnRef>
+          <a:fillRef idx="1">
+            <a:schemeClr val="accent1"/>
+          </a:fillRef>
+          <a:effectRef idx="0">
+            <a:schemeClr val="accent1"/>
+          </a:effectRef>
+          <a:fontRef idx="minor">
+            <a:schemeClr val="lt1"/>
+          </a:fontRef>
+        </p:style>
+        <p:txBody>
+          <a:bodyPr rtlCol="0" anchor="ctr"/>
+          <a:lstStyle/>
+          <a:p>
+            <a:pPr algn="ctr"/>
+            <a:r>
+              <a:rPr lang="zh-CN" altLang="en-US" sz="1200">
+                <a:solidFill>
+                  <a:sysClr val="windowText" lastClr="000000"/>
+                </a:solidFill>
+                <a:latin typeface="Quicksand Light" panose="00000400000000000000" pitchFamily="2" charset="0"/>
+                <a:ea typeface="仿宋" panose="02010609060101010101" pitchFamily="49" charset="-122"/>
+              </a:rPr>
+              <a:t>浮动 </a:t>
+            </a:r>
+            <a:r>
+              <a:rPr lang="en-US" altLang="zh-CN" sz="1200">
+                <a:solidFill>
+                  <a:sysClr val="windowText" lastClr="000000"/>
+                </a:solidFill>
+                <a:latin typeface="Quicksand Light" panose="00000400000000000000" pitchFamily="2" charset="0"/>
+                <a:ea typeface="仿宋" panose="02010609060101010101" pitchFamily="49" charset="-122"/>
+              </a:rPr>
+              <a:t>float</a:t>
+            </a:r>
+            <a:endParaRPr lang="zh-CN" altLang="en-US" sz="1200">
+              <a:solidFill>
+                <a:sysClr val="windowText" lastClr="000000"/>
+              </a:solidFill>
+              <a:latin typeface="Quicksand Light" panose="00000400000000000000" pitchFamily="2" charset="0"/>
+              <a:ea typeface="仿宋" panose="02010609060101010101" pitchFamily="49" charset="-122"/>
+            </a:endParaRPr>
+          </a:p>
+        </p:txBody>
+      </p:sp>
+    </p:spTree>
+    <p:extLst>
+      <p:ext uri="{BB962C8B-B14F-4D97-AF65-F5344CB8AC3E}">
+        <p14:creationId xmlns:p14="http://schemas.microsoft.com/office/powerpoint/2010/main" val="2483548129"/>
       </p:ext>
     </p:extLst>
   </p:cSld>
@@ -27986,1177 +28237,40 @@
           <a:chExt cx="0" cy="0"/>
         </a:xfrm>
       </p:grpSpPr>
-      <p:sp>
-        <p:nvSpPr>
-          <p:cNvPr id="2" name="矩形: 圆角 1">
-            <a:extLst>
-              <a:ext uri="{FF2B5EF4-FFF2-40B4-BE49-F238E27FC236}">
-                <a16:creationId xmlns:a16="http://schemas.microsoft.com/office/drawing/2014/main" id="{7CE4D4CF-0466-1DC3-08B4-9C28D4A64E27}"/>
-              </a:ext>
-            </a:extLst>
-          </p:cNvPr>
-          <p:cNvSpPr/>
-          <p:nvPr/>
-        </p:nvSpPr>
-        <p:spPr>
-          <a:xfrm>
-            <a:off x="2622449" y="3094613"/>
-            <a:ext cx="1440000" cy="360000"/>
-          </a:xfrm>
-          <a:prstGeom prst="roundRect">
-            <a:avLst/>
-          </a:prstGeom>
-          <a:solidFill>
-            <a:schemeClr val="tx1"/>
-          </a:solidFill>
-          <a:ln w="12700">
-            <a:noFill/>
-          </a:ln>
-        </p:spPr>
-        <p:style>
-          <a:lnRef idx="2">
-            <a:schemeClr val="accent1">
-              <a:shade val="15000"/>
-            </a:schemeClr>
-          </a:lnRef>
-          <a:fillRef idx="1">
-            <a:schemeClr val="accent1"/>
-          </a:fillRef>
-          <a:effectRef idx="0">
-            <a:schemeClr val="accent1"/>
-          </a:effectRef>
-          <a:fontRef idx="minor">
-            <a:schemeClr val="lt1"/>
-          </a:fontRef>
-        </p:style>
-        <p:txBody>
-          <a:bodyPr rtlCol="0" anchor="ctr"/>
-          <a:lstStyle/>
-          <a:p>
-            <a:pPr algn="ctr"/>
-            <a:r>
-              <a:rPr lang="en-US" altLang="zh-CN" sz="1200">
-                <a:latin typeface="Quicksand Light" panose="00000400000000000000" pitchFamily="2" charset="0"/>
-                <a:ea typeface="仿宋" panose="02010609060101010101" pitchFamily="49" charset="-122"/>
-              </a:rPr>
-              <a:t>&lt;scroll-view&gt;</a:t>
-            </a:r>
-            <a:endParaRPr lang="zh-CN" altLang="en-US" sz="1200">
-              <a:latin typeface="Quicksand Light" panose="00000400000000000000" pitchFamily="2" charset="0"/>
-              <a:ea typeface="仿宋" panose="02010609060101010101" pitchFamily="49" charset="-122"/>
-            </a:endParaRPr>
-          </a:p>
-        </p:txBody>
-      </p:sp>
-      <p:sp>
-        <p:nvSpPr>
-          <p:cNvPr id="3" name="矩形: 圆角 2">
-            <a:extLst>
-              <a:ext uri="{FF2B5EF4-FFF2-40B4-BE49-F238E27FC236}">
-                <a16:creationId xmlns:a16="http://schemas.microsoft.com/office/drawing/2014/main" id="{6EE8E41B-FB18-64FF-0539-7D9127F8FC67}"/>
-              </a:ext>
-            </a:extLst>
-          </p:cNvPr>
-          <p:cNvSpPr/>
-          <p:nvPr/>
-        </p:nvSpPr>
-        <p:spPr>
-          <a:xfrm>
-            <a:off x="5806701" y="2901283"/>
-            <a:ext cx="1620000" cy="360000"/>
-          </a:xfrm>
-          <a:prstGeom prst="roundRect">
-            <a:avLst/>
-          </a:prstGeom>
-          <a:noFill/>
-          <a:ln w="12700">
-            <a:solidFill>
-              <a:srgbClr val="EB3B5A"/>
-            </a:solidFill>
-            <a:prstDash val="dash"/>
-          </a:ln>
-        </p:spPr>
-        <p:style>
-          <a:lnRef idx="2">
-            <a:schemeClr val="accent1">
-              <a:shade val="15000"/>
-            </a:schemeClr>
-          </a:lnRef>
-          <a:fillRef idx="1">
-            <a:schemeClr val="accent1"/>
-          </a:fillRef>
-          <a:effectRef idx="0">
-            <a:schemeClr val="accent1"/>
-          </a:effectRef>
-          <a:fontRef idx="minor">
-            <a:schemeClr val="lt1"/>
-          </a:fontRef>
-        </p:style>
-        <p:txBody>
-          <a:bodyPr rtlCol="0" anchor="ctr"/>
-          <a:lstStyle/>
-          <a:p>
-            <a:pPr algn="ctr"/>
-            <a:r>
-              <a:rPr lang="zh-CN" altLang="en-US" sz="1200">
-                <a:solidFill>
-                  <a:sysClr val="windowText" lastClr="000000"/>
-                </a:solidFill>
-                <a:latin typeface="Quicksand Light" panose="00000400000000000000" pitchFamily="2" charset="0"/>
-                <a:ea typeface="仿宋" panose="02010609060101010101" pitchFamily="49" charset="-122"/>
-              </a:rPr>
-              <a:t>行内 </a:t>
-            </a:r>
-            <a:r>
-              <a:rPr lang="en-US" altLang="zh-CN" sz="1200">
-                <a:solidFill>
-                  <a:sysClr val="windowText" lastClr="000000"/>
-                </a:solidFill>
-                <a:latin typeface="Quicksand Light" panose="00000400000000000000" pitchFamily="2" charset="0"/>
-                <a:ea typeface="仿宋" panose="02010609060101010101" pitchFamily="49" charset="-122"/>
-              </a:rPr>
-              <a:t>inline</a:t>
-            </a:r>
-            <a:endParaRPr lang="zh-CN" altLang="en-US" sz="1200">
-              <a:solidFill>
-                <a:sysClr val="windowText" lastClr="000000"/>
-              </a:solidFill>
-              <a:latin typeface="Quicksand Light" panose="00000400000000000000" pitchFamily="2" charset="0"/>
-              <a:ea typeface="仿宋" panose="02010609060101010101" pitchFamily="49" charset="-122"/>
-            </a:endParaRPr>
-          </a:p>
-        </p:txBody>
-      </p:sp>
-      <p:sp>
-        <p:nvSpPr>
-          <p:cNvPr id="8" name="矩形: 圆角 7">
-            <a:extLst>
-              <a:ext uri="{FF2B5EF4-FFF2-40B4-BE49-F238E27FC236}">
-                <a16:creationId xmlns:a16="http://schemas.microsoft.com/office/drawing/2014/main" id="{06699B4A-F636-A7C1-FB1E-69E3110ACB30}"/>
-              </a:ext>
-            </a:extLst>
-          </p:cNvPr>
-          <p:cNvSpPr/>
-          <p:nvPr/>
-        </p:nvSpPr>
-        <p:spPr>
-          <a:xfrm>
-            <a:off x="4394575" y="4241749"/>
-            <a:ext cx="1080000" cy="360000"/>
-          </a:xfrm>
-          <a:prstGeom prst="roundRect">
-            <a:avLst/>
-          </a:prstGeom>
-          <a:solidFill>
-            <a:srgbClr val="3DC1D3"/>
-          </a:solidFill>
-          <a:ln w="12700">
-            <a:noFill/>
-          </a:ln>
-        </p:spPr>
-        <p:style>
-          <a:lnRef idx="2">
-            <a:schemeClr val="accent1">
-              <a:shade val="15000"/>
-            </a:schemeClr>
-          </a:lnRef>
-          <a:fillRef idx="1">
-            <a:schemeClr val="accent1"/>
-          </a:fillRef>
-          <a:effectRef idx="0">
-            <a:schemeClr val="accent1"/>
-          </a:effectRef>
-          <a:fontRef idx="minor">
-            <a:schemeClr val="lt1"/>
-          </a:fontRef>
-        </p:style>
-        <p:txBody>
-          <a:bodyPr rtlCol="0" anchor="ctr"/>
-          <a:lstStyle/>
-          <a:p>
-            <a:pPr algn="ctr"/>
-            <a:r>
-              <a:rPr lang="zh-CN" altLang="en-US" sz="1200">
-                <a:latin typeface="Quicksand Light" panose="00000400000000000000" pitchFamily="2" charset="0"/>
-                <a:ea typeface="仿宋" panose="02010609060101010101" pitchFamily="49" charset="-122"/>
-              </a:rPr>
-              <a:t>垂直滚动</a:t>
-            </a:r>
-          </a:p>
-        </p:txBody>
-      </p:sp>
-      <p:sp>
-        <p:nvSpPr>
-          <p:cNvPr id="9" name="矩形: 圆角 8">
-            <a:extLst>
-              <a:ext uri="{FF2B5EF4-FFF2-40B4-BE49-F238E27FC236}">
-                <a16:creationId xmlns:a16="http://schemas.microsoft.com/office/drawing/2014/main" id="{63EC0026-3C9E-C410-1B1D-25D54ACB2F10}"/>
-              </a:ext>
-            </a:extLst>
-          </p:cNvPr>
-          <p:cNvSpPr/>
-          <p:nvPr/>
-        </p:nvSpPr>
-        <p:spPr>
-          <a:xfrm>
-            <a:off x="4394575" y="3094613"/>
-            <a:ext cx="1080000" cy="360000"/>
-          </a:xfrm>
-          <a:prstGeom prst="roundRect">
-            <a:avLst/>
-          </a:prstGeom>
-          <a:solidFill>
-            <a:srgbClr val="EB3B5A"/>
-          </a:solidFill>
-          <a:ln w="12700">
-            <a:noFill/>
-          </a:ln>
-        </p:spPr>
-        <p:style>
-          <a:lnRef idx="2">
-            <a:schemeClr val="accent1">
-              <a:shade val="15000"/>
-            </a:schemeClr>
-          </a:lnRef>
-          <a:fillRef idx="1">
-            <a:schemeClr val="accent1"/>
-          </a:fillRef>
-          <a:effectRef idx="0">
-            <a:schemeClr val="accent1"/>
-          </a:effectRef>
-          <a:fontRef idx="minor">
-            <a:schemeClr val="lt1"/>
-          </a:fontRef>
-        </p:style>
-        <p:txBody>
-          <a:bodyPr rtlCol="0" anchor="ctr"/>
-          <a:lstStyle/>
-          <a:p>
-            <a:pPr algn="ctr"/>
-            <a:r>
-              <a:rPr lang="zh-CN" altLang="en-US" sz="1200" dirty="0">
-                <a:latin typeface="Quicksand Light" panose="00000400000000000000" pitchFamily="2" charset="0"/>
-                <a:ea typeface="仿宋" panose="02010609060101010101" pitchFamily="49" charset="-122"/>
-              </a:rPr>
-              <a:t>水平滚动</a:t>
-            </a:r>
-          </a:p>
-        </p:txBody>
-      </p:sp>
-      <p:cxnSp>
-        <p:nvCxnSpPr>
-          <p:cNvPr id="10" name="连接符: 曲线 9">
-            <a:extLst>
-              <a:ext uri="{FF2B5EF4-FFF2-40B4-BE49-F238E27FC236}">
-                <a16:creationId xmlns:a16="http://schemas.microsoft.com/office/drawing/2014/main" id="{89376DA1-2871-7B3F-3D7E-34DF204828CA}"/>
-              </a:ext>
-            </a:extLst>
-          </p:cNvPr>
-          <p:cNvCxnSpPr>
-            <a:cxnSpLocks/>
-            <a:stCxn id="9" idx="3"/>
-            <a:endCxn id="17" idx="1"/>
-          </p:cNvCxnSpPr>
-          <p:nvPr/>
-        </p:nvCxnSpPr>
-        <p:spPr>
-          <a:xfrm flipV="1">
-            <a:off x="5474575" y="2104829"/>
-            <a:ext cx="332126" cy="1169784"/>
-          </a:xfrm>
-          <a:prstGeom prst="curvedConnector3">
-            <a:avLst>
-              <a:gd name="adj1" fmla="val 50000"/>
-            </a:avLst>
-          </a:prstGeom>
-          <a:ln>
-            <a:solidFill>
-              <a:srgbClr val="EB3B5A"/>
-            </a:solidFill>
-          </a:ln>
-        </p:spPr>
-        <p:style>
-          <a:lnRef idx="1">
-            <a:schemeClr val="accent1"/>
-          </a:lnRef>
-          <a:fillRef idx="0">
-            <a:schemeClr val="accent1"/>
-          </a:fillRef>
-          <a:effectRef idx="0">
-            <a:schemeClr val="accent1"/>
-          </a:effectRef>
-          <a:fontRef idx="minor">
-            <a:schemeClr val="tx1"/>
-          </a:fontRef>
-        </p:style>
-      </p:cxnSp>
-      <p:cxnSp>
-        <p:nvCxnSpPr>
-          <p:cNvPr id="15" name="直接连接符 14">
-            <a:extLst>
-              <a:ext uri="{FF2B5EF4-FFF2-40B4-BE49-F238E27FC236}">
-                <a16:creationId xmlns:a16="http://schemas.microsoft.com/office/drawing/2014/main" id="{B3AF8529-84E5-3299-2E12-01B446E0607B}"/>
-              </a:ext>
-            </a:extLst>
-          </p:cNvPr>
-          <p:cNvCxnSpPr>
-            <a:cxnSpLocks/>
-            <a:stCxn id="2" idx="3"/>
-            <a:endCxn id="9" idx="1"/>
-          </p:cNvCxnSpPr>
-          <p:nvPr/>
-        </p:nvCxnSpPr>
-        <p:spPr>
-          <a:xfrm>
-            <a:off x="4062449" y="3274613"/>
-            <a:ext cx="332126" cy="0"/>
-          </a:xfrm>
-          <a:prstGeom prst="line">
-            <a:avLst/>
-          </a:prstGeom>
-          <a:ln>
-            <a:solidFill>
-              <a:srgbClr val="EB3B5A"/>
-            </a:solidFill>
-          </a:ln>
-        </p:spPr>
-        <p:style>
-          <a:lnRef idx="1">
-            <a:schemeClr val="accent1"/>
-          </a:lnRef>
-          <a:fillRef idx="0">
-            <a:schemeClr val="accent1"/>
-          </a:fillRef>
-          <a:effectRef idx="0">
-            <a:schemeClr val="accent1"/>
-          </a:effectRef>
-          <a:fontRef idx="minor">
-            <a:schemeClr val="tx1"/>
-          </a:fontRef>
-        </p:style>
-      </p:cxnSp>
-      <p:sp>
-        <p:nvSpPr>
-          <p:cNvPr id="16" name="矩形: 圆角 15">
-            <a:extLst>
-              <a:ext uri="{FF2B5EF4-FFF2-40B4-BE49-F238E27FC236}">
-                <a16:creationId xmlns:a16="http://schemas.microsoft.com/office/drawing/2014/main" id="{FA81A049-32C6-0464-CB2F-FE666FC0CCAF}"/>
-              </a:ext>
-            </a:extLst>
-          </p:cNvPr>
-          <p:cNvSpPr/>
-          <p:nvPr/>
-        </p:nvSpPr>
-        <p:spPr>
-          <a:xfrm>
-            <a:off x="5806701" y="2413056"/>
-            <a:ext cx="1620000" cy="360000"/>
-          </a:xfrm>
-          <a:prstGeom prst="roundRect">
-            <a:avLst/>
-          </a:prstGeom>
-          <a:noFill/>
-          <a:ln w="12700">
-            <a:solidFill>
-              <a:srgbClr val="EB3B5A"/>
-            </a:solidFill>
-          </a:ln>
-        </p:spPr>
-        <p:style>
-          <a:lnRef idx="2">
-            <a:schemeClr val="accent1">
-              <a:shade val="15000"/>
-            </a:schemeClr>
-          </a:lnRef>
-          <a:fillRef idx="1">
-            <a:schemeClr val="accent1"/>
-          </a:fillRef>
-          <a:effectRef idx="0">
-            <a:schemeClr val="accent1"/>
-          </a:effectRef>
-          <a:fontRef idx="minor">
-            <a:schemeClr val="lt1"/>
-          </a:fontRef>
-        </p:style>
-        <p:txBody>
-          <a:bodyPr rtlCol="0" anchor="ctr"/>
-          <a:lstStyle/>
-          <a:p>
-            <a:pPr algn="ctr"/>
-            <a:r>
-              <a:rPr lang="zh-CN" altLang="en-US" sz="1200">
-                <a:solidFill>
-                  <a:sysClr val="windowText" lastClr="000000"/>
-                </a:solidFill>
-                <a:latin typeface="Quicksand Light" panose="00000400000000000000" pitchFamily="2" charset="0"/>
-                <a:ea typeface="仿宋" panose="02010609060101010101" pitchFamily="49" charset="-122"/>
-              </a:rPr>
-              <a:t>容器 </a:t>
-            </a:r>
-            <a:r>
-              <a:rPr lang="en-US" altLang="zh-CN" sz="1200">
-                <a:solidFill>
-                  <a:sysClr val="windowText" lastClr="000000"/>
-                </a:solidFill>
-                <a:latin typeface="Quicksand Light" panose="00000400000000000000" pitchFamily="2" charset="0"/>
-                <a:ea typeface="仿宋" panose="02010609060101010101" pitchFamily="49" charset="-122"/>
-              </a:rPr>
-              <a:t>wrap</a:t>
-            </a:r>
-            <a:endParaRPr lang="zh-CN" altLang="en-US" sz="1200">
-              <a:solidFill>
-                <a:sysClr val="windowText" lastClr="000000"/>
-              </a:solidFill>
-              <a:latin typeface="Quicksand Light" panose="00000400000000000000" pitchFamily="2" charset="0"/>
-              <a:ea typeface="仿宋" panose="02010609060101010101" pitchFamily="49" charset="-122"/>
-            </a:endParaRPr>
-          </a:p>
-        </p:txBody>
-      </p:sp>
-      <p:sp>
-        <p:nvSpPr>
-          <p:cNvPr id="17" name="矩形: 圆角 16">
-            <a:extLst>
-              <a:ext uri="{FF2B5EF4-FFF2-40B4-BE49-F238E27FC236}">
-                <a16:creationId xmlns:a16="http://schemas.microsoft.com/office/drawing/2014/main" id="{DF07C0A6-7F4B-674A-E488-85EB77ABE14F}"/>
-              </a:ext>
-            </a:extLst>
-          </p:cNvPr>
-          <p:cNvSpPr/>
-          <p:nvPr/>
-        </p:nvSpPr>
-        <p:spPr>
-          <a:xfrm>
-            <a:off x="5806701" y="1924829"/>
-            <a:ext cx="1620000" cy="360000"/>
-          </a:xfrm>
-          <a:prstGeom prst="roundRect">
-            <a:avLst/>
-          </a:prstGeom>
-          <a:noFill/>
-          <a:ln w="12700">
-            <a:solidFill>
-              <a:srgbClr val="EB3B5A"/>
-            </a:solidFill>
-          </a:ln>
-        </p:spPr>
-        <p:style>
-          <a:lnRef idx="2">
-            <a:schemeClr val="accent1">
-              <a:shade val="15000"/>
-            </a:schemeClr>
-          </a:lnRef>
-          <a:fillRef idx="1">
-            <a:schemeClr val="accent1"/>
-          </a:fillRef>
-          <a:effectRef idx="0">
-            <a:schemeClr val="accent1"/>
-          </a:effectRef>
-          <a:fontRef idx="minor">
-            <a:schemeClr val="lt1"/>
-          </a:fontRef>
-        </p:style>
-        <p:txBody>
-          <a:bodyPr rtlCol="0" anchor="ctr"/>
-          <a:lstStyle/>
-          <a:p>
-            <a:pPr algn="ctr"/>
-            <a:r>
-              <a:rPr lang="en-US" altLang="zh-CN" sz="1200">
-                <a:solidFill>
-                  <a:sysClr val="windowText" lastClr="000000"/>
-                </a:solidFill>
-                <a:latin typeface="Quicksand Light" panose="00000400000000000000" pitchFamily="2" charset="0"/>
-                <a:ea typeface="仿宋" panose="02010609060101010101" pitchFamily="49" charset="-122"/>
-              </a:rPr>
-              <a:t>enable-flex</a:t>
-            </a:r>
-            <a:endParaRPr lang="zh-CN" altLang="en-US" sz="1200">
-              <a:solidFill>
-                <a:sysClr val="windowText" lastClr="000000"/>
-              </a:solidFill>
-              <a:latin typeface="Quicksand Light" panose="00000400000000000000" pitchFamily="2" charset="0"/>
-              <a:ea typeface="仿宋" panose="02010609060101010101" pitchFamily="49" charset="-122"/>
-            </a:endParaRPr>
-          </a:p>
-        </p:txBody>
-      </p:sp>
-      <p:sp>
-        <p:nvSpPr>
-          <p:cNvPr id="18" name="矩形: 圆角 17">
-            <a:extLst>
-              <a:ext uri="{FF2B5EF4-FFF2-40B4-BE49-F238E27FC236}">
-                <a16:creationId xmlns:a16="http://schemas.microsoft.com/office/drawing/2014/main" id="{79DE23DA-ADA0-B751-DD89-7669F999E79D}"/>
-              </a:ext>
-            </a:extLst>
-          </p:cNvPr>
-          <p:cNvSpPr/>
-          <p:nvPr/>
-        </p:nvSpPr>
-        <p:spPr>
-          <a:xfrm>
-            <a:off x="5806701" y="3389510"/>
-            <a:ext cx="1620000" cy="360000"/>
-          </a:xfrm>
-          <a:prstGeom prst="roundRect">
-            <a:avLst/>
-          </a:prstGeom>
-          <a:noFill/>
-          <a:ln w="12700">
-            <a:solidFill>
-              <a:srgbClr val="EB3B5A"/>
-            </a:solidFill>
-            <a:prstDash val="dash"/>
-          </a:ln>
-        </p:spPr>
-        <p:style>
-          <a:lnRef idx="2">
-            <a:schemeClr val="accent1">
-              <a:shade val="15000"/>
-            </a:schemeClr>
-          </a:lnRef>
-          <a:fillRef idx="1">
-            <a:schemeClr val="accent1"/>
-          </a:fillRef>
-          <a:effectRef idx="0">
-            <a:schemeClr val="accent1"/>
-          </a:effectRef>
-          <a:fontRef idx="minor">
-            <a:schemeClr val="lt1"/>
-          </a:fontRef>
-        </p:style>
-        <p:txBody>
-          <a:bodyPr rtlCol="0" anchor="ctr"/>
-          <a:lstStyle/>
-          <a:p>
-            <a:pPr algn="ctr"/>
-            <a:r>
-              <a:rPr lang="zh-CN" altLang="en-US" sz="1200">
-                <a:solidFill>
-                  <a:sysClr val="windowText" lastClr="000000"/>
-                </a:solidFill>
-                <a:latin typeface="Quicksand Light" panose="00000400000000000000" pitchFamily="2" charset="0"/>
-                <a:ea typeface="仿宋" panose="02010609060101010101" pitchFamily="49" charset="-122"/>
-              </a:rPr>
-              <a:t>行内块 </a:t>
-            </a:r>
-            <a:r>
-              <a:rPr lang="en-US" altLang="zh-CN" sz="1200">
-                <a:solidFill>
-                  <a:sysClr val="windowText" lastClr="000000"/>
-                </a:solidFill>
-                <a:latin typeface="Quicksand Light" panose="00000400000000000000" pitchFamily="2" charset="0"/>
-                <a:ea typeface="仿宋" panose="02010609060101010101" pitchFamily="49" charset="-122"/>
-              </a:rPr>
-              <a:t>inline-block</a:t>
-            </a:r>
-            <a:endParaRPr lang="zh-CN" altLang="en-US" sz="1200">
-              <a:solidFill>
-                <a:sysClr val="windowText" lastClr="000000"/>
-              </a:solidFill>
-              <a:latin typeface="Quicksand Light" panose="00000400000000000000" pitchFamily="2" charset="0"/>
-              <a:ea typeface="仿宋" panose="02010609060101010101" pitchFamily="49" charset="-122"/>
-            </a:endParaRPr>
-          </a:p>
-        </p:txBody>
-      </p:sp>
-      <p:sp>
-        <p:nvSpPr>
-          <p:cNvPr id="19" name="矩形: 圆角 18">
-            <a:extLst>
-              <a:ext uri="{FF2B5EF4-FFF2-40B4-BE49-F238E27FC236}">
-                <a16:creationId xmlns:a16="http://schemas.microsoft.com/office/drawing/2014/main" id="{03E4ED18-20DE-9A2D-F3D6-31F089C7D92C}"/>
-              </a:ext>
-            </a:extLst>
-          </p:cNvPr>
-          <p:cNvSpPr/>
-          <p:nvPr/>
-        </p:nvSpPr>
-        <p:spPr>
-          <a:xfrm>
-            <a:off x="5806701" y="3877737"/>
-            <a:ext cx="1620000" cy="360000"/>
-          </a:xfrm>
-          <a:prstGeom prst="roundRect">
-            <a:avLst/>
-          </a:prstGeom>
-          <a:noFill/>
-          <a:ln w="12700">
-            <a:solidFill>
-              <a:schemeClr val="bg1">
-                <a:lumMod val="50000"/>
-              </a:schemeClr>
-            </a:solidFill>
-            <a:prstDash val="dash"/>
-          </a:ln>
-        </p:spPr>
-        <p:style>
-          <a:lnRef idx="2">
-            <a:schemeClr val="accent1">
-              <a:shade val="15000"/>
-            </a:schemeClr>
-          </a:lnRef>
-          <a:fillRef idx="1">
-            <a:schemeClr val="accent1"/>
-          </a:fillRef>
-          <a:effectRef idx="0">
-            <a:schemeClr val="accent1"/>
-          </a:effectRef>
-          <a:fontRef idx="minor">
-            <a:schemeClr val="lt1"/>
-          </a:fontRef>
-        </p:style>
-        <p:txBody>
-          <a:bodyPr rtlCol="0" anchor="ctr"/>
-          <a:lstStyle/>
-          <a:p>
-            <a:pPr algn="ctr"/>
-            <a:r>
-              <a:rPr lang="zh-CN" altLang="en-US" sz="1200">
-                <a:solidFill>
-                  <a:sysClr val="windowText" lastClr="000000"/>
-                </a:solidFill>
-                <a:latin typeface="Quicksand Light" panose="00000400000000000000" pitchFamily="2" charset="0"/>
-                <a:ea typeface="仿宋" panose="02010609060101010101" pitchFamily="49" charset="-122"/>
-              </a:rPr>
-              <a:t>网格 </a:t>
-            </a:r>
-            <a:r>
-              <a:rPr lang="en-US" altLang="zh-CN" sz="1200">
-                <a:solidFill>
-                  <a:sysClr val="windowText" lastClr="000000"/>
-                </a:solidFill>
-                <a:latin typeface="Quicksand Light" panose="00000400000000000000" pitchFamily="2" charset="0"/>
-                <a:ea typeface="仿宋" panose="02010609060101010101" pitchFamily="49" charset="-122"/>
-              </a:rPr>
-              <a:t>grid</a:t>
-            </a:r>
-            <a:endParaRPr lang="zh-CN" altLang="en-US" sz="1200">
-              <a:solidFill>
-                <a:sysClr val="windowText" lastClr="000000"/>
-              </a:solidFill>
-              <a:latin typeface="Quicksand Light" panose="00000400000000000000" pitchFamily="2" charset="0"/>
-              <a:ea typeface="仿宋" panose="02010609060101010101" pitchFamily="49" charset="-122"/>
-            </a:endParaRPr>
-          </a:p>
-        </p:txBody>
-      </p:sp>
-      <p:cxnSp>
-        <p:nvCxnSpPr>
-          <p:cNvPr id="22" name="连接符: 曲线 21">
-            <a:extLst>
-              <a:ext uri="{FF2B5EF4-FFF2-40B4-BE49-F238E27FC236}">
-                <a16:creationId xmlns:a16="http://schemas.microsoft.com/office/drawing/2014/main" id="{D99A8B47-6D7E-2EA4-8359-4BD4F43E0B70}"/>
-              </a:ext>
-            </a:extLst>
-          </p:cNvPr>
-          <p:cNvCxnSpPr>
-            <a:cxnSpLocks/>
-            <a:stCxn id="9" idx="3"/>
-            <a:endCxn id="7" idx="1"/>
-          </p:cNvCxnSpPr>
-          <p:nvPr/>
-        </p:nvCxnSpPr>
-        <p:spPr>
-          <a:xfrm>
-            <a:off x="5474575" y="3274613"/>
-            <a:ext cx="332126" cy="1271351"/>
-          </a:xfrm>
-          <a:prstGeom prst="curvedConnector3">
-            <a:avLst>
-              <a:gd name="adj1" fmla="val 50000"/>
-            </a:avLst>
-          </a:prstGeom>
-          <a:ln>
-            <a:solidFill>
-              <a:srgbClr val="EB3B5A"/>
-            </a:solidFill>
-          </a:ln>
-        </p:spPr>
-        <p:style>
-          <a:lnRef idx="1">
-            <a:schemeClr val="accent1"/>
-          </a:lnRef>
-          <a:fillRef idx="0">
-            <a:schemeClr val="accent1"/>
-          </a:fillRef>
-          <a:effectRef idx="0">
-            <a:schemeClr val="accent1"/>
-          </a:effectRef>
-          <a:fontRef idx="minor">
-            <a:schemeClr val="tx1"/>
-          </a:fontRef>
-        </p:style>
-      </p:cxnSp>
-      <p:cxnSp>
-        <p:nvCxnSpPr>
-          <p:cNvPr id="26" name="连接符: 曲线 25">
-            <a:extLst>
-              <a:ext uri="{FF2B5EF4-FFF2-40B4-BE49-F238E27FC236}">
-                <a16:creationId xmlns:a16="http://schemas.microsoft.com/office/drawing/2014/main" id="{46C1E541-71B5-21B2-7273-4EAC0DC70F03}"/>
-              </a:ext>
-            </a:extLst>
-          </p:cNvPr>
-          <p:cNvCxnSpPr>
-            <a:cxnSpLocks/>
-            <a:stCxn id="8" idx="1"/>
-            <a:endCxn id="2" idx="3"/>
-          </p:cNvCxnSpPr>
-          <p:nvPr/>
-        </p:nvCxnSpPr>
-        <p:spPr>
-          <a:xfrm rot="10800000">
-            <a:off x="4062449" y="3274613"/>
-            <a:ext cx="332126" cy="1147136"/>
-          </a:xfrm>
-          <a:prstGeom prst="curvedConnector3">
-            <a:avLst>
-              <a:gd name="adj1" fmla="val 50000"/>
-            </a:avLst>
-          </a:prstGeom>
-          <a:ln>
-            <a:solidFill>
-              <a:srgbClr val="3DC1D3"/>
-            </a:solidFill>
-          </a:ln>
-        </p:spPr>
-        <p:style>
-          <a:lnRef idx="1">
-            <a:schemeClr val="accent1"/>
-          </a:lnRef>
-          <a:fillRef idx="0">
-            <a:schemeClr val="accent1"/>
-          </a:fillRef>
-          <a:effectRef idx="0">
-            <a:schemeClr val="accent1"/>
-          </a:effectRef>
-          <a:fontRef idx="minor">
-            <a:schemeClr val="tx1"/>
-          </a:fontRef>
-        </p:style>
-      </p:cxnSp>
-      <p:sp>
-        <p:nvSpPr>
-          <p:cNvPr id="31" name="矩形: 圆角 30">
-            <a:extLst>
-              <a:ext uri="{FF2B5EF4-FFF2-40B4-BE49-F238E27FC236}">
-                <a16:creationId xmlns:a16="http://schemas.microsoft.com/office/drawing/2014/main" id="{E8C9255D-9B6B-1495-9667-75E062A30160}"/>
-              </a:ext>
-            </a:extLst>
-          </p:cNvPr>
-          <p:cNvSpPr/>
-          <p:nvPr/>
-        </p:nvSpPr>
-        <p:spPr>
-          <a:xfrm>
-            <a:off x="4394575" y="5388885"/>
-            <a:ext cx="1080000" cy="360000"/>
-          </a:xfrm>
-          <a:prstGeom prst="roundRect">
-            <a:avLst/>
-          </a:prstGeom>
-          <a:solidFill>
-            <a:schemeClr val="accent6">
-              <a:lumMod val="60000"/>
-              <a:lumOff val="40000"/>
-            </a:schemeClr>
-          </a:solidFill>
-          <a:ln w="12700">
-            <a:noFill/>
-          </a:ln>
-        </p:spPr>
-        <p:style>
-          <a:lnRef idx="2">
-            <a:schemeClr val="accent1">
-              <a:shade val="15000"/>
-            </a:schemeClr>
-          </a:lnRef>
-          <a:fillRef idx="1">
-            <a:schemeClr val="accent1"/>
-          </a:fillRef>
-          <a:effectRef idx="0">
-            <a:schemeClr val="accent1"/>
-          </a:effectRef>
-          <a:fontRef idx="minor">
-            <a:schemeClr val="lt1"/>
-          </a:fontRef>
-        </p:style>
-        <p:txBody>
-          <a:bodyPr rtlCol="0" anchor="ctr"/>
-          <a:lstStyle/>
-          <a:p>
-            <a:pPr algn="ctr"/>
-            <a:r>
-              <a:rPr lang="zh-CN" altLang="en-US" sz="1200">
-                <a:latin typeface="Quicksand Light" panose="00000400000000000000" pitchFamily="2" charset="0"/>
-                <a:ea typeface="仿宋" panose="02010609060101010101" pitchFamily="49" charset="-122"/>
-              </a:rPr>
-              <a:t>导航</a:t>
-            </a:r>
-          </a:p>
-        </p:txBody>
-      </p:sp>
-      <p:cxnSp>
-        <p:nvCxnSpPr>
-          <p:cNvPr id="32" name="连接符: 曲线 31">
-            <a:extLst>
-              <a:ext uri="{FF2B5EF4-FFF2-40B4-BE49-F238E27FC236}">
-                <a16:creationId xmlns:a16="http://schemas.microsoft.com/office/drawing/2014/main" id="{77355C97-960E-5F33-1A9D-C89E64984730}"/>
-              </a:ext>
-            </a:extLst>
-          </p:cNvPr>
-          <p:cNvCxnSpPr>
-            <a:cxnSpLocks/>
-            <a:stCxn id="31" idx="1"/>
-            <a:endCxn id="2" idx="3"/>
-          </p:cNvCxnSpPr>
-          <p:nvPr/>
-        </p:nvCxnSpPr>
-        <p:spPr>
-          <a:xfrm rot="10800000">
-            <a:off x="4062449" y="3274613"/>
-            <a:ext cx="332126" cy="2294272"/>
-          </a:xfrm>
-          <a:prstGeom prst="curvedConnector3">
-            <a:avLst>
-              <a:gd name="adj1" fmla="val 50000"/>
-            </a:avLst>
-          </a:prstGeom>
-          <a:ln>
-            <a:solidFill>
-              <a:srgbClr val="A9D18E"/>
-            </a:solidFill>
-          </a:ln>
-        </p:spPr>
-        <p:style>
-          <a:lnRef idx="1">
-            <a:schemeClr val="accent1"/>
-          </a:lnRef>
-          <a:fillRef idx="0">
-            <a:schemeClr val="accent1"/>
-          </a:fillRef>
-          <a:effectRef idx="0">
-            <a:schemeClr val="accent1"/>
-          </a:effectRef>
-          <a:fontRef idx="minor">
-            <a:schemeClr val="tx1"/>
-          </a:fontRef>
-        </p:style>
-      </p:cxnSp>
-      <p:sp>
-        <p:nvSpPr>
-          <p:cNvPr id="4" name="矩形: 圆角 3">
-            <a:extLst>
-              <a:ext uri="{FF2B5EF4-FFF2-40B4-BE49-F238E27FC236}">
-                <a16:creationId xmlns:a16="http://schemas.microsoft.com/office/drawing/2014/main" id="{F804F753-E482-E059-B0E0-437F4CB1E50C}"/>
-              </a:ext>
-            </a:extLst>
-          </p:cNvPr>
-          <p:cNvSpPr/>
-          <p:nvPr/>
-        </p:nvSpPr>
-        <p:spPr>
-          <a:xfrm>
-            <a:off x="5806701" y="5164768"/>
-            <a:ext cx="1620000" cy="360000"/>
-          </a:xfrm>
-          <a:prstGeom prst="roundRect">
-            <a:avLst/>
-          </a:prstGeom>
-          <a:noFill/>
-          <a:ln w="12700">
-            <a:solidFill>
-              <a:schemeClr val="accent6">
-                <a:lumMod val="60000"/>
-                <a:lumOff val="40000"/>
-              </a:schemeClr>
-            </a:solidFill>
-          </a:ln>
-        </p:spPr>
-        <p:style>
-          <a:lnRef idx="2">
-            <a:schemeClr val="accent1">
-              <a:shade val="15000"/>
-            </a:schemeClr>
-          </a:lnRef>
-          <a:fillRef idx="1">
-            <a:schemeClr val="accent1"/>
-          </a:fillRef>
-          <a:effectRef idx="0">
-            <a:schemeClr val="accent1"/>
-          </a:effectRef>
-          <a:fontRef idx="minor">
-            <a:schemeClr val="lt1"/>
-          </a:fontRef>
-        </p:style>
-        <p:txBody>
-          <a:bodyPr rtlCol="0" anchor="ctr"/>
-          <a:lstStyle/>
-          <a:p>
-            <a:pPr algn="ctr"/>
-            <a:r>
-              <a:rPr lang="zh-CN" altLang="en-US" sz="1200">
-                <a:solidFill>
-                  <a:sysClr val="windowText" lastClr="000000"/>
-                </a:solidFill>
-                <a:latin typeface="Quicksand Light" panose="00000400000000000000" pitchFamily="2" charset="0"/>
-                <a:ea typeface="仿宋" panose="02010609060101010101" pitchFamily="49" charset="-122"/>
-              </a:rPr>
-              <a:t>一个滚动视图</a:t>
-            </a:r>
-          </a:p>
-        </p:txBody>
-      </p:sp>
-      <p:sp>
-        <p:nvSpPr>
-          <p:cNvPr id="5" name="矩形: 圆角 4">
-            <a:extLst>
-              <a:ext uri="{FF2B5EF4-FFF2-40B4-BE49-F238E27FC236}">
-                <a16:creationId xmlns:a16="http://schemas.microsoft.com/office/drawing/2014/main" id="{2F218F90-1527-32EF-A4D6-D219CF5B8F16}"/>
-              </a:ext>
-            </a:extLst>
-          </p:cNvPr>
-          <p:cNvSpPr/>
-          <p:nvPr/>
-        </p:nvSpPr>
-        <p:spPr>
-          <a:xfrm>
-            <a:off x="5806701" y="5613003"/>
-            <a:ext cx="1620000" cy="360000"/>
-          </a:xfrm>
-          <a:prstGeom prst="roundRect">
-            <a:avLst/>
-          </a:prstGeom>
-          <a:noFill/>
-          <a:ln w="12700">
-            <a:solidFill>
-              <a:schemeClr val="accent6">
-                <a:lumMod val="60000"/>
-                <a:lumOff val="40000"/>
-              </a:schemeClr>
-            </a:solidFill>
-            <a:prstDash val="dash"/>
-          </a:ln>
-        </p:spPr>
-        <p:style>
-          <a:lnRef idx="2">
-            <a:schemeClr val="accent1">
-              <a:shade val="15000"/>
-            </a:schemeClr>
-          </a:lnRef>
-          <a:fillRef idx="1">
-            <a:schemeClr val="accent1"/>
-          </a:fillRef>
-          <a:effectRef idx="0">
-            <a:schemeClr val="accent1"/>
-          </a:effectRef>
-          <a:fontRef idx="minor">
-            <a:schemeClr val="lt1"/>
-          </a:fontRef>
-        </p:style>
-        <p:txBody>
-          <a:bodyPr rtlCol="0" anchor="ctr"/>
-          <a:lstStyle/>
-          <a:p>
-            <a:pPr algn="ctr"/>
-            <a:r>
-              <a:rPr lang="zh-CN" altLang="en-US" sz="1200">
-                <a:solidFill>
-                  <a:sysClr val="windowText" lastClr="000000"/>
-                </a:solidFill>
-                <a:latin typeface="Quicksand Light" panose="00000400000000000000" pitchFamily="2" charset="0"/>
-                <a:ea typeface="仿宋" panose="02010609060101010101" pitchFamily="49" charset="-122"/>
-              </a:rPr>
-              <a:t>二个滚动视图</a:t>
-            </a:r>
-          </a:p>
-        </p:txBody>
-      </p:sp>
-      <p:cxnSp>
-        <p:nvCxnSpPr>
-          <p:cNvPr id="6" name="连接符: 曲线 5">
-            <a:extLst>
-              <a:ext uri="{FF2B5EF4-FFF2-40B4-BE49-F238E27FC236}">
-                <a16:creationId xmlns:a16="http://schemas.microsoft.com/office/drawing/2014/main" id="{A07E7128-4DE2-E2DD-961D-C1575C1BBE3A}"/>
-              </a:ext>
-            </a:extLst>
-          </p:cNvPr>
-          <p:cNvCxnSpPr>
-            <a:cxnSpLocks/>
-            <a:stCxn id="31" idx="3"/>
-            <a:endCxn id="4" idx="1"/>
-          </p:cNvCxnSpPr>
-          <p:nvPr/>
-        </p:nvCxnSpPr>
-        <p:spPr>
-          <a:xfrm flipV="1">
-            <a:off x="5474575" y="5344768"/>
-            <a:ext cx="332126" cy="224117"/>
-          </a:xfrm>
-          <a:prstGeom prst="curvedConnector3">
-            <a:avLst>
-              <a:gd name="adj1" fmla="val 50000"/>
-            </a:avLst>
-          </a:prstGeom>
-          <a:ln>
-            <a:solidFill>
-              <a:schemeClr val="accent6">
-                <a:lumMod val="60000"/>
-                <a:lumOff val="40000"/>
-              </a:schemeClr>
-            </a:solidFill>
-          </a:ln>
-        </p:spPr>
-        <p:style>
-          <a:lnRef idx="1">
-            <a:schemeClr val="accent1"/>
-          </a:lnRef>
-          <a:fillRef idx="0">
-            <a:schemeClr val="accent1"/>
-          </a:fillRef>
-          <a:effectRef idx="0">
-            <a:schemeClr val="accent1"/>
-          </a:effectRef>
-          <a:fontRef idx="minor">
-            <a:schemeClr val="tx1"/>
-          </a:fontRef>
-        </p:style>
-      </p:cxnSp>
-      <p:cxnSp>
-        <p:nvCxnSpPr>
-          <p:cNvPr id="12" name="连接符: 曲线 11">
-            <a:extLst>
-              <a:ext uri="{FF2B5EF4-FFF2-40B4-BE49-F238E27FC236}">
-                <a16:creationId xmlns:a16="http://schemas.microsoft.com/office/drawing/2014/main" id="{5FD7AEAF-CD97-C450-BBC1-2641DC43007D}"/>
-              </a:ext>
-            </a:extLst>
-          </p:cNvPr>
-          <p:cNvCxnSpPr>
-            <a:cxnSpLocks/>
-            <a:stCxn id="31" idx="3"/>
-            <a:endCxn id="5" idx="1"/>
-          </p:cNvCxnSpPr>
-          <p:nvPr/>
-        </p:nvCxnSpPr>
-        <p:spPr>
-          <a:xfrm>
-            <a:off x="5474575" y="5568885"/>
-            <a:ext cx="332126" cy="224118"/>
-          </a:xfrm>
-          <a:prstGeom prst="curvedConnector3">
-            <a:avLst>
-              <a:gd name="adj1" fmla="val 50000"/>
-            </a:avLst>
-          </a:prstGeom>
-          <a:ln>
-            <a:solidFill>
-              <a:schemeClr val="accent6">
-                <a:lumMod val="60000"/>
-                <a:lumOff val="40000"/>
-              </a:schemeClr>
-            </a:solidFill>
-          </a:ln>
-        </p:spPr>
-        <p:style>
-          <a:lnRef idx="1">
-            <a:schemeClr val="accent1"/>
-          </a:lnRef>
-          <a:fillRef idx="0">
-            <a:schemeClr val="accent1"/>
-          </a:fillRef>
-          <a:effectRef idx="0">
-            <a:schemeClr val="accent1"/>
-          </a:effectRef>
-          <a:fontRef idx="minor">
-            <a:schemeClr val="tx1"/>
-          </a:fontRef>
-        </p:style>
-      </p:cxnSp>
-      <p:sp>
-        <p:nvSpPr>
-          <p:cNvPr id="7" name="矩形: 圆角 6">
-            <a:extLst>
-              <a:ext uri="{FF2B5EF4-FFF2-40B4-BE49-F238E27FC236}">
-                <a16:creationId xmlns:a16="http://schemas.microsoft.com/office/drawing/2014/main" id="{383E7043-36AC-CBD4-DF24-A727B7D0B0BD}"/>
-              </a:ext>
-            </a:extLst>
-          </p:cNvPr>
-          <p:cNvSpPr/>
-          <p:nvPr/>
-        </p:nvSpPr>
-        <p:spPr>
-          <a:xfrm>
-            <a:off x="5806701" y="4365964"/>
-            <a:ext cx="1620000" cy="360000"/>
-          </a:xfrm>
-          <a:prstGeom prst="roundRect">
-            <a:avLst/>
-          </a:prstGeom>
-          <a:noFill/>
-          <a:ln w="12700">
-            <a:solidFill>
-              <a:schemeClr val="bg1">
-                <a:lumMod val="50000"/>
-              </a:schemeClr>
-            </a:solidFill>
-            <a:prstDash val="dash"/>
-          </a:ln>
-        </p:spPr>
-        <p:style>
-          <a:lnRef idx="2">
-            <a:schemeClr val="accent1">
-              <a:shade val="15000"/>
-            </a:schemeClr>
-          </a:lnRef>
-          <a:fillRef idx="1">
-            <a:schemeClr val="accent1"/>
-          </a:fillRef>
-          <a:effectRef idx="0">
-            <a:schemeClr val="accent1"/>
-          </a:effectRef>
-          <a:fontRef idx="minor">
-            <a:schemeClr val="lt1"/>
-          </a:fontRef>
-        </p:style>
-        <p:txBody>
-          <a:bodyPr rtlCol="0" anchor="ctr"/>
-          <a:lstStyle/>
-          <a:p>
-            <a:pPr algn="ctr"/>
-            <a:r>
-              <a:rPr lang="zh-CN" altLang="en-US" sz="1200">
-                <a:solidFill>
-                  <a:sysClr val="windowText" lastClr="000000"/>
-                </a:solidFill>
-                <a:latin typeface="Quicksand Light" panose="00000400000000000000" pitchFamily="2" charset="0"/>
-                <a:ea typeface="仿宋" panose="02010609060101010101" pitchFamily="49" charset="-122"/>
-              </a:rPr>
-              <a:t>浮动 </a:t>
-            </a:r>
-            <a:r>
-              <a:rPr lang="en-US" altLang="zh-CN" sz="1200">
-                <a:solidFill>
-                  <a:sysClr val="windowText" lastClr="000000"/>
-                </a:solidFill>
-                <a:latin typeface="Quicksand Light" panose="00000400000000000000" pitchFamily="2" charset="0"/>
-                <a:ea typeface="仿宋" panose="02010609060101010101" pitchFamily="49" charset="-122"/>
-              </a:rPr>
-              <a:t>float</a:t>
-            </a:r>
-            <a:endParaRPr lang="zh-CN" altLang="en-US" sz="1200">
-              <a:solidFill>
-                <a:sysClr val="windowText" lastClr="000000"/>
-              </a:solidFill>
-              <a:latin typeface="Quicksand Light" panose="00000400000000000000" pitchFamily="2" charset="0"/>
-              <a:ea typeface="仿宋" panose="02010609060101010101" pitchFamily="49" charset="-122"/>
-            </a:endParaRPr>
-          </a:p>
-        </p:txBody>
-      </p:sp>
+      <p:pic>
+        <p:nvPicPr>
+          <p:cNvPr id="3" name="图片 2">
+            <a:extLst>
+              <a:ext uri="{FF2B5EF4-FFF2-40B4-BE49-F238E27FC236}">
+                <a16:creationId xmlns:a16="http://schemas.microsoft.com/office/drawing/2014/main" id="{7ECC09FE-D9D2-2E76-0948-E1F27A08CD34}"/>
+              </a:ext>
+            </a:extLst>
+          </p:cNvPr>
+          <p:cNvPicPr>
+            <a:picLocks noChangeAspect="1"/>
+          </p:cNvPicPr>
+          <p:nvPr/>
+        </p:nvPicPr>
+        <p:blipFill>
+          <a:blip r:embed="rId2"/>
+          <a:stretch>
+            <a:fillRect/>
+          </a:stretch>
+        </p:blipFill>
+        <p:spPr>
+          <a:xfrm>
+            <a:off x="5043340" y="1842866"/>
+            <a:ext cx="2105319" cy="3172268"/>
+          </a:xfrm>
+          <a:prstGeom prst="rect">
+            <a:avLst/>
+          </a:prstGeom>
+        </p:spPr>
+      </p:pic>
     </p:spTree>
     <p:extLst>
       <p:ext uri="{BB962C8B-B14F-4D97-AF65-F5344CB8AC3E}">
-        <p14:creationId xmlns:p14="http://schemas.microsoft.com/office/powerpoint/2010/main" val="2483548129"/>
+        <p14:creationId xmlns:p14="http://schemas.microsoft.com/office/powerpoint/2010/main" val="2672122669"/>
       </p:ext>
     </p:extLst>
   </p:cSld>
@@ -29183,66 +28297,6 @@
           <a:chExt cx="0" cy="0"/>
         </a:xfrm>
       </p:grpSpPr>
-      <p:pic>
-        <p:nvPicPr>
-          <p:cNvPr id="3" name="图片 2">
-            <a:extLst>
-              <a:ext uri="{FF2B5EF4-FFF2-40B4-BE49-F238E27FC236}">
-                <a16:creationId xmlns:a16="http://schemas.microsoft.com/office/drawing/2014/main" id="{7ECC09FE-D9D2-2E76-0948-E1F27A08CD34}"/>
-              </a:ext>
-            </a:extLst>
-          </p:cNvPr>
-          <p:cNvPicPr>
-            <a:picLocks noChangeAspect="1"/>
-          </p:cNvPicPr>
-          <p:nvPr/>
-        </p:nvPicPr>
-        <p:blipFill>
-          <a:blip r:embed="rId2"/>
-          <a:stretch>
-            <a:fillRect/>
-          </a:stretch>
-        </p:blipFill>
-        <p:spPr>
-          <a:xfrm>
-            <a:off x="5043340" y="1842866"/>
-            <a:ext cx="2105319" cy="3172268"/>
-          </a:xfrm>
-          <a:prstGeom prst="rect">
-            <a:avLst/>
-          </a:prstGeom>
-        </p:spPr>
-      </p:pic>
-    </p:spTree>
-    <p:extLst>
-      <p:ext uri="{BB962C8B-B14F-4D97-AF65-F5344CB8AC3E}">
-        <p14:creationId xmlns:p14="http://schemas.microsoft.com/office/powerpoint/2010/main" val="2672122669"/>
-      </p:ext>
-    </p:extLst>
-  </p:cSld>
-  <p:clrMapOvr>
-    <a:masterClrMapping/>
-  </p:clrMapOvr>
-</p:sld>
-</file>
-
-<file path=ppt/slides/slide32.xml><?xml version="1.0" encoding="utf-8"?>
-<p:sld xmlns:a="http://schemas.openxmlformats.org/drawingml/2006/main" xmlns:r="http://schemas.openxmlformats.org/officeDocument/2006/relationships" xmlns:p="http://schemas.openxmlformats.org/presentationml/2006/main">
-  <p:cSld>
-    <p:spTree>
-      <p:nvGrpSpPr>
-        <p:cNvPr id="1" name=""/>
-        <p:cNvGrpSpPr/>
-        <p:nvPr/>
-      </p:nvGrpSpPr>
-      <p:grpSpPr>
-        <a:xfrm>
-          <a:off x="0" y="0"/>
-          <a:ext cx="0" cy="0"/>
-          <a:chOff x="0" y="0"/>
-          <a:chExt cx="0" cy="0"/>
-        </a:xfrm>
-      </p:grpSpPr>
       <p:sp>
         <p:nvSpPr>
           <p:cNvPr id="2" name="矩形: 圆角 1">
@@ -29629,7 +28683,7 @@
 </p:sld>
 </file>
 
-<file path=ppt/slides/slide33.xml><?xml version="1.0" encoding="utf-8"?>
+<file path=ppt/slides/slide32.xml><?xml version="1.0" encoding="utf-8"?>
 <p:sld xmlns:a="http://schemas.openxmlformats.org/drawingml/2006/main" xmlns:r="http://schemas.openxmlformats.org/officeDocument/2006/relationships" xmlns:p="http://schemas.openxmlformats.org/presentationml/2006/main">
   <p:cSld>
     <p:spTree>
@@ -35412,3584 +34466,6 @@
       </p:grpSpPr>
       <p:sp>
         <p:nvSpPr>
-          <p:cNvPr id="3" name="矩形 2">
-            <a:extLst>
-              <a:ext uri="{FF2B5EF4-FFF2-40B4-BE49-F238E27FC236}">
-                <a16:creationId xmlns:a16="http://schemas.microsoft.com/office/drawing/2014/main" id="{7BFE180E-ABE5-8E60-4B59-6CA2D6B23612}"/>
-              </a:ext>
-            </a:extLst>
-          </p:cNvPr>
-          <p:cNvSpPr/>
-          <p:nvPr/>
-        </p:nvSpPr>
-        <p:spPr>
-          <a:xfrm>
-            <a:off x="1162062" y="941298"/>
-            <a:ext cx="1984550" cy="666914"/>
-          </a:xfrm>
-          <a:prstGeom prst="rect">
-            <a:avLst/>
-          </a:prstGeom>
-          <a:noFill/>
-        </p:spPr>
-        <p:style>
-          <a:lnRef idx="2">
-            <a:schemeClr val="accent1">
-              <a:shade val="15000"/>
-            </a:schemeClr>
-          </a:lnRef>
-          <a:fillRef idx="1">
-            <a:schemeClr val="accent1"/>
-          </a:fillRef>
-          <a:effectRef idx="0">
-            <a:schemeClr val="accent1"/>
-          </a:effectRef>
-          <a:fontRef idx="minor">
-            <a:schemeClr val="lt1"/>
-          </a:fontRef>
-        </p:style>
-        <p:txBody>
-          <a:bodyPr rtlCol="0" anchor="ctr"/>
-          <a:lstStyle/>
-          <a:p>
-            <a:pPr algn="ctr"/>
-            <a:endParaRPr lang="zh-CN" altLang="en-US"/>
-          </a:p>
-        </p:txBody>
-      </p:sp>
-      <p:grpSp>
-        <p:nvGrpSpPr>
-          <p:cNvPr id="28" name="组合 27">
-            <a:extLst>
-              <a:ext uri="{FF2B5EF4-FFF2-40B4-BE49-F238E27FC236}">
-                <a16:creationId xmlns:a16="http://schemas.microsoft.com/office/drawing/2014/main" id="{EEE51978-A443-A483-9810-F30672E49154}"/>
-              </a:ext>
-            </a:extLst>
-          </p:cNvPr>
-          <p:cNvGrpSpPr/>
-          <p:nvPr/>
-        </p:nvGrpSpPr>
-        <p:grpSpPr>
-          <a:xfrm>
-            <a:off x="1201985" y="1094755"/>
-            <a:ext cx="590549" cy="360000"/>
-            <a:chOff x="1385885" y="1017493"/>
-            <a:chExt cx="590549" cy="360000"/>
-          </a:xfrm>
-        </p:grpSpPr>
-        <p:pic>
-          <p:nvPicPr>
-            <p:cNvPr id="5" name="图形 4" descr="文档">
-              <a:extLst>
-                <a:ext uri="{FF2B5EF4-FFF2-40B4-BE49-F238E27FC236}">
-                  <a16:creationId xmlns:a16="http://schemas.microsoft.com/office/drawing/2014/main" id="{D592AA54-6817-6628-8E43-B1C0A007507B}"/>
-                </a:ext>
-              </a:extLst>
-            </p:cNvPr>
-            <p:cNvPicPr>
-              <a:picLocks noChangeAspect="1"/>
-            </p:cNvPicPr>
-            <p:nvPr/>
-          </p:nvPicPr>
-          <p:blipFill>
-            <a:blip r:embed="rId2">
-              <a:extLst>
-                <a:ext uri="{96DAC541-7B7A-43D3-8B79-37D633B846F1}">
-                  <asvg:svgBlip xmlns:asvg="http://schemas.microsoft.com/office/drawing/2016/SVG/main" r:embed="rId3"/>
-                </a:ext>
-              </a:extLst>
-            </a:blip>
-            <a:stretch>
-              <a:fillRect/>
-            </a:stretch>
-          </p:blipFill>
-          <p:spPr>
-            <a:xfrm>
-              <a:off x="1616434" y="1017493"/>
-              <a:ext cx="360000" cy="360000"/>
-            </a:xfrm>
-            <a:prstGeom prst="rect">
-              <a:avLst/>
-            </a:prstGeom>
-          </p:spPr>
-        </p:pic>
-        <p:sp>
-          <p:nvSpPr>
-            <p:cNvPr id="8" name="文本框 7">
-              <a:extLst>
-                <a:ext uri="{FF2B5EF4-FFF2-40B4-BE49-F238E27FC236}">
-                  <a16:creationId xmlns:a16="http://schemas.microsoft.com/office/drawing/2014/main" id="{106CC44C-DDBD-2221-C55E-AB74FEF9A77C}"/>
-                </a:ext>
-              </a:extLst>
-            </p:cNvPr>
-            <p:cNvSpPr txBox="1"/>
-            <p:nvPr/>
-          </p:nvSpPr>
-          <p:spPr>
-            <a:xfrm>
-              <a:off x="1385885" y="1058994"/>
-              <a:ext cx="370614" cy="276999"/>
-            </a:xfrm>
-            <a:prstGeom prst="rect">
-              <a:avLst/>
-            </a:prstGeom>
-            <a:noFill/>
-          </p:spPr>
-          <p:txBody>
-            <a:bodyPr wrap="none" rtlCol="0">
-              <a:spAutoFit/>
-            </a:bodyPr>
-            <a:lstStyle/>
-            <a:p>
-              <a:pPr algn="l"/>
-              <a:r>
-                <a:rPr lang="en-US" altLang="zh-CN" sz="1200" dirty="0">
-                  <a:solidFill>
-                    <a:srgbClr val="FF0000"/>
-                  </a:solidFill>
-                  <a:latin typeface="Courier New" panose="02070309020205020404" pitchFamily="49" charset="0"/>
-                  <a:ea typeface="微软雅黑" panose="020B0503020204020204" pitchFamily="34" charset="-122"/>
-                  <a:cs typeface="Courier New" panose="02070309020205020404" pitchFamily="49" charset="0"/>
-                </a:rPr>
-                <a:t>P1</a:t>
-              </a:r>
-              <a:endParaRPr lang="zh-CN" altLang="en-US" sz="1200" dirty="0">
-                <a:solidFill>
-                  <a:srgbClr val="FF0000"/>
-                </a:solidFill>
-                <a:latin typeface="Courier New" panose="02070309020205020404" pitchFamily="49" charset="0"/>
-                <a:ea typeface="微软雅黑" panose="020B0503020204020204" pitchFamily="34" charset="-122"/>
-                <a:cs typeface="Courier New" panose="02070309020205020404" pitchFamily="49" charset="0"/>
-              </a:endParaRPr>
-            </a:p>
-          </p:txBody>
-        </p:sp>
-      </p:grpSp>
-      <p:grpSp>
-        <p:nvGrpSpPr>
-          <p:cNvPr id="27" name="组合 26">
-            <a:extLst>
-              <a:ext uri="{FF2B5EF4-FFF2-40B4-BE49-F238E27FC236}">
-                <a16:creationId xmlns:a16="http://schemas.microsoft.com/office/drawing/2014/main" id="{EF8C590D-AE02-7479-0F90-FBBDFC7F636A}"/>
-              </a:ext>
-            </a:extLst>
-          </p:cNvPr>
-          <p:cNvGrpSpPr/>
-          <p:nvPr/>
-        </p:nvGrpSpPr>
-        <p:grpSpPr>
-          <a:xfrm>
-            <a:off x="1814238" y="1094755"/>
-            <a:ext cx="590549" cy="360000"/>
-            <a:chOff x="1890159" y="1017493"/>
-            <a:chExt cx="590549" cy="360000"/>
-          </a:xfrm>
-        </p:grpSpPr>
-        <p:pic>
-          <p:nvPicPr>
-            <p:cNvPr id="6" name="图形 5" descr="文档">
-              <a:extLst>
-                <a:ext uri="{FF2B5EF4-FFF2-40B4-BE49-F238E27FC236}">
-                  <a16:creationId xmlns:a16="http://schemas.microsoft.com/office/drawing/2014/main" id="{30029A1D-3142-A849-40F0-98C81931F497}"/>
-                </a:ext>
-              </a:extLst>
-            </p:cNvPr>
-            <p:cNvPicPr>
-              <a:picLocks noChangeAspect="1"/>
-            </p:cNvPicPr>
-            <p:nvPr/>
-          </p:nvPicPr>
-          <p:blipFill>
-            <a:blip r:embed="rId2">
-              <a:extLst>
-                <a:ext uri="{96DAC541-7B7A-43D3-8B79-37D633B846F1}">
-                  <asvg:svgBlip xmlns:asvg="http://schemas.microsoft.com/office/drawing/2016/SVG/main" r:embed="rId3"/>
-                </a:ext>
-              </a:extLst>
-            </a:blip>
-            <a:stretch>
-              <a:fillRect/>
-            </a:stretch>
-          </p:blipFill>
-          <p:spPr>
-            <a:xfrm>
-              <a:off x="2120708" y="1017493"/>
-              <a:ext cx="360000" cy="360000"/>
-            </a:xfrm>
-            <a:prstGeom prst="rect">
-              <a:avLst/>
-            </a:prstGeom>
-          </p:spPr>
-        </p:pic>
-        <p:sp>
-          <p:nvSpPr>
-            <p:cNvPr id="9" name="文本框 8">
-              <a:extLst>
-                <a:ext uri="{FF2B5EF4-FFF2-40B4-BE49-F238E27FC236}">
-                  <a16:creationId xmlns:a16="http://schemas.microsoft.com/office/drawing/2014/main" id="{C6AF8BFB-BC01-EA81-BBA3-2AEBB263CB35}"/>
-                </a:ext>
-              </a:extLst>
-            </p:cNvPr>
-            <p:cNvSpPr txBox="1"/>
-            <p:nvPr/>
-          </p:nvSpPr>
-          <p:spPr>
-            <a:xfrm>
-              <a:off x="1890159" y="1058994"/>
-              <a:ext cx="370614" cy="276999"/>
-            </a:xfrm>
-            <a:prstGeom prst="rect">
-              <a:avLst/>
-            </a:prstGeom>
-            <a:noFill/>
-          </p:spPr>
-          <p:txBody>
-            <a:bodyPr wrap="none" rtlCol="0">
-              <a:spAutoFit/>
-            </a:bodyPr>
-            <a:lstStyle/>
-            <a:p>
-              <a:pPr algn="l"/>
-              <a:r>
-                <a:rPr lang="en-US" altLang="zh-CN" sz="1200" dirty="0">
-                  <a:solidFill>
-                    <a:srgbClr val="FF0000"/>
-                  </a:solidFill>
-                  <a:latin typeface="Courier New" panose="02070309020205020404" pitchFamily="49" charset="0"/>
-                  <a:ea typeface="微软雅黑" panose="020B0503020204020204" pitchFamily="34" charset="-122"/>
-                  <a:cs typeface="Courier New" panose="02070309020205020404" pitchFamily="49" charset="0"/>
-                </a:rPr>
-                <a:t>P2</a:t>
-              </a:r>
-              <a:endParaRPr lang="zh-CN" altLang="en-US" sz="1200" dirty="0">
-                <a:solidFill>
-                  <a:srgbClr val="FF0000"/>
-                </a:solidFill>
-                <a:latin typeface="Courier New" panose="02070309020205020404" pitchFamily="49" charset="0"/>
-                <a:ea typeface="微软雅黑" panose="020B0503020204020204" pitchFamily="34" charset="-122"/>
-                <a:cs typeface="Courier New" panose="02070309020205020404" pitchFamily="49" charset="0"/>
-              </a:endParaRPr>
-            </a:p>
-          </p:txBody>
-        </p:sp>
-      </p:grpSp>
-      <p:grpSp>
-        <p:nvGrpSpPr>
-          <p:cNvPr id="26" name="组合 25">
-            <a:extLst>
-              <a:ext uri="{FF2B5EF4-FFF2-40B4-BE49-F238E27FC236}">
-                <a16:creationId xmlns:a16="http://schemas.microsoft.com/office/drawing/2014/main" id="{32CF8815-FB37-8F08-135C-44B7A215A80F}"/>
-              </a:ext>
-            </a:extLst>
-          </p:cNvPr>
-          <p:cNvGrpSpPr/>
-          <p:nvPr/>
-        </p:nvGrpSpPr>
-        <p:grpSpPr>
-          <a:xfrm>
-            <a:off x="2461950" y="1094755"/>
-            <a:ext cx="590549" cy="360000"/>
-            <a:chOff x="2394433" y="1017493"/>
-            <a:chExt cx="590549" cy="360000"/>
-          </a:xfrm>
-        </p:grpSpPr>
-        <p:pic>
-          <p:nvPicPr>
-            <p:cNvPr id="7" name="图形 6" descr="文档">
-              <a:extLst>
-                <a:ext uri="{FF2B5EF4-FFF2-40B4-BE49-F238E27FC236}">
-                  <a16:creationId xmlns:a16="http://schemas.microsoft.com/office/drawing/2014/main" id="{F9DE4040-A3A2-D7C4-282B-42E9C18507BF}"/>
-                </a:ext>
-              </a:extLst>
-            </p:cNvPr>
-            <p:cNvPicPr>
-              <a:picLocks noChangeAspect="1"/>
-            </p:cNvPicPr>
-            <p:nvPr/>
-          </p:nvPicPr>
-          <p:blipFill>
-            <a:blip r:embed="rId2">
-              <a:extLst>
-                <a:ext uri="{96DAC541-7B7A-43D3-8B79-37D633B846F1}">
-                  <asvg:svgBlip xmlns:asvg="http://schemas.microsoft.com/office/drawing/2016/SVG/main" r:embed="rId3"/>
-                </a:ext>
-              </a:extLst>
-            </a:blip>
-            <a:stretch>
-              <a:fillRect/>
-            </a:stretch>
-          </p:blipFill>
-          <p:spPr>
-            <a:xfrm>
-              <a:off x="2624982" y="1017493"/>
-              <a:ext cx="360000" cy="360000"/>
-            </a:xfrm>
-            <a:prstGeom prst="rect">
-              <a:avLst/>
-            </a:prstGeom>
-          </p:spPr>
-        </p:pic>
-        <p:sp>
-          <p:nvSpPr>
-            <p:cNvPr id="10" name="文本框 9">
-              <a:extLst>
-                <a:ext uri="{FF2B5EF4-FFF2-40B4-BE49-F238E27FC236}">
-                  <a16:creationId xmlns:a16="http://schemas.microsoft.com/office/drawing/2014/main" id="{AEBB5379-D08A-58CF-929D-278588283330}"/>
-                </a:ext>
-              </a:extLst>
-            </p:cNvPr>
-            <p:cNvSpPr txBox="1"/>
-            <p:nvPr/>
-          </p:nvSpPr>
-          <p:spPr>
-            <a:xfrm>
-              <a:off x="2394433" y="1058994"/>
-              <a:ext cx="370614" cy="276999"/>
-            </a:xfrm>
-            <a:prstGeom prst="rect">
-              <a:avLst/>
-            </a:prstGeom>
-            <a:noFill/>
-          </p:spPr>
-          <p:txBody>
-            <a:bodyPr wrap="none" rtlCol="0">
-              <a:spAutoFit/>
-            </a:bodyPr>
-            <a:lstStyle/>
-            <a:p>
-              <a:pPr algn="l"/>
-              <a:r>
-                <a:rPr lang="en-US" altLang="zh-CN" sz="1200" dirty="0">
-                  <a:latin typeface="Courier New" panose="02070309020205020404" pitchFamily="49" charset="0"/>
-                  <a:ea typeface="微软雅黑" panose="020B0503020204020204" pitchFamily="34" charset="-122"/>
-                  <a:cs typeface="Courier New" panose="02070309020205020404" pitchFamily="49" charset="0"/>
-                </a:rPr>
-                <a:t>P3</a:t>
-              </a:r>
-              <a:endParaRPr lang="zh-CN" altLang="en-US" sz="1200" dirty="0">
-                <a:latin typeface="Courier New" panose="02070309020205020404" pitchFamily="49" charset="0"/>
-                <a:ea typeface="微软雅黑" panose="020B0503020204020204" pitchFamily="34" charset="-122"/>
-                <a:cs typeface="Courier New" panose="02070309020205020404" pitchFamily="49" charset="0"/>
-              </a:endParaRPr>
-            </a:p>
-          </p:txBody>
-        </p:sp>
-      </p:grpSp>
-      <p:grpSp>
-        <p:nvGrpSpPr>
-          <p:cNvPr id="31" name="组合 30">
-            <a:extLst>
-              <a:ext uri="{FF2B5EF4-FFF2-40B4-BE49-F238E27FC236}">
-                <a16:creationId xmlns:a16="http://schemas.microsoft.com/office/drawing/2014/main" id="{FFF33479-772D-E44E-423D-6B3E220FAB77}"/>
-              </a:ext>
-            </a:extLst>
-          </p:cNvPr>
-          <p:cNvGrpSpPr/>
-          <p:nvPr/>
-        </p:nvGrpSpPr>
-        <p:grpSpPr>
-          <a:xfrm>
-            <a:off x="5313157" y="1134038"/>
-            <a:ext cx="590549" cy="360000"/>
-            <a:chOff x="1385885" y="1017493"/>
-            <a:chExt cx="590549" cy="360000"/>
-          </a:xfrm>
-        </p:grpSpPr>
-        <p:pic>
-          <p:nvPicPr>
-            <p:cNvPr id="38" name="图形 37" descr="文档">
-              <a:extLst>
-                <a:ext uri="{FF2B5EF4-FFF2-40B4-BE49-F238E27FC236}">
-                  <a16:creationId xmlns:a16="http://schemas.microsoft.com/office/drawing/2014/main" id="{DDBB9DFE-CD76-50F1-DA80-6B5074DDC07E}"/>
-                </a:ext>
-              </a:extLst>
-            </p:cNvPr>
-            <p:cNvPicPr>
-              <a:picLocks noChangeAspect="1"/>
-            </p:cNvPicPr>
-            <p:nvPr/>
-          </p:nvPicPr>
-          <p:blipFill>
-            <a:blip r:embed="rId2">
-              <a:extLst>
-                <a:ext uri="{96DAC541-7B7A-43D3-8B79-37D633B846F1}">
-                  <asvg:svgBlip xmlns:asvg="http://schemas.microsoft.com/office/drawing/2016/SVG/main" r:embed="rId3"/>
-                </a:ext>
-              </a:extLst>
-            </a:blip>
-            <a:stretch>
-              <a:fillRect/>
-            </a:stretch>
-          </p:blipFill>
-          <p:spPr>
-            <a:xfrm>
-              <a:off x="1616434" y="1017493"/>
-              <a:ext cx="360000" cy="360000"/>
-            </a:xfrm>
-            <a:prstGeom prst="rect">
-              <a:avLst/>
-            </a:prstGeom>
-          </p:spPr>
-        </p:pic>
-        <p:sp>
-          <p:nvSpPr>
-            <p:cNvPr id="39" name="文本框 38">
-              <a:extLst>
-                <a:ext uri="{FF2B5EF4-FFF2-40B4-BE49-F238E27FC236}">
-                  <a16:creationId xmlns:a16="http://schemas.microsoft.com/office/drawing/2014/main" id="{2D63B797-FD37-FC99-7EA7-971D5F5AD65A}"/>
-                </a:ext>
-              </a:extLst>
-            </p:cNvPr>
-            <p:cNvSpPr txBox="1"/>
-            <p:nvPr/>
-          </p:nvSpPr>
-          <p:spPr>
-            <a:xfrm>
-              <a:off x="1385885" y="1058994"/>
-              <a:ext cx="370614" cy="276999"/>
-            </a:xfrm>
-            <a:prstGeom prst="rect">
-              <a:avLst/>
-            </a:prstGeom>
-            <a:noFill/>
-          </p:spPr>
-          <p:txBody>
-            <a:bodyPr wrap="none" rtlCol="0">
-              <a:spAutoFit/>
-            </a:bodyPr>
-            <a:lstStyle/>
-            <a:p>
-              <a:pPr algn="l"/>
-              <a:r>
-                <a:rPr lang="en-US" altLang="zh-CN" sz="1200" dirty="0">
-                  <a:solidFill>
-                    <a:srgbClr val="FF0000"/>
-                  </a:solidFill>
-                  <a:latin typeface="Courier New" panose="02070309020205020404" pitchFamily="49" charset="0"/>
-                  <a:ea typeface="微软雅黑" panose="020B0503020204020204" pitchFamily="34" charset="-122"/>
-                  <a:cs typeface="Courier New" panose="02070309020205020404" pitchFamily="49" charset="0"/>
-                </a:rPr>
-                <a:t>P4</a:t>
-              </a:r>
-              <a:endParaRPr lang="zh-CN" altLang="en-US" sz="1200" dirty="0">
-                <a:solidFill>
-                  <a:srgbClr val="FF0000"/>
-                </a:solidFill>
-                <a:latin typeface="Courier New" panose="02070309020205020404" pitchFamily="49" charset="0"/>
-                <a:ea typeface="微软雅黑" panose="020B0503020204020204" pitchFamily="34" charset="-122"/>
-                <a:cs typeface="Courier New" panose="02070309020205020404" pitchFamily="49" charset="0"/>
-              </a:endParaRPr>
-            </a:p>
-          </p:txBody>
-        </p:sp>
-      </p:grpSp>
-      <p:grpSp>
-        <p:nvGrpSpPr>
-          <p:cNvPr id="32" name="组合 31">
-            <a:extLst>
-              <a:ext uri="{FF2B5EF4-FFF2-40B4-BE49-F238E27FC236}">
-                <a16:creationId xmlns:a16="http://schemas.microsoft.com/office/drawing/2014/main" id="{DCCFFB73-5D89-6A4D-E232-39B07CB34469}"/>
-              </a:ext>
-            </a:extLst>
-          </p:cNvPr>
-          <p:cNvGrpSpPr/>
-          <p:nvPr/>
-        </p:nvGrpSpPr>
-        <p:grpSpPr>
-          <a:xfrm>
-            <a:off x="6113940" y="1134038"/>
-            <a:ext cx="590549" cy="360000"/>
-            <a:chOff x="1890159" y="1017493"/>
-            <a:chExt cx="590549" cy="360000"/>
-          </a:xfrm>
-        </p:grpSpPr>
-        <p:pic>
-          <p:nvPicPr>
-            <p:cNvPr id="36" name="图形 35" descr="文档">
-              <a:extLst>
-                <a:ext uri="{FF2B5EF4-FFF2-40B4-BE49-F238E27FC236}">
-                  <a16:creationId xmlns:a16="http://schemas.microsoft.com/office/drawing/2014/main" id="{1930C0F1-9FF2-AC85-BE65-1154DEE47C31}"/>
-                </a:ext>
-              </a:extLst>
-            </p:cNvPr>
-            <p:cNvPicPr>
-              <a:picLocks noChangeAspect="1"/>
-            </p:cNvPicPr>
-            <p:nvPr/>
-          </p:nvPicPr>
-          <p:blipFill>
-            <a:blip r:embed="rId2">
-              <a:extLst>
-                <a:ext uri="{96DAC541-7B7A-43D3-8B79-37D633B846F1}">
-                  <asvg:svgBlip xmlns:asvg="http://schemas.microsoft.com/office/drawing/2016/SVG/main" r:embed="rId3"/>
-                </a:ext>
-              </a:extLst>
-            </a:blip>
-            <a:stretch>
-              <a:fillRect/>
-            </a:stretch>
-          </p:blipFill>
-          <p:spPr>
-            <a:xfrm>
-              <a:off x="2120708" y="1017493"/>
-              <a:ext cx="360000" cy="360000"/>
-            </a:xfrm>
-            <a:prstGeom prst="rect">
-              <a:avLst/>
-            </a:prstGeom>
-          </p:spPr>
-        </p:pic>
-        <p:sp>
-          <p:nvSpPr>
-            <p:cNvPr id="37" name="文本框 36">
-              <a:extLst>
-                <a:ext uri="{FF2B5EF4-FFF2-40B4-BE49-F238E27FC236}">
-                  <a16:creationId xmlns:a16="http://schemas.microsoft.com/office/drawing/2014/main" id="{CCBEDC82-7F2D-2DD6-B054-1BA61E5F6B8E}"/>
-                </a:ext>
-              </a:extLst>
-            </p:cNvPr>
-            <p:cNvSpPr txBox="1"/>
-            <p:nvPr/>
-          </p:nvSpPr>
-          <p:spPr>
-            <a:xfrm>
-              <a:off x="1890159" y="1058994"/>
-              <a:ext cx="370614" cy="276999"/>
-            </a:xfrm>
-            <a:prstGeom prst="rect">
-              <a:avLst/>
-            </a:prstGeom>
-            <a:noFill/>
-          </p:spPr>
-          <p:txBody>
-            <a:bodyPr wrap="none" rtlCol="0">
-              <a:spAutoFit/>
-            </a:bodyPr>
-            <a:lstStyle/>
-            <a:p>
-              <a:pPr algn="l"/>
-              <a:r>
-                <a:rPr lang="en-US" altLang="zh-CN" sz="1200" dirty="0">
-                  <a:solidFill>
-                    <a:srgbClr val="20BD6A"/>
-                  </a:solidFill>
-                  <a:latin typeface="Courier New" panose="02070309020205020404" pitchFamily="49" charset="0"/>
-                  <a:ea typeface="微软雅黑" panose="020B0503020204020204" pitchFamily="34" charset="-122"/>
-                  <a:cs typeface="Courier New" panose="02070309020205020404" pitchFamily="49" charset="0"/>
-                </a:rPr>
-                <a:t>P5</a:t>
-              </a:r>
-              <a:endParaRPr lang="zh-CN" altLang="en-US" sz="1200" dirty="0">
-                <a:solidFill>
-                  <a:srgbClr val="20BD6A"/>
-                </a:solidFill>
-                <a:latin typeface="Courier New" panose="02070309020205020404" pitchFamily="49" charset="0"/>
-                <a:ea typeface="微软雅黑" panose="020B0503020204020204" pitchFamily="34" charset="-122"/>
-                <a:cs typeface="Courier New" panose="02070309020205020404" pitchFamily="49" charset="0"/>
-              </a:endParaRPr>
-            </a:p>
-          </p:txBody>
-        </p:sp>
-      </p:grpSp>
-      <p:grpSp>
-        <p:nvGrpSpPr>
-          <p:cNvPr id="49" name="组合 48">
-            <a:extLst>
-              <a:ext uri="{FF2B5EF4-FFF2-40B4-BE49-F238E27FC236}">
-                <a16:creationId xmlns:a16="http://schemas.microsoft.com/office/drawing/2014/main" id="{C87BABE2-7EA3-18A8-2B61-DFB9D7DBC833}"/>
-              </a:ext>
-            </a:extLst>
-          </p:cNvPr>
-          <p:cNvGrpSpPr/>
-          <p:nvPr/>
-        </p:nvGrpSpPr>
-        <p:grpSpPr>
-          <a:xfrm>
-            <a:off x="1858929" y="1587810"/>
-            <a:ext cx="500364" cy="360000"/>
-            <a:chOff x="6021196" y="1927412"/>
-            <a:chExt cx="500364" cy="360000"/>
-          </a:xfrm>
-        </p:grpSpPr>
-        <p:sp>
-          <p:nvSpPr>
-            <p:cNvPr id="40" name="矩形 39">
-              <a:extLst>
-                <a:ext uri="{FF2B5EF4-FFF2-40B4-BE49-F238E27FC236}">
-                  <a16:creationId xmlns:a16="http://schemas.microsoft.com/office/drawing/2014/main" id="{2C4388B8-41C7-7966-AF7E-68FC733CD07E}"/>
-                </a:ext>
-              </a:extLst>
-            </p:cNvPr>
-            <p:cNvSpPr/>
-            <p:nvPr/>
-          </p:nvSpPr>
-          <p:spPr>
-            <a:xfrm>
-              <a:off x="6233560" y="1927412"/>
-              <a:ext cx="288000" cy="72000"/>
-            </a:xfrm>
-            <a:prstGeom prst="rect">
-              <a:avLst/>
-            </a:prstGeom>
-            <a:solidFill>
-              <a:schemeClr val="bg1">
-                <a:lumMod val="85000"/>
-              </a:schemeClr>
-            </a:solidFill>
-            <a:ln>
-              <a:noFill/>
-            </a:ln>
-          </p:spPr>
-          <p:style>
-            <a:lnRef idx="2">
-              <a:schemeClr val="accent1">
-                <a:shade val="15000"/>
-              </a:schemeClr>
-            </a:lnRef>
-            <a:fillRef idx="1">
-              <a:schemeClr val="accent1"/>
-            </a:fillRef>
-            <a:effectRef idx="0">
-              <a:schemeClr val="accent1"/>
-            </a:effectRef>
-            <a:fontRef idx="minor">
-              <a:schemeClr val="lt1"/>
-            </a:fontRef>
-          </p:style>
-          <p:txBody>
-            <a:bodyPr rtlCol="0" anchor="ctr"/>
-            <a:lstStyle/>
-            <a:p>
-              <a:pPr algn="ctr"/>
-              <a:endParaRPr lang="zh-CN" altLang="en-US"/>
-            </a:p>
-          </p:txBody>
-        </p:sp>
-        <p:sp>
-          <p:nvSpPr>
-            <p:cNvPr id="41" name="矩形 40">
-              <a:extLst>
-                <a:ext uri="{FF2B5EF4-FFF2-40B4-BE49-F238E27FC236}">
-                  <a16:creationId xmlns:a16="http://schemas.microsoft.com/office/drawing/2014/main" id="{1FA6612F-5465-D46C-E103-4027D25A0D71}"/>
-                </a:ext>
-              </a:extLst>
-            </p:cNvPr>
-            <p:cNvSpPr/>
-            <p:nvPr/>
-          </p:nvSpPr>
-          <p:spPr>
-            <a:xfrm>
-              <a:off x="6233560" y="2157812"/>
-              <a:ext cx="288000" cy="72000"/>
-            </a:xfrm>
-            <a:prstGeom prst="rect">
-              <a:avLst/>
-            </a:prstGeom>
-            <a:solidFill>
-              <a:schemeClr val="bg1">
-                <a:lumMod val="95000"/>
-              </a:schemeClr>
-            </a:solidFill>
-            <a:ln>
-              <a:noFill/>
-            </a:ln>
-          </p:spPr>
-          <p:style>
-            <a:lnRef idx="2">
-              <a:schemeClr val="accent1">
-                <a:shade val="15000"/>
-              </a:schemeClr>
-            </a:lnRef>
-            <a:fillRef idx="1">
-              <a:schemeClr val="accent1"/>
-            </a:fillRef>
-            <a:effectRef idx="0">
-              <a:schemeClr val="accent1"/>
-            </a:effectRef>
-            <a:fontRef idx="minor">
-              <a:schemeClr val="lt1"/>
-            </a:fontRef>
-          </p:style>
-          <p:txBody>
-            <a:bodyPr rtlCol="0" anchor="ctr"/>
-            <a:lstStyle/>
-            <a:p>
-              <a:pPr algn="ctr"/>
-              <a:endParaRPr lang="zh-CN" altLang="en-US"/>
-            </a:p>
-          </p:txBody>
-        </p:sp>
-        <p:sp>
-          <p:nvSpPr>
-            <p:cNvPr id="42" name="矩形 41">
-              <a:extLst>
-                <a:ext uri="{FF2B5EF4-FFF2-40B4-BE49-F238E27FC236}">
-                  <a16:creationId xmlns:a16="http://schemas.microsoft.com/office/drawing/2014/main" id="{C2FC505B-0DC7-5836-2B96-0A02A442F905}"/>
-                </a:ext>
-              </a:extLst>
-            </p:cNvPr>
-            <p:cNvSpPr/>
-            <p:nvPr/>
-          </p:nvSpPr>
-          <p:spPr>
-            <a:xfrm>
-              <a:off x="6233560" y="2215412"/>
-              <a:ext cx="288000" cy="72000"/>
-            </a:xfrm>
-            <a:prstGeom prst="rect">
-              <a:avLst/>
-            </a:prstGeom>
-            <a:solidFill>
-              <a:schemeClr val="bg1">
-                <a:lumMod val="95000"/>
-              </a:schemeClr>
-            </a:solidFill>
-            <a:ln>
-              <a:noFill/>
-            </a:ln>
-          </p:spPr>
-          <p:style>
-            <a:lnRef idx="2">
-              <a:schemeClr val="accent1">
-                <a:shade val="15000"/>
-              </a:schemeClr>
-            </a:lnRef>
-            <a:fillRef idx="1">
-              <a:schemeClr val="accent1"/>
-            </a:fillRef>
-            <a:effectRef idx="0">
-              <a:schemeClr val="accent1"/>
-            </a:effectRef>
-            <a:fontRef idx="minor">
-              <a:schemeClr val="lt1"/>
-            </a:fontRef>
-          </p:style>
-          <p:txBody>
-            <a:bodyPr rtlCol="0" anchor="ctr"/>
-            <a:lstStyle/>
-            <a:p>
-              <a:pPr algn="ctr"/>
-              <a:endParaRPr lang="zh-CN" altLang="en-US"/>
-            </a:p>
-          </p:txBody>
-        </p:sp>
-        <p:sp>
-          <p:nvSpPr>
-            <p:cNvPr id="43" name="矩形 42">
-              <a:extLst>
-                <a:ext uri="{FF2B5EF4-FFF2-40B4-BE49-F238E27FC236}">
-                  <a16:creationId xmlns:a16="http://schemas.microsoft.com/office/drawing/2014/main" id="{B4830477-DBD1-836B-1EA6-0CCBBBFA3971}"/>
-                </a:ext>
-              </a:extLst>
-            </p:cNvPr>
-            <p:cNvSpPr/>
-            <p:nvPr/>
-          </p:nvSpPr>
-          <p:spPr>
-            <a:xfrm>
-              <a:off x="6233560" y="1985012"/>
-              <a:ext cx="288000" cy="72000"/>
-            </a:xfrm>
-            <a:prstGeom prst="rect">
-              <a:avLst/>
-            </a:prstGeom>
-            <a:solidFill>
-              <a:schemeClr val="bg1">
-                <a:lumMod val="85000"/>
-              </a:schemeClr>
-            </a:solidFill>
-            <a:ln>
-              <a:noFill/>
-            </a:ln>
-          </p:spPr>
-          <p:style>
-            <a:lnRef idx="2">
-              <a:schemeClr val="accent1">
-                <a:shade val="15000"/>
-              </a:schemeClr>
-            </a:lnRef>
-            <a:fillRef idx="1">
-              <a:schemeClr val="accent1"/>
-            </a:fillRef>
-            <a:effectRef idx="0">
-              <a:schemeClr val="accent1"/>
-            </a:effectRef>
-            <a:fontRef idx="minor">
-              <a:schemeClr val="lt1"/>
-            </a:fontRef>
-          </p:style>
-          <p:txBody>
-            <a:bodyPr rtlCol="0" anchor="ctr"/>
-            <a:lstStyle/>
-            <a:p>
-              <a:pPr algn="ctr"/>
-              <a:endParaRPr lang="zh-CN" altLang="en-US"/>
-            </a:p>
-          </p:txBody>
-        </p:sp>
-        <p:sp>
-          <p:nvSpPr>
-            <p:cNvPr id="44" name="矩形 43">
-              <a:extLst>
-                <a:ext uri="{FF2B5EF4-FFF2-40B4-BE49-F238E27FC236}">
-                  <a16:creationId xmlns:a16="http://schemas.microsoft.com/office/drawing/2014/main" id="{40C3A5DF-752B-5061-EFA6-D5EBE06C766F}"/>
-                </a:ext>
-              </a:extLst>
-            </p:cNvPr>
-            <p:cNvSpPr/>
-            <p:nvPr/>
-          </p:nvSpPr>
-          <p:spPr>
-            <a:xfrm>
-              <a:off x="6233560" y="2042612"/>
-              <a:ext cx="288000" cy="72000"/>
-            </a:xfrm>
-            <a:prstGeom prst="rect">
-              <a:avLst/>
-            </a:prstGeom>
-            <a:solidFill>
-              <a:schemeClr val="bg1">
-                <a:lumMod val="95000"/>
-              </a:schemeClr>
-            </a:solidFill>
-            <a:ln>
-              <a:noFill/>
-            </a:ln>
-          </p:spPr>
-          <p:style>
-            <a:lnRef idx="2">
-              <a:schemeClr val="accent1">
-                <a:shade val="15000"/>
-              </a:schemeClr>
-            </a:lnRef>
-            <a:fillRef idx="1">
-              <a:schemeClr val="accent1"/>
-            </a:fillRef>
-            <a:effectRef idx="0">
-              <a:schemeClr val="accent1"/>
-            </a:effectRef>
-            <a:fontRef idx="minor">
-              <a:schemeClr val="lt1"/>
-            </a:fontRef>
-          </p:style>
-          <p:txBody>
-            <a:bodyPr rtlCol="0" anchor="ctr"/>
-            <a:lstStyle/>
-            <a:p>
-              <a:pPr algn="ctr"/>
-              <a:endParaRPr lang="zh-CN" altLang="en-US"/>
-            </a:p>
-          </p:txBody>
-        </p:sp>
-        <p:sp>
-          <p:nvSpPr>
-            <p:cNvPr id="45" name="矩形 44">
-              <a:extLst>
-                <a:ext uri="{FF2B5EF4-FFF2-40B4-BE49-F238E27FC236}">
-                  <a16:creationId xmlns:a16="http://schemas.microsoft.com/office/drawing/2014/main" id="{0C62FA6C-2638-63CB-F4A7-A2A3D9BDC1EA}"/>
-                </a:ext>
-              </a:extLst>
-            </p:cNvPr>
-            <p:cNvSpPr/>
-            <p:nvPr/>
-          </p:nvSpPr>
-          <p:spPr>
-            <a:xfrm>
-              <a:off x="6233560" y="2100212"/>
-              <a:ext cx="288000" cy="72000"/>
-            </a:xfrm>
-            <a:prstGeom prst="rect">
-              <a:avLst/>
-            </a:prstGeom>
-            <a:solidFill>
-              <a:schemeClr val="bg1">
-                <a:lumMod val="95000"/>
-              </a:schemeClr>
-            </a:solidFill>
-            <a:ln>
-              <a:noFill/>
-            </a:ln>
-          </p:spPr>
-          <p:style>
-            <a:lnRef idx="2">
-              <a:schemeClr val="accent1">
-                <a:shade val="15000"/>
-              </a:schemeClr>
-            </a:lnRef>
-            <a:fillRef idx="1">
-              <a:schemeClr val="accent1"/>
-            </a:fillRef>
-            <a:effectRef idx="0">
-              <a:schemeClr val="accent1"/>
-            </a:effectRef>
-            <a:fontRef idx="minor">
-              <a:schemeClr val="lt1"/>
-            </a:fontRef>
-          </p:style>
-          <p:txBody>
-            <a:bodyPr rtlCol="0" anchor="ctr"/>
-            <a:lstStyle/>
-            <a:p>
-              <a:pPr algn="ctr"/>
-              <a:endParaRPr lang="zh-CN" altLang="en-US"/>
-            </a:p>
-          </p:txBody>
-        </p:sp>
-        <p:sp>
-          <p:nvSpPr>
-            <p:cNvPr id="47" name="文本框 46">
-              <a:extLst>
-                <a:ext uri="{FF2B5EF4-FFF2-40B4-BE49-F238E27FC236}">
-                  <a16:creationId xmlns:a16="http://schemas.microsoft.com/office/drawing/2014/main" id="{A53E4717-44C1-8BA9-0660-C66F67B79A6A}"/>
-                </a:ext>
-              </a:extLst>
-            </p:cNvPr>
-            <p:cNvSpPr txBox="1"/>
-            <p:nvPr/>
-          </p:nvSpPr>
-          <p:spPr>
-            <a:xfrm>
-              <a:off x="6021196" y="1968913"/>
-              <a:ext cx="277640" cy="276999"/>
-            </a:xfrm>
-            <a:prstGeom prst="rect">
-              <a:avLst/>
-            </a:prstGeom>
-            <a:noFill/>
-          </p:spPr>
-          <p:txBody>
-            <a:bodyPr wrap="none" rtlCol="0">
-              <a:spAutoFit/>
-            </a:bodyPr>
-            <a:lstStyle/>
-            <a:p>
-              <a:pPr algn="l"/>
-              <a:r>
-                <a:rPr lang="en-US" altLang="zh-CN" sz="1200" dirty="0">
-                  <a:solidFill>
-                    <a:srgbClr val="FF0000"/>
-                  </a:solidFill>
-                  <a:latin typeface="Courier New" panose="02070309020205020404" pitchFamily="49" charset="0"/>
-                  <a:ea typeface="微软雅黑" panose="020B0503020204020204" pitchFamily="34" charset="-122"/>
-                  <a:cs typeface="Courier New" panose="02070309020205020404" pitchFamily="49" charset="0"/>
-                </a:rPr>
-                <a:t>b</a:t>
-              </a:r>
-              <a:endParaRPr lang="zh-CN" altLang="en-US" sz="1200" dirty="0">
-                <a:solidFill>
-                  <a:srgbClr val="FF0000"/>
-                </a:solidFill>
-                <a:latin typeface="Courier New" panose="02070309020205020404" pitchFamily="49" charset="0"/>
-                <a:ea typeface="微软雅黑" panose="020B0503020204020204" pitchFamily="34" charset="-122"/>
-                <a:cs typeface="Courier New" panose="02070309020205020404" pitchFamily="49" charset="0"/>
-              </a:endParaRPr>
-            </a:p>
-          </p:txBody>
-        </p:sp>
-      </p:grpSp>
-      <p:grpSp>
-        <p:nvGrpSpPr>
-          <p:cNvPr id="50" name="组合 49">
-            <a:extLst>
-              <a:ext uri="{FF2B5EF4-FFF2-40B4-BE49-F238E27FC236}">
-                <a16:creationId xmlns:a16="http://schemas.microsoft.com/office/drawing/2014/main" id="{5E6B5F9C-3DF1-1A06-2457-90F50CE5E760}"/>
-              </a:ext>
-            </a:extLst>
-          </p:cNvPr>
-          <p:cNvGrpSpPr/>
-          <p:nvPr/>
-        </p:nvGrpSpPr>
-        <p:grpSpPr>
-          <a:xfrm>
-            <a:off x="2516275" y="1587810"/>
-            <a:ext cx="500364" cy="360000"/>
-            <a:chOff x="6021196" y="1927412"/>
-            <a:chExt cx="500364" cy="360000"/>
-          </a:xfrm>
-        </p:grpSpPr>
-        <p:sp>
-          <p:nvSpPr>
-            <p:cNvPr id="51" name="矩形 50">
-              <a:extLst>
-                <a:ext uri="{FF2B5EF4-FFF2-40B4-BE49-F238E27FC236}">
-                  <a16:creationId xmlns:a16="http://schemas.microsoft.com/office/drawing/2014/main" id="{9082ED9C-9ACF-F7E4-A84A-02C00C613563}"/>
-                </a:ext>
-              </a:extLst>
-            </p:cNvPr>
-            <p:cNvSpPr/>
-            <p:nvPr/>
-          </p:nvSpPr>
-          <p:spPr>
-            <a:xfrm>
-              <a:off x="6233560" y="1927412"/>
-              <a:ext cx="288000" cy="72000"/>
-            </a:xfrm>
-            <a:prstGeom prst="rect">
-              <a:avLst/>
-            </a:prstGeom>
-            <a:solidFill>
-              <a:schemeClr val="bg1">
-                <a:lumMod val="85000"/>
-              </a:schemeClr>
-            </a:solidFill>
-            <a:ln>
-              <a:noFill/>
-            </a:ln>
-          </p:spPr>
-          <p:style>
-            <a:lnRef idx="2">
-              <a:schemeClr val="accent1">
-                <a:shade val="15000"/>
-              </a:schemeClr>
-            </a:lnRef>
-            <a:fillRef idx="1">
-              <a:schemeClr val="accent1"/>
-            </a:fillRef>
-            <a:effectRef idx="0">
-              <a:schemeClr val="accent1"/>
-            </a:effectRef>
-            <a:fontRef idx="minor">
-              <a:schemeClr val="lt1"/>
-            </a:fontRef>
-          </p:style>
-          <p:txBody>
-            <a:bodyPr rtlCol="0" anchor="ctr"/>
-            <a:lstStyle/>
-            <a:p>
-              <a:pPr algn="ctr"/>
-              <a:endParaRPr lang="zh-CN" altLang="en-US"/>
-            </a:p>
-          </p:txBody>
-        </p:sp>
-        <p:sp>
-          <p:nvSpPr>
-            <p:cNvPr id="52" name="矩形 51">
-              <a:extLst>
-                <a:ext uri="{FF2B5EF4-FFF2-40B4-BE49-F238E27FC236}">
-                  <a16:creationId xmlns:a16="http://schemas.microsoft.com/office/drawing/2014/main" id="{0FD4FFCB-DE31-D71C-87FD-EA974E2AA517}"/>
-                </a:ext>
-              </a:extLst>
-            </p:cNvPr>
-            <p:cNvSpPr/>
-            <p:nvPr/>
-          </p:nvSpPr>
-          <p:spPr>
-            <a:xfrm>
-              <a:off x="6233560" y="2157812"/>
-              <a:ext cx="288000" cy="72000"/>
-            </a:xfrm>
-            <a:prstGeom prst="rect">
-              <a:avLst/>
-            </a:prstGeom>
-            <a:solidFill>
-              <a:schemeClr val="bg1">
-                <a:lumMod val="95000"/>
-              </a:schemeClr>
-            </a:solidFill>
-            <a:ln>
-              <a:noFill/>
-            </a:ln>
-          </p:spPr>
-          <p:style>
-            <a:lnRef idx="2">
-              <a:schemeClr val="accent1">
-                <a:shade val="15000"/>
-              </a:schemeClr>
-            </a:lnRef>
-            <a:fillRef idx="1">
-              <a:schemeClr val="accent1"/>
-            </a:fillRef>
-            <a:effectRef idx="0">
-              <a:schemeClr val="accent1"/>
-            </a:effectRef>
-            <a:fontRef idx="minor">
-              <a:schemeClr val="lt1"/>
-            </a:fontRef>
-          </p:style>
-          <p:txBody>
-            <a:bodyPr rtlCol="0" anchor="ctr"/>
-            <a:lstStyle/>
-            <a:p>
-              <a:pPr algn="ctr"/>
-              <a:endParaRPr lang="zh-CN" altLang="en-US"/>
-            </a:p>
-          </p:txBody>
-        </p:sp>
-        <p:sp>
-          <p:nvSpPr>
-            <p:cNvPr id="53" name="矩形 52">
-              <a:extLst>
-                <a:ext uri="{FF2B5EF4-FFF2-40B4-BE49-F238E27FC236}">
-                  <a16:creationId xmlns:a16="http://schemas.microsoft.com/office/drawing/2014/main" id="{F4FFC7B0-91DF-0748-7AB7-DACE9A82AB79}"/>
-                </a:ext>
-              </a:extLst>
-            </p:cNvPr>
-            <p:cNvSpPr/>
-            <p:nvPr/>
-          </p:nvSpPr>
-          <p:spPr>
-            <a:xfrm>
-              <a:off x="6233560" y="2215412"/>
-              <a:ext cx="288000" cy="72000"/>
-            </a:xfrm>
-            <a:prstGeom prst="rect">
-              <a:avLst/>
-            </a:prstGeom>
-            <a:solidFill>
-              <a:schemeClr val="bg1">
-                <a:lumMod val="95000"/>
-              </a:schemeClr>
-            </a:solidFill>
-            <a:ln>
-              <a:noFill/>
-            </a:ln>
-          </p:spPr>
-          <p:style>
-            <a:lnRef idx="2">
-              <a:schemeClr val="accent1">
-                <a:shade val="15000"/>
-              </a:schemeClr>
-            </a:lnRef>
-            <a:fillRef idx="1">
-              <a:schemeClr val="accent1"/>
-            </a:fillRef>
-            <a:effectRef idx="0">
-              <a:schemeClr val="accent1"/>
-            </a:effectRef>
-            <a:fontRef idx="minor">
-              <a:schemeClr val="lt1"/>
-            </a:fontRef>
-          </p:style>
-          <p:txBody>
-            <a:bodyPr rtlCol="0" anchor="ctr"/>
-            <a:lstStyle/>
-            <a:p>
-              <a:pPr algn="ctr"/>
-              <a:endParaRPr lang="zh-CN" altLang="en-US"/>
-            </a:p>
-          </p:txBody>
-        </p:sp>
-        <p:sp>
-          <p:nvSpPr>
-            <p:cNvPr id="54" name="矩形 53">
-              <a:extLst>
-                <a:ext uri="{FF2B5EF4-FFF2-40B4-BE49-F238E27FC236}">
-                  <a16:creationId xmlns:a16="http://schemas.microsoft.com/office/drawing/2014/main" id="{11E2C48D-8950-5CCC-D008-F49615A59FBD}"/>
-                </a:ext>
-              </a:extLst>
-            </p:cNvPr>
-            <p:cNvSpPr/>
-            <p:nvPr/>
-          </p:nvSpPr>
-          <p:spPr>
-            <a:xfrm>
-              <a:off x="6233560" y="1985012"/>
-              <a:ext cx="288000" cy="72000"/>
-            </a:xfrm>
-            <a:prstGeom prst="rect">
-              <a:avLst/>
-            </a:prstGeom>
-            <a:solidFill>
-              <a:schemeClr val="bg1">
-                <a:lumMod val="95000"/>
-              </a:schemeClr>
-            </a:solidFill>
-            <a:ln>
-              <a:noFill/>
-            </a:ln>
-          </p:spPr>
-          <p:style>
-            <a:lnRef idx="2">
-              <a:schemeClr val="accent1">
-                <a:shade val="15000"/>
-              </a:schemeClr>
-            </a:lnRef>
-            <a:fillRef idx="1">
-              <a:schemeClr val="accent1"/>
-            </a:fillRef>
-            <a:effectRef idx="0">
-              <a:schemeClr val="accent1"/>
-            </a:effectRef>
-            <a:fontRef idx="minor">
-              <a:schemeClr val="lt1"/>
-            </a:fontRef>
-          </p:style>
-          <p:txBody>
-            <a:bodyPr rtlCol="0" anchor="ctr"/>
-            <a:lstStyle/>
-            <a:p>
-              <a:pPr algn="ctr"/>
-              <a:endParaRPr lang="zh-CN" altLang="en-US"/>
-            </a:p>
-          </p:txBody>
-        </p:sp>
-        <p:sp>
-          <p:nvSpPr>
-            <p:cNvPr id="55" name="矩形 54">
-              <a:extLst>
-                <a:ext uri="{FF2B5EF4-FFF2-40B4-BE49-F238E27FC236}">
-                  <a16:creationId xmlns:a16="http://schemas.microsoft.com/office/drawing/2014/main" id="{09855BE9-6824-6113-9C56-6EEB90FD44DF}"/>
-                </a:ext>
-              </a:extLst>
-            </p:cNvPr>
-            <p:cNvSpPr/>
-            <p:nvPr/>
-          </p:nvSpPr>
-          <p:spPr>
-            <a:xfrm>
-              <a:off x="6233560" y="2042612"/>
-              <a:ext cx="288000" cy="72000"/>
-            </a:xfrm>
-            <a:prstGeom prst="rect">
-              <a:avLst/>
-            </a:prstGeom>
-            <a:solidFill>
-              <a:schemeClr val="bg1">
-                <a:lumMod val="95000"/>
-              </a:schemeClr>
-            </a:solidFill>
-            <a:ln>
-              <a:noFill/>
-            </a:ln>
-          </p:spPr>
-          <p:style>
-            <a:lnRef idx="2">
-              <a:schemeClr val="accent1">
-                <a:shade val="15000"/>
-              </a:schemeClr>
-            </a:lnRef>
-            <a:fillRef idx="1">
-              <a:schemeClr val="accent1"/>
-            </a:fillRef>
-            <a:effectRef idx="0">
-              <a:schemeClr val="accent1"/>
-            </a:effectRef>
-            <a:fontRef idx="minor">
-              <a:schemeClr val="lt1"/>
-            </a:fontRef>
-          </p:style>
-          <p:txBody>
-            <a:bodyPr rtlCol="0" anchor="ctr"/>
-            <a:lstStyle/>
-            <a:p>
-              <a:pPr algn="ctr"/>
-              <a:endParaRPr lang="zh-CN" altLang="en-US"/>
-            </a:p>
-          </p:txBody>
-        </p:sp>
-        <p:sp>
-          <p:nvSpPr>
-            <p:cNvPr id="56" name="矩形 55">
-              <a:extLst>
-                <a:ext uri="{FF2B5EF4-FFF2-40B4-BE49-F238E27FC236}">
-                  <a16:creationId xmlns:a16="http://schemas.microsoft.com/office/drawing/2014/main" id="{5F15DDE4-E238-28A7-9CEE-3C2EDBC4FA9C}"/>
-                </a:ext>
-              </a:extLst>
-            </p:cNvPr>
-            <p:cNvSpPr/>
-            <p:nvPr/>
-          </p:nvSpPr>
-          <p:spPr>
-            <a:xfrm>
-              <a:off x="6233560" y="2100212"/>
-              <a:ext cx="288000" cy="72000"/>
-            </a:xfrm>
-            <a:prstGeom prst="rect">
-              <a:avLst/>
-            </a:prstGeom>
-            <a:solidFill>
-              <a:schemeClr val="bg1">
-                <a:lumMod val="95000"/>
-              </a:schemeClr>
-            </a:solidFill>
-            <a:ln>
-              <a:noFill/>
-            </a:ln>
-          </p:spPr>
-          <p:style>
-            <a:lnRef idx="2">
-              <a:schemeClr val="accent1">
-                <a:shade val="15000"/>
-              </a:schemeClr>
-            </a:lnRef>
-            <a:fillRef idx="1">
-              <a:schemeClr val="accent1"/>
-            </a:fillRef>
-            <a:effectRef idx="0">
-              <a:schemeClr val="accent1"/>
-            </a:effectRef>
-            <a:fontRef idx="minor">
-              <a:schemeClr val="lt1"/>
-            </a:fontRef>
-          </p:style>
-          <p:txBody>
-            <a:bodyPr rtlCol="0" anchor="ctr"/>
-            <a:lstStyle/>
-            <a:p>
-              <a:pPr algn="ctr"/>
-              <a:endParaRPr lang="zh-CN" altLang="en-US"/>
-            </a:p>
-          </p:txBody>
-        </p:sp>
-        <p:sp>
-          <p:nvSpPr>
-            <p:cNvPr id="57" name="文本框 56">
-              <a:extLst>
-                <a:ext uri="{FF2B5EF4-FFF2-40B4-BE49-F238E27FC236}">
-                  <a16:creationId xmlns:a16="http://schemas.microsoft.com/office/drawing/2014/main" id="{6161DDB2-F975-84F5-5B00-B5161DB14BF6}"/>
-                </a:ext>
-              </a:extLst>
-            </p:cNvPr>
-            <p:cNvSpPr txBox="1"/>
-            <p:nvPr/>
-          </p:nvSpPr>
-          <p:spPr>
-            <a:xfrm>
-              <a:off x="6021196" y="1968913"/>
-              <a:ext cx="277640" cy="276999"/>
-            </a:xfrm>
-            <a:prstGeom prst="rect">
-              <a:avLst/>
-            </a:prstGeom>
-            <a:noFill/>
-          </p:spPr>
-          <p:txBody>
-            <a:bodyPr wrap="none" rtlCol="0">
-              <a:spAutoFit/>
-            </a:bodyPr>
-            <a:lstStyle/>
-            <a:p>
-              <a:pPr algn="l"/>
-              <a:r>
-                <a:rPr lang="en-US" altLang="zh-CN" sz="1200" dirty="0">
-                  <a:latin typeface="Courier New" panose="02070309020205020404" pitchFamily="49" charset="0"/>
-                  <a:ea typeface="微软雅黑" panose="020B0503020204020204" pitchFamily="34" charset="-122"/>
-                  <a:cs typeface="Courier New" panose="02070309020205020404" pitchFamily="49" charset="0"/>
-                </a:rPr>
-                <a:t>c</a:t>
-              </a:r>
-              <a:endParaRPr lang="zh-CN" altLang="en-US" sz="1200" dirty="0">
-                <a:latin typeface="Courier New" panose="02070309020205020404" pitchFamily="49" charset="0"/>
-                <a:ea typeface="微软雅黑" panose="020B0503020204020204" pitchFamily="34" charset="-122"/>
-                <a:cs typeface="Courier New" panose="02070309020205020404" pitchFamily="49" charset="0"/>
-              </a:endParaRPr>
-            </a:p>
-          </p:txBody>
-        </p:sp>
-      </p:grpSp>
-      <p:grpSp>
-        <p:nvGrpSpPr>
-          <p:cNvPr id="58" name="组合 57">
-            <a:extLst>
-              <a:ext uri="{FF2B5EF4-FFF2-40B4-BE49-F238E27FC236}">
-                <a16:creationId xmlns:a16="http://schemas.microsoft.com/office/drawing/2014/main" id="{E0CD305E-CB6B-74DC-94AA-BADA10F3DCD3}"/>
-              </a:ext>
-            </a:extLst>
-          </p:cNvPr>
-          <p:cNvGrpSpPr/>
-          <p:nvPr/>
-        </p:nvGrpSpPr>
-        <p:grpSpPr>
-          <a:xfrm>
-            <a:off x="1264740" y="1587810"/>
-            <a:ext cx="500364" cy="360000"/>
-            <a:chOff x="6021196" y="1927412"/>
-            <a:chExt cx="500364" cy="360000"/>
-          </a:xfrm>
-        </p:grpSpPr>
-        <p:sp>
-          <p:nvSpPr>
-            <p:cNvPr id="59" name="矩形 58">
-              <a:extLst>
-                <a:ext uri="{FF2B5EF4-FFF2-40B4-BE49-F238E27FC236}">
-                  <a16:creationId xmlns:a16="http://schemas.microsoft.com/office/drawing/2014/main" id="{3715DD3C-8625-A078-FF3D-F0F2F3852838}"/>
-                </a:ext>
-              </a:extLst>
-            </p:cNvPr>
-            <p:cNvSpPr/>
-            <p:nvPr/>
-          </p:nvSpPr>
-          <p:spPr>
-            <a:xfrm>
-              <a:off x="6233560" y="1927412"/>
-              <a:ext cx="288000" cy="72000"/>
-            </a:xfrm>
-            <a:prstGeom prst="rect">
-              <a:avLst/>
-            </a:prstGeom>
-            <a:solidFill>
-              <a:schemeClr val="bg1">
-                <a:lumMod val="85000"/>
-              </a:schemeClr>
-            </a:solidFill>
-            <a:ln>
-              <a:noFill/>
-            </a:ln>
-          </p:spPr>
-          <p:style>
-            <a:lnRef idx="2">
-              <a:schemeClr val="accent1">
-                <a:shade val="15000"/>
-              </a:schemeClr>
-            </a:lnRef>
-            <a:fillRef idx="1">
-              <a:schemeClr val="accent1"/>
-            </a:fillRef>
-            <a:effectRef idx="0">
-              <a:schemeClr val="accent1"/>
-            </a:effectRef>
-            <a:fontRef idx="minor">
-              <a:schemeClr val="lt1"/>
-            </a:fontRef>
-          </p:style>
-          <p:txBody>
-            <a:bodyPr rtlCol="0" anchor="ctr"/>
-            <a:lstStyle/>
-            <a:p>
-              <a:pPr algn="ctr"/>
-              <a:endParaRPr lang="zh-CN" altLang="en-US"/>
-            </a:p>
-          </p:txBody>
-        </p:sp>
-        <p:sp>
-          <p:nvSpPr>
-            <p:cNvPr id="60" name="矩形 59">
-              <a:extLst>
-                <a:ext uri="{FF2B5EF4-FFF2-40B4-BE49-F238E27FC236}">
-                  <a16:creationId xmlns:a16="http://schemas.microsoft.com/office/drawing/2014/main" id="{9AAE2502-F9AE-97E3-D9D5-65B7435CBB0D}"/>
-                </a:ext>
-              </a:extLst>
-            </p:cNvPr>
-            <p:cNvSpPr/>
-            <p:nvPr/>
-          </p:nvSpPr>
-          <p:spPr>
-            <a:xfrm>
-              <a:off x="6233560" y="2157812"/>
-              <a:ext cx="288000" cy="72000"/>
-            </a:xfrm>
-            <a:prstGeom prst="rect">
-              <a:avLst/>
-            </a:prstGeom>
-            <a:solidFill>
-              <a:schemeClr val="bg1">
-                <a:lumMod val="95000"/>
-              </a:schemeClr>
-            </a:solidFill>
-            <a:ln>
-              <a:noFill/>
-            </a:ln>
-          </p:spPr>
-          <p:style>
-            <a:lnRef idx="2">
-              <a:schemeClr val="accent1">
-                <a:shade val="15000"/>
-              </a:schemeClr>
-            </a:lnRef>
-            <a:fillRef idx="1">
-              <a:schemeClr val="accent1"/>
-            </a:fillRef>
-            <a:effectRef idx="0">
-              <a:schemeClr val="accent1"/>
-            </a:effectRef>
-            <a:fontRef idx="minor">
-              <a:schemeClr val="lt1"/>
-            </a:fontRef>
-          </p:style>
-          <p:txBody>
-            <a:bodyPr rtlCol="0" anchor="ctr"/>
-            <a:lstStyle/>
-            <a:p>
-              <a:pPr algn="ctr"/>
-              <a:endParaRPr lang="zh-CN" altLang="en-US"/>
-            </a:p>
-          </p:txBody>
-        </p:sp>
-        <p:sp>
-          <p:nvSpPr>
-            <p:cNvPr id="61" name="矩形 60">
-              <a:extLst>
-                <a:ext uri="{FF2B5EF4-FFF2-40B4-BE49-F238E27FC236}">
-                  <a16:creationId xmlns:a16="http://schemas.microsoft.com/office/drawing/2014/main" id="{475CDBC5-00DF-80C3-4168-758A9ADA89F1}"/>
-                </a:ext>
-              </a:extLst>
-            </p:cNvPr>
-            <p:cNvSpPr/>
-            <p:nvPr/>
-          </p:nvSpPr>
-          <p:spPr>
-            <a:xfrm>
-              <a:off x="6233560" y="2215412"/>
-              <a:ext cx="288000" cy="72000"/>
-            </a:xfrm>
-            <a:prstGeom prst="rect">
-              <a:avLst/>
-            </a:prstGeom>
-            <a:solidFill>
-              <a:schemeClr val="bg1">
-                <a:lumMod val="95000"/>
-              </a:schemeClr>
-            </a:solidFill>
-            <a:ln>
-              <a:noFill/>
-            </a:ln>
-          </p:spPr>
-          <p:style>
-            <a:lnRef idx="2">
-              <a:schemeClr val="accent1">
-                <a:shade val="15000"/>
-              </a:schemeClr>
-            </a:lnRef>
-            <a:fillRef idx="1">
-              <a:schemeClr val="accent1"/>
-            </a:fillRef>
-            <a:effectRef idx="0">
-              <a:schemeClr val="accent1"/>
-            </a:effectRef>
-            <a:fontRef idx="minor">
-              <a:schemeClr val="lt1"/>
-            </a:fontRef>
-          </p:style>
-          <p:txBody>
-            <a:bodyPr rtlCol="0" anchor="ctr"/>
-            <a:lstStyle/>
-            <a:p>
-              <a:pPr algn="ctr"/>
-              <a:endParaRPr lang="zh-CN" altLang="en-US"/>
-            </a:p>
-          </p:txBody>
-        </p:sp>
-        <p:sp>
-          <p:nvSpPr>
-            <p:cNvPr id="62" name="矩形 61">
-              <a:extLst>
-                <a:ext uri="{FF2B5EF4-FFF2-40B4-BE49-F238E27FC236}">
-                  <a16:creationId xmlns:a16="http://schemas.microsoft.com/office/drawing/2014/main" id="{31EEF486-C12F-D047-04A9-5D1104BAEC13}"/>
-                </a:ext>
-              </a:extLst>
-            </p:cNvPr>
-            <p:cNvSpPr/>
-            <p:nvPr/>
-          </p:nvSpPr>
-          <p:spPr>
-            <a:xfrm>
-              <a:off x="6233560" y="1985012"/>
-              <a:ext cx="288000" cy="72000"/>
-            </a:xfrm>
-            <a:prstGeom prst="rect">
-              <a:avLst/>
-            </a:prstGeom>
-            <a:solidFill>
-              <a:schemeClr val="bg1">
-                <a:lumMod val="95000"/>
-              </a:schemeClr>
-            </a:solidFill>
-            <a:ln>
-              <a:noFill/>
-            </a:ln>
-          </p:spPr>
-          <p:style>
-            <a:lnRef idx="2">
-              <a:schemeClr val="accent1">
-                <a:shade val="15000"/>
-              </a:schemeClr>
-            </a:lnRef>
-            <a:fillRef idx="1">
-              <a:schemeClr val="accent1"/>
-            </a:fillRef>
-            <a:effectRef idx="0">
-              <a:schemeClr val="accent1"/>
-            </a:effectRef>
-            <a:fontRef idx="minor">
-              <a:schemeClr val="lt1"/>
-            </a:fontRef>
-          </p:style>
-          <p:txBody>
-            <a:bodyPr rtlCol="0" anchor="ctr"/>
-            <a:lstStyle/>
-            <a:p>
-              <a:pPr algn="ctr"/>
-              <a:endParaRPr lang="zh-CN" altLang="en-US"/>
-            </a:p>
-          </p:txBody>
-        </p:sp>
-        <p:sp>
-          <p:nvSpPr>
-            <p:cNvPr id="63" name="矩形 62">
-              <a:extLst>
-                <a:ext uri="{FF2B5EF4-FFF2-40B4-BE49-F238E27FC236}">
-                  <a16:creationId xmlns:a16="http://schemas.microsoft.com/office/drawing/2014/main" id="{73F12FC0-126E-07F4-5A0F-606B0F6654ED}"/>
-                </a:ext>
-              </a:extLst>
-            </p:cNvPr>
-            <p:cNvSpPr/>
-            <p:nvPr/>
-          </p:nvSpPr>
-          <p:spPr>
-            <a:xfrm>
-              <a:off x="6233560" y="2042612"/>
-              <a:ext cx="288000" cy="72000"/>
-            </a:xfrm>
-            <a:prstGeom prst="rect">
-              <a:avLst/>
-            </a:prstGeom>
-            <a:solidFill>
-              <a:schemeClr val="bg1">
-                <a:lumMod val="95000"/>
-              </a:schemeClr>
-            </a:solidFill>
-            <a:ln>
-              <a:noFill/>
-            </a:ln>
-          </p:spPr>
-          <p:style>
-            <a:lnRef idx="2">
-              <a:schemeClr val="accent1">
-                <a:shade val="15000"/>
-              </a:schemeClr>
-            </a:lnRef>
-            <a:fillRef idx="1">
-              <a:schemeClr val="accent1"/>
-            </a:fillRef>
-            <a:effectRef idx="0">
-              <a:schemeClr val="accent1"/>
-            </a:effectRef>
-            <a:fontRef idx="minor">
-              <a:schemeClr val="lt1"/>
-            </a:fontRef>
-          </p:style>
-          <p:txBody>
-            <a:bodyPr rtlCol="0" anchor="ctr"/>
-            <a:lstStyle/>
-            <a:p>
-              <a:pPr algn="ctr"/>
-              <a:endParaRPr lang="zh-CN" altLang="en-US"/>
-            </a:p>
-          </p:txBody>
-        </p:sp>
-        <p:sp>
-          <p:nvSpPr>
-            <p:cNvPr id="64" name="矩形 63">
-              <a:extLst>
-                <a:ext uri="{FF2B5EF4-FFF2-40B4-BE49-F238E27FC236}">
-                  <a16:creationId xmlns:a16="http://schemas.microsoft.com/office/drawing/2014/main" id="{66214CFD-5A95-AB58-CCC7-78F786972EE4}"/>
-                </a:ext>
-              </a:extLst>
-            </p:cNvPr>
-            <p:cNvSpPr/>
-            <p:nvPr/>
-          </p:nvSpPr>
-          <p:spPr>
-            <a:xfrm>
-              <a:off x="6233560" y="2100212"/>
-              <a:ext cx="288000" cy="72000"/>
-            </a:xfrm>
-            <a:prstGeom prst="rect">
-              <a:avLst/>
-            </a:prstGeom>
-            <a:solidFill>
-              <a:schemeClr val="bg1">
-                <a:lumMod val="95000"/>
-              </a:schemeClr>
-            </a:solidFill>
-            <a:ln>
-              <a:noFill/>
-            </a:ln>
-          </p:spPr>
-          <p:style>
-            <a:lnRef idx="2">
-              <a:schemeClr val="accent1">
-                <a:shade val="15000"/>
-              </a:schemeClr>
-            </a:lnRef>
-            <a:fillRef idx="1">
-              <a:schemeClr val="accent1"/>
-            </a:fillRef>
-            <a:effectRef idx="0">
-              <a:schemeClr val="accent1"/>
-            </a:effectRef>
-            <a:fontRef idx="minor">
-              <a:schemeClr val="lt1"/>
-            </a:fontRef>
-          </p:style>
-          <p:txBody>
-            <a:bodyPr rtlCol="0" anchor="ctr"/>
-            <a:lstStyle/>
-            <a:p>
-              <a:pPr algn="ctr"/>
-              <a:endParaRPr lang="zh-CN" altLang="en-US"/>
-            </a:p>
-          </p:txBody>
-        </p:sp>
-        <p:sp>
-          <p:nvSpPr>
-            <p:cNvPr id="65" name="文本框 64">
-              <a:extLst>
-                <a:ext uri="{FF2B5EF4-FFF2-40B4-BE49-F238E27FC236}">
-                  <a16:creationId xmlns:a16="http://schemas.microsoft.com/office/drawing/2014/main" id="{21FC1B37-AA45-139E-926B-8232672ED33E}"/>
-                </a:ext>
-              </a:extLst>
-            </p:cNvPr>
-            <p:cNvSpPr txBox="1"/>
-            <p:nvPr/>
-          </p:nvSpPr>
-          <p:spPr>
-            <a:xfrm>
-              <a:off x="6021196" y="1968913"/>
-              <a:ext cx="277640" cy="276999"/>
-            </a:xfrm>
-            <a:prstGeom prst="rect">
-              <a:avLst/>
-            </a:prstGeom>
-            <a:noFill/>
-          </p:spPr>
-          <p:txBody>
-            <a:bodyPr wrap="none" rtlCol="0">
-              <a:spAutoFit/>
-            </a:bodyPr>
-            <a:lstStyle/>
-            <a:p>
-              <a:pPr algn="l"/>
-              <a:r>
-                <a:rPr lang="en-US" altLang="zh-CN" sz="1200" dirty="0">
-                  <a:solidFill>
-                    <a:srgbClr val="FF0000"/>
-                  </a:solidFill>
-                  <a:latin typeface="Courier New" panose="02070309020205020404" pitchFamily="49" charset="0"/>
-                  <a:ea typeface="微软雅黑" panose="020B0503020204020204" pitchFamily="34" charset="-122"/>
-                  <a:cs typeface="Courier New" panose="02070309020205020404" pitchFamily="49" charset="0"/>
-                </a:rPr>
-                <a:t>a</a:t>
-              </a:r>
-              <a:endParaRPr lang="zh-CN" altLang="en-US" sz="1200" dirty="0">
-                <a:solidFill>
-                  <a:srgbClr val="FF0000"/>
-                </a:solidFill>
-                <a:latin typeface="Courier New" panose="02070309020205020404" pitchFamily="49" charset="0"/>
-                <a:ea typeface="微软雅黑" panose="020B0503020204020204" pitchFamily="34" charset="-122"/>
-                <a:cs typeface="Courier New" panose="02070309020205020404" pitchFamily="49" charset="0"/>
-              </a:endParaRPr>
-            </a:p>
-          </p:txBody>
-        </p:sp>
-      </p:grpSp>
-      <p:grpSp>
-        <p:nvGrpSpPr>
-          <p:cNvPr id="68" name="组合 67">
-            <a:extLst>
-              <a:ext uri="{FF2B5EF4-FFF2-40B4-BE49-F238E27FC236}">
-                <a16:creationId xmlns:a16="http://schemas.microsoft.com/office/drawing/2014/main" id="{2C1B7785-28AF-6325-BB5C-C5B0FC4972B8}"/>
-              </a:ext>
-            </a:extLst>
-          </p:cNvPr>
-          <p:cNvGrpSpPr/>
-          <p:nvPr/>
-        </p:nvGrpSpPr>
-        <p:grpSpPr>
-          <a:xfrm>
-            <a:off x="6181579" y="1613646"/>
-            <a:ext cx="500364" cy="360000"/>
-            <a:chOff x="6021196" y="1927412"/>
-            <a:chExt cx="500364" cy="360000"/>
-          </a:xfrm>
-        </p:grpSpPr>
-        <p:sp>
-          <p:nvSpPr>
-            <p:cNvPr id="85" name="矩形 84">
-              <a:extLst>
-                <a:ext uri="{FF2B5EF4-FFF2-40B4-BE49-F238E27FC236}">
-                  <a16:creationId xmlns:a16="http://schemas.microsoft.com/office/drawing/2014/main" id="{87AE1995-3315-FF77-9797-224E963023E2}"/>
-                </a:ext>
-              </a:extLst>
-            </p:cNvPr>
-            <p:cNvSpPr/>
-            <p:nvPr/>
-          </p:nvSpPr>
-          <p:spPr>
-            <a:xfrm>
-              <a:off x="6233560" y="1927412"/>
-              <a:ext cx="288000" cy="72000"/>
-            </a:xfrm>
-            <a:prstGeom prst="rect">
-              <a:avLst/>
-            </a:prstGeom>
-            <a:solidFill>
-              <a:schemeClr val="bg1">
-                <a:lumMod val="85000"/>
-              </a:schemeClr>
-            </a:solidFill>
-            <a:ln>
-              <a:noFill/>
-            </a:ln>
-          </p:spPr>
-          <p:style>
-            <a:lnRef idx="2">
-              <a:schemeClr val="accent1">
-                <a:shade val="15000"/>
-              </a:schemeClr>
-            </a:lnRef>
-            <a:fillRef idx="1">
-              <a:schemeClr val="accent1"/>
-            </a:fillRef>
-            <a:effectRef idx="0">
-              <a:schemeClr val="accent1"/>
-            </a:effectRef>
-            <a:fontRef idx="minor">
-              <a:schemeClr val="lt1"/>
-            </a:fontRef>
-          </p:style>
-          <p:txBody>
-            <a:bodyPr rtlCol="0" anchor="ctr"/>
-            <a:lstStyle/>
-            <a:p>
-              <a:pPr algn="ctr"/>
-              <a:endParaRPr lang="zh-CN" altLang="en-US"/>
-            </a:p>
-          </p:txBody>
-        </p:sp>
-        <p:sp>
-          <p:nvSpPr>
-            <p:cNvPr id="86" name="矩形 85">
-              <a:extLst>
-                <a:ext uri="{FF2B5EF4-FFF2-40B4-BE49-F238E27FC236}">
-                  <a16:creationId xmlns:a16="http://schemas.microsoft.com/office/drawing/2014/main" id="{0054F01C-EBA5-E10B-EAE0-71A9FBB1D7B6}"/>
-                </a:ext>
-              </a:extLst>
-            </p:cNvPr>
-            <p:cNvSpPr/>
-            <p:nvPr/>
-          </p:nvSpPr>
-          <p:spPr>
-            <a:xfrm>
-              <a:off x="6233560" y="2157812"/>
-              <a:ext cx="288000" cy="72000"/>
-            </a:xfrm>
-            <a:prstGeom prst="rect">
-              <a:avLst/>
-            </a:prstGeom>
-            <a:solidFill>
-              <a:schemeClr val="bg1">
-                <a:lumMod val="95000"/>
-              </a:schemeClr>
-            </a:solidFill>
-            <a:ln>
-              <a:noFill/>
-            </a:ln>
-          </p:spPr>
-          <p:style>
-            <a:lnRef idx="2">
-              <a:schemeClr val="accent1">
-                <a:shade val="15000"/>
-              </a:schemeClr>
-            </a:lnRef>
-            <a:fillRef idx="1">
-              <a:schemeClr val="accent1"/>
-            </a:fillRef>
-            <a:effectRef idx="0">
-              <a:schemeClr val="accent1"/>
-            </a:effectRef>
-            <a:fontRef idx="minor">
-              <a:schemeClr val="lt1"/>
-            </a:fontRef>
-          </p:style>
-          <p:txBody>
-            <a:bodyPr rtlCol="0" anchor="ctr"/>
-            <a:lstStyle/>
-            <a:p>
-              <a:pPr algn="ctr"/>
-              <a:endParaRPr lang="zh-CN" altLang="en-US"/>
-            </a:p>
-          </p:txBody>
-        </p:sp>
-        <p:sp>
-          <p:nvSpPr>
-            <p:cNvPr id="87" name="矩形 86">
-              <a:extLst>
-                <a:ext uri="{FF2B5EF4-FFF2-40B4-BE49-F238E27FC236}">
-                  <a16:creationId xmlns:a16="http://schemas.microsoft.com/office/drawing/2014/main" id="{E602ABC8-D041-30A2-8AE4-0C9805219317}"/>
-                </a:ext>
-              </a:extLst>
-            </p:cNvPr>
-            <p:cNvSpPr/>
-            <p:nvPr/>
-          </p:nvSpPr>
-          <p:spPr>
-            <a:xfrm>
-              <a:off x="6233560" y="2215412"/>
-              <a:ext cx="288000" cy="72000"/>
-            </a:xfrm>
-            <a:prstGeom prst="rect">
-              <a:avLst/>
-            </a:prstGeom>
-            <a:solidFill>
-              <a:schemeClr val="bg1">
-                <a:lumMod val="95000"/>
-              </a:schemeClr>
-            </a:solidFill>
-            <a:ln>
-              <a:noFill/>
-            </a:ln>
-          </p:spPr>
-          <p:style>
-            <a:lnRef idx="2">
-              <a:schemeClr val="accent1">
-                <a:shade val="15000"/>
-              </a:schemeClr>
-            </a:lnRef>
-            <a:fillRef idx="1">
-              <a:schemeClr val="accent1"/>
-            </a:fillRef>
-            <a:effectRef idx="0">
-              <a:schemeClr val="accent1"/>
-            </a:effectRef>
-            <a:fontRef idx="minor">
-              <a:schemeClr val="lt1"/>
-            </a:fontRef>
-          </p:style>
-          <p:txBody>
-            <a:bodyPr rtlCol="0" anchor="ctr"/>
-            <a:lstStyle/>
-            <a:p>
-              <a:pPr algn="ctr"/>
-              <a:endParaRPr lang="zh-CN" altLang="en-US"/>
-            </a:p>
-          </p:txBody>
-        </p:sp>
-        <p:sp>
-          <p:nvSpPr>
-            <p:cNvPr id="88" name="矩形 87">
-              <a:extLst>
-                <a:ext uri="{FF2B5EF4-FFF2-40B4-BE49-F238E27FC236}">
-                  <a16:creationId xmlns:a16="http://schemas.microsoft.com/office/drawing/2014/main" id="{49D9C45B-A327-2671-EE42-6E8D0FE16228}"/>
-                </a:ext>
-              </a:extLst>
-            </p:cNvPr>
-            <p:cNvSpPr/>
-            <p:nvPr/>
-          </p:nvSpPr>
-          <p:spPr>
-            <a:xfrm>
-              <a:off x="6233560" y="1985012"/>
-              <a:ext cx="288000" cy="72000"/>
-            </a:xfrm>
-            <a:prstGeom prst="rect">
-              <a:avLst/>
-            </a:prstGeom>
-            <a:solidFill>
-              <a:schemeClr val="bg1">
-                <a:lumMod val="85000"/>
-              </a:schemeClr>
-            </a:solidFill>
-            <a:ln>
-              <a:noFill/>
-            </a:ln>
-          </p:spPr>
-          <p:style>
-            <a:lnRef idx="2">
-              <a:schemeClr val="accent1">
-                <a:shade val="15000"/>
-              </a:schemeClr>
-            </a:lnRef>
-            <a:fillRef idx="1">
-              <a:schemeClr val="accent1"/>
-            </a:fillRef>
-            <a:effectRef idx="0">
-              <a:schemeClr val="accent1"/>
-            </a:effectRef>
-            <a:fontRef idx="minor">
-              <a:schemeClr val="lt1"/>
-            </a:fontRef>
-          </p:style>
-          <p:txBody>
-            <a:bodyPr rtlCol="0" anchor="ctr"/>
-            <a:lstStyle/>
-            <a:p>
-              <a:pPr algn="ctr"/>
-              <a:endParaRPr lang="zh-CN" altLang="en-US"/>
-            </a:p>
-          </p:txBody>
-        </p:sp>
-        <p:sp>
-          <p:nvSpPr>
-            <p:cNvPr id="89" name="矩形 88">
-              <a:extLst>
-                <a:ext uri="{FF2B5EF4-FFF2-40B4-BE49-F238E27FC236}">
-                  <a16:creationId xmlns:a16="http://schemas.microsoft.com/office/drawing/2014/main" id="{FF177BA0-2E68-0AA8-EA55-74B6FEF924C4}"/>
-                </a:ext>
-              </a:extLst>
-            </p:cNvPr>
-            <p:cNvSpPr/>
-            <p:nvPr/>
-          </p:nvSpPr>
-          <p:spPr>
-            <a:xfrm>
-              <a:off x="6233560" y="2042612"/>
-              <a:ext cx="288000" cy="72000"/>
-            </a:xfrm>
-            <a:prstGeom prst="rect">
-              <a:avLst/>
-            </a:prstGeom>
-            <a:solidFill>
-              <a:schemeClr val="bg1">
-                <a:lumMod val="95000"/>
-              </a:schemeClr>
-            </a:solidFill>
-            <a:ln>
-              <a:noFill/>
-            </a:ln>
-          </p:spPr>
-          <p:style>
-            <a:lnRef idx="2">
-              <a:schemeClr val="accent1">
-                <a:shade val="15000"/>
-              </a:schemeClr>
-            </a:lnRef>
-            <a:fillRef idx="1">
-              <a:schemeClr val="accent1"/>
-            </a:fillRef>
-            <a:effectRef idx="0">
-              <a:schemeClr val="accent1"/>
-            </a:effectRef>
-            <a:fontRef idx="minor">
-              <a:schemeClr val="lt1"/>
-            </a:fontRef>
-          </p:style>
-          <p:txBody>
-            <a:bodyPr rtlCol="0" anchor="ctr"/>
-            <a:lstStyle/>
-            <a:p>
-              <a:pPr algn="ctr"/>
-              <a:endParaRPr lang="zh-CN" altLang="en-US"/>
-            </a:p>
-          </p:txBody>
-        </p:sp>
-        <p:sp>
-          <p:nvSpPr>
-            <p:cNvPr id="90" name="矩形 89">
-              <a:extLst>
-                <a:ext uri="{FF2B5EF4-FFF2-40B4-BE49-F238E27FC236}">
-                  <a16:creationId xmlns:a16="http://schemas.microsoft.com/office/drawing/2014/main" id="{DA8B6111-A2C8-D837-66B9-08FF5E94D914}"/>
-                </a:ext>
-              </a:extLst>
-            </p:cNvPr>
-            <p:cNvSpPr/>
-            <p:nvPr/>
-          </p:nvSpPr>
-          <p:spPr>
-            <a:xfrm>
-              <a:off x="6233560" y="2100212"/>
-              <a:ext cx="288000" cy="72000"/>
-            </a:xfrm>
-            <a:prstGeom prst="rect">
-              <a:avLst/>
-            </a:prstGeom>
-            <a:solidFill>
-              <a:schemeClr val="bg1">
-                <a:lumMod val="95000"/>
-              </a:schemeClr>
-            </a:solidFill>
-            <a:ln>
-              <a:noFill/>
-            </a:ln>
-          </p:spPr>
-          <p:style>
-            <a:lnRef idx="2">
-              <a:schemeClr val="accent1">
-                <a:shade val="15000"/>
-              </a:schemeClr>
-            </a:lnRef>
-            <a:fillRef idx="1">
-              <a:schemeClr val="accent1"/>
-            </a:fillRef>
-            <a:effectRef idx="0">
-              <a:schemeClr val="accent1"/>
-            </a:effectRef>
-            <a:fontRef idx="minor">
-              <a:schemeClr val="lt1"/>
-            </a:fontRef>
-          </p:style>
-          <p:txBody>
-            <a:bodyPr rtlCol="0" anchor="ctr"/>
-            <a:lstStyle/>
-            <a:p>
-              <a:pPr algn="ctr"/>
-              <a:endParaRPr lang="zh-CN" altLang="en-US"/>
-            </a:p>
-          </p:txBody>
-        </p:sp>
-        <p:sp>
-          <p:nvSpPr>
-            <p:cNvPr id="91" name="文本框 90">
-              <a:extLst>
-                <a:ext uri="{FF2B5EF4-FFF2-40B4-BE49-F238E27FC236}">
-                  <a16:creationId xmlns:a16="http://schemas.microsoft.com/office/drawing/2014/main" id="{110E5261-1043-DF12-D880-DEF63B8F92BC}"/>
-                </a:ext>
-              </a:extLst>
-            </p:cNvPr>
-            <p:cNvSpPr txBox="1"/>
-            <p:nvPr/>
-          </p:nvSpPr>
-          <p:spPr>
-            <a:xfrm>
-              <a:off x="6021196" y="1968913"/>
-              <a:ext cx="277640" cy="276999"/>
-            </a:xfrm>
-            <a:prstGeom prst="rect">
-              <a:avLst/>
-            </a:prstGeom>
-            <a:noFill/>
-          </p:spPr>
-          <p:txBody>
-            <a:bodyPr wrap="none" rtlCol="0">
-              <a:spAutoFit/>
-            </a:bodyPr>
-            <a:lstStyle/>
-            <a:p>
-              <a:pPr algn="l"/>
-              <a:r>
-                <a:rPr lang="en-US" altLang="zh-CN" sz="1200" dirty="0">
-                  <a:solidFill>
-                    <a:srgbClr val="20BD6A"/>
-                  </a:solidFill>
-                  <a:latin typeface="Courier New" panose="02070309020205020404" pitchFamily="49" charset="0"/>
-                  <a:ea typeface="微软雅黑" panose="020B0503020204020204" pitchFamily="34" charset="-122"/>
-                  <a:cs typeface="Courier New" panose="02070309020205020404" pitchFamily="49" charset="0"/>
-                </a:rPr>
-                <a:t>y</a:t>
-              </a:r>
-              <a:endParaRPr lang="zh-CN" altLang="en-US" sz="1200" dirty="0">
-                <a:solidFill>
-                  <a:srgbClr val="20BD6A"/>
-                </a:solidFill>
-                <a:latin typeface="Courier New" panose="02070309020205020404" pitchFamily="49" charset="0"/>
-                <a:ea typeface="微软雅黑" panose="020B0503020204020204" pitchFamily="34" charset="-122"/>
-                <a:cs typeface="Courier New" panose="02070309020205020404" pitchFamily="49" charset="0"/>
-              </a:endParaRPr>
-            </a:p>
-          </p:txBody>
-        </p:sp>
-      </p:grpSp>
-      <p:grpSp>
-        <p:nvGrpSpPr>
-          <p:cNvPr id="70" name="组合 69">
-            <a:extLst>
-              <a:ext uri="{FF2B5EF4-FFF2-40B4-BE49-F238E27FC236}">
-                <a16:creationId xmlns:a16="http://schemas.microsoft.com/office/drawing/2014/main" id="{6ECACA64-201F-1DCE-A528-12EAE695D5B2}"/>
-              </a:ext>
-            </a:extLst>
-          </p:cNvPr>
-          <p:cNvGrpSpPr/>
-          <p:nvPr/>
-        </p:nvGrpSpPr>
-        <p:grpSpPr>
-          <a:xfrm>
-            <a:off x="5371564" y="1613646"/>
-            <a:ext cx="500364" cy="360000"/>
-            <a:chOff x="6021196" y="1927412"/>
-            <a:chExt cx="500364" cy="360000"/>
-          </a:xfrm>
-        </p:grpSpPr>
-        <p:sp>
-          <p:nvSpPr>
-            <p:cNvPr id="71" name="矩形 70">
-              <a:extLst>
-                <a:ext uri="{FF2B5EF4-FFF2-40B4-BE49-F238E27FC236}">
-                  <a16:creationId xmlns:a16="http://schemas.microsoft.com/office/drawing/2014/main" id="{689147F5-2DB7-469C-C9A4-79A2786B0E6B}"/>
-                </a:ext>
-              </a:extLst>
-            </p:cNvPr>
-            <p:cNvSpPr/>
-            <p:nvPr/>
-          </p:nvSpPr>
-          <p:spPr>
-            <a:xfrm>
-              <a:off x="6233560" y="1927412"/>
-              <a:ext cx="288000" cy="72000"/>
-            </a:xfrm>
-            <a:prstGeom prst="rect">
-              <a:avLst/>
-            </a:prstGeom>
-            <a:solidFill>
-              <a:schemeClr val="bg1">
-                <a:lumMod val="85000"/>
-              </a:schemeClr>
-            </a:solidFill>
-            <a:ln>
-              <a:noFill/>
-            </a:ln>
-          </p:spPr>
-          <p:style>
-            <a:lnRef idx="2">
-              <a:schemeClr val="accent1">
-                <a:shade val="15000"/>
-              </a:schemeClr>
-            </a:lnRef>
-            <a:fillRef idx="1">
-              <a:schemeClr val="accent1"/>
-            </a:fillRef>
-            <a:effectRef idx="0">
-              <a:schemeClr val="accent1"/>
-            </a:effectRef>
-            <a:fontRef idx="minor">
-              <a:schemeClr val="lt1"/>
-            </a:fontRef>
-          </p:style>
-          <p:txBody>
-            <a:bodyPr rtlCol="0" anchor="ctr"/>
-            <a:lstStyle/>
-            <a:p>
-              <a:pPr algn="ctr"/>
-              <a:endParaRPr lang="zh-CN" altLang="en-US"/>
-            </a:p>
-          </p:txBody>
-        </p:sp>
-        <p:sp>
-          <p:nvSpPr>
-            <p:cNvPr id="72" name="矩形 71">
-              <a:extLst>
-                <a:ext uri="{FF2B5EF4-FFF2-40B4-BE49-F238E27FC236}">
-                  <a16:creationId xmlns:a16="http://schemas.microsoft.com/office/drawing/2014/main" id="{CFB970BC-9D0D-39D5-1B66-92FE6DDC6D53}"/>
-                </a:ext>
-              </a:extLst>
-            </p:cNvPr>
-            <p:cNvSpPr/>
-            <p:nvPr/>
-          </p:nvSpPr>
-          <p:spPr>
-            <a:xfrm>
-              <a:off x="6233560" y="2157812"/>
-              <a:ext cx="288000" cy="72000"/>
-            </a:xfrm>
-            <a:prstGeom prst="rect">
-              <a:avLst/>
-            </a:prstGeom>
-            <a:solidFill>
-              <a:schemeClr val="bg1">
-                <a:lumMod val="95000"/>
-              </a:schemeClr>
-            </a:solidFill>
-            <a:ln>
-              <a:noFill/>
-            </a:ln>
-          </p:spPr>
-          <p:style>
-            <a:lnRef idx="2">
-              <a:schemeClr val="accent1">
-                <a:shade val="15000"/>
-              </a:schemeClr>
-            </a:lnRef>
-            <a:fillRef idx="1">
-              <a:schemeClr val="accent1"/>
-            </a:fillRef>
-            <a:effectRef idx="0">
-              <a:schemeClr val="accent1"/>
-            </a:effectRef>
-            <a:fontRef idx="minor">
-              <a:schemeClr val="lt1"/>
-            </a:fontRef>
-          </p:style>
-          <p:txBody>
-            <a:bodyPr rtlCol="0" anchor="ctr"/>
-            <a:lstStyle/>
-            <a:p>
-              <a:pPr algn="ctr"/>
-              <a:endParaRPr lang="zh-CN" altLang="en-US"/>
-            </a:p>
-          </p:txBody>
-        </p:sp>
-        <p:sp>
-          <p:nvSpPr>
-            <p:cNvPr id="73" name="矩形 72">
-              <a:extLst>
-                <a:ext uri="{FF2B5EF4-FFF2-40B4-BE49-F238E27FC236}">
-                  <a16:creationId xmlns:a16="http://schemas.microsoft.com/office/drawing/2014/main" id="{869461EA-2F46-387F-11AF-9273E85AC66A}"/>
-                </a:ext>
-              </a:extLst>
-            </p:cNvPr>
-            <p:cNvSpPr/>
-            <p:nvPr/>
-          </p:nvSpPr>
-          <p:spPr>
-            <a:xfrm>
-              <a:off x="6233560" y="2215412"/>
-              <a:ext cx="288000" cy="72000"/>
-            </a:xfrm>
-            <a:prstGeom prst="rect">
-              <a:avLst/>
-            </a:prstGeom>
-            <a:solidFill>
-              <a:schemeClr val="bg1">
-                <a:lumMod val="95000"/>
-              </a:schemeClr>
-            </a:solidFill>
-            <a:ln>
-              <a:noFill/>
-            </a:ln>
-          </p:spPr>
-          <p:style>
-            <a:lnRef idx="2">
-              <a:schemeClr val="accent1">
-                <a:shade val="15000"/>
-              </a:schemeClr>
-            </a:lnRef>
-            <a:fillRef idx="1">
-              <a:schemeClr val="accent1"/>
-            </a:fillRef>
-            <a:effectRef idx="0">
-              <a:schemeClr val="accent1"/>
-            </a:effectRef>
-            <a:fontRef idx="minor">
-              <a:schemeClr val="lt1"/>
-            </a:fontRef>
-          </p:style>
-          <p:txBody>
-            <a:bodyPr rtlCol="0" anchor="ctr"/>
-            <a:lstStyle/>
-            <a:p>
-              <a:pPr algn="ctr"/>
-              <a:endParaRPr lang="zh-CN" altLang="en-US"/>
-            </a:p>
-          </p:txBody>
-        </p:sp>
-        <p:sp>
-          <p:nvSpPr>
-            <p:cNvPr id="74" name="矩形 73">
-              <a:extLst>
-                <a:ext uri="{FF2B5EF4-FFF2-40B4-BE49-F238E27FC236}">
-                  <a16:creationId xmlns:a16="http://schemas.microsoft.com/office/drawing/2014/main" id="{B26B85BE-6EA5-3297-ACE5-4AAE406AA7E0}"/>
-                </a:ext>
-              </a:extLst>
-            </p:cNvPr>
-            <p:cNvSpPr/>
-            <p:nvPr/>
-          </p:nvSpPr>
-          <p:spPr>
-            <a:xfrm>
-              <a:off x="6233560" y="1985012"/>
-              <a:ext cx="288000" cy="72000"/>
-            </a:xfrm>
-            <a:prstGeom prst="rect">
-              <a:avLst/>
-            </a:prstGeom>
-            <a:solidFill>
-              <a:schemeClr val="bg1">
-                <a:lumMod val="85000"/>
-              </a:schemeClr>
-            </a:solidFill>
-            <a:ln>
-              <a:noFill/>
-            </a:ln>
-          </p:spPr>
-          <p:style>
-            <a:lnRef idx="2">
-              <a:schemeClr val="accent1">
-                <a:shade val="15000"/>
-              </a:schemeClr>
-            </a:lnRef>
-            <a:fillRef idx="1">
-              <a:schemeClr val="accent1"/>
-            </a:fillRef>
-            <a:effectRef idx="0">
-              <a:schemeClr val="accent1"/>
-            </a:effectRef>
-            <a:fontRef idx="minor">
-              <a:schemeClr val="lt1"/>
-            </a:fontRef>
-          </p:style>
-          <p:txBody>
-            <a:bodyPr rtlCol="0" anchor="ctr"/>
-            <a:lstStyle/>
-            <a:p>
-              <a:pPr algn="ctr"/>
-              <a:endParaRPr lang="zh-CN" altLang="en-US"/>
-            </a:p>
-          </p:txBody>
-        </p:sp>
-        <p:sp>
-          <p:nvSpPr>
-            <p:cNvPr id="75" name="矩形 74">
-              <a:extLst>
-                <a:ext uri="{FF2B5EF4-FFF2-40B4-BE49-F238E27FC236}">
-                  <a16:creationId xmlns:a16="http://schemas.microsoft.com/office/drawing/2014/main" id="{1FFB968D-EB71-EB02-A7E9-2B84CF0C40D1}"/>
-                </a:ext>
-              </a:extLst>
-            </p:cNvPr>
-            <p:cNvSpPr/>
-            <p:nvPr/>
-          </p:nvSpPr>
-          <p:spPr>
-            <a:xfrm>
-              <a:off x="6233560" y="2042612"/>
-              <a:ext cx="288000" cy="72000"/>
-            </a:xfrm>
-            <a:prstGeom prst="rect">
-              <a:avLst/>
-            </a:prstGeom>
-            <a:solidFill>
-              <a:schemeClr val="bg1">
-                <a:lumMod val="85000"/>
-              </a:schemeClr>
-            </a:solidFill>
-            <a:ln>
-              <a:noFill/>
-            </a:ln>
-          </p:spPr>
-          <p:style>
-            <a:lnRef idx="2">
-              <a:schemeClr val="accent1">
-                <a:shade val="15000"/>
-              </a:schemeClr>
-            </a:lnRef>
-            <a:fillRef idx="1">
-              <a:schemeClr val="accent1"/>
-            </a:fillRef>
-            <a:effectRef idx="0">
-              <a:schemeClr val="accent1"/>
-            </a:effectRef>
-            <a:fontRef idx="minor">
-              <a:schemeClr val="lt1"/>
-            </a:fontRef>
-          </p:style>
-          <p:txBody>
-            <a:bodyPr rtlCol="0" anchor="ctr"/>
-            <a:lstStyle/>
-            <a:p>
-              <a:pPr algn="ctr"/>
-              <a:endParaRPr lang="zh-CN" altLang="en-US"/>
-            </a:p>
-          </p:txBody>
-        </p:sp>
-        <p:sp>
-          <p:nvSpPr>
-            <p:cNvPr id="76" name="矩形 75">
-              <a:extLst>
-                <a:ext uri="{FF2B5EF4-FFF2-40B4-BE49-F238E27FC236}">
-                  <a16:creationId xmlns:a16="http://schemas.microsoft.com/office/drawing/2014/main" id="{72A919FF-CEC4-0191-4D11-35D51B499666}"/>
-                </a:ext>
-              </a:extLst>
-            </p:cNvPr>
-            <p:cNvSpPr/>
-            <p:nvPr/>
-          </p:nvSpPr>
-          <p:spPr>
-            <a:xfrm>
-              <a:off x="6233560" y="2100212"/>
-              <a:ext cx="288000" cy="72000"/>
-            </a:xfrm>
-            <a:prstGeom prst="rect">
-              <a:avLst/>
-            </a:prstGeom>
-            <a:solidFill>
-              <a:schemeClr val="bg1">
-                <a:lumMod val="95000"/>
-              </a:schemeClr>
-            </a:solidFill>
-            <a:ln>
-              <a:noFill/>
-            </a:ln>
-          </p:spPr>
-          <p:style>
-            <a:lnRef idx="2">
-              <a:schemeClr val="accent1">
-                <a:shade val="15000"/>
-              </a:schemeClr>
-            </a:lnRef>
-            <a:fillRef idx="1">
-              <a:schemeClr val="accent1"/>
-            </a:fillRef>
-            <a:effectRef idx="0">
-              <a:schemeClr val="accent1"/>
-            </a:effectRef>
-            <a:fontRef idx="minor">
-              <a:schemeClr val="lt1"/>
-            </a:fontRef>
-          </p:style>
-          <p:txBody>
-            <a:bodyPr rtlCol="0" anchor="ctr"/>
-            <a:lstStyle/>
-            <a:p>
-              <a:pPr algn="ctr"/>
-              <a:endParaRPr lang="zh-CN" altLang="en-US"/>
-            </a:p>
-          </p:txBody>
-        </p:sp>
-        <p:sp>
-          <p:nvSpPr>
-            <p:cNvPr id="77" name="文本框 76">
-              <a:extLst>
-                <a:ext uri="{FF2B5EF4-FFF2-40B4-BE49-F238E27FC236}">
-                  <a16:creationId xmlns:a16="http://schemas.microsoft.com/office/drawing/2014/main" id="{DA2B652A-F8C1-8697-AF28-C510F9E58D30}"/>
-                </a:ext>
-              </a:extLst>
-            </p:cNvPr>
-            <p:cNvSpPr txBox="1"/>
-            <p:nvPr/>
-          </p:nvSpPr>
-          <p:spPr>
-            <a:xfrm>
-              <a:off x="6021196" y="1968913"/>
-              <a:ext cx="277640" cy="276999"/>
-            </a:xfrm>
-            <a:prstGeom prst="rect">
-              <a:avLst/>
-            </a:prstGeom>
-            <a:noFill/>
-          </p:spPr>
-          <p:txBody>
-            <a:bodyPr wrap="none" rtlCol="0">
-              <a:spAutoFit/>
-            </a:bodyPr>
-            <a:lstStyle/>
-            <a:p>
-              <a:pPr algn="l"/>
-              <a:r>
-                <a:rPr lang="en-US" altLang="zh-CN" sz="1200" dirty="0">
-                  <a:solidFill>
-                    <a:srgbClr val="FF0000"/>
-                  </a:solidFill>
-                  <a:latin typeface="Courier New" panose="02070309020205020404" pitchFamily="49" charset="0"/>
-                  <a:ea typeface="微软雅黑" panose="020B0503020204020204" pitchFamily="34" charset="-122"/>
-                  <a:cs typeface="Courier New" panose="02070309020205020404" pitchFamily="49" charset="0"/>
-                </a:rPr>
-                <a:t>x</a:t>
-              </a:r>
-              <a:endParaRPr lang="zh-CN" altLang="en-US" sz="1200" dirty="0">
-                <a:solidFill>
-                  <a:srgbClr val="FF0000"/>
-                </a:solidFill>
-                <a:latin typeface="Courier New" panose="02070309020205020404" pitchFamily="49" charset="0"/>
-                <a:ea typeface="微软雅黑" panose="020B0503020204020204" pitchFamily="34" charset="-122"/>
-                <a:cs typeface="Courier New" panose="02070309020205020404" pitchFamily="49" charset="0"/>
-              </a:endParaRPr>
-            </a:p>
-          </p:txBody>
-        </p:sp>
-      </p:grpSp>
-      <p:sp>
-        <p:nvSpPr>
-          <p:cNvPr id="92" name="矩形 91">
-            <a:extLst>
-              <a:ext uri="{FF2B5EF4-FFF2-40B4-BE49-F238E27FC236}">
-                <a16:creationId xmlns:a16="http://schemas.microsoft.com/office/drawing/2014/main" id="{888FEABB-73F0-04A3-E7F6-03CDE808B5F5}"/>
-              </a:ext>
-            </a:extLst>
-          </p:cNvPr>
-          <p:cNvSpPr/>
-          <p:nvPr/>
-        </p:nvSpPr>
-        <p:spPr>
-          <a:xfrm>
-            <a:off x="1162062" y="1954304"/>
-            <a:ext cx="1984550" cy="666914"/>
-          </a:xfrm>
-          <a:prstGeom prst="rect">
-            <a:avLst/>
-          </a:prstGeom>
-          <a:noFill/>
-        </p:spPr>
-        <p:style>
-          <a:lnRef idx="2">
-            <a:schemeClr val="accent1">
-              <a:shade val="15000"/>
-            </a:schemeClr>
-          </a:lnRef>
-          <a:fillRef idx="1">
-            <a:schemeClr val="accent1"/>
-          </a:fillRef>
-          <a:effectRef idx="0">
-            <a:schemeClr val="accent1"/>
-          </a:effectRef>
-          <a:fontRef idx="minor">
-            <a:schemeClr val="lt1"/>
-          </a:fontRef>
-        </p:style>
-        <p:txBody>
-          <a:bodyPr rtlCol="0" anchor="ctr"/>
-          <a:lstStyle/>
-          <a:p>
-            <a:pPr algn="ctr"/>
-            <a:endParaRPr lang="zh-CN" altLang="en-US"/>
-          </a:p>
-        </p:txBody>
-      </p:sp>
-      <p:sp>
-        <p:nvSpPr>
-          <p:cNvPr id="93" name="文本框 92">
-            <a:extLst>
-              <a:ext uri="{FF2B5EF4-FFF2-40B4-BE49-F238E27FC236}">
-                <a16:creationId xmlns:a16="http://schemas.microsoft.com/office/drawing/2014/main" id="{7BFFA76B-7CCC-1BDD-0519-E31C2CEF215C}"/>
-              </a:ext>
-            </a:extLst>
-          </p:cNvPr>
-          <p:cNvSpPr txBox="1"/>
-          <p:nvPr/>
-        </p:nvSpPr>
-        <p:spPr>
-          <a:xfrm>
-            <a:off x="3230113" y="1136256"/>
-            <a:ext cx="1765227" cy="276999"/>
-          </a:xfrm>
-          <a:prstGeom prst="rect">
-            <a:avLst/>
-          </a:prstGeom>
-          <a:noFill/>
-        </p:spPr>
-        <p:txBody>
-          <a:bodyPr wrap="none" rtlCol="0">
-            <a:spAutoFit/>
-          </a:bodyPr>
-          <a:lstStyle/>
-          <a:p>
-            <a:pPr algn="ctr"/>
-            <a:r>
-              <a:rPr lang="en-US" altLang="zh-CN" sz="1200" dirty="0">
-                <a:latin typeface="Courier New" panose="02070309020205020404" pitchFamily="49" charset="0"/>
-                <a:ea typeface="微软雅黑" panose="020B0503020204020204" pitchFamily="34" charset="-122"/>
-                <a:cs typeface="Courier New" panose="02070309020205020404" pitchFamily="49" charset="0"/>
-              </a:rPr>
-              <a:t>Application Layer</a:t>
-            </a:r>
-            <a:endParaRPr lang="zh-CN" altLang="en-US" sz="1200" dirty="0">
-              <a:latin typeface="Courier New" panose="02070309020205020404" pitchFamily="49" charset="0"/>
-              <a:ea typeface="微软雅黑" panose="020B0503020204020204" pitchFamily="34" charset="-122"/>
-              <a:cs typeface="Courier New" panose="02070309020205020404" pitchFamily="49" charset="0"/>
-            </a:endParaRPr>
-          </a:p>
-        </p:txBody>
-      </p:sp>
-      <p:sp>
-        <p:nvSpPr>
-          <p:cNvPr id="94" name="文本框 93">
-            <a:extLst>
-              <a:ext uri="{FF2B5EF4-FFF2-40B4-BE49-F238E27FC236}">
-                <a16:creationId xmlns:a16="http://schemas.microsoft.com/office/drawing/2014/main" id="{78B4EAAF-8F9E-AE2E-0B18-C4FFF109669A}"/>
-              </a:ext>
-            </a:extLst>
-          </p:cNvPr>
-          <p:cNvSpPr txBox="1"/>
-          <p:nvPr/>
-        </p:nvSpPr>
-        <p:spPr>
-          <a:xfrm>
-            <a:off x="3834445" y="1629312"/>
-            <a:ext cx="556563" cy="276999"/>
-          </a:xfrm>
-          <a:prstGeom prst="rect">
-            <a:avLst/>
-          </a:prstGeom>
-          <a:noFill/>
-        </p:spPr>
-        <p:txBody>
-          <a:bodyPr wrap="none" rtlCol="0">
-            <a:spAutoFit/>
-          </a:bodyPr>
-          <a:lstStyle/>
-          <a:p>
-            <a:pPr algn="ctr"/>
-            <a:r>
-              <a:rPr lang="en-US" altLang="zh-CN" sz="1200" dirty="0">
-                <a:latin typeface="Courier New" panose="02070309020205020404" pitchFamily="49" charset="0"/>
-                <a:ea typeface="微软雅黑" panose="020B0503020204020204" pitchFamily="34" charset="-122"/>
-                <a:cs typeface="Courier New" panose="02070309020205020404" pitchFamily="49" charset="0"/>
-              </a:rPr>
-              <a:t>Port</a:t>
-            </a:r>
-            <a:endParaRPr lang="zh-CN" altLang="en-US" sz="1200" dirty="0">
-              <a:latin typeface="Courier New" panose="02070309020205020404" pitchFamily="49" charset="0"/>
-              <a:ea typeface="微软雅黑" panose="020B0503020204020204" pitchFamily="34" charset="-122"/>
-              <a:cs typeface="Courier New" panose="02070309020205020404" pitchFamily="49" charset="0"/>
-            </a:endParaRPr>
-          </a:p>
-        </p:txBody>
-      </p:sp>
-      <p:sp>
-        <p:nvSpPr>
-          <p:cNvPr id="95" name="文本框 94">
-            <a:extLst>
-              <a:ext uri="{FF2B5EF4-FFF2-40B4-BE49-F238E27FC236}">
-                <a16:creationId xmlns:a16="http://schemas.microsoft.com/office/drawing/2014/main" id="{BB7A9DAC-57B6-3ACD-5E13-83AEE7073E74}"/>
-              </a:ext>
-            </a:extLst>
-          </p:cNvPr>
-          <p:cNvSpPr txBox="1"/>
-          <p:nvPr/>
-        </p:nvSpPr>
-        <p:spPr>
-          <a:xfrm>
-            <a:off x="3323087" y="2149262"/>
-            <a:ext cx="1579279" cy="276999"/>
-          </a:xfrm>
-          <a:prstGeom prst="rect">
-            <a:avLst/>
-          </a:prstGeom>
-          <a:noFill/>
-        </p:spPr>
-        <p:txBody>
-          <a:bodyPr wrap="none" rtlCol="0">
-            <a:spAutoFit/>
-          </a:bodyPr>
-          <a:lstStyle/>
-          <a:p>
-            <a:pPr algn="ctr"/>
-            <a:r>
-              <a:rPr lang="en-US" altLang="zh-CN" sz="1200" dirty="0">
-                <a:latin typeface="Courier New" panose="02070309020205020404" pitchFamily="49" charset="0"/>
-                <a:ea typeface="微软雅黑" panose="020B0503020204020204" pitchFamily="34" charset="-122"/>
-                <a:cs typeface="Courier New" panose="02070309020205020404" pitchFamily="49" charset="0"/>
-              </a:rPr>
-              <a:t>Transport Layer</a:t>
-            </a:r>
-            <a:endParaRPr lang="zh-CN" altLang="en-US" sz="1200" dirty="0">
-              <a:latin typeface="Courier New" panose="02070309020205020404" pitchFamily="49" charset="0"/>
-              <a:ea typeface="微软雅黑" panose="020B0503020204020204" pitchFamily="34" charset="-122"/>
-              <a:cs typeface="Courier New" panose="02070309020205020404" pitchFamily="49" charset="0"/>
-            </a:endParaRPr>
-          </a:p>
-        </p:txBody>
-      </p:sp>
-      <p:sp>
-        <p:nvSpPr>
-          <p:cNvPr id="96" name="矩形 95">
-            <a:extLst>
-              <a:ext uri="{FF2B5EF4-FFF2-40B4-BE49-F238E27FC236}">
-                <a16:creationId xmlns:a16="http://schemas.microsoft.com/office/drawing/2014/main" id="{0BE6DD7B-018D-19B4-2101-31B944A8B234}"/>
-              </a:ext>
-            </a:extLst>
-          </p:cNvPr>
-          <p:cNvSpPr/>
-          <p:nvPr/>
-        </p:nvSpPr>
-        <p:spPr>
-          <a:xfrm>
-            <a:off x="5133426" y="941298"/>
-            <a:ext cx="1984550" cy="666914"/>
-          </a:xfrm>
-          <a:prstGeom prst="rect">
-            <a:avLst/>
-          </a:prstGeom>
-          <a:noFill/>
-        </p:spPr>
-        <p:style>
-          <a:lnRef idx="2">
-            <a:schemeClr val="accent1">
-              <a:shade val="15000"/>
-            </a:schemeClr>
-          </a:lnRef>
-          <a:fillRef idx="1">
-            <a:schemeClr val="accent1"/>
-          </a:fillRef>
-          <a:effectRef idx="0">
-            <a:schemeClr val="accent1"/>
-          </a:effectRef>
-          <a:fontRef idx="minor">
-            <a:schemeClr val="lt1"/>
-          </a:fontRef>
-        </p:style>
-        <p:txBody>
-          <a:bodyPr rtlCol="0" anchor="ctr"/>
-          <a:lstStyle/>
-          <a:p>
-            <a:pPr algn="ctr"/>
-            <a:endParaRPr lang="zh-CN" altLang="en-US"/>
-          </a:p>
-        </p:txBody>
-      </p:sp>
-      <p:sp>
-        <p:nvSpPr>
-          <p:cNvPr id="97" name="矩形 96">
-            <a:extLst>
-              <a:ext uri="{FF2B5EF4-FFF2-40B4-BE49-F238E27FC236}">
-                <a16:creationId xmlns:a16="http://schemas.microsoft.com/office/drawing/2014/main" id="{3EF20692-7A2A-6BCC-4AE5-92FF63D2F76B}"/>
-              </a:ext>
-            </a:extLst>
-          </p:cNvPr>
-          <p:cNvSpPr/>
-          <p:nvPr/>
-        </p:nvSpPr>
-        <p:spPr>
-          <a:xfrm>
-            <a:off x="5133426" y="1954304"/>
-            <a:ext cx="1984550" cy="666914"/>
-          </a:xfrm>
-          <a:prstGeom prst="rect">
-            <a:avLst/>
-          </a:prstGeom>
-          <a:noFill/>
-        </p:spPr>
-        <p:style>
-          <a:lnRef idx="2">
-            <a:schemeClr val="accent1">
-              <a:shade val="15000"/>
-            </a:schemeClr>
-          </a:lnRef>
-          <a:fillRef idx="1">
-            <a:schemeClr val="accent1"/>
-          </a:fillRef>
-          <a:effectRef idx="0">
-            <a:schemeClr val="accent1"/>
-          </a:effectRef>
-          <a:fontRef idx="minor">
-            <a:schemeClr val="lt1"/>
-          </a:fontRef>
-        </p:style>
-        <p:txBody>
-          <a:bodyPr rtlCol="0" anchor="ctr"/>
-          <a:lstStyle/>
-          <a:p>
-            <a:pPr algn="ctr"/>
-            <a:endParaRPr lang="zh-CN" altLang="en-US"/>
-          </a:p>
-        </p:txBody>
-      </p:sp>
-      <p:cxnSp>
-        <p:nvCxnSpPr>
-          <p:cNvPr id="99" name="连接符: 肘形 98">
-            <a:extLst>
-              <a:ext uri="{FF2B5EF4-FFF2-40B4-BE49-F238E27FC236}">
-                <a16:creationId xmlns:a16="http://schemas.microsoft.com/office/drawing/2014/main" id="{3C5353EC-0C26-3DA5-91BB-A7A2D466E8DB}"/>
-              </a:ext>
-            </a:extLst>
-          </p:cNvPr>
-          <p:cNvCxnSpPr>
-            <a:cxnSpLocks/>
-            <a:stCxn id="92" idx="2"/>
-            <a:endCxn id="97" idx="2"/>
-          </p:cNvCxnSpPr>
-          <p:nvPr/>
-        </p:nvCxnSpPr>
-        <p:spPr>
-          <a:xfrm rot="16200000" flipH="1">
-            <a:off x="4140019" y="635536"/>
-            <a:ext cx="12700" cy="3971364"/>
-          </a:xfrm>
-          <a:prstGeom prst="bentConnector3">
-            <a:avLst>
-              <a:gd name="adj1" fmla="val 3423528"/>
-            </a:avLst>
-          </a:prstGeom>
-          <a:ln>
-            <a:solidFill>
-              <a:schemeClr val="bg1">
-                <a:lumMod val="50000"/>
-              </a:schemeClr>
-            </a:solidFill>
-            <a:prstDash val="lgDash"/>
-            <a:tailEnd type="triangle"/>
-          </a:ln>
-        </p:spPr>
-        <p:style>
-          <a:lnRef idx="1">
-            <a:schemeClr val="accent1"/>
-          </a:lnRef>
-          <a:fillRef idx="0">
-            <a:schemeClr val="accent1"/>
-          </a:fillRef>
-          <a:effectRef idx="0">
-            <a:schemeClr val="accent1"/>
-          </a:effectRef>
-          <a:fontRef idx="minor">
-            <a:schemeClr val="tx1"/>
-          </a:fontRef>
-        </p:style>
-      </p:cxnSp>
-      <p:sp>
-        <p:nvSpPr>
-          <p:cNvPr id="101" name="文本框 100">
-            <a:extLst>
-              <a:ext uri="{FF2B5EF4-FFF2-40B4-BE49-F238E27FC236}">
-                <a16:creationId xmlns:a16="http://schemas.microsoft.com/office/drawing/2014/main" id="{ED49EBE7-C4F1-6FC3-1679-222C90BC5C16}"/>
-              </a:ext>
-            </a:extLst>
-          </p:cNvPr>
-          <p:cNvSpPr txBox="1"/>
-          <p:nvPr/>
-        </p:nvSpPr>
-        <p:spPr>
-          <a:xfrm>
-            <a:off x="3323087" y="3054700"/>
-            <a:ext cx="1579278" cy="276999"/>
-          </a:xfrm>
-          <a:prstGeom prst="rect">
-            <a:avLst/>
-          </a:prstGeom>
-          <a:noFill/>
-        </p:spPr>
-        <p:txBody>
-          <a:bodyPr wrap="none" rtlCol="0">
-            <a:spAutoFit/>
-          </a:bodyPr>
-          <a:lstStyle/>
-          <a:p>
-            <a:pPr algn="ctr"/>
-            <a:r>
-              <a:rPr lang="en-US" altLang="zh-CN" sz="1200" dirty="0">
-                <a:latin typeface="Courier New" panose="02070309020205020404" pitchFamily="49" charset="0"/>
-                <a:ea typeface="微软雅黑" panose="020B0503020204020204" pitchFamily="34" charset="-122"/>
-                <a:cs typeface="Courier New" panose="02070309020205020404" pitchFamily="49" charset="0"/>
-              </a:rPr>
-              <a:t>Logical channel</a:t>
-            </a:r>
-            <a:endParaRPr lang="zh-CN" altLang="en-US" sz="1200" dirty="0">
-              <a:latin typeface="Courier New" panose="02070309020205020404" pitchFamily="49" charset="0"/>
-              <a:ea typeface="微软雅黑" panose="020B0503020204020204" pitchFamily="34" charset="-122"/>
-              <a:cs typeface="Courier New" panose="02070309020205020404" pitchFamily="49" charset="0"/>
-            </a:endParaRPr>
-          </a:p>
-        </p:txBody>
-      </p:sp>
-      <p:cxnSp>
-        <p:nvCxnSpPr>
-          <p:cNvPr id="106" name="直接箭头连接符 105">
-            <a:extLst>
-              <a:ext uri="{FF2B5EF4-FFF2-40B4-BE49-F238E27FC236}">
-                <a16:creationId xmlns:a16="http://schemas.microsoft.com/office/drawing/2014/main" id="{9F95E230-B855-5A29-A91F-4D13421FE8F3}"/>
-              </a:ext>
-            </a:extLst>
-          </p:cNvPr>
-          <p:cNvCxnSpPr>
-            <a:cxnSpLocks/>
-          </p:cNvCxnSpPr>
-          <p:nvPr/>
-        </p:nvCxnSpPr>
-        <p:spPr>
-          <a:xfrm>
-            <a:off x="1631176" y="1444373"/>
-            <a:ext cx="0" cy="144000"/>
-          </a:xfrm>
-          <a:prstGeom prst="straightConnector1">
-            <a:avLst/>
-          </a:prstGeom>
-          <a:ln>
-            <a:solidFill>
-              <a:srgbClr val="EB3B5A"/>
-            </a:solidFill>
-            <a:tailEnd type="triangle"/>
-          </a:ln>
-        </p:spPr>
-        <p:style>
-          <a:lnRef idx="1">
-            <a:schemeClr val="accent1"/>
-          </a:lnRef>
-          <a:fillRef idx="0">
-            <a:schemeClr val="accent1"/>
-          </a:fillRef>
-          <a:effectRef idx="0">
-            <a:schemeClr val="accent1"/>
-          </a:effectRef>
-          <a:fontRef idx="minor">
-            <a:schemeClr val="tx1"/>
-          </a:fontRef>
-        </p:style>
-      </p:cxnSp>
-      <p:cxnSp>
-        <p:nvCxnSpPr>
-          <p:cNvPr id="107" name="直接箭头连接符 106">
-            <a:extLst>
-              <a:ext uri="{FF2B5EF4-FFF2-40B4-BE49-F238E27FC236}">
-                <a16:creationId xmlns:a16="http://schemas.microsoft.com/office/drawing/2014/main" id="{0F64A9B7-628A-1A23-350B-C708056CA88D}"/>
-              </a:ext>
-            </a:extLst>
-          </p:cNvPr>
-          <p:cNvCxnSpPr>
-            <a:cxnSpLocks/>
-          </p:cNvCxnSpPr>
-          <p:nvPr/>
-        </p:nvCxnSpPr>
-        <p:spPr>
-          <a:xfrm>
-            <a:off x="2205321" y="1444373"/>
-            <a:ext cx="0" cy="144000"/>
-          </a:xfrm>
-          <a:prstGeom prst="straightConnector1">
-            <a:avLst/>
-          </a:prstGeom>
-          <a:ln>
-            <a:solidFill>
-              <a:srgbClr val="EB3B5A"/>
-            </a:solidFill>
-            <a:tailEnd type="triangle"/>
-          </a:ln>
-        </p:spPr>
-        <p:style>
-          <a:lnRef idx="1">
-            <a:schemeClr val="accent1"/>
-          </a:lnRef>
-          <a:fillRef idx="0">
-            <a:schemeClr val="accent1"/>
-          </a:fillRef>
-          <a:effectRef idx="0">
-            <a:schemeClr val="accent1"/>
-          </a:effectRef>
-          <a:fontRef idx="minor">
-            <a:schemeClr val="tx1"/>
-          </a:fontRef>
-        </p:style>
-      </p:cxnSp>
-      <p:cxnSp>
-        <p:nvCxnSpPr>
-          <p:cNvPr id="108" name="直接箭头连接符 107">
-            <a:extLst>
-              <a:ext uri="{FF2B5EF4-FFF2-40B4-BE49-F238E27FC236}">
-                <a16:creationId xmlns:a16="http://schemas.microsoft.com/office/drawing/2014/main" id="{84A5B23B-C6FE-8F0E-60A0-FF0E219AC4FD}"/>
-              </a:ext>
-            </a:extLst>
-          </p:cNvPr>
-          <p:cNvCxnSpPr>
-            <a:cxnSpLocks/>
-          </p:cNvCxnSpPr>
-          <p:nvPr/>
-        </p:nvCxnSpPr>
-        <p:spPr>
-          <a:xfrm>
-            <a:off x="2877672" y="1444373"/>
-            <a:ext cx="0" cy="144000"/>
-          </a:xfrm>
-          <a:prstGeom prst="straightConnector1">
-            <a:avLst/>
-          </a:prstGeom>
-          <a:ln>
-            <a:solidFill>
-              <a:srgbClr val="20BD6A"/>
-            </a:solidFill>
-            <a:tailEnd type="triangle"/>
-          </a:ln>
-        </p:spPr>
-        <p:style>
-          <a:lnRef idx="1">
-            <a:schemeClr val="accent1"/>
-          </a:lnRef>
-          <a:fillRef idx="0">
-            <a:schemeClr val="accent1"/>
-          </a:fillRef>
-          <a:effectRef idx="0">
-            <a:schemeClr val="accent1"/>
-          </a:effectRef>
-          <a:fontRef idx="minor">
-            <a:schemeClr val="tx1"/>
-          </a:fontRef>
-        </p:style>
-      </p:cxnSp>
-      <p:cxnSp>
-        <p:nvCxnSpPr>
-          <p:cNvPr id="109" name="直接箭头连接符 108">
-            <a:extLst>
-              <a:ext uri="{FF2B5EF4-FFF2-40B4-BE49-F238E27FC236}">
-                <a16:creationId xmlns:a16="http://schemas.microsoft.com/office/drawing/2014/main" id="{F82FD08F-3A64-FD6C-A2E3-B71D5DB39489}"/>
-              </a:ext>
-            </a:extLst>
-          </p:cNvPr>
-          <p:cNvCxnSpPr>
-            <a:cxnSpLocks/>
-          </p:cNvCxnSpPr>
-          <p:nvPr/>
-        </p:nvCxnSpPr>
-        <p:spPr>
-          <a:xfrm>
-            <a:off x="5736737" y="1444373"/>
-            <a:ext cx="0" cy="144000"/>
-          </a:xfrm>
-          <a:prstGeom prst="straightConnector1">
-            <a:avLst/>
-          </a:prstGeom>
-          <a:ln>
-            <a:solidFill>
-              <a:schemeClr val="tx1"/>
-            </a:solidFill>
-            <a:tailEnd type="triangle"/>
-          </a:ln>
-        </p:spPr>
-        <p:style>
-          <a:lnRef idx="1">
-            <a:schemeClr val="accent1"/>
-          </a:lnRef>
-          <a:fillRef idx="0">
-            <a:schemeClr val="accent1"/>
-          </a:fillRef>
-          <a:effectRef idx="0">
-            <a:schemeClr val="accent1"/>
-          </a:effectRef>
-          <a:fontRef idx="minor">
-            <a:schemeClr val="tx1"/>
-          </a:fontRef>
-        </p:style>
-      </p:cxnSp>
-      <p:cxnSp>
-        <p:nvCxnSpPr>
-          <p:cNvPr id="110" name="直接箭头连接符 109">
-            <a:extLst>
-              <a:ext uri="{FF2B5EF4-FFF2-40B4-BE49-F238E27FC236}">
-                <a16:creationId xmlns:a16="http://schemas.microsoft.com/office/drawing/2014/main" id="{B58085E8-4B1F-E09F-657B-59008B7DC38A}"/>
-              </a:ext>
-            </a:extLst>
-          </p:cNvPr>
-          <p:cNvCxnSpPr>
-            <a:cxnSpLocks/>
-          </p:cNvCxnSpPr>
-          <p:nvPr/>
-        </p:nvCxnSpPr>
-        <p:spPr>
-          <a:xfrm>
-            <a:off x="6535271" y="1444373"/>
-            <a:ext cx="0" cy="144000"/>
-          </a:xfrm>
-          <a:prstGeom prst="straightConnector1">
-            <a:avLst/>
-          </a:prstGeom>
-          <a:ln>
-            <a:solidFill>
-              <a:srgbClr val="20BD6A"/>
-            </a:solidFill>
-            <a:tailEnd type="triangle"/>
-          </a:ln>
-        </p:spPr>
-        <p:style>
-          <a:lnRef idx="1">
-            <a:schemeClr val="accent1"/>
-          </a:lnRef>
-          <a:fillRef idx="0">
-            <a:schemeClr val="accent1"/>
-          </a:fillRef>
-          <a:effectRef idx="0">
-            <a:schemeClr val="accent1"/>
-          </a:effectRef>
-          <a:fontRef idx="minor">
-            <a:schemeClr val="tx1"/>
-          </a:fontRef>
-        </p:style>
-      </p:cxnSp>
-      <p:sp>
-        <p:nvSpPr>
-          <p:cNvPr id="113" name="文本框 112">
-            <a:extLst>
-              <a:ext uri="{FF2B5EF4-FFF2-40B4-BE49-F238E27FC236}">
-                <a16:creationId xmlns:a16="http://schemas.microsoft.com/office/drawing/2014/main" id="{31D96E86-612C-59A6-07F0-4553D172F74A}"/>
-              </a:ext>
-            </a:extLst>
-          </p:cNvPr>
-          <p:cNvSpPr txBox="1"/>
-          <p:nvPr/>
-        </p:nvSpPr>
-        <p:spPr>
-          <a:xfrm>
-            <a:off x="2171811" y="2638792"/>
-            <a:ext cx="1300356" cy="276999"/>
-          </a:xfrm>
-          <a:prstGeom prst="rect">
-            <a:avLst/>
-          </a:prstGeom>
-          <a:noFill/>
-        </p:spPr>
-        <p:txBody>
-          <a:bodyPr wrap="none" rtlCol="0">
-            <a:spAutoFit/>
-          </a:bodyPr>
-          <a:lstStyle/>
-          <a:p>
-            <a:pPr algn="l"/>
-            <a:r>
-              <a:rPr lang="en-US" altLang="zh-CN" sz="1200" dirty="0">
-                <a:latin typeface="Courier New" panose="02070309020205020404" pitchFamily="49" charset="0"/>
-                <a:ea typeface="微软雅黑" panose="020B0503020204020204" pitchFamily="34" charset="-122"/>
-                <a:cs typeface="Courier New" panose="02070309020205020404" pitchFamily="49" charset="0"/>
-              </a:rPr>
-              <a:t>Multiplexing</a:t>
-            </a:r>
-            <a:endParaRPr lang="zh-CN" altLang="en-US" sz="1200" dirty="0">
-              <a:latin typeface="Courier New" panose="02070309020205020404" pitchFamily="49" charset="0"/>
-              <a:ea typeface="微软雅黑" panose="020B0503020204020204" pitchFamily="34" charset="-122"/>
-              <a:cs typeface="Courier New" panose="02070309020205020404" pitchFamily="49" charset="0"/>
-            </a:endParaRPr>
-          </a:p>
-        </p:txBody>
-      </p:sp>
-      <p:sp>
-        <p:nvSpPr>
-          <p:cNvPr id="114" name="文本框 113">
-            <a:extLst>
-              <a:ext uri="{FF2B5EF4-FFF2-40B4-BE49-F238E27FC236}">
-                <a16:creationId xmlns:a16="http://schemas.microsoft.com/office/drawing/2014/main" id="{E1F78B75-9A57-987F-F596-E2F4E0AF2A96}"/>
-              </a:ext>
-            </a:extLst>
-          </p:cNvPr>
-          <p:cNvSpPr txBox="1"/>
-          <p:nvPr/>
-        </p:nvSpPr>
-        <p:spPr>
-          <a:xfrm>
-            <a:off x="4643729" y="2638792"/>
-            <a:ext cx="1486304" cy="276999"/>
-          </a:xfrm>
-          <a:prstGeom prst="rect">
-            <a:avLst/>
-          </a:prstGeom>
-          <a:noFill/>
-        </p:spPr>
-        <p:txBody>
-          <a:bodyPr wrap="none" rtlCol="0">
-            <a:spAutoFit/>
-          </a:bodyPr>
-          <a:lstStyle/>
-          <a:p>
-            <a:pPr algn="l"/>
-            <a:r>
-              <a:rPr lang="en-US" altLang="zh-CN" sz="1200" dirty="0">
-                <a:latin typeface="Courier New" panose="02070309020205020404" pitchFamily="49" charset="0"/>
-                <a:ea typeface="微软雅黑" panose="020B0503020204020204" pitchFamily="34" charset="-122"/>
-                <a:cs typeface="Courier New" panose="02070309020205020404" pitchFamily="49" charset="0"/>
-              </a:rPr>
-              <a:t>Demultiplexing</a:t>
-            </a:r>
-            <a:endParaRPr lang="zh-CN" altLang="en-US" sz="1200" dirty="0">
-              <a:latin typeface="Courier New" panose="02070309020205020404" pitchFamily="49" charset="0"/>
-              <a:ea typeface="微软雅黑" panose="020B0503020204020204" pitchFamily="34" charset="-122"/>
-              <a:cs typeface="Courier New" panose="02070309020205020404" pitchFamily="49" charset="0"/>
-            </a:endParaRPr>
-          </a:p>
-        </p:txBody>
-      </p:sp>
-      <p:cxnSp>
-        <p:nvCxnSpPr>
-          <p:cNvPr id="115" name="直接箭头连接符 114">
-            <a:extLst>
-              <a:ext uri="{FF2B5EF4-FFF2-40B4-BE49-F238E27FC236}">
-                <a16:creationId xmlns:a16="http://schemas.microsoft.com/office/drawing/2014/main" id="{522EF6EB-A31C-327C-6988-F23967A32403}"/>
-              </a:ext>
-            </a:extLst>
-          </p:cNvPr>
-          <p:cNvCxnSpPr>
-            <a:cxnSpLocks/>
-          </p:cNvCxnSpPr>
-          <p:nvPr/>
-        </p:nvCxnSpPr>
-        <p:spPr>
-          <a:xfrm>
-            <a:off x="1608860" y="1973646"/>
-            <a:ext cx="545477" cy="647572"/>
-          </a:xfrm>
-          <a:prstGeom prst="straightConnector1">
-            <a:avLst/>
-          </a:prstGeom>
-          <a:ln>
-            <a:solidFill>
-              <a:srgbClr val="EB3B5A"/>
-            </a:solidFill>
-            <a:tailEnd type="triangle"/>
-          </a:ln>
-        </p:spPr>
-        <p:style>
-          <a:lnRef idx="1">
-            <a:schemeClr val="accent1"/>
-          </a:lnRef>
-          <a:fillRef idx="0">
-            <a:schemeClr val="accent1"/>
-          </a:fillRef>
-          <a:effectRef idx="0">
-            <a:schemeClr val="accent1"/>
-          </a:effectRef>
-          <a:fontRef idx="minor">
-            <a:schemeClr val="tx1"/>
-          </a:fontRef>
-        </p:style>
-      </p:cxnSp>
-      <p:cxnSp>
-        <p:nvCxnSpPr>
-          <p:cNvPr id="117" name="直接箭头连接符 116">
-            <a:extLst>
-              <a:ext uri="{FF2B5EF4-FFF2-40B4-BE49-F238E27FC236}">
-                <a16:creationId xmlns:a16="http://schemas.microsoft.com/office/drawing/2014/main" id="{AADAE543-12BC-DB03-2563-BF2956BD561C}"/>
-              </a:ext>
-            </a:extLst>
-          </p:cNvPr>
-          <p:cNvCxnSpPr>
-            <a:cxnSpLocks/>
-            <a:stCxn id="53" idx="2"/>
-          </p:cNvCxnSpPr>
-          <p:nvPr/>
-        </p:nvCxnSpPr>
-        <p:spPr>
-          <a:xfrm flipH="1">
-            <a:off x="2260519" y="1947810"/>
-            <a:ext cx="612120" cy="690982"/>
-          </a:xfrm>
-          <a:prstGeom prst="straightConnector1">
-            <a:avLst/>
-          </a:prstGeom>
-          <a:ln>
-            <a:solidFill>
-              <a:srgbClr val="20BD6A"/>
-            </a:solidFill>
-            <a:tailEnd type="triangle"/>
-          </a:ln>
-        </p:spPr>
-        <p:style>
-          <a:lnRef idx="1">
-            <a:schemeClr val="accent1"/>
-          </a:lnRef>
-          <a:fillRef idx="0">
-            <a:schemeClr val="accent1"/>
-          </a:fillRef>
-          <a:effectRef idx="0">
-            <a:schemeClr val="accent1"/>
-          </a:effectRef>
-          <a:fontRef idx="minor">
-            <a:schemeClr val="tx1"/>
-          </a:fontRef>
-        </p:style>
-      </p:cxnSp>
-      <p:cxnSp>
-        <p:nvCxnSpPr>
-          <p:cNvPr id="125" name="直接箭头连接符 124">
-            <a:extLst>
-              <a:ext uri="{FF2B5EF4-FFF2-40B4-BE49-F238E27FC236}">
-                <a16:creationId xmlns:a16="http://schemas.microsoft.com/office/drawing/2014/main" id="{59A3AE77-7CC2-78DE-0312-42231F1660DF}"/>
-              </a:ext>
-            </a:extLst>
-          </p:cNvPr>
-          <p:cNvCxnSpPr>
-            <a:cxnSpLocks/>
-          </p:cNvCxnSpPr>
-          <p:nvPr/>
-        </p:nvCxnSpPr>
-        <p:spPr>
-          <a:xfrm>
-            <a:off x="2205321" y="1955359"/>
-            <a:ext cx="0" cy="648000"/>
-          </a:xfrm>
-          <a:prstGeom prst="straightConnector1">
-            <a:avLst/>
-          </a:prstGeom>
-          <a:ln>
-            <a:solidFill>
-              <a:srgbClr val="EB3B5A"/>
-            </a:solidFill>
-            <a:tailEnd type="triangle"/>
-          </a:ln>
-        </p:spPr>
-        <p:style>
-          <a:lnRef idx="1">
-            <a:schemeClr val="accent1"/>
-          </a:lnRef>
-          <a:fillRef idx="0">
-            <a:schemeClr val="accent1"/>
-          </a:fillRef>
-          <a:effectRef idx="0">
-            <a:schemeClr val="accent1"/>
-          </a:effectRef>
-          <a:fontRef idx="minor">
-            <a:schemeClr val="tx1"/>
-          </a:fontRef>
-        </p:style>
-      </p:cxnSp>
-      <p:cxnSp>
-        <p:nvCxnSpPr>
-          <p:cNvPr id="128" name="直接箭头连接符 127">
-            <a:extLst>
-              <a:ext uri="{FF2B5EF4-FFF2-40B4-BE49-F238E27FC236}">
-                <a16:creationId xmlns:a16="http://schemas.microsoft.com/office/drawing/2014/main" id="{E7AAC13A-7877-C8E2-C121-22971E49B0C1}"/>
-              </a:ext>
-            </a:extLst>
-          </p:cNvPr>
-          <p:cNvCxnSpPr>
-            <a:cxnSpLocks/>
-          </p:cNvCxnSpPr>
-          <p:nvPr/>
-        </p:nvCxnSpPr>
-        <p:spPr>
-          <a:xfrm flipH="1" flipV="1">
-            <a:off x="5708280" y="1968704"/>
-            <a:ext cx="426521" cy="586376"/>
-          </a:xfrm>
-          <a:prstGeom prst="straightConnector1">
-            <a:avLst/>
-          </a:prstGeom>
-          <a:ln>
-            <a:solidFill>
-              <a:srgbClr val="EB3B5A"/>
-            </a:solidFill>
-            <a:tailEnd type="triangle"/>
-          </a:ln>
-        </p:spPr>
-        <p:style>
-          <a:lnRef idx="1">
-            <a:schemeClr val="accent1"/>
-          </a:lnRef>
-          <a:fillRef idx="0">
-            <a:schemeClr val="accent1"/>
-          </a:fillRef>
-          <a:effectRef idx="0">
-            <a:schemeClr val="accent1"/>
-          </a:effectRef>
-          <a:fontRef idx="minor">
-            <a:schemeClr val="tx1"/>
-          </a:fontRef>
-        </p:style>
-      </p:cxnSp>
-      <p:cxnSp>
-        <p:nvCxnSpPr>
-          <p:cNvPr id="130" name="直接箭头连接符 129">
-            <a:extLst>
-              <a:ext uri="{FF2B5EF4-FFF2-40B4-BE49-F238E27FC236}">
-                <a16:creationId xmlns:a16="http://schemas.microsoft.com/office/drawing/2014/main" id="{F8896D3E-8D00-8E4F-BE16-F2F757596011}"/>
-              </a:ext>
-            </a:extLst>
-          </p:cNvPr>
-          <p:cNvCxnSpPr>
-            <a:cxnSpLocks/>
-          </p:cNvCxnSpPr>
-          <p:nvPr/>
-        </p:nvCxnSpPr>
-        <p:spPr>
-          <a:xfrm flipV="1">
-            <a:off x="6134801" y="1943080"/>
-            <a:ext cx="400470" cy="612000"/>
-          </a:xfrm>
-          <a:prstGeom prst="straightConnector1">
-            <a:avLst/>
-          </a:prstGeom>
-          <a:ln>
-            <a:solidFill>
-              <a:srgbClr val="20BD6A"/>
-            </a:solidFill>
-            <a:tailEnd type="triangle"/>
-          </a:ln>
-        </p:spPr>
-        <p:style>
-          <a:lnRef idx="1">
-            <a:schemeClr val="accent1"/>
-          </a:lnRef>
-          <a:fillRef idx="0">
-            <a:schemeClr val="accent1"/>
-          </a:fillRef>
-          <a:effectRef idx="0">
-            <a:schemeClr val="accent1"/>
-          </a:effectRef>
-          <a:fontRef idx="minor">
-            <a:schemeClr val="tx1"/>
-          </a:fontRef>
-        </p:style>
-      </p:cxnSp>
-      <p:sp>
-        <p:nvSpPr>
-          <p:cNvPr id="133" name="文本框 132">
-            <a:extLst>
-              <a:ext uri="{FF2B5EF4-FFF2-40B4-BE49-F238E27FC236}">
-                <a16:creationId xmlns:a16="http://schemas.microsoft.com/office/drawing/2014/main" id="{AE814C0F-52D6-33B1-47C2-8CB08BA624A7}"/>
-              </a:ext>
-            </a:extLst>
-          </p:cNvPr>
-          <p:cNvSpPr txBox="1"/>
-          <p:nvPr/>
-        </p:nvSpPr>
-        <p:spPr>
-          <a:xfrm>
-            <a:off x="1954603" y="561975"/>
-            <a:ext cx="399468" cy="307777"/>
-          </a:xfrm>
-          <a:prstGeom prst="rect">
-            <a:avLst/>
-          </a:prstGeom>
-          <a:noFill/>
-        </p:spPr>
-        <p:txBody>
-          <a:bodyPr wrap="none" rtlCol="0">
-            <a:spAutoFit/>
-          </a:bodyPr>
-          <a:lstStyle/>
-          <a:p>
-            <a:pPr algn="ctr"/>
-            <a:r>
-              <a:rPr lang="en-US" altLang="zh-CN" sz="1400" dirty="0">
-                <a:latin typeface="Courier New" panose="02070309020205020404" pitchFamily="49" charset="0"/>
-                <a:ea typeface="微软雅黑" panose="020B0503020204020204" pitchFamily="34" charset="-122"/>
-                <a:cs typeface="Courier New" panose="02070309020205020404" pitchFamily="49" charset="0"/>
-              </a:rPr>
-              <a:t>H1</a:t>
-            </a:r>
-            <a:endParaRPr lang="zh-CN" altLang="en-US" sz="1400" dirty="0">
-              <a:latin typeface="Courier New" panose="02070309020205020404" pitchFamily="49" charset="0"/>
-              <a:ea typeface="微软雅黑" panose="020B0503020204020204" pitchFamily="34" charset="-122"/>
-              <a:cs typeface="Courier New" panose="02070309020205020404" pitchFamily="49" charset="0"/>
-            </a:endParaRPr>
-          </a:p>
-        </p:txBody>
-      </p:sp>
-      <p:sp>
-        <p:nvSpPr>
-          <p:cNvPr id="134" name="文本框 133">
-            <a:extLst>
-              <a:ext uri="{FF2B5EF4-FFF2-40B4-BE49-F238E27FC236}">
-                <a16:creationId xmlns:a16="http://schemas.microsoft.com/office/drawing/2014/main" id="{C0E3A1EE-675E-B52B-E72D-37290E277572}"/>
-              </a:ext>
-            </a:extLst>
-          </p:cNvPr>
-          <p:cNvSpPr txBox="1"/>
-          <p:nvPr/>
-        </p:nvSpPr>
-        <p:spPr>
-          <a:xfrm>
-            <a:off x="5925967" y="561975"/>
-            <a:ext cx="399468" cy="307777"/>
-          </a:xfrm>
-          <a:prstGeom prst="rect">
-            <a:avLst/>
-          </a:prstGeom>
-          <a:noFill/>
-        </p:spPr>
-        <p:txBody>
-          <a:bodyPr wrap="none" rtlCol="0">
-            <a:spAutoFit/>
-          </a:bodyPr>
-          <a:lstStyle/>
-          <a:p>
-            <a:pPr algn="ctr"/>
-            <a:r>
-              <a:rPr lang="en-US" altLang="zh-CN" sz="1400" dirty="0">
-                <a:latin typeface="Courier New" panose="02070309020205020404" pitchFamily="49" charset="0"/>
-                <a:ea typeface="微软雅黑" panose="020B0503020204020204" pitchFamily="34" charset="-122"/>
-                <a:cs typeface="Courier New" panose="02070309020205020404" pitchFamily="49" charset="0"/>
-              </a:rPr>
-              <a:t>H2</a:t>
-            </a:r>
-            <a:endParaRPr lang="zh-CN" altLang="en-US" sz="1400" dirty="0">
-              <a:latin typeface="Courier New" panose="02070309020205020404" pitchFamily="49" charset="0"/>
-              <a:ea typeface="微软雅黑" panose="020B0503020204020204" pitchFamily="34" charset="-122"/>
-              <a:cs typeface="Courier New" panose="02070309020205020404" pitchFamily="49" charset="0"/>
-            </a:endParaRPr>
-          </a:p>
-        </p:txBody>
-      </p:sp>
-    </p:spTree>
-    <p:extLst>
-      <p:ext uri="{BB962C8B-B14F-4D97-AF65-F5344CB8AC3E}">
-        <p14:creationId xmlns:p14="http://schemas.microsoft.com/office/powerpoint/2010/main" val="3411162658"/>
-      </p:ext>
-    </p:extLst>
-  </p:cSld>
-  <p:clrMapOvr>
-    <a:masterClrMapping/>
-  </p:clrMapOvr>
-</p:sld>
-</file>
-
-<file path=ppt/slides/slide7.xml><?xml version="1.0" encoding="utf-8"?>
-<p:sld xmlns:a="http://schemas.openxmlformats.org/drawingml/2006/main" xmlns:r="http://schemas.openxmlformats.org/officeDocument/2006/relationships" xmlns:p="http://schemas.openxmlformats.org/presentationml/2006/main">
-  <p:cSld>
-    <p:spTree>
-      <p:nvGrpSpPr>
-        <p:cNvPr id="1" name=""/>
-        <p:cNvGrpSpPr/>
-        <p:nvPr/>
-      </p:nvGrpSpPr>
-      <p:grpSpPr>
-        <a:xfrm>
-          <a:off x="0" y="0"/>
-          <a:ext cx="0" cy="0"/>
-          <a:chOff x="0" y="0"/>
-          <a:chExt cx="0" cy="0"/>
-        </a:xfrm>
-      </p:grpSpPr>
-      <p:sp>
-        <p:nvSpPr>
           <p:cNvPr id="2" name="矩形: 圆角 1">
             <a:extLst>
               <a:ext uri="{FF2B5EF4-FFF2-40B4-BE49-F238E27FC236}">
@@ -40161,7 +35637,7 @@
 </p:sld>
 </file>
 
-<file path=ppt/slides/slide8.xml><?xml version="1.0" encoding="utf-8"?>
+<file path=ppt/slides/slide7.xml><?xml version="1.0" encoding="utf-8"?>
 <p:sld xmlns:a="http://schemas.openxmlformats.org/drawingml/2006/main" xmlns:r="http://schemas.openxmlformats.org/officeDocument/2006/relationships" xmlns:p="http://schemas.openxmlformats.org/presentationml/2006/main">
   <p:cSld>
     <p:spTree>
@@ -43370,7 +38846,7 @@
 </p:sld>
 </file>
 
-<file path=ppt/slides/slide9.xml><?xml version="1.0" encoding="utf-8"?>
+<file path=ppt/slides/slide8.xml><?xml version="1.0" encoding="utf-8"?>
 <p:sld xmlns:a="http://schemas.openxmlformats.org/drawingml/2006/main" xmlns:r="http://schemas.openxmlformats.org/officeDocument/2006/relationships" xmlns:p="http://schemas.openxmlformats.org/presentationml/2006/main">
   <p:cSld>
     <p:spTree>
@@ -45539,6 +41015,951 @@
     <p:extLst>
       <p:ext uri="{BB962C8B-B14F-4D97-AF65-F5344CB8AC3E}">
         <p14:creationId xmlns:p14="http://schemas.microsoft.com/office/powerpoint/2010/main" val="4061278343"/>
+      </p:ext>
+    </p:extLst>
+  </p:cSld>
+  <p:clrMapOvr>
+    <a:masterClrMapping/>
+  </p:clrMapOvr>
+</p:sld>
+</file>
+
+<file path=ppt/slides/slide9.xml><?xml version="1.0" encoding="utf-8"?>
+<p:sld xmlns:a="http://schemas.openxmlformats.org/drawingml/2006/main" xmlns:r="http://schemas.openxmlformats.org/officeDocument/2006/relationships" xmlns:p="http://schemas.openxmlformats.org/presentationml/2006/main">
+  <p:cSld>
+    <p:spTree>
+      <p:nvGrpSpPr>
+        <p:cNvPr id="1" name="">
+          <a:extLst>
+            <a:ext uri="{FF2B5EF4-FFF2-40B4-BE49-F238E27FC236}">
+              <a16:creationId xmlns:a16="http://schemas.microsoft.com/office/drawing/2014/main" id="{17D44D37-27F9-6B4C-6ADE-230014C32D82}"/>
+            </a:ext>
+          </a:extLst>
+        </p:cNvPr>
+        <p:cNvGrpSpPr/>
+        <p:nvPr/>
+      </p:nvGrpSpPr>
+      <p:grpSpPr>
+        <a:xfrm>
+          <a:off x="0" y="0"/>
+          <a:ext cx="0" cy="0"/>
+          <a:chOff x="0" y="0"/>
+          <a:chExt cx="0" cy="0"/>
+        </a:xfrm>
+      </p:grpSpPr>
+      <p:sp>
+        <p:nvSpPr>
+          <p:cNvPr id="2" name="矩形: 圆角 1">
+            <a:extLst>
+              <a:ext uri="{FF2B5EF4-FFF2-40B4-BE49-F238E27FC236}">
+                <a16:creationId xmlns:a16="http://schemas.microsoft.com/office/drawing/2014/main" id="{78C5F840-463F-A4D0-84A1-63E21E233D5E}"/>
+              </a:ext>
+            </a:extLst>
+          </p:cNvPr>
+          <p:cNvSpPr/>
+          <p:nvPr/>
+        </p:nvSpPr>
+        <p:spPr>
+          <a:xfrm>
+            <a:off x="5267696" y="3029934"/>
+            <a:ext cx="1080000" cy="216000"/>
+          </a:xfrm>
+          <a:prstGeom prst="roundRect">
+            <a:avLst/>
+          </a:prstGeom>
+          <a:solidFill>
+            <a:schemeClr val="tx1"/>
+          </a:solidFill>
+          <a:ln w="12700">
+            <a:noFill/>
+          </a:ln>
+        </p:spPr>
+        <p:style>
+          <a:lnRef idx="2">
+            <a:schemeClr val="accent1">
+              <a:shade val="15000"/>
+            </a:schemeClr>
+          </a:lnRef>
+          <a:fillRef idx="1">
+            <a:schemeClr val="accent1"/>
+          </a:fillRef>
+          <a:effectRef idx="0">
+            <a:schemeClr val="accent1"/>
+          </a:effectRef>
+          <a:fontRef idx="minor">
+            <a:schemeClr val="lt1"/>
+          </a:fontRef>
+        </p:style>
+        <p:txBody>
+          <a:bodyPr rtlCol="0" anchor="ctr"/>
+          <a:lstStyle/>
+          <a:p>
+            <a:pPr algn="ctr"/>
+            <a:r>
+              <a:rPr lang="en-US" altLang="zh-CN" sz="800">
+                <a:latin typeface="微软雅黑" panose="020B0503020204020204" pitchFamily="34" charset="-122"/>
+                <a:ea typeface="微软雅黑" panose="020B0503020204020204" pitchFamily="34" charset="-122"/>
+              </a:rPr>
+              <a:t>background</a:t>
+            </a:r>
+            <a:endParaRPr lang="zh-CN" altLang="en-US" sz="800">
+              <a:latin typeface="微软雅黑" panose="020B0503020204020204" pitchFamily="34" charset="-122"/>
+              <a:ea typeface="微软雅黑" panose="020B0503020204020204" pitchFamily="34" charset="-122"/>
+            </a:endParaRPr>
+          </a:p>
+        </p:txBody>
+      </p:sp>
+      <p:sp>
+        <p:nvSpPr>
+          <p:cNvPr id="3" name="矩形: 圆角 2">
+            <a:extLst>
+              <a:ext uri="{FF2B5EF4-FFF2-40B4-BE49-F238E27FC236}">
+                <a16:creationId xmlns:a16="http://schemas.microsoft.com/office/drawing/2014/main" id="{F4DE9355-3EFB-8606-FA1A-6D56D6950A98}"/>
+              </a:ext>
+            </a:extLst>
+          </p:cNvPr>
+          <p:cNvSpPr/>
+          <p:nvPr/>
+        </p:nvSpPr>
+        <p:spPr>
+          <a:xfrm>
+            <a:off x="6583823" y="3218172"/>
+            <a:ext cx="1440000" cy="216000"/>
+          </a:xfrm>
+          <a:prstGeom prst="roundRect">
+            <a:avLst/>
+          </a:prstGeom>
+          <a:solidFill>
+            <a:srgbClr val="6D214F"/>
+          </a:solidFill>
+          <a:ln w="12700">
+            <a:noFill/>
+          </a:ln>
+        </p:spPr>
+        <p:style>
+          <a:lnRef idx="2">
+            <a:schemeClr val="accent1">
+              <a:shade val="15000"/>
+            </a:schemeClr>
+          </a:lnRef>
+          <a:fillRef idx="1">
+            <a:schemeClr val="accent1"/>
+          </a:fillRef>
+          <a:effectRef idx="0">
+            <a:schemeClr val="accent1"/>
+          </a:effectRef>
+          <a:fontRef idx="minor">
+            <a:schemeClr val="lt1"/>
+          </a:fontRef>
+        </p:style>
+        <p:txBody>
+          <a:bodyPr rtlCol="0" anchor="ctr"/>
+          <a:lstStyle/>
+          <a:p>
+            <a:pPr algn="ctr"/>
+            <a:r>
+              <a:rPr lang="en-US" altLang="zh-CN" sz="800">
+                <a:latin typeface="Quicksand" panose="00000500000000000000" pitchFamily="2" charset="0"/>
+              </a:rPr>
+              <a:t>background-repeat</a:t>
+            </a:r>
+            <a:endParaRPr lang="zh-CN" altLang="en-US" sz="800">
+              <a:latin typeface="Quicksand" panose="00000500000000000000" pitchFamily="2" charset="0"/>
+            </a:endParaRPr>
+          </a:p>
+        </p:txBody>
+      </p:sp>
+      <p:sp>
+        <p:nvSpPr>
+          <p:cNvPr id="4" name="矩形: 圆角 3">
+            <a:extLst>
+              <a:ext uri="{FF2B5EF4-FFF2-40B4-BE49-F238E27FC236}">
+                <a16:creationId xmlns:a16="http://schemas.microsoft.com/office/drawing/2014/main" id="{B18A25FE-C1B9-F539-4E02-CEFFCB9D0003}"/>
+              </a:ext>
+            </a:extLst>
+          </p:cNvPr>
+          <p:cNvSpPr/>
+          <p:nvPr/>
+        </p:nvSpPr>
+        <p:spPr>
+          <a:xfrm>
+            <a:off x="6583823" y="1712260"/>
+            <a:ext cx="1440000" cy="216000"/>
+          </a:xfrm>
+          <a:prstGeom prst="roundRect">
+            <a:avLst/>
+          </a:prstGeom>
+          <a:solidFill>
+            <a:srgbClr val="FA8231"/>
+          </a:solidFill>
+          <a:ln w="12700">
+            <a:noFill/>
+          </a:ln>
+        </p:spPr>
+        <p:style>
+          <a:lnRef idx="2">
+            <a:schemeClr val="accent1">
+              <a:shade val="15000"/>
+            </a:schemeClr>
+          </a:lnRef>
+          <a:fillRef idx="1">
+            <a:schemeClr val="accent1"/>
+          </a:fillRef>
+          <a:effectRef idx="0">
+            <a:schemeClr val="accent1"/>
+          </a:effectRef>
+          <a:fontRef idx="minor">
+            <a:schemeClr val="lt1"/>
+          </a:fontRef>
+        </p:style>
+        <p:txBody>
+          <a:bodyPr rtlCol="0" anchor="ctr"/>
+          <a:lstStyle/>
+          <a:p>
+            <a:pPr algn="ctr"/>
+            <a:r>
+              <a:rPr lang="en-US" altLang="zh-CN" sz="800">
+                <a:latin typeface="Quicksand" panose="00000500000000000000" pitchFamily="2" charset="0"/>
+              </a:rPr>
+              <a:t>Background-color</a:t>
+            </a:r>
+            <a:endParaRPr lang="zh-CN" altLang="en-US" sz="800">
+              <a:latin typeface="Quicksand" panose="00000500000000000000" pitchFamily="2" charset="0"/>
+            </a:endParaRPr>
+          </a:p>
+        </p:txBody>
+      </p:sp>
+      <p:sp>
+        <p:nvSpPr>
+          <p:cNvPr id="5" name="矩形: 圆角 4">
+            <a:extLst>
+              <a:ext uri="{FF2B5EF4-FFF2-40B4-BE49-F238E27FC236}">
+                <a16:creationId xmlns:a16="http://schemas.microsoft.com/office/drawing/2014/main" id="{87A792D5-D640-E90C-F6FA-DE21142430A7}"/>
+              </a:ext>
+            </a:extLst>
+          </p:cNvPr>
+          <p:cNvSpPr/>
+          <p:nvPr/>
+        </p:nvSpPr>
+        <p:spPr>
+          <a:xfrm>
+            <a:off x="6583823" y="2088738"/>
+            <a:ext cx="1440000" cy="216000"/>
+          </a:xfrm>
+          <a:prstGeom prst="roundRect">
+            <a:avLst/>
+          </a:prstGeom>
+          <a:solidFill>
+            <a:srgbClr val="EB3B5A"/>
+          </a:solidFill>
+          <a:ln w="12700">
+            <a:noFill/>
+          </a:ln>
+        </p:spPr>
+        <p:style>
+          <a:lnRef idx="2">
+            <a:schemeClr val="accent1">
+              <a:shade val="15000"/>
+            </a:schemeClr>
+          </a:lnRef>
+          <a:fillRef idx="1">
+            <a:schemeClr val="accent1"/>
+          </a:fillRef>
+          <a:effectRef idx="0">
+            <a:schemeClr val="accent1"/>
+          </a:effectRef>
+          <a:fontRef idx="minor">
+            <a:schemeClr val="lt1"/>
+          </a:fontRef>
+        </p:style>
+        <p:txBody>
+          <a:bodyPr rtlCol="0" anchor="ctr"/>
+          <a:lstStyle/>
+          <a:p>
+            <a:pPr algn="ctr"/>
+            <a:r>
+              <a:rPr lang="en-US" altLang="zh-CN" sz="800">
+                <a:latin typeface="Quicksand" panose="00000500000000000000" pitchFamily="2" charset="0"/>
+              </a:rPr>
+              <a:t>background-img</a:t>
+            </a:r>
+            <a:endParaRPr lang="zh-CN" altLang="en-US" sz="800">
+              <a:latin typeface="Quicksand" panose="00000500000000000000" pitchFamily="2" charset="0"/>
+            </a:endParaRPr>
+          </a:p>
+        </p:txBody>
+      </p:sp>
+      <p:sp>
+        <p:nvSpPr>
+          <p:cNvPr id="6" name="矩形: 圆角 5">
+            <a:extLst>
+              <a:ext uri="{FF2B5EF4-FFF2-40B4-BE49-F238E27FC236}">
+                <a16:creationId xmlns:a16="http://schemas.microsoft.com/office/drawing/2014/main" id="{F001F596-A9BC-961B-AB7F-13C5672DF725}"/>
+              </a:ext>
+            </a:extLst>
+          </p:cNvPr>
+          <p:cNvSpPr/>
+          <p:nvPr/>
+        </p:nvSpPr>
+        <p:spPr>
+          <a:xfrm>
+            <a:off x="6583823" y="2465216"/>
+            <a:ext cx="1440000" cy="216000"/>
+          </a:xfrm>
+          <a:prstGeom prst="roundRect">
+            <a:avLst/>
+          </a:prstGeom>
+          <a:solidFill>
+            <a:srgbClr val="F78FB3"/>
+          </a:solidFill>
+          <a:ln w="12700">
+            <a:noFill/>
+          </a:ln>
+        </p:spPr>
+        <p:style>
+          <a:lnRef idx="2">
+            <a:schemeClr val="accent1">
+              <a:shade val="15000"/>
+            </a:schemeClr>
+          </a:lnRef>
+          <a:fillRef idx="1">
+            <a:schemeClr val="accent1"/>
+          </a:fillRef>
+          <a:effectRef idx="0">
+            <a:schemeClr val="accent1"/>
+          </a:effectRef>
+          <a:fontRef idx="minor">
+            <a:schemeClr val="lt1"/>
+          </a:fontRef>
+        </p:style>
+        <p:txBody>
+          <a:bodyPr rtlCol="0" anchor="ctr"/>
+          <a:lstStyle/>
+          <a:p>
+            <a:pPr algn="ctr"/>
+            <a:r>
+              <a:rPr lang="en-US" altLang="zh-CN" sz="800">
+                <a:latin typeface="Quicksand" panose="00000500000000000000" pitchFamily="2" charset="0"/>
+              </a:rPr>
+              <a:t>background-position</a:t>
+            </a:r>
+            <a:endParaRPr lang="zh-CN" altLang="en-US" sz="800">
+              <a:latin typeface="Quicksand" panose="00000500000000000000" pitchFamily="2" charset="0"/>
+            </a:endParaRPr>
+          </a:p>
+        </p:txBody>
+      </p:sp>
+      <p:cxnSp>
+        <p:nvCxnSpPr>
+          <p:cNvPr id="13" name="连接符: 曲线 12">
+            <a:extLst>
+              <a:ext uri="{FF2B5EF4-FFF2-40B4-BE49-F238E27FC236}">
+                <a16:creationId xmlns:a16="http://schemas.microsoft.com/office/drawing/2014/main" id="{D857022F-FD57-CB9F-109D-F0FEA004375B}"/>
+              </a:ext>
+            </a:extLst>
+          </p:cNvPr>
+          <p:cNvCxnSpPr>
+            <a:cxnSpLocks/>
+            <a:stCxn id="2" idx="3"/>
+            <a:endCxn id="3" idx="1"/>
+          </p:cNvCxnSpPr>
+          <p:nvPr/>
+        </p:nvCxnSpPr>
+        <p:spPr>
+          <a:xfrm>
+            <a:off x="6347696" y="3137934"/>
+            <a:ext cx="236127" cy="188238"/>
+          </a:xfrm>
+          <a:prstGeom prst="curvedConnector3">
+            <a:avLst>
+              <a:gd name="adj1" fmla="val 50000"/>
+            </a:avLst>
+          </a:prstGeom>
+          <a:ln>
+            <a:solidFill>
+              <a:srgbClr val="6D214F"/>
+            </a:solidFill>
+          </a:ln>
+        </p:spPr>
+        <p:style>
+          <a:lnRef idx="1">
+            <a:schemeClr val="accent1"/>
+          </a:lnRef>
+          <a:fillRef idx="0">
+            <a:schemeClr val="accent1"/>
+          </a:fillRef>
+          <a:effectRef idx="0">
+            <a:schemeClr val="accent1"/>
+          </a:effectRef>
+          <a:fontRef idx="minor">
+            <a:schemeClr val="tx1"/>
+          </a:fontRef>
+        </p:style>
+      </p:cxnSp>
+      <p:cxnSp>
+        <p:nvCxnSpPr>
+          <p:cNvPr id="14" name="连接符: 曲线 13">
+            <a:extLst>
+              <a:ext uri="{FF2B5EF4-FFF2-40B4-BE49-F238E27FC236}">
+                <a16:creationId xmlns:a16="http://schemas.microsoft.com/office/drawing/2014/main" id="{DF152018-D11C-FF19-7282-EC631DB77FDB}"/>
+              </a:ext>
+            </a:extLst>
+          </p:cNvPr>
+          <p:cNvCxnSpPr>
+            <a:stCxn id="2" idx="3"/>
+            <a:endCxn id="5" idx="1"/>
+          </p:cNvCxnSpPr>
+          <p:nvPr/>
+        </p:nvCxnSpPr>
+        <p:spPr>
+          <a:xfrm flipV="1">
+            <a:off x="6347696" y="2196738"/>
+            <a:ext cx="236127" cy="941196"/>
+          </a:xfrm>
+          <a:prstGeom prst="curvedConnector3">
+            <a:avLst/>
+          </a:prstGeom>
+          <a:ln>
+            <a:solidFill>
+              <a:srgbClr val="FF0000"/>
+            </a:solidFill>
+          </a:ln>
+        </p:spPr>
+        <p:style>
+          <a:lnRef idx="1">
+            <a:schemeClr val="accent1"/>
+          </a:lnRef>
+          <a:fillRef idx="0">
+            <a:schemeClr val="accent1"/>
+          </a:fillRef>
+          <a:effectRef idx="0">
+            <a:schemeClr val="accent1"/>
+          </a:effectRef>
+          <a:fontRef idx="minor">
+            <a:schemeClr val="tx1"/>
+          </a:fontRef>
+        </p:style>
+      </p:cxnSp>
+      <p:cxnSp>
+        <p:nvCxnSpPr>
+          <p:cNvPr id="15" name="连接符: 曲线 14">
+            <a:extLst>
+              <a:ext uri="{FF2B5EF4-FFF2-40B4-BE49-F238E27FC236}">
+                <a16:creationId xmlns:a16="http://schemas.microsoft.com/office/drawing/2014/main" id="{D776544B-8805-064E-FB86-8357089F4115}"/>
+              </a:ext>
+            </a:extLst>
+          </p:cNvPr>
+          <p:cNvCxnSpPr>
+            <a:stCxn id="2" idx="3"/>
+            <a:endCxn id="6" idx="1"/>
+          </p:cNvCxnSpPr>
+          <p:nvPr/>
+        </p:nvCxnSpPr>
+        <p:spPr>
+          <a:xfrm flipV="1">
+            <a:off x="6347696" y="2573216"/>
+            <a:ext cx="236127" cy="564718"/>
+          </a:xfrm>
+          <a:prstGeom prst="curvedConnector3">
+            <a:avLst/>
+          </a:prstGeom>
+          <a:ln>
+            <a:solidFill>
+              <a:srgbClr val="F78FB3"/>
+            </a:solidFill>
+          </a:ln>
+        </p:spPr>
+        <p:style>
+          <a:lnRef idx="1">
+            <a:schemeClr val="accent1"/>
+          </a:lnRef>
+          <a:fillRef idx="0">
+            <a:schemeClr val="accent1"/>
+          </a:fillRef>
+          <a:effectRef idx="0">
+            <a:schemeClr val="accent1"/>
+          </a:effectRef>
+          <a:fontRef idx="minor">
+            <a:schemeClr val="tx1"/>
+          </a:fontRef>
+        </p:style>
+      </p:cxnSp>
+      <p:cxnSp>
+        <p:nvCxnSpPr>
+          <p:cNvPr id="16" name="连接符: 曲线 15">
+            <a:extLst>
+              <a:ext uri="{FF2B5EF4-FFF2-40B4-BE49-F238E27FC236}">
+                <a16:creationId xmlns:a16="http://schemas.microsoft.com/office/drawing/2014/main" id="{5530CC53-CE6B-A691-48F9-E0FE20C352A0}"/>
+              </a:ext>
+            </a:extLst>
+          </p:cNvPr>
+          <p:cNvCxnSpPr>
+            <a:stCxn id="4" idx="1"/>
+            <a:endCxn id="2" idx="3"/>
+          </p:cNvCxnSpPr>
+          <p:nvPr/>
+        </p:nvCxnSpPr>
+        <p:spPr>
+          <a:xfrm rot="10800000" flipV="1">
+            <a:off x="6347697" y="1820260"/>
+            <a:ext cx="236127" cy="1317674"/>
+          </a:xfrm>
+          <a:prstGeom prst="curvedConnector3">
+            <a:avLst/>
+          </a:prstGeom>
+          <a:ln>
+            <a:solidFill>
+              <a:srgbClr val="FFC000"/>
+            </a:solidFill>
+          </a:ln>
+        </p:spPr>
+        <p:style>
+          <a:lnRef idx="1">
+            <a:schemeClr val="accent1"/>
+          </a:lnRef>
+          <a:fillRef idx="0">
+            <a:schemeClr val="accent1"/>
+          </a:fillRef>
+          <a:effectRef idx="0">
+            <a:schemeClr val="accent1"/>
+          </a:effectRef>
+          <a:fontRef idx="minor">
+            <a:schemeClr val="tx1"/>
+          </a:fontRef>
+        </p:style>
+      </p:cxnSp>
+      <p:sp>
+        <p:nvSpPr>
+          <p:cNvPr id="12" name="矩形: 圆角 11">
+            <a:extLst>
+              <a:ext uri="{FF2B5EF4-FFF2-40B4-BE49-F238E27FC236}">
+                <a16:creationId xmlns:a16="http://schemas.microsoft.com/office/drawing/2014/main" id="{CA690FCB-6050-34A5-12AA-227C0F7253CA}"/>
+              </a:ext>
+            </a:extLst>
+          </p:cNvPr>
+          <p:cNvSpPr/>
+          <p:nvPr/>
+        </p:nvSpPr>
+        <p:spPr>
+          <a:xfrm>
+            <a:off x="6583823" y="2841694"/>
+            <a:ext cx="1440000" cy="216000"/>
+          </a:xfrm>
+          <a:prstGeom prst="roundRect">
+            <a:avLst/>
+          </a:prstGeom>
+          <a:solidFill>
+            <a:srgbClr val="8854D0"/>
+          </a:solidFill>
+          <a:ln w="12700">
+            <a:noFill/>
+          </a:ln>
+        </p:spPr>
+        <p:style>
+          <a:lnRef idx="2">
+            <a:schemeClr val="accent1">
+              <a:shade val="15000"/>
+            </a:schemeClr>
+          </a:lnRef>
+          <a:fillRef idx="1">
+            <a:schemeClr val="accent1"/>
+          </a:fillRef>
+          <a:effectRef idx="0">
+            <a:schemeClr val="accent1"/>
+          </a:effectRef>
+          <a:fontRef idx="minor">
+            <a:schemeClr val="lt1"/>
+          </a:fontRef>
+        </p:style>
+        <p:txBody>
+          <a:bodyPr rtlCol="0" anchor="ctr"/>
+          <a:lstStyle/>
+          <a:p>
+            <a:pPr algn="ctr"/>
+            <a:r>
+              <a:rPr lang="en-US" altLang="zh-CN" sz="800">
+                <a:latin typeface="Quicksand" panose="00000500000000000000" pitchFamily="2" charset="0"/>
+              </a:rPr>
+              <a:t>background-size</a:t>
+            </a:r>
+            <a:endParaRPr lang="zh-CN" altLang="en-US" sz="800">
+              <a:latin typeface="Quicksand" panose="00000500000000000000" pitchFamily="2" charset="0"/>
+            </a:endParaRPr>
+          </a:p>
+        </p:txBody>
+      </p:sp>
+      <p:cxnSp>
+        <p:nvCxnSpPr>
+          <p:cNvPr id="21" name="连接符: 曲线 20">
+            <a:extLst>
+              <a:ext uri="{FF2B5EF4-FFF2-40B4-BE49-F238E27FC236}">
+                <a16:creationId xmlns:a16="http://schemas.microsoft.com/office/drawing/2014/main" id="{B1FC38B2-3763-8A0C-56A4-C088C18DDBC2}"/>
+              </a:ext>
+            </a:extLst>
+          </p:cNvPr>
+          <p:cNvCxnSpPr>
+            <a:cxnSpLocks/>
+            <a:stCxn id="2" idx="3"/>
+            <a:endCxn id="12" idx="1"/>
+          </p:cNvCxnSpPr>
+          <p:nvPr/>
+        </p:nvCxnSpPr>
+        <p:spPr>
+          <a:xfrm flipV="1">
+            <a:off x="6347696" y="2949694"/>
+            <a:ext cx="236127" cy="188240"/>
+          </a:xfrm>
+          <a:prstGeom prst="curvedConnector3">
+            <a:avLst>
+              <a:gd name="adj1" fmla="val 50000"/>
+            </a:avLst>
+          </a:prstGeom>
+          <a:ln>
+            <a:solidFill>
+              <a:srgbClr val="8854D0"/>
+            </a:solidFill>
+          </a:ln>
+        </p:spPr>
+        <p:style>
+          <a:lnRef idx="1">
+            <a:schemeClr val="accent1"/>
+          </a:lnRef>
+          <a:fillRef idx="0">
+            <a:schemeClr val="accent1"/>
+          </a:fillRef>
+          <a:effectRef idx="0">
+            <a:schemeClr val="accent1"/>
+          </a:effectRef>
+          <a:fontRef idx="minor">
+            <a:schemeClr val="tx1"/>
+          </a:fontRef>
+        </p:style>
+      </p:cxnSp>
+      <p:sp>
+        <p:nvSpPr>
+          <p:cNvPr id="9" name="矩形: 圆角 8">
+            <a:extLst>
+              <a:ext uri="{FF2B5EF4-FFF2-40B4-BE49-F238E27FC236}">
+                <a16:creationId xmlns:a16="http://schemas.microsoft.com/office/drawing/2014/main" id="{5704B543-A087-6258-53B2-3382506CB5CB}"/>
+              </a:ext>
+            </a:extLst>
+          </p:cNvPr>
+          <p:cNvSpPr/>
+          <p:nvPr/>
+        </p:nvSpPr>
+        <p:spPr>
+          <a:xfrm>
+            <a:off x="6583823" y="3971128"/>
+            <a:ext cx="1440000" cy="216000"/>
+          </a:xfrm>
+          <a:prstGeom prst="roundRect">
+            <a:avLst/>
+          </a:prstGeom>
+          <a:solidFill>
+            <a:srgbClr val="3DC1D3"/>
+          </a:solidFill>
+          <a:ln w="12700">
+            <a:noFill/>
+          </a:ln>
+        </p:spPr>
+        <p:style>
+          <a:lnRef idx="2">
+            <a:schemeClr val="accent1">
+              <a:shade val="15000"/>
+            </a:schemeClr>
+          </a:lnRef>
+          <a:fillRef idx="1">
+            <a:schemeClr val="accent1"/>
+          </a:fillRef>
+          <a:effectRef idx="0">
+            <a:schemeClr val="accent1"/>
+          </a:effectRef>
+          <a:fontRef idx="minor">
+            <a:schemeClr val="lt1"/>
+          </a:fontRef>
+        </p:style>
+        <p:txBody>
+          <a:bodyPr rtlCol="0" anchor="ctr"/>
+          <a:lstStyle/>
+          <a:p>
+            <a:pPr algn="ctr"/>
+            <a:r>
+              <a:rPr lang="en-US" altLang="zh-CN" sz="800">
+                <a:latin typeface="Quicksand" panose="00000500000000000000" pitchFamily="2" charset="0"/>
+              </a:rPr>
+              <a:t>background-clip</a:t>
+            </a:r>
+            <a:endParaRPr lang="zh-CN" altLang="en-US" sz="800">
+              <a:latin typeface="Quicksand" panose="00000500000000000000" pitchFamily="2" charset="0"/>
+            </a:endParaRPr>
+          </a:p>
+        </p:txBody>
+      </p:sp>
+      <p:cxnSp>
+        <p:nvCxnSpPr>
+          <p:cNvPr id="11" name="连接符: 曲线 10">
+            <a:extLst>
+              <a:ext uri="{FF2B5EF4-FFF2-40B4-BE49-F238E27FC236}">
+                <a16:creationId xmlns:a16="http://schemas.microsoft.com/office/drawing/2014/main" id="{EADC1F19-9641-15F6-3ECE-3B5E53A4B1CD}"/>
+              </a:ext>
+            </a:extLst>
+          </p:cNvPr>
+          <p:cNvCxnSpPr>
+            <a:cxnSpLocks/>
+            <a:stCxn id="2" idx="3"/>
+            <a:endCxn id="9" idx="1"/>
+          </p:cNvCxnSpPr>
+          <p:nvPr/>
+        </p:nvCxnSpPr>
+        <p:spPr>
+          <a:xfrm>
+            <a:off x="6347696" y="3137934"/>
+            <a:ext cx="236127" cy="941194"/>
+          </a:xfrm>
+          <a:prstGeom prst="curvedConnector3">
+            <a:avLst>
+              <a:gd name="adj1" fmla="val 50000"/>
+            </a:avLst>
+          </a:prstGeom>
+          <a:ln>
+            <a:solidFill>
+              <a:srgbClr val="3DC1D3"/>
+            </a:solidFill>
+          </a:ln>
+        </p:spPr>
+        <p:style>
+          <a:lnRef idx="1">
+            <a:schemeClr val="accent1"/>
+          </a:lnRef>
+          <a:fillRef idx="0">
+            <a:schemeClr val="accent1"/>
+          </a:fillRef>
+          <a:effectRef idx="0">
+            <a:schemeClr val="accent1"/>
+          </a:effectRef>
+          <a:fontRef idx="minor">
+            <a:schemeClr val="tx1"/>
+          </a:fontRef>
+        </p:style>
+      </p:cxnSp>
+      <p:sp>
+        <p:nvSpPr>
+          <p:cNvPr id="28" name="矩形: 圆角 27">
+            <a:extLst>
+              <a:ext uri="{FF2B5EF4-FFF2-40B4-BE49-F238E27FC236}">
+                <a16:creationId xmlns:a16="http://schemas.microsoft.com/office/drawing/2014/main" id="{2D76B52C-A377-4760-EE4D-8E1F7250DC8F}"/>
+              </a:ext>
+            </a:extLst>
+          </p:cNvPr>
+          <p:cNvSpPr/>
+          <p:nvPr/>
+        </p:nvSpPr>
+        <p:spPr>
+          <a:xfrm>
+            <a:off x="6583823" y="3594650"/>
+            <a:ext cx="1440000" cy="216000"/>
+          </a:xfrm>
+          <a:prstGeom prst="roundRect">
+            <a:avLst/>
+          </a:prstGeom>
+          <a:solidFill>
+            <a:srgbClr val="20BF6B"/>
+          </a:solidFill>
+          <a:ln w="12700">
+            <a:noFill/>
+          </a:ln>
+        </p:spPr>
+        <p:style>
+          <a:lnRef idx="2">
+            <a:schemeClr val="accent1">
+              <a:shade val="15000"/>
+            </a:schemeClr>
+          </a:lnRef>
+          <a:fillRef idx="1">
+            <a:schemeClr val="accent1"/>
+          </a:fillRef>
+          <a:effectRef idx="0">
+            <a:schemeClr val="accent1"/>
+          </a:effectRef>
+          <a:fontRef idx="minor">
+            <a:schemeClr val="lt1"/>
+          </a:fontRef>
+        </p:style>
+        <p:txBody>
+          <a:bodyPr rtlCol="0" anchor="ctr"/>
+          <a:lstStyle/>
+          <a:p>
+            <a:pPr algn="ctr"/>
+            <a:r>
+              <a:rPr lang="en-US" altLang="zh-CN" sz="800">
+                <a:latin typeface="Quicksand" panose="00000500000000000000" pitchFamily="2" charset="0"/>
+              </a:rPr>
+              <a:t>background-origin</a:t>
+            </a:r>
+            <a:endParaRPr lang="zh-CN" altLang="en-US" sz="800">
+              <a:latin typeface="Quicksand" panose="00000500000000000000" pitchFamily="2" charset="0"/>
+            </a:endParaRPr>
+          </a:p>
+        </p:txBody>
+      </p:sp>
+      <p:cxnSp>
+        <p:nvCxnSpPr>
+          <p:cNvPr id="29" name="连接符: 曲线 28">
+            <a:extLst>
+              <a:ext uri="{FF2B5EF4-FFF2-40B4-BE49-F238E27FC236}">
+                <a16:creationId xmlns:a16="http://schemas.microsoft.com/office/drawing/2014/main" id="{EF08E3E2-D366-FE1C-85A8-77605DB967B3}"/>
+              </a:ext>
+            </a:extLst>
+          </p:cNvPr>
+          <p:cNvCxnSpPr>
+            <a:cxnSpLocks/>
+            <a:stCxn id="28" idx="1"/>
+            <a:endCxn id="2" idx="3"/>
+          </p:cNvCxnSpPr>
+          <p:nvPr/>
+        </p:nvCxnSpPr>
+        <p:spPr>
+          <a:xfrm rot="10800000">
+            <a:off x="6347697" y="3137934"/>
+            <a:ext cx="236127" cy="564716"/>
+          </a:xfrm>
+          <a:prstGeom prst="curvedConnector3">
+            <a:avLst>
+              <a:gd name="adj1" fmla="val 50000"/>
+            </a:avLst>
+          </a:prstGeom>
+          <a:ln>
+            <a:solidFill>
+              <a:srgbClr val="20BF6B"/>
+            </a:solidFill>
+          </a:ln>
+        </p:spPr>
+        <p:style>
+          <a:lnRef idx="1">
+            <a:schemeClr val="accent1"/>
+          </a:lnRef>
+          <a:fillRef idx="0">
+            <a:schemeClr val="accent1"/>
+          </a:fillRef>
+          <a:effectRef idx="0">
+            <a:schemeClr val="accent1"/>
+          </a:effectRef>
+          <a:fontRef idx="minor">
+            <a:schemeClr val="tx1"/>
+          </a:fontRef>
+        </p:style>
+      </p:cxnSp>
+      <p:sp>
+        <p:nvSpPr>
+          <p:cNvPr id="24" name="矩形: 圆角 8">
+            <a:extLst>
+              <a:ext uri="{FF2B5EF4-FFF2-40B4-BE49-F238E27FC236}">
+                <a16:creationId xmlns:a16="http://schemas.microsoft.com/office/drawing/2014/main" id="{A6C27A23-18E4-76C2-DEF7-34D22EC06C21}"/>
+              </a:ext>
+            </a:extLst>
+          </p:cNvPr>
+          <p:cNvSpPr/>
+          <p:nvPr/>
+        </p:nvSpPr>
+        <p:spPr>
+          <a:xfrm>
+            <a:off x="6583823" y="4347608"/>
+            <a:ext cx="1440000" cy="216000"/>
+          </a:xfrm>
+          <a:prstGeom prst="roundRect">
+            <a:avLst/>
+          </a:prstGeom>
+          <a:solidFill>
+            <a:srgbClr val="0070C0"/>
+          </a:solidFill>
+          <a:ln w="12700">
+            <a:noFill/>
+          </a:ln>
+        </p:spPr>
+        <p:style>
+          <a:lnRef idx="2">
+            <a:schemeClr val="accent1">
+              <a:shade val="15000"/>
+            </a:schemeClr>
+          </a:lnRef>
+          <a:fillRef idx="1">
+            <a:schemeClr val="accent1"/>
+          </a:fillRef>
+          <a:effectRef idx="0">
+            <a:schemeClr val="accent1"/>
+          </a:effectRef>
+          <a:fontRef idx="minor">
+            <a:schemeClr val="lt1"/>
+          </a:fontRef>
+        </p:style>
+        <p:txBody>
+          <a:bodyPr rtlCol="0" anchor="ctr"/>
+          <a:lstStyle/>
+          <a:p>
+            <a:pPr algn="ctr"/>
+            <a:r>
+              <a:rPr lang="en-US" altLang="zh-CN" sz="800">
+                <a:latin typeface="Quicksand" panose="00000500000000000000" pitchFamily="2" charset="0"/>
+              </a:rPr>
+              <a:t>background-attachment</a:t>
+            </a:r>
+            <a:endParaRPr lang="zh-CN" altLang="en-US" sz="800">
+              <a:latin typeface="Quicksand" panose="00000500000000000000" pitchFamily="2" charset="0"/>
+            </a:endParaRPr>
+          </a:p>
+        </p:txBody>
+      </p:sp>
+      <p:cxnSp>
+        <p:nvCxnSpPr>
+          <p:cNvPr id="46" name="连接符: 曲线 10">
+            <a:extLst>
+              <a:ext uri="{FF2B5EF4-FFF2-40B4-BE49-F238E27FC236}">
+                <a16:creationId xmlns:a16="http://schemas.microsoft.com/office/drawing/2014/main" id="{32E5C4EC-C977-10C6-8D74-4BEFAAD30A4E}"/>
+              </a:ext>
+            </a:extLst>
+          </p:cNvPr>
+          <p:cNvCxnSpPr>
+            <a:cxnSpLocks/>
+            <a:stCxn id="2" idx="3"/>
+            <a:endCxn id="24" idx="1"/>
+          </p:cNvCxnSpPr>
+          <p:nvPr/>
+        </p:nvCxnSpPr>
+        <p:spPr>
+          <a:xfrm>
+            <a:off x="6347696" y="3137934"/>
+            <a:ext cx="236127" cy="1317674"/>
+          </a:xfrm>
+          <a:prstGeom prst="curvedConnector3">
+            <a:avLst>
+              <a:gd name="adj1" fmla="val 50000"/>
+            </a:avLst>
+          </a:prstGeom>
+          <a:ln>
+            <a:solidFill>
+              <a:srgbClr val="0070C0"/>
+            </a:solidFill>
+          </a:ln>
+        </p:spPr>
+        <p:style>
+          <a:lnRef idx="1">
+            <a:schemeClr val="accent1"/>
+          </a:lnRef>
+          <a:fillRef idx="0">
+            <a:schemeClr val="accent1"/>
+          </a:fillRef>
+          <a:effectRef idx="0">
+            <a:schemeClr val="accent1"/>
+          </a:effectRef>
+          <a:fontRef idx="minor">
+            <a:schemeClr val="tx1"/>
+          </a:fontRef>
+        </p:style>
+      </p:cxnSp>
+    </p:spTree>
+    <p:extLst>
+      <p:ext uri="{BB962C8B-B14F-4D97-AF65-F5344CB8AC3E}">
+        <p14:creationId xmlns:p14="http://schemas.microsoft.com/office/powerpoint/2010/main" val="1414077195"/>
       </p:ext>
     </p:extLst>
   </p:cSld>

--- a/utils/file/charts.pptx
+++ b/utils/file/charts.pptx
@@ -9,34 +9,33 @@
     <p:sldId id="289" r:id="rId3"/>
     <p:sldId id="290" r:id="rId4"/>
     <p:sldId id="286" r:id="rId5"/>
-    <p:sldId id="287" r:id="rId6"/>
-    <p:sldId id="258" r:id="rId7"/>
-    <p:sldId id="259" r:id="rId8"/>
-    <p:sldId id="260" r:id="rId9"/>
-    <p:sldId id="269" r:id="rId10"/>
-    <p:sldId id="261" r:id="rId11"/>
-    <p:sldId id="262" r:id="rId12"/>
-    <p:sldId id="263" r:id="rId13"/>
-    <p:sldId id="265" r:id="rId14"/>
-    <p:sldId id="266" r:id="rId15"/>
-    <p:sldId id="267" r:id="rId16"/>
-    <p:sldId id="273" r:id="rId17"/>
-    <p:sldId id="271" r:id="rId18"/>
-    <p:sldId id="268" r:id="rId19"/>
-    <p:sldId id="281" r:id="rId20"/>
-    <p:sldId id="282" r:id="rId21"/>
-    <p:sldId id="283" r:id="rId22"/>
-    <p:sldId id="284" r:id="rId23"/>
-    <p:sldId id="274" r:id="rId24"/>
-    <p:sldId id="276" r:id="rId25"/>
-    <p:sldId id="277" r:id="rId26"/>
-    <p:sldId id="278" r:id="rId27"/>
-    <p:sldId id="279" r:id="rId28"/>
-    <p:sldId id="285" r:id="rId29"/>
-    <p:sldId id="280" r:id="rId30"/>
-    <p:sldId id="264" r:id="rId31"/>
-    <p:sldId id="272" r:id="rId32"/>
-    <p:sldId id="256" r:id="rId33"/>
+    <p:sldId id="258" r:id="rId6"/>
+    <p:sldId id="259" r:id="rId7"/>
+    <p:sldId id="260" r:id="rId8"/>
+    <p:sldId id="269" r:id="rId9"/>
+    <p:sldId id="261" r:id="rId10"/>
+    <p:sldId id="262" r:id="rId11"/>
+    <p:sldId id="263" r:id="rId12"/>
+    <p:sldId id="265" r:id="rId13"/>
+    <p:sldId id="266" r:id="rId14"/>
+    <p:sldId id="267" r:id="rId15"/>
+    <p:sldId id="273" r:id="rId16"/>
+    <p:sldId id="271" r:id="rId17"/>
+    <p:sldId id="268" r:id="rId18"/>
+    <p:sldId id="281" r:id="rId19"/>
+    <p:sldId id="282" r:id="rId20"/>
+    <p:sldId id="283" r:id="rId21"/>
+    <p:sldId id="284" r:id="rId22"/>
+    <p:sldId id="274" r:id="rId23"/>
+    <p:sldId id="276" r:id="rId24"/>
+    <p:sldId id="277" r:id="rId25"/>
+    <p:sldId id="278" r:id="rId26"/>
+    <p:sldId id="279" r:id="rId27"/>
+    <p:sldId id="285" r:id="rId28"/>
+    <p:sldId id="280" r:id="rId29"/>
+    <p:sldId id="264" r:id="rId30"/>
+    <p:sldId id="272" r:id="rId31"/>
+    <p:sldId id="256" r:id="rId32"/>
   </p:sldIdLst>
   <p:sldSz cx="12192000" cy="6858000"/>
   <p:notesSz cx="6858000" cy="9144000"/>
@@ -290,7 +289,7 @@
           <a:p>
             <a:fld id="{C0F7C65B-F23F-479A-8AFF-E7E0FC962F06}" type="datetimeFigureOut">
               <a:rPr lang="zh-CN" altLang="en-US" smtClean="0"/>
-              <a:t>2025/11/7</a:t>
+              <a:t>2025/11/15</a:t>
             </a:fld>
             <a:endParaRPr lang="zh-CN" altLang="en-US"/>
           </a:p>
@@ -488,7 +487,7 @@
           <a:p>
             <a:fld id="{C0F7C65B-F23F-479A-8AFF-E7E0FC962F06}" type="datetimeFigureOut">
               <a:rPr lang="zh-CN" altLang="en-US" smtClean="0"/>
-              <a:t>2025/11/7</a:t>
+              <a:t>2025/11/15</a:t>
             </a:fld>
             <a:endParaRPr lang="zh-CN" altLang="en-US"/>
           </a:p>
@@ -696,7 +695,7 @@
           <a:p>
             <a:fld id="{C0F7C65B-F23F-479A-8AFF-E7E0FC962F06}" type="datetimeFigureOut">
               <a:rPr lang="zh-CN" altLang="en-US" smtClean="0"/>
-              <a:t>2025/11/7</a:t>
+              <a:t>2025/11/15</a:t>
             </a:fld>
             <a:endParaRPr lang="zh-CN" altLang="en-US"/>
           </a:p>
@@ -894,7 +893,7 @@
           <a:p>
             <a:fld id="{C0F7C65B-F23F-479A-8AFF-E7E0FC962F06}" type="datetimeFigureOut">
               <a:rPr lang="zh-CN" altLang="en-US" smtClean="0"/>
-              <a:t>2025/11/7</a:t>
+              <a:t>2025/11/15</a:t>
             </a:fld>
             <a:endParaRPr lang="zh-CN" altLang="en-US"/>
           </a:p>
@@ -1169,7 +1168,7 @@
           <a:p>
             <a:fld id="{C0F7C65B-F23F-479A-8AFF-E7E0FC962F06}" type="datetimeFigureOut">
               <a:rPr lang="zh-CN" altLang="en-US" smtClean="0"/>
-              <a:t>2025/11/7</a:t>
+              <a:t>2025/11/15</a:t>
             </a:fld>
             <a:endParaRPr lang="zh-CN" altLang="en-US"/>
           </a:p>
@@ -1434,7 +1433,7 @@
           <a:p>
             <a:fld id="{C0F7C65B-F23F-479A-8AFF-E7E0FC962F06}" type="datetimeFigureOut">
               <a:rPr lang="zh-CN" altLang="en-US" smtClean="0"/>
-              <a:t>2025/11/7</a:t>
+              <a:t>2025/11/15</a:t>
             </a:fld>
             <a:endParaRPr lang="zh-CN" altLang="en-US"/>
           </a:p>
@@ -1846,7 +1845,7 @@
           <a:p>
             <a:fld id="{C0F7C65B-F23F-479A-8AFF-E7E0FC962F06}" type="datetimeFigureOut">
               <a:rPr lang="zh-CN" altLang="en-US" smtClean="0"/>
-              <a:t>2025/11/7</a:t>
+              <a:t>2025/11/15</a:t>
             </a:fld>
             <a:endParaRPr lang="zh-CN" altLang="en-US"/>
           </a:p>
@@ -1987,7 +1986,7 @@
           <a:p>
             <a:fld id="{C0F7C65B-F23F-479A-8AFF-E7E0FC962F06}" type="datetimeFigureOut">
               <a:rPr lang="zh-CN" altLang="en-US" smtClean="0"/>
-              <a:t>2025/11/7</a:t>
+              <a:t>2025/11/15</a:t>
             </a:fld>
             <a:endParaRPr lang="zh-CN" altLang="en-US"/>
           </a:p>
@@ -2100,7 +2099,7 @@
           <a:p>
             <a:fld id="{C0F7C65B-F23F-479A-8AFF-E7E0FC962F06}" type="datetimeFigureOut">
               <a:rPr lang="zh-CN" altLang="en-US" smtClean="0"/>
-              <a:t>2025/11/7</a:t>
+              <a:t>2025/11/15</a:t>
             </a:fld>
             <a:endParaRPr lang="zh-CN" altLang="en-US"/>
           </a:p>
@@ -2411,7 +2410,7 @@
           <a:p>
             <a:fld id="{C0F7C65B-F23F-479A-8AFF-E7E0FC962F06}" type="datetimeFigureOut">
               <a:rPr lang="zh-CN" altLang="en-US" smtClean="0"/>
-              <a:t>2025/11/7</a:t>
+              <a:t>2025/11/15</a:t>
             </a:fld>
             <a:endParaRPr lang="zh-CN" altLang="en-US"/>
           </a:p>
@@ -2699,7 +2698,7 @@
           <a:p>
             <a:fld id="{C0F7C65B-F23F-479A-8AFF-E7E0FC962F06}" type="datetimeFigureOut">
               <a:rPr lang="zh-CN" altLang="en-US" smtClean="0"/>
-              <a:t>2025/11/7</a:t>
+              <a:t>2025/11/15</a:t>
             </a:fld>
             <a:endParaRPr lang="zh-CN" altLang="en-US"/>
           </a:p>
@@ -2940,7 +2939,7 @@
           <a:p>
             <a:fld id="{C0F7C65B-F23F-479A-8AFF-E7E0FC962F06}" type="datetimeFigureOut">
               <a:rPr lang="zh-CN" altLang="en-US" smtClean="0"/>
-              <a:t>2025/11/7</a:t>
+              <a:t>2025/11/15</a:t>
             </a:fld>
             <a:endParaRPr lang="zh-CN" altLang="en-US"/>
           </a:p>
@@ -3510,1735 +3509,6 @@
         <p:cNvPr id="1" name="">
           <a:extLst>
             <a:ext uri="{FF2B5EF4-FFF2-40B4-BE49-F238E27FC236}">
-              <a16:creationId xmlns:a16="http://schemas.microsoft.com/office/drawing/2014/main" id="{18E2CAE3-A1AC-3F4E-935C-0F5B86F0EE15}"/>
-            </a:ext>
-          </a:extLst>
-        </p:cNvPr>
-        <p:cNvGrpSpPr/>
-        <p:nvPr/>
-      </p:nvGrpSpPr>
-      <p:grpSpPr>
-        <a:xfrm>
-          <a:off x="0" y="0"/>
-          <a:ext cx="0" cy="0"/>
-          <a:chOff x="0" y="0"/>
-          <a:chExt cx="0" cy="0"/>
-        </a:xfrm>
-      </p:grpSpPr>
-      <p:sp>
-        <p:nvSpPr>
-          <p:cNvPr id="3" name="矩形: 圆角 2">
-            <a:extLst>
-              <a:ext uri="{FF2B5EF4-FFF2-40B4-BE49-F238E27FC236}">
-                <a16:creationId xmlns:a16="http://schemas.microsoft.com/office/drawing/2014/main" id="{3F6BEB13-BC5C-76A7-70B4-5704F9D6A0AC}"/>
-              </a:ext>
-            </a:extLst>
-          </p:cNvPr>
-          <p:cNvSpPr/>
-          <p:nvPr/>
-        </p:nvSpPr>
-        <p:spPr>
-          <a:xfrm>
-            <a:off x="3927709" y="3694457"/>
-            <a:ext cx="936000" cy="216000"/>
-          </a:xfrm>
-          <a:prstGeom prst="roundRect">
-            <a:avLst/>
-          </a:prstGeom>
-          <a:solidFill>
-            <a:srgbClr val="335BA3">
-              <a:alpha val="89804"/>
-            </a:srgbClr>
-          </a:solidFill>
-          <a:ln w="12700">
-            <a:noFill/>
-          </a:ln>
-        </p:spPr>
-        <p:style>
-          <a:lnRef idx="2">
-            <a:schemeClr val="accent1">
-              <a:shade val="15000"/>
-            </a:schemeClr>
-          </a:lnRef>
-          <a:fillRef idx="1">
-            <a:schemeClr val="accent1"/>
-          </a:fillRef>
-          <a:effectRef idx="0">
-            <a:schemeClr val="accent1"/>
-          </a:effectRef>
-          <a:fontRef idx="minor">
-            <a:schemeClr val="lt1"/>
-          </a:fontRef>
-        </p:style>
-        <p:txBody>
-          <a:bodyPr rtlCol="0" anchor="ctr"/>
-          <a:lstStyle/>
-          <a:p>
-            <a:pPr algn="ctr"/>
-            <a:r>
-              <a:rPr lang="en-US" altLang="zh-CN" sz="800">
-                <a:latin typeface="Quicksand" panose="00000500000000000000" pitchFamily="2" charset="0"/>
-              </a:rPr>
-              <a:t>cartsView.vue</a:t>
-            </a:r>
-            <a:endParaRPr lang="zh-CN" altLang="en-US" sz="800">
-              <a:latin typeface="Quicksand" panose="00000500000000000000" pitchFamily="2" charset="0"/>
-            </a:endParaRPr>
-          </a:p>
-        </p:txBody>
-      </p:sp>
-      <p:sp>
-        <p:nvSpPr>
-          <p:cNvPr id="4" name="矩形: 圆角 3">
-            <a:extLst>
-              <a:ext uri="{FF2B5EF4-FFF2-40B4-BE49-F238E27FC236}">
-                <a16:creationId xmlns:a16="http://schemas.microsoft.com/office/drawing/2014/main" id="{A865B1BF-2668-EBE3-9A2F-76B4ADFC7BD3}"/>
-              </a:ext>
-            </a:extLst>
-          </p:cNvPr>
-          <p:cNvSpPr/>
-          <p:nvPr/>
-        </p:nvSpPr>
-        <p:spPr>
-          <a:xfrm>
-            <a:off x="3927709" y="2237109"/>
-            <a:ext cx="936000" cy="216000"/>
-          </a:xfrm>
-          <a:prstGeom prst="roundRect">
-            <a:avLst/>
-          </a:prstGeom>
-          <a:solidFill>
-            <a:srgbClr val="00BC7B">
-              <a:alpha val="89804"/>
-            </a:srgbClr>
-          </a:solidFill>
-          <a:ln w="12700">
-            <a:noFill/>
-          </a:ln>
-        </p:spPr>
-        <p:style>
-          <a:lnRef idx="2">
-            <a:schemeClr val="accent1">
-              <a:shade val="15000"/>
-            </a:schemeClr>
-          </a:lnRef>
-          <a:fillRef idx="1">
-            <a:schemeClr val="accent1"/>
-          </a:fillRef>
-          <a:effectRef idx="0">
-            <a:schemeClr val="accent1"/>
-          </a:effectRef>
-          <a:fontRef idx="minor">
-            <a:schemeClr val="lt1"/>
-          </a:fontRef>
-        </p:style>
-        <p:txBody>
-          <a:bodyPr rtlCol="0" anchor="ctr"/>
-          <a:lstStyle/>
-          <a:p>
-            <a:pPr algn="ctr"/>
-            <a:r>
-              <a:rPr lang="en-US" altLang="zh-CN" sz="800">
-                <a:latin typeface="Quicksand" panose="00000500000000000000" pitchFamily="2" charset="0"/>
-              </a:rPr>
-              <a:t>detailsView.vue</a:t>
-            </a:r>
-            <a:endParaRPr lang="zh-CN" altLang="en-US" sz="800">
-              <a:latin typeface="Quicksand" panose="00000500000000000000" pitchFamily="2" charset="0"/>
-            </a:endParaRPr>
-          </a:p>
-        </p:txBody>
-      </p:sp>
-      <p:sp>
-        <p:nvSpPr>
-          <p:cNvPr id="7" name="矩形: 圆角 6">
-            <a:extLst>
-              <a:ext uri="{FF2B5EF4-FFF2-40B4-BE49-F238E27FC236}">
-                <a16:creationId xmlns:a16="http://schemas.microsoft.com/office/drawing/2014/main" id="{CF1F7419-7D34-C865-9FD3-CEF01F2784E0}"/>
-              </a:ext>
-            </a:extLst>
-          </p:cNvPr>
-          <p:cNvSpPr/>
-          <p:nvPr/>
-        </p:nvSpPr>
-        <p:spPr>
-          <a:xfrm>
-            <a:off x="4988680" y="2965783"/>
-            <a:ext cx="900000" cy="216000"/>
-          </a:xfrm>
-          <a:prstGeom prst="roundRect">
-            <a:avLst/>
-          </a:prstGeom>
-          <a:solidFill>
-            <a:srgbClr val="F9423A">
-              <a:alpha val="89804"/>
-            </a:srgbClr>
-          </a:solidFill>
-          <a:ln w="12700">
-            <a:noFill/>
-          </a:ln>
-        </p:spPr>
-        <p:style>
-          <a:lnRef idx="2">
-            <a:schemeClr val="accent1">
-              <a:shade val="15000"/>
-            </a:schemeClr>
-          </a:lnRef>
-          <a:fillRef idx="1">
-            <a:schemeClr val="accent1"/>
-          </a:fillRef>
-          <a:effectRef idx="0">
-            <a:schemeClr val="accent1"/>
-          </a:effectRef>
-          <a:fontRef idx="minor">
-            <a:schemeClr val="lt1"/>
-          </a:fontRef>
-        </p:style>
-        <p:txBody>
-          <a:bodyPr rtlCol="0" anchor="ctr"/>
-          <a:lstStyle/>
-          <a:p>
-            <a:pPr algn="ctr"/>
-            <a:r>
-              <a:rPr lang="en-US" altLang="zh-CN" sz="800">
-                <a:latin typeface="Quicksand" panose="00000500000000000000" pitchFamily="2" charset="0"/>
-              </a:rPr>
-              <a:t>cart.js</a:t>
-            </a:r>
-            <a:endParaRPr lang="zh-CN" altLang="en-US" sz="800">
-              <a:latin typeface="Quicksand" panose="00000500000000000000" pitchFamily="2" charset="0"/>
-            </a:endParaRPr>
-          </a:p>
-        </p:txBody>
-      </p:sp>
-      <p:cxnSp>
-        <p:nvCxnSpPr>
-          <p:cNvPr id="14" name="连接符: 曲线 13">
-            <a:extLst>
-              <a:ext uri="{FF2B5EF4-FFF2-40B4-BE49-F238E27FC236}">
-                <a16:creationId xmlns:a16="http://schemas.microsoft.com/office/drawing/2014/main" id="{8CA54037-8AE4-360B-D22C-AE9D102A0F28}"/>
-              </a:ext>
-            </a:extLst>
-          </p:cNvPr>
-          <p:cNvCxnSpPr>
-            <a:cxnSpLocks/>
-            <a:stCxn id="7" idx="1"/>
-            <a:endCxn id="3" idx="3"/>
-          </p:cNvCxnSpPr>
-          <p:nvPr/>
-        </p:nvCxnSpPr>
-        <p:spPr>
-          <a:xfrm rot="10800000" flipV="1">
-            <a:off x="4863710" y="3073783"/>
-            <a:ext cx="124971" cy="728674"/>
-          </a:xfrm>
-          <a:prstGeom prst="curvedConnector3">
-            <a:avLst>
-              <a:gd name="adj1" fmla="val 50000"/>
-            </a:avLst>
-          </a:prstGeom>
-          <a:ln>
-            <a:solidFill>
-              <a:srgbClr val="6D91D1"/>
-            </a:solidFill>
-          </a:ln>
-        </p:spPr>
-        <p:style>
-          <a:lnRef idx="1">
-            <a:schemeClr val="accent1"/>
-          </a:lnRef>
-          <a:fillRef idx="0">
-            <a:schemeClr val="accent1"/>
-          </a:fillRef>
-          <a:effectRef idx="0">
-            <a:schemeClr val="accent1"/>
-          </a:effectRef>
-          <a:fontRef idx="minor">
-            <a:schemeClr val="tx1"/>
-          </a:fontRef>
-        </p:style>
-      </p:cxnSp>
-      <p:cxnSp>
-        <p:nvCxnSpPr>
-          <p:cNvPr id="17" name="连接符: 曲线 16">
-            <a:extLst>
-              <a:ext uri="{FF2B5EF4-FFF2-40B4-BE49-F238E27FC236}">
-                <a16:creationId xmlns:a16="http://schemas.microsoft.com/office/drawing/2014/main" id="{5D7F2DC2-788D-E15F-2B93-BEC9E5020321}"/>
-              </a:ext>
-            </a:extLst>
-          </p:cNvPr>
-          <p:cNvCxnSpPr>
-            <a:stCxn id="4" idx="3"/>
-            <a:endCxn id="7" idx="1"/>
-          </p:cNvCxnSpPr>
-          <p:nvPr/>
-        </p:nvCxnSpPr>
-        <p:spPr>
-          <a:xfrm>
-            <a:off x="4863709" y="2345109"/>
-            <a:ext cx="124971" cy="728674"/>
-          </a:xfrm>
-          <a:prstGeom prst="curvedConnector3">
-            <a:avLst/>
-          </a:prstGeom>
-          <a:ln>
-            <a:solidFill>
-              <a:srgbClr val="00B050"/>
-            </a:solidFill>
-          </a:ln>
-        </p:spPr>
-        <p:style>
-          <a:lnRef idx="1">
-            <a:schemeClr val="accent1"/>
-          </a:lnRef>
-          <a:fillRef idx="0">
-            <a:schemeClr val="accent1"/>
-          </a:fillRef>
-          <a:effectRef idx="0">
-            <a:schemeClr val="accent1"/>
-          </a:effectRef>
-          <a:fontRef idx="minor">
-            <a:schemeClr val="tx1"/>
-          </a:fontRef>
-        </p:style>
-      </p:cxnSp>
-      <p:sp>
-        <p:nvSpPr>
-          <p:cNvPr id="25" name="矩形: 圆角 24">
-            <a:extLst>
-              <a:ext uri="{FF2B5EF4-FFF2-40B4-BE49-F238E27FC236}">
-                <a16:creationId xmlns:a16="http://schemas.microsoft.com/office/drawing/2014/main" id="{9206292A-CFFA-EDEE-0CE6-0FCE7626F683}"/>
-              </a:ext>
-            </a:extLst>
-          </p:cNvPr>
-          <p:cNvSpPr/>
-          <p:nvPr/>
-        </p:nvSpPr>
-        <p:spPr>
-          <a:xfrm>
-            <a:off x="6057780" y="2534400"/>
-            <a:ext cx="900000" cy="216000"/>
-          </a:xfrm>
-          <a:prstGeom prst="roundRect">
-            <a:avLst/>
-          </a:prstGeom>
-          <a:solidFill>
-            <a:srgbClr val="FB837D"/>
-          </a:solidFill>
-          <a:ln w="12700">
-            <a:noFill/>
-          </a:ln>
-        </p:spPr>
-        <p:style>
-          <a:lnRef idx="2">
-            <a:schemeClr val="accent1">
-              <a:shade val="15000"/>
-            </a:schemeClr>
-          </a:lnRef>
-          <a:fillRef idx="1">
-            <a:schemeClr val="accent1"/>
-          </a:fillRef>
-          <a:effectRef idx="0">
-            <a:schemeClr val="accent1"/>
-          </a:effectRef>
-          <a:fontRef idx="minor">
-            <a:schemeClr val="lt1"/>
-          </a:fontRef>
-        </p:style>
-        <p:txBody>
-          <a:bodyPr rtlCol="0" anchor="ctr"/>
-          <a:lstStyle/>
-          <a:p>
-            <a:pPr algn="ctr"/>
-            <a:r>
-              <a:rPr lang="en-US" altLang="zh-CN" sz="800">
-                <a:latin typeface="Quicksand" panose="00000500000000000000" pitchFamily="2" charset="0"/>
-              </a:rPr>
-              <a:t>lists</a:t>
-            </a:r>
-            <a:endParaRPr lang="zh-CN" altLang="en-US" sz="800">
-              <a:latin typeface="Quicksand" panose="00000500000000000000" pitchFamily="2" charset="0"/>
-            </a:endParaRPr>
-          </a:p>
-        </p:txBody>
-      </p:sp>
-      <p:sp>
-        <p:nvSpPr>
-          <p:cNvPr id="26" name="矩形: 圆角 25">
-            <a:extLst>
-              <a:ext uri="{FF2B5EF4-FFF2-40B4-BE49-F238E27FC236}">
-                <a16:creationId xmlns:a16="http://schemas.microsoft.com/office/drawing/2014/main" id="{E1A4A212-0D66-8B59-6229-1091271BAD62}"/>
-              </a:ext>
-            </a:extLst>
-          </p:cNvPr>
-          <p:cNvSpPr/>
-          <p:nvPr/>
-        </p:nvSpPr>
-        <p:spPr>
-          <a:xfrm>
-            <a:off x="6057780" y="2798400"/>
-            <a:ext cx="900000" cy="216000"/>
-          </a:xfrm>
-          <a:prstGeom prst="roundRect">
-            <a:avLst/>
-          </a:prstGeom>
-          <a:solidFill>
-            <a:srgbClr val="FB837D"/>
-          </a:solidFill>
-          <a:ln w="12700">
-            <a:noFill/>
-          </a:ln>
-        </p:spPr>
-        <p:style>
-          <a:lnRef idx="2">
-            <a:schemeClr val="accent1">
-              <a:shade val="15000"/>
-            </a:schemeClr>
-          </a:lnRef>
-          <a:fillRef idx="1">
-            <a:schemeClr val="accent1"/>
-          </a:fillRef>
-          <a:effectRef idx="0">
-            <a:schemeClr val="accent1"/>
-          </a:effectRef>
-          <a:fontRef idx="minor">
-            <a:schemeClr val="lt1"/>
-          </a:fontRef>
-        </p:style>
-        <p:txBody>
-          <a:bodyPr rtlCol="0" anchor="ctr"/>
-          <a:lstStyle/>
-          <a:p>
-            <a:pPr algn="ctr"/>
-            <a:r>
-              <a:rPr lang="en-US" altLang="zh-CN" sz="800">
-                <a:latin typeface="Quicksand" panose="00000500000000000000" pitchFamily="2" charset="0"/>
-              </a:rPr>
-              <a:t>getLists()</a:t>
-            </a:r>
-            <a:endParaRPr lang="zh-CN" altLang="en-US" sz="800">
-              <a:latin typeface="Quicksand" panose="00000500000000000000" pitchFamily="2" charset="0"/>
-            </a:endParaRPr>
-          </a:p>
-        </p:txBody>
-      </p:sp>
-      <p:cxnSp>
-        <p:nvCxnSpPr>
-          <p:cNvPr id="28" name="连接符: 曲线 27">
-            <a:extLst>
-              <a:ext uri="{FF2B5EF4-FFF2-40B4-BE49-F238E27FC236}">
-                <a16:creationId xmlns:a16="http://schemas.microsoft.com/office/drawing/2014/main" id="{309BB0B0-6F0E-C24E-3004-E1132211C2A4}"/>
-              </a:ext>
-            </a:extLst>
-          </p:cNvPr>
-          <p:cNvCxnSpPr>
-            <a:cxnSpLocks/>
-            <a:stCxn id="7" idx="3"/>
-            <a:endCxn id="25" idx="1"/>
-          </p:cNvCxnSpPr>
-          <p:nvPr/>
-        </p:nvCxnSpPr>
-        <p:spPr>
-          <a:xfrm flipV="1">
-            <a:off x="5888680" y="2642400"/>
-            <a:ext cx="169100" cy="431383"/>
-          </a:xfrm>
-          <a:prstGeom prst="curvedConnector3">
-            <a:avLst/>
-          </a:prstGeom>
-          <a:ln>
-            <a:solidFill>
-              <a:srgbClr val="C00000"/>
-            </a:solidFill>
-          </a:ln>
-        </p:spPr>
-        <p:style>
-          <a:lnRef idx="1">
-            <a:schemeClr val="accent1"/>
-          </a:lnRef>
-          <a:fillRef idx="0">
-            <a:schemeClr val="accent1"/>
-          </a:fillRef>
-          <a:effectRef idx="0">
-            <a:schemeClr val="accent1"/>
-          </a:effectRef>
-          <a:fontRef idx="minor">
-            <a:schemeClr val="tx1"/>
-          </a:fontRef>
-        </p:style>
-      </p:cxnSp>
-      <p:cxnSp>
-        <p:nvCxnSpPr>
-          <p:cNvPr id="34" name="连接符: 曲线 33">
-            <a:extLst>
-              <a:ext uri="{FF2B5EF4-FFF2-40B4-BE49-F238E27FC236}">
-                <a16:creationId xmlns:a16="http://schemas.microsoft.com/office/drawing/2014/main" id="{AAE83631-A7F6-E02C-6D38-BABF5CA86FCF}"/>
-              </a:ext>
-            </a:extLst>
-          </p:cNvPr>
-          <p:cNvCxnSpPr>
-            <a:cxnSpLocks/>
-            <a:stCxn id="7" idx="3"/>
-            <a:endCxn id="12" idx="1"/>
-          </p:cNvCxnSpPr>
-          <p:nvPr/>
-        </p:nvCxnSpPr>
-        <p:spPr>
-          <a:xfrm>
-            <a:off x="5888680" y="3073783"/>
-            <a:ext cx="169100" cy="96617"/>
-          </a:xfrm>
-          <a:prstGeom prst="curvedConnector3">
-            <a:avLst>
-              <a:gd name="adj1" fmla="val 50000"/>
-            </a:avLst>
-          </a:prstGeom>
-          <a:ln>
-            <a:solidFill>
-              <a:srgbClr val="C00000"/>
-            </a:solidFill>
-          </a:ln>
-        </p:spPr>
-        <p:style>
-          <a:lnRef idx="1">
-            <a:schemeClr val="accent1"/>
-          </a:lnRef>
-          <a:fillRef idx="0">
-            <a:schemeClr val="accent1"/>
-          </a:fillRef>
-          <a:effectRef idx="0">
-            <a:schemeClr val="accent1"/>
-          </a:effectRef>
-          <a:fontRef idx="minor">
-            <a:schemeClr val="tx1"/>
-          </a:fontRef>
-        </p:style>
-      </p:cxnSp>
-      <p:cxnSp>
-        <p:nvCxnSpPr>
-          <p:cNvPr id="69" name="连接符: 曲线 68">
-            <a:extLst>
-              <a:ext uri="{FF2B5EF4-FFF2-40B4-BE49-F238E27FC236}">
-                <a16:creationId xmlns:a16="http://schemas.microsoft.com/office/drawing/2014/main" id="{3C11272C-4991-936E-0304-646EE0728FD5}"/>
-              </a:ext>
-            </a:extLst>
-          </p:cNvPr>
-          <p:cNvCxnSpPr>
-            <a:cxnSpLocks/>
-            <a:stCxn id="35" idx="3"/>
-            <a:endCxn id="4" idx="1"/>
-          </p:cNvCxnSpPr>
-          <p:nvPr/>
-        </p:nvCxnSpPr>
-        <p:spPr>
-          <a:xfrm>
-            <a:off x="3738400" y="2055600"/>
-            <a:ext cx="189309" cy="289509"/>
-          </a:xfrm>
-          <a:prstGeom prst="curvedConnector3">
-            <a:avLst>
-              <a:gd name="adj1" fmla="val 50000"/>
-            </a:avLst>
-          </a:prstGeom>
-          <a:ln>
-            <a:solidFill>
-              <a:srgbClr val="00B050"/>
-            </a:solidFill>
-          </a:ln>
-        </p:spPr>
-        <p:style>
-          <a:lnRef idx="1">
-            <a:schemeClr val="accent1"/>
-          </a:lnRef>
-          <a:fillRef idx="0">
-            <a:schemeClr val="accent1"/>
-          </a:fillRef>
-          <a:effectRef idx="0">
-            <a:schemeClr val="accent1"/>
-          </a:effectRef>
-          <a:fontRef idx="minor">
-            <a:schemeClr val="tx1"/>
-          </a:fontRef>
-        </p:style>
-      </p:cxnSp>
-      <p:sp>
-        <p:nvSpPr>
-          <p:cNvPr id="108" name="矩形: 圆角 107">
-            <a:extLst>
-              <a:ext uri="{FF2B5EF4-FFF2-40B4-BE49-F238E27FC236}">
-                <a16:creationId xmlns:a16="http://schemas.microsoft.com/office/drawing/2014/main" id="{FAC0BED9-67F3-89B3-6AB2-8DA4ED4A93BE}"/>
-              </a:ext>
-            </a:extLst>
-          </p:cNvPr>
-          <p:cNvSpPr/>
-          <p:nvPr/>
-        </p:nvSpPr>
-        <p:spPr>
-          <a:xfrm>
-            <a:off x="6049650" y="3326400"/>
-            <a:ext cx="900000" cy="216000"/>
-          </a:xfrm>
-          <a:prstGeom prst="roundRect">
-            <a:avLst/>
-          </a:prstGeom>
-          <a:solidFill>
-            <a:srgbClr val="FB837D"/>
-          </a:solidFill>
-          <a:ln w="12700">
-            <a:noFill/>
-          </a:ln>
-        </p:spPr>
-        <p:style>
-          <a:lnRef idx="2">
-            <a:schemeClr val="accent1">
-              <a:shade val="15000"/>
-            </a:schemeClr>
-          </a:lnRef>
-          <a:fillRef idx="1">
-            <a:schemeClr val="accent1"/>
-          </a:fillRef>
-          <a:effectRef idx="0">
-            <a:schemeClr val="accent1"/>
-          </a:effectRef>
-          <a:fontRef idx="minor">
-            <a:schemeClr val="lt1"/>
-          </a:fontRef>
-        </p:style>
-        <p:txBody>
-          <a:bodyPr rtlCol="0" anchor="ctr"/>
-          <a:lstStyle/>
-          <a:p>
-            <a:pPr algn="ctr"/>
-            <a:r>
-              <a:rPr lang="en-US" altLang="zh-CN" sz="800">
-                <a:latin typeface="Quicksand" panose="00000500000000000000" pitchFamily="2" charset="0"/>
-              </a:rPr>
-              <a:t>clearCarts()</a:t>
-            </a:r>
-            <a:endParaRPr lang="zh-CN" altLang="en-US" sz="800">
-              <a:latin typeface="Quicksand" panose="00000500000000000000" pitchFamily="2" charset="0"/>
-            </a:endParaRPr>
-          </a:p>
-        </p:txBody>
-      </p:sp>
-      <p:cxnSp>
-        <p:nvCxnSpPr>
-          <p:cNvPr id="118" name="连接符: 曲线 117">
-            <a:extLst>
-              <a:ext uri="{FF2B5EF4-FFF2-40B4-BE49-F238E27FC236}">
-                <a16:creationId xmlns:a16="http://schemas.microsoft.com/office/drawing/2014/main" id="{10E5DD0E-A687-963B-1415-3F7429B9EB3A}"/>
-              </a:ext>
-            </a:extLst>
-          </p:cNvPr>
-          <p:cNvCxnSpPr>
-            <a:cxnSpLocks/>
-            <a:stCxn id="7" idx="3"/>
-            <a:endCxn id="26" idx="1"/>
-          </p:cNvCxnSpPr>
-          <p:nvPr/>
-        </p:nvCxnSpPr>
-        <p:spPr>
-          <a:xfrm flipV="1">
-            <a:off x="5888680" y="2906400"/>
-            <a:ext cx="169100" cy="167383"/>
-          </a:xfrm>
-          <a:prstGeom prst="curvedConnector3">
-            <a:avLst>
-              <a:gd name="adj1" fmla="val 50000"/>
-            </a:avLst>
-          </a:prstGeom>
-          <a:ln>
-            <a:solidFill>
-              <a:srgbClr val="C00000"/>
-            </a:solidFill>
-          </a:ln>
-        </p:spPr>
-        <p:style>
-          <a:lnRef idx="1">
-            <a:schemeClr val="accent1"/>
-          </a:lnRef>
-          <a:fillRef idx="0">
-            <a:schemeClr val="accent1"/>
-          </a:fillRef>
-          <a:effectRef idx="0">
-            <a:schemeClr val="accent1"/>
-          </a:effectRef>
-          <a:fontRef idx="minor">
-            <a:schemeClr val="tx1"/>
-          </a:fontRef>
-        </p:style>
-      </p:cxnSp>
-      <p:cxnSp>
-        <p:nvCxnSpPr>
-          <p:cNvPr id="121" name="连接符: 曲线 120">
-            <a:extLst>
-              <a:ext uri="{FF2B5EF4-FFF2-40B4-BE49-F238E27FC236}">
-                <a16:creationId xmlns:a16="http://schemas.microsoft.com/office/drawing/2014/main" id="{5E6615E3-8D72-AC02-8F82-0C0E07C8A063}"/>
-              </a:ext>
-            </a:extLst>
-          </p:cNvPr>
-          <p:cNvCxnSpPr>
-            <a:cxnSpLocks/>
-            <a:stCxn id="7" idx="3"/>
-            <a:endCxn id="108" idx="1"/>
-          </p:cNvCxnSpPr>
-          <p:nvPr/>
-        </p:nvCxnSpPr>
-        <p:spPr>
-          <a:xfrm>
-            <a:off x="5888680" y="3073783"/>
-            <a:ext cx="160970" cy="360617"/>
-          </a:xfrm>
-          <a:prstGeom prst="curvedConnector3">
-            <a:avLst>
-              <a:gd name="adj1" fmla="val 50000"/>
-            </a:avLst>
-          </a:prstGeom>
-          <a:ln>
-            <a:solidFill>
-              <a:srgbClr val="C00000"/>
-            </a:solidFill>
-          </a:ln>
-        </p:spPr>
-        <p:style>
-          <a:lnRef idx="1">
-            <a:schemeClr val="accent1"/>
-          </a:lnRef>
-          <a:fillRef idx="0">
-            <a:schemeClr val="accent1"/>
-          </a:fillRef>
-          <a:effectRef idx="0">
-            <a:schemeClr val="accent1"/>
-          </a:effectRef>
-          <a:fontRef idx="minor">
-            <a:schemeClr val="tx1"/>
-          </a:fontRef>
-        </p:style>
-      </p:cxnSp>
-      <p:sp>
-        <p:nvSpPr>
-          <p:cNvPr id="12" name="矩形: 圆角 11">
-            <a:extLst>
-              <a:ext uri="{FF2B5EF4-FFF2-40B4-BE49-F238E27FC236}">
-                <a16:creationId xmlns:a16="http://schemas.microsoft.com/office/drawing/2014/main" id="{720E96D7-080F-5915-CFE3-F48B6E4FAB2E}"/>
-              </a:ext>
-            </a:extLst>
-          </p:cNvPr>
-          <p:cNvSpPr/>
-          <p:nvPr/>
-        </p:nvSpPr>
-        <p:spPr>
-          <a:xfrm>
-            <a:off x="6057780" y="3062400"/>
-            <a:ext cx="900000" cy="216000"/>
-          </a:xfrm>
-          <a:prstGeom prst="roundRect">
-            <a:avLst/>
-          </a:prstGeom>
-          <a:solidFill>
-            <a:srgbClr val="FB837D"/>
-          </a:solidFill>
-          <a:ln w="12700">
-            <a:noFill/>
-          </a:ln>
-        </p:spPr>
-        <p:style>
-          <a:lnRef idx="2">
-            <a:schemeClr val="accent1">
-              <a:shade val="15000"/>
-            </a:schemeClr>
-          </a:lnRef>
-          <a:fillRef idx="1">
-            <a:schemeClr val="accent1"/>
-          </a:fillRef>
-          <a:effectRef idx="0">
-            <a:schemeClr val="accent1"/>
-          </a:effectRef>
-          <a:fontRef idx="minor">
-            <a:schemeClr val="lt1"/>
-          </a:fontRef>
-        </p:style>
-        <p:txBody>
-          <a:bodyPr rtlCol="0" anchor="ctr"/>
-          <a:lstStyle/>
-          <a:p>
-            <a:pPr algn="ctr"/>
-            <a:r>
-              <a:rPr lang="en-US" altLang="zh-CN" sz="800">
-                <a:latin typeface="Quicksand" panose="00000500000000000000" pitchFamily="2" charset="0"/>
-              </a:rPr>
-              <a:t>addToCarts()</a:t>
-            </a:r>
-            <a:endParaRPr lang="zh-CN" altLang="en-US" sz="800">
-              <a:latin typeface="Quicksand" panose="00000500000000000000" pitchFamily="2" charset="0"/>
-            </a:endParaRPr>
-          </a:p>
-        </p:txBody>
-      </p:sp>
-      <p:sp>
-        <p:nvSpPr>
-          <p:cNvPr id="35" name="矩形: 圆角 34">
-            <a:extLst>
-              <a:ext uri="{FF2B5EF4-FFF2-40B4-BE49-F238E27FC236}">
-                <a16:creationId xmlns:a16="http://schemas.microsoft.com/office/drawing/2014/main" id="{2560AFC3-5502-019C-04F5-A2B3EC196CEB}"/>
-              </a:ext>
-            </a:extLst>
-          </p:cNvPr>
-          <p:cNvSpPr/>
-          <p:nvPr/>
-        </p:nvSpPr>
-        <p:spPr>
-          <a:xfrm>
-            <a:off x="2730400" y="1947600"/>
-            <a:ext cx="1008000" cy="216000"/>
-          </a:xfrm>
-          <a:prstGeom prst="roundRect">
-            <a:avLst/>
-          </a:prstGeom>
-          <a:solidFill>
-            <a:srgbClr val="CCF2E5"/>
-          </a:solidFill>
-          <a:ln w="12700">
-            <a:noFill/>
-          </a:ln>
-        </p:spPr>
-        <p:style>
-          <a:lnRef idx="2">
-            <a:schemeClr val="accent1">
-              <a:shade val="15000"/>
-            </a:schemeClr>
-          </a:lnRef>
-          <a:fillRef idx="1">
-            <a:schemeClr val="accent1"/>
-          </a:fillRef>
-          <a:effectRef idx="0">
-            <a:schemeClr val="accent1"/>
-          </a:effectRef>
-          <a:fontRef idx="minor">
-            <a:schemeClr val="lt1"/>
-          </a:fontRef>
-        </p:style>
-        <p:txBody>
-          <a:bodyPr rtlCol="0" anchor="ctr"/>
-          <a:lstStyle/>
-          <a:p>
-            <a:pPr algn="ctr"/>
-            <a:r>
-              <a:rPr lang="en-US" altLang="zh-CN" sz="800">
-                <a:solidFill>
-                  <a:sysClr val="windowText" lastClr="000000"/>
-                </a:solidFill>
-                <a:latin typeface="Quicksand Light" panose="00000400000000000000" pitchFamily="2" charset="0"/>
-              </a:rPr>
-              <a:t>good</a:t>
-            </a:r>
-            <a:endParaRPr lang="zh-CN" altLang="en-US" sz="800">
-              <a:solidFill>
-                <a:sysClr val="windowText" lastClr="000000"/>
-              </a:solidFill>
-              <a:latin typeface="Quicksand Light" panose="00000400000000000000" pitchFamily="2" charset="0"/>
-            </a:endParaRPr>
-          </a:p>
-        </p:txBody>
-      </p:sp>
-      <p:sp>
-        <p:nvSpPr>
-          <p:cNvPr id="36" name="矩形: 圆角 35">
-            <a:extLst>
-              <a:ext uri="{FF2B5EF4-FFF2-40B4-BE49-F238E27FC236}">
-                <a16:creationId xmlns:a16="http://schemas.microsoft.com/office/drawing/2014/main" id="{DEA05F83-9848-938F-5765-BDA46419BE99}"/>
-              </a:ext>
-            </a:extLst>
-          </p:cNvPr>
-          <p:cNvSpPr/>
-          <p:nvPr/>
-        </p:nvSpPr>
-        <p:spPr>
-          <a:xfrm>
-            <a:off x="2730400" y="2237109"/>
-            <a:ext cx="1008000" cy="216000"/>
-          </a:xfrm>
-          <a:prstGeom prst="roundRect">
-            <a:avLst/>
-          </a:prstGeom>
-          <a:solidFill>
-            <a:srgbClr val="CCF2E5"/>
-          </a:solidFill>
-          <a:ln w="12700">
-            <a:noFill/>
-          </a:ln>
-        </p:spPr>
-        <p:style>
-          <a:lnRef idx="2">
-            <a:schemeClr val="accent1">
-              <a:shade val="15000"/>
-            </a:schemeClr>
-          </a:lnRef>
-          <a:fillRef idx="1">
-            <a:schemeClr val="accent1"/>
-          </a:fillRef>
-          <a:effectRef idx="0">
-            <a:schemeClr val="accent1"/>
-          </a:effectRef>
-          <a:fontRef idx="minor">
-            <a:schemeClr val="lt1"/>
-          </a:fontRef>
-        </p:style>
-        <p:txBody>
-          <a:bodyPr rtlCol="0" anchor="ctr"/>
-          <a:lstStyle/>
-          <a:p>
-            <a:pPr algn="ctr"/>
-            <a:r>
-              <a:rPr lang="en-US" altLang="zh-CN" sz="800">
-                <a:solidFill>
-                  <a:sysClr val="windowText" lastClr="000000"/>
-                </a:solidFill>
-                <a:latin typeface="Quicksand Light" panose="00000400000000000000" pitchFamily="2" charset="0"/>
-              </a:rPr>
-              <a:t>goodSelected</a:t>
-            </a:r>
-            <a:endParaRPr lang="zh-CN" altLang="en-US" sz="800">
-              <a:solidFill>
-                <a:sysClr val="windowText" lastClr="000000"/>
-              </a:solidFill>
-              <a:latin typeface="Quicksand Light" panose="00000400000000000000" pitchFamily="2" charset="0"/>
-            </a:endParaRPr>
-          </a:p>
-        </p:txBody>
-      </p:sp>
-      <p:sp>
-        <p:nvSpPr>
-          <p:cNvPr id="37" name="矩形: 圆角 36">
-            <a:extLst>
-              <a:ext uri="{FF2B5EF4-FFF2-40B4-BE49-F238E27FC236}">
-                <a16:creationId xmlns:a16="http://schemas.microsoft.com/office/drawing/2014/main" id="{61EF7C50-FB8D-FA1D-20B6-85409306F50D}"/>
-              </a:ext>
-            </a:extLst>
-          </p:cNvPr>
-          <p:cNvSpPr/>
-          <p:nvPr/>
-        </p:nvSpPr>
-        <p:spPr>
-          <a:xfrm>
-            <a:off x="2730400" y="2523600"/>
-            <a:ext cx="1008000" cy="216000"/>
-          </a:xfrm>
-          <a:prstGeom prst="roundRect">
-            <a:avLst/>
-          </a:prstGeom>
-          <a:solidFill>
-            <a:srgbClr val="CCF2E5"/>
-          </a:solidFill>
-          <a:ln w="12700">
-            <a:noFill/>
-          </a:ln>
-        </p:spPr>
-        <p:style>
-          <a:lnRef idx="2">
-            <a:schemeClr val="accent1">
-              <a:shade val="15000"/>
-            </a:schemeClr>
-          </a:lnRef>
-          <a:fillRef idx="1">
-            <a:schemeClr val="accent1"/>
-          </a:fillRef>
-          <a:effectRef idx="0">
-            <a:schemeClr val="accent1"/>
-          </a:effectRef>
-          <a:fontRef idx="minor">
-            <a:schemeClr val="lt1"/>
-          </a:fontRef>
-        </p:style>
-        <p:txBody>
-          <a:bodyPr rtlCol="0" anchor="ctr"/>
-          <a:lstStyle/>
-          <a:p>
-            <a:pPr algn="ctr"/>
-            <a:r>
-              <a:rPr lang="en-US" altLang="zh-CN" sz="800">
-                <a:solidFill>
-                  <a:sysClr val="windowText" lastClr="000000"/>
-                </a:solidFill>
-                <a:latin typeface="Quicksand Light" panose="00000400000000000000" pitchFamily="2" charset="0"/>
-              </a:rPr>
-              <a:t>addToCarts()</a:t>
-            </a:r>
-            <a:endParaRPr lang="zh-CN" altLang="en-US" sz="800">
-              <a:solidFill>
-                <a:sysClr val="windowText" lastClr="000000"/>
-              </a:solidFill>
-              <a:latin typeface="Quicksand Light" panose="00000400000000000000" pitchFamily="2" charset="0"/>
-            </a:endParaRPr>
-          </a:p>
-        </p:txBody>
-      </p:sp>
-      <p:cxnSp>
-        <p:nvCxnSpPr>
-          <p:cNvPr id="40" name="连接符: 曲线 39">
-            <a:extLst>
-              <a:ext uri="{FF2B5EF4-FFF2-40B4-BE49-F238E27FC236}">
-                <a16:creationId xmlns:a16="http://schemas.microsoft.com/office/drawing/2014/main" id="{4AC6721A-6244-50EC-47B3-5478511DF02F}"/>
-              </a:ext>
-            </a:extLst>
-          </p:cNvPr>
-          <p:cNvCxnSpPr>
-            <a:cxnSpLocks/>
-            <a:stCxn id="37" idx="3"/>
-            <a:endCxn id="4" idx="1"/>
-          </p:cNvCxnSpPr>
-          <p:nvPr/>
-        </p:nvCxnSpPr>
-        <p:spPr>
-          <a:xfrm flipV="1">
-            <a:off x="3738400" y="2345109"/>
-            <a:ext cx="189309" cy="286491"/>
-          </a:xfrm>
-          <a:prstGeom prst="curvedConnector3">
-            <a:avLst>
-              <a:gd name="adj1" fmla="val 50000"/>
-            </a:avLst>
-          </a:prstGeom>
-          <a:ln>
-            <a:solidFill>
-              <a:srgbClr val="00B050"/>
-            </a:solidFill>
-          </a:ln>
-        </p:spPr>
-        <p:style>
-          <a:lnRef idx="1">
-            <a:schemeClr val="accent1"/>
-          </a:lnRef>
-          <a:fillRef idx="0">
-            <a:schemeClr val="accent1"/>
-          </a:fillRef>
-          <a:effectRef idx="0">
-            <a:schemeClr val="accent1"/>
-          </a:effectRef>
-          <a:fontRef idx="minor">
-            <a:schemeClr val="tx1"/>
-          </a:fontRef>
-        </p:style>
-      </p:cxnSp>
-      <p:cxnSp>
-        <p:nvCxnSpPr>
-          <p:cNvPr id="45" name="直接连接符 44">
-            <a:extLst>
-              <a:ext uri="{FF2B5EF4-FFF2-40B4-BE49-F238E27FC236}">
-                <a16:creationId xmlns:a16="http://schemas.microsoft.com/office/drawing/2014/main" id="{64FC7AF9-BB31-5588-9F23-4B97028C7A12}"/>
-              </a:ext>
-            </a:extLst>
-          </p:cNvPr>
-          <p:cNvCxnSpPr>
-            <a:stCxn id="36" idx="3"/>
-            <a:endCxn id="4" idx="1"/>
-          </p:cNvCxnSpPr>
-          <p:nvPr/>
-        </p:nvCxnSpPr>
-        <p:spPr>
-          <a:xfrm>
-            <a:off x="3738400" y="2345109"/>
-            <a:ext cx="189309" cy="0"/>
-          </a:xfrm>
-          <a:prstGeom prst="line">
-            <a:avLst/>
-          </a:prstGeom>
-          <a:ln>
-            <a:solidFill>
-              <a:srgbClr val="00B050"/>
-            </a:solidFill>
-          </a:ln>
-        </p:spPr>
-        <p:style>
-          <a:lnRef idx="1">
-            <a:schemeClr val="accent1"/>
-          </a:lnRef>
-          <a:fillRef idx="0">
-            <a:schemeClr val="accent1"/>
-          </a:fillRef>
-          <a:effectRef idx="0">
-            <a:schemeClr val="accent1"/>
-          </a:effectRef>
-          <a:fontRef idx="minor">
-            <a:schemeClr val="tx1"/>
-          </a:fontRef>
-        </p:style>
-      </p:cxnSp>
-      <p:sp>
-        <p:nvSpPr>
-          <p:cNvPr id="54" name="矩形: 圆角 53">
-            <a:extLst>
-              <a:ext uri="{FF2B5EF4-FFF2-40B4-BE49-F238E27FC236}">
-                <a16:creationId xmlns:a16="http://schemas.microsoft.com/office/drawing/2014/main" id="{A46905A7-222F-AF3F-81E8-3E43C3A2AFC0}"/>
-              </a:ext>
-            </a:extLst>
-          </p:cNvPr>
-          <p:cNvSpPr/>
-          <p:nvPr/>
-        </p:nvSpPr>
-        <p:spPr>
-          <a:xfrm>
-            <a:off x="2730400" y="2946554"/>
-            <a:ext cx="1008000" cy="216000"/>
-          </a:xfrm>
-          <a:prstGeom prst="roundRect">
-            <a:avLst/>
-          </a:prstGeom>
-          <a:solidFill>
-            <a:srgbClr val="5C84CC">
-              <a:alpha val="89804"/>
-            </a:srgbClr>
-          </a:solidFill>
-          <a:ln w="12700">
-            <a:noFill/>
-          </a:ln>
-        </p:spPr>
-        <p:style>
-          <a:lnRef idx="2">
-            <a:schemeClr val="accent1">
-              <a:shade val="15000"/>
-            </a:schemeClr>
-          </a:lnRef>
-          <a:fillRef idx="1">
-            <a:schemeClr val="accent1"/>
-          </a:fillRef>
-          <a:effectRef idx="0">
-            <a:schemeClr val="accent1"/>
-          </a:effectRef>
-          <a:fontRef idx="minor">
-            <a:schemeClr val="lt1"/>
-          </a:fontRef>
-        </p:style>
-        <p:txBody>
-          <a:bodyPr rtlCol="0" anchor="ctr"/>
-          <a:lstStyle/>
-          <a:p>
-            <a:pPr algn="ctr"/>
-            <a:r>
-              <a:rPr lang="en-US" altLang="zh-CN" sz="800">
-                <a:latin typeface="Quicksand" panose="00000500000000000000" pitchFamily="2" charset="0"/>
-              </a:rPr>
-              <a:t>lists</a:t>
-            </a:r>
-            <a:endParaRPr lang="zh-CN" altLang="en-US" sz="800">
-              <a:latin typeface="Quicksand" panose="00000500000000000000" pitchFamily="2" charset="0"/>
-            </a:endParaRPr>
-          </a:p>
-        </p:txBody>
-      </p:sp>
-      <p:sp>
-        <p:nvSpPr>
-          <p:cNvPr id="55" name="矩形: 圆角 54">
-            <a:extLst>
-              <a:ext uri="{FF2B5EF4-FFF2-40B4-BE49-F238E27FC236}">
-                <a16:creationId xmlns:a16="http://schemas.microsoft.com/office/drawing/2014/main" id="{1B69FB84-588C-3B6F-29DC-0D207F19217B}"/>
-              </a:ext>
-            </a:extLst>
-          </p:cNvPr>
-          <p:cNvSpPr/>
-          <p:nvPr/>
-        </p:nvSpPr>
-        <p:spPr>
-          <a:xfrm>
-            <a:off x="2730400" y="3245715"/>
-            <a:ext cx="1008000" cy="216000"/>
-          </a:xfrm>
-          <a:prstGeom prst="roundRect">
-            <a:avLst/>
-          </a:prstGeom>
-          <a:solidFill>
-            <a:srgbClr val="5C84CC">
-              <a:alpha val="89804"/>
-            </a:srgbClr>
-          </a:solidFill>
-          <a:ln w="12700">
-            <a:noFill/>
-          </a:ln>
-        </p:spPr>
-        <p:style>
-          <a:lnRef idx="2">
-            <a:schemeClr val="accent1">
-              <a:shade val="15000"/>
-            </a:schemeClr>
-          </a:lnRef>
-          <a:fillRef idx="1">
-            <a:schemeClr val="accent1"/>
-          </a:fillRef>
-          <a:effectRef idx="0">
-            <a:schemeClr val="accent1"/>
-          </a:effectRef>
-          <a:fontRef idx="minor">
-            <a:schemeClr val="lt1"/>
-          </a:fontRef>
-        </p:style>
-        <p:txBody>
-          <a:bodyPr rtlCol="0" anchor="ctr"/>
-          <a:lstStyle/>
-          <a:p>
-            <a:pPr algn="ctr"/>
-            <a:r>
-              <a:rPr lang="en-US" altLang="zh-CN" sz="800">
-                <a:latin typeface="Quicksand" panose="00000500000000000000" pitchFamily="2" charset="0"/>
-              </a:rPr>
-              <a:t>selectedLists</a:t>
-            </a:r>
-            <a:endParaRPr lang="zh-CN" altLang="en-US" sz="800">
-              <a:latin typeface="Quicksand" panose="00000500000000000000" pitchFamily="2" charset="0"/>
-            </a:endParaRPr>
-          </a:p>
-        </p:txBody>
-      </p:sp>
-      <p:sp>
-        <p:nvSpPr>
-          <p:cNvPr id="56" name="矩形: 圆角 55">
-            <a:extLst>
-              <a:ext uri="{FF2B5EF4-FFF2-40B4-BE49-F238E27FC236}">
-                <a16:creationId xmlns:a16="http://schemas.microsoft.com/office/drawing/2014/main" id="{1761FC9C-89B8-41A0-8F5C-43B5E16AA3C1}"/>
-              </a:ext>
-            </a:extLst>
-          </p:cNvPr>
-          <p:cNvSpPr/>
-          <p:nvPr/>
-        </p:nvSpPr>
-        <p:spPr>
-          <a:xfrm>
-            <a:off x="2730400" y="3544876"/>
-            <a:ext cx="1008000" cy="216000"/>
-          </a:xfrm>
-          <a:prstGeom prst="roundRect">
-            <a:avLst/>
-          </a:prstGeom>
-          <a:solidFill>
-            <a:srgbClr val="5C84CC">
-              <a:alpha val="89804"/>
-            </a:srgbClr>
-          </a:solidFill>
-          <a:ln w="12700">
-            <a:noFill/>
-          </a:ln>
-        </p:spPr>
-        <p:style>
-          <a:lnRef idx="2">
-            <a:schemeClr val="accent1">
-              <a:shade val="15000"/>
-            </a:schemeClr>
-          </a:lnRef>
-          <a:fillRef idx="1">
-            <a:schemeClr val="accent1"/>
-          </a:fillRef>
-          <a:effectRef idx="0">
-            <a:schemeClr val="accent1"/>
-          </a:effectRef>
-          <a:fontRef idx="minor">
-            <a:schemeClr val="lt1"/>
-          </a:fontRef>
-        </p:style>
-        <p:txBody>
-          <a:bodyPr rtlCol="0" anchor="ctr"/>
-          <a:lstStyle/>
-          <a:p>
-            <a:pPr algn="ctr"/>
-            <a:r>
-              <a:rPr lang="en-US" altLang="zh-CN" sz="800">
-                <a:latin typeface="Quicksand" panose="00000500000000000000" pitchFamily="2" charset="0"/>
-              </a:rPr>
-              <a:t>isAll</a:t>
-            </a:r>
-            <a:endParaRPr lang="zh-CN" altLang="en-US" sz="800">
-              <a:latin typeface="Quicksand" panose="00000500000000000000" pitchFamily="2" charset="0"/>
-            </a:endParaRPr>
-          </a:p>
-        </p:txBody>
-      </p:sp>
-      <p:sp>
-        <p:nvSpPr>
-          <p:cNvPr id="57" name="矩形: 圆角 56">
-            <a:extLst>
-              <a:ext uri="{FF2B5EF4-FFF2-40B4-BE49-F238E27FC236}">
-                <a16:creationId xmlns:a16="http://schemas.microsoft.com/office/drawing/2014/main" id="{83DCAFDE-14F9-6845-DB80-8B8F839510C3}"/>
-              </a:ext>
-            </a:extLst>
-          </p:cNvPr>
-          <p:cNvSpPr/>
-          <p:nvPr/>
-        </p:nvSpPr>
-        <p:spPr>
-          <a:xfrm>
-            <a:off x="2730400" y="3844037"/>
-            <a:ext cx="1008000" cy="216000"/>
-          </a:xfrm>
-          <a:prstGeom prst="roundRect">
-            <a:avLst/>
-          </a:prstGeom>
-          <a:solidFill>
-            <a:srgbClr val="5C84CC">
-              <a:alpha val="89804"/>
-            </a:srgbClr>
-          </a:solidFill>
-          <a:ln w="12700">
-            <a:noFill/>
-          </a:ln>
-        </p:spPr>
-        <p:style>
-          <a:lnRef idx="2">
-            <a:schemeClr val="accent1">
-              <a:shade val="15000"/>
-            </a:schemeClr>
-          </a:lnRef>
-          <a:fillRef idx="1">
-            <a:schemeClr val="accent1"/>
-          </a:fillRef>
-          <a:effectRef idx="0">
-            <a:schemeClr val="accent1"/>
-          </a:effectRef>
-          <a:fontRef idx="minor">
-            <a:schemeClr val="lt1"/>
-          </a:fontRef>
-        </p:style>
-        <p:txBody>
-          <a:bodyPr rtlCol="0" anchor="ctr"/>
-          <a:lstStyle/>
-          <a:p>
-            <a:pPr algn="ctr"/>
-            <a:r>
-              <a:rPr lang="en-US" altLang="zh-CN" sz="800">
-                <a:latin typeface="Quicksand" panose="00000500000000000000" pitchFamily="2" charset="0"/>
-              </a:rPr>
-              <a:t>count</a:t>
-            </a:r>
-            <a:endParaRPr lang="zh-CN" altLang="en-US" sz="800">
-              <a:latin typeface="Quicksand" panose="00000500000000000000" pitchFamily="2" charset="0"/>
-            </a:endParaRPr>
-          </a:p>
-        </p:txBody>
-      </p:sp>
-      <p:sp>
-        <p:nvSpPr>
-          <p:cNvPr id="59" name="矩形: 圆角 58">
-            <a:extLst>
-              <a:ext uri="{FF2B5EF4-FFF2-40B4-BE49-F238E27FC236}">
-                <a16:creationId xmlns:a16="http://schemas.microsoft.com/office/drawing/2014/main" id="{D7B3F34F-6627-658C-A744-FBC9FDD8AF91}"/>
-              </a:ext>
-            </a:extLst>
-          </p:cNvPr>
-          <p:cNvSpPr/>
-          <p:nvPr/>
-        </p:nvSpPr>
-        <p:spPr>
-          <a:xfrm>
-            <a:off x="2730400" y="4143198"/>
-            <a:ext cx="1008000" cy="216000"/>
-          </a:xfrm>
-          <a:prstGeom prst="roundRect">
-            <a:avLst/>
-          </a:prstGeom>
-          <a:solidFill>
-            <a:srgbClr val="5C84CC">
-              <a:alpha val="89804"/>
-            </a:srgbClr>
-          </a:solidFill>
-          <a:ln w="12700">
-            <a:noFill/>
-          </a:ln>
-        </p:spPr>
-        <p:style>
-          <a:lnRef idx="2">
-            <a:schemeClr val="accent1">
-              <a:shade val="15000"/>
-            </a:schemeClr>
-          </a:lnRef>
-          <a:fillRef idx="1">
-            <a:schemeClr val="accent1"/>
-          </a:fillRef>
-          <a:effectRef idx="0">
-            <a:schemeClr val="accent1"/>
-          </a:effectRef>
-          <a:fontRef idx="minor">
-            <a:schemeClr val="lt1"/>
-          </a:fontRef>
-        </p:style>
-        <p:txBody>
-          <a:bodyPr rtlCol="0" anchor="ctr"/>
-          <a:lstStyle/>
-          <a:p>
-            <a:pPr algn="ctr"/>
-            <a:r>
-              <a:rPr lang="en-US" altLang="zh-CN" sz="800">
-                <a:latin typeface="Quicksand" panose="00000500000000000000" pitchFamily="2" charset="0"/>
-              </a:rPr>
-              <a:t>totalPrice</a:t>
-            </a:r>
-            <a:endParaRPr lang="zh-CN" altLang="en-US" sz="800">
-              <a:latin typeface="Quicksand" panose="00000500000000000000" pitchFamily="2" charset="0"/>
-            </a:endParaRPr>
-          </a:p>
-        </p:txBody>
-      </p:sp>
-      <p:sp>
-        <p:nvSpPr>
-          <p:cNvPr id="60" name="矩形: 圆角 59">
-            <a:extLst>
-              <a:ext uri="{FF2B5EF4-FFF2-40B4-BE49-F238E27FC236}">
-                <a16:creationId xmlns:a16="http://schemas.microsoft.com/office/drawing/2014/main" id="{69FD48F7-D13B-8DD4-D4AA-42DDEE93B189}"/>
-              </a:ext>
-            </a:extLst>
-          </p:cNvPr>
-          <p:cNvSpPr/>
-          <p:nvPr/>
-        </p:nvSpPr>
-        <p:spPr>
-          <a:xfrm>
-            <a:off x="2730400" y="4442359"/>
-            <a:ext cx="1008000" cy="216000"/>
-          </a:xfrm>
-          <a:prstGeom prst="roundRect">
-            <a:avLst/>
-          </a:prstGeom>
-          <a:solidFill>
-            <a:srgbClr val="5C84CC">
-              <a:alpha val="89804"/>
-            </a:srgbClr>
-          </a:solidFill>
-          <a:ln w="12700">
-            <a:noFill/>
-          </a:ln>
-        </p:spPr>
-        <p:style>
-          <a:lnRef idx="2">
-            <a:schemeClr val="accent1">
-              <a:shade val="15000"/>
-            </a:schemeClr>
-          </a:lnRef>
-          <a:fillRef idx="1">
-            <a:schemeClr val="accent1"/>
-          </a:fillRef>
-          <a:effectRef idx="0">
-            <a:schemeClr val="accent1"/>
-          </a:effectRef>
-          <a:fontRef idx="minor">
-            <a:schemeClr val="lt1"/>
-          </a:fontRef>
-        </p:style>
-        <p:txBody>
-          <a:bodyPr rtlCol="0" anchor="ctr"/>
-          <a:lstStyle/>
-          <a:p>
-            <a:pPr algn="ctr"/>
-            <a:r>
-              <a:rPr lang="en-US" altLang="zh-CN" sz="800">
-                <a:latin typeface="Quicksand" panose="00000500000000000000" pitchFamily="2" charset="0"/>
-              </a:rPr>
-              <a:t>discountPrice</a:t>
-            </a:r>
-            <a:endParaRPr lang="zh-CN" altLang="en-US" sz="800">
-              <a:latin typeface="Quicksand" panose="00000500000000000000" pitchFamily="2" charset="0"/>
-            </a:endParaRPr>
-          </a:p>
-        </p:txBody>
-      </p:sp>
-      <p:cxnSp>
-        <p:nvCxnSpPr>
-          <p:cNvPr id="61" name="连接符: 曲线 60">
-            <a:extLst>
-              <a:ext uri="{FF2B5EF4-FFF2-40B4-BE49-F238E27FC236}">
-                <a16:creationId xmlns:a16="http://schemas.microsoft.com/office/drawing/2014/main" id="{BD5BA532-7EB2-08C6-9059-CA4E846D5684}"/>
-              </a:ext>
-            </a:extLst>
-          </p:cNvPr>
-          <p:cNvCxnSpPr>
-            <a:cxnSpLocks/>
-            <a:stCxn id="54" idx="3"/>
-            <a:endCxn id="3" idx="1"/>
-          </p:cNvCxnSpPr>
-          <p:nvPr/>
-        </p:nvCxnSpPr>
-        <p:spPr>
-          <a:xfrm>
-            <a:off x="3738400" y="3054554"/>
-            <a:ext cx="189309" cy="747903"/>
-          </a:xfrm>
-          <a:prstGeom prst="curvedConnector3">
-            <a:avLst>
-              <a:gd name="adj1" fmla="val 50000"/>
-            </a:avLst>
-          </a:prstGeom>
-          <a:ln>
-            <a:solidFill>
-              <a:srgbClr val="6D91D1"/>
-            </a:solidFill>
-          </a:ln>
-        </p:spPr>
-        <p:style>
-          <a:lnRef idx="1">
-            <a:schemeClr val="accent1"/>
-          </a:lnRef>
-          <a:fillRef idx="0">
-            <a:schemeClr val="accent1"/>
-          </a:fillRef>
-          <a:effectRef idx="0">
-            <a:schemeClr val="accent1"/>
-          </a:effectRef>
-          <a:fontRef idx="minor">
-            <a:schemeClr val="tx1"/>
-          </a:fontRef>
-        </p:style>
-      </p:cxnSp>
-      <p:cxnSp>
-        <p:nvCxnSpPr>
-          <p:cNvPr id="68" name="连接符: 曲线 67">
-            <a:extLst>
-              <a:ext uri="{FF2B5EF4-FFF2-40B4-BE49-F238E27FC236}">
-                <a16:creationId xmlns:a16="http://schemas.microsoft.com/office/drawing/2014/main" id="{16E326BD-B4AE-1641-E70A-A6BFE4509A70}"/>
-              </a:ext>
-            </a:extLst>
-          </p:cNvPr>
-          <p:cNvCxnSpPr>
-            <a:cxnSpLocks/>
-            <a:stCxn id="55" idx="3"/>
-            <a:endCxn id="3" idx="1"/>
-          </p:cNvCxnSpPr>
-          <p:nvPr/>
-        </p:nvCxnSpPr>
-        <p:spPr>
-          <a:xfrm>
-            <a:off x="3738400" y="3353715"/>
-            <a:ext cx="189309" cy="448742"/>
-          </a:xfrm>
-          <a:prstGeom prst="curvedConnector3">
-            <a:avLst>
-              <a:gd name="adj1" fmla="val 50000"/>
-            </a:avLst>
-          </a:prstGeom>
-          <a:ln>
-            <a:solidFill>
-              <a:srgbClr val="6D91D1"/>
-            </a:solidFill>
-          </a:ln>
-        </p:spPr>
-        <p:style>
-          <a:lnRef idx="1">
-            <a:schemeClr val="accent1"/>
-          </a:lnRef>
-          <a:fillRef idx="0">
-            <a:schemeClr val="accent1"/>
-          </a:fillRef>
-          <a:effectRef idx="0">
-            <a:schemeClr val="accent1"/>
-          </a:effectRef>
-          <a:fontRef idx="minor">
-            <a:schemeClr val="tx1"/>
-          </a:fontRef>
-        </p:style>
-      </p:cxnSp>
-      <p:cxnSp>
-        <p:nvCxnSpPr>
-          <p:cNvPr id="75" name="连接符: 曲线 74">
-            <a:extLst>
-              <a:ext uri="{FF2B5EF4-FFF2-40B4-BE49-F238E27FC236}">
-                <a16:creationId xmlns:a16="http://schemas.microsoft.com/office/drawing/2014/main" id="{B5A66737-652E-D3AD-C2BA-7A64BF6D2DB4}"/>
-              </a:ext>
-            </a:extLst>
-          </p:cNvPr>
-          <p:cNvCxnSpPr>
-            <a:cxnSpLocks/>
-            <a:stCxn id="60" idx="3"/>
-            <a:endCxn id="3" idx="1"/>
-          </p:cNvCxnSpPr>
-          <p:nvPr/>
-        </p:nvCxnSpPr>
-        <p:spPr>
-          <a:xfrm flipV="1">
-            <a:off x="3738400" y="3802457"/>
-            <a:ext cx="189309" cy="747902"/>
-          </a:xfrm>
-          <a:prstGeom prst="curvedConnector3">
-            <a:avLst>
-              <a:gd name="adj1" fmla="val 50000"/>
-            </a:avLst>
-          </a:prstGeom>
-          <a:ln>
-            <a:solidFill>
-              <a:srgbClr val="6D91D1"/>
-            </a:solidFill>
-          </a:ln>
-        </p:spPr>
-        <p:style>
-          <a:lnRef idx="1">
-            <a:schemeClr val="accent1"/>
-          </a:lnRef>
-          <a:fillRef idx="0">
-            <a:schemeClr val="accent1"/>
-          </a:fillRef>
-          <a:effectRef idx="0">
-            <a:schemeClr val="accent1"/>
-          </a:effectRef>
-          <a:fontRef idx="minor">
-            <a:schemeClr val="tx1"/>
-          </a:fontRef>
-        </p:style>
-      </p:cxnSp>
-      <p:cxnSp>
-        <p:nvCxnSpPr>
-          <p:cNvPr id="78" name="连接符: 曲线 77">
-            <a:extLst>
-              <a:ext uri="{FF2B5EF4-FFF2-40B4-BE49-F238E27FC236}">
-                <a16:creationId xmlns:a16="http://schemas.microsoft.com/office/drawing/2014/main" id="{9C49D303-6593-4078-0C50-F1465C52AB10}"/>
-              </a:ext>
-            </a:extLst>
-          </p:cNvPr>
-          <p:cNvCxnSpPr>
-            <a:cxnSpLocks/>
-            <a:stCxn id="56" idx="3"/>
-            <a:endCxn id="3" idx="1"/>
-          </p:cNvCxnSpPr>
-          <p:nvPr/>
-        </p:nvCxnSpPr>
-        <p:spPr>
-          <a:xfrm>
-            <a:off x="3738400" y="3652876"/>
-            <a:ext cx="189309" cy="149581"/>
-          </a:xfrm>
-          <a:prstGeom prst="curvedConnector3">
-            <a:avLst>
-              <a:gd name="adj1" fmla="val 50000"/>
-            </a:avLst>
-          </a:prstGeom>
-          <a:ln>
-            <a:solidFill>
-              <a:srgbClr val="6D91D1"/>
-            </a:solidFill>
-          </a:ln>
-        </p:spPr>
-        <p:style>
-          <a:lnRef idx="1">
-            <a:schemeClr val="accent1"/>
-          </a:lnRef>
-          <a:fillRef idx="0">
-            <a:schemeClr val="accent1"/>
-          </a:fillRef>
-          <a:effectRef idx="0">
-            <a:schemeClr val="accent1"/>
-          </a:effectRef>
-          <a:fontRef idx="minor">
-            <a:schemeClr val="tx1"/>
-          </a:fontRef>
-        </p:style>
-      </p:cxnSp>
-      <p:cxnSp>
-        <p:nvCxnSpPr>
-          <p:cNvPr id="81" name="连接符: 曲线 80">
-            <a:extLst>
-              <a:ext uri="{FF2B5EF4-FFF2-40B4-BE49-F238E27FC236}">
-                <a16:creationId xmlns:a16="http://schemas.microsoft.com/office/drawing/2014/main" id="{96EB5F84-D1BD-20B5-2777-AB306C14B03E}"/>
-              </a:ext>
-            </a:extLst>
-          </p:cNvPr>
-          <p:cNvCxnSpPr>
-            <a:cxnSpLocks/>
-            <a:stCxn id="59" idx="3"/>
-            <a:endCxn id="3" idx="1"/>
-          </p:cNvCxnSpPr>
-          <p:nvPr/>
-        </p:nvCxnSpPr>
-        <p:spPr>
-          <a:xfrm flipV="1">
-            <a:off x="3738400" y="3802457"/>
-            <a:ext cx="189309" cy="448741"/>
-          </a:xfrm>
-          <a:prstGeom prst="curvedConnector3">
-            <a:avLst>
-              <a:gd name="adj1" fmla="val 50000"/>
-            </a:avLst>
-          </a:prstGeom>
-          <a:ln>
-            <a:solidFill>
-              <a:srgbClr val="6D91D1"/>
-            </a:solidFill>
-          </a:ln>
-        </p:spPr>
-        <p:style>
-          <a:lnRef idx="1">
-            <a:schemeClr val="accent1"/>
-          </a:lnRef>
-          <a:fillRef idx="0">
-            <a:schemeClr val="accent1"/>
-          </a:fillRef>
-          <a:effectRef idx="0">
-            <a:schemeClr val="accent1"/>
-          </a:effectRef>
-          <a:fontRef idx="minor">
-            <a:schemeClr val="tx1"/>
-          </a:fontRef>
-        </p:style>
-      </p:cxnSp>
-      <p:cxnSp>
-        <p:nvCxnSpPr>
-          <p:cNvPr id="86" name="连接符: 曲线 85">
-            <a:extLst>
-              <a:ext uri="{FF2B5EF4-FFF2-40B4-BE49-F238E27FC236}">
-                <a16:creationId xmlns:a16="http://schemas.microsoft.com/office/drawing/2014/main" id="{698C2E92-6E21-B7A7-AAAB-69046DD82A44}"/>
-              </a:ext>
-            </a:extLst>
-          </p:cNvPr>
-          <p:cNvCxnSpPr>
-            <a:cxnSpLocks/>
-            <a:stCxn id="57" idx="3"/>
-            <a:endCxn id="3" idx="1"/>
-          </p:cNvCxnSpPr>
-          <p:nvPr/>
-        </p:nvCxnSpPr>
-        <p:spPr>
-          <a:xfrm flipV="1">
-            <a:off x="3738400" y="3802457"/>
-            <a:ext cx="189309" cy="149580"/>
-          </a:xfrm>
-          <a:prstGeom prst="curvedConnector3">
-            <a:avLst>
-              <a:gd name="adj1" fmla="val 50000"/>
-            </a:avLst>
-          </a:prstGeom>
-          <a:ln>
-            <a:solidFill>
-              <a:srgbClr val="6D91D1"/>
-            </a:solidFill>
-          </a:ln>
-        </p:spPr>
-        <p:style>
-          <a:lnRef idx="1">
-            <a:schemeClr val="accent1"/>
-          </a:lnRef>
-          <a:fillRef idx="0">
-            <a:schemeClr val="accent1"/>
-          </a:fillRef>
-          <a:effectRef idx="0">
-            <a:schemeClr val="accent1"/>
-          </a:effectRef>
-          <a:fontRef idx="minor">
-            <a:schemeClr val="tx1"/>
-          </a:fontRef>
-        </p:style>
-      </p:cxnSp>
-    </p:spTree>
-    <p:extLst>
-      <p:ext uri="{BB962C8B-B14F-4D97-AF65-F5344CB8AC3E}">
-        <p14:creationId xmlns:p14="http://schemas.microsoft.com/office/powerpoint/2010/main" val="2989024140"/>
-      </p:ext>
-    </p:extLst>
-  </p:cSld>
-  <p:clrMapOvr>
-    <a:masterClrMapping/>
-  </p:clrMapOvr>
-</p:sld>
-</file>
-
-<file path=ppt/slides/slide11.xml><?xml version="1.0" encoding="utf-8"?>
-<p:sld xmlns:a="http://schemas.openxmlformats.org/drawingml/2006/main" xmlns:r="http://schemas.openxmlformats.org/officeDocument/2006/relationships" xmlns:p="http://schemas.openxmlformats.org/presentationml/2006/main">
-  <p:cSld>
-    <p:spTree>
-      <p:nvGrpSpPr>
-        <p:cNvPr id="1" name="">
-          <a:extLst>
-            <a:ext uri="{FF2B5EF4-FFF2-40B4-BE49-F238E27FC236}">
               <a16:creationId xmlns:a16="http://schemas.microsoft.com/office/drawing/2014/main" id="{5C7A2C4C-DE35-8F5D-FAA3-1F45B914C406}"/>
             </a:ext>
           </a:extLst>
@@ -6197,7 +4467,7 @@
 </p:sld>
 </file>
 
-<file path=ppt/slides/slide12.xml><?xml version="1.0" encoding="utf-8"?>
+<file path=ppt/slides/slide11.xml><?xml version="1.0" encoding="utf-8"?>
 <p:sld xmlns:a="http://schemas.openxmlformats.org/drawingml/2006/main" xmlns:r="http://schemas.openxmlformats.org/officeDocument/2006/relationships" xmlns:p="http://schemas.openxmlformats.org/presentationml/2006/main">
   <p:cSld>
     <p:spTree>
@@ -6791,7 +5061,7 @@
 </p:sld>
 </file>
 
-<file path=ppt/slides/slide13.xml><?xml version="1.0" encoding="utf-8"?>
+<file path=ppt/slides/slide12.xml><?xml version="1.0" encoding="utf-8"?>
 <p:sld xmlns:a="http://schemas.openxmlformats.org/drawingml/2006/main" xmlns:r="http://schemas.openxmlformats.org/officeDocument/2006/relationships" xmlns:p="http://schemas.openxmlformats.org/presentationml/2006/main">
   <p:cSld>
     <p:spTree>
@@ -8406,7 +6676,7 @@
 </p:sld>
 </file>
 
-<file path=ppt/slides/slide14.xml><?xml version="1.0" encoding="utf-8"?>
+<file path=ppt/slides/slide13.xml><?xml version="1.0" encoding="utf-8"?>
 <p:sld xmlns:a="http://schemas.openxmlformats.org/drawingml/2006/main" xmlns:r="http://schemas.openxmlformats.org/officeDocument/2006/relationships" xmlns:p="http://schemas.openxmlformats.org/presentationml/2006/main">
   <p:cSld>
     <p:spTree>
@@ -11411,7 +9681,7 @@
 </p:sld>
 </file>
 
-<file path=ppt/slides/slide15.xml><?xml version="1.0" encoding="utf-8"?>
+<file path=ppt/slides/slide14.xml><?xml version="1.0" encoding="utf-8"?>
 <p:sld xmlns:a="http://schemas.openxmlformats.org/drawingml/2006/main" xmlns:r="http://schemas.openxmlformats.org/officeDocument/2006/relationships" xmlns:p="http://schemas.openxmlformats.org/presentationml/2006/main">
   <p:cSld>
     <p:spTree>
@@ -13994,7 +12264,7 @@
 </p:sld>
 </file>
 
-<file path=ppt/slides/slide16.xml><?xml version="1.0" encoding="utf-8"?>
+<file path=ppt/slides/slide15.xml><?xml version="1.0" encoding="utf-8"?>
 <p:sld xmlns:a="http://schemas.openxmlformats.org/drawingml/2006/main" xmlns:r="http://schemas.openxmlformats.org/officeDocument/2006/relationships" xmlns:p="http://schemas.openxmlformats.org/presentationml/2006/main">
   <p:cSld>
     <p:spTree>
@@ -15399,7 +13669,7 @@
 </p:sld>
 </file>
 
-<file path=ppt/slides/slide17.xml><?xml version="1.0" encoding="utf-8"?>
+<file path=ppt/slides/slide16.xml><?xml version="1.0" encoding="utf-8"?>
 <p:sld xmlns:a="http://schemas.openxmlformats.org/drawingml/2006/main" xmlns:r="http://schemas.openxmlformats.org/officeDocument/2006/relationships" xmlns:p="http://schemas.openxmlformats.org/presentationml/2006/main">
   <p:cSld>
     <p:spTree>
@@ -16607,7 +14877,7 @@
 </p:sld>
 </file>
 
-<file path=ppt/slides/slide18.xml><?xml version="1.0" encoding="utf-8"?>
+<file path=ppt/slides/slide17.xml><?xml version="1.0" encoding="utf-8"?>
 <p:sld xmlns:a="http://schemas.openxmlformats.org/drawingml/2006/main" xmlns:r="http://schemas.openxmlformats.org/officeDocument/2006/relationships" xmlns:p="http://schemas.openxmlformats.org/presentationml/2006/main">
   <p:cSld>
     <p:spTree>
@@ -16951,7 +15221,7 @@
 </p:sld>
 </file>
 
-<file path=ppt/slides/slide19.xml><?xml version="1.0" encoding="utf-8"?>
+<file path=ppt/slides/slide18.xml><?xml version="1.0" encoding="utf-8"?>
 <p:sld xmlns:a="http://schemas.openxmlformats.org/drawingml/2006/main" xmlns:r="http://schemas.openxmlformats.org/officeDocument/2006/relationships" xmlns:p="http://schemas.openxmlformats.org/presentationml/2006/main">
   <p:cSld>
     <p:spTree>
@@ -17388,6 +15658,452 @@
     <p:extLst>
       <p:ext uri="{BB962C8B-B14F-4D97-AF65-F5344CB8AC3E}">
         <p14:creationId xmlns:p14="http://schemas.microsoft.com/office/powerpoint/2010/main" val="2473040496"/>
+      </p:ext>
+    </p:extLst>
+  </p:cSld>
+  <p:clrMapOvr>
+    <a:masterClrMapping/>
+  </p:clrMapOvr>
+</p:sld>
+</file>
+
+<file path=ppt/slides/slide19.xml><?xml version="1.0" encoding="utf-8"?>
+<p:sld xmlns:a="http://schemas.openxmlformats.org/drawingml/2006/main" xmlns:r="http://schemas.openxmlformats.org/officeDocument/2006/relationships" xmlns:p="http://schemas.openxmlformats.org/presentationml/2006/main">
+  <p:cSld>
+    <p:spTree>
+      <p:nvGrpSpPr>
+        <p:cNvPr id="1" name="">
+          <a:extLst>
+            <a:ext uri="{FF2B5EF4-FFF2-40B4-BE49-F238E27FC236}">
+              <a16:creationId xmlns:a16="http://schemas.microsoft.com/office/drawing/2014/main" id="{4B6AC346-4E87-BA38-8EDB-AEACB42C1BE9}"/>
+            </a:ext>
+          </a:extLst>
+        </p:cNvPr>
+        <p:cNvGrpSpPr/>
+        <p:nvPr/>
+      </p:nvGrpSpPr>
+      <p:grpSpPr>
+        <a:xfrm>
+          <a:off x="0" y="0"/>
+          <a:ext cx="0" cy="0"/>
+          <a:chOff x="0" y="0"/>
+          <a:chExt cx="0" cy="0"/>
+        </a:xfrm>
+      </p:grpSpPr>
+      <p:sp>
+        <p:nvSpPr>
+          <p:cNvPr id="2" name="Rectangle 1">
+            <a:extLst>
+              <a:ext uri="{FF2B5EF4-FFF2-40B4-BE49-F238E27FC236}">
+                <a16:creationId xmlns:a16="http://schemas.microsoft.com/office/drawing/2014/main" id="{76D07D2F-5702-0123-4A31-FE31E2DEE13E}"/>
+              </a:ext>
+            </a:extLst>
+          </p:cNvPr>
+          <p:cNvSpPr/>
+          <p:nvPr/>
+        </p:nvSpPr>
+        <p:spPr>
+          <a:xfrm>
+            <a:off x="3757723" y="1589964"/>
+            <a:ext cx="3600000" cy="1800000"/>
+          </a:xfrm>
+          <a:prstGeom prst="rect">
+            <a:avLst/>
+          </a:prstGeom>
+          <a:solidFill>
+            <a:schemeClr val="bg1">
+              <a:lumMod val="95000"/>
+            </a:schemeClr>
+          </a:solidFill>
+          <a:ln>
+            <a:noFill/>
+          </a:ln>
+        </p:spPr>
+        <p:style>
+          <a:lnRef idx="2">
+            <a:schemeClr val="accent1">
+              <a:shade val="15000"/>
+            </a:schemeClr>
+          </a:lnRef>
+          <a:fillRef idx="1">
+            <a:schemeClr val="accent1"/>
+          </a:fillRef>
+          <a:effectRef idx="0">
+            <a:schemeClr val="accent1"/>
+          </a:effectRef>
+          <a:fontRef idx="minor">
+            <a:schemeClr val="lt1"/>
+          </a:fontRef>
+        </p:style>
+        <p:txBody>
+          <a:bodyPr rtlCol="0" anchor="ctr"/>
+          <a:lstStyle/>
+          <a:p>
+            <a:pPr algn="ctr"/>
+            <a:endParaRPr lang="zh-CN" altLang="en-US" sz="1200">
+              <a:solidFill>
+                <a:schemeClr val="accent6">
+                  <a:lumMod val="75000"/>
+                </a:schemeClr>
+              </a:solidFill>
+              <a:latin typeface="Poppins" panose="00000500000000000000" pitchFamily="2" charset="0"/>
+              <a:cs typeface="Poppins" panose="00000500000000000000" pitchFamily="2" charset="0"/>
+            </a:endParaRPr>
+          </a:p>
+        </p:txBody>
+      </p:sp>
+      <p:sp>
+        <p:nvSpPr>
+          <p:cNvPr id="3" name="Rectangle 2">
+            <a:extLst>
+              <a:ext uri="{FF2B5EF4-FFF2-40B4-BE49-F238E27FC236}">
+                <a16:creationId xmlns:a16="http://schemas.microsoft.com/office/drawing/2014/main" id="{8ED7BA39-5A4D-7118-2793-ED308937A067}"/>
+              </a:ext>
+            </a:extLst>
+          </p:cNvPr>
+          <p:cNvSpPr/>
+          <p:nvPr/>
+        </p:nvSpPr>
+        <p:spPr>
+          <a:xfrm>
+            <a:off x="3757723" y="1589964"/>
+            <a:ext cx="3600000" cy="360000"/>
+          </a:xfrm>
+          <a:prstGeom prst="rect">
+            <a:avLst/>
+          </a:prstGeom>
+          <a:solidFill>
+            <a:srgbClr val="92D050"/>
+          </a:solidFill>
+          <a:ln>
+            <a:noFill/>
+          </a:ln>
+        </p:spPr>
+        <p:style>
+          <a:lnRef idx="2">
+            <a:schemeClr val="accent1">
+              <a:shade val="15000"/>
+            </a:schemeClr>
+          </a:lnRef>
+          <a:fillRef idx="1">
+            <a:schemeClr val="accent1"/>
+          </a:fillRef>
+          <a:effectRef idx="0">
+            <a:schemeClr val="accent1"/>
+          </a:effectRef>
+          <a:fontRef idx="minor">
+            <a:schemeClr val="lt1"/>
+          </a:fontRef>
+        </p:style>
+        <p:txBody>
+          <a:bodyPr rtlCol="0" anchor="b" anchorCtr="0"/>
+          <a:lstStyle/>
+          <a:p>
+            <a:r>
+              <a:rPr lang="en-US" altLang="zh-CN" sz="1200">
+                <a:latin typeface="Poppins" panose="00000500000000000000" pitchFamily="2" charset="0"/>
+                <a:cs typeface="Poppins" panose="00000500000000000000" pitchFamily="2" charset="0"/>
+              </a:rPr>
+              <a:t>start</a:t>
+            </a:r>
+            <a:endParaRPr lang="zh-CN" altLang="en-US" sz="1200">
+              <a:latin typeface="Poppins" panose="00000500000000000000" pitchFamily="2" charset="0"/>
+              <a:cs typeface="Poppins" panose="00000500000000000000" pitchFamily="2" charset="0"/>
+            </a:endParaRPr>
+          </a:p>
+        </p:txBody>
+      </p:sp>
+      <p:sp>
+        <p:nvSpPr>
+          <p:cNvPr id="4" name="Rectangle 3">
+            <a:extLst>
+              <a:ext uri="{FF2B5EF4-FFF2-40B4-BE49-F238E27FC236}">
+                <a16:creationId xmlns:a16="http://schemas.microsoft.com/office/drawing/2014/main" id="{666A81E6-0BFB-6220-4559-C23808FBFBF6}"/>
+              </a:ext>
+            </a:extLst>
+          </p:cNvPr>
+          <p:cNvSpPr/>
+          <p:nvPr/>
+        </p:nvSpPr>
+        <p:spPr>
+          <a:xfrm>
+            <a:off x="3757723" y="2489964"/>
+            <a:ext cx="3600000" cy="900000"/>
+          </a:xfrm>
+          <a:prstGeom prst="rect">
+            <a:avLst/>
+          </a:prstGeom>
+          <a:solidFill>
+            <a:srgbClr val="92D050"/>
+          </a:solidFill>
+          <a:ln>
+            <a:noFill/>
+          </a:ln>
+        </p:spPr>
+        <p:style>
+          <a:lnRef idx="2">
+            <a:schemeClr val="accent1">
+              <a:shade val="15000"/>
+            </a:schemeClr>
+          </a:lnRef>
+          <a:fillRef idx="1">
+            <a:schemeClr val="accent1"/>
+          </a:fillRef>
+          <a:effectRef idx="0">
+            <a:schemeClr val="accent1"/>
+          </a:effectRef>
+          <a:fontRef idx="minor">
+            <a:schemeClr val="lt1"/>
+          </a:fontRef>
+        </p:style>
+        <p:txBody>
+          <a:bodyPr rtlCol="0" anchor="t" anchorCtr="0"/>
+          <a:lstStyle/>
+          <a:p>
+            <a:r>
+              <a:rPr lang="en-US" altLang="zh-CN" sz="1200">
+                <a:latin typeface="Poppins" panose="00000500000000000000" pitchFamily="2" charset="0"/>
+                <a:cs typeface="Poppins" panose="00000500000000000000" pitchFamily="2" charset="0"/>
+              </a:rPr>
+              <a:t>end</a:t>
+            </a:r>
+            <a:endParaRPr lang="zh-CN" altLang="en-US" sz="1200">
+              <a:latin typeface="Poppins" panose="00000500000000000000" pitchFamily="2" charset="0"/>
+              <a:cs typeface="Poppins" panose="00000500000000000000" pitchFamily="2" charset="0"/>
+            </a:endParaRPr>
+          </a:p>
+        </p:txBody>
+      </p:sp>
+      <p:sp>
+        <p:nvSpPr>
+          <p:cNvPr id="5" name="文本框 4">
+            <a:extLst>
+              <a:ext uri="{FF2B5EF4-FFF2-40B4-BE49-F238E27FC236}">
+                <a16:creationId xmlns:a16="http://schemas.microsoft.com/office/drawing/2014/main" id="{C5322448-C665-DAC9-E5D7-05E311A5FE63}"/>
+              </a:ext>
+            </a:extLst>
+          </p:cNvPr>
+          <p:cNvSpPr txBox="1"/>
+          <p:nvPr/>
+        </p:nvSpPr>
+        <p:spPr>
+          <a:xfrm>
+            <a:off x="4991100" y="2079998"/>
+            <a:ext cx="1592103" cy="307777"/>
+          </a:xfrm>
+          <a:prstGeom prst="rect">
+            <a:avLst/>
+          </a:prstGeom>
+          <a:noFill/>
+        </p:spPr>
+        <p:txBody>
+          <a:bodyPr wrap="none" rtlCol="0">
+            <a:spAutoFit/>
+          </a:bodyPr>
+          <a:lstStyle/>
+          <a:p>
+            <a:r>
+              <a:rPr lang="en-US" altLang="zh-CN" sz="1400">
+                <a:latin typeface="Poppins" panose="00000500000000000000" pitchFamily="2" charset="0"/>
+                <a:cs typeface="Poppins" panose="00000500000000000000" pitchFamily="2" charset="0"/>
+              </a:rPr>
+              <a:t>Animation Zone</a:t>
+            </a:r>
+            <a:endParaRPr lang="zh-CN" altLang="en-US" sz="1400">
+              <a:latin typeface="Poppins" panose="00000500000000000000" pitchFamily="2" charset="0"/>
+              <a:cs typeface="Poppins" panose="00000500000000000000" pitchFamily="2" charset="0"/>
+            </a:endParaRPr>
+          </a:p>
+        </p:txBody>
+      </p:sp>
+      <p:cxnSp>
+        <p:nvCxnSpPr>
+          <p:cNvPr id="7" name="Straight Arrow Connector 5">
+            <a:extLst>
+              <a:ext uri="{FF2B5EF4-FFF2-40B4-BE49-F238E27FC236}">
+                <a16:creationId xmlns:a16="http://schemas.microsoft.com/office/drawing/2014/main" id="{B1CE2327-E1DE-7108-E3FA-E277EA72E1E7}"/>
+              </a:ext>
+            </a:extLst>
+          </p:cNvPr>
+          <p:cNvCxnSpPr>
+            <a:cxnSpLocks/>
+          </p:cNvCxnSpPr>
+          <p:nvPr/>
+        </p:nvCxnSpPr>
+        <p:spPr>
+          <a:xfrm>
+            <a:off x="4297473" y="1589964"/>
+            <a:ext cx="0" cy="360000"/>
+          </a:xfrm>
+          <a:prstGeom prst="straightConnector1">
+            <a:avLst/>
+          </a:prstGeom>
+          <a:ln>
+            <a:solidFill>
+              <a:schemeClr val="bg1"/>
+            </a:solidFill>
+            <a:tailEnd type="triangle"/>
+          </a:ln>
+        </p:spPr>
+        <p:style>
+          <a:lnRef idx="1">
+            <a:schemeClr val="accent1"/>
+          </a:lnRef>
+          <a:fillRef idx="0">
+            <a:schemeClr val="accent1"/>
+          </a:fillRef>
+          <a:effectRef idx="0">
+            <a:schemeClr val="accent1"/>
+          </a:effectRef>
+          <a:fontRef idx="minor">
+            <a:schemeClr val="tx1"/>
+          </a:fontRef>
+        </p:style>
+      </p:cxnSp>
+      <p:cxnSp>
+        <p:nvCxnSpPr>
+          <p:cNvPr id="9" name="Straight Arrow Connector 7">
+            <a:extLst>
+              <a:ext uri="{FF2B5EF4-FFF2-40B4-BE49-F238E27FC236}">
+                <a16:creationId xmlns:a16="http://schemas.microsoft.com/office/drawing/2014/main" id="{BBC8D8F5-BCF1-9AAE-79FA-15942B01F4CE}"/>
+              </a:ext>
+            </a:extLst>
+          </p:cNvPr>
+          <p:cNvCxnSpPr>
+            <a:cxnSpLocks/>
+          </p:cNvCxnSpPr>
+          <p:nvPr/>
+        </p:nvCxnSpPr>
+        <p:spPr>
+          <a:xfrm flipV="1">
+            <a:off x="4297473" y="2489964"/>
+            <a:ext cx="0" cy="900000"/>
+          </a:xfrm>
+          <a:prstGeom prst="straightConnector1">
+            <a:avLst/>
+          </a:prstGeom>
+          <a:ln>
+            <a:solidFill>
+              <a:schemeClr val="bg1"/>
+            </a:solidFill>
+            <a:tailEnd type="triangle"/>
+          </a:ln>
+        </p:spPr>
+        <p:style>
+          <a:lnRef idx="1">
+            <a:schemeClr val="accent1"/>
+          </a:lnRef>
+          <a:fillRef idx="0">
+            <a:schemeClr val="accent1"/>
+          </a:fillRef>
+          <a:effectRef idx="0">
+            <a:schemeClr val="accent1"/>
+          </a:effectRef>
+          <a:fontRef idx="minor">
+            <a:schemeClr val="tx1"/>
+          </a:fontRef>
+        </p:style>
+      </p:cxnSp>
+      <p:sp>
+        <p:nvSpPr>
+          <p:cNvPr id="10" name="文本框 9">
+            <a:extLst>
+              <a:ext uri="{FF2B5EF4-FFF2-40B4-BE49-F238E27FC236}">
+                <a16:creationId xmlns:a16="http://schemas.microsoft.com/office/drawing/2014/main" id="{BA8678E7-DC4B-23B5-0230-727D59E575E5}"/>
+              </a:ext>
+            </a:extLst>
+          </p:cNvPr>
+          <p:cNvSpPr txBox="1"/>
+          <p:nvPr/>
+        </p:nvSpPr>
+        <p:spPr>
+          <a:xfrm>
+            <a:off x="4297473" y="1672965"/>
+            <a:ext cx="425116" cy="276999"/>
+          </a:xfrm>
+          <a:prstGeom prst="rect">
+            <a:avLst/>
+          </a:prstGeom>
+          <a:noFill/>
+        </p:spPr>
+        <p:txBody>
+          <a:bodyPr wrap="none" rtlCol="0">
+            <a:spAutoFit/>
+          </a:bodyPr>
+          <a:lstStyle/>
+          <a:p>
+            <a:r>
+              <a:rPr lang="en-US" altLang="zh-CN" sz="1200">
+                <a:solidFill>
+                  <a:schemeClr val="bg1"/>
+                </a:solidFill>
+                <a:latin typeface="Poppins" panose="00000500000000000000" pitchFamily="2" charset="0"/>
+                <a:cs typeface="Poppins" panose="00000500000000000000" pitchFamily="2" charset="0"/>
+              </a:rPr>
+              <a:t>10%</a:t>
+            </a:r>
+            <a:endParaRPr lang="zh-CN" altLang="en-US" sz="1200">
+              <a:solidFill>
+                <a:schemeClr val="bg1"/>
+              </a:solidFill>
+              <a:latin typeface="Poppins" panose="00000500000000000000" pitchFamily="2" charset="0"/>
+              <a:cs typeface="Poppins" panose="00000500000000000000" pitchFamily="2" charset="0"/>
+            </a:endParaRPr>
+          </a:p>
+        </p:txBody>
+      </p:sp>
+      <p:sp>
+        <p:nvSpPr>
+          <p:cNvPr id="11" name="文本框 10">
+            <a:extLst>
+              <a:ext uri="{FF2B5EF4-FFF2-40B4-BE49-F238E27FC236}">
+                <a16:creationId xmlns:a16="http://schemas.microsoft.com/office/drawing/2014/main" id="{08FFD686-6AFA-CC8B-5C86-8FC3FE0C7291}"/>
+              </a:ext>
+            </a:extLst>
+          </p:cNvPr>
+          <p:cNvSpPr txBox="1"/>
+          <p:nvPr/>
+        </p:nvSpPr>
+        <p:spPr>
+          <a:xfrm>
+            <a:off x="4297473" y="2489964"/>
+            <a:ext cx="474810" cy="276999"/>
+          </a:xfrm>
+          <a:prstGeom prst="rect">
+            <a:avLst/>
+          </a:prstGeom>
+          <a:noFill/>
+        </p:spPr>
+        <p:txBody>
+          <a:bodyPr wrap="none" rtlCol="0">
+            <a:spAutoFit/>
+          </a:bodyPr>
+          <a:lstStyle/>
+          <a:p>
+            <a:r>
+              <a:rPr lang="en-US" altLang="zh-CN" sz="1200">
+                <a:solidFill>
+                  <a:schemeClr val="bg1"/>
+                </a:solidFill>
+                <a:latin typeface="Poppins" panose="00000500000000000000" pitchFamily="2" charset="0"/>
+                <a:cs typeface="Poppins" panose="00000500000000000000" pitchFamily="2" charset="0"/>
+              </a:rPr>
+              <a:t>50%</a:t>
+            </a:r>
+            <a:endParaRPr lang="zh-CN" altLang="en-US" sz="1200">
+              <a:solidFill>
+                <a:schemeClr val="bg1"/>
+              </a:solidFill>
+              <a:latin typeface="Poppins" panose="00000500000000000000" pitchFamily="2" charset="0"/>
+              <a:cs typeface="Poppins" panose="00000500000000000000" pitchFamily="2" charset="0"/>
+            </a:endParaRPr>
+          </a:p>
+        </p:txBody>
+      </p:sp>
+    </p:spTree>
+    <p:extLst>
+      <p:ext uri="{BB962C8B-B14F-4D97-AF65-F5344CB8AC3E}">
+        <p14:creationId xmlns:p14="http://schemas.microsoft.com/office/powerpoint/2010/main" val="3803754908"/>
       </p:ext>
     </p:extLst>
   </p:cSld>
@@ -17534,452 +16250,6 @@
         <p:cNvPr id="1" name="">
           <a:extLst>
             <a:ext uri="{FF2B5EF4-FFF2-40B4-BE49-F238E27FC236}">
-              <a16:creationId xmlns:a16="http://schemas.microsoft.com/office/drawing/2014/main" id="{4B6AC346-4E87-BA38-8EDB-AEACB42C1BE9}"/>
-            </a:ext>
-          </a:extLst>
-        </p:cNvPr>
-        <p:cNvGrpSpPr/>
-        <p:nvPr/>
-      </p:nvGrpSpPr>
-      <p:grpSpPr>
-        <a:xfrm>
-          <a:off x="0" y="0"/>
-          <a:ext cx="0" cy="0"/>
-          <a:chOff x="0" y="0"/>
-          <a:chExt cx="0" cy="0"/>
-        </a:xfrm>
-      </p:grpSpPr>
-      <p:sp>
-        <p:nvSpPr>
-          <p:cNvPr id="2" name="Rectangle 1">
-            <a:extLst>
-              <a:ext uri="{FF2B5EF4-FFF2-40B4-BE49-F238E27FC236}">
-                <a16:creationId xmlns:a16="http://schemas.microsoft.com/office/drawing/2014/main" id="{76D07D2F-5702-0123-4A31-FE31E2DEE13E}"/>
-              </a:ext>
-            </a:extLst>
-          </p:cNvPr>
-          <p:cNvSpPr/>
-          <p:nvPr/>
-        </p:nvSpPr>
-        <p:spPr>
-          <a:xfrm>
-            <a:off x="3757723" y="1589964"/>
-            <a:ext cx="3600000" cy="1800000"/>
-          </a:xfrm>
-          <a:prstGeom prst="rect">
-            <a:avLst/>
-          </a:prstGeom>
-          <a:solidFill>
-            <a:schemeClr val="bg1">
-              <a:lumMod val="95000"/>
-            </a:schemeClr>
-          </a:solidFill>
-          <a:ln>
-            <a:noFill/>
-          </a:ln>
-        </p:spPr>
-        <p:style>
-          <a:lnRef idx="2">
-            <a:schemeClr val="accent1">
-              <a:shade val="15000"/>
-            </a:schemeClr>
-          </a:lnRef>
-          <a:fillRef idx="1">
-            <a:schemeClr val="accent1"/>
-          </a:fillRef>
-          <a:effectRef idx="0">
-            <a:schemeClr val="accent1"/>
-          </a:effectRef>
-          <a:fontRef idx="minor">
-            <a:schemeClr val="lt1"/>
-          </a:fontRef>
-        </p:style>
-        <p:txBody>
-          <a:bodyPr rtlCol="0" anchor="ctr"/>
-          <a:lstStyle/>
-          <a:p>
-            <a:pPr algn="ctr"/>
-            <a:endParaRPr lang="zh-CN" altLang="en-US" sz="1200">
-              <a:solidFill>
-                <a:schemeClr val="accent6">
-                  <a:lumMod val="75000"/>
-                </a:schemeClr>
-              </a:solidFill>
-              <a:latin typeface="Poppins" panose="00000500000000000000" pitchFamily="2" charset="0"/>
-              <a:cs typeface="Poppins" panose="00000500000000000000" pitchFamily="2" charset="0"/>
-            </a:endParaRPr>
-          </a:p>
-        </p:txBody>
-      </p:sp>
-      <p:sp>
-        <p:nvSpPr>
-          <p:cNvPr id="3" name="Rectangle 2">
-            <a:extLst>
-              <a:ext uri="{FF2B5EF4-FFF2-40B4-BE49-F238E27FC236}">
-                <a16:creationId xmlns:a16="http://schemas.microsoft.com/office/drawing/2014/main" id="{8ED7BA39-5A4D-7118-2793-ED308937A067}"/>
-              </a:ext>
-            </a:extLst>
-          </p:cNvPr>
-          <p:cNvSpPr/>
-          <p:nvPr/>
-        </p:nvSpPr>
-        <p:spPr>
-          <a:xfrm>
-            <a:off x="3757723" y="1589964"/>
-            <a:ext cx="3600000" cy="360000"/>
-          </a:xfrm>
-          <a:prstGeom prst="rect">
-            <a:avLst/>
-          </a:prstGeom>
-          <a:solidFill>
-            <a:srgbClr val="92D050"/>
-          </a:solidFill>
-          <a:ln>
-            <a:noFill/>
-          </a:ln>
-        </p:spPr>
-        <p:style>
-          <a:lnRef idx="2">
-            <a:schemeClr val="accent1">
-              <a:shade val="15000"/>
-            </a:schemeClr>
-          </a:lnRef>
-          <a:fillRef idx="1">
-            <a:schemeClr val="accent1"/>
-          </a:fillRef>
-          <a:effectRef idx="0">
-            <a:schemeClr val="accent1"/>
-          </a:effectRef>
-          <a:fontRef idx="minor">
-            <a:schemeClr val="lt1"/>
-          </a:fontRef>
-        </p:style>
-        <p:txBody>
-          <a:bodyPr rtlCol="0" anchor="b" anchorCtr="0"/>
-          <a:lstStyle/>
-          <a:p>
-            <a:r>
-              <a:rPr lang="en-US" altLang="zh-CN" sz="1200">
-                <a:latin typeface="Poppins" panose="00000500000000000000" pitchFamily="2" charset="0"/>
-                <a:cs typeface="Poppins" panose="00000500000000000000" pitchFamily="2" charset="0"/>
-              </a:rPr>
-              <a:t>start</a:t>
-            </a:r>
-            <a:endParaRPr lang="zh-CN" altLang="en-US" sz="1200">
-              <a:latin typeface="Poppins" panose="00000500000000000000" pitchFamily="2" charset="0"/>
-              <a:cs typeface="Poppins" panose="00000500000000000000" pitchFamily="2" charset="0"/>
-            </a:endParaRPr>
-          </a:p>
-        </p:txBody>
-      </p:sp>
-      <p:sp>
-        <p:nvSpPr>
-          <p:cNvPr id="4" name="Rectangle 3">
-            <a:extLst>
-              <a:ext uri="{FF2B5EF4-FFF2-40B4-BE49-F238E27FC236}">
-                <a16:creationId xmlns:a16="http://schemas.microsoft.com/office/drawing/2014/main" id="{666A81E6-0BFB-6220-4559-C23808FBFBF6}"/>
-              </a:ext>
-            </a:extLst>
-          </p:cNvPr>
-          <p:cNvSpPr/>
-          <p:nvPr/>
-        </p:nvSpPr>
-        <p:spPr>
-          <a:xfrm>
-            <a:off x="3757723" y="2489964"/>
-            <a:ext cx="3600000" cy="900000"/>
-          </a:xfrm>
-          <a:prstGeom prst="rect">
-            <a:avLst/>
-          </a:prstGeom>
-          <a:solidFill>
-            <a:srgbClr val="92D050"/>
-          </a:solidFill>
-          <a:ln>
-            <a:noFill/>
-          </a:ln>
-        </p:spPr>
-        <p:style>
-          <a:lnRef idx="2">
-            <a:schemeClr val="accent1">
-              <a:shade val="15000"/>
-            </a:schemeClr>
-          </a:lnRef>
-          <a:fillRef idx="1">
-            <a:schemeClr val="accent1"/>
-          </a:fillRef>
-          <a:effectRef idx="0">
-            <a:schemeClr val="accent1"/>
-          </a:effectRef>
-          <a:fontRef idx="minor">
-            <a:schemeClr val="lt1"/>
-          </a:fontRef>
-        </p:style>
-        <p:txBody>
-          <a:bodyPr rtlCol="0" anchor="t" anchorCtr="0"/>
-          <a:lstStyle/>
-          <a:p>
-            <a:r>
-              <a:rPr lang="en-US" altLang="zh-CN" sz="1200">
-                <a:latin typeface="Poppins" panose="00000500000000000000" pitchFamily="2" charset="0"/>
-                <a:cs typeface="Poppins" panose="00000500000000000000" pitchFamily="2" charset="0"/>
-              </a:rPr>
-              <a:t>end</a:t>
-            </a:r>
-            <a:endParaRPr lang="zh-CN" altLang="en-US" sz="1200">
-              <a:latin typeface="Poppins" panose="00000500000000000000" pitchFamily="2" charset="0"/>
-              <a:cs typeface="Poppins" panose="00000500000000000000" pitchFamily="2" charset="0"/>
-            </a:endParaRPr>
-          </a:p>
-        </p:txBody>
-      </p:sp>
-      <p:sp>
-        <p:nvSpPr>
-          <p:cNvPr id="5" name="文本框 4">
-            <a:extLst>
-              <a:ext uri="{FF2B5EF4-FFF2-40B4-BE49-F238E27FC236}">
-                <a16:creationId xmlns:a16="http://schemas.microsoft.com/office/drawing/2014/main" id="{C5322448-C665-DAC9-E5D7-05E311A5FE63}"/>
-              </a:ext>
-            </a:extLst>
-          </p:cNvPr>
-          <p:cNvSpPr txBox="1"/>
-          <p:nvPr/>
-        </p:nvSpPr>
-        <p:spPr>
-          <a:xfrm>
-            <a:off x="4991100" y="2079998"/>
-            <a:ext cx="1592103" cy="307777"/>
-          </a:xfrm>
-          <a:prstGeom prst="rect">
-            <a:avLst/>
-          </a:prstGeom>
-          <a:noFill/>
-        </p:spPr>
-        <p:txBody>
-          <a:bodyPr wrap="none" rtlCol="0">
-            <a:spAutoFit/>
-          </a:bodyPr>
-          <a:lstStyle/>
-          <a:p>
-            <a:r>
-              <a:rPr lang="en-US" altLang="zh-CN" sz="1400">
-                <a:latin typeface="Poppins" panose="00000500000000000000" pitchFamily="2" charset="0"/>
-                <a:cs typeface="Poppins" panose="00000500000000000000" pitchFamily="2" charset="0"/>
-              </a:rPr>
-              <a:t>Animation Zone</a:t>
-            </a:r>
-            <a:endParaRPr lang="zh-CN" altLang="en-US" sz="1400">
-              <a:latin typeface="Poppins" panose="00000500000000000000" pitchFamily="2" charset="0"/>
-              <a:cs typeface="Poppins" panose="00000500000000000000" pitchFamily="2" charset="0"/>
-            </a:endParaRPr>
-          </a:p>
-        </p:txBody>
-      </p:sp>
-      <p:cxnSp>
-        <p:nvCxnSpPr>
-          <p:cNvPr id="7" name="Straight Arrow Connector 5">
-            <a:extLst>
-              <a:ext uri="{FF2B5EF4-FFF2-40B4-BE49-F238E27FC236}">
-                <a16:creationId xmlns:a16="http://schemas.microsoft.com/office/drawing/2014/main" id="{B1CE2327-E1DE-7108-E3FA-E277EA72E1E7}"/>
-              </a:ext>
-            </a:extLst>
-          </p:cNvPr>
-          <p:cNvCxnSpPr>
-            <a:cxnSpLocks/>
-          </p:cNvCxnSpPr>
-          <p:nvPr/>
-        </p:nvCxnSpPr>
-        <p:spPr>
-          <a:xfrm>
-            <a:off x="4297473" y="1589964"/>
-            <a:ext cx="0" cy="360000"/>
-          </a:xfrm>
-          <a:prstGeom prst="straightConnector1">
-            <a:avLst/>
-          </a:prstGeom>
-          <a:ln>
-            <a:solidFill>
-              <a:schemeClr val="bg1"/>
-            </a:solidFill>
-            <a:tailEnd type="triangle"/>
-          </a:ln>
-        </p:spPr>
-        <p:style>
-          <a:lnRef idx="1">
-            <a:schemeClr val="accent1"/>
-          </a:lnRef>
-          <a:fillRef idx="0">
-            <a:schemeClr val="accent1"/>
-          </a:fillRef>
-          <a:effectRef idx="0">
-            <a:schemeClr val="accent1"/>
-          </a:effectRef>
-          <a:fontRef idx="minor">
-            <a:schemeClr val="tx1"/>
-          </a:fontRef>
-        </p:style>
-      </p:cxnSp>
-      <p:cxnSp>
-        <p:nvCxnSpPr>
-          <p:cNvPr id="9" name="Straight Arrow Connector 7">
-            <a:extLst>
-              <a:ext uri="{FF2B5EF4-FFF2-40B4-BE49-F238E27FC236}">
-                <a16:creationId xmlns:a16="http://schemas.microsoft.com/office/drawing/2014/main" id="{BBC8D8F5-BCF1-9AAE-79FA-15942B01F4CE}"/>
-              </a:ext>
-            </a:extLst>
-          </p:cNvPr>
-          <p:cNvCxnSpPr>
-            <a:cxnSpLocks/>
-          </p:cNvCxnSpPr>
-          <p:nvPr/>
-        </p:nvCxnSpPr>
-        <p:spPr>
-          <a:xfrm flipV="1">
-            <a:off x="4297473" y="2489964"/>
-            <a:ext cx="0" cy="900000"/>
-          </a:xfrm>
-          <a:prstGeom prst="straightConnector1">
-            <a:avLst/>
-          </a:prstGeom>
-          <a:ln>
-            <a:solidFill>
-              <a:schemeClr val="bg1"/>
-            </a:solidFill>
-            <a:tailEnd type="triangle"/>
-          </a:ln>
-        </p:spPr>
-        <p:style>
-          <a:lnRef idx="1">
-            <a:schemeClr val="accent1"/>
-          </a:lnRef>
-          <a:fillRef idx="0">
-            <a:schemeClr val="accent1"/>
-          </a:fillRef>
-          <a:effectRef idx="0">
-            <a:schemeClr val="accent1"/>
-          </a:effectRef>
-          <a:fontRef idx="minor">
-            <a:schemeClr val="tx1"/>
-          </a:fontRef>
-        </p:style>
-      </p:cxnSp>
-      <p:sp>
-        <p:nvSpPr>
-          <p:cNvPr id="10" name="文本框 9">
-            <a:extLst>
-              <a:ext uri="{FF2B5EF4-FFF2-40B4-BE49-F238E27FC236}">
-                <a16:creationId xmlns:a16="http://schemas.microsoft.com/office/drawing/2014/main" id="{BA8678E7-DC4B-23B5-0230-727D59E575E5}"/>
-              </a:ext>
-            </a:extLst>
-          </p:cNvPr>
-          <p:cNvSpPr txBox="1"/>
-          <p:nvPr/>
-        </p:nvSpPr>
-        <p:spPr>
-          <a:xfrm>
-            <a:off x="4297473" y="1672965"/>
-            <a:ext cx="425116" cy="276999"/>
-          </a:xfrm>
-          <a:prstGeom prst="rect">
-            <a:avLst/>
-          </a:prstGeom>
-          <a:noFill/>
-        </p:spPr>
-        <p:txBody>
-          <a:bodyPr wrap="none" rtlCol="0">
-            <a:spAutoFit/>
-          </a:bodyPr>
-          <a:lstStyle/>
-          <a:p>
-            <a:r>
-              <a:rPr lang="en-US" altLang="zh-CN" sz="1200">
-                <a:solidFill>
-                  <a:schemeClr val="bg1"/>
-                </a:solidFill>
-                <a:latin typeface="Poppins" panose="00000500000000000000" pitchFamily="2" charset="0"/>
-                <a:cs typeface="Poppins" panose="00000500000000000000" pitchFamily="2" charset="0"/>
-              </a:rPr>
-              <a:t>10%</a:t>
-            </a:r>
-            <a:endParaRPr lang="zh-CN" altLang="en-US" sz="1200">
-              <a:solidFill>
-                <a:schemeClr val="bg1"/>
-              </a:solidFill>
-              <a:latin typeface="Poppins" panose="00000500000000000000" pitchFamily="2" charset="0"/>
-              <a:cs typeface="Poppins" panose="00000500000000000000" pitchFamily="2" charset="0"/>
-            </a:endParaRPr>
-          </a:p>
-        </p:txBody>
-      </p:sp>
-      <p:sp>
-        <p:nvSpPr>
-          <p:cNvPr id="11" name="文本框 10">
-            <a:extLst>
-              <a:ext uri="{FF2B5EF4-FFF2-40B4-BE49-F238E27FC236}">
-                <a16:creationId xmlns:a16="http://schemas.microsoft.com/office/drawing/2014/main" id="{08FFD686-6AFA-CC8B-5C86-8FC3FE0C7291}"/>
-              </a:ext>
-            </a:extLst>
-          </p:cNvPr>
-          <p:cNvSpPr txBox="1"/>
-          <p:nvPr/>
-        </p:nvSpPr>
-        <p:spPr>
-          <a:xfrm>
-            <a:off x="4297473" y="2489964"/>
-            <a:ext cx="474810" cy="276999"/>
-          </a:xfrm>
-          <a:prstGeom prst="rect">
-            <a:avLst/>
-          </a:prstGeom>
-          <a:noFill/>
-        </p:spPr>
-        <p:txBody>
-          <a:bodyPr wrap="none" rtlCol="0">
-            <a:spAutoFit/>
-          </a:bodyPr>
-          <a:lstStyle/>
-          <a:p>
-            <a:r>
-              <a:rPr lang="en-US" altLang="zh-CN" sz="1200">
-                <a:solidFill>
-                  <a:schemeClr val="bg1"/>
-                </a:solidFill>
-                <a:latin typeface="Poppins" panose="00000500000000000000" pitchFamily="2" charset="0"/>
-                <a:cs typeface="Poppins" panose="00000500000000000000" pitchFamily="2" charset="0"/>
-              </a:rPr>
-              <a:t>50%</a:t>
-            </a:r>
-            <a:endParaRPr lang="zh-CN" altLang="en-US" sz="1200">
-              <a:solidFill>
-                <a:schemeClr val="bg1"/>
-              </a:solidFill>
-              <a:latin typeface="Poppins" panose="00000500000000000000" pitchFamily="2" charset="0"/>
-              <a:cs typeface="Poppins" panose="00000500000000000000" pitchFamily="2" charset="0"/>
-            </a:endParaRPr>
-          </a:p>
-        </p:txBody>
-      </p:sp>
-    </p:spTree>
-    <p:extLst>
-      <p:ext uri="{BB962C8B-B14F-4D97-AF65-F5344CB8AC3E}">
-        <p14:creationId xmlns:p14="http://schemas.microsoft.com/office/powerpoint/2010/main" val="3803754908"/>
-      </p:ext>
-    </p:extLst>
-  </p:cSld>
-  <p:clrMapOvr>
-    <a:masterClrMapping/>
-  </p:clrMapOvr>
-</p:sld>
-</file>
-
-<file path=ppt/slides/slide21.xml><?xml version="1.0" encoding="utf-8"?>
-<p:sld xmlns:a="http://schemas.openxmlformats.org/drawingml/2006/main" xmlns:r="http://schemas.openxmlformats.org/officeDocument/2006/relationships" xmlns:p="http://schemas.openxmlformats.org/presentationml/2006/main">
-  <p:cSld>
-    <p:spTree>
-      <p:nvGrpSpPr>
-        <p:cNvPr id="1" name="">
-          <a:extLst>
-            <a:ext uri="{FF2B5EF4-FFF2-40B4-BE49-F238E27FC236}">
               <a16:creationId xmlns:a16="http://schemas.microsoft.com/office/drawing/2014/main" id="{70C4E89A-BF29-AF5A-ED21-08479844B4D3}"/>
             </a:ext>
           </a:extLst>
@@ -18418,7 +16688,7 @@
 </p:sld>
 </file>
 
-<file path=ppt/slides/slide22.xml><?xml version="1.0" encoding="utf-8"?>
+<file path=ppt/slides/slide21.xml><?xml version="1.0" encoding="utf-8"?>
 <p:sld xmlns:a="http://schemas.openxmlformats.org/drawingml/2006/main" xmlns:r="http://schemas.openxmlformats.org/officeDocument/2006/relationships" xmlns:p="http://schemas.openxmlformats.org/presentationml/2006/main">
   <p:cSld>
     <p:spTree>
@@ -18864,7 +17134,7 @@
 </p:sld>
 </file>
 
-<file path=ppt/slides/slide23.xml><?xml version="1.0" encoding="utf-8"?>
+<file path=ppt/slides/slide22.xml><?xml version="1.0" encoding="utf-8"?>
 <p:sld xmlns:a="http://schemas.openxmlformats.org/drawingml/2006/main" xmlns:r="http://schemas.openxmlformats.org/officeDocument/2006/relationships" xmlns:p="http://schemas.openxmlformats.org/presentationml/2006/main">
   <p:cSld>
     <p:spTree>
@@ -20107,7 +18377,7 @@
 </p:sld>
 </file>
 
-<file path=ppt/slides/slide24.xml><?xml version="1.0" encoding="utf-8"?>
+<file path=ppt/slides/slide23.xml><?xml version="1.0" encoding="utf-8"?>
 <p:sld xmlns:a="http://schemas.openxmlformats.org/drawingml/2006/main" xmlns:r="http://schemas.openxmlformats.org/officeDocument/2006/relationships" xmlns:p="http://schemas.openxmlformats.org/presentationml/2006/main">
   <p:cSld>
     <p:spTree>
@@ -21780,7 +20050,7 @@
 </p:sld>
 </file>
 
-<file path=ppt/slides/slide25.xml><?xml version="1.0" encoding="utf-8"?>
+<file path=ppt/slides/slide24.xml><?xml version="1.0" encoding="utf-8"?>
 <p:sld xmlns:a="http://schemas.openxmlformats.org/drawingml/2006/main" xmlns:r="http://schemas.openxmlformats.org/officeDocument/2006/relationships" xmlns:p="http://schemas.openxmlformats.org/presentationml/2006/main">
   <p:cSld>
     <p:spTree>
@@ -23032,7 +21302,7 @@
 </p:sld>
 </file>
 
-<file path=ppt/slides/slide26.xml><?xml version="1.0" encoding="utf-8"?>
+<file path=ppt/slides/slide25.xml><?xml version="1.0" encoding="utf-8"?>
 <p:sld xmlns:a="http://schemas.openxmlformats.org/drawingml/2006/main" xmlns:r="http://schemas.openxmlformats.org/officeDocument/2006/relationships" xmlns:p="http://schemas.openxmlformats.org/presentationml/2006/main">
   <p:cSld>
     <p:spTree>
@@ -24155,7 +22425,7 @@
 </p:sld>
 </file>
 
-<file path=ppt/slides/slide27.xml><?xml version="1.0" encoding="utf-8"?>
+<file path=ppt/slides/slide26.xml><?xml version="1.0" encoding="utf-8"?>
 <p:sld xmlns:a="http://schemas.openxmlformats.org/drawingml/2006/main" xmlns:r="http://schemas.openxmlformats.org/officeDocument/2006/relationships" xmlns:p="http://schemas.openxmlformats.org/presentationml/2006/main">
   <p:cSld>
     <p:spTree>
@@ -25518,7 +23788,7 @@
 </p:sld>
 </file>
 
-<file path=ppt/slides/slide28.xml><?xml version="1.0" encoding="utf-8"?>
+<file path=ppt/slides/slide27.xml><?xml version="1.0" encoding="utf-8"?>
 <p:sld xmlns:a="http://schemas.openxmlformats.org/drawingml/2006/main" xmlns:r="http://schemas.openxmlformats.org/officeDocument/2006/relationships" xmlns:p="http://schemas.openxmlformats.org/presentationml/2006/main">
   <p:cSld>
     <p:spTree>
@@ -26885,6 +25155,1203 @@
     <p:extLst>
       <p:ext uri="{BB962C8B-B14F-4D97-AF65-F5344CB8AC3E}">
         <p14:creationId xmlns:p14="http://schemas.microsoft.com/office/powerpoint/2010/main" val="2316391152"/>
+      </p:ext>
+    </p:extLst>
+  </p:cSld>
+  <p:clrMapOvr>
+    <a:masterClrMapping/>
+  </p:clrMapOvr>
+</p:sld>
+</file>
+
+<file path=ppt/slides/slide28.xml><?xml version="1.0" encoding="utf-8"?>
+<p:sld xmlns:a="http://schemas.openxmlformats.org/drawingml/2006/main" xmlns:r="http://schemas.openxmlformats.org/officeDocument/2006/relationships" xmlns:p="http://schemas.openxmlformats.org/presentationml/2006/main">
+  <p:cSld>
+    <p:spTree>
+      <p:nvGrpSpPr>
+        <p:cNvPr id="1" name=""/>
+        <p:cNvGrpSpPr/>
+        <p:nvPr/>
+      </p:nvGrpSpPr>
+      <p:grpSpPr>
+        <a:xfrm>
+          <a:off x="0" y="0"/>
+          <a:ext cx="0" cy="0"/>
+          <a:chOff x="0" y="0"/>
+          <a:chExt cx="0" cy="0"/>
+        </a:xfrm>
+      </p:grpSpPr>
+      <p:sp>
+        <p:nvSpPr>
+          <p:cNvPr id="2" name="矩形: 圆角 1">
+            <a:extLst>
+              <a:ext uri="{FF2B5EF4-FFF2-40B4-BE49-F238E27FC236}">
+                <a16:creationId xmlns:a16="http://schemas.microsoft.com/office/drawing/2014/main" id="{7CE4D4CF-0466-1DC3-08B4-9C28D4A64E27}"/>
+              </a:ext>
+            </a:extLst>
+          </p:cNvPr>
+          <p:cNvSpPr/>
+          <p:nvPr/>
+        </p:nvSpPr>
+        <p:spPr>
+          <a:xfrm>
+            <a:off x="2622449" y="3094613"/>
+            <a:ext cx="1440000" cy="360000"/>
+          </a:xfrm>
+          <a:prstGeom prst="roundRect">
+            <a:avLst/>
+          </a:prstGeom>
+          <a:solidFill>
+            <a:schemeClr val="tx1"/>
+          </a:solidFill>
+          <a:ln w="12700">
+            <a:noFill/>
+          </a:ln>
+        </p:spPr>
+        <p:style>
+          <a:lnRef idx="2">
+            <a:schemeClr val="accent1">
+              <a:shade val="15000"/>
+            </a:schemeClr>
+          </a:lnRef>
+          <a:fillRef idx="1">
+            <a:schemeClr val="accent1"/>
+          </a:fillRef>
+          <a:effectRef idx="0">
+            <a:schemeClr val="accent1"/>
+          </a:effectRef>
+          <a:fontRef idx="minor">
+            <a:schemeClr val="lt1"/>
+          </a:fontRef>
+        </p:style>
+        <p:txBody>
+          <a:bodyPr rtlCol="0" anchor="ctr"/>
+          <a:lstStyle/>
+          <a:p>
+            <a:pPr algn="ctr"/>
+            <a:r>
+              <a:rPr lang="en-US" altLang="zh-CN" sz="1200">
+                <a:latin typeface="Quicksand Light" panose="00000400000000000000" pitchFamily="2" charset="0"/>
+                <a:ea typeface="仿宋" panose="02010609060101010101" pitchFamily="49" charset="-122"/>
+              </a:rPr>
+              <a:t>&lt;scroll-view&gt;</a:t>
+            </a:r>
+            <a:endParaRPr lang="zh-CN" altLang="en-US" sz="1200">
+              <a:latin typeface="Quicksand Light" panose="00000400000000000000" pitchFamily="2" charset="0"/>
+              <a:ea typeface="仿宋" panose="02010609060101010101" pitchFamily="49" charset="-122"/>
+            </a:endParaRPr>
+          </a:p>
+        </p:txBody>
+      </p:sp>
+      <p:sp>
+        <p:nvSpPr>
+          <p:cNvPr id="3" name="矩形: 圆角 2">
+            <a:extLst>
+              <a:ext uri="{FF2B5EF4-FFF2-40B4-BE49-F238E27FC236}">
+                <a16:creationId xmlns:a16="http://schemas.microsoft.com/office/drawing/2014/main" id="{6EE8E41B-FB18-64FF-0539-7D9127F8FC67}"/>
+              </a:ext>
+            </a:extLst>
+          </p:cNvPr>
+          <p:cNvSpPr/>
+          <p:nvPr/>
+        </p:nvSpPr>
+        <p:spPr>
+          <a:xfrm>
+            <a:off x="5806701" y="2901283"/>
+            <a:ext cx="1620000" cy="360000"/>
+          </a:xfrm>
+          <a:prstGeom prst="roundRect">
+            <a:avLst/>
+          </a:prstGeom>
+          <a:noFill/>
+          <a:ln w="12700">
+            <a:solidFill>
+              <a:srgbClr val="EB3B5A"/>
+            </a:solidFill>
+            <a:prstDash val="dash"/>
+          </a:ln>
+        </p:spPr>
+        <p:style>
+          <a:lnRef idx="2">
+            <a:schemeClr val="accent1">
+              <a:shade val="15000"/>
+            </a:schemeClr>
+          </a:lnRef>
+          <a:fillRef idx="1">
+            <a:schemeClr val="accent1"/>
+          </a:fillRef>
+          <a:effectRef idx="0">
+            <a:schemeClr val="accent1"/>
+          </a:effectRef>
+          <a:fontRef idx="minor">
+            <a:schemeClr val="lt1"/>
+          </a:fontRef>
+        </p:style>
+        <p:txBody>
+          <a:bodyPr rtlCol="0" anchor="ctr"/>
+          <a:lstStyle/>
+          <a:p>
+            <a:pPr algn="ctr"/>
+            <a:r>
+              <a:rPr lang="zh-CN" altLang="en-US" sz="1200">
+                <a:solidFill>
+                  <a:sysClr val="windowText" lastClr="000000"/>
+                </a:solidFill>
+                <a:latin typeface="Quicksand Light" panose="00000400000000000000" pitchFamily="2" charset="0"/>
+                <a:ea typeface="仿宋" panose="02010609060101010101" pitchFamily="49" charset="-122"/>
+              </a:rPr>
+              <a:t>行内 </a:t>
+            </a:r>
+            <a:r>
+              <a:rPr lang="en-US" altLang="zh-CN" sz="1200">
+                <a:solidFill>
+                  <a:sysClr val="windowText" lastClr="000000"/>
+                </a:solidFill>
+                <a:latin typeface="Quicksand Light" panose="00000400000000000000" pitchFamily="2" charset="0"/>
+                <a:ea typeface="仿宋" panose="02010609060101010101" pitchFamily="49" charset="-122"/>
+              </a:rPr>
+              <a:t>inline</a:t>
+            </a:r>
+            <a:endParaRPr lang="zh-CN" altLang="en-US" sz="1200">
+              <a:solidFill>
+                <a:sysClr val="windowText" lastClr="000000"/>
+              </a:solidFill>
+              <a:latin typeface="Quicksand Light" panose="00000400000000000000" pitchFamily="2" charset="0"/>
+              <a:ea typeface="仿宋" panose="02010609060101010101" pitchFamily="49" charset="-122"/>
+            </a:endParaRPr>
+          </a:p>
+        </p:txBody>
+      </p:sp>
+      <p:sp>
+        <p:nvSpPr>
+          <p:cNvPr id="8" name="矩形: 圆角 7">
+            <a:extLst>
+              <a:ext uri="{FF2B5EF4-FFF2-40B4-BE49-F238E27FC236}">
+                <a16:creationId xmlns:a16="http://schemas.microsoft.com/office/drawing/2014/main" id="{06699B4A-F636-A7C1-FB1E-69E3110ACB30}"/>
+              </a:ext>
+            </a:extLst>
+          </p:cNvPr>
+          <p:cNvSpPr/>
+          <p:nvPr/>
+        </p:nvSpPr>
+        <p:spPr>
+          <a:xfrm>
+            <a:off x="4394575" y="4241749"/>
+            <a:ext cx="1080000" cy="360000"/>
+          </a:xfrm>
+          <a:prstGeom prst="roundRect">
+            <a:avLst/>
+          </a:prstGeom>
+          <a:solidFill>
+            <a:srgbClr val="3DC1D3"/>
+          </a:solidFill>
+          <a:ln w="12700">
+            <a:noFill/>
+          </a:ln>
+        </p:spPr>
+        <p:style>
+          <a:lnRef idx="2">
+            <a:schemeClr val="accent1">
+              <a:shade val="15000"/>
+            </a:schemeClr>
+          </a:lnRef>
+          <a:fillRef idx="1">
+            <a:schemeClr val="accent1"/>
+          </a:fillRef>
+          <a:effectRef idx="0">
+            <a:schemeClr val="accent1"/>
+          </a:effectRef>
+          <a:fontRef idx="minor">
+            <a:schemeClr val="lt1"/>
+          </a:fontRef>
+        </p:style>
+        <p:txBody>
+          <a:bodyPr rtlCol="0" anchor="ctr"/>
+          <a:lstStyle/>
+          <a:p>
+            <a:pPr algn="ctr"/>
+            <a:r>
+              <a:rPr lang="zh-CN" altLang="en-US" sz="1200">
+                <a:latin typeface="Quicksand Light" panose="00000400000000000000" pitchFamily="2" charset="0"/>
+                <a:ea typeface="仿宋" panose="02010609060101010101" pitchFamily="49" charset="-122"/>
+              </a:rPr>
+              <a:t>垂直滚动</a:t>
+            </a:r>
+          </a:p>
+        </p:txBody>
+      </p:sp>
+      <p:sp>
+        <p:nvSpPr>
+          <p:cNvPr id="9" name="矩形: 圆角 8">
+            <a:extLst>
+              <a:ext uri="{FF2B5EF4-FFF2-40B4-BE49-F238E27FC236}">
+                <a16:creationId xmlns:a16="http://schemas.microsoft.com/office/drawing/2014/main" id="{63EC0026-3C9E-C410-1B1D-25D54ACB2F10}"/>
+              </a:ext>
+            </a:extLst>
+          </p:cNvPr>
+          <p:cNvSpPr/>
+          <p:nvPr/>
+        </p:nvSpPr>
+        <p:spPr>
+          <a:xfrm>
+            <a:off x="4394575" y="3094613"/>
+            <a:ext cx="1080000" cy="360000"/>
+          </a:xfrm>
+          <a:prstGeom prst="roundRect">
+            <a:avLst/>
+          </a:prstGeom>
+          <a:solidFill>
+            <a:srgbClr val="EB3B5A"/>
+          </a:solidFill>
+          <a:ln w="12700">
+            <a:noFill/>
+          </a:ln>
+        </p:spPr>
+        <p:style>
+          <a:lnRef idx="2">
+            <a:schemeClr val="accent1">
+              <a:shade val="15000"/>
+            </a:schemeClr>
+          </a:lnRef>
+          <a:fillRef idx="1">
+            <a:schemeClr val="accent1"/>
+          </a:fillRef>
+          <a:effectRef idx="0">
+            <a:schemeClr val="accent1"/>
+          </a:effectRef>
+          <a:fontRef idx="minor">
+            <a:schemeClr val="lt1"/>
+          </a:fontRef>
+        </p:style>
+        <p:txBody>
+          <a:bodyPr rtlCol="0" anchor="ctr"/>
+          <a:lstStyle/>
+          <a:p>
+            <a:pPr algn="ctr"/>
+            <a:r>
+              <a:rPr lang="zh-CN" altLang="en-US" sz="1200" dirty="0">
+                <a:latin typeface="Quicksand Light" panose="00000400000000000000" pitchFamily="2" charset="0"/>
+                <a:ea typeface="仿宋" panose="02010609060101010101" pitchFamily="49" charset="-122"/>
+              </a:rPr>
+              <a:t>水平滚动</a:t>
+            </a:r>
+          </a:p>
+        </p:txBody>
+      </p:sp>
+      <p:cxnSp>
+        <p:nvCxnSpPr>
+          <p:cNvPr id="10" name="连接符: 曲线 9">
+            <a:extLst>
+              <a:ext uri="{FF2B5EF4-FFF2-40B4-BE49-F238E27FC236}">
+                <a16:creationId xmlns:a16="http://schemas.microsoft.com/office/drawing/2014/main" id="{89376DA1-2871-7B3F-3D7E-34DF204828CA}"/>
+              </a:ext>
+            </a:extLst>
+          </p:cNvPr>
+          <p:cNvCxnSpPr>
+            <a:cxnSpLocks/>
+            <a:stCxn id="9" idx="3"/>
+            <a:endCxn id="17" idx="1"/>
+          </p:cNvCxnSpPr>
+          <p:nvPr/>
+        </p:nvCxnSpPr>
+        <p:spPr>
+          <a:xfrm flipV="1">
+            <a:off x="5474575" y="2104829"/>
+            <a:ext cx="332126" cy="1169784"/>
+          </a:xfrm>
+          <a:prstGeom prst="curvedConnector3">
+            <a:avLst>
+              <a:gd name="adj1" fmla="val 50000"/>
+            </a:avLst>
+          </a:prstGeom>
+          <a:ln>
+            <a:solidFill>
+              <a:srgbClr val="EB3B5A"/>
+            </a:solidFill>
+          </a:ln>
+        </p:spPr>
+        <p:style>
+          <a:lnRef idx="1">
+            <a:schemeClr val="accent1"/>
+          </a:lnRef>
+          <a:fillRef idx="0">
+            <a:schemeClr val="accent1"/>
+          </a:fillRef>
+          <a:effectRef idx="0">
+            <a:schemeClr val="accent1"/>
+          </a:effectRef>
+          <a:fontRef idx="minor">
+            <a:schemeClr val="tx1"/>
+          </a:fontRef>
+        </p:style>
+      </p:cxnSp>
+      <p:cxnSp>
+        <p:nvCxnSpPr>
+          <p:cNvPr id="15" name="直接连接符 14">
+            <a:extLst>
+              <a:ext uri="{FF2B5EF4-FFF2-40B4-BE49-F238E27FC236}">
+                <a16:creationId xmlns:a16="http://schemas.microsoft.com/office/drawing/2014/main" id="{B3AF8529-84E5-3299-2E12-01B446E0607B}"/>
+              </a:ext>
+            </a:extLst>
+          </p:cNvPr>
+          <p:cNvCxnSpPr>
+            <a:cxnSpLocks/>
+            <a:stCxn id="2" idx="3"/>
+            <a:endCxn id="9" idx="1"/>
+          </p:cNvCxnSpPr>
+          <p:nvPr/>
+        </p:nvCxnSpPr>
+        <p:spPr>
+          <a:xfrm>
+            <a:off x="4062449" y="3274613"/>
+            <a:ext cx="332126" cy="0"/>
+          </a:xfrm>
+          <a:prstGeom prst="line">
+            <a:avLst/>
+          </a:prstGeom>
+          <a:ln>
+            <a:solidFill>
+              <a:srgbClr val="EB3B5A"/>
+            </a:solidFill>
+          </a:ln>
+        </p:spPr>
+        <p:style>
+          <a:lnRef idx="1">
+            <a:schemeClr val="accent1"/>
+          </a:lnRef>
+          <a:fillRef idx="0">
+            <a:schemeClr val="accent1"/>
+          </a:fillRef>
+          <a:effectRef idx="0">
+            <a:schemeClr val="accent1"/>
+          </a:effectRef>
+          <a:fontRef idx="minor">
+            <a:schemeClr val="tx1"/>
+          </a:fontRef>
+        </p:style>
+      </p:cxnSp>
+      <p:sp>
+        <p:nvSpPr>
+          <p:cNvPr id="16" name="矩形: 圆角 15">
+            <a:extLst>
+              <a:ext uri="{FF2B5EF4-FFF2-40B4-BE49-F238E27FC236}">
+                <a16:creationId xmlns:a16="http://schemas.microsoft.com/office/drawing/2014/main" id="{FA81A049-32C6-0464-CB2F-FE666FC0CCAF}"/>
+              </a:ext>
+            </a:extLst>
+          </p:cNvPr>
+          <p:cNvSpPr/>
+          <p:nvPr/>
+        </p:nvSpPr>
+        <p:spPr>
+          <a:xfrm>
+            <a:off x="5806701" y="2413056"/>
+            <a:ext cx="1620000" cy="360000"/>
+          </a:xfrm>
+          <a:prstGeom prst="roundRect">
+            <a:avLst/>
+          </a:prstGeom>
+          <a:noFill/>
+          <a:ln w="12700">
+            <a:solidFill>
+              <a:srgbClr val="EB3B5A"/>
+            </a:solidFill>
+          </a:ln>
+        </p:spPr>
+        <p:style>
+          <a:lnRef idx="2">
+            <a:schemeClr val="accent1">
+              <a:shade val="15000"/>
+            </a:schemeClr>
+          </a:lnRef>
+          <a:fillRef idx="1">
+            <a:schemeClr val="accent1"/>
+          </a:fillRef>
+          <a:effectRef idx="0">
+            <a:schemeClr val="accent1"/>
+          </a:effectRef>
+          <a:fontRef idx="minor">
+            <a:schemeClr val="lt1"/>
+          </a:fontRef>
+        </p:style>
+        <p:txBody>
+          <a:bodyPr rtlCol="0" anchor="ctr"/>
+          <a:lstStyle/>
+          <a:p>
+            <a:pPr algn="ctr"/>
+            <a:r>
+              <a:rPr lang="zh-CN" altLang="en-US" sz="1200">
+                <a:solidFill>
+                  <a:sysClr val="windowText" lastClr="000000"/>
+                </a:solidFill>
+                <a:latin typeface="Quicksand Light" panose="00000400000000000000" pitchFamily="2" charset="0"/>
+                <a:ea typeface="仿宋" panose="02010609060101010101" pitchFamily="49" charset="-122"/>
+              </a:rPr>
+              <a:t>容器 </a:t>
+            </a:r>
+            <a:r>
+              <a:rPr lang="en-US" altLang="zh-CN" sz="1200">
+                <a:solidFill>
+                  <a:sysClr val="windowText" lastClr="000000"/>
+                </a:solidFill>
+                <a:latin typeface="Quicksand Light" panose="00000400000000000000" pitchFamily="2" charset="0"/>
+                <a:ea typeface="仿宋" panose="02010609060101010101" pitchFamily="49" charset="-122"/>
+              </a:rPr>
+              <a:t>wrap</a:t>
+            </a:r>
+            <a:endParaRPr lang="zh-CN" altLang="en-US" sz="1200">
+              <a:solidFill>
+                <a:sysClr val="windowText" lastClr="000000"/>
+              </a:solidFill>
+              <a:latin typeface="Quicksand Light" panose="00000400000000000000" pitchFamily="2" charset="0"/>
+              <a:ea typeface="仿宋" panose="02010609060101010101" pitchFamily="49" charset="-122"/>
+            </a:endParaRPr>
+          </a:p>
+        </p:txBody>
+      </p:sp>
+      <p:sp>
+        <p:nvSpPr>
+          <p:cNvPr id="17" name="矩形: 圆角 16">
+            <a:extLst>
+              <a:ext uri="{FF2B5EF4-FFF2-40B4-BE49-F238E27FC236}">
+                <a16:creationId xmlns:a16="http://schemas.microsoft.com/office/drawing/2014/main" id="{DF07C0A6-7F4B-674A-E488-85EB77ABE14F}"/>
+              </a:ext>
+            </a:extLst>
+          </p:cNvPr>
+          <p:cNvSpPr/>
+          <p:nvPr/>
+        </p:nvSpPr>
+        <p:spPr>
+          <a:xfrm>
+            <a:off x="5806701" y="1924829"/>
+            <a:ext cx="1620000" cy="360000"/>
+          </a:xfrm>
+          <a:prstGeom prst="roundRect">
+            <a:avLst/>
+          </a:prstGeom>
+          <a:noFill/>
+          <a:ln w="12700">
+            <a:solidFill>
+              <a:srgbClr val="EB3B5A"/>
+            </a:solidFill>
+          </a:ln>
+        </p:spPr>
+        <p:style>
+          <a:lnRef idx="2">
+            <a:schemeClr val="accent1">
+              <a:shade val="15000"/>
+            </a:schemeClr>
+          </a:lnRef>
+          <a:fillRef idx="1">
+            <a:schemeClr val="accent1"/>
+          </a:fillRef>
+          <a:effectRef idx="0">
+            <a:schemeClr val="accent1"/>
+          </a:effectRef>
+          <a:fontRef idx="minor">
+            <a:schemeClr val="lt1"/>
+          </a:fontRef>
+        </p:style>
+        <p:txBody>
+          <a:bodyPr rtlCol="0" anchor="ctr"/>
+          <a:lstStyle/>
+          <a:p>
+            <a:pPr algn="ctr"/>
+            <a:r>
+              <a:rPr lang="en-US" altLang="zh-CN" sz="1200">
+                <a:solidFill>
+                  <a:sysClr val="windowText" lastClr="000000"/>
+                </a:solidFill>
+                <a:latin typeface="Quicksand Light" panose="00000400000000000000" pitchFamily="2" charset="0"/>
+                <a:ea typeface="仿宋" panose="02010609060101010101" pitchFamily="49" charset="-122"/>
+              </a:rPr>
+              <a:t>enable-flex</a:t>
+            </a:r>
+            <a:endParaRPr lang="zh-CN" altLang="en-US" sz="1200">
+              <a:solidFill>
+                <a:sysClr val="windowText" lastClr="000000"/>
+              </a:solidFill>
+              <a:latin typeface="Quicksand Light" panose="00000400000000000000" pitchFamily="2" charset="0"/>
+              <a:ea typeface="仿宋" panose="02010609060101010101" pitchFamily="49" charset="-122"/>
+            </a:endParaRPr>
+          </a:p>
+        </p:txBody>
+      </p:sp>
+      <p:sp>
+        <p:nvSpPr>
+          <p:cNvPr id="18" name="矩形: 圆角 17">
+            <a:extLst>
+              <a:ext uri="{FF2B5EF4-FFF2-40B4-BE49-F238E27FC236}">
+                <a16:creationId xmlns:a16="http://schemas.microsoft.com/office/drawing/2014/main" id="{79DE23DA-ADA0-B751-DD89-7669F999E79D}"/>
+              </a:ext>
+            </a:extLst>
+          </p:cNvPr>
+          <p:cNvSpPr/>
+          <p:nvPr/>
+        </p:nvSpPr>
+        <p:spPr>
+          <a:xfrm>
+            <a:off x="5806701" y="3389510"/>
+            <a:ext cx="1620000" cy="360000"/>
+          </a:xfrm>
+          <a:prstGeom prst="roundRect">
+            <a:avLst/>
+          </a:prstGeom>
+          <a:noFill/>
+          <a:ln w="12700">
+            <a:solidFill>
+              <a:srgbClr val="EB3B5A"/>
+            </a:solidFill>
+            <a:prstDash val="dash"/>
+          </a:ln>
+        </p:spPr>
+        <p:style>
+          <a:lnRef idx="2">
+            <a:schemeClr val="accent1">
+              <a:shade val="15000"/>
+            </a:schemeClr>
+          </a:lnRef>
+          <a:fillRef idx="1">
+            <a:schemeClr val="accent1"/>
+          </a:fillRef>
+          <a:effectRef idx="0">
+            <a:schemeClr val="accent1"/>
+          </a:effectRef>
+          <a:fontRef idx="minor">
+            <a:schemeClr val="lt1"/>
+          </a:fontRef>
+        </p:style>
+        <p:txBody>
+          <a:bodyPr rtlCol="0" anchor="ctr"/>
+          <a:lstStyle/>
+          <a:p>
+            <a:pPr algn="ctr"/>
+            <a:r>
+              <a:rPr lang="zh-CN" altLang="en-US" sz="1200">
+                <a:solidFill>
+                  <a:sysClr val="windowText" lastClr="000000"/>
+                </a:solidFill>
+                <a:latin typeface="Quicksand Light" panose="00000400000000000000" pitchFamily="2" charset="0"/>
+                <a:ea typeface="仿宋" panose="02010609060101010101" pitchFamily="49" charset="-122"/>
+              </a:rPr>
+              <a:t>行内块 </a:t>
+            </a:r>
+            <a:r>
+              <a:rPr lang="en-US" altLang="zh-CN" sz="1200">
+                <a:solidFill>
+                  <a:sysClr val="windowText" lastClr="000000"/>
+                </a:solidFill>
+                <a:latin typeface="Quicksand Light" panose="00000400000000000000" pitchFamily="2" charset="0"/>
+                <a:ea typeface="仿宋" panose="02010609060101010101" pitchFamily="49" charset="-122"/>
+              </a:rPr>
+              <a:t>inline-block</a:t>
+            </a:r>
+            <a:endParaRPr lang="zh-CN" altLang="en-US" sz="1200">
+              <a:solidFill>
+                <a:sysClr val="windowText" lastClr="000000"/>
+              </a:solidFill>
+              <a:latin typeface="Quicksand Light" panose="00000400000000000000" pitchFamily="2" charset="0"/>
+              <a:ea typeface="仿宋" panose="02010609060101010101" pitchFamily="49" charset="-122"/>
+            </a:endParaRPr>
+          </a:p>
+        </p:txBody>
+      </p:sp>
+      <p:sp>
+        <p:nvSpPr>
+          <p:cNvPr id="19" name="矩形: 圆角 18">
+            <a:extLst>
+              <a:ext uri="{FF2B5EF4-FFF2-40B4-BE49-F238E27FC236}">
+                <a16:creationId xmlns:a16="http://schemas.microsoft.com/office/drawing/2014/main" id="{03E4ED18-20DE-9A2D-F3D6-31F089C7D92C}"/>
+              </a:ext>
+            </a:extLst>
+          </p:cNvPr>
+          <p:cNvSpPr/>
+          <p:nvPr/>
+        </p:nvSpPr>
+        <p:spPr>
+          <a:xfrm>
+            <a:off x="5806701" y="3877737"/>
+            <a:ext cx="1620000" cy="360000"/>
+          </a:xfrm>
+          <a:prstGeom prst="roundRect">
+            <a:avLst/>
+          </a:prstGeom>
+          <a:noFill/>
+          <a:ln w="12700">
+            <a:solidFill>
+              <a:schemeClr val="bg1">
+                <a:lumMod val="50000"/>
+              </a:schemeClr>
+            </a:solidFill>
+            <a:prstDash val="dash"/>
+          </a:ln>
+        </p:spPr>
+        <p:style>
+          <a:lnRef idx="2">
+            <a:schemeClr val="accent1">
+              <a:shade val="15000"/>
+            </a:schemeClr>
+          </a:lnRef>
+          <a:fillRef idx="1">
+            <a:schemeClr val="accent1"/>
+          </a:fillRef>
+          <a:effectRef idx="0">
+            <a:schemeClr val="accent1"/>
+          </a:effectRef>
+          <a:fontRef idx="minor">
+            <a:schemeClr val="lt1"/>
+          </a:fontRef>
+        </p:style>
+        <p:txBody>
+          <a:bodyPr rtlCol="0" anchor="ctr"/>
+          <a:lstStyle/>
+          <a:p>
+            <a:pPr algn="ctr"/>
+            <a:r>
+              <a:rPr lang="zh-CN" altLang="en-US" sz="1200">
+                <a:solidFill>
+                  <a:sysClr val="windowText" lastClr="000000"/>
+                </a:solidFill>
+                <a:latin typeface="Quicksand Light" panose="00000400000000000000" pitchFamily="2" charset="0"/>
+                <a:ea typeface="仿宋" panose="02010609060101010101" pitchFamily="49" charset="-122"/>
+              </a:rPr>
+              <a:t>网格 </a:t>
+            </a:r>
+            <a:r>
+              <a:rPr lang="en-US" altLang="zh-CN" sz="1200">
+                <a:solidFill>
+                  <a:sysClr val="windowText" lastClr="000000"/>
+                </a:solidFill>
+                <a:latin typeface="Quicksand Light" panose="00000400000000000000" pitchFamily="2" charset="0"/>
+                <a:ea typeface="仿宋" panose="02010609060101010101" pitchFamily="49" charset="-122"/>
+              </a:rPr>
+              <a:t>grid</a:t>
+            </a:r>
+            <a:endParaRPr lang="zh-CN" altLang="en-US" sz="1200">
+              <a:solidFill>
+                <a:sysClr val="windowText" lastClr="000000"/>
+              </a:solidFill>
+              <a:latin typeface="Quicksand Light" panose="00000400000000000000" pitchFamily="2" charset="0"/>
+              <a:ea typeface="仿宋" panose="02010609060101010101" pitchFamily="49" charset="-122"/>
+            </a:endParaRPr>
+          </a:p>
+        </p:txBody>
+      </p:sp>
+      <p:cxnSp>
+        <p:nvCxnSpPr>
+          <p:cNvPr id="22" name="连接符: 曲线 21">
+            <a:extLst>
+              <a:ext uri="{FF2B5EF4-FFF2-40B4-BE49-F238E27FC236}">
+                <a16:creationId xmlns:a16="http://schemas.microsoft.com/office/drawing/2014/main" id="{D99A8B47-6D7E-2EA4-8359-4BD4F43E0B70}"/>
+              </a:ext>
+            </a:extLst>
+          </p:cNvPr>
+          <p:cNvCxnSpPr>
+            <a:cxnSpLocks/>
+            <a:stCxn id="9" idx="3"/>
+            <a:endCxn id="7" idx="1"/>
+          </p:cNvCxnSpPr>
+          <p:nvPr/>
+        </p:nvCxnSpPr>
+        <p:spPr>
+          <a:xfrm>
+            <a:off x="5474575" y="3274613"/>
+            <a:ext cx="332126" cy="1271351"/>
+          </a:xfrm>
+          <a:prstGeom prst="curvedConnector3">
+            <a:avLst>
+              <a:gd name="adj1" fmla="val 50000"/>
+            </a:avLst>
+          </a:prstGeom>
+          <a:ln>
+            <a:solidFill>
+              <a:srgbClr val="EB3B5A"/>
+            </a:solidFill>
+          </a:ln>
+        </p:spPr>
+        <p:style>
+          <a:lnRef idx="1">
+            <a:schemeClr val="accent1"/>
+          </a:lnRef>
+          <a:fillRef idx="0">
+            <a:schemeClr val="accent1"/>
+          </a:fillRef>
+          <a:effectRef idx="0">
+            <a:schemeClr val="accent1"/>
+          </a:effectRef>
+          <a:fontRef idx="minor">
+            <a:schemeClr val="tx1"/>
+          </a:fontRef>
+        </p:style>
+      </p:cxnSp>
+      <p:cxnSp>
+        <p:nvCxnSpPr>
+          <p:cNvPr id="26" name="连接符: 曲线 25">
+            <a:extLst>
+              <a:ext uri="{FF2B5EF4-FFF2-40B4-BE49-F238E27FC236}">
+                <a16:creationId xmlns:a16="http://schemas.microsoft.com/office/drawing/2014/main" id="{46C1E541-71B5-21B2-7273-4EAC0DC70F03}"/>
+              </a:ext>
+            </a:extLst>
+          </p:cNvPr>
+          <p:cNvCxnSpPr>
+            <a:cxnSpLocks/>
+            <a:stCxn id="8" idx="1"/>
+            <a:endCxn id="2" idx="3"/>
+          </p:cNvCxnSpPr>
+          <p:nvPr/>
+        </p:nvCxnSpPr>
+        <p:spPr>
+          <a:xfrm rot="10800000">
+            <a:off x="4062449" y="3274613"/>
+            <a:ext cx="332126" cy="1147136"/>
+          </a:xfrm>
+          <a:prstGeom prst="curvedConnector3">
+            <a:avLst>
+              <a:gd name="adj1" fmla="val 50000"/>
+            </a:avLst>
+          </a:prstGeom>
+          <a:ln>
+            <a:solidFill>
+              <a:srgbClr val="3DC1D3"/>
+            </a:solidFill>
+          </a:ln>
+        </p:spPr>
+        <p:style>
+          <a:lnRef idx="1">
+            <a:schemeClr val="accent1"/>
+          </a:lnRef>
+          <a:fillRef idx="0">
+            <a:schemeClr val="accent1"/>
+          </a:fillRef>
+          <a:effectRef idx="0">
+            <a:schemeClr val="accent1"/>
+          </a:effectRef>
+          <a:fontRef idx="minor">
+            <a:schemeClr val="tx1"/>
+          </a:fontRef>
+        </p:style>
+      </p:cxnSp>
+      <p:sp>
+        <p:nvSpPr>
+          <p:cNvPr id="31" name="矩形: 圆角 30">
+            <a:extLst>
+              <a:ext uri="{FF2B5EF4-FFF2-40B4-BE49-F238E27FC236}">
+                <a16:creationId xmlns:a16="http://schemas.microsoft.com/office/drawing/2014/main" id="{E8C9255D-9B6B-1495-9667-75E062A30160}"/>
+              </a:ext>
+            </a:extLst>
+          </p:cNvPr>
+          <p:cNvSpPr/>
+          <p:nvPr/>
+        </p:nvSpPr>
+        <p:spPr>
+          <a:xfrm>
+            <a:off x="4394575" y="5388885"/>
+            <a:ext cx="1080000" cy="360000"/>
+          </a:xfrm>
+          <a:prstGeom prst="roundRect">
+            <a:avLst/>
+          </a:prstGeom>
+          <a:solidFill>
+            <a:schemeClr val="accent6">
+              <a:lumMod val="60000"/>
+              <a:lumOff val="40000"/>
+            </a:schemeClr>
+          </a:solidFill>
+          <a:ln w="12700">
+            <a:noFill/>
+          </a:ln>
+        </p:spPr>
+        <p:style>
+          <a:lnRef idx="2">
+            <a:schemeClr val="accent1">
+              <a:shade val="15000"/>
+            </a:schemeClr>
+          </a:lnRef>
+          <a:fillRef idx="1">
+            <a:schemeClr val="accent1"/>
+          </a:fillRef>
+          <a:effectRef idx="0">
+            <a:schemeClr val="accent1"/>
+          </a:effectRef>
+          <a:fontRef idx="minor">
+            <a:schemeClr val="lt1"/>
+          </a:fontRef>
+        </p:style>
+        <p:txBody>
+          <a:bodyPr rtlCol="0" anchor="ctr"/>
+          <a:lstStyle/>
+          <a:p>
+            <a:pPr algn="ctr"/>
+            <a:r>
+              <a:rPr lang="zh-CN" altLang="en-US" sz="1200">
+                <a:latin typeface="Quicksand Light" panose="00000400000000000000" pitchFamily="2" charset="0"/>
+                <a:ea typeface="仿宋" panose="02010609060101010101" pitchFamily="49" charset="-122"/>
+              </a:rPr>
+              <a:t>导航</a:t>
+            </a:r>
+          </a:p>
+        </p:txBody>
+      </p:sp>
+      <p:cxnSp>
+        <p:nvCxnSpPr>
+          <p:cNvPr id="32" name="连接符: 曲线 31">
+            <a:extLst>
+              <a:ext uri="{FF2B5EF4-FFF2-40B4-BE49-F238E27FC236}">
+                <a16:creationId xmlns:a16="http://schemas.microsoft.com/office/drawing/2014/main" id="{77355C97-960E-5F33-1A9D-C89E64984730}"/>
+              </a:ext>
+            </a:extLst>
+          </p:cNvPr>
+          <p:cNvCxnSpPr>
+            <a:cxnSpLocks/>
+            <a:stCxn id="31" idx="1"/>
+            <a:endCxn id="2" idx="3"/>
+          </p:cNvCxnSpPr>
+          <p:nvPr/>
+        </p:nvCxnSpPr>
+        <p:spPr>
+          <a:xfrm rot="10800000">
+            <a:off x="4062449" y="3274613"/>
+            <a:ext cx="332126" cy="2294272"/>
+          </a:xfrm>
+          <a:prstGeom prst="curvedConnector3">
+            <a:avLst>
+              <a:gd name="adj1" fmla="val 50000"/>
+            </a:avLst>
+          </a:prstGeom>
+          <a:ln>
+            <a:solidFill>
+              <a:srgbClr val="A9D18E"/>
+            </a:solidFill>
+          </a:ln>
+        </p:spPr>
+        <p:style>
+          <a:lnRef idx="1">
+            <a:schemeClr val="accent1"/>
+          </a:lnRef>
+          <a:fillRef idx="0">
+            <a:schemeClr val="accent1"/>
+          </a:fillRef>
+          <a:effectRef idx="0">
+            <a:schemeClr val="accent1"/>
+          </a:effectRef>
+          <a:fontRef idx="minor">
+            <a:schemeClr val="tx1"/>
+          </a:fontRef>
+        </p:style>
+      </p:cxnSp>
+      <p:sp>
+        <p:nvSpPr>
+          <p:cNvPr id="4" name="矩形: 圆角 3">
+            <a:extLst>
+              <a:ext uri="{FF2B5EF4-FFF2-40B4-BE49-F238E27FC236}">
+                <a16:creationId xmlns:a16="http://schemas.microsoft.com/office/drawing/2014/main" id="{F804F753-E482-E059-B0E0-437F4CB1E50C}"/>
+              </a:ext>
+            </a:extLst>
+          </p:cNvPr>
+          <p:cNvSpPr/>
+          <p:nvPr/>
+        </p:nvSpPr>
+        <p:spPr>
+          <a:xfrm>
+            <a:off x="5806701" y="5164768"/>
+            <a:ext cx="1620000" cy="360000"/>
+          </a:xfrm>
+          <a:prstGeom prst="roundRect">
+            <a:avLst/>
+          </a:prstGeom>
+          <a:noFill/>
+          <a:ln w="12700">
+            <a:solidFill>
+              <a:schemeClr val="accent6">
+                <a:lumMod val="60000"/>
+                <a:lumOff val="40000"/>
+              </a:schemeClr>
+            </a:solidFill>
+          </a:ln>
+        </p:spPr>
+        <p:style>
+          <a:lnRef idx="2">
+            <a:schemeClr val="accent1">
+              <a:shade val="15000"/>
+            </a:schemeClr>
+          </a:lnRef>
+          <a:fillRef idx="1">
+            <a:schemeClr val="accent1"/>
+          </a:fillRef>
+          <a:effectRef idx="0">
+            <a:schemeClr val="accent1"/>
+          </a:effectRef>
+          <a:fontRef idx="minor">
+            <a:schemeClr val="lt1"/>
+          </a:fontRef>
+        </p:style>
+        <p:txBody>
+          <a:bodyPr rtlCol="0" anchor="ctr"/>
+          <a:lstStyle/>
+          <a:p>
+            <a:pPr algn="ctr"/>
+            <a:r>
+              <a:rPr lang="zh-CN" altLang="en-US" sz="1200">
+                <a:solidFill>
+                  <a:sysClr val="windowText" lastClr="000000"/>
+                </a:solidFill>
+                <a:latin typeface="Quicksand Light" panose="00000400000000000000" pitchFamily="2" charset="0"/>
+                <a:ea typeface="仿宋" panose="02010609060101010101" pitchFamily="49" charset="-122"/>
+              </a:rPr>
+              <a:t>一个滚动视图</a:t>
+            </a:r>
+          </a:p>
+        </p:txBody>
+      </p:sp>
+      <p:sp>
+        <p:nvSpPr>
+          <p:cNvPr id="5" name="矩形: 圆角 4">
+            <a:extLst>
+              <a:ext uri="{FF2B5EF4-FFF2-40B4-BE49-F238E27FC236}">
+                <a16:creationId xmlns:a16="http://schemas.microsoft.com/office/drawing/2014/main" id="{2F218F90-1527-32EF-A4D6-D219CF5B8F16}"/>
+              </a:ext>
+            </a:extLst>
+          </p:cNvPr>
+          <p:cNvSpPr/>
+          <p:nvPr/>
+        </p:nvSpPr>
+        <p:spPr>
+          <a:xfrm>
+            <a:off x="5806701" y="5613003"/>
+            <a:ext cx="1620000" cy="360000"/>
+          </a:xfrm>
+          <a:prstGeom prst="roundRect">
+            <a:avLst/>
+          </a:prstGeom>
+          <a:noFill/>
+          <a:ln w="12700">
+            <a:solidFill>
+              <a:schemeClr val="accent6">
+                <a:lumMod val="60000"/>
+                <a:lumOff val="40000"/>
+              </a:schemeClr>
+            </a:solidFill>
+            <a:prstDash val="dash"/>
+          </a:ln>
+        </p:spPr>
+        <p:style>
+          <a:lnRef idx="2">
+            <a:schemeClr val="accent1">
+              <a:shade val="15000"/>
+            </a:schemeClr>
+          </a:lnRef>
+          <a:fillRef idx="1">
+            <a:schemeClr val="accent1"/>
+          </a:fillRef>
+          <a:effectRef idx="0">
+            <a:schemeClr val="accent1"/>
+          </a:effectRef>
+          <a:fontRef idx="minor">
+            <a:schemeClr val="lt1"/>
+          </a:fontRef>
+        </p:style>
+        <p:txBody>
+          <a:bodyPr rtlCol="0" anchor="ctr"/>
+          <a:lstStyle/>
+          <a:p>
+            <a:pPr algn="ctr"/>
+            <a:r>
+              <a:rPr lang="zh-CN" altLang="en-US" sz="1200">
+                <a:solidFill>
+                  <a:sysClr val="windowText" lastClr="000000"/>
+                </a:solidFill>
+                <a:latin typeface="Quicksand Light" panose="00000400000000000000" pitchFamily="2" charset="0"/>
+                <a:ea typeface="仿宋" panose="02010609060101010101" pitchFamily="49" charset="-122"/>
+              </a:rPr>
+              <a:t>二个滚动视图</a:t>
+            </a:r>
+          </a:p>
+        </p:txBody>
+      </p:sp>
+      <p:cxnSp>
+        <p:nvCxnSpPr>
+          <p:cNvPr id="6" name="连接符: 曲线 5">
+            <a:extLst>
+              <a:ext uri="{FF2B5EF4-FFF2-40B4-BE49-F238E27FC236}">
+                <a16:creationId xmlns:a16="http://schemas.microsoft.com/office/drawing/2014/main" id="{A07E7128-4DE2-E2DD-961D-C1575C1BBE3A}"/>
+              </a:ext>
+            </a:extLst>
+          </p:cNvPr>
+          <p:cNvCxnSpPr>
+            <a:cxnSpLocks/>
+            <a:stCxn id="31" idx="3"/>
+            <a:endCxn id="4" idx="1"/>
+          </p:cNvCxnSpPr>
+          <p:nvPr/>
+        </p:nvCxnSpPr>
+        <p:spPr>
+          <a:xfrm flipV="1">
+            <a:off x="5474575" y="5344768"/>
+            <a:ext cx="332126" cy="224117"/>
+          </a:xfrm>
+          <a:prstGeom prst="curvedConnector3">
+            <a:avLst>
+              <a:gd name="adj1" fmla="val 50000"/>
+            </a:avLst>
+          </a:prstGeom>
+          <a:ln>
+            <a:solidFill>
+              <a:schemeClr val="accent6">
+                <a:lumMod val="60000"/>
+                <a:lumOff val="40000"/>
+              </a:schemeClr>
+            </a:solidFill>
+          </a:ln>
+        </p:spPr>
+        <p:style>
+          <a:lnRef idx="1">
+            <a:schemeClr val="accent1"/>
+          </a:lnRef>
+          <a:fillRef idx="0">
+            <a:schemeClr val="accent1"/>
+          </a:fillRef>
+          <a:effectRef idx="0">
+            <a:schemeClr val="accent1"/>
+          </a:effectRef>
+          <a:fontRef idx="minor">
+            <a:schemeClr val="tx1"/>
+          </a:fontRef>
+        </p:style>
+      </p:cxnSp>
+      <p:cxnSp>
+        <p:nvCxnSpPr>
+          <p:cNvPr id="12" name="连接符: 曲线 11">
+            <a:extLst>
+              <a:ext uri="{FF2B5EF4-FFF2-40B4-BE49-F238E27FC236}">
+                <a16:creationId xmlns:a16="http://schemas.microsoft.com/office/drawing/2014/main" id="{5FD7AEAF-CD97-C450-BBC1-2641DC43007D}"/>
+              </a:ext>
+            </a:extLst>
+          </p:cNvPr>
+          <p:cNvCxnSpPr>
+            <a:cxnSpLocks/>
+            <a:stCxn id="31" idx="3"/>
+            <a:endCxn id="5" idx="1"/>
+          </p:cNvCxnSpPr>
+          <p:nvPr/>
+        </p:nvCxnSpPr>
+        <p:spPr>
+          <a:xfrm>
+            <a:off x="5474575" y="5568885"/>
+            <a:ext cx="332126" cy="224118"/>
+          </a:xfrm>
+          <a:prstGeom prst="curvedConnector3">
+            <a:avLst>
+              <a:gd name="adj1" fmla="val 50000"/>
+            </a:avLst>
+          </a:prstGeom>
+          <a:ln>
+            <a:solidFill>
+              <a:schemeClr val="accent6">
+                <a:lumMod val="60000"/>
+                <a:lumOff val="40000"/>
+              </a:schemeClr>
+            </a:solidFill>
+          </a:ln>
+        </p:spPr>
+        <p:style>
+          <a:lnRef idx="1">
+            <a:schemeClr val="accent1"/>
+          </a:lnRef>
+          <a:fillRef idx="0">
+            <a:schemeClr val="accent1"/>
+          </a:fillRef>
+          <a:effectRef idx="0">
+            <a:schemeClr val="accent1"/>
+          </a:effectRef>
+          <a:fontRef idx="minor">
+            <a:schemeClr val="tx1"/>
+          </a:fontRef>
+        </p:style>
+      </p:cxnSp>
+      <p:sp>
+        <p:nvSpPr>
+          <p:cNvPr id="7" name="矩形: 圆角 6">
+            <a:extLst>
+              <a:ext uri="{FF2B5EF4-FFF2-40B4-BE49-F238E27FC236}">
+                <a16:creationId xmlns:a16="http://schemas.microsoft.com/office/drawing/2014/main" id="{383E7043-36AC-CBD4-DF24-A727B7D0B0BD}"/>
+              </a:ext>
+            </a:extLst>
+          </p:cNvPr>
+          <p:cNvSpPr/>
+          <p:nvPr/>
+        </p:nvSpPr>
+        <p:spPr>
+          <a:xfrm>
+            <a:off x="5806701" y="4365964"/>
+            <a:ext cx="1620000" cy="360000"/>
+          </a:xfrm>
+          <a:prstGeom prst="roundRect">
+            <a:avLst/>
+          </a:prstGeom>
+          <a:noFill/>
+          <a:ln w="12700">
+            <a:solidFill>
+              <a:schemeClr val="bg1">
+                <a:lumMod val="50000"/>
+              </a:schemeClr>
+            </a:solidFill>
+            <a:prstDash val="dash"/>
+          </a:ln>
+        </p:spPr>
+        <p:style>
+          <a:lnRef idx="2">
+            <a:schemeClr val="accent1">
+              <a:shade val="15000"/>
+            </a:schemeClr>
+          </a:lnRef>
+          <a:fillRef idx="1">
+            <a:schemeClr val="accent1"/>
+          </a:fillRef>
+          <a:effectRef idx="0">
+            <a:schemeClr val="accent1"/>
+          </a:effectRef>
+          <a:fontRef idx="minor">
+            <a:schemeClr val="lt1"/>
+          </a:fontRef>
+        </p:style>
+        <p:txBody>
+          <a:bodyPr rtlCol="0" anchor="ctr"/>
+          <a:lstStyle/>
+          <a:p>
+            <a:pPr algn="ctr"/>
+            <a:r>
+              <a:rPr lang="zh-CN" altLang="en-US" sz="1200">
+                <a:solidFill>
+                  <a:sysClr val="windowText" lastClr="000000"/>
+                </a:solidFill>
+                <a:latin typeface="Quicksand Light" panose="00000400000000000000" pitchFamily="2" charset="0"/>
+                <a:ea typeface="仿宋" panose="02010609060101010101" pitchFamily="49" charset="-122"/>
+              </a:rPr>
+              <a:t>浮动 </a:t>
+            </a:r>
+            <a:r>
+              <a:rPr lang="en-US" altLang="zh-CN" sz="1200">
+                <a:solidFill>
+                  <a:sysClr val="windowText" lastClr="000000"/>
+                </a:solidFill>
+                <a:latin typeface="Quicksand Light" panose="00000400000000000000" pitchFamily="2" charset="0"/>
+                <a:ea typeface="仿宋" panose="02010609060101010101" pitchFamily="49" charset="-122"/>
+              </a:rPr>
+              <a:t>float</a:t>
+            </a:r>
+            <a:endParaRPr lang="zh-CN" altLang="en-US" sz="1200">
+              <a:solidFill>
+                <a:sysClr val="windowText" lastClr="000000"/>
+              </a:solidFill>
+              <a:latin typeface="Quicksand Light" panose="00000400000000000000" pitchFamily="2" charset="0"/>
+              <a:ea typeface="仿宋" panose="02010609060101010101" pitchFamily="49" charset="-122"/>
+            </a:endParaRPr>
+          </a:p>
+        </p:txBody>
+      </p:sp>
+    </p:spTree>
+    <p:extLst>
+      <p:ext uri="{BB962C8B-B14F-4D97-AF65-F5344CB8AC3E}">
+        <p14:creationId xmlns:p14="http://schemas.microsoft.com/office/powerpoint/2010/main" val="2483548129"/>
       </p:ext>
     </p:extLst>
   </p:cSld>
@@ -26911,1177 +26378,40 @@
           <a:chExt cx="0" cy="0"/>
         </a:xfrm>
       </p:grpSpPr>
-      <p:sp>
-        <p:nvSpPr>
-          <p:cNvPr id="2" name="矩形: 圆角 1">
-            <a:extLst>
-              <a:ext uri="{FF2B5EF4-FFF2-40B4-BE49-F238E27FC236}">
-                <a16:creationId xmlns:a16="http://schemas.microsoft.com/office/drawing/2014/main" id="{7CE4D4CF-0466-1DC3-08B4-9C28D4A64E27}"/>
-              </a:ext>
-            </a:extLst>
-          </p:cNvPr>
-          <p:cNvSpPr/>
-          <p:nvPr/>
-        </p:nvSpPr>
-        <p:spPr>
-          <a:xfrm>
-            <a:off x="2622449" y="3094613"/>
-            <a:ext cx="1440000" cy="360000"/>
-          </a:xfrm>
-          <a:prstGeom prst="roundRect">
-            <a:avLst/>
-          </a:prstGeom>
-          <a:solidFill>
-            <a:schemeClr val="tx1"/>
-          </a:solidFill>
-          <a:ln w="12700">
-            <a:noFill/>
-          </a:ln>
-        </p:spPr>
-        <p:style>
-          <a:lnRef idx="2">
-            <a:schemeClr val="accent1">
-              <a:shade val="15000"/>
-            </a:schemeClr>
-          </a:lnRef>
-          <a:fillRef idx="1">
-            <a:schemeClr val="accent1"/>
-          </a:fillRef>
-          <a:effectRef idx="0">
-            <a:schemeClr val="accent1"/>
-          </a:effectRef>
-          <a:fontRef idx="minor">
-            <a:schemeClr val="lt1"/>
-          </a:fontRef>
-        </p:style>
-        <p:txBody>
-          <a:bodyPr rtlCol="0" anchor="ctr"/>
-          <a:lstStyle/>
-          <a:p>
-            <a:pPr algn="ctr"/>
-            <a:r>
-              <a:rPr lang="en-US" altLang="zh-CN" sz="1200">
-                <a:latin typeface="Quicksand Light" panose="00000400000000000000" pitchFamily="2" charset="0"/>
-                <a:ea typeface="仿宋" panose="02010609060101010101" pitchFamily="49" charset="-122"/>
-              </a:rPr>
-              <a:t>&lt;scroll-view&gt;</a:t>
-            </a:r>
-            <a:endParaRPr lang="zh-CN" altLang="en-US" sz="1200">
-              <a:latin typeface="Quicksand Light" panose="00000400000000000000" pitchFamily="2" charset="0"/>
-              <a:ea typeface="仿宋" panose="02010609060101010101" pitchFamily="49" charset="-122"/>
-            </a:endParaRPr>
-          </a:p>
-        </p:txBody>
-      </p:sp>
-      <p:sp>
-        <p:nvSpPr>
-          <p:cNvPr id="3" name="矩形: 圆角 2">
-            <a:extLst>
-              <a:ext uri="{FF2B5EF4-FFF2-40B4-BE49-F238E27FC236}">
-                <a16:creationId xmlns:a16="http://schemas.microsoft.com/office/drawing/2014/main" id="{6EE8E41B-FB18-64FF-0539-7D9127F8FC67}"/>
-              </a:ext>
-            </a:extLst>
-          </p:cNvPr>
-          <p:cNvSpPr/>
-          <p:nvPr/>
-        </p:nvSpPr>
-        <p:spPr>
-          <a:xfrm>
-            <a:off x="5806701" y="2901283"/>
-            <a:ext cx="1620000" cy="360000"/>
-          </a:xfrm>
-          <a:prstGeom prst="roundRect">
-            <a:avLst/>
-          </a:prstGeom>
-          <a:noFill/>
-          <a:ln w="12700">
-            <a:solidFill>
-              <a:srgbClr val="EB3B5A"/>
-            </a:solidFill>
-            <a:prstDash val="dash"/>
-          </a:ln>
-        </p:spPr>
-        <p:style>
-          <a:lnRef idx="2">
-            <a:schemeClr val="accent1">
-              <a:shade val="15000"/>
-            </a:schemeClr>
-          </a:lnRef>
-          <a:fillRef idx="1">
-            <a:schemeClr val="accent1"/>
-          </a:fillRef>
-          <a:effectRef idx="0">
-            <a:schemeClr val="accent1"/>
-          </a:effectRef>
-          <a:fontRef idx="minor">
-            <a:schemeClr val="lt1"/>
-          </a:fontRef>
-        </p:style>
-        <p:txBody>
-          <a:bodyPr rtlCol="0" anchor="ctr"/>
-          <a:lstStyle/>
-          <a:p>
-            <a:pPr algn="ctr"/>
-            <a:r>
-              <a:rPr lang="zh-CN" altLang="en-US" sz="1200">
-                <a:solidFill>
-                  <a:sysClr val="windowText" lastClr="000000"/>
-                </a:solidFill>
-                <a:latin typeface="Quicksand Light" panose="00000400000000000000" pitchFamily="2" charset="0"/>
-                <a:ea typeface="仿宋" panose="02010609060101010101" pitchFamily="49" charset="-122"/>
-              </a:rPr>
-              <a:t>行内 </a:t>
-            </a:r>
-            <a:r>
-              <a:rPr lang="en-US" altLang="zh-CN" sz="1200">
-                <a:solidFill>
-                  <a:sysClr val="windowText" lastClr="000000"/>
-                </a:solidFill>
-                <a:latin typeface="Quicksand Light" panose="00000400000000000000" pitchFamily="2" charset="0"/>
-                <a:ea typeface="仿宋" panose="02010609060101010101" pitchFamily="49" charset="-122"/>
-              </a:rPr>
-              <a:t>inline</a:t>
-            </a:r>
-            <a:endParaRPr lang="zh-CN" altLang="en-US" sz="1200">
-              <a:solidFill>
-                <a:sysClr val="windowText" lastClr="000000"/>
-              </a:solidFill>
-              <a:latin typeface="Quicksand Light" panose="00000400000000000000" pitchFamily="2" charset="0"/>
-              <a:ea typeface="仿宋" panose="02010609060101010101" pitchFamily="49" charset="-122"/>
-            </a:endParaRPr>
-          </a:p>
-        </p:txBody>
-      </p:sp>
-      <p:sp>
-        <p:nvSpPr>
-          <p:cNvPr id="8" name="矩形: 圆角 7">
-            <a:extLst>
-              <a:ext uri="{FF2B5EF4-FFF2-40B4-BE49-F238E27FC236}">
-                <a16:creationId xmlns:a16="http://schemas.microsoft.com/office/drawing/2014/main" id="{06699B4A-F636-A7C1-FB1E-69E3110ACB30}"/>
-              </a:ext>
-            </a:extLst>
-          </p:cNvPr>
-          <p:cNvSpPr/>
-          <p:nvPr/>
-        </p:nvSpPr>
-        <p:spPr>
-          <a:xfrm>
-            <a:off x="4394575" y="4241749"/>
-            <a:ext cx="1080000" cy="360000"/>
-          </a:xfrm>
-          <a:prstGeom prst="roundRect">
-            <a:avLst/>
-          </a:prstGeom>
-          <a:solidFill>
-            <a:srgbClr val="3DC1D3"/>
-          </a:solidFill>
-          <a:ln w="12700">
-            <a:noFill/>
-          </a:ln>
-        </p:spPr>
-        <p:style>
-          <a:lnRef idx="2">
-            <a:schemeClr val="accent1">
-              <a:shade val="15000"/>
-            </a:schemeClr>
-          </a:lnRef>
-          <a:fillRef idx="1">
-            <a:schemeClr val="accent1"/>
-          </a:fillRef>
-          <a:effectRef idx="0">
-            <a:schemeClr val="accent1"/>
-          </a:effectRef>
-          <a:fontRef idx="minor">
-            <a:schemeClr val="lt1"/>
-          </a:fontRef>
-        </p:style>
-        <p:txBody>
-          <a:bodyPr rtlCol="0" anchor="ctr"/>
-          <a:lstStyle/>
-          <a:p>
-            <a:pPr algn="ctr"/>
-            <a:r>
-              <a:rPr lang="zh-CN" altLang="en-US" sz="1200">
-                <a:latin typeface="Quicksand Light" panose="00000400000000000000" pitchFamily="2" charset="0"/>
-                <a:ea typeface="仿宋" panose="02010609060101010101" pitchFamily="49" charset="-122"/>
-              </a:rPr>
-              <a:t>垂直滚动</a:t>
-            </a:r>
-          </a:p>
-        </p:txBody>
-      </p:sp>
-      <p:sp>
-        <p:nvSpPr>
-          <p:cNvPr id="9" name="矩形: 圆角 8">
-            <a:extLst>
-              <a:ext uri="{FF2B5EF4-FFF2-40B4-BE49-F238E27FC236}">
-                <a16:creationId xmlns:a16="http://schemas.microsoft.com/office/drawing/2014/main" id="{63EC0026-3C9E-C410-1B1D-25D54ACB2F10}"/>
-              </a:ext>
-            </a:extLst>
-          </p:cNvPr>
-          <p:cNvSpPr/>
-          <p:nvPr/>
-        </p:nvSpPr>
-        <p:spPr>
-          <a:xfrm>
-            <a:off x="4394575" y="3094613"/>
-            <a:ext cx="1080000" cy="360000"/>
-          </a:xfrm>
-          <a:prstGeom prst="roundRect">
-            <a:avLst/>
-          </a:prstGeom>
-          <a:solidFill>
-            <a:srgbClr val="EB3B5A"/>
-          </a:solidFill>
-          <a:ln w="12700">
-            <a:noFill/>
-          </a:ln>
-        </p:spPr>
-        <p:style>
-          <a:lnRef idx="2">
-            <a:schemeClr val="accent1">
-              <a:shade val="15000"/>
-            </a:schemeClr>
-          </a:lnRef>
-          <a:fillRef idx="1">
-            <a:schemeClr val="accent1"/>
-          </a:fillRef>
-          <a:effectRef idx="0">
-            <a:schemeClr val="accent1"/>
-          </a:effectRef>
-          <a:fontRef idx="minor">
-            <a:schemeClr val="lt1"/>
-          </a:fontRef>
-        </p:style>
-        <p:txBody>
-          <a:bodyPr rtlCol="0" anchor="ctr"/>
-          <a:lstStyle/>
-          <a:p>
-            <a:pPr algn="ctr"/>
-            <a:r>
-              <a:rPr lang="zh-CN" altLang="en-US" sz="1200" dirty="0">
-                <a:latin typeface="Quicksand Light" panose="00000400000000000000" pitchFamily="2" charset="0"/>
-                <a:ea typeface="仿宋" panose="02010609060101010101" pitchFamily="49" charset="-122"/>
-              </a:rPr>
-              <a:t>水平滚动</a:t>
-            </a:r>
-          </a:p>
-        </p:txBody>
-      </p:sp>
-      <p:cxnSp>
-        <p:nvCxnSpPr>
-          <p:cNvPr id="10" name="连接符: 曲线 9">
-            <a:extLst>
-              <a:ext uri="{FF2B5EF4-FFF2-40B4-BE49-F238E27FC236}">
-                <a16:creationId xmlns:a16="http://schemas.microsoft.com/office/drawing/2014/main" id="{89376DA1-2871-7B3F-3D7E-34DF204828CA}"/>
-              </a:ext>
-            </a:extLst>
-          </p:cNvPr>
-          <p:cNvCxnSpPr>
-            <a:cxnSpLocks/>
-            <a:stCxn id="9" idx="3"/>
-            <a:endCxn id="17" idx="1"/>
-          </p:cNvCxnSpPr>
-          <p:nvPr/>
-        </p:nvCxnSpPr>
-        <p:spPr>
-          <a:xfrm flipV="1">
-            <a:off x="5474575" y="2104829"/>
-            <a:ext cx="332126" cy="1169784"/>
-          </a:xfrm>
-          <a:prstGeom prst="curvedConnector3">
-            <a:avLst>
-              <a:gd name="adj1" fmla="val 50000"/>
-            </a:avLst>
-          </a:prstGeom>
-          <a:ln>
-            <a:solidFill>
-              <a:srgbClr val="EB3B5A"/>
-            </a:solidFill>
-          </a:ln>
-        </p:spPr>
-        <p:style>
-          <a:lnRef idx="1">
-            <a:schemeClr val="accent1"/>
-          </a:lnRef>
-          <a:fillRef idx="0">
-            <a:schemeClr val="accent1"/>
-          </a:fillRef>
-          <a:effectRef idx="0">
-            <a:schemeClr val="accent1"/>
-          </a:effectRef>
-          <a:fontRef idx="minor">
-            <a:schemeClr val="tx1"/>
-          </a:fontRef>
-        </p:style>
-      </p:cxnSp>
-      <p:cxnSp>
-        <p:nvCxnSpPr>
-          <p:cNvPr id="15" name="直接连接符 14">
-            <a:extLst>
-              <a:ext uri="{FF2B5EF4-FFF2-40B4-BE49-F238E27FC236}">
-                <a16:creationId xmlns:a16="http://schemas.microsoft.com/office/drawing/2014/main" id="{B3AF8529-84E5-3299-2E12-01B446E0607B}"/>
-              </a:ext>
-            </a:extLst>
-          </p:cNvPr>
-          <p:cNvCxnSpPr>
-            <a:cxnSpLocks/>
-            <a:stCxn id="2" idx="3"/>
-            <a:endCxn id="9" idx="1"/>
-          </p:cNvCxnSpPr>
-          <p:nvPr/>
-        </p:nvCxnSpPr>
-        <p:spPr>
-          <a:xfrm>
-            <a:off x="4062449" y="3274613"/>
-            <a:ext cx="332126" cy="0"/>
-          </a:xfrm>
-          <a:prstGeom prst="line">
-            <a:avLst/>
-          </a:prstGeom>
-          <a:ln>
-            <a:solidFill>
-              <a:srgbClr val="EB3B5A"/>
-            </a:solidFill>
-          </a:ln>
-        </p:spPr>
-        <p:style>
-          <a:lnRef idx="1">
-            <a:schemeClr val="accent1"/>
-          </a:lnRef>
-          <a:fillRef idx="0">
-            <a:schemeClr val="accent1"/>
-          </a:fillRef>
-          <a:effectRef idx="0">
-            <a:schemeClr val="accent1"/>
-          </a:effectRef>
-          <a:fontRef idx="minor">
-            <a:schemeClr val="tx1"/>
-          </a:fontRef>
-        </p:style>
-      </p:cxnSp>
-      <p:sp>
-        <p:nvSpPr>
-          <p:cNvPr id="16" name="矩形: 圆角 15">
-            <a:extLst>
-              <a:ext uri="{FF2B5EF4-FFF2-40B4-BE49-F238E27FC236}">
-                <a16:creationId xmlns:a16="http://schemas.microsoft.com/office/drawing/2014/main" id="{FA81A049-32C6-0464-CB2F-FE666FC0CCAF}"/>
-              </a:ext>
-            </a:extLst>
-          </p:cNvPr>
-          <p:cNvSpPr/>
-          <p:nvPr/>
-        </p:nvSpPr>
-        <p:spPr>
-          <a:xfrm>
-            <a:off x="5806701" y="2413056"/>
-            <a:ext cx="1620000" cy="360000"/>
-          </a:xfrm>
-          <a:prstGeom prst="roundRect">
-            <a:avLst/>
-          </a:prstGeom>
-          <a:noFill/>
-          <a:ln w="12700">
-            <a:solidFill>
-              <a:srgbClr val="EB3B5A"/>
-            </a:solidFill>
-          </a:ln>
-        </p:spPr>
-        <p:style>
-          <a:lnRef idx="2">
-            <a:schemeClr val="accent1">
-              <a:shade val="15000"/>
-            </a:schemeClr>
-          </a:lnRef>
-          <a:fillRef idx="1">
-            <a:schemeClr val="accent1"/>
-          </a:fillRef>
-          <a:effectRef idx="0">
-            <a:schemeClr val="accent1"/>
-          </a:effectRef>
-          <a:fontRef idx="minor">
-            <a:schemeClr val="lt1"/>
-          </a:fontRef>
-        </p:style>
-        <p:txBody>
-          <a:bodyPr rtlCol="0" anchor="ctr"/>
-          <a:lstStyle/>
-          <a:p>
-            <a:pPr algn="ctr"/>
-            <a:r>
-              <a:rPr lang="zh-CN" altLang="en-US" sz="1200">
-                <a:solidFill>
-                  <a:sysClr val="windowText" lastClr="000000"/>
-                </a:solidFill>
-                <a:latin typeface="Quicksand Light" panose="00000400000000000000" pitchFamily="2" charset="0"/>
-                <a:ea typeface="仿宋" panose="02010609060101010101" pitchFamily="49" charset="-122"/>
-              </a:rPr>
-              <a:t>容器 </a:t>
-            </a:r>
-            <a:r>
-              <a:rPr lang="en-US" altLang="zh-CN" sz="1200">
-                <a:solidFill>
-                  <a:sysClr val="windowText" lastClr="000000"/>
-                </a:solidFill>
-                <a:latin typeface="Quicksand Light" panose="00000400000000000000" pitchFamily="2" charset="0"/>
-                <a:ea typeface="仿宋" panose="02010609060101010101" pitchFamily="49" charset="-122"/>
-              </a:rPr>
-              <a:t>wrap</a:t>
-            </a:r>
-            <a:endParaRPr lang="zh-CN" altLang="en-US" sz="1200">
-              <a:solidFill>
-                <a:sysClr val="windowText" lastClr="000000"/>
-              </a:solidFill>
-              <a:latin typeface="Quicksand Light" panose="00000400000000000000" pitchFamily="2" charset="0"/>
-              <a:ea typeface="仿宋" panose="02010609060101010101" pitchFamily="49" charset="-122"/>
-            </a:endParaRPr>
-          </a:p>
-        </p:txBody>
-      </p:sp>
-      <p:sp>
-        <p:nvSpPr>
-          <p:cNvPr id="17" name="矩形: 圆角 16">
-            <a:extLst>
-              <a:ext uri="{FF2B5EF4-FFF2-40B4-BE49-F238E27FC236}">
-                <a16:creationId xmlns:a16="http://schemas.microsoft.com/office/drawing/2014/main" id="{DF07C0A6-7F4B-674A-E488-85EB77ABE14F}"/>
-              </a:ext>
-            </a:extLst>
-          </p:cNvPr>
-          <p:cNvSpPr/>
-          <p:nvPr/>
-        </p:nvSpPr>
-        <p:spPr>
-          <a:xfrm>
-            <a:off x="5806701" y="1924829"/>
-            <a:ext cx="1620000" cy="360000"/>
-          </a:xfrm>
-          <a:prstGeom prst="roundRect">
-            <a:avLst/>
-          </a:prstGeom>
-          <a:noFill/>
-          <a:ln w="12700">
-            <a:solidFill>
-              <a:srgbClr val="EB3B5A"/>
-            </a:solidFill>
-          </a:ln>
-        </p:spPr>
-        <p:style>
-          <a:lnRef idx="2">
-            <a:schemeClr val="accent1">
-              <a:shade val="15000"/>
-            </a:schemeClr>
-          </a:lnRef>
-          <a:fillRef idx="1">
-            <a:schemeClr val="accent1"/>
-          </a:fillRef>
-          <a:effectRef idx="0">
-            <a:schemeClr val="accent1"/>
-          </a:effectRef>
-          <a:fontRef idx="minor">
-            <a:schemeClr val="lt1"/>
-          </a:fontRef>
-        </p:style>
-        <p:txBody>
-          <a:bodyPr rtlCol="0" anchor="ctr"/>
-          <a:lstStyle/>
-          <a:p>
-            <a:pPr algn="ctr"/>
-            <a:r>
-              <a:rPr lang="en-US" altLang="zh-CN" sz="1200">
-                <a:solidFill>
-                  <a:sysClr val="windowText" lastClr="000000"/>
-                </a:solidFill>
-                <a:latin typeface="Quicksand Light" panose="00000400000000000000" pitchFamily="2" charset="0"/>
-                <a:ea typeface="仿宋" panose="02010609060101010101" pitchFamily="49" charset="-122"/>
-              </a:rPr>
-              <a:t>enable-flex</a:t>
-            </a:r>
-            <a:endParaRPr lang="zh-CN" altLang="en-US" sz="1200">
-              <a:solidFill>
-                <a:sysClr val="windowText" lastClr="000000"/>
-              </a:solidFill>
-              <a:latin typeface="Quicksand Light" panose="00000400000000000000" pitchFamily="2" charset="0"/>
-              <a:ea typeface="仿宋" panose="02010609060101010101" pitchFamily="49" charset="-122"/>
-            </a:endParaRPr>
-          </a:p>
-        </p:txBody>
-      </p:sp>
-      <p:sp>
-        <p:nvSpPr>
-          <p:cNvPr id="18" name="矩形: 圆角 17">
-            <a:extLst>
-              <a:ext uri="{FF2B5EF4-FFF2-40B4-BE49-F238E27FC236}">
-                <a16:creationId xmlns:a16="http://schemas.microsoft.com/office/drawing/2014/main" id="{79DE23DA-ADA0-B751-DD89-7669F999E79D}"/>
-              </a:ext>
-            </a:extLst>
-          </p:cNvPr>
-          <p:cNvSpPr/>
-          <p:nvPr/>
-        </p:nvSpPr>
-        <p:spPr>
-          <a:xfrm>
-            <a:off x="5806701" y="3389510"/>
-            <a:ext cx="1620000" cy="360000"/>
-          </a:xfrm>
-          <a:prstGeom prst="roundRect">
-            <a:avLst/>
-          </a:prstGeom>
-          <a:noFill/>
-          <a:ln w="12700">
-            <a:solidFill>
-              <a:srgbClr val="EB3B5A"/>
-            </a:solidFill>
-            <a:prstDash val="dash"/>
-          </a:ln>
-        </p:spPr>
-        <p:style>
-          <a:lnRef idx="2">
-            <a:schemeClr val="accent1">
-              <a:shade val="15000"/>
-            </a:schemeClr>
-          </a:lnRef>
-          <a:fillRef idx="1">
-            <a:schemeClr val="accent1"/>
-          </a:fillRef>
-          <a:effectRef idx="0">
-            <a:schemeClr val="accent1"/>
-          </a:effectRef>
-          <a:fontRef idx="minor">
-            <a:schemeClr val="lt1"/>
-          </a:fontRef>
-        </p:style>
-        <p:txBody>
-          <a:bodyPr rtlCol="0" anchor="ctr"/>
-          <a:lstStyle/>
-          <a:p>
-            <a:pPr algn="ctr"/>
-            <a:r>
-              <a:rPr lang="zh-CN" altLang="en-US" sz="1200">
-                <a:solidFill>
-                  <a:sysClr val="windowText" lastClr="000000"/>
-                </a:solidFill>
-                <a:latin typeface="Quicksand Light" panose="00000400000000000000" pitchFamily="2" charset="0"/>
-                <a:ea typeface="仿宋" panose="02010609060101010101" pitchFamily="49" charset="-122"/>
-              </a:rPr>
-              <a:t>行内块 </a:t>
-            </a:r>
-            <a:r>
-              <a:rPr lang="en-US" altLang="zh-CN" sz="1200">
-                <a:solidFill>
-                  <a:sysClr val="windowText" lastClr="000000"/>
-                </a:solidFill>
-                <a:latin typeface="Quicksand Light" panose="00000400000000000000" pitchFamily="2" charset="0"/>
-                <a:ea typeface="仿宋" panose="02010609060101010101" pitchFamily="49" charset="-122"/>
-              </a:rPr>
-              <a:t>inline-block</a:t>
-            </a:r>
-            <a:endParaRPr lang="zh-CN" altLang="en-US" sz="1200">
-              <a:solidFill>
-                <a:sysClr val="windowText" lastClr="000000"/>
-              </a:solidFill>
-              <a:latin typeface="Quicksand Light" panose="00000400000000000000" pitchFamily="2" charset="0"/>
-              <a:ea typeface="仿宋" panose="02010609060101010101" pitchFamily="49" charset="-122"/>
-            </a:endParaRPr>
-          </a:p>
-        </p:txBody>
-      </p:sp>
-      <p:sp>
-        <p:nvSpPr>
-          <p:cNvPr id="19" name="矩形: 圆角 18">
-            <a:extLst>
-              <a:ext uri="{FF2B5EF4-FFF2-40B4-BE49-F238E27FC236}">
-                <a16:creationId xmlns:a16="http://schemas.microsoft.com/office/drawing/2014/main" id="{03E4ED18-20DE-9A2D-F3D6-31F089C7D92C}"/>
-              </a:ext>
-            </a:extLst>
-          </p:cNvPr>
-          <p:cNvSpPr/>
-          <p:nvPr/>
-        </p:nvSpPr>
-        <p:spPr>
-          <a:xfrm>
-            <a:off x="5806701" y="3877737"/>
-            <a:ext cx="1620000" cy="360000"/>
-          </a:xfrm>
-          <a:prstGeom prst="roundRect">
-            <a:avLst/>
-          </a:prstGeom>
-          <a:noFill/>
-          <a:ln w="12700">
-            <a:solidFill>
-              <a:schemeClr val="bg1">
-                <a:lumMod val="50000"/>
-              </a:schemeClr>
-            </a:solidFill>
-            <a:prstDash val="dash"/>
-          </a:ln>
-        </p:spPr>
-        <p:style>
-          <a:lnRef idx="2">
-            <a:schemeClr val="accent1">
-              <a:shade val="15000"/>
-            </a:schemeClr>
-          </a:lnRef>
-          <a:fillRef idx="1">
-            <a:schemeClr val="accent1"/>
-          </a:fillRef>
-          <a:effectRef idx="0">
-            <a:schemeClr val="accent1"/>
-          </a:effectRef>
-          <a:fontRef idx="minor">
-            <a:schemeClr val="lt1"/>
-          </a:fontRef>
-        </p:style>
-        <p:txBody>
-          <a:bodyPr rtlCol="0" anchor="ctr"/>
-          <a:lstStyle/>
-          <a:p>
-            <a:pPr algn="ctr"/>
-            <a:r>
-              <a:rPr lang="zh-CN" altLang="en-US" sz="1200">
-                <a:solidFill>
-                  <a:sysClr val="windowText" lastClr="000000"/>
-                </a:solidFill>
-                <a:latin typeface="Quicksand Light" panose="00000400000000000000" pitchFamily="2" charset="0"/>
-                <a:ea typeface="仿宋" panose="02010609060101010101" pitchFamily="49" charset="-122"/>
-              </a:rPr>
-              <a:t>网格 </a:t>
-            </a:r>
-            <a:r>
-              <a:rPr lang="en-US" altLang="zh-CN" sz="1200">
-                <a:solidFill>
-                  <a:sysClr val="windowText" lastClr="000000"/>
-                </a:solidFill>
-                <a:latin typeface="Quicksand Light" panose="00000400000000000000" pitchFamily="2" charset="0"/>
-                <a:ea typeface="仿宋" panose="02010609060101010101" pitchFamily="49" charset="-122"/>
-              </a:rPr>
-              <a:t>grid</a:t>
-            </a:r>
-            <a:endParaRPr lang="zh-CN" altLang="en-US" sz="1200">
-              <a:solidFill>
-                <a:sysClr val="windowText" lastClr="000000"/>
-              </a:solidFill>
-              <a:latin typeface="Quicksand Light" panose="00000400000000000000" pitchFamily="2" charset="0"/>
-              <a:ea typeface="仿宋" panose="02010609060101010101" pitchFamily="49" charset="-122"/>
-            </a:endParaRPr>
-          </a:p>
-        </p:txBody>
-      </p:sp>
-      <p:cxnSp>
-        <p:nvCxnSpPr>
-          <p:cNvPr id="22" name="连接符: 曲线 21">
-            <a:extLst>
-              <a:ext uri="{FF2B5EF4-FFF2-40B4-BE49-F238E27FC236}">
-                <a16:creationId xmlns:a16="http://schemas.microsoft.com/office/drawing/2014/main" id="{D99A8B47-6D7E-2EA4-8359-4BD4F43E0B70}"/>
-              </a:ext>
-            </a:extLst>
-          </p:cNvPr>
-          <p:cNvCxnSpPr>
-            <a:cxnSpLocks/>
-            <a:stCxn id="9" idx="3"/>
-            <a:endCxn id="7" idx="1"/>
-          </p:cNvCxnSpPr>
-          <p:nvPr/>
-        </p:nvCxnSpPr>
-        <p:spPr>
-          <a:xfrm>
-            <a:off x="5474575" y="3274613"/>
-            <a:ext cx="332126" cy="1271351"/>
-          </a:xfrm>
-          <a:prstGeom prst="curvedConnector3">
-            <a:avLst>
-              <a:gd name="adj1" fmla="val 50000"/>
-            </a:avLst>
-          </a:prstGeom>
-          <a:ln>
-            <a:solidFill>
-              <a:srgbClr val="EB3B5A"/>
-            </a:solidFill>
-          </a:ln>
-        </p:spPr>
-        <p:style>
-          <a:lnRef idx="1">
-            <a:schemeClr val="accent1"/>
-          </a:lnRef>
-          <a:fillRef idx="0">
-            <a:schemeClr val="accent1"/>
-          </a:fillRef>
-          <a:effectRef idx="0">
-            <a:schemeClr val="accent1"/>
-          </a:effectRef>
-          <a:fontRef idx="minor">
-            <a:schemeClr val="tx1"/>
-          </a:fontRef>
-        </p:style>
-      </p:cxnSp>
-      <p:cxnSp>
-        <p:nvCxnSpPr>
-          <p:cNvPr id="26" name="连接符: 曲线 25">
-            <a:extLst>
-              <a:ext uri="{FF2B5EF4-FFF2-40B4-BE49-F238E27FC236}">
-                <a16:creationId xmlns:a16="http://schemas.microsoft.com/office/drawing/2014/main" id="{46C1E541-71B5-21B2-7273-4EAC0DC70F03}"/>
-              </a:ext>
-            </a:extLst>
-          </p:cNvPr>
-          <p:cNvCxnSpPr>
-            <a:cxnSpLocks/>
-            <a:stCxn id="8" idx="1"/>
-            <a:endCxn id="2" idx="3"/>
-          </p:cNvCxnSpPr>
-          <p:nvPr/>
-        </p:nvCxnSpPr>
-        <p:spPr>
-          <a:xfrm rot="10800000">
-            <a:off x="4062449" y="3274613"/>
-            <a:ext cx="332126" cy="1147136"/>
-          </a:xfrm>
-          <a:prstGeom prst="curvedConnector3">
-            <a:avLst>
-              <a:gd name="adj1" fmla="val 50000"/>
-            </a:avLst>
-          </a:prstGeom>
-          <a:ln>
-            <a:solidFill>
-              <a:srgbClr val="3DC1D3"/>
-            </a:solidFill>
-          </a:ln>
-        </p:spPr>
-        <p:style>
-          <a:lnRef idx="1">
-            <a:schemeClr val="accent1"/>
-          </a:lnRef>
-          <a:fillRef idx="0">
-            <a:schemeClr val="accent1"/>
-          </a:fillRef>
-          <a:effectRef idx="0">
-            <a:schemeClr val="accent1"/>
-          </a:effectRef>
-          <a:fontRef idx="minor">
-            <a:schemeClr val="tx1"/>
-          </a:fontRef>
-        </p:style>
-      </p:cxnSp>
-      <p:sp>
-        <p:nvSpPr>
-          <p:cNvPr id="31" name="矩形: 圆角 30">
-            <a:extLst>
-              <a:ext uri="{FF2B5EF4-FFF2-40B4-BE49-F238E27FC236}">
-                <a16:creationId xmlns:a16="http://schemas.microsoft.com/office/drawing/2014/main" id="{E8C9255D-9B6B-1495-9667-75E062A30160}"/>
-              </a:ext>
-            </a:extLst>
-          </p:cNvPr>
-          <p:cNvSpPr/>
-          <p:nvPr/>
-        </p:nvSpPr>
-        <p:spPr>
-          <a:xfrm>
-            <a:off x="4394575" y="5388885"/>
-            <a:ext cx="1080000" cy="360000"/>
-          </a:xfrm>
-          <a:prstGeom prst="roundRect">
-            <a:avLst/>
-          </a:prstGeom>
-          <a:solidFill>
-            <a:schemeClr val="accent6">
-              <a:lumMod val="60000"/>
-              <a:lumOff val="40000"/>
-            </a:schemeClr>
-          </a:solidFill>
-          <a:ln w="12700">
-            <a:noFill/>
-          </a:ln>
-        </p:spPr>
-        <p:style>
-          <a:lnRef idx="2">
-            <a:schemeClr val="accent1">
-              <a:shade val="15000"/>
-            </a:schemeClr>
-          </a:lnRef>
-          <a:fillRef idx="1">
-            <a:schemeClr val="accent1"/>
-          </a:fillRef>
-          <a:effectRef idx="0">
-            <a:schemeClr val="accent1"/>
-          </a:effectRef>
-          <a:fontRef idx="minor">
-            <a:schemeClr val="lt1"/>
-          </a:fontRef>
-        </p:style>
-        <p:txBody>
-          <a:bodyPr rtlCol="0" anchor="ctr"/>
-          <a:lstStyle/>
-          <a:p>
-            <a:pPr algn="ctr"/>
-            <a:r>
-              <a:rPr lang="zh-CN" altLang="en-US" sz="1200">
-                <a:latin typeface="Quicksand Light" panose="00000400000000000000" pitchFamily="2" charset="0"/>
-                <a:ea typeface="仿宋" panose="02010609060101010101" pitchFamily="49" charset="-122"/>
-              </a:rPr>
-              <a:t>导航</a:t>
-            </a:r>
-          </a:p>
-        </p:txBody>
-      </p:sp>
-      <p:cxnSp>
-        <p:nvCxnSpPr>
-          <p:cNvPr id="32" name="连接符: 曲线 31">
-            <a:extLst>
-              <a:ext uri="{FF2B5EF4-FFF2-40B4-BE49-F238E27FC236}">
-                <a16:creationId xmlns:a16="http://schemas.microsoft.com/office/drawing/2014/main" id="{77355C97-960E-5F33-1A9D-C89E64984730}"/>
-              </a:ext>
-            </a:extLst>
-          </p:cNvPr>
-          <p:cNvCxnSpPr>
-            <a:cxnSpLocks/>
-            <a:stCxn id="31" idx="1"/>
-            <a:endCxn id="2" idx="3"/>
-          </p:cNvCxnSpPr>
-          <p:nvPr/>
-        </p:nvCxnSpPr>
-        <p:spPr>
-          <a:xfrm rot="10800000">
-            <a:off x="4062449" y="3274613"/>
-            <a:ext cx="332126" cy="2294272"/>
-          </a:xfrm>
-          <a:prstGeom prst="curvedConnector3">
-            <a:avLst>
-              <a:gd name="adj1" fmla="val 50000"/>
-            </a:avLst>
-          </a:prstGeom>
-          <a:ln>
-            <a:solidFill>
-              <a:srgbClr val="A9D18E"/>
-            </a:solidFill>
-          </a:ln>
-        </p:spPr>
-        <p:style>
-          <a:lnRef idx="1">
-            <a:schemeClr val="accent1"/>
-          </a:lnRef>
-          <a:fillRef idx="0">
-            <a:schemeClr val="accent1"/>
-          </a:fillRef>
-          <a:effectRef idx="0">
-            <a:schemeClr val="accent1"/>
-          </a:effectRef>
-          <a:fontRef idx="minor">
-            <a:schemeClr val="tx1"/>
-          </a:fontRef>
-        </p:style>
-      </p:cxnSp>
-      <p:sp>
-        <p:nvSpPr>
-          <p:cNvPr id="4" name="矩形: 圆角 3">
-            <a:extLst>
-              <a:ext uri="{FF2B5EF4-FFF2-40B4-BE49-F238E27FC236}">
-                <a16:creationId xmlns:a16="http://schemas.microsoft.com/office/drawing/2014/main" id="{F804F753-E482-E059-B0E0-437F4CB1E50C}"/>
-              </a:ext>
-            </a:extLst>
-          </p:cNvPr>
-          <p:cNvSpPr/>
-          <p:nvPr/>
-        </p:nvSpPr>
-        <p:spPr>
-          <a:xfrm>
-            <a:off x="5806701" y="5164768"/>
-            <a:ext cx="1620000" cy="360000"/>
-          </a:xfrm>
-          <a:prstGeom prst="roundRect">
-            <a:avLst/>
-          </a:prstGeom>
-          <a:noFill/>
-          <a:ln w="12700">
-            <a:solidFill>
-              <a:schemeClr val="accent6">
-                <a:lumMod val="60000"/>
-                <a:lumOff val="40000"/>
-              </a:schemeClr>
-            </a:solidFill>
-          </a:ln>
-        </p:spPr>
-        <p:style>
-          <a:lnRef idx="2">
-            <a:schemeClr val="accent1">
-              <a:shade val="15000"/>
-            </a:schemeClr>
-          </a:lnRef>
-          <a:fillRef idx="1">
-            <a:schemeClr val="accent1"/>
-          </a:fillRef>
-          <a:effectRef idx="0">
-            <a:schemeClr val="accent1"/>
-          </a:effectRef>
-          <a:fontRef idx="minor">
-            <a:schemeClr val="lt1"/>
-          </a:fontRef>
-        </p:style>
-        <p:txBody>
-          <a:bodyPr rtlCol="0" anchor="ctr"/>
-          <a:lstStyle/>
-          <a:p>
-            <a:pPr algn="ctr"/>
-            <a:r>
-              <a:rPr lang="zh-CN" altLang="en-US" sz="1200">
-                <a:solidFill>
-                  <a:sysClr val="windowText" lastClr="000000"/>
-                </a:solidFill>
-                <a:latin typeface="Quicksand Light" panose="00000400000000000000" pitchFamily="2" charset="0"/>
-                <a:ea typeface="仿宋" panose="02010609060101010101" pitchFamily="49" charset="-122"/>
-              </a:rPr>
-              <a:t>一个滚动视图</a:t>
-            </a:r>
-          </a:p>
-        </p:txBody>
-      </p:sp>
-      <p:sp>
-        <p:nvSpPr>
-          <p:cNvPr id="5" name="矩形: 圆角 4">
-            <a:extLst>
-              <a:ext uri="{FF2B5EF4-FFF2-40B4-BE49-F238E27FC236}">
-                <a16:creationId xmlns:a16="http://schemas.microsoft.com/office/drawing/2014/main" id="{2F218F90-1527-32EF-A4D6-D219CF5B8F16}"/>
-              </a:ext>
-            </a:extLst>
-          </p:cNvPr>
-          <p:cNvSpPr/>
-          <p:nvPr/>
-        </p:nvSpPr>
-        <p:spPr>
-          <a:xfrm>
-            <a:off x="5806701" y="5613003"/>
-            <a:ext cx="1620000" cy="360000"/>
-          </a:xfrm>
-          <a:prstGeom prst="roundRect">
-            <a:avLst/>
-          </a:prstGeom>
-          <a:noFill/>
-          <a:ln w="12700">
-            <a:solidFill>
-              <a:schemeClr val="accent6">
-                <a:lumMod val="60000"/>
-                <a:lumOff val="40000"/>
-              </a:schemeClr>
-            </a:solidFill>
-            <a:prstDash val="dash"/>
-          </a:ln>
-        </p:spPr>
-        <p:style>
-          <a:lnRef idx="2">
-            <a:schemeClr val="accent1">
-              <a:shade val="15000"/>
-            </a:schemeClr>
-          </a:lnRef>
-          <a:fillRef idx="1">
-            <a:schemeClr val="accent1"/>
-          </a:fillRef>
-          <a:effectRef idx="0">
-            <a:schemeClr val="accent1"/>
-          </a:effectRef>
-          <a:fontRef idx="minor">
-            <a:schemeClr val="lt1"/>
-          </a:fontRef>
-        </p:style>
-        <p:txBody>
-          <a:bodyPr rtlCol="0" anchor="ctr"/>
-          <a:lstStyle/>
-          <a:p>
-            <a:pPr algn="ctr"/>
-            <a:r>
-              <a:rPr lang="zh-CN" altLang="en-US" sz="1200">
-                <a:solidFill>
-                  <a:sysClr val="windowText" lastClr="000000"/>
-                </a:solidFill>
-                <a:latin typeface="Quicksand Light" panose="00000400000000000000" pitchFamily="2" charset="0"/>
-                <a:ea typeface="仿宋" panose="02010609060101010101" pitchFamily="49" charset="-122"/>
-              </a:rPr>
-              <a:t>二个滚动视图</a:t>
-            </a:r>
-          </a:p>
-        </p:txBody>
-      </p:sp>
-      <p:cxnSp>
-        <p:nvCxnSpPr>
-          <p:cNvPr id="6" name="连接符: 曲线 5">
-            <a:extLst>
-              <a:ext uri="{FF2B5EF4-FFF2-40B4-BE49-F238E27FC236}">
-                <a16:creationId xmlns:a16="http://schemas.microsoft.com/office/drawing/2014/main" id="{A07E7128-4DE2-E2DD-961D-C1575C1BBE3A}"/>
-              </a:ext>
-            </a:extLst>
-          </p:cNvPr>
-          <p:cNvCxnSpPr>
-            <a:cxnSpLocks/>
-            <a:stCxn id="31" idx="3"/>
-            <a:endCxn id="4" idx="1"/>
-          </p:cNvCxnSpPr>
-          <p:nvPr/>
-        </p:nvCxnSpPr>
-        <p:spPr>
-          <a:xfrm flipV="1">
-            <a:off x="5474575" y="5344768"/>
-            <a:ext cx="332126" cy="224117"/>
-          </a:xfrm>
-          <a:prstGeom prst="curvedConnector3">
-            <a:avLst>
-              <a:gd name="adj1" fmla="val 50000"/>
-            </a:avLst>
-          </a:prstGeom>
-          <a:ln>
-            <a:solidFill>
-              <a:schemeClr val="accent6">
-                <a:lumMod val="60000"/>
-                <a:lumOff val="40000"/>
-              </a:schemeClr>
-            </a:solidFill>
-          </a:ln>
-        </p:spPr>
-        <p:style>
-          <a:lnRef idx="1">
-            <a:schemeClr val="accent1"/>
-          </a:lnRef>
-          <a:fillRef idx="0">
-            <a:schemeClr val="accent1"/>
-          </a:fillRef>
-          <a:effectRef idx="0">
-            <a:schemeClr val="accent1"/>
-          </a:effectRef>
-          <a:fontRef idx="minor">
-            <a:schemeClr val="tx1"/>
-          </a:fontRef>
-        </p:style>
-      </p:cxnSp>
-      <p:cxnSp>
-        <p:nvCxnSpPr>
-          <p:cNvPr id="12" name="连接符: 曲线 11">
-            <a:extLst>
-              <a:ext uri="{FF2B5EF4-FFF2-40B4-BE49-F238E27FC236}">
-                <a16:creationId xmlns:a16="http://schemas.microsoft.com/office/drawing/2014/main" id="{5FD7AEAF-CD97-C450-BBC1-2641DC43007D}"/>
-              </a:ext>
-            </a:extLst>
-          </p:cNvPr>
-          <p:cNvCxnSpPr>
-            <a:cxnSpLocks/>
-            <a:stCxn id="31" idx="3"/>
-            <a:endCxn id="5" idx="1"/>
-          </p:cNvCxnSpPr>
-          <p:nvPr/>
-        </p:nvCxnSpPr>
-        <p:spPr>
-          <a:xfrm>
-            <a:off x="5474575" y="5568885"/>
-            <a:ext cx="332126" cy="224118"/>
-          </a:xfrm>
-          <a:prstGeom prst="curvedConnector3">
-            <a:avLst>
-              <a:gd name="adj1" fmla="val 50000"/>
-            </a:avLst>
-          </a:prstGeom>
-          <a:ln>
-            <a:solidFill>
-              <a:schemeClr val="accent6">
-                <a:lumMod val="60000"/>
-                <a:lumOff val="40000"/>
-              </a:schemeClr>
-            </a:solidFill>
-          </a:ln>
-        </p:spPr>
-        <p:style>
-          <a:lnRef idx="1">
-            <a:schemeClr val="accent1"/>
-          </a:lnRef>
-          <a:fillRef idx="0">
-            <a:schemeClr val="accent1"/>
-          </a:fillRef>
-          <a:effectRef idx="0">
-            <a:schemeClr val="accent1"/>
-          </a:effectRef>
-          <a:fontRef idx="minor">
-            <a:schemeClr val="tx1"/>
-          </a:fontRef>
-        </p:style>
-      </p:cxnSp>
-      <p:sp>
-        <p:nvSpPr>
-          <p:cNvPr id="7" name="矩形: 圆角 6">
-            <a:extLst>
-              <a:ext uri="{FF2B5EF4-FFF2-40B4-BE49-F238E27FC236}">
-                <a16:creationId xmlns:a16="http://schemas.microsoft.com/office/drawing/2014/main" id="{383E7043-36AC-CBD4-DF24-A727B7D0B0BD}"/>
-              </a:ext>
-            </a:extLst>
-          </p:cNvPr>
-          <p:cNvSpPr/>
-          <p:nvPr/>
-        </p:nvSpPr>
-        <p:spPr>
-          <a:xfrm>
-            <a:off x="5806701" y="4365964"/>
-            <a:ext cx="1620000" cy="360000"/>
-          </a:xfrm>
-          <a:prstGeom prst="roundRect">
-            <a:avLst/>
-          </a:prstGeom>
-          <a:noFill/>
-          <a:ln w="12700">
-            <a:solidFill>
-              <a:schemeClr val="bg1">
-                <a:lumMod val="50000"/>
-              </a:schemeClr>
-            </a:solidFill>
-            <a:prstDash val="dash"/>
-          </a:ln>
-        </p:spPr>
-        <p:style>
-          <a:lnRef idx="2">
-            <a:schemeClr val="accent1">
-              <a:shade val="15000"/>
-            </a:schemeClr>
-          </a:lnRef>
-          <a:fillRef idx="1">
-            <a:schemeClr val="accent1"/>
-          </a:fillRef>
-          <a:effectRef idx="0">
-            <a:schemeClr val="accent1"/>
-          </a:effectRef>
-          <a:fontRef idx="minor">
-            <a:schemeClr val="lt1"/>
-          </a:fontRef>
-        </p:style>
-        <p:txBody>
-          <a:bodyPr rtlCol="0" anchor="ctr"/>
-          <a:lstStyle/>
-          <a:p>
-            <a:pPr algn="ctr"/>
-            <a:r>
-              <a:rPr lang="zh-CN" altLang="en-US" sz="1200">
-                <a:solidFill>
-                  <a:sysClr val="windowText" lastClr="000000"/>
-                </a:solidFill>
-                <a:latin typeface="Quicksand Light" panose="00000400000000000000" pitchFamily="2" charset="0"/>
-                <a:ea typeface="仿宋" panose="02010609060101010101" pitchFamily="49" charset="-122"/>
-              </a:rPr>
-              <a:t>浮动 </a:t>
-            </a:r>
-            <a:r>
-              <a:rPr lang="en-US" altLang="zh-CN" sz="1200">
-                <a:solidFill>
-                  <a:sysClr val="windowText" lastClr="000000"/>
-                </a:solidFill>
-                <a:latin typeface="Quicksand Light" panose="00000400000000000000" pitchFamily="2" charset="0"/>
-                <a:ea typeface="仿宋" panose="02010609060101010101" pitchFamily="49" charset="-122"/>
-              </a:rPr>
-              <a:t>float</a:t>
-            </a:r>
-            <a:endParaRPr lang="zh-CN" altLang="en-US" sz="1200">
-              <a:solidFill>
-                <a:sysClr val="windowText" lastClr="000000"/>
-              </a:solidFill>
-              <a:latin typeface="Quicksand Light" panose="00000400000000000000" pitchFamily="2" charset="0"/>
-              <a:ea typeface="仿宋" panose="02010609060101010101" pitchFamily="49" charset="-122"/>
-            </a:endParaRPr>
-          </a:p>
-        </p:txBody>
-      </p:sp>
+      <p:pic>
+        <p:nvPicPr>
+          <p:cNvPr id="3" name="图片 2">
+            <a:extLst>
+              <a:ext uri="{FF2B5EF4-FFF2-40B4-BE49-F238E27FC236}">
+                <a16:creationId xmlns:a16="http://schemas.microsoft.com/office/drawing/2014/main" id="{7ECC09FE-D9D2-2E76-0948-E1F27A08CD34}"/>
+              </a:ext>
+            </a:extLst>
+          </p:cNvPr>
+          <p:cNvPicPr>
+            <a:picLocks noChangeAspect="1"/>
+          </p:cNvPicPr>
+          <p:nvPr/>
+        </p:nvPicPr>
+        <p:blipFill>
+          <a:blip r:embed="rId2"/>
+          <a:stretch>
+            <a:fillRect/>
+          </a:stretch>
+        </p:blipFill>
+        <p:spPr>
+          <a:xfrm>
+            <a:off x="5043340" y="1842866"/>
+            <a:ext cx="2105319" cy="3172268"/>
+          </a:xfrm>
+          <a:prstGeom prst="rect">
+            <a:avLst/>
+          </a:prstGeom>
+        </p:spPr>
+      </p:pic>
     </p:spTree>
     <p:extLst>
       <p:ext uri="{BB962C8B-B14F-4D97-AF65-F5344CB8AC3E}">
-        <p14:creationId xmlns:p14="http://schemas.microsoft.com/office/powerpoint/2010/main" val="2483548129"/>
+        <p14:creationId xmlns:p14="http://schemas.microsoft.com/office/powerpoint/2010/main" val="2672122669"/>
       </p:ext>
     </p:extLst>
   </p:cSld>
@@ -28237,66 +26567,6 @@
           <a:chExt cx="0" cy="0"/>
         </a:xfrm>
       </p:grpSpPr>
-      <p:pic>
-        <p:nvPicPr>
-          <p:cNvPr id="3" name="图片 2">
-            <a:extLst>
-              <a:ext uri="{FF2B5EF4-FFF2-40B4-BE49-F238E27FC236}">
-                <a16:creationId xmlns:a16="http://schemas.microsoft.com/office/drawing/2014/main" id="{7ECC09FE-D9D2-2E76-0948-E1F27A08CD34}"/>
-              </a:ext>
-            </a:extLst>
-          </p:cNvPr>
-          <p:cNvPicPr>
-            <a:picLocks noChangeAspect="1"/>
-          </p:cNvPicPr>
-          <p:nvPr/>
-        </p:nvPicPr>
-        <p:blipFill>
-          <a:blip r:embed="rId2"/>
-          <a:stretch>
-            <a:fillRect/>
-          </a:stretch>
-        </p:blipFill>
-        <p:spPr>
-          <a:xfrm>
-            <a:off x="5043340" y="1842866"/>
-            <a:ext cx="2105319" cy="3172268"/>
-          </a:xfrm>
-          <a:prstGeom prst="rect">
-            <a:avLst/>
-          </a:prstGeom>
-        </p:spPr>
-      </p:pic>
-    </p:spTree>
-    <p:extLst>
-      <p:ext uri="{BB962C8B-B14F-4D97-AF65-F5344CB8AC3E}">
-        <p14:creationId xmlns:p14="http://schemas.microsoft.com/office/powerpoint/2010/main" val="2672122669"/>
-      </p:ext>
-    </p:extLst>
-  </p:cSld>
-  <p:clrMapOvr>
-    <a:masterClrMapping/>
-  </p:clrMapOvr>
-</p:sld>
-</file>
-
-<file path=ppt/slides/slide31.xml><?xml version="1.0" encoding="utf-8"?>
-<p:sld xmlns:a="http://schemas.openxmlformats.org/drawingml/2006/main" xmlns:r="http://schemas.openxmlformats.org/officeDocument/2006/relationships" xmlns:p="http://schemas.openxmlformats.org/presentationml/2006/main">
-  <p:cSld>
-    <p:spTree>
-      <p:nvGrpSpPr>
-        <p:cNvPr id="1" name=""/>
-        <p:cNvGrpSpPr/>
-        <p:nvPr/>
-      </p:nvGrpSpPr>
-      <p:grpSpPr>
-        <a:xfrm>
-          <a:off x="0" y="0"/>
-          <a:ext cx="0" cy="0"/>
-          <a:chOff x="0" y="0"/>
-          <a:chExt cx="0" cy="0"/>
-        </a:xfrm>
-      </p:grpSpPr>
       <p:sp>
         <p:nvSpPr>
           <p:cNvPr id="2" name="矩形: 圆角 1">
@@ -28683,7 +26953,7 @@
 </p:sld>
 </file>
 
-<file path=ppt/slides/slide32.xml><?xml version="1.0" encoding="utf-8"?>
+<file path=ppt/slides/slide31.xml><?xml version="1.0" encoding="utf-8"?>
 <p:sld xmlns:a="http://schemas.openxmlformats.org/drawingml/2006/main" xmlns:r="http://schemas.openxmlformats.org/officeDocument/2006/relationships" xmlns:p="http://schemas.openxmlformats.org/presentationml/2006/main">
   <p:cSld>
     <p:spTree>
@@ -33694,776 +31964,6 @@
           <a:chExt cx="0" cy="0"/>
         </a:xfrm>
       </p:grpSpPr>
-      <p:cxnSp>
-        <p:nvCxnSpPr>
-          <p:cNvPr id="7" name="直接箭头连接符 6">
-            <a:extLst>
-              <a:ext uri="{FF2B5EF4-FFF2-40B4-BE49-F238E27FC236}">
-                <a16:creationId xmlns:a16="http://schemas.microsoft.com/office/drawing/2014/main" id="{C80FF363-BC0E-F513-0462-96F884DB1FDC}"/>
-              </a:ext>
-            </a:extLst>
-          </p:cNvPr>
-          <p:cNvCxnSpPr>
-            <a:cxnSpLocks/>
-          </p:cNvCxnSpPr>
-          <p:nvPr/>
-        </p:nvCxnSpPr>
-        <p:spPr>
-          <a:xfrm>
-            <a:off x="3851142" y="1691563"/>
-            <a:ext cx="0" cy="3966287"/>
-          </a:xfrm>
-          <a:prstGeom prst="straightConnector1">
-            <a:avLst/>
-          </a:prstGeom>
-          <a:ln w="12700">
-            <a:solidFill>
-              <a:schemeClr val="tx1"/>
-            </a:solidFill>
-            <a:tailEnd type="triangle"/>
-          </a:ln>
-        </p:spPr>
-        <p:style>
-          <a:lnRef idx="1">
-            <a:schemeClr val="accent1"/>
-          </a:lnRef>
-          <a:fillRef idx="0">
-            <a:schemeClr val="accent1"/>
-          </a:fillRef>
-          <a:effectRef idx="0">
-            <a:schemeClr val="accent1"/>
-          </a:effectRef>
-          <a:fontRef idx="minor">
-            <a:schemeClr val="tx1"/>
-          </a:fontRef>
-        </p:style>
-      </p:cxnSp>
-      <p:cxnSp>
-        <p:nvCxnSpPr>
-          <p:cNvPr id="8" name="直接箭头连接符 7">
-            <a:extLst>
-              <a:ext uri="{FF2B5EF4-FFF2-40B4-BE49-F238E27FC236}">
-                <a16:creationId xmlns:a16="http://schemas.microsoft.com/office/drawing/2014/main" id="{22E1B91C-93FA-1433-6508-4A43CD8D807B}"/>
-              </a:ext>
-            </a:extLst>
-          </p:cNvPr>
-          <p:cNvCxnSpPr>
-            <a:cxnSpLocks/>
-          </p:cNvCxnSpPr>
-          <p:nvPr/>
-        </p:nvCxnSpPr>
-        <p:spPr>
-          <a:xfrm>
-            <a:off x="7298041" y="1691563"/>
-            <a:ext cx="0" cy="3966287"/>
-          </a:xfrm>
-          <a:prstGeom prst="straightConnector1">
-            <a:avLst/>
-          </a:prstGeom>
-          <a:ln w="12700">
-            <a:solidFill>
-              <a:schemeClr val="tx1"/>
-            </a:solidFill>
-            <a:tailEnd type="triangle"/>
-          </a:ln>
-        </p:spPr>
-        <p:style>
-          <a:lnRef idx="1">
-            <a:schemeClr val="accent1"/>
-          </a:lnRef>
-          <a:fillRef idx="0">
-            <a:schemeClr val="accent1"/>
-          </a:fillRef>
-          <a:effectRef idx="0">
-            <a:schemeClr val="accent1"/>
-          </a:effectRef>
-          <a:fontRef idx="minor">
-            <a:schemeClr val="tx1"/>
-          </a:fontRef>
-        </p:style>
-      </p:cxnSp>
-      <p:sp>
-        <p:nvSpPr>
-          <p:cNvPr id="9" name="文本框 8">
-            <a:extLst>
-              <a:ext uri="{FF2B5EF4-FFF2-40B4-BE49-F238E27FC236}">
-                <a16:creationId xmlns:a16="http://schemas.microsoft.com/office/drawing/2014/main" id="{A3720D08-6F14-38E6-12AA-2F942A367B46}"/>
-              </a:ext>
-            </a:extLst>
-          </p:cNvPr>
-          <p:cNvSpPr txBox="1"/>
-          <p:nvPr/>
-        </p:nvSpPr>
-        <p:spPr>
-          <a:xfrm>
-            <a:off x="3387554" y="1885950"/>
-            <a:ext cx="463588" cy="276999"/>
-          </a:xfrm>
-          <a:prstGeom prst="rect">
-            <a:avLst/>
-          </a:prstGeom>
-          <a:noFill/>
-        </p:spPr>
-        <p:txBody>
-          <a:bodyPr wrap="none" rtlCol="0">
-            <a:spAutoFit/>
-          </a:bodyPr>
-          <a:lstStyle/>
-          <a:p>
-            <a:r>
-              <a:rPr lang="en-US" altLang="zh-CN" sz="1200" dirty="0">
-                <a:latin typeface="Courier New" panose="02070309020205020404" pitchFamily="49" charset="0"/>
-                <a:ea typeface="微软雅黑" panose="020B0503020204020204" pitchFamily="34" charset="-122"/>
-                <a:cs typeface="Courier New" panose="02070309020205020404" pitchFamily="49" charset="0"/>
-              </a:rPr>
-              <a:t>Bob</a:t>
-            </a:r>
-            <a:endParaRPr lang="zh-CN" altLang="en-US" sz="1200" dirty="0">
-              <a:latin typeface="Courier New" panose="02070309020205020404" pitchFamily="49" charset="0"/>
-              <a:ea typeface="微软雅黑" panose="020B0503020204020204" pitchFamily="34" charset="-122"/>
-              <a:cs typeface="Courier New" panose="02070309020205020404" pitchFamily="49" charset="0"/>
-            </a:endParaRPr>
-          </a:p>
-        </p:txBody>
-      </p:sp>
-      <p:sp>
-        <p:nvSpPr>
-          <p:cNvPr id="10" name="文本框 9">
-            <a:extLst>
-              <a:ext uri="{FF2B5EF4-FFF2-40B4-BE49-F238E27FC236}">
-                <a16:creationId xmlns:a16="http://schemas.microsoft.com/office/drawing/2014/main" id="{C2D2F0C1-4F48-4565-097F-21C3E7248276}"/>
-              </a:ext>
-            </a:extLst>
-          </p:cNvPr>
-          <p:cNvSpPr txBox="1"/>
-          <p:nvPr/>
-        </p:nvSpPr>
-        <p:spPr>
-          <a:xfrm>
-            <a:off x="7298041" y="1885950"/>
-            <a:ext cx="649537" cy="276999"/>
-          </a:xfrm>
-          <a:prstGeom prst="rect">
-            <a:avLst/>
-          </a:prstGeom>
-          <a:noFill/>
-        </p:spPr>
-        <p:txBody>
-          <a:bodyPr wrap="none" rtlCol="0">
-            <a:spAutoFit/>
-          </a:bodyPr>
-          <a:lstStyle/>
-          <a:p>
-            <a:r>
-              <a:rPr lang="en-US" altLang="zh-CN" sz="1200" dirty="0">
-                <a:latin typeface="Courier New" panose="02070309020205020404" pitchFamily="49" charset="0"/>
-                <a:ea typeface="微软雅黑" panose="020B0503020204020204" pitchFamily="34" charset="-122"/>
-                <a:cs typeface="Courier New" panose="02070309020205020404" pitchFamily="49" charset="0"/>
-              </a:rPr>
-              <a:t>Alice</a:t>
-            </a:r>
-            <a:endParaRPr lang="zh-CN" altLang="en-US" sz="1200" dirty="0">
-              <a:latin typeface="Courier New" panose="02070309020205020404" pitchFamily="49" charset="0"/>
-              <a:ea typeface="微软雅黑" panose="020B0503020204020204" pitchFamily="34" charset="-122"/>
-              <a:cs typeface="Courier New" panose="02070309020205020404" pitchFamily="49" charset="0"/>
-            </a:endParaRPr>
-          </a:p>
-        </p:txBody>
-      </p:sp>
-      <p:sp>
-        <p:nvSpPr>
-          <p:cNvPr id="11" name="文本框 10">
-            <a:extLst>
-              <a:ext uri="{FF2B5EF4-FFF2-40B4-BE49-F238E27FC236}">
-                <a16:creationId xmlns:a16="http://schemas.microsoft.com/office/drawing/2014/main" id="{2AB7995F-7501-3414-56E0-2CC9D159BB4D}"/>
-              </a:ext>
-            </a:extLst>
-          </p:cNvPr>
-          <p:cNvSpPr txBox="1"/>
-          <p:nvPr/>
-        </p:nvSpPr>
-        <p:spPr>
-          <a:xfrm>
-            <a:off x="3855211" y="2238375"/>
-            <a:ext cx="3438762" cy="276999"/>
-          </a:xfrm>
-          <a:prstGeom prst="rect">
-            <a:avLst/>
-          </a:prstGeom>
-          <a:noFill/>
-        </p:spPr>
-        <p:txBody>
-          <a:bodyPr wrap="none" rtlCol="0">
-            <a:spAutoFit/>
-          </a:bodyPr>
-          <a:lstStyle/>
-          <a:p>
-            <a:pPr algn="l"/>
-            <a:r>
-              <a:rPr lang="en-US" altLang="zh-CN" sz="1200" dirty="0">
-                <a:latin typeface="Courier New" panose="02070309020205020404" pitchFamily="49" charset="0"/>
-                <a:ea typeface="微软雅黑" panose="020B0503020204020204" pitchFamily="34" charset="-122"/>
-                <a:cs typeface="Courier New" panose="02070309020205020404" pitchFamily="49" charset="0"/>
-              </a:rPr>
-              <a:t>I would like to talk to you, Alice.</a:t>
-            </a:r>
-            <a:endParaRPr lang="zh-CN" altLang="en-US" sz="1200" dirty="0">
-              <a:latin typeface="Courier New" panose="02070309020205020404" pitchFamily="49" charset="0"/>
-              <a:ea typeface="微软雅黑" panose="020B0503020204020204" pitchFamily="34" charset="-122"/>
-              <a:cs typeface="Courier New" panose="02070309020205020404" pitchFamily="49" charset="0"/>
-            </a:endParaRPr>
-          </a:p>
-        </p:txBody>
-      </p:sp>
-      <p:sp>
-        <p:nvSpPr>
-          <p:cNvPr id="12" name="文本框 11">
-            <a:extLst>
-              <a:ext uri="{FF2B5EF4-FFF2-40B4-BE49-F238E27FC236}">
-                <a16:creationId xmlns:a16="http://schemas.microsoft.com/office/drawing/2014/main" id="{D90B4BF5-F870-456B-089B-598433C770CC}"/>
-              </a:ext>
-            </a:extLst>
-          </p:cNvPr>
-          <p:cNvSpPr txBox="1"/>
-          <p:nvPr/>
-        </p:nvSpPr>
-        <p:spPr>
-          <a:xfrm>
-            <a:off x="4552518" y="3614738"/>
-            <a:ext cx="2044149" cy="276999"/>
-          </a:xfrm>
-          <a:prstGeom prst="rect">
-            <a:avLst/>
-          </a:prstGeom>
-          <a:noFill/>
-        </p:spPr>
-        <p:txBody>
-          <a:bodyPr wrap="none" rtlCol="0">
-            <a:spAutoFit/>
-          </a:bodyPr>
-          <a:lstStyle/>
-          <a:p>
-            <a:pPr algn="l"/>
-            <a:r>
-              <a:rPr lang="en-US" altLang="zh-CN" sz="1200" dirty="0">
-                <a:latin typeface="Courier New" panose="02070309020205020404" pitchFamily="49" charset="0"/>
-                <a:ea typeface="微软雅黑" panose="020B0503020204020204" pitchFamily="34" charset="-122"/>
-                <a:cs typeface="Courier New" panose="02070309020205020404" pitchFamily="49" charset="0"/>
-              </a:rPr>
-              <a:t>Ok, let’s talk. Bob.</a:t>
-            </a:r>
-            <a:endParaRPr lang="zh-CN" altLang="en-US" sz="1200" dirty="0">
-              <a:latin typeface="Courier New" panose="02070309020205020404" pitchFamily="49" charset="0"/>
-              <a:ea typeface="微软雅黑" panose="020B0503020204020204" pitchFamily="34" charset="-122"/>
-              <a:cs typeface="Courier New" panose="02070309020205020404" pitchFamily="49" charset="0"/>
-            </a:endParaRPr>
-          </a:p>
-        </p:txBody>
-      </p:sp>
-      <p:sp>
-        <p:nvSpPr>
-          <p:cNvPr id="13" name="文本框 12">
-            <a:extLst>
-              <a:ext uri="{FF2B5EF4-FFF2-40B4-BE49-F238E27FC236}">
-                <a16:creationId xmlns:a16="http://schemas.microsoft.com/office/drawing/2014/main" id="{2D5DC4C4-2CE4-FDE6-CB90-80F89118B614}"/>
-              </a:ext>
-            </a:extLst>
-          </p:cNvPr>
-          <p:cNvSpPr txBox="1"/>
-          <p:nvPr/>
-        </p:nvSpPr>
-        <p:spPr>
-          <a:xfrm>
-            <a:off x="4506030" y="4991100"/>
-            <a:ext cx="2137124" cy="276999"/>
-          </a:xfrm>
-          <a:prstGeom prst="rect">
-            <a:avLst/>
-          </a:prstGeom>
-          <a:noFill/>
-        </p:spPr>
-        <p:txBody>
-          <a:bodyPr wrap="none" rtlCol="0">
-            <a:spAutoFit/>
-          </a:bodyPr>
-          <a:lstStyle/>
-          <a:p>
-            <a:pPr algn="l"/>
-            <a:r>
-              <a:rPr lang="en-US" altLang="zh-CN" sz="1200" dirty="0">
-                <a:latin typeface="Courier New" panose="02070309020205020404" pitchFamily="49" charset="0"/>
-                <a:ea typeface="微软雅黑" panose="020B0503020204020204" pitchFamily="34" charset="-122"/>
-                <a:cs typeface="Courier New" panose="02070309020205020404" pitchFamily="49" charset="0"/>
-              </a:rPr>
-              <a:t>Ok, thank you. Alice.</a:t>
-            </a:r>
-            <a:endParaRPr lang="zh-CN" altLang="en-US" sz="1200" dirty="0">
-              <a:latin typeface="Courier New" panose="02070309020205020404" pitchFamily="49" charset="0"/>
-              <a:ea typeface="微软雅黑" panose="020B0503020204020204" pitchFamily="34" charset="-122"/>
-              <a:cs typeface="Courier New" panose="02070309020205020404" pitchFamily="49" charset="0"/>
-            </a:endParaRPr>
-          </a:p>
-        </p:txBody>
-      </p:sp>
-      <p:cxnSp>
-        <p:nvCxnSpPr>
-          <p:cNvPr id="15" name="直接箭头连接符 14">
-            <a:extLst>
-              <a:ext uri="{FF2B5EF4-FFF2-40B4-BE49-F238E27FC236}">
-                <a16:creationId xmlns:a16="http://schemas.microsoft.com/office/drawing/2014/main" id="{32FF09AF-22D3-1EEF-0F0D-F8D9ECD231A4}"/>
-              </a:ext>
-            </a:extLst>
-          </p:cNvPr>
-          <p:cNvCxnSpPr>
-            <a:cxnSpLocks/>
-          </p:cNvCxnSpPr>
-          <p:nvPr/>
-        </p:nvCxnSpPr>
-        <p:spPr>
-          <a:xfrm>
-            <a:off x="4057649" y="2515374"/>
-            <a:ext cx="2880000" cy="0"/>
-          </a:xfrm>
-          <a:prstGeom prst="straightConnector1">
-            <a:avLst/>
-          </a:prstGeom>
-          <a:ln>
-            <a:solidFill>
-              <a:schemeClr val="tx1"/>
-            </a:solidFill>
-            <a:tailEnd type="triangle"/>
-          </a:ln>
-        </p:spPr>
-        <p:style>
-          <a:lnRef idx="1">
-            <a:schemeClr val="accent1"/>
-          </a:lnRef>
-          <a:fillRef idx="0">
-            <a:schemeClr val="accent1"/>
-          </a:fillRef>
-          <a:effectRef idx="0">
-            <a:schemeClr val="accent1"/>
-          </a:effectRef>
-          <a:fontRef idx="minor">
-            <a:schemeClr val="tx1"/>
-          </a:fontRef>
-        </p:style>
-      </p:cxnSp>
-      <p:cxnSp>
-        <p:nvCxnSpPr>
-          <p:cNvPr id="16" name="直接箭头连接符 15">
-            <a:extLst>
-              <a:ext uri="{FF2B5EF4-FFF2-40B4-BE49-F238E27FC236}">
-                <a16:creationId xmlns:a16="http://schemas.microsoft.com/office/drawing/2014/main" id="{D3A9630C-36DC-3779-A1FB-26718B3A1CA9}"/>
-              </a:ext>
-            </a:extLst>
-          </p:cNvPr>
-          <p:cNvCxnSpPr>
-            <a:cxnSpLocks/>
-          </p:cNvCxnSpPr>
-          <p:nvPr/>
-        </p:nvCxnSpPr>
-        <p:spPr>
-          <a:xfrm>
-            <a:off x="4057649" y="5268099"/>
-            <a:ext cx="2880000" cy="0"/>
-          </a:xfrm>
-          <a:prstGeom prst="straightConnector1">
-            <a:avLst/>
-          </a:prstGeom>
-          <a:ln>
-            <a:solidFill>
-              <a:schemeClr val="tx1"/>
-            </a:solidFill>
-            <a:tailEnd type="triangle"/>
-          </a:ln>
-        </p:spPr>
-        <p:style>
-          <a:lnRef idx="1">
-            <a:schemeClr val="accent1"/>
-          </a:lnRef>
-          <a:fillRef idx="0">
-            <a:schemeClr val="accent1"/>
-          </a:fillRef>
-          <a:effectRef idx="0">
-            <a:schemeClr val="accent1"/>
-          </a:effectRef>
-          <a:fontRef idx="minor">
-            <a:schemeClr val="tx1"/>
-          </a:fontRef>
-        </p:style>
-      </p:cxnSp>
-      <p:cxnSp>
-        <p:nvCxnSpPr>
-          <p:cNvPr id="17" name="直接箭头连接符 16">
-            <a:extLst>
-              <a:ext uri="{FF2B5EF4-FFF2-40B4-BE49-F238E27FC236}">
-                <a16:creationId xmlns:a16="http://schemas.microsoft.com/office/drawing/2014/main" id="{2A8D5AF9-308A-50B4-85CD-E6F7CC8B17FA}"/>
-              </a:ext>
-            </a:extLst>
-          </p:cNvPr>
-          <p:cNvCxnSpPr>
-            <a:cxnSpLocks/>
-          </p:cNvCxnSpPr>
-          <p:nvPr/>
-        </p:nvCxnSpPr>
-        <p:spPr>
-          <a:xfrm flipH="1">
-            <a:off x="4057649" y="3891737"/>
-            <a:ext cx="2880000" cy="0"/>
-          </a:xfrm>
-          <a:prstGeom prst="straightConnector1">
-            <a:avLst/>
-          </a:prstGeom>
-          <a:ln>
-            <a:solidFill>
-              <a:schemeClr val="tx1"/>
-            </a:solidFill>
-            <a:tailEnd type="triangle"/>
-          </a:ln>
-        </p:spPr>
-        <p:style>
-          <a:lnRef idx="1">
-            <a:schemeClr val="accent1"/>
-          </a:lnRef>
-          <a:fillRef idx="0">
-            <a:schemeClr val="accent1"/>
-          </a:fillRef>
-          <a:effectRef idx="0">
-            <a:schemeClr val="accent1"/>
-          </a:effectRef>
-          <a:fontRef idx="minor">
-            <a:schemeClr val="tx1"/>
-          </a:fontRef>
-        </p:style>
-      </p:cxnSp>
-      <p:sp>
-        <p:nvSpPr>
-          <p:cNvPr id="18" name="文本框 17">
-            <a:extLst>
-              <a:ext uri="{FF2B5EF4-FFF2-40B4-BE49-F238E27FC236}">
-                <a16:creationId xmlns:a16="http://schemas.microsoft.com/office/drawing/2014/main" id="{45C08739-91CB-D562-5989-E9C9A2D2D7E1}"/>
-              </a:ext>
-            </a:extLst>
-          </p:cNvPr>
-          <p:cNvSpPr txBox="1"/>
-          <p:nvPr/>
-        </p:nvSpPr>
-        <p:spPr>
-          <a:xfrm>
-            <a:off x="4708010" y="2515374"/>
-            <a:ext cx="1579278" cy="276999"/>
-          </a:xfrm>
-          <a:prstGeom prst="rect">
-            <a:avLst/>
-          </a:prstGeom>
-          <a:noFill/>
-        </p:spPr>
-        <p:txBody>
-          <a:bodyPr wrap="none" rtlCol="0">
-            <a:spAutoFit/>
-          </a:bodyPr>
-          <a:lstStyle/>
-          <a:p>
-            <a:pPr algn="l"/>
-            <a:r>
-              <a:rPr lang="en-US" altLang="zh-CN" sz="1200" b="1" dirty="0">
-                <a:latin typeface="Courier New" panose="02070309020205020404" pitchFamily="49" charset="0"/>
-                <a:ea typeface="微软雅黑" panose="020B0503020204020204" pitchFamily="34" charset="-122"/>
-                <a:cs typeface="Courier New" panose="02070309020205020404" pitchFamily="49" charset="0"/>
-              </a:rPr>
-              <a:t>SYN =1, SEQ# 10</a:t>
-            </a:r>
-            <a:endParaRPr lang="zh-CN" altLang="en-US" sz="1200" b="1" dirty="0">
-              <a:latin typeface="Courier New" panose="02070309020205020404" pitchFamily="49" charset="0"/>
-              <a:ea typeface="微软雅黑" panose="020B0503020204020204" pitchFamily="34" charset="-122"/>
-              <a:cs typeface="Courier New" panose="02070309020205020404" pitchFamily="49" charset="0"/>
-            </a:endParaRPr>
-          </a:p>
-        </p:txBody>
-      </p:sp>
-      <p:sp>
-        <p:nvSpPr>
-          <p:cNvPr id="19" name="文本框 18">
-            <a:extLst>
-              <a:ext uri="{FF2B5EF4-FFF2-40B4-BE49-F238E27FC236}">
-                <a16:creationId xmlns:a16="http://schemas.microsoft.com/office/drawing/2014/main" id="{09C4F885-BE5F-6D59-AA52-9C5CABD19E92}"/>
-              </a:ext>
-            </a:extLst>
-          </p:cNvPr>
-          <p:cNvSpPr txBox="1"/>
-          <p:nvPr/>
-        </p:nvSpPr>
-        <p:spPr>
-          <a:xfrm>
-            <a:off x="4289626" y="3891737"/>
-            <a:ext cx="2416046" cy="276999"/>
-          </a:xfrm>
-          <a:prstGeom prst="rect">
-            <a:avLst/>
-          </a:prstGeom>
-          <a:noFill/>
-        </p:spPr>
-        <p:txBody>
-          <a:bodyPr wrap="none" rtlCol="0">
-            <a:spAutoFit/>
-          </a:bodyPr>
-          <a:lstStyle/>
-          <a:p>
-            <a:pPr algn="l"/>
-            <a:r>
-              <a:rPr lang="en-US" altLang="zh-CN" sz="1200" b="1" dirty="0">
-                <a:latin typeface="Courier New" panose="02070309020205020404" pitchFamily="49" charset="0"/>
-                <a:ea typeface="微软雅黑" panose="020B0503020204020204" pitchFamily="34" charset="-122"/>
-                <a:cs typeface="Courier New" panose="02070309020205020404" pitchFamily="49" charset="0"/>
-              </a:rPr>
-              <a:t>SYN =1, ACK = 1, ACK# 10</a:t>
-            </a:r>
-            <a:endParaRPr lang="zh-CN" altLang="en-US" sz="1200" b="1" dirty="0">
-              <a:latin typeface="Courier New" panose="02070309020205020404" pitchFamily="49" charset="0"/>
-              <a:ea typeface="微软雅黑" panose="020B0503020204020204" pitchFamily="34" charset="-122"/>
-              <a:cs typeface="Courier New" panose="02070309020205020404" pitchFamily="49" charset="0"/>
-            </a:endParaRPr>
-          </a:p>
-        </p:txBody>
-      </p:sp>
-      <p:sp>
-        <p:nvSpPr>
-          <p:cNvPr id="20" name="文本框 19">
-            <a:extLst>
-              <a:ext uri="{FF2B5EF4-FFF2-40B4-BE49-F238E27FC236}">
-                <a16:creationId xmlns:a16="http://schemas.microsoft.com/office/drawing/2014/main" id="{92CBE984-67D0-C6C5-9B64-118FE70B19C4}"/>
-              </a:ext>
-            </a:extLst>
-          </p:cNvPr>
-          <p:cNvSpPr txBox="1"/>
-          <p:nvPr/>
-        </p:nvSpPr>
-        <p:spPr>
-          <a:xfrm>
-            <a:off x="4661523" y="5268099"/>
-            <a:ext cx="1672253" cy="276999"/>
-          </a:xfrm>
-          <a:prstGeom prst="rect">
-            <a:avLst/>
-          </a:prstGeom>
-          <a:noFill/>
-        </p:spPr>
-        <p:txBody>
-          <a:bodyPr wrap="none" rtlCol="0">
-            <a:spAutoFit/>
-          </a:bodyPr>
-          <a:lstStyle/>
-          <a:p>
-            <a:pPr algn="l"/>
-            <a:r>
-              <a:rPr lang="en-US" altLang="zh-CN" sz="1200" b="1" dirty="0">
-                <a:latin typeface="Courier New" panose="02070309020205020404" pitchFamily="49" charset="0"/>
-                <a:ea typeface="微软雅黑" panose="020B0503020204020204" pitchFamily="34" charset="-122"/>
-                <a:cs typeface="Courier New" panose="02070309020205020404" pitchFamily="49" charset="0"/>
-              </a:rPr>
-              <a:t>ACK = 1, SEQ# 11</a:t>
-            </a:r>
-            <a:endParaRPr lang="zh-CN" altLang="en-US" sz="1200" b="1" dirty="0">
-              <a:latin typeface="Courier New" panose="02070309020205020404" pitchFamily="49" charset="0"/>
-              <a:ea typeface="微软雅黑" panose="020B0503020204020204" pitchFamily="34" charset="-122"/>
-              <a:cs typeface="Courier New" panose="02070309020205020404" pitchFamily="49" charset="0"/>
-            </a:endParaRPr>
-          </a:p>
-        </p:txBody>
-      </p:sp>
-      <p:pic>
-        <p:nvPicPr>
-          <p:cNvPr id="21" name="图片 20">
-            <a:extLst>
-              <a:ext uri="{FF2B5EF4-FFF2-40B4-BE49-F238E27FC236}">
-                <a16:creationId xmlns:a16="http://schemas.microsoft.com/office/drawing/2014/main" id="{6F333424-1B0A-FC44-A9BD-30232A0B4331}"/>
-              </a:ext>
-            </a:extLst>
-          </p:cNvPr>
-          <p:cNvPicPr>
-            <a:picLocks noChangeAspect="1"/>
-          </p:cNvPicPr>
-          <p:nvPr/>
-        </p:nvPicPr>
-        <p:blipFill>
-          <a:blip r:embed="rId2">
-            <a:extLst>
-              <a:ext uri="{28A0092B-C50C-407E-A947-70E740481C1C}">
-                <a14:useLocalDpi xmlns:a14="http://schemas.microsoft.com/office/drawing/2010/main" val="0"/>
-              </a:ext>
-            </a:extLst>
-          </a:blip>
-          <a:stretch>
-            <a:fillRect/>
-          </a:stretch>
-        </p:blipFill>
-        <p:spPr>
-          <a:xfrm>
-            <a:off x="3463542" y="887595"/>
-            <a:ext cx="720000" cy="854393"/>
-          </a:xfrm>
-          <a:prstGeom prst="rect">
-            <a:avLst/>
-          </a:prstGeom>
-        </p:spPr>
-      </p:pic>
-      <p:pic>
-        <p:nvPicPr>
-          <p:cNvPr id="22" name="图片 21">
-            <a:extLst>
-              <a:ext uri="{FF2B5EF4-FFF2-40B4-BE49-F238E27FC236}">
-                <a16:creationId xmlns:a16="http://schemas.microsoft.com/office/drawing/2014/main" id="{BA33F9E0-DA70-90DC-6252-77C04D78C2FF}"/>
-              </a:ext>
-            </a:extLst>
-          </p:cNvPr>
-          <p:cNvPicPr>
-            <a:picLocks noChangeAspect="1"/>
-          </p:cNvPicPr>
-          <p:nvPr/>
-        </p:nvPicPr>
-        <p:blipFill>
-          <a:blip r:embed="rId3">
-            <a:extLst>
-              <a:ext uri="{28A0092B-C50C-407E-A947-70E740481C1C}">
-                <a14:useLocalDpi xmlns:a14="http://schemas.microsoft.com/office/drawing/2010/main" val="0"/>
-              </a:ext>
-            </a:extLst>
-          </a:blip>
-          <a:stretch>
-            <a:fillRect/>
-          </a:stretch>
-        </p:blipFill>
-        <p:spPr>
-          <a:xfrm>
-            <a:off x="6910441" y="820363"/>
-            <a:ext cx="720000" cy="921625"/>
-          </a:xfrm>
-          <a:prstGeom prst="rect">
-            <a:avLst/>
-          </a:prstGeom>
-        </p:spPr>
-      </p:pic>
-      <p:cxnSp>
-        <p:nvCxnSpPr>
-          <p:cNvPr id="23" name="直接箭头连接符 22">
-            <a:extLst>
-              <a:ext uri="{FF2B5EF4-FFF2-40B4-BE49-F238E27FC236}">
-                <a16:creationId xmlns:a16="http://schemas.microsoft.com/office/drawing/2014/main" id="{D431E32C-59D1-0A8B-89EC-7EB38ADDC489}"/>
-              </a:ext>
-            </a:extLst>
-          </p:cNvPr>
-          <p:cNvCxnSpPr>
-            <a:cxnSpLocks/>
-          </p:cNvCxnSpPr>
-          <p:nvPr/>
-        </p:nvCxnSpPr>
-        <p:spPr>
-          <a:xfrm>
-            <a:off x="4106991" y="1448574"/>
-            <a:ext cx="2880000" cy="0"/>
-          </a:xfrm>
-          <a:prstGeom prst="straightConnector1">
-            <a:avLst/>
-          </a:prstGeom>
-          <a:ln w="38100">
-            <a:solidFill>
-              <a:schemeClr val="tx1"/>
-            </a:solidFill>
-            <a:headEnd type="stealth"/>
-            <a:tailEnd type="triangle"/>
-          </a:ln>
-        </p:spPr>
-        <p:style>
-          <a:lnRef idx="1">
-            <a:schemeClr val="accent1"/>
-          </a:lnRef>
-          <a:fillRef idx="0">
-            <a:schemeClr val="accent1"/>
-          </a:fillRef>
-          <a:effectRef idx="0">
-            <a:schemeClr val="accent1"/>
-          </a:effectRef>
-          <a:fontRef idx="minor">
-            <a:schemeClr val="tx1"/>
-          </a:fontRef>
-        </p:style>
-      </p:cxnSp>
-      <p:sp>
-        <p:nvSpPr>
-          <p:cNvPr id="24" name="文本框 23">
-            <a:extLst>
-              <a:ext uri="{FF2B5EF4-FFF2-40B4-BE49-F238E27FC236}">
-                <a16:creationId xmlns:a16="http://schemas.microsoft.com/office/drawing/2014/main" id="{56729AAD-AAAB-E89F-E7EF-17595C5ED533}"/>
-              </a:ext>
-            </a:extLst>
-          </p:cNvPr>
-          <p:cNvSpPr txBox="1"/>
-          <p:nvPr/>
-        </p:nvSpPr>
-        <p:spPr>
-          <a:xfrm>
-            <a:off x="4571404" y="1171575"/>
-            <a:ext cx="1951175" cy="276999"/>
-          </a:xfrm>
-          <a:prstGeom prst="rect">
-            <a:avLst/>
-          </a:prstGeom>
-          <a:noFill/>
-        </p:spPr>
-        <p:txBody>
-          <a:bodyPr wrap="none" rtlCol="0">
-            <a:spAutoFit/>
-          </a:bodyPr>
-          <a:lstStyle/>
-          <a:p>
-            <a:pPr algn="l"/>
-            <a:r>
-              <a:rPr lang="en-US" altLang="zh-CN" sz="1200" dirty="0">
-                <a:latin typeface="Courier New" panose="02070309020205020404" pitchFamily="49" charset="0"/>
-                <a:ea typeface="微软雅黑" panose="020B0503020204020204" pitchFamily="34" charset="-122"/>
-                <a:cs typeface="Courier New" panose="02070309020205020404" pitchFamily="49" charset="0"/>
-              </a:rPr>
-              <a:t>Three-Way Handshake</a:t>
-            </a:r>
-            <a:endParaRPr lang="zh-CN" altLang="en-US" sz="1200" dirty="0">
-              <a:latin typeface="Courier New" panose="02070309020205020404" pitchFamily="49" charset="0"/>
-              <a:ea typeface="微软雅黑" panose="020B0503020204020204" pitchFamily="34" charset="-122"/>
-              <a:cs typeface="Courier New" panose="02070309020205020404" pitchFamily="49" charset="0"/>
-            </a:endParaRPr>
-          </a:p>
-        </p:txBody>
-      </p:sp>
-    </p:spTree>
-    <p:extLst>
-      <p:ext uri="{BB962C8B-B14F-4D97-AF65-F5344CB8AC3E}">
-        <p14:creationId xmlns:p14="http://schemas.microsoft.com/office/powerpoint/2010/main" val="222786176"/>
-      </p:ext>
-    </p:extLst>
-  </p:cSld>
-  <p:clrMapOvr>
-    <a:masterClrMapping/>
-  </p:clrMapOvr>
-</p:sld>
-</file>
-
-<file path=ppt/slides/slide6.xml><?xml version="1.0" encoding="utf-8"?>
-<p:sld xmlns:a="http://schemas.openxmlformats.org/drawingml/2006/main" xmlns:r="http://schemas.openxmlformats.org/officeDocument/2006/relationships" xmlns:p="http://schemas.openxmlformats.org/presentationml/2006/main">
-  <p:cSld>
-    <p:spTree>
-      <p:nvGrpSpPr>
-        <p:cNvPr id="1" name=""/>
-        <p:cNvGrpSpPr/>
-        <p:nvPr/>
-      </p:nvGrpSpPr>
-      <p:grpSpPr>
-        <a:xfrm>
-          <a:off x="0" y="0"/>
-          <a:ext cx="0" cy="0"/>
-          <a:chOff x="0" y="0"/>
-          <a:chExt cx="0" cy="0"/>
-        </a:xfrm>
-      </p:grpSpPr>
       <p:sp>
         <p:nvSpPr>
           <p:cNvPr id="2" name="矩形: 圆角 1">
@@ -35637,7 +33137,7 @@
 </p:sld>
 </file>
 
-<file path=ppt/slides/slide7.xml><?xml version="1.0" encoding="utf-8"?>
+<file path=ppt/slides/slide6.xml><?xml version="1.0" encoding="utf-8"?>
 <p:sld xmlns:a="http://schemas.openxmlformats.org/drawingml/2006/main" xmlns:r="http://schemas.openxmlformats.org/officeDocument/2006/relationships" xmlns:p="http://schemas.openxmlformats.org/presentationml/2006/main">
   <p:cSld>
     <p:spTree>
@@ -38846,7 +36346,7 @@
 </p:sld>
 </file>
 
-<file path=ppt/slides/slide8.xml><?xml version="1.0" encoding="utf-8"?>
+<file path=ppt/slides/slide7.xml><?xml version="1.0" encoding="utf-8"?>
 <p:sld xmlns:a="http://schemas.openxmlformats.org/drawingml/2006/main" xmlns:r="http://schemas.openxmlformats.org/officeDocument/2006/relationships" xmlns:p="http://schemas.openxmlformats.org/presentationml/2006/main">
   <p:cSld>
     <p:spTree>
@@ -41024,7 +38524,7 @@
 </p:sld>
 </file>
 
-<file path=ppt/slides/slide9.xml><?xml version="1.0" encoding="utf-8"?>
+<file path=ppt/slides/slide8.xml><?xml version="1.0" encoding="utf-8"?>
 <p:sld xmlns:a="http://schemas.openxmlformats.org/drawingml/2006/main" xmlns:r="http://schemas.openxmlformats.org/officeDocument/2006/relationships" xmlns:p="http://schemas.openxmlformats.org/presentationml/2006/main">
   <p:cSld>
     <p:spTree>
@@ -41960,6 +39460,1735 @@
     <p:extLst>
       <p:ext uri="{BB962C8B-B14F-4D97-AF65-F5344CB8AC3E}">
         <p14:creationId xmlns:p14="http://schemas.microsoft.com/office/powerpoint/2010/main" val="1414077195"/>
+      </p:ext>
+    </p:extLst>
+  </p:cSld>
+  <p:clrMapOvr>
+    <a:masterClrMapping/>
+  </p:clrMapOvr>
+</p:sld>
+</file>
+
+<file path=ppt/slides/slide9.xml><?xml version="1.0" encoding="utf-8"?>
+<p:sld xmlns:a="http://schemas.openxmlformats.org/drawingml/2006/main" xmlns:r="http://schemas.openxmlformats.org/officeDocument/2006/relationships" xmlns:p="http://schemas.openxmlformats.org/presentationml/2006/main">
+  <p:cSld>
+    <p:spTree>
+      <p:nvGrpSpPr>
+        <p:cNvPr id="1" name="">
+          <a:extLst>
+            <a:ext uri="{FF2B5EF4-FFF2-40B4-BE49-F238E27FC236}">
+              <a16:creationId xmlns:a16="http://schemas.microsoft.com/office/drawing/2014/main" id="{18E2CAE3-A1AC-3F4E-935C-0F5B86F0EE15}"/>
+            </a:ext>
+          </a:extLst>
+        </p:cNvPr>
+        <p:cNvGrpSpPr/>
+        <p:nvPr/>
+      </p:nvGrpSpPr>
+      <p:grpSpPr>
+        <a:xfrm>
+          <a:off x="0" y="0"/>
+          <a:ext cx="0" cy="0"/>
+          <a:chOff x="0" y="0"/>
+          <a:chExt cx="0" cy="0"/>
+        </a:xfrm>
+      </p:grpSpPr>
+      <p:sp>
+        <p:nvSpPr>
+          <p:cNvPr id="3" name="矩形: 圆角 2">
+            <a:extLst>
+              <a:ext uri="{FF2B5EF4-FFF2-40B4-BE49-F238E27FC236}">
+                <a16:creationId xmlns:a16="http://schemas.microsoft.com/office/drawing/2014/main" id="{3F6BEB13-BC5C-76A7-70B4-5704F9D6A0AC}"/>
+              </a:ext>
+            </a:extLst>
+          </p:cNvPr>
+          <p:cNvSpPr/>
+          <p:nvPr/>
+        </p:nvSpPr>
+        <p:spPr>
+          <a:xfrm>
+            <a:off x="3927709" y="3694457"/>
+            <a:ext cx="936000" cy="216000"/>
+          </a:xfrm>
+          <a:prstGeom prst="roundRect">
+            <a:avLst/>
+          </a:prstGeom>
+          <a:solidFill>
+            <a:srgbClr val="335BA3">
+              <a:alpha val="89804"/>
+            </a:srgbClr>
+          </a:solidFill>
+          <a:ln w="12700">
+            <a:noFill/>
+          </a:ln>
+        </p:spPr>
+        <p:style>
+          <a:lnRef idx="2">
+            <a:schemeClr val="accent1">
+              <a:shade val="15000"/>
+            </a:schemeClr>
+          </a:lnRef>
+          <a:fillRef idx="1">
+            <a:schemeClr val="accent1"/>
+          </a:fillRef>
+          <a:effectRef idx="0">
+            <a:schemeClr val="accent1"/>
+          </a:effectRef>
+          <a:fontRef idx="minor">
+            <a:schemeClr val="lt1"/>
+          </a:fontRef>
+        </p:style>
+        <p:txBody>
+          <a:bodyPr rtlCol="0" anchor="ctr"/>
+          <a:lstStyle/>
+          <a:p>
+            <a:pPr algn="ctr"/>
+            <a:r>
+              <a:rPr lang="en-US" altLang="zh-CN" sz="800">
+                <a:latin typeface="Quicksand" panose="00000500000000000000" pitchFamily="2" charset="0"/>
+              </a:rPr>
+              <a:t>cartsView.vue</a:t>
+            </a:r>
+            <a:endParaRPr lang="zh-CN" altLang="en-US" sz="800">
+              <a:latin typeface="Quicksand" panose="00000500000000000000" pitchFamily="2" charset="0"/>
+            </a:endParaRPr>
+          </a:p>
+        </p:txBody>
+      </p:sp>
+      <p:sp>
+        <p:nvSpPr>
+          <p:cNvPr id="4" name="矩形: 圆角 3">
+            <a:extLst>
+              <a:ext uri="{FF2B5EF4-FFF2-40B4-BE49-F238E27FC236}">
+                <a16:creationId xmlns:a16="http://schemas.microsoft.com/office/drawing/2014/main" id="{A865B1BF-2668-EBE3-9A2F-76B4ADFC7BD3}"/>
+              </a:ext>
+            </a:extLst>
+          </p:cNvPr>
+          <p:cNvSpPr/>
+          <p:nvPr/>
+        </p:nvSpPr>
+        <p:spPr>
+          <a:xfrm>
+            <a:off x="3927709" y="2237109"/>
+            <a:ext cx="936000" cy="216000"/>
+          </a:xfrm>
+          <a:prstGeom prst="roundRect">
+            <a:avLst/>
+          </a:prstGeom>
+          <a:solidFill>
+            <a:srgbClr val="00BC7B">
+              <a:alpha val="89804"/>
+            </a:srgbClr>
+          </a:solidFill>
+          <a:ln w="12700">
+            <a:noFill/>
+          </a:ln>
+        </p:spPr>
+        <p:style>
+          <a:lnRef idx="2">
+            <a:schemeClr val="accent1">
+              <a:shade val="15000"/>
+            </a:schemeClr>
+          </a:lnRef>
+          <a:fillRef idx="1">
+            <a:schemeClr val="accent1"/>
+          </a:fillRef>
+          <a:effectRef idx="0">
+            <a:schemeClr val="accent1"/>
+          </a:effectRef>
+          <a:fontRef idx="minor">
+            <a:schemeClr val="lt1"/>
+          </a:fontRef>
+        </p:style>
+        <p:txBody>
+          <a:bodyPr rtlCol="0" anchor="ctr"/>
+          <a:lstStyle/>
+          <a:p>
+            <a:pPr algn="ctr"/>
+            <a:r>
+              <a:rPr lang="en-US" altLang="zh-CN" sz="800">
+                <a:latin typeface="Quicksand" panose="00000500000000000000" pitchFamily="2" charset="0"/>
+              </a:rPr>
+              <a:t>detailsView.vue</a:t>
+            </a:r>
+            <a:endParaRPr lang="zh-CN" altLang="en-US" sz="800">
+              <a:latin typeface="Quicksand" panose="00000500000000000000" pitchFamily="2" charset="0"/>
+            </a:endParaRPr>
+          </a:p>
+        </p:txBody>
+      </p:sp>
+      <p:sp>
+        <p:nvSpPr>
+          <p:cNvPr id="7" name="矩形: 圆角 6">
+            <a:extLst>
+              <a:ext uri="{FF2B5EF4-FFF2-40B4-BE49-F238E27FC236}">
+                <a16:creationId xmlns:a16="http://schemas.microsoft.com/office/drawing/2014/main" id="{CF1F7419-7D34-C865-9FD3-CEF01F2784E0}"/>
+              </a:ext>
+            </a:extLst>
+          </p:cNvPr>
+          <p:cNvSpPr/>
+          <p:nvPr/>
+        </p:nvSpPr>
+        <p:spPr>
+          <a:xfrm>
+            <a:off x="4988680" y="2965783"/>
+            <a:ext cx="900000" cy="216000"/>
+          </a:xfrm>
+          <a:prstGeom prst="roundRect">
+            <a:avLst/>
+          </a:prstGeom>
+          <a:solidFill>
+            <a:srgbClr val="F9423A">
+              <a:alpha val="89804"/>
+            </a:srgbClr>
+          </a:solidFill>
+          <a:ln w="12700">
+            <a:noFill/>
+          </a:ln>
+        </p:spPr>
+        <p:style>
+          <a:lnRef idx="2">
+            <a:schemeClr val="accent1">
+              <a:shade val="15000"/>
+            </a:schemeClr>
+          </a:lnRef>
+          <a:fillRef idx="1">
+            <a:schemeClr val="accent1"/>
+          </a:fillRef>
+          <a:effectRef idx="0">
+            <a:schemeClr val="accent1"/>
+          </a:effectRef>
+          <a:fontRef idx="minor">
+            <a:schemeClr val="lt1"/>
+          </a:fontRef>
+        </p:style>
+        <p:txBody>
+          <a:bodyPr rtlCol="0" anchor="ctr"/>
+          <a:lstStyle/>
+          <a:p>
+            <a:pPr algn="ctr"/>
+            <a:r>
+              <a:rPr lang="en-US" altLang="zh-CN" sz="800">
+                <a:latin typeface="Quicksand" panose="00000500000000000000" pitchFamily="2" charset="0"/>
+              </a:rPr>
+              <a:t>cart.js</a:t>
+            </a:r>
+            <a:endParaRPr lang="zh-CN" altLang="en-US" sz="800">
+              <a:latin typeface="Quicksand" panose="00000500000000000000" pitchFamily="2" charset="0"/>
+            </a:endParaRPr>
+          </a:p>
+        </p:txBody>
+      </p:sp>
+      <p:cxnSp>
+        <p:nvCxnSpPr>
+          <p:cNvPr id="14" name="连接符: 曲线 13">
+            <a:extLst>
+              <a:ext uri="{FF2B5EF4-FFF2-40B4-BE49-F238E27FC236}">
+                <a16:creationId xmlns:a16="http://schemas.microsoft.com/office/drawing/2014/main" id="{8CA54037-8AE4-360B-D22C-AE9D102A0F28}"/>
+              </a:ext>
+            </a:extLst>
+          </p:cNvPr>
+          <p:cNvCxnSpPr>
+            <a:cxnSpLocks/>
+            <a:stCxn id="7" idx="1"/>
+            <a:endCxn id="3" idx="3"/>
+          </p:cNvCxnSpPr>
+          <p:nvPr/>
+        </p:nvCxnSpPr>
+        <p:spPr>
+          <a:xfrm rot="10800000" flipV="1">
+            <a:off x="4863710" y="3073783"/>
+            <a:ext cx="124971" cy="728674"/>
+          </a:xfrm>
+          <a:prstGeom prst="curvedConnector3">
+            <a:avLst>
+              <a:gd name="adj1" fmla="val 50000"/>
+            </a:avLst>
+          </a:prstGeom>
+          <a:ln>
+            <a:solidFill>
+              <a:srgbClr val="6D91D1"/>
+            </a:solidFill>
+          </a:ln>
+        </p:spPr>
+        <p:style>
+          <a:lnRef idx="1">
+            <a:schemeClr val="accent1"/>
+          </a:lnRef>
+          <a:fillRef idx="0">
+            <a:schemeClr val="accent1"/>
+          </a:fillRef>
+          <a:effectRef idx="0">
+            <a:schemeClr val="accent1"/>
+          </a:effectRef>
+          <a:fontRef idx="minor">
+            <a:schemeClr val="tx1"/>
+          </a:fontRef>
+        </p:style>
+      </p:cxnSp>
+      <p:cxnSp>
+        <p:nvCxnSpPr>
+          <p:cNvPr id="17" name="连接符: 曲线 16">
+            <a:extLst>
+              <a:ext uri="{FF2B5EF4-FFF2-40B4-BE49-F238E27FC236}">
+                <a16:creationId xmlns:a16="http://schemas.microsoft.com/office/drawing/2014/main" id="{5D7F2DC2-788D-E15F-2B93-BEC9E5020321}"/>
+              </a:ext>
+            </a:extLst>
+          </p:cNvPr>
+          <p:cNvCxnSpPr>
+            <a:stCxn id="4" idx="3"/>
+            <a:endCxn id="7" idx="1"/>
+          </p:cNvCxnSpPr>
+          <p:nvPr/>
+        </p:nvCxnSpPr>
+        <p:spPr>
+          <a:xfrm>
+            <a:off x="4863709" y="2345109"/>
+            <a:ext cx="124971" cy="728674"/>
+          </a:xfrm>
+          <a:prstGeom prst="curvedConnector3">
+            <a:avLst/>
+          </a:prstGeom>
+          <a:ln>
+            <a:solidFill>
+              <a:srgbClr val="00B050"/>
+            </a:solidFill>
+          </a:ln>
+        </p:spPr>
+        <p:style>
+          <a:lnRef idx="1">
+            <a:schemeClr val="accent1"/>
+          </a:lnRef>
+          <a:fillRef idx="0">
+            <a:schemeClr val="accent1"/>
+          </a:fillRef>
+          <a:effectRef idx="0">
+            <a:schemeClr val="accent1"/>
+          </a:effectRef>
+          <a:fontRef idx="minor">
+            <a:schemeClr val="tx1"/>
+          </a:fontRef>
+        </p:style>
+      </p:cxnSp>
+      <p:sp>
+        <p:nvSpPr>
+          <p:cNvPr id="25" name="矩形: 圆角 24">
+            <a:extLst>
+              <a:ext uri="{FF2B5EF4-FFF2-40B4-BE49-F238E27FC236}">
+                <a16:creationId xmlns:a16="http://schemas.microsoft.com/office/drawing/2014/main" id="{9206292A-CFFA-EDEE-0CE6-0FCE7626F683}"/>
+              </a:ext>
+            </a:extLst>
+          </p:cNvPr>
+          <p:cNvSpPr/>
+          <p:nvPr/>
+        </p:nvSpPr>
+        <p:spPr>
+          <a:xfrm>
+            <a:off x="6057780" y="2534400"/>
+            <a:ext cx="900000" cy="216000"/>
+          </a:xfrm>
+          <a:prstGeom prst="roundRect">
+            <a:avLst/>
+          </a:prstGeom>
+          <a:solidFill>
+            <a:srgbClr val="FB837D"/>
+          </a:solidFill>
+          <a:ln w="12700">
+            <a:noFill/>
+          </a:ln>
+        </p:spPr>
+        <p:style>
+          <a:lnRef idx="2">
+            <a:schemeClr val="accent1">
+              <a:shade val="15000"/>
+            </a:schemeClr>
+          </a:lnRef>
+          <a:fillRef idx="1">
+            <a:schemeClr val="accent1"/>
+          </a:fillRef>
+          <a:effectRef idx="0">
+            <a:schemeClr val="accent1"/>
+          </a:effectRef>
+          <a:fontRef idx="minor">
+            <a:schemeClr val="lt1"/>
+          </a:fontRef>
+        </p:style>
+        <p:txBody>
+          <a:bodyPr rtlCol="0" anchor="ctr"/>
+          <a:lstStyle/>
+          <a:p>
+            <a:pPr algn="ctr"/>
+            <a:r>
+              <a:rPr lang="en-US" altLang="zh-CN" sz="800">
+                <a:latin typeface="Quicksand" panose="00000500000000000000" pitchFamily="2" charset="0"/>
+              </a:rPr>
+              <a:t>lists</a:t>
+            </a:r>
+            <a:endParaRPr lang="zh-CN" altLang="en-US" sz="800">
+              <a:latin typeface="Quicksand" panose="00000500000000000000" pitchFamily="2" charset="0"/>
+            </a:endParaRPr>
+          </a:p>
+        </p:txBody>
+      </p:sp>
+      <p:sp>
+        <p:nvSpPr>
+          <p:cNvPr id="26" name="矩形: 圆角 25">
+            <a:extLst>
+              <a:ext uri="{FF2B5EF4-FFF2-40B4-BE49-F238E27FC236}">
+                <a16:creationId xmlns:a16="http://schemas.microsoft.com/office/drawing/2014/main" id="{E1A4A212-0D66-8B59-6229-1091271BAD62}"/>
+              </a:ext>
+            </a:extLst>
+          </p:cNvPr>
+          <p:cNvSpPr/>
+          <p:nvPr/>
+        </p:nvSpPr>
+        <p:spPr>
+          <a:xfrm>
+            <a:off x="6057780" y="2798400"/>
+            <a:ext cx="900000" cy="216000"/>
+          </a:xfrm>
+          <a:prstGeom prst="roundRect">
+            <a:avLst/>
+          </a:prstGeom>
+          <a:solidFill>
+            <a:srgbClr val="FB837D"/>
+          </a:solidFill>
+          <a:ln w="12700">
+            <a:noFill/>
+          </a:ln>
+        </p:spPr>
+        <p:style>
+          <a:lnRef idx="2">
+            <a:schemeClr val="accent1">
+              <a:shade val="15000"/>
+            </a:schemeClr>
+          </a:lnRef>
+          <a:fillRef idx="1">
+            <a:schemeClr val="accent1"/>
+          </a:fillRef>
+          <a:effectRef idx="0">
+            <a:schemeClr val="accent1"/>
+          </a:effectRef>
+          <a:fontRef idx="minor">
+            <a:schemeClr val="lt1"/>
+          </a:fontRef>
+        </p:style>
+        <p:txBody>
+          <a:bodyPr rtlCol="0" anchor="ctr"/>
+          <a:lstStyle/>
+          <a:p>
+            <a:pPr algn="ctr"/>
+            <a:r>
+              <a:rPr lang="en-US" altLang="zh-CN" sz="800">
+                <a:latin typeface="Quicksand" panose="00000500000000000000" pitchFamily="2" charset="0"/>
+              </a:rPr>
+              <a:t>getLists()</a:t>
+            </a:r>
+            <a:endParaRPr lang="zh-CN" altLang="en-US" sz="800">
+              <a:latin typeface="Quicksand" panose="00000500000000000000" pitchFamily="2" charset="0"/>
+            </a:endParaRPr>
+          </a:p>
+        </p:txBody>
+      </p:sp>
+      <p:cxnSp>
+        <p:nvCxnSpPr>
+          <p:cNvPr id="28" name="连接符: 曲线 27">
+            <a:extLst>
+              <a:ext uri="{FF2B5EF4-FFF2-40B4-BE49-F238E27FC236}">
+                <a16:creationId xmlns:a16="http://schemas.microsoft.com/office/drawing/2014/main" id="{309BB0B0-6F0E-C24E-3004-E1132211C2A4}"/>
+              </a:ext>
+            </a:extLst>
+          </p:cNvPr>
+          <p:cNvCxnSpPr>
+            <a:cxnSpLocks/>
+            <a:stCxn id="7" idx="3"/>
+            <a:endCxn id="25" idx="1"/>
+          </p:cNvCxnSpPr>
+          <p:nvPr/>
+        </p:nvCxnSpPr>
+        <p:spPr>
+          <a:xfrm flipV="1">
+            <a:off x="5888680" y="2642400"/>
+            <a:ext cx="169100" cy="431383"/>
+          </a:xfrm>
+          <a:prstGeom prst="curvedConnector3">
+            <a:avLst/>
+          </a:prstGeom>
+          <a:ln>
+            <a:solidFill>
+              <a:srgbClr val="C00000"/>
+            </a:solidFill>
+          </a:ln>
+        </p:spPr>
+        <p:style>
+          <a:lnRef idx="1">
+            <a:schemeClr val="accent1"/>
+          </a:lnRef>
+          <a:fillRef idx="0">
+            <a:schemeClr val="accent1"/>
+          </a:fillRef>
+          <a:effectRef idx="0">
+            <a:schemeClr val="accent1"/>
+          </a:effectRef>
+          <a:fontRef idx="minor">
+            <a:schemeClr val="tx1"/>
+          </a:fontRef>
+        </p:style>
+      </p:cxnSp>
+      <p:cxnSp>
+        <p:nvCxnSpPr>
+          <p:cNvPr id="34" name="连接符: 曲线 33">
+            <a:extLst>
+              <a:ext uri="{FF2B5EF4-FFF2-40B4-BE49-F238E27FC236}">
+                <a16:creationId xmlns:a16="http://schemas.microsoft.com/office/drawing/2014/main" id="{AAE83631-A7F6-E02C-6D38-BABF5CA86FCF}"/>
+              </a:ext>
+            </a:extLst>
+          </p:cNvPr>
+          <p:cNvCxnSpPr>
+            <a:cxnSpLocks/>
+            <a:stCxn id="7" idx="3"/>
+            <a:endCxn id="12" idx="1"/>
+          </p:cNvCxnSpPr>
+          <p:nvPr/>
+        </p:nvCxnSpPr>
+        <p:spPr>
+          <a:xfrm>
+            <a:off x="5888680" y="3073783"/>
+            <a:ext cx="169100" cy="96617"/>
+          </a:xfrm>
+          <a:prstGeom prst="curvedConnector3">
+            <a:avLst>
+              <a:gd name="adj1" fmla="val 50000"/>
+            </a:avLst>
+          </a:prstGeom>
+          <a:ln>
+            <a:solidFill>
+              <a:srgbClr val="C00000"/>
+            </a:solidFill>
+          </a:ln>
+        </p:spPr>
+        <p:style>
+          <a:lnRef idx="1">
+            <a:schemeClr val="accent1"/>
+          </a:lnRef>
+          <a:fillRef idx="0">
+            <a:schemeClr val="accent1"/>
+          </a:fillRef>
+          <a:effectRef idx="0">
+            <a:schemeClr val="accent1"/>
+          </a:effectRef>
+          <a:fontRef idx="minor">
+            <a:schemeClr val="tx1"/>
+          </a:fontRef>
+        </p:style>
+      </p:cxnSp>
+      <p:cxnSp>
+        <p:nvCxnSpPr>
+          <p:cNvPr id="69" name="连接符: 曲线 68">
+            <a:extLst>
+              <a:ext uri="{FF2B5EF4-FFF2-40B4-BE49-F238E27FC236}">
+                <a16:creationId xmlns:a16="http://schemas.microsoft.com/office/drawing/2014/main" id="{3C11272C-4991-936E-0304-646EE0728FD5}"/>
+              </a:ext>
+            </a:extLst>
+          </p:cNvPr>
+          <p:cNvCxnSpPr>
+            <a:cxnSpLocks/>
+            <a:stCxn id="35" idx="3"/>
+            <a:endCxn id="4" idx="1"/>
+          </p:cNvCxnSpPr>
+          <p:nvPr/>
+        </p:nvCxnSpPr>
+        <p:spPr>
+          <a:xfrm>
+            <a:off x="3738400" y="2055600"/>
+            <a:ext cx="189309" cy="289509"/>
+          </a:xfrm>
+          <a:prstGeom prst="curvedConnector3">
+            <a:avLst>
+              <a:gd name="adj1" fmla="val 50000"/>
+            </a:avLst>
+          </a:prstGeom>
+          <a:ln>
+            <a:solidFill>
+              <a:srgbClr val="00B050"/>
+            </a:solidFill>
+          </a:ln>
+        </p:spPr>
+        <p:style>
+          <a:lnRef idx="1">
+            <a:schemeClr val="accent1"/>
+          </a:lnRef>
+          <a:fillRef idx="0">
+            <a:schemeClr val="accent1"/>
+          </a:fillRef>
+          <a:effectRef idx="0">
+            <a:schemeClr val="accent1"/>
+          </a:effectRef>
+          <a:fontRef idx="minor">
+            <a:schemeClr val="tx1"/>
+          </a:fontRef>
+        </p:style>
+      </p:cxnSp>
+      <p:sp>
+        <p:nvSpPr>
+          <p:cNvPr id="108" name="矩形: 圆角 107">
+            <a:extLst>
+              <a:ext uri="{FF2B5EF4-FFF2-40B4-BE49-F238E27FC236}">
+                <a16:creationId xmlns:a16="http://schemas.microsoft.com/office/drawing/2014/main" id="{FAC0BED9-67F3-89B3-6AB2-8DA4ED4A93BE}"/>
+              </a:ext>
+            </a:extLst>
+          </p:cNvPr>
+          <p:cNvSpPr/>
+          <p:nvPr/>
+        </p:nvSpPr>
+        <p:spPr>
+          <a:xfrm>
+            <a:off x="6049650" y="3326400"/>
+            <a:ext cx="900000" cy="216000"/>
+          </a:xfrm>
+          <a:prstGeom prst="roundRect">
+            <a:avLst/>
+          </a:prstGeom>
+          <a:solidFill>
+            <a:srgbClr val="FB837D"/>
+          </a:solidFill>
+          <a:ln w="12700">
+            <a:noFill/>
+          </a:ln>
+        </p:spPr>
+        <p:style>
+          <a:lnRef idx="2">
+            <a:schemeClr val="accent1">
+              <a:shade val="15000"/>
+            </a:schemeClr>
+          </a:lnRef>
+          <a:fillRef idx="1">
+            <a:schemeClr val="accent1"/>
+          </a:fillRef>
+          <a:effectRef idx="0">
+            <a:schemeClr val="accent1"/>
+          </a:effectRef>
+          <a:fontRef idx="minor">
+            <a:schemeClr val="lt1"/>
+          </a:fontRef>
+        </p:style>
+        <p:txBody>
+          <a:bodyPr rtlCol="0" anchor="ctr"/>
+          <a:lstStyle/>
+          <a:p>
+            <a:pPr algn="ctr"/>
+            <a:r>
+              <a:rPr lang="en-US" altLang="zh-CN" sz="800">
+                <a:latin typeface="Quicksand" panose="00000500000000000000" pitchFamily="2" charset="0"/>
+              </a:rPr>
+              <a:t>clearCarts()</a:t>
+            </a:r>
+            <a:endParaRPr lang="zh-CN" altLang="en-US" sz="800">
+              <a:latin typeface="Quicksand" panose="00000500000000000000" pitchFamily="2" charset="0"/>
+            </a:endParaRPr>
+          </a:p>
+        </p:txBody>
+      </p:sp>
+      <p:cxnSp>
+        <p:nvCxnSpPr>
+          <p:cNvPr id="118" name="连接符: 曲线 117">
+            <a:extLst>
+              <a:ext uri="{FF2B5EF4-FFF2-40B4-BE49-F238E27FC236}">
+                <a16:creationId xmlns:a16="http://schemas.microsoft.com/office/drawing/2014/main" id="{10E5DD0E-A687-963B-1415-3F7429B9EB3A}"/>
+              </a:ext>
+            </a:extLst>
+          </p:cNvPr>
+          <p:cNvCxnSpPr>
+            <a:cxnSpLocks/>
+            <a:stCxn id="7" idx="3"/>
+            <a:endCxn id="26" idx="1"/>
+          </p:cNvCxnSpPr>
+          <p:nvPr/>
+        </p:nvCxnSpPr>
+        <p:spPr>
+          <a:xfrm flipV="1">
+            <a:off x="5888680" y="2906400"/>
+            <a:ext cx="169100" cy="167383"/>
+          </a:xfrm>
+          <a:prstGeom prst="curvedConnector3">
+            <a:avLst>
+              <a:gd name="adj1" fmla="val 50000"/>
+            </a:avLst>
+          </a:prstGeom>
+          <a:ln>
+            <a:solidFill>
+              <a:srgbClr val="C00000"/>
+            </a:solidFill>
+          </a:ln>
+        </p:spPr>
+        <p:style>
+          <a:lnRef idx="1">
+            <a:schemeClr val="accent1"/>
+          </a:lnRef>
+          <a:fillRef idx="0">
+            <a:schemeClr val="accent1"/>
+          </a:fillRef>
+          <a:effectRef idx="0">
+            <a:schemeClr val="accent1"/>
+          </a:effectRef>
+          <a:fontRef idx="minor">
+            <a:schemeClr val="tx1"/>
+          </a:fontRef>
+        </p:style>
+      </p:cxnSp>
+      <p:cxnSp>
+        <p:nvCxnSpPr>
+          <p:cNvPr id="121" name="连接符: 曲线 120">
+            <a:extLst>
+              <a:ext uri="{FF2B5EF4-FFF2-40B4-BE49-F238E27FC236}">
+                <a16:creationId xmlns:a16="http://schemas.microsoft.com/office/drawing/2014/main" id="{5E6615E3-8D72-AC02-8F82-0C0E07C8A063}"/>
+              </a:ext>
+            </a:extLst>
+          </p:cNvPr>
+          <p:cNvCxnSpPr>
+            <a:cxnSpLocks/>
+            <a:stCxn id="7" idx="3"/>
+            <a:endCxn id="108" idx="1"/>
+          </p:cNvCxnSpPr>
+          <p:nvPr/>
+        </p:nvCxnSpPr>
+        <p:spPr>
+          <a:xfrm>
+            <a:off x="5888680" y="3073783"/>
+            <a:ext cx="160970" cy="360617"/>
+          </a:xfrm>
+          <a:prstGeom prst="curvedConnector3">
+            <a:avLst>
+              <a:gd name="adj1" fmla="val 50000"/>
+            </a:avLst>
+          </a:prstGeom>
+          <a:ln>
+            <a:solidFill>
+              <a:srgbClr val="C00000"/>
+            </a:solidFill>
+          </a:ln>
+        </p:spPr>
+        <p:style>
+          <a:lnRef idx="1">
+            <a:schemeClr val="accent1"/>
+          </a:lnRef>
+          <a:fillRef idx="0">
+            <a:schemeClr val="accent1"/>
+          </a:fillRef>
+          <a:effectRef idx="0">
+            <a:schemeClr val="accent1"/>
+          </a:effectRef>
+          <a:fontRef idx="minor">
+            <a:schemeClr val="tx1"/>
+          </a:fontRef>
+        </p:style>
+      </p:cxnSp>
+      <p:sp>
+        <p:nvSpPr>
+          <p:cNvPr id="12" name="矩形: 圆角 11">
+            <a:extLst>
+              <a:ext uri="{FF2B5EF4-FFF2-40B4-BE49-F238E27FC236}">
+                <a16:creationId xmlns:a16="http://schemas.microsoft.com/office/drawing/2014/main" id="{720E96D7-080F-5915-CFE3-F48B6E4FAB2E}"/>
+              </a:ext>
+            </a:extLst>
+          </p:cNvPr>
+          <p:cNvSpPr/>
+          <p:nvPr/>
+        </p:nvSpPr>
+        <p:spPr>
+          <a:xfrm>
+            <a:off x="6057780" y="3062400"/>
+            <a:ext cx="900000" cy="216000"/>
+          </a:xfrm>
+          <a:prstGeom prst="roundRect">
+            <a:avLst/>
+          </a:prstGeom>
+          <a:solidFill>
+            <a:srgbClr val="FB837D"/>
+          </a:solidFill>
+          <a:ln w="12700">
+            <a:noFill/>
+          </a:ln>
+        </p:spPr>
+        <p:style>
+          <a:lnRef idx="2">
+            <a:schemeClr val="accent1">
+              <a:shade val="15000"/>
+            </a:schemeClr>
+          </a:lnRef>
+          <a:fillRef idx="1">
+            <a:schemeClr val="accent1"/>
+          </a:fillRef>
+          <a:effectRef idx="0">
+            <a:schemeClr val="accent1"/>
+          </a:effectRef>
+          <a:fontRef idx="minor">
+            <a:schemeClr val="lt1"/>
+          </a:fontRef>
+        </p:style>
+        <p:txBody>
+          <a:bodyPr rtlCol="0" anchor="ctr"/>
+          <a:lstStyle/>
+          <a:p>
+            <a:pPr algn="ctr"/>
+            <a:r>
+              <a:rPr lang="en-US" altLang="zh-CN" sz="800">
+                <a:latin typeface="Quicksand" panose="00000500000000000000" pitchFamily="2" charset="0"/>
+              </a:rPr>
+              <a:t>addToCarts()</a:t>
+            </a:r>
+            <a:endParaRPr lang="zh-CN" altLang="en-US" sz="800">
+              <a:latin typeface="Quicksand" panose="00000500000000000000" pitchFamily="2" charset="0"/>
+            </a:endParaRPr>
+          </a:p>
+        </p:txBody>
+      </p:sp>
+      <p:sp>
+        <p:nvSpPr>
+          <p:cNvPr id="35" name="矩形: 圆角 34">
+            <a:extLst>
+              <a:ext uri="{FF2B5EF4-FFF2-40B4-BE49-F238E27FC236}">
+                <a16:creationId xmlns:a16="http://schemas.microsoft.com/office/drawing/2014/main" id="{2560AFC3-5502-019C-04F5-A2B3EC196CEB}"/>
+              </a:ext>
+            </a:extLst>
+          </p:cNvPr>
+          <p:cNvSpPr/>
+          <p:nvPr/>
+        </p:nvSpPr>
+        <p:spPr>
+          <a:xfrm>
+            <a:off x="2730400" y="1947600"/>
+            <a:ext cx="1008000" cy="216000"/>
+          </a:xfrm>
+          <a:prstGeom prst="roundRect">
+            <a:avLst/>
+          </a:prstGeom>
+          <a:solidFill>
+            <a:srgbClr val="CCF2E5"/>
+          </a:solidFill>
+          <a:ln w="12700">
+            <a:noFill/>
+          </a:ln>
+        </p:spPr>
+        <p:style>
+          <a:lnRef idx="2">
+            <a:schemeClr val="accent1">
+              <a:shade val="15000"/>
+            </a:schemeClr>
+          </a:lnRef>
+          <a:fillRef idx="1">
+            <a:schemeClr val="accent1"/>
+          </a:fillRef>
+          <a:effectRef idx="0">
+            <a:schemeClr val="accent1"/>
+          </a:effectRef>
+          <a:fontRef idx="minor">
+            <a:schemeClr val="lt1"/>
+          </a:fontRef>
+        </p:style>
+        <p:txBody>
+          <a:bodyPr rtlCol="0" anchor="ctr"/>
+          <a:lstStyle/>
+          <a:p>
+            <a:pPr algn="ctr"/>
+            <a:r>
+              <a:rPr lang="en-US" altLang="zh-CN" sz="800">
+                <a:solidFill>
+                  <a:sysClr val="windowText" lastClr="000000"/>
+                </a:solidFill>
+                <a:latin typeface="Quicksand Light" panose="00000400000000000000" pitchFamily="2" charset="0"/>
+              </a:rPr>
+              <a:t>good</a:t>
+            </a:r>
+            <a:endParaRPr lang="zh-CN" altLang="en-US" sz="800">
+              <a:solidFill>
+                <a:sysClr val="windowText" lastClr="000000"/>
+              </a:solidFill>
+              <a:latin typeface="Quicksand Light" panose="00000400000000000000" pitchFamily="2" charset="0"/>
+            </a:endParaRPr>
+          </a:p>
+        </p:txBody>
+      </p:sp>
+      <p:sp>
+        <p:nvSpPr>
+          <p:cNvPr id="36" name="矩形: 圆角 35">
+            <a:extLst>
+              <a:ext uri="{FF2B5EF4-FFF2-40B4-BE49-F238E27FC236}">
+                <a16:creationId xmlns:a16="http://schemas.microsoft.com/office/drawing/2014/main" id="{DEA05F83-9848-938F-5765-BDA46419BE99}"/>
+              </a:ext>
+            </a:extLst>
+          </p:cNvPr>
+          <p:cNvSpPr/>
+          <p:nvPr/>
+        </p:nvSpPr>
+        <p:spPr>
+          <a:xfrm>
+            <a:off x="2730400" y="2237109"/>
+            <a:ext cx="1008000" cy="216000"/>
+          </a:xfrm>
+          <a:prstGeom prst="roundRect">
+            <a:avLst/>
+          </a:prstGeom>
+          <a:solidFill>
+            <a:srgbClr val="CCF2E5"/>
+          </a:solidFill>
+          <a:ln w="12700">
+            <a:noFill/>
+          </a:ln>
+        </p:spPr>
+        <p:style>
+          <a:lnRef idx="2">
+            <a:schemeClr val="accent1">
+              <a:shade val="15000"/>
+            </a:schemeClr>
+          </a:lnRef>
+          <a:fillRef idx="1">
+            <a:schemeClr val="accent1"/>
+          </a:fillRef>
+          <a:effectRef idx="0">
+            <a:schemeClr val="accent1"/>
+          </a:effectRef>
+          <a:fontRef idx="minor">
+            <a:schemeClr val="lt1"/>
+          </a:fontRef>
+        </p:style>
+        <p:txBody>
+          <a:bodyPr rtlCol="0" anchor="ctr"/>
+          <a:lstStyle/>
+          <a:p>
+            <a:pPr algn="ctr"/>
+            <a:r>
+              <a:rPr lang="en-US" altLang="zh-CN" sz="800">
+                <a:solidFill>
+                  <a:sysClr val="windowText" lastClr="000000"/>
+                </a:solidFill>
+                <a:latin typeface="Quicksand Light" panose="00000400000000000000" pitchFamily="2" charset="0"/>
+              </a:rPr>
+              <a:t>goodSelected</a:t>
+            </a:r>
+            <a:endParaRPr lang="zh-CN" altLang="en-US" sz="800">
+              <a:solidFill>
+                <a:sysClr val="windowText" lastClr="000000"/>
+              </a:solidFill>
+              <a:latin typeface="Quicksand Light" panose="00000400000000000000" pitchFamily="2" charset="0"/>
+            </a:endParaRPr>
+          </a:p>
+        </p:txBody>
+      </p:sp>
+      <p:sp>
+        <p:nvSpPr>
+          <p:cNvPr id="37" name="矩形: 圆角 36">
+            <a:extLst>
+              <a:ext uri="{FF2B5EF4-FFF2-40B4-BE49-F238E27FC236}">
+                <a16:creationId xmlns:a16="http://schemas.microsoft.com/office/drawing/2014/main" id="{61EF7C50-FB8D-FA1D-20B6-85409306F50D}"/>
+              </a:ext>
+            </a:extLst>
+          </p:cNvPr>
+          <p:cNvSpPr/>
+          <p:nvPr/>
+        </p:nvSpPr>
+        <p:spPr>
+          <a:xfrm>
+            <a:off x="2730400" y="2523600"/>
+            <a:ext cx="1008000" cy="216000"/>
+          </a:xfrm>
+          <a:prstGeom prst="roundRect">
+            <a:avLst/>
+          </a:prstGeom>
+          <a:solidFill>
+            <a:srgbClr val="CCF2E5"/>
+          </a:solidFill>
+          <a:ln w="12700">
+            <a:noFill/>
+          </a:ln>
+        </p:spPr>
+        <p:style>
+          <a:lnRef idx="2">
+            <a:schemeClr val="accent1">
+              <a:shade val="15000"/>
+            </a:schemeClr>
+          </a:lnRef>
+          <a:fillRef idx="1">
+            <a:schemeClr val="accent1"/>
+          </a:fillRef>
+          <a:effectRef idx="0">
+            <a:schemeClr val="accent1"/>
+          </a:effectRef>
+          <a:fontRef idx="minor">
+            <a:schemeClr val="lt1"/>
+          </a:fontRef>
+        </p:style>
+        <p:txBody>
+          <a:bodyPr rtlCol="0" anchor="ctr"/>
+          <a:lstStyle/>
+          <a:p>
+            <a:pPr algn="ctr"/>
+            <a:r>
+              <a:rPr lang="en-US" altLang="zh-CN" sz="800">
+                <a:solidFill>
+                  <a:sysClr val="windowText" lastClr="000000"/>
+                </a:solidFill>
+                <a:latin typeface="Quicksand Light" panose="00000400000000000000" pitchFamily="2" charset="0"/>
+              </a:rPr>
+              <a:t>addToCarts()</a:t>
+            </a:r>
+            <a:endParaRPr lang="zh-CN" altLang="en-US" sz="800">
+              <a:solidFill>
+                <a:sysClr val="windowText" lastClr="000000"/>
+              </a:solidFill>
+              <a:latin typeface="Quicksand Light" panose="00000400000000000000" pitchFamily="2" charset="0"/>
+            </a:endParaRPr>
+          </a:p>
+        </p:txBody>
+      </p:sp>
+      <p:cxnSp>
+        <p:nvCxnSpPr>
+          <p:cNvPr id="40" name="连接符: 曲线 39">
+            <a:extLst>
+              <a:ext uri="{FF2B5EF4-FFF2-40B4-BE49-F238E27FC236}">
+                <a16:creationId xmlns:a16="http://schemas.microsoft.com/office/drawing/2014/main" id="{4AC6721A-6244-50EC-47B3-5478511DF02F}"/>
+              </a:ext>
+            </a:extLst>
+          </p:cNvPr>
+          <p:cNvCxnSpPr>
+            <a:cxnSpLocks/>
+            <a:stCxn id="37" idx="3"/>
+            <a:endCxn id="4" idx="1"/>
+          </p:cNvCxnSpPr>
+          <p:nvPr/>
+        </p:nvCxnSpPr>
+        <p:spPr>
+          <a:xfrm flipV="1">
+            <a:off x="3738400" y="2345109"/>
+            <a:ext cx="189309" cy="286491"/>
+          </a:xfrm>
+          <a:prstGeom prst="curvedConnector3">
+            <a:avLst>
+              <a:gd name="adj1" fmla="val 50000"/>
+            </a:avLst>
+          </a:prstGeom>
+          <a:ln>
+            <a:solidFill>
+              <a:srgbClr val="00B050"/>
+            </a:solidFill>
+          </a:ln>
+        </p:spPr>
+        <p:style>
+          <a:lnRef idx="1">
+            <a:schemeClr val="accent1"/>
+          </a:lnRef>
+          <a:fillRef idx="0">
+            <a:schemeClr val="accent1"/>
+          </a:fillRef>
+          <a:effectRef idx="0">
+            <a:schemeClr val="accent1"/>
+          </a:effectRef>
+          <a:fontRef idx="minor">
+            <a:schemeClr val="tx1"/>
+          </a:fontRef>
+        </p:style>
+      </p:cxnSp>
+      <p:cxnSp>
+        <p:nvCxnSpPr>
+          <p:cNvPr id="45" name="直接连接符 44">
+            <a:extLst>
+              <a:ext uri="{FF2B5EF4-FFF2-40B4-BE49-F238E27FC236}">
+                <a16:creationId xmlns:a16="http://schemas.microsoft.com/office/drawing/2014/main" id="{64FC7AF9-BB31-5588-9F23-4B97028C7A12}"/>
+              </a:ext>
+            </a:extLst>
+          </p:cNvPr>
+          <p:cNvCxnSpPr>
+            <a:stCxn id="36" idx="3"/>
+            <a:endCxn id="4" idx="1"/>
+          </p:cNvCxnSpPr>
+          <p:nvPr/>
+        </p:nvCxnSpPr>
+        <p:spPr>
+          <a:xfrm>
+            <a:off x="3738400" y="2345109"/>
+            <a:ext cx="189309" cy="0"/>
+          </a:xfrm>
+          <a:prstGeom prst="line">
+            <a:avLst/>
+          </a:prstGeom>
+          <a:ln>
+            <a:solidFill>
+              <a:srgbClr val="00B050"/>
+            </a:solidFill>
+          </a:ln>
+        </p:spPr>
+        <p:style>
+          <a:lnRef idx="1">
+            <a:schemeClr val="accent1"/>
+          </a:lnRef>
+          <a:fillRef idx="0">
+            <a:schemeClr val="accent1"/>
+          </a:fillRef>
+          <a:effectRef idx="0">
+            <a:schemeClr val="accent1"/>
+          </a:effectRef>
+          <a:fontRef idx="minor">
+            <a:schemeClr val="tx1"/>
+          </a:fontRef>
+        </p:style>
+      </p:cxnSp>
+      <p:sp>
+        <p:nvSpPr>
+          <p:cNvPr id="54" name="矩形: 圆角 53">
+            <a:extLst>
+              <a:ext uri="{FF2B5EF4-FFF2-40B4-BE49-F238E27FC236}">
+                <a16:creationId xmlns:a16="http://schemas.microsoft.com/office/drawing/2014/main" id="{A46905A7-222F-AF3F-81E8-3E43C3A2AFC0}"/>
+              </a:ext>
+            </a:extLst>
+          </p:cNvPr>
+          <p:cNvSpPr/>
+          <p:nvPr/>
+        </p:nvSpPr>
+        <p:spPr>
+          <a:xfrm>
+            <a:off x="2730400" y="2946554"/>
+            <a:ext cx="1008000" cy="216000"/>
+          </a:xfrm>
+          <a:prstGeom prst="roundRect">
+            <a:avLst/>
+          </a:prstGeom>
+          <a:solidFill>
+            <a:srgbClr val="5C84CC">
+              <a:alpha val="89804"/>
+            </a:srgbClr>
+          </a:solidFill>
+          <a:ln w="12700">
+            <a:noFill/>
+          </a:ln>
+        </p:spPr>
+        <p:style>
+          <a:lnRef idx="2">
+            <a:schemeClr val="accent1">
+              <a:shade val="15000"/>
+            </a:schemeClr>
+          </a:lnRef>
+          <a:fillRef idx="1">
+            <a:schemeClr val="accent1"/>
+          </a:fillRef>
+          <a:effectRef idx="0">
+            <a:schemeClr val="accent1"/>
+          </a:effectRef>
+          <a:fontRef idx="minor">
+            <a:schemeClr val="lt1"/>
+          </a:fontRef>
+        </p:style>
+        <p:txBody>
+          <a:bodyPr rtlCol="0" anchor="ctr"/>
+          <a:lstStyle/>
+          <a:p>
+            <a:pPr algn="ctr"/>
+            <a:r>
+              <a:rPr lang="en-US" altLang="zh-CN" sz="800">
+                <a:latin typeface="Quicksand" panose="00000500000000000000" pitchFamily="2" charset="0"/>
+              </a:rPr>
+              <a:t>lists</a:t>
+            </a:r>
+            <a:endParaRPr lang="zh-CN" altLang="en-US" sz="800">
+              <a:latin typeface="Quicksand" panose="00000500000000000000" pitchFamily="2" charset="0"/>
+            </a:endParaRPr>
+          </a:p>
+        </p:txBody>
+      </p:sp>
+      <p:sp>
+        <p:nvSpPr>
+          <p:cNvPr id="55" name="矩形: 圆角 54">
+            <a:extLst>
+              <a:ext uri="{FF2B5EF4-FFF2-40B4-BE49-F238E27FC236}">
+                <a16:creationId xmlns:a16="http://schemas.microsoft.com/office/drawing/2014/main" id="{1B69FB84-588C-3B6F-29DC-0D207F19217B}"/>
+              </a:ext>
+            </a:extLst>
+          </p:cNvPr>
+          <p:cNvSpPr/>
+          <p:nvPr/>
+        </p:nvSpPr>
+        <p:spPr>
+          <a:xfrm>
+            <a:off x="2730400" y="3245715"/>
+            <a:ext cx="1008000" cy="216000"/>
+          </a:xfrm>
+          <a:prstGeom prst="roundRect">
+            <a:avLst/>
+          </a:prstGeom>
+          <a:solidFill>
+            <a:srgbClr val="5C84CC">
+              <a:alpha val="89804"/>
+            </a:srgbClr>
+          </a:solidFill>
+          <a:ln w="12700">
+            <a:noFill/>
+          </a:ln>
+        </p:spPr>
+        <p:style>
+          <a:lnRef idx="2">
+            <a:schemeClr val="accent1">
+              <a:shade val="15000"/>
+            </a:schemeClr>
+          </a:lnRef>
+          <a:fillRef idx="1">
+            <a:schemeClr val="accent1"/>
+          </a:fillRef>
+          <a:effectRef idx="0">
+            <a:schemeClr val="accent1"/>
+          </a:effectRef>
+          <a:fontRef idx="minor">
+            <a:schemeClr val="lt1"/>
+          </a:fontRef>
+        </p:style>
+        <p:txBody>
+          <a:bodyPr rtlCol="0" anchor="ctr"/>
+          <a:lstStyle/>
+          <a:p>
+            <a:pPr algn="ctr"/>
+            <a:r>
+              <a:rPr lang="en-US" altLang="zh-CN" sz="800">
+                <a:latin typeface="Quicksand" panose="00000500000000000000" pitchFamily="2" charset="0"/>
+              </a:rPr>
+              <a:t>selectedLists</a:t>
+            </a:r>
+            <a:endParaRPr lang="zh-CN" altLang="en-US" sz="800">
+              <a:latin typeface="Quicksand" panose="00000500000000000000" pitchFamily="2" charset="0"/>
+            </a:endParaRPr>
+          </a:p>
+        </p:txBody>
+      </p:sp>
+      <p:sp>
+        <p:nvSpPr>
+          <p:cNvPr id="56" name="矩形: 圆角 55">
+            <a:extLst>
+              <a:ext uri="{FF2B5EF4-FFF2-40B4-BE49-F238E27FC236}">
+                <a16:creationId xmlns:a16="http://schemas.microsoft.com/office/drawing/2014/main" id="{1761FC9C-89B8-41A0-8F5C-43B5E16AA3C1}"/>
+              </a:ext>
+            </a:extLst>
+          </p:cNvPr>
+          <p:cNvSpPr/>
+          <p:nvPr/>
+        </p:nvSpPr>
+        <p:spPr>
+          <a:xfrm>
+            <a:off x="2730400" y="3544876"/>
+            <a:ext cx="1008000" cy="216000"/>
+          </a:xfrm>
+          <a:prstGeom prst="roundRect">
+            <a:avLst/>
+          </a:prstGeom>
+          <a:solidFill>
+            <a:srgbClr val="5C84CC">
+              <a:alpha val="89804"/>
+            </a:srgbClr>
+          </a:solidFill>
+          <a:ln w="12700">
+            <a:noFill/>
+          </a:ln>
+        </p:spPr>
+        <p:style>
+          <a:lnRef idx="2">
+            <a:schemeClr val="accent1">
+              <a:shade val="15000"/>
+            </a:schemeClr>
+          </a:lnRef>
+          <a:fillRef idx="1">
+            <a:schemeClr val="accent1"/>
+          </a:fillRef>
+          <a:effectRef idx="0">
+            <a:schemeClr val="accent1"/>
+          </a:effectRef>
+          <a:fontRef idx="minor">
+            <a:schemeClr val="lt1"/>
+          </a:fontRef>
+        </p:style>
+        <p:txBody>
+          <a:bodyPr rtlCol="0" anchor="ctr"/>
+          <a:lstStyle/>
+          <a:p>
+            <a:pPr algn="ctr"/>
+            <a:r>
+              <a:rPr lang="en-US" altLang="zh-CN" sz="800">
+                <a:latin typeface="Quicksand" panose="00000500000000000000" pitchFamily="2" charset="0"/>
+              </a:rPr>
+              <a:t>isAll</a:t>
+            </a:r>
+            <a:endParaRPr lang="zh-CN" altLang="en-US" sz="800">
+              <a:latin typeface="Quicksand" panose="00000500000000000000" pitchFamily="2" charset="0"/>
+            </a:endParaRPr>
+          </a:p>
+        </p:txBody>
+      </p:sp>
+      <p:sp>
+        <p:nvSpPr>
+          <p:cNvPr id="57" name="矩形: 圆角 56">
+            <a:extLst>
+              <a:ext uri="{FF2B5EF4-FFF2-40B4-BE49-F238E27FC236}">
+                <a16:creationId xmlns:a16="http://schemas.microsoft.com/office/drawing/2014/main" id="{83DCAFDE-14F9-6845-DB80-8B8F839510C3}"/>
+              </a:ext>
+            </a:extLst>
+          </p:cNvPr>
+          <p:cNvSpPr/>
+          <p:nvPr/>
+        </p:nvSpPr>
+        <p:spPr>
+          <a:xfrm>
+            <a:off x="2730400" y="3844037"/>
+            <a:ext cx="1008000" cy="216000"/>
+          </a:xfrm>
+          <a:prstGeom prst="roundRect">
+            <a:avLst/>
+          </a:prstGeom>
+          <a:solidFill>
+            <a:srgbClr val="5C84CC">
+              <a:alpha val="89804"/>
+            </a:srgbClr>
+          </a:solidFill>
+          <a:ln w="12700">
+            <a:noFill/>
+          </a:ln>
+        </p:spPr>
+        <p:style>
+          <a:lnRef idx="2">
+            <a:schemeClr val="accent1">
+              <a:shade val="15000"/>
+            </a:schemeClr>
+          </a:lnRef>
+          <a:fillRef idx="1">
+            <a:schemeClr val="accent1"/>
+          </a:fillRef>
+          <a:effectRef idx="0">
+            <a:schemeClr val="accent1"/>
+          </a:effectRef>
+          <a:fontRef idx="minor">
+            <a:schemeClr val="lt1"/>
+          </a:fontRef>
+        </p:style>
+        <p:txBody>
+          <a:bodyPr rtlCol="0" anchor="ctr"/>
+          <a:lstStyle/>
+          <a:p>
+            <a:pPr algn="ctr"/>
+            <a:r>
+              <a:rPr lang="en-US" altLang="zh-CN" sz="800">
+                <a:latin typeface="Quicksand" panose="00000500000000000000" pitchFamily="2" charset="0"/>
+              </a:rPr>
+              <a:t>count</a:t>
+            </a:r>
+            <a:endParaRPr lang="zh-CN" altLang="en-US" sz="800">
+              <a:latin typeface="Quicksand" panose="00000500000000000000" pitchFamily="2" charset="0"/>
+            </a:endParaRPr>
+          </a:p>
+        </p:txBody>
+      </p:sp>
+      <p:sp>
+        <p:nvSpPr>
+          <p:cNvPr id="59" name="矩形: 圆角 58">
+            <a:extLst>
+              <a:ext uri="{FF2B5EF4-FFF2-40B4-BE49-F238E27FC236}">
+                <a16:creationId xmlns:a16="http://schemas.microsoft.com/office/drawing/2014/main" id="{D7B3F34F-6627-658C-A744-FBC9FDD8AF91}"/>
+              </a:ext>
+            </a:extLst>
+          </p:cNvPr>
+          <p:cNvSpPr/>
+          <p:nvPr/>
+        </p:nvSpPr>
+        <p:spPr>
+          <a:xfrm>
+            <a:off x="2730400" y="4143198"/>
+            <a:ext cx="1008000" cy="216000"/>
+          </a:xfrm>
+          <a:prstGeom prst="roundRect">
+            <a:avLst/>
+          </a:prstGeom>
+          <a:solidFill>
+            <a:srgbClr val="5C84CC">
+              <a:alpha val="89804"/>
+            </a:srgbClr>
+          </a:solidFill>
+          <a:ln w="12700">
+            <a:noFill/>
+          </a:ln>
+        </p:spPr>
+        <p:style>
+          <a:lnRef idx="2">
+            <a:schemeClr val="accent1">
+              <a:shade val="15000"/>
+            </a:schemeClr>
+          </a:lnRef>
+          <a:fillRef idx="1">
+            <a:schemeClr val="accent1"/>
+          </a:fillRef>
+          <a:effectRef idx="0">
+            <a:schemeClr val="accent1"/>
+          </a:effectRef>
+          <a:fontRef idx="minor">
+            <a:schemeClr val="lt1"/>
+          </a:fontRef>
+        </p:style>
+        <p:txBody>
+          <a:bodyPr rtlCol="0" anchor="ctr"/>
+          <a:lstStyle/>
+          <a:p>
+            <a:pPr algn="ctr"/>
+            <a:r>
+              <a:rPr lang="en-US" altLang="zh-CN" sz="800">
+                <a:latin typeface="Quicksand" panose="00000500000000000000" pitchFamily="2" charset="0"/>
+              </a:rPr>
+              <a:t>totalPrice</a:t>
+            </a:r>
+            <a:endParaRPr lang="zh-CN" altLang="en-US" sz="800">
+              <a:latin typeface="Quicksand" panose="00000500000000000000" pitchFamily="2" charset="0"/>
+            </a:endParaRPr>
+          </a:p>
+        </p:txBody>
+      </p:sp>
+      <p:sp>
+        <p:nvSpPr>
+          <p:cNvPr id="60" name="矩形: 圆角 59">
+            <a:extLst>
+              <a:ext uri="{FF2B5EF4-FFF2-40B4-BE49-F238E27FC236}">
+                <a16:creationId xmlns:a16="http://schemas.microsoft.com/office/drawing/2014/main" id="{69FD48F7-D13B-8DD4-D4AA-42DDEE93B189}"/>
+              </a:ext>
+            </a:extLst>
+          </p:cNvPr>
+          <p:cNvSpPr/>
+          <p:nvPr/>
+        </p:nvSpPr>
+        <p:spPr>
+          <a:xfrm>
+            <a:off x="2730400" y="4442359"/>
+            <a:ext cx="1008000" cy="216000"/>
+          </a:xfrm>
+          <a:prstGeom prst="roundRect">
+            <a:avLst/>
+          </a:prstGeom>
+          <a:solidFill>
+            <a:srgbClr val="5C84CC">
+              <a:alpha val="89804"/>
+            </a:srgbClr>
+          </a:solidFill>
+          <a:ln w="12700">
+            <a:noFill/>
+          </a:ln>
+        </p:spPr>
+        <p:style>
+          <a:lnRef idx="2">
+            <a:schemeClr val="accent1">
+              <a:shade val="15000"/>
+            </a:schemeClr>
+          </a:lnRef>
+          <a:fillRef idx="1">
+            <a:schemeClr val="accent1"/>
+          </a:fillRef>
+          <a:effectRef idx="0">
+            <a:schemeClr val="accent1"/>
+          </a:effectRef>
+          <a:fontRef idx="minor">
+            <a:schemeClr val="lt1"/>
+          </a:fontRef>
+        </p:style>
+        <p:txBody>
+          <a:bodyPr rtlCol="0" anchor="ctr"/>
+          <a:lstStyle/>
+          <a:p>
+            <a:pPr algn="ctr"/>
+            <a:r>
+              <a:rPr lang="en-US" altLang="zh-CN" sz="800">
+                <a:latin typeface="Quicksand" panose="00000500000000000000" pitchFamily="2" charset="0"/>
+              </a:rPr>
+              <a:t>discountPrice</a:t>
+            </a:r>
+            <a:endParaRPr lang="zh-CN" altLang="en-US" sz="800">
+              <a:latin typeface="Quicksand" panose="00000500000000000000" pitchFamily="2" charset="0"/>
+            </a:endParaRPr>
+          </a:p>
+        </p:txBody>
+      </p:sp>
+      <p:cxnSp>
+        <p:nvCxnSpPr>
+          <p:cNvPr id="61" name="连接符: 曲线 60">
+            <a:extLst>
+              <a:ext uri="{FF2B5EF4-FFF2-40B4-BE49-F238E27FC236}">
+                <a16:creationId xmlns:a16="http://schemas.microsoft.com/office/drawing/2014/main" id="{BD5BA532-7EB2-08C6-9059-CA4E846D5684}"/>
+              </a:ext>
+            </a:extLst>
+          </p:cNvPr>
+          <p:cNvCxnSpPr>
+            <a:cxnSpLocks/>
+            <a:stCxn id="54" idx="3"/>
+            <a:endCxn id="3" idx="1"/>
+          </p:cNvCxnSpPr>
+          <p:nvPr/>
+        </p:nvCxnSpPr>
+        <p:spPr>
+          <a:xfrm>
+            <a:off x="3738400" y="3054554"/>
+            <a:ext cx="189309" cy="747903"/>
+          </a:xfrm>
+          <a:prstGeom prst="curvedConnector3">
+            <a:avLst>
+              <a:gd name="adj1" fmla="val 50000"/>
+            </a:avLst>
+          </a:prstGeom>
+          <a:ln>
+            <a:solidFill>
+              <a:srgbClr val="6D91D1"/>
+            </a:solidFill>
+          </a:ln>
+        </p:spPr>
+        <p:style>
+          <a:lnRef idx="1">
+            <a:schemeClr val="accent1"/>
+          </a:lnRef>
+          <a:fillRef idx="0">
+            <a:schemeClr val="accent1"/>
+          </a:fillRef>
+          <a:effectRef idx="0">
+            <a:schemeClr val="accent1"/>
+          </a:effectRef>
+          <a:fontRef idx="minor">
+            <a:schemeClr val="tx1"/>
+          </a:fontRef>
+        </p:style>
+      </p:cxnSp>
+      <p:cxnSp>
+        <p:nvCxnSpPr>
+          <p:cNvPr id="68" name="连接符: 曲线 67">
+            <a:extLst>
+              <a:ext uri="{FF2B5EF4-FFF2-40B4-BE49-F238E27FC236}">
+                <a16:creationId xmlns:a16="http://schemas.microsoft.com/office/drawing/2014/main" id="{16E326BD-B4AE-1641-E70A-A6BFE4509A70}"/>
+              </a:ext>
+            </a:extLst>
+          </p:cNvPr>
+          <p:cNvCxnSpPr>
+            <a:cxnSpLocks/>
+            <a:stCxn id="55" idx="3"/>
+            <a:endCxn id="3" idx="1"/>
+          </p:cNvCxnSpPr>
+          <p:nvPr/>
+        </p:nvCxnSpPr>
+        <p:spPr>
+          <a:xfrm>
+            <a:off x="3738400" y="3353715"/>
+            <a:ext cx="189309" cy="448742"/>
+          </a:xfrm>
+          <a:prstGeom prst="curvedConnector3">
+            <a:avLst>
+              <a:gd name="adj1" fmla="val 50000"/>
+            </a:avLst>
+          </a:prstGeom>
+          <a:ln>
+            <a:solidFill>
+              <a:srgbClr val="6D91D1"/>
+            </a:solidFill>
+          </a:ln>
+        </p:spPr>
+        <p:style>
+          <a:lnRef idx="1">
+            <a:schemeClr val="accent1"/>
+          </a:lnRef>
+          <a:fillRef idx="0">
+            <a:schemeClr val="accent1"/>
+          </a:fillRef>
+          <a:effectRef idx="0">
+            <a:schemeClr val="accent1"/>
+          </a:effectRef>
+          <a:fontRef idx="minor">
+            <a:schemeClr val="tx1"/>
+          </a:fontRef>
+        </p:style>
+      </p:cxnSp>
+      <p:cxnSp>
+        <p:nvCxnSpPr>
+          <p:cNvPr id="75" name="连接符: 曲线 74">
+            <a:extLst>
+              <a:ext uri="{FF2B5EF4-FFF2-40B4-BE49-F238E27FC236}">
+                <a16:creationId xmlns:a16="http://schemas.microsoft.com/office/drawing/2014/main" id="{B5A66737-652E-D3AD-C2BA-7A64BF6D2DB4}"/>
+              </a:ext>
+            </a:extLst>
+          </p:cNvPr>
+          <p:cNvCxnSpPr>
+            <a:cxnSpLocks/>
+            <a:stCxn id="60" idx="3"/>
+            <a:endCxn id="3" idx="1"/>
+          </p:cNvCxnSpPr>
+          <p:nvPr/>
+        </p:nvCxnSpPr>
+        <p:spPr>
+          <a:xfrm flipV="1">
+            <a:off x="3738400" y="3802457"/>
+            <a:ext cx="189309" cy="747902"/>
+          </a:xfrm>
+          <a:prstGeom prst="curvedConnector3">
+            <a:avLst>
+              <a:gd name="adj1" fmla="val 50000"/>
+            </a:avLst>
+          </a:prstGeom>
+          <a:ln>
+            <a:solidFill>
+              <a:srgbClr val="6D91D1"/>
+            </a:solidFill>
+          </a:ln>
+        </p:spPr>
+        <p:style>
+          <a:lnRef idx="1">
+            <a:schemeClr val="accent1"/>
+          </a:lnRef>
+          <a:fillRef idx="0">
+            <a:schemeClr val="accent1"/>
+          </a:fillRef>
+          <a:effectRef idx="0">
+            <a:schemeClr val="accent1"/>
+          </a:effectRef>
+          <a:fontRef idx="minor">
+            <a:schemeClr val="tx1"/>
+          </a:fontRef>
+        </p:style>
+      </p:cxnSp>
+      <p:cxnSp>
+        <p:nvCxnSpPr>
+          <p:cNvPr id="78" name="连接符: 曲线 77">
+            <a:extLst>
+              <a:ext uri="{FF2B5EF4-FFF2-40B4-BE49-F238E27FC236}">
+                <a16:creationId xmlns:a16="http://schemas.microsoft.com/office/drawing/2014/main" id="{9C49D303-6593-4078-0C50-F1465C52AB10}"/>
+              </a:ext>
+            </a:extLst>
+          </p:cNvPr>
+          <p:cNvCxnSpPr>
+            <a:cxnSpLocks/>
+            <a:stCxn id="56" idx="3"/>
+            <a:endCxn id="3" idx="1"/>
+          </p:cNvCxnSpPr>
+          <p:nvPr/>
+        </p:nvCxnSpPr>
+        <p:spPr>
+          <a:xfrm>
+            <a:off x="3738400" y="3652876"/>
+            <a:ext cx="189309" cy="149581"/>
+          </a:xfrm>
+          <a:prstGeom prst="curvedConnector3">
+            <a:avLst>
+              <a:gd name="adj1" fmla="val 50000"/>
+            </a:avLst>
+          </a:prstGeom>
+          <a:ln>
+            <a:solidFill>
+              <a:srgbClr val="6D91D1"/>
+            </a:solidFill>
+          </a:ln>
+        </p:spPr>
+        <p:style>
+          <a:lnRef idx="1">
+            <a:schemeClr val="accent1"/>
+          </a:lnRef>
+          <a:fillRef idx="0">
+            <a:schemeClr val="accent1"/>
+          </a:fillRef>
+          <a:effectRef idx="0">
+            <a:schemeClr val="accent1"/>
+          </a:effectRef>
+          <a:fontRef idx="minor">
+            <a:schemeClr val="tx1"/>
+          </a:fontRef>
+        </p:style>
+      </p:cxnSp>
+      <p:cxnSp>
+        <p:nvCxnSpPr>
+          <p:cNvPr id="81" name="连接符: 曲线 80">
+            <a:extLst>
+              <a:ext uri="{FF2B5EF4-FFF2-40B4-BE49-F238E27FC236}">
+                <a16:creationId xmlns:a16="http://schemas.microsoft.com/office/drawing/2014/main" id="{96EB5F84-D1BD-20B5-2777-AB306C14B03E}"/>
+              </a:ext>
+            </a:extLst>
+          </p:cNvPr>
+          <p:cNvCxnSpPr>
+            <a:cxnSpLocks/>
+            <a:stCxn id="59" idx="3"/>
+            <a:endCxn id="3" idx="1"/>
+          </p:cNvCxnSpPr>
+          <p:nvPr/>
+        </p:nvCxnSpPr>
+        <p:spPr>
+          <a:xfrm flipV="1">
+            <a:off x="3738400" y="3802457"/>
+            <a:ext cx="189309" cy="448741"/>
+          </a:xfrm>
+          <a:prstGeom prst="curvedConnector3">
+            <a:avLst>
+              <a:gd name="adj1" fmla="val 50000"/>
+            </a:avLst>
+          </a:prstGeom>
+          <a:ln>
+            <a:solidFill>
+              <a:srgbClr val="6D91D1"/>
+            </a:solidFill>
+          </a:ln>
+        </p:spPr>
+        <p:style>
+          <a:lnRef idx="1">
+            <a:schemeClr val="accent1"/>
+          </a:lnRef>
+          <a:fillRef idx="0">
+            <a:schemeClr val="accent1"/>
+          </a:fillRef>
+          <a:effectRef idx="0">
+            <a:schemeClr val="accent1"/>
+          </a:effectRef>
+          <a:fontRef idx="minor">
+            <a:schemeClr val="tx1"/>
+          </a:fontRef>
+        </p:style>
+      </p:cxnSp>
+      <p:cxnSp>
+        <p:nvCxnSpPr>
+          <p:cNvPr id="86" name="连接符: 曲线 85">
+            <a:extLst>
+              <a:ext uri="{FF2B5EF4-FFF2-40B4-BE49-F238E27FC236}">
+                <a16:creationId xmlns:a16="http://schemas.microsoft.com/office/drawing/2014/main" id="{698C2E92-6E21-B7A7-AAAB-69046DD82A44}"/>
+              </a:ext>
+            </a:extLst>
+          </p:cNvPr>
+          <p:cNvCxnSpPr>
+            <a:cxnSpLocks/>
+            <a:stCxn id="57" idx="3"/>
+            <a:endCxn id="3" idx="1"/>
+          </p:cNvCxnSpPr>
+          <p:nvPr/>
+        </p:nvCxnSpPr>
+        <p:spPr>
+          <a:xfrm flipV="1">
+            <a:off x="3738400" y="3802457"/>
+            <a:ext cx="189309" cy="149580"/>
+          </a:xfrm>
+          <a:prstGeom prst="curvedConnector3">
+            <a:avLst>
+              <a:gd name="adj1" fmla="val 50000"/>
+            </a:avLst>
+          </a:prstGeom>
+          <a:ln>
+            <a:solidFill>
+              <a:srgbClr val="6D91D1"/>
+            </a:solidFill>
+          </a:ln>
+        </p:spPr>
+        <p:style>
+          <a:lnRef idx="1">
+            <a:schemeClr val="accent1"/>
+          </a:lnRef>
+          <a:fillRef idx="0">
+            <a:schemeClr val="accent1"/>
+          </a:fillRef>
+          <a:effectRef idx="0">
+            <a:schemeClr val="accent1"/>
+          </a:effectRef>
+          <a:fontRef idx="minor">
+            <a:schemeClr val="tx1"/>
+          </a:fontRef>
+        </p:style>
+      </p:cxnSp>
+    </p:spTree>
+    <p:extLst>
+      <p:ext uri="{BB962C8B-B14F-4D97-AF65-F5344CB8AC3E}">
+        <p14:creationId xmlns:p14="http://schemas.microsoft.com/office/powerpoint/2010/main" val="2989024140"/>
       </p:ext>
     </p:extLst>
   </p:cSld>

--- a/utils/file/charts.pptx
+++ b/utils/file/charts.pptx
@@ -8,34 +8,33 @@
     <p:sldId id="270" r:id="rId2"/>
     <p:sldId id="289" r:id="rId3"/>
     <p:sldId id="290" r:id="rId4"/>
-    <p:sldId id="286" r:id="rId5"/>
-    <p:sldId id="258" r:id="rId6"/>
-    <p:sldId id="259" r:id="rId7"/>
-    <p:sldId id="260" r:id="rId8"/>
-    <p:sldId id="269" r:id="rId9"/>
-    <p:sldId id="261" r:id="rId10"/>
-    <p:sldId id="262" r:id="rId11"/>
-    <p:sldId id="263" r:id="rId12"/>
-    <p:sldId id="265" r:id="rId13"/>
-    <p:sldId id="266" r:id="rId14"/>
-    <p:sldId id="267" r:id="rId15"/>
-    <p:sldId id="273" r:id="rId16"/>
-    <p:sldId id="271" r:id="rId17"/>
-    <p:sldId id="268" r:id="rId18"/>
-    <p:sldId id="281" r:id="rId19"/>
-    <p:sldId id="282" r:id="rId20"/>
-    <p:sldId id="283" r:id="rId21"/>
-    <p:sldId id="284" r:id="rId22"/>
-    <p:sldId id="274" r:id="rId23"/>
-    <p:sldId id="276" r:id="rId24"/>
-    <p:sldId id="277" r:id="rId25"/>
-    <p:sldId id="278" r:id="rId26"/>
-    <p:sldId id="279" r:id="rId27"/>
-    <p:sldId id="285" r:id="rId28"/>
-    <p:sldId id="280" r:id="rId29"/>
-    <p:sldId id="264" r:id="rId30"/>
-    <p:sldId id="272" r:id="rId31"/>
-    <p:sldId id="256" r:id="rId32"/>
+    <p:sldId id="258" r:id="rId5"/>
+    <p:sldId id="259" r:id="rId6"/>
+    <p:sldId id="260" r:id="rId7"/>
+    <p:sldId id="269" r:id="rId8"/>
+    <p:sldId id="261" r:id="rId9"/>
+    <p:sldId id="262" r:id="rId10"/>
+    <p:sldId id="263" r:id="rId11"/>
+    <p:sldId id="265" r:id="rId12"/>
+    <p:sldId id="266" r:id="rId13"/>
+    <p:sldId id="267" r:id="rId14"/>
+    <p:sldId id="273" r:id="rId15"/>
+    <p:sldId id="271" r:id="rId16"/>
+    <p:sldId id="268" r:id="rId17"/>
+    <p:sldId id="281" r:id="rId18"/>
+    <p:sldId id="282" r:id="rId19"/>
+    <p:sldId id="283" r:id="rId20"/>
+    <p:sldId id="284" r:id="rId21"/>
+    <p:sldId id="274" r:id="rId22"/>
+    <p:sldId id="276" r:id="rId23"/>
+    <p:sldId id="277" r:id="rId24"/>
+    <p:sldId id="278" r:id="rId25"/>
+    <p:sldId id="279" r:id="rId26"/>
+    <p:sldId id="285" r:id="rId27"/>
+    <p:sldId id="280" r:id="rId28"/>
+    <p:sldId id="264" r:id="rId29"/>
+    <p:sldId id="272" r:id="rId30"/>
+    <p:sldId id="256" r:id="rId31"/>
   </p:sldIdLst>
   <p:sldSz cx="12192000" cy="6858000"/>
   <p:notesSz cx="6858000" cy="9144000"/>
@@ -289,7 +288,7 @@
           <a:p>
             <a:fld id="{C0F7C65B-F23F-479A-8AFF-E7E0FC962F06}" type="datetimeFigureOut">
               <a:rPr lang="zh-CN" altLang="en-US" smtClean="0"/>
-              <a:t>2025/11/15</a:t>
+              <a:t>2025/11/21</a:t>
             </a:fld>
             <a:endParaRPr lang="zh-CN" altLang="en-US"/>
           </a:p>
@@ -487,7 +486,7 @@
           <a:p>
             <a:fld id="{C0F7C65B-F23F-479A-8AFF-E7E0FC962F06}" type="datetimeFigureOut">
               <a:rPr lang="zh-CN" altLang="en-US" smtClean="0"/>
-              <a:t>2025/11/15</a:t>
+              <a:t>2025/11/21</a:t>
             </a:fld>
             <a:endParaRPr lang="zh-CN" altLang="en-US"/>
           </a:p>
@@ -695,7 +694,7 @@
           <a:p>
             <a:fld id="{C0F7C65B-F23F-479A-8AFF-E7E0FC962F06}" type="datetimeFigureOut">
               <a:rPr lang="zh-CN" altLang="en-US" smtClean="0"/>
-              <a:t>2025/11/15</a:t>
+              <a:t>2025/11/21</a:t>
             </a:fld>
             <a:endParaRPr lang="zh-CN" altLang="en-US"/>
           </a:p>
@@ -893,7 +892,7 @@
           <a:p>
             <a:fld id="{C0F7C65B-F23F-479A-8AFF-E7E0FC962F06}" type="datetimeFigureOut">
               <a:rPr lang="zh-CN" altLang="en-US" smtClean="0"/>
-              <a:t>2025/11/15</a:t>
+              <a:t>2025/11/21</a:t>
             </a:fld>
             <a:endParaRPr lang="zh-CN" altLang="en-US"/>
           </a:p>
@@ -1168,7 +1167,7 @@
           <a:p>
             <a:fld id="{C0F7C65B-F23F-479A-8AFF-E7E0FC962F06}" type="datetimeFigureOut">
               <a:rPr lang="zh-CN" altLang="en-US" smtClean="0"/>
-              <a:t>2025/11/15</a:t>
+              <a:t>2025/11/21</a:t>
             </a:fld>
             <a:endParaRPr lang="zh-CN" altLang="en-US"/>
           </a:p>
@@ -1433,7 +1432,7 @@
           <a:p>
             <a:fld id="{C0F7C65B-F23F-479A-8AFF-E7E0FC962F06}" type="datetimeFigureOut">
               <a:rPr lang="zh-CN" altLang="en-US" smtClean="0"/>
-              <a:t>2025/11/15</a:t>
+              <a:t>2025/11/21</a:t>
             </a:fld>
             <a:endParaRPr lang="zh-CN" altLang="en-US"/>
           </a:p>
@@ -1845,7 +1844,7 @@
           <a:p>
             <a:fld id="{C0F7C65B-F23F-479A-8AFF-E7E0FC962F06}" type="datetimeFigureOut">
               <a:rPr lang="zh-CN" altLang="en-US" smtClean="0"/>
-              <a:t>2025/11/15</a:t>
+              <a:t>2025/11/21</a:t>
             </a:fld>
             <a:endParaRPr lang="zh-CN" altLang="en-US"/>
           </a:p>
@@ -1986,7 +1985,7 @@
           <a:p>
             <a:fld id="{C0F7C65B-F23F-479A-8AFF-E7E0FC962F06}" type="datetimeFigureOut">
               <a:rPr lang="zh-CN" altLang="en-US" smtClean="0"/>
-              <a:t>2025/11/15</a:t>
+              <a:t>2025/11/21</a:t>
             </a:fld>
             <a:endParaRPr lang="zh-CN" altLang="en-US"/>
           </a:p>
@@ -2099,7 +2098,7 @@
           <a:p>
             <a:fld id="{C0F7C65B-F23F-479A-8AFF-E7E0FC962F06}" type="datetimeFigureOut">
               <a:rPr lang="zh-CN" altLang="en-US" smtClean="0"/>
-              <a:t>2025/11/15</a:t>
+              <a:t>2025/11/21</a:t>
             </a:fld>
             <a:endParaRPr lang="zh-CN" altLang="en-US"/>
           </a:p>
@@ -2410,7 +2409,7 @@
           <a:p>
             <a:fld id="{C0F7C65B-F23F-479A-8AFF-E7E0FC962F06}" type="datetimeFigureOut">
               <a:rPr lang="zh-CN" altLang="en-US" smtClean="0"/>
-              <a:t>2025/11/15</a:t>
+              <a:t>2025/11/21</a:t>
             </a:fld>
             <a:endParaRPr lang="zh-CN" altLang="en-US"/>
           </a:p>
@@ -2698,7 +2697,7 @@
           <a:p>
             <a:fld id="{C0F7C65B-F23F-479A-8AFF-E7E0FC962F06}" type="datetimeFigureOut">
               <a:rPr lang="zh-CN" altLang="en-US" smtClean="0"/>
-              <a:t>2025/11/15</a:t>
+              <a:t>2025/11/21</a:t>
             </a:fld>
             <a:endParaRPr lang="zh-CN" altLang="en-US"/>
           </a:p>
@@ -2939,7 +2938,7 @@
           <a:p>
             <a:fld id="{C0F7C65B-F23F-479A-8AFF-E7E0FC962F06}" type="datetimeFigureOut">
               <a:rPr lang="zh-CN" altLang="en-US" smtClean="0"/>
-              <a:t>2025/11/15</a:t>
+              <a:t>2025/11/21</a:t>
             </a:fld>
             <a:endParaRPr lang="zh-CN" altLang="en-US"/>
           </a:p>
@@ -3509,972 +3508,6 @@
         <p:cNvPr id="1" name="">
           <a:extLst>
             <a:ext uri="{FF2B5EF4-FFF2-40B4-BE49-F238E27FC236}">
-              <a16:creationId xmlns:a16="http://schemas.microsoft.com/office/drawing/2014/main" id="{5C7A2C4C-DE35-8F5D-FAA3-1F45B914C406}"/>
-            </a:ext>
-          </a:extLst>
-        </p:cNvPr>
-        <p:cNvGrpSpPr/>
-        <p:nvPr/>
-      </p:nvGrpSpPr>
-      <p:grpSpPr>
-        <a:xfrm>
-          <a:off x="0" y="0"/>
-          <a:ext cx="0" cy="0"/>
-          <a:chOff x="0" y="0"/>
-          <a:chExt cx="0" cy="0"/>
-        </a:xfrm>
-      </p:grpSpPr>
-      <p:sp>
-        <p:nvSpPr>
-          <p:cNvPr id="7" name="矩形: 圆角 6">
-            <a:extLst>
-              <a:ext uri="{FF2B5EF4-FFF2-40B4-BE49-F238E27FC236}">
-                <a16:creationId xmlns:a16="http://schemas.microsoft.com/office/drawing/2014/main" id="{E9167702-BFB3-0DB3-BB79-C1FC75427EA0}"/>
-              </a:ext>
-            </a:extLst>
-          </p:cNvPr>
-          <p:cNvSpPr/>
-          <p:nvPr/>
-        </p:nvSpPr>
-        <p:spPr>
-          <a:xfrm>
-            <a:off x="4988680" y="2930400"/>
-            <a:ext cx="900000" cy="216000"/>
-          </a:xfrm>
-          <a:prstGeom prst="roundRect">
-            <a:avLst/>
-          </a:prstGeom>
-          <a:solidFill>
-            <a:srgbClr val="335BA3">
-              <a:alpha val="89804"/>
-            </a:srgbClr>
-          </a:solidFill>
-          <a:ln w="12700">
-            <a:noFill/>
-          </a:ln>
-        </p:spPr>
-        <p:style>
-          <a:lnRef idx="2">
-            <a:schemeClr val="accent1">
-              <a:shade val="15000"/>
-            </a:schemeClr>
-          </a:lnRef>
-          <a:fillRef idx="1">
-            <a:schemeClr val="accent1"/>
-          </a:fillRef>
-          <a:effectRef idx="0">
-            <a:schemeClr val="accent1"/>
-          </a:effectRef>
-          <a:fontRef idx="minor">
-            <a:schemeClr val="lt1"/>
-          </a:fontRef>
-        </p:style>
-        <p:txBody>
-          <a:bodyPr rtlCol="0" anchor="ctr"/>
-          <a:lstStyle/>
-          <a:p>
-            <a:pPr algn="ctr"/>
-            <a:r>
-              <a:rPr lang="en-US" altLang="zh-CN" sz="800">
-                <a:latin typeface="Quicksand" panose="00000500000000000000" pitchFamily="2" charset="0"/>
-              </a:rPr>
-              <a:t>::before</a:t>
-            </a:r>
-            <a:endParaRPr lang="zh-CN" altLang="en-US" sz="800">
-              <a:latin typeface="Quicksand" panose="00000500000000000000" pitchFamily="2" charset="0"/>
-            </a:endParaRPr>
-          </a:p>
-        </p:txBody>
-      </p:sp>
-      <p:sp>
-        <p:nvSpPr>
-          <p:cNvPr id="25" name="矩形: 圆角 24">
-            <a:extLst>
-              <a:ext uri="{FF2B5EF4-FFF2-40B4-BE49-F238E27FC236}">
-                <a16:creationId xmlns:a16="http://schemas.microsoft.com/office/drawing/2014/main" id="{DB29B0F0-7681-C319-D905-61DFC9EA1742}"/>
-              </a:ext>
-            </a:extLst>
-          </p:cNvPr>
-          <p:cNvSpPr/>
-          <p:nvPr/>
-        </p:nvSpPr>
-        <p:spPr>
-          <a:xfrm>
-            <a:off x="6057780" y="2534400"/>
-            <a:ext cx="900000" cy="216000"/>
-          </a:xfrm>
-          <a:prstGeom prst="roundRect">
-            <a:avLst/>
-          </a:prstGeom>
-          <a:solidFill>
-            <a:srgbClr val="F9423A">
-              <a:alpha val="89804"/>
-            </a:srgbClr>
-          </a:solidFill>
-          <a:ln w="12700">
-            <a:noFill/>
-          </a:ln>
-        </p:spPr>
-        <p:style>
-          <a:lnRef idx="2">
-            <a:schemeClr val="accent1">
-              <a:shade val="15000"/>
-            </a:schemeClr>
-          </a:lnRef>
-          <a:fillRef idx="1">
-            <a:schemeClr val="accent1"/>
-          </a:fillRef>
-          <a:effectRef idx="0">
-            <a:schemeClr val="accent1"/>
-          </a:effectRef>
-          <a:fontRef idx="minor">
-            <a:schemeClr val="lt1"/>
-          </a:fontRef>
-        </p:style>
-        <p:txBody>
-          <a:bodyPr rtlCol="0" anchor="ctr"/>
-          <a:lstStyle/>
-          <a:p>
-            <a:pPr algn="ctr"/>
-            <a:r>
-              <a:rPr lang="en-US" altLang="zh-CN" sz="800">
-                <a:latin typeface="Quicksand" panose="00000500000000000000" pitchFamily="2" charset="0"/>
-              </a:rPr>
-              <a:t>String of text</a:t>
-            </a:r>
-            <a:endParaRPr lang="zh-CN" altLang="en-US" sz="800">
-              <a:latin typeface="Quicksand" panose="00000500000000000000" pitchFamily="2" charset="0"/>
-            </a:endParaRPr>
-          </a:p>
-        </p:txBody>
-      </p:sp>
-      <p:sp>
-        <p:nvSpPr>
-          <p:cNvPr id="26" name="矩形: 圆角 25">
-            <a:extLst>
-              <a:ext uri="{FF2B5EF4-FFF2-40B4-BE49-F238E27FC236}">
-                <a16:creationId xmlns:a16="http://schemas.microsoft.com/office/drawing/2014/main" id="{A362D5C7-ED9E-7876-9B3A-5E7694F2029B}"/>
-              </a:ext>
-            </a:extLst>
-          </p:cNvPr>
-          <p:cNvSpPr/>
-          <p:nvPr/>
-        </p:nvSpPr>
-        <p:spPr>
-          <a:xfrm>
-            <a:off x="6057780" y="2798400"/>
-            <a:ext cx="900000" cy="216000"/>
-          </a:xfrm>
-          <a:prstGeom prst="roundRect">
-            <a:avLst/>
-          </a:prstGeom>
-          <a:solidFill>
-            <a:srgbClr val="F6A04D">
-              <a:alpha val="89804"/>
-            </a:srgbClr>
-          </a:solidFill>
-          <a:ln w="12700">
-            <a:noFill/>
-          </a:ln>
-        </p:spPr>
-        <p:style>
-          <a:lnRef idx="2">
-            <a:schemeClr val="accent1">
-              <a:shade val="15000"/>
-            </a:schemeClr>
-          </a:lnRef>
-          <a:fillRef idx="1">
-            <a:schemeClr val="accent1"/>
-          </a:fillRef>
-          <a:effectRef idx="0">
-            <a:schemeClr val="accent1"/>
-          </a:effectRef>
-          <a:fontRef idx="minor">
-            <a:schemeClr val="lt1"/>
-          </a:fontRef>
-        </p:style>
-        <p:txBody>
-          <a:bodyPr rtlCol="0" anchor="ctr"/>
-          <a:lstStyle/>
-          <a:p>
-            <a:pPr algn="ctr"/>
-            <a:r>
-              <a:rPr lang="en-US" altLang="zh-CN" sz="800">
-                <a:latin typeface="Quicksand" panose="00000500000000000000" pitchFamily="2" charset="0"/>
-              </a:rPr>
-              <a:t>Entity</a:t>
-            </a:r>
-            <a:endParaRPr lang="zh-CN" altLang="en-US" sz="800">
-              <a:latin typeface="Quicksand" panose="00000500000000000000" pitchFamily="2" charset="0"/>
-            </a:endParaRPr>
-          </a:p>
-        </p:txBody>
-      </p:sp>
-      <p:cxnSp>
-        <p:nvCxnSpPr>
-          <p:cNvPr id="28" name="连接符: 曲线 27">
-            <a:extLst>
-              <a:ext uri="{FF2B5EF4-FFF2-40B4-BE49-F238E27FC236}">
-                <a16:creationId xmlns:a16="http://schemas.microsoft.com/office/drawing/2014/main" id="{3CC45C27-5C3D-1BF1-5E05-EB880994D1C9}"/>
-              </a:ext>
-            </a:extLst>
-          </p:cNvPr>
-          <p:cNvCxnSpPr>
-            <a:cxnSpLocks/>
-            <a:stCxn id="7" idx="3"/>
-            <a:endCxn id="25" idx="1"/>
-          </p:cNvCxnSpPr>
-          <p:nvPr/>
-        </p:nvCxnSpPr>
-        <p:spPr>
-          <a:xfrm flipV="1">
-            <a:off x="5888680" y="2642400"/>
-            <a:ext cx="169100" cy="396000"/>
-          </a:xfrm>
-          <a:prstGeom prst="curvedConnector3">
-            <a:avLst/>
-          </a:prstGeom>
-          <a:ln>
-            <a:solidFill>
-              <a:srgbClr val="C00000"/>
-            </a:solidFill>
-          </a:ln>
-        </p:spPr>
-        <p:style>
-          <a:lnRef idx="1">
-            <a:schemeClr val="accent1"/>
-          </a:lnRef>
-          <a:fillRef idx="0">
-            <a:schemeClr val="accent1"/>
-          </a:fillRef>
-          <a:effectRef idx="0">
-            <a:schemeClr val="accent1"/>
-          </a:effectRef>
-          <a:fontRef idx="minor">
-            <a:schemeClr val="tx1"/>
-          </a:fontRef>
-        </p:style>
-      </p:cxnSp>
-      <p:cxnSp>
-        <p:nvCxnSpPr>
-          <p:cNvPr id="34" name="连接符: 曲线 33">
-            <a:extLst>
-              <a:ext uri="{FF2B5EF4-FFF2-40B4-BE49-F238E27FC236}">
-                <a16:creationId xmlns:a16="http://schemas.microsoft.com/office/drawing/2014/main" id="{D6AAD16A-0663-8D07-DC16-C4F0A658F0A3}"/>
-              </a:ext>
-            </a:extLst>
-          </p:cNvPr>
-          <p:cNvCxnSpPr>
-            <a:cxnSpLocks/>
-            <a:stCxn id="7" idx="3"/>
-            <a:endCxn id="12" idx="1"/>
-          </p:cNvCxnSpPr>
-          <p:nvPr/>
-        </p:nvCxnSpPr>
-        <p:spPr>
-          <a:xfrm>
-            <a:off x="5888680" y="3038400"/>
-            <a:ext cx="169100" cy="132000"/>
-          </a:xfrm>
-          <a:prstGeom prst="curvedConnector3">
-            <a:avLst>
-              <a:gd name="adj1" fmla="val 50000"/>
-            </a:avLst>
-          </a:prstGeom>
-          <a:ln>
-            <a:solidFill>
-              <a:srgbClr val="9966FF"/>
-            </a:solidFill>
-          </a:ln>
-        </p:spPr>
-        <p:style>
-          <a:lnRef idx="1">
-            <a:schemeClr val="accent1"/>
-          </a:lnRef>
-          <a:fillRef idx="0">
-            <a:schemeClr val="accent1"/>
-          </a:fillRef>
-          <a:effectRef idx="0">
-            <a:schemeClr val="accent1"/>
-          </a:effectRef>
-          <a:fontRef idx="minor">
-            <a:schemeClr val="tx1"/>
-          </a:fontRef>
-        </p:style>
-      </p:cxnSp>
-      <p:sp>
-        <p:nvSpPr>
-          <p:cNvPr id="108" name="矩形: 圆角 107">
-            <a:extLst>
-              <a:ext uri="{FF2B5EF4-FFF2-40B4-BE49-F238E27FC236}">
-                <a16:creationId xmlns:a16="http://schemas.microsoft.com/office/drawing/2014/main" id="{509F35E6-BC71-27B6-AB68-9D6D8641D9DE}"/>
-              </a:ext>
-            </a:extLst>
-          </p:cNvPr>
-          <p:cNvSpPr/>
-          <p:nvPr/>
-        </p:nvSpPr>
-        <p:spPr>
-          <a:xfrm>
-            <a:off x="6049650" y="3326400"/>
-            <a:ext cx="900000" cy="216000"/>
-          </a:xfrm>
-          <a:prstGeom prst="roundRect">
-            <a:avLst/>
-          </a:prstGeom>
-          <a:solidFill>
-            <a:srgbClr val="FB837D"/>
-          </a:solidFill>
-          <a:ln w="12700">
-            <a:noFill/>
-          </a:ln>
-        </p:spPr>
-        <p:style>
-          <a:lnRef idx="2">
-            <a:schemeClr val="accent1">
-              <a:shade val="15000"/>
-            </a:schemeClr>
-          </a:lnRef>
-          <a:fillRef idx="1">
-            <a:schemeClr val="accent1"/>
-          </a:fillRef>
-          <a:effectRef idx="0">
-            <a:schemeClr val="accent1"/>
-          </a:effectRef>
-          <a:fontRef idx="minor">
-            <a:schemeClr val="lt1"/>
-          </a:fontRef>
-        </p:style>
-        <p:txBody>
-          <a:bodyPr rtlCol="0" anchor="ctr"/>
-          <a:lstStyle/>
-          <a:p>
-            <a:pPr algn="ctr"/>
-            <a:r>
-              <a:rPr lang="en-US" altLang="zh-CN" sz="800">
-                <a:latin typeface="Quicksand" panose="00000500000000000000" pitchFamily="2" charset="0"/>
-              </a:rPr>
-              <a:t>counter</a:t>
-            </a:r>
-            <a:endParaRPr lang="zh-CN" altLang="en-US" sz="800">
-              <a:latin typeface="Quicksand" panose="00000500000000000000" pitchFamily="2" charset="0"/>
-            </a:endParaRPr>
-          </a:p>
-        </p:txBody>
-      </p:sp>
-      <p:cxnSp>
-        <p:nvCxnSpPr>
-          <p:cNvPr id="118" name="连接符: 曲线 117">
-            <a:extLst>
-              <a:ext uri="{FF2B5EF4-FFF2-40B4-BE49-F238E27FC236}">
-                <a16:creationId xmlns:a16="http://schemas.microsoft.com/office/drawing/2014/main" id="{DC5EF390-7693-C62F-379C-E8944F075A72}"/>
-              </a:ext>
-            </a:extLst>
-          </p:cNvPr>
-          <p:cNvCxnSpPr>
-            <a:cxnSpLocks/>
-            <a:stCxn id="7" idx="3"/>
-            <a:endCxn id="26" idx="1"/>
-          </p:cNvCxnSpPr>
-          <p:nvPr/>
-        </p:nvCxnSpPr>
-        <p:spPr>
-          <a:xfrm flipV="1">
-            <a:off x="5888680" y="2906400"/>
-            <a:ext cx="169100" cy="132000"/>
-          </a:xfrm>
-          <a:prstGeom prst="curvedConnector3">
-            <a:avLst>
-              <a:gd name="adj1" fmla="val 50000"/>
-            </a:avLst>
-          </a:prstGeom>
-          <a:ln>
-            <a:solidFill>
-              <a:srgbClr val="F7AA5F"/>
-            </a:solidFill>
-          </a:ln>
-        </p:spPr>
-        <p:style>
-          <a:lnRef idx="1">
-            <a:schemeClr val="accent1"/>
-          </a:lnRef>
-          <a:fillRef idx="0">
-            <a:schemeClr val="accent1"/>
-          </a:fillRef>
-          <a:effectRef idx="0">
-            <a:schemeClr val="accent1"/>
-          </a:effectRef>
-          <a:fontRef idx="minor">
-            <a:schemeClr val="tx1"/>
-          </a:fontRef>
-        </p:style>
-      </p:cxnSp>
-      <p:cxnSp>
-        <p:nvCxnSpPr>
-          <p:cNvPr id="121" name="连接符: 曲线 120">
-            <a:extLst>
-              <a:ext uri="{FF2B5EF4-FFF2-40B4-BE49-F238E27FC236}">
-                <a16:creationId xmlns:a16="http://schemas.microsoft.com/office/drawing/2014/main" id="{1D3BCEB4-577A-2C82-5900-26B41E83F91D}"/>
-              </a:ext>
-            </a:extLst>
-          </p:cNvPr>
-          <p:cNvCxnSpPr>
-            <a:cxnSpLocks/>
-            <a:stCxn id="7" idx="3"/>
-            <a:endCxn id="108" idx="1"/>
-          </p:cNvCxnSpPr>
-          <p:nvPr/>
-        </p:nvCxnSpPr>
-        <p:spPr>
-          <a:xfrm>
-            <a:off x="5888680" y="3038400"/>
-            <a:ext cx="160970" cy="396000"/>
-          </a:xfrm>
-          <a:prstGeom prst="curvedConnector3">
-            <a:avLst>
-              <a:gd name="adj1" fmla="val 50000"/>
-            </a:avLst>
-          </a:prstGeom>
-          <a:ln>
-            <a:solidFill>
-              <a:srgbClr val="00B050"/>
-            </a:solidFill>
-          </a:ln>
-        </p:spPr>
-        <p:style>
-          <a:lnRef idx="1">
-            <a:schemeClr val="accent1"/>
-          </a:lnRef>
-          <a:fillRef idx="0">
-            <a:schemeClr val="accent1"/>
-          </a:fillRef>
-          <a:effectRef idx="0">
-            <a:schemeClr val="accent1"/>
-          </a:effectRef>
-          <a:fontRef idx="minor">
-            <a:schemeClr val="tx1"/>
-          </a:fontRef>
-        </p:style>
-      </p:cxnSp>
-      <p:sp>
-        <p:nvSpPr>
-          <p:cNvPr id="12" name="矩形: 圆角 11">
-            <a:extLst>
-              <a:ext uri="{FF2B5EF4-FFF2-40B4-BE49-F238E27FC236}">
-                <a16:creationId xmlns:a16="http://schemas.microsoft.com/office/drawing/2014/main" id="{E4023AE0-10C4-EDDD-C931-D3E49B6AC7C9}"/>
-              </a:ext>
-            </a:extLst>
-          </p:cNvPr>
-          <p:cNvSpPr/>
-          <p:nvPr/>
-        </p:nvSpPr>
-        <p:spPr>
-          <a:xfrm>
-            <a:off x="6057780" y="3062400"/>
-            <a:ext cx="900000" cy="216000"/>
-          </a:xfrm>
-          <a:prstGeom prst="roundRect">
-            <a:avLst/>
-          </a:prstGeom>
-          <a:solidFill>
-            <a:srgbClr val="9966FF"/>
-          </a:solidFill>
-          <a:ln w="12700">
-            <a:noFill/>
-          </a:ln>
-        </p:spPr>
-        <p:style>
-          <a:lnRef idx="2">
-            <a:schemeClr val="accent1">
-              <a:shade val="15000"/>
-            </a:schemeClr>
-          </a:lnRef>
-          <a:fillRef idx="1">
-            <a:schemeClr val="accent1"/>
-          </a:fillRef>
-          <a:effectRef idx="0">
-            <a:schemeClr val="accent1"/>
-          </a:effectRef>
-          <a:fontRef idx="minor">
-            <a:schemeClr val="lt1"/>
-          </a:fontRef>
-        </p:style>
-        <p:txBody>
-          <a:bodyPr rtlCol="0" anchor="ctr"/>
-          <a:lstStyle/>
-          <a:p>
-            <a:pPr algn="ctr"/>
-            <a:r>
-              <a:rPr lang="en-US" altLang="zh-CN" sz="800">
-                <a:solidFill>
-                  <a:schemeClr val="bg1"/>
-                </a:solidFill>
-                <a:latin typeface="Quicksand Light" panose="00000400000000000000" pitchFamily="2" charset="0"/>
-              </a:rPr>
-              <a:t>Iconfont</a:t>
-            </a:r>
-            <a:endParaRPr lang="zh-CN" altLang="en-US" sz="800">
-              <a:solidFill>
-                <a:schemeClr val="bg1"/>
-              </a:solidFill>
-              <a:latin typeface="Quicksand Light" panose="00000400000000000000" pitchFamily="2" charset="0"/>
-            </a:endParaRPr>
-          </a:p>
-        </p:txBody>
-      </p:sp>
-      <p:sp>
-        <p:nvSpPr>
-          <p:cNvPr id="2" name="矩形: 圆角 1">
-            <a:extLst>
-              <a:ext uri="{FF2B5EF4-FFF2-40B4-BE49-F238E27FC236}">
-                <a16:creationId xmlns:a16="http://schemas.microsoft.com/office/drawing/2014/main" id="{83E28516-AB33-28C4-44B6-24DE28D98661}"/>
-              </a:ext>
-            </a:extLst>
-          </p:cNvPr>
-          <p:cNvSpPr/>
-          <p:nvPr/>
-        </p:nvSpPr>
-        <p:spPr>
-          <a:xfrm>
-            <a:off x="7126880" y="2798400"/>
-            <a:ext cx="900000" cy="216000"/>
-          </a:xfrm>
-          <a:prstGeom prst="roundRect">
-            <a:avLst/>
-          </a:prstGeom>
-          <a:solidFill>
-            <a:srgbClr val="CCF2E5"/>
-          </a:solidFill>
-          <a:ln w="12700">
-            <a:noFill/>
-          </a:ln>
-        </p:spPr>
-        <p:style>
-          <a:lnRef idx="2">
-            <a:schemeClr val="accent1">
-              <a:shade val="15000"/>
-            </a:schemeClr>
-          </a:lnRef>
-          <a:fillRef idx="1">
-            <a:schemeClr val="accent1"/>
-          </a:fillRef>
-          <a:effectRef idx="0">
-            <a:schemeClr val="accent1"/>
-          </a:effectRef>
-          <a:fontRef idx="minor">
-            <a:schemeClr val="lt1"/>
-          </a:fontRef>
-        </p:style>
-        <p:txBody>
-          <a:bodyPr rtlCol="0" anchor="ctr"/>
-          <a:lstStyle/>
-          <a:p>
-            <a:pPr algn="ctr"/>
-            <a:r>
-              <a:rPr lang="en-US" altLang="zh-CN" sz="800">
-                <a:solidFill>
-                  <a:sysClr val="windowText" lastClr="000000"/>
-                </a:solidFill>
-                <a:latin typeface="Quicksand Light" panose="00000400000000000000" pitchFamily="2" charset="0"/>
-              </a:rPr>
-              <a:t>Unicode</a:t>
-            </a:r>
-            <a:endParaRPr lang="zh-CN" altLang="en-US" sz="800">
-              <a:solidFill>
-                <a:sysClr val="windowText" lastClr="000000"/>
-              </a:solidFill>
-              <a:latin typeface="Quicksand Light" panose="00000400000000000000" pitchFamily="2" charset="0"/>
-            </a:endParaRPr>
-          </a:p>
-        </p:txBody>
-      </p:sp>
-      <p:sp>
-        <p:nvSpPr>
-          <p:cNvPr id="5" name="矩形: 圆角 4">
-            <a:extLst>
-              <a:ext uri="{FF2B5EF4-FFF2-40B4-BE49-F238E27FC236}">
-                <a16:creationId xmlns:a16="http://schemas.microsoft.com/office/drawing/2014/main" id="{EC9DFEFA-DE6D-C382-23DE-033158234380}"/>
-              </a:ext>
-            </a:extLst>
-          </p:cNvPr>
-          <p:cNvSpPr/>
-          <p:nvPr/>
-        </p:nvSpPr>
-        <p:spPr>
-          <a:xfrm>
-            <a:off x="7126880" y="3062400"/>
-            <a:ext cx="900000" cy="216000"/>
-          </a:xfrm>
-          <a:prstGeom prst="roundRect">
-            <a:avLst/>
-          </a:prstGeom>
-          <a:solidFill>
-            <a:srgbClr val="CCF2E5"/>
-          </a:solidFill>
-          <a:ln w="12700">
-            <a:noFill/>
-          </a:ln>
-        </p:spPr>
-        <p:style>
-          <a:lnRef idx="2">
-            <a:schemeClr val="accent1">
-              <a:shade val="15000"/>
-            </a:schemeClr>
-          </a:lnRef>
-          <a:fillRef idx="1">
-            <a:schemeClr val="accent1"/>
-          </a:fillRef>
-          <a:effectRef idx="0">
-            <a:schemeClr val="accent1"/>
-          </a:effectRef>
-          <a:fontRef idx="minor">
-            <a:schemeClr val="lt1"/>
-          </a:fontRef>
-        </p:style>
-        <p:txBody>
-          <a:bodyPr rtlCol="0" anchor="ctr"/>
-          <a:lstStyle/>
-          <a:p>
-            <a:pPr algn="ctr"/>
-            <a:r>
-              <a:rPr lang="en-US" altLang="zh-CN" sz="800">
-                <a:solidFill>
-                  <a:sysClr val="windowText" lastClr="000000"/>
-                </a:solidFill>
-                <a:latin typeface="Quicksand Light" panose="00000400000000000000" pitchFamily="2" charset="0"/>
-              </a:rPr>
-              <a:t>Unicode</a:t>
-            </a:r>
-            <a:endParaRPr lang="zh-CN" altLang="en-US" sz="800">
-              <a:solidFill>
-                <a:sysClr val="windowText" lastClr="000000"/>
-              </a:solidFill>
-              <a:latin typeface="Quicksand Light" panose="00000400000000000000" pitchFamily="2" charset="0"/>
-            </a:endParaRPr>
-          </a:p>
-        </p:txBody>
-      </p:sp>
-      <p:cxnSp>
-        <p:nvCxnSpPr>
-          <p:cNvPr id="8" name="直接连接符 7">
-            <a:extLst>
-              <a:ext uri="{FF2B5EF4-FFF2-40B4-BE49-F238E27FC236}">
-                <a16:creationId xmlns:a16="http://schemas.microsoft.com/office/drawing/2014/main" id="{9C72856E-D2DA-7E17-A337-C4361ABDE71E}"/>
-              </a:ext>
-            </a:extLst>
-          </p:cNvPr>
-          <p:cNvCxnSpPr>
-            <a:stCxn id="26" idx="3"/>
-            <a:endCxn id="2" idx="1"/>
-          </p:cNvCxnSpPr>
-          <p:nvPr/>
-        </p:nvCxnSpPr>
-        <p:spPr>
-          <a:xfrm>
-            <a:off x="6957780" y="2906400"/>
-            <a:ext cx="169100" cy="0"/>
-          </a:xfrm>
-          <a:prstGeom prst="line">
-            <a:avLst/>
-          </a:prstGeom>
-          <a:ln>
-            <a:solidFill>
-              <a:srgbClr val="F7AA5F"/>
-            </a:solidFill>
-          </a:ln>
-        </p:spPr>
-        <p:style>
-          <a:lnRef idx="1">
-            <a:schemeClr val="accent1"/>
-          </a:lnRef>
-          <a:fillRef idx="0">
-            <a:schemeClr val="accent1"/>
-          </a:fillRef>
-          <a:effectRef idx="0">
-            <a:schemeClr val="accent1"/>
-          </a:effectRef>
-          <a:fontRef idx="minor">
-            <a:schemeClr val="tx1"/>
-          </a:fontRef>
-        </p:style>
-      </p:cxnSp>
-      <p:cxnSp>
-        <p:nvCxnSpPr>
-          <p:cNvPr id="10" name="直接连接符 9">
-            <a:extLst>
-              <a:ext uri="{FF2B5EF4-FFF2-40B4-BE49-F238E27FC236}">
-                <a16:creationId xmlns:a16="http://schemas.microsoft.com/office/drawing/2014/main" id="{E671B0F8-4EB3-1F8A-06EB-35F88593DCA1}"/>
-              </a:ext>
-            </a:extLst>
-          </p:cNvPr>
-          <p:cNvCxnSpPr>
-            <a:stCxn id="12" idx="3"/>
-            <a:endCxn id="5" idx="1"/>
-          </p:cNvCxnSpPr>
-          <p:nvPr/>
-        </p:nvCxnSpPr>
-        <p:spPr>
-          <a:xfrm>
-            <a:off x="6957780" y="3170400"/>
-            <a:ext cx="169100" cy="0"/>
-          </a:xfrm>
-          <a:prstGeom prst="line">
-            <a:avLst/>
-          </a:prstGeom>
-          <a:ln>
-            <a:solidFill>
-              <a:srgbClr val="9966FF"/>
-            </a:solidFill>
-          </a:ln>
-        </p:spPr>
-        <p:style>
-          <a:lnRef idx="1">
-            <a:schemeClr val="accent1"/>
-          </a:lnRef>
-          <a:fillRef idx="0">
-            <a:schemeClr val="accent1"/>
-          </a:fillRef>
-          <a:effectRef idx="0">
-            <a:schemeClr val="accent1"/>
-          </a:effectRef>
-          <a:fontRef idx="minor">
-            <a:schemeClr val="tx1"/>
-          </a:fontRef>
-        </p:style>
-      </p:cxnSp>
-      <p:sp>
-        <p:nvSpPr>
-          <p:cNvPr id="3" name="矩形: 圆角 2">
-            <a:extLst>
-              <a:ext uri="{FF2B5EF4-FFF2-40B4-BE49-F238E27FC236}">
-                <a16:creationId xmlns:a16="http://schemas.microsoft.com/office/drawing/2014/main" id="{C3064634-CD22-075E-68B9-962F834B311B}"/>
-              </a:ext>
-            </a:extLst>
-          </p:cNvPr>
-          <p:cNvSpPr/>
-          <p:nvPr/>
-        </p:nvSpPr>
-        <p:spPr>
-          <a:xfrm>
-            <a:off x="3927709" y="3179700"/>
-            <a:ext cx="900000" cy="216000"/>
-          </a:xfrm>
-          <a:prstGeom prst="roundRect">
-            <a:avLst/>
-          </a:prstGeom>
-          <a:solidFill>
-            <a:schemeClr val="tx1"/>
-          </a:solidFill>
-          <a:ln w="12700">
-            <a:noFill/>
-          </a:ln>
-        </p:spPr>
-        <p:style>
-          <a:lnRef idx="2">
-            <a:schemeClr val="accent1">
-              <a:shade val="15000"/>
-            </a:schemeClr>
-          </a:lnRef>
-          <a:fillRef idx="1">
-            <a:schemeClr val="accent1"/>
-          </a:fillRef>
-          <a:effectRef idx="0">
-            <a:schemeClr val="accent1"/>
-          </a:effectRef>
-          <a:fontRef idx="minor">
-            <a:schemeClr val="lt1"/>
-          </a:fontRef>
-        </p:style>
-        <p:txBody>
-          <a:bodyPr rtlCol="0" anchor="ctr"/>
-          <a:lstStyle/>
-          <a:p>
-            <a:pPr algn="ctr"/>
-            <a:r>
-              <a:rPr lang="en-US" altLang="zh-CN" sz="800">
-                <a:latin typeface="Quicksand Medium" panose="00000600000000000000" pitchFamily="2" charset="0"/>
-              </a:rPr>
-              <a:t>&lt;li&gt;</a:t>
-            </a:r>
-            <a:endParaRPr lang="zh-CN" altLang="en-US" sz="800">
-              <a:latin typeface="Quicksand Medium" panose="00000600000000000000" pitchFamily="2" charset="0"/>
-            </a:endParaRPr>
-          </a:p>
-        </p:txBody>
-      </p:sp>
-      <p:sp>
-        <p:nvSpPr>
-          <p:cNvPr id="4" name="矩形: 圆角 3">
-            <a:extLst>
-              <a:ext uri="{FF2B5EF4-FFF2-40B4-BE49-F238E27FC236}">
-                <a16:creationId xmlns:a16="http://schemas.microsoft.com/office/drawing/2014/main" id="{D464FB6F-32E1-97B7-CAC2-14F5345557D4}"/>
-              </a:ext>
-            </a:extLst>
-          </p:cNvPr>
-          <p:cNvSpPr/>
-          <p:nvPr/>
-        </p:nvSpPr>
-        <p:spPr>
-          <a:xfrm>
-            <a:off x="4988679" y="3429000"/>
-            <a:ext cx="900000" cy="216000"/>
-          </a:xfrm>
-          <a:prstGeom prst="roundRect">
-            <a:avLst/>
-          </a:prstGeom>
-          <a:solidFill>
-            <a:srgbClr val="335BA3">
-              <a:alpha val="89804"/>
-            </a:srgbClr>
-          </a:solidFill>
-          <a:ln w="12700">
-            <a:noFill/>
-          </a:ln>
-        </p:spPr>
-        <p:style>
-          <a:lnRef idx="2">
-            <a:schemeClr val="accent1">
-              <a:shade val="15000"/>
-            </a:schemeClr>
-          </a:lnRef>
-          <a:fillRef idx="1">
-            <a:schemeClr val="accent1"/>
-          </a:fillRef>
-          <a:effectRef idx="0">
-            <a:schemeClr val="accent1"/>
-          </a:effectRef>
-          <a:fontRef idx="minor">
-            <a:schemeClr val="lt1"/>
-          </a:fontRef>
-        </p:style>
-        <p:txBody>
-          <a:bodyPr rtlCol="0" anchor="ctr"/>
-          <a:lstStyle/>
-          <a:p>
-            <a:pPr algn="ctr"/>
-            <a:r>
-              <a:rPr lang="en-US" altLang="zh-CN" sz="800">
-                <a:latin typeface="Quicksand" panose="00000500000000000000" pitchFamily="2" charset="0"/>
-              </a:rPr>
-              <a:t>::after</a:t>
-            </a:r>
-            <a:endParaRPr lang="zh-CN" altLang="en-US" sz="800">
-              <a:latin typeface="Quicksand" panose="00000500000000000000" pitchFamily="2" charset="0"/>
-            </a:endParaRPr>
-          </a:p>
-        </p:txBody>
-      </p:sp>
-      <p:cxnSp>
-        <p:nvCxnSpPr>
-          <p:cNvPr id="6" name="连接符: 曲线 5">
-            <a:extLst>
-              <a:ext uri="{FF2B5EF4-FFF2-40B4-BE49-F238E27FC236}">
-                <a16:creationId xmlns:a16="http://schemas.microsoft.com/office/drawing/2014/main" id="{A49DEFA1-8658-B2E8-502E-F97718CFD37A}"/>
-              </a:ext>
-            </a:extLst>
-          </p:cNvPr>
-          <p:cNvCxnSpPr>
-            <a:cxnSpLocks/>
-            <a:stCxn id="3" idx="3"/>
-            <a:endCxn id="7" idx="1"/>
-          </p:cNvCxnSpPr>
-          <p:nvPr/>
-        </p:nvCxnSpPr>
-        <p:spPr>
-          <a:xfrm flipV="1">
-            <a:off x="4827709" y="3038400"/>
-            <a:ext cx="160971" cy="249300"/>
-          </a:xfrm>
-          <a:prstGeom prst="curvedConnector3">
-            <a:avLst/>
-          </a:prstGeom>
-          <a:ln>
-            <a:solidFill>
-              <a:srgbClr val="486CAC"/>
-            </a:solidFill>
-          </a:ln>
-        </p:spPr>
-        <p:style>
-          <a:lnRef idx="1">
-            <a:schemeClr val="accent1"/>
-          </a:lnRef>
-          <a:fillRef idx="0">
-            <a:schemeClr val="accent1"/>
-          </a:fillRef>
-          <a:effectRef idx="0">
-            <a:schemeClr val="accent1"/>
-          </a:effectRef>
-          <a:fontRef idx="minor">
-            <a:schemeClr val="tx1"/>
-          </a:fontRef>
-        </p:style>
-      </p:cxnSp>
-      <p:cxnSp>
-        <p:nvCxnSpPr>
-          <p:cNvPr id="13" name="连接符: 曲线 12">
-            <a:extLst>
-              <a:ext uri="{FF2B5EF4-FFF2-40B4-BE49-F238E27FC236}">
-                <a16:creationId xmlns:a16="http://schemas.microsoft.com/office/drawing/2014/main" id="{24C1CA78-5496-27AF-13AD-7BE3E7DD4AE2}"/>
-              </a:ext>
-            </a:extLst>
-          </p:cNvPr>
-          <p:cNvCxnSpPr>
-            <a:cxnSpLocks/>
-            <a:stCxn id="3" idx="3"/>
-            <a:endCxn id="4" idx="1"/>
-          </p:cNvCxnSpPr>
-          <p:nvPr/>
-        </p:nvCxnSpPr>
-        <p:spPr>
-          <a:xfrm>
-            <a:off x="4827709" y="3287700"/>
-            <a:ext cx="160970" cy="249300"/>
-          </a:xfrm>
-          <a:prstGeom prst="curvedConnector3">
-            <a:avLst/>
-          </a:prstGeom>
-          <a:ln>
-            <a:solidFill>
-              <a:srgbClr val="486CAC"/>
-            </a:solidFill>
-          </a:ln>
-        </p:spPr>
-        <p:style>
-          <a:lnRef idx="1">
-            <a:schemeClr val="accent1"/>
-          </a:lnRef>
-          <a:fillRef idx="0">
-            <a:schemeClr val="accent1"/>
-          </a:fillRef>
-          <a:effectRef idx="0">
-            <a:schemeClr val="accent1"/>
-          </a:effectRef>
-          <a:fontRef idx="minor">
-            <a:schemeClr val="tx1"/>
-          </a:fontRef>
-        </p:style>
-      </p:cxnSp>
-    </p:spTree>
-    <p:extLst>
-      <p:ext uri="{BB962C8B-B14F-4D97-AF65-F5344CB8AC3E}">
-        <p14:creationId xmlns:p14="http://schemas.microsoft.com/office/powerpoint/2010/main" val="825264789"/>
-      </p:ext>
-    </p:extLst>
-  </p:cSld>
-  <p:clrMapOvr>
-    <a:masterClrMapping/>
-  </p:clrMapOvr>
-</p:sld>
-</file>
-
-<file path=ppt/slides/slide11.xml><?xml version="1.0" encoding="utf-8"?>
-<p:sld xmlns:a="http://schemas.openxmlformats.org/drawingml/2006/main" xmlns:r="http://schemas.openxmlformats.org/officeDocument/2006/relationships" xmlns:p="http://schemas.openxmlformats.org/presentationml/2006/main">
-  <p:cSld>
-    <p:spTree>
-      <p:nvGrpSpPr>
-        <p:cNvPr id="1" name="">
-          <a:extLst>
-            <a:ext uri="{FF2B5EF4-FFF2-40B4-BE49-F238E27FC236}">
               <a16:creationId xmlns:a16="http://schemas.microsoft.com/office/drawing/2014/main" id="{8E4FA66E-600A-88EF-A518-DADE5F3B4051}"/>
             </a:ext>
           </a:extLst>
@@ -5061,7 +4094,7 @@
 </p:sld>
 </file>
 
-<file path=ppt/slides/slide12.xml><?xml version="1.0" encoding="utf-8"?>
+<file path=ppt/slides/slide11.xml><?xml version="1.0" encoding="utf-8"?>
 <p:sld xmlns:a="http://schemas.openxmlformats.org/drawingml/2006/main" xmlns:r="http://schemas.openxmlformats.org/officeDocument/2006/relationships" xmlns:p="http://schemas.openxmlformats.org/presentationml/2006/main">
   <p:cSld>
     <p:spTree>
@@ -6676,7 +5709,7 @@
 </p:sld>
 </file>
 
-<file path=ppt/slides/slide13.xml><?xml version="1.0" encoding="utf-8"?>
+<file path=ppt/slides/slide12.xml><?xml version="1.0" encoding="utf-8"?>
 <p:sld xmlns:a="http://schemas.openxmlformats.org/drawingml/2006/main" xmlns:r="http://schemas.openxmlformats.org/officeDocument/2006/relationships" xmlns:p="http://schemas.openxmlformats.org/presentationml/2006/main">
   <p:cSld>
     <p:spTree>
@@ -9681,7 +8714,7 @@
 </p:sld>
 </file>
 
-<file path=ppt/slides/slide14.xml><?xml version="1.0" encoding="utf-8"?>
+<file path=ppt/slides/slide13.xml><?xml version="1.0" encoding="utf-8"?>
 <p:sld xmlns:a="http://schemas.openxmlformats.org/drawingml/2006/main" xmlns:r="http://schemas.openxmlformats.org/officeDocument/2006/relationships" xmlns:p="http://schemas.openxmlformats.org/presentationml/2006/main">
   <p:cSld>
     <p:spTree>
@@ -12264,7 +11297,7 @@
 </p:sld>
 </file>
 
-<file path=ppt/slides/slide15.xml><?xml version="1.0" encoding="utf-8"?>
+<file path=ppt/slides/slide14.xml><?xml version="1.0" encoding="utf-8"?>
 <p:sld xmlns:a="http://schemas.openxmlformats.org/drawingml/2006/main" xmlns:r="http://schemas.openxmlformats.org/officeDocument/2006/relationships" xmlns:p="http://schemas.openxmlformats.org/presentationml/2006/main">
   <p:cSld>
     <p:spTree>
@@ -13669,7 +12702,7 @@
 </p:sld>
 </file>
 
-<file path=ppt/slides/slide16.xml><?xml version="1.0" encoding="utf-8"?>
+<file path=ppt/slides/slide15.xml><?xml version="1.0" encoding="utf-8"?>
 <p:sld xmlns:a="http://schemas.openxmlformats.org/drawingml/2006/main" xmlns:r="http://schemas.openxmlformats.org/officeDocument/2006/relationships" xmlns:p="http://schemas.openxmlformats.org/presentationml/2006/main">
   <p:cSld>
     <p:spTree>
@@ -14877,7 +13910,7 @@
 </p:sld>
 </file>
 
-<file path=ppt/slides/slide17.xml><?xml version="1.0" encoding="utf-8"?>
+<file path=ppt/slides/slide16.xml><?xml version="1.0" encoding="utf-8"?>
 <p:sld xmlns:a="http://schemas.openxmlformats.org/drawingml/2006/main" xmlns:r="http://schemas.openxmlformats.org/officeDocument/2006/relationships" xmlns:p="http://schemas.openxmlformats.org/presentationml/2006/main">
   <p:cSld>
     <p:spTree>
@@ -15221,7 +14254,7 @@
 </p:sld>
 </file>
 
-<file path=ppt/slides/slide18.xml><?xml version="1.0" encoding="utf-8"?>
+<file path=ppt/slides/slide17.xml><?xml version="1.0" encoding="utf-8"?>
 <p:sld xmlns:a="http://schemas.openxmlformats.org/drawingml/2006/main" xmlns:r="http://schemas.openxmlformats.org/officeDocument/2006/relationships" xmlns:p="http://schemas.openxmlformats.org/presentationml/2006/main">
   <p:cSld>
     <p:spTree>
@@ -15667,7 +14700,7 @@
 </p:sld>
 </file>
 
-<file path=ppt/slides/slide19.xml><?xml version="1.0" encoding="utf-8"?>
+<file path=ppt/slides/slide18.xml><?xml version="1.0" encoding="utf-8"?>
 <p:sld xmlns:a="http://schemas.openxmlformats.org/drawingml/2006/main" xmlns:r="http://schemas.openxmlformats.org/officeDocument/2006/relationships" xmlns:p="http://schemas.openxmlformats.org/presentationml/2006/main">
   <p:cSld>
     <p:spTree>
@@ -16104,6 +15137,452 @@
     <p:extLst>
       <p:ext uri="{BB962C8B-B14F-4D97-AF65-F5344CB8AC3E}">
         <p14:creationId xmlns:p14="http://schemas.microsoft.com/office/powerpoint/2010/main" val="3803754908"/>
+      </p:ext>
+    </p:extLst>
+  </p:cSld>
+  <p:clrMapOvr>
+    <a:masterClrMapping/>
+  </p:clrMapOvr>
+</p:sld>
+</file>
+
+<file path=ppt/slides/slide19.xml><?xml version="1.0" encoding="utf-8"?>
+<p:sld xmlns:a="http://schemas.openxmlformats.org/drawingml/2006/main" xmlns:r="http://schemas.openxmlformats.org/officeDocument/2006/relationships" xmlns:p="http://schemas.openxmlformats.org/presentationml/2006/main">
+  <p:cSld>
+    <p:spTree>
+      <p:nvGrpSpPr>
+        <p:cNvPr id="1" name="">
+          <a:extLst>
+            <a:ext uri="{FF2B5EF4-FFF2-40B4-BE49-F238E27FC236}">
+              <a16:creationId xmlns:a16="http://schemas.microsoft.com/office/drawing/2014/main" id="{70C4E89A-BF29-AF5A-ED21-08479844B4D3}"/>
+            </a:ext>
+          </a:extLst>
+        </p:cNvPr>
+        <p:cNvGrpSpPr/>
+        <p:nvPr/>
+      </p:nvGrpSpPr>
+      <p:grpSpPr>
+        <a:xfrm>
+          <a:off x="0" y="0"/>
+          <a:ext cx="0" cy="0"/>
+          <a:chOff x="0" y="0"/>
+          <a:chExt cx="0" cy="0"/>
+        </a:xfrm>
+      </p:grpSpPr>
+      <p:sp>
+        <p:nvSpPr>
+          <p:cNvPr id="2" name="Rectangle 1">
+            <a:extLst>
+              <a:ext uri="{FF2B5EF4-FFF2-40B4-BE49-F238E27FC236}">
+                <a16:creationId xmlns:a16="http://schemas.microsoft.com/office/drawing/2014/main" id="{0F4514FD-593B-5957-478B-81363107123A}"/>
+              </a:ext>
+            </a:extLst>
+          </p:cNvPr>
+          <p:cNvSpPr/>
+          <p:nvPr/>
+        </p:nvSpPr>
+        <p:spPr>
+          <a:xfrm>
+            <a:off x="3757723" y="1589964"/>
+            <a:ext cx="3600000" cy="1800000"/>
+          </a:xfrm>
+          <a:prstGeom prst="rect">
+            <a:avLst/>
+          </a:prstGeom>
+          <a:solidFill>
+            <a:schemeClr val="bg1">
+              <a:lumMod val="95000"/>
+            </a:schemeClr>
+          </a:solidFill>
+          <a:ln>
+            <a:noFill/>
+          </a:ln>
+        </p:spPr>
+        <p:style>
+          <a:lnRef idx="2">
+            <a:schemeClr val="accent1">
+              <a:shade val="15000"/>
+            </a:schemeClr>
+          </a:lnRef>
+          <a:fillRef idx="1">
+            <a:schemeClr val="accent1"/>
+          </a:fillRef>
+          <a:effectRef idx="0">
+            <a:schemeClr val="accent1"/>
+          </a:effectRef>
+          <a:fontRef idx="minor">
+            <a:schemeClr val="lt1"/>
+          </a:fontRef>
+        </p:style>
+        <p:txBody>
+          <a:bodyPr rtlCol="0" anchor="ctr"/>
+          <a:lstStyle/>
+          <a:p>
+            <a:pPr algn="ctr"/>
+            <a:endParaRPr lang="zh-CN" altLang="en-US" sz="1200">
+              <a:solidFill>
+                <a:schemeClr val="accent6">
+                  <a:lumMod val="75000"/>
+                </a:schemeClr>
+              </a:solidFill>
+              <a:latin typeface="Poppins" panose="00000500000000000000" pitchFamily="2" charset="0"/>
+              <a:cs typeface="Poppins" panose="00000500000000000000" pitchFamily="2" charset="0"/>
+            </a:endParaRPr>
+          </a:p>
+        </p:txBody>
+      </p:sp>
+      <p:sp>
+        <p:nvSpPr>
+          <p:cNvPr id="3" name="Rectangle 2">
+            <a:extLst>
+              <a:ext uri="{FF2B5EF4-FFF2-40B4-BE49-F238E27FC236}">
+                <a16:creationId xmlns:a16="http://schemas.microsoft.com/office/drawing/2014/main" id="{BA8D48D4-E1F3-B266-9AE0-9C5665BBD6F5}"/>
+              </a:ext>
+            </a:extLst>
+          </p:cNvPr>
+          <p:cNvSpPr/>
+          <p:nvPr/>
+        </p:nvSpPr>
+        <p:spPr>
+          <a:xfrm>
+            <a:off x="3757723" y="1589964"/>
+            <a:ext cx="3600000" cy="720000"/>
+          </a:xfrm>
+          <a:prstGeom prst="rect">
+            <a:avLst/>
+          </a:prstGeom>
+          <a:solidFill>
+            <a:srgbClr val="92D050"/>
+          </a:solidFill>
+          <a:ln>
+            <a:noFill/>
+          </a:ln>
+        </p:spPr>
+        <p:style>
+          <a:lnRef idx="2">
+            <a:schemeClr val="accent1">
+              <a:shade val="15000"/>
+            </a:schemeClr>
+          </a:lnRef>
+          <a:fillRef idx="1">
+            <a:schemeClr val="accent1"/>
+          </a:fillRef>
+          <a:effectRef idx="0">
+            <a:schemeClr val="accent1"/>
+          </a:effectRef>
+          <a:fontRef idx="minor">
+            <a:schemeClr val="lt1"/>
+          </a:fontRef>
+        </p:style>
+        <p:txBody>
+          <a:bodyPr rtlCol="0" anchor="b" anchorCtr="0"/>
+          <a:lstStyle/>
+          <a:p>
+            <a:r>
+              <a:rPr lang="en-US" altLang="zh-CN" sz="1200">
+                <a:latin typeface="Poppins" panose="00000500000000000000" pitchFamily="2" charset="0"/>
+                <a:cs typeface="Poppins" panose="00000500000000000000" pitchFamily="2" charset="0"/>
+              </a:rPr>
+              <a:t>start</a:t>
+            </a:r>
+            <a:endParaRPr lang="zh-CN" altLang="en-US" sz="1200">
+              <a:latin typeface="Poppins" panose="00000500000000000000" pitchFamily="2" charset="0"/>
+              <a:cs typeface="Poppins" panose="00000500000000000000" pitchFamily="2" charset="0"/>
+            </a:endParaRPr>
+          </a:p>
+        </p:txBody>
+      </p:sp>
+      <p:sp>
+        <p:nvSpPr>
+          <p:cNvPr id="4" name="Rectangle 3">
+            <a:extLst>
+              <a:ext uri="{FF2B5EF4-FFF2-40B4-BE49-F238E27FC236}">
+                <a16:creationId xmlns:a16="http://schemas.microsoft.com/office/drawing/2014/main" id="{75131CE1-6587-9E1B-DBD4-384409634CF3}"/>
+              </a:ext>
+            </a:extLst>
+          </p:cNvPr>
+          <p:cNvSpPr/>
+          <p:nvPr/>
+        </p:nvSpPr>
+        <p:spPr>
+          <a:xfrm>
+            <a:off x="3757723" y="2309964"/>
+            <a:ext cx="3600000" cy="1080000"/>
+          </a:xfrm>
+          <a:prstGeom prst="rect">
+            <a:avLst/>
+          </a:prstGeom>
+          <a:solidFill>
+            <a:srgbClr val="92D050"/>
+          </a:solidFill>
+          <a:ln>
+            <a:noFill/>
+          </a:ln>
+        </p:spPr>
+        <p:style>
+          <a:lnRef idx="2">
+            <a:schemeClr val="accent1">
+              <a:shade val="15000"/>
+            </a:schemeClr>
+          </a:lnRef>
+          <a:fillRef idx="1">
+            <a:schemeClr val="accent1"/>
+          </a:fillRef>
+          <a:effectRef idx="0">
+            <a:schemeClr val="accent1"/>
+          </a:effectRef>
+          <a:fontRef idx="minor">
+            <a:schemeClr val="lt1"/>
+          </a:fontRef>
+        </p:style>
+        <p:txBody>
+          <a:bodyPr rtlCol="0" anchor="t" anchorCtr="0"/>
+          <a:lstStyle/>
+          <a:p>
+            <a:r>
+              <a:rPr lang="en-US" altLang="zh-CN" sz="1200">
+                <a:latin typeface="Poppins" panose="00000500000000000000" pitchFamily="2" charset="0"/>
+                <a:cs typeface="Poppins" panose="00000500000000000000" pitchFamily="2" charset="0"/>
+              </a:rPr>
+              <a:t>end</a:t>
+            </a:r>
+            <a:endParaRPr lang="zh-CN" altLang="en-US" sz="1200">
+              <a:latin typeface="Poppins" panose="00000500000000000000" pitchFamily="2" charset="0"/>
+              <a:cs typeface="Poppins" panose="00000500000000000000" pitchFamily="2" charset="0"/>
+            </a:endParaRPr>
+          </a:p>
+        </p:txBody>
+      </p:sp>
+      <p:sp>
+        <p:nvSpPr>
+          <p:cNvPr id="5" name="文本框 4">
+            <a:extLst>
+              <a:ext uri="{FF2B5EF4-FFF2-40B4-BE49-F238E27FC236}">
+                <a16:creationId xmlns:a16="http://schemas.microsoft.com/office/drawing/2014/main" id="{45D18331-4F10-66C6-2CC3-6214413856F0}"/>
+              </a:ext>
+            </a:extLst>
+          </p:cNvPr>
+          <p:cNvSpPr txBox="1"/>
+          <p:nvPr/>
+        </p:nvSpPr>
+        <p:spPr>
+          <a:xfrm>
+            <a:off x="4991100" y="2089523"/>
+            <a:ext cx="1592103" cy="307777"/>
+          </a:xfrm>
+          <a:prstGeom prst="rect">
+            <a:avLst/>
+          </a:prstGeom>
+          <a:noFill/>
+        </p:spPr>
+        <p:txBody>
+          <a:bodyPr wrap="none" rtlCol="0">
+            <a:spAutoFit/>
+          </a:bodyPr>
+          <a:lstStyle/>
+          <a:p>
+            <a:r>
+              <a:rPr lang="en-US" altLang="zh-CN" sz="1400">
+                <a:latin typeface="Poppins" panose="00000500000000000000" pitchFamily="2" charset="0"/>
+                <a:cs typeface="Poppins" panose="00000500000000000000" pitchFamily="2" charset="0"/>
+              </a:rPr>
+              <a:t>Animation Zone</a:t>
+            </a:r>
+            <a:endParaRPr lang="zh-CN" altLang="en-US" sz="1400">
+              <a:latin typeface="Poppins" panose="00000500000000000000" pitchFamily="2" charset="0"/>
+              <a:cs typeface="Poppins" panose="00000500000000000000" pitchFamily="2" charset="0"/>
+            </a:endParaRPr>
+          </a:p>
+        </p:txBody>
+      </p:sp>
+      <p:cxnSp>
+        <p:nvCxnSpPr>
+          <p:cNvPr id="7" name="Straight Arrow Connector 5">
+            <a:extLst>
+              <a:ext uri="{FF2B5EF4-FFF2-40B4-BE49-F238E27FC236}">
+                <a16:creationId xmlns:a16="http://schemas.microsoft.com/office/drawing/2014/main" id="{835AD99D-1E1D-3323-3899-83DE42EDA003}"/>
+              </a:ext>
+            </a:extLst>
+          </p:cNvPr>
+          <p:cNvCxnSpPr>
+            <a:cxnSpLocks/>
+          </p:cNvCxnSpPr>
+          <p:nvPr/>
+        </p:nvCxnSpPr>
+        <p:spPr>
+          <a:xfrm>
+            <a:off x="4297473" y="1589964"/>
+            <a:ext cx="0" cy="720000"/>
+          </a:xfrm>
+          <a:prstGeom prst="straightConnector1">
+            <a:avLst/>
+          </a:prstGeom>
+          <a:ln>
+            <a:solidFill>
+              <a:schemeClr val="bg1"/>
+            </a:solidFill>
+            <a:tailEnd type="triangle"/>
+          </a:ln>
+        </p:spPr>
+        <p:style>
+          <a:lnRef idx="1">
+            <a:schemeClr val="accent1"/>
+          </a:lnRef>
+          <a:fillRef idx="0">
+            <a:schemeClr val="accent1"/>
+          </a:fillRef>
+          <a:effectRef idx="0">
+            <a:schemeClr val="accent1"/>
+          </a:effectRef>
+          <a:fontRef idx="minor">
+            <a:schemeClr val="tx1"/>
+          </a:fontRef>
+        </p:style>
+      </p:cxnSp>
+      <p:cxnSp>
+        <p:nvCxnSpPr>
+          <p:cNvPr id="9" name="Straight Arrow Connector 7">
+            <a:extLst>
+              <a:ext uri="{FF2B5EF4-FFF2-40B4-BE49-F238E27FC236}">
+                <a16:creationId xmlns:a16="http://schemas.microsoft.com/office/drawing/2014/main" id="{00A8B3C4-1587-38DE-2403-A0606A3593B1}"/>
+              </a:ext>
+            </a:extLst>
+          </p:cNvPr>
+          <p:cNvCxnSpPr>
+            <a:cxnSpLocks/>
+          </p:cNvCxnSpPr>
+          <p:nvPr/>
+        </p:nvCxnSpPr>
+        <p:spPr>
+          <a:xfrm flipV="1">
+            <a:off x="4297473" y="2309964"/>
+            <a:ext cx="0" cy="1080000"/>
+          </a:xfrm>
+          <a:prstGeom prst="straightConnector1">
+            <a:avLst/>
+          </a:prstGeom>
+          <a:ln>
+            <a:solidFill>
+              <a:schemeClr val="bg1"/>
+            </a:solidFill>
+            <a:tailEnd type="triangle"/>
+          </a:ln>
+        </p:spPr>
+        <p:style>
+          <a:lnRef idx="1">
+            <a:schemeClr val="accent1"/>
+          </a:lnRef>
+          <a:fillRef idx="0">
+            <a:schemeClr val="accent1"/>
+          </a:fillRef>
+          <a:effectRef idx="0">
+            <a:schemeClr val="accent1"/>
+          </a:effectRef>
+          <a:fontRef idx="minor">
+            <a:schemeClr val="tx1"/>
+          </a:fontRef>
+        </p:style>
+      </p:cxnSp>
+      <p:sp>
+        <p:nvSpPr>
+          <p:cNvPr id="10" name="文本框 9">
+            <a:extLst>
+              <a:ext uri="{FF2B5EF4-FFF2-40B4-BE49-F238E27FC236}">
+                <a16:creationId xmlns:a16="http://schemas.microsoft.com/office/drawing/2014/main" id="{1A3F9847-32C0-AF36-6722-54B895024168}"/>
+              </a:ext>
+            </a:extLst>
+          </p:cNvPr>
+          <p:cNvSpPr txBox="1"/>
+          <p:nvPr/>
+        </p:nvSpPr>
+        <p:spPr>
+          <a:xfrm>
+            <a:off x="4297473" y="2032965"/>
+            <a:ext cx="476412" cy="276999"/>
+          </a:xfrm>
+          <a:prstGeom prst="rect">
+            <a:avLst/>
+          </a:prstGeom>
+          <a:noFill/>
+        </p:spPr>
+        <p:txBody>
+          <a:bodyPr wrap="none" rtlCol="0">
+            <a:spAutoFit/>
+          </a:bodyPr>
+          <a:lstStyle/>
+          <a:p>
+            <a:r>
+              <a:rPr lang="en-US" altLang="zh-CN" sz="1200">
+                <a:solidFill>
+                  <a:schemeClr val="bg1"/>
+                </a:solidFill>
+                <a:latin typeface="Poppins" panose="00000500000000000000" pitchFamily="2" charset="0"/>
+                <a:cs typeface="Poppins" panose="00000500000000000000" pitchFamily="2" charset="0"/>
+              </a:rPr>
+              <a:t>40%</a:t>
+            </a:r>
+            <a:endParaRPr lang="zh-CN" altLang="en-US" sz="1200">
+              <a:solidFill>
+                <a:schemeClr val="bg1"/>
+              </a:solidFill>
+              <a:latin typeface="Poppins" panose="00000500000000000000" pitchFamily="2" charset="0"/>
+              <a:cs typeface="Poppins" panose="00000500000000000000" pitchFamily="2" charset="0"/>
+            </a:endParaRPr>
+          </a:p>
+        </p:txBody>
+      </p:sp>
+      <p:sp>
+        <p:nvSpPr>
+          <p:cNvPr id="11" name="文本框 10">
+            <a:extLst>
+              <a:ext uri="{FF2B5EF4-FFF2-40B4-BE49-F238E27FC236}">
+                <a16:creationId xmlns:a16="http://schemas.microsoft.com/office/drawing/2014/main" id="{9D2433A2-2688-D06B-77ED-F2DBF6D27DA1}"/>
+              </a:ext>
+            </a:extLst>
+          </p:cNvPr>
+          <p:cNvSpPr txBox="1"/>
+          <p:nvPr/>
+        </p:nvSpPr>
+        <p:spPr>
+          <a:xfrm>
+            <a:off x="4297473" y="2309964"/>
+            <a:ext cx="476412" cy="276999"/>
+          </a:xfrm>
+          <a:prstGeom prst="rect">
+            <a:avLst/>
+          </a:prstGeom>
+          <a:noFill/>
+        </p:spPr>
+        <p:txBody>
+          <a:bodyPr wrap="none" rtlCol="0">
+            <a:spAutoFit/>
+          </a:bodyPr>
+          <a:lstStyle/>
+          <a:p>
+            <a:r>
+              <a:rPr lang="en-US" altLang="zh-CN" sz="1200">
+                <a:solidFill>
+                  <a:schemeClr val="bg1"/>
+                </a:solidFill>
+                <a:latin typeface="Poppins" panose="00000500000000000000" pitchFamily="2" charset="0"/>
+                <a:cs typeface="Poppins" panose="00000500000000000000" pitchFamily="2" charset="0"/>
+              </a:rPr>
+              <a:t>60%</a:t>
+            </a:r>
+            <a:endParaRPr lang="zh-CN" altLang="en-US" sz="1200">
+              <a:solidFill>
+                <a:schemeClr val="bg1"/>
+              </a:solidFill>
+              <a:latin typeface="Poppins" panose="00000500000000000000" pitchFamily="2" charset="0"/>
+              <a:cs typeface="Poppins" panose="00000500000000000000" pitchFamily="2" charset="0"/>
+            </a:endParaRPr>
+          </a:p>
+        </p:txBody>
+      </p:sp>
+    </p:spTree>
+    <p:extLst>
+      <p:ext uri="{BB962C8B-B14F-4D97-AF65-F5344CB8AC3E}">
+        <p14:creationId xmlns:p14="http://schemas.microsoft.com/office/powerpoint/2010/main" val="1843053738"/>
       </p:ext>
     </p:extLst>
   </p:cSld>
@@ -16250,452 +15729,6 @@
         <p:cNvPr id="1" name="">
           <a:extLst>
             <a:ext uri="{FF2B5EF4-FFF2-40B4-BE49-F238E27FC236}">
-              <a16:creationId xmlns:a16="http://schemas.microsoft.com/office/drawing/2014/main" id="{70C4E89A-BF29-AF5A-ED21-08479844B4D3}"/>
-            </a:ext>
-          </a:extLst>
-        </p:cNvPr>
-        <p:cNvGrpSpPr/>
-        <p:nvPr/>
-      </p:nvGrpSpPr>
-      <p:grpSpPr>
-        <a:xfrm>
-          <a:off x="0" y="0"/>
-          <a:ext cx="0" cy="0"/>
-          <a:chOff x="0" y="0"/>
-          <a:chExt cx="0" cy="0"/>
-        </a:xfrm>
-      </p:grpSpPr>
-      <p:sp>
-        <p:nvSpPr>
-          <p:cNvPr id="2" name="Rectangle 1">
-            <a:extLst>
-              <a:ext uri="{FF2B5EF4-FFF2-40B4-BE49-F238E27FC236}">
-                <a16:creationId xmlns:a16="http://schemas.microsoft.com/office/drawing/2014/main" id="{0F4514FD-593B-5957-478B-81363107123A}"/>
-              </a:ext>
-            </a:extLst>
-          </p:cNvPr>
-          <p:cNvSpPr/>
-          <p:nvPr/>
-        </p:nvSpPr>
-        <p:spPr>
-          <a:xfrm>
-            <a:off x="3757723" y="1589964"/>
-            <a:ext cx="3600000" cy="1800000"/>
-          </a:xfrm>
-          <a:prstGeom prst="rect">
-            <a:avLst/>
-          </a:prstGeom>
-          <a:solidFill>
-            <a:schemeClr val="bg1">
-              <a:lumMod val="95000"/>
-            </a:schemeClr>
-          </a:solidFill>
-          <a:ln>
-            <a:noFill/>
-          </a:ln>
-        </p:spPr>
-        <p:style>
-          <a:lnRef idx="2">
-            <a:schemeClr val="accent1">
-              <a:shade val="15000"/>
-            </a:schemeClr>
-          </a:lnRef>
-          <a:fillRef idx="1">
-            <a:schemeClr val="accent1"/>
-          </a:fillRef>
-          <a:effectRef idx="0">
-            <a:schemeClr val="accent1"/>
-          </a:effectRef>
-          <a:fontRef idx="minor">
-            <a:schemeClr val="lt1"/>
-          </a:fontRef>
-        </p:style>
-        <p:txBody>
-          <a:bodyPr rtlCol="0" anchor="ctr"/>
-          <a:lstStyle/>
-          <a:p>
-            <a:pPr algn="ctr"/>
-            <a:endParaRPr lang="zh-CN" altLang="en-US" sz="1200">
-              <a:solidFill>
-                <a:schemeClr val="accent6">
-                  <a:lumMod val="75000"/>
-                </a:schemeClr>
-              </a:solidFill>
-              <a:latin typeface="Poppins" panose="00000500000000000000" pitchFamily="2" charset="0"/>
-              <a:cs typeface="Poppins" panose="00000500000000000000" pitchFamily="2" charset="0"/>
-            </a:endParaRPr>
-          </a:p>
-        </p:txBody>
-      </p:sp>
-      <p:sp>
-        <p:nvSpPr>
-          <p:cNvPr id="3" name="Rectangle 2">
-            <a:extLst>
-              <a:ext uri="{FF2B5EF4-FFF2-40B4-BE49-F238E27FC236}">
-                <a16:creationId xmlns:a16="http://schemas.microsoft.com/office/drawing/2014/main" id="{BA8D48D4-E1F3-B266-9AE0-9C5665BBD6F5}"/>
-              </a:ext>
-            </a:extLst>
-          </p:cNvPr>
-          <p:cNvSpPr/>
-          <p:nvPr/>
-        </p:nvSpPr>
-        <p:spPr>
-          <a:xfrm>
-            <a:off x="3757723" y="1589964"/>
-            <a:ext cx="3600000" cy="720000"/>
-          </a:xfrm>
-          <a:prstGeom prst="rect">
-            <a:avLst/>
-          </a:prstGeom>
-          <a:solidFill>
-            <a:srgbClr val="92D050"/>
-          </a:solidFill>
-          <a:ln>
-            <a:noFill/>
-          </a:ln>
-        </p:spPr>
-        <p:style>
-          <a:lnRef idx="2">
-            <a:schemeClr val="accent1">
-              <a:shade val="15000"/>
-            </a:schemeClr>
-          </a:lnRef>
-          <a:fillRef idx="1">
-            <a:schemeClr val="accent1"/>
-          </a:fillRef>
-          <a:effectRef idx="0">
-            <a:schemeClr val="accent1"/>
-          </a:effectRef>
-          <a:fontRef idx="minor">
-            <a:schemeClr val="lt1"/>
-          </a:fontRef>
-        </p:style>
-        <p:txBody>
-          <a:bodyPr rtlCol="0" anchor="b" anchorCtr="0"/>
-          <a:lstStyle/>
-          <a:p>
-            <a:r>
-              <a:rPr lang="en-US" altLang="zh-CN" sz="1200">
-                <a:latin typeface="Poppins" panose="00000500000000000000" pitchFamily="2" charset="0"/>
-                <a:cs typeface="Poppins" panose="00000500000000000000" pitchFamily="2" charset="0"/>
-              </a:rPr>
-              <a:t>start</a:t>
-            </a:r>
-            <a:endParaRPr lang="zh-CN" altLang="en-US" sz="1200">
-              <a:latin typeface="Poppins" panose="00000500000000000000" pitchFamily="2" charset="0"/>
-              <a:cs typeface="Poppins" panose="00000500000000000000" pitchFamily="2" charset="0"/>
-            </a:endParaRPr>
-          </a:p>
-        </p:txBody>
-      </p:sp>
-      <p:sp>
-        <p:nvSpPr>
-          <p:cNvPr id="4" name="Rectangle 3">
-            <a:extLst>
-              <a:ext uri="{FF2B5EF4-FFF2-40B4-BE49-F238E27FC236}">
-                <a16:creationId xmlns:a16="http://schemas.microsoft.com/office/drawing/2014/main" id="{75131CE1-6587-9E1B-DBD4-384409634CF3}"/>
-              </a:ext>
-            </a:extLst>
-          </p:cNvPr>
-          <p:cNvSpPr/>
-          <p:nvPr/>
-        </p:nvSpPr>
-        <p:spPr>
-          <a:xfrm>
-            <a:off x="3757723" y="2309964"/>
-            <a:ext cx="3600000" cy="1080000"/>
-          </a:xfrm>
-          <a:prstGeom prst="rect">
-            <a:avLst/>
-          </a:prstGeom>
-          <a:solidFill>
-            <a:srgbClr val="92D050"/>
-          </a:solidFill>
-          <a:ln>
-            <a:noFill/>
-          </a:ln>
-        </p:spPr>
-        <p:style>
-          <a:lnRef idx="2">
-            <a:schemeClr val="accent1">
-              <a:shade val="15000"/>
-            </a:schemeClr>
-          </a:lnRef>
-          <a:fillRef idx="1">
-            <a:schemeClr val="accent1"/>
-          </a:fillRef>
-          <a:effectRef idx="0">
-            <a:schemeClr val="accent1"/>
-          </a:effectRef>
-          <a:fontRef idx="minor">
-            <a:schemeClr val="lt1"/>
-          </a:fontRef>
-        </p:style>
-        <p:txBody>
-          <a:bodyPr rtlCol="0" anchor="t" anchorCtr="0"/>
-          <a:lstStyle/>
-          <a:p>
-            <a:r>
-              <a:rPr lang="en-US" altLang="zh-CN" sz="1200">
-                <a:latin typeface="Poppins" panose="00000500000000000000" pitchFamily="2" charset="0"/>
-                <a:cs typeface="Poppins" panose="00000500000000000000" pitchFamily="2" charset="0"/>
-              </a:rPr>
-              <a:t>end</a:t>
-            </a:r>
-            <a:endParaRPr lang="zh-CN" altLang="en-US" sz="1200">
-              <a:latin typeface="Poppins" panose="00000500000000000000" pitchFamily="2" charset="0"/>
-              <a:cs typeface="Poppins" panose="00000500000000000000" pitchFamily="2" charset="0"/>
-            </a:endParaRPr>
-          </a:p>
-        </p:txBody>
-      </p:sp>
-      <p:sp>
-        <p:nvSpPr>
-          <p:cNvPr id="5" name="文本框 4">
-            <a:extLst>
-              <a:ext uri="{FF2B5EF4-FFF2-40B4-BE49-F238E27FC236}">
-                <a16:creationId xmlns:a16="http://schemas.microsoft.com/office/drawing/2014/main" id="{45D18331-4F10-66C6-2CC3-6214413856F0}"/>
-              </a:ext>
-            </a:extLst>
-          </p:cNvPr>
-          <p:cNvSpPr txBox="1"/>
-          <p:nvPr/>
-        </p:nvSpPr>
-        <p:spPr>
-          <a:xfrm>
-            <a:off x="4991100" y="2089523"/>
-            <a:ext cx="1592103" cy="307777"/>
-          </a:xfrm>
-          <a:prstGeom prst="rect">
-            <a:avLst/>
-          </a:prstGeom>
-          <a:noFill/>
-        </p:spPr>
-        <p:txBody>
-          <a:bodyPr wrap="none" rtlCol="0">
-            <a:spAutoFit/>
-          </a:bodyPr>
-          <a:lstStyle/>
-          <a:p>
-            <a:r>
-              <a:rPr lang="en-US" altLang="zh-CN" sz="1400">
-                <a:latin typeface="Poppins" panose="00000500000000000000" pitchFamily="2" charset="0"/>
-                <a:cs typeface="Poppins" panose="00000500000000000000" pitchFamily="2" charset="0"/>
-              </a:rPr>
-              <a:t>Animation Zone</a:t>
-            </a:r>
-            <a:endParaRPr lang="zh-CN" altLang="en-US" sz="1400">
-              <a:latin typeface="Poppins" panose="00000500000000000000" pitchFamily="2" charset="0"/>
-              <a:cs typeface="Poppins" panose="00000500000000000000" pitchFamily="2" charset="0"/>
-            </a:endParaRPr>
-          </a:p>
-        </p:txBody>
-      </p:sp>
-      <p:cxnSp>
-        <p:nvCxnSpPr>
-          <p:cNvPr id="7" name="Straight Arrow Connector 5">
-            <a:extLst>
-              <a:ext uri="{FF2B5EF4-FFF2-40B4-BE49-F238E27FC236}">
-                <a16:creationId xmlns:a16="http://schemas.microsoft.com/office/drawing/2014/main" id="{835AD99D-1E1D-3323-3899-83DE42EDA003}"/>
-              </a:ext>
-            </a:extLst>
-          </p:cNvPr>
-          <p:cNvCxnSpPr>
-            <a:cxnSpLocks/>
-          </p:cNvCxnSpPr>
-          <p:nvPr/>
-        </p:nvCxnSpPr>
-        <p:spPr>
-          <a:xfrm>
-            <a:off x="4297473" y="1589964"/>
-            <a:ext cx="0" cy="720000"/>
-          </a:xfrm>
-          <a:prstGeom prst="straightConnector1">
-            <a:avLst/>
-          </a:prstGeom>
-          <a:ln>
-            <a:solidFill>
-              <a:schemeClr val="bg1"/>
-            </a:solidFill>
-            <a:tailEnd type="triangle"/>
-          </a:ln>
-        </p:spPr>
-        <p:style>
-          <a:lnRef idx="1">
-            <a:schemeClr val="accent1"/>
-          </a:lnRef>
-          <a:fillRef idx="0">
-            <a:schemeClr val="accent1"/>
-          </a:fillRef>
-          <a:effectRef idx="0">
-            <a:schemeClr val="accent1"/>
-          </a:effectRef>
-          <a:fontRef idx="minor">
-            <a:schemeClr val="tx1"/>
-          </a:fontRef>
-        </p:style>
-      </p:cxnSp>
-      <p:cxnSp>
-        <p:nvCxnSpPr>
-          <p:cNvPr id="9" name="Straight Arrow Connector 7">
-            <a:extLst>
-              <a:ext uri="{FF2B5EF4-FFF2-40B4-BE49-F238E27FC236}">
-                <a16:creationId xmlns:a16="http://schemas.microsoft.com/office/drawing/2014/main" id="{00A8B3C4-1587-38DE-2403-A0606A3593B1}"/>
-              </a:ext>
-            </a:extLst>
-          </p:cNvPr>
-          <p:cNvCxnSpPr>
-            <a:cxnSpLocks/>
-          </p:cNvCxnSpPr>
-          <p:nvPr/>
-        </p:nvCxnSpPr>
-        <p:spPr>
-          <a:xfrm flipV="1">
-            <a:off x="4297473" y="2309964"/>
-            <a:ext cx="0" cy="1080000"/>
-          </a:xfrm>
-          <a:prstGeom prst="straightConnector1">
-            <a:avLst/>
-          </a:prstGeom>
-          <a:ln>
-            <a:solidFill>
-              <a:schemeClr val="bg1"/>
-            </a:solidFill>
-            <a:tailEnd type="triangle"/>
-          </a:ln>
-        </p:spPr>
-        <p:style>
-          <a:lnRef idx="1">
-            <a:schemeClr val="accent1"/>
-          </a:lnRef>
-          <a:fillRef idx="0">
-            <a:schemeClr val="accent1"/>
-          </a:fillRef>
-          <a:effectRef idx="0">
-            <a:schemeClr val="accent1"/>
-          </a:effectRef>
-          <a:fontRef idx="minor">
-            <a:schemeClr val="tx1"/>
-          </a:fontRef>
-        </p:style>
-      </p:cxnSp>
-      <p:sp>
-        <p:nvSpPr>
-          <p:cNvPr id="10" name="文本框 9">
-            <a:extLst>
-              <a:ext uri="{FF2B5EF4-FFF2-40B4-BE49-F238E27FC236}">
-                <a16:creationId xmlns:a16="http://schemas.microsoft.com/office/drawing/2014/main" id="{1A3F9847-32C0-AF36-6722-54B895024168}"/>
-              </a:ext>
-            </a:extLst>
-          </p:cNvPr>
-          <p:cNvSpPr txBox="1"/>
-          <p:nvPr/>
-        </p:nvSpPr>
-        <p:spPr>
-          <a:xfrm>
-            <a:off x="4297473" y="2032965"/>
-            <a:ext cx="476412" cy="276999"/>
-          </a:xfrm>
-          <a:prstGeom prst="rect">
-            <a:avLst/>
-          </a:prstGeom>
-          <a:noFill/>
-        </p:spPr>
-        <p:txBody>
-          <a:bodyPr wrap="none" rtlCol="0">
-            <a:spAutoFit/>
-          </a:bodyPr>
-          <a:lstStyle/>
-          <a:p>
-            <a:r>
-              <a:rPr lang="en-US" altLang="zh-CN" sz="1200">
-                <a:solidFill>
-                  <a:schemeClr val="bg1"/>
-                </a:solidFill>
-                <a:latin typeface="Poppins" panose="00000500000000000000" pitchFamily="2" charset="0"/>
-                <a:cs typeface="Poppins" panose="00000500000000000000" pitchFamily="2" charset="0"/>
-              </a:rPr>
-              <a:t>40%</a:t>
-            </a:r>
-            <a:endParaRPr lang="zh-CN" altLang="en-US" sz="1200">
-              <a:solidFill>
-                <a:schemeClr val="bg1"/>
-              </a:solidFill>
-              <a:latin typeface="Poppins" panose="00000500000000000000" pitchFamily="2" charset="0"/>
-              <a:cs typeface="Poppins" panose="00000500000000000000" pitchFamily="2" charset="0"/>
-            </a:endParaRPr>
-          </a:p>
-        </p:txBody>
-      </p:sp>
-      <p:sp>
-        <p:nvSpPr>
-          <p:cNvPr id="11" name="文本框 10">
-            <a:extLst>
-              <a:ext uri="{FF2B5EF4-FFF2-40B4-BE49-F238E27FC236}">
-                <a16:creationId xmlns:a16="http://schemas.microsoft.com/office/drawing/2014/main" id="{9D2433A2-2688-D06B-77ED-F2DBF6D27DA1}"/>
-              </a:ext>
-            </a:extLst>
-          </p:cNvPr>
-          <p:cNvSpPr txBox="1"/>
-          <p:nvPr/>
-        </p:nvSpPr>
-        <p:spPr>
-          <a:xfrm>
-            <a:off x="4297473" y="2309964"/>
-            <a:ext cx="476412" cy="276999"/>
-          </a:xfrm>
-          <a:prstGeom prst="rect">
-            <a:avLst/>
-          </a:prstGeom>
-          <a:noFill/>
-        </p:spPr>
-        <p:txBody>
-          <a:bodyPr wrap="none" rtlCol="0">
-            <a:spAutoFit/>
-          </a:bodyPr>
-          <a:lstStyle/>
-          <a:p>
-            <a:r>
-              <a:rPr lang="en-US" altLang="zh-CN" sz="1200">
-                <a:solidFill>
-                  <a:schemeClr val="bg1"/>
-                </a:solidFill>
-                <a:latin typeface="Poppins" panose="00000500000000000000" pitchFamily="2" charset="0"/>
-                <a:cs typeface="Poppins" panose="00000500000000000000" pitchFamily="2" charset="0"/>
-              </a:rPr>
-              <a:t>60%</a:t>
-            </a:r>
-            <a:endParaRPr lang="zh-CN" altLang="en-US" sz="1200">
-              <a:solidFill>
-                <a:schemeClr val="bg1"/>
-              </a:solidFill>
-              <a:latin typeface="Poppins" panose="00000500000000000000" pitchFamily="2" charset="0"/>
-              <a:cs typeface="Poppins" panose="00000500000000000000" pitchFamily="2" charset="0"/>
-            </a:endParaRPr>
-          </a:p>
-        </p:txBody>
-      </p:sp>
-    </p:spTree>
-    <p:extLst>
-      <p:ext uri="{BB962C8B-B14F-4D97-AF65-F5344CB8AC3E}">
-        <p14:creationId xmlns:p14="http://schemas.microsoft.com/office/powerpoint/2010/main" val="1843053738"/>
-      </p:ext>
-    </p:extLst>
-  </p:cSld>
-  <p:clrMapOvr>
-    <a:masterClrMapping/>
-  </p:clrMapOvr>
-</p:sld>
-</file>
-
-<file path=ppt/slides/slide21.xml><?xml version="1.0" encoding="utf-8"?>
-<p:sld xmlns:a="http://schemas.openxmlformats.org/drawingml/2006/main" xmlns:r="http://schemas.openxmlformats.org/officeDocument/2006/relationships" xmlns:p="http://schemas.openxmlformats.org/presentationml/2006/main">
-  <p:cSld>
-    <p:spTree>
-      <p:nvGrpSpPr>
-        <p:cNvPr id="1" name="">
-          <a:extLst>
-            <a:ext uri="{FF2B5EF4-FFF2-40B4-BE49-F238E27FC236}">
               <a16:creationId xmlns:a16="http://schemas.microsoft.com/office/drawing/2014/main" id="{59F439DE-D7BB-182A-B2C8-131D63A3B971}"/>
             </a:ext>
           </a:extLst>
@@ -17134,7 +16167,7 @@
 </p:sld>
 </file>
 
-<file path=ppt/slides/slide22.xml><?xml version="1.0" encoding="utf-8"?>
+<file path=ppt/slides/slide21.xml><?xml version="1.0" encoding="utf-8"?>
 <p:sld xmlns:a="http://schemas.openxmlformats.org/drawingml/2006/main" xmlns:r="http://schemas.openxmlformats.org/officeDocument/2006/relationships" xmlns:p="http://schemas.openxmlformats.org/presentationml/2006/main">
   <p:cSld>
     <p:spTree>
@@ -18377,7 +17410,7 @@
 </p:sld>
 </file>
 
-<file path=ppt/slides/slide23.xml><?xml version="1.0" encoding="utf-8"?>
+<file path=ppt/slides/slide22.xml><?xml version="1.0" encoding="utf-8"?>
 <p:sld xmlns:a="http://schemas.openxmlformats.org/drawingml/2006/main" xmlns:r="http://schemas.openxmlformats.org/officeDocument/2006/relationships" xmlns:p="http://schemas.openxmlformats.org/presentationml/2006/main">
   <p:cSld>
     <p:spTree>
@@ -20050,7 +19083,7 @@
 </p:sld>
 </file>
 
-<file path=ppt/slides/slide24.xml><?xml version="1.0" encoding="utf-8"?>
+<file path=ppt/slides/slide23.xml><?xml version="1.0" encoding="utf-8"?>
 <p:sld xmlns:a="http://schemas.openxmlformats.org/drawingml/2006/main" xmlns:r="http://schemas.openxmlformats.org/officeDocument/2006/relationships" xmlns:p="http://schemas.openxmlformats.org/presentationml/2006/main">
   <p:cSld>
     <p:spTree>
@@ -21302,7 +20335,7 @@
 </p:sld>
 </file>
 
-<file path=ppt/slides/slide25.xml><?xml version="1.0" encoding="utf-8"?>
+<file path=ppt/slides/slide24.xml><?xml version="1.0" encoding="utf-8"?>
 <p:sld xmlns:a="http://schemas.openxmlformats.org/drawingml/2006/main" xmlns:r="http://schemas.openxmlformats.org/officeDocument/2006/relationships" xmlns:p="http://schemas.openxmlformats.org/presentationml/2006/main">
   <p:cSld>
     <p:spTree>
@@ -22425,7 +21458,7 @@
 </p:sld>
 </file>
 
-<file path=ppt/slides/slide26.xml><?xml version="1.0" encoding="utf-8"?>
+<file path=ppt/slides/slide25.xml><?xml version="1.0" encoding="utf-8"?>
 <p:sld xmlns:a="http://schemas.openxmlformats.org/drawingml/2006/main" xmlns:r="http://schemas.openxmlformats.org/officeDocument/2006/relationships" xmlns:p="http://schemas.openxmlformats.org/presentationml/2006/main">
   <p:cSld>
     <p:spTree>
@@ -23788,7 +22821,7 @@
 </p:sld>
 </file>
 
-<file path=ppt/slides/slide27.xml><?xml version="1.0" encoding="utf-8"?>
+<file path=ppt/slides/slide26.xml><?xml version="1.0" encoding="utf-8"?>
 <p:sld xmlns:a="http://schemas.openxmlformats.org/drawingml/2006/main" xmlns:r="http://schemas.openxmlformats.org/officeDocument/2006/relationships" xmlns:p="http://schemas.openxmlformats.org/presentationml/2006/main">
   <p:cSld>
     <p:spTree>
@@ -25155,6 +24188,1203 @@
     <p:extLst>
       <p:ext uri="{BB962C8B-B14F-4D97-AF65-F5344CB8AC3E}">
         <p14:creationId xmlns:p14="http://schemas.microsoft.com/office/powerpoint/2010/main" val="2316391152"/>
+      </p:ext>
+    </p:extLst>
+  </p:cSld>
+  <p:clrMapOvr>
+    <a:masterClrMapping/>
+  </p:clrMapOvr>
+</p:sld>
+</file>
+
+<file path=ppt/slides/slide27.xml><?xml version="1.0" encoding="utf-8"?>
+<p:sld xmlns:a="http://schemas.openxmlformats.org/drawingml/2006/main" xmlns:r="http://schemas.openxmlformats.org/officeDocument/2006/relationships" xmlns:p="http://schemas.openxmlformats.org/presentationml/2006/main">
+  <p:cSld>
+    <p:spTree>
+      <p:nvGrpSpPr>
+        <p:cNvPr id="1" name=""/>
+        <p:cNvGrpSpPr/>
+        <p:nvPr/>
+      </p:nvGrpSpPr>
+      <p:grpSpPr>
+        <a:xfrm>
+          <a:off x="0" y="0"/>
+          <a:ext cx="0" cy="0"/>
+          <a:chOff x="0" y="0"/>
+          <a:chExt cx="0" cy="0"/>
+        </a:xfrm>
+      </p:grpSpPr>
+      <p:sp>
+        <p:nvSpPr>
+          <p:cNvPr id="2" name="矩形: 圆角 1">
+            <a:extLst>
+              <a:ext uri="{FF2B5EF4-FFF2-40B4-BE49-F238E27FC236}">
+                <a16:creationId xmlns:a16="http://schemas.microsoft.com/office/drawing/2014/main" id="{7CE4D4CF-0466-1DC3-08B4-9C28D4A64E27}"/>
+              </a:ext>
+            </a:extLst>
+          </p:cNvPr>
+          <p:cNvSpPr/>
+          <p:nvPr/>
+        </p:nvSpPr>
+        <p:spPr>
+          <a:xfrm>
+            <a:off x="2622449" y="3094613"/>
+            <a:ext cx="1440000" cy="360000"/>
+          </a:xfrm>
+          <a:prstGeom prst="roundRect">
+            <a:avLst/>
+          </a:prstGeom>
+          <a:solidFill>
+            <a:schemeClr val="tx1"/>
+          </a:solidFill>
+          <a:ln w="12700">
+            <a:noFill/>
+          </a:ln>
+        </p:spPr>
+        <p:style>
+          <a:lnRef idx="2">
+            <a:schemeClr val="accent1">
+              <a:shade val="15000"/>
+            </a:schemeClr>
+          </a:lnRef>
+          <a:fillRef idx="1">
+            <a:schemeClr val="accent1"/>
+          </a:fillRef>
+          <a:effectRef idx="0">
+            <a:schemeClr val="accent1"/>
+          </a:effectRef>
+          <a:fontRef idx="minor">
+            <a:schemeClr val="lt1"/>
+          </a:fontRef>
+        </p:style>
+        <p:txBody>
+          <a:bodyPr rtlCol="0" anchor="ctr"/>
+          <a:lstStyle/>
+          <a:p>
+            <a:pPr algn="ctr"/>
+            <a:r>
+              <a:rPr lang="en-US" altLang="zh-CN" sz="1200">
+                <a:latin typeface="Quicksand Light" panose="00000400000000000000" pitchFamily="2" charset="0"/>
+                <a:ea typeface="仿宋" panose="02010609060101010101" pitchFamily="49" charset="-122"/>
+              </a:rPr>
+              <a:t>&lt;scroll-view&gt;</a:t>
+            </a:r>
+            <a:endParaRPr lang="zh-CN" altLang="en-US" sz="1200">
+              <a:latin typeface="Quicksand Light" panose="00000400000000000000" pitchFamily="2" charset="0"/>
+              <a:ea typeface="仿宋" panose="02010609060101010101" pitchFamily="49" charset="-122"/>
+            </a:endParaRPr>
+          </a:p>
+        </p:txBody>
+      </p:sp>
+      <p:sp>
+        <p:nvSpPr>
+          <p:cNvPr id="3" name="矩形: 圆角 2">
+            <a:extLst>
+              <a:ext uri="{FF2B5EF4-FFF2-40B4-BE49-F238E27FC236}">
+                <a16:creationId xmlns:a16="http://schemas.microsoft.com/office/drawing/2014/main" id="{6EE8E41B-FB18-64FF-0539-7D9127F8FC67}"/>
+              </a:ext>
+            </a:extLst>
+          </p:cNvPr>
+          <p:cNvSpPr/>
+          <p:nvPr/>
+        </p:nvSpPr>
+        <p:spPr>
+          <a:xfrm>
+            <a:off x="5806701" y="2901283"/>
+            <a:ext cx="1620000" cy="360000"/>
+          </a:xfrm>
+          <a:prstGeom prst="roundRect">
+            <a:avLst/>
+          </a:prstGeom>
+          <a:noFill/>
+          <a:ln w="12700">
+            <a:solidFill>
+              <a:srgbClr val="EB3B5A"/>
+            </a:solidFill>
+            <a:prstDash val="dash"/>
+          </a:ln>
+        </p:spPr>
+        <p:style>
+          <a:lnRef idx="2">
+            <a:schemeClr val="accent1">
+              <a:shade val="15000"/>
+            </a:schemeClr>
+          </a:lnRef>
+          <a:fillRef idx="1">
+            <a:schemeClr val="accent1"/>
+          </a:fillRef>
+          <a:effectRef idx="0">
+            <a:schemeClr val="accent1"/>
+          </a:effectRef>
+          <a:fontRef idx="minor">
+            <a:schemeClr val="lt1"/>
+          </a:fontRef>
+        </p:style>
+        <p:txBody>
+          <a:bodyPr rtlCol="0" anchor="ctr"/>
+          <a:lstStyle/>
+          <a:p>
+            <a:pPr algn="ctr"/>
+            <a:r>
+              <a:rPr lang="zh-CN" altLang="en-US" sz="1200">
+                <a:solidFill>
+                  <a:sysClr val="windowText" lastClr="000000"/>
+                </a:solidFill>
+                <a:latin typeface="Quicksand Light" panose="00000400000000000000" pitchFamily="2" charset="0"/>
+                <a:ea typeface="仿宋" panose="02010609060101010101" pitchFamily="49" charset="-122"/>
+              </a:rPr>
+              <a:t>行内 </a:t>
+            </a:r>
+            <a:r>
+              <a:rPr lang="en-US" altLang="zh-CN" sz="1200">
+                <a:solidFill>
+                  <a:sysClr val="windowText" lastClr="000000"/>
+                </a:solidFill>
+                <a:latin typeface="Quicksand Light" panose="00000400000000000000" pitchFamily="2" charset="0"/>
+                <a:ea typeface="仿宋" panose="02010609060101010101" pitchFamily="49" charset="-122"/>
+              </a:rPr>
+              <a:t>inline</a:t>
+            </a:r>
+            <a:endParaRPr lang="zh-CN" altLang="en-US" sz="1200">
+              <a:solidFill>
+                <a:sysClr val="windowText" lastClr="000000"/>
+              </a:solidFill>
+              <a:latin typeface="Quicksand Light" panose="00000400000000000000" pitchFamily="2" charset="0"/>
+              <a:ea typeface="仿宋" panose="02010609060101010101" pitchFamily="49" charset="-122"/>
+            </a:endParaRPr>
+          </a:p>
+        </p:txBody>
+      </p:sp>
+      <p:sp>
+        <p:nvSpPr>
+          <p:cNvPr id="8" name="矩形: 圆角 7">
+            <a:extLst>
+              <a:ext uri="{FF2B5EF4-FFF2-40B4-BE49-F238E27FC236}">
+                <a16:creationId xmlns:a16="http://schemas.microsoft.com/office/drawing/2014/main" id="{06699B4A-F636-A7C1-FB1E-69E3110ACB30}"/>
+              </a:ext>
+            </a:extLst>
+          </p:cNvPr>
+          <p:cNvSpPr/>
+          <p:nvPr/>
+        </p:nvSpPr>
+        <p:spPr>
+          <a:xfrm>
+            <a:off x="4394575" y="4241749"/>
+            <a:ext cx="1080000" cy="360000"/>
+          </a:xfrm>
+          <a:prstGeom prst="roundRect">
+            <a:avLst/>
+          </a:prstGeom>
+          <a:solidFill>
+            <a:srgbClr val="3DC1D3"/>
+          </a:solidFill>
+          <a:ln w="12700">
+            <a:noFill/>
+          </a:ln>
+        </p:spPr>
+        <p:style>
+          <a:lnRef idx="2">
+            <a:schemeClr val="accent1">
+              <a:shade val="15000"/>
+            </a:schemeClr>
+          </a:lnRef>
+          <a:fillRef idx="1">
+            <a:schemeClr val="accent1"/>
+          </a:fillRef>
+          <a:effectRef idx="0">
+            <a:schemeClr val="accent1"/>
+          </a:effectRef>
+          <a:fontRef idx="minor">
+            <a:schemeClr val="lt1"/>
+          </a:fontRef>
+        </p:style>
+        <p:txBody>
+          <a:bodyPr rtlCol="0" anchor="ctr"/>
+          <a:lstStyle/>
+          <a:p>
+            <a:pPr algn="ctr"/>
+            <a:r>
+              <a:rPr lang="zh-CN" altLang="en-US" sz="1200">
+                <a:latin typeface="Quicksand Light" panose="00000400000000000000" pitchFamily="2" charset="0"/>
+                <a:ea typeface="仿宋" panose="02010609060101010101" pitchFamily="49" charset="-122"/>
+              </a:rPr>
+              <a:t>垂直滚动</a:t>
+            </a:r>
+          </a:p>
+        </p:txBody>
+      </p:sp>
+      <p:sp>
+        <p:nvSpPr>
+          <p:cNvPr id="9" name="矩形: 圆角 8">
+            <a:extLst>
+              <a:ext uri="{FF2B5EF4-FFF2-40B4-BE49-F238E27FC236}">
+                <a16:creationId xmlns:a16="http://schemas.microsoft.com/office/drawing/2014/main" id="{63EC0026-3C9E-C410-1B1D-25D54ACB2F10}"/>
+              </a:ext>
+            </a:extLst>
+          </p:cNvPr>
+          <p:cNvSpPr/>
+          <p:nvPr/>
+        </p:nvSpPr>
+        <p:spPr>
+          <a:xfrm>
+            <a:off x="4394575" y="3094613"/>
+            <a:ext cx="1080000" cy="360000"/>
+          </a:xfrm>
+          <a:prstGeom prst="roundRect">
+            <a:avLst/>
+          </a:prstGeom>
+          <a:solidFill>
+            <a:srgbClr val="EB3B5A"/>
+          </a:solidFill>
+          <a:ln w="12700">
+            <a:noFill/>
+          </a:ln>
+        </p:spPr>
+        <p:style>
+          <a:lnRef idx="2">
+            <a:schemeClr val="accent1">
+              <a:shade val="15000"/>
+            </a:schemeClr>
+          </a:lnRef>
+          <a:fillRef idx="1">
+            <a:schemeClr val="accent1"/>
+          </a:fillRef>
+          <a:effectRef idx="0">
+            <a:schemeClr val="accent1"/>
+          </a:effectRef>
+          <a:fontRef idx="minor">
+            <a:schemeClr val="lt1"/>
+          </a:fontRef>
+        </p:style>
+        <p:txBody>
+          <a:bodyPr rtlCol="0" anchor="ctr"/>
+          <a:lstStyle/>
+          <a:p>
+            <a:pPr algn="ctr"/>
+            <a:r>
+              <a:rPr lang="zh-CN" altLang="en-US" sz="1200" dirty="0">
+                <a:latin typeface="Quicksand Light" panose="00000400000000000000" pitchFamily="2" charset="0"/>
+                <a:ea typeface="仿宋" panose="02010609060101010101" pitchFamily="49" charset="-122"/>
+              </a:rPr>
+              <a:t>水平滚动</a:t>
+            </a:r>
+          </a:p>
+        </p:txBody>
+      </p:sp>
+      <p:cxnSp>
+        <p:nvCxnSpPr>
+          <p:cNvPr id="10" name="连接符: 曲线 9">
+            <a:extLst>
+              <a:ext uri="{FF2B5EF4-FFF2-40B4-BE49-F238E27FC236}">
+                <a16:creationId xmlns:a16="http://schemas.microsoft.com/office/drawing/2014/main" id="{89376DA1-2871-7B3F-3D7E-34DF204828CA}"/>
+              </a:ext>
+            </a:extLst>
+          </p:cNvPr>
+          <p:cNvCxnSpPr>
+            <a:cxnSpLocks/>
+            <a:stCxn id="9" idx="3"/>
+            <a:endCxn id="17" idx="1"/>
+          </p:cNvCxnSpPr>
+          <p:nvPr/>
+        </p:nvCxnSpPr>
+        <p:spPr>
+          <a:xfrm flipV="1">
+            <a:off x="5474575" y="2104829"/>
+            <a:ext cx="332126" cy="1169784"/>
+          </a:xfrm>
+          <a:prstGeom prst="curvedConnector3">
+            <a:avLst>
+              <a:gd name="adj1" fmla="val 50000"/>
+            </a:avLst>
+          </a:prstGeom>
+          <a:ln>
+            <a:solidFill>
+              <a:srgbClr val="EB3B5A"/>
+            </a:solidFill>
+          </a:ln>
+        </p:spPr>
+        <p:style>
+          <a:lnRef idx="1">
+            <a:schemeClr val="accent1"/>
+          </a:lnRef>
+          <a:fillRef idx="0">
+            <a:schemeClr val="accent1"/>
+          </a:fillRef>
+          <a:effectRef idx="0">
+            <a:schemeClr val="accent1"/>
+          </a:effectRef>
+          <a:fontRef idx="minor">
+            <a:schemeClr val="tx1"/>
+          </a:fontRef>
+        </p:style>
+      </p:cxnSp>
+      <p:cxnSp>
+        <p:nvCxnSpPr>
+          <p:cNvPr id="15" name="直接连接符 14">
+            <a:extLst>
+              <a:ext uri="{FF2B5EF4-FFF2-40B4-BE49-F238E27FC236}">
+                <a16:creationId xmlns:a16="http://schemas.microsoft.com/office/drawing/2014/main" id="{B3AF8529-84E5-3299-2E12-01B446E0607B}"/>
+              </a:ext>
+            </a:extLst>
+          </p:cNvPr>
+          <p:cNvCxnSpPr>
+            <a:cxnSpLocks/>
+            <a:stCxn id="2" idx="3"/>
+            <a:endCxn id="9" idx="1"/>
+          </p:cNvCxnSpPr>
+          <p:nvPr/>
+        </p:nvCxnSpPr>
+        <p:spPr>
+          <a:xfrm>
+            <a:off x="4062449" y="3274613"/>
+            <a:ext cx="332126" cy="0"/>
+          </a:xfrm>
+          <a:prstGeom prst="line">
+            <a:avLst/>
+          </a:prstGeom>
+          <a:ln>
+            <a:solidFill>
+              <a:srgbClr val="EB3B5A"/>
+            </a:solidFill>
+          </a:ln>
+        </p:spPr>
+        <p:style>
+          <a:lnRef idx="1">
+            <a:schemeClr val="accent1"/>
+          </a:lnRef>
+          <a:fillRef idx="0">
+            <a:schemeClr val="accent1"/>
+          </a:fillRef>
+          <a:effectRef idx="0">
+            <a:schemeClr val="accent1"/>
+          </a:effectRef>
+          <a:fontRef idx="minor">
+            <a:schemeClr val="tx1"/>
+          </a:fontRef>
+        </p:style>
+      </p:cxnSp>
+      <p:sp>
+        <p:nvSpPr>
+          <p:cNvPr id="16" name="矩形: 圆角 15">
+            <a:extLst>
+              <a:ext uri="{FF2B5EF4-FFF2-40B4-BE49-F238E27FC236}">
+                <a16:creationId xmlns:a16="http://schemas.microsoft.com/office/drawing/2014/main" id="{FA81A049-32C6-0464-CB2F-FE666FC0CCAF}"/>
+              </a:ext>
+            </a:extLst>
+          </p:cNvPr>
+          <p:cNvSpPr/>
+          <p:nvPr/>
+        </p:nvSpPr>
+        <p:spPr>
+          <a:xfrm>
+            <a:off x="5806701" y="2413056"/>
+            <a:ext cx="1620000" cy="360000"/>
+          </a:xfrm>
+          <a:prstGeom prst="roundRect">
+            <a:avLst/>
+          </a:prstGeom>
+          <a:noFill/>
+          <a:ln w="12700">
+            <a:solidFill>
+              <a:srgbClr val="EB3B5A"/>
+            </a:solidFill>
+          </a:ln>
+        </p:spPr>
+        <p:style>
+          <a:lnRef idx="2">
+            <a:schemeClr val="accent1">
+              <a:shade val="15000"/>
+            </a:schemeClr>
+          </a:lnRef>
+          <a:fillRef idx="1">
+            <a:schemeClr val="accent1"/>
+          </a:fillRef>
+          <a:effectRef idx="0">
+            <a:schemeClr val="accent1"/>
+          </a:effectRef>
+          <a:fontRef idx="minor">
+            <a:schemeClr val="lt1"/>
+          </a:fontRef>
+        </p:style>
+        <p:txBody>
+          <a:bodyPr rtlCol="0" anchor="ctr"/>
+          <a:lstStyle/>
+          <a:p>
+            <a:pPr algn="ctr"/>
+            <a:r>
+              <a:rPr lang="zh-CN" altLang="en-US" sz="1200">
+                <a:solidFill>
+                  <a:sysClr val="windowText" lastClr="000000"/>
+                </a:solidFill>
+                <a:latin typeface="Quicksand Light" panose="00000400000000000000" pitchFamily="2" charset="0"/>
+                <a:ea typeface="仿宋" panose="02010609060101010101" pitchFamily="49" charset="-122"/>
+              </a:rPr>
+              <a:t>容器 </a:t>
+            </a:r>
+            <a:r>
+              <a:rPr lang="en-US" altLang="zh-CN" sz="1200">
+                <a:solidFill>
+                  <a:sysClr val="windowText" lastClr="000000"/>
+                </a:solidFill>
+                <a:latin typeface="Quicksand Light" panose="00000400000000000000" pitchFamily="2" charset="0"/>
+                <a:ea typeface="仿宋" panose="02010609060101010101" pitchFamily="49" charset="-122"/>
+              </a:rPr>
+              <a:t>wrap</a:t>
+            </a:r>
+            <a:endParaRPr lang="zh-CN" altLang="en-US" sz="1200">
+              <a:solidFill>
+                <a:sysClr val="windowText" lastClr="000000"/>
+              </a:solidFill>
+              <a:latin typeface="Quicksand Light" panose="00000400000000000000" pitchFamily="2" charset="0"/>
+              <a:ea typeface="仿宋" panose="02010609060101010101" pitchFamily="49" charset="-122"/>
+            </a:endParaRPr>
+          </a:p>
+        </p:txBody>
+      </p:sp>
+      <p:sp>
+        <p:nvSpPr>
+          <p:cNvPr id="17" name="矩形: 圆角 16">
+            <a:extLst>
+              <a:ext uri="{FF2B5EF4-FFF2-40B4-BE49-F238E27FC236}">
+                <a16:creationId xmlns:a16="http://schemas.microsoft.com/office/drawing/2014/main" id="{DF07C0A6-7F4B-674A-E488-85EB77ABE14F}"/>
+              </a:ext>
+            </a:extLst>
+          </p:cNvPr>
+          <p:cNvSpPr/>
+          <p:nvPr/>
+        </p:nvSpPr>
+        <p:spPr>
+          <a:xfrm>
+            <a:off x="5806701" y="1924829"/>
+            <a:ext cx="1620000" cy="360000"/>
+          </a:xfrm>
+          <a:prstGeom prst="roundRect">
+            <a:avLst/>
+          </a:prstGeom>
+          <a:noFill/>
+          <a:ln w="12700">
+            <a:solidFill>
+              <a:srgbClr val="EB3B5A"/>
+            </a:solidFill>
+          </a:ln>
+        </p:spPr>
+        <p:style>
+          <a:lnRef idx="2">
+            <a:schemeClr val="accent1">
+              <a:shade val="15000"/>
+            </a:schemeClr>
+          </a:lnRef>
+          <a:fillRef idx="1">
+            <a:schemeClr val="accent1"/>
+          </a:fillRef>
+          <a:effectRef idx="0">
+            <a:schemeClr val="accent1"/>
+          </a:effectRef>
+          <a:fontRef idx="minor">
+            <a:schemeClr val="lt1"/>
+          </a:fontRef>
+        </p:style>
+        <p:txBody>
+          <a:bodyPr rtlCol="0" anchor="ctr"/>
+          <a:lstStyle/>
+          <a:p>
+            <a:pPr algn="ctr"/>
+            <a:r>
+              <a:rPr lang="en-US" altLang="zh-CN" sz="1200">
+                <a:solidFill>
+                  <a:sysClr val="windowText" lastClr="000000"/>
+                </a:solidFill>
+                <a:latin typeface="Quicksand Light" panose="00000400000000000000" pitchFamily="2" charset="0"/>
+                <a:ea typeface="仿宋" panose="02010609060101010101" pitchFamily="49" charset="-122"/>
+              </a:rPr>
+              <a:t>enable-flex</a:t>
+            </a:r>
+            <a:endParaRPr lang="zh-CN" altLang="en-US" sz="1200">
+              <a:solidFill>
+                <a:sysClr val="windowText" lastClr="000000"/>
+              </a:solidFill>
+              <a:latin typeface="Quicksand Light" panose="00000400000000000000" pitchFamily="2" charset="0"/>
+              <a:ea typeface="仿宋" panose="02010609060101010101" pitchFamily="49" charset="-122"/>
+            </a:endParaRPr>
+          </a:p>
+        </p:txBody>
+      </p:sp>
+      <p:sp>
+        <p:nvSpPr>
+          <p:cNvPr id="18" name="矩形: 圆角 17">
+            <a:extLst>
+              <a:ext uri="{FF2B5EF4-FFF2-40B4-BE49-F238E27FC236}">
+                <a16:creationId xmlns:a16="http://schemas.microsoft.com/office/drawing/2014/main" id="{79DE23DA-ADA0-B751-DD89-7669F999E79D}"/>
+              </a:ext>
+            </a:extLst>
+          </p:cNvPr>
+          <p:cNvSpPr/>
+          <p:nvPr/>
+        </p:nvSpPr>
+        <p:spPr>
+          <a:xfrm>
+            <a:off x="5806701" y="3389510"/>
+            <a:ext cx="1620000" cy="360000"/>
+          </a:xfrm>
+          <a:prstGeom prst="roundRect">
+            <a:avLst/>
+          </a:prstGeom>
+          <a:noFill/>
+          <a:ln w="12700">
+            <a:solidFill>
+              <a:srgbClr val="EB3B5A"/>
+            </a:solidFill>
+            <a:prstDash val="dash"/>
+          </a:ln>
+        </p:spPr>
+        <p:style>
+          <a:lnRef idx="2">
+            <a:schemeClr val="accent1">
+              <a:shade val="15000"/>
+            </a:schemeClr>
+          </a:lnRef>
+          <a:fillRef idx="1">
+            <a:schemeClr val="accent1"/>
+          </a:fillRef>
+          <a:effectRef idx="0">
+            <a:schemeClr val="accent1"/>
+          </a:effectRef>
+          <a:fontRef idx="minor">
+            <a:schemeClr val="lt1"/>
+          </a:fontRef>
+        </p:style>
+        <p:txBody>
+          <a:bodyPr rtlCol="0" anchor="ctr"/>
+          <a:lstStyle/>
+          <a:p>
+            <a:pPr algn="ctr"/>
+            <a:r>
+              <a:rPr lang="zh-CN" altLang="en-US" sz="1200">
+                <a:solidFill>
+                  <a:sysClr val="windowText" lastClr="000000"/>
+                </a:solidFill>
+                <a:latin typeface="Quicksand Light" panose="00000400000000000000" pitchFamily="2" charset="0"/>
+                <a:ea typeface="仿宋" panose="02010609060101010101" pitchFamily="49" charset="-122"/>
+              </a:rPr>
+              <a:t>行内块 </a:t>
+            </a:r>
+            <a:r>
+              <a:rPr lang="en-US" altLang="zh-CN" sz="1200">
+                <a:solidFill>
+                  <a:sysClr val="windowText" lastClr="000000"/>
+                </a:solidFill>
+                <a:latin typeface="Quicksand Light" panose="00000400000000000000" pitchFamily="2" charset="0"/>
+                <a:ea typeface="仿宋" panose="02010609060101010101" pitchFamily="49" charset="-122"/>
+              </a:rPr>
+              <a:t>inline-block</a:t>
+            </a:r>
+            <a:endParaRPr lang="zh-CN" altLang="en-US" sz="1200">
+              <a:solidFill>
+                <a:sysClr val="windowText" lastClr="000000"/>
+              </a:solidFill>
+              <a:latin typeface="Quicksand Light" panose="00000400000000000000" pitchFamily="2" charset="0"/>
+              <a:ea typeface="仿宋" panose="02010609060101010101" pitchFamily="49" charset="-122"/>
+            </a:endParaRPr>
+          </a:p>
+        </p:txBody>
+      </p:sp>
+      <p:sp>
+        <p:nvSpPr>
+          <p:cNvPr id="19" name="矩形: 圆角 18">
+            <a:extLst>
+              <a:ext uri="{FF2B5EF4-FFF2-40B4-BE49-F238E27FC236}">
+                <a16:creationId xmlns:a16="http://schemas.microsoft.com/office/drawing/2014/main" id="{03E4ED18-20DE-9A2D-F3D6-31F089C7D92C}"/>
+              </a:ext>
+            </a:extLst>
+          </p:cNvPr>
+          <p:cNvSpPr/>
+          <p:nvPr/>
+        </p:nvSpPr>
+        <p:spPr>
+          <a:xfrm>
+            <a:off x="5806701" y="3877737"/>
+            <a:ext cx="1620000" cy="360000"/>
+          </a:xfrm>
+          <a:prstGeom prst="roundRect">
+            <a:avLst/>
+          </a:prstGeom>
+          <a:noFill/>
+          <a:ln w="12700">
+            <a:solidFill>
+              <a:schemeClr val="bg1">
+                <a:lumMod val="50000"/>
+              </a:schemeClr>
+            </a:solidFill>
+            <a:prstDash val="dash"/>
+          </a:ln>
+        </p:spPr>
+        <p:style>
+          <a:lnRef idx="2">
+            <a:schemeClr val="accent1">
+              <a:shade val="15000"/>
+            </a:schemeClr>
+          </a:lnRef>
+          <a:fillRef idx="1">
+            <a:schemeClr val="accent1"/>
+          </a:fillRef>
+          <a:effectRef idx="0">
+            <a:schemeClr val="accent1"/>
+          </a:effectRef>
+          <a:fontRef idx="minor">
+            <a:schemeClr val="lt1"/>
+          </a:fontRef>
+        </p:style>
+        <p:txBody>
+          <a:bodyPr rtlCol="0" anchor="ctr"/>
+          <a:lstStyle/>
+          <a:p>
+            <a:pPr algn="ctr"/>
+            <a:r>
+              <a:rPr lang="zh-CN" altLang="en-US" sz="1200">
+                <a:solidFill>
+                  <a:sysClr val="windowText" lastClr="000000"/>
+                </a:solidFill>
+                <a:latin typeface="Quicksand Light" panose="00000400000000000000" pitchFamily="2" charset="0"/>
+                <a:ea typeface="仿宋" panose="02010609060101010101" pitchFamily="49" charset="-122"/>
+              </a:rPr>
+              <a:t>网格 </a:t>
+            </a:r>
+            <a:r>
+              <a:rPr lang="en-US" altLang="zh-CN" sz="1200">
+                <a:solidFill>
+                  <a:sysClr val="windowText" lastClr="000000"/>
+                </a:solidFill>
+                <a:latin typeface="Quicksand Light" panose="00000400000000000000" pitchFamily="2" charset="0"/>
+                <a:ea typeface="仿宋" panose="02010609060101010101" pitchFamily="49" charset="-122"/>
+              </a:rPr>
+              <a:t>grid</a:t>
+            </a:r>
+            <a:endParaRPr lang="zh-CN" altLang="en-US" sz="1200">
+              <a:solidFill>
+                <a:sysClr val="windowText" lastClr="000000"/>
+              </a:solidFill>
+              <a:latin typeface="Quicksand Light" panose="00000400000000000000" pitchFamily="2" charset="0"/>
+              <a:ea typeface="仿宋" panose="02010609060101010101" pitchFamily="49" charset="-122"/>
+            </a:endParaRPr>
+          </a:p>
+        </p:txBody>
+      </p:sp>
+      <p:cxnSp>
+        <p:nvCxnSpPr>
+          <p:cNvPr id="22" name="连接符: 曲线 21">
+            <a:extLst>
+              <a:ext uri="{FF2B5EF4-FFF2-40B4-BE49-F238E27FC236}">
+                <a16:creationId xmlns:a16="http://schemas.microsoft.com/office/drawing/2014/main" id="{D99A8B47-6D7E-2EA4-8359-4BD4F43E0B70}"/>
+              </a:ext>
+            </a:extLst>
+          </p:cNvPr>
+          <p:cNvCxnSpPr>
+            <a:cxnSpLocks/>
+            <a:stCxn id="9" idx="3"/>
+            <a:endCxn id="7" idx="1"/>
+          </p:cNvCxnSpPr>
+          <p:nvPr/>
+        </p:nvCxnSpPr>
+        <p:spPr>
+          <a:xfrm>
+            <a:off x="5474575" y="3274613"/>
+            <a:ext cx="332126" cy="1271351"/>
+          </a:xfrm>
+          <a:prstGeom prst="curvedConnector3">
+            <a:avLst>
+              <a:gd name="adj1" fmla="val 50000"/>
+            </a:avLst>
+          </a:prstGeom>
+          <a:ln>
+            <a:solidFill>
+              <a:srgbClr val="EB3B5A"/>
+            </a:solidFill>
+          </a:ln>
+        </p:spPr>
+        <p:style>
+          <a:lnRef idx="1">
+            <a:schemeClr val="accent1"/>
+          </a:lnRef>
+          <a:fillRef idx="0">
+            <a:schemeClr val="accent1"/>
+          </a:fillRef>
+          <a:effectRef idx="0">
+            <a:schemeClr val="accent1"/>
+          </a:effectRef>
+          <a:fontRef idx="minor">
+            <a:schemeClr val="tx1"/>
+          </a:fontRef>
+        </p:style>
+      </p:cxnSp>
+      <p:cxnSp>
+        <p:nvCxnSpPr>
+          <p:cNvPr id="26" name="连接符: 曲线 25">
+            <a:extLst>
+              <a:ext uri="{FF2B5EF4-FFF2-40B4-BE49-F238E27FC236}">
+                <a16:creationId xmlns:a16="http://schemas.microsoft.com/office/drawing/2014/main" id="{46C1E541-71B5-21B2-7273-4EAC0DC70F03}"/>
+              </a:ext>
+            </a:extLst>
+          </p:cNvPr>
+          <p:cNvCxnSpPr>
+            <a:cxnSpLocks/>
+            <a:stCxn id="8" idx="1"/>
+            <a:endCxn id="2" idx="3"/>
+          </p:cNvCxnSpPr>
+          <p:nvPr/>
+        </p:nvCxnSpPr>
+        <p:spPr>
+          <a:xfrm rot="10800000">
+            <a:off x="4062449" y="3274613"/>
+            <a:ext cx="332126" cy="1147136"/>
+          </a:xfrm>
+          <a:prstGeom prst="curvedConnector3">
+            <a:avLst>
+              <a:gd name="adj1" fmla="val 50000"/>
+            </a:avLst>
+          </a:prstGeom>
+          <a:ln>
+            <a:solidFill>
+              <a:srgbClr val="3DC1D3"/>
+            </a:solidFill>
+          </a:ln>
+        </p:spPr>
+        <p:style>
+          <a:lnRef idx="1">
+            <a:schemeClr val="accent1"/>
+          </a:lnRef>
+          <a:fillRef idx="0">
+            <a:schemeClr val="accent1"/>
+          </a:fillRef>
+          <a:effectRef idx="0">
+            <a:schemeClr val="accent1"/>
+          </a:effectRef>
+          <a:fontRef idx="minor">
+            <a:schemeClr val="tx1"/>
+          </a:fontRef>
+        </p:style>
+      </p:cxnSp>
+      <p:sp>
+        <p:nvSpPr>
+          <p:cNvPr id="31" name="矩形: 圆角 30">
+            <a:extLst>
+              <a:ext uri="{FF2B5EF4-FFF2-40B4-BE49-F238E27FC236}">
+                <a16:creationId xmlns:a16="http://schemas.microsoft.com/office/drawing/2014/main" id="{E8C9255D-9B6B-1495-9667-75E062A30160}"/>
+              </a:ext>
+            </a:extLst>
+          </p:cNvPr>
+          <p:cNvSpPr/>
+          <p:nvPr/>
+        </p:nvSpPr>
+        <p:spPr>
+          <a:xfrm>
+            <a:off x="4394575" y="5388885"/>
+            <a:ext cx="1080000" cy="360000"/>
+          </a:xfrm>
+          <a:prstGeom prst="roundRect">
+            <a:avLst/>
+          </a:prstGeom>
+          <a:solidFill>
+            <a:schemeClr val="accent6">
+              <a:lumMod val="60000"/>
+              <a:lumOff val="40000"/>
+            </a:schemeClr>
+          </a:solidFill>
+          <a:ln w="12700">
+            <a:noFill/>
+          </a:ln>
+        </p:spPr>
+        <p:style>
+          <a:lnRef idx="2">
+            <a:schemeClr val="accent1">
+              <a:shade val="15000"/>
+            </a:schemeClr>
+          </a:lnRef>
+          <a:fillRef idx="1">
+            <a:schemeClr val="accent1"/>
+          </a:fillRef>
+          <a:effectRef idx="0">
+            <a:schemeClr val="accent1"/>
+          </a:effectRef>
+          <a:fontRef idx="minor">
+            <a:schemeClr val="lt1"/>
+          </a:fontRef>
+        </p:style>
+        <p:txBody>
+          <a:bodyPr rtlCol="0" anchor="ctr"/>
+          <a:lstStyle/>
+          <a:p>
+            <a:pPr algn="ctr"/>
+            <a:r>
+              <a:rPr lang="zh-CN" altLang="en-US" sz="1200">
+                <a:latin typeface="Quicksand Light" panose="00000400000000000000" pitchFamily="2" charset="0"/>
+                <a:ea typeface="仿宋" panose="02010609060101010101" pitchFamily="49" charset="-122"/>
+              </a:rPr>
+              <a:t>导航</a:t>
+            </a:r>
+          </a:p>
+        </p:txBody>
+      </p:sp>
+      <p:cxnSp>
+        <p:nvCxnSpPr>
+          <p:cNvPr id="32" name="连接符: 曲线 31">
+            <a:extLst>
+              <a:ext uri="{FF2B5EF4-FFF2-40B4-BE49-F238E27FC236}">
+                <a16:creationId xmlns:a16="http://schemas.microsoft.com/office/drawing/2014/main" id="{77355C97-960E-5F33-1A9D-C89E64984730}"/>
+              </a:ext>
+            </a:extLst>
+          </p:cNvPr>
+          <p:cNvCxnSpPr>
+            <a:cxnSpLocks/>
+            <a:stCxn id="31" idx="1"/>
+            <a:endCxn id="2" idx="3"/>
+          </p:cNvCxnSpPr>
+          <p:nvPr/>
+        </p:nvCxnSpPr>
+        <p:spPr>
+          <a:xfrm rot="10800000">
+            <a:off x="4062449" y="3274613"/>
+            <a:ext cx="332126" cy="2294272"/>
+          </a:xfrm>
+          <a:prstGeom prst="curvedConnector3">
+            <a:avLst>
+              <a:gd name="adj1" fmla="val 50000"/>
+            </a:avLst>
+          </a:prstGeom>
+          <a:ln>
+            <a:solidFill>
+              <a:srgbClr val="A9D18E"/>
+            </a:solidFill>
+          </a:ln>
+        </p:spPr>
+        <p:style>
+          <a:lnRef idx="1">
+            <a:schemeClr val="accent1"/>
+          </a:lnRef>
+          <a:fillRef idx="0">
+            <a:schemeClr val="accent1"/>
+          </a:fillRef>
+          <a:effectRef idx="0">
+            <a:schemeClr val="accent1"/>
+          </a:effectRef>
+          <a:fontRef idx="minor">
+            <a:schemeClr val="tx1"/>
+          </a:fontRef>
+        </p:style>
+      </p:cxnSp>
+      <p:sp>
+        <p:nvSpPr>
+          <p:cNvPr id="4" name="矩形: 圆角 3">
+            <a:extLst>
+              <a:ext uri="{FF2B5EF4-FFF2-40B4-BE49-F238E27FC236}">
+                <a16:creationId xmlns:a16="http://schemas.microsoft.com/office/drawing/2014/main" id="{F804F753-E482-E059-B0E0-437F4CB1E50C}"/>
+              </a:ext>
+            </a:extLst>
+          </p:cNvPr>
+          <p:cNvSpPr/>
+          <p:nvPr/>
+        </p:nvSpPr>
+        <p:spPr>
+          <a:xfrm>
+            <a:off x="5806701" y="5164768"/>
+            <a:ext cx="1620000" cy="360000"/>
+          </a:xfrm>
+          <a:prstGeom prst="roundRect">
+            <a:avLst/>
+          </a:prstGeom>
+          <a:noFill/>
+          <a:ln w="12700">
+            <a:solidFill>
+              <a:schemeClr val="accent6">
+                <a:lumMod val="60000"/>
+                <a:lumOff val="40000"/>
+              </a:schemeClr>
+            </a:solidFill>
+          </a:ln>
+        </p:spPr>
+        <p:style>
+          <a:lnRef idx="2">
+            <a:schemeClr val="accent1">
+              <a:shade val="15000"/>
+            </a:schemeClr>
+          </a:lnRef>
+          <a:fillRef idx="1">
+            <a:schemeClr val="accent1"/>
+          </a:fillRef>
+          <a:effectRef idx="0">
+            <a:schemeClr val="accent1"/>
+          </a:effectRef>
+          <a:fontRef idx="minor">
+            <a:schemeClr val="lt1"/>
+          </a:fontRef>
+        </p:style>
+        <p:txBody>
+          <a:bodyPr rtlCol="0" anchor="ctr"/>
+          <a:lstStyle/>
+          <a:p>
+            <a:pPr algn="ctr"/>
+            <a:r>
+              <a:rPr lang="zh-CN" altLang="en-US" sz="1200">
+                <a:solidFill>
+                  <a:sysClr val="windowText" lastClr="000000"/>
+                </a:solidFill>
+                <a:latin typeface="Quicksand Light" panose="00000400000000000000" pitchFamily="2" charset="0"/>
+                <a:ea typeface="仿宋" panose="02010609060101010101" pitchFamily="49" charset="-122"/>
+              </a:rPr>
+              <a:t>一个滚动视图</a:t>
+            </a:r>
+          </a:p>
+        </p:txBody>
+      </p:sp>
+      <p:sp>
+        <p:nvSpPr>
+          <p:cNvPr id="5" name="矩形: 圆角 4">
+            <a:extLst>
+              <a:ext uri="{FF2B5EF4-FFF2-40B4-BE49-F238E27FC236}">
+                <a16:creationId xmlns:a16="http://schemas.microsoft.com/office/drawing/2014/main" id="{2F218F90-1527-32EF-A4D6-D219CF5B8F16}"/>
+              </a:ext>
+            </a:extLst>
+          </p:cNvPr>
+          <p:cNvSpPr/>
+          <p:nvPr/>
+        </p:nvSpPr>
+        <p:spPr>
+          <a:xfrm>
+            <a:off x="5806701" y="5613003"/>
+            <a:ext cx="1620000" cy="360000"/>
+          </a:xfrm>
+          <a:prstGeom prst="roundRect">
+            <a:avLst/>
+          </a:prstGeom>
+          <a:noFill/>
+          <a:ln w="12700">
+            <a:solidFill>
+              <a:schemeClr val="accent6">
+                <a:lumMod val="60000"/>
+                <a:lumOff val="40000"/>
+              </a:schemeClr>
+            </a:solidFill>
+            <a:prstDash val="dash"/>
+          </a:ln>
+        </p:spPr>
+        <p:style>
+          <a:lnRef idx="2">
+            <a:schemeClr val="accent1">
+              <a:shade val="15000"/>
+            </a:schemeClr>
+          </a:lnRef>
+          <a:fillRef idx="1">
+            <a:schemeClr val="accent1"/>
+          </a:fillRef>
+          <a:effectRef idx="0">
+            <a:schemeClr val="accent1"/>
+          </a:effectRef>
+          <a:fontRef idx="minor">
+            <a:schemeClr val="lt1"/>
+          </a:fontRef>
+        </p:style>
+        <p:txBody>
+          <a:bodyPr rtlCol="0" anchor="ctr"/>
+          <a:lstStyle/>
+          <a:p>
+            <a:pPr algn="ctr"/>
+            <a:r>
+              <a:rPr lang="zh-CN" altLang="en-US" sz="1200">
+                <a:solidFill>
+                  <a:sysClr val="windowText" lastClr="000000"/>
+                </a:solidFill>
+                <a:latin typeface="Quicksand Light" panose="00000400000000000000" pitchFamily="2" charset="0"/>
+                <a:ea typeface="仿宋" panose="02010609060101010101" pitchFamily="49" charset="-122"/>
+              </a:rPr>
+              <a:t>二个滚动视图</a:t>
+            </a:r>
+          </a:p>
+        </p:txBody>
+      </p:sp>
+      <p:cxnSp>
+        <p:nvCxnSpPr>
+          <p:cNvPr id="6" name="连接符: 曲线 5">
+            <a:extLst>
+              <a:ext uri="{FF2B5EF4-FFF2-40B4-BE49-F238E27FC236}">
+                <a16:creationId xmlns:a16="http://schemas.microsoft.com/office/drawing/2014/main" id="{A07E7128-4DE2-E2DD-961D-C1575C1BBE3A}"/>
+              </a:ext>
+            </a:extLst>
+          </p:cNvPr>
+          <p:cNvCxnSpPr>
+            <a:cxnSpLocks/>
+            <a:stCxn id="31" idx="3"/>
+            <a:endCxn id="4" idx="1"/>
+          </p:cNvCxnSpPr>
+          <p:nvPr/>
+        </p:nvCxnSpPr>
+        <p:spPr>
+          <a:xfrm flipV="1">
+            <a:off x="5474575" y="5344768"/>
+            <a:ext cx="332126" cy="224117"/>
+          </a:xfrm>
+          <a:prstGeom prst="curvedConnector3">
+            <a:avLst>
+              <a:gd name="adj1" fmla="val 50000"/>
+            </a:avLst>
+          </a:prstGeom>
+          <a:ln>
+            <a:solidFill>
+              <a:schemeClr val="accent6">
+                <a:lumMod val="60000"/>
+                <a:lumOff val="40000"/>
+              </a:schemeClr>
+            </a:solidFill>
+          </a:ln>
+        </p:spPr>
+        <p:style>
+          <a:lnRef idx="1">
+            <a:schemeClr val="accent1"/>
+          </a:lnRef>
+          <a:fillRef idx="0">
+            <a:schemeClr val="accent1"/>
+          </a:fillRef>
+          <a:effectRef idx="0">
+            <a:schemeClr val="accent1"/>
+          </a:effectRef>
+          <a:fontRef idx="minor">
+            <a:schemeClr val="tx1"/>
+          </a:fontRef>
+        </p:style>
+      </p:cxnSp>
+      <p:cxnSp>
+        <p:nvCxnSpPr>
+          <p:cNvPr id="12" name="连接符: 曲线 11">
+            <a:extLst>
+              <a:ext uri="{FF2B5EF4-FFF2-40B4-BE49-F238E27FC236}">
+                <a16:creationId xmlns:a16="http://schemas.microsoft.com/office/drawing/2014/main" id="{5FD7AEAF-CD97-C450-BBC1-2641DC43007D}"/>
+              </a:ext>
+            </a:extLst>
+          </p:cNvPr>
+          <p:cNvCxnSpPr>
+            <a:cxnSpLocks/>
+            <a:stCxn id="31" idx="3"/>
+            <a:endCxn id="5" idx="1"/>
+          </p:cNvCxnSpPr>
+          <p:nvPr/>
+        </p:nvCxnSpPr>
+        <p:spPr>
+          <a:xfrm>
+            <a:off x="5474575" y="5568885"/>
+            <a:ext cx="332126" cy="224118"/>
+          </a:xfrm>
+          <a:prstGeom prst="curvedConnector3">
+            <a:avLst>
+              <a:gd name="adj1" fmla="val 50000"/>
+            </a:avLst>
+          </a:prstGeom>
+          <a:ln>
+            <a:solidFill>
+              <a:schemeClr val="accent6">
+                <a:lumMod val="60000"/>
+                <a:lumOff val="40000"/>
+              </a:schemeClr>
+            </a:solidFill>
+          </a:ln>
+        </p:spPr>
+        <p:style>
+          <a:lnRef idx="1">
+            <a:schemeClr val="accent1"/>
+          </a:lnRef>
+          <a:fillRef idx="0">
+            <a:schemeClr val="accent1"/>
+          </a:fillRef>
+          <a:effectRef idx="0">
+            <a:schemeClr val="accent1"/>
+          </a:effectRef>
+          <a:fontRef idx="minor">
+            <a:schemeClr val="tx1"/>
+          </a:fontRef>
+        </p:style>
+      </p:cxnSp>
+      <p:sp>
+        <p:nvSpPr>
+          <p:cNvPr id="7" name="矩形: 圆角 6">
+            <a:extLst>
+              <a:ext uri="{FF2B5EF4-FFF2-40B4-BE49-F238E27FC236}">
+                <a16:creationId xmlns:a16="http://schemas.microsoft.com/office/drawing/2014/main" id="{383E7043-36AC-CBD4-DF24-A727B7D0B0BD}"/>
+              </a:ext>
+            </a:extLst>
+          </p:cNvPr>
+          <p:cNvSpPr/>
+          <p:nvPr/>
+        </p:nvSpPr>
+        <p:spPr>
+          <a:xfrm>
+            <a:off x="5806701" y="4365964"/>
+            <a:ext cx="1620000" cy="360000"/>
+          </a:xfrm>
+          <a:prstGeom prst="roundRect">
+            <a:avLst/>
+          </a:prstGeom>
+          <a:noFill/>
+          <a:ln w="12700">
+            <a:solidFill>
+              <a:schemeClr val="bg1">
+                <a:lumMod val="50000"/>
+              </a:schemeClr>
+            </a:solidFill>
+            <a:prstDash val="dash"/>
+          </a:ln>
+        </p:spPr>
+        <p:style>
+          <a:lnRef idx="2">
+            <a:schemeClr val="accent1">
+              <a:shade val="15000"/>
+            </a:schemeClr>
+          </a:lnRef>
+          <a:fillRef idx="1">
+            <a:schemeClr val="accent1"/>
+          </a:fillRef>
+          <a:effectRef idx="0">
+            <a:schemeClr val="accent1"/>
+          </a:effectRef>
+          <a:fontRef idx="minor">
+            <a:schemeClr val="lt1"/>
+          </a:fontRef>
+        </p:style>
+        <p:txBody>
+          <a:bodyPr rtlCol="0" anchor="ctr"/>
+          <a:lstStyle/>
+          <a:p>
+            <a:pPr algn="ctr"/>
+            <a:r>
+              <a:rPr lang="zh-CN" altLang="en-US" sz="1200">
+                <a:solidFill>
+                  <a:sysClr val="windowText" lastClr="000000"/>
+                </a:solidFill>
+                <a:latin typeface="Quicksand Light" panose="00000400000000000000" pitchFamily="2" charset="0"/>
+                <a:ea typeface="仿宋" panose="02010609060101010101" pitchFamily="49" charset="-122"/>
+              </a:rPr>
+              <a:t>浮动 </a:t>
+            </a:r>
+            <a:r>
+              <a:rPr lang="en-US" altLang="zh-CN" sz="1200">
+                <a:solidFill>
+                  <a:sysClr val="windowText" lastClr="000000"/>
+                </a:solidFill>
+                <a:latin typeface="Quicksand Light" panose="00000400000000000000" pitchFamily="2" charset="0"/>
+                <a:ea typeface="仿宋" panose="02010609060101010101" pitchFamily="49" charset="-122"/>
+              </a:rPr>
+              <a:t>float</a:t>
+            </a:r>
+            <a:endParaRPr lang="zh-CN" altLang="en-US" sz="1200">
+              <a:solidFill>
+                <a:sysClr val="windowText" lastClr="000000"/>
+              </a:solidFill>
+              <a:latin typeface="Quicksand Light" panose="00000400000000000000" pitchFamily="2" charset="0"/>
+              <a:ea typeface="仿宋" panose="02010609060101010101" pitchFamily="49" charset="-122"/>
+            </a:endParaRPr>
+          </a:p>
+        </p:txBody>
+      </p:sp>
+    </p:spTree>
+    <p:extLst>
+      <p:ext uri="{BB962C8B-B14F-4D97-AF65-F5344CB8AC3E}">
+        <p14:creationId xmlns:p14="http://schemas.microsoft.com/office/powerpoint/2010/main" val="2483548129"/>
       </p:ext>
     </p:extLst>
   </p:cSld>
@@ -25181,1177 +25411,40 @@
           <a:chExt cx="0" cy="0"/>
         </a:xfrm>
       </p:grpSpPr>
-      <p:sp>
-        <p:nvSpPr>
-          <p:cNvPr id="2" name="矩形: 圆角 1">
-            <a:extLst>
-              <a:ext uri="{FF2B5EF4-FFF2-40B4-BE49-F238E27FC236}">
-                <a16:creationId xmlns:a16="http://schemas.microsoft.com/office/drawing/2014/main" id="{7CE4D4CF-0466-1DC3-08B4-9C28D4A64E27}"/>
-              </a:ext>
-            </a:extLst>
-          </p:cNvPr>
-          <p:cNvSpPr/>
-          <p:nvPr/>
-        </p:nvSpPr>
-        <p:spPr>
-          <a:xfrm>
-            <a:off x="2622449" y="3094613"/>
-            <a:ext cx="1440000" cy="360000"/>
-          </a:xfrm>
-          <a:prstGeom prst="roundRect">
-            <a:avLst/>
-          </a:prstGeom>
-          <a:solidFill>
-            <a:schemeClr val="tx1"/>
-          </a:solidFill>
-          <a:ln w="12700">
-            <a:noFill/>
-          </a:ln>
-        </p:spPr>
-        <p:style>
-          <a:lnRef idx="2">
-            <a:schemeClr val="accent1">
-              <a:shade val="15000"/>
-            </a:schemeClr>
-          </a:lnRef>
-          <a:fillRef idx="1">
-            <a:schemeClr val="accent1"/>
-          </a:fillRef>
-          <a:effectRef idx="0">
-            <a:schemeClr val="accent1"/>
-          </a:effectRef>
-          <a:fontRef idx="minor">
-            <a:schemeClr val="lt1"/>
-          </a:fontRef>
-        </p:style>
-        <p:txBody>
-          <a:bodyPr rtlCol="0" anchor="ctr"/>
-          <a:lstStyle/>
-          <a:p>
-            <a:pPr algn="ctr"/>
-            <a:r>
-              <a:rPr lang="en-US" altLang="zh-CN" sz="1200">
-                <a:latin typeface="Quicksand Light" panose="00000400000000000000" pitchFamily="2" charset="0"/>
-                <a:ea typeface="仿宋" panose="02010609060101010101" pitchFamily="49" charset="-122"/>
-              </a:rPr>
-              <a:t>&lt;scroll-view&gt;</a:t>
-            </a:r>
-            <a:endParaRPr lang="zh-CN" altLang="en-US" sz="1200">
-              <a:latin typeface="Quicksand Light" panose="00000400000000000000" pitchFamily="2" charset="0"/>
-              <a:ea typeface="仿宋" panose="02010609060101010101" pitchFamily="49" charset="-122"/>
-            </a:endParaRPr>
-          </a:p>
-        </p:txBody>
-      </p:sp>
-      <p:sp>
-        <p:nvSpPr>
-          <p:cNvPr id="3" name="矩形: 圆角 2">
-            <a:extLst>
-              <a:ext uri="{FF2B5EF4-FFF2-40B4-BE49-F238E27FC236}">
-                <a16:creationId xmlns:a16="http://schemas.microsoft.com/office/drawing/2014/main" id="{6EE8E41B-FB18-64FF-0539-7D9127F8FC67}"/>
-              </a:ext>
-            </a:extLst>
-          </p:cNvPr>
-          <p:cNvSpPr/>
-          <p:nvPr/>
-        </p:nvSpPr>
-        <p:spPr>
-          <a:xfrm>
-            <a:off x="5806701" y="2901283"/>
-            <a:ext cx="1620000" cy="360000"/>
-          </a:xfrm>
-          <a:prstGeom prst="roundRect">
-            <a:avLst/>
-          </a:prstGeom>
-          <a:noFill/>
-          <a:ln w="12700">
-            <a:solidFill>
-              <a:srgbClr val="EB3B5A"/>
-            </a:solidFill>
-            <a:prstDash val="dash"/>
-          </a:ln>
-        </p:spPr>
-        <p:style>
-          <a:lnRef idx="2">
-            <a:schemeClr val="accent1">
-              <a:shade val="15000"/>
-            </a:schemeClr>
-          </a:lnRef>
-          <a:fillRef idx="1">
-            <a:schemeClr val="accent1"/>
-          </a:fillRef>
-          <a:effectRef idx="0">
-            <a:schemeClr val="accent1"/>
-          </a:effectRef>
-          <a:fontRef idx="minor">
-            <a:schemeClr val="lt1"/>
-          </a:fontRef>
-        </p:style>
-        <p:txBody>
-          <a:bodyPr rtlCol="0" anchor="ctr"/>
-          <a:lstStyle/>
-          <a:p>
-            <a:pPr algn="ctr"/>
-            <a:r>
-              <a:rPr lang="zh-CN" altLang="en-US" sz="1200">
-                <a:solidFill>
-                  <a:sysClr val="windowText" lastClr="000000"/>
-                </a:solidFill>
-                <a:latin typeface="Quicksand Light" panose="00000400000000000000" pitchFamily="2" charset="0"/>
-                <a:ea typeface="仿宋" panose="02010609060101010101" pitchFamily="49" charset="-122"/>
-              </a:rPr>
-              <a:t>行内 </a:t>
-            </a:r>
-            <a:r>
-              <a:rPr lang="en-US" altLang="zh-CN" sz="1200">
-                <a:solidFill>
-                  <a:sysClr val="windowText" lastClr="000000"/>
-                </a:solidFill>
-                <a:latin typeface="Quicksand Light" panose="00000400000000000000" pitchFamily="2" charset="0"/>
-                <a:ea typeface="仿宋" panose="02010609060101010101" pitchFamily="49" charset="-122"/>
-              </a:rPr>
-              <a:t>inline</a:t>
-            </a:r>
-            <a:endParaRPr lang="zh-CN" altLang="en-US" sz="1200">
-              <a:solidFill>
-                <a:sysClr val="windowText" lastClr="000000"/>
-              </a:solidFill>
-              <a:latin typeface="Quicksand Light" panose="00000400000000000000" pitchFamily="2" charset="0"/>
-              <a:ea typeface="仿宋" panose="02010609060101010101" pitchFamily="49" charset="-122"/>
-            </a:endParaRPr>
-          </a:p>
-        </p:txBody>
-      </p:sp>
-      <p:sp>
-        <p:nvSpPr>
-          <p:cNvPr id="8" name="矩形: 圆角 7">
-            <a:extLst>
-              <a:ext uri="{FF2B5EF4-FFF2-40B4-BE49-F238E27FC236}">
-                <a16:creationId xmlns:a16="http://schemas.microsoft.com/office/drawing/2014/main" id="{06699B4A-F636-A7C1-FB1E-69E3110ACB30}"/>
-              </a:ext>
-            </a:extLst>
-          </p:cNvPr>
-          <p:cNvSpPr/>
-          <p:nvPr/>
-        </p:nvSpPr>
-        <p:spPr>
-          <a:xfrm>
-            <a:off x="4394575" y="4241749"/>
-            <a:ext cx="1080000" cy="360000"/>
-          </a:xfrm>
-          <a:prstGeom prst="roundRect">
-            <a:avLst/>
-          </a:prstGeom>
-          <a:solidFill>
-            <a:srgbClr val="3DC1D3"/>
-          </a:solidFill>
-          <a:ln w="12700">
-            <a:noFill/>
-          </a:ln>
-        </p:spPr>
-        <p:style>
-          <a:lnRef idx="2">
-            <a:schemeClr val="accent1">
-              <a:shade val="15000"/>
-            </a:schemeClr>
-          </a:lnRef>
-          <a:fillRef idx="1">
-            <a:schemeClr val="accent1"/>
-          </a:fillRef>
-          <a:effectRef idx="0">
-            <a:schemeClr val="accent1"/>
-          </a:effectRef>
-          <a:fontRef idx="minor">
-            <a:schemeClr val="lt1"/>
-          </a:fontRef>
-        </p:style>
-        <p:txBody>
-          <a:bodyPr rtlCol="0" anchor="ctr"/>
-          <a:lstStyle/>
-          <a:p>
-            <a:pPr algn="ctr"/>
-            <a:r>
-              <a:rPr lang="zh-CN" altLang="en-US" sz="1200">
-                <a:latin typeface="Quicksand Light" panose="00000400000000000000" pitchFamily="2" charset="0"/>
-                <a:ea typeface="仿宋" panose="02010609060101010101" pitchFamily="49" charset="-122"/>
-              </a:rPr>
-              <a:t>垂直滚动</a:t>
-            </a:r>
-          </a:p>
-        </p:txBody>
-      </p:sp>
-      <p:sp>
-        <p:nvSpPr>
-          <p:cNvPr id="9" name="矩形: 圆角 8">
-            <a:extLst>
-              <a:ext uri="{FF2B5EF4-FFF2-40B4-BE49-F238E27FC236}">
-                <a16:creationId xmlns:a16="http://schemas.microsoft.com/office/drawing/2014/main" id="{63EC0026-3C9E-C410-1B1D-25D54ACB2F10}"/>
-              </a:ext>
-            </a:extLst>
-          </p:cNvPr>
-          <p:cNvSpPr/>
-          <p:nvPr/>
-        </p:nvSpPr>
-        <p:spPr>
-          <a:xfrm>
-            <a:off x="4394575" y="3094613"/>
-            <a:ext cx="1080000" cy="360000"/>
-          </a:xfrm>
-          <a:prstGeom prst="roundRect">
-            <a:avLst/>
-          </a:prstGeom>
-          <a:solidFill>
-            <a:srgbClr val="EB3B5A"/>
-          </a:solidFill>
-          <a:ln w="12700">
-            <a:noFill/>
-          </a:ln>
-        </p:spPr>
-        <p:style>
-          <a:lnRef idx="2">
-            <a:schemeClr val="accent1">
-              <a:shade val="15000"/>
-            </a:schemeClr>
-          </a:lnRef>
-          <a:fillRef idx="1">
-            <a:schemeClr val="accent1"/>
-          </a:fillRef>
-          <a:effectRef idx="0">
-            <a:schemeClr val="accent1"/>
-          </a:effectRef>
-          <a:fontRef idx="minor">
-            <a:schemeClr val="lt1"/>
-          </a:fontRef>
-        </p:style>
-        <p:txBody>
-          <a:bodyPr rtlCol="0" anchor="ctr"/>
-          <a:lstStyle/>
-          <a:p>
-            <a:pPr algn="ctr"/>
-            <a:r>
-              <a:rPr lang="zh-CN" altLang="en-US" sz="1200" dirty="0">
-                <a:latin typeface="Quicksand Light" panose="00000400000000000000" pitchFamily="2" charset="0"/>
-                <a:ea typeface="仿宋" panose="02010609060101010101" pitchFamily="49" charset="-122"/>
-              </a:rPr>
-              <a:t>水平滚动</a:t>
-            </a:r>
-          </a:p>
-        </p:txBody>
-      </p:sp>
-      <p:cxnSp>
-        <p:nvCxnSpPr>
-          <p:cNvPr id="10" name="连接符: 曲线 9">
-            <a:extLst>
-              <a:ext uri="{FF2B5EF4-FFF2-40B4-BE49-F238E27FC236}">
-                <a16:creationId xmlns:a16="http://schemas.microsoft.com/office/drawing/2014/main" id="{89376DA1-2871-7B3F-3D7E-34DF204828CA}"/>
-              </a:ext>
-            </a:extLst>
-          </p:cNvPr>
-          <p:cNvCxnSpPr>
-            <a:cxnSpLocks/>
-            <a:stCxn id="9" idx="3"/>
-            <a:endCxn id="17" idx="1"/>
-          </p:cNvCxnSpPr>
-          <p:nvPr/>
-        </p:nvCxnSpPr>
-        <p:spPr>
-          <a:xfrm flipV="1">
-            <a:off x="5474575" y="2104829"/>
-            <a:ext cx="332126" cy="1169784"/>
-          </a:xfrm>
-          <a:prstGeom prst="curvedConnector3">
-            <a:avLst>
-              <a:gd name="adj1" fmla="val 50000"/>
-            </a:avLst>
-          </a:prstGeom>
-          <a:ln>
-            <a:solidFill>
-              <a:srgbClr val="EB3B5A"/>
-            </a:solidFill>
-          </a:ln>
-        </p:spPr>
-        <p:style>
-          <a:lnRef idx="1">
-            <a:schemeClr val="accent1"/>
-          </a:lnRef>
-          <a:fillRef idx="0">
-            <a:schemeClr val="accent1"/>
-          </a:fillRef>
-          <a:effectRef idx="0">
-            <a:schemeClr val="accent1"/>
-          </a:effectRef>
-          <a:fontRef idx="minor">
-            <a:schemeClr val="tx1"/>
-          </a:fontRef>
-        </p:style>
-      </p:cxnSp>
-      <p:cxnSp>
-        <p:nvCxnSpPr>
-          <p:cNvPr id="15" name="直接连接符 14">
-            <a:extLst>
-              <a:ext uri="{FF2B5EF4-FFF2-40B4-BE49-F238E27FC236}">
-                <a16:creationId xmlns:a16="http://schemas.microsoft.com/office/drawing/2014/main" id="{B3AF8529-84E5-3299-2E12-01B446E0607B}"/>
-              </a:ext>
-            </a:extLst>
-          </p:cNvPr>
-          <p:cNvCxnSpPr>
-            <a:cxnSpLocks/>
-            <a:stCxn id="2" idx="3"/>
-            <a:endCxn id="9" idx="1"/>
-          </p:cNvCxnSpPr>
-          <p:nvPr/>
-        </p:nvCxnSpPr>
-        <p:spPr>
-          <a:xfrm>
-            <a:off x="4062449" y="3274613"/>
-            <a:ext cx="332126" cy="0"/>
-          </a:xfrm>
-          <a:prstGeom prst="line">
-            <a:avLst/>
-          </a:prstGeom>
-          <a:ln>
-            <a:solidFill>
-              <a:srgbClr val="EB3B5A"/>
-            </a:solidFill>
-          </a:ln>
-        </p:spPr>
-        <p:style>
-          <a:lnRef idx="1">
-            <a:schemeClr val="accent1"/>
-          </a:lnRef>
-          <a:fillRef idx="0">
-            <a:schemeClr val="accent1"/>
-          </a:fillRef>
-          <a:effectRef idx="0">
-            <a:schemeClr val="accent1"/>
-          </a:effectRef>
-          <a:fontRef idx="minor">
-            <a:schemeClr val="tx1"/>
-          </a:fontRef>
-        </p:style>
-      </p:cxnSp>
-      <p:sp>
-        <p:nvSpPr>
-          <p:cNvPr id="16" name="矩形: 圆角 15">
-            <a:extLst>
-              <a:ext uri="{FF2B5EF4-FFF2-40B4-BE49-F238E27FC236}">
-                <a16:creationId xmlns:a16="http://schemas.microsoft.com/office/drawing/2014/main" id="{FA81A049-32C6-0464-CB2F-FE666FC0CCAF}"/>
-              </a:ext>
-            </a:extLst>
-          </p:cNvPr>
-          <p:cNvSpPr/>
-          <p:nvPr/>
-        </p:nvSpPr>
-        <p:spPr>
-          <a:xfrm>
-            <a:off x="5806701" y="2413056"/>
-            <a:ext cx="1620000" cy="360000"/>
-          </a:xfrm>
-          <a:prstGeom prst="roundRect">
-            <a:avLst/>
-          </a:prstGeom>
-          <a:noFill/>
-          <a:ln w="12700">
-            <a:solidFill>
-              <a:srgbClr val="EB3B5A"/>
-            </a:solidFill>
-          </a:ln>
-        </p:spPr>
-        <p:style>
-          <a:lnRef idx="2">
-            <a:schemeClr val="accent1">
-              <a:shade val="15000"/>
-            </a:schemeClr>
-          </a:lnRef>
-          <a:fillRef idx="1">
-            <a:schemeClr val="accent1"/>
-          </a:fillRef>
-          <a:effectRef idx="0">
-            <a:schemeClr val="accent1"/>
-          </a:effectRef>
-          <a:fontRef idx="minor">
-            <a:schemeClr val="lt1"/>
-          </a:fontRef>
-        </p:style>
-        <p:txBody>
-          <a:bodyPr rtlCol="0" anchor="ctr"/>
-          <a:lstStyle/>
-          <a:p>
-            <a:pPr algn="ctr"/>
-            <a:r>
-              <a:rPr lang="zh-CN" altLang="en-US" sz="1200">
-                <a:solidFill>
-                  <a:sysClr val="windowText" lastClr="000000"/>
-                </a:solidFill>
-                <a:latin typeface="Quicksand Light" panose="00000400000000000000" pitchFamily="2" charset="0"/>
-                <a:ea typeface="仿宋" panose="02010609060101010101" pitchFamily="49" charset="-122"/>
-              </a:rPr>
-              <a:t>容器 </a:t>
-            </a:r>
-            <a:r>
-              <a:rPr lang="en-US" altLang="zh-CN" sz="1200">
-                <a:solidFill>
-                  <a:sysClr val="windowText" lastClr="000000"/>
-                </a:solidFill>
-                <a:latin typeface="Quicksand Light" panose="00000400000000000000" pitchFamily="2" charset="0"/>
-                <a:ea typeface="仿宋" panose="02010609060101010101" pitchFamily="49" charset="-122"/>
-              </a:rPr>
-              <a:t>wrap</a:t>
-            </a:r>
-            <a:endParaRPr lang="zh-CN" altLang="en-US" sz="1200">
-              <a:solidFill>
-                <a:sysClr val="windowText" lastClr="000000"/>
-              </a:solidFill>
-              <a:latin typeface="Quicksand Light" panose="00000400000000000000" pitchFamily="2" charset="0"/>
-              <a:ea typeface="仿宋" panose="02010609060101010101" pitchFamily="49" charset="-122"/>
-            </a:endParaRPr>
-          </a:p>
-        </p:txBody>
-      </p:sp>
-      <p:sp>
-        <p:nvSpPr>
-          <p:cNvPr id="17" name="矩形: 圆角 16">
-            <a:extLst>
-              <a:ext uri="{FF2B5EF4-FFF2-40B4-BE49-F238E27FC236}">
-                <a16:creationId xmlns:a16="http://schemas.microsoft.com/office/drawing/2014/main" id="{DF07C0A6-7F4B-674A-E488-85EB77ABE14F}"/>
-              </a:ext>
-            </a:extLst>
-          </p:cNvPr>
-          <p:cNvSpPr/>
-          <p:nvPr/>
-        </p:nvSpPr>
-        <p:spPr>
-          <a:xfrm>
-            <a:off x="5806701" y="1924829"/>
-            <a:ext cx="1620000" cy="360000"/>
-          </a:xfrm>
-          <a:prstGeom prst="roundRect">
-            <a:avLst/>
-          </a:prstGeom>
-          <a:noFill/>
-          <a:ln w="12700">
-            <a:solidFill>
-              <a:srgbClr val="EB3B5A"/>
-            </a:solidFill>
-          </a:ln>
-        </p:spPr>
-        <p:style>
-          <a:lnRef idx="2">
-            <a:schemeClr val="accent1">
-              <a:shade val="15000"/>
-            </a:schemeClr>
-          </a:lnRef>
-          <a:fillRef idx="1">
-            <a:schemeClr val="accent1"/>
-          </a:fillRef>
-          <a:effectRef idx="0">
-            <a:schemeClr val="accent1"/>
-          </a:effectRef>
-          <a:fontRef idx="minor">
-            <a:schemeClr val="lt1"/>
-          </a:fontRef>
-        </p:style>
-        <p:txBody>
-          <a:bodyPr rtlCol="0" anchor="ctr"/>
-          <a:lstStyle/>
-          <a:p>
-            <a:pPr algn="ctr"/>
-            <a:r>
-              <a:rPr lang="en-US" altLang="zh-CN" sz="1200">
-                <a:solidFill>
-                  <a:sysClr val="windowText" lastClr="000000"/>
-                </a:solidFill>
-                <a:latin typeface="Quicksand Light" panose="00000400000000000000" pitchFamily="2" charset="0"/>
-                <a:ea typeface="仿宋" panose="02010609060101010101" pitchFamily="49" charset="-122"/>
-              </a:rPr>
-              <a:t>enable-flex</a:t>
-            </a:r>
-            <a:endParaRPr lang="zh-CN" altLang="en-US" sz="1200">
-              <a:solidFill>
-                <a:sysClr val="windowText" lastClr="000000"/>
-              </a:solidFill>
-              <a:latin typeface="Quicksand Light" panose="00000400000000000000" pitchFamily="2" charset="0"/>
-              <a:ea typeface="仿宋" panose="02010609060101010101" pitchFamily="49" charset="-122"/>
-            </a:endParaRPr>
-          </a:p>
-        </p:txBody>
-      </p:sp>
-      <p:sp>
-        <p:nvSpPr>
-          <p:cNvPr id="18" name="矩形: 圆角 17">
-            <a:extLst>
-              <a:ext uri="{FF2B5EF4-FFF2-40B4-BE49-F238E27FC236}">
-                <a16:creationId xmlns:a16="http://schemas.microsoft.com/office/drawing/2014/main" id="{79DE23DA-ADA0-B751-DD89-7669F999E79D}"/>
-              </a:ext>
-            </a:extLst>
-          </p:cNvPr>
-          <p:cNvSpPr/>
-          <p:nvPr/>
-        </p:nvSpPr>
-        <p:spPr>
-          <a:xfrm>
-            <a:off x="5806701" y="3389510"/>
-            <a:ext cx="1620000" cy="360000"/>
-          </a:xfrm>
-          <a:prstGeom prst="roundRect">
-            <a:avLst/>
-          </a:prstGeom>
-          <a:noFill/>
-          <a:ln w="12700">
-            <a:solidFill>
-              <a:srgbClr val="EB3B5A"/>
-            </a:solidFill>
-            <a:prstDash val="dash"/>
-          </a:ln>
-        </p:spPr>
-        <p:style>
-          <a:lnRef idx="2">
-            <a:schemeClr val="accent1">
-              <a:shade val="15000"/>
-            </a:schemeClr>
-          </a:lnRef>
-          <a:fillRef idx="1">
-            <a:schemeClr val="accent1"/>
-          </a:fillRef>
-          <a:effectRef idx="0">
-            <a:schemeClr val="accent1"/>
-          </a:effectRef>
-          <a:fontRef idx="minor">
-            <a:schemeClr val="lt1"/>
-          </a:fontRef>
-        </p:style>
-        <p:txBody>
-          <a:bodyPr rtlCol="0" anchor="ctr"/>
-          <a:lstStyle/>
-          <a:p>
-            <a:pPr algn="ctr"/>
-            <a:r>
-              <a:rPr lang="zh-CN" altLang="en-US" sz="1200">
-                <a:solidFill>
-                  <a:sysClr val="windowText" lastClr="000000"/>
-                </a:solidFill>
-                <a:latin typeface="Quicksand Light" panose="00000400000000000000" pitchFamily="2" charset="0"/>
-                <a:ea typeface="仿宋" panose="02010609060101010101" pitchFamily="49" charset="-122"/>
-              </a:rPr>
-              <a:t>行内块 </a:t>
-            </a:r>
-            <a:r>
-              <a:rPr lang="en-US" altLang="zh-CN" sz="1200">
-                <a:solidFill>
-                  <a:sysClr val="windowText" lastClr="000000"/>
-                </a:solidFill>
-                <a:latin typeface="Quicksand Light" panose="00000400000000000000" pitchFamily="2" charset="0"/>
-                <a:ea typeface="仿宋" panose="02010609060101010101" pitchFamily="49" charset="-122"/>
-              </a:rPr>
-              <a:t>inline-block</a:t>
-            </a:r>
-            <a:endParaRPr lang="zh-CN" altLang="en-US" sz="1200">
-              <a:solidFill>
-                <a:sysClr val="windowText" lastClr="000000"/>
-              </a:solidFill>
-              <a:latin typeface="Quicksand Light" panose="00000400000000000000" pitchFamily="2" charset="0"/>
-              <a:ea typeface="仿宋" panose="02010609060101010101" pitchFamily="49" charset="-122"/>
-            </a:endParaRPr>
-          </a:p>
-        </p:txBody>
-      </p:sp>
-      <p:sp>
-        <p:nvSpPr>
-          <p:cNvPr id="19" name="矩形: 圆角 18">
-            <a:extLst>
-              <a:ext uri="{FF2B5EF4-FFF2-40B4-BE49-F238E27FC236}">
-                <a16:creationId xmlns:a16="http://schemas.microsoft.com/office/drawing/2014/main" id="{03E4ED18-20DE-9A2D-F3D6-31F089C7D92C}"/>
-              </a:ext>
-            </a:extLst>
-          </p:cNvPr>
-          <p:cNvSpPr/>
-          <p:nvPr/>
-        </p:nvSpPr>
-        <p:spPr>
-          <a:xfrm>
-            <a:off x="5806701" y="3877737"/>
-            <a:ext cx="1620000" cy="360000"/>
-          </a:xfrm>
-          <a:prstGeom prst="roundRect">
-            <a:avLst/>
-          </a:prstGeom>
-          <a:noFill/>
-          <a:ln w="12700">
-            <a:solidFill>
-              <a:schemeClr val="bg1">
-                <a:lumMod val="50000"/>
-              </a:schemeClr>
-            </a:solidFill>
-            <a:prstDash val="dash"/>
-          </a:ln>
-        </p:spPr>
-        <p:style>
-          <a:lnRef idx="2">
-            <a:schemeClr val="accent1">
-              <a:shade val="15000"/>
-            </a:schemeClr>
-          </a:lnRef>
-          <a:fillRef idx="1">
-            <a:schemeClr val="accent1"/>
-          </a:fillRef>
-          <a:effectRef idx="0">
-            <a:schemeClr val="accent1"/>
-          </a:effectRef>
-          <a:fontRef idx="minor">
-            <a:schemeClr val="lt1"/>
-          </a:fontRef>
-        </p:style>
-        <p:txBody>
-          <a:bodyPr rtlCol="0" anchor="ctr"/>
-          <a:lstStyle/>
-          <a:p>
-            <a:pPr algn="ctr"/>
-            <a:r>
-              <a:rPr lang="zh-CN" altLang="en-US" sz="1200">
-                <a:solidFill>
-                  <a:sysClr val="windowText" lastClr="000000"/>
-                </a:solidFill>
-                <a:latin typeface="Quicksand Light" panose="00000400000000000000" pitchFamily="2" charset="0"/>
-                <a:ea typeface="仿宋" panose="02010609060101010101" pitchFamily="49" charset="-122"/>
-              </a:rPr>
-              <a:t>网格 </a:t>
-            </a:r>
-            <a:r>
-              <a:rPr lang="en-US" altLang="zh-CN" sz="1200">
-                <a:solidFill>
-                  <a:sysClr val="windowText" lastClr="000000"/>
-                </a:solidFill>
-                <a:latin typeface="Quicksand Light" panose="00000400000000000000" pitchFamily="2" charset="0"/>
-                <a:ea typeface="仿宋" panose="02010609060101010101" pitchFamily="49" charset="-122"/>
-              </a:rPr>
-              <a:t>grid</a:t>
-            </a:r>
-            <a:endParaRPr lang="zh-CN" altLang="en-US" sz="1200">
-              <a:solidFill>
-                <a:sysClr val="windowText" lastClr="000000"/>
-              </a:solidFill>
-              <a:latin typeface="Quicksand Light" panose="00000400000000000000" pitchFamily="2" charset="0"/>
-              <a:ea typeface="仿宋" panose="02010609060101010101" pitchFamily="49" charset="-122"/>
-            </a:endParaRPr>
-          </a:p>
-        </p:txBody>
-      </p:sp>
-      <p:cxnSp>
-        <p:nvCxnSpPr>
-          <p:cNvPr id="22" name="连接符: 曲线 21">
-            <a:extLst>
-              <a:ext uri="{FF2B5EF4-FFF2-40B4-BE49-F238E27FC236}">
-                <a16:creationId xmlns:a16="http://schemas.microsoft.com/office/drawing/2014/main" id="{D99A8B47-6D7E-2EA4-8359-4BD4F43E0B70}"/>
-              </a:ext>
-            </a:extLst>
-          </p:cNvPr>
-          <p:cNvCxnSpPr>
-            <a:cxnSpLocks/>
-            <a:stCxn id="9" idx="3"/>
-            <a:endCxn id="7" idx="1"/>
-          </p:cNvCxnSpPr>
-          <p:nvPr/>
-        </p:nvCxnSpPr>
-        <p:spPr>
-          <a:xfrm>
-            <a:off x="5474575" y="3274613"/>
-            <a:ext cx="332126" cy="1271351"/>
-          </a:xfrm>
-          <a:prstGeom prst="curvedConnector3">
-            <a:avLst>
-              <a:gd name="adj1" fmla="val 50000"/>
-            </a:avLst>
-          </a:prstGeom>
-          <a:ln>
-            <a:solidFill>
-              <a:srgbClr val="EB3B5A"/>
-            </a:solidFill>
-          </a:ln>
-        </p:spPr>
-        <p:style>
-          <a:lnRef idx="1">
-            <a:schemeClr val="accent1"/>
-          </a:lnRef>
-          <a:fillRef idx="0">
-            <a:schemeClr val="accent1"/>
-          </a:fillRef>
-          <a:effectRef idx="0">
-            <a:schemeClr val="accent1"/>
-          </a:effectRef>
-          <a:fontRef idx="minor">
-            <a:schemeClr val="tx1"/>
-          </a:fontRef>
-        </p:style>
-      </p:cxnSp>
-      <p:cxnSp>
-        <p:nvCxnSpPr>
-          <p:cNvPr id="26" name="连接符: 曲线 25">
-            <a:extLst>
-              <a:ext uri="{FF2B5EF4-FFF2-40B4-BE49-F238E27FC236}">
-                <a16:creationId xmlns:a16="http://schemas.microsoft.com/office/drawing/2014/main" id="{46C1E541-71B5-21B2-7273-4EAC0DC70F03}"/>
-              </a:ext>
-            </a:extLst>
-          </p:cNvPr>
-          <p:cNvCxnSpPr>
-            <a:cxnSpLocks/>
-            <a:stCxn id="8" idx="1"/>
-            <a:endCxn id="2" idx="3"/>
-          </p:cNvCxnSpPr>
-          <p:nvPr/>
-        </p:nvCxnSpPr>
-        <p:spPr>
-          <a:xfrm rot="10800000">
-            <a:off x="4062449" y="3274613"/>
-            <a:ext cx="332126" cy="1147136"/>
-          </a:xfrm>
-          <a:prstGeom prst="curvedConnector3">
-            <a:avLst>
-              <a:gd name="adj1" fmla="val 50000"/>
-            </a:avLst>
-          </a:prstGeom>
-          <a:ln>
-            <a:solidFill>
-              <a:srgbClr val="3DC1D3"/>
-            </a:solidFill>
-          </a:ln>
-        </p:spPr>
-        <p:style>
-          <a:lnRef idx="1">
-            <a:schemeClr val="accent1"/>
-          </a:lnRef>
-          <a:fillRef idx="0">
-            <a:schemeClr val="accent1"/>
-          </a:fillRef>
-          <a:effectRef idx="0">
-            <a:schemeClr val="accent1"/>
-          </a:effectRef>
-          <a:fontRef idx="minor">
-            <a:schemeClr val="tx1"/>
-          </a:fontRef>
-        </p:style>
-      </p:cxnSp>
-      <p:sp>
-        <p:nvSpPr>
-          <p:cNvPr id="31" name="矩形: 圆角 30">
-            <a:extLst>
-              <a:ext uri="{FF2B5EF4-FFF2-40B4-BE49-F238E27FC236}">
-                <a16:creationId xmlns:a16="http://schemas.microsoft.com/office/drawing/2014/main" id="{E8C9255D-9B6B-1495-9667-75E062A30160}"/>
-              </a:ext>
-            </a:extLst>
-          </p:cNvPr>
-          <p:cNvSpPr/>
-          <p:nvPr/>
-        </p:nvSpPr>
-        <p:spPr>
-          <a:xfrm>
-            <a:off x="4394575" y="5388885"/>
-            <a:ext cx="1080000" cy="360000"/>
-          </a:xfrm>
-          <a:prstGeom prst="roundRect">
-            <a:avLst/>
-          </a:prstGeom>
-          <a:solidFill>
-            <a:schemeClr val="accent6">
-              <a:lumMod val="60000"/>
-              <a:lumOff val="40000"/>
-            </a:schemeClr>
-          </a:solidFill>
-          <a:ln w="12700">
-            <a:noFill/>
-          </a:ln>
-        </p:spPr>
-        <p:style>
-          <a:lnRef idx="2">
-            <a:schemeClr val="accent1">
-              <a:shade val="15000"/>
-            </a:schemeClr>
-          </a:lnRef>
-          <a:fillRef idx="1">
-            <a:schemeClr val="accent1"/>
-          </a:fillRef>
-          <a:effectRef idx="0">
-            <a:schemeClr val="accent1"/>
-          </a:effectRef>
-          <a:fontRef idx="minor">
-            <a:schemeClr val="lt1"/>
-          </a:fontRef>
-        </p:style>
-        <p:txBody>
-          <a:bodyPr rtlCol="0" anchor="ctr"/>
-          <a:lstStyle/>
-          <a:p>
-            <a:pPr algn="ctr"/>
-            <a:r>
-              <a:rPr lang="zh-CN" altLang="en-US" sz="1200">
-                <a:latin typeface="Quicksand Light" panose="00000400000000000000" pitchFamily="2" charset="0"/>
-                <a:ea typeface="仿宋" panose="02010609060101010101" pitchFamily="49" charset="-122"/>
-              </a:rPr>
-              <a:t>导航</a:t>
-            </a:r>
-          </a:p>
-        </p:txBody>
-      </p:sp>
-      <p:cxnSp>
-        <p:nvCxnSpPr>
-          <p:cNvPr id="32" name="连接符: 曲线 31">
-            <a:extLst>
-              <a:ext uri="{FF2B5EF4-FFF2-40B4-BE49-F238E27FC236}">
-                <a16:creationId xmlns:a16="http://schemas.microsoft.com/office/drawing/2014/main" id="{77355C97-960E-5F33-1A9D-C89E64984730}"/>
-              </a:ext>
-            </a:extLst>
-          </p:cNvPr>
-          <p:cNvCxnSpPr>
-            <a:cxnSpLocks/>
-            <a:stCxn id="31" idx="1"/>
-            <a:endCxn id="2" idx="3"/>
-          </p:cNvCxnSpPr>
-          <p:nvPr/>
-        </p:nvCxnSpPr>
-        <p:spPr>
-          <a:xfrm rot="10800000">
-            <a:off x="4062449" y="3274613"/>
-            <a:ext cx="332126" cy="2294272"/>
-          </a:xfrm>
-          <a:prstGeom prst="curvedConnector3">
-            <a:avLst>
-              <a:gd name="adj1" fmla="val 50000"/>
-            </a:avLst>
-          </a:prstGeom>
-          <a:ln>
-            <a:solidFill>
-              <a:srgbClr val="A9D18E"/>
-            </a:solidFill>
-          </a:ln>
-        </p:spPr>
-        <p:style>
-          <a:lnRef idx="1">
-            <a:schemeClr val="accent1"/>
-          </a:lnRef>
-          <a:fillRef idx="0">
-            <a:schemeClr val="accent1"/>
-          </a:fillRef>
-          <a:effectRef idx="0">
-            <a:schemeClr val="accent1"/>
-          </a:effectRef>
-          <a:fontRef idx="minor">
-            <a:schemeClr val="tx1"/>
-          </a:fontRef>
-        </p:style>
-      </p:cxnSp>
-      <p:sp>
-        <p:nvSpPr>
-          <p:cNvPr id="4" name="矩形: 圆角 3">
-            <a:extLst>
-              <a:ext uri="{FF2B5EF4-FFF2-40B4-BE49-F238E27FC236}">
-                <a16:creationId xmlns:a16="http://schemas.microsoft.com/office/drawing/2014/main" id="{F804F753-E482-E059-B0E0-437F4CB1E50C}"/>
-              </a:ext>
-            </a:extLst>
-          </p:cNvPr>
-          <p:cNvSpPr/>
-          <p:nvPr/>
-        </p:nvSpPr>
-        <p:spPr>
-          <a:xfrm>
-            <a:off x="5806701" y="5164768"/>
-            <a:ext cx="1620000" cy="360000"/>
-          </a:xfrm>
-          <a:prstGeom prst="roundRect">
-            <a:avLst/>
-          </a:prstGeom>
-          <a:noFill/>
-          <a:ln w="12700">
-            <a:solidFill>
-              <a:schemeClr val="accent6">
-                <a:lumMod val="60000"/>
-                <a:lumOff val="40000"/>
-              </a:schemeClr>
-            </a:solidFill>
-          </a:ln>
-        </p:spPr>
-        <p:style>
-          <a:lnRef idx="2">
-            <a:schemeClr val="accent1">
-              <a:shade val="15000"/>
-            </a:schemeClr>
-          </a:lnRef>
-          <a:fillRef idx="1">
-            <a:schemeClr val="accent1"/>
-          </a:fillRef>
-          <a:effectRef idx="0">
-            <a:schemeClr val="accent1"/>
-          </a:effectRef>
-          <a:fontRef idx="minor">
-            <a:schemeClr val="lt1"/>
-          </a:fontRef>
-        </p:style>
-        <p:txBody>
-          <a:bodyPr rtlCol="0" anchor="ctr"/>
-          <a:lstStyle/>
-          <a:p>
-            <a:pPr algn="ctr"/>
-            <a:r>
-              <a:rPr lang="zh-CN" altLang="en-US" sz="1200">
-                <a:solidFill>
-                  <a:sysClr val="windowText" lastClr="000000"/>
-                </a:solidFill>
-                <a:latin typeface="Quicksand Light" panose="00000400000000000000" pitchFamily="2" charset="0"/>
-                <a:ea typeface="仿宋" panose="02010609060101010101" pitchFamily="49" charset="-122"/>
-              </a:rPr>
-              <a:t>一个滚动视图</a:t>
-            </a:r>
-          </a:p>
-        </p:txBody>
-      </p:sp>
-      <p:sp>
-        <p:nvSpPr>
-          <p:cNvPr id="5" name="矩形: 圆角 4">
-            <a:extLst>
-              <a:ext uri="{FF2B5EF4-FFF2-40B4-BE49-F238E27FC236}">
-                <a16:creationId xmlns:a16="http://schemas.microsoft.com/office/drawing/2014/main" id="{2F218F90-1527-32EF-A4D6-D219CF5B8F16}"/>
-              </a:ext>
-            </a:extLst>
-          </p:cNvPr>
-          <p:cNvSpPr/>
-          <p:nvPr/>
-        </p:nvSpPr>
-        <p:spPr>
-          <a:xfrm>
-            <a:off x="5806701" y="5613003"/>
-            <a:ext cx="1620000" cy="360000"/>
-          </a:xfrm>
-          <a:prstGeom prst="roundRect">
-            <a:avLst/>
-          </a:prstGeom>
-          <a:noFill/>
-          <a:ln w="12700">
-            <a:solidFill>
-              <a:schemeClr val="accent6">
-                <a:lumMod val="60000"/>
-                <a:lumOff val="40000"/>
-              </a:schemeClr>
-            </a:solidFill>
-            <a:prstDash val="dash"/>
-          </a:ln>
-        </p:spPr>
-        <p:style>
-          <a:lnRef idx="2">
-            <a:schemeClr val="accent1">
-              <a:shade val="15000"/>
-            </a:schemeClr>
-          </a:lnRef>
-          <a:fillRef idx="1">
-            <a:schemeClr val="accent1"/>
-          </a:fillRef>
-          <a:effectRef idx="0">
-            <a:schemeClr val="accent1"/>
-          </a:effectRef>
-          <a:fontRef idx="minor">
-            <a:schemeClr val="lt1"/>
-          </a:fontRef>
-        </p:style>
-        <p:txBody>
-          <a:bodyPr rtlCol="0" anchor="ctr"/>
-          <a:lstStyle/>
-          <a:p>
-            <a:pPr algn="ctr"/>
-            <a:r>
-              <a:rPr lang="zh-CN" altLang="en-US" sz="1200">
-                <a:solidFill>
-                  <a:sysClr val="windowText" lastClr="000000"/>
-                </a:solidFill>
-                <a:latin typeface="Quicksand Light" panose="00000400000000000000" pitchFamily="2" charset="0"/>
-                <a:ea typeface="仿宋" panose="02010609060101010101" pitchFamily="49" charset="-122"/>
-              </a:rPr>
-              <a:t>二个滚动视图</a:t>
-            </a:r>
-          </a:p>
-        </p:txBody>
-      </p:sp>
-      <p:cxnSp>
-        <p:nvCxnSpPr>
-          <p:cNvPr id="6" name="连接符: 曲线 5">
-            <a:extLst>
-              <a:ext uri="{FF2B5EF4-FFF2-40B4-BE49-F238E27FC236}">
-                <a16:creationId xmlns:a16="http://schemas.microsoft.com/office/drawing/2014/main" id="{A07E7128-4DE2-E2DD-961D-C1575C1BBE3A}"/>
-              </a:ext>
-            </a:extLst>
-          </p:cNvPr>
-          <p:cNvCxnSpPr>
-            <a:cxnSpLocks/>
-            <a:stCxn id="31" idx="3"/>
-            <a:endCxn id="4" idx="1"/>
-          </p:cNvCxnSpPr>
-          <p:nvPr/>
-        </p:nvCxnSpPr>
-        <p:spPr>
-          <a:xfrm flipV="1">
-            <a:off x="5474575" y="5344768"/>
-            <a:ext cx="332126" cy="224117"/>
-          </a:xfrm>
-          <a:prstGeom prst="curvedConnector3">
-            <a:avLst>
-              <a:gd name="adj1" fmla="val 50000"/>
-            </a:avLst>
-          </a:prstGeom>
-          <a:ln>
-            <a:solidFill>
-              <a:schemeClr val="accent6">
-                <a:lumMod val="60000"/>
-                <a:lumOff val="40000"/>
-              </a:schemeClr>
-            </a:solidFill>
-          </a:ln>
-        </p:spPr>
-        <p:style>
-          <a:lnRef idx="1">
-            <a:schemeClr val="accent1"/>
-          </a:lnRef>
-          <a:fillRef idx="0">
-            <a:schemeClr val="accent1"/>
-          </a:fillRef>
-          <a:effectRef idx="0">
-            <a:schemeClr val="accent1"/>
-          </a:effectRef>
-          <a:fontRef idx="minor">
-            <a:schemeClr val="tx1"/>
-          </a:fontRef>
-        </p:style>
-      </p:cxnSp>
-      <p:cxnSp>
-        <p:nvCxnSpPr>
-          <p:cNvPr id="12" name="连接符: 曲线 11">
-            <a:extLst>
-              <a:ext uri="{FF2B5EF4-FFF2-40B4-BE49-F238E27FC236}">
-                <a16:creationId xmlns:a16="http://schemas.microsoft.com/office/drawing/2014/main" id="{5FD7AEAF-CD97-C450-BBC1-2641DC43007D}"/>
-              </a:ext>
-            </a:extLst>
-          </p:cNvPr>
-          <p:cNvCxnSpPr>
-            <a:cxnSpLocks/>
-            <a:stCxn id="31" idx="3"/>
-            <a:endCxn id="5" idx="1"/>
-          </p:cNvCxnSpPr>
-          <p:nvPr/>
-        </p:nvCxnSpPr>
-        <p:spPr>
-          <a:xfrm>
-            <a:off x="5474575" y="5568885"/>
-            <a:ext cx="332126" cy="224118"/>
-          </a:xfrm>
-          <a:prstGeom prst="curvedConnector3">
-            <a:avLst>
-              <a:gd name="adj1" fmla="val 50000"/>
-            </a:avLst>
-          </a:prstGeom>
-          <a:ln>
-            <a:solidFill>
-              <a:schemeClr val="accent6">
-                <a:lumMod val="60000"/>
-                <a:lumOff val="40000"/>
-              </a:schemeClr>
-            </a:solidFill>
-          </a:ln>
-        </p:spPr>
-        <p:style>
-          <a:lnRef idx="1">
-            <a:schemeClr val="accent1"/>
-          </a:lnRef>
-          <a:fillRef idx="0">
-            <a:schemeClr val="accent1"/>
-          </a:fillRef>
-          <a:effectRef idx="0">
-            <a:schemeClr val="accent1"/>
-          </a:effectRef>
-          <a:fontRef idx="minor">
-            <a:schemeClr val="tx1"/>
-          </a:fontRef>
-        </p:style>
-      </p:cxnSp>
-      <p:sp>
-        <p:nvSpPr>
-          <p:cNvPr id="7" name="矩形: 圆角 6">
-            <a:extLst>
-              <a:ext uri="{FF2B5EF4-FFF2-40B4-BE49-F238E27FC236}">
-                <a16:creationId xmlns:a16="http://schemas.microsoft.com/office/drawing/2014/main" id="{383E7043-36AC-CBD4-DF24-A727B7D0B0BD}"/>
-              </a:ext>
-            </a:extLst>
-          </p:cNvPr>
-          <p:cNvSpPr/>
-          <p:nvPr/>
-        </p:nvSpPr>
-        <p:spPr>
-          <a:xfrm>
-            <a:off x="5806701" y="4365964"/>
-            <a:ext cx="1620000" cy="360000"/>
-          </a:xfrm>
-          <a:prstGeom prst="roundRect">
-            <a:avLst/>
-          </a:prstGeom>
-          <a:noFill/>
-          <a:ln w="12700">
-            <a:solidFill>
-              <a:schemeClr val="bg1">
-                <a:lumMod val="50000"/>
-              </a:schemeClr>
-            </a:solidFill>
-            <a:prstDash val="dash"/>
-          </a:ln>
-        </p:spPr>
-        <p:style>
-          <a:lnRef idx="2">
-            <a:schemeClr val="accent1">
-              <a:shade val="15000"/>
-            </a:schemeClr>
-          </a:lnRef>
-          <a:fillRef idx="1">
-            <a:schemeClr val="accent1"/>
-          </a:fillRef>
-          <a:effectRef idx="0">
-            <a:schemeClr val="accent1"/>
-          </a:effectRef>
-          <a:fontRef idx="minor">
-            <a:schemeClr val="lt1"/>
-          </a:fontRef>
-        </p:style>
-        <p:txBody>
-          <a:bodyPr rtlCol="0" anchor="ctr"/>
-          <a:lstStyle/>
-          <a:p>
-            <a:pPr algn="ctr"/>
-            <a:r>
-              <a:rPr lang="zh-CN" altLang="en-US" sz="1200">
-                <a:solidFill>
-                  <a:sysClr val="windowText" lastClr="000000"/>
-                </a:solidFill>
-                <a:latin typeface="Quicksand Light" panose="00000400000000000000" pitchFamily="2" charset="0"/>
-                <a:ea typeface="仿宋" panose="02010609060101010101" pitchFamily="49" charset="-122"/>
-              </a:rPr>
-              <a:t>浮动 </a:t>
-            </a:r>
-            <a:r>
-              <a:rPr lang="en-US" altLang="zh-CN" sz="1200">
-                <a:solidFill>
-                  <a:sysClr val="windowText" lastClr="000000"/>
-                </a:solidFill>
-                <a:latin typeface="Quicksand Light" panose="00000400000000000000" pitchFamily="2" charset="0"/>
-                <a:ea typeface="仿宋" panose="02010609060101010101" pitchFamily="49" charset="-122"/>
-              </a:rPr>
-              <a:t>float</a:t>
-            </a:r>
-            <a:endParaRPr lang="zh-CN" altLang="en-US" sz="1200">
-              <a:solidFill>
-                <a:sysClr val="windowText" lastClr="000000"/>
-              </a:solidFill>
-              <a:latin typeface="Quicksand Light" panose="00000400000000000000" pitchFamily="2" charset="0"/>
-              <a:ea typeface="仿宋" panose="02010609060101010101" pitchFamily="49" charset="-122"/>
-            </a:endParaRPr>
-          </a:p>
-        </p:txBody>
-      </p:sp>
+      <p:pic>
+        <p:nvPicPr>
+          <p:cNvPr id="3" name="图片 2">
+            <a:extLst>
+              <a:ext uri="{FF2B5EF4-FFF2-40B4-BE49-F238E27FC236}">
+                <a16:creationId xmlns:a16="http://schemas.microsoft.com/office/drawing/2014/main" id="{7ECC09FE-D9D2-2E76-0948-E1F27A08CD34}"/>
+              </a:ext>
+            </a:extLst>
+          </p:cNvPr>
+          <p:cNvPicPr>
+            <a:picLocks noChangeAspect="1"/>
+          </p:cNvPicPr>
+          <p:nvPr/>
+        </p:nvPicPr>
+        <p:blipFill>
+          <a:blip r:embed="rId2"/>
+          <a:stretch>
+            <a:fillRect/>
+          </a:stretch>
+        </p:blipFill>
+        <p:spPr>
+          <a:xfrm>
+            <a:off x="5043340" y="1842866"/>
+            <a:ext cx="2105319" cy="3172268"/>
+          </a:xfrm>
+          <a:prstGeom prst="rect">
+            <a:avLst/>
+          </a:prstGeom>
+        </p:spPr>
+      </p:pic>
     </p:spTree>
     <p:extLst>
       <p:ext uri="{BB962C8B-B14F-4D97-AF65-F5344CB8AC3E}">
-        <p14:creationId xmlns:p14="http://schemas.microsoft.com/office/powerpoint/2010/main" val="2483548129"/>
+        <p14:creationId xmlns:p14="http://schemas.microsoft.com/office/powerpoint/2010/main" val="2672122669"/>
       </p:ext>
     </p:extLst>
   </p:cSld>
@@ -26378,40 +25471,383 @@
           <a:chExt cx="0" cy="0"/>
         </a:xfrm>
       </p:grpSpPr>
-      <p:pic>
-        <p:nvPicPr>
-          <p:cNvPr id="3" name="图片 2">
-            <a:extLst>
-              <a:ext uri="{FF2B5EF4-FFF2-40B4-BE49-F238E27FC236}">
-                <a16:creationId xmlns:a16="http://schemas.microsoft.com/office/drawing/2014/main" id="{7ECC09FE-D9D2-2E76-0948-E1F27A08CD34}"/>
-              </a:ext>
-            </a:extLst>
-          </p:cNvPr>
-          <p:cNvPicPr>
-            <a:picLocks noChangeAspect="1"/>
-          </p:cNvPicPr>
-          <p:nvPr/>
-        </p:nvPicPr>
-        <p:blipFill>
-          <a:blip r:embed="rId2"/>
-          <a:stretch>
-            <a:fillRect/>
-          </a:stretch>
-        </p:blipFill>
-        <p:spPr>
-          <a:xfrm>
-            <a:off x="5043340" y="1842866"/>
-            <a:ext cx="2105319" cy="3172268"/>
+      <p:sp>
+        <p:nvSpPr>
+          <p:cNvPr id="2" name="矩形: 圆角 1">
+            <a:extLst>
+              <a:ext uri="{FF2B5EF4-FFF2-40B4-BE49-F238E27FC236}">
+                <a16:creationId xmlns:a16="http://schemas.microsoft.com/office/drawing/2014/main" id="{DE06BA0C-6283-91C4-F4BA-E09E7F3139E7}"/>
+              </a:ext>
+            </a:extLst>
+          </p:cNvPr>
+          <p:cNvSpPr/>
+          <p:nvPr/>
+        </p:nvSpPr>
+        <p:spPr>
+          <a:xfrm>
+            <a:off x="3681691" y="2836100"/>
+            <a:ext cx="648000" cy="216000"/>
+          </a:xfrm>
+          <a:prstGeom prst="roundRect">
+            <a:avLst/>
+          </a:prstGeom>
+          <a:noFill/>
+          <a:ln w="12700">
+            <a:noFill/>
+          </a:ln>
+        </p:spPr>
+        <p:style>
+          <a:lnRef idx="2">
+            <a:schemeClr val="accent1">
+              <a:shade val="15000"/>
+            </a:schemeClr>
+          </a:lnRef>
+          <a:fillRef idx="1">
+            <a:schemeClr val="accent1"/>
+          </a:fillRef>
+          <a:effectRef idx="0">
+            <a:schemeClr val="accent1"/>
+          </a:effectRef>
+          <a:fontRef idx="minor">
+            <a:schemeClr val="lt1"/>
+          </a:fontRef>
+        </p:style>
+        <p:txBody>
+          <a:bodyPr rtlCol="0" anchor="ctr"/>
+          <a:lstStyle/>
+          <a:p>
+            <a:pPr algn="ctr"/>
+            <a:r>
+              <a:rPr lang="en-US" altLang="zh-CN" sz="800">
+                <a:solidFill>
+                  <a:sysClr val="windowText" lastClr="000000"/>
+                </a:solidFill>
+                <a:latin typeface="Quicksand Medium" panose="00000600000000000000" pitchFamily="2" charset="0"/>
+              </a:rPr>
+              <a:t>property</a:t>
+            </a:r>
+            <a:endParaRPr lang="zh-CN" altLang="en-US" sz="800">
+              <a:solidFill>
+                <a:sysClr val="windowText" lastClr="000000"/>
+              </a:solidFill>
+              <a:latin typeface="Quicksand Medium" panose="00000600000000000000" pitchFamily="2" charset="0"/>
+            </a:endParaRPr>
+          </a:p>
+        </p:txBody>
+      </p:sp>
+      <p:sp>
+        <p:nvSpPr>
+          <p:cNvPr id="3" name="文本框 2">
+            <a:extLst>
+              <a:ext uri="{FF2B5EF4-FFF2-40B4-BE49-F238E27FC236}">
+                <a16:creationId xmlns:a16="http://schemas.microsoft.com/office/drawing/2014/main" id="{1BF4DFA0-A45B-A793-3635-62C2BCB7B7E5}"/>
+              </a:ext>
+            </a:extLst>
+          </p:cNvPr>
+          <p:cNvSpPr txBox="1"/>
+          <p:nvPr/>
+        </p:nvSpPr>
+        <p:spPr>
+          <a:xfrm>
+            <a:off x="3733800" y="2152650"/>
+            <a:ext cx="1204176" cy="276999"/>
           </a:xfrm>
           <a:prstGeom prst="rect">
             <a:avLst/>
           </a:prstGeom>
-        </p:spPr>
-      </p:pic>
+          <a:noFill/>
+        </p:spPr>
+        <p:txBody>
+          <a:bodyPr wrap="none" rtlCol="0">
+            <a:spAutoFit/>
+          </a:bodyPr>
+          <a:lstStyle/>
+          <a:p>
+            <a:r>
+              <a:rPr lang="en-US" altLang="zh-CN" sz="1200">
+                <a:latin typeface="Quicksand Medium" panose="00000600000000000000" pitchFamily="2" charset="0"/>
+              </a:rPr>
+              <a:t>width : 1024px</a:t>
+            </a:r>
+            <a:endParaRPr lang="zh-CN" altLang="en-US" sz="1200">
+              <a:latin typeface="Quicksand Medium" panose="00000600000000000000" pitchFamily="2" charset="0"/>
+            </a:endParaRPr>
+          </a:p>
+        </p:txBody>
+      </p:sp>
+      <p:sp>
+        <p:nvSpPr>
+          <p:cNvPr id="4" name="矩形: 圆角 3">
+            <a:extLst>
+              <a:ext uri="{FF2B5EF4-FFF2-40B4-BE49-F238E27FC236}">
+                <a16:creationId xmlns:a16="http://schemas.microsoft.com/office/drawing/2014/main" id="{C7735414-9923-6A1B-5E08-61B1E5335642}"/>
+              </a:ext>
+            </a:extLst>
+          </p:cNvPr>
+          <p:cNvSpPr/>
+          <p:nvPr/>
+        </p:nvSpPr>
+        <p:spPr>
+          <a:xfrm>
+            <a:off x="4265891" y="2836100"/>
+            <a:ext cx="504000" cy="216000"/>
+          </a:xfrm>
+          <a:prstGeom prst="roundRect">
+            <a:avLst/>
+          </a:prstGeom>
+          <a:noFill/>
+          <a:ln w="12700">
+            <a:noFill/>
+          </a:ln>
+        </p:spPr>
+        <p:style>
+          <a:lnRef idx="2">
+            <a:schemeClr val="accent1">
+              <a:shade val="15000"/>
+            </a:schemeClr>
+          </a:lnRef>
+          <a:fillRef idx="1">
+            <a:schemeClr val="accent1"/>
+          </a:fillRef>
+          <a:effectRef idx="0">
+            <a:schemeClr val="accent1"/>
+          </a:effectRef>
+          <a:fontRef idx="minor">
+            <a:schemeClr val="lt1"/>
+          </a:fontRef>
+        </p:style>
+        <p:txBody>
+          <a:bodyPr rtlCol="0" anchor="ctr"/>
+          <a:lstStyle/>
+          <a:p>
+            <a:pPr algn="ctr"/>
+            <a:r>
+              <a:rPr lang="en-US" altLang="zh-CN" sz="800">
+                <a:solidFill>
+                  <a:sysClr val="windowText" lastClr="000000"/>
+                </a:solidFill>
+                <a:latin typeface="Quicksand Medium" panose="00000600000000000000" pitchFamily="2" charset="0"/>
+              </a:rPr>
+              <a:t>value</a:t>
+            </a:r>
+            <a:endParaRPr lang="zh-CN" altLang="en-US" sz="800">
+              <a:solidFill>
+                <a:sysClr val="windowText" lastClr="000000"/>
+              </a:solidFill>
+              <a:latin typeface="Quicksand Medium" panose="00000600000000000000" pitchFamily="2" charset="0"/>
+            </a:endParaRPr>
+          </a:p>
+        </p:txBody>
+      </p:sp>
+      <p:sp>
+        <p:nvSpPr>
+          <p:cNvPr id="5" name="矩形: 圆角 4">
+            <a:extLst>
+              <a:ext uri="{FF2B5EF4-FFF2-40B4-BE49-F238E27FC236}">
+                <a16:creationId xmlns:a16="http://schemas.microsoft.com/office/drawing/2014/main" id="{F7AAF0E5-DEEE-811D-1957-33B4BEA1BE4F}"/>
+              </a:ext>
+            </a:extLst>
+          </p:cNvPr>
+          <p:cNvSpPr/>
+          <p:nvPr/>
+        </p:nvSpPr>
+        <p:spPr>
+          <a:xfrm>
+            <a:off x="4513541" y="2836100"/>
+            <a:ext cx="504000" cy="216000"/>
+          </a:xfrm>
+          <a:prstGeom prst="roundRect">
+            <a:avLst/>
+          </a:prstGeom>
+          <a:noFill/>
+          <a:ln w="12700">
+            <a:noFill/>
+          </a:ln>
+        </p:spPr>
+        <p:style>
+          <a:lnRef idx="2">
+            <a:schemeClr val="accent1">
+              <a:shade val="15000"/>
+            </a:schemeClr>
+          </a:lnRef>
+          <a:fillRef idx="1">
+            <a:schemeClr val="accent1"/>
+          </a:fillRef>
+          <a:effectRef idx="0">
+            <a:schemeClr val="accent1"/>
+          </a:effectRef>
+          <a:fontRef idx="minor">
+            <a:schemeClr val="lt1"/>
+          </a:fontRef>
+        </p:style>
+        <p:txBody>
+          <a:bodyPr rtlCol="0" anchor="ctr"/>
+          <a:lstStyle/>
+          <a:p>
+            <a:pPr algn="ctr"/>
+            <a:r>
+              <a:rPr lang="en-US" altLang="zh-CN" sz="800">
+                <a:solidFill>
+                  <a:sysClr val="windowText" lastClr="000000"/>
+                </a:solidFill>
+                <a:latin typeface="Quicksand Medium" panose="00000600000000000000" pitchFamily="2" charset="0"/>
+              </a:rPr>
+              <a:t>unit</a:t>
+            </a:r>
+            <a:endParaRPr lang="zh-CN" altLang="en-US" sz="800">
+              <a:solidFill>
+                <a:sysClr val="windowText" lastClr="000000"/>
+              </a:solidFill>
+              <a:latin typeface="Quicksand Medium" panose="00000600000000000000" pitchFamily="2" charset="0"/>
+            </a:endParaRPr>
+          </a:p>
+        </p:txBody>
+      </p:sp>
+      <p:cxnSp>
+        <p:nvCxnSpPr>
+          <p:cNvPr id="9" name="直接箭头连接符 8">
+            <a:extLst>
+              <a:ext uri="{FF2B5EF4-FFF2-40B4-BE49-F238E27FC236}">
+                <a16:creationId xmlns:a16="http://schemas.microsoft.com/office/drawing/2014/main" id="{43AA0F72-759C-7EAB-A6C6-60FEE7FFD186}"/>
+              </a:ext>
+            </a:extLst>
+          </p:cNvPr>
+          <p:cNvCxnSpPr>
+            <a:cxnSpLocks/>
+          </p:cNvCxnSpPr>
+          <p:nvPr/>
+        </p:nvCxnSpPr>
+        <p:spPr>
+          <a:xfrm flipV="1">
+            <a:off x="4003541" y="2432050"/>
+            <a:ext cx="0" cy="360000"/>
+          </a:xfrm>
+          <a:prstGeom prst="straightConnector1">
+            <a:avLst/>
+          </a:prstGeom>
+          <a:ln>
+            <a:solidFill>
+              <a:schemeClr val="tx1">
+                <a:lumMod val="65000"/>
+                <a:lumOff val="35000"/>
+              </a:schemeClr>
+            </a:solidFill>
+            <a:tailEnd type="triangle"/>
+          </a:ln>
+        </p:spPr>
+        <p:style>
+          <a:lnRef idx="1">
+            <a:schemeClr val="accent1"/>
+          </a:lnRef>
+          <a:fillRef idx="0">
+            <a:schemeClr val="accent1"/>
+          </a:fillRef>
+          <a:effectRef idx="0">
+            <a:schemeClr val="accent1"/>
+          </a:effectRef>
+          <a:fontRef idx="minor">
+            <a:schemeClr val="tx1"/>
+          </a:fontRef>
+        </p:style>
+      </p:cxnSp>
+      <p:cxnSp>
+        <p:nvCxnSpPr>
+          <p:cNvPr id="10" name="直接箭头连接符 9">
+            <a:extLst>
+              <a:ext uri="{FF2B5EF4-FFF2-40B4-BE49-F238E27FC236}">
+                <a16:creationId xmlns:a16="http://schemas.microsoft.com/office/drawing/2014/main" id="{FA908F67-2343-A19C-6EA2-70D4CBB6210B}"/>
+              </a:ext>
+            </a:extLst>
+          </p:cNvPr>
+          <p:cNvCxnSpPr>
+            <a:cxnSpLocks/>
+          </p:cNvCxnSpPr>
+          <p:nvPr/>
+        </p:nvCxnSpPr>
+        <p:spPr>
+          <a:xfrm flipV="1">
+            <a:off x="4517891" y="2432050"/>
+            <a:ext cx="0" cy="360000"/>
+          </a:xfrm>
+          <a:prstGeom prst="straightConnector1">
+            <a:avLst/>
+          </a:prstGeom>
+          <a:ln>
+            <a:solidFill>
+              <a:schemeClr val="tx1">
+                <a:lumMod val="65000"/>
+                <a:lumOff val="35000"/>
+              </a:schemeClr>
+            </a:solidFill>
+            <a:tailEnd type="triangle"/>
+          </a:ln>
+        </p:spPr>
+        <p:style>
+          <a:lnRef idx="1">
+            <a:schemeClr val="accent1"/>
+          </a:lnRef>
+          <a:fillRef idx="0">
+            <a:schemeClr val="accent1"/>
+          </a:fillRef>
+          <a:effectRef idx="0">
+            <a:schemeClr val="accent1"/>
+          </a:effectRef>
+          <a:fontRef idx="minor">
+            <a:schemeClr val="tx1"/>
+          </a:fontRef>
+        </p:style>
+      </p:cxnSp>
+      <p:cxnSp>
+        <p:nvCxnSpPr>
+          <p:cNvPr id="11" name="直接箭头连接符 10">
+            <a:extLst>
+              <a:ext uri="{FF2B5EF4-FFF2-40B4-BE49-F238E27FC236}">
+                <a16:creationId xmlns:a16="http://schemas.microsoft.com/office/drawing/2014/main" id="{F2B6BAE4-E058-A8A3-0AAE-176FEB20EE1B}"/>
+              </a:ext>
+            </a:extLst>
+          </p:cNvPr>
+          <p:cNvCxnSpPr>
+            <a:cxnSpLocks/>
+          </p:cNvCxnSpPr>
+          <p:nvPr/>
+        </p:nvCxnSpPr>
+        <p:spPr>
+          <a:xfrm flipV="1">
+            <a:off x="4765541" y="2432050"/>
+            <a:ext cx="0" cy="360000"/>
+          </a:xfrm>
+          <a:prstGeom prst="straightConnector1">
+            <a:avLst/>
+          </a:prstGeom>
+          <a:ln>
+            <a:solidFill>
+              <a:schemeClr val="tx1">
+                <a:lumMod val="65000"/>
+                <a:lumOff val="35000"/>
+              </a:schemeClr>
+            </a:solidFill>
+            <a:tailEnd type="triangle"/>
+          </a:ln>
+        </p:spPr>
+        <p:style>
+          <a:lnRef idx="1">
+            <a:schemeClr val="accent1"/>
+          </a:lnRef>
+          <a:fillRef idx="0">
+            <a:schemeClr val="accent1"/>
+          </a:fillRef>
+          <a:effectRef idx="0">
+            <a:schemeClr val="accent1"/>
+          </a:effectRef>
+          <a:fontRef idx="minor">
+            <a:schemeClr val="tx1"/>
+          </a:fontRef>
+        </p:style>
+      </p:cxnSp>
     </p:spTree>
     <p:extLst>
       <p:ext uri="{BB962C8B-B14F-4D97-AF65-F5344CB8AC3E}">
-        <p14:creationId xmlns:p14="http://schemas.microsoft.com/office/powerpoint/2010/main" val="2672122669"/>
+        <p14:creationId xmlns:p14="http://schemas.microsoft.com/office/powerpoint/2010/main" val="979191356"/>
       </p:ext>
     </p:extLst>
   </p:cSld>
@@ -26551,409 +25987,6 @@
 </file>
 
 <file path=ppt/slides/slide30.xml><?xml version="1.0" encoding="utf-8"?>
-<p:sld xmlns:a="http://schemas.openxmlformats.org/drawingml/2006/main" xmlns:r="http://schemas.openxmlformats.org/officeDocument/2006/relationships" xmlns:p="http://schemas.openxmlformats.org/presentationml/2006/main">
-  <p:cSld>
-    <p:spTree>
-      <p:nvGrpSpPr>
-        <p:cNvPr id="1" name=""/>
-        <p:cNvGrpSpPr/>
-        <p:nvPr/>
-      </p:nvGrpSpPr>
-      <p:grpSpPr>
-        <a:xfrm>
-          <a:off x="0" y="0"/>
-          <a:ext cx="0" cy="0"/>
-          <a:chOff x="0" y="0"/>
-          <a:chExt cx="0" cy="0"/>
-        </a:xfrm>
-      </p:grpSpPr>
-      <p:sp>
-        <p:nvSpPr>
-          <p:cNvPr id="2" name="矩形: 圆角 1">
-            <a:extLst>
-              <a:ext uri="{FF2B5EF4-FFF2-40B4-BE49-F238E27FC236}">
-                <a16:creationId xmlns:a16="http://schemas.microsoft.com/office/drawing/2014/main" id="{DE06BA0C-6283-91C4-F4BA-E09E7F3139E7}"/>
-              </a:ext>
-            </a:extLst>
-          </p:cNvPr>
-          <p:cNvSpPr/>
-          <p:nvPr/>
-        </p:nvSpPr>
-        <p:spPr>
-          <a:xfrm>
-            <a:off x="3681691" y="2836100"/>
-            <a:ext cx="648000" cy="216000"/>
-          </a:xfrm>
-          <a:prstGeom prst="roundRect">
-            <a:avLst/>
-          </a:prstGeom>
-          <a:noFill/>
-          <a:ln w="12700">
-            <a:noFill/>
-          </a:ln>
-        </p:spPr>
-        <p:style>
-          <a:lnRef idx="2">
-            <a:schemeClr val="accent1">
-              <a:shade val="15000"/>
-            </a:schemeClr>
-          </a:lnRef>
-          <a:fillRef idx="1">
-            <a:schemeClr val="accent1"/>
-          </a:fillRef>
-          <a:effectRef idx="0">
-            <a:schemeClr val="accent1"/>
-          </a:effectRef>
-          <a:fontRef idx="minor">
-            <a:schemeClr val="lt1"/>
-          </a:fontRef>
-        </p:style>
-        <p:txBody>
-          <a:bodyPr rtlCol="0" anchor="ctr"/>
-          <a:lstStyle/>
-          <a:p>
-            <a:pPr algn="ctr"/>
-            <a:r>
-              <a:rPr lang="en-US" altLang="zh-CN" sz="800">
-                <a:solidFill>
-                  <a:sysClr val="windowText" lastClr="000000"/>
-                </a:solidFill>
-                <a:latin typeface="Quicksand Medium" panose="00000600000000000000" pitchFamily="2" charset="0"/>
-              </a:rPr>
-              <a:t>property</a:t>
-            </a:r>
-            <a:endParaRPr lang="zh-CN" altLang="en-US" sz="800">
-              <a:solidFill>
-                <a:sysClr val="windowText" lastClr="000000"/>
-              </a:solidFill>
-              <a:latin typeface="Quicksand Medium" panose="00000600000000000000" pitchFamily="2" charset="0"/>
-            </a:endParaRPr>
-          </a:p>
-        </p:txBody>
-      </p:sp>
-      <p:sp>
-        <p:nvSpPr>
-          <p:cNvPr id="3" name="文本框 2">
-            <a:extLst>
-              <a:ext uri="{FF2B5EF4-FFF2-40B4-BE49-F238E27FC236}">
-                <a16:creationId xmlns:a16="http://schemas.microsoft.com/office/drawing/2014/main" id="{1BF4DFA0-A45B-A793-3635-62C2BCB7B7E5}"/>
-              </a:ext>
-            </a:extLst>
-          </p:cNvPr>
-          <p:cNvSpPr txBox="1"/>
-          <p:nvPr/>
-        </p:nvSpPr>
-        <p:spPr>
-          <a:xfrm>
-            <a:off x="3733800" y="2152650"/>
-            <a:ext cx="1204176" cy="276999"/>
-          </a:xfrm>
-          <a:prstGeom prst="rect">
-            <a:avLst/>
-          </a:prstGeom>
-          <a:noFill/>
-        </p:spPr>
-        <p:txBody>
-          <a:bodyPr wrap="none" rtlCol="0">
-            <a:spAutoFit/>
-          </a:bodyPr>
-          <a:lstStyle/>
-          <a:p>
-            <a:r>
-              <a:rPr lang="en-US" altLang="zh-CN" sz="1200">
-                <a:latin typeface="Quicksand Medium" panose="00000600000000000000" pitchFamily="2" charset="0"/>
-              </a:rPr>
-              <a:t>width : 1024px</a:t>
-            </a:r>
-            <a:endParaRPr lang="zh-CN" altLang="en-US" sz="1200">
-              <a:latin typeface="Quicksand Medium" panose="00000600000000000000" pitchFamily="2" charset="0"/>
-            </a:endParaRPr>
-          </a:p>
-        </p:txBody>
-      </p:sp>
-      <p:sp>
-        <p:nvSpPr>
-          <p:cNvPr id="4" name="矩形: 圆角 3">
-            <a:extLst>
-              <a:ext uri="{FF2B5EF4-FFF2-40B4-BE49-F238E27FC236}">
-                <a16:creationId xmlns:a16="http://schemas.microsoft.com/office/drawing/2014/main" id="{C7735414-9923-6A1B-5E08-61B1E5335642}"/>
-              </a:ext>
-            </a:extLst>
-          </p:cNvPr>
-          <p:cNvSpPr/>
-          <p:nvPr/>
-        </p:nvSpPr>
-        <p:spPr>
-          <a:xfrm>
-            <a:off x="4265891" y="2836100"/>
-            <a:ext cx="504000" cy="216000"/>
-          </a:xfrm>
-          <a:prstGeom prst="roundRect">
-            <a:avLst/>
-          </a:prstGeom>
-          <a:noFill/>
-          <a:ln w="12700">
-            <a:noFill/>
-          </a:ln>
-        </p:spPr>
-        <p:style>
-          <a:lnRef idx="2">
-            <a:schemeClr val="accent1">
-              <a:shade val="15000"/>
-            </a:schemeClr>
-          </a:lnRef>
-          <a:fillRef idx="1">
-            <a:schemeClr val="accent1"/>
-          </a:fillRef>
-          <a:effectRef idx="0">
-            <a:schemeClr val="accent1"/>
-          </a:effectRef>
-          <a:fontRef idx="minor">
-            <a:schemeClr val="lt1"/>
-          </a:fontRef>
-        </p:style>
-        <p:txBody>
-          <a:bodyPr rtlCol="0" anchor="ctr"/>
-          <a:lstStyle/>
-          <a:p>
-            <a:pPr algn="ctr"/>
-            <a:r>
-              <a:rPr lang="en-US" altLang="zh-CN" sz="800">
-                <a:solidFill>
-                  <a:sysClr val="windowText" lastClr="000000"/>
-                </a:solidFill>
-                <a:latin typeface="Quicksand Medium" panose="00000600000000000000" pitchFamily="2" charset="0"/>
-              </a:rPr>
-              <a:t>value</a:t>
-            </a:r>
-            <a:endParaRPr lang="zh-CN" altLang="en-US" sz="800">
-              <a:solidFill>
-                <a:sysClr val="windowText" lastClr="000000"/>
-              </a:solidFill>
-              <a:latin typeface="Quicksand Medium" panose="00000600000000000000" pitchFamily="2" charset="0"/>
-            </a:endParaRPr>
-          </a:p>
-        </p:txBody>
-      </p:sp>
-      <p:sp>
-        <p:nvSpPr>
-          <p:cNvPr id="5" name="矩形: 圆角 4">
-            <a:extLst>
-              <a:ext uri="{FF2B5EF4-FFF2-40B4-BE49-F238E27FC236}">
-                <a16:creationId xmlns:a16="http://schemas.microsoft.com/office/drawing/2014/main" id="{F7AAF0E5-DEEE-811D-1957-33B4BEA1BE4F}"/>
-              </a:ext>
-            </a:extLst>
-          </p:cNvPr>
-          <p:cNvSpPr/>
-          <p:nvPr/>
-        </p:nvSpPr>
-        <p:spPr>
-          <a:xfrm>
-            <a:off x="4513541" y="2836100"/>
-            <a:ext cx="504000" cy="216000"/>
-          </a:xfrm>
-          <a:prstGeom prst="roundRect">
-            <a:avLst/>
-          </a:prstGeom>
-          <a:noFill/>
-          <a:ln w="12700">
-            <a:noFill/>
-          </a:ln>
-        </p:spPr>
-        <p:style>
-          <a:lnRef idx="2">
-            <a:schemeClr val="accent1">
-              <a:shade val="15000"/>
-            </a:schemeClr>
-          </a:lnRef>
-          <a:fillRef idx="1">
-            <a:schemeClr val="accent1"/>
-          </a:fillRef>
-          <a:effectRef idx="0">
-            <a:schemeClr val="accent1"/>
-          </a:effectRef>
-          <a:fontRef idx="minor">
-            <a:schemeClr val="lt1"/>
-          </a:fontRef>
-        </p:style>
-        <p:txBody>
-          <a:bodyPr rtlCol="0" anchor="ctr"/>
-          <a:lstStyle/>
-          <a:p>
-            <a:pPr algn="ctr"/>
-            <a:r>
-              <a:rPr lang="en-US" altLang="zh-CN" sz="800">
-                <a:solidFill>
-                  <a:sysClr val="windowText" lastClr="000000"/>
-                </a:solidFill>
-                <a:latin typeface="Quicksand Medium" panose="00000600000000000000" pitchFamily="2" charset="0"/>
-              </a:rPr>
-              <a:t>unit</a:t>
-            </a:r>
-            <a:endParaRPr lang="zh-CN" altLang="en-US" sz="800">
-              <a:solidFill>
-                <a:sysClr val="windowText" lastClr="000000"/>
-              </a:solidFill>
-              <a:latin typeface="Quicksand Medium" panose="00000600000000000000" pitchFamily="2" charset="0"/>
-            </a:endParaRPr>
-          </a:p>
-        </p:txBody>
-      </p:sp>
-      <p:cxnSp>
-        <p:nvCxnSpPr>
-          <p:cNvPr id="9" name="直接箭头连接符 8">
-            <a:extLst>
-              <a:ext uri="{FF2B5EF4-FFF2-40B4-BE49-F238E27FC236}">
-                <a16:creationId xmlns:a16="http://schemas.microsoft.com/office/drawing/2014/main" id="{43AA0F72-759C-7EAB-A6C6-60FEE7FFD186}"/>
-              </a:ext>
-            </a:extLst>
-          </p:cNvPr>
-          <p:cNvCxnSpPr>
-            <a:cxnSpLocks/>
-          </p:cNvCxnSpPr>
-          <p:nvPr/>
-        </p:nvCxnSpPr>
-        <p:spPr>
-          <a:xfrm flipV="1">
-            <a:off x="4003541" y="2432050"/>
-            <a:ext cx="0" cy="360000"/>
-          </a:xfrm>
-          <a:prstGeom prst="straightConnector1">
-            <a:avLst/>
-          </a:prstGeom>
-          <a:ln>
-            <a:solidFill>
-              <a:schemeClr val="tx1">
-                <a:lumMod val="65000"/>
-                <a:lumOff val="35000"/>
-              </a:schemeClr>
-            </a:solidFill>
-            <a:tailEnd type="triangle"/>
-          </a:ln>
-        </p:spPr>
-        <p:style>
-          <a:lnRef idx="1">
-            <a:schemeClr val="accent1"/>
-          </a:lnRef>
-          <a:fillRef idx="0">
-            <a:schemeClr val="accent1"/>
-          </a:fillRef>
-          <a:effectRef idx="0">
-            <a:schemeClr val="accent1"/>
-          </a:effectRef>
-          <a:fontRef idx="minor">
-            <a:schemeClr val="tx1"/>
-          </a:fontRef>
-        </p:style>
-      </p:cxnSp>
-      <p:cxnSp>
-        <p:nvCxnSpPr>
-          <p:cNvPr id="10" name="直接箭头连接符 9">
-            <a:extLst>
-              <a:ext uri="{FF2B5EF4-FFF2-40B4-BE49-F238E27FC236}">
-                <a16:creationId xmlns:a16="http://schemas.microsoft.com/office/drawing/2014/main" id="{FA908F67-2343-A19C-6EA2-70D4CBB6210B}"/>
-              </a:ext>
-            </a:extLst>
-          </p:cNvPr>
-          <p:cNvCxnSpPr>
-            <a:cxnSpLocks/>
-          </p:cNvCxnSpPr>
-          <p:nvPr/>
-        </p:nvCxnSpPr>
-        <p:spPr>
-          <a:xfrm flipV="1">
-            <a:off x="4517891" y="2432050"/>
-            <a:ext cx="0" cy="360000"/>
-          </a:xfrm>
-          <a:prstGeom prst="straightConnector1">
-            <a:avLst/>
-          </a:prstGeom>
-          <a:ln>
-            <a:solidFill>
-              <a:schemeClr val="tx1">
-                <a:lumMod val="65000"/>
-                <a:lumOff val="35000"/>
-              </a:schemeClr>
-            </a:solidFill>
-            <a:tailEnd type="triangle"/>
-          </a:ln>
-        </p:spPr>
-        <p:style>
-          <a:lnRef idx="1">
-            <a:schemeClr val="accent1"/>
-          </a:lnRef>
-          <a:fillRef idx="0">
-            <a:schemeClr val="accent1"/>
-          </a:fillRef>
-          <a:effectRef idx="0">
-            <a:schemeClr val="accent1"/>
-          </a:effectRef>
-          <a:fontRef idx="minor">
-            <a:schemeClr val="tx1"/>
-          </a:fontRef>
-        </p:style>
-      </p:cxnSp>
-      <p:cxnSp>
-        <p:nvCxnSpPr>
-          <p:cNvPr id="11" name="直接箭头连接符 10">
-            <a:extLst>
-              <a:ext uri="{FF2B5EF4-FFF2-40B4-BE49-F238E27FC236}">
-                <a16:creationId xmlns:a16="http://schemas.microsoft.com/office/drawing/2014/main" id="{F2B6BAE4-E058-A8A3-0AAE-176FEB20EE1B}"/>
-              </a:ext>
-            </a:extLst>
-          </p:cNvPr>
-          <p:cNvCxnSpPr>
-            <a:cxnSpLocks/>
-          </p:cNvCxnSpPr>
-          <p:nvPr/>
-        </p:nvCxnSpPr>
-        <p:spPr>
-          <a:xfrm flipV="1">
-            <a:off x="4765541" y="2432050"/>
-            <a:ext cx="0" cy="360000"/>
-          </a:xfrm>
-          <a:prstGeom prst="straightConnector1">
-            <a:avLst/>
-          </a:prstGeom>
-          <a:ln>
-            <a:solidFill>
-              <a:schemeClr val="tx1">
-                <a:lumMod val="65000"/>
-                <a:lumOff val="35000"/>
-              </a:schemeClr>
-            </a:solidFill>
-            <a:tailEnd type="triangle"/>
-          </a:ln>
-        </p:spPr>
-        <p:style>
-          <a:lnRef idx="1">
-            <a:schemeClr val="accent1"/>
-          </a:lnRef>
-          <a:fillRef idx="0">
-            <a:schemeClr val="accent1"/>
-          </a:fillRef>
-          <a:effectRef idx="0">
-            <a:schemeClr val="accent1"/>
-          </a:effectRef>
-          <a:fontRef idx="minor">
-            <a:schemeClr val="tx1"/>
-          </a:fontRef>
-        </p:style>
-      </p:cxnSp>
-    </p:spTree>
-    <p:extLst>
-      <p:ext uri="{BB962C8B-B14F-4D97-AF65-F5344CB8AC3E}">
-        <p14:creationId xmlns:p14="http://schemas.microsoft.com/office/powerpoint/2010/main" val="979191356"/>
-      </p:ext>
-    </p:extLst>
-  </p:cSld>
-  <p:clrMapOvr>
-    <a:masterClrMapping/>
-  </p:clrMapOvr>
-</p:sld>
-</file>
-
-<file path=ppt/slides/slide31.xml><?xml version="1.0" encoding="utf-8"?>
 <p:sld xmlns:a="http://schemas.openxmlformats.org/drawingml/2006/main" xmlns:r="http://schemas.openxmlformats.org/officeDocument/2006/relationships" xmlns:p="http://schemas.openxmlformats.org/presentationml/2006/main">
   <p:cSld>
     <p:spTree>
@@ -30910,1048 +29943,6 @@
   <p:cSld>
     <p:spTree>
       <p:nvGrpSpPr>
-        <p:cNvPr id="1" name="">
-          <a:extLst>
-            <a:ext uri="{FF2B5EF4-FFF2-40B4-BE49-F238E27FC236}">
-              <a16:creationId xmlns:a16="http://schemas.microsoft.com/office/drawing/2014/main" id="{305ACE99-59B0-D2A0-7D0D-F12E4D9ED934}"/>
-            </a:ext>
-          </a:extLst>
-        </p:cNvPr>
-        <p:cNvGrpSpPr/>
-        <p:nvPr/>
-      </p:nvGrpSpPr>
-      <p:grpSpPr>
-        <a:xfrm>
-          <a:off x="0" y="0"/>
-          <a:ext cx="0" cy="0"/>
-          <a:chOff x="0" y="0"/>
-          <a:chExt cx="0" cy="0"/>
-        </a:xfrm>
-      </p:grpSpPr>
-      <p:sp>
-        <p:nvSpPr>
-          <p:cNvPr id="2" name="矩形: 圆角 1">
-            <a:extLst>
-              <a:ext uri="{FF2B5EF4-FFF2-40B4-BE49-F238E27FC236}">
-                <a16:creationId xmlns:a16="http://schemas.microsoft.com/office/drawing/2014/main" id="{EA1617AA-3BC5-A6C2-7966-463E2BC3AC46}"/>
-              </a:ext>
-            </a:extLst>
-          </p:cNvPr>
-          <p:cNvSpPr/>
-          <p:nvPr/>
-        </p:nvSpPr>
-        <p:spPr>
-          <a:xfrm>
-            <a:off x="3307693" y="2719832"/>
-            <a:ext cx="1440000" cy="360000"/>
-          </a:xfrm>
-          <a:prstGeom prst="roundRect">
-            <a:avLst/>
-          </a:prstGeom>
-          <a:solidFill>
-            <a:schemeClr val="accent5">
-              <a:lumMod val="75000"/>
-            </a:schemeClr>
-          </a:solidFill>
-          <a:ln w="12700">
-            <a:noFill/>
-          </a:ln>
-        </p:spPr>
-        <p:style>
-          <a:lnRef idx="2">
-            <a:schemeClr val="accent1">
-              <a:shade val="15000"/>
-            </a:schemeClr>
-          </a:lnRef>
-          <a:fillRef idx="1">
-            <a:schemeClr val="accent1"/>
-          </a:fillRef>
-          <a:effectRef idx="0">
-            <a:schemeClr val="accent1"/>
-          </a:effectRef>
-          <a:fontRef idx="minor">
-            <a:schemeClr val="lt1"/>
-          </a:fontRef>
-        </p:style>
-        <p:txBody>
-          <a:bodyPr rtlCol="0" anchor="ctr"/>
-          <a:lstStyle/>
-          <a:p>
-            <a:pPr algn="ctr"/>
-            <a:r>
-              <a:rPr lang="en-US" altLang="zh-CN" sz="1200" dirty="0">
-                <a:latin typeface="Quicksand Light" panose="00000400000000000000" pitchFamily="2" charset="0"/>
-              </a:rPr>
-              <a:t>Port</a:t>
-            </a:r>
-            <a:endParaRPr lang="zh-CN" altLang="en-US" sz="1200" dirty="0">
-              <a:latin typeface="Quicksand Light" panose="00000400000000000000" pitchFamily="2" charset="0"/>
-            </a:endParaRPr>
-          </a:p>
-        </p:txBody>
-      </p:sp>
-      <p:sp>
-        <p:nvSpPr>
-          <p:cNvPr id="3" name="矩形: 圆角 2">
-            <a:extLst>
-              <a:ext uri="{FF2B5EF4-FFF2-40B4-BE49-F238E27FC236}">
-                <a16:creationId xmlns:a16="http://schemas.microsoft.com/office/drawing/2014/main" id="{9D801BA9-9C6A-24D0-E174-E3604316CB49}"/>
-              </a:ext>
-            </a:extLst>
-          </p:cNvPr>
-          <p:cNvSpPr/>
-          <p:nvPr/>
-        </p:nvSpPr>
-        <p:spPr>
-          <a:xfrm>
-            <a:off x="5031248" y="3132107"/>
-            <a:ext cx="1800000" cy="360000"/>
-          </a:xfrm>
-          <a:prstGeom prst="roundRect">
-            <a:avLst/>
-          </a:prstGeom>
-          <a:noFill/>
-          <a:ln w="12700">
-            <a:solidFill>
-              <a:schemeClr val="tx2"/>
-            </a:solidFill>
-            <a:prstDash val="solid"/>
-          </a:ln>
-        </p:spPr>
-        <p:style>
-          <a:lnRef idx="2">
-            <a:schemeClr val="accent1">
-              <a:shade val="15000"/>
-            </a:schemeClr>
-          </a:lnRef>
-          <a:fillRef idx="1">
-            <a:schemeClr val="accent1"/>
-          </a:fillRef>
-          <a:effectRef idx="0">
-            <a:schemeClr val="accent1"/>
-          </a:effectRef>
-          <a:fontRef idx="minor">
-            <a:schemeClr val="lt1"/>
-          </a:fontRef>
-        </p:style>
-        <p:txBody>
-          <a:bodyPr rtlCol="0" anchor="ctr"/>
-          <a:lstStyle/>
-          <a:p>
-            <a:pPr algn="ctr"/>
-            <a:r>
-              <a:rPr lang="en-US" altLang="zh-CN" sz="1200" dirty="0">
-                <a:solidFill>
-                  <a:sysClr val="windowText" lastClr="000000"/>
-                </a:solidFill>
-                <a:latin typeface="Quicksand Light" panose="00000400000000000000" pitchFamily="2" charset="0"/>
-              </a:rPr>
-              <a:t>Congestion  Control</a:t>
-            </a:r>
-            <a:endParaRPr lang="zh-CN" altLang="en-US" sz="1200" dirty="0">
-              <a:solidFill>
-                <a:sysClr val="windowText" lastClr="000000"/>
-              </a:solidFill>
-              <a:latin typeface="Quicksand Light" panose="00000400000000000000" pitchFamily="2" charset="0"/>
-            </a:endParaRPr>
-          </a:p>
-        </p:txBody>
-      </p:sp>
-      <p:sp>
-        <p:nvSpPr>
-          <p:cNvPr id="4" name="矩形: 圆角 3">
-            <a:extLst>
-              <a:ext uri="{FF2B5EF4-FFF2-40B4-BE49-F238E27FC236}">
-                <a16:creationId xmlns:a16="http://schemas.microsoft.com/office/drawing/2014/main" id="{B7D33566-285E-1CCB-5E98-A8DFB5DC5691}"/>
-              </a:ext>
-            </a:extLst>
-          </p:cNvPr>
-          <p:cNvSpPr/>
-          <p:nvPr/>
-        </p:nvSpPr>
-        <p:spPr>
-          <a:xfrm>
-            <a:off x="5031248" y="3562619"/>
-            <a:ext cx="1800000" cy="360000"/>
-          </a:xfrm>
-          <a:prstGeom prst="roundRect">
-            <a:avLst/>
-          </a:prstGeom>
-          <a:noFill/>
-          <a:ln w="12700">
-            <a:solidFill>
-              <a:schemeClr val="tx2"/>
-            </a:solidFill>
-            <a:prstDash val="solid"/>
-          </a:ln>
-        </p:spPr>
-        <p:style>
-          <a:lnRef idx="2">
-            <a:schemeClr val="accent1">
-              <a:shade val="15000"/>
-            </a:schemeClr>
-          </a:lnRef>
-          <a:fillRef idx="1">
-            <a:schemeClr val="accent1"/>
-          </a:fillRef>
-          <a:effectRef idx="0">
-            <a:schemeClr val="accent1"/>
-          </a:effectRef>
-          <a:fontRef idx="minor">
-            <a:schemeClr val="lt1"/>
-          </a:fontRef>
-        </p:style>
-        <p:txBody>
-          <a:bodyPr rtlCol="0" anchor="ctr"/>
-          <a:lstStyle/>
-          <a:p>
-            <a:pPr algn="ctr"/>
-            <a:r>
-              <a:rPr lang="en-US" altLang="zh-CN" sz="1200" dirty="0">
-                <a:solidFill>
-                  <a:sysClr val="windowText" lastClr="000000"/>
-                </a:solidFill>
-                <a:latin typeface="Quicksand Light" panose="00000400000000000000" pitchFamily="2" charset="0"/>
-              </a:rPr>
-              <a:t>Three-Way Handshake</a:t>
-            </a:r>
-            <a:endParaRPr lang="zh-CN" altLang="en-US" sz="1200" dirty="0">
-              <a:solidFill>
-                <a:sysClr val="windowText" lastClr="000000"/>
-              </a:solidFill>
-              <a:latin typeface="Quicksand Light" panose="00000400000000000000" pitchFamily="2" charset="0"/>
-            </a:endParaRPr>
-          </a:p>
-        </p:txBody>
-      </p:sp>
-      <p:sp>
-        <p:nvSpPr>
-          <p:cNvPr id="5" name="矩形: 圆角 4">
-            <a:extLst>
-              <a:ext uri="{FF2B5EF4-FFF2-40B4-BE49-F238E27FC236}">
-                <a16:creationId xmlns:a16="http://schemas.microsoft.com/office/drawing/2014/main" id="{905996E1-56AA-82E7-6CF1-E2487C38B700}"/>
-              </a:ext>
-            </a:extLst>
-          </p:cNvPr>
-          <p:cNvSpPr/>
-          <p:nvPr/>
-        </p:nvSpPr>
-        <p:spPr>
-          <a:xfrm>
-            <a:off x="5031248" y="4665692"/>
-            <a:ext cx="1800000" cy="360000"/>
-          </a:xfrm>
-          <a:prstGeom prst="roundRect">
-            <a:avLst/>
-          </a:prstGeom>
-          <a:noFill/>
-          <a:ln w="12700">
-            <a:solidFill>
-              <a:schemeClr val="tx2"/>
-            </a:solidFill>
-            <a:prstDash val="solid"/>
-          </a:ln>
-        </p:spPr>
-        <p:style>
-          <a:lnRef idx="2">
-            <a:schemeClr val="accent1">
-              <a:shade val="15000"/>
-            </a:schemeClr>
-          </a:lnRef>
-          <a:fillRef idx="1">
-            <a:schemeClr val="accent1"/>
-          </a:fillRef>
-          <a:effectRef idx="0">
-            <a:schemeClr val="accent1"/>
-          </a:effectRef>
-          <a:fontRef idx="minor">
-            <a:schemeClr val="lt1"/>
-          </a:fontRef>
-        </p:style>
-        <p:txBody>
-          <a:bodyPr rtlCol="0" anchor="ctr"/>
-          <a:lstStyle/>
-          <a:p>
-            <a:pPr algn="ctr"/>
-            <a:r>
-              <a:rPr lang="en-US" altLang="zh-CN" sz="1200" dirty="0">
-                <a:solidFill>
-                  <a:sysClr val="windowText" lastClr="000000"/>
-                </a:solidFill>
-                <a:latin typeface="Quicksand Light" panose="00000400000000000000" pitchFamily="2" charset="0"/>
-              </a:rPr>
-              <a:t>Packet</a:t>
-            </a:r>
-            <a:endParaRPr lang="zh-CN" altLang="en-US" sz="1200" dirty="0">
-              <a:solidFill>
-                <a:sysClr val="windowText" lastClr="000000"/>
-              </a:solidFill>
-              <a:latin typeface="Quicksand Light" panose="00000400000000000000" pitchFamily="2" charset="0"/>
-            </a:endParaRPr>
-          </a:p>
-        </p:txBody>
-      </p:sp>
-      <p:cxnSp>
-        <p:nvCxnSpPr>
-          <p:cNvPr id="8" name="连接符: 曲线 7">
-            <a:extLst>
-              <a:ext uri="{FF2B5EF4-FFF2-40B4-BE49-F238E27FC236}">
-                <a16:creationId xmlns:a16="http://schemas.microsoft.com/office/drawing/2014/main" id="{40667B24-5AC7-5F2E-7021-EBB90191C191}"/>
-              </a:ext>
-            </a:extLst>
-          </p:cNvPr>
-          <p:cNvCxnSpPr>
-            <a:cxnSpLocks/>
-            <a:stCxn id="3" idx="1"/>
-            <a:endCxn id="16" idx="3"/>
-          </p:cNvCxnSpPr>
-          <p:nvPr/>
-        </p:nvCxnSpPr>
-        <p:spPr>
-          <a:xfrm rot="10800000" flipV="1">
-            <a:off x="4747694" y="3312107"/>
-            <a:ext cx="283555" cy="215256"/>
-          </a:xfrm>
-          <a:prstGeom prst="curvedConnector3">
-            <a:avLst>
-              <a:gd name="adj1" fmla="val 50000"/>
-            </a:avLst>
-          </a:prstGeom>
-          <a:ln w="6350">
-            <a:solidFill>
-              <a:srgbClr val="3CBFD1"/>
-            </a:solidFill>
-          </a:ln>
-        </p:spPr>
-        <p:style>
-          <a:lnRef idx="1">
-            <a:schemeClr val="accent1"/>
-          </a:lnRef>
-          <a:fillRef idx="0">
-            <a:schemeClr val="accent1"/>
-          </a:fillRef>
-          <a:effectRef idx="0">
-            <a:schemeClr val="accent1"/>
-          </a:effectRef>
-          <a:fontRef idx="minor">
-            <a:schemeClr val="tx1"/>
-          </a:fontRef>
-        </p:style>
-      </p:cxnSp>
-      <p:sp>
-        <p:nvSpPr>
-          <p:cNvPr id="9" name="矩形: 圆角 8">
-            <a:extLst>
-              <a:ext uri="{FF2B5EF4-FFF2-40B4-BE49-F238E27FC236}">
-                <a16:creationId xmlns:a16="http://schemas.microsoft.com/office/drawing/2014/main" id="{88EFE3ED-A618-B1ED-5F36-94CB8F38355F}"/>
-              </a:ext>
-            </a:extLst>
-          </p:cNvPr>
-          <p:cNvSpPr/>
-          <p:nvPr/>
-        </p:nvSpPr>
-        <p:spPr>
-          <a:xfrm>
-            <a:off x="5031248" y="3993131"/>
-            <a:ext cx="1800000" cy="360000"/>
-          </a:xfrm>
-          <a:prstGeom prst="roundRect">
-            <a:avLst/>
-          </a:prstGeom>
-          <a:noFill/>
-          <a:ln w="12700">
-            <a:solidFill>
-              <a:schemeClr val="tx2"/>
-            </a:solidFill>
-            <a:prstDash val="solid"/>
-          </a:ln>
-        </p:spPr>
-        <p:style>
-          <a:lnRef idx="2">
-            <a:schemeClr val="accent1">
-              <a:shade val="15000"/>
-            </a:schemeClr>
-          </a:lnRef>
-          <a:fillRef idx="1">
-            <a:schemeClr val="accent1"/>
-          </a:fillRef>
-          <a:effectRef idx="0">
-            <a:schemeClr val="accent1"/>
-          </a:effectRef>
-          <a:fontRef idx="minor">
-            <a:schemeClr val="lt1"/>
-          </a:fontRef>
-        </p:style>
-        <p:txBody>
-          <a:bodyPr rtlCol="0" anchor="ctr"/>
-          <a:lstStyle/>
-          <a:p>
-            <a:pPr algn="ctr"/>
-            <a:r>
-              <a:rPr lang="en-US" altLang="zh-CN" sz="1200" dirty="0">
-                <a:solidFill>
-                  <a:sysClr val="windowText" lastClr="000000"/>
-                </a:solidFill>
-                <a:latin typeface="Quicksand Light" panose="00000400000000000000" pitchFamily="2" charset="0"/>
-              </a:rPr>
-              <a:t>Packet</a:t>
-            </a:r>
-            <a:endParaRPr lang="zh-CN" altLang="en-US" sz="1200" dirty="0">
-              <a:solidFill>
-                <a:sysClr val="windowText" lastClr="000000"/>
-              </a:solidFill>
-              <a:latin typeface="Quicksand Light" panose="00000400000000000000" pitchFamily="2" charset="0"/>
-            </a:endParaRPr>
-          </a:p>
-        </p:txBody>
-      </p:sp>
-      <p:cxnSp>
-        <p:nvCxnSpPr>
-          <p:cNvPr id="10" name="连接符: 曲线 9">
-            <a:extLst>
-              <a:ext uri="{FF2B5EF4-FFF2-40B4-BE49-F238E27FC236}">
-                <a16:creationId xmlns:a16="http://schemas.microsoft.com/office/drawing/2014/main" id="{56D54B0A-0C00-1FA5-AA24-AB208E9F3E39}"/>
-              </a:ext>
-            </a:extLst>
-          </p:cNvPr>
-          <p:cNvCxnSpPr>
-            <a:cxnSpLocks/>
-            <a:stCxn id="16" idx="3"/>
-            <a:endCxn id="9" idx="1"/>
-          </p:cNvCxnSpPr>
-          <p:nvPr/>
-        </p:nvCxnSpPr>
-        <p:spPr>
-          <a:xfrm>
-            <a:off x="4747693" y="3527363"/>
-            <a:ext cx="283555" cy="645768"/>
-          </a:xfrm>
-          <a:prstGeom prst="curvedConnector3">
-            <a:avLst>
-              <a:gd name="adj1" fmla="val 50000"/>
-            </a:avLst>
-          </a:prstGeom>
-          <a:ln w="6350">
-            <a:solidFill>
-              <a:srgbClr val="3CBFD1"/>
-            </a:solidFill>
-          </a:ln>
-        </p:spPr>
-        <p:style>
-          <a:lnRef idx="1">
-            <a:schemeClr val="accent1"/>
-          </a:lnRef>
-          <a:fillRef idx="0">
-            <a:schemeClr val="accent1"/>
-          </a:fillRef>
-          <a:effectRef idx="0">
-            <a:schemeClr val="accent1"/>
-          </a:effectRef>
-          <a:fontRef idx="minor">
-            <a:schemeClr val="tx1"/>
-          </a:fontRef>
-        </p:style>
-      </p:cxnSp>
-      <p:sp>
-        <p:nvSpPr>
-          <p:cNvPr id="13" name="矩形: 圆角 12">
-            <a:extLst>
-              <a:ext uri="{FF2B5EF4-FFF2-40B4-BE49-F238E27FC236}">
-                <a16:creationId xmlns:a16="http://schemas.microsoft.com/office/drawing/2014/main" id="{AD181E9B-9708-8757-6641-0EC70B8857D3}"/>
-              </a:ext>
-            </a:extLst>
-          </p:cNvPr>
-          <p:cNvSpPr/>
-          <p:nvPr/>
-        </p:nvSpPr>
-        <p:spPr>
-          <a:xfrm>
-            <a:off x="5031248" y="2705606"/>
-            <a:ext cx="1800000" cy="360000"/>
-          </a:xfrm>
-          <a:prstGeom prst="roundRect">
-            <a:avLst/>
-          </a:prstGeom>
-          <a:noFill/>
-          <a:ln w="12700">
-            <a:solidFill>
-              <a:schemeClr val="tx2"/>
-            </a:solidFill>
-            <a:prstDash val="solid"/>
-          </a:ln>
-        </p:spPr>
-        <p:style>
-          <a:lnRef idx="2">
-            <a:schemeClr val="accent1">
-              <a:shade val="15000"/>
-            </a:schemeClr>
-          </a:lnRef>
-          <a:fillRef idx="1">
-            <a:schemeClr val="accent1"/>
-          </a:fillRef>
-          <a:effectRef idx="0">
-            <a:schemeClr val="accent1"/>
-          </a:effectRef>
-          <a:fontRef idx="minor">
-            <a:schemeClr val="lt1"/>
-          </a:fontRef>
-        </p:style>
-        <p:txBody>
-          <a:bodyPr rtlCol="0" anchor="ctr"/>
-          <a:lstStyle/>
-          <a:p>
-            <a:pPr algn="ctr"/>
-            <a:r>
-              <a:rPr lang="en-US" altLang="zh-CN" sz="1200" dirty="0">
-                <a:solidFill>
-                  <a:sysClr val="windowText" lastClr="000000"/>
-                </a:solidFill>
-                <a:latin typeface="Quicksand Light" panose="00000400000000000000" pitchFamily="2" charset="0"/>
-              </a:rPr>
-              <a:t>Traffic Control</a:t>
-            </a:r>
-            <a:endParaRPr lang="zh-CN" altLang="en-US" sz="1200" dirty="0">
-              <a:solidFill>
-                <a:sysClr val="windowText" lastClr="000000"/>
-              </a:solidFill>
-              <a:latin typeface="Quicksand Light" panose="00000400000000000000" pitchFamily="2" charset="0"/>
-            </a:endParaRPr>
-          </a:p>
-        </p:txBody>
-      </p:sp>
-      <p:cxnSp>
-        <p:nvCxnSpPr>
-          <p:cNvPr id="14" name="连接符: 曲线 13">
-            <a:extLst>
-              <a:ext uri="{FF2B5EF4-FFF2-40B4-BE49-F238E27FC236}">
-                <a16:creationId xmlns:a16="http://schemas.microsoft.com/office/drawing/2014/main" id="{94161A20-9CEA-26C5-90F1-7284ECA5C704}"/>
-              </a:ext>
-            </a:extLst>
-          </p:cNvPr>
-          <p:cNvCxnSpPr>
-            <a:cxnSpLocks/>
-            <a:stCxn id="13" idx="1"/>
-            <a:endCxn id="16" idx="3"/>
-          </p:cNvCxnSpPr>
-          <p:nvPr/>
-        </p:nvCxnSpPr>
-        <p:spPr>
-          <a:xfrm rot="10800000" flipV="1">
-            <a:off x="4747694" y="2885605"/>
-            <a:ext cx="283555" cy="641757"/>
-          </a:xfrm>
-          <a:prstGeom prst="curvedConnector3">
-            <a:avLst>
-              <a:gd name="adj1" fmla="val 50000"/>
-            </a:avLst>
-          </a:prstGeom>
-          <a:ln w="6350">
-            <a:solidFill>
-              <a:srgbClr val="3CBFD1"/>
-            </a:solidFill>
-          </a:ln>
-        </p:spPr>
-        <p:style>
-          <a:lnRef idx="1">
-            <a:schemeClr val="accent1"/>
-          </a:lnRef>
-          <a:fillRef idx="0">
-            <a:schemeClr val="accent1"/>
-          </a:fillRef>
-          <a:effectRef idx="0">
-            <a:schemeClr val="accent1"/>
-          </a:effectRef>
-          <a:fontRef idx="minor">
-            <a:schemeClr val="tx1"/>
-          </a:fontRef>
-        </p:style>
-      </p:cxnSp>
-      <p:sp>
-        <p:nvSpPr>
-          <p:cNvPr id="36" name="矩形: 圆角 35">
-            <a:extLst>
-              <a:ext uri="{FF2B5EF4-FFF2-40B4-BE49-F238E27FC236}">
-                <a16:creationId xmlns:a16="http://schemas.microsoft.com/office/drawing/2014/main" id="{C6587821-DD92-9679-7756-3E8C2C8D118E}"/>
-              </a:ext>
-            </a:extLst>
-          </p:cNvPr>
-          <p:cNvSpPr/>
-          <p:nvPr/>
-        </p:nvSpPr>
-        <p:spPr>
-          <a:xfrm>
-            <a:off x="1584137" y="3347363"/>
-            <a:ext cx="1440000" cy="360000"/>
-          </a:xfrm>
-          <a:prstGeom prst="roundRect">
-            <a:avLst/>
-          </a:prstGeom>
-          <a:solidFill>
-            <a:schemeClr val="tx1"/>
-          </a:solidFill>
-          <a:ln w="12700">
-            <a:noFill/>
-          </a:ln>
-        </p:spPr>
-        <p:style>
-          <a:lnRef idx="2">
-            <a:schemeClr val="accent1">
-              <a:shade val="15000"/>
-            </a:schemeClr>
-          </a:lnRef>
-          <a:fillRef idx="1">
-            <a:schemeClr val="accent1"/>
-          </a:fillRef>
-          <a:effectRef idx="0">
-            <a:schemeClr val="accent1"/>
-          </a:effectRef>
-          <a:fontRef idx="minor">
-            <a:schemeClr val="lt1"/>
-          </a:fontRef>
-        </p:style>
-        <p:txBody>
-          <a:bodyPr rtlCol="0" anchor="ctr"/>
-          <a:lstStyle/>
-          <a:p>
-            <a:pPr algn="ctr"/>
-            <a:r>
-              <a:rPr lang="en-US" altLang="zh-CN" sz="1200" dirty="0">
-                <a:latin typeface="Quicksand Light" panose="00000400000000000000" pitchFamily="2" charset="0"/>
-                <a:ea typeface="微软雅黑" panose="020B0503020204020204" pitchFamily="34" charset="-122"/>
-              </a:rPr>
-              <a:t>Transport Layer</a:t>
-            </a:r>
-            <a:endParaRPr lang="zh-CN" altLang="en-US" sz="1200" dirty="0">
-              <a:latin typeface="Quicksand Light" panose="00000400000000000000" pitchFamily="2" charset="0"/>
-              <a:ea typeface="微软雅黑" panose="020B0503020204020204" pitchFamily="34" charset="-122"/>
-            </a:endParaRPr>
-          </a:p>
-        </p:txBody>
-      </p:sp>
-      <p:cxnSp>
-        <p:nvCxnSpPr>
-          <p:cNvPr id="42" name="连接符: 曲线 41">
-            <a:extLst>
-              <a:ext uri="{FF2B5EF4-FFF2-40B4-BE49-F238E27FC236}">
-                <a16:creationId xmlns:a16="http://schemas.microsoft.com/office/drawing/2014/main" id="{6589FE98-C76F-3ED9-8AB2-A810BAC61631}"/>
-              </a:ext>
-            </a:extLst>
-          </p:cNvPr>
-          <p:cNvCxnSpPr>
-            <a:cxnSpLocks/>
-            <a:stCxn id="36" idx="3"/>
-            <a:endCxn id="2" idx="1"/>
-          </p:cNvCxnSpPr>
-          <p:nvPr/>
-        </p:nvCxnSpPr>
-        <p:spPr>
-          <a:xfrm flipV="1">
-            <a:off x="3024137" y="2899832"/>
-            <a:ext cx="283556" cy="627531"/>
-          </a:xfrm>
-          <a:prstGeom prst="curvedConnector3">
-            <a:avLst>
-              <a:gd name="adj1" fmla="val 50000"/>
-            </a:avLst>
-          </a:prstGeom>
-          <a:ln>
-            <a:solidFill>
-              <a:schemeClr val="accent5">
-                <a:lumMod val="75000"/>
-              </a:schemeClr>
-            </a:solidFill>
-          </a:ln>
-        </p:spPr>
-        <p:style>
-          <a:lnRef idx="1">
-            <a:schemeClr val="accent1"/>
-          </a:lnRef>
-          <a:fillRef idx="0">
-            <a:schemeClr val="accent1"/>
-          </a:fillRef>
-          <a:effectRef idx="0">
-            <a:schemeClr val="accent1"/>
-          </a:effectRef>
-          <a:fontRef idx="minor">
-            <a:schemeClr val="tx1"/>
-          </a:fontRef>
-        </p:style>
-      </p:cxnSp>
-      <p:sp>
-        <p:nvSpPr>
-          <p:cNvPr id="16" name="矩形: 圆角 15">
-            <a:extLst>
-              <a:ext uri="{FF2B5EF4-FFF2-40B4-BE49-F238E27FC236}">
-                <a16:creationId xmlns:a16="http://schemas.microsoft.com/office/drawing/2014/main" id="{C4F8D70D-848F-8E10-57D5-0246D0F22858}"/>
-              </a:ext>
-            </a:extLst>
-          </p:cNvPr>
-          <p:cNvSpPr/>
-          <p:nvPr/>
-        </p:nvSpPr>
-        <p:spPr>
-          <a:xfrm>
-            <a:off x="3307693" y="3347363"/>
-            <a:ext cx="1440000" cy="360000"/>
-          </a:xfrm>
-          <a:prstGeom prst="roundRect">
-            <a:avLst/>
-          </a:prstGeom>
-          <a:solidFill>
-            <a:srgbClr val="3DC1D3"/>
-          </a:solidFill>
-          <a:ln w="12700">
-            <a:noFill/>
-          </a:ln>
-        </p:spPr>
-        <p:style>
-          <a:lnRef idx="2">
-            <a:schemeClr val="accent1">
-              <a:shade val="15000"/>
-            </a:schemeClr>
-          </a:lnRef>
-          <a:fillRef idx="1">
-            <a:schemeClr val="accent1"/>
-          </a:fillRef>
-          <a:effectRef idx="0">
-            <a:schemeClr val="accent1"/>
-          </a:effectRef>
-          <a:fontRef idx="minor">
-            <a:schemeClr val="lt1"/>
-          </a:fontRef>
-        </p:style>
-        <p:txBody>
-          <a:bodyPr rtlCol="0" anchor="ctr"/>
-          <a:lstStyle/>
-          <a:p>
-            <a:pPr algn="ctr"/>
-            <a:r>
-              <a:rPr lang="en-US" altLang="zh-CN" sz="1200" dirty="0">
-                <a:latin typeface="Quicksand Light" panose="00000400000000000000" pitchFamily="2" charset="0"/>
-              </a:rPr>
-              <a:t>TCP</a:t>
-            </a:r>
-            <a:endParaRPr lang="zh-CN" altLang="en-US" sz="1200" dirty="0">
-              <a:latin typeface="Quicksand Light" panose="00000400000000000000" pitchFamily="2" charset="0"/>
-            </a:endParaRPr>
-          </a:p>
-        </p:txBody>
-      </p:sp>
-      <p:sp>
-        <p:nvSpPr>
-          <p:cNvPr id="19" name="矩形: 圆角 18">
-            <a:extLst>
-              <a:ext uri="{FF2B5EF4-FFF2-40B4-BE49-F238E27FC236}">
-                <a16:creationId xmlns:a16="http://schemas.microsoft.com/office/drawing/2014/main" id="{81530229-6710-AE17-7125-34E7C102D265}"/>
-              </a:ext>
-            </a:extLst>
-          </p:cNvPr>
-          <p:cNvSpPr/>
-          <p:nvPr/>
-        </p:nvSpPr>
-        <p:spPr>
-          <a:xfrm>
-            <a:off x="3307693" y="4665692"/>
-            <a:ext cx="1440000" cy="360000"/>
-          </a:xfrm>
-          <a:prstGeom prst="roundRect">
-            <a:avLst/>
-          </a:prstGeom>
-          <a:solidFill>
-            <a:srgbClr val="20BF6B"/>
-          </a:solidFill>
-          <a:ln w="12700">
-            <a:noFill/>
-          </a:ln>
-        </p:spPr>
-        <p:style>
-          <a:lnRef idx="2">
-            <a:schemeClr val="accent1">
-              <a:shade val="15000"/>
-            </a:schemeClr>
-          </a:lnRef>
-          <a:fillRef idx="1">
-            <a:schemeClr val="accent1"/>
-          </a:fillRef>
-          <a:effectRef idx="0">
-            <a:schemeClr val="accent1"/>
-          </a:effectRef>
-          <a:fontRef idx="minor">
-            <a:schemeClr val="lt1"/>
-          </a:fontRef>
-        </p:style>
-        <p:txBody>
-          <a:bodyPr rtlCol="0" anchor="ctr"/>
-          <a:lstStyle/>
-          <a:p>
-            <a:pPr algn="ctr"/>
-            <a:r>
-              <a:rPr lang="en-US" altLang="zh-CN" sz="1200" dirty="0">
-                <a:latin typeface="Quicksand Light" panose="00000400000000000000" pitchFamily="2" charset="0"/>
-              </a:rPr>
-              <a:t>UDP</a:t>
-            </a:r>
-            <a:endParaRPr lang="zh-CN" altLang="en-US" sz="1200" dirty="0">
-              <a:latin typeface="Quicksand Light" panose="00000400000000000000" pitchFamily="2" charset="0"/>
-            </a:endParaRPr>
-          </a:p>
-        </p:txBody>
-      </p:sp>
-      <p:cxnSp>
-        <p:nvCxnSpPr>
-          <p:cNvPr id="22" name="连接符: 曲线 21">
-            <a:extLst>
-              <a:ext uri="{FF2B5EF4-FFF2-40B4-BE49-F238E27FC236}">
-                <a16:creationId xmlns:a16="http://schemas.microsoft.com/office/drawing/2014/main" id="{983C1AC8-3735-FBF8-1D52-F46340D06312}"/>
-              </a:ext>
-            </a:extLst>
-          </p:cNvPr>
-          <p:cNvCxnSpPr>
-            <a:cxnSpLocks/>
-            <a:stCxn id="36" idx="3"/>
-            <a:endCxn id="19" idx="1"/>
-          </p:cNvCxnSpPr>
-          <p:nvPr/>
-        </p:nvCxnSpPr>
-        <p:spPr>
-          <a:xfrm>
-            <a:off x="3024137" y="3527363"/>
-            <a:ext cx="283556" cy="1318329"/>
-          </a:xfrm>
-          <a:prstGeom prst="curvedConnector3">
-            <a:avLst>
-              <a:gd name="adj1" fmla="val 50000"/>
-            </a:avLst>
-          </a:prstGeom>
-          <a:ln>
-            <a:solidFill>
-              <a:srgbClr val="20BF6B"/>
-            </a:solidFill>
-          </a:ln>
-        </p:spPr>
-        <p:style>
-          <a:lnRef idx="1">
-            <a:schemeClr val="accent1"/>
-          </a:lnRef>
-          <a:fillRef idx="0">
-            <a:schemeClr val="accent1"/>
-          </a:fillRef>
-          <a:effectRef idx="0">
-            <a:schemeClr val="accent1"/>
-          </a:effectRef>
-          <a:fontRef idx="minor">
-            <a:schemeClr val="tx1"/>
-          </a:fontRef>
-        </p:style>
-      </p:cxnSp>
-      <p:cxnSp>
-        <p:nvCxnSpPr>
-          <p:cNvPr id="28" name="直接连接符 27">
-            <a:extLst>
-              <a:ext uri="{FF2B5EF4-FFF2-40B4-BE49-F238E27FC236}">
-                <a16:creationId xmlns:a16="http://schemas.microsoft.com/office/drawing/2014/main" id="{BD7B110E-78A0-DA3F-A295-242686C8DE59}"/>
-              </a:ext>
-            </a:extLst>
-          </p:cNvPr>
-          <p:cNvCxnSpPr>
-            <a:stCxn id="16" idx="1"/>
-            <a:endCxn id="36" idx="3"/>
-          </p:cNvCxnSpPr>
-          <p:nvPr/>
-        </p:nvCxnSpPr>
-        <p:spPr>
-          <a:xfrm flipH="1">
-            <a:off x="3024137" y="3527363"/>
-            <a:ext cx="283556" cy="0"/>
-          </a:xfrm>
-          <a:prstGeom prst="line">
-            <a:avLst/>
-          </a:prstGeom>
-          <a:ln>
-            <a:solidFill>
-              <a:srgbClr val="3CBFD1"/>
-            </a:solidFill>
-          </a:ln>
-        </p:spPr>
-        <p:style>
-          <a:lnRef idx="1">
-            <a:schemeClr val="accent1"/>
-          </a:lnRef>
-          <a:fillRef idx="0">
-            <a:schemeClr val="accent1"/>
-          </a:fillRef>
-          <a:effectRef idx="0">
-            <a:schemeClr val="accent1"/>
-          </a:effectRef>
-          <a:fontRef idx="minor">
-            <a:schemeClr val="tx1"/>
-          </a:fontRef>
-        </p:style>
-      </p:cxnSp>
-      <p:cxnSp>
-        <p:nvCxnSpPr>
-          <p:cNvPr id="29" name="连接符: 曲线 28">
-            <a:extLst>
-              <a:ext uri="{FF2B5EF4-FFF2-40B4-BE49-F238E27FC236}">
-                <a16:creationId xmlns:a16="http://schemas.microsoft.com/office/drawing/2014/main" id="{3CE98D71-068D-12E4-6351-5662457FF6EF}"/>
-              </a:ext>
-            </a:extLst>
-          </p:cNvPr>
-          <p:cNvCxnSpPr>
-            <a:cxnSpLocks/>
-            <a:stCxn id="4" idx="1"/>
-            <a:endCxn id="16" idx="3"/>
-          </p:cNvCxnSpPr>
-          <p:nvPr/>
-        </p:nvCxnSpPr>
-        <p:spPr>
-          <a:xfrm rot="10800000">
-            <a:off x="4747694" y="3527363"/>
-            <a:ext cx="283555" cy="215256"/>
-          </a:xfrm>
-          <a:prstGeom prst="curvedConnector3">
-            <a:avLst>
-              <a:gd name="adj1" fmla="val 50000"/>
-            </a:avLst>
-          </a:prstGeom>
-          <a:ln w="6350">
-            <a:solidFill>
-              <a:srgbClr val="3CBFD1"/>
-            </a:solidFill>
-          </a:ln>
-        </p:spPr>
-        <p:style>
-          <a:lnRef idx="1">
-            <a:schemeClr val="accent1"/>
-          </a:lnRef>
-          <a:fillRef idx="0">
-            <a:schemeClr val="accent1"/>
-          </a:fillRef>
-          <a:effectRef idx="0">
-            <a:schemeClr val="accent1"/>
-          </a:effectRef>
-          <a:fontRef idx="minor">
-            <a:schemeClr val="tx1"/>
-          </a:fontRef>
-        </p:style>
-      </p:cxnSp>
-      <p:sp>
-        <p:nvSpPr>
-          <p:cNvPr id="6" name="矩形: 圆角 5">
-            <a:extLst>
-              <a:ext uri="{FF2B5EF4-FFF2-40B4-BE49-F238E27FC236}">
-                <a16:creationId xmlns:a16="http://schemas.microsoft.com/office/drawing/2014/main" id="{E26F0BAC-FA81-5F6F-B924-707A50D906C4}"/>
-              </a:ext>
-            </a:extLst>
-          </p:cNvPr>
-          <p:cNvSpPr/>
-          <p:nvPr/>
-        </p:nvSpPr>
-        <p:spPr>
-          <a:xfrm>
-            <a:off x="7102100" y="3562619"/>
-            <a:ext cx="1800000" cy="360000"/>
-          </a:xfrm>
-          <a:prstGeom prst="roundRect">
-            <a:avLst/>
-          </a:prstGeom>
-          <a:noFill/>
-          <a:ln w="12700">
-            <a:noFill/>
-            <a:prstDash val="solid"/>
-          </a:ln>
-        </p:spPr>
-        <p:style>
-          <a:lnRef idx="2">
-            <a:schemeClr val="accent1">
-              <a:shade val="15000"/>
-            </a:schemeClr>
-          </a:lnRef>
-          <a:fillRef idx="1">
-            <a:schemeClr val="accent1"/>
-          </a:fillRef>
-          <a:effectRef idx="0">
-            <a:schemeClr val="accent1"/>
-          </a:effectRef>
-          <a:fontRef idx="minor">
-            <a:schemeClr val="lt1"/>
-          </a:fontRef>
-        </p:style>
-        <p:txBody>
-          <a:bodyPr rtlCol="0" anchor="ctr"/>
-          <a:lstStyle/>
-          <a:p>
-            <a:endParaRPr lang="zh-CN" altLang="en-US" sz="1200" dirty="0">
-              <a:solidFill>
-                <a:sysClr val="windowText" lastClr="000000"/>
-              </a:solidFill>
-              <a:latin typeface="Quicksand Light" panose="00000400000000000000" pitchFamily="2" charset="0"/>
-            </a:endParaRPr>
-          </a:p>
-        </p:txBody>
-      </p:sp>
-      <p:cxnSp>
-        <p:nvCxnSpPr>
-          <p:cNvPr id="17" name="直接连接符 16">
-            <a:extLst>
-              <a:ext uri="{FF2B5EF4-FFF2-40B4-BE49-F238E27FC236}">
-                <a16:creationId xmlns:a16="http://schemas.microsoft.com/office/drawing/2014/main" id="{5469945C-7541-0506-CC16-F8088F979CF3}"/>
-              </a:ext>
-            </a:extLst>
-          </p:cNvPr>
-          <p:cNvCxnSpPr>
-            <a:stCxn id="19" idx="3"/>
-            <a:endCxn id="5" idx="1"/>
-          </p:cNvCxnSpPr>
-          <p:nvPr/>
-        </p:nvCxnSpPr>
-        <p:spPr>
-          <a:xfrm>
-            <a:off x="4747693" y="4845692"/>
-            <a:ext cx="283555" cy="0"/>
-          </a:xfrm>
-          <a:prstGeom prst="line">
-            <a:avLst/>
-          </a:prstGeom>
-          <a:ln>
-            <a:solidFill>
-              <a:srgbClr val="20BD6A"/>
-            </a:solidFill>
-          </a:ln>
-        </p:spPr>
-        <p:style>
-          <a:lnRef idx="1">
-            <a:schemeClr val="accent1"/>
-          </a:lnRef>
-          <a:fillRef idx="0">
-            <a:schemeClr val="accent1"/>
-          </a:fillRef>
-          <a:effectRef idx="0">
-            <a:schemeClr val="accent1"/>
-          </a:effectRef>
-          <a:fontRef idx="minor">
-            <a:schemeClr val="tx1"/>
-          </a:fontRef>
-        </p:style>
-      </p:cxnSp>
-    </p:spTree>
-    <p:extLst>
-      <p:ext uri="{BB962C8B-B14F-4D97-AF65-F5344CB8AC3E}">
-        <p14:creationId xmlns:p14="http://schemas.microsoft.com/office/powerpoint/2010/main" val="1275707856"/>
-      </p:ext>
-    </p:extLst>
-  </p:cSld>
-  <p:clrMapOvr>
-    <a:masterClrMapping/>
-  </p:clrMapOvr>
-</p:sld>
-</file>
-
-<file path=ppt/slides/slide5.xml><?xml version="1.0" encoding="utf-8"?>
-<p:sld xmlns:a="http://schemas.openxmlformats.org/drawingml/2006/main" xmlns:r="http://schemas.openxmlformats.org/officeDocument/2006/relationships" xmlns:p="http://schemas.openxmlformats.org/presentationml/2006/main">
-  <p:cSld>
-    <p:spTree>
-      <p:nvGrpSpPr>
         <p:cNvPr id="1" name=""/>
         <p:cNvGrpSpPr/>
         <p:nvPr/>
@@ -33137,7 +31128,7 @@
 </p:sld>
 </file>
 
-<file path=ppt/slides/slide6.xml><?xml version="1.0" encoding="utf-8"?>
+<file path=ppt/slides/slide5.xml><?xml version="1.0" encoding="utf-8"?>
 <p:sld xmlns:a="http://schemas.openxmlformats.org/drawingml/2006/main" xmlns:r="http://schemas.openxmlformats.org/officeDocument/2006/relationships" xmlns:p="http://schemas.openxmlformats.org/presentationml/2006/main">
   <p:cSld>
     <p:spTree>
@@ -36346,7 +34337,7 @@
 </p:sld>
 </file>
 
-<file path=ppt/slides/slide7.xml><?xml version="1.0" encoding="utf-8"?>
+<file path=ppt/slides/slide6.xml><?xml version="1.0" encoding="utf-8"?>
 <p:sld xmlns:a="http://schemas.openxmlformats.org/drawingml/2006/main" xmlns:r="http://schemas.openxmlformats.org/officeDocument/2006/relationships" xmlns:p="http://schemas.openxmlformats.org/presentationml/2006/main">
   <p:cSld>
     <p:spTree>
@@ -38524,7 +36515,7 @@
 </p:sld>
 </file>
 
-<file path=ppt/slides/slide8.xml><?xml version="1.0" encoding="utf-8"?>
+<file path=ppt/slides/slide7.xml><?xml version="1.0" encoding="utf-8"?>
 <p:sld xmlns:a="http://schemas.openxmlformats.org/drawingml/2006/main" xmlns:r="http://schemas.openxmlformats.org/officeDocument/2006/relationships" xmlns:p="http://schemas.openxmlformats.org/presentationml/2006/main">
   <p:cSld>
     <p:spTree>
@@ -39469,7 +37460,7 @@
 </p:sld>
 </file>
 
-<file path=ppt/slides/slide9.xml><?xml version="1.0" encoding="utf-8"?>
+<file path=ppt/slides/slide8.xml><?xml version="1.0" encoding="utf-8"?>
 <p:sld xmlns:a="http://schemas.openxmlformats.org/drawingml/2006/main" xmlns:r="http://schemas.openxmlformats.org/officeDocument/2006/relationships" xmlns:p="http://schemas.openxmlformats.org/presentationml/2006/main">
   <p:cSld>
     <p:spTree>
@@ -41189,6 +39180,972 @@
     <p:extLst>
       <p:ext uri="{BB962C8B-B14F-4D97-AF65-F5344CB8AC3E}">
         <p14:creationId xmlns:p14="http://schemas.microsoft.com/office/powerpoint/2010/main" val="2989024140"/>
+      </p:ext>
+    </p:extLst>
+  </p:cSld>
+  <p:clrMapOvr>
+    <a:masterClrMapping/>
+  </p:clrMapOvr>
+</p:sld>
+</file>
+
+<file path=ppt/slides/slide9.xml><?xml version="1.0" encoding="utf-8"?>
+<p:sld xmlns:a="http://schemas.openxmlformats.org/drawingml/2006/main" xmlns:r="http://schemas.openxmlformats.org/officeDocument/2006/relationships" xmlns:p="http://schemas.openxmlformats.org/presentationml/2006/main">
+  <p:cSld>
+    <p:spTree>
+      <p:nvGrpSpPr>
+        <p:cNvPr id="1" name="">
+          <a:extLst>
+            <a:ext uri="{FF2B5EF4-FFF2-40B4-BE49-F238E27FC236}">
+              <a16:creationId xmlns:a16="http://schemas.microsoft.com/office/drawing/2014/main" id="{5C7A2C4C-DE35-8F5D-FAA3-1F45B914C406}"/>
+            </a:ext>
+          </a:extLst>
+        </p:cNvPr>
+        <p:cNvGrpSpPr/>
+        <p:nvPr/>
+      </p:nvGrpSpPr>
+      <p:grpSpPr>
+        <a:xfrm>
+          <a:off x="0" y="0"/>
+          <a:ext cx="0" cy="0"/>
+          <a:chOff x="0" y="0"/>
+          <a:chExt cx="0" cy="0"/>
+        </a:xfrm>
+      </p:grpSpPr>
+      <p:sp>
+        <p:nvSpPr>
+          <p:cNvPr id="7" name="矩形: 圆角 6">
+            <a:extLst>
+              <a:ext uri="{FF2B5EF4-FFF2-40B4-BE49-F238E27FC236}">
+                <a16:creationId xmlns:a16="http://schemas.microsoft.com/office/drawing/2014/main" id="{E9167702-BFB3-0DB3-BB79-C1FC75427EA0}"/>
+              </a:ext>
+            </a:extLst>
+          </p:cNvPr>
+          <p:cNvSpPr/>
+          <p:nvPr/>
+        </p:nvSpPr>
+        <p:spPr>
+          <a:xfrm>
+            <a:off x="4988680" y="2930400"/>
+            <a:ext cx="900000" cy="216000"/>
+          </a:xfrm>
+          <a:prstGeom prst="roundRect">
+            <a:avLst/>
+          </a:prstGeom>
+          <a:solidFill>
+            <a:srgbClr val="335BA3">
+              <a:alpha val="89804"/>
+            </a:srgbClr>
+          </a:solidFill>
+          <a:ln w="12700">
+            <a:noFill/>
+          </a:ln>
+        </p:spPr>
+        <p:style>
+          <a:lnRef idx="2">
+            <a:schemeClr val="accent1">
+              <a:shade val="15000"/>
+            </a:schemeClr>
+          </a:lnRef>
+          <a:fillRef idx="1">
+            <a:schemeClr val="accent1"/>
+          </a:fillRef>
+          <a:effectRef idx="0">
+            <a:schemeClr val="accent1"/>
+          </a:effectRef>
+          <a:fontRef idx="minor">
+            <a:schemeClr val="lt1"/>
+          </a:fontRef>
+        </p:style>
+        <p:txBody>
+          <a:bodyPr rtlCol="0" anchor="ctr"/>
+          <a:lstStyle/>
+          <a:p>
+            <a:pPr algn="ctr"/>
+            <a:r>
+              <a:rPr lang="en-US" altLang="zh-CN" sz="800">
+                <a:latin typeface="Quicksand" panose="00000500000000000000" pitchFamily="2" charset="0"/>
+              </a:rPr>
+              <a:t>::before</a:t>
+            </a:r>
+            <a:endParaRPr lang="zh-CN" altLang="en-US" sz="800">
+              <a:latin typeface="Quicksand" panose="00000500000000000000" pitchFamily="2" charset="0"/>
+            </a:endParaRPr>
+          </a:p>
+        </p:txBody>
+      </p:sp>
+      <p:sp>
+        <p:nvSpPr>
+          <p:cNvPr id="25" name="矩形: 圆角 24">
+            <a:extLst>
+              <a:ext uri="{FF2B5EF4-FFF2-40B4-BE49-F238E27FC236}">
+                <a16:creationId xmlns:a16="http://schemas.microsoft.com/office/drawing/2014/main" id="{DB29B0F0-7681-C319-D905-61DFC9EA1742}"/>
+              </a:ext>
+            </a:extLst>
+          </p:cNvPr>
+          <p:cNvSpPr/>
+          <p:nvPr/>
+        </p:nvSpPr>
+        <p:spPr>
+          <a:xfrm>
+            <a:off x="6057780" y="2534400"/>
+            <a:ext cx="900000" cy="216000"/>
+          </a:xfrm>
+          <a:prstGeom prst="roundRect">
+            <a:avLst/>
+          </a:prstGeom>
+          <a:solidFill>
+            <a:srgbClr val="F9423A">
+              <a:alpha val="89804"/>
+            </a:srgbClr>
+          </a:solidFill>
+          <a:ln w="12700">
+            <a:noFill/>
+          </a:ln>
+        </p:spPr>
+        <p:style>
+          <a:lnRef idx="2">
+            <a:schemeClr val="accent1">
+              <a:shade val="15000"/>
+            </a:schemeClr>
+          </a:lnRef>
+          <a:fillRef idx="1">
+            <a:schemeClr val="accent1"/>
+          </a:fillRef>
+          <a:effectRef idx="0">
+            <a:schemeClr val="accent1"/>
+          </a:effectRef>
+          <a:fontRef idx="minor">
+            <a:schemeClr val="lt1"/>
+          </a:fontRef>
+        </p:style>
+        <p:txBody>
+          <a:bodyPr rtlCol="0" anchor="ctr"/>
+          <a:lstStyle/>
+          <a:p>
+            <a:pPr algn="ctr"/>
+            <a:r>
+              <a:rPr lang="en-US" altLang="zh-CN" sz="800">
+                <a:latin typeface="Quicksand" panose="00000500000000000000" pitchFamily="2" charset="0"/>
+              </a:rPr>
+              <a:t>String of text</a:t>
+            </a:r>
+            <a:endParaRPr lang="zh-CN" altLang="en-US" sz="800">
+              <a:latin typeface="Quicksand" panose="00000500000000000000" pitchFamily="2" charset="0"/>
+            </a:endParaRPr>
+          </a:p>
+        </p:txBody>
+      </p:sp>
+      <p:sp>
+        <p:nvSpPr>
+          <p:cNvPr id="26" name="矩形: 圆角 25">
+            <a:extLst>
+              <a:ext uri="{FF2B5EF4-FFF2-40B4-BE49-F238E27FC236}">
+                <a16:creationId xmlns:a16="http://schemas.microsoft.com/office/drawing/2014/main" id="{A362D5C7-ED9E-7876-9B3A-5E7694F2029B}"/>
+              </a:ext>
+            </a:extLst>
+          </p:cNvPr>
+          <p:cNvSpPr/>
+          <p:nvPr/>
+        </p:nvSpPr>
+        <p:spPr>
+          <a:xfrm>
+            <a:off x="6057780" y="2798400"/>
+            <a:ext cx="900000" cy="216000"/>
+          </a:xfrm>
+          <a:prstGeom prst="roundRect">
+            <a:avLst/>
+          </a:prstGeom>
+          <a:solidFill>
+            <a:srgbClr val="F6A04D">
+              <a:alpha val="89804"/>
+            </a:srgbClr>
+          </a:solidFill>
+          <a:ln w="12700">
+            <a:noFill/>
+          </a:ln>
+        </p:spPr>
+        <p:style>
+          <a:lnRef idx="2">
+            <a:schemeClr val="accent1">
+              <a:shade val="15000"/>
+            </a:schemeClr>
+          </a:lnRef>
+          <a:fillRef idx="1">
+            <a:schemeClr val="accent1"/>
+          </a:fillRef>
+          <a:effectRef idx="0">
+            <a:schemeClr val="accent1"/>
+          </a:effectRef>
+          <a:fontRef idx="minor">
+            <a:schemeClr val="lt1"/>
+          </a:fontRef>
+        </p:style>
+        <p:txBody>
+          <a:bodyPr rtlCol="0" anchor="ctr"/>
+          <a:lstStyle/>
+          <a:p>
+            <a:pPr algn="ctr"/>
+            <a:r>
+              <a:rPr lang="en-US" altLang="zh-CN" sz="800">
+                <a:latin typeface="Quicksand" panose="00000500000000000000" pitchFamily="2" charset="0"/>
+              </a:rPr>
+              <a:t>Entity</a:t>
+            </a:r>
+            <a:endParaRPr lang="zh-CN" altLang="en-US" sz="800">
+              <a:latin typeface="Quicksand" panose="00000500000000000000" pitchFamily="2" charset="0"/>
+            </a:endParaRPr>
+          </a:p>
+        </p:txBody>
+      </p:sp>
+      <p:cxnSp>
+        <p:nvCxnSpPr>
+          <p:cNvPr id="28" name="连接符: 曲线 27">
+            <a:extLst>
+              <a:ext uri="{FF2B5EF4-FFF2-40B4-BE49-F238E27FC236}">
+                <a16:creationId xmlns:a16="http://schemas.microsoft.com/office/drawing/2014/main" id="{3CC45C27-5C3D-1BF1-5E05-EB880994D1C9}"/>
+              </a:ext>
+            </a:extLst>
+          </p:cNvPr>
+          <p:cNvCxnSpPr>
+            <a:cxnSpLocks/>
+            <a:stCxn id="7" idx="3"/>
+            <a:endCxn id="25" idx="1"/>
+          </p:cNvCxnSpPr>
+          <p:nvPr/>
+        </p:nvCxnSpPr>
+        <p:spPr>
+          <a:xfrm flipV="1">
+            <a:off x="5888680" y="2642400"/>
+            <a:ext cx="169100" cy="396000"/>
+          </a:xfrm>
+          <a:prstGeom prst="curvedConnector3">
+            <a:avLst/>
+          </a:prstGeom>
+          <a:ln>
+            <a:solidFill>
+              <a:srgbClr val="C00000"/>
+            </a:solidFill>
+          </a:ln>
+        </p:spPr>
+        <p:style>
+          <a:lnRef idx="1">
+            <a:schemeClr val="accent1"/>
+          </a:lnRef>
+          <a:fillRef idx="0">
+            <a:schemeClr val="accent1"/>
+          </a:fillRef>
+          <a:effectRef idx="0">
+            <a:schemeClr val="accent1"/>
+          </a:effectRef>
+          <a:fontRef idx="minor">
+            <a:schemeClr val="tx1"/>
+          </a:fontRef>
+        </p:style>
+      </p:cxnSp>
+      <p:cxnSp>
+        <p:nvCxnSpPr>
+          <p:cNvPr id="34" name="连接符: 曲线 33">
+            <a:extLst>
+              <a:ext uri="{FF2B5EF4-FFF2-40B4-BE49-F238E27FC236}">
+                <a16:creationId xmlns:a16="http://schemas.microsoft.com/office/drawing/2014/main" id="{D6AAD16A-0663-8D07-DC16-C4F0A658F0A3}"/>
+              </a:ext>
+            </a:extLst>
+          </p:cNvPr>
+          <p:cNvCxnSpPr>
+            <a:cxnSpLocks/>
+            <a:stCxn id="7" idx="3"/>
+            <a:endCxn id="12" idx="1"/>
+          </p:cNvCxnSpPr>
+          <p:nvPr/>
+        </p:nvCxnSpPr>
+        <p:spPr>
+          <a:xfrm>
+            <a:off x="5888680" y="3038400"/>
+            <a:ext cx="169100" cy="132000"/>
+          </a:xfrm>
+          <a:prstGeom prst="curvedConnector3">
+            <a:avLst>
+              <a:gd name="adj1" fmla="val 50000"/>
+            </a:avLst>
+          </a:prstGeom>
+          <a:ln>
+            <a:solidFill>
+              <a:srgbClr val="9966FF"/>
+            </a:solidFill>
+          </a:ln>
+        </p:spPr>
+        <p:style>
+          <a:lnRef idx="1">
+            <a:schemeClr val="accent1"/>
+          </a:lnRef>
+          <a:fillRef idx="0">
+            <a:schemeClr val="accent1"/>
+          </a:fillRef>
+          <a:effectRef idx="0">
+            <a:schemeClr val="accent1"/>
+          </a:effectRef>
+          <a:fontRef idx="minor">
+            <a:schemeClr val="tx1"/>
+          </a:fontRef>
+        </p:style>
+      </p:cxnSp>
+      <p:sp>
+        <p:nvSpPr>
+          <p:cNvPr id="108" name="矩形: 圆角 107">
+            <a:extLst>
+              <a:ext uri="{FF2B5EF4-FFF2-40B4-BE49-F238E27FC236}">
+                <a16:creationId xmlns:a16="http://schemas.microsoft.com/office/drawing/2014/main" id="{509F35E6-BC71-27B6-AB68-9D6D8641D9DE}"/>
+              </a:ext>
+            </a:extLst>
+          </p:cNvPr>
+          <p:cNvSpPr/>
+          <p:nvPr/>
+        </p:nvSpPr>
+        <p:spPr>
+          <a:xfrm>
+            <a:off x="6049650" y="3326400"/>
+            <a:ext cx="900000" cy="216000"/>
+          </a:xfrm>
+          <a:prstGeom prst="roundRect">
+            <a:avLst/>
+          </a:prstGeom>
+          <a:solidFill>
+            <a:srgbClr val="FB837D"/>
+          </a:solidFill>
+          <a:ln w="12700">
+            <a:noFill/>
+          </a:ln>
+        </p:spPr>
+        <p:style>
+          <a:lnRef idx="2">
+            <a:schemeClr val="accent1">
+              <a:shade val="15000"/>
+            </a:schemeClr>
+          </a:lnRef>
+          <a:fillRef idx="1">
+            <a:schemeClr val="accent1"/>
+          </a:fillRef>
+          <a:effectRef idx="0">
+            <a:schemeClr val="accent1"/>
+          </a:effectRef>
+          <a:fontRef idx="minor">
+            <a:schemeClr val="lt1"/>
+          </a:fontRef>
+        </p:style>
+        <p:txBody>
+          <a:bodyPr rtlCol="0" anchor="ctr"/>
+          <a:lstStyle/>
+          <a:p>
+            <a:pPr algn="ctr"/>
+            <a:r>
+              <a:rPr lang="en-US" altLang="zh-CN" sz="800">
+                <a:latin typeface="Quicksand" panose="00000500000000000000" pitchFamily="2" charset="0"/>
+              </a:rPr>
+              <a:t>counter</a:t>
+            </a:r>
+            <a:endParaRPr lang="zh-CN" altLang="en-US" sz="800">
+              <a:latin typeface="Quicksand" panose="00000500000000000000" pitchFamily="2" charset="0"/>
+            </a:endParaRPr>
+          </a:p>
+        </p:txBody>
+      </p:sp>
+      <p:cxnSp>
+        <p:nvCxnSpPr>
+          <p:cNvPr id="118" name="连接符: 曲线 117">
+            <a:extLst>
+              <a:ext uri="{FF2B5EF4-FFF2-40B4-BE49-F238E27FC236}">
+                <a16:creationId xmlns:a16="http://schemas.microsoft.com/office/drawing/2014/main" id="{DC5EF390-7693-C62F-379C-E8944F075A72}"/>
+              </a:ext>
+            </a:extLst>
+          </p:cNvPr>
+          <p:cNvCxnSpPr>
+            <a:cxnSpLocks/>
+            <a:stCxn id="7" idx="3"/>
+            <a:endCxn id="26" idx="1"/>
+          </p:cNvCxnSpPr>
+          <p:nvPr/>
+        </p:nvCxnSpPr>
+        <p:spPr>
+          <a:xfrm flipV="1">
+            <a:off x="5888680" y="2906400"/>
+            <a:ext cx="169100" cy="132000"/>
+          </a:xfrm>
+          <a:prstGeom prst="curvedConnector3">
+            <a:avLst>
+              <a:gd name="adj1" fmla="val 50000"/>
+            </a:avLst>
+          </a:prstGeom>
+          <a:ln>
+            <a:solidFill>
+              <a:srgbClr val="F7AA5F"/>
+            </a:solidFill>
+          </a:ln>
+        </p:spPr>
+        <p:style>
+          <a:lnRef idx="1">
+            <a:schemeClr val="accent1"/>
+          </a:lnRef>
+          <a:fillRef idx="0">
+            <a:schemeClr val="accent1"/>
+          </a:fillRef>
+          <a:effectRef idx="0">
+            <a:schemeClr val="accent1"/>
+          </a:effectRef>
+          <a:fontRef idx="minor">
+            <a:schemeClr val="tx1"/>
+          </a:fontRef>
+        </p:style>
+      </p:cxnSp>
+      <p:cxnSp>
+        <p:nvCxnSpPr>
+          <p:cNvPr id="121" name="连接符: 曲线 120">
+            <a:extLst>
+              <a:ext uri="{FF2B5EF4-FFF2-40B4-BE49-F238E27FC236}">
+                <a16:creationId xmlns:a16="http://schemas.microsoft.com/office/drawing/2014/main" id="{1D3BCEB4-577A-2C82-5900-26B41E83F91D}"/>
+              </a:ext>
+            </a:extLst>
+          </p:cNvPr>
+          <p:cNvCxnSpPr>
+            <a:cxnSpLocks/>
+            <a:stCxn id="7" idx="3"/>
+            <a:endCxn id="108" idx="1"/>
+          </p:cNvCxnSpPr>
+          <p:nvPr/>
+        </p:nvCxnSpPr>
+        <p:spPr>
+          <a:xfrm>
+            <a:off x="5888680" y="3038400"/>
+            <a:ext cx="160970" cy="396000"/>
+          </a:xfrm>
+          <a:prstGeom prst="curvedConnector3">
+            <a:avLst>
+              <a:gd name="adj1" fmla="val 50000"/>
+            </a:avLst>
+          </a:prstGeom>
+          <a:ln>
+            <a:solidFill>
+              <a:srgbClr val="00B050"/>
+            </a:solidFill>
+          </a:ln>
+        </p:spPr>
+        <p:style>
+          <a:lnRef idx="1">
+            <a:schemeClr val="accent1"/>
+          </a:lnRef>
+          <a:fillRef idx="0">
+            <a:schemeClr val="accent1"/>
+          </a:fillRef>
+          <a:effectRef idx="0">
+            <a:schemeClr val="accent1"/>
+          </a:effectRef>
+          <a:fontRef idx="minor">
+            <a:schemeClr val="tx1"/>
+          </a:fontRef>
+        </p:style>
+      </p:cxnSp>
+      <p:sp>
+        <p:nvSpPr>
+          <p:cNvPr id="12" name="矩形: 圆角 11">
+            <a:extLst>
+              <a:ext uri="{FF2B5EF4-FFF2-40B4-BE49-F238E27FC236}">
+                <a16:creationId xmlns:a16="http://schemas.microsoft.com/office/drawing/2014/main" id="{E4023AE0-10C4-EDDD-C931-D3E49B6AC7C9}"/>
+              </a:ext>
+            </a:extLst>
+          </p:cNvPr>
+          <p:cNvSpPr/>
+          <p:nvPr/>
+        </p:nvSpPr>
+        <p:spPr>
+          <a:xfrm>
+            <a:off x="6057780" y="3062400"/>
+            <a:ext cx="900000" cy="216000"/>
+          </a:xfrm>
+          <a:prstGeom prst="roundRect">
+            <a:avLst/>
+          </a:prstGeom>
+          <a:solidFill>
+            <a:srgbClr val="9966FF"/>
+          </a:solidFill>
+          <a:ln w="12700">
+            <a:noFill/>
+          </a:ln>
+        </p:spPr>
+        <p:style>
+          <a:lnRef idx="2">
+            <a:schemeClr val="accent1">
+              <a:shade val="15000"/>
+            </a:schemeClr>
+          </a:lnRef>
+          <a:fillRef idx="1">
+            <a:schemeClr val="accent1"/>
+          </a:fillRef>
+          <a:effectRef idx="0">
+            <a:schemeClr val="accent1"/>
+          </a:effectRef>
+          <a:fontRef idx="minor">
+            <a:schemeClr val="lt1"/>
+          </a:fontRef>
+        </p:style>
+        <p:txBody>
+          <a:bodyPr rtlCol="0" anchor="ctr"/>
+          <a:lstStyle/>
+          <a:p>
+            <a:pPr algn="ctr"/>
+            <a:r>
+              <a:rPr lang="en-US" altLang="zh-CN" sz="800">
+                <a:solidFill>
+                  <a:schemeClr val="bg1"/>
+                </a:solidFill>
+                <a:latin typeface="Quicksand Light" panose="00000400000000000000" pitchFamily="2" charset="0"/>
+              </a:rPr>
+              <a:t>Iconfont</a:t>
+            </a:r>
+            <a:endParaRPr lang="zh-CN" altLang="en-US" sz="800">
+              <a:solidFill>
+                <a:schemeClr val="bg1"/>
+              </a:solidFill>
+              <a:latin typeface="Quicksand Light" panose="00000400000000000000" pitchFamily="2" charset="0"/>
+            </a:endParaRPr>
+          </a:p>
+        </p:txBody>
+      </p:sp>
+      <p:sp>
+        <p:nvSpPr>
+          <p:cNvPr id="2" name="矩形: 圆角 1">
+            <a:extLst>
+              <a:ext uri="{FF2B5EF4-FFF2-40B4-BE49-F238E27FC236}">
+                <a16:creationId xmlns:a16="http://schemas.microsoft.com/office/drawing/2014/main" id="{83E28516-AB33-28C4-44B6-24DE28D98661}"/>
+              </a:ext>
+            </a:extLst>
+          </p:cNvPr>
+          <p:cNvSpPr/>
+          <p:nvPr/>
+        </p:nvSpPr>
+        <p:spPr>
+          <a:xfrm>
+            <a:off x="7126880" y="2798400"/>
+            <a:ext cx="900000" cy="216000"/>
+          </a:xfrm>
+          <a:prstGeom prst="roundRect">
+            <a:avLst/>
+          </a:prstGeom>
+          <a:solidFill>
+            <a:srgbClr val="CCF2E5"/>
+          </a:solidFill>
+          <a:ln w="12700">
+            <a:noFill/>
+          </a:ln>
+        </p:spPr>
+        <p:style>
+          <a:lnRef idx="2">
+            <a:schemeClr val="accent1">
+              <a:shade val="15000"/>
+            </a:schemeClr>
+          </a:lnRef>
+          <a:fillRef idx="1">
+            <a:schemeClr val="accent1"/>
+          </a:fillRef>
+          <a:effectRef idx="0">
+            <a:schemeClr val="accent1"/>
+          </a:effectRef>
+          <a:fontRef idx="minor">
+            <a:schemeClr val="lt1"/>
+          </a:fontRef>
+        </p:style>
+        <p:txBody>
+          <a:bodyPr rtlCol="0" anchor="ctr"/>
+          <a:lstStyle/>
+          <a:p>
+            <a:pPr algn="ctr"/>
+            <a:r>
+              <a:rPr lang="en-US" altLang="zh-CN" sz="800">
+                <a:solidFill>
+                  <a:sysClr val="windowText" lastClr="000000"/>
+                </a:solidFill>
+                <a:latin typeface="Quicksand Light" panose="00000400000000000000" pitchFamily="2" charset="0"/>
+              </a:rPr>
+              <a:t>Unicode</a:t>
+            </a:r>
+            <a:endParaRPr lang="zh-CN" altLang="en-US" sz="800">
+              <a:solidFill>
+                <a:sysClr val="windowText" lastClr="000000"/>
+              </a:solidFill>
+              <a:latin typeface="Quicksand Light" panose="00000400000000000000" pitchFamily="2" charset="0"/>
+            </a:endParaRPr>
+          </a:p>
+        </p:txBody>
+      </p:sp>
+      <p:sp>
+        <p:nvSpPr>
+          <p:cNvPr id="5" name="矩形: 圆角 4">
+            <a:extLst>
+              <a:ext uri="{FF2B5EF4-FFF2-40B4-BE49-F238E27FC236}">
+                <a16:creationId xmlns:a16="http://schemas.microsoft.com/office/drawing/2014/main" id="{EC9DFEFA-DE6D-C382-23DE-033158234380}"/>
+              </a:ext>
+            </a:extLst>
+          </p:cNvPr>
+          <p:cNvSpPr/>
+          <p:nvPr/>
+        </p:nvSpPr>
+        <p:spPr>
+          <a:xfrm>
+            <a:off x="7126880" y="3062400"/>
+            <a:ext cx="900000" cy="216000"/>
+          </a:xfrm>
+          <a:prstGeom prst="roundRect">
+            <a:avLst/>
+          </a:prstGeom>
+          <a:solidFill>
+            <a:srgbClr val="CCF2E5"/>
+          </a:solidFill>
+          <a:ln w="12700">
+            <a:noFill/>
+          </a:ln>
+        </p:spPr>
+        <p:style>
+          <a:lnRef idx="2">
+            <a:schemeClr val="accent1">
+              <a:shade val="15000"/>
+            </a:schemeClr>
+          </a:lnRef>
+          <a:fillRef idx="1">
+            <a:schemeClr val="accent1"/>
+          </a:fillRef>
+          <a:effectRef idx="0">
+            <a:schemeClr val="accent1"/>
+          </a:effectRef>
+          <a:fontRef idx="minor">
+            <a:schemeClr val="lt1"/>
+          </a:fontRef>
+        </p:style>
+        <p:txBody>
+          <a:bodyPr rtlCol="0" anchor="ctr"/>
+          <a:lstStyle/>
+          <a:p>
+            <a:pPr algn="ctr"/>
+            <a:r>
+              <a:rPr lang="en-US" altLang="zh-CN" sz="800">
+                <a:solidFill>
+                  <a:sysClr val="windowText" lastClr="000000"/>
+                </a:solidFill>
+                <a:latin typeface="Quicksand Light" panose="00000400000000000000" pitchFamily="2" charset="0"/>
+              </a:rPr>
+              <a:t>Unicode</a:t>
+            </a:r>
+            <a:endParaRPr lang="zh-CN" altLang="en-US" sz="800">
+              <a:solidFill>
+                <a:sysClr val="windowText" lastClr="000000"/>
+              </a:solidFill>
+              <a:latin typeface="Quicksand Light" panose="00000400000000000000" pitchFamily="2" charset="0"/>
+            </a:endParaRPr>
+          </a:p>
+        </p:txBody>
+      </p:sp>
+      <p:cxnSp>
+        <p:nvCxnSpPr>
+          <p:cNvPr id="8" name="直接连接符 7">
+            <a:extLst>
+              <a:ext uri="{FF2B5EF4-FFF2-40B4-BE49-F238E27FC236}">
+                <a16:creationId xmlns:a16="http://schemas.microsoft.com/office/drawing/2014/main" id="{9C72856E-D2DA-7E17-A337-C4361ABDE71E}"/>
+              </a:ext>
+            </a:extLst>
+          </p:cNvPr>
+          <p:cNvCxnSpPr>
+            <a:stCxn id="26" idx="3"/>
+            <a:endCxn id="2" idx="1"/>
+          </p:cNvCxnSpPr>
+          <p:nvPr/>
+        </p:nvCxnSpPr>
+        <p:spPr>
+          <a:xfrm>
+            <a:off x="6957780" y="2906400"/>
+            <a:ext cx="169100" cy="0"/>
+          </a:xfrm>
+          <a:prstGeom prst="line">
+            <a:avLst/>
+          </a:prstGeom>
+          <a:ln>
+            <a:solidFill>
+              <a:srgbClr val="F7AA5F"/>
+            </a:solidFill>
+          </a:ln>
+        </p:spPr>
+        <p:style>
+          <a:lnRef idx="1">
+            <a:schemeClr val="accent1"/>
+          </a:lnRef>
+          <a:fillRef idx="0">
+            <a:schemeClr val="accent1"/>
+          </a:fillRef>
+          <a:effectRef idx="0">
+            <a:schemeClr val="accent1"/>
+          </a:effectRef>
+          <a:fontRef idx="minor">
+            <a:schemeClr val="tx1"/>
+          </a:fontRef>
+        </p:style>
+      </p:cxnSp>
+      <p:cxnSp>
+        <p:nvCxnSpPr>
+          <p:cNvPr id="10" name="直接连接符 9">
+            <a:extLst>
+              <a:ext uri="{FF2B5EF4-FFF2-40B4-BE49-F238E27FC236}">
+                <a16:creationId xmlns:a16="http://schemas.microsoft.com/office/drawing/2014/main" id="{E671B0F8-4EB3-1F8A-06EB-35F88593DCA1}"/>
+              </a:ext>
+            </a:extLst>
+          </p:cNvPr>
+          <p:cNvCxnSpPr>
+            <a:stCxn id="12" idx="3"/>
+            <a:endCxn id="5" idx="1"/>
+          </p:cNvCxnSpPr>
+          <p:nvPr/>
+        </p:nvCxnSpPr>
+        <p:spPr>
+          <a:xfrm>
+            <a:off x="6957780" y="3170400"/>
+            <a:ext cx="169100" cy="0"/>
+          </a:xfrm>
+          <a:prstGeom prst="line">
+            <a:avLst/>
+          </a:prstGeom>
+          <a:ln>
+            <a:solidFill>
+              <a:srgbClr val="9966FF"/>
+            </a:solidFill>
+          </a:ln>
+        </p:spPr>
+        <p:style>
+          <a:lnRef idx="1">
+            <a:schemeClr val="accent1"/>
+          </a:lnRef>
+          <a:fillRef idx="0">
+            <a:schemeClr val="accent1"/>
+          </a:fillRef>
+          <a:effectRef idx="0">
+            <a:schemeClr val="accent1"/>
+          </a:effectRef>
+          <a:fontRef idx="minor">
+            <a:schemeClr val="tx1"/>
+          </a:fontRef>
+        </p:style>
+      </p:cxnSp>
+      <p:sp>
+        <p:nvSpPr>
+          <p:cNvPr id="3" name="矩形: 圆角 2">
+            <a:extLst>
+              <a:ext uri="{FF2B5EF4-FFF2-40B4-BE49-F238E27FC236}">
+                <a16:creationId xmlns:a16="http://schemas.microsoft.com/office/drawing/2014/main" id="{C3064634-CD22-075E-68B9-962F834B311B}"/>
+              </a:ext>
+            </a:extLst>
+          </p:cNvPr>
+          <p:cNvSpPr/>
+          <p:nvPr/>
+        </p:nvSpPr>
+        <p:spPr>
+          <a:xfrm>
+            <a:off x="3927709" y="3179700"/>
+            <a:ext cx="900000" cy="216000"/>
+          </a:xfrm>
+          <a:prstGeom prst="roundRect">
+            <a:avLst/>
+          </a:prstGeom>
+          <a:solidFill>
+            <a:schemeClr val="tx1"/>
+          </a:solidFill>
+          <a:ln w="12700">
+            <a:noFill/>
+          </a:ln>
+        </p:spPr>
+        <p:style>
+          <a:lnRef idx="2">
+            <a:schemeClr val="accent1">
+              <a:shade val="15000"/>
+            </a:schemeClr>
+          </a:lnRef>
+          <a:fillRef idx="1">
+            <a:schemeClr val="accent1"/>
+          </a:fillRef>
+          <a:effectRef idx="0">
+            <a:schemeClr val="accent1"/>
+          </a:effectRef>
+          <a:fontRef idx="minor">
+            <a:schemeClr val="lt1"/>
+          </a:fontRef>
+        </p:style>
+        <p:txBody>
+          <a:bodyPr rtlCol="0" anchor="ctr"/>
+          <a:lstStyle/>
+          <a:p>
+            <a:pPr algn="ctr"/>
+            <a:r>
+              <a:rPr lang="en-US" altLang="zh-CN" sz="800">
+                <a:latin typeface="Quicksand Medium" panose="00000600000000000000" pitchFamily="2" charset="0"/>
+              </a:rPr>
+              <a:t>&lt;li&gt;</a:t>
+            </a:r>
+            <a:endParaRPr lang="zh-CN" altLang="en-US" sz="800">
+              <a:latin typeface="Quicksand Medium" panose="00000600000000000000" pitchFamily="2" charset="0"/>
+            </a:endParaRPr>
+          </a:p>
+        </p:txBody>
+      </p:sp>
+      <p:sp>
+        <p:nvSpPr>
+          <p:cNvPr id="4" name="矩形: 圆角 3">
+            <a:extLst>
+              <a:ext uri="{FF2B5EF4-FFF2-40B4-BE49-F238E27FC236}">
+                <a16:creationId xmlns:a16="http://schemas.microsoft.com/office/drawing/2014/main" id="{D464FB6F-32E1-97B7-CAC2-14F5345557D4}"/>
+              </a:ext>
+            </a:extLst>
+          </p:cNvPr>
+          <p:cNvSpPr/>
+          <p:nvPr/>
+        </p:nvSpPr>
+        <p:spPr>
+          <a:xfrm>
+            <a:off x="4988679" y="3429000"/>
+            <a:ext cx="900000" cy="216000"/>
+          </a:xfrm>
+          <a:prstGeom prst="roundRect">
+            <a:avLst/>
+          </a:prstGeom>
+          <a:solidFill>
+            <a:srgbClr val="335BA3">
+              <a:alpha val="89804"/>
+            </a:srgbClr>
+          </a:solidFill>
+          <a:ln w="12700">
+            <a:noFill/>
+          </a:ln>
+        </p:spPr>
+        <p:style>
+          <a:lnRef idx="2">
+            <a:schemeClr val="accent1">
+              <a:shade val="15000"/>
+            </a:schemeClr>
+          </a:lnRef>
+          <a:fillRef idx="1">
+            <a:schemeClr val="accent1"/>
+          </a:fillRef>
+          <a:effectRef idx="0">
+            <a:schemeClr val="accent1"/>
+          </a:effectRef>
+          <a:fontRef idx="minor">
+            <a:schemeClr val="lt1"/>
+          </a:fontRef>
+        </p:style>
+        <p:txBody>
+          <a:bodyPr rtlCol="0" anchor="ctr"/>
+          <a:lstStyle/>
+          <a:p>
+            <a:pPr algn="ctr"/>
+            <a:r>
+              <a:rPr lang="en-US" altLang="zh-CN" sz="800">
+                <a:latin typeface="Quicksand" panose="00000500000000000000" pitchFamily="2" charset="0"/>
+              </a:rPr>
+              <a:t>::after</a:t>
+            </a:r>
+            <a:endParaRPr lang="zh-CN" altLang="en-US" sz="800">
+              <a:latin typeface="Quicksand" panose="00000500000000000000" pitchFamily="2" charset="0"/>
+            </a:endParaRPr>
+          </a:p>
+        </p:txBody>
+      </p:sp>
+      <p:cxnSp>
+        <p:nvCxnSpPr>
+          <p:cNvPr id="6" name="连接符: 曲线 5">
+            <a:extLst>
+              <a:ext uri="{FF2B5EF4-FFF2-40B4-BE49-F238E27FC236}">
+                <a16:creationId xmlns:a16="http://schemas.microsoft.com/office/drawing/2014/main" id="{A49DEFA1-8658-B2E8-502E-F97718CFD37A}"/>
+              </a:ext>
+            </a:extLst>
+          </p:cNvPr>
+          <p:cNvCxnSpPr>
+            <a:cxnSpLocks/>
+            <a:stCxn id="3" idx="3"/>
+            <a:endCxn id="7" idx="1"/>
+          </p:cNvCxnSpPr>
+          <p:nvPr/>
+        </p:nvCxnSpPr>
+        <p:spPr>
+          <a:xfrm flipV="1">
+            <a:off x="4827709" y="3038400"/>
+            <a:ext cx="160971" cy="249300"/>
+          </a:xfrm>
+          <a:prstGeom prst="curvedConnector3">
+            <a:avLst/>
+          </a:prstGeom>
+          <a:ln>
+            <a:solidFill>
+              <a:srgbClr val="486CAC"/>
+            </a:solidFill>
+          </a:ln>
+        </p:spPr>
+        <p:style>
+          <a:lnRef idx="1">
+            <a:schemeClr val="accent1"/>
+          </a:lnRef>
+          <a:fillRef idx="0">
+            <a:schemeClr val="accent1"/>
+          </a:fillRef>
+          <a:effectRef idx="0">
+            <a:schemeClr val="accent1"/>
+          </a:effectRef>
+          <a:fontRef idx="minor">
+            <a:schemeClr val="tx1"/>
+          </a:fontRef>
+        </p:style>
+      </p:cxnSp>
+      <p:cxnSp>
+        <p:nvCxnSpPr>
+          <p:cNvPr id="13" name="连接符: 曲线 12">
+            <a:extLst>
+              <a:ext uri="{FF2B5EF4-FFF2-40B4-BE49-F238E27FC236}">
+                <a16:creationId xmlns:a16="http://schemas.microsoft.com/office/drawing/2014/main" id="{24C1CA78-5496-27AF-13AD-7BE3E7DD4AE2}"/>
+              </a:ext>
+            </a:extLst>
+          </p:cNvPr>
+          <p:cNvCxnSpPr>
+            <a:cxnSpLocks/>
+            <a:stCxn id="3" idx="3"/>
+            <a:endCxn id="4" idx="1"/>
+          </p:cNvCxnSpPr>
+          <p:nvPr/>
+        </p:nvCxnSpPr>
+        <p:spPr>
+          <a:xfrm>
+            <a:off x="4827709" y="3287700"/>
+            <a:ext cx="160970" cy="249300"/>
+          </a:xfrm>
+          <a:prstGeom prst="curvedConnector3">
+            <a:avLst/>
+          </a:prstGeom>
+          <a:ln>
+            <a:solidFill>
+              <a:srgbClr val="486CAC"/>
+            </a:solidFill>
+          </a:ln>
+        </p:spPr>
+        <p:style>
+          <a:lnRef idx="1">
+            <a:schemeClr val="accent1"/>
+          </a:lnRef>
+          <a:fillRef idx="0">
+            <a:schemeClr val="accent1"/>
+          </a:fillRef>
+          <a:effectRef idx="0">
+            <a:schemeClr val="accent1"/>
+          </a:effectRef>
+          <a:fontRef idx="minor">
+            <a:schemeClr val="tx1"/>
+          </a:fontRef>
+        </p:style>
+      </p:cxnSp>
+    </p:spTree>
+    <p:extLst>
+      <p:ext uri="{BB962C8B-B14F-4D97-AF65-F5344CB8AC3E}">
+        <p14:creationId xmlns:p14="http://schemas.microsoft.com/office/powerpoint/2010/main" val="825264789"/>
       </p:ext>
     </p:extLst>
   </p:cSld>

--- a/utils/file/charts.pptx
+++ b/utils/file/charts.pptx
@@ -288,7 +288,7 @@
           <a:p>
             <a:fld id="{C0F7C65B-F23F-479A-8AFF-E7E0FC962F06}" type="datetimeFigureOut">
               <a:rPr lang="zh-CN" altLang="en-US" smtClean="0"/>
-              <a:t>2025/11/21</a:t>
+              <a:t>2025/12/20</a:t>
             </a:fld>
             <a:endParaRPr lang="zh-CN" altLang="en-US"/>
           </a:p>
@@ -486,7 +486,7 @@
           <a:p>
             <a:fld id="{C0F7C65B-F23F-479A-8AFF-E7E0FC962F06}" type="datetimeFigureOut">
               <a:rPr lang="zh-CN" altLang="en-US" smtClean="0"/>
-              <a:t>2025/11/21</a:t>
+              <a:t>2025/12/20</a:t>
             </a:fld>
             <a:endParaRPr lang="zh-CN" altLang="en-US"/>
           </a:p>
@@ -694,7 +694,7 @@
           <a:p>
             <a:fld id="{C0F7C65B-F23F-479A-8AFF-E7E0FC962F06}" type="datetimeFigureOut">
               <a:rPr lang="zh-CN" altLang="en-US" smtClean="0"/>
-              <a:t>2025/11/21</a:t>
+              <a:t>2025/12/20</a:t>
             </a:fld>
             <a:endParaRPr lang="zh-CN" altLang="en-US"/>
           </a:p>
@@ -892,7 +892,7 @@
           <a:p>
             <a:fld id="{C0F7C65B-F23F-479A-8AFF-E7E0FC962F06}" type="datetimeFigureOut">
               <a:rPr lang="zh-CN" altLang="en-US" smtClean="0"/>
-              <a:t>2025/11/21</a:t>
+              <a:t>2025/12/20</a:t>
             </a:fld>
             <a:endParaRPr lang="zh-CN" altLang="en-US"/>
           </a:p>
@@ -1167,7 +1167,7 @@
           <a:p>
             <a:fld id="{C0F7C65B-F23F-479A-8AFF-E7E0FC962F06}" type="datetimeFigureOut">
               <a:rPr lang="zh-CN" altLang="en-US" smtClean="0"/>
-              <a:t>2025/11/21</a:t>
+              <a:t>2025/12/20</a:t>
             </a:fld>
             <a:endParaRPr lang="zh-CN" altLang="en-US"/>
           </a:p>
@@ -1432,7 +1432,7 @@
           <a:p>
             <a:fld id="{C0F7C65B-F23F-479A-8AFF-E7E0FC962F06}" type="datetimeFigureOut">
               <a:rPr lang="zh-CN" altLang="en-US" smtClean="0"/>
-              <a:t>2025/11/21</a:t>
+              <a:t>2025/12/20</a:t>
             </a:fld>
             <a:endParaRPr lang="zh-CN" altLang="en-US"/>
           </a:p>
@@ -1844,7 +1844,7 @@
           <a:p>
             <a:fld id="{C0F7C65B-F23F-479A-8AFF-E7E0FC962F06}" type="datetimeFigureOut">
               <a:rPr lang="zh-CN" altLang="en-US" smtClean="0"/>
-              <a:t>2025/11/21</a:t>
+              <a:t>2025/12/20</a:t>
             </a:fld>
             <a:endParaRPr lang="zh-CN" altLang="en-US"/>
           </a:p>
@@ -1985,7 +1985,7 @@
           <a:p>
             <a:fld id="{C0F7C65B-F23F-479A-8AFF-E7E0FC962F06}" type="datetimeFigureOut">
               <a:rPr lang="zh-CN" altLang="en-US" smtClean="0"/>
-              <a:t>2025/11/21</a:t>
+              <a:t>2025/12/20</a:t>
             </a:fld>
             <a:endParaRPr lang="zh-CN" altLang="en-US"/>
           </a:p>
@@ -2098,7 +2098,7 @@
           <a:p>
             <a:fld id="{C0F7C65B-F23F-479A-8AFF-E7E0FC962F06}" type="datetimeFigureOut">
               <a:rPr lang="zh-CN" altLang="en-US" smtClean="0"/>
-              <a:t>2025/11/21</a:t>
+              <a:t>2025/12/20</a:t>
             </a:fld>
             <a:endParaRPr lang="zh-CN" altLang="en-US"/>
           </a:p>
@@ -2409,7 +2409,7 @@
           <a:p>
             <a:fld id="{C0F7C65B-F23F-479A-8AFF-E7E0FC962F06}" type="datetimeFigureOut">
               <a:rPr lang="zh-CN" altLang="en-US" smtClean="0"/>
-              <a:t>2025/11/21</a:t>
+              <a:t>2025/12/20</a:t>
             </a:fld>
             <a:endParaRPr lang="zh-CN" altLang="en-US"/>
           </a:p>
@@ -2697,7 +2697,7 @@
           <a:p>
             <a:fld id="{C0F7C65B-F23F-479A-8AFF-E7E0FC962F06}" type="datetimeFigureOut">
               <a:rPr lang="zh-CN" altLang="en-US" smtClean="0"/>
-              <a:t>2025/11/21</a:t>
+              <a:t>2025/12/20</a:t>
             </a:fld>
             <a:endParaRPr lang="zh-CN" altLang="en-US"/>
           </a:p>
@@ -2938,7 +2938,7 @@
           <a:p>
             <a:fld id="{C0F7C65B-F23F-479A-8AFF-E7E0FC962F06}" type="datetimeFigureOut">
               <a:rPr lang="zh-CN" altLang="en-US" smtClean="0"/>
-              <a:t>2025/11/21</a:t>
+              <a:t>2025/12/20</a:t>
             </a:fld>
             <a:endParaRPr lang="zh-CN" altLang="en-US"/>
           </a:p>
@@ -3468,7 +3468,7 @@
           <a:lstStyle/>
           <a:p>
             <a:r>
-              <a:rPr lang="en-US" altLang="zh-CN" sz="4000">
+              <a:rPr lang="en-US" altLang="zh-CN" sz="4000" dirty="0">
                 <a:solidFill>
                   <a:schemeClr val="bg1"/>
                 </a:solidFill>
@@ -30004,7 +30004,7 @@
           <a:p>
             <a:pPr algn="ctr"/>
             <a:r>
-              <a:rPr lang="en-US" altLang="zh-CN" sz="800">
+              <a:rPr lang="en-US" altLang="zh-CN" sz="800" dirty="0">
                 <a:latin typeface="Quicksand Light" panose="00000400000000000000" pitchFamily="2" charset="0"/>
               </a:rPr>
               <a:t>&lt;table&gt;</a:t>
@@ -30066,7 +30066,7 @@
           <a:p>
             <a:pPr algn="ctr"/>
             <a:r>
-              <a:rPr lang="en-US" altLang="zh-CN" sz="800">
+              <a:rPr lang="en-US" altLang="zh-CN" sz="800" dirty="0">
                 <a:latin typeface="Quicksand Light" panose="00000400000000000000" pitchFamily="2" charset="0"/>
               </a:rPr>
               <a:t>&lt;caption&gt;</a:t>
@@ -30128,10 +30128,22 @@
           <a:p>
             <a:pPr algn="ctr"/>
             <a:r>
+              <a:rPr lang="en-US" altLang="zh-CN" sz="800" dirty="0">
+                <a:latin typeface="Quicksand Light" panose="00000400000000000000" pitchFamily="2" charset="0"/>
+              </a:rPr>
+              <a:t>&lt;</a:t>
+            </a:r>
+            <a:r>
+              <a:rPr lang="en-US" altLang="zh-CN" sz="800" dirty="0" err="1">
+                <a:latin typeface="Quicksand Light" panose="00000400000000000000" pitchFamily="2" charset="0"/>
+              </a:rPr>
+              <a:t>thead</a:t>
+            </a:r>
+            <a:r>
               <a:rPr lang="en-US" altLang="zh-CN" sz="800">
                 <a:latin typeface="Quicksand Light" panose="00000400000000000000" pitchFamily="2" charset="0"/>
               </a:rPr>
-              <a:t>&lt;thead&gt;</a:t>
+              <a:t>&gt;</a:t>
             </a:r>
             <a:endParaRPr lang="zh-CN" altLang="en-US" sz="800">
               <a:latin typeface="Quicksand Light" panose="00000400000000000000" pitchFamily="2" charset="0"/>
@@ -31165,8 +31177,8 @@
         </p:nvSpPr>
         <p:spPr>
           <a:xfrm>
-            <a:off x="2611582" y="3272280"/>
-            <a:ext cx="1080000" cy="216000"/>
+            <a:off x="2420510" y="3607729"/>
+            <a:ext cx="1080000" cy="288000"/>
           </a:xfrm>
           <a:prstGeom prst="roundRect">
             <a:avLst/>
@@ -31200,13 +31212,13 @@
           <a:p>
             <a:pPr algn="ctr"/>
             <a:r>
-              <a:rPr lang="en-US" altLang="zh-CN" sz="800">
-                <a:latin typeface="Quicksand Light" panose="00000400000000000000" pitchFamily="2" charset="0"/>
+              <a:rPr lang="en-US" altLang="zh-CN" sz="1200">
+                <a:latin typeface="Montserrat" panose="00000500000000000000" pitchFamily="2" charset="0"/>
               </a:rPr>
               <a:t>&lt;form&gt;</a:t>
             </a:r>
-            <a:endParaRPr lang="zh-CN" altLang="en-US" sz="800">
-              <a:latin typeface="Quicksand Light" panose="00000400000000000000" pitchFamily="2" charset="0"/>
+            <a:endParaRPr lang="zh-CN" altLang="en-US" sz="1200">
+              <a:latin typeface="Montserrat" panose="00000500000000000000" pitchFamily="2" charset="0"/>
             </a:endParaRPr>
           </a:p>
         </p:txBody>
@@ -31225,8 +31237,8 @@
         </p:nvSpPr>
         <p:spPr>
           <a:xfrm>
-            <a:off x="3927709" y="2890560"/>
-            <a:ext cx="900000" cy="216000"/>
+            <a:off x="3736637" y="3109822"/>
+            <a:ext cx="1152000" cy="288000"/>
           </a:xfrm>
           <a:prstGeom prst="roundRect">
             <a:avLst/>
@@ -31262,13 +31274,13 @@
           <a:p>
             <a:pPr algn="ctr"/>
             <a:r>
-              <a:rPr lang="en-US" altLang="zh-CN" sz="800">
-                <a:latin typeface="Quicksand Light" panose="00000400000000000000" pitchFamily="2" charset="0"/>
+              <a:rPr lang="en-US" altLang="zh-CN" sz="1200">
+                <a:latin typeface="Montserrat" panose="00000500000000000000" pitchFamily="2" charset="0"/>
               </a:rPr>
               <a:t>&lt;label&gt;</a:t>
             </a:r>
-            <a:endParaRPr lang="zh-CN" altLang="en-US" sz="800">
-              <a:latin typeface="Quicksand Light" panose="00000400000000000000" pitchFamily="2" charset="0"/>
+            <a:endParaRPr lang="zh-CN" altLang="en-US" sz="1200">
+              <a:latin typeface="Montserrat" panose="00000500000000000000" pitchFamily="2" charset="0"/>
             </a:endParaRPr>
           </a:p>
         </p:txBody>
@@ -31287,8 +31299,8 @@
         </p:nvSpPr>
         <p:spPr>
           <a:xfrm>
-            <a:off x="3927709" y="2250000"/>
-            <a:ext cx="900000" cy="216000"/>
+            <a:off x="3736637" y="2445946"/>
+            <a:ext cx="1152000" cy="288000"/>
           </a:xfrm>
           <a:prstGeom prst="roundRect">
             <a:avLst/>
@@ -31324,13 +31336,13 @@
           <a:p>
             <a:pPr algn="ctr"/>
             <a:r>
-              <a:rPr lang="en-US" altLang="zh-CN" sz="800">
-                <a:latin typeface="Quicksand Light" panose="00000400000000000000" pitchFamily="2" charset="0"/>
+              <a:rPr lang="en-US" altLang="zh-CN" sz="1200" dirty="0">
+                <a:latin typeface="Montserrat" panose="00000500000000000000" pitchFamily="2" charset="0"/>
               </a:rPr>
               <a:t>&lt;input&gt;</a:t>
             </a:r>
-            <a:endParaRPr lang="zh-CN" altLang="en-US" sz="800">
-              <a:latin typeface="Quicksand Light" panose="00000400000000000000" pitchFamily="2" charset="0"/>
+            <a:endParaRPr lang="zh-CN" altLang="en-US" sz="1200" dirty="0">
+              <a:latin typeface="Montserrat" panose="00000500000000000000" pitchFamily="2" charset="0"/>
             </a:endParaRPr>
           </a:p>
         </p:txBody>
@@ -31349,8 +31361,8 @@
         </p:nvSpPr>
         <p:spPr>
           <a:xfrm>
-            <a:off x="3927709" y="3780000"/>
-            <a:ext cx="900000" cy="216000"/>
+            <a:off x="3736637" y="4105636"/>
+            <a:ext cx="1152000" cy="288000"/>
           </a:xfrm>
           <a:prstGeom prst="roundRect">
             <a:avLst/>
@@ -31386,13 +31398,13 @@
           <a:p>
             <a:pPr algn="ctr"/>
             <a:r>
-              <a:rPr lang="en-US" altLang="zh-CN" sz="800">
-                <a:latin typeface="Quicksand Light" panose="00000400000000000000" pitchFamily="2" charset="0"/>
+              <a:rPr lang="en-US" altLang="zh-CN" sz="1200">
+                <a:latin typeface="Montserrat" panose="00000500000000000000" pitchFamily="2" charset="0"/>
               </a:rPr>
               <a:t>&lt;textarea&gt;</a:t>
             </a:r>
-            <a:endParaRPr lang="zh-CN" altLang="en-US" sz="800">
-              <a:latin typeface="Quicksand Light" panose="00000400000000000000" pitchFamily="2" charset="0"/>
+            <a:endParaRPr lang="zh-CN" altLang="en-US" sz="1200">
+              <a:latin typeface="Montserrat" panose="00000500000000000000" pitchFamily="2" charset="0"/>
             </a:endParaRPr>
           </a:p>
         </p:txBody>
@@ -31411,8 +31423,8 @@
         </p:nvSpPr>
         <p:spPr>
           <a:xfrm>
-            <a:off x="3927709" y="4711650"/>
-            <a:ext cx="900000" cy="216000"/>
+            <a:off x="3736637" y="5101450"/>
+            <a:ext cx="1152000" cy="288000"/>
           </a:xfrm>
           <a:prstGeom prst="roundRect">
             <a:avLst/>
@@ -31448,13 +31460,13 @@
           <a:p>
             <a:pPr algn="ctr"/>
             <a:r>
-              <a:rPr lang="en-US" altLang="zh-CN" sz="800">
-                <a:latin typeface="Quicksand Light" panose="00000400000000000000" pitchFamily="2" charset="0"/>
+              <a:rPr lang="en-US" altLang="zh-CN" sz="1200">
+                <a:latin typeface="Montserrat" panose="00000500000000000000" pitchFamily="2" charset="0"/>
               </a:rPr>
               <a:t>&lt;button&gt;</a:t>
             </a:r>
-            <a:endParaRPr lang="zh-CN" altLang="en-US" sz="800">
-              <a:latin typeface="Quicksand Light" panose="00000400000000000000" pitchFamily="2" charset="0"/>
+            <a:endParaRPr lang="zh-CN" altLang="en-US" sz="1200">
+              <a:latin typeface="Montserrat" panose="00000500000000000000" pitchFamily="2" charset="0"/>
             </a:endParaRPr>
           </a:p>
         </p:txBody>
@@ -31473,8 +31485,8 @@
         </p:nvSpPr>
         <p:spPr>
           <a:xfrm>
-            <a:off x="4988680" y="1998000"/>
-            <a:ext cx="900000" cy="216000"/>
+            <a:off x="5111512" y="2114008"/>
+            <a:ext cx="1152000" cy="288000"/>
           </a:xfrm>
           <a:prstGeom prst="roundRect">
             <a:avLst/>
@@ -31508,19 +31520,19 @@
           <a:p>
             <a:pPr algn="ctr"/>
             <a:r>
-              <a:rPr lang="en-US" altLang="zh-CN" sz="800">
+              <a:rPr lang="en-US" altLang="zh-CN" sz="1200">
                 <a:solidFill>
                   <a:sysClr val="windowText" lastClr="000000"/>
                 </a:solidFill>
-                <a:latin typeface="Quicksand Light" panose="00000400000000000000" pitchFamily="2" charset="0"/>
+                <a:latin typeface="Montserrat" panose="00000500000000000000" pitchFamily="2" charset="0"/>
               </a:rPr>
               <a:t>type</a:t>
             </a:r>
-            <a:endParaRPr lang="zh-CN" altLang="en-US" sz="800">
+            <a:endParaRPr lang="zh-CN" altLang="en-US" sz="1200">
               <a:solidFill>
                 <a:sysClr val="windowText" lastClr="000000"/>
               </a:solidFill>
-              <a:latin typeface="Quicksand Light" panose="00000400000000000000" pitchFamily="2" charset="0"/>
+              <a:latin typeface="Montserrat" panose="00000500000000000000" pitchFamily="2" charset="0"/>
             </a:endParaRPr>
           </a:p>
         </p:txBody>
@@ -31539,8 +31551,8 @@
         </p:nvSpPr>
         <p:spPr>
           <a:xfrm>
-            <a:off x="4988680" y="2250000"/>
-            <a:ext cx="900000" cy="216000"/>
+            <a:off x="5111512" y="2445946"/>
+            <a:ext cx="1152000" cy="288000"/>
           </a:xfrm>
           <a:prstGeom prst="roundRect">
             <a:avLst/>
@@ -31574,19 +31586,19 @@
           <a:p>
             <a:pPr algn="ctr"/>
             <a:r>
-              <a:rPr lang="en-US" altLang="zh-CN" sz="800">
+              <a:rPr lang="en-US" altLang="zh-CN" sz="1200">
                 <a:solidFill>
                   <a:sysClr val="windowText" lastClr="000000"/>
                 </a:solidFill>
-                <a:latin typeface="Quicksand Light" panose="00000400000000000000" pitchFamily="2" charset="0"/>
+                <a:latin typeface="Montserrat" panose="00000500000000000000" pitchFamily="2" charset="0"/>
               </a:rPr>
               <a:t>name</a:t>
             </a:r>
-            <a:endParaRPr lang="zh-CN" altLang="en-US" sz="800">
+            <a:endParaRPr lang="zh-CN" altLang="en-US" sz="1200">
               <a:solidFill>
                 <a:sysClr val="windowText" lastClr="000000"/>
               </a:solidFill>
-              <a:latin typeface="Quicksand Light" panose="00000400000000000000" pitchFamily="2" charset="0"/>
+              <a:latin typeface="Montserrat" panose="00000500000000000000" pitchFamily="2" charset="0"/>
             </a:endParaRPr>
           </a:p>
         </p:txBody>
@@ -31605,8 +31617,8 @@
         </p:nvSpPr>
         <p:spPr>
           <a:xfrm>
-            <a:off x="4988680" y="3276000"/>
-            <a:ext cx="900000" cy="216000"/>
+            <a:off x="5111512" y="3441760"/>
+            <a:ext cx="1152000" cy="288000"/>
           </a:xfrm>
           <a:prstGeom prst="roundRect">
             <a:avLst/>
@@ -31642,19 +31654,19 @@
           <a:p>
             <a:pPr algn="ctr"/>
             <a:r>
-              <a:rPr lang="en-US" altLang="zh-CN" sz="800">
+              <a:rPr lang="en-US" altLang="zh-CN" sz="1200">
                 <a:solidFill>
                   <a:sysClr val="windowText" lastClr="000000"/>
                 </a:solidFill>
-                <a:latin typeface="Quicksand Light" panose="00000400000000000000" pitchFamily="2" charset="0"/>
+                <a:latin typeface="Montserrat" panose="00000500000000000000" pitchFamily="2" charset="0"/>
               </a:rPr>
               <a:t>name</a:t>
             </a:r>
-            <a:endParaRPr lang="zh-CN" altLang="en-US" sz="800">
+            <a:endParaRPr lang="zh-CN" altLang="en-US" sz="1200">
               <a:solidFill>
                 <a:sysClr val="windowText" lastClr="000000"/>
               </a:solidFill>
-              <a:latin typeface="Quicksand Light" panose="00000400000000000000" pitchFamily="2" charset="0"/>
+              <a:latin typeface="Montserrat" panose="00000500000000000000" pitchFamily="2" charset="0"/>
             </a:endParaRPr>
           </a:p>
         </p:txBody>
@@ -31673,8 +31685,8 @@
         </p:nvSpPr>
         <p:spPr>
           <a:xfrm>
-            <a:off x="4988680" y="3528000"/>
-            <a:ext cx="900000" cy="216000"/>
+            <a:off x="5111512" y="3773698"/>
+            <a:ext cx="1152000" cy="288000"/>
           </a:xfrm>
           <a:prstGeom prst="roundRect">
             <a:avLst/>
@@ -31710,19 +31722,19 @@
           <a:p>
             <a:pPr algn="ctr"/>
             <a:r>
-              <a:rPr lang="en-US" altLang="zh-CN" sz="800">
+              <a:rPr lang="en-US" altLang="zh-CN" sz="1200">
                 <a:solidFill>
                   <a:sysClr val="windowText" lastClr="000000"/>
                 </a:solidFill>
-                <a:latin typeface="Quicksand Light" panose="00000400000000000000" pitchFamily="2" charset="0"/>
+                <a:latin typeface="Montserrat" panose="00000500000000000000" pitchFamily="2" charset="0"/>
               </a:rPr>
               <a:t>id</a:t>
             </a:r>
-            <a:endParaRPr lang="zh-CN" altLang="en-US" sz="800">
+            <a:endParaRPr lang="zh-CN" altLang="en-US" sz="1200">
               <a:solidFill>
                 <a:sysClr val="windowText" lastClr="000000"/>
               </a:solidFill>
-              <a:latin typeface="Quicksand Light" panose="00000400000000000000" pitchFamily="2" charset="0"/>
+              <a:latin typeface="Montserrat" panose="00000500000000000000" pitchFamily="2" charset="0"/>
             </a:endParaRPr>
           </a:p>
         </p:txBody>
@@ -31741,8 +31753,8 @@
         </p:nvSpPr>
         <p:spPr>
           <a:xfrm>
-            <a:off x="4988680" y="4711650"/>
-            <a:ext cx="900000" cy="216000"/>
+            <a:off x="5111512" y="5101450"/>
+            <a:ext cx="1152000" cy="288000"/>
           </a:xfrm>
           <a:prstGeom prst="roundRect">
             <a:avLst/>
@@ -31778,19 +31790,19 @@
           <a:p>
             <a:pPr algn="ctr"/>
             <a:r>
-              <a:rPr lang="en-US" altLang="zh-CN" sz="800">
+              <a:rPr lang="en-US" altLang="zh-CN" sz="1200">
                 <a:solidFill>
                   <a:sysClr val="windowText" lastClr="000000"/>
                 </a:solidFill>
-                <a:latin typeface="Quicksand Light" panose="00000400000000000000" pitchFamily="2" charset="0"/>
+                <a:latin typeface="Montserrat" panose="00000500000000000000" pitchFamily="2" charset="0"/>
               </a:rPr>
               <a:t>type</a:t>
             </a:r>
-            <a:endParaRPr lang="zh-CN" altLang="en-US" sz="800">
+            <a:endParaRPr lang="zh-CN" altLang="en-US" sz="1200">
               <a:solidFill>
                 <a:sysClr val="windowText" lastClr="000000"/>
               </a:solidFill>
-              <a:latin typeface="Quicksand Light" panose="00000400000000000000" pitchFamily="2" charset="0"/>
+              <a:latin typeface="Montserrat" panose="00000500000000000000" pitchFamily="2" charset="0"/>
             </a:endParaRPr>
           </a:p>
         </p:txBody>
@@ -31813,8 +31825,8 @@
         </p:nvCxnSpPr>
         <p:spPr>
           <a:xfrm flipV="1">
-            <a:off x="3691582" y="2998560"/>
-            <a:ext cx="236127" cy="381720"/>
+            <a:off x="3500510" y="3253822"/>
+            <a:ext cx="236127" cy="497907"/>
           </a:xfrm>
           <a:prstGeom prst="curvedConnector3">
             <a:avLst/>
@@ -31860,8 +31872,8 @@
         </p:nvCxnSpPr>
         <p:spPr>
           <a:xfrm>
-            <a:off x="3691582" y="3380280"/>
-            <a:ext cx="236127" cy="507720"/>
+            <a:off x="3500510" y="3751729"/>
+            <a:ext cx="236127" cy="497907"/>
           </a:xfrm>
           <a:prstGeom prst="curvedConnector3">
             <a:avLst/>
@@ -31904,8 +31916,8 @@
         </p:nvCxnSpPr>
         <p:spPr>
           <a:xfrm>
-            <a:off x="3691582" y="3380280"/>
-            <a:ext cx="236127" cy="1439370"/>
+            <a:off x="3500510" y="3751729"/>
+            <a:ext cx="236127" cy="1493721"/>
           </a:xfrm>
           <a:prstGeom prst="curvedConnector3">
             <a:avLst/>
@@ -31948,8 +31960,8 @@
         </p:nvCxnSpPr>
         <p:spPr>
           <a:xfrm rot="10800000" flipV="1">
-            <a:off x="3691583" y="2358000"/>
-            <a:ext cx="236127" cy="1022280"/>
+            <a:off x="3500511" y="2589945"/>
+            <a:ext cx="236127" cy="1161783"/>
           </a:xfrm>
           <a:prstGeom prst="curvedConnector3">
             <a:avLst/>
@@ -31992,8 +32004,8 @@
         </p:nvCxnSpPr>
         <p:spPr>
           <a:xfrm flipV="1">
-            <a:off x="4827709" y="2106000"/>
-            <a:ext cx="160971" cy="252000"/>
+            <a:off x="4888637" y="2258008"/>
+            <a:ext cx="222875" cy="331938"/>
           </a:xfrm>
           <a:prstGeom prst="curvedConnector3">
             <a:avLst/>
@@ -32037,8 +32049,8 @@
         </p:nvCxnSpPr>
         <p:spPr>
           <a:xfrm rot="10800000">
-            <a:off x="4827710" y="2358000"/>
-            <a:ext cx="160971" cy="252000"/>
+            <a:off x="4888638" y="2589946"/>
+            <a:ext cx="222875" cy="331938"/>
           </a:xfrm>
           <a:prstGeom prst="curvedConnector3">
             <a:avLst/>
@@ -32081,8 +32093,8 @@
         </p:nvCxnSpPr>
         <p:spPr>
           <a:xfrm flipV="1">
-            <a:off x="4827709" y="3384000"/>
-            <a:ext cx="160971" cy="504000"/>
+            <a:off x="4888637" y="3585760"/>
+            <a:ext cx="222875" cy="663876"/>
           </a:xfrm>
           <a:prstGeom prst="curvedConnector3">
             <a:avLst/>
@@ -32108,51 +32120,6 @@
           </a:fontRef>
         </p:style>
       </p:cxnSp>
-      <p:cxnSp>
-        <p:nvCxnSpPr>
-          <p:cNvPr id="20" name="连接符: 曲线 19">
-            <a:extLst>
-              <a:ext uri="{FF2B5EF4-FFF2-40B4-BE49-F238E27FC236}">
-                <a16:creationId xmlns:a16="http://schemas.microsoft.com/office/drawing/2014/main" id="{09626C45-BBC6-47DC-7646-AF112E30BD5E}"/>
-              </a:ext>
-            </a:extLst>
-          </p:cNvPr>
-          <p:cNvCxnSpPr>
-            <a:cxnSpLocks/>
-            <a:stCxn id="101" idx="1"/>
-            <a:endCxn id="5" idx="3"/>
-          </p:cNvCxnSpPr>
-          <p:nvPr/>
-        </p:nvCxnSpPr>
-        <p:spPr>
-          <a:xfrm rot="10800000">
-            <a:off x="4827709" y="3888000"/>
-            <a:ext cx="160970" cy="252000"/>
-          </a:xfrm>
-          <a:prstGeom prst="curvedConnector3">
-            <a:avLst/>
-          </a:prstGeom>
-          <a:ln>
-            <a:solidFill>
-              <a:srgbClr val="FF0000"/>
-            </a:solidFill>
-          </a:ln>
-        </p:spPr>
-        <p:style>
-          <a:lnRef idx="1">
-            <a:schemeClr val="accent1"/>
-          </a:lnRef>
-          <a:fillRef idx="0">
-            <a:schemeClr val="accent1"/>
-          </a:fillRef>
-          <a:effectRef idx="0">
-            <a:schemeClr val="accent1"/>
-          </a:effectRef>
-          <a:fontRef idx="minor">
-            <a:schemeClr val="tx1"/>
-          </a:fontRef>
-        </p:style>
-      </p:cxnSp>
       <p:sp>
         <p:nvSpPr>
           <p:cNvPr id="23" name="矩形: 圆角 22">
@@ -32167,8 +32134,8 @@
         </p:nvSpPr>
         <p:spPr>
           <a:xfrm>
-            <a:off x="4988680" y="2502000"/>
-            <a:ext cx="900000" cy="216000"/>
+            <a:off x="5111512" y="2777884"/>
+            <a:ext cx="1152000" cy="288000"/>
           </a:xfrm>
           <a:prstGeom prst="roundRect">
             <a:avLst/>
@@ -32202,19 +32169,19 @@
           <a:p>
             <a:pPr algn="ctr"/>
             <a:r>
-              <a:rPr lang="en-US" altLang="zh-CN" sz="800">
+              <a:rPr lang="en-US" altLang="zh-CN" sz="1200">
                 <a:solidFill>
                   <a:sysClr val="windowText" lastClr="000000"/>
                 </a:solidFill>
-                <a:latin typeface="Quicksand Light" panose="00000400000000000000" pitchFamily="2" charset="0"/>
+                <a:latin typeface="Montserrat" panose="00000500000000000000" pitchFamily="2" charset="0"/>
               </a:rPr>
               <a:t>id</a:t>
             </a:r>
-            <a:endParaRPr lang="zh-CN" altLang="en-US" sz="800">
+            <a:endParaRPr lang="zh-CN" altLang="en-US" sz="1200">
               <a:solidFill>
                 <a:sysClr val="windowText" lastClr="000000"/>
               </a:solidFill>
-              <a:latin typeface="Quicksand Light" panose="00000400000000000000" pitchFamily="2" charset="0"/>
+              <a:latin typeface="Montserrat" panose="00000500000000000000" pitchFamily="2" charset="0"/>
             </a:endParaRPr>
           </a:p>
         </p:txBody>
@@ -32233,8 +32200,8 @@
         </p:nvSpPr>
         <p:spPr>
           <a:xfrm>
-            <a:off x="4988680" y="2890560"/>
-            <a:ext cx="900000" cy="216000"/>
+            <a:off x="5111512" y="3109822"/>
+            <a:ext cx="1152000" cy="288000"/>
           </a:xfrm>
           <a:prstGeom prst="roundRect">
             <a:avLst/>
@@ -32270,305 +32237,23 @@
           <a:p>
             <a:pPr algn="ctr"/>
             <a:r>
-              <a:rPr lang="en-US" altLang="zh-CN" sz="800">
+              <a:rPr lang="en-US" altLang="zh-CN" sz="1200">
                 <a:solidFill>
                   <a:sysClr val="windowText" lastClr="000000"/>
                 </a:solidFill>
-                <a:latin typeface="Quicksand Light" panose="00000400000000000000" pitchFamily="2" charset="0"/>
+                <a:latin typeface="Montserrat" panose="00000500000000000000" pitchFamily="2" charset="0"/>
               </a:rPr>
               <a:t>for</a:t>
             </a:r>
-            <a:endParaRPr lang="zh-CN" altLang="en-US" sz="800">
+            <a:endParaRPr lang="zh-CN" altLang="en-US" sz="1200">
               <a:solidFill>
                 <a:sysClr val="windowText" lastClr="000000"/>
               </a:solidFill>
-              <a:latin typeface="Quicksand Light" panose="00000400000000000000" pitchFamily="2" charset="0"/>
+              <a:latin typeface="Montserrat" panose="00000500000000000000" pitchFamily="2" charset="0"/>
             </a:endParaRPr>
           </a:p>
         </p:txBody>
       </p:sp>
-      <p:sp>
-        <p:nvSpPr>
-          <p:cNvPr id="25" name="矩形: 圆角 24">
-            <a:extLst>
-              <a:ext uri="{FF2B5EF4-FFF2-40B4-BE49-F238E27FC236}">
-                <a16:creationId xmlns:a16="http://schemas.microsoft.com/office/drawing/2014/main" id="{0C604421-37C1-756C-7B73-6463DCFA65A5}"/>
-              </a:ext>
-            </a:extLst>
-          </p:cNvPr>
-          <p:cNvSpPr/>
-          <p:nvPr/>
-        </p:nvSpPr>
-        <p:spPr>
-          <a:xfrm>
-            <a:off x="6057780" y="1620000"/>
-            <a:ext cx="720000" cy="216000"/>
-          </a:xfrm>
-          <a:prstGeom prst="roundRect">
-            <a:avLst/>
-          </a:prstGeom>
-          <a:noFill/>
-          <a:ln w="12700">
-            <a:noFill/>
-          </a:ln>
-        </p:spPr>
-        <p:style>
-          <a:lnRef idx="2">
-            <a:schemeClr val="accent1">
-              <a:shade val="15000"/>
-            </a:schemeClr>
-          </a:lnRef>
-          <a:fillRef idx="1">
-            <a:schemeClr val="accent1"/>
-          </a:fillRef>
-          <a:effectRef idx="0">
-            <a:schemeClr val="accent1"/>
-          </a:effectRef>
-          <a:fontRef idx="minor">
-            <a:schemeClr val="lt1"/>
-          </a:fontRef>
-        </p:style>
-        <p:txBody>
-          <a:bodyPr rtlCol="0" anchor="ctr"/>
-          <a:lstStyle/>
-          <a:p>
-            <a:pPr algn="just"/>
-            <a:r>
-              <a:rPr lang="en-US" altLang="zh-CN" sz="800">
-                <a:solidFill>
-                  <a:sysClr val="windowText" lastClr="000000"/>
-                </a:solidFill>
-                <a:latin typeface="Quicksand Light" panose="00000400000000000000" pitchFamily="2" charset="0"/>
-              </a:rPr>
-              <a:t>text</a:t>
-            </a:r>
-            <a:endParaRPr lang="zh-CN" altLang="en-US" sz="800">
-              <a:solidFill>
-                <a:sysClr val="windowText" lastClr="000000"/>
-              </a:solidFill>
-              <a:latin typeface="Quicksand Light" panose="00000400000000000000" pitchFamily="2" charset="0"/>
-            </a:endParaRPr>
-          </a:p>
-        </p:txBody>
-      </p:sp>
-      <p:sp>
-        <p:nvSpPr>
-          <p:cNvPr id="26" name="矩形: 圆角 25">
-            <a:extLst>
-              <a:ext uri="{FF2B5EF4-FFF2-40B4-BE49-F238E27FC236}">
-                <a16:creationId xmlns:a16="http://schemas.microsoft.com/office/drawing/2014/main" id="{00038D7F-385D-2345-2DBA-32B639EF5D3A}"/>
-              </a:ext>
-            </a:extLst>
-          </p:cNvPr>
-          <p:cNvSpPr/>
-          <p:nvPr/>
-        </p:nvSpPr>
-        <p:spPr>
-          <a:xfrm>
-            <a:off x="6057780" y="1872000"/>
-            <a:ext cx="720000" cy="216000"/>
-          </a:xfrm>
-          <a:prstGeom prst="roundRect">
-            <a:avLst/>
-          </a:prstGeom>
-          <a:noFill/>
-          <a:ln w="12700">
-            <a:noFill/>
-          </a:ln>
-        </p:spPr>
-        <p:style>
-          <a:lnRef idx="2">
-            <a:schemeClr val="accent1">
-              <a:shade val="15000"/>
-            </a:schemeClr>
-          </a:lnRef>
-          <a:fillRef idx="1">
-            <a:schemeClr val="accent1"/>
-          </a:fillRef>
-          <a:effectRef idx="0">
-            <a:schemeClr val="accent1"/>
-          </a:effectRef>
-          <a:fontRef idx="minor">
-            <a:schemeClr val="lt1"/>
-          </a:fontRef>
-        </p:style>
-        <p:txBody>
-          <a:bodyPr rtlCol="0" anchor="ctr"/>
-          <a:lstStyle/>
-          <a:p>
-            <a:pPr algn="just"/>
-            <a:r>
-              <a:rPr lang="en-US" altLang="zh-CN" sz="800">
-                <a:solidFill>
-                  <a:sysClr val="windowText" lastClr="000000"/>
-                </a:solidFill>
-                <a:latin typeface="Quicksand Light" panose="00000400000000000000" pitchFamily="2" charset="0"/>
-              </a:rPr>
-              <a:t>password</a:t>
-            </a:r>
-            <a:endParaRPr lang="zh-CN" altLang="en-US" sz="800">
-              <a:solidFill>
-                <a:sysClr val="windowText" lastClr="000000"/>
-              </a:solidFill>
-              <a:latin typeface="Quicksand Light" panose="00000400000000000000" pitchFamily="2" charset="0"/>
-            </a:endParaRPr>
-          </a:p>
-        </p:txBody>
-      </p:sp>
-      <p:sp>
-        <p:nvSpPr>
-          <p:cNvPr id="27" name="矩形: 圆角 26">
-            <a:extLst>
-              <a:ext uri="{FF2B5EF4-FFF2-40B4-BE49-F238E27FC236}">
-                <a16:creationId xmlns:a16="http://schemas.microsoft.com/office/drawing/2014/main" id="{8C58B27E-9EDF-2603-8A2C-88C8201B54FE}"/>
-              </a:ext>
-            </a:extLst>
-          </p:cNvPr>
-          <p:cNvSpPr/>
-          <p:nvPr/>
-        </p:nvSpPr>
-        <p:spPr>
-          <a:xfrm>
-            <a:off x="6057780" y="2124000"/>
-            <a:ext cx="720000" cy="216000"/>
-          </a:xfrm>
-          <a:prstGeom prst="roundRect">
-            <a:avLst/>
-          </a:prstGeom>
-          <a:noFill/>
-          <a:ln w="12700">
-            <a:noFill/>
-          </a:ln>
-        </p:spPr>
-        <p:style>
-          <a:lnRef idx="2">
-            <a:schemeClr val="accent1">
-              <a:shade val="15000"/>
-            </a:schemeClr>
-          </a:lnRef>
-          <a:fillRef idx="1">
-            <a:schemeClr val="accent1"/>
-          </a:fillRef>
-          <a:effectRef idx="0">
-            <a:schemeClr val="accent1"/>
-          </a:effectRef>
-          <a:fontRef idx="minor">
-            <a:schemeClr val="lt1"/>
-          </a:fontRef>
-        </p:style>
-        <p:txBody>
-          <a:bodyPr rtlCol="0" anchor="ctr"/>
-          <a:lstStyle/>
-          <a:p>
-            <a:pPr algn="just"/>
-            <a:r>
-              <a:rPr lang="en-US" altLang="zh-CN" sz="800">
-                <a:solidFill>
-                  <a:sysClr val="windowText" lastClr="000000"/>
-                </a:solidFill>
-                <a:latin typeface="Quicksand Light" panose="00000400000000000000" pitchFamily="2" charset="0"/>
-              </a:rPr>
-              <a:t>radio</a:t>
-            </a:r>
-            <a:endParaRPr lang="zh-CN" altLang="en-US" sz="800">
-              <a:solidFill>
-                <a:sysClr val="windowText" lastClr="000000"/>
-              </a:solidFill>
-              <a:latin typeface="Quicksand Light" panose="00000400000000000000" pitchFamily="2" charset="0"/>
-            </a:endParaRPr>
-          </a:p>
-        </p:txBody>
-      </p:sp>
-      <p:cxnSp>
-        <p:nvCxnSpPr>
-          <p:cNvPr id="28" name="连接符: 曲线 27">
-            <a:extLst>
-              <a:ext uri="{FF2B5EF4-FFF2-40B4-BE49-F238E27FC236}">
-                <a16:creationId xmlns:a16="http://schemas.microsoft.com/office/drawing/2014/main" id="{7DFA1551-73F5-4C28-AE50-579B119B5BF0}"/>
-              </a:ext>
-            </a:extLst>
-          </p:cNvPr>
-          <p:cNvCxnSpPr>
-            <a:cxnSpLocks/>
-            <a:stCxn id="7" idx="3"/>
-            <a:endCxn id="25" idx="1"/>
-          </p:cNvCxnSpPr>
-          <p:nvPr/>
-        </p:nvCxnSpPr>
-        <p:spPr>
-          <a:xfrm flipV="1">
-            <a:off x="5888680" y="1728000"/>
-            <a:ext cx="169100" cy="378000"/>
-          </a:xfrm>
-          <a:prstGeom prst="curvedConnector3">
-            <a:avLst/>
-          </a:prstGeom>
-          <a:ln>
-            <a:solidFill>
-              <a:srgbClr val="FFC000"/>
-            </a:solidFill>
-          </a:ln>
-        </p:spPr>
-        <p:style>
-          <a:lnRef idx="1">
-            <a:schemeClr val="accent1"/>
-          </a:lnRef>
-          <a:fillRef idx="0">
-            <a:schemeClr val="accent1"/>
-          </a:fillRef>
-          <a:effectRef idx="0">
-            <a:schemeClr val="accent1"/>
-          </a:effectRef>
-          <a:fontRef idx="minor">
-            <a:schemeClr val="tx1"/>
-          </a:fontRef>
-        </p:style>
-      </p:cxnSp>
-      <p:cxnSp>
-        <p:nvCxnSpPr>
-          <p:cNvPr id="34" name="连接符: 曲线 33">
-            <a:extLst>
-              <a:ext uri="{FF2B5EF4-FFF2-40B4-BE49-F238E27FC236}">
-                <a16:creationId xmlns:a16="http://schemas.microsoft.com/office/drawing/2014/main" id="{5727ED6B-E94F-5BBD-2645-A22F1B3616AA}"/>
-              </a:ext>
-            </a:extLst>
-          </p:cNvPr>
-          <p:cNvCxnSpPr>
-            <a:cxnSpLocks/>
-            <a:stCxn id="7" idx="3"/>
-            <a:endCxn id="27" idx="1"/>
-          </p:cNvCxnSpPr>
-          <p:nvPr/>
-        </p:nvCxnSpPr>
-        <p:spPr>
-          <a:xfrm>
-            <a:off x="5888680" y="2106000"/>
-            <a:ext cx="169100" cy="126000"/>
-          </a:xfrm>
-          <a:prstGeom prst="curvedConnector3">
-            <a:avLst/>
-          </a:prstGeom>
-          <a:ln>
-            <a:solidFill>
-              <a:srgbClr val="FFC000"/>
-            </a:solidFill>
-          </a:ln>
-        </p:spPr>
-        <p:style>
-          <a:lnRef idx="1">
-            <a:schemeClr val="accent1"/>
-          </a:lnRef>
-          <a:fillRef idx="0">
-            <a:schemeClr val="accent1"/>
-          </a:fillRef>
-          <a:effectRef idx="0">
-            <a:schemeClr val="accent1"/>
-          </a:effectRef>
-          <a:fontRef idx="minor">
-            <a:schemeClr val="tx1"/>
-          </a:fontRef>
-        </p:style>
-      </p:cxnSp>
       <p:cxnSp>
         <p:nvCxnSpPr>
           <p:cNvPr id="39" name="直接连接符 38">
@@ -32587,8 +32272,8 @@
         </p:nvCxnSpPr>
         <p:spPr>
           <a:xfrm>
-            <a:off x="4827709" y="4819650"/>
-            <a:ext cx="160971" cy="0"/>
+            <a:off x="4888637" y="5245450"/>
+            <a:ext cx="222875" cy="0"/>
           </a:xfrm>
           <a:prstGeom prst="line">
             <a:avLst/>
@@ -32632,8 +32317,8 @@
         </p:nvCxnSpPr>
         <p:spPr>
           <a:xfrm>
-            <a:off x="4827709" y="2998560"/>
-            <a:ext cx="160971" cy="0"/>
+            <a:off x="4888637" y="3253822"/>
+            <a:ext cx="222875" cy="0"/>
           </a:xfrm>
           <a:prstGeom prst="line">
             <a:avLst/>
@@ -32680,8 +32365,8 @@
         </p:nvCxnSpPr>
         <p:spPr>
           <a:xfrm>
-            <a:off x="4827709" y="2358000"/>
-            <a:ext cx="160971" cy="0"/>
+            <a:off x="4888637" y="2589946"/>
+            <a:ext cx="222875" cy="0"/>
           </a:xfrm>
           <a:prstGeom prst="line">
             <a:avLst/>
@@ -32709,10 +32394,10 @@
       </p:cxnSp>
       <p:sp>
         <p:nvSpPr>
-          <p:cNvPr id="50" name="矩形: 圆角 49">
-            <a:extLst>
-              <a:ext uri="{FF2B5EF4-FFF2-40B4-BE49-F238E27FC236}">
-                <a16:creationId xmlns:a16="http://schemas.microsoft.com/office/drawing/2014/main" id="{58AAABB9-3154-4A0D-0375-6856BBE16E89}"/>
+          <p:cNvPr id="58" name="矩形: 圆角 57">
+            <a:extLst>
+              <a:ext uri="{FF2B5EF4-FFF2-40B4-BE49-F238E27FC236}">
+                <a16:creationId xmlns:a16="http://schemas.microsoft.com/office/drawing/2014/main" id="{BCD0C830-E273-C6A9-558C-7D736BFE7434}"/>
               </a:ext>
             </a:extLst>
           </p:cNvPr>
@@ -32721,74 +32406,8 @@
         </p:nvSpPr>
         <p:spPr>
           <a:xfrm>
-            <a:off x="6866970" y="1619950"/>
-            <a:ext cx="900000" cy="216000"/>
-          </a:xfrm>
-          <a:prstGeom prst="roundRect">
-            <a:avLst/>
-          </a:prstGeom>
-          <a:solidFill>
-            <a:srgbClr val="FDECDB"/>
-          </a:solidFill>
-          <a:ln w="12700">
-            <a:noFill/>
-          </a:ln>
-        </p:spPr>
-        <p:style>
-          <a:lnRef idx="2">
-            <a:schemeClr val="accent1">
-              <a:shade val="15000"/>
-            </a:schemeClr>
-          </a:lnRef>
-          <a:fillRef idx="1">
-            <a:schemeClr val="accent1"/>
-          </a:fillRef>
-          <a:effectRef idx="0">
-            <a:schemeClr val="accent1"/>
-          </a:effectRef>
-          <a:fontRef idx="minor">
-            <a:schemeClr val="lt1"/>
-          </a:fontRef>
-        </p:style>
-        <p:txBody>
-          <a:bodyPr rtlCol="0" anchor="ctr"/>
-          <a:lstStyle/>
-          <a:p>
-            <a:pPr algn="ctr"/>
-            <a:r>
-              <a:rPr lang="en-US" altLang="zh-CN" sz="800">
-                <a:solidFill>
-                  <a:sysClr val="windowText" lastClr="000000"/>
-                </a:solidFill>
-                <a:latin typeface="Quicksand Light" panose="00000400000000000000" pitchFamily="2" charset="0"/>
-              </a:rPr>
-              <a:t>placeholder</a:t>
-            </a:r>
-            <a:endParaRPr lang="zh-CN" altLang="en-US" sz="800">
-              <a:solidFill>
-                <a:sysClr val="windowText" lastClr="000000"/>
-              </a:solidFill>
-              <a:latin typeface="Quicksand Light" panose="00000400000000000000" pitchFamily="2" charset="0"/>
-            </a:endParaRPr>
-          </a:p>
-        </p:txBody>
-      </p:sp>
-      <p:sp>
-        <p:nvSpPr>
-          <p:cNvPr id="58" name="矩形: 圆角 57">
-            <a:extLst>
-              <a:ext uri="{FF2B5EF4-FFF2-40B4-BE49-F238E27FC236}">
-                <a16:creationId xmlns:a16="http://schemas.microsoft.com/office/drawing/2014/main" id="{BCD0C830-E273-C6A9-558C-7D736BFE7434}"/>
-              </a:ext>
-            </a:extLst>
-          </p:cNvPr>
-          <p:cNvSpPr/>
-          <p:nvPr/>
-        </p:nvSpPr>
-        <p:spPr>
-          <a:xfrm>
-            <a:off x="4988680" y="3780000"/>
-            <a:ext cx="900000" cy="216000"/>
+            <a:off x="5111512" y="4105636"/>
+            <a:ext cx="1152000" cy="288000"/>
           </a:xfrm>
           <a:prstGeom prst="roundRect">
             <a:avLst/>
@@ -32824,19 +32443,19 @@
           <a:p>
             <a:pPr algn="ctr"/>
             <a:r>
-              <a:rPr lang="en-US" altLang="zh-CN" sz="800">
+              <a:rPr lang="en-US" altLang="zh-CN" sz="1200">
                 <a:solidFill>
                   <a:sysClr val="windowText" lastClr="000000"/>
                 </a:solidFill>
-                <a:latin typeface="Quicksand Light" panose="00000400000000000000" pitchFamily="2" charset="0"/>
+                <a:latin typeface="Montserrat" panose="00000500000000000000" pitchFamily="2" charset="0"/>
               </a:rPr>
               <a:t>placeholder</a:t>
             </a:r>
-            <a:endParaRPr lang="zh-CN" altLang="en-US" sz="800">
+            <a:endParaRPr lang="zh-CN" altLang="en-US" sz="1200">
               <a:solidFill>
                 <a:sysClr val="windowText" lastClr="000000"/>
               </a:solidFill>
-              <a:latin typeface="Quicksand Light" panose="00000400000000000000" pitchFamily="2" charset="0"/>
+              <a:latin typeface="Montserrat" panose="00000500000000000000" pitchFamily="2" charset="0"/>
             </a:endParaRPr>
           </a:p>
         </p:txBody>
@@ -32855,8 +32474,8 @@
         </p:nvSpPr>
         <p:spPr>
           <a:xfrm>
-            <a:off x="6096000" y="4459650"/>
-            <a:ext cx="720000" cy="216000"/>
+            <a:off x="6418143" y="4769512"/>
+            <a:ext cx="1152000" cy="288000"/>
           </a:xfrm>
           <a:prstGeom prst="roundRect">
             <a:avLst/>
@@ -32888,19 +32507,19 @@
           <a:p>
             <a:pPr algn="just"/>
             <a:r>
-              <a:rPr lang="en-US" altLang="zh-CN" sz="800">
+              <a:rPr lang="en-US" altLang="zh-CN" sz="1200" dirty="0">
                 <a:solidFill>
                   <a:sysClr val="windowText" lastClr="000000"/>
                 </a:solidFill>
-                <a:latin typeface="Quicksand Light" panose="00000400000000000000" pitchFamily="2" charset="0"/>
+                <a:latin typeface="Montserrat" panose="00000500000000000000" pitchFamily="2" charset="0"/>
               </a:rPr>
               <a:t>submit</a:t>
             </a:r>
-            <a:endParaRPr lang="zh-CN" altLang="en-US" sz="800">
+            <a:endParaRPr lang="zh-CN" altLang="en-US" sz="1200" dirty="0">
               <a:solidFill>
                 <a:sysClr val="windowText" lastClr="000000"/>
               </a:solidFill>
-              <a:latin typeface="Quicksand Light" panose="00000400000000000000" pitchFamily="2" charset="0"/>
+              <a:latin typeface="Montserrat" panose="00000500000000000000" pitchFamily="2" charset="0"/>
             </a:endParaRPr>
           </a:p>
         </p:txBody>
@@ -32919,8 +32538,8 @@
         </p:nvSpPr>
         <p:spPr>
           <a:xfrm>
-            <a:off x="6096000" y="4711650"/>
-            <a:ext cx="720000" cy="216000"/>
+            <a:off x="6418143" y="5101450"/>
+            <a:ext cx="1152000" cy="288000"/>
           </a:xfrm>
           <a:prstGeom prst="roundRect">
             <a:avLst/>
@@ -32952,19 +32571,19 @@
           <a:p>
             <a:pPr algn="just"/>
             <a:r>
-              <a:rPr lang="en-US" altLang="zh-CN" sz="800">
+              <a:rPr lang="en-US" altLang="zh-CN" sz="1200" dirty="0">
                 <a:solidFill>
                   <a:sysClr val="windowText" lastClr="000000"/>
                 </a:solidFill>
-                <a:latin typeface="Quicksand Light" panose="00000400000000000000" pitchFamily="2" charset="0"/>
+                <a:latin typeface="Montserrat" panose="00000500000000000000" pitchFamily="2" charset="0"/>
               </a:rPr>
               <a:t>reset</a:t>
             </a:r>
-            <a:endParaRPr lang="zh-CN" altLang="en-US" sz="800">
+            <a:endParaRPr lang="zh-CN" altLang="en-US" sz="1200" dirty="0">
               <a:solidFill>
                 <a:sysClr val="windowText" lastClr="000000"/>
               </a:solidFill>
-              <a:latin typeface="Quicksand Light" panose="00000400000000000000" pitchFamily="2" charset="0"/>
+              <a:latin typeface="Montserrat" panose="00000500000000000000" pitchFamily="2" charset="0"/>
             </a:endParaRPr>
           </a:p>
         </p:txBody>
@@ -32983,8 +32602,8 @@
         </p:nvSpPr>
         <p:spPr>
           <a:xfrm>
-            <a:off x="6096000" y="4963650"/>
-            <a:ext cx="720000" cy="216000"/>
+            <a:off x="6418143" y="5433389"/>
+            <a:ext cx="1152000" cy="288000"/>
           </a:xfrm>
           <a:prstGeom prst="roundRect">
             <a:avLst/>
@@ -33016,46 +32635,48 @@
           <a:p>
             <a:pPr algn="just"/>
             <a:r>
-              <a:rPr lang="en-US" altLang="zh-CN" sz="800">
+              <a:rPr lang="en-US" altLang="zh-CN" sz="1200" dirty="0">
                 <a:solidFill>
                   <a:sysClr val="windowText" lastClr="000000"/>
                 </a:solidFill>
-                <a:latin typeface="Quicksand Light" panose="00000400000000000000" pitchFamily="2" charset="0"/>
+                <a:latin typeface="Montserrat" panose="00000500000000000000" pitchFamily="2" charset="0"/>
               </a:rPr>
               <a:t>button</a:t>
             </a:r>
-            <a:endParaRPr lang="zh-CN" altLang="en-US" sz="800">
+            <a:endParaRPr lang="zh-CN" altLang="en-US" sz="1200" dirty="0">
               <a:solidFill>
                 <a:sysClr val="windowText" lastClr="000000"/>
               </a:solidFill>
-              <a:latin typeface="Quicksand Light" panose="00000400000000000000" pitchFamily="2" charset="0"/>
+              <a:latin typeface="Montserrat" panose="00000500000000000000" pitchFamily="2" charset="0"/>
             </a:endParaRPr>
           </a:p>
         </p:txBody>
       </p:sp>
       <p:cxnSp>
         <p:nvCxnSpPr>
-          <p:cNvPr id="65" name="直接连接符 64">
-            <a:extLst>
-              <a:ext uri="{FF2B5EF4-FFF2-40B4-BE49-F238E27FC236}">
-                <a16:creationId xmlns:a16="http://schemas.microsoft.com/office/drawing/2014/main" id="{0AD81138-BEF5-5730-C7E8-69B7F57D6411}"/>
+          <p:cNvPr id="69" name="连接符: 曲线 68">
+            <a:extLst>
+              <a:ext uri="{FF2B5EF4-FFF2-40B4-BE49-F238E27FC236}">
+                <a16:creationId xmlns:a16="http://schemas.microsoft.com/office/drawing/2014/main" id="{C3880AB9-44DB-574E-16DF-557B03E0D9EB}"/>
               </a:ext>
             </a:extLst>
           </p:cNvPr>
           <p:cNvCxnSpPr>
             <a:cxnSpLocks/>
-            <a:stCxn id="11" idx="3"/>
-            <a:endCxn id="63" idx="1"/>
+            <a:stCxn id="62" idx="1"/>
+            <a:endCxn id="11" idx="3"/>
           </p:cNvCxnSpPr>
           <p:nvPr/>
         </p:nvCxnSpPr>
         <p:spPr>
-          <a:xfrm>
-            <a:off x="5888680" y="4819650"/>
-            <a:ext cx="207320" cy="0"/>
-          </a:xfrm>
-          <a:prstGeom prst="line">
-            <a:avLst/>
+          <a:xfrm rot="10800000" flipV="1">
+            <a:off x="6263513" y="4913512"/>
+            <a:ext cx="154631" cy="331938"/>
+          </a:xfrm>
+          <a:prstGeom prst="curvedConnector3">
+            <a:avLst>
+              <a:gd name="adj1" fmla="val 50000"/>
+            </a:avLst>
           </a:prstGeom>
           <a:ln>
             <a:solidFill>
@@ -33080,26 +32701,29 @@
       </p:cxnSp>
       <p:cxnSp>
         <p:nvCxnSpPr>
-          <p:cNvPr id="69" name="连接符: 曲线 68">
-            <a:extLst>
-              <a:ext uri="{FF2B5EF4-FFF2-40B4-BE49-F238E27FC236}">
-                <a16:creationId xmlns:a16="http://schemas.microsoft.com/office/drawing/2014/main" id="{C3880AB9-44DB-574E-16DF-557B03E0D9EB}"/>
+          <p:cNvPr id="71" name="连接符: 曲线 70">
+            <a:extLst>
+              <a:ext uri="{FF2B5EF4-FFF2-40B4-BE49-F238E27FC236}">
+                <a16:creationId xmlns:a16="http://schemas.microsoft.com/office/drawing/2014/main" id="{42E1D754-A645-B651-5F08-3F63927D9AAD}"/>
               </a:ext>
             </a:extLst>
           </p:cNvPr>
           <p:cNvCxnSpPr>
-            <a:stCxn id="62" idx="1"/>
+            <a:cxnSpLocks/>
+            <a:stCxn id="64" idx="1"/>
             <a:endCxn id="11" idx="3"/>
           </p:cNvCxnSpPr>
           <p:nvPr/>
         </p:nvCxnSpPr>
         <p:spPr>
-          <a:xfrm rot="10800000" flipV="1">
-            <a:off x="5888680" y="4567650"/>
-            <a:ext cx="207320" cy="252000"/>
+          <a:xfrm rot="10800000">
+            <a:off x="6263513" y="5245451"/>
+            <a:ext cx="154631" cy="331939"/>
           </a:xfrm>
           <a:prstGeom prst="curvedConnector3">
-            <a:avLst/>
+            <a:avLst>
+              <a:gd name="adj1" fmla="val 50000"/>
+            </a:avLst>
           </a:prstGeom>
           <a:ln>
             <a:solidFill>
@@ -33122,314 +32746,6 @@
           </a:fontRef>
         </p:style>
       </p:cxnSp>
-      <p:cxnSp>
-        <p:nvCxnSpPr>
-          <p:cNvPr id="71" name="连接符: 曲线 70">
-            <a:extLst>
-              <a:ext uri="{FF2B5EF4-FFF2-40B4-BE49-F238E27FC236}">
-                <a16:creationId xmlns:a16="http://schemas.microsoft.com/office/drawing/2014/main" id="{42E1D754-A645-B651-5F08-3F63927D9AAD}"/>
-              </a:ext>
-            </a:extLst>
-          </p:cNvPr>
-          <p:cNvCxnSpPr>
-            <a:stCxn id="64" idx="1"/>
-            <a:endCxn id="11" idx="3"/>
-          </p:cNvCxnSpPr>
-          <p:nvPr/>
-        </p:nvCxnSpPr>
-        <p:spPr>
-          <a:xfrm rot="10800000">
-            <a:off x="5888680" y="4819650"/>
-            <a:ext cx="207320" cy="252000"/>
-          </a:xfrm>
-          <a:prstGeom prst="curvedConnector3">
-            <a:avLst/>
-          </a:prstGeom>
-          <a:ln>
-            <a:solidFill>
-              <a:srgbClr val="92D050"/>
-            </a:solidFill>
-          </a:ln>
-        </p:spPr>
-        <p:style>
-          <a:lnRef idx="1">
-            <a:schemeClr val="accent1"/>
-          </a:lnRef>
-          <a:fillRef idx="0">
-            <a:schemeClr val="accent1"/>
-          </a:fillRef>
-          <a:effectRef idx="0">
-            <a:schemeClr val="accent1"/>
-          </a:effectRef>
-          <a:fontRef idx="minor">
-            <a:schemeClr val="tx1"/>
-          </a:fontRef>
-        </p:style>
-      </p:cxnSp>
-      <p:sp>
-        <p:nvSpPr>
-          <p:cNvPr id="72" name="矩形: 圆角 71">
-            <a:extLst>
-              <a:ext uri="{FF2B5EF4-FFF2-40B4-BE49-F238E27FC236}">
-                <a16:creationId xmlns:a16="http://schemas.microsoft.com/office/drawing/2014/main" id="{903E92A5-949C-FBA0-49E2-DEA3E21FC78D}"/>
-              </a:ext>
-            </a:extLst>
-          </p:cNvPr>
-          <p:cNvSpPr/>
-          <p:nvPr/>
-        </p:nvSpPr>
-        <p:spPr>
-          <a:xfrm>
-            <a:off x="6866970" y="2123950"/>
-            <a:ext cx="900000" cy="216000"/>
-          </a:xfrm>
-          <a:prstGeom prst="roundRect">
-            <a:avLst/>
-          </a:prstGeom>
-          <a:solidFill>
-            <a:srgbClr val="FDECDB"/>
-          </a:solidFill>
-          <a:ln w="12700">
-            <a:noFill/>
-          </a:ln>
-        </p:spPr>
-        <p:style>
-          <a:lnRef idx="2">
-            <a:schemeClr val="accent1">
-              <a:shade val="15000"/>
-            </a:schemeClr>
-          </a:lnRef>
-          <a:fillRef idx="1">
-            <a:schemeClr val="accent1"/>
-          </a:fillRef>
-          <a:effectRef idx="0">
-            <a:schemeClr val="accent1"/>
-          </a:effectRef>
-          <a:fontRef idx="minor">
-            <a:schemeClr val="lt1"/>
-          </a:fontRef>
-        </p:style>
-        <p:txBody>
-          <a:bodyPr rtlCol="0" anchor="ctr"/>
-          <a:lstStyle/>
-          <a:p>
-            <a:pPr algn="ctr"/>
-            <a:r>
-              <a:rPr lang="en-US" altLang="zh-CN" sz="800">
-                <a:solidFill>
-                  <a:sysClr val="windowText" lastClr="000000"/>
-                </a:solidFill>
-                <a:latin typeface="Quicksand Light" panose="00000400000000000000" pitchFamily="2" charset="0"/>
-              </a:rPr>
-              <a:t>value</a:t>
-            </a:r>
-            <a:endParaRPr lang="zh-CN" altLang="en-US" sz="800">
-              <a:solidFill>
-                <a:sysClr val="windowText" lastClr="000000"/>
-              </a:solidFill>
-              <a:latin typeface="Quicksand Light" panose="00000400000000000000" pitchFamily="2" charset="0"/>
-            </a:endParaRPr>
-          </a:p>
-        </p:txBody>
-      </p:sp>
-      <p:sp>
-        <p:nvSpPr>
-          <p:cNvPr id="73" name="矩形: 圆角 72">
-            <a:extLst>
-              <a:ext uri="{FF2B5EF4-FFF2-40B4-BE49-F238E27FC236}">
-                <a16:creationId xmlns:a16="http://schemas.microsoft.com/office/drawing/2014/main" id="{B2A026AB-1FE7-E13C-3690-2D59A7DC0E76}"/>
-              </a:ext>
-            </a:extLst>
-          </p:cNvPr>
-          <p:cNvSpPr/>
-          <p:nvPr/>
-        </p:nvSpPr>
-        <p:spPr>
-          <a:xfrm>
-            <a:off x="6866970" y="2627950"/>
-            <a:ext cx="900000" cy="216000"/>
-          </a:xfrm>
-          <a:prstGeom prst="roundRect">
-            <a:avLst/>
-          </a:prstGeom>
-          <a:solidFill>
-            <a:srgbClr val="FDECDB"/>
-          </a:solidFill>
-          <a:ln w="12700">
-            <a:noFill/>
-          </a:ln>
-        </p:spPr>
-        <p:style>
-          <a:lnRef idx="2">
-            <a:schemeClr val="accent1">
-              <a:shade val="15000"/>
-            </a:schemeClr>
-          </a:lnRef>
-          <a:fillRef idx="1">
-            <a:schemeClr val="accent1"/>
-          </a:fillRef>
-          <a:effectRef idx="0">
-            <a:schemeClr val="accent1"/>
-          </a:effectRef>
-          <a:fontRef idx="minor">
-            <a:schemeClr val="lt1"/>
-          </a:fontRef>
-        </p:style>
-        <p:txBody>
-          <a:bodyPr rtlCol="0" anchor="ctr"/>
-          <a:lstStyle/>
-          <a:p>
-            <a:pPr algn="ctr"/>
-            <a:r>
-              <a:rPr lang="en-US" altLang="zh-CN" sz="800">
-                <a:solidFill>
-                  <a:sysClr val="windowText" lastClr="000000"/>
-                </a:solidFill>
-                <a:latin typeface="Quicksand Light" panose="00000400000000000000" pitchFamily="2" charset="0"/>
-              </a:rPr>
-              <a:t>hidden</a:t>
-            </a:r>
-            <a:endParaRPr lang="zh-CN" altLang="en-US" sz="800">
-              <a:solidFill>
-                <a:sysClr val="windowText" lastClr="000000"/>
-              </a:solidFill>
-              <a:latin typeface="Quicksand Light" panose="00000400000000000000" pitchFamily="2" charset="0"/>
-            </a:endParaRPr>
-          </a:p>
-        </p:txBody>
-      </p:sp>
-      <p:sp>
-        <p:nvSpPr>
-          <p:cNvPr id="99" name="矩形: 圆角 98">
-            <a:extLst>
-              <a:ext uri="{FF2B5EF4-FFF2-40B4-BE49-F238E27FC236}">
-                <a16:creationId xmlns:a16="http://schemas.microsoft.com/office/drawing/2014/main" id="{E65A18CE-ACBE-A555-CD25-C5D31C3EF1F8}"/>
-              </a:ext>
-            </a:extLst>
-          </p:cNvPr>
-          <p:cNvSpPr/>
-          <p:nvPr/>
-        </p:nvSpPr>
-        <p:spPr>
-          <a:xfrm>
-            <a:off x="6866970" y="2375950"/>
-            <a:ext cx="900000" cy="216000"/>
-          </a:xfrm>
-          <a:prstGeom prst="roundRect">
-            <a:avLst/>
-          </a:prstGeom>
-          <a:solidFill>
-            <a:srgbClr val="FDECDB"/>
-          </a:solidFill>
-          <a:ln w="12700">
-            <a:noFill/>
-          </a:ln>
-        </p:spPr>
-        <p:style>
-          <a:lnRef idx="2">
-            <a:schemeClr val="accent1">
-              <a:shade val="15000"/>
-            </a:schemeClr>
-          </a:lnRef>
-          <a:fillRef idx="1">
-            <a:schemeClr val="accent1"/>
-          </a:fillRef>
-          <a:effectRef idx="0">
-            <a:schemeClr val="accent1"/>
-          </a:effectRef>
-          <a:fontRef idx="minor">
-            <a:schemeClr val="lt1"/>
-          </a:fontRef>
-        </p:style>
-        <p:txBody>
-          <a:bodyPr rtlCol="0" anchor="ctr"/>
-          <a:lstStyle/>
-          <a:p>
-            <a:pPr algn="ctr"/>
-            <a:r>
-              <a:rPr lang="en-US" altLang="zh-CN" sz="800">
-                <a:solidFill>
-                  <a:sysClr val="windowText" lastClr="000000"/>
-                </a:solidFill>
-                <a:latin typeface="Quicksand Light" panose="00000400000000000000" pitchFamily="2" charset="0"/>
-              </a:rPr>
-              <a:t>checked</a:t>
-            </a:r>
-            <a:endParaRPr lang="zh-CN" altLang="en-US" sz="800">
-              <a:solidFill>
-                <a:sysClr val="windowText" lastClr="000000"/>
-              </a:solidFill>
-              <a:latin typeface="Quicksand Light" panose="00000400000000000000" pitchFamily="2" charset="0"/>
-            </a:endParaRPr>
-          </a:p>
-        </p:txBody>
-      </p:sp>
-      <p:sp>
-        <p:nvSpPr>
-          <p:cNvPr id="100" name="矩形: 圆角 99">
-            <a:extLst>
-              <a:ext uri="{FF2B5EF4-FFF2-40B4-BE49-F238E27FC236}">
-                <a16:creationId xmlns:a16="http://schemas.microsoft.com/office/drawing/2014/main" id="{7379FF89-A584-320C-1B6B-9E2F4C8E96E1}"/>
-              </a:ext>
-            </a:extLst>
-          </p:cNvPr>
-          <p:cNvSpPr/>
-          <p:nvPr/>
-        </p:nvSpPr>
-        <p:spPr>
-          <a:xfrm>
-            <a:off x="6866970" y="1367950"/>
-            <a:ext cx="900000" cy="216000"/>
-          </a:xfrm>
-          <a:prstGeom prst="roundRect">
-            <a:avLst/>
-          </a:prstGeom>
-          <a:solidFill>
-            <a:srgbClr val="FDECDB"/>
-          </a:solidFill>
-          <a:ln w="12700">
-            <a:noFill/>
-          </a:ln>
-        </p:spPr>
-        <p:style>
-          <a:lnRef idx="2">
-            <a:schemeClr val="accent1">
-              <a:shade val="15000"/>
-            </a:schemeClr>
-          </a:lnRef>
-          <a:fillRef idx="1">
-            <a:schemeClr val="accent1"/>
-          </a:fillRef>
-          <a:effectRef idx="0">
-            <a:schemeClr val="accent1"/>
-          </a:effectRef>
-          <a:fontRef idx="minor">
-            <a:schemeClr val="lt1"/>
-          </a:fontRef>
-        </p:style>
-        <p:txBody>
-          <a:bodyPr rtlCol="0" anchor="ctr"/>
-          <a:lstStyle/>
-          <a:p>
-            <a:pPr algn="ctr"/>
-            <a:r>
-              <a:rPr lang="en-US" altLang="zh-CN" sz="800">
-                <a:solidFill>
-                  <a:sysClr val="windowText" lastClr="000000"/>
-                </a:solidFill>
-                <a:latin typeface="Quicksand Light" panose="00000400000000000000" pitchFamily="2" charset="0"/>
-              </a:rPr>
-              <a:t>maxlength</a:t>
-            </a:r>
-            <a:endParaRPr lang="zh-CN" altLang="en-US" sz="800">
-              <a:solidFill>
-                <a:sysClr val="windowText" lastClr="000000"/>
-              </a:solidFill>
-              <a:latin typeface="Quicksand Light" panose="00000400000000000000" pitchFamily="2" charset="0"/>
-            </a:endParaRPr>
-          </a:p>
-        </p:txBody>
-      </p:sp>
       <p:sp>
         <p:nvSpPr>
           <p:cNvPr id="101" name="矩形: 圆角 100">
@@ -33444,8 +32760,8 @@
         </p:nvSpPr>
         <p:spPr>
           <a:xfrm>
-            <a:off x="4988679" y="4032000"/>
-            <a:ext cx="900000" cy="216000"/>
+            <a:off x="5111511" y="4437574"/>
+            <a:ext cx="1152000" cy="288000"/>
           </a:xfrm>
           <a:prstGeom prst="roundRect">
             <a:avLst/>
@@ -33481,19 +32797,19 @@
           <a:p>
             <a:pPr algn="ctr"/>
             <a:r>
-              <a:rPr lang="en-US" altLang="zh-CN" sz="800">
+              <a:rPr lang="en-US" altLang="zh-CN" sz="1200" dirty="0">
                 <a:solidFill>
                   <a:sysClr val="windowText" lastClr="000000"/>
                 </a:solidFill>
-                <a:latin typeface="Quicksand Light" panose="00000400000000000000" pitchFamily="2" charset="0"/>
+                <a:latin typeface="Montserrat" panose="00000500000000000000" pitchFamily="2" charset="0"/>
               </a:rPr>
               <a:t>maxlength</a:t>
             </a:r>
-            <a:endParaRPr lang="zh-CN" altLang="en-US" sz="800">
+            <a:endParaRPr lang="zh-CN" altLang="en-US" sz="1200" dirty="0">
               <a:solidFill>
                 <a:sysClr val="windowText" lastClr="000000"/>
               </a:solidFill>
-              <a:latin typeface="Quicksand Light" panose="00000400000000000000" pitchFamily="2" charset="0"/>
+              <a:latin typeface="Montserrat" panose="00000500000000000000" pitchFamily="2" charset="0"/>
             </a:endParaRPr>
           </a:p>
         </p:txBody>
@@ -33516,8 +32832,8 @@
         </p:nvCxnSpPr>
         <p:spPr>
           <a:xfrm rot="10800000">
-            <a:off x="4827709" y="3888000"/>
-            <a:ext cx="160970" cy="511200"/>
+            <a:off x="4888637" y="4249636"/>
+            <a:ext cx="222874" cy="663876"/>
           </a:xfrm>
           <a:prstGeom prst="curvedConnector3">
             <a:avLst>
@@ -33545,277 +32861,6 @@
           </a:fontRef>
         </p:style>
       </p:cxnSp>
-      <p:cxnSp>
-        <p:nvCxnSpPr>
-          <p:cNvPr id="105" name="连接符: 曲线 104">
-            <a:extLst>
-              <a:ext uri="{FF2B5EF4-FFF2-40B4-BE49-F238E27FC236}">
-                <a16:creationId xmlns:a16="http://schemas.microsoft.com/office/drawing/2014/main" id="{C588CD9F-21AB-BD77-5679-38D1DCB1886E}"/>
-              </a:ext>
-            </a:extLst>
-          </p:cNvPr>
-          <p:cNvCxnSpPr>
-            <a:cxnSpLocks/>
-            <a:stCxn id="10" idx="1"/>
-            <a:endCxn id="5" idx="3"/>
-          </p:cNvCxnSpPr>
-          <p:nvPr/>
-        </p:nvCxnSpPr>
-        <p:spPr>
-          <a:xfrm rot="10800000" flipV="1">
-            <a:off x="4827710" y="3636000"/>
-            <a:ext cx="160971" cy="252000"/>
-          </a:xfrm>
-          <a:prstGeom prst="curvedConnector3">
-            <a:avLst>
-              <a:gd name="adj1" fmla="val 50000"/>
-            </a:avLst>
-          </a:prstGeom>
-          <a:ln>
-            <a:solidFill>
-              <a:srgbClr val="FF0000"/>
-            </a:solidFill>
-          </a:ln>
-        </p:spPr>
-        <p:style>
-          <a:lnRef idx="1">
-            <a:schemeClr val="accent1"/>
-          </a:lnRef>
-          <a:fillRef idx="0">
-            <a:schemeClr val="accent1"/>
-          </a:fillRef>
-          <a:effectRef idx="0">
-            <a:schemeClr val="accent1"/>
-          </a:effectRef>
-          <a:fontRef idx="minor">
-            <a:schemeClr val="tx1"/>
-          </a:fontRef>
-        </p:style>
-      </p:cxnSp>
-      <p:sp>
-        <p:nvSpPr>
-          <p:cNvPr id="108" name="矩形: 圆角 107">
-            <a:extLst>
-              <a:ext uri="{FF2B5EF4-FFF2-40B4-BE49-F238E27FC236}">
-                <a16:creationId xmlns:a16="http://schemas.microsoft.com/office/drawing/2014/main" id="{354794C5-9D47-890A-B8D7-2D43D24E339E}"/>
-              </a:ext>
-            </a:extLst>
-          </p:cNvPr>
-          <p:cNvSpPr/>
-          <p:nvPr/>
-        </p:nvSpPr>
-        <p:spPr>
-          <a:xfrm>
-            <a:off x="6049650" y="2376000"/>
-            <a:ext cx="720000" cy="216000"/>
-          </a:xfrm>
-          <a:prstGeom prst="roundRect">
-            <a:avLst/>
-          </a:prstGeom>
-          <a:noFill/>
-          <a:ln w="12700">
-            <a:noFill/>
-          </a:ln>
-        </p:spPr>
-        <p:style>
-          <a:lnRef idx="2">
-            <a:schemeClr val="accent1">
-              <a:shade val="15000"/>
-            </a:schemeClr>
-          </a:lnRef>
-          <a:fillRef idx="1">
-            <a:schemeClr val="accent1"/>
-          </a:fillRef>
-          <a:effectRef idx="0">
-            <a:schemeClr val="accent1"/>
-          </a:effectRef>
-          <a:fontRef idx="minor">
-            <a:schemeClr val="lt1"/>
-          </a:fontRef>
-        </p:style>
-        <p:txBody>
-          <a:bodyPr rtlCol="0" anchor="ctr"/>
-          <a:lstStyle/>
-          <a:p>
-            <a:pPr algn="just"/>
-            <a:r>
-              <a:rPr lang="en-US" altLang="zh-CN" sz="800">
-                <a:solidFill>
-                  <a:sysClr val="windowText" lastClr="000000"/>
-                </a:solidFill>
-                <a:latin typeface="Quicksand Light" panose="00000400000000000000" pitchFamily="2" charset="0"/>
-              </a:rPr>
-              <a:t>checkbox</a:t>
-            </a:r>
-            <a:endParaRPr lang="zh-CN" altLang="en-US" sz="800">
-              <a:solidFill>
-                <a:sysClr val="windowText" lastClr="000000"/>
-              </a:solidFill>
-              <a:latin typeface="Quicksand Light" panose="00000400000000000000" pitchFamily="2" charset="0"/>
-            </a:endParaRPr>
-          </a:p>
-        </p:txBody>
-      </p:sp>
-      <p:sp>
-        <p:nvSpPr>
-          <p:cNvPr id="116" name="矩形: 圆角 115">
-            <a:extLst>
-              <a:ext uri="{FF2B5EF4-FFF2-40B4-BE49-F238E27FC236}">
-                <a16:creationId xmlns:a16="http://schemas.microsoft.com/office/drawing/2014/main" id="{382A6B3C-89BA-D66E-6C26-AC690B438335}"/>
-              </a:ext>
-            </a:extLst>
-          </p:cNvPr>
-          <p:cNvSpPr/>
-          <p:nvPr/>
-        </p:nvSpPr>
-        <p:spPr>
-          <a:xfrm>
-            <a:off x="6866970" y="1871950"/>
-            <a:ext cx="900000" cy="216000"/>
-          </a:xfrm>
-          <a:prstGeom prst="roundRect">
-            <a:avLst/>
-          </a:prstGeom>
-          <a:solidFill>
-            <a:srgbClr val="FDECDB"/>
-          </a:solidFill>
-          <a:ln w="12700">
-            <a:noFill/>
-          </a:ln>
-        </p:spPr>
-        <p:style>
-          <a:lnRef idx="2">
-            <a:schemeClr val="accent1">
-              <a:shade val="15000"/>
-            </a:schemeClr>
-          </a:lnRef>
-          <a:fillRef idx="1">
-            <a:schemeClr val="accent1"/>
-          </a:fillRef>
-          <a:effectRef idx="0">
-            <a:schemeClr val="accent1"/>
-          </a:effectRef>
-          <a:fontRef idx="minor">
-            <a:schemeClr val="lt1"/>
-          </a:fontRef>
-        </p:style>
-        <p:txBody>
-          <a:bodyPr rtlCol="0" anchor="ctr"/>
-          <a:lstStyle/>
-          <a:p>
-            <a:pPr algn="ctr"/>
-            <a:r>
-              <a:rPr lang="en-US" altLang="zh-CN" sz="800">
-                <a:solidFill>
-                  <a:sysClr val="windowText" lastClr="000000"/>
-                </a:solidFill>
-                <a:latin typeface="Quicksand Light" panose="00000400000000000000" pitchFamily="2" charset="0"/>
-              </a:rPr>
-              <a:t>required</a:t>
-            </a:r>
-            <a:endParaRPr lang="zh-CN" altLang="en-US" sz="800">
-              <a:solidFill>
-                <a:sysClr val="windowText" lastClr="000000"/>
-              </a:solidFill>
-              <a:latin typeface="Quicksand Light" panose="00000400000000000000" pitchFamily="2" charset="0"/>
-            </a:endParaRPr>
-          </a:p>
-        </p:txBody>
-      </p:sp>
-      <p:cxnSp>
-        <p:nvCxnSpPr>
-          <p:cNvPr id="118" name="连接符: 曲线 117">
-            <a:extLst>
-              <a:ext uri="{FF2B5EF4-FFF2-40B4-BE49-F238E27FC236}">
-                <a16:creationId xmlns:a16="http://schemas.microsoft.com/office/drawing/2014/main" id="{CBE13B43-0D4E-B2FD-031A-846740662212}"/>
-              </a:ext>
-            </a:extLst>
-          </p:cNvPr>
-          <p:cNvCxnSpPr>
-            <a:cxnSpLocks/>
-            <a:stCxn id="7" idx="3"/>
-            <a:endCxn id="26" idx="1"/>
-          </p:cNvCxnSpPr>
-          <p:nvPr/>
-        </p:nvCxnSpPr>
-        <p:spPr>
-          <a:xfrm flipV="1">
-            <a:off x="5888680" y="1980000"/>
-            <a:ext cx="169100" cy="126000"/>
-          </a:xfrm>
-          <a:prstGeom prst="curvedConnector3">
-            <a:avLst>
-              <a:gd name="adj1" fmla="val 50000"/>
-            </a:avLst>
-          </a:prstGeom>
-          <a:ln>
-            <a:solidFill>
-              <a:srgbClr val="FFC000"/>
-            </a:solidFill>
-          </a:ln>
-        </p:spPr>
-        <p:style>
-          <a:lnRef idx="1">
-            <a:schemeClr val="accent1"/>
-          </a:lnRef>
-          <a:fillRef idx="0">
-            <a:schemeClr val="accent1"/>
-          </a:fillRef>
-          <a:effectRef idx="0">
-            <a:schemeClr val="accent1"/>
-          </a:effectRef>
-          <a:fontRef idx="minor">
-            <a:schemeClr val="tx1"/>
-          </a:fontRef>
-        </p:style>
-      </p:cxnSp>
-      <p:cxnSp>
-        <p:nvCxnSpPr>
-          <p:cNvPr id="121" name="连接符: 曲线 120">
-            <a:extLst>
-              <a:ext uri="{FF2B5EF4-FFF2-40B4-BE49-F238E27FC236}">
-                <a16:creationId xmlns:a16="http://schemas.microsoft.com/office/drawing/2014/main" id="{797AFADC-9137-9041-E1A2-1D81B311B42C}"/>
-              </a:ext>
-            </a:extLst>
-          </p:cNvPr>
-          <p:cNvCxnSpPr>
-            <a:cxnSpLocks/>
-            <a:stCxn id="7" idx="3"/>
-            <a:endCxn id="108" idx="1"/>
-          </p:cNvCxnSpPr>
-          <p:nvPr/>
-        </p:nvCxnSpPr>
-        <p:spPr>
-          <a:xfrm>
-            <a:off x="5888680" y="2106000"/>
-            <a:ext cx="160970" cy="378000"/>
-          </a:xfrm>
-          <a:prstGeom prst="curvedConnector3">
-            <a:avLst>
-              <a:gd name="adj1" fmla="val 50000"/>
-            </a:avLst>
-          </a:prstGeom>
-          <a:ln>
-            <a:solidFill>
-              <a:srgbClr val="FFC000"/>
-            </a:solidFill>
-          </a:ln>
-        </p:spPr>
-        <p:style>
-          <a:lnRef idx="1">
-            <a:schemeClr val="accent1"/>
-          </a:lnRef>
-          <a:fillRef idx="0">
-            <a:schemeClr val="accent1"/>
-          </a:fillRef>
-          <a:effectRef idx="0">
-            <a:schemeClr val="accent1"/>
-          </a:effectRef>
-          <a:fontRef idx="minor">
-            <a:schemeClr val="tx1"/>
-          </a:fontRef>
-        </p:style>
-      </p:cxnSp>
       <p:sp>
         <p:nvSpPr>
           <p:cNvPr id="12" name="矩形: 圆角 11">
@@ -33830,8 +32875,8 @@
         </p:nvSpPr>
         <p:spPr>
           <a:xfrm>
-            <a:off x="3927708" y="5113863"/>
-            <a:ext cx="900000" cy="216000"/>
+            <a:off x="3736636" y="5765326"/>
+            <a:ext cx="1152000" cy="288000"/>
           </a:xfrm>
           <a:prstGeom prst="roundRect">
             <a:avLst/>
@@ -33865,13 +32910,13 @@
           <a:p>
             <a:pPr algn="ctr"/>
             <a:r>
-              <a:rPr lang="en-US" altLang="zh-CN" sz="800">
-                <a:latin typeface="Quicksand Light" panose="00000400000000000000" pitchFamily="2" charset="0"/>
+              <a:rPr lang="en-US" altLang="zh-CN" sz="1200" dirty="0">
+                <a:latin typeface="Montserrat" panose="00000500000000000000" pitchFamily="2" charset="0"/>
               </a:rPr>
               <a:t>&lt;select&gt;</a:t>
             </a:r>
-            <a:endParaRPr lang="zh-CN" altLang="en-US" sz="800">
-              <a:latin typeface="Quicksand Light" panose="00000400000000000000" pitchFamily="2" charset="0"/>
+            <a:endParaRPr lang="zh-CN" altLang="en-US" sz="1200">
+              <a:latin typeface="Montserrat" panose="00000500000000000000" pitchFamily="2" charset="0"/>
             </a:endParaRPr>
           </a:p>
         </p:txBody>
@@ -33890,8 +32935,8 @@
         </p:nvSpPr>
         <p:spPr>
           <a:xfrm>
-            <a:off x="4988679" y="5119485"/>
-            <a:ext cx="900000" cy="216000"/>
+            <a:off x="5111511" y="5433389"/>
+            <a:ext cx="1152000" cy="288000"/>
           </a:xfrm>
           <a:prstGeom prst="roundRect">
             <a:avLst/>
@@ -33925,19 +32970,19 @@
           <a:p>
             <a:pPr algn="ctr"/>
             <a:r>
-              <a:rPr lang="en-US" altLang="zh-CN" sz="800">
+              <a:rPr lang="en-US" altLang="zh-CN" sz="1200" dirty="0">
                 <a:solidFill>
                   <a:sysClr val="windowText" lastClr="000000"/>
                 </a:solidFill>
-                <a:latin typeface="Quicksand Light" panose="00000400000000000000" pitchFamily="2" charset="0"/>
+                <a:latin typeface="Montserrat" panose="00000500000000000000" pitchFamily="2" charset="0"/>
               </a:rPr>
-              <a:t>&lt;option&gt;</a:t>
-            </a:r>
-            <a:endParaRPr lang="zh-CN" altLang="en-US" sz="800">
+              <a:t>name</a:t>
+            </a:r>
+            <a:endParaRPr lang="zh-CN" altLang="en-US" sz="1200" dirty="0">
               <a:solidFill>
                 <a:sysClr val="windowText" lastClr="000000"/>
               </a:solidFill>
-              <a:latin typeface="Quicksand Light" panose="00000400000000000000" pitchFamily="2" charset="0"/>
+              <a:latin typeface="Montserrat" panose="00000500000000000000" pitchFamily="2" charset="0"/>
             </a:endParaRPr>
           </a:p>
         </p:txBody>
@@ -33960,8 +33005,8 @@
         </p:nvCxnSpPr>
         <p:spPr>
           <a:xfrm>
-            <a:off x="3691582" y="3380280"/>
-            <a:ext cx="236126" cy="1841583"/>
+            <a:off x="3500510" y="3751729"/>
+            <a:ext cx="236126" cy="2157597"/>
           </a:xfrm>
           <a:prstGeom prst="curvedConnector3">
             <a:avLst>
@@ -33989,50 +33034,6 @@
           </a:fontRef>
         </p:style>
       </p:cxnSp>
-      <p:cxnSp>
-        <p:nvCxnSpPr>
-          <p:cNvPr id="32" name="直接连接符 31">
-            <a:extLst>
-              <a:ext uri="{FF2B5EF4-FFF2-40B4-BE49-F238E27FC236}">
-                <a16:creationId xmlns:a16="http://schemas.microsoft.com/office/drawing/2014/main" id="{30C63155-C7C4-547C-CBE0-9D0EA7EE8B52}"/>
-              </a:ext>
-            </a:extLst>
-          </p:cNvPr>
-          <p:cNvCxnSpPr>
-            <a:stCxn id="12" idx="3"/>
-            <a:endCxn id="21" idx="1"/>
-          </p:cNvCxnSpPr>
-          <p:nvPr/>
-        </p:nvCxnSpPr>
-        <p:spPr>
-          <a:xfrm>
-            <a:off x="4827708" y="5221863"/>
-            <a:ext cx="160971" cy="5622"/>
-          </a:xfrm>
-          <a:prstGeom prst="line">
-            <a:avLst/>
-          </a:prstGeom>
-          <a:ln>
-            <a:solidFill>
-              <a:srgbClr val="8854D0"/>
-            </a:solidFill>
-          </a:ln>
-        </p:spPr>
-        <p:style>
-          <a:lnRef idx="1">
-            <a:schemeClr val="accent1"/>
-          </a:lnRef>
-          <a:fillRef idx="0">
-            <a:schemeClr val="accent1"/>
-          </a:fillRef>
-          <a:effectRef idx="0">
-            <a:schemeClr val="accent1"/>
-          </a:effectRef>
-          <a:fontRef idx="minor">
-            <a:schemeClr val="tx1"/>
-          </a:fontRef>
-        </p:style>
-      </p:cxnSp>
       <p:sp>
         <p:nvSpPr>
           <p:cNvPr id="53" name="矩形: 圆角 52">
@@ -34047,8 +33048,8 @@
         </p:nvSpPr>
         <p:spPr>
           <a:xfrm>
-            <a:off x="4988679" y="4291200"/>
-            <a:ext cx="900000" cy="216000"/>
+            <a:off x="5111511" y="4769512"/>
+            <a:ext cx="1152000" cy="288000"/>
           </a:xfrm>
           <a:prstGeom prst="roundRect">
             <a:avLst/>
@@ -34084,162 +33085,425 @@
           <a:p>
             <a:pPr algn="ctr"/>
             <a:r>
-              <a:rPr lang="en-US" altLang="zh-CN" sz="800">
+              <a:rPr lang="en-US" altLang="zh-CN" sz="1200" dirty="0">
                 <a:solidFill>
                   <a:sysClr val="windowText" lastClr="000000"/>
                 </a:solidFill>
-                <a:latin typeface="Quicksand Light" panose="00000400000000000000" pitchFamily="2" charset="0"/>
+                <a:latin typeface="Montserrat" panose="00000500000000000000" pitchFamily="2" charset="0"/>
               </a:rPr>
               <a:t>required</a:t>
             </a:r>
-            <a:endParaRPr lang="zh-CN" altLang="en-US" sz="800">
+            <a:endParaRPr lang="zh-CN" altLang="en-US" sz="1200" dirty="0">
               <a:solidFill>
                 <a:sysClr val="windowText" lastClr="000000"/>
               </a:solidFill>
-              <a:latin typeface="Quicksand Light" panose="00000400000000000000" pitchFamily="2" charset="0"/>
+              <a:latin typeface="Montserrat" panose="00000500000000000000" pitchFamily="2" charset="0"/>
+            </a:endParaRPr>
+          </a:p>
+        </p:txBody>
+      </p:sp>
+      <p:sp>
+        <p:nvSpPr>
+          <p:cNvPr id="50" name="矩形: 圆角 49">
+            <a:extLst>
+              <a:ext uri="{FF2B5EF4-FFF2-40B4-BE49-F238E27FC236}">
+                <a16:creationId xmlns:a16="http://schemas.microsoft.com/office/drawing/2014/main" id="{58AAABB9-3154-4A0D-0375-6856BBE16E89}"/>
+              </a:ext>
+            </a:extLst>
+          </p:cNvPr>
+          <p:cNvSpPr/>
+          <p:nvPr/>
+        </p:nvSpPr>
+        <p:spPr>
+          <a:xfrm>
+            <a:off x="7673757" y="1620063"/>
+            <a:ext cx="1152000" cy="288000"/>
+          </a:xfrm>
+          <a:prstGeom prst="roundRect">
+            <a:avLst/>
+          </a:prstGeom>
+          <a:solidFill>
+            <a:srgbClr val="FDECDB"/>
+          </a:solidFill>
+          <a:ln w="12700">
+            <a:noFill/>
+          </a:ln>
+        </p:spPr>
+        <p:style>
+          <a:lnRef idx="2">
+            <a:schemeClr val="accent1">
+              <a:shade val="15000"/>
+            </a:schemeClr>
+          </a:lnRef>
+          <a:fillRef idx="1">
+            <a:schemeClr val="accent1"/>
+          </a:fillRef>
+          <a:effectRef idx="0">
+            <a:schemeClr val="accent1"/>
+          </a:effectRef>
+          <a:fontRef idx="minor">
+            <a:schemeClr val="lt1"/>
+          </a:fontRef>
+        </p:style>
+        <p:txBody>
+          <a:bodyPr rtlCol="0" anchor="ctr"/>
+          <a:lstStyle/>
+          <a:p>
+            <a:pPr algn="ctr"/>
+            <a:r>
+              <a:rPr lang="en-US" altLang="zh-CN" sz="1200">
+                <a:solidFill>
+                  <a:sysClr val="windowText" lastClr="000000"/>
+                </a:solidFill>
+                <a:latin typeface="Montserrat" panose="00000500000000000000" pitchFamily="2" charset="0"/>
+              </a:rPr>
+              <a:t>placeholder</a:t>
+            </a:r>
+            <a:endParaRPr lang="zh-CN" altLang="en-US" sz="1200">
+              <a:solidFill>
+                <a:sysClr val="windowText" lastClr="000000"/>
+              </a:solidFill>
+              <a:latin typeface="Montserrat" panose="00000500000000000000" pitchFamily="2" charset="0"/>
+            </a:endParaRPr>
+          </a:p>
+        </p:txBody>
+      </p:sp>
+      <p:sp>
+        <p:nvSpPr>
+          <p:cNvPr id="72" name="矩形: 圆角 71">
+            <a:extLst>
+              <a:ext uri="{FF2B5EF4-FFF2-40B4-BE49-F238E27FC236}">
+                <a16:creationId xmlns:a16="http://schemas.microsoft.com/office/drawing/2014/main" id="{903E92A5-949C-FBA0-49E2-DEA3E21FC78D}"/>
+              </a:ext>
+            </a:extLst>
+          </p:cNvPr>
+          <p:cNvSpPr/>
+          <p:nvPr/>
+        </p:nvSpPr>
+        <p:spPr>
+          <a:xfrm>
+            <a:off x="7673757" y="2246839"/>
+            <a:ext cx="1152000" cy="288000"/>
+          </a:xfrm>
+          <a:prstGeom prst="roundRect">
+            <a:avLst/>
+          </a:prstGeom>
+          <a:solidFill>
+            <a:srgbClr val="FDECDB"/>
+          </a:solidFill>
+          <a:ln w="12700">
+            <a:noFill/>
+          </a:ln>
+        </p:spPr>
+        <p:style>
+          <a:lnRef idx="2">
+            <a:schemeClr val="accent1">
+              <a:shade val="15000"/>
+            </a:schemeClr>
+          </a:lnRef>
+          <a:fillRef idx="1">
+            <a:schemeClr val="accent1"/>
+          </a:fillRef>
+          <a:effectRef idx="0">
+            <a:schemeClr val="accent1"/>
+          </a:effectRef>
+          <a:fontRef idx="minor">
+            <a:schemeClr val="lt1"/>
+          </a:fontRef>
+        </p:style>
+        <p:txBody>
+          <a:bodyPr rtlCol="0" anchor="ctr"/>
+          <a:lstStyle/>
+          <a:p>
+            <a:pPr algn="ctr"/>
+            <a:r>
+              <a:rPr lang="en-US" altLang="zh-CN" sz="1200" dirty="0">
+                <a:solidFill>
+                  <a:sysClr val="windowText" lastClr="000000"/>
+                </a:solidFill>
+                <a:latin typeface="Montserrat" panose="00000500000000000000" pitchFamily="2" charset="0"/>
+              </a:rPr>
+              <a:t>value</a:t>
+            </a:r>
+            <a:endParaRPr lang="zh-CN" altLang="en-US" sz="1200" dirty="0">
+              <a:solidFill>
+                <a:sysClr val="windowText" lastClr="000000"/>
+              </a:solidFill>
+              <a:latin typeface="Montserrat" panose="00000500000000000000" pitchFamily="2" charset="0"/>
+            </a:endParaRPr>
+          </a:p>
+        </p:txBody>
+      </p:sp>
+      <p:sp>
+        <p:nvSpPr>
+          <p:cNvPr id="73" name="矩形: 圆角 72">
+            <a:extLst>
+              <a:ext uri="{FF2B5EF4-FFF2-40B4-BE49-F238E27FC236}">
+                <a16:creationId xmlns:a16="http://schemas.microsoft.com/office/drawing/2014/main" id="{B2A026AB-1FE7-E13C-3690-2D59A7DC0E76}"/>
+              </a:ext>
+            </a:extLst>
+          </p:cNvPr>
+          <p:cNvSpPr/>
+          <p:nvPr/>
+        </p:nvSpPr>
+        <p:spPr>
+          <a:xfrm>
+            <a:off x="7673757" y="2560226"/>
+            <a:ext cx="1152000" cy="288000"/>
+          </a:xfrm>
+          <a:prstGeom prst="roundRect">
+            <a:avLst/>
+          </a:prstGeom>
+          <a:solidFill>
+            <a:srgbClr val="FDECDB"/>
+          </a:solidFill>
+          <a:ln w="12700">
+            <a:noFill/>
+          </a:ln>
+        </p:spPr>
+        <p:style>
+          <a:lnRef idx="2">
+            <a:schemeClr val="accent1">
+              <a:shade val="15000"/>
+            </a:schemeClr>
+          </a:lnRef>
+          <a:fillRef idx="1">
+            <a:schemeClr val="accent1"/>
+          </a:fillRef>
+          <a:effectRef idx="0">
+            <a:schemeClr val="accent1"/>
+          </a:effectRef>
+          <a:fontRef idx="minor">
+            <a:schemeClr val="lt1"/>
+          </a:fontRef>
+        </p:style>
+        <p:txBody>
+          <a:bodyPr rtlCol="0" anchor="ctr"/>
+          <a:lstStyle/>
+          <a:p>
+            <a:pPr algn="ctr"/>
+            <a:r>
+              <a:rPr lang="en-US" altLang="zh-CN" sz="1200">
+                <a:solidFill>
+                  <a:sysClr val="windowText" lastClr="000000"/>
+                </a:solidFill>
+                <a:latin typeface="Montserrat" panose="00000500000000000000" pitchFamily="2" charset="0"/>
+              </a:rPr>
+              <a:t>hidden</a:t>
+            </a:r>
+            <a:endParaRPr lang="zh-CN" altLang="en-US" sz="1200">
+              <a:solidFill>
+                <a:sysClr val="windowText" lastClr="000000"/>
+              </a:solidFill>
+              <a:latin typeface="Montserrat" panose="00000500000000000000" pitchFamily="2" charset="0"/>
+            </a:endParaRPr>
+          </a:p>
+        </p:txBody>
+      </p:sp>
+      <p:sp>
+        <p:nvSpPr>
+          <p:cNvPr id="99" name="矩形: 圆角 98">
+            <a:extLst>
+              <a:ext uri="{FF2B5EF4-FFF2-40B4-BE49-F238E27FC236}">
+                <a16:creationId xmlns:a16="http://schemas.microsoft.com/office/drawing/2014/main" id="{E65A18CE-ACBE-A555-CD25-C5D31C3EF1F8}"/>
+              </a:ext>
+            </a:extLst>
+          </p:cNvPr>
+          <p:cNvSpPr/>
+          <p:nvPr/>
+        </p:nvSpPr>
+        <p:spPr>
+          <a:xfrm>
+            <a:off x="7673757" y="2873614"/>
+            <a:ext cx="1152000" cy="288000"/>
+          </a:xfrm>
+          <a:prstGeom prst="roundRect">
+            <a:avLst/>
+          </a:prstGeom>
+          <a:solidFill>
+            <a:srgbClr val="FDECDB"/>
+          </a:solidFill>
+          <a:ln w="12700">
+            <a:noFill/>
+          </a:ln>
+        </p:spPr>
+        <p:style>
+          <a:lnRef idx="2">
+            <a:schemeClr val="accent1">
+              <a:shade val="15000"/>
+            </a:schemeClr>
+          </a:lnRef>
+          <a:fillRef idx="1">
+            <a:schemeClr val="accent1"/>
+          </a:fillRef>
+          <a:effectRef idx="0">
+            <a:schemeClr val="accent1"/>
+          </a:effectRef>
+          <a:fontRef idx="minor">
+            <a:schemeClr val="lt1"/>
+          </a:fontRef>
+        </p:style>
+        <p:txBody>
+          <a:bodyPr rtlCol="0" anchor="ctr"/>
+          <a:lstStyle/>
+          <a:p>
+            <a:pPr algn="ctr"/>
+            <a:r>
+              <a:rPr lang="en-US" altLang="zh-CN" sz="1200" dirty="0">
+                <a:solidFill>
+                  <a:sysClr val="windowText" lastClr="000000"/>
+                </a:solidFill>
+                <a:latin typeface="Montserrat" panose="00000500000000000000" pitchFamily="2" charset="0"/>
+              </a:rPr>
+              <a:t>checked</a:t>
+            </a:r>
+            <a:endParaRPr lang="zh-CN" altLang="en-US" sz="1200" dirty="0">
+              <a:solidFill>
+                <a:sysClr val="windowText" lastClr="000000"/>
+              </a:solidFill>
+              <a:latin typeface="Montserrat" panose="00000500000000000000" pitchFamily="2" charset="0"/>
+            </a:endParaRPr>
+          </a:p>
+        </p:txBody>
+      </p:sp>
+      <p:sp>
+        <p:nvSpPr>
+          <p:cNvPr id="100" name="矩形: 圆角 99">
+            <a:extLst>
+              <a:ext uri="{FF2B5EF4-FFF2-40B4-BE49-F238E27FC236}">
+                <a16:creationId xmlns:a16="http://schemas.microsoft.com/office/drawing/2014/main" id="{7379FF89-A584-320C-1B6B-9E2F4C8E96E1}"/>
+              </a:ext>
+            </a:extLst>
+          </p:cNvPr>
+          <p:cNvSpPr/>
+          <p:nvPr/>
+        </p:nvSpPr>
+        <p:spPr>
+          <a:xfrm>
+            <a:off x="7673757" y="1306675"/>
+            <a:ext cx="1152000" cy="288000"/>
+          </a:xfrm>
+          <a:prstGeom prst="roundRect">
+            <a:avLst/>
+          </a:prstGeom>
+          <a:solidFill>
+            <a:srgbClr val="FDECDB"/>
+          </a:solidFill>
+          <a:ln w="12700">
+            <a:noFill/>
+          </a:ln>
+        </p:spPr>
+        <p:style>
+          <a:lnRef idx="2">
+            <a:schemeClr val="accent1">
+              <a:shade val="15000"/>
+            </a:schemeClr>
+          </a:lnRef>
+          <a:fillRef idx="1">
+            <a:schemeClr val="accent1"/>
+          </a:fillRef>
+          <a:effectRef idx="0">
+            <a:schemeClr val="accent1"/>
+          </a:effectRef>
+          <a:fontRef idx="minor">
+            <a:schemeClr val="lt1"/>
+          </a:fontRef>
+        </p:style>
+        <p:txBody>
+          <a:bodyPr rtlCol="0" anchor="ctr"/>
+          <a:lstStyle/>
+          <a:p>
+            <a:pPr algn="ctr"/>
+            <a:r>
+              <a:rPr lang="en-US" altLang="zh-CN" sz="1200" dirty="0">
+                <a:solidFill>
+                  <a:sysClr val="windowText" lastClr="000000"/>
+                </a:solidFill>
+                <a:latin typeface="Montserrat" panose="00000500000000000000" pitchFamily="2" charset="0"/>
+              </a:rPr>
+              <a:t>maxlength</a:t>
+            </a:r>
+            <a:endParaRPr lang="zh-CN" altLang="en-US" sz="1200" dirty="0">
+              <a:solidFill>
+                <a:sysClr val="windowText" lastClr="000000"/>
+              </a:solidFill>
+              <a:latin typeface="Montserrat" panose="00000500000000000000" pitchFamily="2" charset="0"/>
+            </a:endParaRPr>
+          </a:p>
+        </p:txBody>
+      </p:sp>
+      <p:sp>
+        <p:nvSpPr>
+          <p:cNvPr id="116" name="矩形: 圆角 115">
+            <a:extLst>
+              <a:ext uri="{FF2B5EF4-FFF2-40B4-BE49-F238E27FC236}">
+                <a16:creationId xmlns:a16="http://schemas.microsoft.com/office/drawing/2014/main" id="{382A6B3C-89BA-D66E-6C26-AC690B438335}"/>
+              </a:ext>
+            </a:extLst>
+          </p:cNvPr>
+          <p:cNvSpPr/>
+          <p:nvPr/>
+        </p:nvSpPr>
+        <p:spPr>
+          <a:xfrm>
+            <a:off x="7673757" y="1933451"/>
+            <a:ext cx="1152000" cy="288000"/>
+          </a:xfrm>
+          <a:prstGeom prst="roundRect">
+            <a:avLst/>
+          </a:prstGeom>
+          <a:solidFill>
+            <a:srgbClr val="FDECDB"/>
+          </a:solidFill>
+          <a:ln w="12700">
+            <a:noFill/>
+          </a:ln>
+        </p:spPr>
+        <p:style>
+          <a:lnRef idx="2">
+            <a:schemeClr val="accent1">
+              <a:shade val="15000"/>
+            </a:schemeClr>
+          </a:lnRef>
+          <a:fillRef idx="1">
+            <a:schemeClr val="accent1"/>
+          </a:fillRef>
+          <a:effectRef idx="0">
+            <a:schemeClr val="accent1"/>
+          </a:effectRef>
+          <a:fontRef idx="minor">
+            <a:schemeClr val="lt1"/>
+          </a:fontRef>
+        </p:style>
+        <p:txBody>
+          <a:bodyPr rtlCol="0" anchor="ctr"/>
+          <a:lstStyle/>
+          <a:p>
+            <a:pPr algn="ctr"/>
+            <a:r>
+              <a:rPr lang="en-US" altLang="zh-CN" sz="1200" dirty="0">
+                <a:solidFill>
+                  <a:sysClr val="windowText" lastClr="000000"/>
+                </a:solidFill>
+                <a:latin typeface="Montserrat" panose="00000500000000000000" pitchFamily="2" charset="0"/>
+              </a:rPr>
+              <a:t>required</a:t>
+            </a:r>
+            <a:endParaRPr lang="zh-CN" altLang="en-US" sz="1200">
+              <a:solidFill>
+                <a:sysClr val="windowText" lastClr="000000"/>
+              </a:solidFill>
+              <a:latin typeface="Montserrat" panose="00000500000000000000" pitchFamily="2" charset="0"/>
             </a:endParaRPr>
           </a:p>
         </p:txBody>
       </p:sp>
       <p:cxnSp>
         <p:nvCxnSpPr>
-          <p:cNvPr id="57" name="直接连接符 56">
-            <a:extLst>
-              <a:ext uri="{FF2B5EF4-FFF2-40B4-BE49-F238E27FC236}">
-                <a16:creationId xmlns:a16="http://schemas.microsoft.com/office/drawing/2014/main" id="{9F854D6C-16BF-D7A9-DA69-C3AFB8FC137B}"/>
-              </a:ext>
-            </a:extLst>
-          </p:cNvPr>
-          <p:cNvCxnSpPr>
-            <a:stCxn id="5" idx="3"/>
-            <a:endCxn id="58" idx="1"/>
-          </p:cNvCxnSpPr>
-          <p:nvPr/>
-        </p:nvCxnSpPr>
-        <p:spPr>
-          <a:xfrm>
-            <a:off x="4827709" y="3888000"/>
-            <a:ext cx="160971" cy="0"/>
-          </a:xfrm>
-          <a:prstGeom prst="line">
-            <a:avLst/>
-          </a:prstGeom>
-          <a:ln>
-            <a:solidFill>
-              <a:srgbClr val="FF0000"/>
-            </a:solidFill>
-          </a:ln>
-        </p:spPr>
-        <p:style>
-          <a:lnRef idx="1">
-            <a:schemeClr val="accent1"/>
-          </a:lnRef>
-          <a:fillRef idx="0">
-            <a:schemeClr val="accent1"/>
-          </a:fillRef>
-          <a:effectRef idx="0">
-            <a:schemeClr val="accent1"/>
-          </a:effectRef>
-          <a:fontRef idx="minor">
-            <a:schemeClr val="tx1"/>
-          </a:fontRef>
-        </p:style>
-      </p:cxnSp>
-      <p:cxnSp>
-        <p:nvCxnSpPr>
-          <p:cNvPr id="60" name="直接连接符 59">
-            <a:extLst>
-              <a:ext uri="{FF2B5EF4-FFF2-40B4-BE49-F238E27FC236}">
-                <a16:creationId xmlns:a16="http://schemas.microsoft.com/office/drawing/2014/main" id="{300ADA2C-CE4D-12A0-0817-D564DCFC3109}"/>
-              </a:ext>
-            </a:extLst>
-          </p:cNvPr>
-          <p:cNvCxnSpPr>
-            <a:stCxn id="27" idx="3"/>
-            <a:endCxn id="72" idx="1"/>
-          </p:cNvCxnSpPr>
-          <p:nvPr/>
-        </p:nvCxnSpPr>
-        <p:spPr>
-          <a:xfrm flipV="1">
-            <a:off x="6777780" y="2231950"/>
-            <a:ext cx="89190" cy="50"/>
-          </a:xfrm>
-          <a:prstGeom prst="line">
-            <a:avLst/>
-          </a:prstGeom>
-          <a:ln>
-            <a:solidFill>
-              <a:srgbClr val="FFC000"/>
-            </a:solidFill>
-          </a:ln>
-        </p:spPr>
-        <p:style>
-          <a:lnRef idx="1">
-            <a:schemeClr val="accent1"/>
-          </a:lnRef>
-          <a:fillRef idx="0">
-            <a:schemeClr val="accent1"/>
-          </a:fillRef>
-          <a:effectRef idx="0">
-            <a:schemeClr val="accent1"/>
-          </a:effectRef>
-          <a:fontRef idx="minor">
-            <a:schemeClr val="tx1"/>
-          </a:fontRef>
-        </p:style>
-      </p:cxnSp>
-      <p:cxnSp>
-        <p:nvCxnSpPr>
-          <p:cNvPr id="61" name="直接连接符 60">
-            <a:extLst>
-              <a:ext uri="{FF2B5EF4-FFF2-40B4-BE49-F238E27FC236}">
-                <a16:creationId xmlns:a16="http://schemas.microsoft.com/office/drawing/2014/main" id="{523440AD-FF8B-8C27-8FD7-66B27F2159C2}"/>
-              </a:ext>
-            </a:extLst>
-          </p:cNvPr>
-          <p:cNvCxnSpPr>
-            <a:cxnSpLocks/>
-            <a:stCxn id="108" idx="3"/>
-            <a:endCxn id="73" idx="1"/>
-          </p:cNvCxnSpPr>
-          <p:nvPr/>
-        </p:nvCxnSpPr>
-        <p:spPr>
-          <a:xfrm>
-            <a:off x="6769650" y="2484000"/>
-            <a:ext cx="97320" cy="251950"/>
-          </a:xfrm>
-          <a:prstGeom prst="line">
-            <a:avLst/>
-          </a:prstGeom>
-          <a:ln>
-            <a:solidFill>
-              <a:srgbClr val="FFC000"/>
-            </a:solidFill>
-          </a:ln>
-        </p:spPr>
-        <p:style>
-          <a:lnRef idx="1">
-            <a:schemeClr val="accent1"/>
-          </a:lnRef>
-          <a:fillRef idx="0">
-            <a:schemeClr val="accent1"/>
-          </a:fillRef>
-          <a:effectRef idx="0">
-            <a:schemeClr val="accent1"/>
-          </a:effectRef>
-          <a:fontRef idx="minor">
-            <a:schemeClr val="tx1"/>
-          </a:fontRef>
-        </p:style>
-      </p:cxnSp>
-      <p:cxnSp>
-        <p:nvCxnSpPr>
-          <p:cNvPr id="68" name="直接连接符 67">
-            <a:extLst>
-              <a:ext uri="{FF2B5EF4-FFF2-40B4-BE49-F238E27FC236}">
-                <a16:creationId xmlns:a16="http://schemas.microsoft.com/office/drawing/2014/main" id="{2537ED9D-A966-4186-B6EA-7DFF40C6A6BA}"/>
+          <p:cNvPr id="29" name="连接符: 曲线 28">
+            <a:extLst>
+              <a:ext uri="{FF2B5EF4-FFF2-40B4-BE49-F238E27FC236}">
+                <a16:creationId xmlns:a16="http://schemas.microsoft.com/office/drawing/2014/main" id="{017E8C98-3AEA-3BDC-A2AF-A5B7738F38BD}"/>
               </a:ext>
             </a:extLst>
           </p:cNvPr>
@@ -34252,11 +33516,13 @@
         </p:nvCxnSpPr>
         <p:spPr>
           <a:xfrm flipV="1">
-            <a:off x="6777780" y="1475950"/>
-            <a:ext cx="89190" cy="252050"/>
-          </a:xfrm>
-          <a:prstGeom prst="line">
-            <a:avLst/>
+            <a:off x="7434273" y="1450675"/>
+            <a:ext cx="239484" cy="335735"/>
+          </a:xfrm>
+          <a:prstGeom prst="curvedConnector3">
+            <a:avLst>
+              <a:gd name="adj1" fmla="val 50000"/>
+            </a:avLst>
           </a:prstGeom>
           <a:ln>
             <a:solidFill>
@@ -34281,27 +33547,763 @@
       </p:cxnSp>
       <p:cxnSp>
         <p:nvCxnSpPr>
-          <p:cNvPr id="77" name="直接连接符 76">
-            <a:extLst>
-              <a:ext uri="{FF2B5EF4-FFF2-40B4-BE49-F238E27FC236}">
-                <a16:creationId xmlns:a16="http://schemas.microsoft.com/office/drawing/2014/main" id="{06F786CE-CB00-37D5-6948-3AE8D93F996C}"/>
+          <p:cNvPr id="33" name="连接符: 曲线 32">
+            <a:extLst>
+              <a:ext uri="{FF2B5EF4-FFF2-40B4-BE49-F238E27FC236}">
+                <a16:creationId xmlns:a16="http://schemas.microsoft.com/office/drawing/2014/main" id="{B9B008D8-2E43-55E2-A92D-6B300AF369AF}"/>
               </a:ext>
             </a:extLst>
           </p:cNvPr>
           <p:cNvCxnSpPr>
             <a:cxnSpLocks/>
             <a:stCxn id="26" idx="3"/>
-            <a:endCxn id="116" idx="1"/>
+            <a:endCxn id="72" idx="1"/>
           </p:cNvCxnSpPr>
           <p:nvPr/>
         </p:nvCxnSpPr>
         <p:spPr>
+          <a:xfrm>
+            <a:off x="7434273" y="2056304"/>
+            <a:ext cx="239484" cy="334535"/>
+          </a:xfrm>
+          <a:prstGeom prst="curvedConnector3">
+            <a:avLst>
+              <a:gd name="adj1" fmla="val 50000"/>
+            </a:avLst>
+          </a:prstGeom>
+          <a:ln>
+            <a:solidFill>
+              <a:srgbClr val="FFC000"/>
+            </a:solidFill>
+          </a:ln>
+        </p:spPr>
+        <p:style>
+          <a:lnRef idx="1">
+            <a:schemeClr val="accent1"/>
+          </a:lnRef>
+          <a:fillRef idx="0">
+            <a:schemeClr val="accent1"/>
+          </a:fillRef>
+          <a:effectRef idx="0">
+            <a:schemeClr val="accent1"/>
+          </a:effectRef>
+          <a:fontRef idx="minor">
+            <a:schemeClr val="tx1"/>
+          </a:fontRef>
+        </p:style>
+      </p:cxnSp>
+      <p:sp>
+        <p:nvSpPr>
+          <p:cNvPr id="25" name="矩形: 圆角 24">
+            <a:extLst>
+              <a:ext uri="{FF2B5EF4-FFF2-40B4-BE49-F238E27FC236}">
+                <a16:creationId xmlns:a16="http://schemas.microsoft.com/office/drawing/2014/main" id="{0C604421-37C1-756C-7B73-6463DCFA65A5}"/>
+              </a:ext>
+            </a:extLst>
+          </p:cNvPr>
+          <p:cNvSpPr/>
+          <p:nvPr/>
+        </p:nvSpPr>
+        <p:spPr>
+          <a:xfrm>
+            <a:off x="6426273" y="1642410"/>
+            <a:ext cx="1008000" cy="288000"/>
+          </a:xfrm>
+          <a:prstGeom prst="roundRect">
+            <a:avLst/>
+          </a:prstGeom>
+          <a:noFill/>
+          <a:ln w="12700">
+            <a:noFill/>
+          </a:ln>
+        </p:spPr>
+        <p:style>
+          <a:lnRef idx="2">
+            <a:schemeClr val="accent1">
+              <a:shade val="15000"/>
+            </a:schemeClr>
+          </a:lnRef>
+          <a:fillRef idx="1">
+            <a:schemeClr val="accent1"/>
+          </a:fillRef>
+          <a:effectRef idx="0">
+            <a:schemeClr val="accent1"/>
+          </a:effectRef>
+          <a:fontRef idx="minor">
+            <a:schemeClr val="lt1"/>
+          </a:fontRef>
+        </p:style>
+        <p:txBody>
+          <a:bodyPr rtlCol="0" anchor="ctr"/>
+          <a:lstStyle/>
+          <a:p>
+            <a:pPr algn="just"/>
+            <a:r>
+              <a:rPr lang="en-US" altLang="zh-CN" sz="1200" dirty="0">
+                <a:solidFill>
+                  <a:sysClr val="windowText" lastClr="000000"/>
+                </a:solidFill>
+                <a:latin typeface="Montserrat" panose="00000500000000000000" pitchFamily="2" charset="0"/>
+              </a:rPr>
+              <a:t>text</a:t>
+            </a:r>
+            <a:endParaRPr lang="zh-CN" altLang="en-US" sz="1200" dirty="0">
+              <a:solidFill>
+                <a:sysClr val="windowText" lastClr="000000"/>
+              </a:solidFill>
+              <a:latin typeface="Montserrat" panose="00000500000000000000" pitchFamily="2" charset="0"/>
+            </a:endParaRPr>
+          </a:p>
+        </p:txBody>
+      </p:sp>
+      <p:sp>
+        <p:nvSpPr>
+          <p:cNvPr id="26" name="矩形: 圆角 25">
+            <a:extLst>
+              <a:ext uri="{FF2B5EF4-FFF2-40B4-BE49-F238E27FC236}">
+                <a16:creationId xmlns:a16="http://schemas.microsoft.com/office/drawing/2014/main" id="{00038D7F-385D-2345-2DBA-32B639EF5D3A}"/>
+              </a:ext>
+            </a:extLst>
+          </p:cNvPr>
+          <p:cNvSpPr/>
+          <p:nvPr/>
+        </p:nvSpPr>
+        <p:spPr>
+          <a:xfrm>
+            <a:off x="6426273" y="1912304"/>
+            <a:ext cx="1008000" cy="288000"/>
+          </a:xfrm>
+          <a:prstGeom prst="roundRect">
+            <a:avLst/>
+          </a:prstGeom>
+          <a:noFill/>
+          <a:ln w="12700">
+            <a:noFill/>
+          </a:ln>
+        </p:spPr>
+        <p:style>
+          <a:lnRef idx="2">
+            <a:schemeClr val="accent1">
+              <a:shade val="15000"/>
+            </a:schemeClr>
+          </a:lnRef>
+          <a:fillRef idx="1">
+            <a:schemeClr val="accent1"/>
+          </a:fillRef>
+          <a:effectRef idx="0">
+            <a:schemeClr val="accent1"/>
+          </a:effectRef>
+          <a:fontRef idx="minor">
+            <a:schemeClr val="lt1"/>
+          </a:fontRef>
+        </p:style>
+        <p:txBody>
+          <a:bodyPr rtlCol="0" anchor="ctr"/>
+          <a:lstStyle/>
+          <a:p>
+            <a:pPr algn="just"/>
+            <a:r>
+              <a:rPr lang="en-US" altLang="zh-CN" sz="1200" dirty="0">
+                <a:solidFill>
+                  <a:sysClr val="windowText" lastClr="000000"/>
+                </a:solidFill>
+                <a:latin typeface="Montserrat" panose="00000500000000000000" pitchFamily="2" charset="0"/>
+              </a:rPr>
+              <a:t>password</a:t>
+            </a:r>
+            <a:endParaRPr lang="zh-CN" altLang="en-US" sz="1200" dirty="0">
+              <a:solidFill>
+                <a:sysClr val="windowText" lastClr="000000"/>
+              </a:solidFill>
+              <a:latin typeface="Montserrat" panose="00000500000000000000" pitchFamily="2" charset="0"/>
+            </a:endParaRPr>
+          </a:p>
+        </p:txBody>
+      </p:sp>
+      <p:sp>
+        <p:nvSpPr>
+          <p:cNvPr id="27" name="矩形: 圆角 26">
+            <a:extLst>
+              <a:ext uri="{FF2B5EF4-FFF2-40B4-BE49-F238E27FC236}">
+                <a16:creationId xmlns:a16="http://schemas.microsoft.com/office/drawing/2014/main" id="{8C58B27E-9EDF-2603-8A2C-88C8201B54FE}"/>
+              </a:ext>
+            </a:extLst>
+          </p:cNvPr>
+          <p:cNvSpPr/>
+          <p:nvPr/>
+        </p:nvSpPr>
+        <p:spPr>
+          <a:xfrm>
+            <a:off x="6426273" y="2744173"/>
+            <a:ext cx="1008000" cy="288000"/>
+          </a:xfrm>
+          <a:prstGeom prst="roundRect">
+            <a:avLst/>
+          </a:prstGeom>
+          <a:noFill/>
+          <a:ln w="12700">
+            <a:noFill/>
+          </a:ln>
+        </p:spPr>
+        <p:style>
+          <a:lnRef idx="2">
+            <a:schemeClr val="accent1">
+              <a:shade val="15000"/>
+            </a:schemeClr>
+          </a:lnRef>
+          <a:fillRef idx="1">
+            <a:schemeClr val="accent1"/>
+          </a:fillRef>
+          <a:effectRef idx="0">
+            <a:schemeClr val="accent1"/>
+          </a:effectRef>
+          <a:fontRef idx="minor">
+            <a:schemeClr val="lt1"/>
+          </a:fontRef>
+        </p:style>
+        <p:txBody>
+          <a:bodyPr rtlCol="0" anchor="ctr"/>
+          <a:lstStyle/>
+          <a:p>
+            <a:pPr algn="just"/>
+            <a:r>
+              <a:rPr lang="en-US" altLang="zh-CN" sz="1200" dirty="0">
+                <a:solidFill>
+                  <a:sysClr val="windowText" lastClr="000000"/>
+                </a:solidFill>
+                <a:latin typeface="Montserrat" panose="00000500000000000000" pitchFamily="2" charset="0"/>
+              </a:rPr>
+              <a:t>radio</a:t>
+            </a:r>
+            <a:endParaRPr lang="zh-CN" altLang="en-US" sz="1200" dirty="0">
+              <a:solidFill>
+                <a:sysClr val="windowText" lastClr="000000"/>
+              </a:solidFill>
+              <a:latin typeface="Montserrat" panose="00000500000000000000" pitchFamily="2" charset="0"/>
+            </a:endParaRPr>
+          </a:p>
+        </p:txBody>
+      </p:sp>
+      <p:cxnSp>
+        <p:nvCxnSpPr>
+          <p:cNvPr id="28" name="连接符: 曲线 27">
+            <a:extLst>
+              <a:ext uri="{FF2B5EF4-FFF2-40B4-BE49-F238E27FC236}">
+                <a16:creationId xmlns:a16="http://schemas.microsoft.com/office/drawing/2014/main" id="{7DFA1551-73F5-4C28-AE50-579B119B5BF0}"/>
+              </a:ext>
+            </a:extLst>
+          </p:cNvPr>
+          <p:cNvCxnSpPr>
+            <a:cxnSpLocks/>
+            <a:stCxn id="7" idx="3"/>
+            <a:endCxn id="25" idx="1"/>
+          </p:cNvCxnSpPr>
+          <p:nvPr/>
+        </p:nvCxnSpPr>
+        <p:spPr>
           <a:xfrm flipV="1">
-            <a:off x="6777780" y="1979950"/>
-            <a:ext cx="89190" cy="50"/>
-          </a:xfrm>
-          <a:prstGeom prst="line">
-            <a:avLst/>
+            <a:off x="6263512" y="1786410"/>
+            <a:ext cx="162761" cy="471598"/>
+          </a:xfrm>
+          <a:prstGeom prst="curvedConnector3">
+            <a:avLst>
+              <a:gd name="adj1" fmla="val 50000"/>
+            </a:avLst>
+          </a:prstGeom>
+          <a:ln>
+            <a:solidFill>
+              <a:srgbClr val="FFC000"/>
+            </a:solidFill>
+          </a:ln>
+        </p:spPr>
+        <p:style>
+          <a:lnRef idx="1">
+            <a:schemeClr val="accent1"/>
+          </a:lnRef>
+          <a:fillRef idx="0">
+            <a:schemeClr val="accent1"/>
+          </a:fillRef>
+          <a:effectRef idx="0">
+            <a:schemeClr val="accent1"/>
+          </a:effectRef>
+          <a:fontRef idx="minor">
+            <a:schemeClr val="tx1"/>
+          </a:fontRef>
+        </p:style>
+      </p:cxnSp>
+      <p:sp>
+        <p:nvSpPr>
+          <p:cNvPr id="108" name="矩形: 圆角 107">
+            <a:extLst>
+              <a:ext uri="{FF2B5EF4-FFF2-40B4-BE49-F238E27FC236}">
+                <a16:creationId xmlns:a16="http://schemas.microsoft.com/office/drawing/2014/main" id="{354794C5-9D47-890A-B8D7-2D43D24E339E}"/>
+              </a:ext>
+            </a:extLst>
+          </p:cNvPr>
+          <p:cNvSpPr/>
+          <p:nvPr/>
+        </p:nvSpPr>
+        <p:spPr>
+          <a:xfrm>
+            <a:off x="6418143" y="3014067"/>
+            <a:ext cx="1008000" cy="288000"/>
+          </a:xfrm>
+          <a:prstGeom prst="roundRect">
+            <a:avLst/>
+          </a:prstGeom>
+          <a:noFill/>
+          <a:ln w="12700">
+            <a:noFill/>
+          </a:ln>
+        </p:spPr>
+        <p:style>
+          <a:lnRef idx="2">
+            <a:schemeClr val="accent1">
+              <a:shade val="15000"/>
+            </a:schemeClr>
+          </a:lnRef>
+          <a:fillRef idx="1">
+            <a:schemeClr val="accent1"/>
+          </a:fillRef>
+          <a:effectRef idx="0">
+            <a:schemeClr val="accent1"/>
+          </a:effectRef>
+          <a:fontRef idx="minor">
+            <a:schemeClr val="lt1"/>
+          </a:fontRef>
+        </p:style>
+        <p:txBody>
+          <a:bodyPr rtlCol="0" anchor="ctr"/>
+          <a:lstStyle/>
+          <a:p>
+            <a:pPr algn="just"/>
+            <a:r>
+              <a:rPr lang="en-US" altLang="zh-CN" sz="1200" dirty="0">
+                <a:solidFill>
+                  <a:sysClr val="windowText" lastClr="000000"/>
+                </a:solidFill>
+                <a:latin typeface="Montserrat" panose="00000500000000000000" pitchFamily="2" charset="0"/>
+              </a:rPr>
+              <a:t>checkbox</a:t>
+            </a:r>
+            <a:endParaRPr lang="zh-CN" altLang="en-US" sz="1200" dirty="0">
+              <a:solidFill>
+                <a:sysClr val="windowText" lastClr="000000"/>
+              </a:solidFill>
+              <a:latin typeface="Montserrat" panose="00000500000000000000" pitchFamily="2" charset="0"/>
+            </a:endParaRPr>
+          </a:p>
+        </p:txBody>
+      </p:sp>
+      <p:cxnSp>
+        <p:nvCxnSpPr>
+          <p:cNvPr id="121" name="连接符: 曲线 120">
+            <a:extLst>
+              <a:ext uri="{FF2B5EF4-FFF2-40B4-BE49-F238E27FC236}">
+                <a16:creationId xmlns:a16="http://schemas.microsoft.com/office/drawing/2014/main" id="{797AFADC-9137-9041-E1A2-1D81B311B42C}"/>
+              </a:ext>
+            </a:extLst>
+          </p:cNvPr>
+          <p:cNvCxnSpPr>
+            <a:cxnSpLocks/>
+            <a:stCxn id="7" idx="3"/>
+            <a:endCxn id="108" idx="1"/>
+          </p:cNvCxnSpPr>
+          <p:nvPr/>
+        </p:nvCxnSpPr>
+        <p:spPr>
+          <a:xfrm>
+            <a:off x="6263512" y="2258008"/>
+            <a:ext cx="154631" cy="900059"/>
+          </a:xfrm>
+          <a:prstGeom prst="curvedConnector3">
+            <a:avLst>
+              <a:gd name="adj1" fmla="val 50000"/>
+            </a:avLst>
+          </a:prstGeom>
+          <a:ln>
+            <a:solidFill>
+              <a:srgbClr val="FFC000"/>
+            </a:solidFill>
+          </a:ln>
+        </p:spPr>
+        <p:style>
+          <a:lnRef idx="1">
+            <a:schemeClr val="accent1"/>
+          </a:lnRef>
+          <a:fillRef idx="0">
+            <a:schemeClr val="accent1"/>
+          </a:fillRef>
+          <a:effectRef idx="0">
+            <a:schemeClr val="accent1"/>
+          </a:effectRef>
+          <a:fontRef idx="minor">
+            <a:schemeClr val="tx1"/>
+          </a:fontRef>
+        </p:style>
+      </p:cxnSp>
+      <p:sp>
+        <p:nvSpPr>
+          <p:cNvPr id="37" name="矩形: 圆角 36">
+            <a:extLst>
+              <a:ext uri="{FF2B5EF4-FFF2-40B4-BE49-F238E27FC236}">
+                <a16:creationId xmlns:a16="http://schemas.microsoft.com/office/drawing/2014/main" id="{6FA91C42-0C1D-D552-8917-E136786023C6}"/>
+              </a:ext>
+            </a:extLst>
+          </p:cNvPr>
+          <p:cNvSpPr/>
+          <p:nvPr/>
+        </p:nvSpPr>
+        <p:spPr>
+          <a:xfrm>
+            <a:off x="6418143" y="2369561"/>
+            <a:ext cx="1008000" cy="288000"/>
+          </a:xfrm>
+          <a:prstGeom prst="roundRect">
+            <a:avLst/>
+          </a:prstGeom>
+          <a:noFill/>
+          <a:ln w="12700">
+            <a:noFill/>
+          </a:ln>
+        </p:spPr>
+        <p:style>
+          <a:lnRef idx="2">
+            <a:schemeClr val="accent1">
+              <a:shade val="15000"/>
+            </a:schemeClr>
+          </a:lnRef>
+          <a:fillRef idx="1">
+            <a:schemeClr val="accent1"/>
+          </a:fillRef>
+          <a:effectRef idx="0">
+            <a:schemeClr val="accent1"/>
+          </a:effectRef>
+          <a:fontRef idx="minor">
+            <a:schemeClr val="lt1"/>
+          </a:fontRef>
+        </p:style>
+        <p:txBody>
+          <a:bodyPr rtlCol="0" anchor="ctr"/>
+          <a:lstStyle/>
+          <a:p>
+            <a:pPr algn="just"/>
+            <a:r>
+              <a:rPr lang="en-US" altLang="zh-CN" sz="1200" dirty="0">
+                <a:solidFill>
+                  <a:sysClr val="windowText" lastClr="000000"/>
+                </a:solidFill>
+                <a:latin typeface="Montserrat" panose="00000500000000000000" pitchFamily="2" charset="0"/>
+              </a:rPr>
+              <a:t>button</a:t>
+            </a:r>
+            <a:endParaRPr lang="zh-CN" altLang="en-US" sz="1200" dirty="0">
+              <a:solidFill>
+                <a:sysClr val="windowText" lastClr="000000"/>
+              </a:solidFill>
+              <a:latin typeface="Montserrat" panose="00000500000000000000" pitchFamily="2" charset="0"/>
+            </a:endParaRPr>
+          </a:p>
+        </p:txBody>
+      </p:sp>
+      <p:sp>
+        <p:nvSpPr>
+          <p:cNvPr id="30" name="矩形: 圆角 29">
+            <a:extLst>
+              <a:ext uri="{FF2B5EF4-FFF2-40B4-BE49-F238E27FC236}">
+                <a16:creationId xmlns:a16="http://schemas.microsoft.com/office/drawing/2014/main" id="{BD9CCC73-F1FA-B7EC-7203-AF0E587DA98B}"/>
+              </a:ext>
+            </a:extLst>
+          </p:cNvPr>
+          <p:cNvSpPr/>
+          <p:nvPr/>
+        </p:nvSpPr>
+        <p:spPr>
+          <a:xfrm>
+            <a:off x="5111511" y="5765326"/>
+            <a:ext cx="1152000" cy="288000"/>
+          </a:xfrm>
+          <a:prstGeom prst="roundRect">
+            <a:avLst/>
+          </a:prstGeom>
+          <a:solidFill>
+            <a:srgbClr val="C7ADE9"/>
+          </a:solidFill>
+          <a:ln w="12700">
+            <a:noFill/>
+          </a:ln>
+        </p:spPr>
+        <p:style>
+          <a:lnRef idx="2">
+            <a:schemeClr val="accent1">
+              <a:shade val="15000"/>
+            </a:schemeClr>
+          </a:lnRef>
+          <a:fillRef idx="1">
+            <a:schemeClr val="accent1"/>
+          </a:fillRef>
+          <a:effectRef idx="0">
+            <a:schemeClr val="accent1"/>
+          </a:effectRef>
+          <a:fontRef idx="minor">
+            <a:schemeClr val="lt1"/>
+          </a:fontRef>
+        </p:style>
+        <p:txBody>
+          <a:bodyPr rtlCol="0" anchor="ctr"/>
+          <a:lstStyle/>
+          <a:p>
+            <a:pPr algn="ctr"/>
+            <a:r>
+              <a:rPr lang="en-US" altLang="zh-CN" sz="1200" dirty="0">
+                <a:solidFill>
+                  <a:sysClr val="windowText" lastClr="000000"/>
+                </a:solidFill>
+                <a:latin typeface="Montserrat" panose="00000500000000000000" pitchFamily="2" charset="0"/>
+              </a:rPr>
+              <a:t>id</a:t>
+            </a:r>
+            <a:endParaRPr lang="zh-CN" altLang="en-US" sz="1200" dirty="0">
+              <a:solidFill>
+                <a:sysClr val="windowText" lastClr="000000"/>
+              </a:solidFill>
+              <a:latin typeface="Montserrat" panose="00000500000000000000" pitchFamily="2" charset="0"/>
+            </a:endParaRPr>
+          </a:p>
+        </p:txBody>
+      </p:sp>
+      <p:sp>
+        <p:nvSpPr>
+          <p:cNvPr id="31" name="矩形: 圆角 30">
+            <a:extLst>
+              <a:ext uri="{FF2B5EF4-FFF2-40B4-BE49-F238E27FC236}">
+                <a16:creationId xmlns:a16="http://schemas.microsoft.com/office/drawing/2014/main" id="{57BE3A41-3B4F-AB86-EECA-6B51C6B6C1A0}"/>
+              </a:ext>
+            </a:extLst>
+          </p:cNvPr>
+          <p:cNvSpPr/>
+          <p:nvPr/>
+        </p:nvSpPr>
+        <p:spPr>
+          <a:xfrm>
+            <a:off x="5111511" y="6097264"/>
+            <a:ext cx="1152000" cy="288000"/>
+          </a:xfrm>
+          <a:prstGeom prst="roundRect">
+            <a:avLst/>
+          </a:prstGeom>
+          <a:solidFill>
+            <a:srgbClr val="C7ADE9"/>
+          </a:solidFill>
+          <a:ln w="12700">
+            <a:noFill/>
+          </a:ln>
+        </p:spPr>
+        <p:style>
+          <a:lnRef idx="2">
+            <a:schemeClr val="accent1">
+              <a:shade val="15000"/>
+            </a:schemeClr>
+          </a:lnRef>
+          <a:fillRef idx="1">
+            <a:schemeClr val="accent1"/>
+          </a:fillRef>
+          <a:effectRef idx="0">
+            <a:schemeClr val="accent1"/>
+          </a:effectRef>
+          <a:fontRef idx="minor">
+            <a:schemeClr val="lt1"/>
+          </a:fontRef>
+        </p:style>
+        <p:txBody>
+          <a:bodyPr rtlCol="0" anchor="ctr"/>
+          <a:lstStyle/>
+          <a:p>
+            <a:pPr algn="ctr"/>
+            <a:r>
+              <a:rPr lang="en-US" altLang="zh-CN" sz="1200" dirty="0">
+                <a:solidFill>
+                  <a:sysClr val="windowText" lastClr="000000"/>
+                </a:solidFill>
+                <a:latin typeface="Montserrat" panose="00000500000000000000" pitchFamily="2" charset="0"/>
+              </a:rPr>
+              <a:t>&lt;option&gt;</a:t>
+            </a:r>
+            <a:endParaRPr lang="zh-CN" altLang="en-US" sz="1200" dirty="0">
+              <a:solidFill>
+                <a:sysClr val="windowText" lastClr="000000"/>
+              </a:solidFill>
+              <a:latin typeface="Montserrat" panose="00000500000000000000" pitchFamily="2" charset="0"/>
+            </a:endParaRPr>
+          </a:p>
+        </p:txBody>
+      </p:sp>
+      <p:cxnSp>
+        <p:nvCxnSpPr>
+          <p:cNvPr id="34" name="连接符: 曲线 33">
+            <a:extLst>
+              <a:ext uri="{FF2B5EF4-FFF2-40B4-BE49-F238E27FC236}">
+                <a16:creationId xmlns:a16="http://schemas.microsoft.com/office/drawing/2014/main" id="{633C67E8-D028-C85A-E972-73CEA836F621}"/>
+              </a:ext>
+            </a:extLst>
+          </p:cNvPr>
+          <p:cNvCxnSpPr>
+            <a:cxnSpLocks/>
+            <a:stCxn id="21" idx="1"/>
+            <a:endCxn id="12" idx="3"/>
+          </p:cNvCxnSpPr>
+          <p:nvPr/>
+        </p:nvCxnSpPr>
+        <p:spPr>
+          <a:xfrm rot="10800000" flipV="1">
+            <a:off x="4888637" y="5577388"/>
+            <a:ext cx="222875" cy="331937"/>
+          </a:xfrm>
+          <a:prstGeom prst="curvedConnector3">
+            <a:avLst>
+              <a:gd name="adj1" fmla="val 50000"/>
+            </a:avLst>
+          </a:prstGeom>
+          <a:ln>
+            <a:solidFill>
+              <a:srgbClr val="8854D0"/>
+            </a:solidFill>
+          </a:ln>
+        </p:spPr>
+        <p:style>
+          <a:lnRef idx="1">
+            <a:schemeClr val="accent1"/>
+          </a:lnRef>
+          <a:fillRef idx="0">
+            <a:schemeClr val="accent1"/>
+          </a:fillRef>
+          <a:effectRef idx="0">
+            <a:schemeClr val="accent1"/>
+          </a:effectRef>
+          <a:fontRef idx="minor">
+            <a:schemeClr val="tx1"/>
+          </a:fontRef>
+        </p:style>
+      </p:cxnSp>
+      <p:cxnSp>
+        <p:nvCxnSpPr>
+          <p:cNvPr id="38" name="连接符: 曲线 37">
+            <a:extLst>
+              <a:ext uri="{FF2B5EF4-FFF2-40B4-BE49-F238E27FC236}">
+                <a16:creationId xmlns:a16="http://schemas.microsoft.com/office/drawing/2014/main" id="{684D6285-3A23-E778-92CA-15C9A5FA20BC}"/>
+              </a:ext>
+            </a:extLst>
+          </p:cNvPr>
+          <p:cNvCxnSpPr>
+            <a:cxnSpLocks/>
+            <a:stCxn id="31" idx="1"/>
+            <a:endCxn id="12" idx="3"/>
+          </p:cNvCxnSpPr>
+          <p:nvPr/>
+        </p:nvCxnSpPr>
+        <p:spPr>
+          <a:xfrm rot="10800000">
+            <a:off x="4888637" y="5909326"/>
+            <a:ext cx="222875" cy="331938"/>
+          </a:xfrm>
+          <a:prstGeom prst="curvedConnector3">
+            <a:avLst>
+              <a:gd name="adj1" fmla="val 50000"/>
+            </a:avLst>
+          </a:prstGeom>
+          <a:ln>
+            <a:solidFill>
+              <a:srgbClr val="8854D0"/>
+            </a:solidFill>
+          </a:ln>
+        </p:spPr>
+        <p:style>
+          <a:lnRef idx="1">
+            <a:schemeClr val="accent1"/>
+          </a:lnRef>
+          <a:fillRef idx="0">
+            <a:schemeClr val="accent1"/>
+          </a:fillRef>
+          <a:effectRef idx="0">
+            <a:schemeClr val="accent1"/>
+          </a:effectRef>
+          <a:fontRef idx="minor">
+            <a:schemeClr val="tx1"/>
+          </a:fontRef>
+        </p:style>
+      </p:cxnSp>
+      <p:cxnSp>
+        <p:nvCxnSpPr>
+          <p:cNvPr id="47" name="连接符: 曲线 46">
+            <a:extLst>
+              <a:ext uri="{FF2B5EF4-FFF2-40B4-BE49-F238E27FC236}">
+                <a16:creationId xmlns:a16="http://schemas.microsoft.com/office/drawing/2014/main" id="{BA78BC2D-F1BE-EC17-3127-EB52F68FD4C2}"/>
+              </a:ext>
+            </a:extLst>
+          </p:cNvPr>
+          <p:cNvCxnSpPr>
+            <a:cxnSpLocks/>
+            <a:stCxn id="27" idx="3"/>
+            <a:endCxn id="99" idx="1"/>
+          </p:cNvCxnSpPr>
+          <p:nvPr/>
+        </p:nvCxnSpPr>
+        <p:spPr>
+          <a:xfrm>
+            <a:off x="7434273" y="2888173"/>
+            <a:ext cx="239484" cy="129441"/>
+          </a:xfrm>
+          <a:prstGeom prst="curvedConnector3">
+            <a:avLst>
+              <a:gd name="adj1" fmla="val 50000"/>
+            </a:avLst>
+          </a:prstGeom>
+          <a:ln>
+            <a:solidFill>
+              <a:srgbClr val="FFC000"/>
+            </a:solidFill>
+          </a:ln>
+        </p:spPr>
+        <p:style>
+          <a:lnRef idx="1">
+            <a:schemeClr val="accent1"/>
+          </a:lnRef>
+          <a:fillRef idx="0">
+            <a:schemeClr val="accent1"/>
+          </a:fillRef>
+          <a:effectRef idx="0">
+            <a:schemeClr val="accent1"/>
+          </a:effectRef>
+          <a:fontRef idx="minor">
+            <a:schemeClr val="tx1"/>
+          </a:fontRef>
+        </p:style>
+      </p:cxnSp>
+      <p:cxnSp>
+        <p:nvCxnSpPr>
+          <p:cNvPr id="51" name="连接符: 曲线 50">
+            <a:extLst>
+              <a:ext uri="{FF2B5EF4-FFF2-40B4-BE49-F238E27FC236}">
+                <a16:creationId xmlns:a16="http://schemas.microsoft.com/office/drawing/2014/main" id="{0E54F35F-B766-BD4C-814C-CFF23033B849}"/>
+              </a:ext>
+            </a:extLst>
+          </p:cNvPr>
+          <p:cNvCxnSpPr>
+            <a:cxnSpLocks/>
+            <a:stCxn id="108" idx="3"/>
+            <a:endCxn id="99" idx="1"/>
+          </p:cNvCxnSpPr>
+          <p:nvPr/>
+        </p:nvCxnSpPr>
+        <p:spPr>
+          <a:xfrm flipV="1">
+            <a:off x="7426143" y="3017614"/>
+            <a:ext cx="247614" cy="140453"/>
+          </a:xfrm>
+          <a:prstGeom prst="curvedConnector3">
+            <a:avLst>
+              <a:gd name="adj1" fmla="val 50000"/>
+            </a:avLst>
           </a:prstGeom>
           <a:ln>
             <a:solidFill>
@@ -34409,7 +34411,7 @@
           <a:p>
             <a:pPr algn="ctr"/>
             <a:r>
-              <a:rPr lang="en-US" altLang="zh-CN" sz="800">
+              <a:rPr lang="en-US" altLang="zh-CN" sz="800" dirty="0">
                 <a:latin typeface="Quicksand Light" panose="00000400000000000000" pitchFamily="2" charset="0"/>
                 <a:ea typeface="微软雅黑" panose="020B0503020204020204" pitchFamily="34" charset="-122"/>
               </a:rPr>
@@ -34471,12 +34473,24 @@
           <a:p>
             <a:pPr algn="ctr"/>
             <a:r>
-              <a:rPr lang="en-US" altLang="zh-CN" sz="800">
+              <a:rPr lang="en-US" altLang="zh-CN" sz="800" dirty="0">
                 <a:latin typeface="Quicksand Light" panose="00000400000000000000" pitchFamily="2" charset="0"/>
               </a:rPr>
-              <a:t>&lt;svg&gt;</a:t>
-            </a:r>
-            <a:endParaRPr lang="zh-CN" altLang="en-US" sz="800">
+              <a:t>&lt;</a:t>
+            </a:r>
+            <a:r>
+              <a:rPr lang="en-US" altLang="zh-CN" sz="800" dirty="0" err="1">
+                <a:latin typeface="Quicksand Light" panose="00000400000000000000" pitchFamily="2" charset="0"/>
+              </a:rPr>
+              <a:t>svg</a:t>
+            </a:r>
+            <a:r>
+              <a:rPr lang="en-US" altLang="zh-CN" sz="800" dirty="0">
+                <a:latin typeface="Quicksand Light" panose="00000400000000000000" pitchFamily="2" charset="0"/>
+              </a:rPr>
+              <a:t>&gt;</a:t>
+            </a:r>
+            <a:endParaRPr lang="zh-CN" altLang="en-US" sz="800" dirty="0">
               <a:latin typeface="Quicksand Light" panose="00000400000000000000" pitchFamily="2" charset="0"/>
             </a:endParaRPr>
           </a:p>

--- a/utils/file/charts.pptx
+++ b/utils/file/charts.pptx
@@ -288,7 +288,7 @@
           <a:p>
             <a:fld id="{C0F7C65B-F23F-479A-8AFF-E7E0FC962F06}" type="datetimeFigureOut">
               <a:rPr lang="zh-CN" altLang="en-US" smtClean="0"/>
-              <a:t>2025/12/20</a:t>
+              <a:t>2026/1/18</a:t>
             </a:fld>
             <a:endParaRPr lang="zh-CN" altLang="en-US"/>
           </a:p>
@@ -486,7 +486,7 @@
           <a:p>
             <a:fld id="{C0F7C65B-F23F-479A-8AFF-E7E0FC962F06}" type="datetimeFigureOut">
               <a:rPr lang="zh-CN" altLang="en-US" smtClean="0"/>
-              <a:t>2025/12/20</a:t>
+              <a:t>2026/1/18</a:t>
             </a:fld>
             <a:endParaRPr lang="zh-CN" altLang="en-US"/>
           </a:p>
@@ -694,7 +694,7 @@
           <a:p>
             <a:fld id="{C0F7C65B-F23F-479A-8AFF-E7E0FC962F06}" type="datetimeFigureOut">
               <a:rPr lang="zh-CN" altLang="en-US" smtClean="0"/>
-              <a:t>2025/12/20</a:t>
+              <a:t>2026/1/18</a:t>
             </a:fld>
             <a:endParaRPr lang="zh-CN" altLang="en-US"/>
           </a:p>
@@ -892,7 +892,7 @@
           <a:p>
             <a:fld id="{C0F7C65B-F23F-479A-8AFF-E7E0FC962F06}" type="datetimeFigureOut">
               <a:rPr lang="zh-CN" altLang="en-US" smtClean="0"/>
-              <a:t>2025/12/20</a:t>
+              <a:t>2026/1/18</a:t>
             </a:fld>
             <a:endParaRPr lang="zh-CN" altLang="en-US"/>
           </a:p>
@@ -1167,7 +1167,7 @@
           <a:p>
             <a:fld id="{C0F7C65B-F23F-479A-8AFF-E7E0FC962F06}" type="datetimeFigureOut">
               <a:rPr lang="zh-CN" altLang="en-US" smtClean="0"/>
-              <a:t>2025/12/20</a:t>
+              <a:t>2026/1/18</a:t>
             </a:fld>
             <a:endParaRPr lang="zh-CN" altLang="en-US"/>
           </a:p>
@@ -1432,7 +1432,7 @@
           <a:p>
             <a:fld id="{C0F7C65B-F23F-479A-8AFF-E7E0FC962F06}" type="datetimeFigureOut">
               <a:rPr lang="zh-CN" altLang="en-US" smtClean="0"/>
-              <a:t>2025/12/20</a:t>
+              <a:t>2026/1/18</a:t>
             </a:fld>
             <a:endParaRPr lang="zh-CN" altLang="en-US"/>
           </a:p>
@@ -1844,7 +1844,7 @@
           <a:p>
             <a:fld id="{C0F7C65B-F23F-479A-8AFF-E7E0FC962F06}" type="datetimeFigureOut">
               <a:rPr lang="zh-CN" altLang="en-US" smtClean="0"/>
-              <a:t>2025/12/20</a:t>
+              <a:t>2026/1/18</a:t>
             </a:fld>
             <a:endParaRPr lang="zh-CN" altLang="en-US"/>
           </a:p>
@@ -1985,7 +1985,7 @@
           <a:p>
             <a:fld id="{C0F7C65B-F23F-479A-8AFF-E7E0FC962F06}" type="datetimeFigureOut">
               <a:rPr lang="zh-CN" altLang="en-US" smtClean="0"/>
-              <a:t>2025/12/20</a:t>
+              <a:t>2026/1/18</a:t>
             </a:fld>
             <a:endParaRPr lang="zh-CN" altLang="en-US"/>
           </a:p>
@@ -2098,7 +2098,7 @@
           <a:p>
             <a:fld id="{C0F7C65B-F23F-479A-8AFF-E7E0FC962F06}" type="datetimeFigureOut">
               <a:rPr lang="zh-CN" altLang="en-US" smtClean="0"/>
-              <a:t>2025/12/20</a:t>
+              <a:t>2026/1/18</a:t>
             </a:fld>
             <a:endParaRPr lang="zh-CN" altLang="en-US"/>
           </a:p>
@@ -2409,7 +2409,7 @@
           <a:p>
             <a:fld id="{C0F7C65B-F23F-479A-8AFF-E7E0FC962F06}" type="datetimeFigureOut">
               <a:rPr lang="zh-CN" altLang="en-US" smtClean="0"/>
-              <a:t>2025/12/20</a:t>
+              <a:t>2026/1/18</a:t>
             </a:fld>
             <a:endParaRPr lang="zh-CN" altLang="en-US"/>
           </a:p>
@@ -2697,7 +2697,7 @@
           <a:p>
             <a:fld id="{C0F7C65B-F23F-479A-8AFF-E7E0FC962F06}" type="datetimeFigureOut">
               <a:rPr lang="zh-CN" altLang="en-US" smtClean="0"/>
-              <a:t>2025/12/20</a:t>
+              <a:t>2026/1/18</a:t>
             </a:fld>
             <a:endParaRPr lang="zh-CN" altLang="en-US"/>
           </a:p>
@@ -2938,7 +2938,7 @@
           <a:p>
             <a:fld id="{C0F7C65B-F23F-479A-8AFF-E7E0FC962F06}" type="datetimeFigureOut">
               <a:rPr lang="zh-CN" altLang="en-US" smtClean="0"/>
-              <a:t>2025/12/20</a:t>
+              <a:t>2026/1/18</a:t>
             </a:fld>
             <a:endParaRPr lang="zh-CN" altLang="en-US"/>
           </a:p>
@@ -11370,12 +11370,12 @@
             <a:pPr algn="ctr"/>
             <a:r>
               <a:rPr lang="en-US" altLang="zh-CN" sz="800">
-                <a:latin typeface="Quicksand Light" panose="00000400000000000000" pitchFamily="2" charset="0"/>
+                <a:latin typeface="Poppins" panose="00000500000000000000" pitchFamily="2" charset="0"/>
               </a:rPr>
               <a:t>Data type</a:t>
             </a:r>
             <a:endParaRPr lang="zh-CN" altLang="en-US" sz="800">
-              <a:latin typeface="Quicksand Light" panose="00000400000000000000" pitchFamily="2" charset="0"/>
+              <a:latin typeface="Poppins" panose="00000500000000000000" pitchFamily="2" charset="0"/>
             </a:endParaRPr>
           </a:p>
         </p:txBody>
@@ -11430,7 +11430,7 @@
                 <a:solidFill>
                   <a:sysClr val="windowText" lastClr="000000"/>
                 </a:solidFill>
-                <a:latin typeface="Quicksand" panose="00000500000000000000" pitchFamily="2" charset="0"/>
+                <a:latin typeface="Poppins" panose="00000500000000000000" pitchFamily="2" charset="0"/>
               </a:rPr>
               <a:t>Number</a:t>
             </a:r>
@@ -11438,7 +11438,7 @@
               <a:solidFill>
                 <a:sysClr val="windowText" lastClr="000000"/>
               </a:solidFill>
-              <a:latin typeface="Quicksand" panose="00000500000000000000" pitchFamily="2" charset="0"/>
+              <a:latin typeface="Poppins" panose="00000500000000000000" pitchFamily="2" charset="0"/>
             </a:endParaRPr>
           </a:p>
         </p:txBody>
@@ -11493,7 +11493,7 @@
                 <a:solidFill>
                   <a:sysClr val="windowText" lastClr="000000"/>
                 </a:solidFill>
-                <a:latin typeface="Quicksand" panose="00000500000000000000" pitchFamily="2" charset="0"/>
+                <a:latin typeface="Poppins" panose="00000500000000000000" pitchFamily="2" charset="0"/>
               </a:rPr>
               <a:t>Class</a:t>
             </a:r>
@@ -11501,7 +11501,7 @@
               <a:solidFill>
                 <a:sysClr val="windowText" lastClr="000000"/>
               </a:solidFill>
-              <a:latin typeface="Quicksand" panose="00000500000000000000" pitchFamily="2" charset="0"/>
+              <a:latin typeface="Poppins" panose="00000500000000000000" pitchFamily="2" charset="0"/>
             </a:endParaRPr>
           </a:p>
         </p:txBody>
@@ -11650,12 +11650,12 @@
             <a:pPr algn="ctr"/>
             <a:r>
               <a:rPr lang="en-US" altLang="zh-CN" sz="800">
-                <a:latin typeface="Quicksand Light" panose="00000400000000000000" pitchFamily="2" charset="0"/>
+                <a:latin typeface="Poppins" panose="00000500000000000000" pitchFamily="2" charset="0"/>
               </a:rPr>
               <a:t>Primitives</a:t>
             </a:r>
             <a:endParaRPr lang="zh-CN" altLang="en-US" sz="800">
-              <a:latin typeface="Quicksand Light" panose="00000400000000000000" pitchFamily="2" charset="0"/>
+              <a:latin typeface="Poppins" panose="00000500000000000000" pitchFamily="2" charset="0"/>
             </a:endParaRPr>
           </a:p>
         </p:txBody>
@@ -11710,7 +11710,7 @@
                 <a:solidFill>
                   <a:sysClr val="windowText" lastClr="000000"/>
                 </a:solidFill>
-                <a:latin typeface="Quicksand" panose="00000500000000000000" pitchFamily="2" charset="0"/>
+                <a:latin typeface="Poppins" panose="00000500000000000000" pitchFamily="2" charset="0"/>
               </a:rPr>
               <a:t>null</a:t>
             </a:r>
@@ -11718,7 +11718,7 @@
               <a:solidFill>
                 <a:sysClr val="windowText" lastClr="000000"/>
               </a:solidFill>
-              <a:latin typeface="Quicksand" panose="00000500000000000000" pitchFamily="2" charset="0"/>
+              <a:latin typeface="Poppins" panose="00000500000000000000" pitchFamily="2" charset="0"/>
             </a:endParaRPr>
           </a:p>
         </p:txBody>
@@ -11822,12 +11822,12 @@
             <a:pPr algn="ctr"/>
             <a:r>
               <a:rPr lang="en-US" altLang="zh-CN" sz="800">
-                <a:latin typeface="Quicksand" panose="00000500000000000000" pitchFamily="2" charset="0"/>
+                <a:latin typeface="Poppins" panose="00000500000000000000" pitchFamily="2" charset="0"/>
               </a:rPr>
               <a:t>Reference</a:t>
             </a:r>
             <a:endParaRPr lang="zh-CN" altLang="en-US" sz="800">
-              <a:latin typeface="Quicksand" panose="00000500000000000000" pitchFamily="2" charset="0"/>
+              <a:latin typeface="Poppins" panose="00000500000000000000" pitchFamily="2" charset="0"/>
             </a:endParaRPr>
           </a:p>
         </p:txBody>
@@ -11878,19 +11878,19 @@
           <a:lstStyle/>
           <a:p>
             <a:r>
-              <a:rPr lang="en-US" altLang="zh-CN" sz="800">
+              <a:rPr lang="en-US" altLang="zh-CN" sz="800" dirty="0">
                 <a:solidFill>
                   <a:sysClr val="windowText" lastClr="000000"/>
                 </a:solidFill>
-                <a:latin typeface="Quicksand" panose="00000500000000000000" pitchFamily="2" charset="0"/>
+                <a:latin typeface="Poppins" panose="00000500000000000000" pitchFamily="2" charset="0"/>
               </a:rPr>
-              <a:t>Array</a:t>
-            </a:r>
-            <a:endParaRPr lang="zh-CN" altLang="en-US" sz="800">
+              <a:t>Object</a:t>
+            </a:r>
+            <a:endParaRPr lang="zh-CN" altLang="en-US" sz="800" dirty="0">
               <a:solidFill>
                 <a:sysClr val="windowText" lastClr="000000"/>
               </a:solidFill>
-              <a:latin typeface="Quicksand" panose="00000500000000000000" pitchFamily="2" charset="0"/>
+              <a:latin typeface="Poppins" panose="00000500000000000000" pitchFamily="2" charset="0"/>
             </a:endParaRPr>
           </a:p>
         </p:txBody>
@@ -12086,7 +12086,7 @@
                 <a:solidFill>
                   <a:sysClr val="windowText" lastClr="000000"/>
                 </a:solidFill>
-                <a:latin typeface="Quicksand" panose="00000500000000000000" pitchFamily="2" charset="0"/>
+                <a:latin typeface="Poppins" panose="00000500000000000000" pitchFamily="2" charset="0"/>
               </a:rPr>
               <a:t>String</a:t>
             </a:r>
@@ -12094,7 +12094,7 @@
               <a:solidFill>
                 <a:sysClr val="windowText" lastClr="000000"/>
               </a:solidFill>
-              <a:latin typeface="Quicksand" panose="00000500000000000000" pitchFamily="2" charset="0"/>
+              <a:latin typeface="Poppins" panose="00000500000000000000" pitchFamily="2" charset="0"/>
             </a:endParaRPr>
           </a:p>
         </p:txBody>
@@ -12149,7 +12149,7 @@
                 <a:solidFill>
                   <a:sysClr val="windowText" lastClr="000000"/>
                 </a:solidFill>
-                <a:latin typeface="Quicksand" panose="00000500000000000000" pitchFamily="2" charset="0"/>
+                <a:latin typeface="Poppins" panose="00000500000000000000" pitchFamily="2" charset="0"/>
               </a:rPr>
               <a:t>Boolean</a:t>
             </a:r>
@@ -12157,7 +12157,7 @@
               <a:solidFill>
                 <a:sysClr val="windowText" lastClr="000000"/>
               </a:solidFill>
-              <a:latin typeface="Quicksand" panose="00000500000000000000" pitchFamily="2" charset="0"/>
+              <a:latin typeface="Poppins" panose="00000500000000000000" pitchFamily="2" charset="0"/>
             </a:endParaRPr>
           </a:p>
         </p:txBody>
@@ -12212,7 +12212,7 @@
                 <a:solidFill>
                   <a:sysClr val="windowText" lastClr="000000"/>
                 </a:solidFill>
-                <a:latin typeface="Quicksand" panose="00000500000000000000" pitchFamily="2" charset="0"/>
+                <a:latin typeface="Poppins" panose="00000500000000000000" pitchFamily="2" charset="0"/>
               </a:rPr>
               <a:t>Undefined</a:t>
             </a:r>
@@ -12220,7 +12220,7 @@
               <a:solidFill>
                 <a:sysClr val="windowText" lastClr="000000"/>
               </a:solidFill>
-              <a:latin typeface="Quicksand" panose="00000500000000000000" pitchFamily="2" charset="0"/>
+              <a:latin typeface="Poppins" panose="00000500000000000000" pitchFamily="2" charset="0"/>
             </a:endParaRPr>
           </a:p>
         </p:txBody>
@@ -12271,19 +12271,19 @@
           <a:lstStyle/>
           <a:p>
             <a:r>
-              <a:rPr lang="en-US" altLang="zh-CN" sz="800">
+              <a:rPr lang="en-US" altLang="zh-CN" sz="800" dirty="0">
                 <a:solidFill>
                   <a:sysClr val="windowText" lastClr="000000"/>
                 </a:solidFill>
-                <a:latin typeface="Quicksand" panose="00000500000000000000" pitchFamily="2" charset="0"/>
+                <a:latin typeface="Poppins" panose="00000500000000000000" pitchFamily="2" charset="0"/>
               </a:rPr>
-              <a:t>Object</a:t>
-            </a:r>
-            <a:endParaRPr lang="zh-CN" altLang="en-US" sz="800">
+              <a:t>Function</a:t>
+            </a:r>
+            <a:endParaRPr lang="zh-CN" altLang="en-US" sz="800" dirty="0">
               <a:solidFill>
                 <a:sysClr val="windowText" lastClr="000000"/>
               </a:solidFill>
-              <a:latin typeface="Quicksand" panose="00000500000000000000" pitchFamily="2" charset="0"/>
+              <a:latin typeface="Poppins" panose="00000500000000000000" pitchFamily="2" charset="0"/>
             </a:endParaRPr>
           </a:p>
         </p:txBody>
@@ -12334,19 +12334,19 @@
           <a:lstStyle/>
           <a:p>
             <a:r>
-              <a:rPr lang="en-US" altLang="zh-CN" sz="800">
+              <a:rPr lang="en-US" altLang="zh-CN" sz="800" dirty="0">
                 <a:solidFill>
                   <a:sysClr val="windowText" lastClr="000000"/>
                 </a:solidFill>
-                <a:latin typeface="Quicksand" panose="00000500000000000000" pitchFamily="2" charset="0"/>
+                <a:latin typeface="Poppins" panose="00000500000000000000" pitchFamily="2" charset="0"/>
               </a:rPr>
-              <a:t>Function</a:t>
-            </a:r>
-            <a:endParaRPr lang="zh-CN" altLang="en-US" sz="800">
+              <a:t>Array</a:t>
+            </a:r>
+            <a:endParaRPr lang="zh-CN" altLang="en-US" sz="800" dirty="0">
               <a:solidFill>
                 <a:sysClr val="windowText" lastClr="000000"/>
               </a:solidFill>
-              <a:latin typeface="Quicksand" panose="00000500000000000000" pitchFamily="2" charset="0"/>
+              <a:latin typeface="Poppins" panose="00000500000000000000" pitchFamily="2" charset="0"/>
             </a:endParaRPr>
           </a:p>
         </p:txBody>
@@ -12401,7 +12401,7 @@
                 <a:solidFill>
                   <a:sysClr val="windowText" lastClr="000000"/>
                 </a:solidFill>
-                <a:latin typeface="Quicksand" panose="00000500000000000000" pitchFamily="2" charset="0"/>
+                <a:latin typeface="Poppins" panose="00000500000000000000" pitchFamily="2" charset="0"/>
               </a:rPr>
               <a:t>Map</a:t>
             </a:r>
@@ -12409,7 +12409,7 @@
               <a:solidFill>
                 <a:sysClr val="windowText" lastClr="000000"/>
               </a:solidFill>
-              <a:latin typeface="Quicksand" panose="00000500000000000000" pitchFamily="2" charset="0"/>
+              <a:latin typeface="Poppins" panose="00000500000000000000" pitchFamily="2" charset="0"/>
             </a:endParaRPr>
           </a:p>
         </p:txBody>
@@ -12464,7 +12464,7 @@
                 <a:solidFill>
                   <a:sysClr val="windowText" lastClr="000000"/>
                 </a:solidFill>
-                <a:latin typeface="Quicksand" panose="00000500000000000000" pitchFamily="2" charset="0"/>
+                <a:latin typeface="Poppins" panose="00000500000000000000" pitchFamily="2" charset="0"/>
               </a:rPr>
               <a:t>Set</a:t>
             </a:r>
@@ -12472,7 +12472,7 @@
               <a:solidFill>
                 <a:sysClr val="windowText" lastClr="000000"/>
               </a:solidFill>
-              <a:latin typeface="Quicksand" panose="00000500000000000000" pitchFamily="2" charset="0"/>
+              <a:latin typeface="Poppins" panose="00000500000000000000" pitchFamily="2" charset="0"/>
             </a:endParaRPr>
           </a:p>
         </p:txBody>
@@ -12527,7 +12527,7 @@
                 <a:solidFill>
                   <a:sysClr val="windowText" lastClr="000000"/>
                 </a:solidFill>
-                <a:latin typeface="Quicksand" panose="00000500000000000000" pitchFamily="2" charset="0"/>
+                <a:latin typeface="Poppins" panose="00000500000000000000" pitchFamily="2" charset="0"/>
               </a:rPr>
               <a:t>RegExp</a:t>
             </a:r>
@@ -12535,7 +12535,7 @@
               <a:solidFill>
                 <a:sysClr val="windowText" lastClr="000000"/>
               </a:solidFill>
-              <a:latin typeface="Quicksand" panose="00000500000000000000" pitchFamily="2" charset="0"/>
+              <a:latin typeface="Poppins" panose="00000500000000000000" pitchFamily="2" charset="0"/>
             </a:endParaRPr>
           </a:p>
         </p:txBody>
@@ -12590,12 +12590,12 @@
             <a:pPr algn="ctr"/>
             <a:r>
               <a:rPr lang="en-US" altLang="zh-CN" sz="800">
-                <a:latin typeface="Quicksand Light" panose="00000400000000000000" pitchFamily="2" charset="0"/>
+                <a:latin typeface="Poppins" panose="00000500000000000000" pitchFamily="2" charset="0"/>
               </a:rPr>
               <a:t>Conversion</a:t>
             </a:r>
             <a:endParaRPr lang="zh-CN" altLang="en-US" sz="800">
-              <a:latin typeface="Quicksand Light" panose="00000400000000000000" pitchFamily="2" charset="0"/>
+              <a:latin typeface="Poppins" panose="00000500000000000000" pitchFamily="2" charset="0"/>
             </a:endParaRPr>
           </a:p>
         </p:txBody>

--- a/utils/file/charts.pptx
+++ b/utils/file/charts.pptx
@@ -6,35 +6,36 @@
   </p:sldMasterIdLst>
   <p:sldIdLst>
     <p:sldId id="270" r:id="rId2"/>
-    <p:sldId id="289" r:id="rId3"/>
-    <p:sldId id="290" r:id="rId4"/>
-    <p:sldId id="258" r:id="rId5"/>
-    <p:sldId id="259" r:id="rId6"/>
-    <p:sldId id="260" r:id="rId7"/>
-    <p:sldId id="269" r:id="rId8"/>
-    <p:sldId id="261" r:id="rId9"/>
-    <p:sldId id="262" r:id="rId10"/>
-    <p:sldId id="263" r:id="rId11"/>
-    <p:sldId id="265" r:id="rId12"/>
-    <p:sldId id="266" r:id="rId13"/>
-    <p:sldId id="267" r:id="rId14"/>
-    <p:sldId id="273" r:id="rId15"/>
-    <p:sldId id="271" r:id="rId16"/>
-    <p:sldId id="268" r:id="rId17"/>
-    <p:sldId id="281" r:id="rId18"/>
-    <p:sldId id="282" r:id="rId19"/>
-    <p:sldId id="283" r:id="rId20"/>
-    <p:sldId id="284" r:id="rId21"/>
-    <p:sldId id="274" r:id="rId22"/>
-    <p:sldId id="276" r:id="rId23"/>
-    <p:sldId id="277" r:id="rId24"/>
-    <p:sldId id="278" r:id="rId25"/>
-    <p:sldId id="279" r:id="rId26"/>
-    <p:sldId id="285" r:id="rId27"/>
-    <p:sldId id="280" r:id="rId28"/>
-    <p:sldId id="264" r:id="rId29"/>
-    <p:sldId id="272" r:id="rId30"/>
-    <p:sldId id="256" r:id="rId31"/>
+    <p:sldId id="291" r:id="rId3"/>
+    <p:sldId id="289" r:id="rId4"/>
+    <p:sldId id="290" r:id="rId5"/>
+    <p:sldId id="258" r:id="rId6"/>
+    <p:sldId id="259" r:id="rId7"/>
+    <p:sldId id="260" r:id="rId8"/>
+    <p:sldId id="269" r:id="rId9"/>
+    <p:sldId id="261" r:id="rId10"/>
+    <p:sldId id="262" r:id="rId11"/>
+    <p:sldId id="263" r:id="rId12"/>
+    <p:sldId id="265" r:id="rId13"/>
+    <p:sldId id="266" r:id="rId14"/>
+    <p:sldId id="267" r:id="rId15"/>
+    <p:sldId id="273" r:id="rId16"/>
+    <p:sldId id="271" r:id="rId17"/>
+    <p:sldId id="268" r:id="rId18"/>
+    <p:sldId id="281" r:id="rId19"/>
+    <p:sldId id="282" r:id="rId20"/>
+    <p:sldId id="283" r:id="rId21"/>
+    <p:sldId id="284" r:id="rId22"/>
+    <p:sldId id="274" r:id="rId23"/>
+    <p:sldId id="276" r:id="rId24"/>
+    <p:sldId id="277" r:id="rId25"/>
+    <p:sldId id="278" r:id="rId26"/>
+    <p:sldId id="279" r:id="rId27"/>
+    <p:sldId id="285" r:id="rId28"/>
+    <p:sldId id="280" r:id="rId29"/>
+    <p:sldId id="264" r:id="rId30"/>
+    <p:sldId id="272" r:id="rId31"/>
+    <p:sldId id="256" r:id="rId32"/>
   </p:sldIdLst>
   <p:sldSz cx="12192000" cy="6858000"/>
   <p:notesSz cx="6858000" cy="9144000"/>
@@ -288,7 +289,7 @@
           <a:p>
             <a:fld id="{C0F7C65B-F23F-479A-8AFF-E7E0FC962F06}" type="datetimeFigureOut">
               <a:rPr lang="zh-CN" altLang="en-US" smtClean="0"/>
-              <a:t>2026/1/18</a:t>
+              <a:t>2026/1/29</a:t>
             </a:fld>
             <a:endParaRPr lang="zh-CN" altLang="en-US"/>
           </a:p>
@@ -486,7 +487,7 @@
           <a:p>
             <a:fld id="{C0F7C65B-F23F-479A-8AFF-E7E0FC962F06}" type="datetimeFigureOut">
               <a:rPr lang="zh-CN" altLang="en-US" smtClean="0"/>
-              <a:t>2026/1/18</a:t>
+              <a:t>2026/1/29</a:t>
             </a:fld>
             <a:endParaRPr lang="zh-CN" altLang="en-US"/>
           </a:p>
@@ -694,7 +695,7 @@
           <a:p>
             <a:fld id="{C0F7C65B-F23F-479A-8AFF-E7E0FC962F06}" type="datetimeFigureOut">
               <a:rPr lang="zh-CN" altLang="en-US" smtClean="0"/>
-              <a:t>2026/1/18</a:t>
+              <a:t>2026/1/29</a:t>
             </a:fld>
             <a:endParaRPr lang="zh-CN" altLang="en-US"/>
           </a:p>
@@ -892,7 +893,7 @@
           <a:p>
             <a:fld id="{C0F7C65B-F23F-479A-8AFF-E7E0FC962F06}" type="datetimeFigureOut">
               <a:rPr lang="zh-CN" altLang="en-US" smtClean="0"/>
-              <a:t>2026/1/18</a:t>
+              <a:t>2026/1/29</a:t>
             </a:fld>
             <a:endParaRPr lang="zh-CN" altLang="en-US"/>
           </a:p>
@@ -1167,7 +1168,7 @@
           <a:p>
             <a:fld id="{C0F7C65B-F23F-479A-8AFF-E7E0FC962F06}" type="datetimeFigureOut">
               <a:rPr lang="zh-CN" altLang="en-US" smtClean="0"/>
-              <a:t>2026/1/18</a:t>
+              <a:t>2026/1/29</a:t>
             </a:fld>
             <a:endParaRPr lang="zh-CN" altLang="en-US"/>
           </a:p>
@@ -1432,7 +1433,7 @@
           <a:p>
             <a:fld id="{C0F7C65B-F23F-479A-8AFF-E7E0FC962F06}" type="datetimeFigureOut">
               <a:rPr lang="zh-CN" altLang="en-US" smtClean="0"/>
-              <a:t>2026/1/18</a:t>
+              <a:t>2026/1/29</a:t>
             </a:fld>
             <a:endParaRPr lang="zh-CN" altLang="en-US"/>
           </a:p>
@@ -1844,7 +1845,7 @@
           <a:p>
             <a:fld id="{C0F7C65B-F23F-479A-8AFF-E7E0FC962F06}" type="datetimeFigureOut">
               <a:rPr lang="zh-CN" altLang="en-US" smtClean="0"/>
-              <a:t>2026/1/18</a:t>
+              <a:t>2026/1/29</a:t>
             </a:fld>
             <a:endParaRPr lang="zh-CN" altLang="en-US"/>
           </a:p>
@@ -1985,7 +1986,7 @@
           <a:p>
             <a:fld id="{C0F7C65B-F23F-479A-8AFF-E7E0FC962F06}" type="datetimeFigureOut">
               <a:rPr lang="zh-CN" altLang="en-US" smtClean="0"/>
-              <a:t>2026/1/18</a:t>
+              <a:t>2026/1/29</a:t>
             </a:fld>
             <a:endParaRPr lang="zh-CN" altLang="en-US"/>
           </a:p>
@@ -2098,7 +2099,7 @@
           <a:p>
             <a:fld id="{C0F7C65B-F23F-479A-8AFF-E7E0FC962F06}" type="datetimeFigureOut">
               <a:rPr lang="zh-CN" altLang="en-US" smtClean="0"/>
-              <a:t>2026/1/18</a:t>
+              <a:t>2026/1/29</a:t>
             </a:fld>
             <a:endParaRPr lang="zh-CN" altLang="en-US"/>
           </a:p>
@@ -2409,7 +2410,7 @@
           <a:p>
             <a:fld id="{C0F7C65B-F23F-479A-8AFF-E7E0FC962F06}" type="datetimeFigureOut">
               <a:rPr lang="zh-CN" altLang="en-US" smtClean="0"/>
-              <a:t>2026/1/18</a:t>
+              <a:t>2026/1/29</a:t>
             </a:fld>
             <a:endParaRPr lang="zh-CN" altLang="en-US"/>
           </a:p>
@@ -2697,7 +2698,7 @@
           <a:p>
             <a:fld id="{C0F7C65B-F23F-479A-8AFF-E7E0FC962F06}" type="datetimeFigureOut">
               <a:rPr lang="zh-CN" altLang="en-US" smtClean="0"/>
-              <a:t>2026/1/18</a:t>
+              <a:t>2026/1/29</a:t>
             </a:fld>
             <a:endParaRPr lang="zh-CN" altLang="en-US"/>
           </a:p>
@@ -2938,7 +2939,7 @@
           <a:p>
             <a:fld id="{C0F7C65B-F23F-479A-8AFF-E7E0FC962F06}" type="datetimeFigureOut">
               <a:rPr lang="zh-CN" altLang="en-US" smtClean="0"/>
-              <a:t>2026/1/18</a:t>
+              <a:t>2026/1/29</a:t>
             </a:fld>
             <a:endParaRPr lang="zh-CN" altLang="en-US"/>
           </a:p>
@@ -3508,6 +3509,972 @@
         <p:cNvPr id="1" name="">
           <a:extLst>
             <a:ext uri="{FF2B5EF4-FFF2-40B4-BE49-F238E27FC236}">
+              <a16:creationId xmlns:a16="http://schemas.microsoft.com/office/drawing/2014/main" id="{5C7A2C4C-DE35-8F5D-FAA3-1F45B914C406}"/>
+            </a:ext>
+          </a:extLst>
+        </p:cNvPr>
+        <p:cNvGrpSpPr/>
+        <p:nvPr/>
+      </p:nvGrpSpPr>
+      <p:grpSpPr>
+        <a:xfrm>
+          <a:off x="0" y="0"/>
+          <a:ext cx="0" cy="0"/>
+          <a:chOff x="0" y="0"/>
+          <a:chExt cx="0" cy="0"/>
+        </a:xfrm>
+      </p:grpSpPr>
+      <p:sp>
+        <p:nvSpPr>
+          <p:cNvPr id="7" name="矩形: 圆角 6">
+            <a:extLst>
+              <a:ext uri="{FF2B5EF4-FFF2-40B4-BE49-F238E27FC236}">
+                <a16:creationId xmlns:a16="http://schemas.microsoft.com/office/drawing/2014/main" id="{E9167702-BFB3-0DB3-BB79-C1FC75427EA0}"/>
+              </a:ext>
+            </a:extLst>
+          </p:cNvPr>
+          <p:cNvSpPr/>
+          <p:nvPr/>
+        </p:nvSpPr>
+        <p:spPr>
+          <a:xfrm>
+            <a:off x="4988680" y="2930400"/>
+            <a:ext cx="900000" cy="216000"/>
+          </a:xfrm>
+          <a:prstGeom prst="roundRect">
+            <a:avLst/>
+          </a:prstGeom>
+          <a:solidFill>
+            <a:srgbClr val="335BA3">
+              <a:alpha val="89804"/>
+            </a:srgbClr>
+          </a:solidFill>
+          <a:ln w="12700">
+            <a:noFill/>
+          </a:ln>
+        </p:spPr>
+        <p:style>
+          <a:lnRef idx="2">
+            <a:schemeClr val="accent1">
+              <a:shade val="15000"/>
+            </a:schemeClr>
+          </a:lnRef>
+          <a:fillRef idx="1">
+            <a:schemeClr val="accent1"/>
+          </a:fillRef>
+          <a:effectRef idx="0">
+            <a:schemeClr val="accent1"/>
+          </a:effectRef>
+          <a:fontRef idx="minor">
+            <a:schemeClr val="lt1"/>
+          </a:fontRef>
+        </p:style>
+        <p:txBody>
+          <a:bodyPr rtlCol="0" anchor="ctr"/>
+          <a:lstStyle/>
+          <a:p>
+            <a:pPr algn="ctr"/>
+            <a:r>
+              <a:rPr lang="en-US" altLang="zh-CN" sz="800">
+                <a:latin typeface="Quicksand" panose="00000500000000000000" pitchFamily="2" charset="0"/>
+              </a:rPr>
+              <a:t>::before</a:t>
+            </a:r>
+            <a:endParaRPr lang="zh-CN" altLang="en-US" sz="800">
+              <a:latin typeface="Quicksand" panose="00000500000000000000" pitchFamily="2" charset="0"/>
+            </a:endParaRPr>
+          </a:p>
+        </p:txBody>
+      </p:sp>
+      <p:sp>
+        <p:nvSpPr>
+          <p:cNvPr id="25" name="矩形: 圆角 24">
+            <a:extLst>
+              <a:ext uri="{FF2B5EF4-FFF2-40B4-BE49-F238E27FC236}">
+                <a16:creationId xmlns:a16="http://schemas.microsoft.com/office/drawing/2014/main" id="{DB29B0F0-7681-C319-D905-61DFC9EA1742}"/>
+              </a:ext>
+            </a:extLst>
+          </p:cNvPr>
+          <p:cNvSpPr/>
+          <p:nvPr/>
+        </p:nvSpPr>
+        <p:spPr>
+          <a:xfrm>
+            <a:off x="6057780" y="2534400"/>
+            <a:ext cx="900000" cy="216000"/>
+          </a:xfrm>
+          <a:prstGeom prst="roundRect">
+            <a:avLst/>
+          </a:prstGeom>
+          <a:solidFill>
+            <a:srgbClr val="F9423A">
+              <a:alpha val="89804"/>
+            </a:srgbClr>
+          </a:solidFill>
+          <a:ln w="12700">
+            <a:noFill/>
+          </a:ln>
+        </p:spPr>
+        <p:style>
+          <a:lnRef idx="2">
+            <a:schemeClr val="accent1">
+              <a:shade val="15000"/>
+            </a:schemeClr>
+          </a:lnRef>
+          <a:fillRef idx="1">
+            <a:schemeClr val="accent1"/>
+          </a:fillRef>
+          <a:effectRef idx="0">
+            <a:schemeClr val="accent1"/>
+          </a:effectRef>
+          <a:fontRef idx="minor">
+            <a:schemeClr val="lt1"/>
+          </a:fontRef>
+        </p:style>
+        <p:txBody>
+          <a:bodyPr rtlCol="0" anchor="ctr"/>
+          <a:lstStyle/>
+          <a:p>
+            <a:pPr algn="ctr"/>
+            <a:r>
+              <a:rPr lang="en-US" altLang="zh-CN" sz="800">
+                <a:latin typeface="Quicksand" panose="00000500000000000000" pitchFamily="2" charset="0"/>
+              </a:rPr>
+              <a:t>String of text</a:t>
+            </a:r>
+            <a:endParaRPr lang="zh-CN" altLang="en-US" sz="800">
+              <a:latin typeface="Quicksand" panose="00000500000000000000" pitchFamily="2" charset="0"/>
+            </a:endParaRPr>
+          </a:p>
+        </p:txBody>
+      </p:sp>
+      <p:sp>
+        <p:nvSpPr>
+          <p:cNvPr id="26" name="矩形: 圆角 25">
+            <a:extLst>
+              <a:ext uri="{FF2B5EF4-FFF2-40B4-BE49-F238E27FC236}">
+                <a16:creationId xmlns:a16="http://schemas.microsoft.com/office/drawing/2014/main" id="{A362D5C7-ED9E-7876-9B3A-5E7694F2029B}"/>
+              </a:ext>
+            </a:extLst>
+          </p:cNvPr>
+          <p:cNvSpPr/>
+          <p:nvPr/>
+        </p:nvSpPr>
+        <p:spPr>
+          <a:xfrm>
+            <a:off x="6057780" y="2798400"/>
+            <a:ext cx="900000" cy="216000"/>
+          </a:xfrm>
+          <a:prstGeom prst="roundRect">
+            <a:avLst/>
+          </a:prstGeom>
+          <a:solidFill>
+            <a:srgbClr val="F6A04D">
+              <a:alpha val="89804"/>
+            </a:srgbClr>
+          </a:solidFill>
+          <a:ln w="12700">
+            <a:noFill/>
+          </a:ln>
+        </p:spPr>
+        <p:style>
+          <a:lnRef idx="2">
+            <a:schemeClr val="accent1">
+              <a:shade val="15000"/>
+            </a:schemeClr>
+          </a:lnRef>
+          <a:fillRef idx="1">
+            <a:schemeClr val="accent1"/>
+          </a:fillRef>
+          <a:effectRef idx="0">
+            <a:schemeClr val="accent1"/>
+          </a:effectRef>
+          <a:fontRef idx="minor">
+            <a:schemeClr val="lt1"/>
+          </a:fontRef>
+        </p:style>
+        <p:txBody>
+          <a:bodyPr rtlCol="0" anchor="ctr"/>
+          <a:lstStyle/>
+          <a:p>
+            <a:pPr algn="ctr"/>
+            <a:r>
+              <a:rPr lang="en-US" altLang="zh-CN" sz="800">
+                <a:latin typeface="Quicksand" panose="00000500000000000000" pitchFamily="2" charset="0"/>
+              </a:rPr>
+              <a:t>Entity</a:t>
+            </a:r>
+            <a:endParaRPr lang="zh-CN" altLang="en-US" sz="800">
+              <a:latin typeface="Quicksand" panose="00000500000000000000" pitchFamily="2" charset="0"/>
+            </a:endParaRPr>
+          </a:p>
+        </p:txBody>
+      </p:sp>
+      <p:cxnSp>
+        <p:nvCxnSpPr>
+          <p:cNvPr id="28" name="连接符: 曲线 27">
+            <a:extLst>
+              <a:ext uri="{FF2B5EF4-FFF2-40B4-BE49-F238E27FC236}">
+                <a16:creationId xmlns:a16="http://schemas.microsoft.com/office/drawing/2014/main" id="{3CC45C27-5C3D-1BF1-5E05-EB880994D1C9}"/>
+              </a:ext>
+            </a:extLst>
+          </p:cNvPr>
+          <p:cNvCxnSpPr>
+            <a:cxnSpLocks/>
+            <a:stCxn id="7" idx="3"/>
+            <a:endCxn id="25" idx="1"/>
+          </p:cNvCxnSpPr>
+          <p:nvPr/>
+        </p:nvCxnSpPr>
+        <p:spPr>
+          <a:xfrm flipV="1">
+            <a:off x="5888680" y="2642400"/>
+            <a:ext cx="169100" cy="396000"/>
+          </a:xfrm>
+          <a:prstGeom prst="curvedConnector3">
+            <a:avLst/>
+          </a:prstGeom>
+          <a:ln>
+            <a:solidFill>
+              <a:srgbClr val="C00000"/>
+            </a:solidFill>
+          </a:ln>
+        </p:spPr>
+        <p:style>
+          <a:lnRef idx="1">
+            <a:schemeClr val="accent1"/>
+          </a:lnRef>
+          <a:fillRef idx="0">
+            <a:schemeClr val="accent1"/>
+          </a:fillRef>
+          <a:effectRef idx="0">
+            <a:schemeClr val="accent1"/>
+          </a:effectRef>
+          <a:fontRef idx="minor">
+            <a:schemeClr val="tx1"/>
+          </a:fontRef>
+        </p:style>
+      </p:cxnSp>
+      <p:cxnSp>
+        <p:nvCxnSpPr>
+          <p:cNvPr id="34" name="连接符: 曲线 33">
+            <a:extLst>
+              <a:ext uri="{FF2B5EF4-FFF2-40B4-BE49-F238E27FC236}">
+                <a16:creationId xmlns:a16="http://schemas.microsoft.com/office/drawing/2014/main" id="{D6AAD16A-0663-8D07-DC16-C4F0A658F0A3}"/>
+              </a:ext>
+            </a:extLst>
+          </p:cNvPr>
+          <p:cNvCxnSpPr>
+            <a:cxnSpLocks/>
+            <a:stCxn id="7" idx="3"/>
+            <a:endCxn id="12" idx="1"/>
+          </p:cNvCxnSpPr>
+          <p:nvPr/>
+        </p:nvCxnSpPr>
+        <p:spPr>
+          <a:xfrm>
+            <a:off x="5888680" y="3038400"/>
+            <a:ext cx="169100" cy="132000"/>
+          </a:xfrm>
+          <a:prstGeom prst="curvedConnector3">
+            <a:avLst>
+              <a:gd name="adj1" fmla="val 50000"/>
+            </a:avLst>
+          </a:prstGeom>
+          <a:ln>
+            <a:solidFill>
+              <a:srgbClr val="9966FF"/>
+            </a:solidFill>
+          </a:ln>
+        </p:spPr>
+        <p:style>
+          <a:lnRef idx="1">
+            <a:schemeClr val="accent1"/>
+          </a:lnRef>
+          <a:fillRef idx="0">
+            <a:schemeClr val="accent1"/>
+          </a:fillRef>
+          <a:effectRef idx="0">
+            <a:schemeClr val="accent1"/>
+          </a:effectRef>
+          <a:fontRef idx="minor">
+            <a:schemeClr val="tx1"/>
+          </a:fontRef>
+        </p:style>
+      </p:cxnSp>
+      <p:sp>
+        <p:nvSpPr>
+          <p:cNvPr id="108" name="矩形: 圆角 107">
+            <a:extLst>
+              <a:ext uri="{FF2B5EF4-FFF2-40B4-BE49-F238E27FC236}">
+                <a16:creationId xmlns:a16="http://schemas.microsoft.com/office/drawing/2014/main" id="{509F35E6-BC71-27B6-AB68-9D6D8641D9DE}"/>
+              </a:ext>
+            </a:extLst>
+          </p:cNvPr>
+          <p:cNvSpPr/>
+          <p:nvPr/>
+        </p:nvSpPr>
+        <p:spPr>
+          <a:xfrm>
+            <a:off x="6049650" y="3326400"/>
+            <a:ext cx="900000" cy="216000"/>
+          </a:xfrm>
+          <a:prstGeom prst="roundRect">
+            <a:avLst/>
+          </a:prstGeom>
+          <a:solidFill>
+            <a:srgbClr val="FB837D"/>
+          </a:solidFill>
+          <a:ln w="12700">
+            <a:noFill/>
+          </a:ln>
+        </p:spPr>
+        <p:style>
+          <a:lnRef idx="2">
+            <a:schemeClr val="accent1">
+              <a:shade val="15000"/>
+            </a:schemeClr>
+          </a:lnRef>
+          <a:fillRef idx="1">
+            <a:schemeClr val="accent1"/>
+          </a:fillRef>
+          <a:effectRef idx="0">
+            <a:schemeClr val="accent1"/>
+          </a:effectRef>
+          <a:fontRef idx="minor">
+            <a:schemeClr val="lt1"/>
+          </a:fontRef>
+        </p:style>
+        <p:txBody>
+          <a:bodyPr rtlCol="0" anchor="ctr"/>
+          <a:lstStyle/>
+          <a:p>
+            <a:pPr algn="ctr"/>
+            <a:r>
+              <a:rPr lang="en-US" altLang="zh-CN" sz="800">
+                <a:latin typeface="Quicksand" panose="00000500000000000000" pitchFamily="2" charset="0"/>
+              </a:rPr>
+              <a:t>counter</a:t>
+            </a:r>
+            <a:endParaRPr lang="zh-CN" altLang="en-US" sz="800">
+              <a:latin typeface="Quicksand" panose="00000500000000000000" pitchFamily="2" charset="0"/>
+            </a:endParaRPr>
+          </a:p>
+        </p:txBody>
+      </p:sp>
+      <p:cxnSp>
+        <p:nvCxnSpPr>
+          <p:cNvPr id="118" name="连接符: 曲线 117">
+            <a:extLst>
+              <a:ext uri="{FF2B5EF4-FFF2-40B4-BE49-F238E27FC236}">
+                <a16:creationId xmlns:a16="http://schemas.microsoft.com/office/drawing/2014/main" id="{DC5EF390-7693-C62F-379C-E8944F075A72}"/>
+              </a:ext>
+            </a:extLst>
+          </p:cNvPr>
+          <p:cNvCxnSpPr>
+            <a:cxnSpLocks/>
+            <a:stCxn id="7" idx="3"/>
+            <a:endCxn id="26" idx="1"/>
+          </p:cNvCxnSpPr>
+          <p:nvPr/>
+        </p:nvCxnSpPr>
+        <p:spPr>
+          <a:xfrm flipV="1">
+            <a:off x="5888680" y="2906400"/>
+            <a:ext cx="169100" cy="132000"/>
+          </a:xfrm>
+          <a:prstGeom prst="curvedConnector3">
+            <a:avLst>
+              <a:gd name="adj1" fmla="val 50000"/>
+            </a:avLst>
+          </a:prstGeom>
+          <a:ln>
+            <a:solidFill>
+              <a:srgbClr val="F7AA5F"/>
+            </a:solidFill>
+          </a:ln>
+        </p:spPr>
+        <p:style>
+          <a:lnRef idx="1">
+            <a:schemeClr val="accent1"/>
+          </a:lnRef>
+          <a:fillRef idx="0">
+            <a:schemeClr val="accent1"/>
+          </a:fillRef>
+          <a:effectRef idx="0">
+            <a:schemeClr val="accent1"/>
+          </a:effectRef>
+          <a:fontRef idx="minor">
+            <a:schemeClr val="tx1"/>
+          </a:fontRef>
+        </p:style>
+      </p:cxnSp>
+      <p:cxnSp>
+        <p:nvCxnSpPr>
+          <p:cNvPr id="121" name="连接符: 曲线 120">
+            <a:extLst>
+              <a:ext uri="{FF2B5EF4-FFF2-40B4-BE49-F238E27FC236}">
+                <a16:creationId xmlns:a16="http://schemas.microsoft.com/office/drawing/2014/main" id="{1D3BCEB4-577A-2C82-5900-26B41E83F91D}"/>
+              </a:ext>
+            </a:extLst>
+          </p:cNvPr>
+          <p:cNvCxnSpPr>
+            <a:cxnSpLocks/>
+            <a:stCxn id="7" idx="3"/>
+            <a:endCxn id="108" idx="1"/>
+          </p:cNvCxnSpPr>
+          <p:nvPr/>
+        </p:nvCxnSpPr>
+        <p:spPr>
+          <a:xfrm>
+            <a:off x="5888680" y="3038400"/>
+            <a:ext cx="160970" cy="396000"/>
+          </a:xfrm>
+          <a:prstGeom prst="curvedConnector3">
+            <a:avLst>
+              <a:gd name="adj1" fmla="val 50000"/>
+            </a:avLst>
+          </a:prstGeom>
+          <a:ln>
+            <a:solidFill>
+              <a:srgbClr val="00B050"/>
+            </a:solidFill>
+          </a:ln>
+        </p:spPr>
+        <p:style>
+          <a:lnRef idx="1">
+            <a:schemeClr val="accent1"/>
+          </a:lnRef>
+          <a:fillRef idx="0">
+            <a:schemeClr val="accent1"/>
+          </a:fillRef>
+          <a:effectRef idx="0">
+            <a:schemeClr val="accent1"/>
+          </a:effectRef>
+          <a:fontRef idx="minor">
+            <a:schemeClr val="tx1"/>
+          </a:fontRef>
+        </p:style>
+      </p:cxnSp>
+      <p:sp>
+        <p:nvSpPr>
+          <p:cNvPr id="12" name="矩形: 圆角 11">
+            <a:extLst>
+              <a:ext uri="{FF2B5EF4-FFF2-40B4-BE49-F238E27FC236}">
+                <a16:creationId xmlns:a16="http://schemas.microsoft.com/office/drawing/2014/main" id="{E4023AE0-10C4-EDDD-C931-D3E49B6AC7C9}"/>
+              </a:ext>
+            </a:extLst>
+          </p:cNvPr>
+          <p:cNvSpPr/>
+          <p:nvPr/>
+        </p:nvSpPr>
+        <p:spPr>
+          <a:xfrm>
+            <a:off x="6057780" y="3062400"/>
+            <a:ext cx="900000" cy="216000"/>
+          </a:xfrm>
+          <a:prstGeom prst="roundRect">
+            <a:avLst/>
+          </a:prstGeom>
+          <a:solidFill>
+            <a:srgbClr val="9966FF"/>
+          </a:solidFill>
+          <a:ln w="12700">
+            <a:noFill/>
+          </a:ln>
+        </p:spPr>
+        <p:style>
+          <a:lnRef idx="2">
+            <a:schemeClr val="accent1">
+              <a:shade val="15000"/>
+            </a:schemeClr>
+          </a:lnRef>
+          <a:fillRef idx="1">
+            <a:schemeClr val="accent1"/>
+          </a:fillRef>
+          <a:effectRef idx="0">
+            <a:schemeClr val="accent1"/>
+          </a:effectRef>
+          <a:fontRef idx="minor">
+            <a:schemeClr val="lt1"/>
+          </a:fontRef>
+        </p:style>
+        <p:txBody>
+          <a:bodyPr rtlCol="0" anchor="ctr"/>
+          <a:lstStyle/>
+          <a:p>
+            <a:pPr algn="ctr"/>
+            <a:r>
+              <a:rPr lang="en-US" altLang="zh-CN" sz="800">
+                <a:solidFill>
+                  <a:schemeClr val="bg1"/>
+                </a:solidFill>
+                <a:latin typeface="Quicksand Light" panose="00000400000000000000" pitchFamily="2" charset="0"/>
+              </a:rPr>
+              <a:t>Iconfont</a:t>
+            </a:r>
+            <a:endParaRPr lang="zh-CN" altLang="en-US" sz="800">
+              <a:solidFill>
+                <a:schemeClr val="bg1"/>
+              </a:solidFill>
+              <a:latin typeface="Quicksand Light" panose="00000400000000000000" pitchFamily="2" charset="0"/>
+            </a:endParaRPr>
+          </a:p>
+        </p:txBody>
+      </p:sp>
+      <p:sp>
+        <p:nvSpPr>
+          <p:cNvPr id="2" name="矩形: 圆角 1">
+            <a:extLst>
+              <a:ext uri="{FF2B5EF4-FFF2-40B4-BE49-F238E27FC236}">
+                <a16:creationId xmlns:a16="http://schemas.microsoft.com/office/drawing/2014/main" id="{83E28516-AB33-28C4-44B6-24DE28D98661}"/>
+              </a:ext>
+            </a:extLst>
+          </p:cNvPr>
+          <p:cNvSpPr/>
+          <p:nvPr/>
+        </p:nvSpPr>
+        <p:spPr>
+          <a:xfrm>
+            <a:off x="7126880" y="2798400"/>
+            <a:ext cx="900000" cy="216000"/>
+          </a:xfrm>
+          <a:prstGeom prst="roundRect">
+            <a:avLst/>
+          </a:prstGeom>
+          <a:solidFill>
+            <a:srgbClr val="CCF2E5"/>
+          </a:solidFill>
+          <a:ln w="12700">
+            <a:noFill/>
+          </a:ln>
+        </p:spPr>
+        <p:style>
+          <a:lnRef idx="2">
+            <a:schemeClr val="accent1">
+              <a:shade val="15000"/>
+            </a:schemeClr>
+          </a:lnRef>
+          <a:fillRef idx="1">
+            <a:schemeClr val="accent1"/>
+          </a:fillRef>
+          <a:effectRef idx="0">
+            <a:schemeClr val="accent1"/>
+          </a:effectRef>
+          <a:fontRef idx="minor">
+            <a:schemeClr val="lt1"/>
+          </a:fontRef>
+        </p:style>
+        <p:txBody>
+          <a:bodyPr rtlCol="0" anchor="ctr"/>
+          <a:lstStyle/>
+          <a:p>
+            <a:pPr algn="ctr"/>
+            <a:r>
+              <a:rPr lang="en-US" altLang="zh-CN" sz="800">
+                <a:solidFill>
+                  <a:sysClr val="windowText" lastClr="000000"/>
+                </a:solidFill>
+                <a:latin typeface="Quicksand Light" panose="00000400000000000000" pitchFamily="2" charset="0"/>
+              </a:rPr>
+              <a:t>Unicode</a:t>
+            </a:r>
+            <a:endParaRPr lang="zh-CN" altLang="en-US" sz="800">
+              <a:solidFill>
+                <a:sysClr val="windowText" lastClr="000000"/>
+              </a:solidFill>
+              <a:latin typeface="Quicksand Light" panose="00000400000000000000" pitchFamily="2" charset="0"/>
+            </a:endParaRPr>
+          </a:p>
+        </p:txBody>
+      </p:sp>
+      <p:sp>
+        <p:nvSpPr>
+          <p:cNvPr id="5" name="矩形: 圆角 4">
+            <a:extLst>
+              <a:ext uri="{FF2B5EF4-FFF2-40B4-BE49-F238E27FC236}">
+                <a16:creationId xmlns:a16="http://schemas.microsoft.com/office/drawing/2014/main" id="{EC9DFEFA-DE6D-C382-23DE-033158234380}"/>
+              </a:ext>
+            </a:extLst>
+          </p:cNvPr>
+          <p:cNvSpPr/>
+          <p:nvPr/>
+        </p:nvSpPr>
+        <p:spPr>
+          <a:xfrm>
+            <a:off x="7126880" y="3062400"/>
+            <a:ext cx="900000" cy="216000"/>
+          </a:xfrm>
+          <a:prstGeom prst="roundRect">
+            <a:avLst/>
+          </a:prstGeom>
+          <a:solidFill>
+            <a:srgbClr val="CCF2E5"/>
+          </a:solidFill>
+          <a:ln w="12700">
+            <a:noFill/>
+          </a:ln>
+        </p:spPr>
+        <p:style>
+          <a:lnRef idx="2">
+            <a:schemeClr val="accent1">
+              <a:shade val="15000"/>
+            </a:schemeClr>
+          </a:lnRef>
+          <a:fillRef idx="1">
+            <a:schemeClr val="accent1"/>
+          </a:fillRef>
+          <a:effectRef idx="0">
+            <a:schemeClr val="accent1"/>
+          </a:effectRef>
+          <a:fontRef idx="minor">
+            <a:schemeClr val="lt1"/>
+          </a:fontRef>
+        </p:style>
+        <p:txBody>
+          <a:bodyPr rtlCol="0" anchor="ctr"/>
+          <a:lstStyle/>
+          <a:p>
+            <a:pPr algn="ctr"/>
+            <a:r>
+              <a:rPr lang="en-US" altLang="zh-CN" sz="800">
+                <a:solidFill>
+                  <a:sysClr val="windowText" lastClr="000000"/>
+                </a:solidFill>
+                <a:latin typeface="Quicksand Light" panose="00000400000000000000" pitchFamily="2" charset="0"/>
+              </a:rPr>
+              <a:t>Unicode</a:t>
+            </a:r>
+            <a:endParaRPr lang="zh-CN" altLang="en-US" sz="800">
+              <a:solidFill>
+                <a:sysClr val="windowText" lastClr="000000"/>
+              </a:solidFill>
+              <a:latin typeface="Quicksand Light" panose="00000400000000000000" pitchFamily="2" charset="0"/>
+            </a:endParaRPr>
+          </a:p>
+        </p:txBody>
+      </p:sp>
+      <p:cxnSp>
+        <p:nvCxnSpPr>
+          <p:cNvPr id="8" name="直接连接符 7">
+            <a:extLst>
+              <a:ext uri="{FF2B5EF4-FFF2-40B4-BE49-F238E27FC236}">
+                <a16:creationId xmlns:a16="http://schemas.microsoft.com/office/drawing/2014/main" id="{9C72856E-D2DA-7E17-A337-C4361ABDE71E}"/>
+              </a:ext>
+            </a:extLst>
+          </p:cNvPr>
+          <p:cNvCxnSpPr>
+            <a:stCxn id="26" idx="3"/>
+            <a:endCxn id="2" idx="1"/>
+          </p:cNvCxnSpPr>
+          <p:nvPr/>
+        </p:nvCxnSpPr>
+        <p:spPr>
+          <a:xfrm>
+            <a:off x="6957780" y="2906400"/>
+            <a:ext cx="169100" cy="0"/>
+          </a:xfrm>
+          <a:prstGeom prst="line">
+            <a:avLst/>
+          </a:prstGeom>
+          <a:ln>
+            <a:solidFill>
+              <a:srgbClr val="F7AA5F"/>
+            </a:solidFill>
+          </a:ln>
+        </p:spPr>
+        <p:style>
+          <a:lnRef idx="1">
+            <a:schemeClr val="accent1"/>
+          </a:lnRef>
+          <a:fillRef idx="0">
+            <a:schemeClr val="accent1"/>
+          </a:fillRef>
+          <a:effectRef idx="0">
+            <a:schemeClr val="accent1"/>
+          </a:effectRef>
+          <a:fontRef idx="minor">
+            <a:schemeClr val="tx1"/>
+          </a:fontRef>
+        </p:style>
+      </p:cxnSp>
+      <p:cxnSp>
+        <p:nvCxnSpPr>
+          <p:cNvPr id="10" name="直接连接符 9">
+            <a:extLst>
+              <a:ext uri="{FF2B5EF4-FFF2-40B4-BE49-F238E27FC236}">
+                <a16:creationId xmlns:a16="http://schemas.microsoft.com/office/drawing/2014/main" id="{E671B0F8-4EB3-1F8A-06EB-35F88593DCA1}"/>
+              </a:ext>
+            </a:extLst>
+          </p:cNvPr>
+          <p:cNvCxnSpPr>
+            <a:stCxn id="12" idx="3"/>
+            <a:endCxn id="5" idx="1"/>
+          </p:cNvCxnSpPr>
+          <p:nvPr/>
+        </p:nvCxnSpPr>
+        <p:spPr>
+          <a:xfrm>
+            <a:off x="6957780" y="3170400"/>
+            <a:ext cx="169100" cy="0"/>
+          </a:xfrm>
+          <a:prstGeom prst="line">
+            <a:avLst/>
+          </a:prstGeom>
+          <a:ln>
+            <a:solidFill>
+              <a:srgbClr val="9966FF"/>
+            </a:solidFill>
+          </a:ln>
+        </p:spPr>
+        <p:style>
+          <a:lnRef idx="1">
+            <a:schemeClr val="accent1"/>
+          </a:lnRef>
+          <a:fillRef idx="0">
+            <a:schemeClr val="accent1"/>
+          </a:fillRef>
+          <a:effectRef idx="0">
+            <a:schemeClr val="accent1"/>
+          </a:effectRef>
+          <a:fontRef idx="minor">
+            <a:schemeClr val="tx1"/>
+          </a:fontRef>
+        </p:style>
+      </p:cxnSp>
+      <p:sp>
+        <p:nvSpPr>
+          <p:cNvPr id="3" name="矩形: 圆角 2">
+            <a:extLst>
+              <a:ext uri="{FF2B5EF4-FFF2-40B4-BE49-F238E27FC236}">
+                <a16:creationId xmlns:a16="http://schemas.microsoft.com/office/drawing/2014/main" id="{C3064634-CD22-075E-68B9-962F834B311B}"/>
+              </a:ext>
+            </a:extLst>
+          </p:cNvPr>
+          <p:cNvSpPr/>
+          <p:nvPr/>
+        </p:nvSpPr>
+        <p:spPr>
+          <a:xfrm>
+            <a:off x="3927709" y="3179700"/>
+            <a:ext cx="900000" cy="216000"/>
+          </a:xfrm>
+          <a:prstGeom prst="roundRect">
+            <a:avLst/>
+          </a:prstGeom>
+          <a:solidFill>
+            <a:schemeClr val="tx1"/>
+          </a:solidFill>
+          <a:ln w="12700">
+            <a:noFill/>
+          </a:ln>
+        </p:spPr>
+        <p:style>
+          <a:lnRef idx="2">
+            <a:schemeClr val="accent1">
+              <a:shade val="15000"/>
+            </a:schemeClr>
+          </a:lnRef>
+          <a:fillRef idx="1">
+            <a:schemeClr val="accent1"/>
+          </a:fillRef>
+          <a:effectRef idx="0">
+            <a:schemeClr val="accent1"/>
+          </a:effectRef>
+          <a:fontRef idx="minor">
+            <a:schemeClr val="lt1"/>
+          </a:fontRef>
+        </p:style>
+        <p:txBody>
+          <a:bodyPr rtlCol="0" anchor="ctr"/>
+          <a:lstStyle/>
+          <a:p>
+            <a:pPr algn="ctr"/>
+            <a:r>
+              <a:rPr lang="en-US" altLang="zh-CN" sz="800">
+                <a:latin typeface="Quicksand Medium" panose="00000600000000000000" pitchFamily="2" charset="0"/>
+              </a:rPr>
+              <a:t>&lt;li&gt;</a:t>
+            </a:r>
+            <a:endParaRPr lang="zh-CN" altLang="en-US" sz="800">
+              <a:latin typeface="Quicksand Medium" panose="00000600000000000000" pitchFamily="2" charset="0"/>
+            </a:endParaRPr>
+          </a:p>
+        </p:txBody>
+      </p:sp>
+      <p:sp>
+        <p:nvSpPr>
+          <p:cNvPr id="4" name="矩形: 圆角 3">
+            <a:extLst>
+              <a:ext uri="{FF2B5EF4-FFF2-40B4-BE49-F238E27FC236}">
+                <a16:creationId xmlns:a16="http://schemas.microsoft.com/office/drawing/2014/main" id="{D464FB6F-32E1-97B7-CAC2-14F5345557D4}"/>
+              </a:ext>
+            </a:extLst>
+          </p:cNvPr>
+          <p:cNvSpPr/>
+          <p:nvPr/>
+        </p:nvSpPr>
+        <p:spPr>
+          <a:xfrm>
+            <a:off x="4988679" y="3429000"/>
+            <a:ext cx="900000" cy="216000"/>
+          </a:xfrm>
+          <a:prstGeom prst="roundRect">
+            <a:avLst/>
+          </a:prstGeom>
+          <a:solidFill>
+            <a:srgbClr val="335BA3">
+              <a:alpha val="89804"/>
+            </a:srgbClr>
+          </a:solidFill>
+          <a:ln w="12700">
+            <a:noFill/>
+          </a:ln>
+        </p:spPr>
+        <p:style>
+          <a:lnRef idx="2">
+            <a:schemeClr val="accent1">
+              <a:shade val="15000"/>
+            </a:schemeClr>
+          </a:lnRef>
+          <a:fillRef idx="1">
+            <a:schemeClr val="accent1"/>
+          </a:fillRef>
+          <a:effectRef idx="0">
+            <a:schemeClr val="accent1"/>
+          </a:effectRef>
+          <a:fontRef idx="minor">
+            <a:schemeClr val="lt1"/>
+          </a:fontRef>
+        </p:style>
+        <p:txBody>
+          <a:bodyPr rtlCol="0" anchor="ctr"/>
+          <a:lstStyle/>
+          <a:p>
+            <a:pPr algn="ctr"/>
+            <a:r>
+              <a:rPr lang="en-US" altLang="zh-CN" sz="800">
+                <a:latin typeface="Quicksand" panose="00000500000000000000" pitchFamily="2" charset="0"/>
+              </a:rPr>
+              <a:t>::after</a:t>
+            </a:r>
+            <a:endParaRPr lang="zh-CN" altLang="en-US" sz="800">
+              <a:latin typeface="Quicksand" panose="00000500000000000000" pitchFamily="2" charset="0"/>
+            </a:endParaRPr>
+          </a:p>
+        </p:txBody>
+      </p:sp>
+      <p:cxnSp>
+        <p:nvCxnSpPr>
+          <p:cNvPr id="6" name="连接符: 曲线 5">
+            <a:extLst>
+              <a:ext uri="{FF2B5EF4-FFF2-40B4-BE49-F238E27FC236}">
+                <a16:creationId xmlns:a16="http://schemas.microsoft.com/office/drawing/2014/main" id="{A49DEFA1-8658-B2E8-502E-F97718CFD37A}"/>
+              </a:ext>
+            </a:extLst>
+          </p:cNvPr>
+          <p:cNvCxnSpPr>
+            <a:cxnSpLocks/>
+            <a:stCxn id="3" idx="3"/>
+            <a:endCxn id="7" idx="1"/>
+          </p:cNvCxnSpPr>
+          <p:nvPr/>
+        </p:nvCxnSpPr>
+        <p:spPr>
+          <a:xfrm flipV="1">
+            <a:off x="4827709" y="3038400"/>
+            <a:ext cx="160971" cy="249300"/>
+          </a:xfrm>
+          <a:prstGeom prst="curvedConnector3">
+            <a:avLst/>
+          </a:prstGeom>
+          <a:ln>
+            <a:solidFill>
+              <a:srgbClr val="486CAC"/>
+            </a:solidFill>
+          </a:ln>
+        </p:spPr>
+        <p:style>
+          <a:lnRef idx="1">
+            <a:schemeClr val="accent1"/>
+          </a:lnRef>
+          <a:fillRef idx="0">
+            <a:schemeClr val="accent1"/>
+          </a:fillRef>
+          <a:effectRef idx="0">
+            <a:schemeClr val="accent1"/>
+          </a:effectRef>
+          <a:fontRef idx="minor">
+            <a:schemeClr val="tx1"/>
+          </a:fontRef>
+        </p:style>
+      </p:cxnSp>
+      <p:cxnSp>
+        <p:nvCxnSpPr>
+          <p:cNvPr id="13" name="连接符: 曲线 12">
+            <a:extLst>
+              <a:ext uri="{FF2B5EF4-FFF2-40B4-BE49-F238E27FC236}">
+                <a16:creationId xmlns:a16="http://schemas.microsoft.com/office/drawing/2014/main" id="{24C1CA78-5496-27AF-13AD-7BE3E7DD4AE2}"/>
+              </a:ext>
+            </a:extLst>
+          </p:cNvPr>
+          <p:cNvCxnSpPr>
+            <a:cxnSpLocks/>
+            <a:stCxn id="3" idx="3"/>
+            <a:endCxn id="4" idx="1"/>
+          </p:cNvCxnSpPr>
+          <p:nvPr/>
+        </p:nvCxnSpPr>
+        <p:spPr>
+          <a:xfrm>
+            <a:off x="4827709" y="3287700"/>
+            <a:ext cx="160970" cy="249300"/>
+          </a:xfrm>
+          <a:prstGeom prst="curvedConnector3">
+            <a:avLst/>
+          </a:prstGeom>
+          <a:ln>
+            <a:solidFill>
+              <a:srgbClr val="486CAC"/>
+            </a:solidFill>
+          </a:ln>
+        </p:spPr>
+        <p:style>
+          <a:lnRef idx="1">
+            <a:schemeClr val="accent1"/>
+          </a:lnRef>
+          <a:fillRef idx="0">
+            <a:schemeClr val="accent1"/>
+          </a:fillRef>
+          <a:effectRef idx="0">
+            <a:schemeClr val="accent1"/>
+          </a:effectRef>
+          <a:fontRef idx="minor">
+            <a:schemeClr val="tx1"/>
+          </a:fontRef>
+        </p:style>
+      </p:cxnSp>
+    </p:spTree>
+    <p:extLst>
+      <p:ext uri="{BB962C8B-B14F-4D97-AF65-F5344CB8AC3E}">
+        <p14:creationId xmlns:p14="http://schemas.microsoft.com/office/powerpoint/2010/main" val="825264789"/>
+      </p:ext>
+    </p:extLst>
+  </p:cSld>
+  <p:clrMapOvr>
+    <a:masterClrMapping/>
+  </p:clrMapOvr>
+</p:sld>
+</file>
+
+<file path=ppt/slides/slide11.xml><?xml version="1.0" encoding="utf-8"?>
+<p:sld xmlns:a="http://schemas.openxmlformats.org/drawingml/2006/main" xmlns:r="http://schemas.openxmlformats.org/officeDocument/2006/relationships" xmlns:p="http://schemas.openxmlformats.org/presentationml/2006/main">
+  <p:cSld>
+    <p:spTree>
+      <p:nvGrpSpPr>
+        <p:cNvPr id="1" name="">
+          <a:extLst>
+            <a:ext uri="{FF2B5EF4-FFF2-40B4-BE49-F238E27FC236}">
               <a16:creationId xmlns:a16="http://schemas.microsoft.com/office/drawing/2014/main" id="{8E4FA66E-600A-88EF-A518-DADE5F3B4051}"/>
             </a:ext>
           </a:extLst>
@@ -4094,7 +5061,7 @@
 </p:sld>
 </file>
 
-<file path=ppt/slides/slide11.xml><?xml version="1.0" encoding="utf-8"?>
+<file path=ppt/slides/slide12.xml><?xml version="1.0" encoding="utf-8"?>
 <p:sld xmlns:a="http://schemas.openxmlformats.org/drawingml/2006/main" xmlns:r="http://schemas.openxmlformats.org/officeDocument/2006/relationships" xmlns:p="http://schemas.openxmlformats.org/presentationml/2006/main">
   <p:cSld>
     <p:spTree>
@@ -5709,7 +6676,7 @@
 </p:sld>
 </file>
 
-<file path=ppt/slides/slide12.xml><?xml version="1.0" encoding="utf-8"?>
+<file path=ppt/slides/slide13.xml><?xml version="1.0" encoding="utf-8"?>
 <p:sld xmlns:a="http://schemas.openxmlformats.org/drawingml/2006/main" xmlns:r="http://schemas.openxmlformats.org/officeDocument/2006/relationships" xmlns:p="http://schemas.openxmlformats.org/presentationml/2006/main">
   <p:cSld>
     <p:spTree>
@@ -8714,7 +9681,7 @@
 </p:sld>
 </file>
 
-<file path=ppt/slides/slide13.xml><?xml version="1.0" encoding="utf-8"?>
+<file path=ppt/slides/slide14.xml><?xml version="1.0" encoding="utf-8"?>
 <p:sld xmlns:a="http://schemas.openxmlformats.org/drawingml/2006/main" xmlns:r="http://schemas.openxmlformats.org/officeDocument/2006/relationships" xmlns:p="http://schemas.openxmlformats.org/presentationml/2006/main">
   <p:cSld>
     <p:spTree>
@@ -11297,7 +12264,7 @@
 </p:sld>
 </file>
 
-<file path=ppt/slides/slide14.xml><?xml version="1.0" encoding="utf-8"?>
+<file path=ppt/slides/slide15.xml><?xml version="1.0" encoding="utf-8"?>
 <p:sld xmlns:a="http://schemas.openxmlformats.org/drawingml/2006/main" xmlns:r="http://schemas.openxmlformats.org/officeDocument/2006/relationships" xmlns:p="http://schemas.openxmlformats.org/presentationml/2006/main">
   <p:cSld>
     <p:spTree>
@@ -12702,7 +13669,7 @@
 </p:sld>
 </file>
 
-<file path=ppt/slides/slide15.xml><?xml version="1.0" encoding="utf-8"?>
+<file path=ppt/slides/slide16.xml><?xml version="1.0" encoding="utf-8"?>
 <p:sld xmlns:a="http://schemas.openxmlformats.org/drawingml/2006/main" xmlns:r="http://schemas.openxmlformats.org/officeDocument/2006/relationships" xmlns:p="http://schemas.openxmlformats.org/presentationml/2006/main">
   <p:cSld>
     <p:spTree>
@@ -13910,7 +14877,7 @@
 </p:sld>
 </file>
 
-<file path=ppt/slides/slide16.xml><?xml version="1.0" encoding="utf-8"?>
+<file path=ppt/slides/slide17.xml><?xml version="1.0" encoding="utf-8"?>
 <p:sld xmlns:a="http://schemas.openxmlformats.org/drawingml/2006/main" xmlns:r="http://schemas.openxmlformats.org/officeDocument/2006/relationships" xmlns:p="http://schemas.openxmlformats.org/presentationml/2006/main">
   <p:cSld>
     <p:spTree>
@@ -14254,7 +15221,7 @@
 </p:sld>
 </file>
 
-<file path=ppt/slides/slide17.xml><?xml version="1.0" encoding="utf-8"?>
+<file path=ppt/slides/slide18.xml><?xml version="1.0" encoding="utf-8"?>
 <p:sld xmlns:a="http://schemas.openxmlformats.org/drawingml/2006/main" xmlns:r="http://schemas.openxmlformats.org/officeDocument/2006/relationships" xmlns:p="http://schemas.openxmlformats.org/presentationml/2006/main">
   <p:cSld>
     <p:spTree>
@@ -14700,7 +15667,7 @@
 </p:sld>
 </file>
 
-<file path=ppt/slides/slide18.xml><?xml version="1.0" encoding="utf-8"?>
+<file path=ppt/slides/slide19.xml><?xml version="1.0" encoding="utf-8"?>
 <p:sld xmlns:a="http://schemas.openxmlformats.org/drawingml/2006/main" xmlns:r="http://schemas.openxmlformats.org/officeDocument/2006/relationships" xmlns:p="http://schemas.openxmlformats.org/presentationml/2006/main">
   <p:cSld>
     <p:spTree>
@@ -15137,452 +16104,6 @@
     <p:extLst>
       <p:ext uri="{BB962C8B-B14F-4D97-AF65-F5344CB8AC3E}">
         <p14:creationId xmlns:p14="http://schemas.microsoft.com/office/powerpoint/2010/main" val="3803754908"/>
-      </p:ext>
-    </p:extLst>
-  </p:cSld>
-  <p:clrMapOvr>
-    <a:masterClrMapping/>
-  </p:clrMapOvr>
-</p:sld>
-</file>
-
-<file path=ppt/slides/slide19.xml><?xml version="1.0" encoding="utf-8"?>
-<p:sld xmlns:a="http://schemas.openxmlformats.org/drawingml/2006/main" xmlns:r="http://schemas.openxmlformats.org/officeDocument/2006/relationships" xmlns:p="http://schemas.openxmlformats.org/presentationml/2006/main">
-  <p:cSld>
-    <p:spTree>
-      <p:nvGrpSpPr>
-        <p:cNvPr id="1" name="">
-          <a:extLst>
-            <a:ext uri="{FF2B5EF4-FFF2-40B4-BE49-F238E27FC236}">
-              <a16:creationId xmlns:a16="http://schemas.microsoft.com/office/drawing/2014/main" id="{70C4E89A-BF29-AF5A-ED21-08479844B4D3}"/>
-            </a:ext>
-          </a:extLst>
-        </p:cNvPr>
-        <p:cNvGrpSpPr/>
-        <p:nvPr/>
-      </p:nvGrpSpPr>
-      <p:grpSpPr>
-        <a:xfrm>
-          <a:off x="0" y="0"/>
-          <a:ext cx="0" cy="0"/>
-          <a:chOff x="0" y="0"/>
-          <a:chExt cx="0" cy="0"/>
-        </a:xfrm>
-      </p:grpSpPr>
-      <p:sp>
-        <p:nvSpPr>
-          <p:cNvPr id="2" name="Rectangle 1">
-            <a:extLst>
-              <a:ext uri="{FF2B5EF4-FFF2-40B4-BE49-F238E27FC236}">
-                <a16:creationId xmlns:a16="http://schemas.microsoft.com/office/drawing/2014/main" id="{0F4514FD-593B-5957-478B-81363107123A}"/>
-              </a:ext>
-            </a:extLst>
-          </p:cNvPr>
-          <p:cNvSpPr/>
-          <p:nvPr/>
-        </p:nvSpPr>
-        <p:spPr>
-          <a:xfrm>
-            <a:off x="3757723" y="1589964"/>
-            <a:ext cx="3600000" cy="1800000"/>
-          </a:xfrm>
-          <a:prstGeom prst="rect">
-            <a:avLst/>
-          </a:prstGeom>
-          <a:solidFill>
-            <a:schemeClr val="bg1">
-              <a:lumMod val="95000"/>
-            </a:schemeClr>
-          </a:solidFill>
-          <a:ln>
-            <a:noFill/>
-          </a:ln>
-        </p:spPr>
-        <p:style>
-          <a:lnRef idx="2">
-            <a:schemeClr val="accent1">
-              <a:shade val="15000"/>
-            </a:schemeClr>
-          </a:lnRef>
-          <a:fillRef idx="1">
-            <a:schemeClr val="accent1"/>
-          </a:fillRef>
-          <a:effectRef idx="0">
-            <a:schemeClr val="accent1"/>
-          </a:effectRef>
-          <a:fontRef idx="minor">
-            <a:schemeClr val="lt1"/>
-          </a:fontRef>
-        </p:style>
-        <p:txBody>
-          <a:bodyPr rtlCol="0" anchor="ctr"/>
-          <a:lstStyle/>
-          <a:p>
-            <a:pPr algn="ctr"/>
-            <a:endParaRPr lang="zh-CN" altLang="en-US" sz="1200">
-              <a:solidFill>
-                <a:schemeClr val="accent6">
-                  <a:lumMod val="75000"/>
-                </a:schemeClr>
-              </a:solidFill>
-              <a:latin typeface="Poppins" panose="00000500000000000000" pitchFamily="2" charset="0"/>
-              <a:cs typeface="Poppins" panose="00000500000000000000" pitchFamily="2" charset="0"/>
-            </a:endParaRPr>
-          </a:p>
-        </p:txBody>
-      </p:sp>
-      <p:sp>
-        <p:nvSpPr>
-          <p:cNvPr id="3" name="Rectangle 2">
-            <a:extLst>
-              <a:ext uri="{FF2B5EF4-FFF2-40B4-BE49-F238E27FC236}">
-                <a16:creationId xmlns:a16="http://schemas.microsoft.com/office/drawing/2014/main" id="{BA8D48D4-E1F3-B266-9AE0-9C5665BBD6F5}"/>
-              </a:ext>
-            </a:extLst>
-          </p:cNvPr>
-          <p:cNvSpPr/>
-          <p:nvPr/>
-        </p:nvSpPr>
-        <p:spPr>
-          <a:xfrm>
-            <a:off x="3757723" y="1589964"/>
-            <a:ext cx="3600000" cy="720000"/>
-          </a:xfrm>
-          <a:prstGeom prst="rect">
-            <a:avLst/>
-          </a:prstGeom>
-          <a:solidFill>
-            <a:srgbClr val="92D050"/>
-          </a:solidFill>
-          <a:ln>
-            <a:noFill/>
-          </a:ln>
-        </p:spPr>
-        <p:style>
-          <a:lnRef idx="2">
-            <a:schemeClr val="accent1">
-              <a:shade val="15000"/>
-            </a:schemeClr>
-          </a:lnRef>
-          <a:fillRef idx="1">
-            <a:schemeClr val="accent1"/>
-          </a:fillRef>
-          <a:effectRef idx="0">
-            <a:schemeClr val="accent1"/>
-          </a:effectRef>
-          <a:fontRef idx="minor">
-            <a:schemeClr val="lt1"/>
-          </a:fontRef>
-        </p:style>
-        <p:txBody>
-          <a:bodyPr rtlCol="0" anchor="b" anchorCtr="0"/>
-          <a:lstStyle/>
-          <a:p>
-            <a:r>
-              <a:rPr lang="en-US" altLang="zh-CN" sz="1200">
-                <a:latin typeface="Poppins" panose="00000500000000000000" pitchFamily="2" charset="0"/>
-                <a:cs typeface="Poppins" panose="00000500000000000000" pitchFamily="2" charset="0"/>
-              </a:rPr>
-              <a:t>start</a:t>
-            </a:r>
-            <a:endParaRPr lang="zh-CN" altLang="en-US" sz="1200">
-              <a:latin typeface="Poppins" panose="00000500000000000000" pitchFamily="2" charset="0"/>
-              <a:cs typeface="Poppins" panose="00000500000000000000" pitchFamily="2" charset="0"/>
-            </a:endParaRPr>
-          </a:p>
-        </p:txBody>
-      </p:sp>
-      <p:sp>
-        <p:nvSpPr>
-          <p:cNvPr id="4" name="Rectangle 3">
-            <a:extLst>
-              <a:ext uri="{FF2B5EF4-FFF2-40B4-BE49-F238E27FC236}">
-                <a16:creationId xmlns:a16="http://schemas.microsoft.com/office/drawing/2014/main" id="{75131CE1-6587-9E1B-DBD4-384409634CF3}"/>
-              </a:ext>
-            </a:extLst>
-          </p:cNvPr>
-          <p:cNvSpPr/>
-          <p:nvPr/>
-        </p:nvSpPr>
-        <p:spPr>
-          <a:xfrm>
-            <a:off x="3757723" y="2309964"/>
-            <a:ext cx="3600000" cy="1080000"/>
-          </a:xfrm>
-          <a:prstGeom prst="rect">
-            <a:avLst/>
-          </a:prstGeom>
-          <a:solidFill>
-            <a:srgbClr val="92D050"/>
-          </a:solidFill>
-          <a:ln>
-            <a:noFill/>
-          </a:ln>
-        </p:spPr>
-        <p:style>
-          <a:lnRef idx="2">
-            <a:schemeClr val="accent1">
-              <a:shade val="15000"/>
-            </a:schemeClr>
-          </a:lnRef>
-          <a:fillRef idx="1">
-            <a:schemeClr val="accent1"/>
-          </a:fillRef>
-          <a:effectRef idx="0">
-            <a:schemeClr val="accent1"/>
-          </a:effectRef>
-          <a:fontRef idx="minor">
-            <a:schemeClr val="lt1"/>
-          </a:fontRef>
-        </p:style>
-        <p:txBody>
-          <a:bodyPr rtlCol="0" anchor="t" anchorCtr="0"/>
-          <a:lstStyle/>
-          <a:p>
-            <a:r>
-              <a:rPr lang="en-US" altLang="zh-CN" sz="1200">
-                <a:latin typeface="Poppins" panose="00000500000000000000" pitchFamily="2" charset="0"/>
-                <a:cs typeface="Poppins" panose="00000500000000000000" pitchFamily="2" charset="0"/>
-              </a:rPr>
-              <a:t>end</a:t>
-            </a:r>
-            <a:endParaRPr lang="zh-CN" altLang="en-US" sz="1200">
-              <a:latin typeface="Poppins" panose="00000500000000000000" pitchFamily="2" charset="0"/>
-              <a:cs typeface="Poppins" panose="00000500000000000000" pitchFamily="2" charset="0"/>
-            </a:endParaRPr>
-          </a:p>
-        </p:txBody>
-      </p:sp>
-      <p:sp>
-        <p:nvSpPr>
-          <p:cNvPr id="5" name="文本框 4">
-            <a:extLst>
-              <a:ext uri="{FF2B5EF4-FFF2-40B4-BE49-F238E27FC236}">
-                <a16:creationId xmlns:a16="http://schemas.microsoft.com/office/drawing/2014/main" id="{45D18331-4F10-66C6-2CC3-6214413856F0}"/>
-              </a:ext>
-            </a:extLst>
-          </p:cNvPr>
-          <p:cNvSpPr txBox="1"/>
-          <p:nvPr/>
-        </p:nvSpPr>
-        <p:spPr>
-          <a:xfrm>
-            <a:off x="4991100" y="2089523"/>
-            <a:ext cx="1592103" cy="307777"/>
-          </a:xfrm>
-          <a:prstGeom prst="rect">
-            <a:avLst/>
-          </a:prstGeom>
-          <a:noFill/>
-        </p:spPr>
-        <p:txBody>
-          <a:bodyPr wrap="none" rtlCol="0">
-            <a:spAutoFit/>
-          </a:bodyPr>
-          <a:lstStyle/>
-          <a:p>
-            <a:r>
-              <a:rPr lang="en-US" altLang="zh-CN" sz="1400">
-                <a:latin typeface="Poppins" panose="00000500000000000000" pitchFamily="2" charset="0"/>
-                <a:cs typeface="Poppins" panose="00000500000000000000" pitchFamily="2" charset="0"/>
-              </a:rPr>
-              <a:t>Animation Zone</a:t>
-            </a:r>
-            <a:endParaRPr lang="zh-CN" altLang="en-US" sz="1400">
-              <a:latin typeface="Poppins" panose="00000500000000000000" pitchFamily="2" charset="0"/>
-              <a:cs typeface="Poppins" panose="00000500000000000000" pitchFamily="2" charset="0"/>
-            </a:endParaRPr>
-          </a:p>
-        </p:txBody>
-      </p:sp>
-      <p:cxnSp>
-        <p:nvCxnSpPr>
-          <p:cNvPr id="7" name="Straight Arrow Connector 5">
-            <a:extLst>
-              <a:ext uri="{FF2B5EF4-FFF2-40B4-BE49-F238E27FC236}">
-                <a16:creationId xmlns:a16="http://schemas.microsoft.com/office/drawing/2014/main" id="{835AD99D-1E1D-3323-3899-83DE42EDA003}"/>
-              </a:ext>
-            </a:extLst>
-          </p:cNvPr>
-          <p:cNvCxnSpPr>
-            <a:cxnSpLocks/>
-          </p:cNvCxnSpPr>
-          <p:nvPr/>
-        </p:nvCxnSpPr>
-        <p:spPr>
-          <a:xfrm>
-            <a:off x="4297473" y="1589964"/>
-            <a:ext cx="0" cy="720000"/>
-          </a:xfrm>
-          <a:prstGeom prst="straightConnector1">
-            <a:avLst/>
-          </a:prstGeom>
-          <a:ln>
-            <a:solidFill>
-              <a:schemeClr val="bg1"/>
-            </a:solidFill>
-            <a:tailEnd type="triangle"/>
-          </a:ln>
-        </p:spPr>
-        <p:style>
-          <a:lnRef idx="1">
-            <a:schemeClr val="accent1"/>
-          </a:lnRef>
-          <a:fillRef idx="0">
-            <a:schemeClr val="accent1"/>
-          </a:fillRef>
-          <a:effectRef idx="0">
-            <a:schemeClr val="accent1"/>
-          </a:effectRef>
-          <a:fontRef idx="minor">
-            <a:schemeClr val="tx1"/>
-          </a:fontRef>
-        </p:style>
-      </p:cxnSp>
-      <p:cxnSp>
-        <p:nvCxnSpPr>
-          <p:cNvPr id="9" name="Straight Arrow Connector 7">
-            <a:extLst>
-              <a:ext uri="{FF2B5EF4-FFF2-40B4-BE49-F238E27FC236}">
-                <a16:creationId xmlns:a16="http://schemas.microsoft.com/office/drawing/2014/main" id="{00A8B3C4-1587-38DE-2403-A0606A3593B1}"/>
-              </a:ext>
-            </a:extLst>
-          </p:cNvPr>
-          <p:cNvCxnSpPr>
-            <a:cxnSpLocks/>
-          </p:cNvCxnSpPr>
-          <p:nvPr/>
-        </p:nvCxnSpPr>
-        <p:spPr>
-          <a:xfrm flipV="1">
-            <a:off x="4297473" y="2309964"/>
-            <a:ext cx="0" cy="1080000"/>
-          </a:xfrm>
-          <a:prstGeom prst="straightConnector1">
-            <a:avLst/>
-          </a:prstGeom>
-          <a:ln>
-            <a:solidFill>
-              <a:schemeClr val="bg1"/>
-            </a:solidFill>
-            <a:tailEnd type="triangle"/>
-          </a:ln>
-        </p:spPr>
-        <p:style>
-          <a:lnRef idx="1">
-            <a:schemeClr val="accent1"/>
-          </a:lnRef>
-          <a:fillRef idx="0">
-            <a:schemeClr val="accent1"/>
-          </a:fillRef>
-          <a:effectRef idx="0">
-            <a:schemeClr val="accent1"/>
-          </a:effectRef>
-          <a:fontRef idx="minor">
-            <a:schemeClr val="tx1"/>
-          </a:fontRef>
-        </p:style>
-      </p:cxnSp>
-      <p:sp>
-        <p:nvSpPr>
-          <p:cNvPr id="10" name="文本框 9">
-            <a:extLst>
-              <a:ext uri="{FF2B5EF4-FFF2-40B4-BE49-F238E27FC236}">
-                <a16:creationId xmlns:a16="http://schemas.microsoft.com/office/drawing/2014/main" id="{1A3F9847-32C0-AF36-6722-54B895024168}"/>
-              </a:ext>
-            </a:extLst>
-          </p:cNvPr>
-          <p:cNvSpPr txBox="1"/>
-          <p:nvPr/>
-        </p:nvSpPr>
-        <p:spPr>
-          <a:xfrm>
-            <a:off x="4297473" y="2032965"/>
-            <a:ext cx="476412" cy="276999"/>
-          </a:xfrm>
-          <a:prstGeom prst="rect">
-            <a:avLst/>
-          </a:prstGeom>
-          <a:noFill/>
-        </p:spPr>
-        <p:txBody>
-          <a:bodyPr wrap="none" rtlCol="0">
-            <a:spAutoFit/>
-          </a:bodyPr>
-          <a:lstStyle/>
-          <a:p>
-            <a:r>
-              <a:rPr lang="en-US" altLang="zh-CN" sz="1200">
-                <a:solidFill>
-                  <a:schemeClr val="bg1"/>
-                </a:solidFill>
-                <a:latin typeface="Poppins" panose="00000500000000000000" pitchFamily="2" charset="0"/>
-                <a:cs typeface="Poppins" panose="00000500000000000000" pitchFamily="2" charset="0"/>
-              </a:rPr>
-              <a:t>40%</a:t>
-            </a:r>
-            <a:endParaRPr lang="zh-CN" altLang="en-US" sz="1200">
-              <a:solidFill>
-                <a:schemeClr val="bg1"/>
-              </a:solidFill>
-              <a:latin typeface="Poppins" panose="00000500000000000000" pitchFamily="2" charset="0"/>
-              <a:cs typeface="Poppins" panose="00000500000000000000" pitchFamily="2" charset="0"/>
-            </a:endParaRPr>
-          </a:p>
-        </p:txBody>
-      </p:sp>
-      <p:sp>
-        <p:nvSpPr>
-          <p:cNvPr id="11" name="文本框 10">
-            <a:extLst>
-              <a:ext uri="{FF2B5EF4-FFF2-40B4-BE49-F238E27FC236}">
-                <a16:creationId xmlns:a16="http://schemas.microsoft.com/office/drawing/2014/main" id="{9D2433A2-2688-D06B-77ED-F2DBF6D27DA1}"/>
-              </a:ext>
-            </a:extLst>
-          </p:cNvPr>
-          <p:cNvSpPr txBox="1"/>
-          <p:nvPr/>
-        </p:nvSpPr>
-        <p:spPr>
-          <a:xfrm>
-            <a:off x="4297473" y="2309964"/>
-            <a:ext cx="476412" cy="276999"/>
-          </a:xfrm>
-          <a:prstGeom prst="rect">
-            <a:avLst/>
-          </a:prstGeom>
-          <a:noFill/>
-        </p:spPr>
-        <p:txBody>
-          <a:bodyPr wrap="none" rtlCol="0">
-            <a:spAutoFit/>
-          </a:bodyPr>
-          <a:lstStyle/>
-          <a:p>
-            <a:r>
-              <a:rPr lang="en-US" altLang="zh-CN" sz="1200">
-                <a:solidFill>
-                  <a:schemeClr val="bg1"/>
-                </a:solidFill>
-                <a:latin typeface="Poppins" panose="00000500000000000000" pitchFamily="2" charset="0"/>
-                <a:cs typeface="Poppins" panose="00000500000000000000" pitchFamily="2" charset="0"/>
-              </a:rPr>
-              <a:t>60%</a:t>
-            </a:r>
-            <a:endParaRPr lang="zh-CN" altLang="en-US" sz="1200">
-              <a:solidFill>
-                <a:schemeClr val="bg1"/>
-              </a:solidFill>
-              <a:latin typeface="Poppins" panose="00000500000000000000" pitchFamily="2" charset="0"/>
-              <a:cs typeface="Poppins" panose="00000500000000000000" pitchFamily="2" charset="0"/>
-            </a:endParaRPr>
-          </a:p>
-        </p:txBody>
-      </p:sp>
-    </p:spTree>
-    <p:extLst>
-      <p:ext uri="{BB962C8B-B14F-4D97-AF65-F5344CB8AC3E}">
-        <p14:creationId xmlns:p14="http://schemas.microsoft.com/office/powerpoint/2010/main" val="1843053738"/>
       </p:ext>
     </p:extLst>
   </p:cSld>
@@ -15609,109 +16130,1060 @@
           <a:chExt cx="0" cy="0"/>
         </a:xfrm>
       </p:grpSpPr>
-      <p:pic>
-        <p:nvPicPr>
-          <p:cNvPr id="1026" name="Picture 2">
-            <a:extLst>
-              <a:ext uri="{FF2B5EF4-FFF2-40B4-BE49-F238E27FC236}">
-                <a16:creationId xmlns:a16="http://schemas.microsoft.com/office/drawing/2014/main" id="{02D4B95B-4837-314F-E44F-1B98868454D4}"/>
-              </a:ext>
-            </a:extLst>
-          </p:cNvPr>
-          <p:cNvPicPr>
-            <a:picLocks noChangeAspect="1" noChangeArrowheads="1"/>
-          </p:cNvPicPr>
-          <p:nvPr/>
-        </p:nvPicPr>
-        <p:blipFill>
-          <a:blip r:embed="rId2">
-            <a:extLst>
-              <a:ext uri="{28A0092B-C50C-407E-A947-70E740481C1C}">
-                <a14:useLocalDpi xmlns:a14="http://schemas.microsoft.com/office/drawing/2010/main" val="0"/>
-              </a:ext>
-            </a:extLst>
-          </a:blip>
-          <a:srcRect/>
-          <a:stretch>
-            <a:fillRect/>
-          </a:stretch>
-        </p:blipFill>
-        <p:spPr bwMode="auto">
-          <a:xfrm>
-            <a:off x="3848100" y="1943100"/>
-            <a:ext cx="4495800" cy="2971800"/>
-          </a:xfrm>
-          <a:prstGeom prst="rect">
-            <a:avLst/>
-          </a:prstGeom>
-          <a:noFill/>
-          <a:extLst>
-            <a:ext uri="{909E8E84-426E-40DD-AFC4-6F175D3DCCD1}">
-              <a14:hiddenFill xmlns:a14="http://schemas.microsoft.com/office/drawing/2010/main">
-                <a:solidFill>
-                  <a:srgbClr val="FFFFFF"/>
-                </a:solidFill>
-              </a14:hiddenFill>
-            </a:ext>
-          </a:extLst>
-        </p:spPr>
-      </p:pic>
-      <p:sp>
-        <p:nvSpPr>
-          <p:cNvPr id="2" name="矩形 1">
-            <a:extLst>
-              <a:ext uri="{FF2B5EF4-FFF2-40B4-BE49-F238E27FC236}">
-                <a16:creationId xmlns:a16="http://schemas.microsoft.com/office/drawing/2014/main" id="{82FB5D9D-1EED-E402-9A5B-9D01D36FAD12}"/>
-              </a:ext>
-            </a:extLst>
-          </p:cNvPr>
-          <p:cNvSpPr/>
-          <p:nvPr/>
-        </p:nvSpPr>
-        <p:spPr>
-          <a:xfrm>
-            <a:off x="6409765" y="4312024"/>
-            <a:ext cx="2393576" cy="779929"/>
-          </a:xfrm>
-          <a:prstGeom prst="rect">
-            <a:avLst/>
-          </a:prstGeom>
-          <a:solidFill>
-            <a:schemeClr val="bg1"/>
-          </a:solidFill>
-          <a:ln>
-            <a:noFill/>
-          </a:ln>
-        </p:spPr>
-        <p:style>
-          <a:lnRef idx="2">
-            <a:schemeClr val="accent1">
-              <a:shade val="15000"/>
-            </a:schemeClr>
-          </a:lnRef>
-          <a:fillRef idx="1">
-            <a:schemeClr val="accent1"/>
-          </a:fillRef>
-          <a:effectRef idx="0">
-            <a:schemeClr val="accent1"/>
-          </a:effectRef>
-          <a:fontRef idx="minor">
-            <a:schemeClr val="lt1"/>
-          </a:fontRef>
-        </p:style>
-        <p:txBody>
-          <a:bodyPr rtlCol="0" anchor="ctr"/>
-          <a:lstStyle/>
-          <a:p>
-            <a:pPr algn="ctr"/>
-            <a:endParaRPr lang="zh-CN" altLang="en-US"/>
-          </a:p>
-        </p:txBody>
-      </p:sp>
+      <p:graphicFrame>
+        <p:nvGraphicFramePr>
+          <p:cNvPr id="3" name="表格 2">
+            <a:extLst>
+              <a:ext uri="{FF2B5EF4-FFF2-40B4-BE49-F238E27FC236}">
+                <a16:creationId xmlns:a16="http://schemas.microsoft.com/office/drawing/2014/main" id="{0827E5AD-8286-83D4-C6ED-155E9C880C93}"/>
+              </a:ext>
+            </a:extLst>
+          </p:cNvPr>
+          <p:cNvGraphicFramePr>
+            <a:graphicFrameLocks noGrp="1"/>
+          </p:cNvGraphicFramePr>
+          <p:nvPr>
+            <p:extLst>
+              <p:ext uri="{D42A27DB-BD31-4B8C-83A1-F6EECF244321}">
+                <p14:modId xmlns:p14="http://schemas.microsoft.com/office/powerpoint/2010/main" val="885732688"/>
+              </p:ext>
+            </p:extLst>
+          </p:nvPr>
+        </p:nvGraphicFramePr>
+        <p:xfrm>
+          <a:off x="2032000" y="2503642"/>
+          <a:ext cx="3348000" cy="900000"/>
+        </p:xfrm>
+        <a:graphic>
+          <a:graphicData uri="http://schemas.openxmlformats.org/drawingml/2006/table">
+            <a:tbl>
+              <a:tblPr firstRow="1" bandRow="1"/>
+              <a:tblGrid>
+                <a:gridCol w="418500">
+                  <a:extLst>
+                    <a:ext uri="{9D8B030D-6E8A-4147-A177-3AD203B41FA5}">
+                      <a16:colId xmlns:a16="http://schemas.microsoft.com/office/drawing/2014/main" val="1036622043"/>
+                    </a:ext>
+                  </a:extLst>
+                </a:gridCol>
+                <a:gridCol w="418500">
+                  <a:extLst>
+                    <a:ext uri="{9D8B030D-6E8A-4147-A177-3AD203B41FA5}">
+                      <a16:colId xmlns:a16="http://schemas.microsoft.com/office/drawing/2014/main" val="1479305070"/>
+                    </a:ext>
+                  </a:extLst>
+                </a:gridCol>
+                <a:gridCol w="418500">
+                  <a:extLst>
+                    <a:ext uri="{9D8B030D-6E8A-4147-A177-3AD203B41FA5}">
+                      <a16:colId xmlns:a16="http://schemas.microsoft.com/office/drawing/2014/main" val="2640503298"/>
+                    </a:ext>
+                  </a:extLst>
+                </a:gridCol>
+                <a:gridCol w="418500">
+                  <a:extLst>
+                    <a:ext uri="{9D8B030D-6E8A-4147-A177-3AD203B41FA5}">
+                      <a16:colId xmlns:a16="http://schemas.microsoft.com/office/drawing/2014/main" val="2411688004"/>
+                    </a:ext>
+                  </a:extLst>
+                </a:gridCol>
+                <a:gridCol w="418500">
+                  <a:extLst>
+                    <a:ext uri="{9D8B030D-6E8A-4147-A177-3AD203B41FA5}">
+                      <a16:colId xmlns:a16="http://schemas.microsoft.com/office/drawing/2014/main" val="3602322577"/>
+                    </a:ext>
+                  </a:extLst>
+                </a:gridCol>
+                <a:gridCol w="418500">
+                  <a:extLst>
+                    <a:ext uri="{9D8B030D-6E8A-4147-A177-3AD203B41FA5}">
+                      <a16:colId xmlns:a16="http://schemas.microsoft.com/office/drawing/2014/main" val="2333894780"/>
+                    </a:ext>
+                  </a:extLst>
+                </a:gridCol>
+                <a:gridCol w="418500">
+                  <a:extLst>
+                    <a:ext uri="{9D8B030D-6E8A-4147-A177-3AD203B41FA5}">
+                      <a16:colId xmlns:a16="http://schemas.microsoft.com/office/drawing/2014/main" val="1465958921"/>
+                    </a:ext>
+                  </a:extLst>
+                </a:gridCol>
+                <a:gridCol w="418500">
+                  <a:extLst>
+                    <a:ext uri="{9D8B030D-6E8A-4147-A177-3AD203B41FA5}">
+                      <a16:colId xmlns:a16="http://schemas.microsoft.com/office/drawing/2014/main" val="3527640167"/>
+                    </a:ext>
+                  </a:extLst>
+                </a:gridCol>
+              </a:tblGrid>
+              <a:tr h="300000">
+                <a:tc gridSpan="8">
+                  <a:txBody>
+                    <a:bodyPr/>
+                    <a:lstStyle/>
+                    <a:p>
+                      <a:pPr algn="ctr"/>
+                      <a:r>
+                        <a:rPr lang="en-US" altLang="zh-CN" sz="900" dirty="0"/>
+                        <a:t>1 byte</a:t>
+                      </a:r>
+                      <a:endParaRPr lang="zh-CN" altLang="en-US" sz="900" dirty="0"/>
+                    </a:p>
+                  </a:txBody>
+                  <a:tcPr anchor="ctr"/>
+                </a:tc>
+                <a:tc hMerge="1">
+                  <a:txBody>
+                    <a:bodyPr/>
+                    <a:lstStyle/>
+                    <a:p>
+                      <a:endParaRPr lang="zh-CN" altLang="en-US" dirty="0"/>
+                    </a:p>
+                  </a:txBody>
+                  <a:tcPr/>
+                </a:tc>
+                <a:tc hMerge="1">
+                  <a:txBody>
+                    <a:bodyPr/>
+                    <a:lstStyle/>
+                    <a:p>
+                      <a:endParaRPr lang="zh-CN" altLang="en-US" dirty="0"/>
+                    </a:p>
+                  </a:txBody>
+                  <a:tcPr/>
+                </a:tc>
+                <a:tc hMerge="1">
+                  <a:txBody>
+                    <a:bodyPr/>
+                    <a:lstStyle/>
+                    <a:p>
+                      <a:endParaRPr lang="zh-CN" altLang="en-US" dirty="0"/>
+                    </a:p>
+                  </a:txBody>
+                  <a:tcPr/>
+                </a:tc>
+                <a:tc hMerge="1">
+                  <a:txBody>
+                    <a:bodyPr/>
+                    <a:lstStyle/>
+                    <a:p>
+                      <a:endParaRPr lang="zh-CN" altLang="en-US" dirty="0"/>
+                    </a:p>
+                  </a:txBody>
+                  <a:tcPr/>
+                </a:tc>
+                <a:tc hMerge="1">
+                  <a:txBody>
+                    <a:bodyPr/>
+                    <a:lstStyle/>
+                    <a:p>
+                      <a:endParaRPr lang="zh-CN" altLang="en-US" dirty="0"/>
+                    </a:p>
+                  </a:txBody>
+                  <a:tcPr/>
+                </a:tc>
+                <a:tc hMerge="1">
+                  <a:txBody>
+                    <a:bodyPr/>
+                    <a:lstStyle/>
+                    <a:p>
+                      <a:endParaRPr lang="zh-CN" altLang="en-US" dirty="0"/>
+                    </a:p>
+                  </a:txBody>
+                  <a:tcPr/>
+                </a:tc>
+                <a:tc hMerge="1">
+                  <a:txBody>
+                    <a:bodyPr/>
+                    <a:lstStyle/>
+                    <a:p>
+                      <a:endParaRPr lang="zh-CN" altLang="en-US" dirty="0"/>
+                    </a:p>
+                  </a:txBody>
+                  <a:tcPr/>
+                </a:tc>
+                <a:extLst>
+                  <a:ext uri="{0D108BD9-81ED-4DB2-BD59-A6C34878D82A}">
+                    <a16:rowId xmlns:a16="http://schemas.microsoft.com/office/drawing/2014/main" val="2047386269"/>
+                  </a:ext>
+                </a:extLst>
+              </a:tr>
+              <a:tr h="300000">
+                <a:tc>
+                  <a:txBody>
+                    <a:bodyPr/>
+                    <a:lstStyle/>
+                    <a:p>
+                      <a:pPr marL="0" marR="0" lvl="0" indent="0" algn="ctr" defTabSz="914400" rtl="0" eaLnBrk="1" fontAlgn="auto" latinLnBrk="0" hangingPunct="1">
+                        <a:lnSpc>
+                          <a:spcPct val="100000"/>
+                        </a:lnSpc>
+                        <a:spcBef>
+                          <a:spcPts val="0"/>
+                        </a:spcBef>
+                        <a:spcAft>
+                          <a:spcPts val="0"/>
+                        </a:spcAft>
+                        <a:buClrTx/>
+                        <a:buSzTx/>
+                        <a:buFontTx/>
+                        <a:buNone/>
+                        <a:tabLst/>
+                        <a:defRPr/>
+                      </a:pPr>
+                      <a:r>
+                        <a:rPr kumimoji="0" lang="en-US" altLang="zh-CN" sz="900" b="0" i="0" u="none" strike="noStrike" kern="1200" cap="none" spc="0" normalizeH="0" baseline="0" noProof="0" dirty="0">
+                          <a:ln>
+                            <a:noFill/>
+                          </a:ln>
+                          <a:solidFill>
+                            <a:prstClr val="black"/>
+                          </a:solidFill>
+                          <a:effectLst/>
+                          <a:uLnTx/>
+                          <a:uFillTx/>
+                          <a:latin typeface="等线" panose="020F0502020204030204"/>
+                          <a:ea typeface="等线" panose="02010600030101010101" pitchFamily="2" charset="-122"/>
+                          <a:cs typeface="+mn-cs"/>
+                        </a:rPr>
+                        <a:t>1 bit</a:t>
+                      </a:r>
+                      <a:endParaRPr kumimoji="0" lang="zh-CN" altLang="en-US" sz="900" b="0" i="0" u="none" strike="noStrike" kern="1200" cap="none" spc="0" normalizeH="0" baseline="0" noProof="0" dirty="0">
+                        <a:ln>
+                          <a:noFill/>
+                        </a:ln>
+                        <a:solidFill>
+                          <a:prstClr val="black"/>
+                        </a:solidFill>
+                        <a:effectLst/>
+                        <a:uLnTx/>
+                        <a:uFillTx/>
+                        <a:latin typeface="等线" panose="020F0502020204030204"/>
+                        <a:ea typeface="等线" panose="02010600030101010101" pitchFamily="2" charset="-122"/>
+                        <a:cs typeface="+mn-cs"/>
+                      </a:endParaRPr>
+                    </a:p>
+                  </a:txBody>
+                  <a:tcPr anchor="ctr">
+                    <a:lnB w="12700" cap="flat" cmpd="sng" algn="ctr">
+                      <a:solidFill>
+                        <a:schemeClr val="tx1"/>
+                      </a:solidFill>
+                      <a:prstDash val="solid"/>
+                      <a:round/>
+                      <a:headEnd type="none" w="med" len="med"/>
+                      <a:tailEnd type="none" w="med" len="med"/>
+                    </a:lnB>
+                  </a:tcPr>
+                </a:tc>
+                <a:tc>
+                  <a:txBody>
+                    <a:bodyPr/>
+                    <a:lstStyle/>
+                    <a:p>
+                      <a:pPr marL="0" marR="0" lvl="0" indent="0" algn="ctr" defTabSz="914400" rtl="0" eaLnBrk="1" fontAlgn="auto" latinLnBrk="0" hangingPunct="1">
+                        <a:lnSpc>
+                          <a:spcPct val="100000"/>
+                        </a:lnSpc>
+                        <a:spcBef>
+                          <a:spcPts val="0"/>
+                        </a:spcBef>
+                        <a:spcAft>
+                          <a:spcPts val="0"/>
+                        </a:spcAft>
+                        <a:buClrTx/>
+                        <a:buSzTx/>
+                        <a:buFontTx/>
+                        <a:buNone/>
+                        <a:tabLst/>
+                        <a:defRPr/>
+                      </a:pPr>
+                      <a:r>
+                        <a:rPr kumimoji="0" lang="en-US" altLang="zh-CN" sz="900" b="0" i="0" u="none" strike="noStrike" kern="1200" cap="none" spc="0" normalizeH="0" baseline="0" noProof="0" dirty="0">
+                          <a:ln>
+                            <a:noFill/>
+                          </a:ln>
+                          <a:solidFill>
+                            <a:prstClr val="black"/>
+                          </a:solidFill>
+                          <a:effectLst/>
+                          <a:uLnTx/>
+                          <a:uFillTx/>
+                          <a:latin typeface="等线" panose="020F0502020204030204"/>
+                          <a:ea typeface="等线" panose="02010600030101010101" pitchFamily="2" charset="-122"/>
+                          <a:cs typeface="+mn-cs"/>
+                        </a:rPr>
+                        <a:t>1 bit</a:t>
+                      </a:r>
+                      <a:endParaRPr kumimoji="0" lang="zh-CN" altLang="en-US" sz="900" b="0" i="0" u="none" strike="noStrike" kern="1200" cap="none" spc="0" normalizeH="0" baseline="0" noProof="0" dirty="0">
+                        <a:ln>
+                          <a:noFill/>
+                        </a:ln>
+                        <a:solidFill>
+                          <a:prstClr val="black"/>
+                        </a:solidFill>
+                        <a:effectLst/>
+                        <a:uLnTx/>
+                        <a:uFillTx/>
+                        <a:latin typeface="等线" panose="020F0502020204030204"/>
+                        <a:ea typeface="等线" panose="02010600030101010101" pitchFamily="2" charset="-122"/>
+                        <a:cs typeface="+mn-cs"/>
+                      </a:endParaRPr>
+                    </a:p>
+                  </a:txBody>
+                  <a:tcPr anchor="ctr">
+                    <a:lnB w="12700" cap="flat" cmpd="sng" algn="ctr">
+                      <a:solidFill>
+                        <a:schemeClr val="tx1"/>
+                      </a:solidFill>
+                      <a:prstDash val="solid"/>
+                      <a:round/>
+                      <a:headEnd type="none" w="med" len="med"/>
+                      <a:tailEnd type="none" w="med" len="med"/>
+                    </a:lnB>
+                  </a:tcPr>
+                </a:tc>
+                <a:tc>
+                  <a:txBody>
+                    <a:bodyPr/>
+                    <a:lstStyle/>
+                    <a:p>
+                      <a:pPr marL="0" marR="0" lvl="0" indent="0" algn="ctr" defTabSz="914400" rtl="0" eaLnBrk="1" fontAlgn="auto" latinLnBrk="0" hangingPunct="1">
+                        <a:lnSpc>
+                          <a:spcPct val="100000"/>
+                        </a:lnSpc>
+                        <a:spcBef>
+                          <a:spcPts val="0"/>
+                        </a:spcBef>
+                        <a:spcAft>
+                          <a:spcPts val="0"/>
+                        </a:spcAft>
+                        <a:buClrTx/>
+                        <a:buSzTx/>
+                        <a:buFontTx/>
+                        <a:buNone/>
+                        <a:tabLst/>
+                        <a:defRPr/>
+                      </a:pPr>
+                      <a:r>
+                        <a:rPr kumimoji="0" lang="en-US" altLang="zh-CN" sz="900" b="0" i="0" u="none" strike="noStrike" kern="1200" cap="none" spc="0" normalizeH="0" baseline="0" noProof="0" dirty="0">
+                          <a:ln>
+                            <a:noFill/>
+                          </a:ln>
+                          <a:solidFill>
+                            <a:prstClr val="black"/>
+                          </a:solidFill>
+                          <a:effectLst/>
+                          <a:uLnTx/>
+                          <a:uFillTx/>
+                          <a:latin typeface="等线" panose="020F0502020204030204"/>
+                          <a:ea typeface="等线" panose="02010600030101010101" pitchFamily="2" charset="-122"/>
+                          <a:cs typeface="+mn-cs"/>
+                        </a:rPr>
+                        <a:t>1 bit</a:t>
+                      </a:r>
+                      <a:endParaRPr kumimoji="0" lang="zh-CN" altLang="en-US" sz="900" b="0" i="0" u="none" strike="noStrike" kern="1200" cap="none" spc="0" normalizeH="0" baseline="0" noProof="0" dirty="0">
+                        <a:ln>
+                          <a:noFill/>
+                        </a:ln>
+                        <a:solidFill>
+                          <a:prstClr val="black"/>
+                        </a:solidFill>
+                        <a:effectLst/>
+                        <a:uLnTx/>
+                        <a:uFillTx/>
+                        <a:latin typeface="等线" panose="020F0502020204030204"/>
+                        <a:ea typeface="等线" panose="02010600030101010101" pitchFamily="2" charset="-122"/>
+                        <a:cs typeface="+mn-cs"/>
+                      </a:endParaRPr>
+                    </a:p>
+                  </a:txBody>
+                  <a:tcPr anchor="ctr">
+                    <a:lnB w="12700" cap="flat" cmpd="sng" algn="ctr">
+                      <a:solidFill>
+                        <a:schemeClr val="tx1"/>
+                      </a:solidFill>
+                      <a:prstDash val="solid"/>
+                      <a:round/>
+                      <a:headEnd type="none" w="med" len="med"/>
+                      <a:tailEnd type="none" w="med" len="med"/>
+                    </a:lnB>
+                  </a:tcPr>
+                </a:tc>
+                <a:tc>
+                  <a:txBody>
+                    <a:bodyPr/>
+                    <a:lstStyle/>
+                    <a:p>
+                      <a:pPr marL="0" marR="0" lvl="0" indent="0" algn="ctr" defTabSz="914400" rtl="0" eaLnBrk="1" fontAlgn="auto" latinLnBrk="0" hangingPunct="1">
+                        <a:lnSpc>
+                          <a:spcPct val="100000"/>
+                        </a:lnSpc>
+                        <a:spcBef>
+                          <a:spcPts val="0"/>
+                        </a:spcBef>
+                        <a:spcAft>
+                          <a:spcPts val="0"/>
+                        </a:spcAft>
+                        <a:buClrTx/>
+                        <a:buSzTx/>
+                        <a:buFontTx/>
+                        <a:buNone/>
+                        <a:tabLst/>
+                        <a:defRPr/>
+                      </a:pPr>
+                      <a:r>
+                        <a:rPr kumimoji="0" lang="en-US" altLang="zh-CN" sz="900" b="0" i="0" u="none" strike="noStrike" kern="1200" cap="none" spc="0" normalizeH="0" baseline="0" noProof="0" dirty="0">
+                          <a:ln>
+                            <a:noFill/>
+                          </a:ln>
+                          <a:solidFill>
+                            <a:prstClr val="black"/>
+                          </a:solidFill>
+                          <a:effectLst/>
+                          <a:uLnTx/>
+                          <a:uFillTx/>
+                          <a:latin typeface="等线" panose="020F0502020204030204"/>
+                          <a:ea typeface="等线" panose="02010600030101010101" pitchFamily="2" charset="-122"/>
+                          <a:cs typeface="+mn-cs"/>
+                        </a:rPr>
+                        <a:t>1 bit</a:t>
+                      </a:r>
+                      <a:endParaRPr kumimoji="0" lang="zh-CN" altLang="en-US" sz="900" b="0" i="0" u="none" strike="noStrike" kern="1200" cap="none" spc="0" normalizeH="0" baseline="0" noProof="0" dirty="0">
+                        <a:ln>
+                          <a:noFill/>
+                        </a:ln>
+                        <a:solidFill>
+                          <a:prstClr val="black"/>
+                        </a:solidFill>
+                        <a:effectLst/>
+                        <a:uLnTx/>
+                        <a:uFillTx/>
+                        <a:latin typeface="等线" panose="020F0502020204030204"/>
+                        <a:ea typeface="等线" panose="02010600030101010101" pitchFamily="2" charset="-122"/>
+                        <a:cs typeface="+mn-cs"/>
+                      </a:endParaRPr>
+                    </a:p>
+                  </a:txBody>
+                  <a:tcPr anchor="ctr">
+                    <a:lnB w="12700" cap="flat" cmpd="sng" algn="ctr">
+                      <a:solidFill>
+                        <a:schemeClr val="tx1"/>
+                      </a:solidFill>
+                      <a:prstDash val="solid"/>
+                      <a:round/>
+                      <a:headEnd type="none" w="med" len="med"/>
+                      <a:tailEnd type="none" w="med" len="med"/>
+                    </a:lnB>
+                  </a:tcPr>
+                </a:tc>
+                <a:tc>
+                  <a:txBody>
+                    <a:bodyPr/>
+                    <a:lstStyle/>
+                    <a:p>
+                      <a:pPr marL="0" marR="0" lvl="0" indent="0" algn="ctr" defTabSz="914400" rtl="0" eaLnBrk="1" fontAlgn="auto" latinLnBrk="0" hangingPunct="1">
+                        <a:lnSpc>
+                          <a:spcPct val="100000"/>
+                        </a:lnSpc>
+                        <a:spcBef>
+                          <a:spcPts val="0"/>
+                        </a:spcBef>
+                        <a:spcAft>
+                          <a:spcPts val="0"/>
+                        </a:spcAft>
+                        <a:buClrTx/>
+                        <a:buSzTx/>
+                        <a:buFontTx/>
+                        <a:buNone/>
+                        <a:tabLst/>
+                        <a:defRPr/>
+                      </a:pPr>
+                      <a:r>
+                        <a:rPr kumimoji="0" lang="en-US" altLang="zh-CN" sz="900" b="0" i="0" u="none" strike="noStrike" kern="1200" cap="none" spc="0" normalizeH="0" baseline="0" noProof="0" dirty="0">
+                          <a:ln>
+                            <a:noFill/>
+                          </a:ln>
+                          <a:solidFill>
+                            <a:prstClr val="black"/>
+                          </a:solidFill>
+                          <a:effectLst/>
+                          <a:uLnTx/>
+                          <a:uFillTx/>
+                          <a:latin typeface="等线" panose="020F0502020204030204"/>
+                          <a:ea typeface="等线" panose="02010600030101010101" pitchFamily="2" charset="-122"/>
+                          <a:cs typeface="+mn-cs"/>
+                        </a:rPr>
+                        <a:t>1 bit</a:t>
+                      </a:r>
+                      <a:endParaRPr kumimoji="0" lang="zh-CN" altLang="en-US" sz="900" b="0" i="0" u="none" strike="noStrike" kern="1200" cap="none" spc="0" normalizeH="0" baseline="0" noProof="0" dirty="0">
+                        <a:ln>
+                          <a:noFill/>
+                        </a:ln>
+                        <a:solidFill>
+                          <a:prstClr val="black"/>
+                        </a:solidFill>
+                        <a:effectLst/>
+                        <a:uLnTx/>
+                        <a:uFillTx/>
+                        <a:latin typeface="等线" panose="020F0502020204030204"/>
+                        <a:ea typeface="等线" panose="02010600030101010101" pitchFamily="2" charset="-122"/>
+                        <a:cs typeface="+mn-cs"/>
+                      </a:endParaRPr>
+                    </a:p>
+                  </a:txBody>
+                  <a:tcPr anchor="ctr">
+                    <a:lnB w="12700" cap="flat" cmpd="sng" algn="ctr">
+                      <a:solidFill>
+                        <a:schemeClr val="tx1"/>
+                      </a:solidFill>
+                      <a:prstDash val="solid"/>
+                      <a:round/>
+                      <a:headEnd type="none" w="med" len="med"/>
+                      <a:tailEnd type="none" w="med" len="med"/>
+                    </a:lnB>
+                  </a:tcPr>
+                </a:tc>
+                <a:tc>
+                  <a:txBody>
+                    <a:bodyPr/>
+                    <a:lstStyle/>
+                    <a:p>
+                      <a:pPr marL="0" marR="0" lvl="0" indent="0" algn="ctr" defTabSz="914400" rtl="0" eaLnBrk="1" fontAlgn="auto" latinLnBrk="0" hangingPunct="1">
+                        <a:lnSpc>
+                          <a:spcPct val="100000"/>
+                        </a:lnSpc>
+                        <a:spcBef>
+                          <a:spcPts val="0"/>
+                        </a:spcBef>
+                        <a:spcAft>
+                          <a:spcPts val="0"/>
+                        </a:spcAft>
+                        <a:buClrTx/>
+                        <a:buSzTx/>
+                        <a:buFontTx/>
+                        <a:buNone/>
+                        <a:tabLst/>
+                        <a:defRPr/>
+                      </a:pPr>
+                      <a:r>
+                        <a:rPr kumimoji="0" lang="en-US" altLang="zh-CN" sz="900" b="0" i="0" u="none" strike="noStrike" kern="1200" cap="none" spc="0" normalizeH="0" baseline="0" noProof="0" dirty="0">
+                          <a:ln>
+                            <a:noFill/>
+                          </a:ln>
+                          <a:solidFill>
+                            <a:prstClr val="black"/>
+                          </a:solidFill>
+                          <a:effectLst/>
+                          <a:uLnTx/>
+                          <a:uFillTx/>
+                          <a:latin typeface="等线" panose="020F0502020204030204"/>
+                          <a:ea typeface="等线" panose="02010600030101010101" pitchFamily="2" charset="-122"/>
+                          <a:cs typeface="+mn-cs"/>
+                        </a:rPr>
+                        <a:t>1 bit</a:t>
+                      </a:r>
+                      <a:endParaRPr kumimoji="0" lang="zh-CN" altLang="en-US" sz="900" b="0" i="0" u="none" strike="noStrike" kern="1200" cap="none" spc="0" normalizeH="0" baseline="0" noProof="0" dirty="0">
+                        <a:ln>
+                          <a:noFill/>
+                        </a:ln>
+                        <a:solidFill>
+                          <a:prstClr val="black"/>
+                        </a:solidFill>
+                        <a:effectLst/>
+                        <a:uLnTx/>
+                        <a:uFillTx/>
+                        <a:latin typeface="等线" panose="020F0502020204030204"/>
+                        <a:ea typeface="等线" panose="02010600030101010101" pitchFamily="2" charset="-122"/>
+                        <a:cs typeface="+mn-cs"/>
+                      </a:endParaRPr>
+                    </a:p>
+                  </a:txBody>
+                  <a:tcPr anchor="ctr">
+                    <a:lnB w="12700" cap="flat" cmpd="sng" algn="ctr">
+                      <a:solidFill>
+                        <a:schemeClr val="tx1"/>
+                      </a:solidFill>
+                      <a:prstDash val="solid"/>
+                      <a:round/>
+                      <a:headEnd type="none" w="med" len="med"/>
+                      <a:tailEnd type="none" w="med" len="med"/>
+                    </a:lnB>
+                  </a:tcPr>
+                </a:tc>
+                <a:tc>
+                  <a:txBody>
+                    <a:bodyPr/>
+                    <a:lstStyle/>
+                    <a:p>
+                      <a:pPr marL="0" marR="0" lvl="0" indent="0" algn="ctr" defTabSz="914400" rtl="0" eaLnBrk="1" fontAlgn="auto" latinLnBrk="0" hangingPunct="1">
+                        <a:lnSpc>
+                          <a:spcPct val="100000"/>
+                        </a:lnSpc>
+                        <a:spcBef>
+                          <a:spcPts val="0"/>
+                        </a:spcBef>
+                        <a:spcAft>
+                          <a:spcPts val="0"/>
+                        </a:spcAft>
+                        <a:buClrTx/>
+                        <a:buSzTx/>
+                        <a:buFontTx/>
+                        <a:buNone/>
+                        <a:tabLst/>
+                        <a:defRPr/>
+                      </a:pPr>
+                      <a:r>
+                        <a:rPr kumimoji="0" lang="en-US" altLang="zh-CN" sz="900" b="0" i="0" u="none" strike="noStrike" kern="1200" cap="none" spc="0" normalizeH="0" baseline="0" noProof="0" dirty="0">
+                          <a:ln>
+                            <a:noFill/>
+                          </a:ln>
+                          <a:solidFill>
+                            <a:prstClr val="black"/>
+                          </a:solidFill>
+                          <a:effectLst/>
+                          <a:uLnTx/>
+                          <a:uFillTx/>
+                          <a:latin typeface="等线" panose="020F0502020204030204"/>
+                          <a:ea typeface="等线" panose="02010600030101010101" pitchFamily="2" charset="-122"/>
+                          <a:cs typeface="+mn-cs"/>
+                        </a:rPr>
+                        <a:t>1 bit</a:t>
+                      </a:r>
+                      <a:endParaRPr kumimoji="0" lang="zh-CN" altLang="en-US" sz="900" b="0" i="0" u="none" strike="noStrike" kern="1200" cap="none" spc="0" normalizeH="0" baseline="0" noProof="0" dirty="0">
+                        <a:ln>
+                          <a:noFill/>
+                        </a:ln>
+                        <a:solidFill>
+                          <a:prstClr val="black"/>
+                        </a:solidFill>
+                        <a:effectLst/>
+                        <a:uLnTx/>
+                        <a:uFillTx/>
+                        <a:latin typeface="等线" panose="020F0502020204030204"/>
+                        <a:ea typeface="等线" panose="02010600030101010101" pitchFamily="2" charset="-122"/>
+                        <a:cs typeface="+mn-cs"/>
+                      </a:endParaRPr>
+                    </a:p>
+                  </a:txBody>
+                  <a:tcPr anchor="ctr">
+                    <a:lnB w="12700" cap="flat" cmpd="sng" algn="ctr">
+                      <a:solidFill>
+                        <a:schemeClr val="tx1"/>
+                      </a:solidFill>
+                      <a:prstDash val="solid"/>
+                      <a:round/>
+                      <a:headEnd type="none" w="med" len="med"/>
+                      <a:tailEnd type="none" w="med" len="med"/>
+                    </a:lnB>
+                  </a:tcPr>
+                </a:tc>
+                <a:tc>
+                  <a:txBody>
+                    <a:bodyPr/>
+                    <a:lstStyle/>
+                    <a:p>
+                      <a:pPr algn="ctr"/>
+                      <a:r>
+                        <a:rPr lang="en-US" altLang="zh-CN" sz="900" dirty="0"/>
+                        <a:t>1 bit</a:t>
+                      </a:r>
+                      <a:endParaRPr lang="zh-CN" altLang="en-US" sz="900" dirty="0"/>
+                    </a:p>
+                  </a:txBody>
+                  <a:tcPr anchor="ctr">
+                    <a:lnB w="12700" cap="flat" cmpd="sng" algn="ctr">
+                      <a:solidFill>
+                        <a:schemeClr val="tx1"/>
+                      </a:solidFill>
+                      <a:prstDash val="solid"/>
+                      <a:round/>
+                      <a:headEnd type="none" w="med" len="med"/>
+                      <a:tailEnd type="none" w="med" len="med"/>
+                    </a:lnB>
+                  </a:tcPr>
+                </a:tc>
+                <a:extLst>
+                  <a:ext uri="{0D108BD9-81ED-4DB2-BD59-A6C34878D82A}">
+                    <a16:rowId xmlns:a16="http://schemas.microsoft.com/office/drawing/2014/main" val="3523780269"/>
+                  </a:ext>
+                </a:extLst>
+              </a:tr>
+              <a:tr h="300000">
+                <a:tc>
+                  <a:txBody>
+                    <a:bodyPr/>
+                    <a:lstStyle/>
+                    <a:p>
+                      <a:pPr algn="ctr"/>
+                      <a:r>
+                        <a:rPr lang="en-US" altLang="zh-CN" sz="900" dirty="0"/>
+                        <a:t>7</a:t>
+                      </a:r>
+                      <a:endParaRPr lang="zh-CN" altLang="en-US" sz="900" dirty="0"/>
+                    </a:p>
+                  </a:txBody>
+                  <a:tcPr anchor="ctr">
+                    <a:lnL w="12700" cmpd="sng">
+                      <a:noFill/>
+                      <a:prstDash val="solid"/>
+                    </a:lnL>
+                    <a:lnR w="12700" cmpd="sng">
+                      <a:noFill/>
+                      <a:prstDash val="solid"/>
+                    </a:lnR>
+                    <a:lnT w="12700" cap="flat" cmpd="sng" algn="ctr">
+                      <a:solidFill>
+                        <a:schemeClr val="tx1"/>
+                      </a:solidFill>
+                      <a:prstDash val="solid"/>
+                      <a:round/>
+                      <a:headEnd type="none" w="med" len="med"/>
+                      <a:tailEnd type="none" w="med" len="med"/>
+                    </a:lnT>
+                    <a:lnB w="12700" cmpd="sng">
+                      <a:noFill/>
+                      <a:prstDash val="solid"/>
+                    </a:lnB>
+                    <a:lnTlToBr w="12700" cmpd="sng">
+                      <a:noFill/>
+                      <a:prstDash val="solid"/>
+                    </a:lnTlToBr>
+                    <a:lnBlToTr w="12700" cmpd="sng">
+                      <a:noFill/>
+                      <a:prstDash val="solid"/>
+                    </a:lnBlToTr>
+                  </a:tcPr>
+                </a:tc>
+                <a:tc>
+                  <a:txBody>
+                    <a:bodyPr/>
+                    <a:lstStyle/>
+                    <a:p>
+                      <a:pPr algn="ctr"/>
+                      <a:r>
+                        <a:rPr lang="en-US" altLang="zh-CN" sz="900" dirty="0"/>
+                        <a:t>6</a:t>
+                      </a:r>
+                      <a:endParaRPr lang="zh-CN" altLang="en-US" sz="900" dirty="0"/>
+                    </a:p>
+                  </a:txBody>
+                  <a:tcPr anchor="ctr">
+                    <a:lnL w="12700" cmpd="sng">
+                      <a:noFill/>
+                      <a:prstDash val="solid"/>
+                    </a:lnL>
+                    <a:lnR w="12700" cmpd="sng">
+                      <a:noFill/>
+                      <a:prstDash val="solid"/>
+                    </a:lnR>
+                    <a:lnT w="12700" cap="flat" cmpd="sng" algn="ctr">
+                      <a:solidFill>
+                        <a:schemeClr val="tx1"/>
+                      </a:solidFill>
+                      <a:prstDash val="solid"/>
+                      <a:round/>
+                      <a:headEnd type="none" w="med" len="med"/>
+                      <a:tailEnd type="none" w="med" len="med"/>
+                    </a:lnT>
+                    <a:lnB w="12700" cmpd="sng">
+                      <a:noFill/>
+                      <a:prstDash val="solid"/>
+                    </a:lnB>
+                    <a:lnTlToBr w="12700" cmpd="sng">
+                      <a:noFill/>
+                      <a:prstDash val="solid"/>
+                    </a:lnTlToBr>
+                    <a:lnBlToTr w="12700" cmpd="sng">
+                      <a:noFill/>
+                      <a:prstDash val="solid"/>
+                    </a:lnBlToTr>
+                  </a:tcPr>
+                </a:tc>
+                <a:tc>
+                  <a:txBody>
+                    <a:bodyPr/>
+                    <a:lstStyle/>
+                    <a:p>
+                      <a:pPr algn="ctr"/>
+                      <a:r>
+                        <a:rPr lang="en-US" altLang="zh-CN" sz="900" dirty="0"/>
+                        <a:t>5</a:t>
+                      </a:r>
+                      <a:endParaRPr lang="zh-CN" altLang="en-US" sz="900" dirty="0"/>
+                    </a:p>
+                  </a:txBody>
+                  <a:tcPr anchor="ctr">
+                    <a:lnL w="12700" cmpd="sng">
+                      <a:noFill/>
+                      <a:prstDash val="solid"/>
+                    </a:lnL>
+                    <a:lnR w="12700" cmpd="sng">
+                      <a:noFill/>
+                      <a:prstDash val="solid"/>
+                    </a:lnR>
+                    <a:lnT w="12700" cap="flat" cmpd="sng" algn="ctr">
+                      <a:solidFill>
+                        <a:schemeClr val="tx1"/>
+                      </a:solidFill>
+                      <a:prstDash val="solid"/>
+                      <a:round/>
+                      <a:headEnd type="none" w="med" len="med"/>
+                      <a:tailEnd type="none" w="med" len="med"/>
+                    </a:lnT>
+                    <a:lnB w="12700" cmpd="sng">
+                      <a:noFill/>
+                      <a:prstDash val="solid"/>
+                    </a:lnB>
+                    <a:lnTlToBr w="12700" cmpd="sng">
+                      <a:noFill/>
+                      <a:prstDash val="solid"/>
+                    </a:lnTlToBr>
+                    <a:lnBlToTr w="12700" cmpd="sng">
+                      <a:noFill/>
+                      <a:prstDash val="solid"/>
+                    </a:lnBlToTr>
+                  </a:tcPr>
+                </a:tc>
+                <a:tc>
+                  <a:txBody>
+                    <a:bodyPr/>
+                    <a:lstStyle/>
+                    <a:p>
+                      <a:pPr algn="ctr"/>
+                      <a:r>
+                        <a:rPr lang="en-US" altLang="zh-CN" sz="900" dirty="0"/>
+                        <a:t>4</a:t>
+                      </a:r>
+                      <a:endParaRPr lang="zh-CN" altLang="en-US" sz="900" dirty="0"/>
+                    </a:p>
+                  </a:txBody>
+                  <a:tcPr anchor="ctr">
+                    <a:lnL w="12700" cmpd="sng">
+                      <a:noFill/>
+                      <a:prstDash val="solid"/>
+                    </a:lnL>
+                    <a:lnR w="12700" cmpd="sng">
+                      <a:noFill/>
+                      <a:prstDash val="solid"/>
+                    </a:lnR>
+                    <a:lnT w="12700" cap="flat" cmpd="sng" algn="ctr">
+                      <a:solidFill>
+                        <a:schemeClr val="tx1"/>
+                      </a:solidFill>
+                      <a:prstDash val="solid"/>
+                      <a:round/>
+                      <a:headEnd type="none" w="med" len="med"/>
+                      <a:tailEnd type="none" w="med" len="med"/>
+                    </a:lnT>
+                    <a:lnB w="12700" cmpd="sng">
+                      <a:noFill/>
+                      <a:prstDash val="solid"/>
+                    </a:lnB>
+                    <a:lnTlToBr w="12700" cmpd="sng">
+                      <a:noFill/>
+                      <a:prstDash val="solid"/>
+                    </a:lnTlToBr>
+                    <a:lnBlToTr w="12700" cmpd="sng">
+                      <a:noFill/>
+                      <a:prstDash val="solid"/>
+                    </a:lnBlToTr>
+                  </a:tcPr>
+                </a:tc>
+                <a:tc>
+                  <a:txBody>
+                    <a:bodyPr/>
+                    <a:lstStyle/>
+                    <a:p>
+                      <a:pPr algn="ctr"/>
+                      <a:r>
+                        <a:rPr lang="en-US" altLang="zh-CN" sz="900" dirty="0"/>
+                        <a:t>3</a:t>
+                      </a:r>
+                      <a:endParaRPr lang="zh-CN" altLang="en-US" sz="900" dirty="0"/>
+                    </a:p>
+                  </a:txBody>
+                  <a:tcPr anchor="ctr">
+                    <a:lnL w="12700" cmpd="sng">
+                      <a:noFill/>
+                      <a:prstDash val="solid"/>
+                    </a:lnL>
+                    <a:lnR w="12700" cmpd="sng">
+                      <a:noFill/>
+                      <a:prstDash val="solid"/>
+                    </a:lnR>
+                    <a:lnT w="12700" cap="flat" cmpd="sng" algn="ctr">
+                      <a:solidFill>
+                        <a:schemeClr val="tx1"/>
+                      </a:solidFill>
+                      <a:prstDash val="solid"/>
+                      <a:round/>
+                      <a:headEnd type="none" w="med" len="med"/>
+                      <a:tailEnd type="none" w="med" len="med"/>
+                    </a:lnT>
+                    <a:lnB w="12700" cmpd="sng">
+                      <a:noFill/>
+                      <a:prstDash val="solid"/>
+                    </a:lnB>
+                    <a:lnTlToBr w="12700" cmpd="sng">
+                      <a:noFill/>
+                      <a:prstDash val="solid"/>
+                    </a:lnTlToBr>
+                    <a:lnBlToTr w="12700" cmpd="sng">
+                      <a:noFill/>
+                      <a:prstDash val="solid"/>
+                    </a:lnBlToTr>
+                  </a:tcPr>
+                </a:tc>
+                <a:tc>
+                  <a:txBody>
+                    <a:bodyPr/>
+                    <a:lstStyle/>
+                    <a:p>
+                      <a:pPr algn="ctr"/>
+                      <a:r>
+                        <a:rPr lang="en-US" altLang="zh-CN" sz="900" dirty="0"/>
+                        <a:t>2</a:t>
+                      </a:r>
+                      <a:endParaRPr lang="zh-CN" altLang="en-US" sz="900" dirty="0"/>
+                    </a:p>
+                  </a:txBody>
+                  <a:tcPr anchor="ctr">
+                    <a:lnL w="12700" cmpd="sng">
+                      <a:noFill/>
+                      <a:prstDash val="solid"/>
+                    </a:lnL>
+                    <a:lnR w="12700" cmpd="sng">
+                      <a:noFill/>
+                      <a:prstDash val="solid"/>
+                    </a:lnR>
+                    <a:lnT w="12700" cap="flat" cmpd="sng" algn="ctr">
+                      <a:solidFill>
+                        <a:schemeClr val="tx1"/>
+                      </a:solidFill>
+                      <a:prstDash val="solid"/>
+                      <a:round/>
+                      <a:headEnd type="none" w="med" len="med"/>
+                      <a:tailEnd type="none" w="med" len="med"/>
+                    </a:lnT>
+                    <a:lnB w="12700" cmpd="sng">
+                      <a:noFill/>
+                      <a:prstDash val="solid"/>
+                    </a:lnB>
+                    <a:lnTlToBr w="12700" cmpd="sng">
+                      <a:noFill/>
+                      <a:prstDash val="solid"/>
+                    </a:lnTlToBr>
+                    <a:lnBlToTr w="12700" cmpd="sng">
+                      <a:noFill/>
+                      <a:prstDash val="solid"/>
+                    </a:lnBlToTr>
+                  </a:tcPr>
+                </a:tc>
+                <a:tc>
+                  <a:txBody>
+                    <a:bodyPr/>
+                    <a:lstStyle/>
+                    <a:p>
+                      <a:pPr algn="ctr"/>
+                      <a:r>
+                        <a:rPr lang="en-US" altLang="zh-CN" sz="900" dirty="0"/>
+                        <a:t>1</a:t>
+                      </a:r>
+                      <a:endParaRPr lang="zh-CN" altLang="en-US" sz="900" dirty="0"/>
+                    </a:p>
+                  </a:txBody>
+                  <a:tcPr anchor="ctr">
+                    <a:lnL w="12700" cmpd="sng">
+                      <a:noFill/>
+                      <a:prstDash val="solid"/>
+                    </a:lnL>
+                    <a:lnR w="12700" cmpd="sng">
+                      <a:noFill/>
+                      <a:prstDash val="solid"/>
+                    </a:lnR>
+                    <a:lnT w="12700" cap="flat" cmpd="sng" algn="ctr">
+                      <a:solidFill>
+                        <a:schemeClr val="tx1"/>
+                      </a:solidFill>
+                      <a:prstDash val="solid"/>
+                      <a:round/>
+                      <a:headEnd type="none" w="med" len="med"/>
+                      <a:tailEnd type="none" w="med" len="med"/>
+                    </a:lnT>
+                    <a:lnB w="12700" cmpd="sng">
+                      <a:noFill/>
+                      <a:prstDash val="solid"/>
+                    </a:lnB>
+                    <a:lnTlToBr w="12700" cmpd="sng">
+                      <a:noFill/>
+                      <a:prstDash val="solid"/>
+                    </a:lnTlToBr>
+                    <a:lnBlToTr w="12700" cmpd="sng">
+                      <a:noFill/>
+                      <a:prstDash val="solid"/>
+                    </a:lnBlToTr>
+                  </a:tcPr>
+                </a:tc>
+                <a:tc>
+                  <a:txBody>
+                    <a:bodyPr/>
+                    <a:lstStyle/>
+                    <a:p>
+                      <a:pPr algn="ctr"/>
+                      <a:r>
+                        <a:rPr lang="en-US" altLang="zh-CN" sz="900" dirty="0"/>
+                        <a:t>0</a:t>
+                      </a:r>
+                      <a:endParaRPr lang="zh-CN" altLang="en-US" sz="900" dirty="0"/>
+                    </a:p>
+                  </a:txBody>
+                  <a:tcPr anchor="ctr">
+                    <a:lnL w="12700" cmpd="sng">
+                      <a:noFill/>
+                      <a:prstDash val="solid"/>
+                    </a:lnL>
+                    <a:lnR w="12700" cmpd="sng">
+                      <a:noFill/>
+                      <a:prstDash val="solid"/>
+                    </a:lnR>
+                    <a:lnT w="12700" cap="flat" cmpd="sng" algn="ctr">
+                      <a:solidFill>
+                        <a:schemeClr val="tx1"/>
+                      </a:solidFill>
+                      <a:prstDash val="solid"/>
+                      <a:round/>
+                      <a:headEnd type="none" w="med" len="med"/>
+                      <a:tailEnd type="none" w="med" len="med"/>
+                    </a:lnT>
+                    <a:lnB w="12700" cmpd="sng">
+                      <a:noFill/>
+                      <a:prstDash val="solid"/>
+                    </a:lnB>
+                    <a:lnTlToBr w="12700" cmpd="sng">
+                      <a:noFill/>
+                      <a:prstDash val="solid"/>
+                    </a:lnTlToBr>
+                    <a:lnBlToTr w="12700" cmpd="sng">
+                      <a:noFill/>
+                      <a:prstDash val="solid"/>
+                    </a:lnBlToTr>
+                  </a:tcPr>
+                </a:tc>
+                <a:extLst>
+                  <a:ext uri="{0D108BD9-81ED-4DB2-BD59-A6C34878D82A}">
+                    <a16:rowId xmlns:a16="http://schemas.microsoft.com/office/drawing/2014/main" val="3634073990"/>
+                  </a:ext>
+                </a:extLst>
+              </a:tr>
+            </a:tbl>
+          </a:graphicData>
+        </a:graphic>
+      </p:graphicFrame>
     </p:spTree>
     <p:extLst>
       <p:ext uri="{BB962C8B-B14F-4D97-AF65-F5344CB8AC3E}">
-        <p14:creationId xmlns:p14="http://schemas.microsoft.com/office/powerpoint/2010/main" val="3445511340"/>
+        <p14:creationId xmlns:p14="http://schemas.microsoft.com/office/powerpoint/2010/main" val="2248897816"/>
       </p:ext>
     </p:extLst>
   </p:cSld>
@@ -15722,6 +17194,452 @@
 </file>
 
 <file path=ppt/slides/slide20.xml><?xml version="1.0" encoding="utf-8"?>
+<p:sld xmlns:a="http://schemas.openxmlformats.org/drawingml/2006/main" xmlns:r="http://schemas.openxmlformats.org/officeDocument/2006/relationships" xmlns:p="http://schemas.openxmlformats.org/presentationml/2006/main">
+  <p:cSld>
+    <p:spTree>
+      <p:nvGrpSpPr>
+        <p:cNvPr id="1" name="">
+          <a:extLst>
+            <a:ext uri="{FF2B5EF4-FFF2-40B4-BE49-F238E27FC236}">
+              <a16:creationId xmlns:a16="http://schemas.microsoft.com/office/drawing/2014/main" id="{70C4E89A-BF29-AF5A-ED21-08479844B4D3}"/>
+            </a:ext>
+          </a:extLst>
+        </p:cNvPr>
+        <p:cNvGrpSpPr/>
+        <p:nvPr/>
+      </p:nvGrpSpPr>
+      <p:grpSpPr>
+        <a:xfrm>
+          <a:off x="0" y="0"/>
+          <a:ext cx="0" cy="0"/>
+          <a:chOff x="0" y="0"/>
+          <a:chExt cx="0" cy="0"/>
+        </a:xfrm>
+      </p:grpSpPr>
+      <p:sp>
+        <p:nvSpPr>
+          <p:cNvPr id="2" name="Rectangle 1">
+            <a:extLst>
+              <a:ext uri="{FF2B5EF4-FFF2-40B4-BE49-F238E27FC236}">
+                <a16:creationId xmlns:a16="http://schemas.microsoft.com/office/drawing/2014/main" id="{0F4514FD-593B-5957-478B-81363107123A}"/>
+              </a:ext>
+            </a:extLst>
+          </p:cNvPr>
+          <p:cNvSpPr/>
+          <p:nvPr/>
+        </p:nvSpPr>
+        <p:spPr>
+          <a:xfrm>
+            <a:off x="3757723" y="1589964"/>
+            <a:ext cx="3600000" cy="1800000"/>
+          </a:xfrm>
+          <a:prstGeom prst="rect">
+            <a:avLst/>
+          </a:prstGeom>
+          <a:solidFill>
+            <a:schemeClr val="bg1">
+              <a:lumMod val="95000"/>
+            </a:schemeClr>
+          </a:solidFill>
+          <a:ln>
+            <a:noFill/>
+          </a:ln>
+        </p:spPr>
+        <p:style>
+          <a:lnRef idx="2">
+            <a:schemeClr val="accent1">
+              <a:shade val="15000"/>
+            </a:schemeClr>
+          </a:lnRef>
+          <a:fillRef idx="1">
+            <a:schemeClr val="accent1"/>
+          </a:fillRef>
+          <a:effectRef idx="0">
+            <a:schemeClr val="accent1"/>
+          </a:effectRef>
+          <a:fontRef idx="minor">
+            <a:schemeClr val="lt1"/>
+          </a:fontRef>
+        </p:style>
+        <p:txBody>
+          <a:bodyPr rtlCol="0" anchor="ctr"/>
+          <a:lstStyle/>
+          <a:p>
+            <a:pPr algn="ctr"/>
+            <a:endParaRPr lang="zh-CN" altLang="en-US" sz="1200">
+              <a:solidFill>
+                <a:schemeClr val="accent6">
+                  <a:lumMod val="75000"/>
+                </a:schemeClr>
+              </a:solidFill>
+              <a:latin typeface="Poppins" panose="00000500000000000000" pitchFamily="2" charset="0"/>
+              <a:cs typeface="Poppins" panose="00000500000000000000" pitchFamily="2" charset="0"/>
+            </a:endParaRPr>
+          </a:p>
+        </p:txBody>
+      </p:sp>
+      <p:sp>
+        <p:nvSpPr>
+          <p:cNvPr id="3" name="Rectangle 2">
+            <a:extLst>
+              <a:ext uri="{FF2B5EF4-FFF2-40B4-BE49-F238E27FC236}">
+                <a16:creationId xmlns:a16="http://schemas.microsoft.com/office/drawing/2014/main" id="{BA8D48D4-E1F3-B266-9AE0-9C5665BBD6F5}"/>
+              </a:ext>
+            </a:extLst>
+          </p:cNvPr>
+          <p:cNvSpPr/>
+          <p:nvPr/>
+        </p:nvSpPr>
+        <p:spPr>
+          <a:xfrm>
+            <a:off x="3757723" y="1589964"/>
+            <a:ext cx="3600000" cy="720000"/>
+          </a:xfrm>
+          <a:prstGeom prst="rect">
+            <a:avLst/>
+          </a:prstGeom>
+          <a:solidFill>
+            <a:srgbClr val="92D050"/>
+          </a:solidFill>
+          <a:ln>
+            <a:noFill/>
+          </a:ln>
+        </p:spPr>
+        <p:style>
+          <a:lnRef idx="2">
+            <a:schemeClr val="accent1">
+              <a:shade val="15000"/>
+            </a:schemeClr>
+          </a:lnRef>
+          <a:fillRef idx="1">
+            <a:schemeClr val="accent1"/>
+          </a:fillRef>
+          <a:effectRef idx="0">
+            <a:schemeClr val="accent1"/>
+          </a:effectRef>
+          <a:fontRef idx="minor">
+            <a:schemeClr val="lt1"/>
+          </a:fontRef>
+        </p:style>
+        <p:txBody>
+          <a:bodyPr rtlCol="0" anchor="b" anchorCtr="0"/>
+          <a:lstStyle/>
+          <a:p>
+            <a:r>
+              <a:rPr lang="en-US" altLang="zh-CN" sz="1200">
+                <a:latin typeface="Poppins" panose="00000500000000000000" pitchFamily="2" charset="0"/>
+                <a:cs typeface="Poppins" panose="00000500000000000000" pitchFamily="2" charset="0"/>
+              </a:rPr>
+              <a:t>start</a:t>
+            </a:r>
+            <a:endParaRPr lang="zh-CN" altLang="en-US" sz="1200">
+              <a:latin typeface="Poppins" panose="00000500000000000000" pitchFamily="2" charset="0"/>
+              <a:cs typeface="Poppins" panose="00000500000000000000" pitchFamily="2" charset="0"/>
+            </a:endParaRPr>
+          </a:p>
+        </p:txBody>
+      </p:sp>
+      <p:sp>
+        <p:nvSpPr>
+          <p:cNvPr id="4" name="Rectangle 3">
+            <a:extLst>
+              <a:ext uri="{FF2B5EF4-FFF2-40B4-BE49-F238E27FC236}">
+                <a16:creationId xmlns:a16="http://schemas.microsoft.com/office/drawing/2014/main" id="{75131CE1-6587-9E1B-DBD4-384409634CF3}"/>
+              </a:ext>
+            </a:extLst>
+          </p:cNvPr>
+          <p:cNvSpPr/>
+          <p:nvPr/>
+        </p:nvSpPr>
+        <p:spPr>
+          <a:xfrm>
+            <a:off x="3757723" y="2309964"/>
+            <a:ext cx="3600000" cy="1080000"/>
+          </a:xfrm>
+          <a:prstGeom prst="rect">
+            <a:avLst/>
+          </a:prstGeom>
+          <a:solidFill>
+            <a:srgbClr val="92D050"/>
+          </a:solidFill>
+          <a:ln>
+            <a:noFill/>
+          </a:ln>
+        </p:spPr>
+        <p:style>
+          <a:lnRef idx="2">
+            <a:schemeClr val="accent1">
+              <a:shade val="15000"/>
+            </a:schemeClr>
+          </a:lnRef>
+          <a:fillRef idx="1">
+            <a:schemeClr val="accent1"/>
+          </a:fillRef>
+          <a:effectRef idx="0">
+            <a:schemeClr val="accent1"/>
+          </a:effectRef>
+          <a:fontRef idx="minor">
+            <a:schemeClr val="lt1"/>
+          </a:fontRef>
+        </p:style>
+        <p:txBody>
+          <a:bodyPr rtlCol="0" anchor="t" anchorCtr="0"/>
+          <a:lstStyle/>
+          <a:p>
+            <a:r>
+              <a:rPr lang="en-US" altLang="zh-CN" sz="1200">
+                <a:latin typeface="Poppins" panose="00000500000000000000" pitchFamily="2" charset="0"/>
+                <a:cs typeface="Poppins" panose="00000500000000000000" pitchFamily="2" charset="0"/>
+              </a:rPr>
+              <a:t>end</a:t>
+            </a:r>
+            <a:endParaRPr lang="zh-CN" altLang="en-US" sz="1200">
+              <a:latin typeface="Poppins" panose="00000500000000000000" pitchFamily="2" charset="0"/>
+              <a:cs typeface="Poppins" panose="00000500000000000000" pitchFamily="2" charset="0"/>
+            </a:endParaRPr>
+          </a:p>
+        </p:txBody>
+      </p:sp>
+      <p:sp>
+        <p:nvSpPr>
+          <p:cNvPr id="5" name="文本框 4">
+            <a:extLst>
+              <a:ext uri="{FF2B5EF4-FFF2-40B4-BE49-F238E27FC236}">
+                <a16:creationId xmlns:a16="http://schemas.microsoft.com/office/drawing/2014/main" id="{45D18331-4F10-66C6-2CC3-6214413856F0}"/>
+              </a:ext>
+            </a:extLst>
+          </p:cNvPr>
+          <p:cNvSpPr txBox="1"/>
+          <p:nvPr/>
+        </p:nvSpPr>
+        <p:spPr>
+          <a:xfrm>
+            <a:off x="4991100" y="2089523"/>
+            <a:ext cx="1592103" cy="307777"/>
+          </a:xfrm>
+          <a:prstGeom prst="rect">
+            <a:avLst/>
+          </a:prstGeom>
+          <a:noFill/>
+        </p:spPr>
+        <p:txBody>
+          <a:bodyPr wrap="none" rtlCol="0">
+            <a:spAutoFit/>
+          </a:bodyPr>
+          <a:lstStyle/>
+          <a:p>
+            <a:r>
+              <a:rPr lang="en-US" altLang="zh-CN" sz="1400">
+                <a:latin typeface="Poppins" panose="00000500000000000000" pitchFamily="2" charset="0"/>
+                <a:cs typeface="Poppins" panose="00000500000000000000" pitchFamily="2" charset="0"/>
+              </a:rPr>
+              <a:t>Animation Zone</a:t>
+            </a:r>
+            <a:endParaRPr lang="zh-CN" altLang="en-US" sz="1400">
+              <a:latin typeface="Poppins" panose="00000500000000000000" pitchFamily="2" charset="0"/>
+              <a:cs typeface="Poppins" panose="00000500000000000000" pitchFamily="2" charset="0"/>
+            </a:endParaRPr>
+          </a:p>
+        </p:txBody>
+      </p:sp>
+      <p:cxnSp>
+        <p:nvCxnSpPr>
+          <p:cNvPr id="7" name="Straight Arrow Connector 5">
+            <a:extLst>
+              <a:ext uri="{FF2B5EF4-FFF2-40B4-BE49-F238E27FC236}">
+                <a16:creationId xmlns:a16="http://schemas.microsoft.com/office/drawing/2014/main" id="{835AD99D-1E1D-3323-3899-83DE42EDA003}"/>
+              </a:ext>
+            </a:extLst>
+          </p:cNvPr>
+          <p:cNvCxnSpPr>
+            <a:cxnSpLocks/>
+          </p:cNvCxnSpPr>
+          <p:nvPr/>
+        </p:nvCxnSpPr>
+        <p:spPr>
+          <a:xfrm>
+            <a:off x="4297473" y="1589964"/>
+            <a:ext cx="0" cy="720000"/>
+          </a:xfrm>
+          <a:prstGeom prst="straightConnector1">
+            <a:avLst/>
+          </a:prstGeom>
+          <a:ln>
+            <a:solidFill>
+              <a:schemeClr val="bg1"/>
+            </a:solidFill>
+            <a:tailEnd type="triangle"/>
+          </a:ln>
+        </p:spPr>
+        <p:style>
+          <a:lnRef idx="1">
+            <a:schemeClr val="accent1"/>
+          </a:lnRef>
+          <a:fillRef idx="0">
+            <a:schemeClr val="accent1"/>
+          </a:fillRef>
+          <a:effectRef idx="0">
+            <a:schemeClr val="accent1"/>
+          </a:effectRef>
+          <a:fontRef idx="minor">
+            <a:schemeClr val="tx1"/>
+          </a:fontRef>
+        </p:style>
+      </p:cxnSp>
+      <p:cxnSp>
+        <p:nvCxnSpPr>
+          <p:cNvPr id="9" name="Straight Arrow Connector 7">
+            <a:extLst>
+              <a:ext uri="{FF2B5EF4-FFF2-40B4-BE49-F238E27FC236}">
+                <a16:creationId xmlns:a16="http://schemas.microsoft.com/office/drawing/2014/main" id="{00A8B3C4-1587-38DE-2403-A0606A3593B1}"/>
+              </a:ext>
+            </a:extLst>
+          </p:cNvPr>
+          <p:cNvCxnSpPr>
+            <a:cxnSpLocks/>
+          </p:cNvCxnSpPr>
+          <p:nvPr/>
+        </p:nvCxnSpPr>
+        <p:spPr>
+          <a:xfrm flipV="1">
+            <a:off x="4297473" y="2309964"/>
+            <a:ext cx="0" cy="1080000"/>
+          </a:xfrm>
+          <a:prstGeom prst="straightConnector1">
+            <a:avLst/>
+          </a:prstGeom>
+          <a:ln>
+            <a:solidFill>
+              <a:schemeClr val="bg1"/>
+            </a:solidFill>
+            <a:tailEnd type="triangle"/>
+          </a:ln>
+        </p:spPr>
+        <p:style>
+          <a:lnRef idx="1">
+            <a:schemeClr val="accent1"/>
+          </a:lnRef>
+          <a:fillRef idx="0">
+            <a:schemeClr val="accent1"/>
+          </a:fillRef>
+          <a:effectRef idx="0">
+            <a:schemeClr val="accent1"/>
+          </a:effectRef>
+          <a:fontRef idx="minor">
+            <a:schemeClr val="tx1"/>
+          </a:fontRef>
+        </p:style>
+      </p:cxnSp>
+      <p:sp>
+        <p:nvSpPr>
+          <p:cNvPr id="10" name="文本框 9">
+            <a:extLst>
+              <a:ext uri="{FF2B5EF4-FFF2-40B4-BE49-F238E27FC236}">
+                <a16:creationId xmlns:a16="http://schemas.microsoft.com/office/drawing/2014/main" id="{1A3F9847-32C0-AF36-6722-54B895024168}"/>
+              </a:ext>
+            </a:extLst>
+          </p:cNvPr>
+          <p:cNvSpPr txBox="1"/>
+          <p:nvPr/>
+        </p:nvSpPr>
+        <p:spPr>
+          <a:xfrm>
+            <a:off x="4297473" y="2032965"/>
+            <a:ext cx="476412" cy="276999"/>
+          </a:xfrm>
+          <a:prstGeom prst="rect">
+            <a:avLst/>
+          </a:prstGeom>
+          <a:noFill/>
+        </p:spPr>
+        <p:txBody>
+          <a:bodyPr wrap="none" rtlCol="0">
+            <a:spAutoFit/>
+          </a:bodyPr>
+          <a:lstStyle/>
+          <a:p>
+            <a:r>
+              <a:rPr lang="en-US" altLang="zh-CN" sz="1200">
+                <a:solidFill>
+                  <a:schemeClr val="bg1"/>
+                </a:solidFill>
+                <a:latin typeface="Poppins" panose="00000500000000000000" pitchFamily="2" charset="0"/>
+                <a:cs typeface="Poppins" panose="00000500000000000000" pitchFamily="2" charset="0"/>
+              </a:rPr>
+              <a:t>40%</a:t>
+            </a:r>
+            <a:endParaRPr lang="zh-CN" altLang="en-US" sz="1200">
+              <a:solidFill>
+                <a:schemeClr val="bg1"/>
+              </a:solidFill>
+              <a:latin typeface="Poppins" panose="00000500000000000000" pitchFamily="2" charset="0"/>
+              <a:cs typeface="Poppins" panose="00000500000000000000" pitchFamily="2" charset="0"/>
+            </a:endParaRPr>
+          </a:p>
+        </p:txBody>
+      </p:sp>
+      <p:sp>
+        <p:nvSpPr>
+          <p:cNvPr id="11" name="文本框 10">
+            <a:extLst>
+              <a:ext uri="{FF2B5EF4-FFF2-40B4-BE49-F238E27FC236}">
+                <a16:creationId xmlns:a16="http://schemas.microsoft.com/office/drawing/2014/main" id="{9D2433A2-2688-D06B-77ED-F2DBF6D27DA1}"/>
+              </a:ext>
+            </a:extLst>
+          </p:cNvPr>
+          <p:cNvSpPr txBox="1"/>
+          <p:nvPr/>
+        </p:nvSpPr>
+        <p:spPr>
+          <a:xfrm>
+            <a:off x="4297473" y="2309964"/>
+            <a:ext cx="476412" cy="276999"/>
+          </a:xfrm>
+          <a:prstGeom prst="rect">
+            <a:avLst/>
+          </a:prstGeom>
+          <a:noFill/>
+        </p:spPr>
+        <p:txBody>
+          <a:bodyPr wrap="none" rtlCol="0">
+            <a:spAutoFit/>
+          </a:bodyPr>
+          <a:lstStyle/>
+          <a:p>
+            <a:r>
+              <a:rPr lang="en-US" altLang="zh-CN" sz="1200">
+                <a:solidFill>
+                  <a:schemeClr val="bg1"/>
+                </a:solidFill>
+                <a:latin typeface="Poppins" panose="00000500000000000000" pitchFamily="2" charset="0"/>
+                <a:cs typeface="Poppins" panose="00000500000000000000" pitchFamily="2" charset="0"/>
+              </a:rPr>
+              <a:t>60%</a:t>
+            </a:r>
+            <a:endParaRPr lang="zh-CN" altLang="en-US" sz="1200">
+              <a:solidFill>
+                <a:schemeClr val="bg1"/>
+              </a:solidFill>
+              <a:latin typeface="Poppins" panose="00000500000000000000" pitchFamily="2" charset="0"/>
+              <a:cs typeface="Poppins" panose="00000500000000000000" pitchFamily="2" charset="0"/>
+            </a:endParaRPr>
+          </a:p>
+        </p:txBody>
+      </p:sp>
+    </p:spTree>
+    <p:extLst>
+      <p:ext uri="{BB962C8B-B14F-4D97-AF65-F5344CB8AC3E}">
+        <p14:creationId xmlns:p14="http://schemas.microsoft.com/office/powerpoint/2010/main" val="1843053738"/>
+      </p:ext>
+    </p:extLst>
+  </p:cSld>
+  <p:clrMapOvr>
+    <a:masterClrMapping/>
+  </p:clrMapOvr>
+</p:sld>
+</file>
+
+<file path=ppt/slides/slide21.xml><?xml version="1.0" encoding="utf-8"?>
 <p:sld xmlns:a="http://schemas.openxmlformats.org/drawingml/2006/main" xmlns:r="http://schemas.openxmlformats.org/officeDocument/2006/relationships" xmlns:p="http://schemas.openxmlformats.org/presentationml/2006/main">
   <p:cSld>
     <p:spTree>
@@ -16167,7 +18085,7 @@
 </p:sld>
 </file>
 
-<file path=ppt/slides/slide21.xml><?xml version="1.0" encoding="utf-8"?>
+<file path=ppt/slides/slide22.xml><?xml version="1.0" encoding="utf-8"?>
 <p:sld xmlns:a="http://schemas.openxmlformats.org/drawingml/2006/main" xmlns:r="http://schemas.openxmlformats.org/officeDocument/2006/relationships" xmlns:p="http://schemas.openxmlformats.org/presentationml/2006/main">
   <p:cSld>
     <p:spTree>
@@ -17410,7 +19328,7 @@
 </p:sld>
 </file>
 
-<file path=ppt/slides/slide22.xml><?xml version="1.0" encoding="utf-8"?>
+<file path=ppt/slides/slide23.xml><?xml version="1.0" encoding="utf-8"?>
 <p:sld xmlns:a="http://schemas.openxmlformats.org/drawingml/2006/main" xmlns:r="http://schemas.openxmlformats.org/officeDocument/2006/relationships" xmlns:p="http://schemas.openxmlformats.org/presentationml/2006/main">
   <p:cSld>
     <p:spTree>
@@ -19083,7 +21001,7 @@
 </p:sld>
 </file>
 
-<file path=ppt/slides/slide23.xml><?xml version="1.0" encoding="utf-8"?>
+<file path=ppt/slides/slide24.xml><?xml version="1.0" encoding="utf-8"?>
 <p:sld xmlns:a="http://schemas.openxmlformats.org/drawingml/2006/main" xmlns:r="http://schemas.openxmlformats.org/officeDocument/2006/relationships" xmlns:p="http://schemas.openxmlformats.org/presentationml/2006/main">
   <p:cSld>
     <p:spTree>
@@ -20335,7 +22253,7 @@
 </p:sld>
 </file>
 
-<file path=ppt/slides/slide24.xml><?xml version="1.0" encoding="utf-8"?>
+<file path=ppt/slides/slide25.xml><?xml version="1.0" encoding="utf-8"?>
 <p:sld xmlns:a="http://schemas.openxmlformats.org/drawingml/2006/main" xmlns:r="http://schemas.openxmlformats.org/officeDocument/2006/relationships" xmlns:p="http://schemas.openxmlformats.org/presentationml/2006/main">
   <p:cSld>
     <p:spTree>
@@ -21458,7 +23376,7 @@
 </p:sld>
 </file>
 
-<file path=ppt/slides/slide25.xml><?xml version="1.0" encoding="utf-8"?>
+<file path=ppt/slides/slide26.xml><?xml version="1.0" encoding="utf-8"?>
 <p:sld xmlns:a="http://schemas.openxmlformats.org/drawingml/2006/main" xmlns:r="http://schemas.openxmlformats.org/officeDocument/2006/relationships" xmlns:p="http://schemas.openxmlformats.org/presentationml/2006/main">
   <p:cSld>
     <p:spTree>
@@ -22821,7 +24739,7 @@
 </p:sld>
 </file>
 
-<file path=ppt/slides/slide26.xml><?xml version="1.0" encoding="utf-8"?>
+<file path=ppt/slides/slide27.xml><?xml version="1.0" encoding="utf-8"?>
 <p:sld xmlns:a="http://schemas.openxmlformats.org/drawingml/2006/main" xmlns:r="http://schemas.openxmlformats.org/officeDocument/2006/relationships" xmlns:p="http://schemas.openxmlformats.org/presentationml/2006/main">
   <p:cSld>
     <p:spTree>
@@ -24188,1203 +26106,6 @@
     <p:extLst>
       <p:ext uri="{BB962C8B-B14F-4D97-AF65-F5344CB8AC3E}">
         <p14:creationId xmlns:p14="http://schemas.microsoft.com/office/powerpoint/2010/main" val="2316391152"/>
-      </p:ext>
-    </p:extLst>
-  </p:cSld>
-  <p:clrMapOvr>
-    <a:masterClrMapping/>
-  </p:clrMapOvr>
-</p:sld>
-</file>
-
-<file path=ppt/slides/slide27.xml><?xml version="1.0" encoding="utf-8"?>
-<p:sld xmlns:a="http://schemas.openxmlformats.org/drawingml/2006/main" xmlns:r="http://schemas.openxmlformats.org/officeDocument/2006/relationships" xmlns:p="http://schemas.openxmlformats.org/presentationml/2006/main">
-  <p:cSld>
-    <p:spTree>
-      <p:nvGrpSpPr>
-        <p:cNvPr id="1" name=""/>
-        <p:cNvGrpSpPr/>
-        <p:nvPr/>
-      </p:nvGrpSpPr>
-      <p:grpSpPr>
-        <a:xfrm>
-          <a:off x="0" y="0"/>
-          <a:ext cx="0" cy="0"/>
-          <a:chOff x="0" y="0"/>
-          <a:chExt cx="0" cy="0"/>
-        </a:xfrm>
-      </p:grpSpPr>
-      <p:sp>
-        <p:nvSpPr>
-          <p:cNvPr id="2" name="矩形: 圆角 1">
-            <a:extLst>
-              <a:ext uri="{FF2B5EF4-FFF2-40B4-BE49-F238E27FC236}">
-                <a16:creationId xmlns:a16="http://schemas.microsoft.com/office/drawing/2014/main" id="{7CE4D4CF-0466-1DC3-08B4-9C28D4A64E27}"/>
-              </a:ext>
-            </a:extLst>
-          </p:cNvPr>
-          <p:cNvSpPr/>
-          <p:nvPr/>
-        </p:nvSpPr>
-        <p:spPr>
-          <a:xfrm>
-            <a:off x="2622449" y="3094613"/>
-            <a:ext cx="1440000" cy="360000"/>
-          </a:xfrm>
-          <a:prstGeom prst="roundRect">
-            <a:avLst/>
-          </a:prstGeom>
-          <a:solidFill>
-            <a:schemeClr val="tx1"/>
-          </a:solidFill>
-          <a:ln w="12700">
-            <a:noFill/>
-          </a:ln>
-        </p:spPr>
-        <p:style>
-          <a:lnRef idx="2">
-            <a:schemeClr val="accent1">
-              <a:shade val="15000"/>
-            </a:schemeClr>
-          </a:lnRef>
-          <a:fillRef idx="1">
-            <a:schemeClr val="accent1"/>
-          </a:fillRef>
-          <a:effectRef idx="0">
-            <a:schemeClr val="accent1"/>
-          </a:effectRef>
-          <a:fontRef idx="minor">
-            <a:schemeClr val="lt1"/>
-          </a:fontRef>
-        </p:style>
-        <p:txBody>
-          <a:bodyPr rtlCol="0" anchor="ctr"/>
-          <a:lstStyle/>
-          <a:p>
-            <a:pPr algn="ctr"/>
-            <a:r>
-              <a:rPr lang="en-US" altLang="zh-CN" sz="1200">
-                <a:latin typeface="Quicksand Light" panose="00000400000000000000" pitchFamily="2" charset="0"/>
-                <a:ea typeface="仿宋" panose="02010609060101010101" pitchFamily="49" charset="-122"/>
-              </a:rPr>
-              <a:t>&lt;scroll-view&gt;</a:t>
-            </a:r>
-            <a:endParaRPr lang="zh-CN" altLang="en-US" sz="1200">
-              <a:latin typeface="Quicksand Light" panose="00000400000000000000" pitchFamily="2" charset="0"/>
-              <a:ea typeface="仿宋" panose="02010609060101010101" pitchFamily="49" charset="-122"/>
-            </a:endParaRPr>
-          </a:p>
-        </p:txBody>
-      </p:sp>
-      <p:sp>
-        <p:nvSpPr>
-          <p:cNvPr id="3" name="矩形: 圆角 2">
-            <a:extLst>
-              <a:ext uri="{FF2B5EF4-FFF2-40B4-BE49-F238E27FC236}">
-                <a16:creationId xmlns:a16="http://schemas.microsoft.com/office/drawing/2014/main" id="{6EE8E41B-FB18-64FF-0539-7D9127F8FC67}"/>
-              </a:ext>
-            </a:extLst>
-          </p:cNvPr>
-          <p:cNvSpPr/>
-          <p:nvPr/>
-        </p:nvSpPr>
-        <p:spPr>
-          <a:xfrm>
-            <a:off x="5806701" y="2901283"/>
-            <a:ext cx="1620000" cy="360000"/>
-          </a:xfrm>
-          <a:prstGeom prst="roundRect">
-            <a:avLst/>
-          </a:prstGeom>
-          <a:noFill/>
-          <a:ln w="12700">
-            <a:solidFill>
-              <a:srgbClr val="EB3B5A"/>
-            </a:solidFill>
-            <a:prstDash val="dash"/>
-          </a:ln>
-        </p:spPr>
-        <p:style>
-          <a:lnRef idx="2">
-            <a:schemeClr val="accent1">
-              <a:shade val="15000"/>
-            </a:schemeClr>
-          </a:lnRef>
-          <a:fillRef idx="1">
-            <a:schemeClr val="accent1"/>
-          </a:fillRef>
-          <a:effectRef idx="0">
-            <a:schemeClr val="accent1"/>
-          </a:effectRef>
-          <a:fontRef idx="minor">
-            <a:schemeClr val="lt1"/>
-          </a:fontRef>
-        </p:style>
-        <p:txBody>
-          <a:bodyPr rtlCol="0" anchor="ctr"/>
-          <a:lstStyle/>
-          <a:p>
-            <a:pPr algn="ctr"/>
-            <a:r>
-              <a:rPr lang="zh-CN" altLang="en-US" sz="1200">
-                <a:solidFill>
-                  <a:sysClr val="windowText" lastClr="000000"/>
-                </a:solidFill>
-                <a:latin typeface="Quicksand Light" panose="00000400000000000000" pitchFamily="2" charset="0"/>
-                <a:ea typeface="仿宋" panose="02010609060101010101" pitchFamily="49" charset="-122"/>
-              </a:rPr>
-              <a:t>行内 </a:t>
-            </a:r>
-            <a:r>
-              <a:rPr lang="en-US" altLang="zh-CN" sz="1200">
-                <a:solidFill>
-                  <a:sysClr val="windowText" lastClr="000000"/>
-                </a:solidFill>
-                <a:latin typeface="Quicksand Light" panose="00000400000000000000" pitchFamily="2" charset="0"/>
-                <a:ea typeface="仿宋" panose="02010609060101010101" pitchFamily="49" charset="-122"/>
-              </a:rPr>
-              <a:t>inline</a:t>
-            </a:r>
-            <a:endParaRPr lang="zh-CN" altLang="en-US" sz="1200">
-              <a:solidFill>
-                <a:sysClr val="windowText" lastClr="000000"/>
-              </a:solidFill>
-              <a:latin typeface="Quicksand Light" panose="00000400000000000000" pitchFamily="2" charset="0"/>
-              <a:ea typeface="仿宋" panose="02010609060101010101" pitchFamily="49" charset="-122"/>
-            </a:endParaRPr>
-          </a:p>
-        </p:txBody>
-      </p:sp>
-      <p:sp>
-        <p:nvSpPr>
-          <p:cNvPr id="8" name="矩形: 圆角 7">
-            <a:extLst>
-              <a:ext uri="{FF2B5EF4-FFF2-40B4-BE49-F238E27FC236}">
-                <a16:creationId xmlns:a16="http://schemas.microsoft.com/office/drawing/2014/main" id="{06699B4A-F636-A7C1-FB1E-69E3110ACB30}"/>
-              </a:ext>
-            </a:extLst>
-          </p:cNvPr>
-          <p:cNvSpPr/>
-          <p:nvPr/>
-        </p:nvSpPr>
-        <p:spPr>
-          <a:xfrm>
-            <a:off x="4394575" y="4241749"/>
-            <a:ext cx="1080000" cy="360000"/>
-          </a:xfrm>
-          <a:prstGeom prst="roundRect">
-            <a:avLst/>
-          </a:prstGeom>
-          <a:solidFill>
-            <a:srgbClr val="3DC1D3"/>
-          </a:solidFill>
-          <a:ln w="12700">
-            <a:noFill/>
-          </a:ln>
-        </p:spPr>
-        <p:style>
-          <a:lnRef idx="2">
-            <a:schemeClr val="accent1">
-              <a:shade val="15000"/>
-            </a:schemeClr>
-          </a:lnRef>
-          <a:fillRef idx="1">
-            <a:schemeClr val="accent1"/>
-          </a:fillRef>
-          <a:effectRef idx="0">
-            <a:schemeClr val="accent1"/>
-          </a:effectRef>
-          <a:fontRef idx="minor">
-            <a:schemeClr val="lt1"/>
-          </a:fontRef>
-        </p:style>
-        <p:txBody>
-          <a:bodyPr rtlCol="0" anchor="ctr"/>
-          <a:lstStyle/>
-          <a:p>
-            <a:pPr algn="ctr"/>
-            <a:r>
-              <a:rPr lang="zh-CN" altLang="en-US" sz="1200">
-                <a:latin typeface="Quicksand Light" panose="00000400000000000000" pitchFamily="2" charset="0"/>
-                <a:ea typeface="仿宋" panose="02010609060101010101" pitchFamily="49" charset="-122"/>
-              </a:rPr>
-              <a:t>垂直滚动</a:t>
-            </a:r>
-          </a:p>
-        </p:txBody>
-      </p:sp>
-      <p:sp>
-        <p:nvSpPr>
-          <p:cNvPr id="9" name="矩形: 圆角 8">
-            <a:extLst>
-              <a:ext uri="{FF2B5EF4-FFF2-40B4-BE49-F238E27FC236}">
-                <a16:creationId xmlns:a16="http://schemas.microsoft.com/office/drawing/2014/main" id="{63EC0026-3C9E-C410-1B1D-25D54ACB2F10}"/>
-              </a:ext>
-            </a:extLst>
-          </p:cNvPr>
-          <p:cNvSpPr/>
-          <p:nvPr/>
-        </p:nvSpPr>
-        <p:spPr>
-          <a:xfrm>
-            <a:off x="4394575" y="3094613"/>
-            <a:ext cx="1080000" cy="360000"/>
-          </a:xfrm>
-          <a:prstGeom prst="roundRect">
-            <a:avLst/>
-          </a:prstGeom>
-          <a:solidFill>
-            <a:srgbClr val="EB3B5A"/>
-          </a:solidFill>
-          <a:ln w="12700">
-            <a:noFill/>
-          </a:ln>
-        </p:spPr>
-        <p:style>
-          <a:lnRef idx="2">
-            <a:schemeClr val="accent1">
-              <a:shade val="15000"/>
-            </a:schemeClr>
-          </a:lnRef>
-          <a:fillRef idx="1">
-            <a:schemeClr val="accent1"/>
-          </a:fillRef>
-          <a:effectRef idx="0">
-            <a:schemeClr val="accent1"/>
-          </a:effectRef>
-          <a:fontRef idx="minor">
-            <a:schemeClr val="lt1"/>
-          </a:fontRef>
-        </p:style>
-        <p:txBody>
-          <a:bodyPr rtlCol="0" anchor="ctr"/>
-          <a:lstStyle/>
-          <a:p>
-            <a:pPr algn="ctr"/>
-            <a:r>
-              <a:rPr lang="zh-CN" altLang="en-US" sz="1200" dirty="0">
-                <a:latin typeface="Quicksand Light" panose="00000400000000000000" pitchFamily="2" charset="0"/>
-                <a:ea typeface="仿宋" panose="02010609060101010101" pitchFamily="49" charset="-122"/>
-              </a:rPr>
-              <a:t>水平滚动</a:t>
-            </a:r>
-          </a:p>
-        </p:txBody>
-      </p:sp>
-      <p:cxnSp>
-        <p:nvCxnSpPr>
-          <p:cNvPr id="10" name="连接符: 曲线 9">
-            <a:extLst>
-              <a:ext uri="{FF2B5EF4-FFF2-40B4-BE49-F238E27FC236}">
-                <a16:creationId xmlns:a16="http://schemas.microsoft.com/office/drawing/2014/main" id="{89376DA1-2871-7B3F-3D7E-34DF204828CA}"/>
-              </a:ext>
-            </a:extLst>
-          </p:cNvPr>
-          <p:cNvCxnSpPr>
-            <a:cxnSpLocks/>
-            <a:stCxn id="9" idx="3"/>
-            <a:endCxn id="17" idx="1"/>
-          </p:cNvCxnSpPr>
-          <p:nvPr/>
-        </p:nvCxnSpPr>
-        <p:spPr>
-          <a:xfrm flipV="1">
-            <a:off x="5474575" y="2104829"/>
-            <a:ext cx="332126" cy="1169784"/>
-          </a:xfrm>
-          <a:prstGeom prst="curvedConnector3">
-            <a:avLst>
-              <a:gd name="adj1" fmla="val 50000"/>
-            </a:avLst>
-          </a:prstGeom>
-          <a:ln>
-            <a:solidFill>
-              <a:srgbClr val="EB3B5A"/>
-            </a:solidFill>
-          </a:ln>
-        </p:spPr>
-        <p:style>
-          <a:lnRef idx="1">
-            <a:schemeClr val="accent1"/>
-          </a:lnRef>
-          <a:fillRef idx="0">
-            <a:schemeClr val="accent1"/>
-          </a:fillRef>
-          <a:effectRef idx="0">
-            <a:schemeClr val="accent1"/>
-          </a:effectRef>
-          <a:fontRef idx="minor">
-            <a:schemeClr val="tx1"/>
-          </a:fontRef>
-        </p:style>
-      </p:cxnSp>
-      <p:cxnSp>
-        <p:nvCxnSpPr>
-          <p:cNvPr id="15" name="直接连接符 14">
-            <a:extLst>
-              <a:ext uri="{FF2B5EF4-FFF2-40B4-BE49-F238E27FC236}">
-                <a16:creationId xmlns:a16="http://schemas.microsoft.com/office/drawing/2014/main" id="{B3AF8529-84E5-3299-2E12-01B446E0607B}"/>
-              </a:ext>
-            </a:extLst>
-          </p:cNvPr>
-          <p:cNvCxnSpPr>
-            <a:cxnSpLocks/>
-            <a:stCxn id="2" idx="3"/>
-            <a:endCxn id="9" idx="1"/>
-          </p:cNvCxnSpPr>
-          <p:nvPr/>
-        </p:nvCxnSpPr>
-        <p:spPr>
-          <a:xfrm>
-            <a:off x="4062449" y="3274613"/>
-            <a:ext cx="332126" cy="0"/>
-          </a:xfrm>
-          <a:prstGeom prst="line">
-            <a:avLst/>
-          </a:prstGeom>
-          <a:ln>
-            <a:solidFill>
-              <a:srgbClr val="EB3B5A"/>
-            </a:solidFill>
-          </a:ln>
-        </p:spPr>
-        <p:style>
-          <a:lnRef idx="1">
-            <a:schemeClr val="accent1"/>
-          </a:lnRef>
-          <a:fillRef idx="0">
-            <a:schemeClr val="accent1"/>
-          </a:fillRef>
-          <a:effectRef idx="0">
-            <a:schemeClr val="accent1"/>
-          </a:effectRef>
-          <a:fontRef idx="minor">
-            <a:schemeClr val="tx1"/>
-          </a:fontRef>
-        </p:style>
-      </p:cxnSp>
-      <p:sp>
-        <p:nvSpPr>
-          <p:cNvPr id="16" name="矩形: 圆角 15">
-            <a:extLst>
-              <a:ext uri="{FF2B5EF4-FFF2-40B4-BE49-F238E27FC236}">
-                <a16:creationId xmlns:a16="http://schemas.microsoft.com/office/drawing/2014/main" id="{FA81A049-32C6-0464-CB2F-FE666FC0CCAF}"/>
-              </a:ext>
-            </a:extLst>
-          </p:cNvPr>
-          <p:cNvSpPr/>
-          <p:nvPr/>
-        </p:nvSpPr>
-        <p:spPr>
-          <a:xfrm>
-            <a:off x="5806701" y="2413056"/>
-            <a:ext cx="1620000" cy="360000"/>
-          </a:xfrm>
-          <a:prstGeom prst="roundRect">
-            <a:avLst/>
-          </a:prstGeom>
-          <a:noFill/>
-          <a:ln w="12700">
-            <a:solidFill>
-              <a:srgbClr val="EB3B5A"/>
-            </a:solidFill>
-          </a:ln>
-        </p:spPr>
-        <p:style>
-          <a:lnRef idx="2">
-            <a:schemeClr val="accent1">
-              <a:shade val="15000"/>
-            </a:schemeClr>
-          </a:lnRef>
-          <a:fillRef idx="1">
-            <a:schemeClr val="accent1"/>
-          </a:fillRef>
-          <a:effectRef idx="0">
-            <a:schemeClr val="accent1"/>
-          </a:effectRef>
-          <a:fontRef idx="minor">
-            <a:schemeClr val="lt1"/>
-          </a:fontRef>
-        </p:style>
-        <p:txBody>
-          <a:bodyPr rtlCol="0" anchor="ctr"/>
-          <a:lstStyle/>
-          <a:p>
-            <a:pPr algn="ctr"/>
-            <a:r>
-              <a:rPr lang="zh-CN" altLang="en-US" sz="1200">
-                <a:solidFill>
-                  <a:sysClr val="windowText" lastClr="000000"/>
-                </a:solidFill>
-                <a:latin typeface="Quicksand Light" panose="00000400000000000000" pitchFamily="2" charset="0"/>
-                <a:ea typeface="仿宋" panose="02010609060101010101" pitchFamily="49" charset="-122"/>
-              </a:rPr>
-              <a:t>容器 </a:t>
-            </a:r>
-            <a:r>
-              <a:rPr lang="en-US" altLang="zh-CN" sz="1200">
-                <a:solidFill>
-                  <a:sysClr val="windowText" lastClr="000000"/>
-                </a:solidFill>
-                <a:latin typeface="Quicksand Light" panose="00000400000000000000" pitchFamily="2" charset="0"/>
-                <a:ea typeface="仿宋" panose="02010609060101010101" pitchFamily="49" charset="-122"/>
-              </a:rPr>
-              <a:t>wrap</a:t>
-            </a:r>
-            <a:endParaRPr lang="zh-CN" altLang="en-US" sz="1200">
-              <a:solidFill>
-                <a:sysClr val="windowText" lastClr="000000"/>
-              </a:solidFill>
-              <a:latin typeface="Quicksand Light" panose="00000400000000000000" pitchFamily="2" charset="0"/>
-              <a:ea typeface="仿宋" panose="02010609060101010101" pitchFamily="49" charset="-122"/>
-            </a:endParaRPr>
-          </a:p>
-        </p:txBody>
-      </p:sp>
-      <p:sp>
-        <p:nvSpPr>
-          <p:cNvPr id="17" name="矩形: 圆角 16">
-            <a:extLst>
-              <a:ext uri="{FF2B5EF4-FFF2-40B4-BE49-F238E27FC236}">
-                <a16:creationId xmlns:a16="http://schemas.microsoft.com/office/drawing/2014/main" id="{DF07C0A6-7F4B-674A-E488-85EB77ABE14F}"/>
-              </a:ext>
-            </a:extLst>
-          </p:cNvPr>
-          <p:cNvSpPr/>
-          <p:nvPr/>
-        </p:nvSpPr>
-        <p:spPr>
-          <a:xfrm>
-            <a:off x="5806701" y="1924829"/>
-            <a:ext cx="1620000" cy="360000"/>
-          </a:xfrm>
-          <a:prstGeom prst="roundRect">
-            <a:avLst/>
-          </a:prstGeom>
-          <a:noFill/>
-          <a:ln w="12700">
-            <a:solidFill>
-              <a:srgbClr val="EB3B5A"/>
-            </a:solidFill>
-          </a:ln>
-        </p:spPr>
-        <p:style>
-          <a:lnRef idx="2">
-            <a:schemeClr val="accent1">
-              <a:shade val="15000"/>
-            </a:schemeClr>
-          </a:lnRef>
-          <a:fillRef idx="1">
-            <a:schemeClr val="accent1"/>
-          </a:fillRef>
-          <a:effectRef idx="0">
-            <a:schemeClr val="accent1"/>
-          </a:effectRef>
-          <a:fontRef idx="minor">
-            <a:schemeClr val="lt1"/>
-          </a:fontRef>
-        </p:style>
-        <p:txBody>
-          <a:bodyPr rtlCol="0" anchor="ctr"/>
-          <a:lstStyle/>
-          <a:p>
-            <a:pPr algn="ctr"/>
-            <a:r>
-              <a:rPr lang="en-US" altLang="zh-CN" sz="1200">
-                <a:solidFill>
-                  <a:sysClr val="windowText" lastClr="000000"/>
-                </a:solidFill>
-                <a:latin typeface="Quicksand Light" panose="00000400000000000000" pitchFamily="2" charset="0"/>
-                <a:ea typeface="仿宋" panose="02010609060101010101" pitchFamily="49" charset="-122"/>
-              </a:rPr>
-              <a:t>enable-flex</a:t>
-            </a:r>
-            <a:endParaRPr lang="zh-CN" altLang="en-US" sz="1200">
-              <a:solidFill>
-                <a:sysClr val="windowText" lastClr="000000"/>
-              </a:solidFill>
-              <a:latin typeface="Quicksand Light" panose="00000400000000000000" pitchFamily="2" charset="0"/>
-              <a:ea typeface="仿宋" panose="02010609060101010101" pitchFamily="49" charset="-122"/>
-            </a:endParaRPr>
-          </a:p>
-        </p:txBody>
-      </p:sp>
-      <p:sp>
-        <p:nvSpPr>
-          <p:cNvPr id="18" name="矩形: 圆角 17">
-            <a:extLst>
-              <a:ext uri="{FF2B5EF4-FFF2-40B4-BE49-F238E27FC236}">
-                <a16:creationId xmlns:a16="http://schemas.microsoft.com/office/drawing/2014/main" id="{79DE23DA-ADA0-B751-DD89-7669F999E79D}"/>
-              </a:ext>
-            </a:extLst>
-          </p:cNvPr>
-          <p:cNvSpPr/>
-          <p:nvPr/>
-        </p:nvSpPr>
-        <p:spPr>
-          <a:xfrm>
-            <a:off x="5806701" y="3389510"/>
-            <a:ext cx="1620000" cy="360000"/>
-          </a:xfrm>
-          <a:prstGeom prst="roundRect">
-            <a:avLst/>
-          </a:prstGeom>
-          <a:noFill/>
-          <a:ln w="12700">
-            <a:solidFill>
-              <a:srgbClr val="EB3B5A"/>
-            </a:solidFill>
-            <a:prstDash val="dash"/>
-          </a:ln>
-        </p:spPr>
-        <p:style>
-          <a:lnRef idx="2">
-            <a:schemeClr val="accent1">
-              <a:shade val="15000"/>
-            </a:schemeClr>
-          </a:lnRef>
-          <a:fillRef idx="1">
-            <a:schemeClr val="accent1"/>
-          </a:fillRef>
-          <a:effectRef idx="0">
-            <a:schemeClr val="accent1"/>
-          </a:effectRef>
-          <a:fontRef idx="minor">
-            <a:schemeClr val="lt1"/>
-          </a:fontRef>
-        </p:style>
-        <p:txBody>
-          <a:bodyPr rtlCol="0" anchor="ctr"/>
-          <a:lstStyle/>
-          <a:p>
-            <a:pPr algn="ctr"/>
-            <a:r>
-              <a:rPr lang="zh-CN" altLang="en-US" sz="1200">
-                <a:solidFill>
-                  <a:sysClr val="windowText" lastClr="000000"/>
-                </a:solidFill>
-                <a:latin typeface="Quicksand Light" panose="00000400000000000000" pitchFamily="2" charset="0"/>
-                <a:ea typeface="仿宋" panose="02010609060101010101" pitchFamily="49" charset="-122"/>
-              </a:rPr>
-              <a:t>行内块 </a:t>
-            </a:r>
-            <a:r>
-              <a:rPr lang="en-US" altLang="zh-CN" sz="1200">
-                <a:solidFill>
-                  <a:sysClr val="windowText" lastClr="000000"/>
-                </a:solidFill>
-                <a:latin typeface="Quicksand Light" panose="00000400000000000000" pitchFamily="2" charset="0"/>
-                <a:ea typeface="仿宋" panose="02010609060101010101" pitchFamily="49" charset="-122"/>
-              </a:rPr>
-              <a:t>inline-block</a:t>
-            </a:r>
-            <a:endParaRPr lang="zh-CN" altLang="en-US" sz="1200">
-              <a:solidFill>
-                <a:sysClr val="windowText" lastClr="000000"/>
-              </a:solidFill>
-              <a:latin typeface="Quicksand Light" panose="00000400000000000000" pitchFamily="2" charset="0"/>
-              <a:ea typeface="仿宋" panose="02010609060101010101" pitchFamily="49" charset="-122"/>
-            </a:endParaRPr>
-          </a:p>
-        </p:txBody>
-      </p:sp>
-      <p:sp>
-        <p:nvSpPr>
-          <p:cNvPr id="19" name="矩形: 圆角 18">
-            <a:extLst>
-              <a:ext uri="{FF2B5EF4-FFF2-40B4-BE49-F238E27FC236}">
-                <a16:creationId xmlns:a16="http://schemas.microsoft.com/office/drawing/2014/main" id="{03E4ED18-20DE-9A2D-F3D6-31F089C7D92C}"/>
-              </a:ext>
-            </a:extLst>
-          </p:cNvPr>
-          <p:cNvSpPr/>
-          <p:nvPr/>
-        </p:nvSpPr>
-        <p:spPr>
-          <a:xfrm>
-            <a:off x="5806701" y="3877737"/>
-            <a:ext cx="1620000" cy="360000"/>
-          </a:xfrm>
-          <a:prstGeom prst="roundRect">
-            <a:avLst/>
-          </a:prstGeom>
-          <a:noFill/>
-          <a:ln w="12700">
-            <a:solidFill>
-              <a:schemeClr val="bg1">
-                <a:lumMod val="50000"/>
-              </a:schemeClr>
-            </a:solidFill>
-            <a:prstDash val="dash"/>
-          </a:ln>
-        </p:spPr>
-        <p:style>
-          <a:lnRef idx="2">
-            <a:schemeClr val="accent1">
-              <a:shade val="15000"/>
-            </a:schemeClr>
-          </a:lnRef>
-          <a:fillRef idx="1">
-            <a:schemeClr val="accent1"/>
-          </a:fillRef>
-          <a:effectRef idx="0">
-            <a:schemeClr val="accent1"/>
-          </a:effectRef>
-          <a:fontRef idx="minor">
-            <a:schemeClr val="lt1"/>
-          </a:fontRef>
-        </p:style>
-        <p:txBody>
-          <a:bodyPr rtlCol="0" anchor="ctr"/>
-          <a:lstStyle/>
-          <a:p>
-            <a:pPr algn="ctr"/>
-            <a:r>
-              <a:rPr lang="zh-CN" altLang="en-US" sz="1200">
-                <a:solidFill>
-                  <a:sysClr val="windowText" lastClr="000000"/>
-                </a:solidFill>
-                <a:latin typeface="Quicksand Light" panose="00000400000000000000" pitchFamily="2" charset="0"/>
-                <a:ea typeface="仿宋" panose="02010609060101010101" pitchFamily="49" charset="-122"/>
-              </a:rPr>
-              <a:t>网格 </a:t>
-            </a:r>
-            <a:r>
-              <a:rPr lang="en-US" altLang="zh-CN" sz="1200">
-                <a:solidFill>
-                  <a:sysClr val="windowText" lastClr="000000"/>
-                </a:solidFill>
-                <a:latin typeface="Quicksand Light" panose="00000400000000000000" pitchFamily="2" charset="0"/>
-                <a:ea typeface="仿宋" panose="02010609060101010101" pitchFamily="49" charset="-122"/>
-              </a:rPr>
-              <a:t>grid</a:t>
-            </a:r>
-            <a:endParaRPr lang="zh-CN" altLang="en-US" sz="1200">
-              <a:solidFill>
-                <a:sysClr val="windowText" lastClr="000000"/>
-              </a:solidFill>
-              <a:latin typeface="Quicksand Light" panose="00000400000000000000" pitchFamily="2" charset="0"/>
-              <a:ea typeface="仿宋" panose="02010609060101010101" pitchFamily="49" charset="-122"/>
-            </a:endParaRPr>
-          </a:p>
-        </p:txBody>
-      </p:sp>
-      <p:cxnSp>
-        <p:nvCxnSpPr>
-          <p:cNvPr id="22" name="连接符: 曲线 21">
-            <a:extLst>
-              <a:ext uri="{FF2B5EF4-FFF2-40B4-BE49-F238E27FC236}">
-                <a16:creationId xmlns:a16="http://schemas.microsoft.com/office/drawing/2014/main" id="{D99A8B47-6D7E-2EA4-8359-4BD4F43E0B70}"/>
-              </a:ext>
-            </a:extLst>
-          </p:cNvPr>
-          <p:cNvCxnSpPr>
-            <a:cxnSpLocks/>
-            <a:stCxn id="9" idx="3"/>
-            <a:endCxn id="7" idx="1"/>
-          </p:cNvCxnSpPr>
-          <p:nvPr/>
-        </p:nvCxnSpPr>
-        <p:spPr>
-          <a:xfrm>
-            <a:off x="5474575" y="3274613"/>
-            <a:ext cx="332126" cy="1271351"/>
-          </a:xfrm>
-          <a:prstGeom prst="curvedConnector3">
-            <a:avLst>
-              <a:gd name="adj1" fmla="val 50000"/>
-            </a:avLst>
-          </a:prstGeom>
-          <a:ln>
-            <a:solidFill>
-              <a:srgbClr val="EB3B5A"/>
-            </a:solidFill>
-          </a:ln>
-        </p:spPr>
-        <p:style>
-          <a:lnRef idx="1">
-            <a:schemeClr val="accent1"/>
-          </a:lnRef>
-          <a:fillRef idx="0">
-            <a:schemeClr val="accent1"/>
-          </a:fillRef>
-          <a:effectRef idx="0">
-            <a:schemeClr val="accent1"/>
-          </a:effectRef>
-          <a:fontRef idx="minor">
-            <a:schemeClr val="tx1"/>
-          </a:fontRef>
-        </p:style>
-      </p:cxnSp>
-      <p:cxnSp>
-        <p:nvCxnSpPr>
-          <p:cNvPr id="26" name="连接符: 曲线 25">
-            <a:extLst>
-              <a:ext uri="{FF2B5EF4-FFF2-40B4-BE49-F238E27FC236}">
-                <a16:creationId xmlns:a16="http://schemas.microsoft.com/office/drawing/2014/main" id="{46C1E541-71B5-21B2-7273-4EAC0DC70F03}"/>
-              </a:ext>
-            </a:extLst>
-          </p:cNvPr>
-          <p:cNvCxnSpPr>
-            <a:cxnSpLocks/>
-            <a:stCxn id="8" idx="1"/>
-            <a:endCxn id="2" idx="3"/>
-          </p:cNvCxnSpPr>
-          <p:nvPr/>
-        </p:nvCxnSpPr>
-        <p:spPr>
-          <a:xfrm rot="10800000">
-            <a:off x="4062449" y="3274613"/>
-            <a:ext cx="332126" cy="1147136"/>
-          </a:xfrm>
-          <a:prstGeom prst="curvedConnector3">
-            <a:avLst>
-              <a:gd name="adj1" fmla="val 50000"/>
-            </a:avLst>
-          </a:prstGeom>
-          <a:ln>
-            <a:solidFill>
-              <a:srgbClr val="3DC1D3"/>
-            </a:solidFill>
-          </a:ln>
-        </p:spPr>
-        <p:style>
-          <a:lnRef idx="1">
-            <a:schemeClr val="accent1"/>
-          </a:lnRef>
-          <a:fillRef idx="0">
-            <a:schemeClr val="accent1"/>
-          </a:fillRef>
-          <a:effectRef idx="0">
-            <a:schemeClr val="accent1"/>
-          </a:effectRef>
-          <a:fontRef idx="minor">
-            <a:schemeClr val="tx1"/>
-          </a:fontRef>
-        </p:style>
-      </p:cxnSp>
-      <p:sp>
-        <p:nvSpPr>
-          <p:cNvPr id="31" name="矩形: 圆角 30">
-            <a:extLst>
-              <a:ext uri="{FF2B5EF4-FFF2-40B4-BE49-F238E27FC236}">
-                <a16:creationId xmlns:a16="http://schemas.microsoft.com/office/drawing/2014/main" id="{E8C9255D-9B6B-1495-9667-75E062A30160}"/>
-              </a:ext>
-            </a:extLst>
-          </p:cNvPr>
-          <p:cNvSpPr/>
-          <p:nvPr/>
-        </p:nvSpPr>
-        <p:spPr>
-          <a:xfrm>
-            <a:off x="4394575" y="5388885"/>
-            <a:ext cx="1080000" cy="360000"/>
-          </a:xfrm>
-          <a:prstGeom prst="roundRect">
-            <a:avLst/>
-          </a:prstGeom>
-          <a:solidFill>
-            <a:schemeClr val="accent6">
-              <a:lumMod val="60000"/>
-              <a:lumOff val="40000"/>
-            </a:schemeClr>
-          </a:solidFill>
-          <a:ln w="12700">
-            <a:noFill/>
-          </a:ln>
-        </p:spPr>
-        <p:style>
-          <a:lnRef idx="2">
-            <a:schemeClr val="accent1">
-              <a:shade val="15000"/>
-            </a:schemeClr>
-          </a:lnRef>
-          <a:fillRef idx="1">
-            <a:schemeClr val="accent1"/>
-          </a:fillRef>
-          <a:effectRef idx="0">
-            <a:schemeClr val="accent1"/>
-          </a:effectRef>
-          <a:fontRef idx="minor">
-            <a:schemeClr val="lt1"/>
-          </a:fontRef>
-        </p:style>
-        <p:txBody>
-          <a:bodyPr rtlCol="0" anchor="ctr"/>
-          <a:lstStyle/>
-          <a:p>
-            <a:pPr algn="ctr"/>
-            <a:r>
-              <a:rPr lang="zh-CN" altLang="en-US" sz="1200">
-                <a:latin typeface="Quicksand Light" panose="00000400000000000000" pitchFamily="2" charset="0"/>
-                <a:ea typeface="仿宋" panose="02010609060101010101" pitchFamily="49" charset="-122"/>
-              </a:rPr>
-              <a:t>导航</a:t>
-            </a:r>
-          </a:p>
-        </p:txBody>
-      </p:sp>
-      <p:cxnSp>
-        <p:nvCxnSpPr>
-          <p:cNvPr id="32" name="连接符: 曲线 31">
-            <a:extLst>
-              <a:ext uri="{FF2B5EF4-FFF2-40B4-BE49-F238E27FC236}">
-                <a16:creationId xmlns:a16="http://schemas.microsoft.com/office/drawing/2014/main" id="{77355C97-960E-5F33-1A9D-C89E64984730}"/>
-              </a:ext>
-            </a:extLst>
-          </p:cNvPr>
-          <p:cNvCxnSpPr>
-            <a:cxnSpLocks/>
-            <a:stCxn id="31" idx="1"/>
-            <a:endCxn id="2" idx="3"/>
-          </p:cNvCxnSpPr>
-          <p:nvPr/>
-        </p:nvCxnSpPr>
-        <p:spPr>
-          <a:xfrm rot="10800000">
-            <a:off x="4062449" y="3274613"/>
-            <a:ext cx="332126" cy="2294272"/>
-          </a:xfrm>
-          <a:prstGeom prst="curvedConnector3">
-            <a:avLst>
-              <a:gd name="adj1" fmla="val 50000"/>
-            </a:avLst>
-          </a:prstGeom>
-          <a:ln>
-            <a:solidFill>
-              <a:srgbClr val="A9D18E"/>
-            </a:solidFill>
-          </a:ln>
-        </p:spPr>
-        <p:style>
-          <a:lnRef idx="1">
-            <a:schemeClr val="accent1"/>
-          </a:lnRef>
-          <a:fillRef idx="0">
-            <a:schemeClr val="accent1"/>
-          </a:fillRef>
-          <a:effectRef idx="0">
-            <a:schemeClr val="accent1"/>
-          </a:effectRef>
-          <a:fontRef idx="minor">
-            <a:schemeClr val="tx1"/>
-          </a:fontRef>
-        </p:style>
-      </p:cxnSp>
-      <p:sp>
-        <p:nvSpPr>
-          <p:cNvPr id="4" name="矩形: 圆角 3">
-            <a:extLst>
-              <a:ext uri="{FF2B5EF4-FFF2-40B4-BE49-F238E27FC236}">
-                <a16:creationId xmlns:a16="http://schemas.microsoft.com/office/drawing/2014/main" id="{F804F753-E482-E059-B0E0-437F4CB1E50C}"/>
-              </a:ext>
-            </a:extLst>
-          </p:cNvPr>
-          <p:cNvSpPr/>
-          <p:nvPr/>
-        </p:nvSpPr>
-        <p:spPr>
-          <a:xfrm>
-            <a:off x="5806701" y="5164768"/>
-            <a:ext cx="1620000" cy="360000"/>
-          </a:xfrm>
-          <a:prstGeom prst="roundRect">
-            <a:avLst/>
-          </a:prstGeom>
-          <a:noFill/>
-          <a:ln w="12700">
-            <a:solidFill>
-              <a:schemeClr val="accent6">
-                <a:lumMod val="60000"/>
-                <a:lumOff val="40000"/>
-              </a:schemeClr>
-            </a:solidFill>
-          </a:ln>
-        </p:spPr>
-        <p:style>
-          <a:lnRef idx="2">
-            <a:schemeClr val="accent1">
-              <a:shade val="15000"/>
-            </a:schemeClr>
-          </a:lnRef>
-          <a:fillRef idx="1">
-            <a:schemeClr val="accent1"/>
-          </a:fillRef>
-          <a:effectRef idx="0">
-            <a:schemeClr val="accent1"/>
-          </a:effectRef>
-          <a:fontRef idx="minor">
-            <a:schemeClr val="lt1"/>
-          </a:fontRef>
-        </p:style>
-        <p:txBody>
-          <a:bodyPr rtlCol="0" anchor="ctr"/>
-          <a:lstStyle/>
-          <a:p>
-            <a:pPr algn="ctr"/>
-            <a:r>
-              <a:rPr lang="zh-CN" altLang="en-US" sz="1200">
-                <a:solidFill>
-                  <a:sysClr val="windowText" lastClr="000000"/>
-                </a:solidFill>
-                <a:latin typeface="Quicksand Light" panose="00000400000000000000" pitchFamily="2" charset="0"/>
-                <a:ea typeface="仿宋" panose="02010609060101010101" pitchFamily="49" charset="-122"/>
-              </a:rPr>
-              <a:t>一个滚动视图</a:t>
-            </a:r>
-          </a:p>
-        </p:txBody>
-      </p:sp>
-      <p:sp>
-        <p:nvSpPr>
-          <p:cNvPr id="5" name="矩形: 圆角 4">
-            <a:extLst>
-              <a:ext uri="{FF2B5EF4-FFF2-40B4-BE49-F238E27FC236}">
-                <a16:creationId xmlns:a16="http://schemas.microsoft.com/office/drawing/2014/main" id="{2F218F90-1527-32EF-A4D6-D219CF5B8F16}"/>
-              </a:ext>
-            </a:extLst>
-          </p:cNvPr>
-          <p:cNvSpPr/>
-          <p:nvPr/>
-        </p:nvSpPr>
-        <p:spPr>
-          <a:xfrm>
-            <a:off x="5806701" y="5613003"/>
-            <a:ext cx="1620000" cy="360000"/>
-          </a:xfrm>
-          <a:prstGeom prst="roundRect">
-            <a:avLst/>
-          </a:prstGeom>
-          <a:noFill/>
-          <a:ln w="12700">
-            <a:solidFill>
-              <a:schemeClr val="accent6">
-                <a:lumMod val="60000"/>
-                <a:lumOff val="40000"/>
-              </a:schemeClr>
-            </a:solidFill>
-            <a:prstDash val="dash"/>
-          </a:ln>
-        </p:spPr>
-        <p:style>
-          <a:lnRef idx="2">
-            <a:schemeClr val="accent1">
-              <a:shade val="15000"/>
-            </a:schemeClr>
-          </a:lnRef>
-          <a:fillRef idx="1">
-            <a:schemeClr val="accent1"/>
-          </a:fillRef>
-          <a:effectRef idx="0">
-            <a:schemeClr val="accent1"/>
-          </a:effectRef>
-          <a:fontRef idx="minor">
-            <a:schemeClr val="lt1"/>
-          </a:fontRef>
-        </p:style>
-        <p:txBody>
-          <a:bodyPr rtlCol="0" anchor="ctr"/>
-          <a:lstStyle/>
-          <a:p>
-            <a:pPr algn="ctr"/>
-            <a:r>
-              <a:rPr lang="zh-CN" altLang="en-US" sz="1200">
-                <a:solidFill>
-                  <a:sysClr val="windowText" lastClr="000000"/>
-                </a:solidFill>
-                <a:latin typeface="Quicksand Light" panose="00000400000000000000" pitchFamily="2" charset="0"/>
-                <a:ea typeface="仿宋" panose="02010609060101010101" pitchFamily="49" charset="-122"/>
-              </a:rPr>
-              <a:t>二个滚动视图</a:t>
-            </a:r>
-          </a:p>
-        </p:txBody>
-      </p:sp>
-      <p:cxnSp>
-        <p:nvCxnSpPr>
-          <p:cNvPr id="6" name="连接符: 曲线 5">
-            <a:extLst>
-              <a:ext uri="{FF2B5EF4-FFF2-40B4-BE49-F238E27FC236}">
-                <a16:creationId xmlns:a16="http://schemas.microsoft.com/office/drawing/2014/main" id="{A07E7128-4DE2-E2DD-961D-C1575C1BBE3A}"/>
-              </a:ext>
-            </a:extLst>
-          </p:cNvPr>
-          <p:cNvCxnSpPr>
-            <a:cxnSpLocks/>
-            <a:stCxn id="31" idx="3"/>
-            <a:endCxn id="4" idx="1"/>
-          </p:cNvCxnSpPr>
-          <p:nvPr/>
-        </p:nvCxnSpPr>
-        <p:spPr>
-          <a:xfrm flipV="1">
-            <a:off x="5474575" y="5344768"/>
-            <a:ext cx="332126" cy="224117"/>
-          </a:xfrm>
-          <a:prstGeom prst="curvedConnector3">
-            <a:avLst>
-              <a:gd name="adj1" fmla="val 50000"/>
-            </a:avLst>
-          </a:prstGeom>
-          <a:ln>
-            <a:solidFill>
-              <a:schemeClr val="accent6">
-                <a:lumMod val="60000"/>
-                <a:lumOff val="40000"/>
-              </a:schemeClr>
-            </a:solidFill>
-          </a:ln>
-        </p:spPr>
-        <p:style>
-          <a:lnRef idx="1">
-            <a:schemeClr val="accent1"/>
-          </a:lnRef>
-          <a:fillRef idx="0">
-            <a:schemeClr val="accent1"/>
-          </a:fillRef>
-          <a:effectRef idx="0">
-            <a:schemeClr val="accent1"/>
-          </a:effectRef>
-          <a:fontRef idx="minor">
-            <a:schemeClr val="tx1"/>
-          </a:fontRef>
-        </p:style>
-      </p:cxnSp>
-      <p:cxnSp>
-        <p:nvCxnSpPr>
-          <p:cNvPr id="12" name="连接符: 曲线 11">
-            <a:extLst>
-              <a:ext uri="{FF2B5EF4-FFF2-40B4-BE49-F238E27FC236}">
-                <a16:creationId xmlns:a16="http://schemas.microsoft.com/office/drawing/2014/main" id="{5FD7AEAF-CD97-C450-BBC1-2641DC43007D}"/>
-              </a:ext>
-            </a:extLst>
-          </p:cNvPr>
-          <p:cNvCxnSpPr>
-            <a:cxnSpLocks/>
-            <a:stCxn id="31" idx="3"/>
-            <a:endCxn id="5" idx="1"/>
-          </p:cNvCxnSpPr>
-          <p:nvPr/>
-        </p:nvCxnSpPr>
-        <p:spPr>
-          <a:xfrm>
-            <a:off x="5474575" y="5568885"/>
-            <a:ext cx="332126" cy="224118"/>
-          </a:xfrm>
-          <a:prstGeom prst="curvedConnector3">
-            <a:avLst>
-              <a:gd name="adj1" fmla="val 50000"/>
-            </a:avLst>
-          </a:prstGeom>
-          <a:ln>
-            <a:solidFill>
-              <a:schemeClr val="accent6">
-                <a:lumMod val="60000"/>
-                <a:lumOff val="40000"/>
-              </a:schemeClr>
-            </a:solidFill>
-          </a:ln>
-        </p:spPr>
-        <p:style>
-          <a:lnRef idx="1">
-            <a:schemeClr val="accent1"/>
-          </a:lnRef>
-          <a:fillRef idx="0">
-            <a:schemeClr val="accent1"/>
-          </a:fillRef>
-          <a:effectRef idx="0">
-            <a:schemeClr val="accent1"/>
-          </a:effectRef>
-          <a:fontRef idx="minor">
-            <a:schemeClr val="tx1"/>
-          </a:fontRef>
-        </p:style>
-      </p:cxnSp>
-      <p:sp>
-        <p:nvSpPr>
-          <p:cNvPr id="7" name="矩形: 圆角 6">
-            <a:extLst>
-              <a:ext uri="{FF2B5EF4-FFF2-40B4-BE49-F238E27FC236}">
-                <a16:creationId xmlns:a16="http://schemas.microsoft.com/office/drawing/2014/main" id="{383E7043-36AC-CBD4-DF24-A727B7D0B0BD}"/>
-              </a:ext>
-            </a:extLst>
-          </p:cNvPr>
-          <p:cNvSpPr/>
-          <p:nvPr/>
-        </p:nvSpPr>
-        <p:spPr>
-          <a:xfrm>
-            <a:off x="5806701" y="4365964"/>
-            <a:ext cx="1620000" cy="360000"/>
-          </a:xfrm>
-          <a:prstGeom prst="roundRect">
-            <a:avLst/>
-          </a:prstGeom>
-          <a:noFill/>
-          <a:ln w="12700">
-            <a:solidFill>
-              <a:schemeClr val="bg1">
-                <a:lumMod val="50000"/>
-              </a:schemeClr>
-            </a:solidFill>
-            <a:prstDash val="dash"/>
-          </a:ln>
-        </p:spPr>
-        <p:style>
-          <a:lnRef idx="2">
-            <a:schemeClr val="accent1">
-              <a:shade val="15000"/>
-            </a:schemeClr>
-          </a:lnRef>
-          <a:fillRef idx="1">
-            <a:schemeClr val="accent1"/>
-          </a:fillRef>
-          <a:effectRef idx="0">
-            <a:schemeClr val="accent1"/>
-          </a:effectRef>
-          <a:fontRef idx="minor">
-            <a:schemeClr val="lt1"/>
-          </a:fontRef>
-        </p:style>
-        <p:txBody>
-          <a:bodyPr rtlCol="0" anchor="ctr"/>
-          <a:lstStyle/>
-          <a:p>
-            <a:pPr algn="ctr"/>
-            <a:r>
-              <a:rPr lang="zh-CN" altLang="en-US" sz="1200">
-                <a:solidFill>
-                  <a:sysClr val="windowText" lastClr="000000"/>
-                </a:solidFill>
-                <a:latin typeface="Quicksand Light" panose="00000400000000000000" pitchFamily="2" charset="0"/>
-                <a:ea typeface="仿宋" panose="02010609060101010101" pitchFamily="49" charset="-122"/>
-              </a:rPr>
-              <a:t>浮动 </a:t>
-            </a:r>
-            <a:r>
-              <a:rPr lang="en-US" altLang="zh-CN" sz="1200">
-                <a:solidFill>
-                  <a:sysClr val="windowText" lastClr="000000"/>
-                </a:solidFill>
-                <a:latin typeface="Quicksand Light" panose="00000400000000000000" pitchFamily="2" charset="0"/>
-                <a:ea typeface="仿宋" panose="02010609060101010101" pitchFamily="49" charset="-122"/>
-              </a:rPr>
-              <a:t>float</a:t>
-            </a:r>
-            <a:endParaRPr lang="zh-CN" altLang="en-US" sz="1200">
-              <a:solidFill>
-                <a:sysClr val="windowText" lastClr="000000"/>
-              </a:solidFill>
-              <a:latin typeface="Quicksand Light" panose="00000400000000000000" pitchFamily="2" charset="0"/>
-              <a:ea typeface="仿宋" panose="02010609060101010101" pitchFamily="49" charset="-122"/>
-            </a:endParaRPr>
-          </a:p>
-        </p:txBody>
-      </p:sp>
-    </p:spTree>
-    <p:extLst>
-      <p:ext uri="{BB962C8B-B14F-4D97-AF65-F5344CB8AC3E}">
-        <p14:creationId xmlns:p14="http://schemas.microsoft.com/office/powerpoint/2010/main" val="2483548129"/>
       </p:ext>
     </p:extLst>
   </p:cSld>
@@ -25411,40 +26132,1177 @@
           <a:chExt cx="0" cy="0"/>
         </a:xfrm>
       </p:grpSpPr>
-      <p:pic>
-        <p:nvPicPr>
-          <p:cNvPr id="3" name="图片 2">
-            <a:extLst>
-              <a:ext uri="{FF2B5EF4-FFF2-40B4-BE49-F238E27FC236}">
-                <a16:creationId xmlns:a16="http://schemas.microsoft.com/office/drawing/2014/main" id="{7ECC09FE-D9D2-2E76-0948-E1F27A08CD34}"/>
-              </a:ext>
-            </a:extLst>
-          </p:cNvPr>
-          <p:cNvPicPr>
-            <a:picLocks noChangeAspect="1"/>
-          </p:cNvPicPr>
-          <p:nvPr/>
-        </p:nvPicPr>
-        <p:blipFill>
-          <a:blip r:embed="rId2"/>
-          <a:stretch>
-            <a:fillRect/>
-          </a:stretch>
-        </p:blipFill>
-        <p:spPr>
-          <a:xfrm>
-            <a:off x="5043340" y="1842866"/>
-            <a:ext cx="2105319" cy="3172268"/>
-          </a:xfrm>
-          <a:prstGeom prst="rect">
-            <a:avLst/>
-          </a:prstGeom>
-        </p:spPr>
-      </p:pic>
+      <p:sp>
+        <p:nvSpPr>
+          <p:cNvPr id="2" name="矩形: 圆角 1">
+            <a:extLst>
+              <a:ext uri="{FF2B5EF4-FFF2-40B4-BE49-F238E27FC236}">
+                <a16:creationId xmlns:a16="http://schemas.microsoft.com/office/drawing/2014/main" id="{7CE4D4CF-0466-1DC3-08B4-9C28D4A64E27}"/>
+              </a:ext>
+            </a:extLst>
+          </p:cNvPr>
+          <p:cNvSpPr/>
+          <p:nvPr/>
+        </p:nvSpPr>
+        <p:spPr>
+          <a:xfrm>
+            <a:off x="2622449" y="3094613"/>
+            <a:ext cx="1440000" cy="360000"/>
+          </a:xfrm>
+          <a:prstGeom prst="roundRect">
+            <a:avLst/>
+          </a:prstGeom>
+          <a:solidFill>
+            <a:schemeClr val="tx1"/>
+          </a:solidFill>
+          <a:ln w="12700">
+            <a:noFill/>
+          </a:ln>
+        </p:spPr>
+        <p:style>
+          <a:lnRef idx="2">
+            <a:schemeClr val="accent1">
+              <a:shade val="15000"/>
+            </a:schemeClr>
+          </a:lnRef>
+          <a:fillRef idx="1">
+            <a:schemeClr val="accent1"/>
+          </a:fillRef>
+          <a:effectRef idx="0">
+            <a:schemeClr val="accent1"/>
+          </a:effectRef>
+          <a:fontRef idx="minor">
+            <a:schemeClr val="lt1"/>
+          </a:fontRef>
+        </p:style>
+        <p:txBody>
+          <a:bodyPr rtlCol="0" anchor="ctr"/>
+          <a:lstStyle/>
+          <a:p>
+            <a:pPr algn="ctr"/>
+            <a:r>
+              <a:rPr lang="en-US" altLang="zh-CN" sz="1200">
+                <a:latin typeface="Quicksand Light" panose="00000400000000000000" pitchFamily="2" charset="0"/>
+                <a:ea typeface="仿宋" panose="02010609060101010101" pitchFamily="49" charset="-122"/>
+              </a:rPr>
+              <a:t>&lt;scroll-view&gt;</a:t>
+            </a:r>
+            <a:endParaRPr lang="zh-CN" altLang="en-US" sz="1200">
+              <a:latin typeface="Quicksand Light" panose="00000400000000000000" pitchFamily="2" charset="0"/>
+              <a:ea typeface="仿宋" panose="02010609060101010101" pitchFamily="49" charset="-122"/>
+            </a:endParaRPr>
+          </a:p>
+        </p:txBody>
+      </p:sp>
+      <p:sp>
+        <p:nvSpPr>
+          <p:cNvPr id="3" name="矩形: 圆角 2">
+            <a:extLst>
+              <a:ext uri="{FF2B5EF4-FFF2-40B4-BE49-F238E27FC236}">
+                <a16:creationId xmlns:a16="http://schemas.microsoft.com/office/drawing/2014/main" id="{6EE8E41B-FB18-64FF-0539-7D9127F8FC67}"/>
+              </a:ext>
+            </a:extLst>
+          </p:cNvPr>
+          <p:cNvSpPr/>
+          <p:nvPr/>
+        </p:nvSpPr>
+        <p:spPr>
+          <a:xfrm>
+            <a:off x="5806701" y="2901283"/>
+            <a:ext cx="1620000" cy="360000"/>
+          </a:xfrm>
+          <a:prstGeom prst="roundRect">
+            <a:avLst/>
+          </a:prstGeom>
+          <a:noFill/>
+          <a:ln w="12700">
+            <a:solidFill>
+              <a:srgbClr val="EB3B5A"/>
+            </a:solidFill>
+            <a:prstDash val="dash"/>
+          </a:ln>
+        </p:spPr>
+        <p:style>
+          <a:lnRef idx="2">
+            <a:schemeClr val="accent1">
+              <a:shade val="15000"/>
+            </a:schemeClr>
+          </a:lnRef>
+          <a:fillRef idx="1">
+            <a:schemeClr val="accent1"/>
+          </a:fillRef>
+          <a:effectRef idx="0">
+            <a:schemeClr val="accent1"/>
+          </a:effectRef>
+          <a:fontRef idx="minor">
+            <a:schemeClr val="lt1"/>
+          </a:fontRef>
+        </p:style>
+        <p:txBody>
+          <a:bodyPr rtlCol="0" anchor="ctr"/>
+          <a:lstStyle/>
+          <a:p>
+            <a:pPr algn="ctr"/>
+            <a:r>
+              <a:rPr lang="zh-CN" altLang="en-US" sz="1200">
+                <a:solidFill>
+                  <a:sysClr val="windowText" lastClr="000000"/>
+                </a:solidFill>
+                <a:latin typeface="Quicksand Light" panose="00000400000000000000" pitchFamily="2" charset="0"/>
+                <a:ea typeface="仿宋" panose="02010609060101010101" pitchFamily="49" charset="-122"/>
+              </a:rPr>
+              <a:t>行内 </a:t>
+            </a:r>
+            <a:r>
+              <a:rPr lang="en-US" altLang="zh-CN" sz="1200">
+                <a:solidFill>
+                  <a:sysClr val="windowText" lastClr="000000"/>
+                </a:solidFill>
+                <a:latin typeface="Quicksand Light" panose="00000400000000000000" pitchFamily="2" charset="0"/>
+                <a:ea typeface="仿宋" panose="02010609060101010101" pitchFamily="49" charset="-122"/>
+              </a:rPr>
+              <a:t>inline</a:t>
+            </a:r>
+            <a:endParaRPr lang="zh-CN" altLang="en-US" sz="1200">
+              <a:solidFill>
+                <a:sysClr val="windowText" lastClr="000000"/>
+              </a:solidFill>
+              <a:latin typeface="Quicksand Light" panose="00000400000000000000" pitchFamily="2" charset="0"/>
+              <a:ea typeface="仿宋" panose="02010609060101010101" pitchFamily="49" charset="-122"/>
+            </a:endParaRPr>
+          </a:p>
+        </p:txBody>
+      </p:sp>
+      <p:sp>
+        <p:nvSpPr>
+          <p:cNvPr id="8" name="矩形: 圆角 7">
+            <a:extLst>
+              <a:ext uri="{FF2B5EF4-FFF2-40B4-BE49-F238E27FC236}">
+                <a16:creationId xmlns:a16="http://schemas.microsoft.com/office/drawing/2014/main" id="{06699B4A-F636-A7C1-FB1E-69E3110ACB30}"/>
+              </a:ext>
+            </a:extLst>
+          </p:cNvPr>
+          <p:cNvSpPr/>
+          <p:nvPr/>
+        </p:nvSpPr>
+        <p:spPr>
+          <a:xfrm>
+            <a:off x="4394575" y="4241749"/>
+            <a:ext cx="1080000" cy="360000"/>
+          </a:xfrm>
+          <a:prstGeom prst="roundRect">
+            <a:avLst/>
+          </a:prstGeom>
+          <a:solidFill>
+            <a:srgbClr val="3DC1D3"/>
+          </a:solidFill>
+          <a:ln w="12700">
+            <a:noFill/>
+          </a:ln>
+        </p:spPr>
+        <p:style>
+          <a:lnRef idx="2">
+            <a:schemeClr val="accent1">
+              <a:shade val="15000"/>
+            </a:schemeClr>
+          </a:lnRef>
+          <a:fillRef idx="1">
+            <a:schemeClr val="accent1"/>
+          </a:fillRef>
+          <a:effectRef idx="0">
+            <a:schemeClr val="accent1"/>
+          </a:effectRef>
+          <a:fontRef idx="minor">
+            <a:schemeClr val="lt1"/>
+          </a:fontRef>
+        </p:style>
+        <p:txBody>
+          <a:bodyPr rtlCol="0" anchor="ctr"/>
+          <a:lstStyle/>
+          <a:p>
+            <a:pPr algn="ctr"/>
+            <a:r>
+              <a:rPr lang="zh-CN" altLang="en-US" sz="1200">
+                <a:latin typeface="Quicksand Light" panose="00000400000000000000" pitchFamily="2" charset="0"/>
+                <a:ea typeface="仿宋" panose="02010609060101010101" pitchFamily="49" charset="-122"/>
+              </a:rPr>
+              <a:t>垂直滚动</a:t>
+            </a:r>
+          </a:p>
+        </p:txBody>
+      </p:sp>
+      <p:sp>
+        <p:nvSpPr>
+          <p:cNvPr id="9" name="矩形: 圆角 8">
+            <a:extLst>
+              <a:ext uri="{FF2B5EF4-FFF2-40B4-BE49-F238E27FC236}">
+                <a16:creationId xmlns:a16="http://schemas.microsoft.com/office/drawing/2014/main" id="{63EC0026-3C9E-C410-1B1D-25D54ACB2F10}"/>
+              </a:ext>
+            </a:extLst>
+          </p:cNvPr>
+          <p:cNvSpPr/>
+          <p:nvPr/>
+        </p:nvSpPr>
+        <p:spPr>
+          <a:xfrm>
+            <a:off x="4394575" y="3094613"/>
+            <a:ext cx="1080000" cy="360000"/>
+          </a:xfrm>
+          <a:prstGeom prst="roundRect">
+            <a:avLst/>
+          </a:prstGeom>
+          <a:solidFill>
+            <a:srgbClr val="EB3B5A"/>
+          </a:solidFill>
+          <a:ln w="12700">
+            <a:noFill/>
+          </a:ln>
+        </p:spPr>
+        <p:style>
+          <a:lnRef idx="2">
+            <a:schemeClr val="accent1">
+              <a:shade val="15000"/>
+            </a:schemeClr>
+          </a:lnRef>
+          <a:fillRef idx="1">
+            <a:schemeClr val="accent1"/>
+          </a:fillRef>
+          <a:effectRef idx="0">
+            <a:schemeClr val="accent1"/>
+          </a:effectRef>
+          <a:fontRef idx="minor">
+            <a:schemeClr val="lt1"/>
+          </a:fontRef>
+        </p:style>
+        <p:txBody>
+          <a:bodyPr rtlCol="0" anchor="ctr"/>
+          <a:lstStyle/>
+          <a:p>
+            <a:pPr algn="ctr"/>
+            <a:r>
+              <a:rPr lang="zh-CN" altLang="en-US" sz="1200" dirty="0">
+                <a:latin typeface="Quicksand Light" panose="00000400000000000000" pitchFamily="2" charset="0"/>
+                <a:ea typeface="仿宋" panose="02010609060101010101" pitchFamily="49" charset="-122"/>
+              </a:rPr>
+              <a:t>水平滚动</a:t>
+            </a:r>
+          </a:p>
+        </p:txBody>
+      </p:sp>
+      <p:cxnSp>
+        <p:nvCxnSpPr>
+          <p:cNvPr id="10" name="连接符: 曲线 9">
+            <a:extLst>
+              <a:ext uri="{FF2B5EF4-FFF2-40B4-BE49-F238E27FC236}">
+                <a16:creationId xmlns:a16="http://schemas.microsoft.com/office/drawing/2014/main" id="{89376DA1-2871-7B3F-3D7E-34DF204828CA}"/>
+              </a:ext>
+            </a:extLst>
+          </p:cNvPr>
+          <p:cNvCxnSpPr>
+            <a:cxnSpLocks/>
+            <a:stCxn id="9" idx="3"/>
+            <a:endCxn id="17" idx="1"/>
+          </p:cNvCxnSpPr>
+          <p:nvPr/>
+        </p:nvCxnSpPr>
+        <p:spPr>
+          <a:xfrm flipV="1">
+            <a:off x="5474575" y="2104829"/>
+            <a:ext cx="332126" cy="1169784"/>
+          </a:xfrm>
+          <a:prstGeom prst="curvedConnector3">
+            <a:avLst>
+              <a:gd name="adj1" fmla="val 50000"/>
+            </a:avLst>
+          </a:prstGeom>
+          <a:ln>
+            <a:solidFill>
+              <a:srgbClr val="EB3B5A"/>
+            </a:solidFill>
+          </a:ln>
+        </p:spPr>
+        <p:style>
+          <a:lnRef idx="1">
+            <a:schemeClr val="accent1"/>
+          </a:lnRef>
+          <a:fillRef idx="0">
+            <a:schemeClr val="accent1"/>
+          </a:fillRef>
+          <a:effectRef idx="0">
+            <a:schemeClr val="accent1"/>
+          </a:effectRef>
+          <a:fontRef idx="minor">
+            <a:schemeClr val="tx1"/>
+          </a:fontRef>
+        </p:style>
+      </p:cxnSp>
+      <p:cxnSp>
+        <p:nvCxnSpPr>
+          <p:cNvPr id="15" name="直接连接符 14">
+            <a:extLst>
+              <a:ext uri="{FF2B5EF4-FFF2-40B4-BE49-F238E27FC236}">
+                <a16:creationId xmlns:a16="http://schemas.microsoft.com/office/drawing/2014/main" id="{B3AF8529-84E5-3299-2E12-01B446E0607B}"/>
+              </a:ext>
+            </a:extLst>
+          </p:cNvPr>
+          <p:cNvCxnSpPr>
+            <a:cxnSpLocks/>
+            <a:stCxn id="2" idx="3"/>
+            <a:endCxn id="9" idx="1"/>
+          </p:cNvCxnSpPr>
+          <p:nvPr/>
+        </p:nvCxnSpPr>
+        <p:spPr>
+          <a:xfrm>
+            <a:off x="4062449" y="3274613"/>
+            <a:ext cx="332126" cy="0"/>
+          </a:xfrm>
+          <a:prstGeom prst="line">
+            <a:avLst/>
+          </a:prstGeom>
+          <a:ln>
+            <a:solidFill>
+              <a:srgbClr val="EB3B5A"/>
+            </a:solidFill>
+          </a:ln>
+        </p:spPr>
+        <p:style>
+          <a:lnRef idx="1">
+            <a:schemeClr val="accent1"/>
+          </a:lnRef>
+          <a:fillRef idx="0">
+            <a:schemeClr val="accent1"/>
+          </a:fillRef>
+          <a:effectRef idx="0">
+            <a:schemeClr val="accent1"/>
+          </a:effectRef>
+          <a:fontRef idx="minor">
+            <a:schemeClr val="tx1"/>
+          </a:fontRef>
+        </p:style>
+      </p:cxnSp>
+      <p:sp>
+        <p:nvSpPr>
+          <p:cNvPr id="16" name="矩形: 圆角 15">
+            <a:extLst>
+              <a:ext uri="{FF2B5EF4-FFF2-40B4-BE49-F238E27FC236}">
+                <a16:creationId xmlns:a16="http://schemas.microsoft.com/office/drawing/2014/main" id="{FA81A049-32C6-0464-CB2F-FE666FC0CCAF}"/>
+              </a:ext>
+            </a:extLst>
+          </p:cNvPr>
+          <p:cNvSpPr/>
+          <p:nvPr/>
+        </p:nvSpPr>
+        <p:spPr>
+          <a:xfrm>
+            <a:off x="5806701" y="2413056"/>
+            <a:ext cx="1620000" cy="360000"/>
+          </a:xfrm>
+          <a:prstGeom prst="roundRect">
+            <a:avLst/>
+          </a:prstGeom>
+          <a:noFill/>
+          <a:ln w="12700">
+            <a:solidFill>
+              <a:srgbClr val="EB3B5A"/>
+            </a:solidFill>
+          </a:ln>
+        </p:spPr>
+        <p:style>
+          <a:lnRef idx="2">
+            <a:schemeClr val="accent1">
+              <a:shade val="15000"/>
+            </a:schemeClr>
+          </a:lnRef>
+          <a:fillRef idx="1">
+            <a:schemeClr val="accent1"/>
+          </a:fillRef>
+          <a:effectRef idx="0">
+            <a:schemeClr val="accent1"/>
+          </a:effectRef>
+          <a:fontRef idx="minor">
+            <a:schemeClr val="lt1"/>
+          </a:fontRef>
+        </p:style>
+        <p:txBody>
+          <a:bodyPr rtlCol="0" anchor="ctr"/>
+          <a:lstStyle/>
+          <a:p>
+            <a:pPr algn="ctr"/>
+            <a:r>
+              <a:rPr lang="zh-CN" altLang="en-US" sz="1200">
+                <a:solidFill>
+                  <a:sysClr val="windowText" lastClr="000000"/>
+                </a:solidFill>
+                <a:latin typeface="Quicksand Light" panose="00000400000000000000" pitchFamily="2" charset="0"/>
+                <a:ea typeface="仿宋" panose="02010609060101010101" pitchFamily="49" charset="-122"/>
+              </a:rPr>
+              <a:t>容器 </a:t>
+            </a:r>
+            <a:r>
+              <a:rPr lang="en-US" altLang="zh-CN" sz="1200">
+                <a:solidFill>
+                  <a:sysClr val="windowText" lastClr="000000"/>
+                </a:solidFill>
+                <a:latin typeface="Quicksand Light" panose="00000400000000000000" pitchFamily="2" charset="0"/>
+                <a:ea typeface="仿宋" panose="02010609060101010101" pitchFamily="49" charset="-122"/>
+              </a:rPr>
+              <a:t>wrap</a:t>
+            </a:r>
+            <a:endParaRPr lang="zh-CN" altLang="en-US" sz="1200">
+              <a:solidFill>
+                <a:sysClr val="windowText" lastClr="000000"/>
+              </a:solidFill>
+              <a:latin typeface="Quicksand Light" panose="00000400000000000000" pitchFamily="2" charset="0"/>
+              <a:ea typeface="仿宋" panose="02010609060101010101" pitchFamily="49" charset="-122"/>
+            </a:endParaRPr>
+          </a:p>
+        </p:txBody>
+      </p:sp>
+      <p:sp>
+        <p:nvSpPr>
+          <p:cNvPr id="17" name="矩形: 圆角 16">
+            <a:extLst>
+              <a:ext uri="{FF2B5EF4-FFF2-40B4-BE49-F238E27FC236}">
+                <a16:creationId xmlns:a16="http://schemas.microsoft.com/office/drawing/2014/main" id="{DF07C0A6-7F4B-674A-E488-85EB77ABE14F}"/>
+              </a:ext>
+            </a:extLst>
+          </p:cNvPr>
+          <p:cNvSpPr/>
+          <p:nvPr/>
+        </p:nvSpPr>
+        <p:spPr>
+          <a:xfrm>
+            <a:off x="5806701" y="1924829"/>
+            <a:ext cx="1620000" cy="360000"/>
+          </a:xfrm>
+          <a:prstGeom prst="roundRect">
+            <a:avLst/>
+          </a:prstGeom>
+          <a:noFill/>
+          <a:ln w="12700">
+            <a:solidFill>
+              <a:srgbClr val="EB3B5A"/>
+            </a:solidFill>
+          </a:ln>
+        </p:spPr>
+        <p:style>
+          <a:lnRef idx="2">
+            <a:schemeClr val="accent1">
+              <a:shade val="15000"/>
+            </a:schemeClr>
+          </a:lnRef>
+          <a:fillRef idx="1">
+            <a:schemeClr val="accent1"/>
+          </a:fillRef>
+          <a:effectRef idx="0">
+            <a:schemeClr val="accent1"/>
+          </a:effectRef>
+          <a:fontRef idx="minor">
+            <a:schemeClr val="lt1"/>
+          </a:fontRef>
+        </p:style>
+        <p:txBody>
+          <a:bodyPr rtlCol="0" anchor="ctr"/>
+          <a:lstStyle/>
+          <a:p>
+            <a:pPr algn="ctr"/>
+            <a:r>
+              <a:rPr lang="en-US" altLang="zh-CN" sz="1200">
+                <a:solidFill>
+                  <a:sysClr val="windowText" lastClr="000000"/>
+                </a:solidFill>
+                <a:latin typeface="Quicksand Light" panose="00000400000000000000" pitchFamily="2" charset="0"/>
+                <a:ea typeface="仿宋" panose="02010609060101010101" pitchFamily="49" charset="-122"/>
+              </a:rPr>
+              <a:t>enable-flex</a:t>
+            </a:r>
+            <a:endParaRPr lang="zh-CN" altLang="en-US" sz="1200">
+              <a:solidFill>
+                <a:sysClr val="windowText" lastClr="000000"/>
+              </a:solidFill>
+              <a:latin typeface="Quicksand Light" panose="00000400000000000000" pitchFamily="2" charset="0"/>
+              <a:ea typeface="仿宋" panose="02010609060101010101" pitchFamily="49" charset="-122"/>
+            </a:endParaRPr>
+          </a:p>
+        </p:txBody>
+      </p:sp>
+      <p:sp>
+        <p:nvSpPr>
+          <p:cNvPr id="18" name="矩形: 圆角 17">
+            <a:extLst>
+              <a:ext uri="{FF2B5EF4-FFF2-40B4-BE49-F238E27FC236}">
+                <a16:creationId xmlns:a16="http://schemas.microsoft.com/office/drawing/2014/main" id="{79DE23DA-ADA0-B751-DD89-7669F999E79D}"/>
+              </a:ext>
+            </a:extLst>
+          </p:cNvPr>
+          <p:cNvSpPr/>
+          <p:nvPr/>
+        </p:nvSpPr>
+        <p:spPr>
+          <a:xfrm>
+            <a:off x="5806701" y="3389510"/>
+            <a:ext cx="1620000" cy="360000"/>
+          </a:xfrm>
+          <a:prstGeom prst="roundRect">
+            <a:avLst/>
+          </a:prstGeom>
+          <a:noFill/>
+          <a:ln w="12700">
+            <a:solidFill>
+              <a:srgbClr val="EB3B5A"/>
+            </a:solidFill>
+            <a:prstDash val="dash"/>
+          </a:ln>
+        </p:spPr>
+        <p:style>
+          <a:lnRef idx="2">
+            <a:schemeClr val="accent1">
+              <a:shade val="15000"/>
+            </a:schemeClr>
+          </a:lnRef>
+          <a:fillRef idx="1">
+            <a:schemeClr val="accent1"/>
+          </a:fillRef>
+          <a:effectRef idx="0">
+            <a:schemeClr val="accent1"/>
+          </a:effectRef>
+          <a:fontRef idx="minor">
+            <a:schemeClr val="lt1"/>
+          </a:fontRef>
+        </p:style>
+        <p:txBody>
+          <a:bodyPr rtlCol="0" anchor="ctr"/>
+          <a:lstStyle/>
+          <a:p>
+            <a:pPr algn="ctr"/>
+            <a:r>
+              <a:rPr lang="zh-CN" altLang="en-US" sz="1200">
+                <a:solidFill>
+                  <a:sysClr val="windowText" lastClr="000000"/>
+                </a:solidFill>
+                <a:latin typeface="Quicksand Light" panose="00000400000000000000" pitchFamily="2" charset="0"/>
+                <a:ea typeface="仿宋" panose="02010609060101010101" pitchFamily="49" charset="-122"/>
+              </a:rPr>
+              <a:t>行内块 </a:t>
+            </a:r>
+            <a:r>
+              <a:rPr lang="en-US" altLang="zh-CN" sz="1200">
+                <a:solidFill>
+                  <a:sysClr val="windowText" lastClr="000000"/>
+                </a:solidFill>
+                <a:latin typeface="Quicksand Light" panose="00000400000000000000" pitchFamily="2" charset="0"/>
+                <a:ea typeface="仿宋" panose="02010609060101010101" pitchFamily="49" charset="-122"/>
+              </a:rPr>
+              <a:t>inline-block</a:t>
+            </a:r>
+            <a:endParaRPr lang="zh-CN" altLang="en-US" sz="1200">
+              <a:solidFill>
+                <a:sysClr val="windowText" lastClr="000000"/>
+              </a:solidFill>
+              <a:latin typeface="Quicksand Light" panose="00000400000000000000" pitchFamily="2" charset="0"/>
+              <a:ea typeface="仿宋" panose="02010609060101010101" pitchFamily="49" charset="-122"/>
+            </a:endParaRPr>
+          </a:p>
+        </p:txBody>
+      </p:sp>
+      <p:sp>
+        <p:nvSpPr>
+          <p:cNvPr id="19" name="矩形: 圆角 18">
+            <a:extLst>
+              <a:ext uri="{FF2B5EF4-FFF2-40B4-BE49-F238E27FC236}">
+                <a16:creationId xmlns:a16="http://schemas.microsoft.com/office/drawing/2014/main" id="{03E4ED18-20DE-9A2D-F3D6-31F089C7D92C}"/>
+              </a:ext>
+            </a:extLst>
+          </p:cNvPr>
+          <p:cNvSpPr/>
+          <p:nvPr/>
+        </p:nvSpPr>
+        <p:spPr>
+          <a:xfrm>
+            <a:off x="5806701" y="3877737"/>
+            <a:ext cx="1620000" cy="360000"/>
+          </a:xfrm>
+          <a:prstGeom prst="roundRect">
+            <a:avLst/>
+          </a:prstGeom>
+          <a:noFill/>
+          <a:ln w="12700">
+            <a:solidFill>
+              <a:schemeClr val="bg1">
+                <a:lumMod val="50000"/>
+              </a:schemeClr>
+            </a:solidFill>
+            <a:prstDash val="dash"/>
+          </a:ln>
+        </p:spPr>
+        <p:style>
+          <a:lnRef idx="2">
+            <a:schemeClr val="accent1">
+              <a:shade val="15000"/>
+            </a:schemeClr>
+          </a:lnRef>
+          <a:fillRef idx="1">
+            <a:schemeClr val="accent1"/>
+          </a:fillRef>
+          <a:effectRef idx="0">
+            <a:schemeClr val="accent1"/>
+          </a:effectRef>
+          <a:fontRef idx="minor">
+            <a:schemeClr val="lt1"/>
+          </a:fontRef>
+        </p:style>
+        <p:txBody>
+          <a:bodyPr rtlCol="0" anchor="ctr"/>
+          <a:lstStyle/>
+          <a:p>
+            <a:pPr algn="ctr"/>
+            <a:r>
+              <a:rPr lang="zh-CN" altLang="en-US" sz="1200">
+                <a:solidFill>
+                  <a:sysClr val="windowText" lastClr="000000"/>
+                </a:solidFill>
+                <a:latin typeface="Quicksand Light" panose="00000400000000000000" pitchFamily="2" charset="0"/>
+                <a:ea typeface="仿宋" panose="02010609060101010101" pitchFamily="49" charset="-122"/>
+              </a:rPr>
+              <a:t>网格 </a:t>
+            </a:r>
+            <a:r>
+              <a:rPr lang="en-US" altLang="zh-CN" sz="1200">
+                <a:solidFill>
+                  <a:sysClr val="windowText" lastClr="000000"/>
+                </a:solidFill>
+                <a:latin typeface="Quicksand Light" panose="00000400000000000000" pitchFamily="2" charset="0"/>
+                <a:ea typeface="仿宋" panose="02010609060101010101" pitchFamily="49" charset="-122"/>
+              </a:rPr>
+              <a:t>grid</a:t>
+            </a:r>
+            <a:endParaRPr lang="zh-CN" altLang="en-US" sz="1200">
+              <a:solidFill>
+                <a:sysClr val="windowText" lastClr="000000"/>
+              </a:solidFill>
+              <a:latin typeface="Quicksand Light" panose="00000400000000000000" pitchFamily="2" charset="0"/>
+              <a:ea typeface="仿宋" panose="02010609060101010101" pitchFamily="49" charset="-122"/>
+            </a:endParaRPr>
+          </a:p>
+        </p:txBody>
+      </p:sp>
+      <p:cxnSp>
+        <p:nvCxnSpPr>
+          <p:cNvPr id="22" name="连接符: 曲线 21">
+            <a:extLst>
+              <a:ext uri="{FF2B5EF4-FFF2-40B4-BE49-F238E27FC236}">
+                <a16:creationId xmlns:a16="http://schemas.microsoft.com/office/drawing/2014/main" id="{D99A8B47-6D7E-2EA4-8359-4BD4F43E0B70}"/>
+              </a:ext>
+            </a:extLst>
+          </p:cNvPr>
+          <p:cNvCxnSpPr>
+            <a:cxnSpLocks/>
+            <a:stCxn id="9" idx="3"/>
+            <a:endCxn id="7" idx="1"/>
+          </p:cNvCxnSpPr>
+          <p:nvPr/>
+        </p:nvCxnSpPr>
+        <p:spPr>
+          <a:xfrm>
+            <a:off x="5474575" y="3274613"/>
+            <a:ext cx="332126" cy="1271351"/>
+          </a:xfrm>
+          <a:prstGeom prst="curvedConnector3">
+            <a:avLst>
+              <a:gd name="adj1" fmla="val 50000"/>
+            </a:avLst>
+          </a:prstGeom>
+          <a:ln>
+            <a:solidFill>
+              <a:srgbClr val="EB3B5A"/>
+            </a:solidFill>
+          </a:ln>
+        </p:spPr>
+        <p:style>
+          <a:lnRef idx="1">
+            <a:schemeClr val="accent1"/>
+          </a:lnRef>
+          <a:fillRef idx="0">
+            <a:schemeClr val="accent1"/>
+          </a:fillRef>
+          <a:effectRef idx="0">
+            <a:schemeClr val="accent1"/>
+          </a:effectRef>
+          <a:fontRef idx="minor">
+            <a:schemeClr val="tx1"/>
+          </a:fontRef>
+        </p:style>
+      </p:cxnSp>
+      <p:cxnSp>
+        <p:nvCxnSpPr>
+          <p:cNvPr id="26" name="连接符: 曲线 25">
+            <a:extLst>
+              <a:ext uri="{FF2B5EF4-FFF2-40B4-BE49-F238E27FC236}">
+                <a16:creationId xmlns:a16="http://schemas.microsoft.com/office/drawing/2014/main" id="{46C1E541-71B5-21B2-7273-4EAC0DC70F03}"/>
+              </a:ext>
+            </a:extLst>
+          </p:cNvPr>
+          <p:cNvCxnSpPr>
+            <a:cxnSpLocks/>
+            <a:stCxn id="8" idx="1"/>
+            <a:endCxn id="2" idx="3"/>
+          </p:cNvCxnSpPr>
+          <p:nvPr/>
+        </p:nvCxnSpPr>
+        <p:spPr>
+          <a:xfrm rot="10800000">
+            <a:off x="4062449" y="3274613"/>
+            <a:ext cx="332126" cy="1147136"/>
+          </a:xfrm>
+          <a:prstGeom prst="curvedConnector3">
+            <a:avLst>
+              <a:gd name="adj1" fmla="val 50000"/>
+            </a:avLst>
+          </a:prstGeom>
+          <a:ln>
+            <a:solidFill>
+              <a:srgbClr val="3DC1D3"/>
+            </a:solidFill>
+          </a:ln>
+        </p:spPr>
+        <p:style>
+          <a:lnRef idx="1">
+            <a:schemeClr val="accent1"/>
+          </a:lnRef>
+          <a:fillRef idx="0">
+            <a:schemeClr val="accent1"/>
+          </a:fillRef>
+          <a:effectRef idx="0">
+            <a:schemeClr val="accent1"/>
+          </a:effectRef>
+          <a:fontRef idx="minor">
+            <a:schemeClr val="tx1"/>
+          </a:fontRef>
+        </p:style>
+      </p:cxnSp>
+      <p:sp>
+        <p:nvSpPr>
+          <p:cNvPr id="31" name="矩形: 圆角 30">
+            <a:extLst>
+              <a:ext uri="{FF2B5EF4-FFF2-40B4-BE49-F238E27FC236}">
+                <a16:creationId xmlns:a16="http://schemas.microsoft.com/office/drawing/2014/main" id="{E8C9255D-9B6B-1495-9667-75E062A30160}"/>
+              </a:ext>
+            </a:extLst>
+          </p:cNvPr>
+          <p:cNvSpPr/>
+          <p:nvPr/>
+        </p:nvSpPr>
+        <p:spPr>
+          <a:xfrm>
+            <a:off x="4394575" y="5388885"/>
+            <a:ext cx="1080000" cy="360000"/>
+          </a:xfrm>
+          <a:prstGeom prst="roundRect">
+            <a:avLst/>
+          </a:prstGeom>
+          <a:solidFill>
+            <a:schemeClr val="accent6">
+              <a:lumMod val="60000"/>
+              <a:lumOff val="40000"/>
+            </a:schemeClr>
+          </a:solidFill>
+          <a:ln w="12700">
+            <a:noFill/>
+          </a:ln>
+        </p:spPr>
+        <p:style>
+          <a:lnRef idx="2">
+            <a:schemeClr val="accent1">
+              <a:shade val="15000"/>
+            </a:schemeClr>
+          </a:lnRef>
+          <a:fillRef idx="1">
+            <a:schemeClr val="accent1"/>
+          </a:fillRef>
+          <a:effectRef idx="0">
+            <a:schemeClr val="accent1"/>
+          </a:effectRef>
+          <a:fontRef idx="minor">
+            <a:schemeClr val="lt1"/>
+          </a:fontRef>
+        </p:style>
+        <p:txBody>
+          <a:bodyPr rtlCol="0" anchor="ctr"/>
+          <a:lstStyle/>
+          <a:p>
+            <a:pPr algn="ctr"/>
+            <a:r>
+              <a:rPr lang="zh-CN" altLang="en-US" sz="1200">
+                <a:latin typeface="Quicksand Light" panose="00000400000000000000" pitchFamily="2" charset="0"/>
+                <a:ea typeface="仿宋" panose="02010609060101010101" pitchFamily="49" charset="-122"/>
+              </a:rPr>
+              <a:t>导航</a:t>
+            </a:r>
+          </a:p>
+        </p:txBody>
+      </p:sp>
+      <p:cxnSp>
+        <p:nvCxnSpPr>
+          <p:cNvPr id="32" name="连接符: 曲线 31">
+            <a:extLst>
+              <a:ext uri="{FF2B5EF4-FFF2-40B4-BE49-F238E27FC236}">
+                <a16:creationId xmlns:a16="http://schemas.microsoft.com/office/drawing/2014/main" id="{77355C97-960E-5F33-1A9D-C89E64984730}"/>
+              </a:ext>
+            </a:extLst>
+          </p:cNvPr>
+          <p:cNvCxnSpPr>
+            <a:cxnSpLocks/>
+            <a:stCxn id="31" idx="1"/>
+            <a:endCxn id="2" idx="3"/>
+          </p:cNvCxnSpPr>
+          <p:nvPr/>
+        </p:nvCxnSpPr>
+        <p:spPr>
+          <a:xfrm rot="10800000">
+            <a:off x="4062449" y="3274613"/>
+            <a:ext cx="332126" cy="2294272"/>
+          </a:xfrm>
+          <a:prstGeom prst="curvedConnector3">
+            <a:avLst>
+              <a:gd name="adj1" fmla="val 50000"/>
+            </a:avLst>
+          </a:prstGeom>
+          <a:ln>
+            <a:solidFill>
+              <a:srgbClr val="A9D18E"/>
+            </a:solidFill>
+          </a:ln>
+        </p:spPr>
+        <p:style>
+          <a:lnRef idx="1">
+            <a:schemeClr val="accent1"/>
+          </a:lnRef>
+          <a:fillRef idx="0">
+            <a:schemeClr val="accent1"/>
+          </a:fillRef>
+          <a:effectRef idx="0">
+            <a:schemeClr val="accent1"/>
+          </a:effectRef>
+          <a:fontRef idx="minor">
+            <a:schemeClr val="tx1"/>
+          </a:fontRef>
+        </p:style>
+      </p:cxnSp>
+      <p:sp>
+        <p:nvSpPr>
+          <p:cNvPr id="4" name="矩形: 圆角 3">
+            <a:extLst>
+              <a:ext uri="{FF2B5EF4-FFF2-40B4-BE49-F238E27FC236}">
+                <a16:creationId xmlns:a16="http://schemas.microsoft.com/office/drawing/2014/main" id="{F804F753-E482-E059-B0E0-437F4CB1E50C}"/>
+              </a:ext>
+            </a:extLst>
+          </p:cNvPr>
+          <p:cNvSpPr/>
+          <p:nvPr/>
+        </p:nvSpPr>
+        <p:spPr>
+          <a:xfrm>
+            <a:off x="5806701" y="5164768"/>
+            <a:ext cx="1620000" cy="360000"/>
+          </a:xfrm>
+          <a:prstGeom prst="roundRect">
+            <a:avLst/>
+          </a:prstGeom>
+          <a:noFill/>
+          <a:ln w="12700">
+            <a:solidFill>
+              <a:schemeClr val="accent6">
+                <a:lumMod val="60000"/>
+                <a:lumOff val="40000"/>
+              </a:schemeClr>
+            </a:solidFill>
+          </a:ln>
+        </p:spPr>
+        <p:style>
+          <a:lnRef idx="2">
+            <a:schemeClr val="accent1">
+              <a:shade val="15000"/>
+            </a:schemeClr>
+          </a:lnRef>
+          <a:fillRef idx="1">
+            <a:schemeClr val="accent1"/>
+          </a:fillRef>
+          <a:effectRef idx="0">
+            <a:schemeClr val="accent1"/>
+          </a:effectRef>
+          <a:fontRef idx="minor">
+            <a:schemeClr val="lt1"/>
+          </a:fontRef>
+        </p:style>
+        <p:txBody>
+          <a:bodyPr rtlCol="0" anchor="ctr"/>
+          <a:lstStyle/>
+          <a:p>
+            <a:pPr algn="ctr"/>
+            <a:r>
+              <a:rPr lang="zh-CN" altLang="en-US" sz="1200">
+                <a:solidFill>
+                  <a:sysClr val="windowText" lastClr="000000"/>
+                </a:solidFill>
+                <a:latin typeface="Quicksand Light" panose="00000400000000000000" pitchFamily="2" charset="0"/>
+                <a:ea typeface="仿宋" panose="02010609060101010101" pitchFamily="49" charset="-122"/>
+              </a:rPr>
+              <a:t>一个滚动视图</a:t>
+            </a:r>
+          </a:p>
+        </p:txBody>
+      </p:sp>
+      <p:sp>
+        <p:nvSpPr>
+          <p:cNvPr id="5" name="矩形: 圆角 4">
+            <a:extLst>
+              <a:ext uri="{FF2B5EF4-FFF2-40B4-BE49-F238E27FC236}">
+                <a16:creationId xmlns:a16="http://schemas.microsoft.com/office/drawing/2014/main" id="{2F218F90-1527-32EF-A4D6-D219CF5B8F16}"/>
+              </a:ext>
+            </a:extLst>
+          </p:cNvPr>
+          <p:cNvSpPr/>
+          <p:nvPr/>
+        </p:nvSpPr>
+        <p:spPr>
+          <a:xfrm>
+            <a:off x="5806701" y="5613003"/>
+            <a:ext cx="1620000" cy="360000"/>
+          </a:xfrm>
+          <a:prstGeom prst="roundRect">
+            <a:avLst/>
+          </a:prstGeom>
+          <a:noFill/>
+          <a:ln w="12700">
+            <a:solidFill>
+              <a:schemeClr val="accent6">
+                <a:lumMod val="60000"/>
+                <a:lumOff val="40000"/>
+              </a:schemeClr>
+            </a:solidFill>
+            <a:prstDash val="dash"/>
+          </a:ln>
+        </p:spPr>
+        <p:style>
+          <a:lnRef idx="2">
+            <a:schemeClr val="accent1">
+              <a:shade val="15000"/>
+            </a:schemeClr>
+          </a:lnRef>
+          <a:fillRef idx="1">
+            <a:schemeClr val="accent1"/>
+          </a:fillRef>
+          <a:effectRef idx="0">
+            <a:schemeClr val="accent1"/>
+          </a:effectRef>
+          <a:fontRef idx="minor">
+            <a:schemeClr val="lt1"/>
+          </a:fontRef>
+        </p:style>
+        <p:txBody>
+          <a:bodyPr rtlCol="0" anchor="ctr"/>
+          <a:lstStyle/>
+          <a:p>
+            <a:pPr algn="ctr"/>
+            <a:r>
+              <a:rPr lang="zh-CN" altLang="en-US" sz="1200">
+                <a:solidFill>
+                  <a:sysClr val="windowText" lastClr="000000"/>
+                </a:solidFill>
+                <a:latin typeface="Quicksand Light" panose="00000400000000000000" pitchFamily="2" charset="0"/>
+                <a:ea typeface="仿宋" panose="02010609060101010101" pitchFamily="49" charset="-122"/>
+              </a:rPr>
+              <a:t>二个滚动视图</a:t>
+            </a:r>
+          </a:p>
+        </p:txBody>
+      </p:sp>
+      <p:cxnSp>
+        <p:nvCxnSpPr>
+          <p:cNvPr id="6" name="连接符: 曲线 5">
+            <a:extLst>
+              <a:ext uri="{FF2B5EF4-FFF2-40B4-BE49-F238E27FC236}">
+                <a16:creationId xmlns:a16="http://schemas.microsoft.com/office/drawing/2014/main" id="{A07E7128-4DE2-E2DD-961D-C1575C1BBE3A}"/>
+              </a:ext>
+            </a:extLst>
+          </p:cNvPr>
+          <p:cNvCxnSpPr>
+            <a:cxnSpLocks/>
+            <a:stCxn id="31" idx="3"/>
+            <a:endCxn id="4" idx="1"/>
+          </p:cNvCxnSpPr>
+          <p:nvPr/>
+        </p:nvCxnSpPr>
+        <p:spPr>
+          <a:xfrm flipV="1">
+            <a:off x="5474575" y="5344768"/>
+            <a:ext cx="332126" cy="224117"/>
+          </a:xfrm>
+          <a:prstGeom prst="curvedConnector3">
+            <a:avLst>
+              <a:gd name="adj1" fmla="val 50000"/>
+            </a:avLst>
+          </a:prstGeom>
+          <a:ln>
+            <a:solidFill>
+              <a:schemeClr val="accent6">
+                <a:lumMod val="60000"/>
+                <a:lumOff val="40000"/>
+              </a:schemeClr>
+            </a:solidFill>
+          </a:ln>
+        </p:spPr>
+        <p:style>
+          <a:lnRef idx="1">
+            <a:schemeClr val="accent1"/>
+          </a:lnRef>
+          <a:fillRef idx="0">
+            <a:schemeClr val="accent1"/>
+          </a:fillRef>
+          <a:effectRef idx="0">
+            <a:schemeClr val="accent1"/>
+          </a:effectRef>
+          <a:fontRef idx="minor">
+            <a:schemeClr val="tx1"/>
+          </a:fontRef>
+        </p:style>
+      </p:cxnSp>
+      <p:cxnSp>
+        <p:nvCxnSpPr>
+          <p:cNvPr id="12" name="连接符: 曲线 11">
+            <a:extLst>
+              <a:ext uri="{FF2B5EF4-FFF2-40B4-BE49-F238E27FC236}">
+                <a16:creationId xmlns:a16="http://schemas.microsoft.com/office/drawing/2014/main" id="{5FD7AEAF-CD97-C450-BBC1-2641DC43007D}"/>
+              </a:ext>
+            </a:extLst>
+          </p:cNvPr>
+          <p:cNvCxnSpPr>
+            <a:cxnSpLocks/>
+            <a:stCxn id="31" idx="3"/>
+            <a:endCxn id="5" idx="1"/>
+          </p:cNvCxnSpPr>
+          <p:nvPr/>
+        </p:nvCxnSpPr>
+        <p:spPr>
+          <a:xfrm>
+            <a:off x="5474575" y="5568885"/>
+            <a:ext cx="332126" cy="224118"/>
+          </a:xfrm>
+          <a:prstGeom prst="curvedConnector3">
+            <a:avLst>
+              <a:gd name="adj1" fmla="val 50000"/>
+            </a:avLst>
+          </a:prstGeom>
+          <a:ln>
+            <a:solidFill>
+              <a:schemeClr val="accent6">
+                <a:lumMod val="60000"/>
+                <a:lumOff val="40000"/>
+              </a:schemeClr>
+            </a:solidFill>
+          </a:ln>
+        </p:spPr>
+        <p:style>
+          <a:lnRef idx="1">
+            <a:schemeClr val="accent1"/>
+          </a:lnRef>
+          <a:fillRef idx="0">
+            <a:schemeClr val="accent1"/>
+          </a:fillRef>
+          <a:effectRef idx="0">
+            <a:schemeClr val="accent1"/>
+          </a:effectRef>
+          <a:fontRef idx="minor">
+            <a:schemeClr val="tx1"/>
+          </a:fontRef>
+        </p:style>
+      </p:cxnSp>
+      <p:sp>
+        <p:nvSpPr>
+          <p:cNvPr id="7" name="矩形: 圆角 6">
+            <a:extLst>
+              <a:ext uri="{FF2B5EF4-FFF2-40B4-BE49-F238E27FC236}">
+                <a16:creationId xmlns:a16="http://schemas.microsoft.com/office/drawing/2014/main" id="{383E7043-36AC-CBD4-DF24-A727B7D0B0BD}"/>
+              </a:ext>
+            </a:extLst>
+          </p:cNvPr>
+          <p:cNvSpPr/>
+          <p:nvPr/>
+        </p:nvSpPr>
+        <p:spPr>
+          <a:xfrm>
+            <a:off x="5806701" y="4365964"/>
+            <a:ext cx="1620000" cy="360000"/>
+          </a:xfrm>
+          <a:prstGeom prst="roundRect">
+            <a:avLst/>
+          </a:prstGeom>
+          <a:noFill/>
+          <a:ln w="12700">
+            <a:solidFill>
+              <a:schemeClr val="bg1">
+                <a:lumMod val="50000"/>
+              </a:schemeClr>
+            </a:solidFill>
+            <a:prstDash val="dash"/>
+          </a:ln>
+        </p:spPr>
+        <p:style>
+          <a:lnRef idx="2">
+            <a:schemeClr val="accent1">
+              <a:shade val="15000"/>
+            </a:schemeClr>
+          </a:lnRef>
+          <a:fillRef idx="1">
+            <a:schemeClr val="accent1"/>
+          </a:fillRef>
+          <a:effectRef idx="0">
+            <a:schemeClr val="accent1"/>
+          </a:effectRef>
+          <a:fontRef idx="minor">
+            <a:schemeClr val="lt1"/>
+          </a:fontRef>
+        </p:style>
+        <p:txBody>
+          <a:bodyPr rtlCol="0" anchor="ctr"/>
+          <a:lstStyle/>
+          <a:p>
+            <a:pPr algn="ctr"/>
+            <a:r>
+              <a:rPr lang="zh-CN" altLang="en-US" sz="1200">
+                <a:solidFill>
+                  <a:sysClr val="windowText" lastClr="000000"/>
+                </a:solidFill>
+                <a:latin typeface="Quicksand Light" panose="00000400000000000000" pitchFamily="2" charset="0"/>
+                <a:ea typeface="仿宋" panose="02010609060101010101" pitchFamily="49" charset="-122"/>
+              </a:rPr>
+              <a:t>浮动 </a:t>
+            </a:r>
+            <a:r>
+              <a:rPr lang="en-US" altLang="zh-CN" sz="1200">
+                <a:solidFill>
+                  <a:sysClr val="windowText" lastClr="000000"/>
+                </a:solidFill>
+                <a:latin typeface="Quicksand Light" panose="00000400000000000000" pitchFamily="2" charset="0"/>
+                <a:ea typeface="仿宋" panose="02010609060101010101" pitchFamily="49" charset="-122"/>
+              </a:rPr>
+              <a:t>float</a:t>
+            </a:r>
+            <a:endParaRPr lang="zh-CN" altLang="en-US" sz="1200">
+              <a:solidFill>
+                <a:sysClr val="windowText" lastClr="000000"/>
+              </a:solidFill>
+              <a:latin typeface="Quicksand Light" panose="00000400000000000000" pitchFamily="2" charset="0"/>
+              <a:ea typeface="仿宋" panose="02010609060101010101" pitchFamily="49" charset="-122"/>
+            </a:endParaRPr>
+          </a:p>
+        </p:txBody>
+      </p:sp>
     </p:spTree>
     <p:extLst>
       <p:ext uri="{BB962C8B-B14F-4D97-AF65-F5344CB8AC3E}">
-        <p14:creationId xmlns:p14="http://schemas.microsoft.com/office/powerpoint/2010/main" val="2672122669"/>
+        <p14:creationId xmlns:p14="http://schemas.microsoft.com/office/powerpoint/2010/main" val="2483548129"/>
       </p:ext>
     </p:extLst>
   </p:cSld>
@@ -25471,383 +27329,40 @@
           <a:chExt cx="0" cy="0"/>
         </a:xfrm>
       </p:grpSpPr>
-      <p:sp>
-        <p:nvSpPr>
-          <p:cNvPr id="2" name="矩形: 圆角 1">
-            <a:extLst>
-              <a:ext uri="{FF2B5EF4-FFF2-40B4-BE49-F238E27FC236}">
-                <a16:creationId xmlns:a16="http://schemas.microsoft.com/office/drawing/2014/main" id="{DE06BA0C-6283-91C4-F4BA-E09E7F3139E7}"/>
-              </a:ext>
-            </a:extLst>
-          </p:cNvPr>
-          <p:cNvSpPr/>
-          <p:nvPr/>
-        </p:nvSpPr>
-        <p:spPr>
-          <a:xfrm>
-            <a:off x="3681691" y="2836100"/>
-            <a:ext cx="648000" cy="216000"/>
-          </a:xfrm>
-          <a:prstGeom prst="roundRect">
-            <a:avLst/>
-          </a:prstGeom>
-          <a:noFill/>
-          <a:ln w="12700">
-            <a:noFill/>
-          </a:ln>
-        </p:spPr>
-        <p:style>
-          <a:lnRef idx="2">
-            <a:schemeClr val="accent1">
-              <a:shade val="15000"/>
-            </a:schemeClr>
-          </a:lnRef>
-          <a:fillRef idx="1">
-            <a:schemeClr val="accent1"/>
-          </a:fillRef>
-          <a:effectRef idx="0">
-            <a:schemeClr val="accent1"/>
-          </a:effectRef>
-          <a:fontRef idx="minor">
-            <a:schemeClr val="lt1"/>
-          </a:fontRef>
-        </p:style>
-        <p:txBody>
-          <a:bodyPr rtlCol="0" anchor="ctr"/>
-          <a:lstStyle/>
-          <a:p>
-            <a:pPr algn="ctr"/>
-            <a:r>
-              <a:rPr lang="en-US" altLang="zh-CN" sz="800">
-                <a:solidFill>
-                  <a:sysClr val="windowText" lastClr="000000"/>
-                </a:solidFill>
-                <a:latin typeface="Quicksand Medium" panose="00000600000000000000" pitchFamily="2" charset="0"/>
-              </a:rPr>
-              <a:t>property</a:t>
-            </a:r>
-            <a:endParaRPr lang="zh-CN" altLang="en-US" sz="800">
-              <a:solidFill>
-                <a:sysClr val="windowText" lastClr="000000"/>
-              </a:solidFill>
-              <a:latin typeface="Quicksand Medium" panose="00000600000000000000" pitchFamily="2" charset="0"/>
-            </a:endParaRPr>
-          </a:p>
-        </p:txBody>
-      </p:sp>
-      <p:sp>
-        <p:nvSpPr>
-          <p:cNvPr id="3" name="文本框 2">
-            <a:extLst>
-              <a:ext uri="{FF2B5EF4-FFF2-40B4-BE49-F238E27FC236}">
-                <a16:creationId xmlns:a16="http://schemas.microsoft.com/office/drawing/2014/main" id="{1BF4DFA0-A45B-A793-3635-62C2BCB7B7E5}"/>
-              </a:ext>
-            </a:extLst>
-          </p:cNvPr>
-          <p:cNvSpPr txBox="1"/>
-          <p:nvPr/>
-        </p:nvSpPr>
-        <p:spPr>
-          <a:xfrm>
-            <a:off x="3733800" y="2152650"/>
-            <a:ext cx="1204176" cy="276999"/>
+      <p:pic>
+        <p:nvPicPr>
+          <p:cNvPr id="3" name="图片 2">
+            <a:extLst>
+              <a:ext uri="{FF2B5EF4-FFF2-40B4-BE49-F238E27FC236}">
+                <a16:creationId xmlns:a16="http://schemas.microsoft.com/office/drawing/2014/main" id="{7ECC09FE-D9D2-2E76-0948-E1F27A08CD34}"/>
+              </a:ext>
+            </a:extLst>
+          </p:cNvPr>
+          <p:cNvPicPr>
+            <a:picLocks noChangeAspect="1"/>
+          </p:cNvPicPr>
+          <p:nvPr/>
+        </p:nvPicPr>
+        <p:blipFill>
+          <a:blip r:embed="rId2"/>
+          <a:stretch>
+            <a:fillRect/>
+          </a:stretch>
+        </p:blipFill>
+        <p:spPr>
+          <a:xfrm>
+            <a:off x="5043340" y="1842866"/>
+            <a:ext cx="2105319" cy="3172268"/>
           </a:xfrm>
           <a:prstGeom prst="rect">
             <a:avLst/>
           </a:prstGeom>
-          <a:noFill/>
-        </p:spPr>
-        <p:txBody>
-          <a:bodyPr wrap="none" rtlCol="0">
-            <a:spAutoFit/>
-          </a:bodyPr>
-          <a:lstStyle/>
-          <a:p>
-            <a:r>
-              <a:rPr lang="en-US" altLang="zh-CN" sz="1200">
-                <a:latin typeface="Quicksand Medium" panose="00000600000000000000" pitchFamily="2" charset="0"/>
-              </a:rPr>
-              <a:t>width : 1024px</a:t>
-            </a:r>
-            <a:endParaRPr lang="zh-CN" altLang="en-US" sz="1200">
-              <a:latin typeface="Quicksand Medium" panose="00000600000000000000" pitchFamily="2" charset="0"/>
-            </a:endParaRPr>
-          </a:p>
-        </p:txBody>
-      </p:sp>
-      <p:sp>
-        <p:nvSpPr>
-          <p:cNvPr id="4" name="矩形: 圆角 3">
-            <a:extLst>
-              <a:ext uri="{FF2B5EF4-FFF2-40B4-BE49-F238E27FC236}">
-                <a16:creationId xmlns:a16="http://schemas.microsoft.com/office/drawing/2014/main" id="{C7735414-9923-6A1B-5E08-61B1E5335642}"/>
-              </a:ext>
-            </a:extLst>
-          </p:cNvPr>
-          <p:cNvSpPr/>
-          <p:nvPr/>
-        </p:nvSpPr>
-        <p:spPr>
-          <a:xfrm>
-            <a:off x="4265891" y="2836100"/>
-            <a:ext cx="504000" cy="216000"/>
-          </a:xfrm>
-          <a:prstGeom prst="roundRect">
-            <a:avLst/>
-          </a:prstGeom>
-          <a:noFill/>
-          <a:ln w="12700">
-            <a:noFill/>
-          </a:ln>
-        </p:spPr>
-        <p:style>
-          <a:lnRef idx="2">
-            <a:schemeClr val="accent1">
-              <a:shade val="15000"/>
-            </a:schemeClr>
-          </a:lnRef>
-          <a:fillRef idx="1">
-            <a:schemeClr val="accent1"/>
-          </a:fillRef>
-          <a:effectRef idx="0">
-            <a:schemeClr val="accent1"/>
-          </a:effectRef>
-          <a:fontRef idx="minor">
-            <a:schemeClr val="lt1"/>
-          </a:fontRef>
-        </p:style>
-        <p:txBody>
-          <a:bodyPr rtlCol="0" anchor="ctr"/>
-          <a:lstStyle/>
-          <a:p>
-            <a:pPr algn="ctr"/>
-            <a:r>
-              <a:rPr lang="en-US" altLang="zh-CN" sz="800">
-                <a:solidFill>
-                  <a:sysClr val="windowText" lastClr="000000"/>
-                </a:solidFill>
-                <a:latin typeface="Quicksand Medium" panose="00000600000000000000" pitchFamily="2" charset="0"/>
-              </a:rPr>
-              <a:t>value</a:t>
-            </a:r>
-            <a:endParaRPr lang="zh-CN" altLang="en-US" sz="800">
-              <a:solidFill>
-                <a:sysClr val="windowText" lastClr="000000"/>
-              </a:solidFill>
-              <a:latin typeface="Quicksand Medium" panose="00000600000000000000" pitchFamily="2" charset="0"/>
-            </a:endParaRPr>
-          </a:p>
-        </p:txBody>
-      </p:sp>
-      <p:sp>
-        <p:nvSpPr>
-          <p:cNvPr id="5" name="矩形: 圆角 4">
-            <a:extLst>
-              <a:ext uri="{FF2B5EF4-FFF2-40B4-BE49-F238E27FC236}">
-                <a16:creationId xmlns:a16="http://schemas.microsoft.com/office/drawing/2014/main" id="{F7AAF0E5-DEEE-811D-1957-33B4BEA1BE4F}"/>
-              </a:ext>
-            </a:extLst>
-          </p:cNvPr>
-          <p:cNvSpPr/>
-          <p:nvPr/>
-        </p:nvSpPr>
-        <p:spPr>
-          <a:xfrm>
-            <a:off x="4513541" y="2836100"/>
-            <a:ext cx="504000" cy="216000"/>
-          </a:xfrm>
-          <a:prstGeom prst="roundRect">
-            <a:avLst/>
-          </a:prstGeom>
-          <a:noFill/>
-          <a:ln w="12700">
-            <a:noFill/>
-          </a:ln>
-        </p:spPr>
-        <p:style>
-          <a:lnRef idx="2">
-            <a:schemeClr val="accent1">
-              <a:shade val="15000"/>
-            </a:schemeClr>
-          </a:lnRef>
-          <a:fillRef idx="1">
-            <a:schemeClr val="accent1"/>
-          </a:fillRef>
-          <a:effectRef idx="0">
-            <a:schemeClr val="accent1"/>
-          </a:effectRef>
-          <a:fontRef idx="minor">
-            <a:schemeClr val="lt1"/>
-          </a:fontRef>
-        </p:style>
-        <p:txBody>
-          <a:bodyPr rtlCol="0" anchor="ctr"/>
-          <a:lstStyle/>
-          <a:p>
-            <a:pPr algn="ctr"/>
-            <a:r>
-              <a:rPr lang="en-US" altLang="zh-CN" sz="800">
-                <a:solidFill>
-                  <a:sysClr val="windowText" lastClr="000000"/>
-                </a:solidFill>
-                <a:latin typeface="Quicksand Medium" panose="00000600000000000000" pitchFamily="2" charset="0"/>
-              </a:rPr>
-              <a:t>unit</a:t>
-            </a:r>
-            <a:endParaRPr lang="zh-CN" altLang="en-US" sz="800">
-              <a:solidFill>
-                <a:sysClr val="windowText" lastClr="000000"/>
-              </a:solidFill>
-              <a:latin typeface="Quicksand Medium" panose="00000600000000000000" pitchFamily="2" charset="0"/>
-            </a:endParaRPr>
-          </a:p>
-        </p:txBody>
-      </p:sp>
-      <p:cxnSp>
-        <p:nvCxnSpPr>
-          <p:cNvPr id="9" name="直接箭头连接符 8">
-            <a:extLst>
-              <a:ext uri="{FF2B5EF4-FFF2-40B4-BE49-F238E27FC236}">
-                <a16:creationId xmlns:a16="http://schemas.microsoft.com/office/drawing/2014/main" id="{43AA0F72-759C-7EAB-A6C6-60FEE7FFD186}"/>
-              </a:ext>
-            </a:extLst>
-          </p:cNvPr>
-          <p:cNvCxnSpPr>
-            <a:cxnSpLocks/>
-          </p:cNvCxnSpPr>
-          <p:nvPr/>
-        </p:nvCxnSpPr>
-        <p:spPr>
-          <a:xfrm flipV="1">
-            <a:off x="4003541" y="2432050"/>
-            <a:ext cx="0" cy="360000"/>
-          </a:xfrm>
-          <a:prstGeom prst="straightConnector1">
-            <a:avLst/>
-          </a:prstGeom>
-          <a:ln>
-            <a:solidFill>
-              <a:schemeClr val="tx1">
-                <a:lumMod val="65000"/>
-                <a:lumOff val="35000"/>
-              </a:schemeClr>
-            </a:solidFill>
-            <a:tailEnd type="triangle"/>
-          </a:ln>
-        </p:spPr>
-        <p:style>
-          <a:lnRef idx="1">
-            <a:schemeClr val="accent1"/>
-          </a:lnRef>
-          <a:fillRef idx="0">
-            <a:schemeClr val="accent1"/>
-          </a:fillRef>
-          <a:effectRef idx="0">
-            <a:schemeClr val="accent1"/>
-          </a:effectRef>
-          <a:fontRef idx="minor">
-            <a:schemeClr val="tx1"/>
-          </a:fontRef>
-        </p:style>
-      </p:cxnSp>
-      <p:cxnSp>
-        <p:nvCxnSpPr>
-          <p:cNvPr id="10" name="直接箭头连接符 9">
-            <a:extLst>
-              <a:ext uri="{FF2B5EF4-FFF2-40B4-BE49-F238E27FC236}">
-                <a16:creationId xmlns:a16="http://schemas.microsoft.com/office/drawing/2014/main" id="{FA908F67-2343-A19C-6EA2-70D4CBB6210B}"/>
-              </a:ext>
-            </a:extLst>
-          </p:cNvPr>
-          <p:cNvCxnSpPr>
-            <a:cxnSpLocks/>
-          </p:cNvCxnSpPr>
-          <p:nvPr/>
-        </p:nvCxnSpPr>
-        <p:spPr>
-          <a:xfrm flipV="1">
-            <a:off x="4517891" y="2432050"/>
-            <a:ext cx="0" cy="360000"/>
-          </a:xfrm>
-          <a:prstGeom prst="straightConnector1">
-            <a:avLst/>
-          </a:prstGeom>
-          <a:ln>
-            <a:solidFill>
-              <a:schemeClr val="tx1">
-                <a:lumMod val="65000"/>
-                <a:lumOff val="35000"/>
-              </a:schemeClr>
-            </a:solidFill>
-            <a:tailEnd type="triangle"/>
-          </a:ln>
-        </p:spPr>
-        <p:style>
-          <a:lnRef idx="1">
-            <a:schemeClr val="accent1"/>
-          </a:lnRef>
-          <a:fillRef idx="0">
-            <a:schemeClr val="accent1"/>
-          </a:fillRef>
-          <a:effectRef idx="0">
-            <a:schemeClr val="accent1"/>
-          </a:effectRef>
-          <a:fontRef idx="minor">
-            <a:schemeClr val="tx1"/>
-          </a:fontRef>
-        </p:style>
-      </p:cxnSp>
-      <p:cxnSp>
-        <p:nvCxnSpPr>
-          <p:cNvPr id="11" name="直接箭头连接符 10">
-            <a:extLst>
-              <a:ext uri="{FF2B5EF4-FFF2-40B4-BE49-F238E27FC236}">
-                <a16:creationId xmlns:a16="http://schemas.microsoft.com/office/drawing/2014/main" id="{F2B6BAE4-E058-A8A3-0AAE-176FEB20EE1B}"/>
-              </a:ext>
-            </a:extLst>
-          </p:cNvPr>
-          <p:cNvCxnSpPr>
-            <a:cxnSpLocks/>
-          </p:cNvCxnSpPr>
-          <p:nvPr/>
-        </p:nvCxnSpPr>
-        <p:spPr>
-          <a:xfrm flipV="1">
-            <a:off x="4765541" y="2432050"/>
-            <a:ext cx="0" cy="360000"/>
-          </a:xfrm>
-          <a:prstGeom prst="straightConnector1">
-            <a:avLst/>
-          </a:prstGeom>
-          <a:ln>
-            <a:solidFill>
-              <a:schemeClr val="tx1">
-                <a:lumMod val="65000"/>
-                <a:lumOff val="35000"/>
-              </a:schemeClr>
-            </a:solidFill>
-            <a:tailEnd type="triangle"/>
-          </a:ln>
-        </p:spPr>
-        <p:style>
-          <a:lnRef idx="1">
-            <a:schemeClr val="accent1"/>
-          </a:lnRef>
-          <a:fillRef idx="0">
-            <a:schemeClr val="accent1"/>
-          </a:fillRef>
-          <a:effectRef idx="0">
-            <a:schemeClr val="accent1"/>
-          </a:effectRef>
-          <a:fontRef idx="minor">
-            <a:schemeClr val="tx1"/>
-          </a:fontRef>
-        </p:style>
-      </p:cxnSp>
+        </p:spPr>
+      </p:pic>
     </p:spTree>
     <p:extLst>
       <p:ext uri="{BB962C8B-B14F-4D97-AF65-F5344CB8AC3E}">
-        <p14:creationId xmlns:p14="http://schemas.microsoft.com/office/powerpoint/2010/main" val="979191356"/>
+        <p14:creationId xmlns:p14="http://schemas.microsoft.com/office/powerpoint/2010/main" val="2672122669"/>
       </p:ext>
     </p:extLst>
   </p:cSld>
@@ -25876,10 +27391,10 @@
       </p:grpSpPr>
       <p:pic>
         <p:nvPicPr>
-          <p:cNvPr id="1026" name="Picture 2" descr="第十八天 PPPoE原理和配置_当用户希望建立pppoe连接时,首先会发送什么类型的ppp报文-CSDN博客">
-            <a:extLst>
-              <a:ext uri="{FF2B5EF4-FFF2-40B4-BE49-F238E27FC236}">
-                <a16:creationId xmlns:a16="http://schemas.microsoft.com/office/drawing/2014/main" id="{C6C94040-E0BC-6343-0359-493FEFBAA89B}"/>
+          <p:cNvPr id="1026" name="Picture 2">
+            <a:extLst>
+              <a:ext uri="{FF2B5EF4-FFF2-40B4-BE49-F238E27FC236}">
+                <a16:creationId xmlns:a16="http://schemas.microsoft.com/office/drawing/2014/main" id="{02D4B95B-4837-314F-E44F-1B98868454D4}"/>
               </a:ext>
             </a:extLst>
           </p:cNvPr>
@@ -25903,8 +27418,8 @@
         </p:blipFill>
         <p:spPr bwMode="auto">
           <a:xfrm>
-            <a:off x="2811182" y="1407458"/>
-            <a:ext cx="6480000" cy="3828970"/>
+            <a:off x="3848100" y="1943100"/>
+            <a:ext cx="4495800" cy="2971800"/>
           </a:xfrm>
           <a:prstGeom prst="rect">
             <a:avLst/>
@@ -25926,7 +27441,7 @@
           <p:cNvPr id="2" name="矩形 1">
             <a:extLst>
               <a:ext uri="{FF2B5EF4-FFF2-40B4-BE49-F238E27FC236}">
-                <a16:creationId xmlns:a16="http://schemas.microsoft.com/office/drawing/2014/main" id="{19D45507-CD22-C66C-A849-86CD58600BEF}"/>
+                <a16:creationId xmlns:a16="http://schemas.microsoft.com/office/drawing/2014/main" id="{82FB5D9D-1EED-E402-9A5B-9D01D36FAD12}"/>
               </a:ext>
             </a:extLst>
           </p:cNvPr>
@@ -25935,7 +27450,7 @@
         </p:nvSpPr>
         <p:spPr>
           <a:xfrm>
-            <a:off x="6938682" y="4421023"/>
+            <a:off x="6409765" y="4312024"/>
             <a:ext cx="2393576" cy="779929"/>
           </a:xfrm>
           <a:prstGeom prst="rect">
@@ -25976,7 +27491,7 @@
     </p:spTree>
     <p:extLst>
       <p:ext uri="{BB962C8B-B14F-4D97-AF65-F5344CB8AC3E}">
-        <p14:creationId xmlns:p14="http://schemas.microsoft.com/office/powerpoint/2010/main" val="1938204860"/>
+        <p14:creationId xmlns:p14="http://schemas.microsoft.com/office/powerpoint/2010/main" val="3445511340"/>
       </p:ext>
     </p:extLst>
   </p:cSld>
@@ -25987,6 +27502,409 @@
 </file>
 
 <file path=ppt/slides/slide30.xml><?xml version="1.0" encoding="utf-8"?>
+<p:sld xmlns:a="http://schemas.openxmlformats.org/drawingml/2006/main" xmlns:r="http://schemas.openxmlformats.org/officeDocument/2006/relationships" xmlns:p="http://schemas.openxmlformats.org/presentationml/2006/main">
+  <p:cSld>
+    <p:spTree>
+      <p:nvGrpSpPr>
+        <p:cNvPr id="1" name=""/>
+        <p:cNvGrpSpPr/>
+        <p:nvPr/>
+      </p:nvGrpSpPr>
+      <p:grpSpPr>
+        <a:xfrm>
+          <a:off x="0" y="0"/>
+          <a:ext cx="0" cy="0"/>
+          <a:chOff x="0" y="0"/>
+          <a:chExt cx="0" cy="0"/>
+        </a:xfrm>
+      </p:grpSpPr>
+      <p:sp>
+        <p:nvSpPr>
+          <p:cNvPr id="2" name="矩形: 圆角 1">
+            <a:extLst>
+              <a:ext uri="{FF2B5EF4-FFF2-40B4-BE49-F238E27FC236}">
+                <a16:creationId xmlns:a16="http://schemas.microsoft.com/office/drawing/2014/main" id="{DE06BA0C-6283-91C4-F4BA-E09E7F3139E7}"/>
+              </a:ext>
+            </a:extLst>
+          </p:cNvPr>
+          <p:cNvSpPr/>
+          <p:nvPr/>
+        </p:nvSpPr>
+        <p:spPr>
+          <a:xfrm>
+            <a:off x="3681691" y="2836100"/>
+            <a:ext cx="648000" cy="216000"/>
+          </a:xfrm>
+          <a:prstGeom prst="roundRect">
+            <a:avLst/>
+          </a:prstGeom>
+          <a:noFill/>
+          <a:ln w="12700">
+            <a:noFill/>
+          </a:ln>
+        </p:spPr>
+        <p:style>
+          <a:lnRef idx="2">
+            <a:schemeClr val="accent1">
+              <a:shade val="15000"/>
+            </a:schemeClr>
+          </a:lnRef>
+          <a:fillRef idx="1">
+            <a:schemeClr val="accent1"/>
+          </a:fillRef>
+          <a:effectRef idx="0">
+            <a:schemeClr val="accent1"/>
+          </a:effectRef>
+          <a:fontRef idx="minor">
+            <a:schemeClr val="lt1"/>
+          </a:fontRef>
+        </p:style>
+        <p:txBody>
+          <a:bodyPr rtlCol="0" anchor="ctr"/>
+          <a:lstStyle/>
+          <a:p>
+            <a:pPr algn="ctr"/>
+            <a:r>
+              <a:rPr lang="en-US" altLang="zh-CN" sz="800">
+                <a:solidFill>
+                  <a:sysClr val="windowText" lastClr="000000"/>
+                </a:solidFill>
+                <a:latin typeface="Quicksand Medium" panose="00000600000000000000" pitchFamily="2" charset="0"/>
+              </a:rPr>
+              <a:t>property</a:t>
+            </a:r>
+            <a:endParaRPr lang="zh-CN" altLang="en-US" sz="800">
+              <a:solidFill>
+                <a:sysClr val="windowText" lastClr="000000"/>
+              </a:solidFill>
+              <a:latin typeface="Quicksand Medium" panose="00000600000000000000" pitchFamily="2" charset="0"/>
+            </a:endParaRPr>
+          </a:p>
+        </p:txBody>
+      </p:sp>
+      <p:sp>
+        <p:nvSpPr>
+          <p:cNvPr id="3" name="文本框 2">
+            <a:extLst>
+              <a:ext uri="{FF2B5EF4-FFF2-40B4-BE49-F238E27FC236}">
+                <a16:creationId xmlns:a16="http://schemas.microsoft.com/office/drawing/2014/main" id="{1BF4DFA0-A45B-A793-3635-62C2BCB7B7E5}"/>
+              </a:ext>
+            </a:extLst>
+          </p:cNvPr>
+          <p:cNvSpPr txBox="1"/>
+          <p:nvPr/>
+        </p:nvSpPr>
+        <p:spPr>
+          <a:xfrm>
+            <a:off x="3733800" y="2152650"/>
+            <a:ext cx="1204176" cy="276999"/>
+          </a:xfrm>
+          <a:prstGeom prst="rect">
+            <a:avLst/>
+          </a:prstGeom>
+          <a:noFill/>
+        </p:spPr>
+        <p:txBody>
+          <a:bodyPr wrap="none" rtlCol="0">
+            <a:spAutoFit/>
+          </a:bodyPr>
+          <a:lstStyle/>
+          <a:p>
+            <a:r>
+              <a:rPr lang="en-US" altLang="zh-CN" sz="1200">
+                <a:latin typeface="Quicksand Medium" panose="00000600000000000000" pitchFamily="2" charset="0"/>
+              </a:rPr>
+              <a:t>width : 1024px</a:t>
+            </a:r>
+            <a:endParaRPr lang="zh-CN" altLang="en-US" sz="1200">
+              <a:latin typeface="Quicksand Medium" panose="00000600000000000000" pitchFamily="2" charset="0"/>
+            </a:endParaRPr>
+          </a:p>
+        </p:txBody>
+      </p:sp>
+      <p:sp>
+        <p:nvSpPr>
+          <p:cNvPr id="4" name="矩形: 圆角 3">
+            <a:extLst>
+              <a:ext uri="{FF2B5EF4-FFF2-40B4-BE49-F238E27FC236}">
+                <a16:creationId xmlns:a16="http://schemas.microsoft.com/office/drawing/2014/main" id="{C7735414-9923-6A1B-5E08-61B1E5335642}"/>
+              </a:ext>
+            </a:extLst>
+          </p:cNvPr>
+          <p:cNvSpPr/>
+          <p:nvPr/>
+        </p:nvSpPr>
+        <p:spPr>
+          <a:xfrm>
+            <a:off x="4265891" y="2836100"/>
+            <a:ext cx="504000" cy="216000"/>
+          </a:xfrm>
+          <a:prstGeom prst="roundRect">
+            <a:avLst/>
+          </a:prstGeom>
+          <a:noFill/>
+          <a:ln w="12700">
+            <a:noFill/>
+          </a:ln>
+        </p:spPr>
+        <p:style>
+          <a:lnRef idx="2">
+            <a:schemeClr val="accent1">
+              <a:shade val="15000"/>
+            </a:schemeClr>
+          </a:lnRef>
+          <a:fillRef idx="1">
+            <a:schemeClr val="accent1"/>
+          </a:fillRef>
+          <a:effectRef idx="0">
+            <a:schemeClr val="accent1"/>
+          </a:effectRef>
+          <a:fontRef idx="minor">
+            <a:schemeClr val="lt1"/>
+          </a:fontRef>
+        </p:style>
+        <p:txBody>
+          <a:bodyPr rtlCol="0" anchor="ctr"/>
+          <a:lstStyle/>
+          <a:p>
+            <a:pPr algn="ctr"/>
+            <a:r>
+              <a:rPr lang="en-US" altLang="zh-CN" sz="800">
+                <a:solidFill>
+                  <a:sysClr val="windowText" lastClr="000000"/>
+                </a:solidFill>
+                <a:latin typeface="Quicksand Medium" panose="00000600000000000000" pitchFamily="2" charset="0"/>
+              </a:rPr>
+              <a:t>value</a:t>
+            </a:r>
+            <a:endParaRPr lang="zh-CN" altLang="en-US" sz="800">
+              <a:solidFill>
+                <a:sysClr val="windowText" lastClr="000000"/>
+              </a:solidFill>
+              <a:latin typeface="Quicksand Medium" panose="00000600000000000000" pitchFamily="2" charset="0"/>
+            </a:endParaRPr>
+          </a:p>
+        </p:txBody>
+      </p:sp>
+      <p:sp>
+        <p:nvSpPr>
+          <p:cNvPr id="5" name="矩形: 圆角 4">
+            <a:extLst>
+              <a:ext uri="{FF2B5EF4-FFF2-40B4-BE49-F238E27FC236}">
+                <a16:creationId xmlns:a16="http://schemas.microsoft.com/office/drawing/2014/main" id="{F7AAF0E5-DEEE-811D-1957-33B4BEA1BE4F}"/>
+              </a:ext>
+            </a:extLst>
+          </p:cNvPr>
+          <p:cNvSpPr/>
+          <p:nvPr/>
+        </p:nvSpPr>
+        <p:spPr>
+          <a:xfrm>
+            <a:off x="4513541" y="2836100"/>
+            <a:ext cx="504000" cy="216000"/>
+          </a:xfrm>
+          <a:prstGeom prst="roundRect">
+            <a:avLst/>
+          </a:prstGeom>
+          <a:noFill/>
+          <a:ln w="12700">
+            <a:noFill/>
+          </a:ln>
+        </p:spPr>
+        <p:style>
+          <a:lnRef idx="2">
+            <a:schemeClr val="accent1">
+              <a:shade val="15000"/>
+            </a:schemeClr>
+          </a:lnRef>
+          <a:fillRef idx="1">
+            <a:schemeClr val="accent1"/>
+          </a:fillRef>
+          <a:effectRef idx="0">
+            <a:schemeClr val="accent1"/>
+          </a:effectRef>
+          <a:fontRef idx="minor">
+            <a:schemeClr val="lt1"/>
+          </a:fontRef>
+        </p:style>
+        <p:txBody>
+          <a:bodyPr rtlCol="0" anchor="ctr"/>
+          <a:lstStyle/>
+          <a:p>
+            <a:pPr algn="ctr"/>
+            <a:r>
+              <a:rPr lang="en-US" altLang="zh-CN" sz="800">
+                <a:solidFill>
+                  <a:sysClr val="windowText" lastClr="000000"/>
+                </a:solidFill>
+                <a:latin typeface="Quicksand Medium" panose="00000600000000000000" pitchFamily="2" charset="0"/>
+              </a:rPr>
+              <a:t>unit</a:t>
+            </a:r>
+            <a:endParaRPr lang="zh-CN" altLang="en-US" sz="800">
+              <a:solidFill>
+                <a:sysClr val="windowText" lastClr="000000"/>
+              </a:solidFill>
+              <a:latin typeface="Quicksand Medium" panose="00000600000000000000" pitchFamily="2" charset="0"/>
+            </a:endParaRPr>
+          </a:p>
+        </p:txBody>
+      </p:sp>
+      <p:cxnSp>
+        <p:nvCxnSpPr>
+          <p:cNvPr id="9" name="直接箭头连接符 8">
+            <a:extLst>
+              <a:ext uri="{FF2B5EF4-FFF2-40B4-BE49-F238E27FC236}">
+                <a16:creationId xmlns:a16="http://schemas.microsoft.com/office/drawing/2014/main" id="{43AA0F72-759C-7EAB-A6C6-60FEE7FFD186}"/>
+              </a:ext>
+            </a:extLst>
+          </p:cNvPr>
+          <p:cNvCxnSpPr>
+            <a:cxnSpLocks/>
+          </p:cNvCxnSpPr>
+          <p:nvPr/>
+        </p:nvCxnSpPr>
+        <p:spPr>
+          <a:xfrm flipV="1">
+            <a:off x="4003541" y="2432050"/>
+            <a:ext cx="0" cy="360000"/>
+          </a:xfrm>
+          <a:prstGeom prst="straightConnector1">
+            <a:avLst/>
+          </a:prstGeom>
+          <a:ln>
+            <a:solidFill>
+              <a:schemeClr val="tx1">
+                <a:lumMod val="65000"/>
+                <a:lumOff val="35000"/>
+              </a:schemeClr>
+            </a:solidFill>
+            <a:tailEnd type="triangle"/>
+          </a:ln>
+        </p:spPr>
+        <p:style>
+          <a:lnRef idx="1">
+            <a:schemeClr val="accent1"/>
+          </a:lnRef>
+          <a:fillRef idx="0">
+            <a:schemeClr val="accent1"/>
+          </a:fillRef>
+          <a:effectRef idx="0">
+            <a:schemeClr val="accent1"/>
+          </a:effectRef>
+          <a:fontRef idx="minor">
+            <a:schemeClr val="tx1"/>
+          </a:fontRef>
+        </p:style>
+      </p:cxnSp>
+      <p:cxnSp>
+        <p:nvCxnSpPr>
+          <p:cNvPr id="10" name="直接箭头连接符 9">
+            <a:extLst>
+              <a:ext uri="{FF2B5EF4-FFF2-40B4-BE49-F238E27FC236}">
+                <a16:creationId xmlns:a16="http://schemas.microsoft.com/office/drawing/2014/main" id="{FA908F67-2343-A19C-6EA2-70D4CBB6210B}"/>
+              </a:ext>
+            </a:extLst>
+          </p:cNvPr>
+          <p:cNvCxnSpPr>
+            <a:cxnSpLocks/>
+          </p:cNvCxnSpPr>
+          <p:nvPr/>
+        </p:nvCxnSpPr>
+        <p:spPr>
+          <a:xfrm flipV="1">
+            <a:off x="4517891" y="2432050"/>
+            <a:ext cx="0" cy="360000"/>
+          </a:xfrm>
+          <a:prstGeom prst="straightConnector1">
+            <a:avLst/>
+          </a:prstGeom>
+          <a:ln>
+            <a:solidFill>
+              <a:schemeClr val="tx1">
+                <a:lumMod val="65000"/>
+                <a:lumOff val="35000"/>
+              </a:schemeClr>
+            </a:solidFill>
+            <a:tailEnd type="triangle"/>
+          </a:ln>
+        </p:spPr>
+        <p:style>
+          <a:lnRef idx="1">
+            <a:schemeClr val="accent1"/>
+          </a:lnRef>
+          <a:fillRef idx="0">
+            <a:schemeClr val="accent1"/>
+          </a:fillRef>
+          <a:effectRef idx="0">
+            <a:schemeClr val="accent1"/>
+          </a:effectRef>
+          <a:fontRef idx="minor">
+            <a:schemeClr val="tx1"/>
+          </a:fontRef>
+        </p:style>
+      </p:cxnSp>
+      <p:cxnSp>
+        <p:nvCxnSpPr>
+          <p:cNvPr id="11" name="直接箭头连接符 10">
+            <a:extLst>
+              <a:ext uri="{FF2B5EF4-FFF2-40B4-BE49-F238E27FC236}">
+                <a16:creationId xmlns:a16="http://schemas.microsoft.com/office/drawing/2014/main" id="{F2B6BAE4-E058-A8A3-0AAE-176FEB20EE1B}"/>
+              </a:ext>
+            </a:extLst>
+          </p:cNvPr>
+          <p:cNvCxnSpPr>
+            <a:cxnSpLocks/>
+          </p:cNvCxnSpPr>
+          <p:nvPr/>
+        </p:nvCxnSpPr>
+        <p:spPr>
+          <a:xfrm flipV="1">
+            <a:off x="4765541" y="2432050"/>
+            <a:ext cx="0" cy="360000"/>
+          </a:xfrm>
+          <a:prstGeom prst="straightConnector1">
+            <a:avLst/>
+          </a:prstGeom>
+          <a:ln>
+            <a:solidFill>
+              <a:schemeClr val="tx1">
+                <a:lumMod val="65000"/>
+                <a:lumOff val="35000"/>
+              </a:schemeClr>
+            </a:solidFill>
+            <a:tailEnd type="triangle"/>
+          </a:ln>
+        </p:spPr>
+        <p:style>
+          <a:lnRef idx="1">
+            <a:schemeClr val="accent1"/>
+          </a:lnRef>
+          <a:fillRef idx="0">
+            <a:schemeClr val="accent1"/>
+          </a:fillRef>
+          <a:effectRef idx="0">
+            <a:schemeClr val="accent1"/>
+          </a:effectRef>
+          <a:fontRef idx="minor">
+            <a:schemeClr val="tx1"/>
+          </a:fontRef>
+        </p:style>
+      </p:cxnSp>
+    </p:spTree>
+    <p:extLst>
+      <p:ext uri="{BB962C8B-B14F-4D97-AF65-F5344CB8AC3E}">
+        <p14:creationId xmlns:p14="http://schemas.microsoft.com/office/powerpoint/2010/main" val="979191356"/>
+      </p:ext>
+    </p:extLst>
+  </p:cSld>
+  <p:clrMapOvr>
+    <a:masterClrMapping/>
+  </p:clrMapOvr>
+</p:sld>
+</file>
+
+<file path=ppt/slides/slide31.xml><?xml version="1.0" encoding="utf-8"?>
 <p:sld xmlns:a="http://schemas.openxmlformats.org/drawingml/2006/main" xmlns:r="http://schemas.openxmlformats.org/officeDocument/2006/relationships" xmlns:p="http://schemas.openxmlformats.org/presentationml/2006/main">
   <p:cSld>
     <p:spTree>
@@ -29955,6 +31873,135 @@
           <a:chExt cx="0" cy="0"/>
         </a:xfrm>
       </p:grpSpPr>
+      <p:pic>
+        <p:nvPicPr>
+          <p:cNvPr id="1026" name="Picture 2" descr="第十八天 PPPoE原理和配置_当用户希望建立pppoe连接时,首先会发送什么类型的ppp报文-CSDN博客">
+            <a:extLst>
+              <a:ext uri="{FF2B5EF4-FFF2-40B4-BE49-F238E27FC236}">
+                <a16:creationId xmlns:a16="http://schemas.microsoft.com/office/drawing/2014/main" id="{C6C94040-E0BC-6343-0359-493FEFBAA89B}"/>
+              </a:ext>
+            </a:extLst>
+          </p:cNvPr>
+          <p:cNvPicPr>
+            <a:picLocks noChangeAspect="1" noChangeArrowheads="1"/>
+          </p:cNvPicPr>
+          <p:nvPr/>
+        </p:nvPicPr>
+        <p:blipFill>
+          <a:blip r:embed="rId2">
+            <a:extLst>
+              <a:ext uri="{28A0092B-C50C-407E-A947-70E740481C1C}">
+                <a14:useLocalDpi xmlns:a14="http://schemas.microsoft.com/office/drawing/2010/main" val="0"/>
+              </a:ext>
+            </a:extLst>
+          </a:blip>
+          <a:srcRect/>
+          <a:stretch>
+            <a:fillRect/>
+          </a:stretch>
+        </p:blipFill>
+        <p:spPr bwMode="auto">
+          <a:xfrm>
+            <a:off x="2811182" y="1407458"/>
+            <a:ext cx="6480000" cy="3828970"/>
+          </a:xfrm>
+          <a:prstGeom prst="rect">
+            <a:avLst/>
+          </a:prstGeom>
+          <a:noFill/>
+          <a:extLst>
+            <a:ext uri="{909E8E84-426E-40DD-AFC4-6F175D3DCCD1}">
+              <a14:hiddenFill xmlns:a14="http://schemas.microsoft.com/office/drawing/2010/main">
+                <a:solidFill>
+                  <a:srgbClr val="FFFFFF"/>
+                </a:solidFill>
+              </a14:hiddenFill>
+            </a:ext>
+          </a:extLst>
+        </p:spPr>
+      </p:pic>
+      <p:sp>
+        <p:nvSpPr>
+          <p:cNvPr id="2" name="矩形 1">
+            <a:extLst>
+              <a:ext uri="{FF2B5EF4-FFF2-40B4-BE49-F238E27FC236}">
+                <a16:creationId xmlns:a16="http://schemas.microsoft.com/office/drawing/2014/main" id="{19D45507-CD22-C66C-A849-86CD58600BEF}"/>
+              </a:ext>
+            </a:extLst>
+          </p:cNvPr>
+          <p:cNvSpPr/>
+          <p:nvPr/>
+        </p:nvSpPr>
+        <p:spPr>
+          <a:xfrm>
+            <a:off x="6938682" y="4421023"/>
+            <a:ext cx="2393576" cy="779929"/>
+          </a:xfrm>
+          <a:prstGeom prst="rect">
+            <a:avLst/>
+          </a:prstGeom>
+          <a:solidFill>
+            <a:schemeClr val="bg1"/>
+          </a:solidFill>
+          <a:ln>
+            <a:noFill/>
+          </a:ln>
+        </p:spPr>
+        <p:style>
+          <a:lnRef idx="2">
+            <a:schemeClr val="accent1">
+              <a:shade val="15000"/>
+            </a:schemeClr>
+          </a:lnRef>
+          <a:fillRef idx="1">
+            <a:schemeClr val="accent1"/>
+          </a:fillRef>
+          <a:effectRef idx="0">
+            <a:schemeClr val="accent1"/>
+          </a:effectRef>
+          <a:fontRef idx="minor">
+            <a:schemeClr val="lt1"/>
+          </a:fontRef>
+        </p:style>
+        <p:txBody>
+          <a:bodyPr rtlCol="0" anchor="ctr"/>
+          <a:lstStyle/>
+          <a:p>
+            <a:pPr algn="ctr"/>
+            <a:endParaRPr lang="zh-CN" altLang="en-US"/>
+          </a:p>
+        </p:txBody>
+      </p:sp>
+    </p:spTree>
+    <p:extLst>
+      <p:ext uri="{BB962C8B-B14F-4D97-AF65-F5344CB8AC3E}">
+        <p14:creationId xmlns:p14="http://schemas.microsoft.com/office/powerpoint/2010/main" val="1938204860"/>
+      </p:ext>
+    </p:extLst>
+  </p:cSld>
+  <p:clrMapOvr>
+    <a:masterClrMapping/>
+  </p:clrMapOvr>
+</p:sld>
+</file>
+
+<file path=ppt/slides/slide5.xml><?xml version="1.0" encoding="utf-8"?>
+<p:sld xmlns:a="http://schemas.openxmlformats.org/drawingml/2006/main" xmlns:r="http://schemas.openxmlformats.org/officeDocument/2006/relationships" xmlns:p="http://schemas.openxmlformats.org/presentationml/2006/main">
+  <p:cSld>
+    <p:spTree>
+      <p:nvGrpSpPr>
+        <p:cNvPr id="1" name=""/>
+        <p:cNvGrpSpPr/>
+        <p:nvPr/>
+      </p:nvGrpSpPr>
+      <p:grpSpPr>
+        <a:xfrm>
+          <a:off x="0" y="0"/>
+          <a:ext cx="0" cy="0"/>
+          <a:chOff x="0" y="0"/>
+          <a:chExt cx="0" cy="0"/>
+        </a:xfrm>
+      </p:grpSpPr>
       <p:sp>
         <p:nvSpPr>
           <p:cNvPr id="2" name="矩形: 圆角 1">
@@ -31140,7 +33187,7 @@
 </p:sld>
 </file>
 
-<file path=ppt/slides/slide5.xml><?xml version="1.0" encoding="utf-8"?>
+<file path=ppt/slides/slide6.xml><?xml version="1.0" encoding="utf-8"?>
 <p:sld xmlns:a="http://schemas.openxmlformats.org/drawingml/2006/main" xmlns:r="http://schemas.openxmlformats.org/officeDocument/2006/relationships" xmlns:p="http://schemas.openxmlformats.org/presentationml/2006/main">
   <p:cSld>
     <p:spTree>
@@ -34339,7 +36386,7 @@
 </p:sld>
 </file>
 
-<file path=ppt/slides/slide6.xml><?xml version="1.0" encoding="utf-8"?>
+<file path=ppt/slides/slide7.xml><?xml version="1.0" encoding="utf-8"?>
 <p:sld xmlns:a="http://schemas.openxmlformats.org/drawingml/2006/main" xmlns:r="http://schemas.openxmlformats.org/officeDocument/2006/relationships" xmlns:p="http://schemas.openxmlformats.org/presentationml/2006/main">
   <p:cSld>
     <p:spTree>
@@ -36529,7 +38576,7 @@
 </p:sld>
 </file>
 
-<file path=ppt/slides/slide7.xml><?xml version="1.0" encoding="utf-8"?>
+<file path=ppt/slides/slide8.xml><?xml version="1.0" encoding="utf-8"?>
 <p:sld xmlns:a="http://schemas.openxmlformats.org/drawingml/2006/main" xmlns:r="http://schemas.openxmlformats.org/officeDocument/2006/relationships" xmlns:p="http://schemas.openxmlformats.org/presentationml/2006/main">
   <p:cSld>
     <p:spTree>
@@ -37474,7 +39521,7 @@
 </p:sld>
 </file>
 
-<file path=ppt/slides/slide8.xml><?xml version="1.0" encoding="utf-8"?>
+<file path=ppt/slides/slide9.xml><?xml version="1.0" encoding="utf-8"?>
 <p:sld xmlns:a="http://schemas.openxmlformats.org/drawingml/2006/main" xmlns:r="http://schemas.openxmlformats.org/officeDocument/2006/relationships" xmlns:p="http://schemas.openxmlformats.org/presentationml/2006/main">
   <p:cSld>
     <p:spTree>
@@ -39194,972 +41241,6 @@
     <p:extLst>
       <p:ext uri="{BB962C8B-B14F-4D97-AF65-F5344CB8AC3E}">
         <p14:creationId xmlns:p14="http://schemas.microsoft.com/office/powerpoint/2010/main" val="2989024140"/>
-      </p:ext>
-    </p:extLst>
-  </p:cSld>
-  <p:clrMapOvr>
-    <a:masterClrMapping/>
-  </p:clrMapOvr>
-</p:sld>
-</file>
-
-<file path=ppt/slides/slide9.xml><?xml version="1.0" encoding="utf-8"?>
-<p:sld xmlns:a="http://schemas.openxmlformats.org/drawingml/2006/main" xmlns:r="http://schemas.openxmlformats.org/officeDocument/2006/relationships" xmlns:p="http://schemas.openxmlformats.org/presentationml/2006/main">
-  <p:cSld>
-    <p:spTree>
-      <p:nvGrpSpPr>
-        <p:cNvPr id="1" name="">
-          <a:extLst>
-            <a:ext uri="{FF2B5EF4-FFF2-40B4-BE49-F238E27FC236}">
-              <a16:creationId xmlns:a16="http://schemas.microsoft.com/office/drawing/2014/main" id="{5C7A2C4C-DE35-8F5D-FAA3-1F45B914C406}"/>
-            </a:ext>
-          </a:extLst>
-        </p:cNvPr>
-        <p:cNvGrpSpPr/>
-        <p:nvPr/>
-      </p:nvGrpSpPr>
-      <p:grpSpPr>
-        <a:xfrm>
-          <a:off x="0" y="0"/>
-          <a:ext cx="0" cy="0"/>
-          <a:chOff x="0" y="0"/>
-          <a:chExt cx="0" cy="0"/>
-        </a:xfrm>
-      </p:grpSpPr>
-      <p:sp>
-        <p:nvSpPr>
-          <p:cNvPr id="7" name="矩形: 圆角 6">
-            <a:extLst>
